--- a/RAN_Intelligent_Controllers/research/Diagrams.pptx
+++ b/RAN_Intelligent_Controllers/research/Diagrams.pptx
@@ -7,6 +7,9 @@
   <p:sldIdLst>
     <p:sldId id="257" r:id="rId2"/>
     <p:sldId id="258" r:id="rId3"/>
+    <p:sldId id="259" r:id="rId4"/>
+    <p:sldId id="261" r:id="rId5"/>
+    <p:sldId id="260" r:id="rId6"/>
   </p:sldIdLst>
   <p:sldSz cx="12192000" cy="6858000"/>
   <p:notesSz cx="6858000" cy="9144000"/>
@@ -260,7 +263,7 @@
           <a:p>
             <a:fld id="{2D1DF383-F48D-4C35-882C-8A26F25E24F6}" type="datetimeFigureOut">
               <a:rPr lang="en-US" smtClean="0"/>
-              <a:t>3/22/2025</a:t>
+              <a:t>3/26/2025</a:t>
             </a:fld>
             <a:endParaRPr lang="en-US"/>
           </a:p>
@@ -458,7 +461,7 @@
           <a:p>
             <a:fld id="{2D1DF383-F48D-4C35-882C-8A26F25E24F6}" type="datetimeFigureOut">
               <a:rPr lang="en-US" smtClean="0"/>
-              <a:t>3/22/2025</a:t>
+              <a:t>3/26/2025</a:t>
             </a:fld>
             <a:endParaRPr lang="en-US"/>
           </a:p>
@@ -666,7 +669,7 @@
           <a:p>
             <a:fld id="{2D1DF383-F48D-4C35-882C-8A26F25E24F6}" type="datetimeFigureOut">
               <a:rPr lang="en-US" smtClean="0"/>
-              <a:t>3/22/2025</a:t>
+              <a:t>3/26/2025</a:t>
             </a:fld>
             <a:endParaRPr lang="en-US"/>
           </a:p>
@@ -864,7 +867,7 @@
           <a:p>
             <a:fld id="{2D1DF383-F48D-4C35-882C-8A26F25E24F6}" type="datetimeFigureOut">
               <a:rPr lang="en-US" smtClean="0"/>
-              <a:t>3/22/2025</a:t>
+              <a:t>3/26/2025</a:t>
             </a:fld>
             <a:endParaRPr lang="en-US"/>
           </a:p>
@@ -1139,7 +1142,7 @@
           <a:p>
             <a:fld id="{2D1DF383-F48D-4C35-882C-8A26F25E24F6}" type="datetimeFigureOut">
               <a:rPr lang="en-US" smtClean="0"/>
-              <a:t>3/22/2025</a:t>
+              <a:t>3/26/2025</a:t>
             </a:fld>
             <a:endParaRPr lang="en-US"/>
           </a:p>
@@ -1404,7 +1407,7 @@
           <a:p>
             <a:fld id="{2D1DF383-F48D-4C35-882C-8A26F25E24F6}" type="datetimeFigureOut">
               <a:rPr lang="en-US" smtClean="0"/>
-              <a:t>3/22/2025</a:t>
+              <a:t>3/26/2025</a:t>
             </a:fld>
             <a:endParaRPr lang="en-US"/>
           </a:p>
@@ -1816,7 +1819,7 @@
           <a:p>
             <a:fld id="{2D1DF383-F48D-4C35-882C-8A26F25E24F6}" type="datetimeFigureOut">
               <a:rPr lang="en-US" smtClean="0"/>
-              <a:t>3/22/2025</a:t>
+              <a:t>3/26/2025</a:t>
             </a:fld>
             <a:endParaRPr lang="en-US"/>
           </a:p>
@@ -1957,7 +1960,7 @@
           <a:p>
             <a:fld id="{2D1DF383-F48D-4C35-882C-8A26F25E24F6}" type="datetimeFigureOut">
               <a:rPr lang="en-US" smtClean="0"/>
-              <a:t>3/22/2025</a:t>
+              <a:t>3/26/2025</a:t>
             </a:fld>
             <a:endParaRPr lang="en-US"/>
           </a:p>
@@ -2070,7 +2073,7 @@
           <a:p>
             <a:fld id="{2D1DF383-F48D-4C35-882C-8A26F25E24F6}" type="datetimeFigureOut">
               <a:rPr lang="en-US" smtClean="0"/>
-              <a:t>3/22/2025</a:t>
+              <a:t>3/26/2025</a:t>
             </a:fld>
             <a:endParaRPr lang="en-US"/>
           </a:p>
@@ -2381,7 +2384,7 @@
           <a:p>
             <a:fld id="{2D1DF383-F48D-4C35-882C-8A26F25E24F6}" type="datetimeFigureOut">
               <a:rPr lang="en-US" smtClean="0"/>
-              <a:t>3/22/2025</a:t>
+              <a:t>3/26/2025</a:t>
             </a:fld>
             <a:endParaRPr lang="en-US"/>
           </a:p>
@@ -2669,7 +2672,7 @@
           <a:p>
             <a:fld id="{2D1DF383-F48D-4C35-882C-8A26F25E24F6}" type="datetimeFigureOut">
               <a:rPr lang="en-US" smtClean="0"/>
-              <a:t>3/22/2025</a:t>
+              <a:t>3/26/2025</a:t>
             </a:fld>
             <a:endParaRPr lang="en-US"/>
           </a:p>
@@ -2910,7 +2913,7 @@
           <a:p>
             <a:fld id="{2D1DF383-F48D-4C35-882C-8A26F25E24F6}" type="datetimeFigureOut">
               <a:rPr lang="en-US" smtClean="0"/>
-              <a:t>3/22/2025</a:t>
+              <a:t>3/26/2025</a:t>
             </a:fld>
             <a:endParaRPr lang="en-US"/>
           </a:p>
@@ -3451,7 +3454,7 @@
                   <a:lumMod val="85000"/>
                 </a:schemeClr>
               </a:solidFill>
-              <a:ln w="28575">
+              <a:ln w="12700">
                 <a:solidFill>
                   <a:schemeClr val="tx1"/>
                 </a:solidFill>
@@ -3649,7 +3652,7 @@
                   <a:lumMod val="95000"/>
                 </a:schemeClr>
               </a:solidFill>
-              <a:ln w="28575">
+              <a:ln w="12700">
                 <a:solidFill>
                   <a:schemeClr val="tx1"/>
                 </a:solidFill>
@@ -3746,7 +3749,7 @@
               </a:avLst>
             </a:prstGeom>
             <a:noFill/>
-            <a:ln w="28575">
+            <a:ln w="12700">
               <a:solidFill>
                 <a:schemeClr val="tx1"/>
               </a:solidFill>
@@ -4102,7 +4105,7 @@
                             </a:avLst>
                           </a:prstGeom>
                           <a:noFill/>
-                          <a:ln w="28575">
+                          <a:ln w="12700">
                             <a:solidFill>
                               <a:schemeClr val="tx1"/>
                             </a:solidFill>
@@ -4808,7 +4811,7 @@
                             </a:avLst>
                           </a:prstGeom>
                           <a:noFill/>
-                          <a:ln w="28575">
+                          <a:ln w="12700">
                             <a:solidFill>
                               <a:schemeClr val="tx1"/>
                             </a:solidFill>
@@ -5639,7 +5642,7 @@
                     </a:avLst>
                   </a:prstGeom>
                   <a:noFill/>
-                  <a:ln w="28575">
+                  <a:ln w="12700">
                     <a:solidFill>
                       <a:schemeClr val="tx1"/>
                     </a:solidFill>
@@ -5697,7 +5700,7 @@
               <a:prstGeom prst="bentConnector2">
                 <a:avLst/>
               </a:prstGeom>
-              <a:ln w="28575">
+              <a:ln w="12700">
                 <a:solidFill>
                   <a:schemeClr val="tx1"/>
                 </a:solidFill>
@@ -5766,7 +5769,7 @@
                     <a:lumMod val="95000"/>
                   </a:schemeClr>
                 </a:solidFill>
-                <a:ln w="28575">
+                <a:ln w="12700">
                   <a:solidFill>
                     <a:schemeClr val="tx1"/>
                   </a:solidFill>
@@ -5945,7 +5948,7 @@
               <a:prstGeom prst="line">
                 <a:avLst/>
               </a:prstGeom>
-              <a:ln w="28575"/>
+              <a:ln w="12700"/>
             </p:spPr>
             <p:style>
               <a:lnRef idx="2">
@@ -6119,7 +6122,7 @@
                     <a:lumMod val="85000"/>
                   </a:schemeClr>
                 </a:solidFill>
-                <a:ln w="28575">
+                <a:ln w="12700">
                   <a:solidFill>
                     <a:schemeClr val="tx1"/>
                   </a:solidFill>
@@ -6250,7 +6253,7 @@
                     <a:lumMod val="85000"/>
                   </a:schemeClr>
                 </a:solidFill>
-                <a:ln w="28575">
+                <a:ln w="12700">
                   <a:solidFill>
                     <a:schemeClr val="tx1"/>
                   </a:solidFill>
@@ -6381,7 +6384,7 @@
                     <a:lumMod val="85000"/>
                   </a:schemeClr>
                 </a:solidFill>
-                <a:ln w="28575">
+                <a:ln w="12700">
                   <a:solidFill>
                     <a:schemeClr val="tx1"/>
                   </a:solidFill>
@@ -6522,7 +6525,7 @@
                     <a:lumMod val="85000"/>
                   </a:schemeClr>
                 </a:solidFill>
-                <a:ln w="28575">
+                <a:ln w="12700">
                   <a:solidFill>
                     <a:schemeClr val="tx1"/>
                   </a:solidFill>
@@ -6652,7 +6655,7 @@
                   </a:avLst>
                 </a:prstGeom>
                 <a:grpFill/>
-                <a:ln w="28575">
+                <a:ln w="12700">
                   <a:solidFill>
                     <a:schemeClr val="tx1"/>
                   </a:solidFill>
@@ -6775,7 +6778,7 @@
                   </a:avLst>
                 </a:prstGeom>
                 <a:grpFill/>
-                <a:ln w="28575">
+                <a:ln w="12700">
                   <a:solidFill>
                     <a:schemeClr val="tx1"/>
                   </a:solidFill>
@@ -6919,7 +6922,7 @@
                   <a:gd name="adj1" fmla="val 50000"/>
                 </a:avLst>
               </a:prstGeom>
-              <a:ln w="28575">
+              <a:ln w="12700">
                 <a:solidFill>
                   <a:schemeClr val="tx1"/>
                 </a:solidFill>
@@ -7577,7 +7580,9 @@
               </a:ext>
             </a:extLst>
           </p:cNvPr>
-          <p:cNvSpPr/>
+          <p:cNvSpPr>
+            <a:spLocks noGrp="1" noRot="1" noMove="1" noResize="1" noEditPoints="1" noAdjustHandles="1" noChangeArrowheads="1" noChangeShapeType="1"/>
+          </p:cNvSpPr>
           <p:nvPr/>
         </p:nvSpPr>
         <p:spPr>
@@ -11929,6 +11934,7903 @@
 </p:sld>
 </file>
 
+<file path=ppt/slides/slide3.xml><?xml version="1.0" encoding="utf-8"?>
+<p:sld xmlns:a="http://schemas.openxmlformats.org/drawingml/2006/main" xmlns:r="http://schemas.openxmlformats.org/officeDocument/2006/relationships" xmlns:p="http://schemas.openxmlformats.org/presentationml/2006/main">
+  <p:cSld>
+    <p:spTree>
+      <p:nvGrpSpPr>
+        <p:cNvPr id="1" name=""/>
+        <p:cNvGrpSpPr/>
+        <p:nvPr/>
+      </p:nvGrpSpPr>
+      <p:grpSpPr>
+        <a:xfrm>
+          <a:off x="0" y="0"/>
+          <a:ext cx="0" cy="0"/>
+          <a:chOff x="0" y="0"/>
+          <a:chExt cx="0" cy="0"/>
+        </a:xfrm>
+      </p:grpSpPr>
+      <p:grpSp>
+        <p:nvGrpSpPr>
+          <p:cNvPr id="13" name="Group 12">
+            <a:extLst>
+              <a:ext uri="{FF2B5EF4-FFF2-40B4-BE49-F238E27FC236}">
+                <a16:creationId xmlns:a16="http://schemas.microsoft.com/office/drawing/2014/main" id="{79BBDDB3-4BA8-B6A3-68D5-E088B0FC42CC}"/>
+              </a:ext>
+            </a:extLst>
+          </p:cNvPr>
+          <p:cNvGrpSpPr/>
+          <p:nvPr/>
+        </p:nvGrpSpPr>
+        <p:grpSpPr>
+          <a:xfrm>
+            <a:off x="575839" y="2069432"/>
+            <a:ext cx="11199066" cy="1947249"/>
+            <a:chOff x="575839" y="2069432"/>
+            <a:chExt cx="11199066" cy="1947249"/>
+          </a:xfrm>
+        </p:grpSpPr>
+        <p:sp>
+          <p:nvSpPr>
+            <p:cNvPr id="14" name="Rectangle: Rounded Corners 13">
+              <a:extLst>
+                <a:ext uri="{FF2B5EF4-FFF2-40B4-BE49-F238E27FC236}">
+                  <a16:creationId xmlns:a16="http://schemas.microsoft.com/office/drawing/2014/main" id="{F0739420-0123-DB6F-5885-960E057BE8AB}"/>
+                </a:ext>
+              </a:extLst>
+            </p:cNvPr>
+            <p:cNvSpPr/>
+            <p:nvPr/>
+          </p:nvSpPr>
+          <p:spPr>
+            <a:xfrm>
+              <a:off x="575839" y="2069432"/>
+              <a:ext cx="11199066" cy="1945979"/>
+            </a:xfrm>
+            <a:prstGeom prst="roundRect">
+              <a:avLst>
+                <a:gd name="adj" fmla="val 3896"/>
+              </a:avLst>
+            </a:prstGeom>
+            <a:solidFill>
+              <a:schemeClr val="bg1"/>
+            </a:solidFill>
+            <a:ln w="12700">
+              <a:solidFill>
+                <a:schemeClr val="tx1"/>
+              </a:solidFill>
+            </a:ln>
+          </p:spPr>
+          <p:style>
+            <a:lnRef idx="2">
+              <a:schemeClr val="accent1">
+                <a:shade val="15000"/>
+              </a:schemeClr>
+            </a:lnRef>
+            <a:fillRef idx="1">
+              <a:schemeClr val="accent1"/>
+            </a:fillRef>
+            <a:effectRef idx="0">
+              <a:schemeClr val="accent1"/>
+            </a:effectRef>
+            <a:fontRef idx="minor">
+              <a:schemeClr val="lt1"/>
+            </a:fontRef>
+          </p:style>
+          <p:txBody>
+            <a:bodyPr rtlCol="0" anchor="ctr"/>
+            <a:lstStyle/>
+            <a:p>
+              <a:pPr algn="ctr"/>
+              <a:endParaRPr lang="en-US" dirty="0">
+                <a:latin typeface="Times New Roman" panose="02020603050405020304" pitchFamily="18" charset="0"/>
+                <a:cs typeface="Times New Roman" panose="02020603050405020304" pitchFamily="18" charset="0"/>
+              </a:endParaRPr>
+            </a:p>
+          </p:txBody>
+        </p:sp>
+        <p:cxnSp>
+          <p:nvCxnSpPr>
+            <p:cNvPr id="389" name="Straight Connector 388">
+              <a:extLst>
+                <a:ext uri="{FF2B5EF4-FFF2-40B4-BE49-F238E27FC236}">
+                  <a16:creationId xmlns:a16="http://schemas.microsoft.com/office/drawing/2014/main" id="{E8158BD4-8CEA-CB0D-3588-00251A11F8D0}"/>
+                </a:ext>
+              </a:extLst>
+            </p:cNvPr>
+            <p:cNvCxnSpPr>
+              <a:cxnSpLocks/>
+              <a:endCxn id="137" idx="1"/>
+            </p:cNvCxnSpPr>
+            <p:nvPr/>
+          </p:nvCxnSpPr>
+          <p:spPr>
+            <a:xfrm>
+              <a:off x="5943801" y="3107001"/>
+              <a:ext cx="554158" cy="139732"/>
+            </a:xfrm>
+            <a:prstGeom prst="line">
+              <a:avLst/>
+            </a:prstGeom>
+            <a:ln w="12700">
+              <a:solidFill>
+                <a:srgbClr val="FF0000"/>
+              </a:solidFill>
+              <a:prstDash val="sysDot"/>
+            </a:ln>
+          </p:spPr>
+          <p:style>
+            <a:lnRef idx="2">
+              <a:schemeClr val="accent1"/>
+            </a:lnRef>
+            <a:fillRef idx="0">
+              <a:schemeClr val="accent1"/>
+            </a:fillRef>
+            <a:effectRef idx="1">
+              <a:schemeClr val="accent1"/>
+            </a:effectRef>
+            <a:fontRef idx="minor">
+              <a:schemeClr val="tx1"/>
+            </a:fontRef>
+          </p:style>
+        </p:cxnSp>
+        <p:grpSp>
+          <p:nvGrpSpPr>
+            <p:cNvPr id="289" name="Group 288">
+              <a:extLst>
+                <a:ext uri="{FF2B5EF4-FFF2-40B4-BE49-F238E27FC236}">
+                  <a16:creationId xmlns:a16="http://schemas.microsoft.com/office/drawing/2014/main" id="{897C35CB-2826-9D45-36E5-D9869AC5C779}"/>
+                </a:ext>
+              </a:extLst>
+            </p:cNvPr>
+            <p:cNvGrpSpPr/>
+            <p:nvPr/>
+          </p:nvGrpSpPr>
+          <p:grpSpPr>
+            <a:xfrm>
+              <a:off x="6498724" y="2172257"/>
+              <a:ext cx="2302213" cy="647296"/>
+              <a:chOff x="7063677" y="4951549"/>
+              <a:chExt cx="2302213" cy="647296"/>
+            </a:xfrm>
+          </p:grpSpPr>
+          <p:grpSp>
+            <p:nvGrpSpPr>
+              <p:cNvPr id="290" name="Group 289">
+                <a:extLst>
+                  <a:ext uri="{FF2B5EF4-FFF2-40B4-BE49-F238E27FC236}">
+                    <a16:creationId xmlns:a16="http://schemas.microsoft.com/office/drawing/2014/main" id="{9FD17C75-99D0-F3DB-8F70-72BD9907E773}"/>
+                  </a:ext>
+                </a:extLst>
+              </p:cNvPr>
+              <p:cNvGrpSpPr/>
+              <p:nvPr/>
+            </p:nvGrpSpPr>
+            <p:grpSpPr>
+              <a:xfrm>
+                <a:off x="7063677" y="4951549"/>
+                <a:ext cx="2239251" cy="333931"/>
+                <a:chOff x="7168594" y="4200673"/>
+                <a:chExt cx="2239251" cy="299842"/>
+              </a:xfrm>
+            </p:grpSpPr>
+            <p:sp>
+              <p:nvSpPr>
+                <p:cNvPr id="292" name="Rectangle: Rounded Corners 291">
+                  <a:extLst>
+                    <a:ext uri="{FF2B5EF4-FFF2-40B4-BE49-F238E27FC236}">
+                      <a16:creationId xmlns:a16="http://schemas.microsoft.com/office/drawing/2014/main" id="{94C59FF3-872B-7D38-DDD5-DDE390FD075E}"/>
+                    </a:ext>
+                  </a:extLst>
+                </p:cNvPr>
+                <p:cNvSpPr/>
+                <p:nvPr/>
+              </p:nvSpPr>
+              <p:spPr>
+                <a:xfrm>
+                  <a:off x="7168596" y="4200673"/>
+                  <a:ext cx="2239249" cy="299842"/>
+                </a:xfrm>
+                <a:prstGeom prst="roundRect">
+                  <a:avLst>
+                    <a:gd name="adj" fmla="val 28947"/>
+                  </a:avLst>
+                </a:prstGeom>
+                <a:solidFill>
+                  <a:schemeClr val="bg1">
+                    <a:lumMod val="85000"/>
+                  </a:schemeClr>
+                </a:solidFill>
+                <a:ln w="12700">
+                  <a:solidFill>
+                    <a:schemeClr val="tx1"/>
+                  </a:solidFill>
+                </a:ln>
+              </p:spPr>
+              <p:style>
+                <a:lnRef idx="2">
+                  <a:schemeClr val="accent1">
+                    <a:shade val="15000"/>
+                  </a:schemeClr>
+                </a:lnRef>
+                <a:fillRef idx="1">
+                  <a:schemeClr val="accent1"/>
+                </a:fillRef>
+                <a:effectRef idx="0">
+                  <a:schemeClr val="accent1"/>
+                </a:effectRef>
+                <a:fontRef idx="minor">
+                  <a:schemeClr val="lt1"/>
+                </a:fontRef>
+              </p:style>
+              <p:txBody>
+                <a:bodyPr rtlCol="0" anchor="ctr"/>
+                <a:lstStyle/>
+                <a:p>
+                  <a:pPr algn="ctr"/>
+                  <a:endParaRPr lang="en-US" sz="1400" dirty="0">
+                    <a:solidFill>
+                      <a:schemeClr val="tx1"/>
+                    </a:solidFill>
+                    <a:latin typeface="Times New Roman" panose="02020603050405020304" pitchFamily="18" charset="0"/>
+                    <a:cs typeface="Times New Roman" panose="02020603050405020304" pitchFamily="18" charset="0"/>
+                  </a:endParaRPr>
+                </a:p>
+              </p:txBody>
+            </p:sp>
+            <p:sp>
+              <p:nvSpPr>
+                <p:cNvPr id="293" name="TextBox 292">
+                  <a:extLst>
+                    <a:ext uri="{FF2B5EF4-FFF2-40B4-BE49-F238E27FC236}">
+                      <a16:creationId xmlns:a16="http://schemas.microsoft.com/office/drawing/2014/main" id="{6BE91B1C-BB8A-8A0A-14C1-2CE1DA7B570C}"/>
+                    </a:ext>
+                  </a:extLst>
+                </p:cNvPr>
+                <p:cNvSpPr txBox="1"/>
+                <p:nvPr/>
+              </p:nvSpPr>
+              <p:spPr>
+                <a:xfrm>
+                  <a:off x="7168594" y="4201157"/>
+                  <a:ext cx="2238468" cy="276358"/>
+                </a:xfrm>
+                <a:prstGeom prst="rect">
+                  <a:avLst/>
+                </a:prstGeom>
+                <a:noFill/>
+              </p:spPr>
+              <p:txBody>
+                <a:bodyPr wrap="square">
+                  <a:spAutoFit/>
+                </a:bodyPr>
+                <a:lstStyle/>
+                <a:p>
+                  <a:pPr algn="ctr"/>
+                  <a:r>
+                    <a:rPr lang="en-US" sz="1400" dirty="0">
+                      <a:solidFill>
+                        <a:schemeClr val="tx1"/>
+                      </a:solidFill>
+                      <a:latin typeface="Times New Roman" panose="02020603050405020304" pitchFamily="18" charset="0"/>
+                      <a:cs typeface="Times New Roman" panose="02020603050405020304" pitchFamily="18" charset="0"/>
+                    </a:rPr>
+                    <a:t>Open5GS</a:t>
+                  </a:r>
+                  <a:endParaRPr lang="en-US" sz="1400" dirty="0">
+                    <a:latin typeface="Times New Roman" panose="02020603050405020304" pitchFamily="18" charset="0"/>
+                    <a:cs typeface="Times New Roman" panose="02020603050405020304" pitchFamily="18" charset="0"/>
+                  </a:endParaRPr>
+                </a:p>
+              </p:txBody>
+            </p:sp>
+          </p:grpSp>
+          <p:sp>
+            <p:nvSpPr>
+              <p:cNvPr id="291" name="TextBox 290">
+                <a:extLst>
+                  <a:ext uri="{FF2B5EF4-FFF2-40B4-BE49-F238E27FC236}">
+                    <a16:creationId xmlns:a16="http://schemas.microsoft.com/office/drawing/2014/main" id="{CA6FF32F-AAF7-5B75-CF10-697418E1E78B}"/>
+                  </a:ext>
+                </a:extLst>
+              </p:cNvPr>
+              <p:cNvSpPr txBox="1"/>
+              <p:nvPr/>
+            </p:nvSpPr>
+            <p:spPr>
+              <a:xfrm>
+                <a:off x="7126641" y="5291068"/>
+                <a:ext cx="2239249" cy="307777"/>
+              </a:xfrm>
+              <a:prstGeom prst="rect">
+                <a:avLst/>
+              </a:prstGeom>
+              <a:noFill/>
+            </p:spPr>
+            <p:txBody>
+              <a:bodyPr wrap="square">
+                <a:spAutoFit/>
+              </a:bodyPr>
+              <a:lstStyle/>
+              <a:p>
+                <a:pPr algn="ctr"/>
+                <a:r>
+                  <a:rPr lang="en-US" sz="1400" b="1" dirty="0">
+                    <a:solidFill>
+                      <a:schemeClr val="tx1"/>
+                    </a:solidFill>
+                    <a:latin typeface="Times New Roman" panose="02020603050405020304" pitchFamily="18" charset="0"/>
+                    <a:cs typeface="Times New Roman" panose="02020603050405020304" pitchFamily="18" charset="0"/>
+                  </a:rPr>
+                  <a:t>5G Core Network</a:t>
+                </a:r>
+                <a:endParaRPr lang="en-US" sz="1400" b="1" dirty="0">
+                  <a:latin typeface="Times New Roman" panose="02020603050405020304" pitchFamily="18" charset="0"/>
+                  <a:cs typeface="Times New Roman" panose="02020603050405020304" pitchFamily="18" charset="0"/>
+                </a:endParaRPr>
+              </a:p>
+            </p:txBody>
+          </p:sp>
+        </p:grpSp>
+        <p:cxnSp>
+          <p:nvCxnSpPr>
+            <p:cNvPr id="342" name="Straight Connector 341">
+              <a:extLst>
+                <a:ext uri="{FF2B5EF4-FFF2-40B4-BE49-F238E27FC236}">
+                  <a16:creationId xmlns:a16="http://schemas.microsoft.com/office/drawing/2014/main" id="{19AEC2F8-5A21-3B40-519C-F2CA97AA5EE4}"/>
+                </a:ext>
+              </a:extLst>
+            </p:cNvPr>
+            <p:cNvCxnSpPr>
+              <a:cxnSpLocks/>
+              <a:stCxn id="201" idx="3"/>
+              <a:endCxn id="276" idx="1"/>
+            </p:cNvCxnSpPr>
+            <p:nvPr/>
+          </p:nvCxnSpPr>
+          <p:spPr>
+            <a:xfrm>
+              <a:off x="2929887" y="2336371"/>
+              <a:ext cx="676819" cy="0"/>
+            </a:xfrm>
+            <a:prstGeom prst="line">
+              <a:avLst/>
+            </a:prstGeom>
+            <a:ln w="12700">
+              <a:solidFill>
+                <a:schemeClr val="tx1"/>
+              </a:solidFill>
+              <a:prstDash val="sysDot"/>
+            </a:ln>
+          </p:spPr>
+          <p:style>
+            <a:lnRef idx="2">
+              <a:schemeClr val="accent1"/>
+            </a:lnRef>
+            <a:fillRef idx="0">
+              <a:schemeClr val="accent1"/>
+            </a:fillRef>
+            <a:effectRef idx="1">
+              <a:schemeClr val="accent1"/>
+            </a:effectRef>
+            <a:fontRef idx="minor">
+              <a:schemeClr val="tx1"/>
+            </a:fontRef>
+          </p:style>
+        </p:cxnSp>
+        <p:cxnSp>
+          <p:nvCxnSpPr>
+            <p:cNvPr id="347" name="Straight Connector 346">
+              <a:extLst>
+                <a:ext uri="{FF2B5EF4-FFF2-40B4-BE49-F238E27FC236}">
+                  <a16:creationId xmlns:a16="http://schemas.microsoft.com/office/drawing/2014/main" id="{B08242A5-1335-1B3A-F36E-92F7ACADE36C}"/>
+                </a:ext>
+              </a:extLst>
+            </p:cNvPr>
+            <p:cNvCxnSpPr>
+              <a:cxnSpLocks/>
+              <a:stCxn id="200" idx="3"/>
+              <a:endCxn id="275" idx="1"/>
+            </p:cNvCxnSpPr>
+            <p:nvPr/>
+          </p:nvCxnSpPr>
+          <p:spPr>
+            <a:xfrm>
+              <a:off x="2929886" y="2642033"/>
+              <a:ext cx="680631" cy="0"/>
+            </a:xfrm>
+            <a:prstGeom prst="line">
+              <a:avLst/>
+            </a:prstGeom>
+            <a:ln w="12700">
+              <a:solidFill>
+                <a:schemeClr val="tx1"/>
+              </a:solidFill>
+            </a:ln>
+          </p:spPr>
+          <p:style>
+            <a:lnRef idx="2">
+              <a:schemeClr val="accent1"/>
+            </a:lnRef>
+            <a:fillRef idx="0">
+              <a:schemeClr val="accent1"/>
+            </a:fillRef>
+            <a:effectRef idx="1">
+              <a:schemeClr val="accent1"/>
+            </a:effectRef>
+            <a:fontRef idx="minor">
+              <a:schemeClr val="tx1"/>
+            </a:fontRef>
+          </p:style>
+        </p:cxnSp>
+        <p:cxnSp>
+          <p:nvCxnSpPr>
+            <p:cNvPr id="350" name="Straight Connector 349">
+              <a:extLst>
+                <a:ext uri="{FF2B5EF4-FFF2-40B4-BE49-F238E27FC236}">
+                  <a16:creationId xmlns:a16="http://schemas.microsoft.com/office/drawing/2014/main" id="{03562168-DCAA-1D7C-522F-29E8943268AD}"/>
+                </a:ext>
+              </a:extLst>
+            </p:cNvPr>
+            <p:cNvCxnSpPr>
+              <a:cxnSpLocks/>
+              <a:stCxn id="202" idx="3"/>
+              <a:endCxn id="276" idx="1"/>
+            </p:cNvCxnSpPr>
+            <p:nvPr/>
+          </p:nvCxnSpPr>
+          <p:spPr>
+            <a:xfrm flipV="1">
+              <a:off x="2929886" y="2336371"/>
+              <a:ext cx="676820" cy="1222648"/>
+            </a:xfrm>
+            <a:prstGeom prst="line">
+              <a:avLst/>
+            </a:prstGeom>
+            <a:ln w="12700">
+              <a:solidFill>
+                <a:schemeClr val="tx1"/>
+              </a:solidFill>
+              <a:prstDash val="sysDot"/>
+            </a:ln>
+          </p:spPr>
+          <p:style>
+            <a:lnRef idx="2">
+              <a:schemeClr val="accent1"/>
+            </a:lnRef>
+            <a:fillRef idx="0">
+              <a:schemeClr val="accent1"/>
+            </a:fillRef>
+            <a:effectRef idx="1">
+              <a:schemeClr val="accent1"/>
+            </a:effectRef>
+            <a:fontRef idx="minor">
+              <a:schemeClr val="tx1"/>
+            </a:fontRef>
+          </p:style>
+        </p:cxnSp>
+        <p:cxnSp>
+          <p:nvCxnSpPr>
+            <p:cNvPr id="353" name="Straight Connector 352">
+              <a:extLst>
+                <a:ext uri="{FF2B5EF4-FFF2-40B4-BE49-F238E27FC236}">
+                  <a16:creationId xmlns:a16="http://schemas.microsoft.com/office/drawing/2014/main" id="{E96F9127-6829-F9FD-FB9A-07BC9E2C0085}"/>
+                </a:ext>
+              </a:extLst>
+            </p:cNvPr>
+            <p:cNvCxnSpPr>
+              <a:cxnSpLocks/>
+              <a:stCxn id="209" idx="3"/>
+              <a:endCxn id="280" idx="1"/>
+            </p:cNvCxnSpPr>
+            <p:nvPr/>
+          </p:nvCxnSpPr>
+          <p:spPr>
+            <a:xfrm>
+              <a:off x="2929886" y="3253357"/>
+              <a:ext cx="680631" cy="0"/>
+            </a:xfrm>
+            <a:prstGeom prst="line">
+              <a:avLst/>
+            </a:prstGeom>
+            <a:ln w="12700">
+              <a:solidFill>
+                <a:schemeClr val="tx1"/>
+              </a:solidFill>
+            </a:ln>
+          </p:spPr>
+          <p:style>
+            <a:lnRef idx="2">
+              <a:schemeClr val="accent1"/>
+            </a:lnRef>
+            <a:fillRef idx="0">
+              <a:schemeClr val="accent1"/>
+            </a:fillRef>
+            <a:effectRef idx="1">
+              <a:schemeClr val="accent1"/>
+            </a:effectRef>
+            <a:fontRef idx="minor">
+              <a:schemeClr val="tx1"/>
+            </a:fontRef>
+          </p:style>
+        </p:cxnSp>
+        <p:cxnSp>
+          <p:nvCxnSpPr>
+            <p:cNvPr id="356" name="Straight Connector 355">
+              <a:extLst>
+                <a:ext uri="{FF2B5EF4-FFF2-40B4-BE49-F238E27FC236}">
+                  <a16:creationId xmlns:a16="http://schemas.microsoft.com/office/drawing/2014/main" id="{85981B5D-8D58-316D-8BA0-E0B5EC7F6C13}"/>
+                </a:ext>
+              </a:extLst>
+            </p:cNvPr>
+            <p:cNvCxnSpPr>
+              <a:cxnSpLocks/>
+              <a:stCxn id="199" idx="3"/>
+              <a:endCxn id="274" idx="1"/>
+            </p:cNvCxnSpPr>
+            <p:nvPr/>
+          </p:nvCxnSpPr>
+          <p:spPr>
+            <a:xfrm>
+              <a:off x="2929886" y="2947695"/>
+              <a:ext cx="665196" cy="0"/>
+            </a:xfrm>
+            <a:prstGeom prst="line">
+              <a:avLst/>
+            </a:prstGeom>
+            <a:ln w="12700">
+              <a:solidFill>
+                <a:schemeClr val="tx1"/>
+              </a:solidFill>
+              <a:prstDash val="sysDot"/>
+            </a:ln>
+          </p:spPr>
+          <p:style>
+            <a:lnRef idx="2">
+              <a:schemeClr val="accent1"/>
+            </a:lnRef>
+            <a:fillRef idx="0">
+              <a:schemeClr val="accent1"/>
+            </a:fillRef>
+            <a:effectRef idx="1">
+              <a:schemeClr val="accent1"/>
+            </a:effectRef>
+            <a:fontRef idx="minor">
+              <a:schemeClr val="tx1"/>
+            </a:fontRef>
+          </p:style>
+        </p:cxnSp>
+        <p:cxnSp>
+          <p:nvCxnSpPr>
+            <p:cNvPr id="359" name="Straight Connector 358">
+              <a:extLst>
+                <a:ext uri="{FF2B5EF4-FFF2-40B4-BE49-F238E27FC236}">
+                  <a16:creationId xmlns:a16="http://schemas.microsoft.com/office/drawing/2014/main" id="{C221BBAA-9FEE-8D9E-6872-58AEB1FAFC02}"/>
+                </a:ext>
+              </a:extLst>
+            </p:cNvPr>
+            <p:cNvCxnSpPr>
+              <a:cxnSpLocks/>
+              <a:stCxn id="137" idx="3"/>
+              <a:endCxn id="315" idx="1"/>
+            </p:cNvCxnSpPr>
+            <p:nvPr/>
+          </p:nvCxnSpPr>
+          <p:spPr>
+            <a:xfrm>
+              <a:off x="8737209" y="3246733"/>
+              <a:ext cx="639701" cy="277076"/>
+            </a:xfrm>
+            <a:prstGeom prst="line">
+              <a:avLst/>
+            </a:prstGeom>
+            <a:ln w="12700">
+              <a:solidFill>
+                <a:schemeClr val="tx1"/>
+              </a:solidFill>
+            </a:ln>
+          </p:spPr>
+          <p:style>
+            <a:lnRef idx="2">
+              <a:schemeClr val="accent1"/>
+            </a:lnRef>
+            <a:fillRef idx="0">
+              <a:schemeClr val="accent1"/>
+            </a:fillRef>
+            <a:effectRef idx="1">
+              <a:schemeClr val="accent1"/>
+            </a:effectRef>
+            <a:fontRef idx="minor">
+              <a:schemeClr val="tx1"/>
+            </a:fontRef>
+          </p:style>
+        </p:cxnSp>
+        <p:cxnSp>
+          <p:nvCxnSpPr>
+            <p:cNvPr id="367" name="Straight Connector 366">
+              <a:extLst>
+                <a:ext uri="{FF2B5EF4-FFF2-40B4-BE49-F238E27FC236}">
+                  <a16:creationId xmlns:a16="http://schemas.microsoft.com/office/drawing/2014/main" id="{0292EA4F-C1D1-7DDC-D7FC-4367D17C623C}"/>
+                </a:ext>
+              </a:extLst>
+            </p:cNvPr>
+            <p:cNvCxnSpPr>
+              <a:cxnSpLocks/>
+              <a:stCxn id="2" idx="1"/>
+              <a:endCxn id="293" idx="1"/>
+            </p:cNvCxnSpPr>
+            <p:nvPr/>
+          </p:nvCxnSpPr>
+          <p:spPr>
+            <a:xfrm flipV="1">
+              <a:off x="5943801" y="2326685"/>
+              <a:ext cx="554923" cy="166966"/>
+            </a:xfrm>
+            <a:prstGeom prst="line">
+              <a:avLst/>
+            </a:prstGeom>
+            <a:ln w="12700">
+              <a:solidFill>
+                <a:schemeClr val="tx1"/>
+              </a:solidFill>
+            </a:ln>
+          </p:spPr>
+          <p:style>
+            <a:lnRef idx="2">
+              <a:schemeClr val="accent1"/>
+            </a:lnRef>
+            <a:fillRef idx="0">
+              <a:schemeClr val="accent1"/>
+            </a:fillRef>
+            <a:effectRef idx="1">
+              <a:schemeClr val="accent1"/>
+            </a:effectRef>
+            <a:fontRef idx="minor">
+              <a:schemeClr val="tx1"/>
+            </a:fontRef>
+          </p:style>
+        </p:cxnSp>
+        <p:cxnSp>
+          <p:nvCxnSpPr>
+            <p:cNvPr id="370" name="Straight Connector 369">
+              <a:extLst>
+                <a:ext uri="{FF2B5EF4-FFF2-40B4-BE49-F238E27FC236}">
+                  <a16:creationId xmlns:a16="http://schemas.microsoft.com/office/drawing/2014/main" id="{1463F92E-A5E1-B471-7536-4E2BB81B1C71}"/>
+                </a:ext>
+              </a:extLst>
+            </p:cNvPr>
+            <p:cNvCxnSpPr>
+              <a:cxnSpLocks/>
+              <a:stCxn id="3" idx="1"/>
+              <a:endCxn id="293" idx="1"/>
+            </p:cNvCxnSpPr>
+            <p:nvPr/>
+          </p:nvCxnSpPr>
+          <p:spPr>
+            <a:xfrm flipV="1">
+              <a:off x="5943801" y="2326685"/>
+              <a:ext cx="554923" cy="780316"/>
+            </a:xfrm>
+            <a:prstGeom prst="line">
+              <a:avLst/>
+            </a:prstGeom>
+            <a:ln w="12700">
+              <a:solidFill>
+                <a:schemeClr val="tx1"/>
+              </a:solidFill>
+            </a:ln>
+          </p:spPr>
+          <p:style>
+            <a:lnRef idx="2">
+              <a:schemeClr val="accent1"/>
+            </a:lnRef>
+            <a:fillRef idx="0">
+              <a:schemeClr val="accent1"/>
+            </a:fillRef>
+            <a:effectRef idx="1">
+              <a:schemeClr val="accent1"/>
+            </a:effectRef>
+            <a:fontRef idx="minor">
+              <a:schemeClr val="tx1"/>
+            </a:fontRef>
+          </p:style>
+        </p:cxnSp>
+        <p:cxnSp>
+          <p:nvCxnSpPr>
+            <p:cNvPr id="373" name="Straight Connector 372">
+              <a:extLst>
+                <a:ext uri="{FF2B5EF4-FFF2-40B4-BE49-F238E27FC236}">
+                  <a16:creationId xmlns:a16="http://schemas.microsoft.com/office/drawing/2014/main" id="{203454DD-698B-FE70-9DDA-C59F2DCB67D9}"/>
+                </a:ext>
+              </a:extLst>
+            </p:cNvPr>
+            <p:cNvCxnSpPr>
+              <a:cxnSpLocks/>
+              <a:endCxn id="137" idx="1"/>
+            </p:cNvCxnSpPr>
+            <p:nvPr/>
+          </p:nvCxnSpPr>
+          <p:spPr>
+            <a:xfrm>
+              <a:off x="5943801" y="2493651"/>
+              <a:ext cx="554158" cy="753082"/>
+            </a:xfrm>
+            <a:prstGeom prst="line">
+              <a:avLst/>
+            </a:prstGeom>
+            <a:ln w="12700">
+              <a:solidFill>
+                <a:schemeClr val="tx1"/>
+              </a:solidFill>
+            </a:ln>
+          </p:spPr>
+          <p:style>
+            <a:lnRef idx="2">
+              <a:schemeClr val="accent1"/>
+            </a:lnRef>
+            <a:fillRef idx="0">
+              <a:schemeClr val="accent1"/>
+            </a:fillRef>
+            <a:effectRef idx="1">
+              <a:schemeClr val="accent1"/>
+            </a:effectRef>
+            <a:fontRef idx="minor">
+              <a:schemeClr val="tx1"/>
+            </a:fontRef>
+          </p:style>
+        </p:cxnSp>
+        <p:cxnSp>
+          <p:nvCxnSpPr>
+            <p:cNvPr id="376" name="Straight Connector 375">
+              <a:extLst>
+                <a:ext uri="{FF2B5EF4-FFF2-40B4-BE49-F238E27FC236}">
+                  <a16:creationId xmlns:a16="http://schemas.microsoft.com/office/drawing/2014/main" id="{DCB765BE-C6D0-9C88-B79C-0653B5D0E5AF}"/>
+                </a:ext>
+              </a:extLst>
+            </p:cNvPr>
+            <p:cNvCxnSpPr>
+              <a:cxnSpLocks/>
+              <a:endCxn id="139" idx="1"/>
+            </p:cNvCxnSpPr>
+            <p:nvPr/>
+          </p:nvCxnSpPr>
+          <p:spPr>
+            <a:xfrm>
+              <a:off x="5943801" y="3107001"/>
+              <a:ext cx="554158" cy="442679"/>
+            </a:xfrm>
+            <a:prstGeom prst="line">
+              <a:avLst/>
+            </a:prstGeom>
+            <a:ln w="12700">
+              <a:solidFill>
+                <a:schemeClr val="tx1"/>
+              </a:solidFill>
+            </a:ln>
+          </p:spPr>
+          <p:style>
+            <a:lnRef idx="2">
+              <a:schemeClr val="accent1"/>
+            </a:lnRef>
+            <a:fillRef idx="0">
+              <a:schemeClr val="accent1"/>
+            </a:fillRef>
+            <a:effectRef idx="1">
+              <a:schemeClr val="accent1"/>
+            </a:effectRef>
+            <a:fontRef idx="minor">
+              <a:schemeClr val="tx1"/>
+            </a:fontRef>
+          </p:style>
+        </p:cxnSp>
+        <p:cxnSp>
+          <p:nvCxnSpPr>
+            <p:cNvPr id="380" name="Straight Connector 379">
+              <a:extLst>
+                <a:ext uri="{FF2B5EF4-FFF2-40B4-BE49-F238E27FC236}">
+                  <a16:creationId xmlns:a16="http://schemas.microsoft.com/office/drawing/2014/main" id="{AA778A2D-5D6E-872D-16E0-E2154F72147B}"/>
+                </a:ext>
+              </a:extLst>
+            </p:cNvPr>
+            <p:cNvCxnSpPr>
+              <a:cxnSpLocks/>
+              <a:stCxn id="277" idx="3"/>
+              <a:endCxn id="137" idx="1"/>
+            </p:cNvCxnSpPr>
+            <p:nvPr/>
+          </p:nvCxnSpPr>
+          <p:spPr>
+            <a:xfrm flipV="1">
+              <a:off x="5817331" y="3246733"/>
+              <a:ext cx="680628" cy="312286"/>
+            </a:xfrm>
+            <a:prstGeom prst="line">
+              <a:avLst/>
+            </a:prstGeom>
+            <a:ln w="12700">
+              <a:solidFill>
+                <a:schemeClr val="tx1"/>
+              </a:solidFill>
+            </a:ln>
+          </p:spPr>
+          <p:style>
+            <a:lnRef idx="2">
+              <a:schemeClr val="accent1"/>
+            </a:lnRef>
+            <a:fillRef idx="0">
+              <a:schemeClr val="accent1"/>
+            </a:fillRef>
+            <a:effectRef idx="1">
+              <a:schemeClr val="accent1"/>
+            </a:effectRef>
+            <a:fontRef idx="minor">
+              <a:schemeClr val="tx1"/>
+            </a:fontRef>
+          </p:style>
+        </p:cxnSp>
+        <p:cxnSp>
+          <p:nvCxnSpPr>
+            <p:cNvPr id="385" name="Straight Connector 384">
+              <a:extLst>
+                <a:ext uri="{FF2B5EF4-FFF2-40B4-BE49-F238E27FC236}">
+                  <a16:creationId xmlns:a16="http://schemas.microsoft.com/office/drawing/2014/main" id="{86974C24-CD13-AB9D-5659-40C787D7C759}"/>
+                </a:ext>
+              </a:extLst>
+            </p:cNvPr>
+            <p:cNvCxnSpPr>
+              <a:cxnSpLocks/>
+              <a:endCxn id="139" idx="1"/>
+            </p:cNvCxnSpPr>
+            <p:nvPr/>
+          </p:nvCxnSpPr>
+          <p:spPr>
+            <a:xfrm>
+              <a:off x="5943801" y="2493651"/>
+              <a:ext cx="554158" cy="1056029"/>
+            </a:xfrm>
+            <a:prstGeom prst="line">
+              <a:avLst/>
+            </a:prstGeom>
+            <a:ln w="12700">
+              <a:solidFill>
+                <a:schemeClr val="tx1"/>
+              </a:solidFill>
+              <a:prstDash val="sysDot"/>
+            </a:ln>
+          </p:spPr>
+          <p:style>
+            <a:lnRef idx="2">
+              <a:schemeClr val="accent1"/>
+            </a:lnRef>
+            <a:fillRef idx="0">
+              <a:schemeClr val="accent1"/>
+            </a:fillRef>
+            <a:effectRef idx="1">
+              <a:schemeClr val="accent1"/>
+            </a:effectRef>
+            <a:fontRef idx="minor">
+              <a:schemeClr val="tx1"/>
+            </a:fontRef>
+          </p:style>
+        </p:cxnSp>
+        <p:sp>
+          <p:nvSpPr>
+            <p:cNvPr id="2" name="Right Brace 1">
+              <a:extLst>
+                <a:ext uri="{FF2B5EF4-FFF2-40B4-BE49-F238E27FC236}">
+                  <a16:creationId xmlns:a16="http://schemas.microsoft.com/office/drawing/2014/main" id="{2A8D8D8A-42F1-94E4-4204-822955899560}"/>
+                </a:ext>
+              </a:extLst>
+            </p:cNvPr>
+            <p:cNvSpPr/>
+            <p:nvPr/>
+          </p:nvSpPr>
+          <p:spPr>
+            <a:xfrm>
+              <a:off x="5861045" y="2206203"/>
+              <a:ext cx="82756" cy="574896"/>
+            </a:xfrm>
+            <a:prstGeom prst="rightBrace">
+              <a:avLst>
+                <a:gd name="adj1" fmla="val 88901"/>
+                <a:gd name="adj2" fmla="val 50000"/>
+              </a:avLst>
+            </a:prstGeom>
+            <a:ln w="12700">
+              <a:solidFill>
+                <a:schemeClr val="tx1"/>
+              </a:solidFill>
+            </a:ln>
+          </p:spPr>
+          <p:style>
+            <a:lnRef idx="2">
+              <a:schemeClr val="accent1"/>
+            </a:lnRef>
+            <a:fillRef idx="0">
+              <a:schemeClr val="accent1"/>
+            </a:fillRef>
+            <a:effectRef idx="1">
+              <a:schemeClr val="accent1"/>
+            </a:effectRef>
+            <a:fontRef idx="minor">
+              <a:schemeClr val="tx1"/>
+            </a:fontRef>
+          </p:style>
+          <p:txBody>
+            <a:bodyPr rtlCol="0" anchor="ctr"/>
+            <a:lstStyle/>
+            <a:p>
+              <a:pPr algn="ctr"/>
+              <a:endParaRPr lang="en-US"/>
+            </a:p>
+          </p:txBody>
+        </p:sp>
+        <p:sp>
+          <p:nvSpPr>
+            <p:cNvPr id="3" name="Right Brace 2">
+              <a:extLst>
+                <a:ext uri="{FF2B5EF4-FFF2-40B4-BE49-F238E27FC236}">
+                  <a16:creationId xmlns:a16="http://schemas.microsoft.com/office/drawing/2014/main" id="{7E2A8974-C683-F013-EE39-E7DAD5BD85E5}"/>
+                </a:ext>
+              </a:extLst>
+            </p:cNvPr>
+            <p:cNvSpPr/>
+            <p:nvPr/>
+          </p:nvSpPr>
+          <p:spPr>
+            <a:xfrm>
+              <a:off x="5861045" y="2819553"/>
+              <a:ext cx="82756" cy="574896"/>
+            </a:xfrm>
+            <a:prstGeom prst="rightBrace">
+              <a:avLst>
+                <a:gd name="adj1" fmla="val 88901"/>
+                <a:gd name="adj2" fmla="val 50000"/>
+              </a:avLst>
+            </a:prstGeom>
+            <a:ln w="12700">
+              <a:solidFill>
+                <a:schemeClr val="tx1"/>
+              </a:solidFill>
+            </a:ln>
+          </p:spPr>
+          <p:style>
+            <a:lnRef idx="2">
+              <a:schemeClr val="accent1"/>
+            </a:lnRef>
+            <a:fillRef idx="0">
+              <a:schemeClr val="accent1"/>
+            </a:fillRef>
+            <a:effectRef idx="1">
+              <a:schemeClr val="accent1"/>
+            </a:effectRef>
+            <a:fontRef idx="minor">
+              <a:schemeClr val="tx1"/>
+            </a:fontRef>
+          </p:style>
+          <p:txBody>
+            <a:bodyPr rtlCol="0" anchor="ctr"/>
+            <a:lstStyle/>
+            <a:p>
+              <a:pPr algn="ctr"/>
+              <a:endParaRPr lang="en-US"/>
+            </a:p>
+          </p:txBody>
+        </p:sp>
+        <p:grpSp>
+          <p:nvGrpSpPr>
+            <p:cNvPr id="270" name="Group 269">
+              <a:extLst>
+                <a:ext uri="{FF2B5EF4-FFF2-40B4-BE49-F238E27FC236}">
+                  <a16:creationId xmlns:a16="http://schemas.microsoft.com/office/drawing/2014/main" id="{A9832EC4-0E44-30A3-4E70-CD46C82868E4}"/>
+                </a:ext>
+              </a:extLst>
+            </p:cNvPr>
+            <p:cNvGrpSpPr/>
+            <p:nvPr/>
+          </p:nvGrpSpPr>
+          <p:grpSpPr>
+            <a:xfrm>
+              <a:off x="3594298" y="2171378"/>
+              <a:ext cx="2263961" cy="1844033"/>
+              <a:chOff x="3916949" y="3691197"/>
+              <a:chExt cx="2263961" cy="1844033"/>
+            </a:xfrm>
+          </p:grpSpPr>
+          <p:sp>
+            <p:nvSpPr>
+              <p:cNvPr id="271" name="Rectangle: Rounded Corners 270">
+                <a:extLst>
+                  <a:ext uri="{FF2B5EF4-FFF2-40B4-BE49-F238E27FC236}">
+                    <a16:creationId xmlns:a16="http://schemas.microsoft.com/office/drawing/2014/main" id="{D7B4D6CF-6257-A2E5-C9CA-3300DB701243}"/>
+                  </a:ext>
+                </a:extLst>
+              </p:cNvPr>
+              <p:cNvSpPr/>
+              <p:nvPr/>
+            </p:nvSpPr>
+            <p:spPr>
+              <a:xfrm>
+                <a:off x="3916949" y="3692460"/>
+                <a:ext cx="2239249" cy="1531642"/>
+              </a:xfrm>
+              <a:prstGeom prst="roundRect">
+                <a:avLst>
+                  <a:gd name="adj" fmla="val 5859"/>
+                </a:avLst>
+              </a:prstGeom>
+              <a:solidFill>
+                <a:schemeClr val="bg1">
+                  <a:lumMod val="85000"/>
+                </a:schemeClr>
+              </a:solidFill>
+              <a:ln w="28575">
+                <a:noFill/>
+              </a:ln>
+            </p:spPr>
+            <p:style>
+              <a:lnRef idx="2">
+                <a:schemeClr val="accent1">
+                  <a:shade val="15000"/>
+                </a:schemeClr>
+              </a:lnRef>
+              <a:fillRef idx="1">
+                <a:schemeClr val="accent1"/>
+              </a:fillRef>
+              <a:effectRef idx="0">
+                <a:schemeClr val="accent1"/>
+              </a:effectRef>
+              <a:fontRef idx="minor">
+                <a:schemeClr val="lt1"/>
+              </a:fontRef>
+            </p:style>
+            <p:txBody>
+              <a:bodyPr rtlCol="0" anchor="ctr"/>
+              <a:lstStyle/>
+              <a:p>
+                <a:pPr algn="ctr"/>
+                <a:endParaRPr lang="en-US" dirty="0">
+                  <a:latin typeface="Times New Roman" panose="02020603050405020304" pitchFamily="18" charset="0"/>
+                  <a:cs typeface="Times New Roman" panose="02020603050405020304" pitchFamily="18" charset="0"/>
+                </a:endParaRPr>
+              </a:p>
+            </p:txBody>
+          </p:sp>
+          <p:sp>
+            <p:nvSpPr>
+              <p:cNvPr id="272" name="Rectangle: Top Corners Rounded 271">
+                <a:extLst>
+                  <a:ext uri="{FF2B5EF4-FFF2-40B4-BE49-F238E27FC236}">
+                    <a16:creationId xmlns:a16="http://schemas.microsoft.com/office/drawing/2014/main" id="{9EACF07D-32F6-2137-DA90-32B66227DEC0}"/>
+                  </a:ext>
+                </a:extLst>
+              </p:cNvPr>
+              <p:cNvSpPr/>
+              <p:nvPr/>
+            </p:nvSpPr>
+            <p:spPr>
+              <a:xfrm rot="10800000">
+                <a:off x="3916952" y="4613172"/>
+                <a:ext cx="2239248" cy="323588"/>
+              </a:xfrm>
+              <a:prstGeom prst="round2SameRect">
+                <a:avLst>
+                  <a:gd name="adj1" fmla="val 28890"/>
+                  <a:gd name="adj2" fmla="val 0"/>
+                </a:avLst>
+              </a:prstGeom>
+              <a:solidFill>
+                <a:srgbClr val="F2F2F2"/>
+              </a:solidFill>
+              <a:ln>
+                <a:noFill/>
+              </a:ln>
+            </p:spPr>
+            <p:style>
+              <a:lnRef idx="2">
+                <a:schemeClr val="accent1">
+                  <a:shade val="15000"/>
+                </a:schemeClr>
+              </a:lnRef>
+              <a:fillRef idx="1">
+                <a:schemeClr val="accent1"/>
+              </a:fillRef>
+              <a:effectRef idx="0">
+                <a:schemeClr val="accent1"/>
+              </a:effectRef>
+              <a:fontRef idx="minor">
+                <a:schemeClr val="lt1"/>
+              </a:fontRef>
+            </p:style>
+            <p:txBody>
+              <a:bodyPr rtlCol="0" anchor="ctr"/>
+              <a:lstStyle/>
+              <a:p>
+                <a:pPr algn="ctr"/>
+                <a:endParaRPr lang="en-US"/>
+              </a:p>
+            </p:txBody>
+          </p:sp>
+          <p:sp>
+            <p:nvSpPr>
+              <p:cNvPr id="273" name="Rectangle 272">
+                <a:extLst>
+                  <a:ext uri="{FF2B5EF4-FFF2-40B4-BE49-F238E27FC236}">
+                    <a16:creationId xmlns:a16="http://schemas.microsoft.com/office/drawing/2014/main" id="{D6075B7C-6B1B-AA09-28DC-A0AB26B8A4EF}"/>
+                  </a:ext>
+                </a:extLst>
+              </p:cNvPr>
+              <p:cNvSpPr/>
+              <p:nvPr/>
+            </p:nvSpPr>
+            <p:spPr>
+              <a:xfrm>
+                <a:off x="3916951" y="3990559"/>
+                <a:ext cx="2239249" cy="323587"/>
+              </a:xfrm>
+              <a:prstGeom prst="rect">
+                <a:avLst/>
+              </a:prstGeom>
+              <a:solidFill>
+                <a:schemeClr val="bg1">
+                  <a:lumMod val="95000"/>
+                </a:schemeClr>
+              </a:solidFill>
+              <a:ln>
+                <a:noFill/>
+              </a:ln>
+            </p:spPr>
+            <p:style>
+              <a:lnRef idx="2">
+                <a:schemeClr val="accent1">
+                  <a:shade val="15000"/>
+                </a:schemeClr>
+              </a:lnRef>
+              <a:fillRef idx="1">
+                <a:schemeClr val="accent1"/>
+              </a:fillRef>
+              <a:effectRef idx="0">
+                <a:schemeClr val="accent1"/>
+              </a:effectRef>
+              <a:fontRef idx="minor">
+                <a:schemeClr val="lt1"/>
+              </a:fontRef>
+            </p:style>
+            <p:txBody>
+              <a:bodyPr rtlCol="0" anchor="ctr"/>
+              <a:lstStyle/>
+              <a:p>
+                <a:pPr algn="ctr"/>
+                <a:endParaRPr lang="en-US"/>
+              </a:p>
+            </p:txBody>
+          </p:sp>
+          <p:sp>
+            <p:nvSpPr>
+              <p:cNvPr id="274" name="TextBox 273">
+                <a:extLst>
+                  <a:ext uri="{FF2B5EF4-FFF2-40B4-BE49-F238E27FC236}">
+                    <a16:creationId xmlns:a16="http://schemas.microsoft.com/office/drawing/2014/main" id="{0F1D9381-EB89-C1C5-783F-90CB3F61BF0E}"/>
+                  </a:ext>
+                </a:extLst>
+              </p:cNvPr>
+              <p:cNvSpPr txBox="1"/>
+              <p:nvPr/>
+            </p:nvSpPr>
+            <p:spPr>
+              <a:xfrm>
+                <a:off x="3917733" y="4313625"/>
+                <a:ext cx="2237684" cy="307777"/>
+              </a:xfrm>
+              <a:prstGeom prst="rect">
+                <a:avLst/>
+              </a:prstGeom>
+              <a:noFill/>
+            </p:spPr>
+            <p:txBody>
+              <a:bodyPr wrap="square">
+                <a:spAutoFit/>
+              </a:bodyPr>
+              <a:lstStyle/>
+              <a:p>
+                <a:pPr algn="ctr"/>
+                <a:r>
+                  <a:rPr lang="en-US" sz="1400" dirty="0">
+                    <a:latin typeface="Times New Roman" panose="02020603050405020304" pitchFamily="18" charset="0"/>
+                    <a:cs typeface="Times New Roman" panose="02020603050405020304" pitchFamily="18" charset="0"/>
+                  </a:rPr>
+                  <a:t>OAI : USRP</a:t>
+                </a:r>
+              </a:p>
+            </p:txBody>
+          </p:sp>
+          <p:sp>
+            <p:nvSpPr>
+              <p:cNvPr id="275" name="TextBox 274">
+                <a:extLst>
+                  <a:ext uri="{FF2B5EF4-FFF2-40B4-BE49-F238E27FC236}">
+                    <a16:creationId xmlns:a16="http://schemas.microsoft.com/office/drawing/2014/main" id="{A8AE50F6-876D-1B55-54CD-525FF6E92E84}"/>
+                  </a:ext>
+                </a:extLst>
+              </p:cNvPr>
+              <p:cNvSpPr txBox="1"/>
+              <p:nvPr/>
+            </p:nvSpPr>
+            <p:spPr>
+              <a:xfrm>
+                <a:off x="3933168" y="4007963"/>
+                <a:ext cx="2206814" cy="307777"/>
+              </a:xfrm>
+              <a:prstGeom prst="rect">
+                <a:avLst/>
+              </a:prstGeom>
+              <a:noFill/>
+            </p:spPr>
+            <p:txBody>
+              <a:bodyPr wrap="square">
+                <a:spAutoFit/>
+              </a:bodyPr>
+              <a:lstStyle/>
+              <a:p>
+                <a:pPr algn="ctr"/>
+                <a:r>
+                  <a:rPr lang="en-US" sz="1400" dirty="0" err="1">
+                    <a:latin typeface="Times New Roman" panose="02020603050405020304" pitchFamily="18" charset="0"/>
+                    <a:cs typeface="Times New Roman" panose="02020603050405020304" pitchFamily="18" charset="0"/>
+                  </a:rPr>
+                  <a:t>srsRAN_Project</a:t>
+                </a:r>
+                <a:r>
+                  <a:rPr lang="en-US" sz="1400" dirty="0">
+                    <a:latin typeface="Times New Roman" panose="02020603050405020304" pitchFamily="18" charset="0"/>
+                    <a:cs typeface="Times New Roman" panose="02020603050405020304" pitchFamily="18" charset="0"/>
+                  </a:rPr>
+                  <a:t> : </a:t>
+                </a:r>
+                <a:r>
+                  <a:rPr lang="en-US" sz="1400" dirty="0" err="1">
+                    <a:latin typeface="Times New Roman" panose="02020603050405020304" pitchFamily="18" charset="0"/>
+                    <a:cs typeface="Times New Roman" panose="02020603050405020304" pitchFamily="18" charset="0"/>
+                  </a:rPr>
+                  <a:t>ZeroMQ</a:t>
+                </a:r>
+                <a:endParaRPr lang="en-US" sz="1400" dirty="0">
+                  <a:latin typeface="Times New Roman" panose="02020603050405020304" pitchFamily="18" charset="0"/>
+                  <a:cs typeface="Times New Roman" panose="02020603050405020304" pitchFamily="18" charset="0"/>
+                </a:endParaRPr>
+              </a:p>
+            </p:txBody>
+          </p:sp>
+          <p:sp>
+            <p:nvSpPr>
+              <p:cNvPr id="276" name="TextBox 275">
+                <a:extLst>
+                  <a:ext uri="{FF2B5EF4-FFF2-40B4-BE49-F238E27FC236}">
+                    <a16:creationId xmlns:a16="http://schemas.microsoft.com/office/drawing/2014/main" id="{1413A169-90A0-F78F-98F8-C95D3D06F347}"/>
+                  </a:ext>
+                </a:extLst>
+              </p:cNvPr>
+              <p:cNvSpPr txBox="1"/>
+              <p:nvPr/>
+            </p:nvSpPr>
+            <p:spPr>
+              <a:xfrm>
+                <a:off x="3929357" y="3702301"/>
+                <a:ext cx="2206816" cy="307777"/>
+              </a:xfrm>
+              <a:prstGeom prst="rect">
+                <a:avLst/>
+              </a:prstGeom>
+              <a:noFill/>
+            </p:spPr>
+            <p:txBody>
+              <a:bodyPr wrap="square">
+                <a:spAutoFit/>
+              </a:bodyPr>
+              <a:lstStyle/>
+              <a:p>
+                <a:pPr algn="ctr"/>
+                <a:r>
+                  <a:rPr lang="en-US" sz="1400" dirty="0" err="1">
+                    <a:latin typeface="Times New Roman" panose="02020603050405020304" pitchFamily="18" charset="0"/>
+                    <a:cs typeface="Times New Roman" panose="02020603050405020304" pitchFamily="18" charset="0"/>
+                  </a:rPr>
+                  <a:t>srsRAN_Project</a:t>
+                </a:r>
+                <a:r>
+                  <a:rPr lang="en-US" sz="1400" dirty="0">
+                    <a:latin typeface="Times New Roman" panose="02020603050405020304" pitchFamily="18" charset="0"/>
+                    <a:cs typeface="Times New Roman" panose="02020603050405020304" pitchFamily="18" charset="0"/>
+                  </a:rPr>
+                  <a:t> : USRP</a:t>
+                </a:r>
+              </a:p>
+            </p:txBody>
+          </p:sp>
+          <p:sp>
+            <p:nvSpPr>
+              <p:cNvPr id="277" name="TextBox 276">
+                <a:extLst>
+                  <a:ext uri="{FF2B5EF4-FFF2-40B4-BE49-F238E27FC236}">
+                    <a16:creationId xmlns:a16="http://schemas.microsoft.com/office/drawing/2014/main" id="{96F5014D-82C8-C27A-8EF4-CC8285452C10}"/>
+                  </a:ext>
+                </a:extLst>
+              </p:cNvPr>
+              <p:cNvSpPr txBox="1"/>
+              <p:nvPr/>
+            </p:nvSpPr>
+            <p:spPr>
+              <a:xfrm>
+                <a:off x="3933168" y="4924949"/>
+                <a:ext cx="2206814" cy="307777"/>
+              </a:xfrm>
+              <a:prstGeom prst="rect">
+                <a:avLst/>
+              </a:prstGeom>
+              <a:noFill/>
+            </p:spPr>
+            <p:txBody>
+              <a:bodyPr wrap="square">
+                <a:spAutoFit/>
+              </a:bodyPr>
+              <a:lstStyle/>
+              <a:p>
+                <a:pPr algn="ctr"/>
+                <a:r>
+                  <a:rPr lang="en-US" sz="1400" dirty="0">
+                    <a:latin typeface="Times New Roman" panose="02020603050405020304" pitchFamily="18" charset="0"/>
+                    <a:cs typeface="Times New Roman" panose="02020603050405020304" pitchFamily="18" charset="0"/>
+                  </a:rPr>
+                  <a:t>O-RAN SC : E2 Simulator</a:t>
+                </a:r>
+              </a:p>
+            </p:txBody>
+          </p:sp>
+          <p:sp>
+            <p:nvSpPr>
+              <p:cNvPr id="278" name="TextBox 277">
+                <a:extLst>
+                  <a:ext uri="{FF2B5EF4-FFF2-40B4-BE49-F238E27FC236}">
+                    <a16:creationId xmlns:a16="http://schemas.microsoft.com/office/drawing/2014/main" id="{3BDAD62F-06B2-79B2-26C5-B0000A989788}"/>
+                  </a:ext>
+                </a:extLst>
+              </p:cNvPr>
+              <p:cNvSpPr txBox="1"/>
+              <p:nvPr/>
+            </p:nvSpPr>
+            <p:spPr>
+              <a:xfrm>
+                <a:off x="3941661" y="5227453"/>
+                <a:ext cx="2239249" cy="307777"/>
+              </a:xfrm>
+              <a:prstGeom prst="rect">
+                <a:avLst/>
+              </a:prstGeom>
+              <a:noFill/>
+            </p:spPr>
+            <p:txBody>
+              <a:bodyPr wrap="square">
+                <a:spAutoFit/>
+              </a:bodyPr>
+              <a:lstStyle/>
+              <a:p>
+                <a:pPr algn="ctr"/>
+                <a:r>
+                  <a:rPr lang="en-US" sz="1400" b="1" dirty="0">
+                    <a:solidFill>
+                      <a:schemeClr val="tx1"/>
+                    </a:solidFill>
+                    <a:latin typeface="Times New Roman" panose="02020603050405020304" pitchFamily="18" charset="0"/>
+                    <a:cs typeface="Times New Roman" panose="02020603050405020304" pitchFamily="18" charset="0"/>
+                  </a:rPr>
+                  <a:t>Next Generation Node B</a:t>
+                </a:r>
+                <a:endParaRPr lang="en-US" sz="1400" b="1" dirty="0">
+                  <a:latin typeface="Times New Roman" panose="02020603050405020304" pitchFamily="18" charset="0"/>
+                  <a:cs typeface="Times New Roman" panose="02020603050405020304" pitchFamily="18" charset="0"/>
+                </a:endParaRPr>
+              </a:p>
+            </p:txBody>
+          </p:sp>
+          <p:sp>
+            <p:nvSpPr>
+              <p:cNvPr id="279" name="Rectangle 278">
+                <a:extLst>
+                  <a:ext uri="{FF2B5EF4-FFF2-40B4-BE49-F238E27FC236}">
+                    <a16:creationId xmlns:a16="http://schemas.microsoft.com/office/drawing/2014/main" id="{83A50FAE-7494-A2B4-0F14-D16BA097F548}"/>
+                  </a:ext>
+                </a:extLst>
+              </p:cNvPr>
+              <p:cNvSpPr/>
+              <p:nvPr/>
+            </p:nvSpPr>
+            <p:spPr>
+              <a:xfrm>
+                <a:off x="3916950" y="4615547"/>
+                <a:ext cx="2239249" cy="323587"/>
+              </a:xfrm>
+              <a:prstGeom prst="rect">
+                <a:avLst/>
+              </a:prstGeom>
+              <a:solidFill>
+                <a:schemeClr val="bg1">
+                  <a:lumMod val="95000"/>
+                </a:schemeClr>
+              </a:solidFill>
+              <a:ln>
+                <a:noFill/>
+              </a:ln>
+            </p:spPr>
+            <p:style>
+              <a:lnRef idx="2">
+                <a:schemeClr val="accent1">
+                  <a:shade val="15000"/>
+                </a:schemeClr>
+              </a:lnRef>
+              <a:fillRef idx="1">
+                <a:schemeClr val="accent1"/>
+              </a:fillRef>
+              <a:effectRef idx="0">
+                <a:schemeClr val="accent1"/>
+              </a:effectRef>
+              <a:fontRef idx="minor">
+                <a:schemeClr val="lt1"/>
+              </a:fontRef>
+            </p:style>
+            <p:txBody>
+              <a:bodyPr rtlCol="0" anchor="ctr"/>
+              <a:lstStyle/>
+              <a:p>
+                <a:pPr algn="ctr"/>
+                <a:endParaRPr lang="en-US"/>
+              </a:p>
+            </p:txBody>
+          </p:sp>
+          <p:sp>
+            <p:nvSpPr>
+              <p:cNvPr id="280" name="TextBox 279">
+                <a:extLst>
+                  <a:ext uri="{FF2B5EF4-FFF2-40B4-BE49-F238E27FC236}">
+                    <a16:creationId xmlns:a16="http://schemas.microsoft.com/office/drawing/2014/main" id="{B116DFE2-7F21-FE11-0F36-441A58E9A2C3}"/>
+                  </a:ext>
+                </a:extLst>
+              </p:cNvPr>
+              <p:cNvSpPr txBox="1"/>
+              <p:nvPr/>
+            </p:nvSpPr>
+            <p:spPr>
+              <a:xfrm>
+                <a:off x="3933168" y="4619287"/>
+                <a:ext cx="2206814" cy="307777"/>
+              </a:xfrm>
+              <a:prstGeom prst="rect">
+                <a:avLst/>
+              </a:prstGeom>
+              <a:noFill/>
+            </p:spPr>
+            <p:txBody>
+              <a:bodyPr wrap="square">
+                <a:spAutoFit/>
+              </a:bodyPr>
+              <a:lstStyle/>
+              <a:p>
+                <a:pPr algn="ctr"/>
+                <a:r>
+                  <a:rPr lang="en-US" sz="1400" dirty="0">
+                    <a:solidFill>
+                      <a:schemeClr val="tx1"/>
+                    </a:solidFill>
+                    <a:latin typeface="Times New Roman" panose="02020603050405020304" pitchFamily="18" charset="0"/>
+                    <a:cs typeface="Times New Roman" panose="02020603050405020304" pitchFamily="18" charset="0"/>
+                  </a:rPr>
+                  <a:t>OAI : RF Simulator</a:t>
+                </a:r>
+                <a:endParaRPr lang="en-US" sz="1400" dirty="0">
+                  <a:latin typeface="Times New Roman" panose="02020603050405020304" pitchFamily="18" charset="0"/>
+                  <a:cs typeface="Times New Roman" panose="02020603050405020304" pitchFamily="18" charset="0"/>
+                </a:endParaRPr>
+              </a:p>
+            </p:txBody>
+          </p:sp>
+          <p:sp>
+            <p:nvSpPr>
+              <p:cNvPr id="281" name="Rectangle: Rounded Corners 280">
+                <a:extLst>
+                  <a:ext uri="{FF2B5EF4-FFF2-40B4-BE49-F238E27FC236}">
+                    <a16:creationId xmlns:a16="http://schemas.microsoft.com/office/drawing/2014/main" id="{4D54D83B-619F-C188-C380-2C35CAF9BF85}"/>
+                  </a:ext>
+                </a:extLst>
+              </p:cNvPr>
+              <p:cNvSpPr/>
+              <p:nvPr/>
+            </p:nvSpPr>
+            <p:spPr>
+              <a:xfrm>
+                <a:off x="3916951" y="3691197"/>
+                <a:ext cx="2239249" cy="1534218"/>
+              </a:xfrm>
+              <a:prstGeom prst="roundRect">
+                <a:avLst>
+                  <a:gd name="adj" fmla="val 5819"/>
+                </a:avLst>
+              </a:prstGeom>
+              <a:noFill/>
+              <a:ln w="12700">
+                <a:solidFill>
+                  <a:schemeClr val="tx1"/>
+                </a:solidFill>
+              </a:ln>
+            </p:spPr>
+            <p:style>
+              <a:lnRef idx="2">
+                <a:schemeClr val="accent1">
+                  <a:shade val="15000"/>
+                </a:schemeClr>
+              </a:lnRef>
+              <a:fillRef idx="1">
+                <a:schemeClr val="accent1"/>
+              </a:fillRef>
+              <a:effectRef idx="0">
+                <a:schemeClr val="accent1"/>
+              </a:effectRef>
+              <a:fontRef idx="minor">
+                <a:schemeClr val="lt1"/>
+              </a:fontRef>
+            </p:style>
+            <p:txBody>
+              <a:bodyPr rtlCol="0" anchor="ctr"/>
+              <a:lstStyle/>
+              <a:p>
+                <a:pPr algn="ctr"/>
+                <a:endParaRPr lang="en-US" dirty="0">
+                  <a:latin typeface="Times New Roman" panose="02020603050405020304" pitchFamily="18" charset="0"/>
+                  <a:cs typeface="Times New Roman" panose="02020603050405020304" pitchFamily="18" charset="0"/>
+                </a:endParaRPr>
+              </a:p>
+            </p:txBody>
+          </p:sp>
+        </p:grpSp>
+        <p:grpSp>
+          <p:nvGrpSpPr>
+            <p:cNvPr id="227" name="Group 226">
+              <a:extLst>
+                <a:ext uri="{FF2B5EF4-FFF2-40B4-BE49-F238E27FC236}">
+                  <a16:creationId xmlns:a16="http://schemas.microsoft.com/office/drawing/2014/main" id="{7A854522-CD14-6BE1-A26D-F4B8091652DF}"/>
+                </a:ext>
+              </a:extLst>
+            </p:cNvPr>
+            <p:cNvGrpSpPr/>
+            <p:nvPr/>
+          </p:nvGrpSpPr>
+          <p:grpSpPr>
+            <a:xfrm>
+              <a:off x="690637" y="2171378"/>
+              <a:ext cx="2263961" cy="1844033"/>
+              <a:chOff x="3916949" y="3691197"/>
+              <a:chExt cx="2263961" cy="1844033"/>
+            </a:xfrm>
+          </p:grpSpPr>
+          <p:sp>
+            <p:nvSpPr>
+              <p:cNvPr id="210" name="Rectangle: Rounded Corners 209">
+                <a:extLst>
+                  <a:ext uri="{FF2B5EF4-FFF2-40B4-BE49-F238E27FC236}">
+                    <a16:creationId xmlns:a16="http://schemas.microsoft.com/office/drawing/2014/main" id="{70ADBDF1-D32C-AE54-601E-E1D8D6CDE9CC}"/>
+                  </a:ext>
+                </a:extLst>
+              </p:cNvPr>
+              <p:cNvSpPr/>
+              <p:nvPr/>
+            </p:nvSpPr>
+            <p:spPr>
+              <a:xfrm>
+                <a:off x="3916949" y="3692460"/>
+                <a:ext cx="2239249" cy="1531642"/>
+              </a:xfrm>
+              <a:prstGeom prst="roundRect">
+                <a:avLst>
+                  <a:gd name="adj" fmla="val 5859"/>
+                </a:avLst>
+              </a:prstGeom>
+              <a:solidFill>
+                <a:schemeClr val="bg1">
+                  <a:lumMod val="85000"/>
+                </a:schemeClr>
+              </a:solidFill>
+              <a:ln w="28575">
+                <a:noFill/>
+              </a:ln>
+            </p:spPr>
+            <p:style>
+              <a:lnRef idx="2">
+                <a:schemeClr val="accent1">
+                  <a:shade val="15000"/>
+                </a:schemeClr>
+              </a:lnRef>
+              <a:fillRef idx="1">
+                <a:schemeClr val="accent1"/>
+              </a:fillRef>
+              <a:effectRef idx="0">
+                <a:schemeClr val="accent1"/>
+              </a:effectRef>
+              <a:fontRef idx="minor">
+                <a:schemeClr val="lt1"/>
+              </a:fontRef>
+            </p:style>
+            <p:txBody>
+              <a:bodyPr rtlCol="0" anchor="ctr"/>
+              <a:lstStyle/>
+              <a:p>
+                <a:pPr algn="ctr"/>
+                <a:endParaRPr lang="en-US" dirty="0">
+                  <a:latin typeface="Times New Roman" panose="02020603050405020304" pitchFamily="18" charset="0"/>
+                  <a:cs typeface="Times New Roman" panose="02020603050405020304" pitchFamily="18" charset="0"/>
+                </a:endParaRPr>
+              </a:p>
+            </p:txBody>
+          </p:sp>
+          <p:sp>
+            <p:nvSpPr>
+              <p:cNvPr id="195" name="Rectangle: Top Corners Rounded 194">
+                <a:extLst>
+                  <a:ext uri="{FF2B5EF4-FFF2-40B4-BE49-F238E27FC236}">
+                    <a16:creationId xmlns:a16="http://schemas.microsoft.com/office/drawing/2014/main" id="{49EE529D-3822-3C34-2FCF-96301FCBDE2B}"/>
+                  </a:ext>
+                </a:extLst>
+              </p:cNvPr>
+              <p:cNvSpPr/>
+              <p:nvPr/>
+            </p:nvSpPr>
+            <p:spPr>
+              <a:xfrm rot="10800000">
+                <a:off x="3916952" y="4613172"/>
+                <a:ext cx="2239248" cy="323588"/>
+              </a:xfrm>
+              <a:prstGeom prst="round2SameRect">
+                <a:avLst>
+                  <a:gd name="adj1" fmla="val 28890"/>
+                  <a:gd name="adj2" fmla="val 0"/>
+                </a:avLst>
+              </a:prstGeom>
+              <a:solidFill>
+                <a:srgbClr val="F2F2F2"/>
+              </a:solidFill>
+              <a:ln>
+                <a:noFill/>
+              </a:ln>
+            </p:spPr>
+            <p:style>
+              <a:lnRef idx="2">
+                <a:schemeClr val="accent1">
+                  <a:shade val="15000"/>
+                </a:schemeClr>
+              </a:lnRef>
+              <a:fillRef idx="1">
+                <a:schemeClr val="accent1"/>
+              </a:fillRef>
+              <a:effectRef idx="0">
+                <a:schemeClr val="accent1"/>
+              </a:effectRef>
+              <a:fontRef idx="minor">
+                <a:schemeClr val="lt1"/>
+              </a:fontRef>
+            </p:style>
+            <p:txBody>
+              <a:bodyPr rtlCol="0" anchor="ctr"/>
+              <a:lstStyle/>
+              <a:p>
+                <a:pPr algn="ctr"/>
+                <a:endParaRPr lang="en-US"/>
+              </a:p>
+            </p:txBody>
+          </p:sp>
+          <p:sp>
+            <p:nvSpPr>
+              <p:cNvPr id="197" name="Rectangle 196">
+                <a:extLst>
+                  <a:ext uri="{FF2B5EF4-FFF2-40B4-BE49-F238E27FC236}">
+                    <a16:creationId xmlns:a16="http://schemas.microsoft.com/office/drawing/2014/main" id="{9D8422CA-4FF5-7187-2D0D-ADC45EB74032}"/>
+                  </a:ext>
+                </a:extLst>
+              </p:cNvPr>
+              <p:cNvSpPr/>
+              <p:nvPr/>
+            </p:nvSpPr>
+            <p:spPr>
+              <a:xfrm>
+                <a:off x="3916951" y="3990559"/>
+                <a:ext cx="2239249" cy="323587"/>
+              </a:xfrm>
+              <a:prstGeom prst="rect">
+                <a:avLst/>
+              </a:prstGeom>
+              <a:solidFill>
+                <a:schemeClr val="bg1">
+                  <a:lumMod val="95000"/>
+                </a:schemeClr>
+              </a:solidFill>
+              <a:ln>
+                <a:noFill/>
+              </a:ln>
+            </p:spPr>
+            <p:style>
+              <a:lnRef idx="2">
+                <a:schemeClr val="accent1">
+                  <a:shade val="15000"/>
+                </a:schemeClr>
+              </a:lnRef>
+              <a:fillRef idx="1">
+                <a:schemeClr val="accent1"/>
+              </a:fillRef>
+              <a:effectRef idx="0">
+                <a:schemeClr val="accent1"/>
+              </a:effectRef>
+              <a:fontRef idx="minor">
+                <a:schemeClr val="lt1"/>
+              </a:fontRef>
+            </p:style>
+            <p:txBody>
+              <a:bodyPr rtlCol="0" anchor="ctr"/>
+              <a:lstStyle/>
+              <a:p>
+                <a:pPr algn="ctr"/>
+                <a:endParaRPr lang="en-US"/>
+              </a:p>
+            </p:txBody>
+          </p:sp>
+          <p:sp>
+            <p:nvSpPr>
+              <p:cNvPr id="199" name="TextBox 198">
+                <a:extLst>
+                  <a:ext uri="{FF2B5EF4-FFF2-40B4-BE49-F238E27FC236}">
+                    <a16:creationId xmlns:a16="http://schemas.microsoft.com/office/drawing/2014/main" id="{9F8EDD21-A0C6-EE8F-DB27-D2CD5236A366}"/>
+                  </a:ext>
+                </a:extLst>
+              </p:cNvPr>
+              <p:cNvSpPr txBox="1"/>
+              <p:nvPr/>
+            </p:nvSpPr>
+            <p:spPr>
+              <a:xfrm>
+                <a:off x="3916952" y="4313625"/>
+                <a:ext cx="2239246" cy="307777"/>
+              </a:xfrm>
+              <a:prstGeom prst="rect">
+                <a:avLst/>
+              </a:prstGeom>
+              <a:noFill/>
+            </p:spPr>
+            <p:txBody>
+              <a:bodyPr wrap="square">
+                <a:spAutoFit/>
+              </a:bodyPr>
+              <a:lstStyle/>
+              <a:p>
+                <a:pPr algn="ctr"/>
+                <a:r>
+                  <a:rPr lang="en-US" sz="1400" dirty="0">
+                    <a:latin typeface="Times New Roman" panose="02020603050405020304" pitchFamily="18" charset="0"/>
+                    <a:cs typeface="Times New Roman" panose="02020603050405020304" pitchFamily="18" charset="0"/>
+                  </a:rPr>
+                  <a:t>OAI : USRP</a:t>
+                </a:r>
+              </a:p>
+            </p:txBody>
+          </p:sp>
+          <p:sp>
+            <p:nvSpPr>
+              <p:cNvPr id="200" name="TextBox 199">
+                <a:extLst>
+                  <a:ext uri="{FF2B5EF4-FFF2-40B4-BE49-F238E27FC236}">
+                    <a16:creationId xmlns:a16="http://schemas.microsoft.com/office/drawing/2014/main" id="{F4E12DF1-F6ED-9A1D-33B3-ACB6D007555A}"/>
+                  </a:ext>
+                </a:extLst>
+              </p:cNvPr>
+              <p:cNvSpPr txBox="1"/>
+              <p:nvPr/>
+            </p:nvSpPr>
+            <p:spPr>
+              <a:xfrm>
+                <a:off x="3916952" y="4007963"/>
+                <a:ext cx="2239246" cy="307777"/>
+              </a:xfrm>
+              <a:prstGeom prst="rect">
+                <a:avLst/>
+              </a:prstGeom>
+              <a:noFill/>
+            </p:spPr>
+            <p:txBody>
+              <a:bodyPr wrap="square">
+                <a:spAutoFit/>
+              </a:bodyPr>
+              <a:lstStyle/>
+              <a:p>
+                <a:pPr algn="ctr"/>
+                <a:r>
+                  <a:rPr lang="en-US" sz="1400" dirty="0">
+                    <a:latin typeface="Times New Roman" panose="02020603050405020304" pitchFamily="18" charset="0"/>
+                    <a:cs typeface="Times New Roman" panose="02020603050405020304" pitchFamily="18" charset="0"/>
+                  </a:rPr>
+                  <a:t>srsRAN_4G : </a:t>
+                </a:r>
+                <a:r>
+                  <a:rPr lang="en-US" sz="1400" dirty="0" err="1">
+                    <a:latin typeface="Times New Roman" panose="02020603050405020304" pitchFamily="18" charset="0"/>
+                    <a:cs typeface="Times New Roman" panose="02020603050405020304" pitchFamily="18" charset="0"/>
+                  </a:rPr>
+                  <a:t>ZeroMQ</a:t>
+                </a:r>
+                <a:endParaRPr lang="en-US" sz="1400" dirty="0">
+                  <a:latin typeface="Times New Roman" panose="02020603050405020304" pitchFamily="18" charset="0"/>
+                  <a:cs typeface="Times New Roman" panose="02020603050405020304" pitchFamily="18" charset="0"/>
+                </a:endParaRPr>
+              </a:p>
+            </p:txBody>
+          </p:sp>
+          <p:sp>
+            <p:nvSpPr>
+              <p:cNvPr id="201" name="TextBox 200">
+                <a:extLst>
+                  <a:ext uri="{FF2B5EF4-FFF2-40B4-BE49-F238E27FC236}">
+                    <a16:creationId xmlns:a16="http://schemas.microsoft.com/office/drawing/2014/main" id="{0E36D728-D080-9470-0E71-4C5261DE33FD}"/>
+                  </a:ext>
+                </a:extLst>
+              </p:cNvPr>
+              <p:cNvSpPr txBox="1"/>
+              <p:nvPr/>
+            </p:nvSpPr>
+            <p:spPr>
+              <a:xfrm>
+                <a:off x="3916951" y="3702301"/>
+                <a:ext cx="2239248" cy="307777"/>
+              </a:xfrm>
+              <a:prstGeom prst="rect">
+                <a:avLst/>
+              </a:prstGeom>
+              <a:noFill/>
+            </p:spPr>
+            <p:txBody>
+              <a:bodyPr wrap="square">
+                <a:spAutoFit/>
+              </a:bodyPr>
+              <a:lstStyle/>
+              <a:p>
+                <a:pPr algn="ctr"/>
+                <a:r>
+                  <a:rPr lang="en-US" sz="1400" dirty="0">
+                    <a:latin typeface="Times New Roman" panose="02020603050405020304" pitchFamily="18" charset="0"/>
+                    <a:cs typeface="Times New Roman" panose="02020603050405020304" pitchFamily="18" charset="0"/>
+                  </a:rPr>
+                  <a:t>srsRAN_4G : USRP</a:t>
+                </a:r>
+              </a:p>
+            </p:txBody>
+          </p:sp>
+          <p:sp>
+            <p:nvSpPr>
+              <p:cNvPr id="202" name="TextBox 201">
+                <a:extLst>
+                  <a:ext uri="{FF2B5EF4-FFF2-40B4-BE49-F238E27FC236}">
+                    <a16:creationId xmlns:a16="http://schemas.microsoft.com/office/drawing/2014/main" id="{16FB98B6-AA11-EA1B-485F-18B0C2E0C573}"/>
+                  </a:ext>
+                </a:extLst>
+              </p:cNvPr>
+              <p:cNvSpPr txBox="1"/>
+              <p:nvPr/>
+            </p:nvSpPr>
+            <p:spPr>
+              <a:xfrm>
+                <a:off x="3916952" y="4924949"/>
+                <a:ext cx="2239246" cy="307777"/>
+              </a:xfrm>
+              <a:prstGeom prst="rect">
+                <a:avLst/>
+              </a:prstGeom>
+              <a:noFill/>
+            </p:spPr>
+            <p:txBody>
+              <a:bodyPr wrap="square">
+                <a:spAutoFit/>
+              </a:bodyPr>
+              <a:lstStyle/>
+              <a:p>
+                <a:pPr algn="ctr"/>
+                <a:r>
+                  <a:rPr lang="en-US" sz="1400" dirty="0">
+                    <a:latin typeface="Times New Roman" panose="02020603050405020304" pitchFamily="18" charset="0"/>
+                    <a:cs typeface="Times New Roman" panose="02020603050405020304" pitchFamily="18" charset="0"/>
+                  </a:rPr>
+                  <a:t>Mobile Phone</a:t>
+                </a:r>
+              </a:p>
+            </p:txBody>
+          </p:sp>
+          <p:sp>
+            <p:nvSpPr>
+              <p:cNvPr id="203" name="TextBox 202">
+                <a:extLst>
+                  <a:ext uri="{FF2B5EF4-FFF2-40B4-BE49-F238E27FC236}">
+                    <a16:creationId xmlns:a16="http://schemas.microsoft.com/office/drawing/2014/main" id="{2BC8A388-630D-2F0A-E362-E58FB4DE4B4B}"/>
+                  </a:ext>
+                </a:extLst>
+              </p:cNvPr>
+              <p:cNvSpPr txBox="1"/>
+              <p:nvPr/>
+            </p:nvSpPr>
+            <p:spPr>
+              <a:xfrm>
+                <a:off x="3941661" y="5227453"/>
+                <a:ext cx="2239249" cy="307777"/>
+              </a:xfrm>
+              <a:prstGeom prst="rect">
+                <a:avLst/>
+              </a:prstGeom>
+              <a:noFill/>
+            </p:spPr>
+            <p:txBody>
+              <a:bodyPr wrap="square">
+                <a:spAutoFit/>
+              </a:bodyPr>
+              <a:lstStyle/>
+              <a:p>
+                <a:pPr algn="ctr"/>
+                <a:r>
+                  <a:rPr lang="en-US" sz="1400" b="1" dirty="0">
+                    <a:solidFill>
+                      <a:schemeClr val="tx1"/>
+                    </a:solidFill>
+                    <a:latin typeface="Times New Roman" panose="02020603050405020304" pitchFamily="18" charset="0"/>
+                    <a:cs typeface="Times New Roman" panose="02020603050405020304" pitchFamily="18" charset="0"/>
+                  </a:rPr>
+                  <a:t>User Equipment</a:t>
+                </a:r>
+                <a:endParaRPr lang="en-US" sz="1400" b="1" dirty="0">
+                  <a:latin typeface="Times New Roman" panose="02020603050405020304" pitchFamily="18" charset="0"/>
+                  <a:cs typeface="Times New Roman" panose="02020603050405020304" pitchFamily="18" charset="0"/>
+                </a:endParaRPr>
+              </a:p>
+            </p:txBody>
+          </p:sp>
+          <p:sp>
+            <p:nvSpPr>
+              <p:cNvPr id="208" name="Rectangle 207">
+                <a:extLst>
+                  <a:ext uri="{FF2B5EF4-FFF2-40B4-BE49-F238E27FC236}">
+                    <a16:creationId xmlns:a16="http://schemas.microsoft.com/office/drawing/2014/main" id="{212011C4-EBF3-EB29-D80C-BEAECBCA7B62}"/>
+                  </a:ext>
+                </a:extLst>
+              </p:cNvPr>
+              <p:cNvSpPr/>
+              <p:nvPr/>
+            </p:nvSpPr>
+            <p:spPr>
+              <a:xfrm>
+                <a:off x="3916950" y="4615547"/>
+                <a:ext cx="2239249" cy="323587"/>
+              </a:xfrm>
+              <a:prstGeom prst="rect">
+                <a:avLst/>
+              </a:prstGeom>
+              <a:solidFill>
+                <a:schemeClr val="bg1">
+                  <a:lumMod val="95000"/>
+                </a:schemeClr>
+              </a:solidFill>
+              <a:ln>
+                <a:noFill/>
+              </a:ln>
+            </p:spPr>
+            <p:style>
+              <a:lnRef idx="2">
+                <a:schemeClr val="accent1">
+                  <a:shade val="15000"/>
+                </a:schemeClr>
+              </a:lnRef>
+              <a:fillRef idx="1">
+                <a:schemeClr val="accent1"/>
+              </a:fillRef>
+              <a:effectRef idx="0">
+                <a:schemeClr val="accent1"/>
+              </a:effectRef>
+              <a:fontRef idx="minor">
+                <a:schemeClr val="lt1"/>
+              </a:fontRef>
+            </p:style>
+            <p:txBody>
+              <a:bodyPr rtlCol="0" anchor="ctr"/>
+              <a:lstStyle/>
+              <a:p>
+                <a:pPr algn="ctr"/>
+                <a:endParaRPr lang="en-US"/>
+              </a:p>
+            </p:txBody>
+          </p:sp>
+          <p:sp>
+            <p:nvSpPr>
+              <p:cNvPr id="209" name="TextBox 208">
+                <a:extLst>
+                  <a:ext uri="{FF2B5EF4-FFF2-40B4-BE49-F238E27FC236}">
+                    <a16:creationId xmlns:a16="http://schemas.microsoft.com/office/drawing/2014/main" id="{84E8EFF1-03BE-6A27-CF24-939A0A21B022}"/>
+                  </a:ext>
+                </a:extLst>
+              </p:cNvPr>
+              <p:cNvSpPr txBox="1"/>
+              <p:nvPr/>
+            </p:nvSpPr>
+            <p:spPr>
+              <a:xfrm>
+                <a:off x="3916952" y="4619287"/>
+                <a:ext cx="2239246" cy="307777"/>
+              </a:xfrm>
+              <a:prstGeom prst="rect">
+                <a:avLst/>
+              </a:prstGeom>
+              <a:noFill/>
+            </p:spPr>
+            <p:txBody>
+              <a:bodyPr wrap="square">
+                <a:spAutoFit/>
+              </a:bodyPr>
+              <a:lstStyle/>
+              <a:p>
+                <a:pPr algn="ctr"/>
+                <a:r>
+                  <a:rPr lang="en-US" sz="1400" dirty="0">
+                    <a:latin typeface="Times New Roman" panose="02020603050405020304" pitchFamily="18" charset="0"/>
+                    <a:cs typeface="Times New Roman" panose="02020603050405020304" pitchFamily="18" charset="0"/>
+                  </a:rPr>
+                  <a:t>OAI : RF Simulator</a:t>
+                </a:r>
+              </a:p>
+            </p:txBody>
+          </p:sp>
+          <p:sp>
+            <p:nvSpPr>
+              <p:cNvPr id="198" name="Rectangle: Rounded Corners 197">
+                <a:extLst>
+                  <a:ext uri="{FF2B5EF4-FFF2-40B4-BE49-F238E27FC236}">
+                    <a16:creationId xmlns:a16="http://schemas.microsoft.com/office/drawing/2014/main" id="{4F21D880-AC22-436C-BBFD-41B6AC956B7F}"/>
+                  </a:ext>
+                </a:extLst>
+              </p:cNvPr>
+              <p:cNvSpPr/>
+              <p:nvPr/>
+            </p:nvSpPr>
+            <p:spPr>
+              <a:xfrm>
+                <a:off x="3916951" y="3691197"/>
+                <a:ext cx="2239249" cy="1534218"/>
+              </a:xfrm>
+              <a:prstGeom prst="roundRect">
+                <a:avLst>
+                  <a:gd name="adj" fmla="val 5819"/>
+                </a:avLst>
+              </a:prstGeom>
+              <a:noFill/>
+              <a:ln w="12700">
+                <a:solidFill>
+                  <a:schemeClr val="tx1"/>
+                </a:solidFill>
+              </a:ln>
+            </p:spPr>
+            <p:style>
+              <a:lnRef idx="2">
+                <a:schemeClr val="accent1">
+                  <a:shade val="15000"/>
+                </a:schemeClr>
+              </a:lnRef>
+              <a:fillRef idx="1">
+                <a:schemeClr val="accent1"/>
+              </a:fillRef>
+              <a:effectRef idx="0">
+                <a:schemeClr val="accent1"/>
+              </a:effectRef>
+              <a:fontRef idx="minor">
+                <a:schemeClr val="lt1"/>
+              </a:fontRef>
+            </p:style>
+            <p:txBody>
+              <a:bodyPr rtlCol="0" anchor="ctr"/>
+              <a:lstStyle/>
+              <a:p>
+                <a:pPr algn="ctr"/>
+                <a:endParaRPr lang="en-US" dirty="0">
+                  <a:latin typeface="Times New Roman" panose="02020603050405020304" pitchFamily="18" charset="0"/>
+                  <a:cs typeface="Times New Roman" panose="02020603050405020304" pitchFamily="18" charset="0"/>
+                </a:endParaRPr>
+              </a:p>
+            </p:txBody>
+          </p:sp>
+        </p:grpSp>
+        <p:grpSp>
+          <p:nvGrpSpPr>
+            <p:cNvPr id="294" name="Group 293">
+              <a:extLst>
+                <a:ext uri="{FF2B5EF4-FFF2-40B4-BE49-F238E27FC236}">
+                  <a16:creationId xmlns:a16="http://schemas.microsoft.com/office/drawing/2014/main" id="{7F0217C1-27AC-0AE9-0AB2-B6739AA10A59}"/>
+                </a:ext>
+              </a:extLst>
+            </p:cNvPr>
+            <p:cNvGrpSpPr/>
+            <p:nvPr/>
+          </p:nvGrpSpPr>
+          <p:grpSpPr>
+            <a:xfrm>
+              <a:off x="6497959" y="3084878"/>
+              <a:ext cx="2239250" cy="930533"/>
+              <a:chOff x="6696060" y="5146289"/>
+              <a:chExt cx="2239250" cy="930533"/>
+            </a:xfrm>
+          </p:grpSpPr>
+          <p:grpSp>
+            <p:nvGrpSpPr>
+              <p:cNvPr id="282" name="Group 281">
+                <a:extLst>
+                  <a:ext uri="{FF2B5EF4-FFF2-40B4-BE49-F238E27FC236}">
+                    <a16:creationId xmlns:a16="http://schemas.microsoft.com/office/drawing/2014/main" id="{10760A10-5230-083D-FCAE-497AD888B029}"/>
+                  </a:ext>
+                </a:extLst>
+              </p:cNvPr>
+              <p:cNvGrpSpPr/>
+              <p:nvPr/>
+            </p:nvGrpSpPr>
+            <p:grpSpPr>
+              <a:xfrm>
+                <a:off x="6696060" y="5146289"/>
+                <a:ext cx="2239250" cy="618690"/>
+                <a:chOff x="6808092" y="5153909"/>
+                <a:chExt cx="2239250" cy="618690"/>
+              </a:xfrm>
+            </p:grpSpPr>
+            <p:grpSp>
+              <p:nvGrpSpPr>
+                <p:cNvPr id="136" name="Group 135">
+                  <a:extLst>
+                    <a:ext uri="{FF2B5EF4-FFF2-40B4-BE49-F238E27FC236}">
+                      <a16:creationId xmlns:a16="http://schemas.microsoft.com/office/drawing/2014/main" id="{841B9809-A189-561B-4300-1452E248F236}"/>
+                    </a:ext>
+                  </a:extLst>
+                </p:cNvPr>
+                <p:cNvGrpSpPr/>
+                <p:nvPr/>
+              </p:nvGrpSpPr>
+              <p:grpSpPr>
+                <a:xfrm>
+                  <a:off x="6808092" y="5153909"/>
+                  <a:ext cx="2239249" cy="618690"/>
+                  <a:chOff x="4021891" y="2194877"/>
+                  <a:chExt cx="2239249" cy="618690"/>
+                </a:xfrm>
+              </p:grpSpPr>
+              <p:sp>
+                <p:nvSpPr>
+                  <p:cNvPr id="141" name="Rectangle: Rounded Corners 140">
+                    <a:extLst>
+                      <a:ext uri="{FF2B5EF4-FFF2-40B4-BE49-F238E27FC236}">
+                        <a16:creationId xmlns:a16="http://schemas.microsoft.com/office/drawing/2014/main" id="{3F2A5807-4769-53A4-4C75-D528398D2568}"/>
+                      </a:ext>
+                    </a:extLst>
+                  </p:cNvPr>
+                  <p:cNvSpPr/>
+                  <p:nvPr/>
+                </p:nvSpPr>
+                <p:spPr>
+                  <a:xfrm>
+                    <a:off x="4021891" y="2194877"/>
+                    <a:ext cx="2239249" cy="618689"/>
+                  </a:xfrm>
+                  <a:prstGeom prst="roundRect">
+                    <a:avLst>
+                      <a:gd name="adj" fmla="val 12974"/>
+                    </a:avLst>
+                  </a:prstGeom>
+                  <a:solidFill>
+                    <a:schemeClr val="bg1">
+                      <a:lumMod val="85000"/>
+                    </a:schemeClr>
+                  </a:solidFill>
+                  <a:ln w="28575">
+                    <a:noFill/>
+                  </a:ln>
+                </p:spPr>
+                <p:style>
+                  <a:lnRef idx="2">
+                    <a:schemeClr val="accent1">
+                      <a:shade val="15000"/>
+                    </a:schemeClr>
+                  </a:lnRef>
+                  <a:fillRef idx="1">
+                    <a:schemeClr val="accent1"/>
+                  </a:fillRef>
+                  <a:effectRef idx="0">
+                    <a:schemeClr val="accent1"/>
+                  </a:effectRef>
+                  <a:fontRef idx="minor">
+                    <a:schemeClr val="lt1"/>
+                  </a:fontRef>
+                </p:style>
+                <p:txBody>
+                  <a:bodyPr rtlCol="0" anchor="ctr"/>
+                  <a:lstStyle/>
+                  <a:p>
+                    <a:pPr algn="ctr"/>
+                    <a:endParaRPr lang="en-US" dirty="0">
+                      <a:latin typeface="Times New Roman" panose="02020603050405020304" pitchFamily="18" charset="0"/>
+                      <a:cs typeface="Times New Roman" panose="02020603050405020304" pitchFamily="18" charset="0"/>
+                    </a:endParaRPr>
+                  </a:p>
+                </p:txBody>
+              </p:sp>
+              <p:sp>
+                <p:nvSpPr>
+                  <p:cNvPr id="142" name="Rectangle: Top Corners Rounded 141">
+                    <a:extLst>
+                      <a:ext uri="{FF2B5EF4-FFF2-40B4-BE49-F238E27FC236}">
+                        <a16:creationId xmlns:a16="http://schemas.microsoft.com/office/drawing/2014/main" id="{BFBE2C83-3F94-BEC1-509A-666E953B5AE3}"/>
+                      </a:ext>
+                    </a:extLst>
+                  </p:cNvPr>
+                  <p:cNvSpPr/>
+                  <p:nvPr/>
+                </p:nvSpPr>
+                <p:spPr>
+                  <a:xfrm flipV="1">
+                    <a:off x="4022672" y="2504431"/>
+                    <a:ext cx="2238468" cy="307778"/>
+                  </a:xfrm>
+                  <a:prstGeom prst="round2SameRect">
+                    <a:avLst>
+                      <a:gd name="adj1" fmla="val 28674"/>
+                      <a:gd name="adj2" fmla="val 0"/>
+                    </a:avLst>
+                  </a:prstGeom>
+                  <a:solidFill>
+                    <a:schemeClr val="bg1">
+                      <a:lumMod val="95000"/>
+                    </a:schemeClr>
+                  </a:solidFill>
+                  <a:ln>
+                    <a:noFill/>
+                  </a:ln>
+                </p:spPr>
+                <p:style>
+                  <a:lnRef idx="2">
+                    <a:schemeClr val="accent1">
+                      <a:shade val="15000"/>
+                    </a:schemeClr>
+                  </a:lnRef>
+                  <a:fillRef idx="1">
+                    <a:schemeClr val="accent1"/>
+                  </a:fillRef>
+                  <a:effectRef idx="0">
+                    <a:schemeClr val="accent1"/>
+                  </a:effectRef>
+                  <a:fontRef idx="minor">
+                    <a:schemeClr val="lt1"/>
+                  </a:fontRef>
+                </p:style>
+                <p:txBody>
+                  <a:bodyPr rtlCol="0" anchor="ctr"/>
+                  <a:lstStyle/>
+                  <a:p>
+                    <a:pPr algn="ctr"/>
+                    <a:endParaRPr lang="en-US"/>
+                  </a:p>
+                </p:txBody>
+              </p:sp>
+              <p:sp>
+                <p:nvSpPr>
+                  <p:cNvPr id="143" name="Rectangle: Rounded Corners 142">
+                    <a:extLst>
+                      <a:ext uri="{FF2B5EF4-FFF2-40B4-BE49-F238E27FC236}">
+                        <a16:creationId xmlns:a16="http://schemas.microsoft.com/office/drawing/2014/main" id="{BE57BFF5-2C67-F628-A5CE-99608F010250}"/>
+                      </a:ext>
+                    </a:extLst>
+                  </p:cNvPr>
+                  <p:cNvSpPr/>
+                  <p:nvPr/>
+                </p:nvSpPr>
+                <p:spPr>
+                  <a:xfrm>
+                    <a:off x="4021891" y="2194878"/>
+                    <a:ext cx="2239249" cy="618689"/>
+                  </a:xfrm>
+                  <a:prstGeom prst="roundRect">
+                    <a:avLst>
+                      <a:gd name="adj" fmla="val 12974"/>
+                    </a:avLst>
+                  </a:prstGeom>
+                  <a:noFill/>
+                  <a:ln w="12700">
+                    <a:solidFill>
+                      <a:schemeClr val="tx1"/>
+                    </a:solidFill>
+                  </a:ln>
+                </p:spPr>
+                <p:style>
+                  <a:lnRef idx="2">
+                    <a:schemeClr val="accent1">
+                      <a:shade val="15000"/>
+                    </a:schemeClr>
+                  </a:lnRef>
+                  <a:fillRef idx="1">
+                    <a:schemeClr val="accent1"/>
+                  </a:fillRef>
+                  <a:effectRef idx="0">
+                    <a:schemeClr val="accent1"/>
+                  </a:effectRef>
+                  <a:fontRef idx="minor">
+                    <a:schemeClr val="lt1"/>
+                  </a:fontRef>
+                </p:style>
+                <p:txBody>
+                  <a:bodyPr rtlCol="0" anchor="ctr"/>
+                  <a:lstStyle/>
+                  <a:p>
+                    <a:pPr algn="ctr"/>
+                    <a:endParaRPr lang="en-US" dirty="0">
+                      <a:latin typeface="Times New Roman" panose="02020603050405020304" pitchFamily="18" charset="0"/>
+                      <a:cs typeface="Times New Roman" panose="02020603050405020304" pitchFamily="18" charset="0"/>
+                    </a:endParaRPr>
+                  </a:p>
+                </p:txBody>
+              </p:sp>
+            </p:grpSp>
+            <p:sp>
+              <p:nvSpPr>
+                <p:cNvPr id="137" name="TextBox 136">
+                  <a:extLst>
+                    <a:ext uri="{FF2B5EF4-FFF2-40B4-BE49-F238E27FC236}">
+                      <a16:creationId xmlns:a16="http://schemas.microsoft.com/office/drawing/2014/main" id="{8E4086BF-90AE-16D0-B4BD-62589545315F}"/>
+                    </a:ext>
+                  </a:extLst>
+                </p:cNvPr>
+                <p:cNvSpPr txBox="1"/>
+                <p:nvPr/>
+              </p:nvSpPr>
+              <p:spPr>
+                <a:xfrm>
+                  <a:off x="6808092" y="5161875"/>
+                  <a:ext cx="2239250" cy="307777"/>
+                </a:xfrm>
+                <a:prstGeom prst="rect">
+                  <a:avLst/>
+                </a:prstGeom>
+                <a:noFill/>
+              </p:spPr>
+              <p:txBody>
+                <a:bodyPr wrap="square">
+                  <a:spAutoFit/>
+                </a:bodyPr>
+                <a:lstStyle/>
+                <a:p>
+                  <a:pPr algn="ctr"/>
+                  <a:r>
+                    <a:rPr lang="en-US" sz="1400" dirty="0">
+                      <a:solidFill>
+                        <a:schemeClr val="tx1"/>
+                      </a:solidFill>
+                      <a:latin typeface="Times New Roman" panose="02020603050405020304" pitchFamily="18" charset="0"/>
+                      <a:cs typeface="Times New Roman" panose="02020603050405020304" pitchFamily="18" charset="0"/>
+                    </a:rPr>
+                    <a:t>O-RAN SC : Near-RT RIC</a:t>
+                  </a:r>
+                  <a:endParaRPr lang="en-US" sz="1400" dirty="0">
+                    <a:latin typeface="Times New Roman" panose="02020603050405020304" pitchFamily="18" charset="0"/>
+                    <a:cs typeface="Times New Roman" panose="02020603050405020304" pitchFamily="18" charset="0"/>
+                  </a:endParaRPr>
+                </a:p>
+              </p:txBody>
+            </p:sp>
+            <p:sp>
+              <p:nvSpPr>
+                <p:cNvPr id="139" name="TextBox 138">
+                  <a:extLst>
+                    <a:ext uri="{FF2B5EF4-FFF2-40B4-BE49-F238E27FC236}">
+                      <a16:creationId xmlns:a16="http://schemas.microsoft.com/office/drawing/2014/main" id="{EBFB5C70-1560-E4FD-6B36-6B68117B7EA6}"/>
+                    </a:ext>
+                  </a:extLst>
+                </p:cNvPr>
+                <p:cNvSpPr txBox="1"/>
+                <p:nvPr/>
+              </p:nvSpPr>
+              <p:spPr>
+                <a:xfrm>
+                  <a:off x="6808092" y="5464822"/>
+                  <a:ext cx="2239250" cy="307777"/>
+                </a:xfrm>
+                <a:prstGeom prst="rect">
+                  <a:avLst/>
+                </a:prstGeom>
+                <a:noFill/>
+              </p:spPr>
+              <p:txBody>
+                <a:bodyPr wrap="square">
+                  <a:spAutoFit/>
+                </a:bodyPr>
+                <a:lstStyle/>
+                <a:p>
+                  <a:pPr algn="ctr"/>
+                  <a:r>
+                    <a:rPr lang="en-US" sz="1400" dirty="0">
+                      <a:solidFill>
+                        <a:schemeClr val="tx1"/>
+                      </a:solidFill>
+                      <a:latin typeface="Times New Roman" panose="02020603050405020304" pitchFamily="18" charset="0"/>
+                      <a:cs typeface="Times New Roman" panose="02020603050405020304" pitchFamily="18" charset="0"/>
+                    </a:rPr>
+                    <a:t>Mosaic5G : FlexRIC</a:t>
+                  </a:r>
+                  <a:endParaRPr lang="en-US" sz="1400" dirty="0">
+                    <a:latin typeface="Times New Roman" panose="02020603050405020304" pitchFamily="18" charset="0"/>
+                    <a:cs typeface="Times New Roman" panose="02020603050405020304" pitchFamily="18" charset="0"/>
+                  </a:endParaRPr>
+                </a:p>
+              </p:txBody>
+            </p:sp>
+          </p:grpSp>
+          <p:sp>
+            <p:nvSpPr>
+              <p:cNvPr id="283" name="TextBox 282">
+                <a:extLst>
+                  <a:ext uri="{FF2B5EF4-FFF2-40B4-BE49-F238E27FC236}">
+                    <a16:creationId xmlns:a16="http://schemas.microsoft.com/office/drawing/2014/main" id="{86324A6E-ABC2-1C25-09F7-5897B7BD58DD}"/>
+                  </a:ext>
+                </a:extLst>
+              </p:cNvPr>
+              <p:cNvSpPr txBox="1"/>
+              <p:nvPr/>
+            </p:nvSpPr>
+            <p:spPr>
+              <a:xfrm>
+                <a:off x="6696060" y="5769045"/>
+                <a:ext cx="2239249" cy="307777"/>
+              </a:xfrm>
+              <a:prstGeom prst="rect">
+                <a:avLst/>
+              </a:prstGeom>
+              <a:noFill/>
+            </p:spPr>
+            <p:txBody>
+              <a:bodyPr wrap="square">
+                <a:spAutoFit/>
+              </a:bodyPr>
+              <a:lstStyle/>
+              <a:p>
+                <a:pPr algn="ctr"/>
+                <a:r>
+                  <a:rPr lang="en-US" sz="1400" b="1" dirty="0">
+                    <a:solidFill>
+                      <a:schemeClr val="tx1"/>
+                    </a:solidFill>
+                    <a:latin typeface="Times New Roman" panose="02020603050405020304" pitchFamily="18" charset="0"/>
+                    <a:cs typeface="Times New Roman" panose="02020603050405020304" pitchFamily="18" charset="0"/>
+                  </a:rPr>
+                  <a:t>Near-RT RIC</a:t>
+                </a:r>
+                <a:endParaRPr lang="en-US" sz="1400" b="1" dirty="0">
+                  <a:latin typeface="Times New Roman" panose="02020603050405020304" pitchFamily="18" charset="0"/>
+                  <a:cs typeface="Times New Roman" panose="02020603050405020304" pitchFamily="18" charset="0"/>
+                </a:endParaRPr>
+              </a:p>
+            </p:txBody>
+          </p:sp>
+        </p:grpSp>
+        <p:grpSp>
+          <p:nvGrpSpPr>
+            <p:cNvPr id="335" name="Group 334">
+              <a:extLst>
+                <a:ext uri="{FF2B5EF4-FFF2-40B4-BE49-F238E27FC236}">
+                  <a16:creationId xmlns:a16="http://schemas.microsoft.com/office/drawing/2014/main" id="{C7A28311-B01E-C743-5717-5D14FED17C39}"/>
+                </a:ext>
+              </a:extLst>
+            </p:cNvPr>
+            <p:cNvGrpSpPr/>
+            <p:nvPr/>
+          </p:nvGrpSpPr>
+          <p:grpSpPr>
+            <a:xfrm>
+              <a:off x="9376910" y="3369385"/>
+              <a:ext cx="2302213" cy="647296"/>
+              <a:chOff x="9110915" y="4521647"/>
+              <a:chExt cx="2302213" cy="647296"/>
+            </a:xfrm>
+          </p:grpSpPr>
+          <p:sp>
+            <p:nvSpPr>
+              <p:cNvPr id="314" name="Rectangle: Rounded Corners 313">
+                <a:extLst>
+                  <a:ext uri="{FF2B5EF4-FFF2-40B4-BE49-F238E27FC236}">
+                    <a16:creationId xmlns:a16="http://schemas.microsoft.com/office/drawing/2014/main" id="{C9184302-A9D9-791B-1672-1678F45A7E55}"/>
+                  </a:ext>
+                </a:extLst>
+              </p:cNvPr>
+              <p:cNvSpPr/>
+              <p:nvPr/>
+            </p:nvSpPr>
+            <p:spPr>
+              <a:xfrm>
+                <a:off x="9110917" y="4521647"/>
+                <a:ext cx="2239249" cy="333931"/>
+              </a:xfrm>
+              <a:prstGeom prst="roundRect">
+                <a:avLst>
+                  <a:gd name="adj" fmla="val 28947"/>
+                </a:avLst>
+              </a:prstGeom>
+              <a:solidFill>
+                <a:schemeClr val="bg1">
+                  <a:lumMod val="85000"/>
+                </a:schemeClr>
+              </a:solidFill>
+              <a:ln w="12700">
+                <a:solidFill>
+                  <a:schemeClr val="tx1"/>
+                </a:solidFill>
+              </a:ln>
+            </p:spPr>
+            <p:style>
+              <a:lnRef idx="2">
+                <a:schemeClr val="accent1">
+                  <a:shade val="15000"/>
+                </a:schemeClr>
+              </a:lnRef>
+              <a:fillRef idx="1">
+                <a:schemeClr val="accent1"/>
+              </a:fillRef>
+              <a:effectRef idx="0">
+                <a:schemeClr val="accent1"/>
+              </a:effectRef>
+              <a:fontRef idx="minor">
+                <a:schemeClr val="lt1"/>
+              </a:fontRef>
+            </p:style>
+            <p:txBody>
+              <a:bodyPr rtlCol="0" anchor="ctr"/>
+              <a:lstStyle/>
+              <a:p>
+                <a:pPr algn="ctr"/>
+                <a:endParaRPr lang="en-US" sz="1400" dirty="0">
+                  <a:solidFill>
+                    <a:schemeClr val="tx1"/>
+                  </a:solidFill>
+                  <a:latin typeface="Times New Roman" panose="02020603050405020304" pitchFamily="18" charset="0"/>
+                  <a:cs typeface="Times New Roman" panose="02020603050405020304" pitchFamily="18" charset="0"/>
+                </a:endParaRPr>
+              </a:p>
+            </p:txBody>
+          </p:sp>
+          <p:sp>
+            <p:nvSpPr>
+              <p:cNvPr id="315" name="TextBox 314">
+                <a:extLst>
+                  <a:ext uri="{FF2B5EF4-FFF2-40B4-BE49-F238E27FC236}">
+                    <a16:creationId xmlns:a16="http://schemas.microsoft.com/office/drawing/2014/main" id="{9BDE51E9-FC26-93B1-D16F-98B8FB9FEE2F}"/>
+                  </a:ext>
+                </a:extLst>
+              </p:cNvPr>
+              <p:cNvSpPr txBox="1"/>
+              <p:nvPr/>
+            </p:nvSpPr>
+            <p:spPr>
+              <a:xfrm>
+                <a:off x="9110915" y="4522182"/>
+                <a:ext cx="2238468" cy="307777"/>
+              </a:xfrm>
+              <a:prstGeom prst="rect">
+                <a:avLst/>
+              </a:prstGeom>
+              <a:noFill/>
+            </p:spPr>
+            <p:txBody>
+              <a:bodyPr wrap="square">
+                <a:spAutoFit/>
+              </a:bodyPr>
+              <a:lstStyle/>
+              <a:p>
+                <a:pPr algn="ctr"/>
+                <a:r>
+                  <a:rPr lang="en-US" sz="1400" dirty="0">
+                    <a:solidFill>
+                      <a:schemeClr val="tx1"/>
+                    </a:solidFill>
+                    <a:latin typeface="Times New Roman" panose="02020603050405020304" pitchFamily="18" charset="0"/>
+                    <a:cs typeface="Times New Roman" panose="02020603050405020304" pitchFamily="18" charset="0"/>
+                  </a:rPr>
+                  <a:t>O-RAN SC : Non-RT RIC</a:t>
+                </a:r>
+                <a:endParaRPr lang="en-US" sz="1400" dirty="0">
+                  <a:latin typeface="Times New Roman" panose="02020603050405020304" pitchFamily="18" charset="0"/>
+                  <a:cs typeface="Times New Roman" panose="02020603050405020304" pitchFamily="18" charset="0"/>
+                </a:endParaRPr>
+              </a:p>
+            </p:txBody>
+          </p:sp>
+          <p:sp>
+            <p:nvSpPr>
+              <p:cNvPr id="316" name="TextBox 315">
+                <a:extLst>
+                  <a:ext uri="{FF2B5EF4-FFF2-40B4-BE49-F238E27FC236}">
+                    <a16:creationId xmlns:a16="http://schemas.microsoft.com/office/drawing/2014/main" id="{C18DB793-99BB-9141-9857-0496732E9F2F}"/>
+                  </a:ext>
+                </a:extLst>
+              </p:cNvPr>
+              <p:cNvSpPr txBox="1"/>
+              <p:nvPr/>
+            </p:nvSpPr>
+            <p:spPr>
+              <a:xfrm>
+                <a:off x="9173879" y="4861166"/>
+                <a:ext cx="2239249" cy="307777"/>
+              </a:xfrm>
+              <a:prstGeom prst="rect">
+                <a:avLst/>
+              </a:prstGeom>
+              <a:noFill/>
+            </p:spPr>
+            <p:txBody>
+              <a:bodyPr wrap="square">
+                <a:spAutoFit/>
+              </a:bodyPr>
+              <a:lstStyle/>
+              <a:p>
+                <a:pPr algn="ctr"/>
+                <a:r>
+                  <a:rPr lang="en-US" sz="1400" b="1" dirty="0">
+                    <a:solidFill>
+                      <a:schemeClr val="tx1"/>
+                    </a:solidFill>
+                    <a:latin typeface="Times New Roman" panose="02020603050405020304" pitchFamily="18" charset="0"/>
+                    <a:cs typeface="Times New Roman" panose="02020603050405020304" pitchFamily="18" charset="0"/>
+                  </a:rPr>
+                  <a:t>Non-RT RIC</a:t>
+                </a:r>
+                <a:endParaRPr lang="en-US" sz="1400" b="1" dirty="0">
+                  <a:latin typeface="Times New Roman" panose="02020603050405020304" pitchFamily="18" charset="0"/>
+                  <a:cs typeface="Times New Roman" panose="02020603050405020304" pitchFamily="18" charset="0"/>
+                </a:endParaRPr>
+              </a:p>
+            </p:txBody>
+          </p:sp>
+        </p:grpSp>
+        <p:grpSp>
+          <p:nvGrpSpPr>
+            <p:cNvPr id="10" name="Group 9">
+              <a:extLst>
+                <a:ext uri="{FF2B5EF4-FFF2-40B4-BE49-F238E27FC236}">
+                  <a16:creationId xmlns:a16="http://schemas.microsoft.com/office/drawing/2014/main" id="{3F4BAE37-81CB-F3FB-EAED-6C481A15D7A4}"/>
+                </a:ext>
+              </a:extLst>
+            </p:cNvPr>
+            <p:cNvGrpSpPr/>
+            <p:nvPr/>
+          </p:nvGrpSpPr>
+          <p:grpSpPr>
+            <a:xfrm>
+              <a:off x="8873989" y="2167447"/>
+              <a:ext cx="2860204" cy="738664"/>
+              <a:chOff x="8873989" y="2167447"/>
+              <a:chExt cx="2860204" cy="738664"/>
+            </a:xfrm>
+          </p:grpSpPr>
+          <p:sp>
+            <p:nvSpPr>
+              <p:cNvPr id="4" name="Rectangle 3">
+                <a:extLst>
+                  <a:ext uri="{FF2B5EF4-FFF2-40B4-BE49-F238E27FC236}">
+                    <a16:creationId xmlns:a16="http://schemas.microsoft.com/office/drawing/2014/main" id="{240F11AF-0E17-5252-2864-12FAED76A826}"/>
+                  </a:ext>
+                </a:extLst>
+              </p:cNvPr>
+              <p:cNvSpPr/>
+              <p:nvPr/>
+            </p:nvSpPr>
+            <p:spPr>
+              <a:xfrm>
+                <a:off x="8873989" y="2187920"/>
+                <a:ext cx="2787151" cy="705139"/>
+              </a:xfrm>
+              <a:prstGeom prst="rect">
+                <a:avLst/>
+              </a:prstGeom>
+              <a:solidFill>
+                <a:schemeClr val="bg1"/>
+              </a:solidFill>
+              <a:ln w="12700">
+                <a:solidFill>
+                  <a:schemeClr val="tx1"/>
+                </a:solidFill>
+              </a:ln>
+            </p:spPr>
+            <p:style>
+              <a:lnRef idx="2">
+                <a:schemeClr val="accent1">
+                  <a:shade val="15000"/>
+                </a:schemeClr>
+              </a:lnRef>
+              <a:fillRef idx="1">
+                <a:schemeClr val="accent1"/>
+              </a:fillRef>
+              <a:effectRef idx="0">
+                <a:schemeClr val="accent1"/>
+              </a:effectRef>
+              <a:fontRef idx="minor">
+                <a:schemeClr val="lt1"/>
+              </a:fontRef>
+            </p:style>
+            <p:txBody>
+              <a:bodyPr rtlCol="0" anchor="ctr"/>
+              <a:lstStyle/>
+              <a:p>
+                <a:pPr algn="ctr"/>
+                <a:endParaRPr lang="en-US"/>
+              </a:p>
+            </p:txBody>
+          </p:sp>
+          <p:cxnSp>
+            <p:nvCxnSpPr>
+              <p:cNvPr id="5" name="Straight Connector 4">
+                <a:extLst>
+                  <a:ext uri="{FF2B5EF4-FFF2-40B4-BE49-F238E27FC236}">
+                    <a16:creationId xmlns:a16="http://schemas.microsoft.com/office/drawing/2014/main" id="{6EB7CE28-570D-A649-CDDD-D2D4267E56C2}"/>
+                  </a:ext>
+                </a:extLst>
+              </p:cNvPr>
+              <p:cNvCxnSpPr>
+                <a:cxnSpLocks/>
+              </p:cNvCxnSpPr>
+              <p:nvPr/>
+            </p:nvCxnSpPr>
+            <p:spPr>
+              <a:xfrm>
+                <a:off x="8967214" y="2323726"/>
+                <a:ext cx="210474" cy="0"/>
+              </a:xfrm>
+              <a:prstGeom prst="line">
+                <a:avLst/>
+              </a:prstGeom>
+              <a:ln w="12700">
+                <a:solidFill>
+                  <a:schemeClr val="tx1"/>
+                </a:solidFill>
+              </a:ln>
+            </p:spPr>
+            <p:style>
+              <a:lnRef idx="2">
+                <a:schemeClr val="dk1"/>
+              </a:lnRef>
+              <a:fillRef idx="0">
+                <a:schemeClr val="dk1"/>
+              </a:fillRef>
+              <a:effectRef idx="1">
+                <a:schemeClr val="dk1"/>
+              </a:effectRef>
+              <a:fontRef idx="minor">
+                <a:schemeClr val="tx1"/>
+              </a:fontRef>
+            </p:style>
+          </p:cxnSp>
+          <p:sp>
+            <p:nvSpPr>
+              <p:cNvPr id="6" name="TextBox 5">
+                <a:extLst>
+                  <a:ext uri="{FF2B5EF4-FFF2-40B4-BE49-F238E27FC236}">
+                    <a16:creationId xmlns:a16="http://schemas.microsoft.com/office/drawing/2014/main" id="{64D782A1-F8AE-355C-132E-E89499CD1C8D}"/>
+                  </a:ext>
+                </a:extLst>
+              </p:cNvPr>
+              <p:cNvSpPr txBox="1"/>
+              <p:nvPr/>
+            </p:nvSpPr>
+            <p:spPr>
+              <a:xfrm>
+                <a:off x="9147085" y="2167447"/>
+                <a:ext cx="2587108" cy="738664"/>
+              </a:xfrm>
+              <a:prstGeom prst="rect">
+                <a:avLst/>
+              </a:prstGeom>
+              <a:noFill/>
+            </p:spPr>
+            <p:txBody>
+              <a:bodyPr wrap="square">
+                <a:spAutoFit/>
+              </a:bodyPr>
+              <a:lstStyle/>
+              <a:p>
+                <a:r>
+                  <a:rPr lang="en-US" sz="1400" dirty="0">
+                    <a:latin typeface="Times New Roman" panose="02020603050405020304" pitchFamily="18" charset="0"/>
+                    <a:cs typeface="Times New Roman" panose="02020603050405020304" pitchFamily="18" charset="0"/>
+                  </a:rPr>
+                  <a:t>Supported by default installation</a:t>
+                </a:r>
+                <a:br>
+                  <a:rPr lang="en-US" sz="1400" dirty="0">
+                    <a:latin typeface="Times New Roman" panose="02020603050405020304" pitchFamily="18" charset="0"/>
+                    <a:cs typeface="Times New Roman" panose="02020603050405020304" pitchFamily="18" charset="0"/>
+                  </a:rPr>
+                </a:br>
+                <a:r>
+                  <a:rPr lang="en-US" sz="1400" dirty="0">
+                    <a:latin typeface="Times New Roman" panose="02020603050405020304" pitchFamily="18" charset="0"/>
+                    <a:cs typeface="Times New Roman" panose="02020603050405020304" pitchFamily="18" charset="0"/>
+                  </a:rPr>
+                  <a:t>Supported after adjusting configs</a:t>
+                </a:r>
+              </a:p>
+              <a:p>
+                <a:r>
+                  <a:rPr lang="en-US" sz="1400" dirty="0">
+                    <a:latin typeface="Times New Roman" panose="02020603050405020304" pitchFamily="18" charset="0"/>
+                    <a:cs typeface="Times New Roman" panose="02020603050405020304" pitchFamily="18" charset="0"/>
+                  </a:rPr>
+                  <a:t>Not supported</a:t>
+                </a:r>
+              </a:p>
+            </p:txBody>
+          </p:sp>
+          <p:cxnSp>
+            <p:nvCxnSpPr>
+              <p:cNvPr id="7" name="Straight Connector 6">
+                <a:extLst>
+                  <a:ext uri="{FF2B5EF4-FFF2-40B4-BE49-F238E27FC236}">
+                    <a16:creationId xmlns:a16="http://schemas.microsoft.com/office/drawing/2014/main" id="{E90BE35D-3534-C8E0-8BAC-13AA49C1B7B8}"/>
+                  </a:ext>
+                </a:extLst>
+              </p:cNvPr>
+              <p:cNvCxnSpPr>
+                <a:cxnSpLocks/>
+              </p:cNvCxnSpPr>
+              <p:nvPr/>
+            </p:nvCxnSpPr>
+            <p:spPr>
+              <a:xfrm>
+                <a:off x="8967214" y="2541315"/>
+                <a:ext cx="210474" cy="0"/>
+              </a:xfrm>
+              <a:prstGeom prst="line">
+                <a:avLst/>
+              </a:prstGeom>
+              <a:ln w="12700">
+                <a:solidFill>
+                  <a:schemeClr val="tx1"/>
+                </a:solidFill>
+                <a:prstDash val="sysDot"/>
+              </a:ln>
+            </p:spPr>
+            <p:style>
+              <a:lnRef idx="2">
+                <a:schemeClr val="dk1"/>
+              </a:lnRef>
+              <a:fillRef idx="0">
+                <a:schemeClr val="dk1"/>
+              </a:fillRef>
+              <a:effectRef idx="1">
+                <a:schemeClr val="dk1"/>
+              </a:effectRef>
+              <a:fontRef idx="minor">
+                <a:schemeClr val="tx1"/>
+              </a:fontRef>
+            </p:style>
+          </p:cxnSp>
+          <p:cxnSp>
+            <p:nvCxnSpPr>
+              <p:cNvPr id="8" name="Straight Connector 7">
+                <a:extLst>
+                  <a:ext uri="{FF2B5EF4-FFF2-40B4-BE49-F238E27FC236}">
+                    <a16:creationId xmlns:a16="http://schemas.microsoft.com/office/drawing/2014/main" id="{9C57C3EC-B1EB-B8F3-36AA-A15E64D94D01}"/>
+                  </a:ext>
+                </a:extLst>
+              </p:cNvPr>
+              <p:cNvCxnSpPr>
+                <a:cxnSpLocks/>
+              </p:cNvCxnSpPr>
+              <p:nvPr/>
+            </p:nvCxnSpPr>
+            <p:spPr>
+              <a:xfrm>
+                <a:off x="8967214" y="2758903"/>
+                <a:ext cx="210474" cy="0"/>
+              </a:xfrm>
+              <a:prstGeom prst="line">
+                <a:avLst/>
+              </a:prstGeom>
+              <a:ln w="12700">
+                <a:solidFill>
+                  <a:srgbClr val="FF0000"/>
+                </a:solidFill>
+                <a:prstDash val="sysDot"/>
+              </a:ln>
+            </p:spPr>
+            <p:style>
+              <a:lnRef idx="2">
+                <a:schemeClr val="dk1"/>
+              </a:lnRef>
+              <a:fillRef idx="0">
+                <a:schemeClr val="dk1"/>
+              </a:fillRef>
+              <a:effectRef idx="1">
+                <a:schemeClr val="dk1"/>
+              </a:effectRef>
+              <a:fontRef idx="minor">
+                <a:schemeClr val="tx1"/>
+              </a:fontRef>
+            </p:style>
+          </p:cxnSp>
+        </p:grpSp>
+      </p:grpSp>
+    </p:spTree>
+    <p:extLst>
+      <p:ext uri="{BB962C8B-B14F-4D97-AF65-F5344CB8AC3E}">
+        <p14:creationId xmlns:p14="http://schemas.microsoft.com/office/powerpoint/2010/main" val="1944686828"/>
+      </p:ext>
+    </p:extLst>
+  </p:cSld>
+  <p:clrMapOvr>
+    <a:masterClrMapping/>
+  </p:clrMapOvr>
+</p:sld>
+</file>
+
+<file path=ppt/slides/slide4.xml><?xml version="1.0" encoding="utf-8"?>
+<p:sld xmlns:a="http://schemas.openxmlformats.org/drawingml/2006/main" xmlns:r="http://schemas.openxmlformats.org/officeDocument/2006/relationships" xmlns:p="http://schemas.openxmlformats.org/presentationml/2006/main">
+  <p:cSld>
+    <p:spTree>
+      <p:nvGrpSpPr>
+        <p:cNvPr id="1" name=""/>
+        <p:cNvGrpSpPr/>
+        <p:nvPr/>
+      </p:nvGrpSpPr>
+      <p:grpSpPr>
+        <a:xfrm>
+          <a:off x="0" y="0"/>
+          <a:ext cx="0" cy="0"/>
+          <a:chOff x="0" y="0"/>
+          <a:chExt cx="0" cy="0"/>
+        </a:xfrm>
+      </p:grpSpPr>
+      <p:sp>
+        <p:nvSpPr>
+          <p:cNvPr id="198" name="Rectangle 197">
+            <a:extLst>
+              <a:ext uri="{FF2B5EF4-FFF2-40B4-BE49-F238E27FC236}">
+                <a16:creationId xmlns:a16="http://schemas.microsoft.com/office/drawing/2014/main" id="{48F3AFCA-C6E8-6EAA-EE14-23BCAADE730F}"/>
+              </a:ext>
+            </a:extLst>
+          </p:cNvPr>
+          <p:cNvSpPr>
+            <a:spLocks noGrp="1" noRot="1" noMove="1" noResize="1" noEditPoints="1" noAdjustHandles="1" noChangeArrowheads="1" noChangeShapeType="1"/>
+          </p:cNvSpPr>
+          <p:nvPr/>
+        </p:nvSpPr>
+        <p:spPr>
+          <a:xfrm>
+            <a:off x="0" y="0"/>
+            <a:ext cx="12192000" cy="6858000"/>
+          </a:xfrm>
+          <a:prstGeom prst="rect">
+            <a:avLst/>
+          </a:prstGeom>
+          <a:solidFill>
+            <a:srgbClr val="0D1117"/>
+          </a:solidFill>
+        </p:spPr>
+        <p:style>
+          <a:lnRef idx="2">
+            <a:schemeClr val="dk1">
+              <a:shade val="15000"/>
+            </a:schemeClr>
+          </a:lnRef>
+          <a:fillRef idx="1">
+            <a:schemeClr val="dk1"/>
+          </a:fillRef>
+          <a:effectRef idx="0">
+            <a:schemeClr val="dk1"/>
+          </a:effectRef>
+          <a:fontRef idx="minor">
+            <a:schemeClr val="lt1"/>
+          </a:fontRef>
+        </p:style>
+        <p:txBody>
+          <a:bodyPr rtlCol="0" anchor="ctr"/>
+          <a:lstStyle/>
+          <a:p>
+            <a:pPr algn="ctr"/>
+            <a:endParaRPr lang="en-US">
+              <a:solidFill>
+                <a:schemeClr val="bg1"/>
+              </a:solidFill>
+            </a:endParaRPr>
+          </a:p>
+        </p:txBody>
+      </p:sp>
+      <p:grpSp>
+        <p:nvGrpSpPr>
+          <p:cNvPr id="5" name="Group 4">
+            <a:extLst>
+              <a:ext uri="{FF2B5EF4-FFF2-40B4-BE49-F238E27FC236}">
+                <a16:creationId xmlns:a16="http://schemas.microsoft.com/office/drawing/2014/main" id="{931B99C2-A115-399B-B00F-E5C8AE3B5617}"/>
+              </a:ext>
+            </a:extLst>
+          </p:cNvPr>
+          <p:cNvGrpSpPr/>
+          <p:nvPr/>
+        </p:nvGrpSpPr>
+        <p:grpSpPr>
+          <a:xfrm>
+            <a:off x="575839" y="2069432"/>
+            <a:ext cx="11199066" cy="1947249"/>
+            <a:chOff x="575839" y="2069432"/>
+            <a:chExt cx="11199066" cy="1947249"/>
+          </a:xfrm>
+        </p:grpSpPr>
+        <p:sp>
+          <p:nvSpPr>
+            <p:cNvPr id="6" name="Rectangle: Rounded Corners 5">
+              <a:extLst>
+                <a:ext uri="{FF2B5EF4-FFF2-40B4-BE49-F238E27FC236}">
+                  <a16:creationId xmlns:a16="http://schemas.microsoft.com/office/drawing/2014/main" id="{782EB370-06F7-A3C6-2D9D-767AE910B3C2}"/>
+                </a:ext>
+              </a:extLst>
+            </p:cNvPr>
+            <p:cNvSpPr/>
+            <p:nvPr/>
+          </p:nvSpPr>
+          <p:spPr>
+            <a:xfrm>
+              <a:off x="575839" y="2069432"/>
+              <a:ext cx="11199066" cy="1945979"/>
+            </a:xfrm>
+            <a:prstGeom prst="roundRect">
+              <a:avLst>
+                <a:gd name="adj" fmla="val 3896"/>
+              </a:avLst>
+            </a:prstGeom>
+            <a:solidFill>
+              <a:srgbClr val="0D1117"/>
+            </a:solidFill>
+            <a:ln w="12700">
+              <a:solidFill>
+                <a:schemeClr val="bg1"/>
+              </a:solidFill>
+            </a:ln>
+          </p:spPr>
+          <p:style>
+            <a:lnRef idx="2">
+              <a:schemeClr val="accent1">
+                <a:shade val="15000"/>
+              </a:schemeClr>
+            </a:lnRef>
+            <a:fillRef idx="1">
+              <a:schemeClr val="accent1"/>
+            </a:fillRef>
+            <a:effectRef idx="0">
+              <a:schemeClr val="accent1"/>
+            </a:effectRef>
+            <a:fontRef idx="minor">
+              <a:schemeClr val="lt1"/>
+            </a:fontRef>
+          </p:style>
+          <p:txBody>
+            <a:bodyPr rtlCol="0" anchor="ctr"/>
+            <a:lstStyle/>
+            <a:p>
+              <a:pPr algn="ctr"/>
+              <a:endParaRPr lang="en-US" dirty="0">
+                <a:latin typeface="Times New Roman" panose="02020603050405020304" pitchFamily="18" charset="0"/>
+                <a:cs typeface="Times New Roman" panose="02020603050405020304" pitchFamily="18" charset="0"/>
+              </a:endParaRPr>
+            </a:p>
+          </p:txBody>
+        </p:sp>
+        <p:grpSp>
+          <p:nvGrpSpPr>
+            <p:cNvPr id="7" name="Group 6">
+              <a:extLst>
+                <a:ext uri="{FF2B5EF4-FFF2-40B4-BE49-F238E27FC236}">
+                  <a16:creationId xmlns:a16="http://schemas.microsoft.com/office/drawing/2014/main" id="{7118692E-D854-304E-EB0C-33857FA0FA39}"/>
+                </a:ext>
+              </a:extLst>
+            </p:cNvPr>
+            <p:cNvGrpSpPr/>
+            <p:nvPr/>
+          </p:nvGrpSpPr>
+          <p:grpSpPr>
+            <a:xfrm>
+              <a:off x="690637" y="2167447"/>
+              <a:ext cx="11043556" cy="1849234"/>
+              <a:chOff x="778869" y="4228858"/>
+              <a:chExt cx="11043556" cy="1849234"/>
+            </a:xfrm>
+          </p:grpSpPr>
+          <p:cxnSp>
+            <p:nvCxnSpPr>
+              <p:cNvPr id="8" name="Straight Connector 7">
+                <a:extLst>
+                  <a:ext uri="{FF2B5EF4-FFF2-40B4-BE49-F238E27FC236}">
+                    <a16:creationId xmlns:a16="http://schemas.microsoft.com/office/drawing/2014/main" id="{9E7BD0CD-0AD8-F766-F38F-1FB50716D247}"/>
+                  </a:ext>
+                </a:extLst>
+              </p:cNvPr>
+              <p:cNvCxnSpPr>
+                <a:cxnSpLocks/>
+                <a:endCxn id="35" idx="1"/>
+              </p:cNvCxnSpPr>
+              <p:nvPr/>
+            </p:nvCxnSpPr>
+            <p:spPr>
+              <a:xfrm>
+                <a:off x="6032033" y="5177937"/>
+                <a:ext cx="554158" cy="139732"/>
+              </a:xfrm>
+              <a:prstGeom prst="line">
+                <a:avLst/>
+              </a:prstGeom>
+              <a:ln w="12700">
+                <a:solidFill>
+                  <a:srgbClr val="FF0000"/>
+                </a:solidFill>
+                <a:prstDash val="sysDot"/>
+              </a:ln>
+            </p:spPr>
+            <p:style>
+              <a:lnRef idx="2">
+                <a:schemeClr val="accent1"/>
+              </a:lnRef>
+              <a:fillRef idx="0">
+                <a:schemeClr val="accent1"/>
+              </a:fillRef>
+              <a:effectRef idx="1">
+                <a:schemeClr val="accent1"/>
+              </a:effectRef>
+              <a:fontRef idx="minor">
+                <a:schemeClr val="tx1"/>
+              </a:fontRef>
+            </p:style>
+          </p:cxnSp>
+          <p:grpSp>
+            <p:nvGrpSpPr>
+              <p:cNvPr id="9" name="Group 8">
+                <a:extLst>
+                  <a:ext uri="{FF2B5EF4-FFF2-40B4-BE49-F238E27FC236}">
+                    <a16:creationId xmlns:a16="http://schemas.microsoft.com/office/drawing/2014/main" id="{316BC739-B35F-85FE-983B-5189F671AA40}"/>
+                  </a:ext>
+                </a:extLst>
+              </p:cNvPr>
+              <p:cNvGrpSpPr/>
+              <p:nvPr/>
+            </p:nvGrpSpPr>
+            <p:grpSpPr>
+              <a:xfrm>
+                <a:off x="6586956" y="4233668"/>
+                <a:ext cx="2302213" cy="647296"/>
+                <a:chOff x="7063677" y="4951549"/>
+                <a:chExt cx="2302213" cy="647296"/>
+              </a:xfrm>
+            </p:grpSpPr>
+            <p:grpSp>
+              <p:nvGrpSpPr>
+                <p:cNvPr id="67" name="Group 66">
+                  <a:extLst>
+                    <a:ext uri="{FF2B5EF4-FFF2-40B4-BE49-F238E27FC236}">
+                      <a16:creationId xmlns:a16="http://schemas.microsoft.com/office/drawing/2014/main" id="{94C82875-16D7-328F-D44F-2C1A08F28D46}"/>
+                    </a:ext>
+                  </a:extLst>
+                </p:cNvPr>
+                <p:cNvGrpSpPr/>
+                <p:nvPr/>
+              </p:nvGrpSpPr>
+              <p:grpSpPr>
+                <a:xfrm>
+                  <a:off x="7063677" y="4951549"/>
+                  <a:ext cx="2239251" cy="333931"/>
+                  <a:chOff x="7168594" y="4200673"/>
+                  <a:chExt cx="2239251" cy="299842"/>
+                </a:xfrm>
+              </p:grpSpPr>
+              <p:sp>
+                <p:nvSpPr>
+                  <p:cNvPr id="69" name="Rectangle: Rounded Corners 68">
+                    <a:extLst>
+                      <a:ext uri="{FF2B5EF4-FFF2-40B4-BE49-F238E27FC236}">
+                        <a16:creationId xmlns:a16="http://schemas.microsoft.com/office/drawing/2014/main" id="{E3E5506D-785E-C802-0B5C-83BCF4D57BC8}"/>
+                      </a:ext>
+                    </a:extLst>
+                  </p:cNvPr>
+                  <p:cNvSpPr/>
+                  <p:nvPr/>
+                </p:nvSpPr>
+                <p:spPr>
+                  <a:xfrm>
+                    <a:off x="7168596" y="4200673"/>
+                    <a:ext cx="2239249" cy="299842"/>
+                  </a:xfrm>
+                  <a:prstGeom prst="roundRect">
+                    <a:avLst>
+                      <a:gd name="adj" fmla="val 28947"/>
+                    </a:avLst>
+                  </a:prstGeom>
+                  <a:solidFill>
+                    <a:srgbClr val="262626"/>
+                  </a:solidFill>
+                  <a:ln w="12700">
+                    <a:solidFill>
+                      <a:schemeClr val="bg1"/>
+                    </a:solidFill>
+                  </a:ln>
+                </p:spPr>
+                <p:style>
+                  <a:lnRef idx="2">
+                    <a:schemeClr val="accent1">
+                      <a:shade val="15000"/>
+                    </a:schemeClr>
+                  </a:lnRef>
+                  <a:fillRef idx="1">
+                    <a:schemeClr val="accent1"/>
+                  </a:fillRef>
+                  <a:effectRef idx="0">
+                    <a:schemeClr val="accent1"/>
+                  </a:effectRef>
+                  <a:fontRef idx="minor">
+                    <a:schemeClr val="lt1"/>
+                  </a:fontRef>
+                </p:style>
+                <p:txBody>
+                  <a:bodyPr rtlCol="0" anchor="ctr"/>
+                  <a:lstStyle/>
+                  <a:p>
+                    <a:pPr algn="ctr"/>
+                    <a:endParaRPr lang="en-US" sz="1400" dirty="0">
+                      <a:solidFill>
+                        <a:schemeClr val="tx1"/>
+                      </a:solidFill>
+                      <a:latin typeface="Times New Roman" panose="02020603050405020304" pitchFamily="18" charset="0"/>
+                      <a:cs typeface="Times New Roman" panose="02020603050405020304" pitchFamily="18" charset="0"/>
+                    </a:endParaRPr>
+                  </a:p>
+                </p:txBody>
+              </p:sp>
+              <p:sp>
+                <p:nvSpPr>
+                  <p:cNvPr id="70" name="TextBox 69">
+                    <a:extLst>
+                      <a:ext uri="{FF2B5EF4-FFF2-40B4-BE49-F238E27FC236}">
+                        <a16:creationId xmlns:a16="http://schemas.microsoft.com/office/drawing/2014/main" id="{A6BD8DC3-F519-6540-99EC-9071E4B84D62}"/>
+                      </a:ext>
+                    </a:extLst>
+                  </p:cNvPr>
+                  <p:cNvSpPr txBox="1"/>
+                  <p:nvPr/>
+                </p:nvSpPr>
+                <p:spPr>
+                  <a:xfrm>
+                    <a:off x="7168594" y="4201157"/>
+                    <a:ext cx="2238468" cy="276358"/>
+                  </a:xfrm>
+                  <a:prstGeom prst="rect">
+                    <a:avLst/>
+                  </a:prstGeom>
+                  <a:noFill/>
+                  <a:ln w="12700">
+                    <a:noFill/>
+                  </a:ln>
+                </p:spPr>
+                <p:txBody>
+                  <a:bodyPr wrap="square">
+                    <a:spAutoFit/>
+                  </a:bodyPr>
+                  <a:lstStyle/>
+                  <a:p>
+                    <a:pPr algn="ctr"/>
+                    <a:r>
+                      <a:rPr lang="en-US" sz="1400" dirty="0">
+                        <a:solidFill>
+                          <a:schemeClr val="bg1"/>
+                        </a:solidFill>
+                        <a:latin typeface="Times New Roman" panose="02020603050405020304" pitchFamily="18" charset="0"/>
+                        <a:cs typeface="Times New Roman" panose="02020603050405020304" pitchFamily="18" charset="0"/>
+                      </a:rPr>
+                      <a:t>Open5GS</a:t>
+                    </a:r>
+                  </a:p>
+                </p:txBody>
+              </p:sp>
+            </p:grpSp>
+            <p:sp>
+              <p:nvSpPr>
+                <p:cNvPr id="68" name="TextBox 67">
+                  <a:extLst>
+                    <a:ext uri="{FF2B5EF4-FFF2-40B4-BE49-F238E27FC236}">
+                      <a16:creationId xmlns:a16="http://schemas.microsoft.com/office/drawing/2014/main" id="{94615E0D-4553-284E-CE2D-CF14F759AE84}"/>
+                    </a:ext>
+                  </a:extLst>
+                </p:cNvPr>
+                <p:cNvSpPr txBox="1"/>
+                <p:nvPr/>
+              </p:nvSpPr>
+              <p:spPr>
+                <a:xfrm>
+                  <a:off x="7126641" y="5291068"/>
+                  <a:ext cx="2239249" cy="307777"/>
+                </a:xfrm>
+                <a:prstGeom prst="rect">
+                  <a:avLst/>
+                </a:prstGeom>
+                <a:noFill/>
+              </p:spPr>
+              <p:txBody>
+                <a:bodyPr wrap="square">
+                  <a:spAutoFit/>
+                </a:bodyPr>
+                <a:lstStyle/>
+                <a:p>
+                  <a:pPr algn="ctr"/>
+                  <a:r>
+                    <a:rPr lang="en-US" sz="1400" b="1" dirty="0">
+                      <a:solidFill>
+                        <a:schemeClr val="bg1"/>
+                      </a:solidFill>
+                      <a:latin typeface="Times New Roman" panose="02020603050405020304" pitchFamily="18" charset="0"/>
+                      <a:cs typeface="Times New Roman" panose="02020603050405020304" pitchFamily="18" charset="0"/>
+                    </a:rPr>
+                    <a:t>5G Core Network</a:t>
+                  </a:r>
+                </a:p>
+              </p:txBody>
+            </p:sp>
+          </p:grpSp>
+          <p:cxnSp>
+            <p:nvCxnSpPr>
+              <p:cNvPr id="10" name="Straight Connector 9">
+                <a:extLst>
+                  <a:ext uri="{FF2B5EF4-FFF2-40B4-BE49-F238E27FC236}">
+                    <a16:creationId xmlns:a16="http://schemas.microsoft.com/office/drawing/2014/main" id="{32A79DEC-8744-1300-577F-E137537AD2F9}"/>
+                  </a:ext>
+                </a:extLst>
+              </p:cNvPr>
+              <p:cNvCxnSpPr>
+                <a:cxnSpLocks/>
+                <a:stCxn id="45" idx="3"/>
+                <a:endCxn id="56" idx="1"/>
+              </p:cNvCxnSpPr>
+              <p:nvPr/>
+            </p:nvCxnSpPr>
+            <p:spPr>
+              <a:xfrm>
+                <a:off x="3018119" y="4397782"/>
+                <a:ext cx="676819" cy="0"/>
+              </a:xfrm>
+              <a:prstGeom prst="line">
+                <a:avLst/>
+              </a:prstGeom>
+              <a:ln w="12700">
+                <a:solidFill>
+                  <a:schemeClr val="bg1"/>
+                </a:solidFill>
+                <a:prstDash val="sysDot"/>
+              </a:ln>
+            </p:spPr>
+            <p:style>
+              <a:lnRef idx="2">
+                <a:schemeClr val="accent1"/>
+              </a:lnRef>
+              <a:fillRef idx="0">
+                <a:schemeClr val="accent1"/>
+              </a:fillRef>
+              <a:effectRef idx="1">
+                <a:schemeClr val="accent1"/>
+              </a:effectRef>
+              <a:fontRef idx="minor">
+                <a:schemeClr val="tx1"/>
+              </a:fontRef>
+            </p:style>
+          </p:cxnSp>
+          <p:cxnSp>
+            <p:nvCxnSpPr>
+              <p:cNvPr id="11" name="Straight Connector 10">
+                <a:extLst>
+                  <a:ext uri="{FF2B5EF4-FFF2-40B4-BE49-F238E27FC236}">
+                    <a16:creationId xmlns:a16="http://schemas.microsoft.com/office/drawing/2014/main" id="{34C38DF5-DD28-45E9-2507-546631986FEC}"/>
+                  </a:ext>
+                </a:extLst>
+              </p:cNvPr>
+              <p:cNvCxnSpPr>
+                <a:cxnSpLocks/>
+                <a:stCxn id="44" idx="3"/>
+                <a:endCxn id="55" idx="1"/>
+              </p:cNvCxnSpPr>
+              <p:nvPr/>
+            </p:nvCxnSpPr>
+            <p:spPr>
+              <a:xfrm>
+                <a:off x="3020023" y="4703444"/>
+                <a:ext cx="678726" cy="0"/>
+              </a:xfrm>
+              <a:prstGeom prst="line">
+                <a:avLst/>
+              </a:prstGeom>
+              <a:ln w="12700">
+                <a:solidFill>
+                  <a:schemeClr val="bg1"/>
+                </a:solidFill>
+              </a:ln>
+            </p:spPr>
+            <p:style>
+              <a:lnRef idx="2">
+                <a:schemeClr val="accent1"/>
+              </a:lnRef>
+              <a:fillRef idx="0">
+                <a:schemeClr val="accent1"/>
+              </a:fillRef>
+              <a:effectRef idx="1">
+                <a:schemeClr val="accent1"/>
+              </a:effectRef>
+              <a:fontRef idx="minor">
+                <a:schemeClr val="tx1"/>
+              </a:fontRef>
+            </p:style>
+          </p:cxnSp>
+          <p:cxnSp>
+            <p:nvCxnSpPr>
+              <p:cNvPr id="12" name="Straight Connector 11">
+                <a:extLst>
+                  <a:ext uri="{FF2B5EF4-FFF2-40B4-BE49-F238E27FC236}">
+                    <a16:creationId xmlns:a16="http://schemas.microsoft.com/office/drawing/2014/main" id="{5ECED138-8687-8AC9-B515-1F21C20F5556}"/>
+                  </a:ext>
+                </a:extLst>
+              </p:cNvPr>
+              <p:cNvCxnSpPr>
+                <a:cxnSpLocks/>
+                <a:stCxn id="46" idx="3"/>
+                <a:endCxn id="56" idx="1"/>
+              </p:cNvCxnSpPr>
+              <p:nvPr/>
+            </p:nvCxnSpPr>
+            <p:spPr>
+              <a:xfrm flipV="1">
+                <a:off x="3018118" y="4397782"/>
+                <a:ext cx="676820" cy="1222648"/>
+              </a:xfrm>
+              <a:prstGeom prst="line">
+                <a:avLst/>
+              </a:prstGeom>
+              <a:ln w="12700">
+                <a:solidFill>
+                  <a:schemeClr val="bg1"/>
+                </a:solidFill>
+                <a:prstDash val="sysDot"/>
+              </a:ln>
+            </p:spPr>
+            <p:style>
+              <a:lnRef idx="2">
+                <a:schemeClr val="accent1"/>
+              </a:lnRef>
+              <a:fillRef idx="0">
+                <a:schemeClr val="accent1"/>
+              </a:fillRef>
+              <a:effectRef idx="1">
+                <a:schemeClr val="accent1"/>
+              </a:effectRef>
+              <a:fontRef idx="minor">
+                <a:schemeClr val="tx1"/>
+              </a:fontRef>
+            </p:style>
+          </p:cxnSp>
+          <p:cxnSp>
+            <p:nvCxnSpPr>
+              <p:cNvPr id="13" name="Straight Connector 12">
+                <a:extLst>
+                  <a:ext uri="{FF2B5EF4-FFF2-40B4-BE49-F238E27FC236}">
+                    <a16:creationId xmlns:a16="http://schemas.microsoft.com/office/drawing/2014/main" id="{1515E354-6DA8-293E-5366-4FCC379F89CE}"/>
+                  </a:ext>
+                </a:extLst>
+              </p:cNvPr>
+              <p:cNvCxnSpPr>
+                <a:cxnSpLocks/>
+                <a:stCxn id="49" idx="3"/>
+                <a:endCxn id="60" idx="1"/>
+              </p:cNvCxnSpPr>
+              <p:nvPr/>
+            </p:nvCxnSpPr>
+            <p:spPr>
+              <a:xfrm>
+                <a:off x="3018118" y="5314768"/>
+                <a:ext cx="680631" cy="0"/>
+              </a:xfrm>
+              <a:prstGeom prst="line">
+                <a:avLst/>
+              </a:prstGeom>
+              <a:ln w="12700">
+                <a:solidFill>
+                  <a:schemeClr val="bg1"/>
+                </a:solidFill>
+              </a:ln>
+            </p:spPr>
+            <p:style>
+              <a:lnRef idx="2">
+                <a:schemeClr val="accent1"/>
+              </a:lnRef>
+              <a:fillRef idx="0">
+                <a:schemeClr val="accent1"/>
+              </a:fillRef>
+              <a:effectRef idx="1">
+                <a:schemeClr val="accent1"/>
+              </a:effectRef>
+              <a:fontRef idx="minor">
+                <a:schemeClr val="tx1"/>
+              </a:fontRef>
+            </p:style>
+          </p:cxnSp>
+          <p:cxnSp>
+            <p:nvCxnSpPr>
+              <p:cNvPr id="14" name="Straight Connector 13">
+                <a:extLst>
+                  <a:ext uri="{FF2B5EF4-FFF2-40B4-BE49-F238E27FC236}">
+                    <a16:creationId xmlns:a16="http://schemas.microsoft.com/office/drawing/2014/main" id="{FB2657DE-F9D4-6A96-5B71-8BE2C8C90454}"/>
+                  </a:ext>
+                </a:extLst>
+              </p:cNvPr>
+              <p:cNvCxnSpPr>
+                <a:cxnSpLocks/>
+                <a:stCxn id="43" idx="3"/>
+                <a:endCxn id="54" idx="1"/>
+              </p:cNvCxnSpPr>
+              <p:nvPr/>
+            </p:nvCxnSpPr>
+            <p:spPr>
+              <a:xfrm>
+                <a:off x="3018118" y="5009106"/>
+                <a:ext cx="665196" cy="0"/>
+              </a:xfrm>
+              <a:prstGeom prst="line">
+                <a:avLst/>
+              </a:prstGeom>
+              <a:ln w="12700">
+                <a:solidFill>
+                  <a:schemeClr val="bg1"/>
+                </a:solidFill>
+                <a:prstDash val="sysDot"/>
+              </a:ln>
+            </p:spPr>
+            <p:style>
+              <a:lnRef idx="2">
+                <a:schemeClr val="accent1"/>
+              </a:lnRef>
+              <a:fillRef idx="0">
+                <a:schemeClr val="accent1"/>
+              </a:fillRef>
+              <a:effectRef idx="1">
+                <a:schemeClr val="accent1"/>
+              </a:effectRef>
+              <a:fontRef idx="minor">
+                <a:schemeClr val="tx1"/>
+              </a:fontRef>
+            </p:style>
+          </p:cxnSp>
+          <p:cxnSp>
+            <p:nvCxnSpPr>
+              <p:cNvPr id="15" name="Straight Connector 14">
+                <a:extLst>
+                  <a:ext uri="{FF2B5EF4-FFF2-40B4-BE49-F238E27FC236}">
+                    <a16:creationId xmlns:a16="http://schemas.microsoft.com/office/drawing/2014/main" id="{7B8C0992-8C5B-0CFA-F351-BDE45110AE40}"/>
+                  </a:ext>
+                </a:extLst>
+              </p:cNvPr>
+              <p:cNvCxnSpPr>
+                <a:cxnSpLocks/>
+                <a:stCxn id="35" idx="3"/>
+                <a:endCxn id="30" idx="1"/>
+              </p:cNvCxnSpPr>
+              <p:nvPr/>
+            </p:nvCxnSpPr>
+            <p:spPr>
+              <a:xfrm>
+                <a:off x="8825441" y="5317669"/>
+                <a:ext cx="639701" cy="267551"/>
+              </a:xfrm>
+              <a:prstGeom prst="line">
+                <a:avLst/>
+              </a:prstGeom>
+              <a:ln w="12700">
+                <a:solidFill>
+                  <a:schemeClr val="bg1"/>
+                </a:solidFill>
+              </a:ln>
+            </p:spPr>
+            <p:style>
+              <a:lnRef idx="2">
+                <a:schemeClr val="accent1"/>
+              </a:lnRef>
+              <a:fillRef idx="0">
+                <a:schemeClr val="accent1"/>
+              </a:fillRef>
+              <a:effectRef idx="1">
+                <a:schemeClr val="accent1"/>
+              </a:effectRef>
+              <a:fontRef idx="minor">
+                <a:schemeClr val="tx1"/>
+              </a:fontRef>
+            </p:style>
+          </p:cxnSp>
+          <p:cxnSp>
+            <p:nvCxnSpPr>
+              <p:cNvPr id="16" name="Straight Connector 15">
+                <a:extLst>
+                  <a:ext uri="{FF2B5EF4-FFF2-40B4-BE49-F238E27FC236}">
+                    <a16:creationId xmlns:a16="http://schemas.microsoft.com/office/drawing/2014/main" id="{A0F3449C-2283-DACE-FB13-38396C4B7FB9}"/>
+                  </a:ext>
+                </a:extLst>
+              </p:cNvPr>
+              <p:cNvCxnSpPr>
+                <a:cxnSpLocks/>
+                <a:stCxn id="23" idx="1"/>
+                <a:endCxn id="70" idx="1"/>
+              </p:cNvCxnSpPr>
+              <p:nvPr/>
+            </p:nvCxnSpPr>
+            <p:spPr>
+              <a:xfrm flipV="1">
+                <a:off x="6032033" y="4388096"/>
+                <a:ext cx="554923" cy="166966"/>
+              </a:xfrm>
+              <a:prstGeom prst="line">
+                <a:avLst/>
+              </a:prstGeom>
+              <a:ln w="12700">
+                <a:solidFill>
+                  <a:schemeClr val="bg1"/>
+                </a:solidFill>
+              </a:ln>
+            </p:spPr>
+            <p:style>
+              <a:lnRef idx="2">
+                <a:schemeClr val="accent1"/>
+              </a:lnRef>
+              <a:fillRef idx="0">
+                <a:schemeClr val="accent1"/>
+              </a:fillRef>
+              <a:effectRef idx="1">
+                <a:schemeClr val="accent1"/>
+              </a:effectRef>
+              <a:fontRef idx="minor">
+                <a:schemeClr val="tx1"/>
+              </a:fontRef>
+            </p:style>
+          </p:cxnSp>
+          <p:cxnSp>
+            <p:nvCxnSpPr>
+              <p:cNvPr id="17" name="Straight Connector 16">
+                <a:extLst>
+                  <a:ext uri="{FF2B5EF4-FFF2-40B4-BE49-F238E27FC236}">
+                    <a16:creationId xmlns:a16="http://schemas.microsoft.com/office/drawing/2014/main" id="{A0F3409B-9BA3-B0DD-2840-A8BFD7EB2EFD}"/>
+                  </a:ext>
+                </a:extLst>
+              </p:cNvPr>
+              <p:cNvCxnSpPr>
+                <a:cxnSpLocks/>
+                <a:stCxn id="24" idx="1"/>
+                <a:endCxn id="70" idx="1"/>
+              </p:cNvCxnSpPr>
+              <p:nvPr/>
+            </p:nvCxnSpPr>
+            <p:spPr>
+              <a:xfrm flipV="1">
+                <a:off x="6032033" y="4388096"/>
+                <a:ext cx="554923" cy="780316"/>
+              </a:xfrm>
+              <a:prstGeom prst="line">
+                <a:avLst/>
+              </a:prstGeom>
+              <a:ln w="12700">
+                <a:solidFill>
+                  <a:schemeClr val="bg1"/>
+                </a:solidFill>
+              </a:ln>
+            </p:spPr>
+            <p:style>
+              <a:lnRef idx="2">
+                <a:schemeClr val="accent1"/>
+              </a:lnRef>
+              <a:fillRef idx="0">
+                <a:schemeClr val="accent1"/>
+              </a:fillRef>
+              <a:effectRef idx="1">
+                <a:schemeClr val="accent1"/>
+              </a:effectRef>
+              <a:fontRef idx="minor">
+                <a:schemeClr val="tx1"/>
+              </a:fontRef>
+            </p:style>
+          </p:cxnSp>
+          <p:cxnSp>
+            <p:nvCxnSpPr>
+              <p:cNvPr id="18" name="Straight Connector 17">
+                <a:extLst>
+                  <a:ext uri="{FF2B5EF4-FFF2-40B4-BE49-F238E27FC236}">
+                    <a16:creationId xmlns:a16="http://schemas.microsoft.com/office/drawing/2014/main" id="{3936E016-28E0-8BF0-9431-64131BB8293D}"/>
+                  </a:ext>
+                </a:extLst>
+              </p:cNvPr>
+              <p:cNvCxnSpPr>
+                <a:cxnSpLocks/>
+                <a:endCxn id="35" idx="1"/>
+              </p:cNvCxnSpPr>
+              <p:nvPr/>
+            </p:nvCxnSpPr>
+            <p:spPr>
+              <a:xfrm>
+                <a:off x="6032033" y="4564587"/>
+                <a:ext cx="554158" cy="753082"/>
+              </a:xfrm>
+              <a:prstGeom prst="line">
+                <a:avLst/>
+              </a:prstGeom>
+              <a:ln w="12700">
+                <a:solidFill>
+                  <a:schemeClr val="bg1"/>
+                </a:solidFill>
+              </a:ln>
+            </p:spPr>
+            <p:style>
+              <a:lnRef idx="2">
+                <a:schemeClr val="accent1"/>
+              </a:lnRef>
+              <a:fillRef idx="0">
+                <a:schemeClr val="accent1"/>
+              </a:fillRef>
+              <a:effectRef idx="1">
+                <a:schemeClr val="accent1"/>
+              </a:effectRef>
+              <a:fontRef idx="minor">
+                <a:schemeClr val="tx1"/>
+              </a:fontRef>
+            </p:style>
+          </p:cxnSp>
+          <p:cxnSp>
+            <p:nvCxnSpPr>
+              <p:cNvPr id="19" name="Straight Connector 18">
+                <a:extLst>
+                  <a:ext uri="{FF2B5EF4-FFF2-40B4-BE49-F238E27FC236}">
+                    <a16:creationId xmlns:a16="http://schemas.microsoft.com/office/drawing/2014/main" id="{E085886D-3B15-DB08-3633-1E75D9D54A31}"/>
+                  </a:ext>
+                </a:extLst>
+              </p:cNvPr>
+              <p:cNvCxnSpPr>
+                <a:cxnSpLocks/>
+                <a:endCxn id="36" idx="1"/>
+              </p:cNvCxnSpPr>
+              <p:nvPr/>
+            </p:nvCxnSpPr>
+            <p:spPr>
+              <a:xfrm>
+                <a:off x="6032033" y="5168412"/>
+                <a:ext cx="554158" cy="442679"/>
+              </a:xfrm>
+              <a:prstGeom prst="line">
+                <a:avLst/>
+              </a:prstGeom>
+              <a:ln w="12700">
+                <a:solidFill>
+                  <a:schemeClr val="bg1"/>
+                </a:solidFill>
+              </a:ln>
+            </p:spPr>
+            <p:style>
+              <a:lnRef idx="2">
+                <a:schemeClr val="accent1"/>
+              </a:lnRef>
+              <a:fillRef idx="0">
+                <a:schemeClr val="accent1"/>
+              </a:fillRef>
+              <a:effectRef idx="1">
+                <a:schemeClr val="accent1"/>
+              </a:effectRef>
+              <a:fontRef idx="minor">
+                <a:schemeClr val="tx1"/>
+              </a:fontRef>
+            </p:style>
+          </p:cxnSp>
+          <p:cxnSp>
+            <p:nvCxnSpPr>
+              <p:cNvPr id="20" name="Straight Connector 19">
+                <a:extLst>
+                  <a:ext uri="{FF2B5EF4-FFF2-40B4-BE49-F238E27FC236}">
+                    <a16:creationId xmlns:a16="http://schemas.microsoft.com/office/drawing/2014/main" id="{464B0A35-8F04-98CF-A4D8-50AD8B8C9AA5}"/>
+                  </a:ext>
+                </a:extLst>
+              </p:cNvPr>
+              <p:cNvCxnSpPr>
+                <a:cxnSpLocks/>
+                <a:stCxn id="57" idx="3"/>
+                <a:endCxn id="35" idx="1"/>
+              </p:cNvCxnSpPr>
+              <p:nvPr/>
+            </p:nvCxnSpPr>
+            <p:spPr>
+              <a:xfrm flipV="1">
+                <a:off x="5905563" y="5317669"/>
+                <a:ext cx="680628" cy="302761"/>
+              </a:xfrm>
+              <a:prstGeom prst="line">
+                <a:avLst/>
+              </a:prstGeom>
+              <a:ln w="12700">
+                <a:solidFill>
+                  <a:schemeClr val="bg1"/>
+                </a:solidFill>
+              </a:ln>
+            </p:spPr>
+            <p:style>
+              <a:lnRef idx="2">
+                <a:schemeClr val="accent1"/>
+              </a:lnRef>
+              <a:fillRef idx="0">
+                <a:schemeClr val="accent1"/>
+              </a:fillRef>
+              <a:effectRef idx="1">
+                <a:schemeClr val="accent1"/>
+              </a:effectRef>
+              <a:fontRef idx="minor">
+                <a:schemeClr val="tx1"/>
+              </a:fontRef>
+            </p:style>
+          </p:cxnSp>
+          <p:cxnSp>
+            <p:nvCxnSpPr>
+              <p:cNvPr id="21" name="Straight Connector 20">
+                <a:extLst>
+                  <a:ext uri="{FF2B5EF4-FFF2-40B4-BE49-F238E27FC236}">
+                    <a16:creationId xmlns:a16="http://schemas.microsoft.com/office/drawing/2014/main" id="{3820C6D9-0E3D-0876-944B-2DAB23175A99}"/>
+                  </a:ext>
+                </a:extLst>
+              </p:cNvPr>
+              <p:cNvCxnSpPr>
+                <a:cxnSpLocks/>
+                <a:endCxn id="36" idx="1"/>
+              </p:cNvCxnSpPr>
+              <p:nvPr/>
+            </p:nvCxnSpPr>
+            <p:spPr>
+              <a:xfrm>
+                <a:off x="6032033" y="4555062"/>
+                <a:ext cx="554158" cy="1056029"/>
+              </a:xfrm>
+              <a:prstGeom prst="line">
+                <a:avLst/>
+              </a:prstGeom>
+              <a:ln w="12700">
+                <a:solidFill>
+                  <a:schemeClr val="bg1"/>
+                </a:solidFill>
+                <a:prstDash val="sysDot"/>
+              </a:ln>
+            </p:spPr>
+            <p:style>
+              <a:lnRef idx="2">
+                <a:schemeClr val="accent1"/>
+              </a:lnRef>
+              <a:fillRef idx="0">
+                <a:schemeClr val="accent1"/>
+              </a:fillRef>
+              <a:effectRef idx="1">
+                <a:schemeClr val="accent1"/>
+              </a:effectRef>
+              <a:fontRef idx="minor">
+                <a:schemeClr val="tx1"/>
+              </a:fontRef>
+            </p:style>
+          </p:cxnSp>
+          <p:grpSp>
+            <p:nvGrpSpPr>
+              <p:cNvPr id="22" name="Group 21">
+                <a:extLst>
+                  <a:ext uri="{FF2B5EF4-FFF2-40B4-BE49-F238E27FC236}">
+                    <a16:creationId xmlns:a16="http://schemas.microsoft.com/office/drawing/2014/main" id="{AA953FD7-0D5A-D260-FEA5-A750D4B0B26B}"/>
+                  </a:ext>
+                </a:extLst>
+              </p:cNvPr>
+              <p:cNvGrpSpPr/>
+              <p:nvPr/>
+            </p:nvGrpSpPr>
+            <p:grpSpPr>
+              <a:xfrm>
+                <a:off x="8962221" y="4228858"/>
+                <a:ext cx="2860204" cy="738664"/>
+                <a:chOff x="8962221" y="4222565"/>
+                <a:chExt cx="2860204" cy="738664"/>
+              </a:xfrm>
+            </p:grpSpPr>
+            <p:sp>
+              <p:nvSpPr>
+                <p:cNvPr id="62" name="Rectangle 61">
+                  <a:extLst>
+                    <a:ext uri="{FF2B5EF4-FFF2-40B4-BE49-F238E27FC236}">
+                      <a16:creationId xmlns:a16="http://schemas.microsoft.com/office/drawing/2014/main" id="{A59D6F40-6E6F-232E-ECC9-A4EB8C8693B0}"/>
+                    </a:ext>
+                  </a:extLst>
+                </p:cNvPr>
+                <p:cNvSpPr/>
+                <p:nvPr/>
+              </p:nvSpPr>
+              <p:spPr>
+                <a:xfrm>
+                  <a:off x="8962221" y="4243038"/>
+                  <a:ext cx="2787151" cy="705139"/>
+                </a:xfrm>
+                <a:prstGeom prst="rect">
+                  <a:avLst/>
+                </a:prstGeom>
+                <a:solidFill>
+                  <a:srgbClr val="0D1117"/>
+                </a:solidFill>
+                <a:ln w="12700">
+                  <a:solidFill>
+                    <a:schemeClr val="bg1"/>
+                  </a:solidFill>
+                </a:ln>
+              </p:spPr>
+              <p:style>
+                <a:lnRef idx="2">
+                  <a:schemeClr val="accent1">
+                    <a:shade val="15000"/>
+                  </a:schemeClr>
+                </a:lnRef>
+                <a:fillRef idx="1">
+                  <a:schemeClr val="accent1"/>
+                </a:fillRef>
+                <a:effectRef idx="0">
+                  <a:schemeClr val="accent1"/>
+                </a:effectRef>
+                <a:fontRef idx="minor">
+                  <a:schemeClr val="lt1"/>
+                </a:fontRef>
+              </p:style>
+              <p:txBody>
+                <a:bodyPr rtlCol="0" anchor="ctr"/>
+                <a:lstStyle/>
+                <a:p>
+                  <a:pPr algn="ctr"/>
+                  <a:endParaRPr lang="en-US"/>
+                </a:p>
+              </p:txBody>
+            </p:sp>
+            <p:cxnSp>
+              <p:nvCxnSpPr>
+                <p:cNvPr id="63" name="Straight Connector 62">
+                  <a:extLst>
+                    <a:ext uri="{FF2B5EF4-FFF2-40B4-BE49-F238E27FC236}">
+                      <a16:creationId xmlns:a16="http://schemas.microsoft.com/office/drawing/2014/main" id="{D14BEA91-F3A3-C660-8A23-F11C29E56CD0}"/>
+                    </a:ext>
+                  </a:extLst>
+                </p:cNvPr>
+                <p:cNvCxnSpPr>
+                  <a:cxnSpLocks/>
+                </p:cNvCxnSpPr>
+                <p:nvPr/>
+              </p:nvCxnSpPr>
+              <p:spPr>
+                <a:xfrm>
+                  <a:off x="9055446" y="4378844"/>
+                  <a:ext cx="210474" cy="0"/>
+                </a:xfrm>
+                <a:prstGeom prst="line">
+                  <a:avLst/>
+                </a:prstGeom>
+                <a:ln w="12700">
+                  <a:solidFill>
+                    <a:schemeClr val="bg1"/>
+                  </a:solidFill>
+                </a:ln>
+              </p:spPr>
+              <p:style>
+                <a:lnRef idx="2">
+                  <a:schemeClr val="dk1"/>
+                </a:lnRef>
+                <a:fillRef idx="0">
+                  <a:schemeClr val="dk1"/>
+                </a:fillRef>
+                <a:effectRef idx="1">
+                  <a:schemeClr val="dk1"/>
+                </a:effectRef>
+                <a:fontRef idx="minor">
+                  <a:schemeClr val="tx1"/>
+                </a:fontRef>
+              </p:style>
+            </p:cxnSp>
+            <p:sp>
+              <p:nvSpPr>
+                <p:cNvPr id="64" name="TextBox 63">
+                  <a:extLst>
+                    <a:ext uri="{FF2B5EF4-FFF2-40B4-BE49-F238E27FC236}">
+                      <a16:creationId xmlns:a16="http://schemas.microsoft.com/office/drawing/2014/main" id="{87248227-D8ED-62C9-8498-3B65A1AFBC5C}"/>
+                    </a:ext>
+                  </a:extLst>
+                </p:cNvPr>
+                <p:cNvSpPr txBox="1"/>
+                <p:nvPr/>
+              </p:nvSpPr>
+              <p:spPr>
+                <a:xfrm>
+                  <a:off x="9235317" y="4222565"/>
+                  <a:ext cx="2587108" cy="738664"/>
+                </a:xfrm>
+                <a:prstGeom prst="rect">
+                  <a:avLst/>
+                </a:prstGeom>
+                <a:noFill/>
+              </p:spPr>
+              <p:txBody>
+                <a:bodyPr wrap="square">
+                  <a:spAutoFit/>
+                </a:bodyPr>
+                <a:lstStyle/>
+                <a:p>
+                  <a:r>
+                    <a:rPr lang="en-US" sz="1400" dirty="0">
+                      <a:solidFill>
+                        <a:schemeClr val="bg1"/>
+                      </a:solidFill>
+                      <a:latin typeface="Times New Roman" panose="02020603050405020304" pitchFamily="18" charset="0"/>
+                      <a:cs typeface="Times New Roman" panose="02020603050405020304" pitchFamily="18" charset="0"/>
+                    </a:rPr>
+                    <a:t>Supported by default installation</a:t>
+                  </a:r>
+                  <a:br>
+                    <a:rPr lang="en-US" sz="1400" dirty="0">
+                      <a:solidFill>
+                        <a:schemeClr val="bg1"/>
+                      </a:solidFill>
+                      <a:latin typeface="Times New Roman" panose="02020603050405020304" pitchFamily="18" charset="0"/>
+                      <a:cs typeface="Times New Roman" panose="02020603050405020304" pitchFamily="18" charset="0"/>
+                    </a:rPr>
+                  </a:br>
+                  <a:r>
+                    <a:rPr lang="en-US" sz="1400" dirty="0">
+                      <a:solidFill>
+                        <a:schemeClr val="bg1"/>
+                      </a:solidFill>
+                      <a:latin typeface="Times New Roman" panose="02020603050405020304" pitchFamily="18" charset="0"/>
+                      <a:cs typeface="Times New Roman" panose="02020603050405020304" pitchFamily="18" charset="0"/>
+                    </a:rPr>
+                    <a:t>Supported after adjusting configs</a:t>
+                  </a:r>
+                </a:p>
+                <a:p>
+                  <a:r>
+                    <a:rPr lang="en-US" sz="1400" dirty="0">
+                      <a:solidFill>
+                        <a:schemeClr val="bg1"/>
+                      </a:solidFill>
+                      <a:latin typeface="Times New Roman" panose="02020603050405020304" pitchFamily="18" charset="0"/>
+                      <a:cs typeface="Times New Roman" panose="02020603050405020304" pitchFamily="18" charset="0"/>
+                    </a:rPr>
+                    <a:t>Not supported</a:t>
+                  </a:r>
+                </a:p>
+              </p:txBody>
+            </p:sp>
+            <p:cxnSp>
+              <p:nvCxnSpPr>
+                <p:cNvPr id="65" name="Straight Connector 64">
+                  <a:extLst>
+                    <a:ext uri="{FF2B5EF4-FFF2-40B4-BE49-F238E27FC236}">
+                      <a16:creationId xmlns:a16="http://schemas.microsoft.com/office/drawing/2014/main" id="{D72BCCD9-0ADB-0E7D-4D13-D2CC2EA67358}"/>
+                    </a:ext>
+                  </a:extLst>
+                </p:cNvPr>
+                <p:cNvCxnSpPr>
+                  <a:cxnSpLocks/>
+                </p:cNvCxnSpPr>
+                <p:nvPr/>
+              </p:nvCxnSpPr>
+              <p:spPr>
+                <a:xfrm>
+                  <a:off x="9055446" y="4596433"/>
+                  <a:ext cx="210474" cy="0"/>
+                </a:xfrm>
+                <a:prstGeom prst="line">
+                  <a:avLst/>
+                </a:prstGeom>
+                <a:ln w="12700">
+                  <a:solidFill>
+                    <a:schemeClr val="bg1"/>
+                  </a:solidFill>
+                  <a:prstDash val="sysDot"/>
+                </a:ln>
+              </p:spPr>
+              <p:style>
+                <a:lnRef idx="2">
+                  <a:schemeClr val="dk1"/>
+                </a:lnRef>
+                <a:fillRef idx="0">
+                  <a:schemeClr val="dk1"/>
+                </a:fillRef>
+                <a:effectRef idx="1">
+                  <a:schemeClr val="dk1"/>
+                </a:effectRef>
+                <a:fontRef idx="minor">
+                  <a:schemeClr val="tx1"/>
+                </a:fontRef>
+              </p:style>
+            </p:cxnSp>
+            <p:cxnSp>
+              <p:nvCxnSpPr>
+                <p:cNvPr id="66" name="Straight Connector 65">
+                  <a:extLst>
+                    <a:ext uri="{FF2B5EF4-FFF2-40B4-BE49-F238E27FC236}">
+                      <a16:creationId xmlns:a16="http://schemas.microsoft.com/office/drawing/2014/main" id="{665363D5-40A1-F6AF-3318-E7F22DE66076}"/>
+                    </a:ext>
+                  </a:extLst>
+                </p:cNvPr>
+                <p:cNvCxnSpPr>
+                  <a:cxnSpLocks/>
+                </p:cNvCxnSpPr>
+                <p:nvPr/>
+              </p:nvCxnSpPr>
+              <p:spPr>
+                <a:xfrm>
+                  <a:off x="9055446" y="4814021"/>
+                  <a:ext cx="210474" cy="0"/>
+                </a:xfrm>
+                <a:prstGeom prst="line">
+                  <a:avLst/>
+                </a:prstGeom>
+                <a:ln w="12700">
+                  <a:solidFill>
+                    <a:srgbClr val="FF0000"/>
+                  </a:solidFill>
+                  <a:prstDash val="sysDot"/>
+                </a:ln>
+              </p:spPr>
+              <p:style>
+                <a:lnRef idx="2">
+                  <a:schemeClr val="dk1"/>
+                </a:lnRef>
+                <a:fillRef idx="0">
+                  <a:schemeClr val="dk1"/>
+                </a:fillRef>
+                <a:effectRef idx="1">
+                  <a:schemeClr val="dk1"/>
+                </a:effectRef>
+                <a:fontRef idx="minor">
+                  <a:schemeClr val="tx1"/>
+                </a:fontRef>
+              </p:style>
+            </p:cxnSp>
+          </p:grpSp>
+          <p:sp>
+            <p:nvSpPr>
+              <p:cNvPr id="23" name="Right Brace 22">
+                <a:extLst>
+                  <a:ext uri="{FF2B5EF4-FFF2-40B4-BE49-F238E27FC236}">
+                    <a16:creationId xmlns:a16="http://schemas.microsoft.com/office/drawing/2014/main" id="{A7991ECF-F9B7-7535-37FB-A57CED3BF203}"/>
+                  </a:ext>
+                </a:extLst>
+              </p:cNvPr>
+              <p:cNvSpPr/>
+              <p:nvPr/>
+            </p:nvSpPr>
+            <p:spPr>
+              <a:xfrm>
+                <a:off x="5949277" y="4267614"/>
+                <a:ext cx="82756" cy="574896"/>
+              </a:xfrm>
+              <a:prstGeom prst="rightBrace">
+                <a:avLst>
+                  <a:gd name="adj1" fmla="val 88901"/>
+                  <a:gd name="adj2" fmla="val 50000"/>
+                </a:avLst>
+              </a:prstGeom>
+              <a:ln w="12700">
+                <a:solidFill>
+                  <a:schemeClr val="bg1"/>
+                </a:solidFill>
+              </a:ln>
+            </p:spPr>
+            <p:style>
+              <a:lnRef idx="2">
+                <a:schemeClr val="accent1"/>
+              </a:lnRef>
+              <a:fillRef idx="0">
+                <a:schemeClr val="accent1"/>
+              </a:fillRef>
+              <a:effectRef idx="1">
+                <a:schemeClr val="accent1"/>
+              </a:effectRef>
+              <a:fontRef idx="minor">
+                <a:schemeClr val="tx1"/>
+              </a:fontRef>
+            </p:style>
+            <p:txBody>
+              <a:bodyPr rtlCol="0" anchor="ctr"/>
+              <a:lstStyle/>
+              <a:p>
+                <a:pPr algn="ctr"/>
+                <a:endParaRPr lang="en-US"/>
+              </a:p>
+            </p:txBody>
+          </p:sp>
+          <p:sp>
+            <p:nvSpPr>
+              <p:cNvPr id="24" name="Right Brace 23">
+                <a:extLst>
+                  <a:ext uri="{FF2B5EF4-FFF2-40B4-BE49-F238E27FC236}">
+                    <a16:creationId xmlns:a16="http://schemas.microsoft.com/office/drawing/2014/main" id="{20C8E6D4-A40E-D435-BF8F-F8C003ACF650}"/>
+                  </a:ext>
+                </a:extLst>
+              </p:cNvPr>
+              <p:cNvSpPr/>
+              <p:nvPr/>
+            </p:nvSpPr>
+            <p:spPr>
+              <a:xfrm>
+                <a:off x="5949277" y="4880964"/>
+                <a:ext cx="82756" cy="574896"/>
+              </a:xfrm>
+              <a:prstGeom prst="rightBrace">
+                <a:avLst>
+                  <a:gd name="adj1" fmla="val 88901"/>
+                  <a:gd name="adj2" fmla="val 50000"/>
+                </a:avLst>
+              </a:prstGeom>
+              <a:ln w="12700">
+                <a:solidFill>
+                  <a:schemeClr val="bg1"/>
+                </a:solidFill>
+              </a:ln>
+            </p:spPr>
+            <p:style>
+              <a:lnRef idx="2">
+                <a:schemeClr val="accent1"/>
+              </a:lnRef>
+              <a:fillRef idx="0">
+                <a:schemeClr val="accent1"/>
+              </a:fillRef>
+              <a:effectRef idx="1">
+                <a:schemeClr val="accent1"/>
+              </a:effectRef>
+              <a:fontRef idx="minor">
+                <a:schemeClr val="tx1"/>
+              </a:fontRef>
+            </p:style>
+            <p:txBody>
+              <a:bodyPr rtlCol="0" anchor="ctr"/>
+              <a:lstStyle/>
+              <a:p>
+                <a:pPr algn="ctr"/>
+                <a:endParaRPr lang="en-US"/>
+              </a:p>
+            </p:txBody>
+          </p:sp>
+          <p:grpSp>
+            <p:nvGrpSpPr>
+              <p:cNvPr id="25" name="Group 24">
+                <a:extLst>
+                  <a:ext uri="{FF2B5EF4-FFF2-40B4-BE49-F238E27FC236}">
+                    <a16:creationId xmlns:a16="http://schemas.microsoft.com/office/drawing/2014/main" id="{7A087A7C-EBC3-7D25-0193-6488C85E22BB}"/>
+                  </a:ext>
+                </a:extLst>
+              </p:cNvPr>
+              <p:cNvGrpSpPr/>
+              <p:nvPr/>
+            </p:nvGrpSpPr>
+            <p:grpSpPr>
+              <a:xfrm>
+                <a:off x="3682530" y="4232789"/>
+                <a:ext cx="2263961" cy="1844033"/>
+                <a:chOff x="3916949" y="3691197"/>
+                <a:chExt cx="2263961" cy="1844033"/>
+              </a:xfrm>
+            </p:grpSpPr>
+            <p:sp>
+              <p:nvSpPr>
+                <p:cNvPr id="51" name="Rectangle: Rounded Corners 50">
+                  <a:extLst>
+                    <a:ext uri="{FF2B5EF4-FFF2-40B4-BE49-F238E27FC236}">
+                      <a16:creationId xmlns:a16="http://schemas.microsoft.com/office/drawing/2014/main" id="{B3D7257C-B989-E6D2-FBC9-EEE63B1B672D}"/>
+                    </a:ext>
+                  </a:extLst>
+                </p:cNvPr>
+                <p:cNvSpPr/>
+                <p:nvPr/>
+              </p:nvSpPr>
+              <p:spPr>
+                <a:xfrm>
+                  <a:off x="3916949" y="3692460"/>
+                  <a:ext cx="2239249" cy="1531642"/>
+                </a:xfrm>
+                <a:prstGeom prst="roundRect">
+                  <a:avLst>
+                    <a:gd name="adj" fmla="val 5859"/>
+                  </a:avLst>
+                </a:prstGeom>
+                <a:solidFill>
+                  <a:srgbClr val="262626"/>
+                </a:solidFill>
+                <a:ln w="28575">
+                  <a:noFill/>
+                </a:ln>
+              </p:spPr>
+              <p:style>
+                <a:lnRef idx="2">
+                  <a:schemeClr val="accent1">
+                    <a:shade val="15000"/>
+                  </a:schemeClr>
+                </a:lnRef>
+                <a:fillRef idx="1">
+                  <a:schemeClr val="accent1"/>
+                </a:fillRef>
+                <a:effectRef idx="0">
+                  <a:schemeClr val="accent1"/>
+                </a:effectRef>
+                <a:fontRef idx="minor">
+                  <a:schemeClr val="lt1"/>
+                </a:fontRef>
+              </p:style>
+              <p:txBody>
+                <a:bodyPr rtlCol="0" anchor="ctr"/>
+                <a:lstStyle/>
+                <a:p>
+                  <a:pPr algn="ctr"/>
+                  <a:endParaRPr lang="en-US" dirty="0">
+                    <a:latin typeface="Times New Roman" panose="02020603050405020304" pitchFamily="18" charset="0"/>
+                    <a:cs typeface="Times New Roman" panose="02020603050405020304" pitchFamily="18" charset="0"/>
+                  </a:endParaRPr>
+                </a:p>
+              </p:txBody>
+            </p:sp>
+            <p:sp>
+              <p:nvSpPr>
+                <p:cNvPr id="52" name="Rectangle: Top Corners Rounded 51">
+                  <a:extLst>
+                    <a:ext uri="{FF2B5EF4-FFF2-40B4-BE49-F238E27FC236}">
+                      <a16:creationId xmlns:a16="http://schemas.microsoft.com/office/drawing/2014/main" id="{DBC9B431-FC85-98F1-7802-3B3651BE6F8D}"/>
+                    </a:ext>
+                  </a:extLst>
+                </p:cNvPr>
+                <p:cNvSpPr/>
+                <p:nvPr/>
+              </p:nvSpPr>
+              <p:spPr>
+                <a:xfrm rot="10800000">
+                  <a:off x="3916952" y="4613172"/>
+                  <a:ext cx="2239248" cy="323588"/>
+                </a:xfrm>
+                <a:prstGeom prst="round2SameRect">
+                  <a:avLst>
+                    <a:gd name="adj1" fmla="val 28890"/>
+                    <a:gd name="adj2" fmla="val 0"/>
+                  </a:avLst>
+                </a:prstGeom>
+                <a:solidFill>
+                  <a:srgbClr val="F2F2F2"/>
+                </a:solidFill>
+                <a:ln>
+                  <a:noFill/>
+                </a:ln>
+              </p:spPr>
+              <p:style>
+                <a:lnRef idx="2">
+                  <a:schemeClr val="accent1">
+                    <a:shade val="15000"/>
+                  </a:schemeClr>
+                </a:lnRef>
+                <a:fillRef idx="1">
+                  <a:schemeClr val="accent1"/>
+                </a:fillRef>
+                <a:effectRef idx="0">
+                  <a:schemeClr val="accent1"/>
+                </a:effectRef>
+                <a:fontRef idx="minor">
+                  <a:schemeClr val="lt1"/>
+                </a:fontRef>
+              </p:style>
+              <p:txBody>
+                <a:bodyPr rtlCol="0" anchor="ctr"/>
+                <a:lstStyle/>
+                <a:p>
+                  <a:pPr algn="ctr"/>
+                  <a:endParaRPr lang="en-US"/>
+                </a:p>
+              </p:txBody>
+            </p:sp>
+            <p:sp>
+              <p:nvSpPr>
+                <p:cNvPr id="53" name="Rectangle 52">
+                  <a:extLst>
+                    <a:ext uri="{FF2B5EF4-FFF2-40B4-BE49-F238E27FC236}">
+                      <a16:creationId xmlns:a16="http://schemas.microsoft.com/office/drawing/2014/main" id="{19AB0D5D-41E1-ECDD-6800-6D04A0A25D57}"/>
+                    </a:ext>
+                  </a:extLst>
+                </p:cNvPr>
+                <p:cNvSpPr/>
+                <p:nvPr/>
+              </p:nvSpPr>
+              <p:spPr>
+                <a:xfrm>
+                  <a:off x="3916951" y="3990559"/>
+                  <a:ext cx="2239249" cy="323587"/>
+                </a:xfrm>
+                <a:prstGeom prst="rect">
+                  <a:avLst/>
+                </a:prstGeom>
+                <a:solidFill>
+                  <a:srgbClr val="3A3A3A"/>
+                </a:solidFill>
+                <a:ln>
+                  <a:noFill/>
+                </a:ln>
+              </p:spPr>
+              <p:style>
+                <a:lnRef idx="2">
+                  <a:schemeClr val="accent1">
+                    <a:shade val="15000"/>
+                  </a:schemeClr>
+                </a:lnRef>
+                <a:fillRef idx="1">
+                  <a:schemeClr val="accent1"/>
+                </a:fillRef>
+                <a:effectRef idx="0">
+                  <a:schemeClr val="accent1"/>
+                </a:effectRef>
+                <a:fontRef idx="minor">
+                  <a:schemeClr val="lt1"/>
+                </a:fontRef>
+              </p:style>
+              <p:txBody>
+                <a:bodyPr rtlCol="0" anchor="ctr"/>
+                <a:lstStyle/>
+                <a:p>
+                  <a:pPr algn="ctr"/>
+                  <a:endParaRPr lang="en-US"/>
+                </a:p>
+              </p:txBody>
+            </p:sp>
+            <p:sp>
+              <p:nvSpPr>
+                <p:cNvPr id="54" name="TextBox 53">
+                  <a:extLst>
+                    <a:ext uri="{FF2B5EF4-FFF2-40B4-BE49-F238E27FC236}">
+                      <a16:creationId xmlns:a16="http://schemas.microsoft.com/office/drawing/2014/main" id="{A40C2853-5546-FC7B-38EC-F30D79A444C7}"/>
+                    </a:ext>
+                  </a:extLst>
+                </p:cNvPr>
+                <p:cNvSpPr txBox="1"/>
+                <p:nvPr/>
+              </p:nvSpPr>
+              <p:spPr>
+                <a:xfrm>
+                  <a:off x="3917733" y="4313625"/>
+                  <a:ext cx="2237684" cy="307777"/>
+                </a:xfrm>
+                <a:prstGeom prst="rect">
+                  <a:avLst/>
+                </a:prstGeom>
+                <a:noFill/>
+              </p:spPr>
+              <p:txBody>
+                <a:bodyPr wrap="square">
+                  <a:spAutoFit/>
+                </a:bodyPr>
+                <a:lstStyle/>
+                <a:p>
+                  <a:pPr algn="ctr"/>
+                  <a:r>
+                    <a:rPr lang="en-US" sz="1400" dirty="0">
+                      <a:solidFill>
+                        <a:schemeClr val="bg1"/>
+                      </a:solidFill>
+                      <a:latin typeface="Times New Roman" panose="02020603050405020304" pitchFamily="18" charset="0"/>
+                      <a:cs typeface="Times New Roman" panose="02020603050405020304" pitchFamily="18" charset="0"/>
+                    </a:rPr>
+                    <a:t>OAI : USRP</a:t>
+                  </a:r>
+                </a:p>
+              </p:txBody>
+            </p:sp>
+            <p:sp>
+              <p:nvSpPr>
+                <p:cNvPr id="55" name="TextBox 54">
+                  <a:extLst>
+                    <a:ext uri="{FF2B5EF4-FFF2-40B4-BE49-F238E27FC236}">
+                      <a16:creationId xmlns:a16="http://schemas.microsoft.com/office/drawing/2014/main" id="{63618131-BAB2-A494-D3FA-1003A22DEB82}"/>
+                    </a:ext>
+                  </a:extLst>
+                </p:cNvPr>
+                <p:cNvSpPr txBox="1"/>
+                <p:nvPr/>
+              </p:nvSpPr>
+              <p:spPr>
+                <a:xfrm>
+                  <a:off x="3933168" y="4007963"/>
+                  <a:ext cx="2206814" cy="307777"/>
+                </a:xfrm>
+                <a:prstGeom prst="rect">
+                  <a:avLst/>
+                </a:prstGeom>
+                <a:noFill/>
+              </p:spPr>
+              <p:txBody>
+                <a:bodyPr wrap="square">
+                  <a:spAutoFit/>
+                </a:bodyPr>
+                <a:lstStyle/>
+                <a:p>
+                  <a:pPr algn="ctr"/>
+                  <a:r>
+                    <a:rPr lang="en-US" sz="1400" dirty="0" err="1">
+                      <a:solidFill>
+                        <a:schemeClr val="bg1"/>
+                      </a:solidFill>
+                      <a:latin typeface="Times New Roman" panose="02020603050405020304" pitchFamily="18" charset="0"/>
+                      <a:cs typeface="Times New Roman" panose="02020603050405020304" pitchFamily="18" charset="0"/>
+                    </a:rPr>
+                    <a:t>srsRAN_Project</a:t>
+                  </a:r>
+                  <a:r>
+                    <a:rPr lang="en-US" sz="1400" dirty="0">
+                      <a:solidFill>
+                        <a:schemeClr val="bg1"/>
+                      </a:solidFill>
+                      <a:latin typeface="Times New Roman" panose="02020603050405020304" pitchFamily="18" charset="0"/>
+                      <a:cs typeface="Times New Roman" panose="02020603050405020304" pitchFamily="18" charset="0"/>
+                    </a:rPr>
+                    <a:t> : </a:t>
+                  </a:r>
+                  <a:r>
+                    <a:rPr lang="en-US" sz="1400" dirty="0" err="1">
+                      <a:solidFill>
+                        <a:schemeClr val="bg1"/>
+                      </a:solidFill>
+                      <a:latin typeface="Times New Roman" panose="02020603050405020304" pitchFamily="18" charset="0"/>
+                      <a:cs typeface="Times New Roman" panose="02020603050405020304" pitchFamily="18" charset="0"/>
+                    </a:rPr>
+                    <a:t>ZeroMQ</a:t>
+                  </a:r>
+                  <a:endParaRPr lang="en-US" sz="1400" dirty="0">
+                    <a:solidFill>
+                      <a:schemeClr val="bg1"/>
+                    </a:solidFill>
+                    <a:latin typeface="Times New Roman" panose="02020603050405020304" pitchFamily="18" charset="0"/>
+                    <a:cs typeface="Times New Roman" panose="02020603050405020304" pitchFamily="18" charset="0"/>
+                  </a:endParaRPr>
+                </a:p>
+              </p:txBody>
+            </p:sp>
+            <p:sp>
+              <p:nvSpPr>
+                <p:cNvPr id="56" name="TextBox 55">
+                  <a:extLst>
+                    <a:ext uri="{FF2B5EF4-FFF2-40B4-BE49-F238E27FC236}">
+                      <a16:creationId xmlns:a16="http://schemas.microsoft.com/office/drawing/2014/main" id="{30B92E24-1934-475B-8C5E-87A7F5F0D58C}"/>
+                    </a:ext>
+                  </a:extLst>
+                </p:cNvPr>
+                <p:cNvSpPr txBox="1"/>
+                <p:nvPr/>
+              </p:nvSpPr>
+              <p:spPr>
+                <a:xfrm>
+                  <a:off x="3929357" y="3702301"/>
+                  <a:ext cx="2206816" cy="307777"/>
+                </a:xfrm>
+                <a:prstGeom prst="rect">
+                  <a:avLst/>
+                </a:prstGeom>
+                <a:noFill/>
+              </p:spPr>
+              <p:txBody>
+                <a:bodyPr wrap="square">
+                  <a:spAutoFit/>
+                </a:bodyPr>
+                <a:lstStyle/>
+                <a:p>
+                  <a:pPr algn="ctr"/>
+                  <a:r>
+                    <a:rPr lang="en-US" sz="1400" dirty="0" err="1">
+                      <a:solidFill>
+                        <a:schemeClr val="bg1"/>
+                      </a:solidFill>
+                      <a:latin typeface="Times New Roman" panose="02020603050405020304" pitchFamily="18" charset="0"/>
+                      <a:cs typeface="Times New Roman" panose="02020603050405020304" pitchFamily="18" charset="0"/>
+                    </a:rPr>
+                    <a:t>srsRAN_Project</a:t>
+                  </a:r>
+                  <a:r>
+                    <a:rPr lang="en-US" sz="1400" dirty="0">
+                      <a:solidFill>
+                        <a:schemeClr val="bg1"/>
+                      </a:solidFill>
+                      <a:latin typeface="Times New Roman" panose="02020603050405020304" pitchFamily="18" charset="0"/>
+                      <a:cs typeface="Times New Roman" panose="02020603050405020304" pitchFamily="18" charset="0"/>
+                    </a:rPr>
+                    <a:t> : USRP</a:t>
+                  </a:r>
+                </a:p>
+              </p:txBody>
+            </p:sp>
+            <p:sp>
+              <p:nvSpPr>
+                <p:cNvPr id="57" name="TextBox 56">
+                  <a:extLst>
+                    <a:ext uri="{FF2B5EF4-FFF2-40B4-BE49-F238E27FC236}">
+                      <a16:creationId xmlns:a16="http://schemas.microsoft.com/office/drawing/2014/main" id="{0B8C8F01-0D4B-E516-9B28-D04D18700C28}"/>
+                    </a:ext>
+                  </a:extLst>
+                </p:cNvPr>
+                <p:cNvSpPr txBox="1"/>
+                <p:nvPr/>
+              </p:nvSpPr>
+              <p:spPr>
+                <a:xfrm>
+                  <a:off x="3933168" y="4924949"/>
+                  <a:ext cx="2206814" cy="307777"/>
+                </a:xfrm>
+                <a:prstGeom prst="rect">
+                  <a:avLst/>
+                </a:prstGeom>
+                <a:noFill/>
+              </p:spPr>
+              <p:txBody>
+                <a:bodyPr wrap="square">
+                  <a:spAutoFit/>
+                </a:bodyPr>
+                <a:lstStyle/>
+                <a:p>
+                  <a:pPr algn="ctr"/>
+                  <a:r>
+                    <a:rPr lang="en-US" sz="1400" dirty="0">
+                      <a:solidFill>
+                        <a:schemeClr val="bg1"/>
+                      </a:solidFill>
+                      <a:latin typeface="Times New Roman" panose="02020603050405020304" pitchFamily="18" charset="0"/>
+                      <a:cs typeface="Times New Roman" panose="02020603050405020304" pitchFamily="18" charset="0"/>
+                    </a:rPr>
+                    <a:t>O-RAN SC : E2 Simulator</a:t>
+                  </a:r>
+                </a:p>
+              </p:txBody>
+            </p:sp>
+            <p:sp>
+              <p:nvSpPr>
+                <p:cNvPr id="58" name="TextBox 57">
+                  <a:extLst>
+                    <a:ext uri="{FF2B5EF4-FFF2-40B4-BE49-F238E27FC236}">
+                      <a16:creationId xmlns:a16="http://schemas.microsoft.com/office/drawing/2014/main" id="{E1692A11-3785-2962-B861-CAA171F11677}"/>
+                    </a:ext>
+                  </a:extLst>
+                </p:cNvPr>
+                <p:cNvSpPr txBox="1"/>
+                <p:nvPr/>
+              </p:nvSpPr>
+              <p:spPr>
+                <a:xfrm>
+                  <a:off x="3941661" y="5227453"/>
+                  <a:ext cx="2239249" cy="307777"/>
+                </a:xfrm>
+                <a:prstGeom prst="rect">
+                  <a:avLst/>
+                </a:prstGeom>
+                <a:noFill/>
+              </p:spPr>
+              <p:txBody>
+                <a:bodyPr wrap="square">
+                  <a:spAutoFit/>
+                </a:bodyPr>
+                <a:lstStyle/>
+                <a:p>
+                  <a:pPr algn="ctr"/>
+                  <a:r>
+                    <a:rPr lang="en-US" sz="1400" b="1" dirty="0">
+                      <a:solidFill>
+                        <a:schemeClr val="bg1"/>
+                      </a:solidFill>
+                      <a:latin typeface="Times New Roman" panose="02020603050405020304" pitchFamily="18" charset="0"/>
+                      <a:cs typeface="Times New Roman" panose="02020603050405020304" pitchFamily="18" charset="0"/>
+                    </a:rPr>
+                    <a:t>Next Generation Node B</a:t>
+                  </a:r>
+                </a:p>
+              </p:txBody>
+            </p:sp>
+            <p:sp>
+              <p:nvSpPr>
+                <p:cNvPr id="59" name="Rectangle 58">
+                  <a:extLst>
+                    <a:ext uri="{FF2B5EF4-FFF2-40B4-BE49-F238E27FC236}">
+                      <a16:creationId xmlns:a16="http://schemas.microsoft.com/office/drawing/2014/main" id="{31BF9939-6DC0-9767-200A-9AA00ED4DFCB}"/>
+                    </a:ext>
+                  </a:extLst>
+                </p:cNvPr>
+                <p:cNvSpPr/>
+                <p:nvPr/>
+              </p:nvSpPr>
+              <p:spPr>
+                <a:xfrm>
+                  <a:off x="3916950" y="4607247"/>
+                  <a:ext cx="2239249" cy="331887"/>
+                </a:xfrm>
+                <a:prstGeom prst="rect">
+                  <a:avLst/>
+                </a:prstGeom>
+                <a:solidFill>
+                  <a:srgbClr val="3A3A3A"/>
+                </a:solidFill>
+                <a:ln>
+                  <a:noFill/>
+                </a:ln>
+              </p:spPr>
+              <p:style>
+                <a:lnRef idx="2">
+                  <a:schemeClr val="accent1">
+                    <a:shade val="15000"/>
+                  </a:schemeClr>
+                </a:lnRef>
+                <a:fillRef idx="1">
+                  <a:schemeClr val="accent1"/>
+                </a:fillRef>
+                <a:effectRef idx="0">
+                  <a:schemeClr val="accent1"/>
+                </a:effectRef>
+                <a:fontRef idx="minor">
+                  <a:schemeClr val="lt1"/>
+                </a:fontRef>
+              </p:style>
+              <p:txBody>
+                <a:bodyPr rtlCol="0" anchor="ctr"/>
+                <a:lstStyle/>
+                <a:p>
+                  <a:pPr algn="ctr"/>
+                  <a:endParaRPr lang="en-US"/>
+                </a:p>
+              </p:txBody>
+            </p:sp>
+            <p:sp>
+              <p:nvSpPr>
+                <p:cNvPr id="60" name="TextBox 59">
+                  <a:extLst>
+                    <a:ext uri="{FF2B5EF4-FFF2-40B4-BE49-F238E27FC236}">
+                      <a16:creationId xmlns:a16="http://schemas.microsoft.com/office/drawing/2014/main" id="{590EF321-DED3-3E92-2D8E-023FCA46B884}"/>
+                    </a:ext>
+                  </a:extLst>
+                </p:cNvPr>
+                <p:cNvSpPr txBox="1"/>
+                <p:nvPr/>
+              </p:nvSpPr>
+              <p:spPr>
+                <a:xfrm>
+                  <a:off x="3933168" y="4619287"/>
+                  <a:ext cx="2206814" cy="307777"/>
+                </a:xfrm>
+                <a:prstGeom prst="rect">
+                  <a:avLst/>
+                </a:prstGeom>
+                <a:noFill/>
+              </p:spPr>
+              <p:txBody>
+                <a:bodyPr wrap="square">
+                  <a:spAutoFit/>
+                </a:bodyPr>
+                <a:lstStyle/>
+                <a:p>
+                  <a:pPr algn="ctr"/>
+                  <a:r>
+                    <a:rPr lang="en-US" sz="1400" dirty="0">
+                      <a:solidFill>
+                        <a:schemeClr val="bg1"/>
+                      </a:solidFill>
+                      <a:latin typeface="Times New Roman" panose="02020603050405020304" pitchFamily="18" charset="0"/>
+                      <a:cs typeface="Times New Roman" panose="02020603050405020304" pitchFamily="18" charset="0"/>
+                    </a:rPr>
+                    <a:t>OAI : RF Simulator</a:t>
+                  </a:r>
+                </a:p>
+              </p:txBody>
+            </p:sp>
+            <p:sp>
+              <p:nvSpPr>
+                <p:cNvPr id="61" name="Rectangle: Rounded Corners 60">
+                  <a:extLst>
+                    <a:ext uri="{FF2B5EF4-FFF2-40B4-BE49-F238E27FC236}">
+                      <a16:creationId xmlns:a16="http://schemas.microsoft.com/office/drawing/2014/main" id="{26FE37A3-1994-C0D5-B06F-E32D4E2A9E9D}"/>
+                    </a:ext>
+                  </a:extLst>
+                </p:cNvPr>
+                <p:cNvSpPr/>
+                <p:nvPr/>
+              </p:nvSpPr>
+              <p:spPr>
+                <a:xfrm>
+                  <a:off x="3916951" y="3691197"/>
+                  <a:ext cx="2239249" cy="1534218"/>
+                </a:xfrm>
+                <a:prstGeom prst="roundRect">
+                  <a:avLst>
+                    <a:gd name="adj" fmla="val 5819"/>
+                  </a:avLst>
+                </a:prstGeom>
+                <a:noFill/>
+                <a:ln w="12700">
+                  <a:solidFill>
+                    <a:schemeClr val="bg1"/>
+                  </a:solidFill>
+                </a:ln>
+              </p:spPr>
+              <p:style>
+                <a:lnRef idx="2">
+                  <a:schemeClr val="accent1">
+                    <a:shade val="15000"/>
+                  </a:schemeClr>
+                </a:lnRef>
+                <a:fillRef idx="1">
+                  <a:schemeClr val="accent1"/>
+                </a:fillRef>
+                <a:effectRef idx="0">
+                  <a:schemeClr val="accent1"/>
+                </a:effectRef>
+                <a:fontRef idx="minor">
+                  <a:schemeClr val="lt1"/>
+                </a:fontRef>
+              </p:style>
+              <p:txBody>
+                <a:bodyPr rtlCol="0" anchor="ctr"/>
+                <a:lstStyle/>
+                <a:p>
+                  <a:pPr algn="ctr"/>
+                  <a:endParaRPr lang="en-US" dirty="0">
+                    <a:latin typeface="Times New Roman" panose="02020603050405020304" pitchFamily="18" charset="0"/>
+                    <a:cs typeface="Times New Roman" panose="02020603050405020304" pitchFamily="18" charset="0"/>
+                  </a:endParaRPr>
+                </a:p>
+              </p:txBody>
+            </p:sp>
+          </p:grpSp>
+          <p:grpSp>
+            <p:nvGrpSpPr>
+              <p:cNvPr id="26" name="Group 25">
+                <a:extLst>
+                  <a:ext uri="{FF2B5EF4-FFF2-40B4-BE49-F238E27FC236}">
+                    <a16:creationId xmlns:a16="http://schemas.microsoft.com/office/drawing/2014/main" id="{738FE746-EA93-3F84-2E49-EB596828B714}"/>
+                  </a:ext>
+                </a:extLst>
+              </p:cNvPr>
+              <p:cNvGrpSpPr/>
+              <p:nvPr/>
+            </p:nvGrpSpPr>
+            <p:grpSpPr>
+              <a:xfrm>
+                <a:off x="778869" y="4232789"/>
+                <a:ext cx="2263961" cy="1844033"/>
+                <a:chOff x="3916949" y="3691197"/>
+                <a:chExt cx="2263961" cy="1844033"/>
+              </a:xfrm>
+            </p:grpSpPr>
+            <p:sp>
+              <p:nvSpPr>
+                <p:cNvPr id="40" name="Rectangle: Rounded Corners 39">
+                  <a:extLst>
+                    <a:ext uri="{FF2B5EF4-FFF2-40B4-BE49-F238E27FC236}">
+                      <a16:creationId xmlns:a16="http://schemas.microsoft.com/office/drawing/2014/main" id="{06932116-A947-404E-B203-2C38A8952496}"/>
+                    </a:ext>
+                  </a:extLst>
+                </p:cNvPr>
+                <p:cNvSpPr/>
+                <p:nvPr/>
+              </p:nvSpPr>
+              <p:spPr>
+                <a:xfrm>
+                  <a:off x="3916949" y="3692460"/>
+                  <a:ext cx="2239249" cy="1531642"/>
+                </a:xfrm>
+                <a:prstGeom prst="roundRect">
+                  <a:avLst>
+                    <a:gd name="adj" fmla="val 5859"/>
+                  </a:avLst>
+                </a:prstGeom>
+                <a:solidFill>
+                  <a:srgbClr val="262626"/>
+                </a:solidFill>
+                <a:ln w="28575">
+                  <a:noFill/>
+                </a:ln>
+              </p:spPr>
+              <p:style>
+                <a:lnRef idx="2">
+                  <a:schemeClr val="accent1">
+                    <a:shade val="15000"/>
+                  </a:schemeClr>
+                </a:lnRef>
+                <a:fillRef idx="1">
+                  <a:schemeClr val="accent1"/>
+                </a:fillRef>
+                <a:effectRef idx="0">
+                  <a:schemeClr val="accent1"/>
+                </a:effectRef>
+                <a:fontRef idx="minor">
+                  <a:schemeClr val="lt1"/>
+                </a:fontRef>
+              </p:style>
+              <p:txBody>
+                <a:bodyPr rtlCol="0" anchor="ctr"/>
+                <a:lstStyle/>
+                <a:p>
+                  <a:pPr algn="ctr"/>
+                  <a:endParaRPr lang="en-US" dirty="0">
+                    <a:latin typeface="Times New Roman" panose="02020603050405020304" pitchFamily="18" charset="0"/>
+                    <a:cs typeface="Times New Roman" panose="02020603050405020304" pitchFamily="18" charset="0"/>
+                  </a:endParaRPr>
+                </a:p>
+              </p:txBody>
+            </p:sp>
+            <p:sp>
+              <p:nvSpPr>
+                <p:cNvPr id="41" name="Rectangle: Top Corners Rounded 40">
+                  <a:extLst>
+                    <a:ext uri="{FF2B5EF4-FFF2-40B4-BE49-F238E27FC236}">
+                      <a16:creationId xmlns:a16="http://schemas.microsoft.com/office/drawing/2014/main" id="{AB9DCAB6-A723-7C47-DA69-4A1D35F5520F}"/>
+                    </a:ext>
+                  </a:extLst>
+                </p:cNvPr>
+                <p:cNvSpPr/>
+                <p:nvPr/>
+              </p:nvSpPr>
+              <p:spPr>
+                <a:xfrm rot="10800000">
+                  <a:off x="3916952" y="4613172"/>
+                  <a:ext cx="2239248" cy="323588"/>
+                </a:xfrm>
+                <a:prstGeom prst="round2SameRect">
+                  <a:avLst>
+                    <a:gd name="adj1" fmla="val 28890"/>
+                    <a:gd name="adj2" fmla="val 0"/>
+                  </a:avLst>
+                </a:prstGeom>
+                <a:solidFill>
+                  <a:srgbClr val="F2F2F2"/>
+                </a:solidFill>
+                <a:ln>
+                  <a:noFill/>
+                </a:ln>
+              </p:spPr>
+              <p:style>
+                <a:lnRef idx="2">
+                  <a:schemeClr val="accent1">
+                    <a:shade val="15000"/>
+                  </a:schemeClr>
+                </a:lnRef>
+                <a:fillRef idx="1">
+                  <a:schemeClr val="accent1"/>
+                </a:fillRef>
+                <a:effectRef idx="0">
+                  <a:schemeClr val="accent1"/>
+                </a:effectRef>
+                <a:fontRef idx="minor">
+                  <a:schemeClr val="lt1"/>
+                </a:fontRef>
+              </p:style>
+              <p:txBody>
+                <a:bodyPr rtlCol="0" anchor="ctr"/>
+                <a:lstStyle/>
+                <a:p>
+                  <a:pPr algn="ctr"/>
+                  <a:endParaRPr lang="en-US"/>
+                </a:p>
+              </p:txBody>
+            </p:sp>
+            <p:sp>
+              <p:nvSpPr>
+                <p:cNvPr id="42" name="Rectangle 41">
+                  <a:extLst>
+                    <a:ext uri="{FF2B5EF4-FFF2-40B4-BE49-F238E27FC236}">
+                      <a16:creationId xmlns:a16="http://schemas.microsoft.com/office/drawing/2014/main" id="{059024B3-E725-8F4D-57EF-E266332C0F1D}"/>
+                    </a:ext>
+                  </a:extLst>
+                </p:cNvPr>
+                <p:cNvSpPr/>
+                <p:nvPr/>
+              </p:nvSpPr>
+              <p:spPr>
+                <a:xfrm>
+                  <a:off x="3916951" y="3990559"/>
+                  <a:ext cx="2239249" cy="323587"/>
+                </a:xfrm>
+                <a:prstGeom prst="rect">
+                  <a:avLst/>
+                </a:prstGeom>
+                <a:solidFill>
+                  <a:srgbClr val="3A3A3A"/>
+                </a:solidFill>
+                <a:ln>
+                  <a:noFill/>
+                </a:ln>
+              </p:spPr>
+              <p:style>
+                <a:lnRef idx="2">
+                  <a:schemeClr val="accent1">
+                    <a:shade val="15000"/>
+                  </a:schemeClr>
+                </a:lnRef>
+                <a:fillRef idx="1">
+                  <a:schemeClr val="accent1"/>
+                </a:fillRef>
+                <a:effectRef idx="0">
+                  <a:schemeClr val="accent1"/>
+                </a:effectRef>
+                <a:fontRef idx="minor">
+                  <a:schemeClr val="lt1"/>
+                </a:fontRef>
+              </p:style>
+              <p:txBody>
+                <a:bodyPr rtlCol="0" anchor="ctr"/>
+                <a:lstStyle/>
+                <a:p>
+                  <a:pPr algn="ctr"/>
+                  <a:endParaRPr lang="en-US"/>
+                </a:p>
+              </p:txBody>
+            </p:sp>
+            <p:sp>
+              <p:nvSpPr>
+                <p:cNvPr id="43" name="TextBox 42">
+                  <a:extLst>
+                    <a:ext uri="{FF2B5EF4-FFF2-40B4-BE49-F238E27FC236}">
+                      <a16:creationId xmlns:a16="http://schemas.microsoft.com/office/drawing/2014/main" id="{8F539C13-3DA0-CDD5-906F-B7B23E40A3DD}"/>
+                    </a:ext>
+                  </a:extLst>
+                </p:cNvPr>
+                <p:cNvSpPr txBox="1"/>
+                <p:nvPr/>
+              </p:nvSpPr>
+              <p:spPr>
+                <a:xfrm>
+                  <a:off x="3916952" y="4313625"/>
+                  <a:ext cx="2239246" cy="307777"/>
+                </a:xfrm>
+                <a:prstGeom prst="rect">
+                  <a:avLst/>
+                </a:prstGeom>
+                <a:noFill/>
+              </p:spPr>
+              <p:txBody>
+                <a:bodyPr wrap="square">
+                  <a:spAutoFit/>
+                </a:bodyPr>
+                <a:lstStyle/>
+                <a:p>
+                  <a:pPr algn="ctr"/>
+                  <a:r>
+                    <a:rPr lang="en-US" sz="1400" dirty="0">
+                      <a:solidFill>
+                        <a:schemeClr val="bg1"/>
+                      </a:solidFill>
+                      <a:latin typeface="Times New Roman" panose="02020603050405020304" pitchFamily="18" charset="0"/>
+                      <a:cs typeface="Times New Roman" panose="02020603050405020304" pitchFamily="18" charset="0"/>
+                    </a:rPr>
+                    <a:t>OAI : USRP</a:t>
+                  </a:r>
+                </a:p>
+              </p:txBody>
+            </p:sp>
+            <p:sp>
+              <p:nvSpPr>
+                <p:cNvPr id="44" name="TextBox 43">
+                  <a:extLst>
+                    <a:ext uri="{FF2B5EF4-FFF2-40B4-BE49-F238E27FC236}">
+                      <a16:creationId xmlns:a16="http://schemas.microsoft.com/office/drawing/2014/main" id="{DA83BE73-067A-6A36-CE79-E9C8F7848B03}"/>
+                    </a:ext>
+                  </a:extLst>
+                </p:cNvPr>
+                <p:cNvSpPr txBox="1"/>
+                <p:nvPr/>
+              </p:nvSpPr>
+              <p:spPr>
+                <a:xfrm>
+                  <a:off x="3918857" y="4007963"/>
+                  <a:ext cx="2239246" cy="307777"/>
+                </a:xfrm>
+                <a:prstGeom prst="rect">
+                  <a:avLst/>
+                </a:prstGeom>
+                <a:noFill/>
+              </p:spPr>
+              <p:txBody>
+                <a:bodyPr wrap="square">
+                  <a:spAutoFit/>
+                </a:bodyPr>
+                <a:lstStyle/>
+                <a:p>
+                  <a:pPr algn="ctr"/>
+                  <a:r>
+                    <a:rPr lang="en-US" sz="1400" dirty="0">
+                      <a:solidFill>
+                        <a:schemeClr val="bg1"/>
+                      </a:solidFill>
+                      <a:latin typeface="Times New Roman" panose="02020603050405020304" pitchFamily="18" charset="0"/>
+                      <a:cs typeface="Times New Roman" panose="02020603050405020304" pitchFamily="18" charset="0"/>
+                    </a:rPr>
+                    <a:t>srsRAN_4G : </a:t>
+                  </a:r>
+                  <a:r>
+                    <a:rPr lang="en-US" sz="1400" dirty="0" err="1">
+                      <a:solidFill>
+                        <a:schemeClr val="bg1"/>
+                      </a:solidFill>
+                      <a:latin typeface="Times New Roman" panose="02020603050405020304" pitchFamily="18" charset="0"/>
+                      <a:cs typeface="Times New Roman" panose="02020603050405020304" pitchFamily="18" charset="0"/>
+                    </a:rPr>
+                    <a:t>ZeroMQ</a:t>
+                  </a:r>
+                  <a:endParaRPr lang="en-US" sz="1400" dirty="0">
+                    <a:solidFill>
+                      <a:schemeClr val="bg1"/>
+                    </a:solidFill>
+                    <a:latin typeface="Times New Roman" panose="02020603050405020304" pitchFamily="18" charset="0"/>
+                    <a:cs typeface="Times New Roman" panose="02020603050405020304" pitchFamily="18" charset="0"/>
+                  </a:endParaRPr>
+                </a:p>
+              </p:txBody>
+            </p:sp>
+            <p:sp>
+              <p:nvSpPr>
+                <p:cNvPr id="45" name="TextBox 44">
+                  <a:extLst>
+                    <a:ext uri="{FF2B5EF4-FFF2-40B4-BE49-F238E27FC236}">
+                      <a16:creationId xmlns:a16="http://schemas.microsoft.com/office/drawing/2014/main" id="{592A8990-5727-46D2-F53B-BB54ADC83038}"/>
+                    </a:ext>
+                  </a:extLst>
+                </p:cNvPr>
+                <p:cNvSpPr txBox="1"/>
+                <p:nvPr/>
+              </p:nvSpPr>
+              <p:spPr>
+                <a:xfrm>
+                  <a:off x="3916951" y="3702301"/>
+                  <a:ext cx="2239248" cy="307777"/>
+                </a:xfrm>
+                <a:prstGeom prst="rect">
+                  <a:avLst/>
+                </a:prstGeom>
+                <a:noFill/>
+              </p:spPr>
+              <p:txBody>
+                <a:bodyPr wrap="square">
+                  <a:spAutoFit/>
+                </a:bodyPr>
+                <a:lstStyle/>
+                <a:p>
+                  <a:pPr algn="ctr"/>
+                  <a:r>
+                    <a:rPr lang="en-US" sz="1400" dirty="0">
+                      <a:solidFill>
+                        <a:schemeClr val="bg1"/>
+                      </a:solidFill>
+                      <a:latin typeface="Times New Roman" panose="02020603050405020304" pitchFamily="18" charset="0"/>
+                      <a:cs typeface="Times New Roman" panose="02020603050405020304" pitchFamily="18" charset="0"/>
+                    </a:rPr>
+                    <a:t>srsRAN_4G : USRP</a:t>
+                  </a:r>
+                </a:p>
+              </p:txBody>
+            </p:sp>
+            <p:sp>
+              <p:nvSpPr>
+                <p:cNvPr id="46" name="TextBox 45">
+                  <a:extLst>
+                    <a:ext uri="{FF2B5EF4-FFF2-40B4-BE49-F238E27FC236}">
+                      <a16:creationId xmlns:a16="http://schemas.microsoft.com/office/drawing/2014/main" id="{52E6A652-08FB-05C2-F5D5-25D5E1D5B523}"/>
+                    </a:ext>
+                  </a:extLst>
+                </p:cNvPr>
+                <p:cNvSpPr txBox="1"/>
+                <p:nvPr/>
+              </p:nvSpPr>
+              <p:spPr>
+                <a:xfrm>
+                  <a:off x="3916952" y="4924949"/>
+                  <a:ext cx="2239246" cy="307777"/>
+                </a:xfrm>
+                <a:prstGeom prst="rect">
+                  <a:avLst/>
+                </a:prstGeom>
+                <a:noFill/>
+              </p:spPr>
+              <p:txBody>
+                <a:bodyPr wrap="square">
+                  <a:spAutoFit/>
+                </a:bodyPr>
+                <a:lstStyle/>
+                <a:p>
+                  <a:pPr algn="ctr"/>
+                  <a:r>
+                    <a:rPr lang="en-US" sz="1400" dirty="0">
+                      <a:solidFill>
+                        <a:schemeClr val="bg1"/>
+                      </a:solidFill>
+                      <a:latin typeface="Times New Roman" panose="02020603050405020304" pitchFamily="18" charset="0"/>
+                      <a:cs typeface="Times New Roman" panose="02020603050405020304" pitchFamily="18" charset="0"/>
+                    </a:rPr>
+                    <a:t>Mobile Phone</a:t>
+                  </a:r>
+                </a:p>
+              </p:txBody>
+            </p:sp>
+            <p:sp>
+              <p:nvSpPr>
+                <p:cNvPr id="47" name="TextBox 46">
+                  <a:extLst>
+                    <a:ext uri="{FF2B5EF4-FFF2-40B4-BE49-F238E27FC236}">
+                      <a16:creationId xmlns:a16="http://schemas.microsoft.com/office/drawing/2014/main" id="{29036365-8CEE-A19F-B173-8499CDCFCABA}"/>
+                    </a:ext>
+                  </a:extLst>
+                </p:cNvPr>
+                <p:cNvSpPr txBox="1"/>
+                <p:nvPr/>
+              </p:nvSpPr>
+              <p:spPr>
+                <a:xfrm>
+                  <a:off x="3941661" y="5227453"/>
+                  <a:ext cx="2239249" cy="307777"/>
+                </a:xfrm>
+                <a:prstGeom prst="rect">
+                  <a:avLst/>
+                </a:prstGeom>
+                <a:noFill/>
+              </p:spPr>
+              <p:txBody>
+                <a:bodyPr wrap="square">
+                  <a:spAutoFit/>
+                </a:bodyPr>
+                <a:lstStyle/>
+                <a:p>
+                  <a:pPr algn="ctr"/>
+                  <a:r>
+                    <a:rPr lang="en-US" sz="1400" b="1" dirty="0">
+                      <a:solidFill>
+                        <a:schemeClr val="bg1"/>
+                      </a:solidFill>
+                      <a:latin typeface="Times New Roman" panose="02020603050405020304" pitchFamily="18" charset="0"/>
+                      <a:cs typeface="Times New Roman" panose="02020603050405020304" pitchFamily="18" charset="0"/>
+                    </a:rPr>
+                    <a:t>User Equipment</a:t>
+                  </a:r>
+                </a:p>
+              </p:txBody>
+            </p:sp>
+            <p:sp>
+              <p:nvSpPr>
+                <p:cNvPr id="48" name="Rectangle 47">
+                  <a:extLst>
+                    <a:ext uri="{FF2B5EF4-FFF2-40B4-BE49-F238E27FC236}">
+                      <a16:creationId xmlns:a16="http://schemas.microsoft.com/office/drawing/2014/main" id="{D925D158-702C-A0D3-8A57-4736AFF32367}"/>
+                    </a:ext>
+                  </a:extLst>
+                </p:cNvPr>
+                <p:cNvSpPr/>
+                <p:nvPr/>
+              </p:nvSpPr>
+              <p:spPr>
+                <a:xfrm>
+                  <a:off x="3916950" y="4611639"/>
+                  <a:ext cx="2239249" cy="327496"/>
+                </a:xfrm>
+                <a:prstGeom prst="rect">
+                  <a:avLst/>
+                </a:prstGeom>
+                <a:solidFill>
+                  <a:srgbClr val="3A3A3A"/>
+                </a:solidFill>
+                <a:ln>
+                  <a:noFill/>
+                </a:ln>
+              </p:spPr>
+              <p:style>
+                <a:lnRef idx="2">
+                  <a:schemeClr val="accent1">
+                    <a:shade val="15000"/>
+                  </a:schemeClr>
+                </a:lnRef>
+                <a:fillRef idx="1">
+                  <a:schemeClr val="accent1"/>
+                </a:fillRef>
+                <a:effectRef idx="0">
+                  <a:schemeClr val="accent1"/>
+                </a:effectRef>
+                <a:fontRef idx="minor">
+                  <a:schemeClr val="lt1"/>
+                </a:fontRef>
+              </p:style>
+              <p:txBody>
+                <a:bodyPr rtlCol="0" anchor="ctr"/>
+                <a:lstStyle/>
+                <a:p>
+                  <a:pPr algn="ctr"/>
+                  <a:endParaRPr lang="en-US"/>
+                </a:p>
+              </p:txBody>
+            </p:sp>
+            <p:sp>
+              <p:nvSpPr>
+                <p:cNvPr id="49" name="TextBox 48">
+                  <a:extLst>
+                    <a:ext uri="{FF2B5EF4-FFF2-40B4-BE49-F238E27FC236}">
+                      <a16:creationId xmlns:a16="http://schemas.microsoft.com/office/drawing/2014/main" id="{D8772B8B-14B6-19AA-9DFC-643F7AF6818D}"/>
+                    </a:ext>
+                  </a:extLst>
+                </p:cNvPr>
+                <p:cNvSpPr txBox="1"/>
+                <p:nvPr/>
+              </p:nvSpPr>
+              <p:spPr>
+                <a:xfrm>
+                  <a:off x="3916952" y="4619287"/>
+                  <a:ext cx="2239246" cy="307777"/>
+                </a:xfrm>
+                <a:prstGeom prst="rect">
+                  <a:avLst/>
+                </a:prstGeom>
+                <a:noFill/>
+              </p:spPr>
+              <p:txBody>
+                <a:bodyPr wrap="square">
+                  <a:spAutoFit/>
+                </a:bodyPr>
+                <a:lstStyle/>
+                <a:p>
+                  <a:pPr algn="ctr"/>
+                  <a:r>
+                    <a:rPr lang="en-US" sz="1400" dirty="0">
+                      <a:solidFill>
+                        <a:schemeClr val="bg1"/>
+                      </a:solidFill>
+                      <a:latin typeface="Times New Roman" panose="02020603050405020304" pitchFamily="18" charset="0"/>
+                      <a:cs typeface="Times New Roman" panose="02020603050405020304" pitchFamily="18" charset="0"/>
+                    </a:rPr>
+                    <a:t>OAI : RF Simulator</a:t>
+                  </a:r>
+                </a:p>
+              </p:txBody>
+            </p:sp>
+            <p:sp>
+              <p:nvSpPr>
+                <p:cNvPr id="50" name="Rectangle: Rounded Corners 49">
+                  <a:extLst>
+                    <a:ext uri="{FF2B5EF4-FFF2-40B4-BE49-F238E27FC236}">
+                      <a16:creationId xmlns:a16="http://schemas.microsoft.com/office/drawing/2014/main" id="{A0CE4E09-8DF3-9F5F-9E61-B32DC3A4E44A}"/>
+                    </a:ext>
+                  </a:extLst>
+                </p:cNvPr>
+                <p:cNvSpPr/>
+                <p:nvPr/>
+              </p:nvSpPr>
+              <p:spPr>
+                <a:xfrm>
+                  <a:off x="3916951" y="3691197"/>
+                  <a:ext cx="2239249" cy="1534218"/>
+                </a:xfrm>
+                <a:prstGeom prst="roundRect">
+                  <a:avLst>
+                    <a:gd name="adj" fmla="val 5819"/>
+                  </a:avLst>
+                </a:prstGeom>
+                <a:noFill/>
+                <a:ln w="12700">
+                  <a:solidFill>
+                    <a:schemeClr val="bg1"/>
+                  </a:solidFill>
+                </a:ln>
+              </p:spPr>
+              <p:style>
+                <a:lnRef idx="2">
+                  <a:schemeClr val="accent1">
+                    <a:shade val="15000"/>
+                  </a:schemeClr>
+                </a:lnRef>
+                <a:fillRef idx="1">
+                  <a:schemeClr val="accent1"/>
+                </a:fillRef>
+                <a:effectRef idx="0">
+                  <a:schemeClr val="accent1"/>
+                </a:effectRef>
+                <a:fontRef idx="minor">
+                  <a:schemeClr val="lt1"/>
+                </a:fontRef>
+              </p:style>
+              <p:txBody>
+                <a:bodyPr rtlCol="0" anchor="ctr"/>
+                <a:lstStyle/>
+                <a:p>
+                  <a:pPr algn="ctr"/>
+                  <a:endParaRPr lang="en-US" dirty="0">
+                    <a:latin typeface="Times New Roman" panose="02020603050405020304" pitchFamily="18" charset="0"/>
+                    <a:cs typeface="Times New Roman" panose="02020603050405020304" pitchFamily="18" charset="0"/>
+                  </a:endParaRPr>
+                </a:p>
+              </p:txBody>
+            </p:sp>
+          </p:grpSp>
+          <p:grpSp>
+            <p:nvGrpSpPr>
+              <p:cNvPr id="27" name="Group 26">
+                <a:extLst>
+                  <a:ext uri="{FF2B5EF4-FFF2-40B4-BE49-F238E27FC236}">
+                    <a16:creationId xmlns:a16="http://schemas.microsoft.com/office/drawing/2014/main" id="{5726D8C5-614D-56A4-C7DA-2AE1FE738FC2}"/>
+                  </a:ext>
+                </a:extLst>
+              </p:cNvPr>
+              <p:cNvGrpSpPr/>
+              <p:nvPr/>
+            </p:nvGrpSpPr>
+            <p:grpSpPr>
+              <a:xfrm>
+                <a:off x="6586191" y="5146289"/>
+                <a:ext cx="2239250" cy="930533"/>
+                <a:chOff x="6696060" y="5146289"/>
+                <a:chExt cx="2239250" cy="930533"/>
+              </a:xfrm>
+            </p:grpSpPr>
+            <p:grpSp>
+              <p:nvGrpSpPr>
+                <p:cNvPr id="32" name="Group 31">
+                  <a:extLst>
+                    <a:ext uri="{FF2B5EF4-FFF2-40B4-BE49-F238E27FC236}">
+                      <a16:creationId xmlns:a16="http://schemas.microsoft.com/office/drawing/2014/main" id="{820554D9-5169-E86E-F3E1-6FD7B1FB0948}"/>
+                    </a:ext>
+                  </a:extLst>
+                </p:cNvPr>
+                <p:cNvGrpSpPr/>
+                <p:nvPr/>
+              </p:nvGrpSpPr>
+              <p:grpSpPr>
+                <a:xfrm>
+                  <a:off x="6696060" y="5146289"/>
+                  <a:ext cx="2239250" cy="618690"/>
+                  <a:chOff x="6808092" y="5153909"/>
+                  <a:chExt cx="2239250" cy="618690"/>
+                </a:xfrm>
+              </p:grpSpPr>
+              <p:grpSp>
+                <p:nvGrpSpPr>
+                  <p:cNvPr id="34" name="Group 33">
+                    <a:extLst>
+                      <a:ext uri="{FF2B5EF4-FFF2-40B4-BE49-F238E27FC236}">
+                        <a16:creationId xmlns:a16="http://schemas.microsoft.com/office/drawing/2014/main" id="{0E46935C-6F39-D19A-CFCF-D62A86034828}"/>
+                      </a:ext>
+                    </a:extLst>
+                  </p:cNvPr>
+                  <p:cNvGrpSpPr/>
+                  <p:nvPr/>
+                </p:nvGrpSpPr>
+                <p:grpSpPr>
+                  <a:xfrm>
+                    <a:off x="6808092" y="5153909"/>
+                    <a:ext cx="2239249" cy="618690"/>
+                    <a:chOff x="4021891" y="2194877"/>
+                    <a:chExt cx="2239249" cy="618690"/>
+                  </a:xfrm>
+                </p:grpSpPr>
+                <p:sp>
+                  <p:nvSpPr>
+                    <p:cNvPr id="37" name="Rectangle: Rounded Corners 36">
+                      <a:extLst>
+                        <a:ext uri="{FF2B5EF4-FFF2-40B4-BE49-F238E27FC236}">
+                          <a16:creationId xmlns:a16="http://schemas.microsoft.com/office/drawing/2014/main" id="{2B8A2F6C-2A67-260F-6F24-A4C6D93DEC79}"/>
+                        </a:ext>
+                      </a:extLst>
+                    </p:cNvPr>
+                    <p:cNvSpPr/>
+                    <p:nvPr/>
+                  </p:nvSpPr>
+                  <p:spPr>
+                    <a:xfrm>
+                      <a:off x="4021891" y="2194877"/>
+                      <a:ext cx="2239249" cy="618689"/>
+                    </a:xfrm>
+                    <a:prstGeom prst="roundRect">
+                      <a:avLst>
+                        <a:gd name="adj" fmla="val 12974"/>
+                      </a:avLst>
+                    </a:prstGeom>
+                    <a:solidFill>
+                      <a:srgbClr val="262626"/>
+                    </a:solidFill>
+                    <a:ln w="28575">
+                      <a:noFill/>
+                    </a:ln>
+                  </p:spPr>
+                  <p:style>
+                    <a:lnRef idx="2">
+                      <a:schemeClr val="accent1">
+                        <a:shade val="15000"/>
+                      </a:schemeClr>
+                    </a:lnRef>
+                    <a:fillRef idx="1">
+                      <a:schemeClr val="accent1"/>
+                    </a:fillRef>
+                    <a:effectRef idx="0">
+                      <a:schemeClr val="accent1"/>
+                    </a:effectRef>
+                    <a:fontRef idx="minor">
+                      <a:schemeClr val="lt1"/>
+                    </a:fontRef>
+                  </p:style>
+                  <p:txBody>
+                    <a:bodyPr rtlCol="0" anchor="ctr"/>
+                    <a:lstStyle/>
+                    <a:p>
+                      <a:pPr algn="ctr"/>
+                      <a:endParaRPr lang="en-US" dirty="0">
+                        <a:latin typeface="Times New Roman" panose="02020603050405020304" pitchFamily="18" charset="0"/>
+                        <a:cs typeface="Times New Roman" panose="02020603050405020304" pitchFamily="18" charset="0"/>
+                      </a:endParaRPr>
+                    </a:p>
+                  </p:txBody>
+                </p:sp>
+                <p:sp>
+                  <p:nvSpPr>
+                    <p:cNvPr id="38" name="Rectangle: Top Corners Rounded 37">
+                      <a:extLst>
+                        <a:ext uri="{FF2B5EF4-FFF2-40B4-BE49-F238E27FC236}">
+                          <a16:creationId xmlns:a16="http://schemas.microsoft.com/office/drawing/2014/main" id="{DF0159E4-F128-74A1-8A96-41E2DB712167}"/>
+                        </a:ext>
+                      </a:extLst>
+                    </p:cNvPr>
+                    <p:cNvSpPr/>
+                    <p:nvPr/>
+                  </p:nvSpPr>
+                  <p:spPr>
+                    <a:xfrm flipV="1">
+                      <a:off x="4022672" y="2504431"/>
+                      <a:ext cx="2238468" cy="307778"/>
+                    </a:xfrm>
+                    <a:prstGeom prst="round2SameRect">
+                      <a:avLst>
+                        <a:gd name="adj1" fmla="val 28674"/>
+                        <a:gd name="adj2" fmla="val 0"/>
+                      </a:avLst>
+                    </a:prstGeom>
+                    <a:solidFill>
+                      <a:srgbClr val="3A3A3A"/>
+                    </a:solidFill>
+                    <a:ln>
+                      <a:noFill/>
+                    </a:ln>
+                  </p:spPr>
+                  <p:style>
+                    <a:lnRef idx="2">
+                      <a:schemeClr val="accent1">
+                        <a:shade val="15000"/>
+                      </a:schemeClr>
+                    </a:lnRef>
+                    <a:fillRef idx="1">
+                      <a:schemeClr val="accent1"/>
+                    </a:fillRef>
+                    <a:effectRef idx="0">
+                      <a:schemeClr val="accent1"/>
+                    </a:effectRef>
+                    <a:fontRef idx="minor">
+                      <a:schemeClr val="lt1"/>
+                    </a:fontRef>
+                  </p:style>
+                  <p:txBody>
+                    <a:bodyPr rtlCol="0" anchor="ctr"/>
+                    <a:lstStyle/>
+                    <a:p>
+                      <a:pPr algn="ctr"/>
+                      <a:endParaRPr lang="en-US"/>
+                    </a:p>
+                  </p:txBody>
+                </p:sp>
+                <p:sp>
+                  <p:nvSpPr>
+                    <p:cNvPr id="39" name="Rectangle: Rounded Corners 38">
+                      <a:extLst>
+                        <a:ext uri="{FF2B5EF4-FFF2-40B4-BE49-F238E27FC236}">
+                          <a16:creationId xmlns:a16="http://schemas.microsoft.com/office/drawing/2014/main" id="{B5C5DF2A-4F80-58F0-7F14-9A6CAA7EA5E2}"/>
+                        </a:ext>
+                      </a:extLst>
+                    </p:cNvPr>
+                    <p:cNvSpPr/>
+                    <p:nvPr/>
+                  </p:nvSpPr>
+                  <p:spPr>
+                    <a:xfrm>
+                      <a:off x="4021891" y="2194878"/>
+                      <a:ext cx="2239249" cy="618689"/>
+                    </a:xfrm>
+                    <a:prstGeom prst="roundRect">
+                      <a:avLst>
+                        <a:gd name="adj" fmla="val 12974"/>
+                      </a:avLst>
+                    </a:prstGeom>
+                    <a:noFill/>
+                    <a:ln w="12700">
+                      <a:solidFill>
+                        <a:schemeClr val="bg1"/>
+                      </a:solidFill>
+                    </a:ln>
+                  </p:spPr>
+                  <p:style>
+                    <a:lnRef idx="2">
+                      <a:schemeClr val="accent1">
+                        <a:shade val="15000"/>
+                      </a:schemeClr>
+                    </a:lnRef>
+                    <a:fillRef idx="1">
+                      <a:schemeClr val="accent1"/>
+                    </a:fillRef>
+                    <a:effectRef idx="0">
+                      <a:schemeClr val="accent1"/>
+                    </a:effectRef>
+                    <a:fontRef idx="minor">
+                      <a:schemeClr val="lt1"/>
+                    </a:fontRef>
+                  </p:style>
+                  <p:txBody>
+                    <a:bodyPr rtlCol="0" anchor="ctr"/>
+                    <a:lstStyle/>
+                    <a:p>
+                      <a:pPr algn="ctr"/>
+                      <a:endParaRPr lang="en-US" dirty="0">
+                        <a:latin typeface="Times New Roman" panose="02020603050405020304" pitchFamily="18" charset="0"/>
+                        <a:cs typeface="Times New Roman" panose="02020603050405020304" pitchFamily="18" charset="0"/>
+                      </a:endParaRPr>
+                    </a:p>
+                  </p:txBody>
+                </p:sp>
+              </p:grpSp>
+              <p:sp>
+                <p:nvSpPr>
+                  <p:cNvPr id="35" name="TextBox 34">
+                    <a:extLst>
+                      <a:ext uri="{FF2B5EF4-FFF2-40B4-BE49-F238E27FC236}">
+                        <a16:creationId xmlns:a16="http://schemas.microsoft.com/office/drawing/2014/main" id="{3DB1D612-0DA6-DFDD-7974-3E9354FCC1D8}"/>
+                      </a:ext>
+                    </a:extLst>
+                  </p:cNvPr>
+                  <p:cNvSpPr txBox="1"/>
+                  <p:nvPr/>
+                </p:nvSpPr>
+                <p:spPr>
+                  <a:xfrm>
+                    <a:off x="6808092" y="5171400"/>
+                    <a:ext cx="2239250" cy="307777"/>
+                  </a:xfrm>
+                  <a:prstGeom prst="rect">
+                    <a:avLst/>
+                  </a:prstGeom>
+                  <a:noFill/>
+                </p:spPr>
+                <p:txBody>
+                  <a:bodyPr wrap="square">
+                    <a:spAutoFit/>
+                  </a:bodyPr>
+                  <a:lstStyle/>
+                  <a:p>
+                    <a:pPr algn="ctr"/>
+                    <a:r>
+                      <a:rPr lang="en-US" sz="1400" dirty="0">
+                        <a:solidFill>
+                          <a:schemeClr val="bg1"/>
+                        </a:solidFill>
+                        <a:latin typeface="Times New Roman" panose="02020603050405020304" pitchFamily="18" charset="0"/>
+                        <a:cs typeface="Times New Roman" panose="02020603050405020304" pitchFamily="18" charset="0"/>
+                      </a:rPr>
+                      <a:t>O-RAN SC : Near-RT RIC</a:t>
+                    </a:r>
+                  </a:p>
+                </p:txBody>
+              </p:sp>
+              <p:sp>
+                <p:nvSpPr>
+                  <p:cNvPr id="36" name="TextBox 35">
+                    <a:extLst>
+                      <a:ext uri="{FF2B5EF4-FFF2-40B4-BE49-F238E27FC236}">
+                        <a16:creationId xmlns:a16="http://schemas.microsoft.com/office/drawing/2014/main" id="{9F749793-5D51-05F0-271A-74342A22925C}"/>
+                      </a:ext>
+                    </a:extLst>
+                  </p:cNvPr>
+                  <p:cNvSpPr txBox="1"/>
+                  <p:nvPr/>
+                </p:nvSpPr>
+                <p:spPr>
+                  <a:xfrm>
+                    <a:off x="6808092" y="5464822"/>
+                    <a:ext cx="2239250" cy="307777"/>
+                  </a:xfrm>
+                  <a:prstGeom prst="rect">
+                    <a:avLst/>
+                  </a:prstGeom>
+                  <a:noFill/>
+                </p:spPr>
+                <p:txBody>
+                  <a:bodyPr wrap="square">
+                    <a:spAutoFit/>
+                  </a:bodyPr>
+                  <a:lstStyle/>
+                  <a:p>
+                    <a:pPr algn="ctr"/>
+                    <a:r>
+                      <a:rPr lang="en-US" sz="1400" dirty="0">
+                        <a:solidFill>
+                          <a:schemeClr val="bg1"/>
+                        </a:solidFill>
+                        <a:latin typeface="Times New Roman" panose="02020603050405020304" pitchFamily="18" charset="0"/>
+                        <a:cs typeface="Times New Roman" panose="02020603050405020304" pitchFamily="18" charset="0"/>
+                      </a:rPr>
+                      <a:t>Mosaic5G : FlexRIC</a:t>
+                    </a:r>
+                  </a:p>
+                </p:txBody>
+              </p:sp>
+            </p:grpSp>
+            <p:sp>
+              <p:nvSpPr>
+                <p:cNvPr id="33" name="TextBox 32">
+                  <a:extLst>
+                    <a:ext uri="{FF2B5EF4-FFF2-40B4-BE49-F238E27FC236}">
+                      <a16:creationId xmlns:a16="http://schemas.microsoft.com/office/drawing/2014/main" id="{26B54E29-6558-EF44-CA43-59C6ECE36CDF}"/>
+                    </a:ext>
+                  </a:extLst>
+                </p:cNvPr>
+                <p:cNvSpPr txBox="1"/>
+                <p:nvPr/>
+              </p:nvSpPr>
+              <p:spPr>
+                <a:xfrm>
+                  <a:off x="6696060" y="5769045"/>
+                  <a:ext cx="2239249" cy="307777"/>
+                </a:xfrm>
+                <a:prstGeom prst="rect">
+                  <a:avLst/>
+                </a:prstGeom>
+                <a:noFill/>
+              </p:spPr>
+              <p:txBody>
+                <a:bodyPr wrap="square">
+                  <a:spAutoFit/>
+                </a:bodyPr>
+                <a:lstStyle/>
+                <a:p>
+                  <a:pPr algn="ctr"/>
+                  <a:r>
+                    <a:rPr lang="en-US" sz="1400" b="1" dirty="0">
+                      <a:solidFill>
+                        <a:schemeClr val="bg1"/>
+                      </a:solidFill>
+                      <a:latin typeface="Times New Roman" panose="02020603050405020304" pitchFamily="18" charset="0"/>
+                      <a:cs typeface="Times New Roman" panose="02020603050405020304" pitchFamily="18" charset="0"/>
+                    </a:rPr>
+                    <a:t>Near-RT RIC</a:t>
+                  </a:r>
+                </a:p>
+              </p:txBody>
+            </p:sp>
+          </p:grpSp>
+          <p:grpSp>
+            <p:nvGrpSpPr>
+              <p:cNvPr id="28" name="Group 27">
+                <a:extLst>
+                  <a:ext uri="{FF2B5EF4-FFF2-40B4-BE49-F238E27FC236}">
+                    <a16:creationId xmlns:a16="http://schemas.microsoft.com/office/drawing/2014/main" id="{760B8761-A333-E78A-907F-AD48533196CD}"/>
+                  </a:ext>
+                </a:extLst>
+              </p:cNvPr>
+              <p:cNvGrpSpPr/>
+              <p:nvPr/>
+            </p:nvGrpSpPr>
+            <p:grpSpPr>
+              <a:xfrm>
+                <a:off x="9465142" y="5430796"/>
+                <a:ext cx="2302213" cy="647296"/>
+                <a:chOff x="9110915" y="4521647"/>
+                <a:chExt cx="2302213" cy="647296"/>
+              </a:xfrm>
+            </p:grpSpPr>
+            <p:sp>
+              <p:nvSpPr>
+                <p:cNvPr id="29" name="Rectangle: Rounded Corners 28">
+                  <a:extLst>
+                    <a:ext uri="{FF2B5EF4-FFF2-40B4-BE49-F238E27FC236}">
+                      <a16:creationId xmlns:a16="http://schemas.microsoft.com/office/drawing/2014/main" id="{022DC171-A3EC-050F-5AC8-CA1EDEC48D5E}"/>
+                    </a:ext>
+                  </a:extLst>
+                </p:cNvPr>
+                <p:cNvSpPr/>
+                <p:nvPr/>
+              </p:nvSpPr>
+              <p:spPr>
+                <a:xfrm>
+                  <a:off x="9110917" y="4521647"/>
+                  <a:ext cx="2239249" cy="333931"/>
+                </a:xfrm>
+                <a:prstGeom prst="roundRect">
+                  <a:avLst>
+                    <a:gd name="adj" fmla="val 28947"/>
+                  </a:avLst>
+                </a:prstGeom>
+                <a:solidFill>
+                  <a:srgbClr val="262626"/>
+                </a:solidFill>
+                <a:ln w="12700">
+                  <a:solidFill>
+                    <a:schemeClr val="bg1"/>
+                  </a:solidFill>
+                </a:ln>
+              </p:spPr>
+              <p:style>
+                <a:lnRef idx="2">
+                  <a:schemeClr val="accent1">
+                    <a:shade val="15000"/>
+                  </a:schemeClr>
+                </a:lnRef>
+                <a:fillRef idx="1">
+                  <a:schemeClr val="accent1"/>
+                </a:fillRef>
+                <a:effectRef idx="0">
+                  <a:schemeClr val="accent1"/>
+                </a:effectRef>
+                <a:fontRef idx="minor">
+                  <a:schemeClr val="lt1"/>
+                </a:fontRef>
+              </p:style>
+              <p:txBody>
+                <a:bodyPr rtlCol="0" anchor="ctr"/>
+                <a:lstStyle/>
+                <a:p>
+                  <a:pPr algn="ctr"/>
+                  <a:endParaRPr lang="en-US" sz="1400" dirty="0">
+                    <a:solidFill>
+                      <a:schemeClr val="tx1"/>
+                    </a:solidFill>
+                    <a:latin typeface="Times New Roman" panose="02020603050405020304" pitchFamily="18" charset="0"/>
+                    <a:cs typeface="Times New Roman" panose="02020603050405020304" pitchFamily="18" charset="0"/>
+                  </a:endParaRPr>
+                </a:p>
+              </p:txBody>
+            </p:sp>
+            <p:sp>
+              <p:nvSpPr>
+                <p:cNvPr id="30" name="TextBox 29">
+                  <a:extLst>
+                    <a:ext uri="{FF2B5EF4-FFF2-40B4-BE49-F238E27FC236}">
+                      <a16:creationId xmlns:a16="http://schemas.microsoft.com/office/drawing/2014/main" id="{78F29ACD-A658-CB33-2DDC-6428BDD4405E}"/>
+                    </a:ext>
+                  </a:extLst>
+                </p:cNvPr>
+                <p:cNvSpPr txBox="1"/>
+                <p:nvPr/>
+              </p:nvSpPr>
+              <p:spPr>
+                <a:xfrm>
+                  <a:off x="9110915" y="4522182"/>
+                  <a:ext cx="2238468" cy="307777"/>
+                </a:xfrm>
+                <a:prstGeom prst="rect">
+                  <a:avLst/>
+                </a:prstGeom>
+                <a:noFill/>
+              </p:spPr>
+              <p:txBody>
+                <a:bodyPr wrap="square">
+                  <a:spAutoFit/>
+                </a:bodyPr>
+                <a:lstStyle/>
+                <a:p>
+                  <a:pPr algn="ctr"/>
+                  <a:r>
+                    <a:rPr lang="en-US" sz="1400" dirty="0">
+                      <a:solidFill>
+                        <a:schemeClr val="bg1"/>
+                      </a:solidFill>
+                      <a:latin typeface="Times New Roman" panose="02020603050405020304" pitchFamily="18" charset="0"/>
+                      <a:cs typeface="Times New Roman" panose="02020603050405020304" pitchFamily="18" charset="0"/>
+                    </a:rPr>
+                    <a:t>O-RAN SC : Non-RT RIC</a:t>
+                  </a:r>
+                </a:p>
+              </p:txBody>
+            </p:sp>
+            <p:sp>
+              <p:nvSpPr>
+                <p:cNvPr id="31" name="TextBox 30">
+                  <a:extLst>
+                    <a:ext uri="{FF2B5EF4-FFF2-40B4-BE49-F238E27FC236}">
+                      <a16:creationId xmlns:a16="http://schemas.microsoft.com/office/drawing/2014/main" id="{4F2D46F8-64B8-9102-13D1-EC6356B1DA86}"/>
+                    </a:ext>
+                  </a:extLst>
+                </p:cNvPr>
+                <p:cNvSpPr txBox="1"/>
+                <p:nvPr/>
+              </p:nvSpPr>
+              <p:spPr>
+                <a:xfrm>
+                  <a:off x="9173879" y="4861166"/>
+                  <a:ext cx="2239249" cy="307777"/>
+                </a:xfrm>
+                <a:prstGeom prst="rect">
+                  <a:avLst/>
+                </a:prstGeom>
+                <a:noFill/>
+              </p:spPr>
+              <p:txBody>
+                <a:bodyPr wrap="square">
+                  <a:spAutoFit/>
+                </a:bodyPr>
+                <a:lstStyle/>
+                <a:p>
+                  <a:pPr algn="ctr"/>
+                  <a:r>
+                    <a:rPr lang="en-US" sz="1400" b="1" dirty="0">
+                      <a:solidFill>
+                        <a:schemeClr val="bg1"/>
+                      </a:solidFill>
+                      <a:latin typeface="Times New Roman" panose="02020603050405020304" pitchFamily="18" charset="0"/>
+                      <a:cs typeface="Times New Roman" panose="02020603050405020304" pitchFamily="18" charset="0"/>
+                    </a:rPr>
+                    <a:t>Non-RT RIC</a:t>
+                  </a:r>
+                </a:p>
+              </p:txBody>
+            </p:sp>
+          </p:grpSp>
+        </p:grpSp>
+      </p:grpSp>
+    </p:spTree>
+    <p:extLst>
+      <p:ext uri="{BB962C8B-B14F-4D97-AF65-F5344CB8AC3E}">
+        <p14:creationId xmlns:p14="http://schemas.microsoft.com/office/powerpoint/2010/main" val="2822301344"/>
+      </p:ext>
+    </p:extLst>
+  </p:cSld>
+  <p:clrMapOvr>
+    <a:masterClrMapping/>
+  </p:clrMapOvr>
+</p:sld>
+</file>
+
+<file path=ppt/slides/slide5.xml><?xml version="1.0" encoding="utf-8"?>
+<p:sld xmlns:a="http://schemas.openxmlformats.org/drawingml/2006/main" xmlns:r="http://schemas.openxmlformats.org/officeDocument/2006/relationships" xmlns:p="http://schemas.openxmlformats.org/presentationml/2006/main">
+  <p:cSld>
+    <p:spTree>
+      <p:nvGrpSpPr>
+        <p:cNvPr id="1" name=""/>
+        <p:cNvGrpSpPr/>
+        <p:nvPr/>
+      </p:nvGrpSpPr>
+      <p:grpSpPr>
+        <a:xfrm>
+          <a:off x="0" y="0"/>
+          <a:ext cx="0" cy="0"/>
+          <a:chOff x="0" y="0"/>
+          <a:chExt cx="0" cy="0"/>
+        </a:xfrm>
+      </p:grpSpPr>
+      <p:grpSp>
+        <p:nvGrpSpPr>
+          <p:cNvPr id="2" name="Group 1">
+            <a:extLst>
+              <a:ext uri="{FF2B5EF4-FFF2-40B4-BE49-F238E27FC236}">
+                <a16:creationId xmlns:a16="http://schemas.microsoft.com/office/drawing/2014/main" id="{1F1C2E85-70FA-F3AF-5835-4DDBDE1FC0EB}"/>
+              </a:ext>
+            </a:extLst>
+          </p:cNvPr>
+          <p:cNvGrpSpPr/>
+          <p:nvPr/>
+        </p:nvGrpSpPr>
+        <p:grpSpPr>
+          <a:xfrm>
+            <a:off x="412247" y="458846"/>
+            <a:ext cx="1637614" cy="523700"/>
+            <a:chOff x="3423671" y="1867158"/>
+            <a:chExt cx="1637614" cy="523700"/>
+          </a:xfrm>
+        </p:grpSpPr>
+        <p:sp>
+          <p:nvSpPr>
+            <p:cNvPr id="6" name="Rectangle: Rounded Corners 5">
+              <a:extLst>
+                <a:ext uri="{FF2B5EF4-FFF2-40B4-BE49-F238E27FC236}">
+                  <a16:creationId xmlns:a16="http://schemas.microsoft.com/office/drawing/2014/main" id="{0DE1AD32-18BE-07D1-4819-E93C1902D708}"/>
+                </a:ext>
+              </a:extLst>
+            </p:cNvPr>
+            <p:cNvSpPr/>
+            <p:nvPr/>
+          </p:nvSpPr>
+          <p:spPr>
+            <a:xfrm>
+              <a:off x="3423671" y="1867158"/>
+              <a:ext cx="1637614" cy="523220"/>
+            </a:xfrm>
+            <a:prstGeom prst="roundRect">
+              <a:avLst>
+                <a:gd name="adj" fmla="val 12974"/>
+              </a:avLst>
+            </a:prstGeom>
+            <a:solidFill>
+              <a:schemeClr val="bg1">
+                <a:lumMod val="85000"/>
+              </a:schemeClr>
+            </a:solidFill>
+            <a:ln w="28575">
+              <a:solidFill>
+                <a:schemeClr val="tx1"/>
+              </a:solidFill>
+            </a:ln>
+          </p:spPr>
+          <p:style>
+            <a:lnRef idx="2">
+              <a:schemeClr val="accent1">
+                <a:shade val="15000"/>
+              </a:schemeClr>
+            </a:lnRef>
+            <a:fillRef idx="1">
+              <a:schemeClr val="accent1"/>
+            </a:fillRef>
+            <a:effectRef idx="0">
+              <a:schemeClr val="accent1"/>
+            </a:effectRef>
+            <a:fontRef idx="minor">
+              <a:schemeClr val="lt1"/>
+            </a:fontRef>
+          </p:style>
+          <p:txBody>
+            <a:bodyPr rtlCol="0" anchor="ctr"/>
+            <a:lstStyle/>
+            <a:p>
+              <a:pPr algn="ctr"/>
+              <a:endParaRPr lang="en-US" sz="1400" dirty="0">
+                <a:solidFill>
+                  <a:schemeClr val="tx1"/>
+                </a:solidFill>
+                <a:latin typeface="Times New Roman" panose="02020603050405020304" pitchFamily="18" charset="0"/>
+                <a:cs typeface="Times New Roman" panose="02020603050405020304" pitchFamily="18" charset="0"/>
+              </a:endParaRPr>
+            </a:p>
+          </p:txBody>
+        </p:sp>
+        <p:sp>
+          <p:nvSpPr>
+            <p:cNvPr id="7" name="TextBox 6">
+              <a:extLst>
+                <a:ext uri="{FF2B5EF4-FFF2-40B4-BE49-F238E27FC236}">
+                  <a16:creationId xmlns:a16="http://schemas.microsoft.com/office/drawing/2014/main" id="{2D86B25B-27D4-ED9E-4290-51E8EA8B1A63}"/>
+                </a:ext>
+              </a:extLst>
+            </p:cNvPr>
+            <p:cNvSpPr txBox="1"/>
+            <p:nvPr/>
+          </p:nvSpPr>
+          <p:spPr>
+            <a:xfrm>
+              <a:off x="3557978" y="1867638"/>
+              <a:ext cx="1369001" cy="523220"/>
+            </a:xfrm>
+            <a:prstGeom prst="rect">
+              <a:avLst/>
+            </a:prstGeom>
+            <a:noFill/>
+          </p:spPr>
+          <p:txBody>
+            <a:bodyPr wrap="square">
+              <a:spAutoFit/>
+            </a:bodyPr>
+            <a:lstStyle/>
+            <a:p>
+              <a:pPr algn="ctr"/>
+              <a:r>
+                <a:rPr lang="en-US" sz="1400" dirty="0">
+                  <a:solidFill>
+                    <a:schemeClr val="tx1"/>
+                  </a:solidFill>
+                  <a:latin typeface="Times New Roman" panose="02020603050405020304" pitchFamily="18" charset="0"/>
+                  <a:cs typeface="Times New Roman" panose="02020603050405020304" pitchFamily="18" charset="0"/>
+                </a:rPr>
+                <a:t>OpenAirInterface5G</a:t>
+              </a:r>
+              <a:endParaRPr lang="en-US" sz="1400" dirty="0">
+                <a:latin typeface="Times New Roman" panose="02020603050405020304" pitchFamily="18" charset="0"/>
+                <a:cs typeface="Times New Roman" panose="02020603050405020304" pitchFamily="18" charset="0"/>
+              </a:endParaRPr>
+            </a:p>
+          </p:txBody>
+        </p:sp>
+      </p:grpSp>
+      <p:grpSp>
+        <p:nvGrpSpPr>
+          <p:cNvPr id="21" name="Group 20">
+            <a:extLst>
+              <a:ext uri="{FF2B5EF4-FFF2-40B4-BE49-F238E27FC236}">
+                <a16:creationId xmlns:a16="http://schemas.microsoft.com/office/drawing/2014/main" id="{B7AC3C24-5D93-8C7A-BF1B-FB95124CC532}"/>
+              </a:ext>
+            </a:extLst>
+          </p:cNvPr>
+          <p:cNvGrpSpPr/>
+          <p:nvPr/>
+        </p:nvGrpSpPr>
+        <p:grpSpPr>
+          <a:xfrm>
+            <a:off x="5451307" y="440618"/>
+            <a:ext cx="2283381" cy="1233863"/>
+            <a:chOff x="1028392" y="2318655"/>
+            <a:chExt cx="2283381" cy="1233863"/>
+          </a:xfrm>
+        </p:grpSpPr>
+        <p:sp>
+          <p:nvSpPr>
+            <p:cNvPr id="146" name="TextBox 145">
+              <a:extLst>
+                <a:ext uri="{FF2B5EF4-FFF2-40B4-BE49-F238E27FC236}">
+                  <a16:creationId xmlns:a16="http://schemas.microsoft.com/office/drawing/2014/main" id="{3D2C051E-CEAC-BF62-49F2-C16CA11A4610}"/>
+                </a:ext>
+              </a:extLst>
+            </p:cNvPr>
+            <p:cNvSpPr txBox="1"/>
+            <p:nvPr/>
+          </p:nvSpPr>
+          <p:spPr>
+            <a:xfrm>
+              <a:off x="1028392" y="3244741"/>
+              <a:ext cx="2239249" cy="307777"/>
+            </a:xfrm>
+            <a:prstGeom prst="rect">
+              <a:avLst/>
+            </a:prstGeom>
+            <a:noFill/>
+          </p:spPr>
+          <p:txBody>
+            <a:bodyPr wrap="square">
+              <a:spAutoFit/>
+            </a:bodyPr>
+            <a:lstStyle/>
+            <a:p>
+              <a:pPr algn="ctr"/>
+              <a:r>
+                <a:rPr lang="en-US" sz="1400" b="1" dirty="0">
+                  <a:solidFill>
+                    <a:schemeClr val="tx1"/>
+                  </a:solidFill>
+                  <a:latin typeface="Times New Roman" panose="02020603050405020304" pitchFamily="18" charset="0"/>
+                  <a:cs typeface="Times New Roman" panose="02020603050405020304" pitchFamily="18" charset="0"/>
+                </a:rPr>
+                <a:t>Next Generation Node B</a:t>
+              </a:r>
+              <a:endParaRPr lang="en-US" sz="1400" b="1" dirty="0">
+                <a:latin typeface="Times New Roman" panose="02020603050405020304" pitchFamily="18" charset="0"/>
+                <a:cs typeface="Times New Roman" panose="02020603050405020304" pitchFamily="18" charset="0"/>
+              </a:endParaRPr>
+            </a:p>
+          </p:txBody>
+        </p:sp>
+        <p:grpSp>
+          <p:nvGrpSpPr>
+            <p:cNvPr id="150" name="Group 149">
+              <a:extLst>
+                <a:ext uri="{FF2B5EF4-FFF2-40B4-BE49-F238E27FC236}">
+                  <a16:creationId xmlns:a16="http://schemas.microsoft.com/office/drawing/2014/main" id="{16B62768-79CA-CE53-4D99-435EA269FFFD}"/>
+                </a:ext>
+              </a:extLst>
+            </p:cNvPr>
+            <p:cNvGrpSpPr/>
+            <p:nvPr/>
+          </p:nvGrpSpPr>
+          <p:grpSpPr>
+            <a:xfrm>
+              <a:off x="1028392" y="2318655"/>
+              <a:ext cx="2239249" cy="923272"/>
+              <a:chOff x="1590040" y="5303322"/>
+              <a:chExt cx="2374765" cy="923272"/>
+            </a:xfrm>
+          </p:grpSpPr>
+          <p:sp>
+            <p:nvSpPr>
+              <p:cNvPr id="157" name="Rectangle: Rounded Corners 156">
+                <a:extLst>
+                  <a:ext uri="{FF2B5EF4-FFF2-40B4-BE49-F238E27FC236}">
+                    <a16:creationId xmlns:a16="http://schemas.microsoft.com/office/drawing/2014/main" id="{528EBC03-1854-3E22-EDF7-C6702650CE13}"/>
+                  </a:ext>
+                </a:extLst>
+              </p:cNvPr>
+              <p:cNvSpPr/>
+              <p:nvPr/>
+            </p:nvSpPr>
+            <p:spPr>
+              <a:xfrm>
+                <a:off x="1590040" y="5303322"/>
+                <a:ext cx="2374765" cy="923272"/>
+              </a:xfrm>
+              <a:prstGeom prst="roundRect">
+                <a:avLst>
+                  <a:gd name="adj" fmla="val 9466"/>
+                </a:avLst>
+              </a:prstGeom>
+              <a:solidFill>
+                <a:schemeClr val="bg1">
+                  <a:lumMod val="85000"/>
+                </a:schemeClr>
+              </a:solidFill>
+              <a:ln w="28575">
+                <a:noFill/>
+              </a:ln>
+            </p:spPr>
+            <p:style>
+              <a:lnRef idx="2">
+                <a:schemeClr val="accent1">
+                  <a:shade val="15000"/>
+                </a:schemeClr>
+              </a:lnRef>
+              <a:fillRef idx="1">
+                <a:schemeClr val="accent1"/>
+              </a:fillRef>
+              <a:effectRef idx="0">
+                <a:schemeClr val="accent1"/>
+              </a:effectRef>
+              <a:fontRef idx="minor">
+                <a:schemeClr val="lt1"/>
+              </a:fontRef>
+            </p:style>
+            <p:txBody>
+              <a:bodyPr rtlCol="0" anchor="ctr"/>
+              <a:lstStyle/>
+              <a:p>
+                <a:pPr algn="ctr"/>
+                <a:endParaRPr lang="en-US" dirty="0">
+                  <a:latin typeface="Times New Roman" panose="02020603050405020304" pitchFamily="18" charset="0"/>
+                  <a:cs typeface="Times New Roman" panose="02020603050405020304" pitchFamily="18" charset="0"/>
+                </a:endParaRPr>
+              </a:p>
+            </p:txBody>
+          </p:sp>
+          <p:sp>
+            <p:nvSpPr>
+              <p:cNvPr id="158" name="Rectangle 157">
+                <a:extLst>
+                  <a:ext uri="{FF2B5EF4-FFF2-40B4-BE49-F238E27FC236}">
+                    <a16:creationId xmlns:a16="http://schemas.microsoft.com/office/drawing/2014/main" id="{9EE93C6C-9A09-52B2-8968-AB606F0E55D6}"/>
+                  </a:ext>
+                </a:extLst>
+              </p:cNvPr>
+              <p:cNvSpPr/>
+              <p:nvPr/>
+            </p:nvSpPr>
+            <p:spPr>
+              <a:xfrm>
+                <a:off x="1590040" y="5603165"/>
+                <a:ext cx="2374765" cy="323587"/>
+              </a:xfrm>
+              <a:prstGeom prst="rect">
+                <a:avLst/>
+              </a:prstGeom>
+              <a:solidFill>
+                <a:schemeClr val="bg1">
+                  <a:lumMod val="95000"/>
+                </a:schemeClr>
+              </a:solidFill>
+              <a:ln>
+                <a:noFill/>
+              </a:ln>
+            </p:spPr>
+            <p:style>
+              <a:lnRef idx="2">
+                <a:schemeClr val="accent1">
+                  <a:shade val="15000"/>
+                </a:schemeClr>
+              </a:lnRef>
+              <a:fillRef idx="1">
+                <a:schemeClr val="accent1"/>
+              </a:fillRef>
+              <a:effectRef idx="0">
+                <a:schemeClr val="accent1"/>
+              </a:effectRef>
+              <a:fontRef idx="minor">
+                <a:schemeClr val="lt1"/>
+              </a:fontRef>
+            </p:style>
+            <p:txBody>
+              <a:bodyPr rtlCol="0" anchor="ctr"/>
+              <a:lstStyle/>
+              <a:p>
+                <a:pPr algn="ctr"/>
+                <a:endParaRPr lang="en-US"/>
+              </a:p>
+            </p:txBody>
+          </p:sp>
+          <p:sp>
+            <p:nvSpPr>
+              <p:cNvPr id="159" name="Rectangle: Rounded Corners 158">
+                <a:extLst>
+                  <a:ext uri="{FF2B5EF4-FFF2-40B4-BE49-F238E27FC236}">
+                    <a16:creationId xmlns:a16="http://schemas.microsoft.com/office/drawing/2014/main" id="{14EF32EA-D114-017F-DBFE-F63D79959F99}"/>
+                  </a:ext>
+                </a:extLst>
+              </p:cNvPr>
+              <p:cNvSpPr/>
+              <p:nvPr/>
+            </p:nvSpPr>
+            <p:spPr>
+              <a:xfrm>
+                <a:off x="1590040" y="5303322"/>
+                <a:ext cx="2374765" cy="923272"/>
+              </a:xfrm>
+              <a:prstGeom prst="roundRect">
+                <a:avLst>
+                  <a:gd name="adj" fmla="val 9879"/>
+                </a:avLst>
+              </a:prstGeom>
+              <a:noFill/>
+              <a:ln w="28575">
+                <a:solidFill>
+                  <a:schemeClr val="tx1"/>
+                </a:solidFill>
+              </a:ln>
+            </p:spPr>
+            <p:style>
+              <a:lnRef idx="2">
+                <a:schemeClr val="accent1">
+                  <a:shade val="15000"/>
+                </a:schemeClr>
+              </a:lnRef>
+              <a:fillRef idx="1">
+                <a:schemeClr val="accent1"/>
+              </a:fillRef>
+              <a:effectRef idx="0">
+                <a:schemeClr val="accent1"/>
+              </a:effectRef>
+              <a:fontRef idx="minor">
+                <a:schemeClr val="lt1"/>
+              </a:fontRef>
+            </p:style>
+            <p:txBody>
+              <a:bodyPr rtlCol="0" anchor="ctr"/>
+              <a:lstStyle/>
+              <a:p>
+                <a:pPr algn="ctr"/>
+                <a:endParaRPr lang="en-US" dirty="0">
+                  <a:latin typeface="Times New Roman" panose="02020603050405020304" pitchFamily="18" charset="0"/>
+                  <a:cs typeface="Times New Roman" panose="02020603050405020304" pitchFamily="18" charset="0"/>
+                </a:endParaRPr>
+              </a:p>
+            </p:txBody>
+          </p:sp>
+        </p:grpSp>
+        <p:sp>
+          <p:nvSpPr>
+            <p:cNvPr id="151" name="TextBox 150">
+              <a:extLst>
+                <a:ext uri="{FF2B5EF4-FFF2-40B4-BE49-F238E27FC236}">
+                  <a16:creationId xmlns:a16="http://schemas.microsoft.com/office/drawing/2014/main" id="{D086D922-3E57-7D55-1D13-0524DE570C58}"/>
+                </a:ext>
+              </a:extLst>
+            </p:cNvPr>
+            <p:cNvSpPr txBox="1"/>
+            <p:nvPr/>
+          </p:nvSpPr>
+          <p:spPr>
+            <a:xfrm>
+              <a:off x="1342370" y="2928594"/>
+              <a:ext cx="1969403" cy="307777"/>
+            </a:xfrm>
+            <a:prstGeom prst="rect">
+              <a:avLst/>
+            </a:prstGeom>
+            <a:noFill/>
+          </p:spPr>
+          <p:txBody>
+            <a:bodyPr wrap="square">
+              <a:spAutoFit/>
+            </a:bodyPr>
+            <a:lstStyle/>
+            <a:p>
+              <a:pPr algn="ctr"/>
+              <a:r>
+                <a:rPr lang="en-US" sz="1400" dirty="0">
+                  <a:solidFill>
+                    <a:schemeClr val="tx1"/>
+                  </a:solidFill>
+                  <a:latin typeface="Times New Roman" panose="02020603050405020304" pitchFamily="18" charset="0"/>
+                  <a:cs typeface="Times New Roman" panose="02020603050405020304" pitchFamily="18" charset="0"/>
+                </a:rPr>
+                <a:t>RF Simulator</a:t>
+              </a:r>
+              <a:endParaRPr lang="en-US" sz="1400" dirty="0">
+                <a:latin typeface="Times New Roman" panose="02020603050405020304" pitchFamily="18" charset="0"/>
+                <a:cs typeface="Times New Roman" panose="02020603050405020304" pitchFamily="18" charset="0"/>
+              </a:endParaRPr>
+            </a:p>
+          </p:txBody>
+        </p:sp>
+        <p:sp>
+          <p:nvSpPr>
+            <p:cNvPr id="152" name="TextBox 151">
+              <a:extLst>
+                <a:ext uri="{FF2B5EF4-FFF2-40B4-BE49-F238E27FC236}">
+                  <a16:creationId xmlns:a16="http://schemas.microsoft.com/office/drawing/2014/main" id="{2F4E4E72-ECFE-B991-CB49-4F95696D47F8}"/>
+                </a:ext>
+              </a:extLst>
+            </p:cNvPr>
+            <p:cNvSpPr txBox="1"/>
+            <p:nvPr/>
+          </p:nvSpPr>
+          <p:spPr>
+            <a:xfrm>
+              <a:off x="1342370" y="2629568"/>
+              <a:ext cx="1969403" cy="307777"/>
+            </a:xfrm>
+            <a:prstGeom prst="rect">
+              <a:avLst/>
+            </a:prstGeom>
+            <a:noFill/>
+          </p:spPr>
+          <p:txBody>
+            <a:bodyPr wrap="square">
+              <a:spAutoFit/>
+            </a:bodyPr>
+            <a:lstStyle/>
+            <a:p>
+              <a:pPr algn="ctr"/>
+              <a:r>
+                <a:rPr lang="en-US" sz="1400" dirty="0">
+                  <a:latin typeface="Times New Roman" panose="02020603050405020304" pitchFamily="18" charset="0"/>
+                  <a:cs typeface="Times New Roman" panose="02020603050405020304" pitchFamily="18" charset="0"/>
+                </a:rPr>
+                <a:t>OAI RF Simulator</a:t>
+              </a:r>
+            </a:p>
+          </p:txBody>
+        </p:sp>
+        <p:sp>
+          <p:nvSpPr>
+            <p:cNvPr id="153" name="TextBox 152">
+              <a:extLst>
+                <a:ext uri="{FF2B5EF4-FFF2-40B4-BE49-F238E27FC236}">
+                  <a16:creationId xmlns:a16="http://schemas.microsoft.com/office/drawing/2014/main" id="{85EFAFED-45ED-1FDD-79F8-2BED0AC5076B}"/>
+                </a:ext>
+              </a:extLst>
+            </p:cNvPr>
+            <p:cNvSpPr txBox="1"/>
+            <p:nvPr/>
+          </p:nvSpPr>
+          <p:spPr>
+            <a:xfrm>
+              <a:off x="1342370" y="2330542"/>
+              <a:ext cx="1969403" cy="307777"/>
+            </a:xfrm>
+            <a:prstGeom prst="rect">
+              <a:avLst/>
+            </a:prstGeom>
+            <a:noFill/>
+          </p:spPr>
+          <p:txBody>
+            <a:bodyPr wrap="square">
+              <a:spAutoFit/>
+            </a:bodyPr>
+            <a:lstStyle/>
+            <a:p>
+              <a:pPr algn="ctr"/>
+              <a:r>
+                <a:rPr lang="en-US" sz="1400" dirty="0">
+                  <a:latin typeface="Times New Roman" panose="02020603050405020304" pitchFamily="18" charset="0"/>
+                  <a:cs typeface="Times New Roman" panose="02020603050405020304" pitchFamily="18" charset="0"/>
+                </a:rPr>
+                <a:t>srsRAN_4G</a:t>
+              </a:r>
+            </a:p>
+          </p:txBody>
+        </p:sp>
+      </p:grpSp>
+      <p:grpSp>
+        <p:nvGrpSpPr>
+          <p:cNvPr id="183" name="Group 182">
+            <a:extLst>
+              <a:ext uri="{FF2B5EF4-FFF2-40B4-BE49-F238E27FC236}">
+                <a16:creationId xmlns:a16="http://schemas.microsoft.com/office/drawing/2014/main" id="{56A8650A-9B1A-7398-6972-598AB9FAD8E5}"/>
+              </a:ext>
+            </a:extLst>
+          </p:cNvPr>
+          <p:cNvGrpSpPr/>
+          <p:nvPr/>
+        </p:nvGrpSpPr>
+        <p:grpSpPr>
+          <a:xfrm>
+            <a:off x="8216865" y="440618"/>
+            <a:ext cx="2239249" cy="1557651"/>
+            <a:chOff x="4580556" y="3243709"/>
+            <a:chExt cx="2239249" cy="1557651"/>
+          </a:xfrm>
+        </p:grpSpPr>
+        <p:sp>
+          <p:nvSpPr>
+            <p:cNvPr id="184" name="Rectangle: Top Corners Rounded 183">
+              <a:extLst>
+                <a:ext uri="{FF2B5EF4-FFF2-40B4-BE49-F238E27FC236}">
+                  <a16:creationId xmlns:a16="http://schemas.microsoft.com/office/drawing/2014/main" id="{229EA9B1-6BFD-E3FF-F3FF-C5C9B53DF06F}"/>
+                </a:ext>
+              </a:extLst>
+            </p:cNvPr>
+            <p:cNvSpPr/>
+            <p:nvPr/>
+          </p:nvSpPr>
+          <p:spPr>
+            <a:xfrm rot="10800000">
+              <a:off x="4580557" y="4166644"/>
+              <a:ext cx="2239248" cy="323588"/>
+            </a:xfrm>
+            <a:prstGeom prst="round2SameRect">
+              <a:avLst>
+                <a:gd name="adj1" fmla="val 28890"/>
+                <a:gd name="adj2" fmla="val 0"/>
+              </a:avLst>
+            </a:prstGeom>
+            <a:solidFill>
+              <a:srgbClr val="F2F2F2"/>
+            </a:solidFill>
+            <a:ln>
+              <a:noFill/>
+            </a:ln>
+          </p:spPr>
+          <p:style>
+            <a:lnRef idx="2">
+              <a:schemeClr val="accent1">
+                <a:shade val="15000"/>
+              </a:schemeClr>
+            </a:lnRef>
+            <a:fillRef idx="1">
+              <a:schemeClr val="accent1"/>
+            </a:fillRef>
+            <a:effectRef idx="0">
+              <a:schemeClr val="accent1"/>
+            </a:effectRef>
+            <a:fontRef idx="minor">
+              <a:schemeClr val="lt1"/>
+            </a:fontRef>
+          </p:style>
+          <p:txBody>
+            <a:bodyPr rtlCol="0" anchor="ctr"/>
+            <a:lstStyle/>
+            <a:p>
+              <a:pPr algn="ctr"/>
+              <a:endParaRPr lang="en-US"/>
+            </a:p>
+          </p:txBody>
+        </p:sp>
+        <p:sp>
+          <p:nvSpPr>
+            <p:cNvPr id="185" name="Rectangle: Top Corners Rounded 184">
+              <a:extLst>
+                <a:ext uri="{FF2B5EF4-FFF2-40B4-BE49-F238E27FC236}">
+                  <a16:creationId xmlns:a16="http://schemas.microsoft.com/office/drawing/2014/main" id="{73FB63BF-5717-D110-52A5-F3B146F5CB6B}"/>
+                </a:ext>
+              </a:extLst>
+            </p:cNvPr>
+            <p:cNvSpPr/>
+            <p:nvPr/>
+          </p:nvSpPr>
+          <p:spPr>
+            <a:xfrm>
+              <a:off x="4580556" y="3243709"/>
+              <a:ext cx="2239248" cy="923272"/>
+            </a:xfrm>
+            <a:prstGeom prst="round2SameRect">
+              <a:avLst>
+                <a:gd name="adj1" fmla="val 13584"/>
+                <a:gd name="adj2" fmla="val 0"/>
+              </a:avLst>
+            </a:prstGeom>
+            <a:solidFill>
+              <a:srgbClr val="D9D9D9"/>
+            </a:solidFill>
+            <a:ln>
+              <a:noFill/>
+            </a:ln>
+          </p:spPr>
+          <p:style>
+            <a:lnRef idx="2">
+              <a:schemeClr val="accent1">
+                <a:shade val="15000"/>
+              </a:schemeClr>
+            </a:lnRef>
+            <a:fillRef idx="1">
+              <a:schemeClr val="accent1"/>
+            </a:fillRef>
+            <a:effectRef idx="0">
+              <a:schemeClr val="accent1"/>
+            </a:effectRef>
+            <a:fontRef idx="minor">
+              <a:schemeClr val="lt1"/>
+            </a:fontRef>
+          </p:style>
+          <p:txBody>
+            <a:bodyPr rtlCol="0" anchor="ctr"/>
+            <a:lstStyle/>
+            <a:p>
+              <a:pPr algn="ctr"/>
+              <a:endParaRPr lang="en-US"/>
+            </a:p>
+          </p:txBody>
+        </p:sp>
+        <p:sp>
+          <p:nvSpPr>
+            <p:cNvPr id="186" name="Rectangle 185">
+              <a:extLst>
+                <a:ext uri="{FF2B5EF4-FFF2-40B4-BE49-F238E27FC236}">
+                  <a16:creationId xmlns:a16="http://schemas.microsoft.com/office/drawing/2014/main" id="{BFE8DF71-9149-613C-4600-80E2A3014CBA}"/>
+                </a:ext>
+              </a:extLst>
+            </p:cNvPr>
+            <p:cNvSpPr/>
+            <p:nvPr/>
+          </p:nvSpPr>
+          <p:spPr>
+            <a:xfrm>
+              <a:off x="4580556" y="3544031"/>
+              <a:ext cx="2239249" cy="323587"/>
+            </a:xfrm>
+            <a:prstGeom prst="rect">
+              <a:avLst/>
+            </a:prstGeom>
+            <a:solidFill>
+              <a:schemeClr val="bg1">
+                <a:lumMod val="95000"/>
+              </a:schemeClr>
+            </a:solidFill>
+            <a:ln>
+              <a:noFill/>
+            </a:ln>
+          </p:spPr>
+          <p:style>
+            <a:lnRef idx="2">
+              <a:schemeClr val="accent1">
+                <a:shade val="15000"/>
+              </a:schemeClr>
+            </a:lnRef>
+            <a:fillRef idx="1">
+              <a:schemeClr val="accent1"/>
+            </a:fillRef>
+            <a:effectRef idx="0">
+              <a:schemeClr val="accent1"/>
+            </a:effectRef>
+            <a:fontRef idx="minor">
+              <a:schemeClr val="lt1"/>
+            </a:fontRef>
+          </p:style>
+          <p:txBody>
+            <a:bodyPr rtlCol="0" anchor="ctr"/>
+            <a:lstStyle/>
+            <a:p>
+              <a:pPr algn="ctr"/>
+              <a:endParaRPr lang="en-US"/>
+            </a:p>
+          </p:txBody>
+        </p:sp>
+        <p:sp>
+          <p:nvSpPr>
+            <p:cNvPr id="187" name="Rectangle: Rounded Corners 186">
+              <a:extLst>
+                <a:ext uri="{FF2B5EF4-FFF2-40B4-BE49-F238E27FC236}">
+                  <a16:creationId xmlns:a16="http://schemas.microsoft.com/office/drawing/2014/main" id="{1AEFF849-F882-E815-BA68-80B76190EC0D}"/>
+                </a:ext>
+              </a:extLst>
+            </p:cNvPr>
+            <p:cNvSpPr/>
+            <p:nvPr/>
+          </p:nvSpPr>
+          <p:spPr>
+            <a:xfrm>
+              <a:off x="4580556" y="3244668"/>
+              <a:ext cx="2239249" cy="1246101"/>
+            </a:xfrm>
+            <a:prstGeom prst="roundRect">
+              <a:avLst>
+                <a:gd name="adj" fmla="val 7433"/>
+              </a:avLst>
+            </a:prstGeom>
+            <a:noFill/>
+            <a:ln w="28575">
+              <a:solidFill>
+                <a:schemeClr val="tx1"/>
+              </a:solidFill>
+            </a:ln>
+          </p:spPr>
+          <p:style>
+            <a:lnRef idx="2">
+              <a:schemeClr val="accent1">
+                <a:shade val="15000"/>
+              </a:schemeClr>
+            </a:lnRef>
+            <a:fillRef idx="1">
+              <a:schemeClr val="accent1"/>
+            </a:fillRef>
+            <a:effectRef idx="0">
+              <a:schemeClr val="accent1"/>
+            </a:effectRef>
+            <a:fontRef idx="minor">
+              <a:schemeClr val="lt1"/>
+            </a:fontRef>
+          </p:style>
+          <p:txBody>
+            <a:bodyPr rtlCol="0" anchor="ctr"/>
+            <a:lstStyle/>
+            <a:p>
+              <a:pPr algn="ctr"/>
+              <a:endParaRPr lang="en-US" dirty="0">
+                <a:latin typeface="Times New Roman" panose="02020603050405020304" pitchFamily="18" charset="0"/>
+                <a:cs typeface="Times New Roman" panose="02020603050405020304" pitchFamily="18" charset="0"/>
+              </a:endParaRPr>
+            </a:p>
+          </p:txBody>
+        </p:sp>
+        <p:sp>
+          <p:nvSpPr>
+            <p:cNvPr id="188" name="TextBox 187">
+              <a:extLst>
+                <a:ext uri="{FF2B5EF4-FFF2-40B4-BE49-F238E27FC236}">
+                  <a16:creationId xmlns:a16="http://schemas.microsoft.com/office/drawing/2014/main" id="{33579F1E-6CB2-0193-BAA2-1247E7FCBDEF}"/>
+                </a:ext>
+              </a:extLst>
+            </p:cNvPr>
+            <p:cNvSpPr txBox="1"/>
+            <p:nvPr/>
+          </p:nvSpPr>
+          <p:spPr>
+            <a:xfrm>
+              <a:off x="4651773" y="3853825"/>
+              <a:ext cx="2096816" cy="307777"/>
+            </a:xfrm>
+            <a:prstGeom prst="rect">
+              <a:avLst/>
+            </a:prstGeom>
+            <a:noFill/>
+          </p:spPr>
+          <p:txBody>
+            <a:bodyPr wrap="square">
+              <a:spAutoFit/>
+            </a:bodyPr>
+            <a:lstStyle/>
+            <a:p>
+              <a:pPr algn="ctr"/>
+              <a:r>
+                <a:rPr lang="en-US" sz="1400" dirty="0" err="1">
+                  <a:latin typeface="Times New Roman" panose="02020603050405020304" pitchFamily="18" charset="0"/>
+                  <a:cs typeface="Times New Roman" panose="02020603050405020304" pitchFamily="18" charset="0"/>
+                </a:rPr>
+                <a:t>ZeroMQ</a:t>
+              </a:r>
+              <a:endParaRPr lang="en-US" sz="1400" dirty="0">
+                <a:latin typeface="Times New Roman" panose="02020603050405020304" pitchFamily="18" charset="0"/>
+                <a:cs typeface="Times New Roman" panose="02020603050405020304" pitchFamily="18" charset="0"/>
+              </a:endParaRPr>
+            </a:p>
+          </p:txBody>
+        </p:sp>
+        <p:sp>
+          <p:nvSpPr>
+            <p:cNvPr id="189" name="TextBox 188">
+              <a:extLst>
+                <a:ext uri="{FF2B5EF4-FFF2-40B4-BE49-F238E27FC236}">
+                  <a16:creationId xmlns:a16="http://schemas.microsoft.com/office/drawing/2014/main" id="{AFC220C3-24C2-039B-DB95-799285B4D7EF}"/>
+                </a:ext>
+              </a:extLst>
+            </p:cNvPr>
+            <p:cNvSpPr txBox="1"/>
+            <p:nvPr/>
+          </p:nvSpPr>
+          <p:spPr>
+            <a:xfrm>
+              <a:off x="4651773" y="3554799"/>
+              <a:ext cx="2096816" cy="307777"/>
+            </a:xfrm>
+            <a:prstGeom prst="rect">
+              <a:avLst/>
+            </a:prstGeom>
+            <a:noFill/>
+          </p:spPr>
+          <p:txBody>
+            <a:bodyPr wrap="square">
+              <a:spAutoFit/>
+            </a:bodyPr>
+            <a:lstStyle/>
+            <a:p>
+              <a:pPr algn="ctr"/>
+              <a:r>
+                <a:rPr lang="en-US" sz="1400" dirty="0">
+                  <a:latin typeface="Times New Roman" panose="02020603050405020304" pitchFamily="18" charset="0"/>
+                  <a:cs typeface="Times New Roman" panose="02020603050405020304" pitchFamily="18" charset="0"/>
+                </a:rPr>
+                <a:t>OAI RF Simulator</a:t>
+              </a:r>
+            </a:p>
+          </p:txBody>
+        </p:sp>
+        <p:sp>
+          <p:nvSpPr>
+            <p:cNvPr id="190" name="TextBox 189">
+              <a:extLst>
+                <a:ext uri="{FF2B5EF4-FFF2-40B4-BE49-F238E27FC236}">
+                  <a16:creationId xmlns:a16="http://schemas.microsoft.com/office/drawing/2014/main" id="{66E1370B-F4E9-A649-A767-EE11BD3748F2}"/>
+                </a:ext>
+              </a:extLst>
+            </p:cNvPr>
+            <p:cNvSpPr txBox="1"/>
+            <p:nvPr/>
+          </p:nvSpPr>
+          <p:spPr>
+            <a:xfrm>
+              <a:off x="4651771" y="3255773"/>
+              <a:ext cx="2096818" cy="307777"/>
+            </a:xfrm>
+            <a:prstGeom prst="rect">
+              <a:avLst/>
+            </a:prstGeom>
+            <a:noFill/>
+          </p:spPr>
+          <p:txBody>
+            <a:bodyPr wrap="square">
+              <a:spAutoFit/>
+            </a:bodyPr>
+            <a:lstStyle/>
+            <a:p>
+              <a:pPr algn="ctr"/>
+              <a:r>
+                <a:rPr lang="en-US" sz="1400" dirty="0" err="1">
+                  <a:latin typeface="Times New Roman" panose="02020603050405020304" pitchFamily="18" charset="0"/>
+                  <a:cs typeface="Times New Roman" panose="02020603050405020304" pitchFamily="18" charset="0"/>
+                </a:rPr>
+                <a:t>srsRAN_Project</a:t>
+              </a:r>
+              <a:endParaRPr lang="en-US" sz="1400" dirty="0">
+                <a:latin typeface="Times New Roman" panose="02020603050405020304" pitchFamily="18" charset="0"/>
+                <a:cs typeface="Times New Roman" panose="02020603050405020304" pitchFamily="18" charset="0"/>
+              </a:endParaRPr>
+            </a:p>
+          </p:txBody>
+        </p:sp>
+        <p:sp>
+          <p:nvSpPr>
+            <p:cNvPr id="191" name="TextBox 190">
+              <a:extLst>
+                <a:ext uri="{FF2B5EF4-FFF2-40B4-BE49-F238E27FC236}">
+                  <a16:creationId xmlns:a16="http://schemas.microsoft.com/office/drawing/2014/main" id="{B9116D2E-B36D-257B-A7FE-ED45BAEF10A0}"/>
+                </a:ext>
+              </a:extLst>
+            </p:cNvPr>
+            <p:cNvSpPr txBox="1"/>
+            <p:nvPr/>
+          </p:nvSpPr>
+          <p:spPr>
+            <a:xfrm>
+              <a:off x="4651773" y="4173617"/>
+              <a:ext cx="2096816" cy="307777"/>
+            </a:xfrm>
+            <a:prstGeom prst="rect">
+              <a:avLst/>
+            </a:prstGeom>
+            <a:noFill/>
+          </p:spPr>
+          <p:txBody>
+            <a:bodyPr wrap="square">
+              <a:spAutoFit/>
+            </a:bodyPr>
+            <a:lstStyle/>
+            <a:p>
+              <a:pPr algn="ctr"/>
+              <a:r>
+                <a:rPr lang="en-US" sz="1400" dirty="0">
+                  <a:solidFill>
+                    <a:schemeClr val="tx1"/>
+                  </a:solidFill>
+                  <a:latin typeface="Times New Roman" panose="02020603050405020304" pitchFamily="18" charset="0"/>
+                  <a:cs typeface="Times New Roman" panose="02020603050405020304" pitchFamily="18" charset="0"/>
+                </a:rPr>
+                <a:t>RF Simulator</a:t>
+              </a:r>
+              <a:endParaRPr lang="en-US" sz="1400" dirty="0">
+                <a:latin typeface="Times New Roman" panose="02020603050405020304" pitchFamily="18" charset="0"/>
+                <a:cs typeface="Times New Roman" panose="02020603050405020304" pitchFamily="18" charset="0"/>
+              </a:endParaRPr>
+            </a:p>
+          </p:txBody>
+        </p:sp>
+        <p:sp>
+          <p:nvSpPr>
+            <p:cNvPr id="192" name="TextBox 191">
+              <a:extLst>
+                <a:ext uri="{FF2B5EF4-FFF2-40B4-BE49-F238E27FC236}">
+                  <a16:creationId xmlns:a16="http://schemas.microsoft.com/office/drawing/2014/main" id="{E6E33893-429F-F317-B564-C4D037064D7E}"/>
+                </a:ext>
+              </a:extLst>
+            </p:cNvPr>
+            <p:cNvSpPr txBox="1"/>
+            <p:nvPr/>
+          </p:nvSpPr>
+          <p:spPr>
+            <a:xfrm>
+              <a:off x="4580556" y="4493583"/>
+              <a:ext cx="2239249" cy="307777"/>
+            </a:xfrm>
+            <a:prstGeom prst="rect">
+              <a:avLst/>
+            </a:prstGeom>
+            <a:noFill/>
+          </p:spPr>
+          <p:txBody>
+            <a:bodyPr wrap="square">
+              <a:spAutoFit/>
+            </a:bodyPr>
+            <a:lstStyle/>
+            <a:p>
+              <a:pPr algn="ctr"/>
+              <a:r>
+                <a:rPr lang="en-US" sz="1400" b="1" dirty="0">
+                  <a:solidFill>
+                    <a:schemeClr val="tx1"/>
+                  </a:solidFill>
+                  <a:latin typeface="Times New Roman" panose="02020603050405020304" pitchFamily="18" charset="0"/>
+                  <a:cs typeface="Times New Roman" panose="02020603050405020304" pitchFamily="18" charset="0"/>
+                </a:rPr>
+                <a:t>Next Generation Node B</a:t>
+              </a:r>
+              <a:endParaRPr lang="en-US" sz="1400" b="1" dirty="0">
+                <a:latin typeface="Times New Roman" panose="02020603050405020304" pitchFamily="18" charset="0"/>
+                <a:cs typeface="Times New Roman" panose="02020603050405020304" pitchFamily="18" charset="0"/>
+              </a:endParaRPr>
+            </a:p>
+          </p:txBody>
+        </p:sp>
+      </p:grpSp>
+      <p:grpSp>
+        <p:nvGrpSpPr>
+          <p:cNvPr id="22" name="Group 21">
+            <a:extLst>
+              <a:ext uri="{FF2B5EF4-FFF2-40B4-BE49-F238E27FC236}">
+                <a16:creationId xmlns:a16="http://schemas.microsoft.com/office/drawing/2014/main" id="{753784BD-0F53-3A78-9BF8-4EDBA6EF7876}"/>
+              </a:ext>
+            </a:extLst>
+          </p:cNvPr>
+          <p:cNvGrpSpPr/>
+          <p:nvPr/>
+        </p:nvGrpSpPr>
+        <p:grpSpPr>
+          <a:xfrm>
+            <a:off x="8946149" y="2752413"/>
+            <a:ext cx="2263961" cy="1844033"/>
+            <a:chOff x="3916949" y="3691197"/>
+            <a:chExt cx="2263961" cy="1844033"/>
+          </a:xfrm>
+        </p:grpSpPr>
+        <p:sp>
+          <p:nvSpPr>
+            <p:cNvPr id="210" name="Rectangle: Rounded Corners 209">
+              <a:extLst>
+                <a:ext uri="{FF2B5EF4-FFF2-40B4-BE49-F238E27FC236}">
+                  <a16:creationId xmlns:a16="http://schemas.microsoft.com/office/drawing/2014/main" id="{70ADBDF1-D32C-AE54-601E-E1D8D6CDE9CC}"/>
+                </a:ext>
+              </a:extLst>
+            </p:cNvPr>
+            <p:cNvSpPr/>
+            <p:nvPr/>
+          </p:nvSpPr>
+          <p:spPr>
+            <a:xfrm>
+              <a:off x="3916949" y="3692460"/>
+              <a:ext cx="2239249" cy="1531642"/>
+            </a:xfrm>
+            <a:prstGeom prst="roundRect">
+              <a:avLst>
+                <a:gd name="adj" fmla="val 5859"/>
+              </a:avLst>
+            </a:prstGeom>
+            <a:solidFill>
+              <a:schemeClr val="bg1">
+                <a:lumMod val="85000"/>
+              </a:schemeClr>
+            </a:solidFill>
+            <a:ln w="28575">
+              <a:noFill/>
+            </a:ln>
+          </p:spPr>
+          <p:style>
+            <a:lnRef idx="2">
+              <a:schemeClr val="accent1">
+                <a:shade val="15000"/>
+              </a:schemeClr>
+            </a:lnRef>
+            <a:fillRef idx="1">
+              <a:schemeClr val="accent1"/>
+            </a:fillRef>
+            <a:effectRef idx="0">
+              <a:schemeClr val="accent1"/>
+            </a:effectRef>
+            <a:fontRef idx="minor">
+              <a:schemeClr val="lt1"/>
+            </a:fontRef>
+          </p:style>
+          <p:txBody>
+            <a:bodyPr rtlCol="0" anchor="ctr"/>
+            <a:lstStyle/>
+            <a:p>
+              <a:pPr algn="ctr"/>
+              <a:endParaRPr lang="en-US" dirty="0">
+                <a:latin typeface="Times New Roman" panose="02020603050405020304" pitchFamily="18" charset="0"/>
+                <a:cs typeface="Times New Roman" panose="02020603050405020304" pitchFamily="18" charset="0"/>
+              </a:endParaRPr>
+            </a:p>
+          </p:txBody>
+        </p:sp>
+        <p:sp>
+          <p:nvSpPr>
+            <p:cNvPr id="195" name="Rectangle: Top Corners Rounded 194">
+              <a:extLst>
+                <a:ext uri="{FF2B5EF4-FFF2-40B4-BE49-F238E27FC236}">
+                  <a16:creationId xmlns:a16="http://schemas.microsoft.com/office/drawing/2014/main" id="{49EE529D-3822-3C34-2FCF-96301FCBDE2B}"/>
+                </a:ext>
+              </a:extLst>
+            </p:cNvPr>
+            <p:cNvSpPr/>
+            <p:nvPr/>
+          </p:nvSpPr>
+          <p:spPr>
+            <a:xfrm rot="10800000">
+              <a:off x="3916952" y="4613172"/>
+              <a:ext cx="2239248" cy="323588"/>
+            </a:xfrm>
+            <a:prstGeom prst="round2SameRect">
+              <a:avLst>
+                <a:gd name="adj1" fmla="val 28890"/>
+                <a:gd name="adj2" fmla="val 0"/>
+              </a:avLst>
+            </a:prstGeom>
+            <a:solidFill>
+              <a:srgbClr val="F2F2F2"/>
+            </a:solidFill>
+            <a:ln>
+              <a:noFill/>
+            </a:ln>
+          </p:spPr>
+          <p:style>
+            <a:lnRef idx="2">
+              <a:schemeClr val="accent1">
+                <a:shade val="15000"/>
+              </a:schemeClr>
+            </a:lnRef>
+            <a:fillRef idx="1">
+              <a:schemeClr val="accent1"/>
+            </a:fillRef>
+            <a:effectRef idx="0">
+              <a:schemeClr val="accent1"/>
+            </a:effectRef>
+            <a:fontRef idx="minor">
+              <a:schemeClr val="lt1"/>
+            </a:fontRef>
+          </p:style>
+          <p:txBody>
+            <a:bodyPr rtlCol="0" anchor="ctr"/>
+            <a:lstStyle/>
+            <a:p>
+              <a:pPr algn="ctr"/>
+              <a:endParaRPr lang="en-US"/>
+            </a:p>
+          </p:txBody>
+        </p:sp>
+        <p:sp>
+          <p:nvSpPr>
+            <p:cNvPr id="197" name="Rectangle 196">
+              <a:extLst>
+                <a:ext uri="{FF2B5EF4-FFF2-40B4-BE49-F238E27FC236}">
+                  <a16:creationId xmlns:a16="http://schemas.microsoft.com/office/drawing/2014/main" id="{9D8422CA-4FF5-7187-2D0D-ADC45EB74032}"/>
+                </a:ext>
+              </a:extLst>
+            </p:cNvPr>
+            <p:cNvSpPr/>
+            <p:nvPr/>
+          </p:nvSpPr>
+          <p:spPr>
+            <a:xfrm>
+              <a:off x="3916951" y="3990559"/>
+              <a:ext cx="2239249" cy="323587"/>
+            </a:xfrm>
+            <a:prstGeom prst="rect">
+              <a:avLst/>
+            </a:prstGeom>
+            <a:solidFill>
+              <a:schemeClr val="bg1">
+                <a:lumMod val="95000"/>
+              </a:schemeClr>
+            </a:solidFill>
+            <a:ln>
+              <a:noFill/>
+            </a:ln>
+          </p:spPr>
+          <p:style>
+            <a:lnRef idx="2">
+              <a:schemeClr val="accent1">
+                <a:shade val="15000"/>
+              </a:schemeClr>
+            </a:lnRef>
+            <a:fillRef idx="1">
+              <a:schemeClr val="accent1"/>
+            </a:fillRef>
+            <a:effectRef idx="0">
+              <a:schemeClr val="accent1"/>
+            </a:effectRef>
+            <a:fontRef idx="minor">
+              <a:schemeClr val="lt1"/>
+            </a:fontRef>
+          </p:style>
+          <p:txBody>
+            <a:bodyPr rtlCol="0" anchor="ctr"/>
+            <a:lstStyle/>
+            <a:p>
+              <a:pPr algn="ctr"/>
+              <a:endParaRPr lang="en-US"/>
+            </a:p>
+          </p:txBody>
+        </p:sp>
+        <p:sp>
+          <p:nvSpPr>
+            <p:cNvPr id="199" name="TextBox 198">
+              <a:extLst>
+                <a:ext uri="{FF2B5EF4-FFF2-40B4-BE49-F238E27FC236}">
+                  <a16:creationId xmlns:a16="http://schemas.microsoft.com/office/drawing/2014/main" id="{9F8EDD21-A0C6-EE8F-DB27-D2CD5236A366}"/>
+                </a:ext>
+              </a:extLst>
+            </p:cNvPr>
+            <p:cNvSpPr txBox="1"/>
+            <p:nvPr/>
+          </p:nvSpPr>
+          <p:spPr>
+            <a:xfrm>
+              <a:off x="3988167" y="4313625"/>
+              <a:ext cx="2096816" cy="307777"/>
+            </a:xfrm>
+            <a:prstGeom prst="rect">
+              <a:avLst/>
+            </a:prstGeom>
+            <a:noFill/>
+          </p:spPr>
+          <p:txBody>
+            <a:bodyPr wrap="square">
+              <a:spAutoFit/>
+            </a:bodyPr>
+            <a:lstStyle/>
+            <a:p>
+              <a:pPr algn="ctr"/>
+              <a:r>
+                <a:rPr lang="en-US" sz="1400" dirty="0" err="1">
+                  <a:latin typeface="Times New Roman" panose="02020603050405020304" pitchFamily="18" charset="0"/>
+                  <a:cs typeface="Times New Roman" panose="02020603050405020304" pitchFamily="18" charset="0"/>
+                </a:rPr>
+                <a:t>ZeroMQ</a:t>
+              </a:r>
+              <a:endParaRPr lang="en-US" sz="1400" dirty="0">
+                <a:latin typeface="Times New Roman" panose="02020603050405020304" pitchFamily="18" charset="0"/>
+                <a:cs typeface="Times New Roman" panose="02020603050405020304" pitchFamily="18" charset="0"/>
+              </a:endParaRPr>
+            </a:p>
+          </p:txBody>
+        </p:sp>
+        <p:sp>
+          <p:nvSpPr>
+            <p:cNvPr id="200" name="TextBox 199">
+              <a:extLst>
+                <a:ext uri="{FF2B5EF4-FFF2-40B4-BE49-F238E27FC236}">
+                  <a16:creationId xmlns:a16="http://schemas.microsoft.com/office/drawing/2014/main" id="{F4E12DF1-F6ED-9A1D-33B3-ACB6D007555A}"/>
+                </a:ext>
+              </a:extLst>
+            </p:cNvPr>
+            <p:cNvSpPr txBox="1"/>
+            <p:nvPr/>
+          </p:nvSpPr>
+          <p:spPr>
+            <a:xfrm>
+              <a:off x="3988167" y="4007963"/>
+              <a:ext cx="2096816" cy="307777"/>
+            </a:xfrm>
+            <a:prstGeom prst="rect">
+              <a:avLst/>
+            </a:prstGeom>
+            <a:noFill/>
+          </p:spPr>
+          <p:txBody>
+            <a:bodyPr wrap="square">
+              <a:spAutoFit/>
+            </a:bodyPr>
+            <a:lstStyle/>
+            <a:p>
+              <a:pPr algn="ctr"/>
+              <a:r>
+                <a:rPr lang="en-US" sz="1400" dirty="0">
+                  <a:latin typeface="Times New Roman" panose="02020603050405020304" pitchFamily="18" charset="0"/>
+                  <a:cs typeface="Times New Roman" panose="02020603050405020304" pitchFamily="18" charset="0"/>
+                </a:rPr>
+                <a:t>OAI RF Simulator</a:t>
+              </a:r>
+            </a:p>
+          </p:txBody>
+        </p:sp>
+        <p:sp>
+          <p:nvSpPr>
+            <p:cNvPr id="201" name="TextBox 200">
+              <a:extLst>
+                <a:ext uri="{FF2B5EF4-FFF2-40B4-BE49-F238E27FC236}">
+                  <a16:creationId xmlns:a16="http://schemas.microsoft.com/office/drawing/2014/main" id="{0E36D728-D080-9470-0E71-4C5261DE33FD}"/>
+                </a:ext>
+              </a:extLst>
+            </p:cNvPr>
+            <p:cNvSpPr txBox="1"/>
+            <p:nvPr/>
+          </p:nvSpPr>
+          <p:spPr>
+            <a:xfrm>
+              <a:off x="3988166" y="3702301"/>
+              <a:ext cx="2096818" cy="307777"/>
+            </a:xfrm>
+            <a:prstGeom prst="rect">
+              <a:avLst/>
+            </a:prstGeom>
+            <a:noFill/>
+          </p:spPr>
+          <p:txBody>
+            <a:bodyPr wrap="square">
+              <a:spAutoFit/>
+            </a:bodyPr>
+            <a:lstStyle/>
+            <a:p>
+              <a:pPr algn="ctr"/>
+              <a:r>
+                <a:rPr lang="en-US" sz="1400" dirty="0">
+                  <a:latin typeface="Times New Roman" panose="02020603050405020304" pitchFamily="18" charset="0"/>
+                  <a:cs typeface="Times New Roman" panose="02020603050405020304" pitchFamily="18" charset="0"/>
+                </a:rPr>
+                <a:t>srsRAN_4G</a:t>
+              </a:r>
+            </a:p>
+          </p:txBody>
+        </p:sp>
+        <p:sp>
+          <p:nvSpPr>
+            <p:cNvPr id="202" name="TextBox 201">
+              <a:extLst>
+                <a:ext uri="{FF2B5EF4-FFF2-40B4-BE49-F238E27FC236}">
+                  <a16:creationId xmlns:a16="http://schemas.microsoft.com/office/drawing/2014/main" id="{16FB98B6-AA11-EA1B-485F-18B0C2E0C573}"/>
+                </a:ext>
+              </a:extLst>
+            </p:cNvPr>
+            <p:cNvSpPr txBox="1"/>
+            <p:nvPr/>
+          </p:nvSpPr>
+          <p:spPr>
+            <a:xfrm>
+              <a:off x="3988167" y="4924949"/>
+              <a:ext cx="2096816" cy="307777"/>
+            </a:xfrm>
+            <a:prstGeom prst="rect">
+              <a:avLst/>
+            </a:prstGeom>
+            <a:noFill/>
+          </p:spPr>
+          <p:txBody>
+            <a:bodyPr wrap="square">
+              <a:spAutoFit/>
+            </a:bodyPr>
+            <a:lstStyle/>
+            <a:p>
+              <a:pPr algn="ctr"/>
+              <a:r>
+                <a:rPr lang="en-US" sz="1400" dirty="0">
+                  <a:solidFill>
+                    <a:schemeClr val="tx1"/>
+                  </a:solidFill>
+                  <a:latin typeface="Times New Roman" panose="02020603050405020304" pitchFamily="18" charset="0"/>
+                  <a:cs typeface="Times New Roman" panose="02020603050405020304" pitchFamily="18" charset="0"/>
+                </a:rPr>
+                <a:t>RF Simulator</a:t>
+              </a:r>
+              <a:endParaRPr lang="en-US" sz="1400" dirty="0">
+                <a:latin typeface="Times New Roman" panose="02020603050405020304" pitchFamily="18" charset="0"/>
+                <a:cs typeface="Times New Roman" panose="02020603050405020304" pitchFamily="18" charset="0"/>
+              </a:endParaRPr>
+            </a:p>
+          </p:txBody>
+        </p:sp>
+        <p:sp>
+          <p:nvSpPr>
+            <p:cNvPr id="203" name="TextBox 202">
+              <a:extLst>
+                <a:ext uri="{FF2B5EF4-FFF2-40B4-BE49-F238E27FC236}">
+                  <a16:creationId xmlns:a16="http://schemas.microsoft.com/office/drawing/2014/main" id="{2BC8A388-630D-2F0A-E362-E58FB4DE4B4B}"/>
+                </a:ext>
+              </a:extLst>
+            </p:cNvPr>
+            <p:cNvSpPr txBox="1"/>
+            <p:nvPr/>
+          </p:nvSpPr>
+          <p:spPr>
+            <a:xfrm>
+              <a:off x="3941661" y="5227453"/>
+              <a:ext cx="2239249" cy="307777"/>
+            </a:xfrm>
+            <a:prstGeom prst="rect">
+              <a:avLst/>
+            </a:prstGeom>
+            <a:noFill/>
+          </p:spPr>
+          <p:txBody>
+            <a:bodyPr wrap="square">
+              <a:spAutoFit/>
+            </a:bodyPr>
+            <a:lstStyle/>
+            <a:p>
+              <a:pPr algn="ctr"/>
+              <a:r>
+                <a:rPr lang="en-US" sz="1400" b="1" dirty="0">
+                  <a:solidFill>
+                    <a:schemeClr val="tx1"/>
+                  </a:solidFill>
+                  <a:latin typeface="Times New Roman" panose="02020603050405020304" pitchFamily="18" charset="0"/>
+                  <a:cs typeface="Times New Roman" panose="02020603050405020304" pitchFamily="18" charset="0"/>
+                </a:rPr>
+                <a:t>User Equipment</a:t>
+              </a:r>
+              <a:endParaRPr lang="en-US" sz="1400" b="1" dirty="0">
+                <a:latin typeface="Times New Roman" panose="02020603050405020304" pitchFamily="18" charset="0"/>
+                <a:cs typeface="Times New Roman" panose="02020603050405020304" pitchFamily="18" charset="0"/>
+              </a:endParaRPr>
+            </a:p>
+          </p:txBody>
+        </p:sp>
+        <p:sp>
+          <p:nvSpPr>
+            <p:cNvPr id="208" name="Rectangle 207">
+              <a:extLst>
+                <a:ext uri="{FF2B5EF4-FFF2-40B4-BE49-F238E27FC236}">
+                  <a16:creationId xmlns:a16="http://schemas.microsoft.com/office/drawing/2014/main" id="{212011C4-EBF3-EB29-D80C-BEAECBCA7B62}"/>
+                </a:ext>
+              </a:extLst>
+            </p:cNvPr>
+            <p:cNvSpPr/>
+            <p:nvPr/>
+          </p:nvSpPr>
+          <p:spPr>
+            <a:xfrm>
+              <a:off x="3916950" y="4615547"/>
+              <a:ext cx="2239249" cy="323587"/>
+            </a:xfrm>
+            <a:prstGeom prst="rect">
+              <a:avLst/>
+            </a:prstGeom>
+            <a:solidFill>
+              <a:schemeClr val="bg1">
+                <a:lumMod val="95000"/>
+              </a:schemeClr>
+            </a:solidFill>
+            <a:ln>
+              <a:noFill/>
+            </a:ln>
+          </p:spPr>
+          <p:style>
+            <a:lnRef idx="2">
+              <a:schemeClr val="accent1">
+                <a:shade val="15000"/>
+              </a:schemeClr>
+            </a:lnRef>
+            <a:fillRef idx="1">
+              <a:schemeClr val="accent1"/>
+            </a:fillRef>
+            <a:effectRef idx="0">
+              <a:schemeClr val="accent1"/>
+            </a:effectRef>
+            <a:fontRef idx="minor">
+              <a:schemeClr val="lt1"/>
+            </a:fontRef>
+          </p:style>
+          <p:txBody>
+            <a:bodyPr rtlCol="0" anchor="ctr"/>
+            <a:lstStyle/>
+            <a:p>
+              <a:pPr algn="ctr"/>
+              <a:endParaRPr lang="en-US"/>
+            </a:p>
+          </p:txBody>
+        </p:sp>
+        <p:sp>
+          <p:nvSpPr>
+            <p:cNvPr id="209" name="TextBox 208">
+              <a:extLst>
+                <a:ext uri="{FF2B5EF4-FFF2-40B4-BE49-F238E27FC236}">
+                  <a16:creationId xmlns:a16="http://schemas.microsoft.com/office/drawing/2014/main" id="{84E8EFF1-03BE-6A27-CF24-939A0A21B022}"/>
+                </a:ext>
+              </a:extLst>
+            </p:cNvPr>
+            <p:cNvSpPr txBox="1"/>
+            <p:nvPr/>
+          </p:nvSpPr>
+          <p:spPr>
+            <a:xfrm>
+              <a:off x="3988167" y="4619287"/>
+              <a:ext cx="2096816" cy="307777"/>
+            </a:xfrm>
+            <a:prstGeom prst="rect">
+              <a:avLst/>
+            </a:prstGeom>
+            <a:noFill/>
+          </p:spPr>
+          <p:txBody>
+            <a:bodyPr wrap="square">
+              <a:spAutoFit/>
+            </a:bodyPr>
+            <a:lstStyle/>
+            <a:p>
+              <a:pPr algn="ctr"/>
+              <a:r>
+                <a:rPr lang="en-US" sz="1400" dirty="0">
+                  <a:latin typeface="Times New Roman" panose="02020603050405020304" pitchFamily="18" charset="0"/>
+                  <a:cs typeface="Times New Roman" panose="02020603050405020304" pitchFamily="18" charset="0"/>
+                </a:rPr>
+                <a:t>OAI RF Simulator</a:t>
+              </a:r>
+            </a:p>
+          </p:txBody>
+        </p:sp>
+        <p:sp>
+          <p:nvSpPr>
+            <p:cNvPr id="198" name="Rectangle: Rounded Corners 197">
+              <a:extLst>
+                <a:ext uri="{FF2B5EF4-FFF2-40B4-BE49-F238E27FC236}">
+                  <a16:creationId xmlns:a16="http://schemas.microsoft.com/office/drawing/2014/main" id="{4F21D880-AC22-436C-BBFD-41B6AC956B7F}"/>
+                </a:ext>
+              </a:extLst>
+            </p:cNvPr>
+            <p:cNvSpPr/>
+            <p:nvPr/>
+          </p:nvSpPr>
+          <p:spPr>
+            <a:xfrm>
+              <a:off x="3916951" y="3691197"/>
+              <a:ext cx="2239249" cy="1534218"/>
+            </a:xfrm>
+            <a:prstGeom prst="roundRect">
+              <a:avLst>
+                <a:gd name="adj" fmla="val 5819"/>
+              </a:avLst>
+            </a:prstGeom>
+            <a:noFill/>
+            <a:ln w="28575">
+              <a:solidFill>
+                <a:schemeClr val="tx1"/>
+              </a:solidFill>
+            </a:ln>
+          </p:spPr>
+          <p:style>
+            <a:lnRef idx="2">
+              <a:schemeClr val="accent1">
+                <a:shade val="15000"/>
+              </a:schemeClr>
+            </a:lnRef>
+            <a:fillRef idx="1">
+              <a:schemeClr val="accent1"/>
+            </a:fillRef>
+            <a:effectRef idx="0">
+              <a:schemeClr val="accent1"/>
+            </a:effectRef>
+            <a:fontRef idx="minor">
+              <a:schemeClr val="lt1"/>
+            </a:fontRef>
+          </p:style>
+          <p:txBody>
+            <a:bodyPr rtlCol="0" anchor="ctr"/>
+            <a:lstStyle/>
+            <a:p>
+              <a:pPr algn="ctr"/>
+              <a:endParaRPr lang="en-US" dirty="0">
+                <a:latin typeface="Times New Roman" panose="02020603050405020304" pitchFamily="18" charset="0"/>
+                <a:cs typeface="Times New Roman" panose="02020603050405020304" pitchFamily="18" charset="0"/>
+              </a:endParaRPr>
+            </a:p>
+          </p:txBody>
+        </p:sp>
+      </p:grpSp>
+      <p:grpSp>
+        <p:nvGrpSpPr>
+          <p:cNvPr id="12" name="Group 11">
+            <a:extLst>
+              <a:ext uri="{FF2B5EF4-FFF2-40B4-BE49-F238E27FC236}">
+                <a16:creationId xmlns:a16="http://schemas.microsoft.com/office/drawing/2014/main" id="{C49EF465-001C-7783-5F6C-57A25CF61BB4}"/>
+              </a:ext>
+            </a:extLst>
+          </p:cNvPr>
+          <p:cNvGrpSpPr/>
+          <p:nvPr/>
+        </p:nvGrpSpPr>
+        <p:grpSpPr>
+          <a:xfrm>
+            <a:off x="2854729" y="476549"/>
+            <a:ext cx="2283381" cy="618690"/>
+            <a:chOff x="4021891" y="2194877"/>
+            <a:chExt cx="2283381" cy="618690"/>
+          </a:xfrm>
+        </p:grpSpPr>
+        <p:grpSp>
+          <p:nvGrpSpPr>
+            <p:cNvPr id="13" name="Group 12">
+              <a:extLst>
+                <a:ext uri="{FF2B5EF4-FFF2-40B4-BE49-F238E27FC236}">
+                  <a16:creationId xmlns:a16="http://schemas.microsoft.com/office/drawing/2014/main" id="{4C17C7CA-3D88-352F-013F-B179FDCA2E4C}"/>
+                </a:ext>
+              </a:extLst>
+            </p:cNvPr>
+            <p:cNvGrpSpPr/>
+            <p:nvPr/>
+          </p:nvGrpSpPr>
+          <p:grpSpPr>
+            <a:xfrm>
+              <a:off x="4021891" y="2194877"/>
+              <a:ext cx="2239249" cy="618690"/>
+              <a:chOff x="4021891" y="2194877"/>
+              <a:chExt cx="2239249" cy="618690"/>
+            </a:xfrm>
+          </p:grpSpPr>
+          <p:sp>
+            <p:nvSpPr>
+              <p:cNvPr id="18" name="Rectangle: Rounded Corners 17">
+                <a:extLst>
+                  <a:ext uri="{FF2B5EF4-FFF2-40B4-BE49-F238E27FC236}">
+                    <a16:creationId xmlns:a16="http://schemas.microsoft.com/office/drawing/2014/main" id="{C8F751A2-1FD4-CEF2-3A17-68FE14A70D80}"/>
+                  </a:ext>
+                </a:extLst>
+              </p:cNvPr>
+              <p:cNvSpPr/>
+              <p:nvPr/>
+            </p:nvSpPr>
+            <p:spPr>
+              <a:xfrm>
+                <a:off x="4021891" y="2194877"/>
+                <a:ext cx="2239249" cy="618689"/>
+              </a:xfrm>
+              <a:prstGeom prst="roundRect">
+                <a:avLst>
+                  <a:gd name="adj" fmla="val 12974"/>
+                </a:avLst>
+              </a:prstGeom>
+              <a:solidFill>
+                <a:schemeClr val="bg1">
+                  <a:lumMod val="85000"/>
+                </a:schemeClr>
+              </a:solidFill>
+              <a:ln w="28575">
+                <a:noFill/>
+              </a:ln>
+            </p:spPr>
+            <p:style>
+              <a:lnRef idx="2">
+                <a:schemeClr val="accent1">
+                  <a:shade val="15000"/>
+                </a:schemeClr>
+              </a:lnRef>
+              <a:fillRef idx="1">
+                <a:schemeClr val="accent1"/>
+              </a:fillRef>
+              <a:effectRef idx="0">
+                <a:schemeClr val="accent1"/>
+              </a:effectRef>
+              <a:fontRef idx="minor">
+                <a:schemeClr val="lt1"/>
+              </a:fontRef>
+            </p:style>
+            <p:txBody>
+              <a:bodyPr rtlCol="0" anchor="ctr"/>
+              <a:lstStyle/>
+              <a:p>
+                <a:pPr algn="ctr"/>
+                <a:endParaRPr lang="en-US" dirty="0">
+                  <a:latin typeface="Times New Roman" panose="02020603050405020304" pitchFamily="18" charset="0"/>
+                  <a:cs typeface="Times New Roman" panose="02020603050405020304" pitchFamily="18" charset="0"/>
+                </a:endParaRPr>
+              </a:p>
+            </p:txBody>
+          </p:sp>
+          <p:sp>
+            <p:nvSpPr>
+              <p:cNvPr id="19" name="Rectangle: Top Corners Rounded 18">
+                <a:extLst>
+                  <a:ext uri="{FF2B5EF4-FFF2-40B4-BE49-F238E27FC236}">
+                    <a16:creationId xmlns:a16="http://schemas.microsoft.com/office/drawing/2014/main" id="{6B20333F-70B2-82D0-0236-16367BE204FC}"/>
+                  </a:ext>
+                </a:extLst>
+              </p:cNvPr>
+              <p:cNvSpPr/>
+              <p:nvPr/>
+            </p:nvSpPr>
+            <p:spPr>
+              <a:xfrm flipV="1">
+                <a:off x="4022672" y="2504431"/>
+                <a:ext cx="2238468" cy="307778"/>
+              </a:xfrm>
+              <a:prstGeom prst="round2SameRect">
+                <a:avLst>
+                  <a:gd name="adj1" fmla="val 28674"/>
+                  <a:gd name="adj2" fmla="val 0"/>
+                </a:avLst>
+              </a:prstGeom>
+              <a:solidFill>
+                <a:schemeClr val="bg1">
+                  <a:lumMod val="95000"/>
+                </a:schemeClr>
+              </a:solidFill>
+              <a:ln>
+                <a:noFill/>
+              </a:ln>
+            </p:spPr>
+            <p:style>
+              <a:lnRef idx="2">
+                <a:schemeClr val="accent1">
+                  <a:shade val="15000"/>
+                </a:schemeClr>
+              </a:lnRef>
+              <a:fillRef idx="1">
+                <a:schemeClr val="accent1"/>
+              </a:fillRef>
+              <a:effectRef idx="0">
+                <a:schemeClr val="accent1"/>
+              </a:effectRef>
+              <a:fontRef idx="minor">
+                <a:schemeClr val="lt1"/>
+              </a:fontRef>
+            </p:style>
+            <p:txBody>
+              <a:bodyPr rtlCol="0" anchor="ctr"/>
+              <a:lstStyle/>
+              <a:p>
+                <a:pPr algn="ctr"/>
+                <a:endParaRPr lang="en-US"/>
+              </a:p>
+            </p:txBody>
+          </p:sp>
+          <p:sp>
+            <p:nvSpPr>
+              <p:cNvPr id="20" name="Rectangle: Rounded Corners 19">
+                <a:extLst>
+                  <a:ext uri="{FF2B5EF4-FFF2-40B4-BE49-F238E27FC236}">
+                    <a16:creationId xmlns:a16="http://schemas.microsoft.com/office/drawing/2014/main" id="{4935954C-C150-F87D-E950-5626530C6397}"/>
+                  </a:ext>
+                </a:extLst>
+              </p:cNvPr>
+              <p:cNvSpPr/>
+              <p:nvPr/>
+            </p:nvSpPr>
+            <p:spPr>
+              <a:xfrm>
+                <a:off x="4021891" y="2194878"/>
+                <a:ext cx="2239249" cy="618689"/>
+              </a:xfrm>
+              <a:prstGeom prst="roundRect">
+                <a:avLst>
+                  <a:gd name="adj" fmla="val 12974"/>
+                </a:avLst>
+              </a:prstGeom>
+              <a:noFill/>
+              <a:ln w="28575">
+                <a:solidFill>
+                  <a:schemeClr val="tx1"/>
+                </a:solidFill>
+              </a:ln>
+            </p:spPr>
+            <p:style>
+              <a:lnRef idx="2">
+                <a:schemeClr val="accent1">
+                  <a:shade val="15000"/>
+                </a:schemeClr>
+              </a:lnRef>
+              <a:fillRef idx="1">
+                <a:schemeClr val="accent1"/>
+              </a:fillRef>
+              <a:effectRef idx="0">
+                <a:schemeClr val="accent1"/>
+              </a:effectRef>
+              <a:fontRef idx="minor">
+                <a:schemeClr val="lt1"/>
+              </a:fontRef>
+            </p:style>
+            <p:txBody>
+              <a:bodyPr rtlCol="0" anchor="ctr"/>
+              <a:lstStyle/>
+              <a:p>
+                <a:pPr algn="ctr"/>
+                <a:endParaRPr lang="en-US" dirty="0">
+                  <a:latin typeface="Times New Roman" panose="02020603050405020304" pitchFamily="18" charset="0"/>
+                  <a:cs typeface="Times New Roman" panose="02020603050405020304" pitchFamily="18" charset="0"/>
+                </a:endParaRPr>
+              </a:p>
+            </p:txBody>
+          </p:sp>
+        </p:grpSp>
+        <p:sp>
+          <p:nvSpPr>
+            <p:cNvPr id="14" name="TextBox 13">
+              <a:extLst>
+                <a:ext uri="{FF2B5EF4-FFF2-40B4-BE49-F238E27FC236}">
+                  <a16:creationId xmlns:a16="http://schemas.microsoft.com/office/drawing/2014/main" id="{2B8321BA-AFD2-0D5A-A1EF-8F267B242282}"/>
+                </a:ext>
+              </a:extLst>
+            </p:cNvPr>
+            <p:cNvSpPr txBox="1"/>
+            <p:nvPr/>
+          </p:nvSpPr>
+          <p:spPr>
+            <a:xfrm>
+              <a:off x="4335869" y="2202843"/>
+              <a:ext cx="1969403" cy="206243"/>
+            </a:xfrm>
+            <a:prstGeom prst="rect">
+              <a:avLst/>
+            </a:prstGeom>
+            <a:noFill/>
+          </p:spPr>
+          <p:txBody>
+            <a:bodyPr wrap="square">
+              <a:spAutoFit/>
+            </a:bodyPr>
+            <a:lstStyle/>
+            <a:p>
+              <a:pPr algn="ctr"/>
+              <a:r>
+                <a:rPr lang="en-US" sz="1400" dirty="0">
+                  <a:solidFill>
+                    <a:schemeClr val="tx1"/>
+                  </a:solidFill>
+                  <a:latin typeface="Times New Roman" panose="02020603050405020304" pitchFamily="18" charset="0"/>
+                  <a:cs typeface="Times New Roman" panose="02020603050405020304" pitchFamily="18" charset="0"/>
+                </a:rPr>
+                <a:t>Software-Defined Radio</a:t>
+              </a:r>
+              <a:endParaRPr lang="en-US" sz="1400" dirty="0">
+                <a:latin typeface="Times New Roman" panose="02020603050405020304" pitchFamily="18" charset="0"/>
+                <a:cs typeface="Times New Roman" panose="02020603050405020304" pitchFamily="18" charset="0"/>
+              </a:endParaRPr>
+            </a:p>
+          </p:txBody>
+        </p:sp>
+        <p:pic>
+          <p:nvPicPr>
+            <p:cNvPr id="15" name="Graphic 14">
+              <a:extLst>
+                <a:ext uri="{FF2B5EF4-FFF2-40B4-BE49-F238E27FC236}">
+                  <a16:creationId xmlns:a16="http://schemas.microsoft.com/office/drawing/2014/main" id="{838E587D-7FC7-DCA8-A87C-348E0BC50496}"/>
+                </a:ext>
+              </a:extLst>
+            </p:cNvPr>
+            <p:cNvPicPr>
+              <a:picLocks noChangeAspect="1"/>
+            </p:cNvPicPr>
+            <p:nvPr/>
+          </p:nvPicPr>
+          <p:blipFill>
+            <a:blip r:embed="rId2">
+              <a:extLst>
+                <a:ext uri="{96DAC541-7B7A-43D3-8B79-37D633B846F1}">
+                  <asvg:svgBlip xmlns:asvg="http://schemas.microsoft.com/office/drawing/2016/SVG/main" r:embed="rId3"/>
+                </a:ext>
+              </a:extLst>
+            </a:blip>
+            <a:srcRect/>
+            <a:stretch/>
+          </p:blipFill>
+          <p:spPr>
+            <a:xfrm>
+              <a:off x="4134842" y="2215325"/>
+              <a:ext cx="289426" cy="289426"/>
+            </a:xfrm>
+            <a:prstGeom prst="rect">
+              <a:avLst/>
+            </a:prstGeom>
+          </p:spPr>
+        </p:pic>
+        <p:sp>
+          <p:nvSpPr>
+            <p:cNvPr id="16" name="TextBox 15">
+              <a:extLst>
+                <a:ext uri="{FF2B5EF4-FFF2-40B4-BE49-F238E27FC236}">
+                  <a16:creationId xmlns:a16="http://schemas.microsoft.com/office/drawing/2014/main" id="{89E10690-E616-98D7-E1BE-87ABD688169C}"/>
+                </a:ext>
+              </a:extLst>
+            </p:cNvPr>
+            <p:cNvSpPr txBox="1"/>
+            <p:nvPr/>
+          </p:nvSpPr>
+          <p:spPr>
+            <a:xfrm>
+              <a:off x="4335869" y="2505790"/>
+              <a:ext cx="1969403" cy="307777"/>
+            </a:xfrm>
+            <a:prstGeom prst="rect">
+              <a:avLst/>
+            </a:prstGeom>
+            <a:noFill/>
+          </p:spPr>
+          <p:txBody>
+            <a:bodyPr wrap="square">
+              <a:spAutoFit/>
+            </a:bodyPr>
+            <a:lstStyle/>
+            <a:p>
+              <a:pPr algn="ctr"/>
+              <a:r>
+                <a:rPr lang="en-US" sz="1400" dirty="0">
+                  <a:solidFill>
+                    <a:schemeClr val="tx1"/>
+                  </a:solidFill>
+                  <a:latin typeface="Times New Roman" panose="02020603050405020304" pitchFamily="18" charset="0"/>
+                  <a:cs typeface="Times New Roman" panose="02020603050405020304" pitchFamily="18" charset="0"/>
+                </a:rPr>
+                <a:t>RF Simulator / </a:t>
+              </a:r>
+              <a:r>
+                <a:rPr lang="en-US" sz="1400" dirty="0" err="1">
+                  <a:solidFill>
+                    <a:schemeClr val="tx1"/>
+                  </a:solidFill>
+                  <a:latin typeface="Times New Roman" panose="02020603050405020304" pitchFamily="18" charset="0"/>
+                  <a:cs typeface="Times New Roman" panose="02020603050405020304" pitchFamily="18" charset="0"/>
+                </a:rPr>
+                <a:t>ZeroMQ</a:t>
+              </a:r>
+              <a:endParaRPr lang="en-US" sz="1400" dirty="0">
+                <a:latin typeface="Times New Roman" panose="02020603050405020304" pitchFamily="18" charset="0"/>
+                <a:cs typeface="Times New Roman" panose="02020603050405020304" pitchFamily="18" charset="0"/>
+              </a:endParaRPr>
+            </a:p>
+          </p:txBody>
+        </p:sp>
+        <p:pic>
+          <p:nvPicPr>
+            <p:cNvPr id="17" name="Graphic 16">
+              <a:extLst>
+                <a:ext uri="{FF2B5EF4-FFF2-40B4-BE49-F238E27FC236}">
+                  <a16:creationId xmlns:a16="http://schemas.microsoft.com/office/drawing/2014/main" id="{623624F3-1900-AB14-665C-2ED82DEB8D11}"/>
+                </a:ext>
+              </a:extLst>
+            </p:cNvPr>
+            <p:cNvPicPr>
+              <a:picLocks noChangeAspect="1"/>
+            </p:cNvPicPr>
+            <p:nvPr/>
+          </p:nvPicPr>
+          <p:blipFill>
+            <a:blip r:embed="rId4">
+              <a:extLst>
+                <a:ext uri="{96DAC541-7B7A-43D3-8B79-37D633B846F1}">
+                  <asvg:svgBlip xmlns:asvg="http://schemas.microsoft.com/office/drawing/2016/SVG/main" r:embed="rId5"/>
+                </a:ext>
+              </a:extLst>
+            </a:blip>
+            <a:srcRect/>
+            <a:stretch/>
+          </p:blipFill>
+          <p:spPr>
+            <a:xfrm>
+              <a:off x="4167277" y="2528018"/>
+              <a:ext cx="256990" cy="256990"/>
+            </a:xfrm>
+            <a:prstGeom prst="rect">
+              <a:avLst/>
+            </a:prstGeom>
+          </p:spPr>
+        </p:pic>
+      </p:grpSp>
+    </p:spTree>
+    <p:extLst>
+      <p:ext uri="{BB962C8B-B14F-4D97-AF65-F5344CB8AC3E}">
+        <p14:creationId xmlns:p14="http://schemas.microsoft.com/office/powerpoint/2010/main" val="3201538529"/>
+      </p:ext>
+    </p:extLst>
+  </p:cSld>
+  <p:clrMapOvr>
+    <a:masterClrMapping/>
+  </p:clrMapOvr>
+</p:sld>
+</file>
+
 <file path=ppt/theme/theme1.xml><?xml version="1.0" encoding="utf-8"?>
 <a:theme xmlns:a="http://schemas.openxmlformats.org/drawingml/2006/main" name="Office Theme">
   <a:themeElements>

--- a/RAN_Intelligent_Controllers/research/Diagrams.pptx
+++ b/RAN_Intelligent_Controllers/research/Diagrams.pptx
@@ -263,7 +263,7 @@
           <a:p>
             <a:fld id="{2D1DF383-F48D-4C35-882C-8A26F25E24F6}" type="datetimeFigureOut">
               <a:rPr lang="en-US" smtClean="0"/>
-              <a:t>3/26/2025</a:t>
+              <a:t>3/27/2025</a:t>
             </a:fld>
             <a:endParaRPr lang="en-US"/>
           </a:p>
@@ -461,7 +461,7 @@
           <a:p>
             <a:fld id="{2D1DF383-F48D-4C35-882C-8A26F25E24F6}" type="datetimeFigureOut">
               <a:rPr lang="en-US" smtClean="0"/>
-              <a:t>3/26/2025</a:t>
+              <a:t>3/27/2025</a:t>
             </a:fld>
             <a:endParaRPr lang="en-US"/>
           </a:p>
@@ -669,7 +669,7 @@
           <a:p>
             <a:fld id="{2D1DF383-F48D-4C35-882C-8A26F25E24F6}" type="datetimeFigureOut">
               <a:rPr lang="en-US" smtClean="0"/>
-              <a:t>3/26/2025</a:t>
+              <a:t>3/27/2025</a:t>
             </a:fld>
             <a:endParaRPr lang="en-US"/>
           </a:p>
@@ -867,7 +867,7 @@
           <a:p>
             <a:fld id="{2D1DF383-F48D-4C35-882C-8A26F25E24F6}" type="datetimeFigureOut">
               <a:rPr lang="en-US" smtClean="0"/>
-              <a:t>3/26/2025</a:t>
+              <a:t>3/27/2025</a:t>
             </a:fld>
             <a:endParaRPr lang="en-US"/>
           </a:p>
@@ -1142,7 +1142,7 @@
           <a:p>
             <a:fld id="{2D1DF383-F48D-4C35-882C-8A26F25E24F6}" type="datetimeFigureOut">
               <a:rPr lang="en-US" smtClean="0"/>
-              <a:t>3/26/2025</a:t>
+              <a:t>3/27/2025</a:t>
             </a:fld>
             <a:endParaRPr lang="en-US"/>
           </a:p>
@@ -1407,7 +1407,7 @@
           <a:p>
             <a:fld id="{2D1DF383-F48D-4C35-882C-8A26F25E24F6}" type="datetimeFigureOut">
               <a:rPr lang="en-US" smtClean="0"/>
-              <a:t>3/26/2025</a:t>
+              <a:t>3/27/2025</a:t>
             </a:fld>
             <a:endParaRPr lang="en-US"/>
           </a:p>
@@ -1819,7 +1819,7 @@
           <a:p>
             <a:fld id="{2D1DF383-F48D-4C35-882C-8A26F25E24F6}" type="datetimeFigureOut">
               <a:rPr lang="en-US" smtClean="0"/>
-              <a:t>3/26/2025</a:t>
+              <a:t>3/27/2025</a:t>
             </a:fld>
             <a:endParaRPr lang="en-US"/>
           </a:p>
@@ -1960,7 +1960,7 @@
           <a:p>
             <a:fld id="{2D1DF383-F48D-4C35-882C-8A26F25E24F6}" type="datetimeFigureOut">
               <a:rPr lang="en-US" smtClean="0"/>
-              <a:t>3/26/2025</a:t>
+              <a:t>3/27/2025</a:t>
             </a:fld>
             <a:endParaRPr lang="en-US"/>
           </a:p>
@@ -2073,7 +2073,7 @@
           <a:p>
             <a:fld id="{2D1DF383-F48D-4C35-882C-8A26F25E24F6}" type="datetimeFigureOut">
               <a:rPr lang="en-US" smtClean="0"/>
-              <a:t>3/26/2025</a:t>
+              <a:t>3/27/2025</a:t>
             </a:fld>
             <a:endParaRPr lang="en-US"/>
           </a:p>
@@ -2384,7 +2384,7 @@
           <a:p>
             <a:fld id="{2D1DF383-F48D-4C35-882C-8A26F25E24F6}" type="datetimeFigureOut">
               <a:rPr lang="en-US" smtClean="0"/>
-              <a:t>3/26/2025</a:t>
+              <a:t>3/27/2025</a:t>
             </a:fld>
             <a:endParaRPr lang="en-US"/>
           </a:p>
@@ -2672,7 +2672,7 @@
           <a:p>
             <a:fld id="{2D1DF383-F48D-4C35-882C-8A26F25E24F6}" type="datetimeFigureOut">
               <a:rPr lang="en-US" smtClean="0"/>
-              <a:t>3/26/2025</a:t>
+              <a:t>3/27/2025</a:t>
             </a:fld>
             <a:endParaRPr lang="en-US"/>
           </a:p>
@@ -2913,7 +2913,7 @@
           <a:p>
             <a:fld id="{2D1DF383-F48D-4C35-882C-8A26F25E24F6}" type="datetimeFigureOut">
               <a:rPr lang="en-US" smtClean="0"/>
-              <a:t>3/26/2025</a:t>
+              <a:t>3/27/2025</a:t>
             </a:fld>
             <a:endParaRPr lang="en-US"/>
           </a:p>
@@ -12055,7 +12055,7 @@
             </a:prstGeom>
             <a:ln w="12700">
               <a:solidFill>
-                <a:srgbClr val="FF0000"/>
+                <a:srgbClr val="C40E00"/>
               </a:solidFill>
               <a:prstDash val="sysDot"/>
             </a:ln>
@@ -14839,7 +14839,7 @@
               </a:prstGeom>
               <a:ln w="12700">
                 <a:solidFill>
-                  <a:srgbClr val="FF0000"/>
+                  <a:srgbClr val="C40E00"/>
                 </a:solidFill>
                 <a:prstDash val="sysDot"/>
               </a:ln>
@@ -15070,7 +15070,7 @@
               </a:prstGeom>
               <a:ln w="12700">
                 <a:solidFill>
-                  <a:srgbClr val="FF0000"/>
+                  <a:srgbClr val="FF7B61"/>
                 </a:solidFill>
                 <a:prstDash val="sysDot"/>
               </a:ln>
@@ -16079,7 +16079,7 @@
                 </a:prstGeom>
                 <a:ln w="12700">
                   <a:solidFill>
-                    <a:srgbClr val="FF0000"/>
+                    <a:srgbClr val="FF7B61"/>
                   </a:solidFill>
                   <a:prstDash val="sysDot"/>
                 </a:ln>

--- a/RAN_Intelligent_Controllers/research/Diagrams.pptx
+++ b/RAN_Intelligent_Controllers/research/Diagrams.pptx
@@ -263,7 +263,7 @@
           <a:p>
             <a:fld id="{2D1DF383-F48D-4C35-882C-8A26F25E24F6}" type="datetimeFigureOut">
               <a:rPr lang="en-US" smtClean="0"/>
-              <a:t>3/27/2025</a:t>
+              <a:t>4/3/2025</a:t>
             </a:fld>
             <a:endParaRPr lang="en-US"/>
           </a:p>
@@ -461,7 +461,7 @@
           <a:p>
             <a:fld id="{2D1DF383-F48D-4C35-882C-8A26F25E24F6}" type="datetimeFigureOut">
               <a:rPr lang="en-US" smtClean="0"/>
-              <a:t>3/27/2025</a:t>
+              <a:t>4/3/2025</a:t>
             </a:fld>
             <a:endParaRPr lang="en-US"/>
           </a:p>
@@ -669,7 +669,7 @@
           <a:p>
             <a:fld id="{2D1DF383-F48D-4C35-882C-8A26F25E24F6}" type="datetimeFigureOut">
               <a:rPr lang="en-US" smtClean="0"/>
-              <a:t>3/27/2025</a:t>
+              <a:t>4/3/2025</a:t>
             </a:fld>
             <a:endParaRPr lang="en-US"/>
           </a:p>
@@ -867,7 +867,7 @@
           <a:p>
             <a:fld id="{2D1DF383-F48D-4C35-882C-8A26F25E24F6}" type="datetimeFigureOut">
               <a:rPr lang="en-US" smtClean="0"/>
-              <a:t>3/27/2025</a:t>
+              <a:t>4/3/2025</a:t>
             </a:fld>
             <a:endParaRPr lang="en-US"/>
           </a:p>
@@ -1142,7 +1142,7 @@
           <a:p>
             <a:fld id="{2D1DF383-F48D-4C35-882C-8A26F25E24F6}" type="datetimeFigureOut">
               <a:rPr lang="en-US" smtClean="0"/>
-              <a:t>3/27/2025</a:t>
+              <a:t>4/3/2025</a:t>
             </a:fld>
             <a:endParaRPr lang="en-US"/>
           </a:p>
@@ -1407,7 +1407,7 @@
           <a:p>
             <a:fld id="{2D1DF383-F48D-4C35-882C-8A26F25E24F6}" type="datetimeFigureOut">
               <a:rPr lang="en-US" smtClean="0"/>
-              <a:t>3/27/2025</a:t>
+              <a:t>4/3/2025</a:t>
             </a:fld>
             <a:endParaRPr lang="en-US"/>
           </a:p>
@@ -1819,7 +1819,7 @@
           <a:p>
             <a:fld id="{2D1DF383-F48D-4C35-882C-8A26F25E24F6}" type="datetimeFigureOut">
               <a:rPr lang="en-US" smtClean="0"/>
-              <a:t>3/27/2025</a:t>
+              <a:t>4/3/2025</a:t>
             </a:fld>
             <a:endParaRPr lang="en-US"/>
           </a:p>
@@ -1960,7 +1960,7 @@
           <a:p>
             <a:fld id="{2D1DF383-F48D-4C35-882C-8A26F25E24F6}" type="datetimeFigureOut">
               <a:rPr lang="en-US" smtClean="0"/>
-              <a:t>3/27/2025</a:t>
+              <a:t>4/3/2025</a:t>
             </a:fld>
             <a:endParaRPr lang="en-US"/>
           </a:p>
@@ -2073,7 +2073,7 @@
           <a:p>
             <a:fld id="{2D1DF383-F48D-4C35-882C-8A26F25E24F6}" type="datetimeFigureOut">
               <a:rPr lang="en-US" smtClean="0"/>
-              <a:t>3/27/2025</a:t>
+              <a:t>4/3/2025</a:t>
             </a:fld>
             <a:endParaRPr lang="en-US"/>
           </a:p>
@@ -2384,7 +2384,7 @@
           <a:p>
             <a:fld id="{2D1DF383-F48D-4C35-882C-8A26F25E24F6}" type="datetimeFigureOut">
               <a:rPr lang="en-US" smtClean="0"/>
-              <a:t>3/27/2025</a:t>
+              <a:t>4/3/2025</a:t>
             </a:fld>
             <a:endParaRPr lang="en-US"/>
           </a:p>
@@ -2672,7 +2672,7 @@
           <a:p>
             <a:fld id="{2D1DF383-F48D-4C35-882C-8A26F25E24F6}" type="datetimeFigureOut">
               <a:rPr lang="en-US" smtClean="0"/>
-              <a:t>3/27/2025</a:t>
+              <a:t>4/3/2025</a:t>
             </a:fld>
             <a:endParaRPr lang="en-US"/>
           </a:p>
@@ -2913,7 +2913,7 @@
           <a:p>
             <a:fld id="{2D1DF383-F48D-4C35-882C-8A26F25E24F6}" type="datetimeFigureOut">
               <a:rPr lang="en-US" smtClean="0"/>
-              <a:t>3/27/2025</a:t>
+              <a:t>4/3/2025</a:t>
             </a:fld>
             <a:endParaRPr lang="en-US"/>
           </a:p>
@@ -11953,10 +11953,10 @@
       </p:grpSpPr>
       <p:grpSp>
         <p:nvGrpSpPr>
-          <p:cNvPr id="13" name="Group 12">
+          <p:cNvPr id="15" name="Group 14">
             <a:extLst>
               <a:ext uri="{FF2B5EF4-FFF2-40B4-BE49-F238E27FC236}">
-                <a16:creationId xmlns:a16="http://schemas.microsoft.com/office/drawing/2014/main" id="{79BBDDB3-4BA8-B6A3-68D5-E088B0FC42CC}"/>
+                <a16:creationId xmlns:a16="http://schemas.microsoft.com/office/drawing/2014/main" id="{5277176F-FC8F-52B9-D803-65D9E27547F1}"/>
               </a:ext>
             </a:extLst>
           </p:cNvPr>
@@ -14766,7 +14766,7 @@
                     <a:latin typeface="Times New Roman" panose="02020603050405020304" pitchFamily="18" charset="0"/>
                     <a:cs typeface="Times New Roman" panose="02020603050405020304" pitchFamily="18" charset="0"/>
                   </a:rPr>
-                  <a:t>Not supported</a:t>
+                  <a:t>Presumably not supported</a:t>
                 </a:r>
               </a:p>
             </p:txBody>
@@ -14860,6 +14860,52 @@
             </p:style>
           </p:cxnSp>
         </p:grpSp>
+        <p:cxnSp>
+          <p:nvCxnSpPr>
+            <p:cNvPr id="9" name="Straight Connector 8">
+              <a:extLst>
+                <a:ext uri="{FF2B5EF4-FFF2-40B4-BE49-F238E27FC236}">
+                  <a16:creationId xmlns:a16="http://schemas.microsoft.com/office/drawing/2014/main" id="{145E9855-DB2F-EF47-9B6D-8D24DD2BDB8D}"/>
+                </a:ext>
+              </a:extLst>
+            </p:cNvPr>
+            <p:cNvCxnSpPr>
+              <a:cxnSpLocks/>
+              <a:stCxn id="202" idx="3"/>
+              <a:endCxn id="281" idx="1"/>
+            </p:cNvCxnSpPr>
+            <p:nvPr/>
+          </p:nvCxnSpPr>
+          <p:spPr>
+            <a:xfrm flipV="1">
+              <a:off x="2929886" y="2938487"/>
+              <a:ext cx="664414" cy="620532"/>
+            </a:xfrm>
+            <a:prstGeom prst="line">
+              <a:avLst/>
+            </a:prstGeom>
+            <a:ln w="12700">
+              <a:solidFill>
+                <a:schemeClr val="tx1"/>
+              </a:solidFill>
+              <a:prstDash val="sysDot"/>
+            </a:ln>
+          </p:spPr>
+          <p:style>
+            <a:lnRef idx="2">
+              <a:schemeClr val="accent1"/>
+            </a:lnRef>
+            <a:fillRef idx="0">
+              <a:schemeClr val="accent1"/>
+            </a:fillRef>
+            <a:effectRef idx="1">
+              <a:schemeClr val="accent1"/>
+            </a:effectRef>
+            <a:fontRef idx="minor">
+              <a:schemeClr val="tx1"/>
+            </a:fontRef>
+          </p:style>
+        </p:cxnSp>
       </p:grpSp>
     </p:spTree>
     <p:extLst>
@@ -14948,10 +14994,10 @@
       </p:sp>
       <p:grpSp>
         <p:nvGrpSpPr>
-          <p:cNvPr id="5" name="Group 4">
+          <p:cNvPr id="71" name="Group 70">
             <a:extLst>
               <a:ext uri="{FF2B5EF4-FFF2-40B4-BE49-F238E27FC236}">
-                <a16:creationId xmlns:a16="http://schemas.microsoft.com/office/drawing/2014/main" id="{931B99C2-A115-399B-B00F-E5C8AE3B5617}"/>
+                <a16:creationId xmlns:a16="http://schemas.microsoft.com/office/drawing/2014/main" id="{985DB30F-01F0-302E-005C-3A0C3D22E960}"/>
               </a:ext>
             </a:extLst>
           </p:cNvPr>
@@ -15025,12 +15071,57 @@
             </a:p>
           </p:txBody>
         </p:sp>
+        <p:cxnSp>
+          <p:nvCxnSpPr>
+            <p:cNvPr id="8" name="Straight Connector 7">
+              <a:extLst>
+                <a:ext uri="{FF2B5EF4-FFF2-40B4-BE49-F238E27FC236}">
+                  <a16:creationId xmlns:a16="http://schemas.microsoft.com/office/drawing/2014/main" id="{9E7BD0CD-0AD8-F766-F38F-1FB50716D247}"/>
+                </a:ext>
+              </a:extLst>
+            </p:cNvPr>
+            <p:cNvCxnSpPr>
+              <a:cxnSpLocks/>
+              <a:endCxn id="35" idx="1"/>
+            </p:cNvCxnSpPr>
+            <p:nvPr/>
+          </p:nvCxnSpPr>
+          <p:spPr>
+            <a:xfrm>
+              <a:off x="5943801" y="3116526"/>
+              <a:ext cx="554158" cy="139732"/>
+            </a:xfrm>
+            <a:prstGeom prst="line">
+              <a:avLst/>
+            </a:prstGeom>
+            <a:ln w="12700">
+              <a:solidFill>
+                <a:srgbClr val="FF7B61"/>
+              </a:solidFill>
+              <a:prstDash val="sysDot"/>
+            </a:ln>
+          </p:spPr>
+          <p:style>
+            <a:lnRef idx="2">
+              <a:schemeClr val="accent1"/>
+            </a:lnRef>
+            <a:fillRef idx="0">
+              <a:schemeClr val="accent1"/>
+            </a:fillRef>
+            <a:effectRef idx="1">
+              <a:schemeClr val="accent1"/>
+            </a:effectRef>
+            <a:fontRef idx="minor">
+              <a:schemeClr val="tx1"/>
+            </a:fontRef>
+          </p:style>
+        </p:cxnSp>
         <p:grpSp>
           <p:nvGrpSpPr>
-            <p:cNvPr id="7" name="Group 6">
+            <p:cNvPr id="9" name="Group 8">
               <a:extLst>
                 <a:ext uri="{FF2B5EF4-FFF2-40B4-BE49-F238E27FC236}">
-                  <a16:creationId xmlns:a16="http://schemas.microsoft.com/office/drawing/2014/main" id="{7118692E-D854-304E-EB0C-33857FA0FA39}"/>
+                  <a16:creationId xmlns:a16="http://schemas.microsoft.com/office/drawing/2014/main" id="{316BC739-B35F-85FE-983B-5189F671AA40}"/>
                 </a:ext>
               </a:extLst>
             </p:cNvPr>
@@ -15039,63 +15130,18 @@
           </p:nvGrpSpPr>
           <p:grpSpPr>
             <a:xfrm>
-              <a:off x="690637" y="2167447"/>
-              <a:ext cx="11043556" cy="1849234"/>
-              <a:chOff x="778869" y="4228858"/>
-              <a:chExt cx="11043556" cy="1849234"/>
+              <a:off x="6498724" y="2172257"/>
+              <a:ext cx="2302213" cy="647296"/>
+              <a:chOff x="7063677" y="4951549"/>
+              <a:chExt cx="2302213" cy="647296"/>
             </a:xfrm>
           </p:grpSpPr>
-          <p:cxnSp>
-            <p:nvCxnSpPr>
-              <p:cNvPr id="8" name="Straight Connector 7">
+          <p:grpSp>
+            <p:nvGrpSpPr>
+              <p:cNvPr id="67" name="Group 66">
                 <a:extLst>
                   <a:ext uri="{FF2B5EF4-FFF2-40B4-BE49-F238E27FC236}">
-                    <a16:creationId xmlns:a16="http://schemas.microsoft.com/office/drawing/2014/main" id="{9E7BD0CD-0AD8-F766-F38F-1FB50716D247}"/>
-                  </a:ext>
-                </a:extLst>
-              </p:cNvPr>
-              <p:cNvCxnSpPr>
-                <a:cxnSpLocks/>
-                <a:endCxn id="35" idx="1"/>
-              </p:cNvCxnSpPr>
-              <p:nvPr/>
-            </p:nvCxnSpPr>
-            <p:spPr>
-              <a:xfrm>
-                <a:off x="6032033" y="5177937"/>
-                <a:ext cx="554158" cy="139732"/>
-              </a:xfrm>
-              <a:prstGeom prst="line">
-                <a:avLst/>
-              </a:prstGeom>
-              <a:ln w="12700">
-                <a:solidFill>
-                  <a:srgbClr val="FF7B61"/>
-                </a:solidFill>
-                <a:prstDash val="sysDot"/>
-              </a:ln>
-            </p:spPr>
-            <p:style>
-              <a:lnRef idx="2">
-                <a:schemeClr val="accent1"/>
-              </a:lnRef>
-              <a:fillRef idx="0">
-                <a:schemeClr val="accent1"/>
-              </a:fillRef>
-              <a:effectRef idx="1">
-                <a:schemeClr val="accent1"/>
-              </a:effectRef>
-              <a:fontRef idx="minor">
-                <a:schemeClr val="tx1"/>
-              </a:fontRef>
-            </p:style>
-          </p:cxnSp>
-          <p:grpSp>
-            <p:nvGrpSpPr>
-              <p:cNvPr id="9" name="Group 8">
-                <a:extLst>
-                  <a:ext uri="{FF2B5EF4-FFF2-40B4-BE49-F238E27FC236}">
-                    <a16:creationId xmlns:a16="http://schemas.microsoft.com/office/drawing/2014/main" id="{316BC739-B35F-85FE-983B-5189F671AA40}"/>
+                    <a16:creationId xmlns:a16="http://schemas.microsoft.com/office/drawing/2014/main" id="{94C82875-16D7-328F-D44F-2C1A08F28D46}"/>
                   </a:ext>
                 </a:extLst>
               </p:cNvPr>
@@ -15104,750 +15150,18 @@
             </p:nvGrpSpPr>
             <p:grpSpPr>
               <a:xfrm>
-                <a:off x="6586956" y="4233668"/>
-                <a:ext cx="2302213" cy="647296"/>
-                <a:chOff x="7063677" y="4951549"/>
-                <a:chExt cx="2302213" cy="647296"/>
-              </a:xfrm>
-            </p:grpSpPr>
-            <p:grpSp>
-              <p:nvGrpSpPr>
-                <p:cNvPr id="67" name="Group 66">
-                  <a:extLst>
-                    <a:ext uri="{FF2B5EF4-FFF2-40B4-BE49-F238E27FC236}">
-                      <a16:creationId xmlns:a16="http://schemas.microsoft.com/office/drawing/2014/main" id="{94C82875-16D7-328F-D44F-2C1A08F28D46}"/>
-                    </a:ext>
-                  </a:extLst>
-                </p:cNvPr>
-                <p:cNvGrpSpPr/>
-                <p:nvPr/>
-              </p:nvGrpSpPr>
-              <p:grpSpPr>
-                <a:xfrm>
-                  <a:off x="7063677" y="4951549"/>
-                  <a:ext cx="2239251" cy="333931"/>
-                  <a:chOff x="7168594" y="4200673"/>
-                  <a:chExt cx="2239251" cy="299842"/>
-                </a:xfrm>
-              </p:grpSpPr>
-              <p:sp>
-                <p:nvSpPr>
-                  <p:cNvPr id="69" name="Rectangle: Rounded Corners 68">
-                    <a:extLst>
-                      <a:ext uri="{FF2B5EF4-FFF2-40B4-BE49-F238E27FC236}">
-                        <a16:creationId xmlns:a16="http://schemas.microsoft.com/office/drawing/2014/main" id="{E3E5506D-785E-C802-0B5C-83BCF4D57BC8}"/>
-                      </a:ext>
-                    </a:extLst>
-                  </p:cNvPr>
-                  <p:cNvSpPr/>
-                  <p:nvPr/>
-                </p:nvSpPr>
-                <p:spPr>
-                  <a:xfrm>
-                    <a:off x="7168596" y="4200673"/>
-                    <a:ext cx="2239249" cy="299842"/>
-                  </a:xfrm>
-                  <a:prstGeom prst="roundRect">
-                    <a:avLst>
-                      <a:gd name="adj" fmla="val 28947"/>
-                    </a:avLst>
-                  </a:prstGeom>
-                  <a:solidFill>
-                    <a:srgbClr val="262626"/>
-                  </a:solidFill>
-                  <a:ln w="12700">
-                    <a:solidFill>
-                      <a:schemeClr val="bg1"/>
-                    </a:solidFill>
-                  </a:ln>
-                </p:spPr>
-                <p:style>
-                  <a:lnRef idx="2">
-                    <a:schemeClr val="accent1">
-                      <a:shade val="15000"/>
-                    </a:schemeClr>
-                  </a:lnRef>
-                  <a:fillRef idx="1">
-                    <a:schemeClr val="accent1"/>
-                  </a:fillRef>
-                  <a:effectRef idx="0">
-                    <a:schemeClr val="accent1"/>
-                  </a:effectRef>
-                  <a:fontRef idx="minor">
-                    <a:schemeClr val="lt1"/>
-                  </a:fontRef>
-                </p:style>
-                <p:txBody>
-                  <a:bodyPr rtlCol="0" anchor="ctr"/>
-                  <a:lstStyle/>
-                  <a:p>
-                    <a:pPr algn="ctr"/>
-                    <a:endParaRPr lang="en-US" sz="1400" dirty="0">
-                      <a:solidFill>
-                        <a:schemeClr val="tx1"/>
-                      </a:solidFill>
-                      <a:latin typeface="Times New Roman" panose="02020603050405020304" pitchFamily="18" charset="0"/>
-                      <a:cs typeface="Times New Roman" panose="02020603050405020304" pitchFamily="18" charset="0"/>
-                    </a:endParaRPr>
-                  </a:p>
-                </p:txBody>
-              </p:sp>
-              <p:sp>
-                <p:nvSpPr>
-                  <p:cNvPr id="70" name="TextBox 69">
-                    <a:extLst>
-                      <a:ext uri="{FF2B5EF4-FFF2-40B4-BE49-F238E27FC236}">
-                        <a16:creationId xmlns:a16="http://schemas.microsoft.com/office/drawing/2014/main" id="{A6BD8DC3-F519-6540-99EC-9071E4B84D62}"/>
-                      </a:ext>
-                    </a:extLst>
-                  </p:cNvPr>
-                  <p:cNvSpPr txBox="1"/>
-                  <p:nvPr/>
-                </p:nvSpPr>
-                <p:spPr>
-                  <a:xfrm>
-                    <a:off x="7168594" y="4201157"/>
-                    <a:ext cx="2238468" cy="276358"/>
-                  </a:xfrm>
-                  <a:prstGeom prst="rect">
-                    <a:avLst/>
-                  </a:prstGeom>
-                  <a:noFill/>
-                  <a:ln w="12700">
-                    <a:noFill/>
-                  </a:ln>
-                </p:spPr>
-                <p:txBody>
-                  <a:bodyPr wrap="square">
-                    <a:spAutoFit/>
-                  </a:bodyPr>
-                  <a:lstStyle/>
-                  <a:p>
-                    <a:pPr algn="ctr"/>
-                    <a:r>
-                      <a:rPr lang="en-US" sz="1400" dirty="0">
-                        <a:solidFill>
-                          <a:schemeClr val="bg1"/>
-                        </a:solidFill>
-                        <a:latin typeface="Times New Roman" panose="02020603050405020304" pitchFamily="18" charset="0"/>
-                        <a:cs typeface="Times New Roman" panose="02020603050405020304" pitchFamily="18" charset="0"/>
-                      </a:rPr>
-                      <a:t>Open5GS</a:t>
-                    </a:r>
-                  </a:p>
-                </p:txBody>
-              </p:sp>
-            </p:grpSp>
-            <p:sp>
-              <p:nvSpPr>
-                <p:cNvPr id="68" name="TextBox 67">
-                  <a:extLst>
-                    <a:ext uri="{FF2B5EF4-FFF2-40B4-BE49-F238E27FC236}">
-                      <a16:creationId xmlns:a16="http://schemas.microsoft.com/office/drawing/2014/main" id="{94615E0D-4553-284E-CE2D-CF14F759AE84}"/>
-                    </a:ext>
-                  </a:extLst>
-                </p:cNvPr>
-                <p:cNvSpPr txBox="1"/>
-                <p:nvPr/>
-              </p:nvSpPr>
-              <p:spPr>
-                <a:xfrm>
-                  <a:off x="7126641" y="5291068"/>
-                  <a:ext cx="2239249" cy="307777"/>
-                </a:xfrm>
-                <a:prstGeom prst="rect">
-                  <a:avLst/>
-                </a:prstGeom>
-                <a:noFill/>
-              </p:spPr>
-              <p:txBody>
-                <a:bodyPr wrap="square">
-                  <a:spAutoFit/>
-                </a:bodyPr>
-                <a:lstStyle/>
-                <a:p>
-                  <a:pPr algn="ctr"/>
-                  <a:r>
-                    <a:rPr lang="en-US" sz="1400" b="1" dirty="0">
-                      <a:solidFill>
-                        <a:schemeClr val="bg1"/>
-                      </a:solidFill>
-                      <a:latin typeface="Times New Roman" panose="02020603050405020304" pitchFamily="18" charset="0"/>
-                      <a:cs typeface="Times New Roman" panose="02020603050405020304" pitchFamily="18" charset="0"/>
-                    </a:rPr>
-                    <a:t>5G Core Network</a:t>
-                  </a:r>
-                </a:p>
-              </p:txBody>
-            </p:sp>
-          </p:grpSp>
-          <p:cxnSp>
-            <p:nvCxnSpPr>
-              <p:cNvPr id="10" name="Straight Connector 9">
-                <a:extLst>
-                  <a:ext uri="{FF2B5EF4-FFF2-40B4-BE49-F238E27FC236}">
-                    <a16:creationId xmlns:a16="http://schemas.microsoft.com/office/drawing/2014/main" id="{32A79DEC-8744-1300-577F-E137537AD2F9}"/>
-                  </a:ext>
-                </a:extLst>
-              </p:cNvPr>
-              <p:cNvCxnSpPr>
-                <a:cxnSpLocks/>
-                <a:stCxn id="45" idx="3"/>
-                <a:endCxn id="56" idx="1"/>
-              </p:cNvCxnSpPr>
-              <p:nvPr/>
-            </p:nvCxnSpPr>
-            <p:spPr>
-              <a:xfrm>
-                <a:off x="3018119" y="4397782"/>
-                <a:ext cx="676819" cy="0"/>
-              </a:xfrm>
-              <a:prstGeom prst="line">
-                <a:avLst/>
-              </a:prstGeom>
-              <a:ln w="12700">
-                <a:solidFill>
-                  <a:schemeClr val="bg1"/>
-                </a:solidFill>
-                <a:prstDash val="sysDot"/>
-              </a:ln>
-            </p:spPr>
-            <p:style>
-              <a:lnRef idx="2">
-                <a:schemeClr val="accent1"/>
-              </a:lnRef>
-              <a:fillRef idx="0">
-                <a:schemeClr val="accent1"/>
-              </a:fillRef>
-              <a:effectRef idx="1">
-                <a:schemeClr val="accent1"/>
-              </a:effectRef>
-              <a:fontRef idx="minor">
-                <a:schemeClr val="tx1"/>
-              </a:fontRef>
-            </p:style>
-          </p:cxnSp>
-          <p:cxnSp>
-            <p:nvCxnSpPr>
-              <p:cNvPr id="11" name="Straight Connector 10">
-                <a:extLst>
-                  <a:ext uri="{FF2B5EF4-FFF2-40B4-BE49-F238E27FC236}">
-                    <a16:creationId xmlns:a16="http://schemas.microsoft.com/office/drawing/2014/main" id="{34C38DF5-DD28-45E9-2507-546631986FEC}"/>
-                  </a:ext>
-                </a:extLst>
-              </p:cNvPr>
-              <p:cNvCxnSpPr>
-                <a:cxnSpLocks/>
-                <a:stCxn id="44" idx="3"/>
-                <a:endCxn id="55" idx="1"/>
-              </p:cNvCxnSpPr>
-              <p:nvPr/>
-            </p:nvCxnSpPr>
-            <p:spPr>
-              <a:xfrm>
-                <a:off x="3020023" y="4703444"/>
-                <a:ext cx="678726" cy="0"/>
-              </a:xfrm>
-              <a:prstGeom prst="line">
-                <a:avLst/>
-              </a:prstGeom>
-              <a:ln w="12700">
-                <a:solidFill>
-                  <a:schemeClr val="bg1"/>
-                </a:solidFill>
-              </a:ln>
-            </p:spPr>
-            <p:style>
-              <a:lnRef idx="2">
-                <a:schemeClr val="accent1"/>
-              </a:lnRef>
-              <a:fillRef idx="0">
-                <a:schemeClr val="accent1"/>
-              </a:fillRef>
-              <a:effectRef idx="1">
-                <a:schemeClr val="accent1"/>
-              </a:effectRef>
-              <a:fontRef idx="minor">
-                <a:schemeClr val="tx1"/>
-              </a:fontRef>
-            </p:style>
-          </p:cxnSp>
-          <p:cxnSp>
-            <p:nvCxnSpPr>
-              <p:cNvPr id="12" name="Straight Connector 11">
-                <a:extLst>
-                  <a:ext uri="{FF2B5EF4-FFF2-40B4-BE49-F238E27FC236}">
-                    <a16:creationId xmlns:a16="http://schemas.microsoft.com/office/drawing/2014/main" id="{5ECED138-8687-8AC9-B515-1F21C20F5556}"/>
-                  </a:ext>
-                </a:extLst>
-              </p:cNvPr>
-              <p:cNvCxnSpPr>
-                <a:cxnSpLocks/>
-                <a:stCxn id="46" idx="3"/>
-                <a:endCxn id="56" idx="1"/>
-              </p:cNvCxnSpPr>
-              <p:nvPr/>
-            </p:nvCxnSpPr>
-            <p:spPr>
-              <a:xfrm flipV="1">
-                <a:off x="3018118" y="4397782"/>
-                <a:ext cx="676820" cy="1222648"/>
-              </a:xfrm>
-              <a:prstGeom prst="line">
-                <a:avLst/>
-              </a:prstGeom>
-              <a:ln w="12700">
-                <a:solidFill>
-                  <a:schemeClr val="bg1"/>
-                </a:solidFill>
-                <a:prstDash val="sysDot"/>
-              </a:ln>
-            </p:spPr>
-            <p:style>
-              <a:lnRef idx="2">
-                <a:schemeClr val="accent1"/>
-              </a:lnRef>
-              <a:fillRef idx="0">
-                <a:schemeClr val="accent1"/>
-              </a:fillRef>
-              <a:effectRef idx="1">
-                <a:schemeClr val="accent1"/>
-              </a:effectRef>
-              <a:fontRef idx="minor">
-                <a:schemeClr val="tx1"/>
-              </a:fontRef>
-            </p:style>
-          </p:cxnSp>
-          <p:cxnSp>
-            <p:nvCxnSpPr>
-              <p:cNvPr id="13" name="Straight Connector 12">
-                <a:extLst>
-                  <a:ext uri="{FF2B5EF4-FFF2-40B4-BE49-F238E27FC236}">
-                    <a16:creationId xmlns:a16="http://schemas.microsoft.com/office/drawing/2014/main" id="{1515E354-6DA8-293E-5366-4FCC379F89CE}"/>
-                  </a:ext>
-                </a:extLst>
-              </p:cNvPr>
-              <p:cNvCxnSpPr>
-                <a:cxnSpLocks/>
-                <a:stCxn id="49" idx="3"/>
-                <a:endCxn id="60" idx="1"/>
-              </p:cNvCxnSpPr>
-              <p:nvPr/>
-            </p:nvCxnSpPr>
-            <p:spPr>
-              <a:xfrm>
-                <a:off x="3018118" y="5314768"/>
-                <a:ext cx="680631" cy="0"/>
-              </a:xfrm>
-              <a:prstGeom prst="line">
-                <a:avLst/>
-              </a:prstGeom>
-              <a:ln w="12700">
-                <a:solidFill>
-                  <a:schemeClr val="bg1"/>
-                </a:solidFill>
-              </a:ln>
-            </p:spPr>
-            <p:style>
-              <a:lnRef idx="2">
-                <a:schemeClr val="accent1"/>
-              </a:lnRef>
-              <a:fillRef idx="0">
-                <a:schemeClr val="accent1"/>
-              </a:fillRef>
-              <a:effectRef idx="1">
-                <a:schemeClr val="accent1"/>
-              </a:effectRef>
-              <a:fontRef idx="minor">
-                <a:schemeClr val="tx1"/>
-              </a:fontRef>
-            </p:style>
-          </p:cxnSp>
-          <p:cxnSp>
-            <p:nvCxnSpPr>
-              <p:cNvPr id="14" name="Straight Connector 13">
-                <a:extLst>
-                  <a:ext uri="{FF2B5EF4-FFF2-40B4-BE49-F238E27FC236}">
-                    <a16:creationId xmlns:a16="http://schemas.microsoft.com/office/drawing/2014/main" id="{FB2657DE-F9D4-6A96-5B71-8BE2C8C90454}"/>
-                  </a:ext>
-                </a:extLst>
-              </p:cNvPr>
-              <p:cNvCxnSpPr>
-                <a:cxnSpLocks/>
-                <a:stCxn id="43" idx="3"/>
-                <a:endCxn id="54" idx="1"/>
-              </p:cNvCxnSpPr>
-              <p:nvPr/>
-            </p:nvCxnSpPr>
-            <p:spPr>
-              <a:xfrm>
-                <a:off x="3018118" y="5009106"/>
-                <a:ext cx="665196" cy="0"/>
-              </a:xfrm>
-              <a:prstGeom prst="line">
-                <a:avLst/>
-              </a:prstGeom>
-              <a:ln w="12700">
-                <a:solidFill>
-                  <a:schemeClr val="bg1"/>
-                </a:solidFill>
-                <a:prstDash val="sysDot"/>
-              </a:ln>
-            </p:spPr>
-            <p:style>
-              <a:lnRef idx="2">
-                <a:schemeClr val="accent1"/>
-              </a:lnRef>
-              <a:fillRef idx="0">
-                <a:schemeClr val="accent1"/>
-              </a:fillRef>
-              <a:effectRef idx="1">
-                <a:schemeClr val="accent1"/>
-              </a:effectRef>
-              <a:fontRef idx="minor">
-                <a:schemeClr val="tx1"/>
-              </a:fontRef>
-            </p:style>
-          </p:cxnSp>
-          <p:cxnSp>
-            <p:nvCxnSpPr>
-              <p:cNvPr id="15" name="Straight Connector 14">
-                <a:extLst>
-                  <a:ext uri="{FF2B5EF4-FFF2-40B4-BE49-F238E27FC236}">
-                    <a16:creationId xmlns:a16="http://schemas.microsoft.com/office/drawing/2014/main" id="{7B8C0992-8C5B-0CFA-F351-BDE45110AE40}"/>
-                  </a:ext>
-                </a:extLst>
-              </p:cNvPr>
-              <p:cNvCxnSpPr>
-                <a:cxnSpLocks/>
-                <a:stCxn id="35" idx="3"/>
-                <a:endCxn id="30" idx="1"/>
-              </p:cNvCxnSpPr>
-              <p:nvPr/>
-            </p:nvCxnSpPr>
-            <p:spPr>
-              <a:xfrm>
-                <a:off x="8825441" y="5317669"/>
-                <a:ext cx="639701" cy="267551"/>
-              </a:xfrm>
-              <a:prstGeom prst="line">
-                <a:avLst/>
-              </a:prstGeom>
-              <a:ln w="12700">
-                <a:solidFill>
-                  <a:schemeClr val="bg1"/>
-                </a:solidFill>
-              </a:ln>
-            </p:spPr>
-            <p:style>
-              <a:lnRef idx="2">
-                <a:schemeClr val="accent1"/>
-              </a:lnRef>
-              <a:fillRef idx="0">
-                <a:schemeClr val="accent1"/>
-              </a:fillRef>
-              <a:effectRef idx="1">
-                <a:schemeClr val="accent1"/>
-              </a:effectRef>
-              <a:fontRef idx="minor">
-                <a:schemeClr val="tx1"/>
-              </a:fontRef>
-            </p:style>
-          </p:cxnSp>
-          <p:cxnSp>
-            <p:nvCxnSpPr>
-              <p:cNvPr id="16" name="Straight Connector 15">
-                <a:extLst>
-                  <a:ext uri="{FF2B5EF4-FFF2-40B4-BE49-F238E27FC236}">
-                    <a16:creationId xmlns:a16="http://schemas.microsoft.com/office/drawing/2014/main" id="{A0F3449C-2283-DACE-FB13-38396C4B7FB9}"/>
-                  </a:ext>
-                </a:extLst>
-              </p:cNvPr>
-              <p:cNvCxnSpPr>
-                <a:cxnSpLocks/>
-                <a:stCxn id="23" idx="1"/>
-                <a:endCxn id="70" idx="1"/>
-              </p:cNvCxnSpPr>
-              <p:nvPr/>
-            </p:nvCxnSpPr>
-            <p:spPr>
-              <a:xfrm flipV="1">
-                <a:off x="6032033" y="4388096"/>
-                <a:ext cx="554923" cy="166966"/>
-              </a:xfrm>
-              <a:prstGeom prst="line">
-                <a:avLst/>
-              </a:prstGeom>
-              <a:ln w="12700">
-                <a:solidFill>
-                  <a:schemeClr val="bg1"/>
-                </a:solidFill>
-              </a:ln>
-            </p:spPr>
-            <p:style>
-              <a:lnRef idx="2">
-                <a:schemeClr val="accent1"/>
-              </a:lnRef>
-              <a:fillRef idx="0">
-                <a:schemeClr val="accent1"/>
-              </a:fillRef>
-              <a:effectRef idx="1">
-                <a:schemeClr val="accent1"/>
-              </a:effectRef>
-              <a:fontRef idx="minor">
-                <a:schemeClr val="tx1"/>
-              </a:fontRef>
-            </p:style>
-          </p:cxnSp>
-          <p:cxnSp>
-            <p:nvCxnSpPr>
-              <p:cNvPr id="17" name="Straight Connector 16">
-                <a:extLst>
-                  <a:ext uri="{FF2B5EF4-FFF2-40B4-BE49-F238E27FC236}">
-                    <a16:creationId xmlns:a16="http://schemas.microsoft.com/office/drawing/2014/main" id="{A0F3409B-9BA3-B0DD-2840-A8BFD7EB2EFD}"/>
-                  </a:ext>
-                </a:extLst>
-              </p:cNvPr>
-              <p:cNvCxnSpPr>
-                <a:cxnSpLocks/>
-                <a:stCxn id="24" idx="1"/>
-                <a:endCxn id="70" idx="1"/>
-              </p:cNvCxnSpPr>
-              <p:nvPr/>
-            </p:nvCxnSpPr>
-            <p:spPr>
-              <a:xfrm flipV="1">
-                <a:off x="6032033" y="4388096"/>
-                <a:ext cx="554923" cy="780316"/>
-              </a:xfrm>
-              <a:prstGeom prst="line">
-                <a:avLst/>
-              </a:prstGeom>
-              <a:ln w="12700">
-                <a:solidFill>
-                  <a:schemeClr val="bg1"/>
-                </a:solidFill>
-              </a:ln>
-            </p:spPr>
-            <p:style>
-              <a:lnRef idx="2">
-                <a:schemeClr val="accent1"/>
-              </a:lnRef>
-              <a:fillRef idx="0">
-                <a:schemeClr val="accent1"/>
-              </a:fillRef>
-              <a:effectRef idx="1">
-                <a:schemeClr val="accent1"/>
-              </a:effectRef>
-              <a:fontRef idx="minor">
-                <a:schemeClr val="tx1"/>
-              </a:fontRef>
-            </p:style>
-          </p:cxnSp>
-          <p:cxnSp>
-            <p:nvCxnSpPr>
-              <p:cNvPr id="18" name="Straight Connector 17">
-                <a:extLst>
-                  <a:ext uri="{FF2B5EF4-FFF2-40B4-BE49-F238E27FC236}">
-                    <a16:creationId xmlns:a16="http://schemas.microsoft.com/office/drawing/2014/main" id="{3936E016-28E0-8BF0-9431-64131BB8293D}"/>
-                  </a:ext>
-                </a:extLst>
-              </p:cNvPr>
-              <p:cNvCxnSpPr>
-                <a:cxnSpLocks/>
-                <a:endCxn id="35" idx="1"/>
-              </p:cNvCxnSpPr>
-              <p:nvPr/>
-            </p:nvCxnSpPr>
-            <p:spPr>
-              <a:xfrm>
-                <a:off x="6032033" y="4564587"/>
-                <a:ext cx="554158" cy="753082"/>
-              </a:xfrm>
-              <a:prstGeom prst="line">
-                <a:avLst/>
-              </a:prstGeom>
-              <a:ln w="12700">
-                <a:solidFill>
-                  <a:schemeClr val="bg1"/>
-                </a:solidFill>
-              </a:ln>
-            </p:spPr>
-            <p:style>
-              <a:lnRef idx="2">
-                <a:schemeClr val="accent1"/>
-              </a:lnRef>
-              <a:fillRef idx="0">
-                <a:schemeClr val="accent1"/>
-              </a:fillRef>
-              <a:effectRef idx="1">
-                <a:schemeClr val="accent1"/>
-              </a:effectRef>
-              <a:fontRef idx="minor">
-                <a:schemeClr val="tx1"/>
-              </a:fontRef>
-            </p:style>
-          </p:cxnSp>
-          <p:cxnSp>
-            <p:nvCxnSpPr>
-              <p:cNvPr id="19" name="Straight Connector 18">
-                <a:extLst>
-                  <a:ext uri="{FF2B5EF4-FFF2-40B4-BE49-F238E27FC236}">
-                    <a16:creationId xmlns:a16="http://schemas.microsoft.com/office/drawing/2014/main" id="{E085886D-3B15-DB08-3633-1E75D9D54A31}"/>
-                  </a:ext>
-                </a:extLst>
-              </p:cNvPr>
-              <p:cNvCxnSpPr>
-                <a:cxnSpLocks/>
-                <a:endCxn id="36" idx="1"/>
-              </p:cNvCxnSpPr>
-              <p:nvPr/>
-            </p:nvCxnSpPr>
-            <p:spPr>
-              <a:xfrm>
-                <a:off x="6032033" y="5168412"/>
-                <a:ext cx="554158" cy="442679"/>
-              </a:xfrm>
-              <a:prstGeom prst="line">
-                <a:avLst/>
-              </a:prstGeom>
-              <a:ln w="12700">
-                <a:solidFill>
-                  <a:schemeClr val="bg1"/>
-                </a:solidFill>
-              </a:ln>
-            </p:spPr>
-            <p:style>
-              <a:lnRef idx="2">
-                <a:schemeClr val="accent1"/>
-              </a:lnRef>
-              <a:fillRef idx="0">
-                <a:schemeClr val="accent1"/>
-              </a:fillRef>
-              <a:effectRef idx="1">
-                <a:schemeClr val="accent1"/>
-              </a:effectRef>
-              <a:fontRef idx="minor">
-                <a:schemeClr val="tx1"/>
-              </a:fontRef>
-            </p:style>
-          </p:cxnSp>
-          <p:cxnSp>
-            <p:nvCxnSpPr>
-              <p:cNvPr id="20" name="Straight Connector 19">
-                <a:extLst>
-                  <a:ext uri="{FF2B5EF4-FFF2-40B4-BE49-F238E27FC236}">
-                    <a16:creationId xmlns:a16="http://schemas.microsoft.com/office/drawing/2014/main" id="{464B0A35-8F04-98CF-A4D8-50AD8B8C9AA5}"/>
-                  </a:ext>
-                </a:extLst>
-              </p:cNvPr>
-              <p:cNvCxnSpPr>
-                <a:cxnSpLocks/>
-                <a:stCxn id="57" idx="3"/>
-                <a:endCxn id="35" idx="1"/>
-              </p:cNvCxnSpPr>
-              <p:nvPr/>
-            </p:nvCxnSpPr>
-            <p:spPr>
-              <a:xfrm flipV="1">
-                <a:off x="5905563" y="5317669"/>
-                <a:ext cx="680628" cy="302761"/>
-              </a:xfrm>
-              <a:prstGeom prst="line">
-                <a:avLst/>
-              </a:prstGeom>
-              <a:ln w="12700">
-                <a:solidFill>
-                  <a:schemeClr val="bg1"/>
-                </a:solidFill>
-              </a:ln>
-            </p:spPr>
-            <p:style>
-              <a:lnRef idx="2">
-                <a:schemeClr val="accent1"/>
-              </a:lnRef>
-              <a:fillRef idx="0">
-                <a:schemeClr val="accent1"/>
-              </a:fillRef>
-              <a:effectRef idx="1">
-                <a:schemeClr val="accent1"/>
-              </a:effectRef>
-              <a:fontRef idx="minor">
-                <a:schemeClr val="tx1"/>
-              </a:fontRef>
-            </p:style>
-          </p:cxnSp>
-          <p:cxnSp>
-            <p:nvCxnSpPr>
-              <p:cNvPr id="21" name="Straight Connector 20">
-                <a:extLst>
-                  <a:ext uri="{FF2B5EF4-FFF2-40B4-BE49-F238E27FC236}">
-                    <a16:creationId xmlns:a16="http://schemas.microsoft.com/office/drawing/2014/main" id="{3820C6D9-0E3D-0876-944B-2DAB23175A99}"/>
-                  </a:ext>
-                </a:extLst>
-              </p:cNvPr>
-              <p:cNvCxnSpPr>
-                <a:cxnSpLocks/>
-                <a:endCxn id="36" idx="1"/>
-              </p:cNvCxnSpPr>
-              <p:nvPr/>
-            </p:nvCxnSpPr>
-            <p:spPr>
-              <a:xfrm>
-                <a:off x="6032033" y="4555062"/>
-                <a:ext cx="554158" cy="1056029"/>
-              </a:xfrm>
-              <a:prstGeom prst="line">
-                <a:avLst/>
-              </a:prstGeom>
-              <a:ln w="12700">
-                <a:solidFill>
-                  <a:schemeClr val="bg1"/>
-                </a:solidFill>
-                <a:prstDash val="sysDot"/>
-              </a:ln>
-            </p:spPr>
-            <p:style>
-              <a:lnRef idx="2">
-                <a:schemeClr val="accent1"/>
-              </a:lnRef>
-              <a:fillRef idx="0">
-                <a:schemeClr val="accent1"/>
-              </a:fillRef>
-              <a:effectRef idx="1">
-                <a:schemeClr val="accent1"/>
-              </a:effectRef>
-              <a:fontRef idx="minor">
-                <a:schemeClr val="tx1"/>
-              </a:fontRef>
-            </p:style>
-          </p:cxnSp>
-          <p:grpSp>
-            <p:nvGrpSpPr>
-              <p:cNvPr id="22" name="Group 21">
-                <a:extLst>
-                  <a:ext uri="{FF2B5EF4-FFF2-40B4-BE49-F238E27FC236}">
-                    <a16:creationId xmlns:a16="http://schemas.microsoft.com/office/drawing/2014/main" id="{AA953FD7-0D5A-D260-FEA5-A750D4B0B26B}"/>
-                  </a:ext>
-                </a:extLst>
-              </p:cNvPr>
-              <p:cNvGrpSpPr/>
-              <p:nvPr/>
-            </p:nvGrpSpPr>
-            <p:grpSpPr>
-              <a:xfrm>
-                <a:off x="8962221" y="4228858"/>
-                <a:ext cx="2860204" cy="738664"/>
-                <a:chOff x="8962221" y="4222565"/>
-                <a:chExt cx="2860204" cy="738664"/>
+                <a:off x="7063677" y="4951549"/>
+                <a:ext cx="2239251" cy="333931"/>
+                <a:chOff x="7168594" y="4200673"/>
+                <a:chExt cx="2239251" cy="299842"/>
               </a:xfrm>
             </p:grpSpPr>
             <p:sp>
               <p:nvSpPr>
-                <p:cNvPr id="62" name="Rectangle 61">
+                <p:cNvPr id="69" name="Rectangle: Rounded Corners 68">
                   <a:extLst>
                     <a:ext uri="{FF2B5EF4-FFF2-40B4-BE49-F238E27FC236}">
-                      <a16:creationId xmlns:a16="http://schemas.microsoft.com/office/drawing/2014/main" id="{A59D6F40-6E6F-232E-ECC9-A4EB8C8693B0}"/>
+                      <a16:creationId xmlns:a16="http://schemas.microsoft.com/office/drawing/2014/main" id="{E3E5506D-785E-C802-0B5C-83BCF4D57BC8}"/>
                     </a:ext>
                   </a:extLst>
                 </p:cNvPr>
@@ -15856,1894 +15170,8 @@
               </p:nvSpPr>
               <p:spPr>
                 <a:xfrm>
-                  <a:off x="8962221" y="4243038"/>
-                  <a:ext cx="2787151" cy="705139"/>
-                </a:xfrm>
-                <a:prstGeom prst="rect">
-                  <a:avLst/>
-                </a:prstGeom>
-                <a:solidFill>
-                  <a:srgbClr val="0D1117"/>
-                </a:solidFill>
-                <a:ln w="12700">
-                  <a:solidFill>
-                    <a:schemeClr val="bg1"/>
-                  </a:solidFill>
-                </a:ln>
-              </p:spPr>
-              <p:style>
-                <a:lnRef idx="2">
-                  <a:schemeClr val="accent1">
-                    <a:shade val="15000"/>
-                  </a:schemeClr>
-                </a:lnRef>
-                <a:fillRef idx="1">
-                  <a:schemeClr val="accent1"/>
-                </a:fillRef>
-                <a:effectRef idx="0">
-                  <a:schemeClr val="accent1"/>
-                </a:effectRef>
-                <a:fontRef idx="minor">
-                  <a:schemeClr val="lt1"/>
-                </a:fontRef>
-              </p:style>
-              <p:txBody>
-                <a:bodyPr rtlCol="0" anchor="ctr"/>
-                <a:lstStyle/>
-                <a:p>
-                  <a:pPr algn="ctr"/>
-                  <a:endParaRPr lang="en-US"/>
-                </a:p>
-              </p:txBody>
-            </p:sp>
-            <p:cxnSp>
-              <p:nvCxnSpPr>
-                <p:cNvPr id="63" name="Straight Connector 62">
-                  <a:extLst>
-                    <a:ext uri="{FF2B5EF4-FFF2-40B4-BE49-F238E27FC236}">
-                      <a16:creationId xmlns:a16="http://schemas.microsoft.com/office/drawing/2014/main" id="{D14BEA91-F3A3-C660-8A23-F11C29E56CD0}"/>
-                    </a:ext>
-                  </a:extLst>
-                </p:cNvPr>
-                <p:cNvCxnSpPr>
-                  <a:cxnSpLocks/>
-                </p:cNvCxnSpPr>
-                <p:nvPr/>
-              </p:nvCxnSpPr>
-              <p:spPr>
-                <a:xfrm>
-                  <a:off x="9055446" y="4378844"/>
-                  <a:ext cx="210474" cy="0"/>
-                </a:xfrm>
-                <a:prstGeom prst="line">
-                  <a:avLst/>
-                </a:prstGeom>
-                <a:ln w="12700">
-                  <a:solidFill>
-                    <a:schemeClr val="bg1"/>
-                  </a:solidFill>
-                </a:ln>
-              </p:spPr>
-              <p:style>
-                <a:lnRef idx="2">
-                  <a:schemeClr val="dk1"/>
-                </a:lnRef>
-                <a:fillRef idx="0">
-                  <a:schemeClr val="dk1"/>
-                </a:fillRef>
-                <a:effectRef idx="1">
-                  <a:schemeClr val="dk1"/>
-                </a:effectRef>
-                <a:fontRef idx="minor">
-                  <a:schemeClr val="tx1"/>
-                </a:fontRef>
-              </p:style>
-            </p:cxnSp>
-            <p:sp>
-              <p:nvSpPr>
-                <p:cNvPr id="64" name="TextBox 63">
-                  <a:extLst>
-                    <a:ext uri="{FF2B5EF4-FFF2-40B4-BE49-F238E27FC236}">
-                      <a16:creationId xmlns:a16="http://schemas.microsoft.com/office/drawing/2014/main" id="{87248227-D8ED-62C9-8498-3B65A1AFBC5C}"/>
-                    </a:ext>
-                  </a:extLst>
-                </p:cNvPr>
-                <p:cNvSpPr txBox="1"/>
-                <p:nvPr/>
-              </p:nvSpPr>
-              <p:spPr>
-                <a:xfrm>
-                  <a:off x="9235317" y="4222565"/>
-                  <a:ext cx="2587108" cy="738664"/>
-                </a:xfrm>
-                <a:prstGeom prst="rect">
-                  <a:avLst/>
-                </a:prstGeom>
-                <a:noFill/>
-              </p:spPr>
-              <p:txBody>
-                <a:bodyPr wrap="square">
-                  <a:spAutoFit/>
-                </a:bodyPr>
-                <a:lstStyle/>
-                <a:p>
-                  <a:r>
-                    <a:rPr lang="en-US" sz="1400" dirty="0">
-                      <a:solidFill>
-                        <a:schemeClr val="bg1"/>
-                      </a:solidFill>
-                      <a:latin typeface="Times New Roman" panose="02020603050405020304" pitchFamily="18" charset="0"/>
-                      <a:cs typeface="Times New Roman" panose="02020603050405020304" pitchFamily="18" charset="0"/>
-                    </a:rPr>
-                    <a:t>Supported by default installation</a:t>
-                  </a:r>
-                  <a:br>
-                    <a:rPr lang="en-US" sz="1400" dirty="0">
-                      <a:solidFill>
-                        <a:schemeClr val="bg1"/>
-                      </a:solidFill>
-                      <a:latin typeface="Times New Roman" panose="02020603050405020304" pitchFamily="18" charset="0"/>
-                      <a:cs typeface="Times New Roman" panose="02020603050405020304" pitchFamily="18" charset="0"/>
-                    </a:rPr>
-                  </a:br>
-                  <a:r>
-                    <a:rPr lang="en-US" sz="1400" dirty="0">
-                      <a:solidFill>
-                        <a:schemeClr val="bg1"/>
-                      </a:solidFill>
-                      <a:latin typeface="Times New Roman" panose="02020603050405020304" pitchFamily="18" charset="0"/>
-                      <a:cs typeface="Times New Roman" panose="02020603050405020304" pitchFamily="18" charset="0"/>
-                    </a:rPr>
-                    <a:t>Supported after adjusting configs</a:t>
-                  </a:r>
-                </a:p>
-                <a:p>
-                  <a:r>
-                    <a:rPr lang="en-US" sz="1400" dirty="0">
-                      <a:solidFill>
-                        <a:schemeClr val="bg1"/>
-                      </a:solidFill>
-                      <a:latin typeface="Times New Roman" panose="02020603050405020304" pitchFamily="18" charset="0"/>
-                      <a:cs typeface="Times New Roman" panose="02020603050405020304" pitchFamily="18" charset="0"/>
-                    </a:rPr>
-                    <a:t>Not supported</a:t>
-                  </a:r>
-                </a:p>
-              </p:txBody>
-            </p:sp>
-            <p:cxnSp>
-              <p:nvCxnSpPr>
-                <p:cNvPr id="65" name="Straight Connector 64">
-                  <a:extLst>
-                    <a:ext uri="{FF2B5EF4-FFF2-40B4-BE49-F238E27FC236}">
-                      <a16:creationId xmlns:a16="http://schemas.microsoft.com/office/drawing/2014/main" id="{D72BCCD9-0ADB-0E7D-4D13-D2CC2EA67358}"/>
-                    </a:ext>
-                  </a:extLst>
-                </p:cNvPr>
-                <p:cNvCxnSpPr>
-                  <a:cxnSpLocks/>
-                </p:cNvCxnSpPr>
-                <p:nvPr/>
-              </p:nvCxnSpPr>
-              <p:spPr>
-                <a:xfrm>
-                  <a:off x="9055446" y="4596433"/>
-                  <a:ext cx="210474" cy="0"/>
-                </a:xfrm>
-                <a:prstGeom prst="line">
-                  <a:avLst/>
-                </a:prstGeom>
-                <a:ln w="12700">
-                  <a:solidFill>
-                    <a:schemeClr val="bg1"/>
-                  </a:solidFill>
-                  <a:prstDash val="sysDot"/>
-                </a:ln>
-              </p:spPr>
-              <p:style>
-                <a:lnRef idx="2">
-                  <a:schemeClr val="dk1"/>
-                </a:lnRef>
-                <a:fillRef idx="0">
-                  <a:schemeClr val="dk1"/>
-                </a:fillRef>
-                <a:effectRef idx="1">
-                  <a:schemeClr val="dk1"/>
-                </a:effectRef>
-                <a:fontRef idx="minor">
-                  <a:schemeClr val="tx1"/>
-                </a:fontRef>
-              </p:style>
-            </p:cxnSp>
-            <p:cxnSp>
-              <p:nvCxnSpPr>
-                <p:cNvPr id="66" name="Straight Connector 65">
-                  <a:extLst>
-                    <a:ext uri="{FF2B5EF4-FFF2-40B4-BE49-F238E27FC236}">
-                      <a16:creationId xmlns:a16="http://schemas.microsoft.com/office/drawing/2014/main" id="{665363D5-40A1-F6AF-3318-E7F22DE66076}"/>
-                    </a:ext>
-                  </a:extLst>
-                </p:cNvPr>
-                <p:cNvCxnSpPr>
-                  <a:cxnSpLocks/>
-                </p:cNvCxnSpPr>
-                <p:nvPr/>
-              </p:nvCxnSpPr>
-              <p:spPr>
-                <a:xfrm>
-                  <a:off x="9055446" y="4814021"/>
-                  <a:ext cx="210474" cy="0"/>
-                </a:xfrm>
-                <a:prstGeom prst="line">
-                  <a:avLst/>
-                </a:prstGeom>
-                <a:ln w="12700">
-                  <a:solidFill>
-                    <a:srgbClr val="FF7B61"/>
-                  </a:solidFill>
-                  <a:prstDash val="sysDot"/>
-                </a:ln>
-              </p:spPr>
-              <p:style>
-                <a:lnRef idx="2">
-                  <a:schemeClr val="dk1"/>
-                </a:lnRef>
-                <a:fillRef idx="0">
-                  <a:schemeClr val="dk1"/>
-                </a:fillRef>
-                <a:effectRef idx="1">
-                  <a:schemeClr val="dk1"/>
-                </a:effectRef>
-                <a:fontRef idx="minor">
-                  <a:schemeClr val="tx1"/>
-                </a:fontRef>
-              </p:style>
-            </p:cxnSp>
-          </p:grpSp>
-          <p:sp>
-            <p:nvSpPr>
-              <p:cNvPr id="23" name="Right Brace 22">
-                <a:extLst>
-                  <a:ext uri="{FF2B5EF4-FFF2-40B4-BE49-F238E27FC236}">
-                    <a16:creationId xmlns:a16="http://schemas.microsoft.com/office/drawing/2014/main" id="{A7991ECF-F9B7-7535-37FB-A57CED3BF203}"/>
-                  </a:ext>
-                </a:extLst>
-              </p:cNvPr>
-              <p:cNvSpPr/>
-              <p:nvPr/>
-            </p:nvSpPr>
-            <p:spPr>
-              <a:xfrm>
-                <a:off x="5949277" y="4267614"/>
-                <a:ext cx="82756" cy="574896"/>
-              </a:xfrm>
-              <a:prstGeom prst="rightBrace">
-                <a:avLst>
-                  <a:gd name="adj1" fmla="val 88901"/>
-                  <a:gd name="adj2" fmla="val 50000"/>
-                </a:avLst>
-              </a:prstGeom>
-              <a:ln w="12700">
-                <a:solidFill>
-                  <a:schemeClr val="bg1"/>
-                </a:solidFill>
-              </a:ln>
-            </p:spPr>
-            <p:style>
-              <a:lnRef idx="2">
-                <a:schemeClr val="accent1"/>
-              </a:lnRef>
-              <a:fillRef idx="0">
-                <a:schemeClr val="accent1"/>
-              </a:fillRef>
-              <a:effectRef idx="1">
-                <a:schemeClr val="accent1"/>
-              </a:effectRef>
-              <a:fontRef idx="minor">
-                <a:schemeClr val="tx1"/>
-              </a:fontRef>
-            </p:style>
-            <p:txBody>
-              <a:bodyPr rtlCol="0" anchor="ctr"/>
-              <a:lstStyle/>
-              <a:p>
-                <a:pPr algn="ctr"/>
-                <a:endParaRPr lang="en-US"/>
-              </a:p>
-            </p:txBody>
-          </p:sp>
-          <p:sp>
-            <p:nvSpPr>
-              <p:cNvPr id="24" name="Right Brace 23">
-                <a:extLst>
-                  <a:ext uri="{FF2B5EF4-FFF2-40B4-BE49-F238E27FC236}">
-                    <a16:creationId xmlns:a16="http://schemas.microsoft.com/office/drawing/2014/main" id="{20C8E6D4-A40E-D435-BF8F-F8C003ACF650}"/>
-                  </a:ext>
-                </a:extLst>
-              </p:cNvPr>
-              <p:cNvSpPr/>
-              <p:nvPr/>
-            </p:nvSpPr>
-            <p:spPr>
-              <a:xfrm>
-                <a:off x="5949277" y="4880964"/>
-                <a:ext cx="82756" cy="574896"/>
-              </a:xfrm>
-              <a:prstGeom prst="rightBrace">
-                <a:avLst>
-                  <a:gd name="adj1" fmla="val 88901"/>
-                  <a:gd name="adj2" fmla="val 50000"/>
-                </a:avLst>
-              </a:prstGeom>
-              <a:ln w="12700">
-                <a:solidFill>
-                  <a:schemeClr val="bg1"/>
-                </a:solidFill>
-              </a:ln>
-            </p:spPr>
-            <p:style>
-              <a:lnRef idx="2">
-                <a:schemeClr val="accent1"/>
-              </a:lnRef>
-              <a:fillRef idx="0">
-                <a:schemeClr val="accent1"/>
-              </a:fillRef>
-              <a:effectRef idx="1">
-                <a:schemeClr val="accent1"/>
-              </a:effectRef>
-              <a:fontRef idx="minor">
-                <a:schemeClr val="tx1"/>
-              </a:fontRef>
-            </p:style>
-            <p:txBody>
-              <a:bodyPr rtlCol="0" anchor="ctr"/>
-              <a:lstStyle/>
-              <a:p>
-                <a:pPr algn="ctr"/>
-                <a:endParaRPr lang="en-US"/>
-              </a:p>
-            </p:txBody>
-          </p:sp>
-          <p:grpSp>
-            <p:nvGrpSpPr>
-              <p:cNvPr id="25" name="Group 24">
-                <a:extLst>
-                  <a:ext uri="{FF2B5EF4-FFF2-40B4-BE49-F238E27FC236}">
-                    <a16:creationId xmlns:a16="http://schemas.microsoft.com/office/drawing/2014/main" id="{7A087A7C-EBC3-7D25-0193-6488C85E22BB}"/>
-                  </a:ext>
-                </a:extLst>
-              </p:cNvPr>
-              <p:cNvGrpSpPr/>
-              <p:nvPr/>
-            </p:nvGrpSpPr>
-            <p:grpSpPr>
-              <a:xfrm>
-                <a:off x="3682530" y="4232789"/>
-                <a:ext cx="2263961" cy="1844033"/>
-                <a:chOff x="3916949" y="3691197"/>
-                <a:chExt cx="2263961" cy="1844033"/>
-              </a:xfrm>
-            </p:grpSpPr>
-            <p:sp>
-              <p:nvSpPr>
-                <p:cNvPr id="51" name="Rectangle: Rounded Corners 50">
-                  <a:extLst>
-                    <a:ext uri="{FF2B5EF4-FFF2-40B4-BE49-F238E27FC236}">
-                      <a16:creationId xmlns:a16="http://schemas.microsoft.com/office/drawing/2014/main" id="{B3D7257C-B989-E6D2-FBC9-EEE63B1B672D}"/>
-                    </a:ext>
-                  </a:extLst>
-                </p:cNvPr>
-                <p:cNvSpPr/>
-                <p:nvPr/>
-              </p:nvSpPr>
-              <p:spPr>
-                <a:xfrm>
-                  <a:off x="3916949" y="3692460"/>
-                  <a:ext cx="2239249" cy="1531642"/>
-                </a:xfrm>
-                <a:prstGeom prst="roundRect">
-                  <a:avLst>
-                    <a:gd name="adj" fmla="val 5859"/>
-                  </a:avLst>
-                </a:prstGeom>
-                <a:solidFill>
-                  <a:srgbClr val="262626"/>
-                </a:solidFill>
-                <a:ln w="28575">
-                  <a:noFill/>
-                </a:ln>
-              </p:spPr>
-              <p:style>
-                <a:lnRef idx="2">
-                  <a:schemeClr val="accent1">
-                    <a:shade val="15000"/>
-                  </a:schemeClr>
-                </a:lnRef>
-                <a:fillRef idx="1">
-                  <a:schemeClr val="accent1"/>
-                </a:fillRef>
-                <a:effectRef idx="0">
-                  <a:schemeClr val="accent1"/>
-                </a:effectRef>
-                <a:fontRef idx="minor">
-                  <a:schemeClr val="lt1"/>
-                </a:fontRef>
-              </p:style>
-              <p:txBody>
-                <a:bodyPr rtlCol="0" anchor="ctr"/>
-                <a:lstStyle/>
-                <a:p>
-                  <a:pPr algn="ctr"/>
-                  <a:endParaRPr lang="en-US" dirty="0">
-                    <a:latin typeface="Times New Roman" panose="02020603050405020304" pitchFamily="18" charset="0"/>
-                    <a:cs typeface="Times New Roman" panose="02020603050405020304" pitchFamily="18" charset="0"/>
-                  </a:endParaRPr>
-                </a:p>
-              </p:txBody>
-            </p:sp>
-            <p:sp>
-              <p:nvSpPr>
-                <p:cNvPr id="52" name="Rectangle: Top Corners Rounded 51">
-                  <a:extLst>
-                    <a:ext uri="{FF2B5EF4-FFF2-40B4-BE49-F238E27FC236}">
-                      <a16:creationId xmlns:a16="http://schemas.microsoft.com/office/drawing/2014/main" id="{DBC9B431-FC85-98F1-7802-3B3651BE6F8D}"/>
-                    </a:ext>
-                  </a:extLst>
-                </p:cNvPr>
-                <p:cNvSpPr/>
-                <p:nvPr/>
-              </p:nvSpPr>
-              <p:spPr>
-                <a:xfrm rot="10800000">
-                  <a:off x="3916952" y="4613172"/>
-                  <a:ext cx="2239248" cy="323588"/>
-                </a:xfrm>
-                <a:prstGeom prst="round2SameRect">
-                  <a:avLst>
-                    <a:gd name="adj1" fmla="val 28890"/>
-                    <a:gd name="adj2" fmla="val 0"/>
-                  </a:avLst>
-                </a:prstGeom>
-                <a:solidFill>
-                  <a:srgbClr val="F2F2F2"/>
-                </a:solidFill>
-                <a:ln>
-                  <a:noFill/>
-                </a:ln>
-              </p:spPr>
-              <p:style>
-                <a:lnRef idx="2">
-                  <a:schemeClr val="accent1">
-                    <a:shade val="15000"/>
-                  </a:schemeClr>
-                </a:lnRef>
-                <a:fillRef idx="1">
-                  <a:schemeClr val="accent1"/>
-                </a:fillRef>
-                <a:effectRef idx="0">
-                  <a:schemeClr val="accent1"/>
-                </a:effectRef>
-                <a:fontRef idx="minor">
-                  <a:schemeClr val="lt1"/>
-                </a:fontRef>
-              </p:style>
-              <p:txBody>
-                <a:bodyPr rtlCol="0" anchor="ctr"/>
-                <a:lstStyle/>
-                <a:p>
-                  <a:pPr algn="ctr"/>
-                  <a:endParaRPr lang="en-US"/>
-                </a:p>
-              </p:txBody>
-            </p:sp>
-            <p:sp>
-              <p:nvSpPr>
-                <p:cNvPr id="53" name="Rectangle 52">
-                  <a:extLst>
-                    <a:ext uri="{FF2B5EF4-FFF2-40B4-BE49-F238E27FC236}">
-                      <a16:creationId xmlns:a16="http://schemas.microsoft.com/office/drawing/2014/main" id="{19AB0D5D-41E1-ECDD-6800-6D04A0A25D57}"/>
-                    </a:ext>
-                  </a:extLst>
-                </p:cNvPr>
-                <p:cNvSpPr/>
-                <p:nvPr/>
-              </p:nvSpPr>
-              <p:spPr>
-                <a:xfrm>
-                  <a:off x="3916951" y="3990559"/>
-                  <a:ext cx="2239249" cy="323587"/>
-                </a:xfrm>
-                <a:prstGeom prst="rect">
-                  <a:avLst/>
-                </a:prstGeom>
-                <a:solidFill>
-                  <a:srgbClr val="3A3A3A"/>
-                </a:solidFill>
-                <a:ln>
-                  <a:noFill/>
-                </a:ln>
-              </p:spPr>
-              <p:style>
-                <a:lnRef idx="2">
-                  <a:schemeClr val="accent1">
-                    <a:shade val="15000"/>
-                  </a:schemeClr>
-                </a:lnRef>
-                <a:fillRef idx="1">
-                  <a:schemeClr val="accent1"/>
-                </a:fillRef>
-                <a:effectRef idx="0">
-                  <a:schemeClr val="accent1"/>
-                </a:effectRef>
-                <a:fontRef idx="minor">
-                  <a:schemeClr val="lt1"/>
-                </a:fontRef>
-              </p:style>
-              <p:txBody>
-                <a:bodyPr rtlCol="0" anchor="ctr"/>
-                <a:lstStyle/>
-                <a:p>
-                  <a:pPr algn="ctr"/>
-                  <a:endParaRPr lang="en-US"/>
-                </a:p>
-              </p:txBody>
-            </p:sp>
-            <p:sp>
-              <p:nvSpPr>
-                <p:cNvPr id="54" name="TextBox 53">
-                  <a:extLst>
-                    <a:ext uri="{FF2B5EF4-FFF2-40B4-BE49-F238E27FC236}">
-                      <a16:creationId xmlns:a16="http://schemas.microsoft.com/office/drawing/2014/main" id="{A40C2853-5546-FC7B-38EC-F30D79A444C7}"/>
-                    </a:ext>
-                  </a:extLst>
-                </p:cNvPr>
-                <p:cNvSpPr txBox="1"/>
-                <p:nvPr/>
-              </p:nvSpPr>
-              <p:spPr>
-                <a:xfrm>
-                  <a:off x="3917733" y="4313625"/>
-                  <a:ext cx="2237684" cy="307777"/>
-                </a:xfrm>
-                <a:prstGeom prst="rect">
-                  <a:avLst/>
-                </a:prstGeom>
-                <a:noFill/>
-              </p:spPr>
-              <p:txBody>
-                <a:bodyPr wrap="square">
-                  <a:spAutoFit/>
-                </a:bodyPr>
-                <a:lstStyle/>
-                <a:p>
-                  <a:pPr algn="ctr"/>
-                  <a:r>
-                    <a:rPr lang="en-US" sz="1400" dirty="0">
-                      <a:solidFill>
-                        <a:schemeClr val="bg1"/>
-                      </a:solidFill>
-                      <a:latin typeface="Times New Roman" panose="02020603050405020304" pitchFamily="18" charset="0"/>
-                      <a:cs typeface="Times New Roman" panose="02020603050405020304" pitchFamily="18" charset="0"/>
-                    </a:rPr>
-                    <a:t>OAI : USRP</a:t>
-                  </a:r>
-                </a:p>
-              </p:txBody>
-            </p:sp>
-            <p:sp>
-              <p:nvSpPr>
-                <p:cNvPr id="55" name="TextBox 54">
-                  <a:extLst>
-                    <a:ext uri="{FF2B5EF4-FFF2-40B4-BE49-F238E27FC236}">
-                      <a16:creationId xmlns:a16="http://schemas.microsoft.com/office/drawing/2014/main" id="{63618131-BAB2-A494-D3FA-1003A22DEB82}"/>
-                    </a:ext>
-                  </a:extLst>
-                </p:cNvPr>
-                <p:cNvSpPr txBox="1"/>
-                <p:nvPr/>
-              </p:nvSpPr>
-              <p:spPr>
-                <a:xfrm>
-                  <a:off x="3933168" y="4007963"/>
-                  <a:ext cx="2206814" cy="307777"/>
-                </a:xfrm>
-                <a:prstGeom prst="rect">
-                  <a:avLst/>
-                </a:prstGeom>
-                <a:noFill/>
-              </p:spPr>
-              <p:txBody>
-                <a:bodyPr wrap="square">
-                  <a:spAutoFit/>
-                </a:bodyPr>
-                <a:lstStyle/>
-                <a:p>
-                  <a:pPr algn="ctr"/>
-                  <a:r>
-                    <a:rPr lang="en-US" sz="1400" dirty="0" err="1">
-                      <a:solidFill>
-                        <a:schemeClr val="bg1"/>
-                      </a:solidFill>
-                      <a:latin typeface="Times New Roman" panose="02020603050405020304" pitchFamily="18" charset="0"/>
-                      <a:cs typeface="Times New Roman" panose="02020603050405020304" pitchFamily="18" charset="0"/>
-                    </a:rPr>
-                    <a:t>srsRAN_Project</a:t>
-                  </a:r>
-                  <a:r>
-                    <a:rPr lang="en-US" sz="1400" dirty="0">
-                      <a:solidFill>
-                        <a:schemeClr val="bg1"/>
-                      </a:solidFill>
-                      <a:latin typeface="Times New Roman" panose="02020603050405020304" pitchFamily="18" charset="0"/>
-                      <a:cs typeface="Times New Roman" panose="02020603050405020304" pitchFamily="18" charset="0"/>
-                    </a:rPr>
-                    <a:t> : </a:t>
-                  </a:r>
-                  <a:r>
-                    <a:rPr lang="en-US" sz="1400" dirty="0" err="1">
-                      <a:solidFill>
-                        <a:schemeClr val="bg1"/>
-                      </a:solidFill>
-                      <a:latin typeface="Times New Roman" panose="02020603050405020304" pitchFamily="18" charset="0"/>
-                      <a:cs typeface="Times New Roman" panose="02020603050405020304" pitchFamily="18" charset="0"/>
-                    </a:rPr>
-                    <a:t>ZeroMQ</a:t>
-                  </a:r>
-                  <a:endParaRPr lang="en-US" sz="1400" dirty="0">
-                    <a:solidFill>
-                      <a:schemeClr val="bg1"/>
-                    </a:solidFill>
-                    <a:latin typeface="Times New Roman" panose="02020603050405020304" pitchFamily="18" charset="0"/>
-                    <a:cs typeface="Times New Roman" panose="02020603050405020304" pitchFamily="18" charset="0"/>
-                  </a:endParaRPr>
-                </a:p>
-              </p:txBody>
-            </p:sp>
-            <p:sp>
-              <p:nvSpPr>
-                <p:cNvPr id="56" name="TextBox 55">
-                  <a:extLst>
-                    <a:ext uri="{FF2B5EF4-FFF2-40B4-BE49-F238E27FC236}">
-                      <a16:creationId xmlns:a16="http://schemas.microsoft.com/office/drawing/2014/main" id="{30B92E24-1934-475B-8C5E-87A7F5F0D58C}"/>
-                    </a:ext>
-                  </a:extLst>
-                </p:cNvPr>
-                <p:cNvSpPr txBox="1"/>
-                <p:nvPr/>
-              </p:nvSpPr>
-              <p:spPr>
-                <a:xfrm>
-                  <a:off x="3929357" y="3702301"/>
-                  <a:ext cx="2206816" cy="307777"/>
-                </a:xfrm>
-                <a:prstGeom prst="rect">
-                  <a:avLst/>
-                </a:prstGeom>
-                <a:noFill/>
-              </p:spPr>
-              <p:txBody>
-                <a:bodyPr wrap="square">
-                  <a:spAutoFit/>
-                </a:bodyPr>
-                <a:lstStyle/>
-                <a:p>
-                  <a:pPr algn="ctr"/>
-                  <a:r>
-                    <a:rPr lang="en-US" sz="1400" dirty="0" err="1">
-                      <a:solidFill>
-                        <a:schemeClr val="bg1"/>
-                      </a:solidFill>
-                      <a:latin typeface="Times New Roman" panose="02020603050405020304" pitchFamily="18" charset="0"/>
-                      <a:cs typeface="Times New Roman" panose="02020603050405020304" pitchFamily="18" charset="0"/>
-                    </a:rPr>
-                    <a:t>srsRAN_Project</a:t>
-                  </a:r>
-                  <a:r>
-                    <a:rPr lang="en-US" sz="1400" dirty="0">
-                      <a:solidFill>
-                        <a:schemeClr val="bg1"/>
-                      </a:solidFill>
-                      <a:latin typeface="Times New Roman" panose="02020603050405020304" pitchFamily="18" charset="0"/>
-                      <a:cs typeface="Times New Roman" panose="02020603050405020304" pitchFamily="18" charset="0"/>
-                    </a:rPr>
-                    <a:t> : USRP</a:t>
-                  </a:r>
-                </a:p>
-              </p:txBody>
-            </p:sp>
-            <p:sp>
-              <p:nvSpPr>
-                <p:cNvPr id="57" name="TextBox 56">
-                  <a:extLst>
-                    <a:ext uri="{FF2B5EF4-FFF2-40B4-BE49-F238E27FC236}">
-                      <a16:creationId xmlns:a16="http://schemas.microsoft.com/office/drawing/2014/main" id="{0B8C8F01-0D4B-E516-9B28-D04D18700C28}"/>
-                    </a:ext>
-                  </a:extLst>
-                </p:cNvPr>
-                <p:cNvSpPr txBox="1"/>
-                <p:nvPr/>
-              </p:nvSpPr>
-              <p:spPr>
-                <a:xfrm>
-                  <a:off x="3933168" y="4924949"/>
-                  <a:ext cx="2206814" cy="307777"/>
-                </a:xfrm>
-                <a:prstGeom prst="rect">
-                  <a:avLst/>
-                </a:prstGeom>
-                <a:noFill/>
-              </p:spPr>
-              <p:txBody>
-                <a:bodyPr wrap="square">
-                  <a:spAutoFit/>
-                </a:bodyPr>
-                <a:lstStyle/>
-                <a:p>
-                  <a:pPr algn="ctr"/>
-                  <a:r>
-                    <a:rPr lang="en-US" sz="1400" dirty="0">
-                      <a:solidFill>
-                        <a:schemeClr val="bg1"/>
-                      </a:solidFill>
-                      <a:latin typeface="Times New Roman" panose="02020603050405020304" pitchFamily="18" charset="0"/>
-                      <a:cs typeface="Times New Roman" panose="02020603050405020304" pitchFamily="18" charset="0"/>
-                    </a:rPr>
-                    <a:t>O-RAN SC : E2 Simulator</a:t>
-                  </a:r>
-                </a:p>
-              </p:txBody>
-            </p:sp>
-            <p:sp>
-              <p:nvSpPr>
-                <p:cNvPr id="58" name="TextBox 57">
-                  <a:extLst>
-                    <a:ext uri="{FF2B5EF4-FFF2-40B4-BE49-F238E27FC236}">
-                      <a16:creationId xmlns:a16="http://schemas.microsoft.com/office/drawing/2014/main" id="{E1692A11-3785-2962-B861-CAA171F11677}"/>
-                    </a:ext>
-                  </a:extLst>
-                </p:cNvPr>
-                <p:cNvSpPr txBox="1"/>
-                <p:nvPr/>
-              </p:nvSpPr>
-              <p:spPr>
-                <a:xfrm>
-                  <a:off x="3941661" y="5227453"/>
-                  <a:ext cx="2239249" cy="307777"/>
-                </a:xfrm>
-                <a:prstGeom prst="rect">
-                  <a:avLst/>
-                </a:prstGeom>
-                <a:noFill/>
-              </p:spPr>
-              <p:txBody>
-                <a:bodyPr wrap="square">
-                  <a:spAutoFit/>
-                </a:bodyPr>
-                <a:lstStyle/>
-                <a:p>
-                  <a:pPr algn="ctr"/>
-                  <a:r>
-                    <a:rPr lang="en-US" sz="1400" b="1" dirty="0">
-                      <a:solidFill>
-                        <a:schemeClr val="bg1"/>
-                      </a:solidFill>
-                      <a:latin typeface="Times New Roman" panose="02020603050405020304" pitchFamily="18" charset="0"/>
-                      <a:cs typeface="Times New Roman" panose="02020603050405020304" pitchFamily="18" charset="0"/>
-                    </a:rPr>
-                    <a:t>Next Generation Node B</a:t>
-                  </a:r>
-                </a:p>
-              </p:txBody>
-            </p:sp>
-            <p:sp>
-              <p:nvSpPr>
-                <p:cNvPr id="59" name="Rectangle 58">
-                  <a:extLst>
-                    <a:ext uri="{FF2B5EF4-FFF2-40B4-BE49-F238E27FC236}">
-                      <a16:creationId xmlns:a16="http://schemas.microsoft.com/office/drawing/2014/main" id="{31BF9939-6DC0-9767-200A-9AA00ED4DFCB}"/>
-                    </a:ext>
-                  </a:extLst>
-                </p:cNvPr>
-                <p:cNvSpPr/>
-                <p:nvPr/>
-              </p:nvSpPr>
-              <p:spPr>
-                <a:xfrm>
-                  <a:off x="3916950" y="4607247"/>
-                  <a:ext cx="2239249" cy="331887"/>
-                </a:xfrm>
-                <a:prstGeom prst="rect">
-                  <a:avLst/>
-                </a:prstGeom>
-                <a:solidFill>
-                  <a:srgbClr val="3A3A3A"/>
-                </a:solidFill>
-                <a:ln>
-                  <a:noFill/>
-                </a:ln>
-              </p:spPr>
-              <p:style>
-                <a:lnRef idx="2">
-                  <a:schemeClr val="accent1">
-                    <a:shade val="15000"/>
-                  </a:schemeClr>
-                </a:lnRef>
-                <a:fillRef idx="1">
-                  <a:schemeClr val="accent1"/>
-                </a:fillRef>
-                <a:effectRef idx="0">
-                  <a:schemeClr val="accent1"/>
-                </a:effectRef>
-                <a:fontRef idx="minor">
-                  <a:schemeClr val="lt1"/>
-                </a:fontRef>
-              </p:style>
-              <p:txBody>
-                <a:bodyPr rtlCol="0" anchor="ctr"/>
-                <a:lstStyle/>
-                <a:p>
-                  <a:pPr algn="ctr"/>
-                  <a:endParaRPr lang="en-US"/>
-                </a:p>
-              </p:txBody>
-            </p:sp>
-            <p:sp>
-              <p:nvSpPr>
-                <p:cNvPr id="60" name="TextBox 59">
-                  <a:extLst>
-                    <a:ext uri="{FF2B5EF4-FFF2-40B4-BE49-F238E27FC236}">
-                      <a16:creationId xmlns:a16="http://schemas.microsoft.com/office/drawing/2014/main" id="{590EF321-DED3-3E92-2D8E-023FCA46B884}"/>
-                    </a:ext>
-                  </a:extLst>
-                </p:cNvPr>
-                <p:cNvSpPr txBox="1"/>
-                <p:nvPr/>
-              </p:nvSpPr>
-              <p:spPr>
-                <a:xfrm>
-                  <a:off x="3933168" y="4619287"/>
-                  <a:ext cx="2206814" cy="307777"/>
-                </a:xfrm>
-                <a:prstGeom prst="rect">
-                  <a:avLst/>
-                </a:prstGeom>
-                <a:noFill/>
-              </p:spPr>
-              <p:txBody>
-                <a:bodyPr wrap="square">
-                  <a:spAutoFit/>
-                </a:bodyPr>
-                <a:lstStyle/>
-                <a:p>
-                  <a:pPr algn="ctr"/>
-                  <a:r>
-                    <a:rPr lang="en-US" sz="1400" dirty="0">
-                      <a:solidFill>
-                        <a:schemeClr val="bg1"/>
-                      </a:solidFill>
-                      <a:latin typeface="Times New Roman" panose="02020603050405020304" pitchFamily="18" charset="0"/>
-                      <a:cs typeface="Times New Roman" panose="02020603050405020304" pitchFamily="18" charset="0"/>
-                    </a:rPr>
-                    <a:t>OAI : RF Simulator</a:t>
-                  </a:r>
-                </a:p>
-              </p:txBody>
-            </p:sp>
-            <p:sp>
-              <p:nvSpPr>
-                <p:cNvPr id="61" name="Rectangle: Rounded Corners 60">
-                  <a:extLst>
-                    <a:ext uri="{FF2B5EF4-FFF2-40B4-BE49-F238E27FC236}">
-                      <a16:creationId xmlns:a16="http://schemas.microsoft.com/office/drawing/2014/main" id="{26FE37A3-1994-C0D5-B06F-E32D4E2A9E9D}"/>
-                    </a:ext>
-                  </a:extLst>
-                </p:cNvPr>
-                <p:cNvSpPr/>
-                <p:nvPr/>
-              </p:nvSpPr>
-              <p:spPr>
-                <a:xfrm>
-                  <a:off x="3916951" y="3691197"/>
-                  <a:ext cx="2239249" cy="1534218"/>
-                </a:xfrm>
-                <a:prstGeom prst="roundRect">
-                  <a:avLst>
-                    <a:gd name="adj" fmla="val 5819"/>
-                  </a:avLst>
-                </a:prstGeom>
-                <a:noFill/>
-                <a:ln w="12700">
-                  <a:solidFill>
-                    <a:schemeClr val="bg1"/>
-                  </a:solidFill>
-                </a:ln>
-              </p:spPr>
-              <p:style>
-                <a:lnRef idx="2">
-                  <a:schemeClr val="accent1">
-                    <a:shade val="15000"/>
-                  </a:schemeClr>
-                </a:lnRef>
-                <a:fillRef idx="1">
-                  <a:schemeClr val="accent1"/>
-                </a:fillRef>
-                <a:effectRef idx="0">
-                  <a:schemeClr val="accent1"/>
-                </a:effectRef>
-                <a:fontRef idx="minor">
-                  <a:schemeClr val="lt1"/>
-                </a:fontRef>
-              </p:style>
-              <p:txBody>
-                <a:bodyPr rtlCol="0" anchor="ctr"/>
-                <a:lstStyle/>
-                <a:p>
-                  <a:pPr algn="ctr"/>
-                  <a:endParaRPr lang="en-US" dirty="0">
-                    <a:latin typeface="Times New Roman" panose="02020603050405020304" pitchFamily="18" charset="0"/>
-                    <a:cs typeface="Times New Roman" panose="02020603050405020304" pitchFamily="18" charset="0"/>
-                  </a:endParaRPr>
-                </a:p>
-              </p:txBody>
-            </p:sp>
-          </p:grpSp>
-          <p:grpSp>
-            <p:nvGrpSpPr>
-              <p:cNvPr id="26" name="Group 25">
-                <a:extLst>
-                  <a:ext uri="{FF2B5EF4-FFF2-40B4-BE49-F238E27FC236}">
-                    <a16:creationId xmlns:a16="http://schemas.microsoft.com/office/drawing/2014/main" id="{738FE746-EA93-3F84-2E49-EB596828B714}"/>
-                  </a:ext>
-                </a:extLst>
-              </p:cNvPr>
-              <p:cNvGrpSpPr/>
-              <p:nvPr/>
-            </p:nvGrpSpPr>
-            <p:grpSpPr>
-              <a:xfrm>
-                <a:off x="778869" y="4232789"/>
-                <a:ext cx="2263961" cy="1844033"/>
-                <a:chOff x="3916949" y="3691197"/>
-                <a:chExt cx="2263961" cy="1844033"/>
-              </a:xfrm>
-            </p:grpSpPr>
-            <p:sp>
-              <p:nvSpPr>
-                <p:cNvPr id="40" name="Rectangle: Rounded Corners 39">
-                  <a:extLst>
-                    <a:ext uri="{FF2B5EF4-FFF2-40B4-BE49-F238E27FC236}">
-                      <a16:creationId xmlns:a16="http://schemas.microsoft.com/office/drawing/2014/main" id="{06932116-A947-404E-B203-2C38A8952496}"/>
-                    </a:ext>
-                  </a:extLst>
-                </p:cNvPr>
-                <p:cNvSpPr/>
-                <p:nvPr/>
-              </p:nvSpPr>
-              <p:spPr>
-                <a:xfrm>
-                  <a:off x="3916949" y="3692460"/>
-                  <a:ext cx="2239249" cy="1531642"/>
-                </a:xfrm>
-                <a:prstGeom prst="roundRect">
-                  <a:avLst>
-                    <a:gd name="adj" fmla="val 5859"/>
-                  </a:avLst>
-                </a:prstGeom>
-                <a:solidFill>
-                  <a:srgbClr val="262626"/>
-                </a:solidFill>
-                <a:ln w="28575">
-                  <a:noFill/>
-                </a:ln>
-              </p:spPr>
-              <p:style>
-                <a:lnRef idx="2">
-                  <a:schemeClr val="accent1">
-                    <a:shade val="15000"/>
-                  </a:schemeClr>
-                </a:lnRef>
-                <a:fillRef idx="1">
-                  <a:schemeClr val="accent1"/>
-                </a:fillRef>
-                <a:effectRef idx="0">
-                  <a:schemeClr val="accent1"/>
-                </a:effectRef>
-                <a:fontRef idx="minor">
-                  <a:schemeClr val="lt1"/>
-                </a:fontRef>
-              </p:style>
-              <p:txBody>
-                <a:bodyPr rtlCol="0" anchor="ctr"/>
-                <a:lstStyle/>
-                <a:p>
-                  <a:pPr algn="ctr"/>
-                  <a:endParaRPr lang="en-US" dirty="0">
-                    <a:latin typeface="Times New Roman" panose="02020603050405020304" pitchFamily="18" charset="0"/>
-                    <a:cs typeface="Times New Roman" panose="02020603050405020304" pitchFamily="18" charset="0"/>
-                  </a:endParaRPr>
-                </a:p>
-              </p:txBody>
-            </p:sp>
-            <p:sp>
-              <p:nvSpPr>
-                <p:cNvPr id="41" name="Rectangle: Top Corners Rounded 40">
-                  <a:extLst>
-                    <a:ext uri="{FF2B5EF4-FFF2-40B4-BE49-F238E27FC236}">
-                      <a16:creationId xmlns:a16="http://schemas.microsoft.com/office/drawing/2014/main" id="{AB9DCAB6-A723-7C47-DA69-4A1D35F5520F}"/>
-                    </a:ext>
-                  </a:extLst>
-                </p:cNvPr>
-                <p:cNvSpPr/>
-                <p:nvPr/>
-              </p:nvSpPr>
-              <p:spPr>
-                <a:xfrm rot="10800000">
-                  <a:off x="3916952" y="4613172"/>
-                  <a:ext cx="2239248" cy="323588"/>
-                </a:xfrm>
-                <a:prstGeom prst="round2SameRect">
-                  <a:avLst>
-                    <a:gd name="adj1" fmla="val 28890"/>
-                    <a:gd name="adj2" fmla="val 0"/>
-                  </a:avLst>
-                </a:prstGeom>
-                <a:solidFill>
-                  <a:srgbClr val="F2F2F2"/>
-                </a:solidFill>
-                <a:ln>
-                  <a:noFill/>
-                </a:ln>
-              </p:spPr>
-              <p:style>
-                <a:lnRef idx="2">
-                  <a:schemeClr val="accent1">
-                    <a:shade val="15000"/>
-                  </a:schemeClr>
-                </a:lnRef>
-                <a:fillRef idx="1">
-                  <a:schemeClr val="accent1"/>
-                </a:fillRef>
-                <a:effectRef idx="0">
-                  <a:schemeClr val="accent1"/>
-                </a:effectRef>
-                <a:fontRef idx="minor">
-                  <a:schemeClr val="lt1"/>
-                </a:fontRef>
-              </p:style>
-              <p:txBody>
-                <a:bodyPr rtlCol="0" anchor="ctr"/>
-                <a:lstStyle/>
-                <a:p>
-                  <a:pPr algn="ctr"/>
-                  <a:endParaRPr lang="en-US"/>
-                </a:p>
-              </p:txBody>
-            </p:sp>
-            <p:sp>
-              <p:nvSpPr>
-                <p:cNvPr id="42" name="Rectangle 41">
-                  <a:extLst>
-                    <a:ext uri="{FF2B5EF4-FFF2-40B4-BE49-F238E27FC236}">
-                      <a16:creationId xmlns:a16="http://schemas.microsoft.com/office/drawing/2014/main" id="{059024B3-E725-8F4D-57EF-E266332C0F1D}"/>
-                    </a:ext>
-                  </a:extLst>
-                </p:cNvPr>
-                <p:cNvSpPr/>
-                <p:nvPr/>
-              </p:nvSpPr>
-              <p:spPr>
-                <a:xfrm>
-                  <a:off x="3916951" y="3990559"/>
-                  <a:ext cx="2239249" cy="323587"/>
-                </a:xfrm>
-                <a:prstGeom prst="rect">
-                  <a:avLst/>
-                </a:prstGeom>
-                <a:solidFill>
-                  <a:srgbClr val="3A3A3A"/>
-                </a:solidFill>
-                <a:ln>
-                  <a:noFill/>
-                </a:ln>
-              </p:spPr>
-              <p:style>
-                <a:lnRef idx="2">
-                  <a:schemeClr val="accent1">
-                    <a:shade val="15000"/>
-                  </a:schemeClr>
-                </a:lnRef>
-                <a:fillRef idx="1">
-                  <a:schemeClr val="accent1"/>
-                </a:fillRef>
-                <a:effectRef idx="0">
-                  <a:schemeClr val="accent1"/>
-                </a:effectRef>
-                <a:fontRef idx="minor">
-                  <a:schemeClr val="lt1"/>
-                </a:fontRef>
-              </p:style>
-              <p:txBody>
-                <a:bodyPr rtlCol="0" anchor="ctr"/>
-                <a:lstStyle/>
-                <a:p>
-                  <a:pPr algn="ctr"/>
-                  <a:endParaRPr lang="en-US"/>
-                </a:p>
-              </p:txBody>
-            </p:sp>
-            <p:sp>
-              <p:nvSpPr>
-                <p:cNvPr id="43" name="TextBox 42">
-                  <a:extLst>
-                    <a:ext uri="{FF2B5EF4-FFF2-40B4-BE49-F238E27FC236}">
-                      <a16:creationId xmlns:a16="http://schemas.microsoft.com/office/drawing/2014/main" id="{8F539C13-3DA0-CDD5-906F-B7B23E40A3DD}"/>
-                    </a:ext>
-                  </a:extLst>
-                </p:cNvPr>
-                <p:cNvSpPr txBox="1"/>
-                <p:nvPr/>
-              </p:nvSpPr>
-              <p:spPr>
-                <a:xfrm>
-                  <a:off x="3916952" y="4313625"/>
-                  <a:ext cx="2239246" cy="307777"/>
-                </a:xfrm>
-                <a:prstGeom prst="rect">
-                  <a:avLst/>
-                </a:prstGeom>
-                <a:noFill/>
-              </p:spPr>
-              <p:txBody>
-                <a:bodyPr wrap="square">
-                  <a:spAutoFit/>
-                </a:bodyPr>
-                <a:lstStyle/>
-                <a:p>
-                  <a:pPr algn="ctr"/>
-                  <a:r>
-                    <a:rPr lang="en-US" sz="1400" dirty="0">
-                      <a:solidFill>
-                        <a:schemeClr val="bg1"/>
-                      </a:solidFill>
-                      <a:latin typeface="Times New Roman" panose="02020603050405020304" pitchFamily="18" charset="0"/>
-                      <a:cs typeface="Times New Roman" panose="02020603050405020304" pitchFamily="18" charset="0"/>
-                    </a:rPr>
-                    <a:t>OAI : USRP</a:t>
-                  </a:r>
-                </a:p>
-              </p:txBody>
-            </p:sp>
-            <p:sp>
-              <p:nvSpPr>
-                <p:cNvPr id="44" name="TextBox 43">
-                  <a:extLst>
-                    <a:ext uri="{FF2B5EF4-FFF2-40B4-BE49-F238E27FC236}">
-                      <a16:creationId xmlns:a16="http://schemas.microsoft.com/office/drawing/2014/main" id="{DA83BE73-067A-6A36-CE79-E9C8F7848B03}"/>
-                    </a:ext>
-                  </a:extLst>
-                </p:cNvPr>
-                <p:cNvSpPr txBox="1"/>
-                <p:nvPr/>
-              </p:nvSpPr>
-              <p:spPr>
-                <a:xfrm>
-                  <a:off x="3918857" y="4007963"/>
-                  <a:ext cx="2239246" cy="307777"/>
-                </a:xfrm>
-                <a:prstGeom prst="rect">
-                  <a:avLst/>
-                </a:prstGeom>
-                <a:noFill/>
-              </p:spPr>
-              <p:txBody>
-                <a:bodyPr wrap="square">
-                  <a:spAutoFit/>
-                </a:bodyPr>
-                <a:lstStyle/>
-                <a:p>
-                  <a:pPr algn="ctr"/>
-                  <a:r>
-                    <a:rPr lang="en-US" sz="1400" dirty="0">
-                      <a:solidFill>
-                        <a:schemeClr val="bg1"/>
-                      </a:solidFill>
-                      <a:latin typeface="Times New Roman" panose="02020603050405020304" pitchFamily="18" charset="0"/>
-                      <a:cs typeface="Times New Roman" panose="02020603050405020304" pitchFamily="18" charset="0"/>
-                    </a:rPr>
-                    <a:t>srsRAN_4G : </a:t>
-                  </a:r>
-                  <a:r>
-                    <a:rPr lang="en-US" sz="1400" dirty="0" err="1">
-                      <a:solidFill>
-                        <a:schemeClr val="bg1"/>
-                      </a:solidFill>
-                      <a:latin typeface="Times New Roman" panose="02020603050405020304" pitchFamily="18" charset="0"/>
-                      <a:cs typeface="Times New Roman" panose="02020603050405020304" pitchFamily="18" charset="0"/>
-                    </a:rPr>
-                    <a:t>ZeroMQ</a:t>
-                  </a:r>
-                  <a:endParaRPr lang="en-US" sz="1400" dirty="0">
-                    <a:solidFill>
-                      <a:schemeClr val="bg1"/>
-                    </a:solidFill>
-                    <a:latin typeface="Times New Roman" panose="02020603050405020304" pitchFamily="18" charset="0"/>
-                    <a:cs typeface="Times New Roman" panose="02020603050405020304" pitchFamily="18" charset="0"/>
-                  </a:endParaRPr>
-                </a:p>
-              </p:txBody>
-            </p:sp>
-            <p:sp>
-              <p:nvSpPr>
-                <p:cNvPr id="45" name="TextBox 44">
-                  <a:extLst>
-                    <a:ext uri="{FF2B5EF4-FFF2-40B4-BE49-F238E27FC236}">
-                      <a16:creationId xmlns:a16="http://schemas.microsoft.com/office/drawing/2014/main" id="{592A8990-5727-46D2-F53B-BB54ADC83038}"/>
-                    </a:ext>
-                  </a:extLst>
-                </p:cNvPr>
-                <p:cNvSpPr txBox="1"/>
-                <p:nvPr/>
-              </p:nvSpPr>
-              <p:spPr>
-                <a:xfrm>
-                  <a:off x="3916951" y="3702301"/>
-                  <a:ext cx="2239248" cy="307777"/>
-                </a:xfrm>
-                <a:prstGeom prst="rect">
-                  <a:avLst/>
-                </a:prstGeom>
-                <a:noFill/>
-              </p:spPr>
-              <p:txBody>
-                <a:bodyPr wrap="square">
-                  <a:spAutoFit/>
-                </a:bodyPr>
-                <a:lstStyle/>
-                <a:p>
-                  <a:pPr algn="ctr"/>
-                  <a:r>
-                    <a:rPr lang="en-US" sz="1400" dirty="0">
-                      <a:solidFill>
-                        <a:schemeClr val="bg1"/>
-                      </a:solidFill>
-                      <a:latin typeface="Times New Roman" panose="02020603050405020304" pitchFamily="18" charset="0"/>
-                      <a:cs typeface="Times New Roman" panose="02020603050405020304" pitchFamily="18" charset="0"/>
-                    </a:rPr>
-                    <a:t>srsRAN_4G : USRP</a:t>
-                  </a:r>
-                </a:p>
-              </p:txBody>
-            </p:sp>
-            <p:sp>
-              <p:nvSpPr>
-                <p:cNvPr id="46" name="TextBox 45">
-                  <a:extLst>
-                    <a:ext uri="{FF2B5EF4-FFF2-40B4-BE49-F238E27FC236}">
-                      <a16:creationId xmlns:a16="http://schemas.microsoft.com/office/drawing/2014/main" id="{52E6A652-08FB-05C2-F5D5-25D5E1D5B523}"/>
-                    </a:ext>
-                  </a:extLst>
-                </p:cNvPr>
-                <p:cNvSpPr txBox="1"/>
-                <p:nvPr/>
-              </p:nvSpPr>
-              <p:spPr>
-                <a:xfrm>
-                  <a:off x="3916952" y="4924949"/>
-                  <a:ext cx="2239246" cy="307777"/>
-                </a:xfrm>
-                <a:prstGeom prst="rect">
-                  <a:avLst/>
-                </a:prstGeom>
-                <a:noFill/>
-              </p:spPr>
-              <p:txBody>
-                <a:bodyPr wrap="square">
-                  <a:spAutoFit/>
-                </a:bodyPr>
-                <a:lstStyle/>
-                <a:p>
-                  <a:pPr algn="ctr"/>
-                  <a:r>
-                    <a:rPr lang="en-US" sz="1400" dirty="0">
-                      <a:solidFill>
-                        <a:schemeClr val="bg1"/>
-                      </a:solidFill>
-                      <a:latin typeface="Times New Roman" panose="02020603050405020304" pitchFamily="18" charset="0"/>
-                      <a:cs typeface="Times New Roman" panose="02020603050405020304" pitchFamily="18" charset="0"/>
-                    </a:rPr>
-                    <a:t>Mobile Phone</a:t>
-                  </a:r>
-                </a:p>
-              </p:txBody>
-            </p:sp>
-            <p:sp>
-              <p:nvSpPr>
-                <p:cNvPr id="47" name="TextBox 46">
-                  <a:extLst>
-                    <a:ext uri="{FF2B5EF4-FFF2-40B4-BE49-F238E27FC236}">
-                      <a16:creationId xmlns:a16="http://schemas.microsoft.com/office/drawing/2014/main" id="{29036365-8CEE-A19F-B173-8499CDCFCABA}"/>
-                    </a:ext>
-                  </a:extLst>
-                </p:cNvPr>
-                <p:cNvSpPr txBox="1"/>
-                <p:nvPr/>
-              </p:nvSpPr>
-              <p:spPr>
-                <a:xfrm>
-                  <a:off x="3941661" y="5227453"/>
-                  <a:ext cx="2239249" cy="307777"/>
-                </a:xfrm>
-                <a:prstGeom prst="rect">
-                  <a:avLst/>
-                </a:prstGeom>
-                <a:noFill/>
-              </p:spPr>
-              <p:txBody>
-                <a:bodyPr wrap="square">
-                  <a:spAutoFit/>
-                </a:bodyPr>
-                <a:lstStyle/>
-                <a:p>
-                  <a:pPr algn="ctr"/>
-                  <a:r>
-                    <a:rPr lang="en-US" sz="1400" b="1" dirty="0">
-                      <a:solidFill>
-                        <a:schemeClr val="bg1"/>
-                      </a:solidFill>
-                      <a:latin typeface="Times New Roman" panose="02020603050405020304" pitchFamily="18" charset="0"/>
-                      <a:cs typeface="Times New Roman" panose="02020603050405020304" pitchFamily="18" charset="0"/>
-                    </a:rPr>
-                    <a:t>User Equipment</a:t>
-                  </a:r>
-                </a:p>
-              </p:txBody>
-            </p:sp>
-            <p:sp>
-              <p:nvSpPr>
-                <p:cNvPr id="48" name="Rectangle 47">
-                  <a:extLst>
-                    <a:ext uri="{FF2B5EF4-FFF2-40B4-BE49-F238E27FC236}">
-                      <a16:creationId xmlns:a16="http://schemas.microsoft.com/office/drawing/2014/main" id="{D925D158-702C-A0D3-8A57-4736AFF32367}"/>
-                    </a:ext>
-                  </a:extLst>
-                </p:cNvPr>
-                <p:cNvSpPr/>
-                <p:nvPr/>
-              </p:nvSpPr>
-              <p:spPr>
-                <a:xfrm>
-                  <a:off x="3916950" y="4611639"/>
-                  <a:ext cx="2239249" cy="327496"/>
-                </a:xfrm>
-                <a:prstGeom prst="rect">
-                  <a:avLst/>
-                </a:prstGeom>
-                <a:solidFill>
-                  <a:srgbClr val="3A3A3A"/>
-                </a:solidFill>
-                <a:ln>
-                  <a:noFill/>
-                </a:ln>
-              </p:spPr>
-              <p:style>
-                <a:lnRef idx="2">
-                  <a:schemeClr val="accent1">
-                    <a:shade val="15000"/>
-                  </a:schemeClr>
-                </a:lnRef>
-                <a:fillRef idx="1">
-                  <a:schemeClr val="accent1"/>
-                </a:fillRef>
-                <a:effectRef idx="0">
-                  <a:schemeClr val="accent1"/>
-                </a:effectRef>
-                <a:fontRef idx="minor">
-                  <a:schemeClr val="lt1"/>
-                </a:fontRef>
-              </p:style>
-              <p:txBody>
-                <a:bodyPr rtlCol="0" anchor="ctr"/>
-                <a:lstStyle/>
-                <a:p>
-                  <a:pPr algn="ctr"/>
-                  <a:endParaRPr lang="en-US"/>
-                </a:p>
-              </p:txBody>
-            </p:sp>
-            <p:sp>
-              <p:nvSpPr>
-                <p:cNvPr id="49" name="TextBox 48">
-                  <a:extLst>
-                    <a:ext uri="{FF2B5EF4-FFF2-40B4-BE49-F238E27FC236}">
-                      <a16:creationId xmlns:a16="http://schemas.microsoft.com/office/drawing/2014/main" id="{D8772B8B-14B6-19AA-9DFC-643F7AF6818D}"/>
-                    </a:ext>
-                  </a:extLst>
-                </p:cNvPr>
-                <p:cNvSpPr txBox="1"/>
-                <p:nvPr/>
-              </p:nvSpPr>
-              <p:spPr>
-                <a:xfrm>
-                  <a:off x="3916952" y="4619287"/>
-                  <a:ext cx="2239246" cy="307777"/>
-                </a:xfrm>
-                <a:prstGeom prst="rect">
-                  <a:avLst/>
-                </a:prstGeom>
-                <a:noFill/>
-              </p:spPr>
-              <p:txBody>
-                <a:bodyPr wrap="square">
-                  <a:spAutoFit/>
-                </a:bodyPr>
-                <a:lstStyle/>
-                <a:p>
-                  <a:pPr algn="ctr"/>
-                  <a:r>
-                    <a:rPr lang="en-US" sz="1400" dirty="0">
-                      <a:solidFill>
-                        <a:schemeClr val="bg1"/>
-                      </a:solidFill>
-                      <a:latin typeface="Times New Roman" panose="02020603050405020304" pitchFamily="18" charset="0"/>
-                      <a:cs typeface="Times New Roman" panose="02020603050405020304" pitchFamily="18" charset="0"/>
-                    </a:rPr>
-                    <a:t>OAI : RF Simulator</a:t>
-                  </a:r>
-                </a:p>
-              </p:txBody>
-            </p:sp>
-            <p:sp>
-              <p:nvSpPr>
-                <p:cNvPr id="50" name="Rectangle: Rounded Corners 49">
-                  <a:extLst>
-                    <a:ext uri="{FF2B5EF4-FFF2-40B4-BE49-F238E27FC236}">
-                      <a16:creationId xmlns:a16="http://schemas.microsoft.com/office/drawing/2014/main" id="{A0CE4E09-8DF3-9F5F-9E61-B32DC3A4E44A}"/>
-                    </a:ext>
-                  </a:extLst>
-                </p:cNvPr>
-                <p:cNvSpPr/>
-                <p:nvPr/>
-              </p:nvSpPr>
-              <p:spPr>
-                <a:xfrm>
-                  <a:off x="3916951" y="3691197"/>
-                  <a:ext cx="2239249" cy="1534218"/>
-                </a:xfrm>
-                <a:prstGeom prst="roundRect">
-                  <a:avLst>
-                    <a:gd name="adj" fmla="val 5819"/>
-                  </a:avLst>
-                </a:prstGeom>
-                <a:noFill/>
-                <a:ln w="12700">
-                  <a:solidFill>
-                    <a:schemeClr val="bg1"/>
-                  </a:solidFill>
-                </a:ln>
-              </p:spPr>
-              <p:style>
-                <a:lnRef idx="2">
-                  <a:schemeClr val="accent1">
-                    <a:shade val="15000"/>
-                  </a:schemeClr>
-                </a:lnRef>
-                <a:fillRef idx="1">
-                  <a:schemeClr val="accent1"/>
-                </a:fillRef>
-                <a:effectRef idx="0">
-                  <a:schemeClr val="accent1"/>
-                </a:effectRef>
-                <a:fontRef idx="minor">
-                  <a:schemeClr val="lt1"/>
-                </a:fontRef>
-              </p:style>
-              <p:txBody>
-                <a:bodyPr rtlCol="0" anchor="ctr"/>
-                <a:lstStyle/>
-                <a:p>
-                  <a:pPr algn="ctr"/>
-                  <a:endParaRPr lang="en-US" dirty="0">
-                    <a:latin typeface="Times New Roman" panose="02020603050405020304" pitchFamily="18" charset="0"/>
-                    <a:cs typeface="Times New Roman" panose="02020603050405020304" pitchFamily="18" charset="0"/>
-                  </a:endParaRPr>
-                </a:p>
-              </p:txBody>
-            </p:sp>
-          </p:grpSp>
-          <p:grpSp>
-            <p:nvGrpSpPr>
-              <p:cNvPr id="27" name="Group 26">
-                <a:extLst>
-                  <a:ext uri="{FF2B5EF4-FFF2-40B4-BE49-F238E27FC236}">
-                    <a16:creationId xmlns:a16="http://schemas.microsoft.com/office/drawing/2014/main" id="{5726D8C5-614D-56A4-C7DA-2AE1FE738FC2}"/>
-                  </a:ext>
-                </a:extLst>
-              </p:cNvPr>
-              <p:cNvGrpSpPr/>
-              <p:nvPr/>
-            </p:nvGrpSpPr>
-            <p:grpSpPr>
-              <a:xfrm>
-                <a:off x="6586191" y="5146289"/>
-                <a:ext cx="2239250" cy="930533"/>
-                <a:chOff x="6696060" y="5146289"/>
-                <a:chExt cx="2239250" cy="930533"/>
-              </a:xfrm>
-            </p:grpSpPr>
-            <p:grpSp>
-              <p:nvGrpSpPr>
-                <p:cNvPr id="32" name="Group 31">
-                  <a:extLst>
-                    <a:ext uri="{FF2B5EF4-FFF2-40B4-BE49-F238E27FC236}">
-                      <a16:creationId xmlns:a16="http://schemas.microsoft.com/office/drawing/2014/main" id="{820554D9-5169-E86E-F3E1-6FD7B1FB0948}"/>
-                    </a:ext>
-                  </a:extLst>
-                </p:cNvPr>
-                <p:cNvGrpSpPr/>
-                <p:nvPr/>
-              </p:nvGrpSpPr>
-              <p:grpSpPr>
-                <a:xfrm>
-                  <a:off x="6696060" y="5146289"/>
-                  <a:ext cx="2239250" cy="618690"/>
-                  <a:chOff x="6808092" y="5153909"/>
-                  <a:chExt cx="2239250" cy="618690"/>
-                </a:xfrm>
-              </p:grpSpPr>
-              <p:grpSp>
-                <p:nvGrpSpPr>
-                  <p:cNvPr id="34" name="Group 33">
-                    <a:extLst>
-                      <a:ext uri="{FF2B5EF4-FFF2-40B4-BE49-F238E27FC236}">
-                        <a16:creationId xmlns:a16="http://schemas.microsoft.com/office/drawing/2014/main" id="{0E46935C-6F39-D19A-CFCF-D62A86034828}"/>
-                      </a:ext>
-                    </a:extLst>
-                  </p:cNvPr>
-                  <p:cNvGrpSpPr/>
-                  <p:nvPr/>
-                </p:nvGrpSpPr>
-                <p:grpSpPr>
-                  <a:xfrm>
-                    <a:off x="6808092" y="5153909"/>
-                    <a:ext cx="2239249" cy="618690"/>
-                    <a:chOff x="4021891" y="2194877"/>
-                    <a:chExt cx="2239249" cy="618690"/>
-                  </a:xfrm>
-                </p:grpSpPr>
-                <p:sp>
-                  <p:nvSpPr>
-                    <p:cNvPr id="37" name="Rectangle: Rounded Corners 36">
-                      <a:extLst>
-                        <a:ext uri="{FF2B5EF4-FFF2-40B4-BE49-F238E27FC236}">
-                          <a16:creationId xmlns:a16="http://schemas.microsoft.com/office/drawing/2014/main" id="{2B8A2F6C-2A67-260F-6F24-A4C6D93DEC79}"/>
-                        </a:ext>
-                      </a:extLst>
-                    </p:cNvPr>
-                    <p:cNvSpPr/>
-                    <p:nvPr/>
-                  </p:nvSpPr>
-                  <p:spPr>
-                    <a:xfrm>
-                      <a:off x="4021891" y="2194877"/>
-                      <a:ext cx="2239249" cy="618689"/>
-                    </a:xfrm>
-                    <a:prstGeom prst="roundRect">
-                      <a:avLst>
-                        <a:gd name="adj" fmla="val 12974"/>
-                      </a:avLst>
-                    </a:prstGeom>
-                    <a:solidFill>
-                      <a:srgbClr val="262626"/>
-                    </a:solidFill>
-                    <a:ln w="28575">
-                      <a:noFill/>
-                    </a:ln>
-                  </p:spPr>
-                  <p:style>
-                    <a:lnRef idx="2">
-                      <a:schemeClr val="accent1">
-                        <a:shade val="15000"/>
-                      </a:schemeClr>
-                    </a:lnRef>
-                    <a:fillRef idx="1">
-                      <a:schemeClr val="accent1"/>
-                    </a:fillRef>
-                    <a:effectRef idx="0">
-                      <a:schemeClr val="accent1"/>
-                    </a:effectRef>
-                    <a:fontRef idx="minor">
-                      <a:schemeClr val="lt1"/>
-                    </a:fontRef>
-                  </p:style>
-                  <p:txBody>
-                    <a:bodyPr rtlCol="0" anchor="ctr"/>
-                    <a:lstStyle/>
-                    <a:p>
-                      <a:pPr algn="ctr"/>
-                      <a:endParaRPr lang="en-US" dirty="0">
-                        <a:latin typeface="Times New Roman" panose="02020603050405020304" pitchFamily="18" charset="0"/>
-                        <a:cs typeface="Times New Roman" panose="02020603050405020304" pitchFamily="18" charset="0"/>
-                      </a:endParaRPr>
-                    </a:p>
-                  </p:txBody>
-                </p:sp>
-                <p:sp>
-                  <p:nvSpPr>
-                    <p:cNvPr id="38" name="Rectangle: Top Corners Rounded 37">
-                      <a:extLst>
-                        <a:ext uri="{FF2B5EF4-FFF2-40B4-BE49-F238E27FC236}">
-                          <a16:creationId xmlns:a16="http://schemas.microsoft.com/office/drawing/2014/main" id="{DF0159E4-F128-74A1-8A96-41E2DB712167}"/>
-                        </a:ext>
-                      </a:extLst>
-                    </p:cNvPr>
-                    <p:cNvSpPr/>
-                    <p:nvPr/>
-                  </p:nvSpPr>
-                  <p:spPr>
-                    <a:xfrm flipV="1">
-                      <a:off x="4022672" y="2504431"/>
-                      <a:ext cx="2238468" cy="307778"/>
-                    </a:xfrm>
-                    <a:prstGeom prst="round2SameRect">
-                      <a:avLst>
-                        <a:gd name="adj1" fmla="val 28674"/>
-                        <a:gd name="adj2" fmla="val 0"/>
-                      </a:avLst>
-                    </a:prstGeom>
-                    <a:solidFill>
-                      <a:srgbClr val="3A3A3A"/>
-                    </a:solidFill>
-                    <a:ln>
-                      <a:noFill/>
-                    </a:ln>
-                  </p:spPr>
-                  <p:style>
-                    <a:lnRef idx="2">
-                      <a:schemeClr val="accent1">
-                        <a:shade val="15000"/>
-                      </a:schemeClr>
-                    </a:lnRef>
-                    <a:fillRef idx="1">
-                      <a:schemeClr val="accent1"/>
-                    </a:fillRef>
-                    <a:effectRef idx="0">
-                      <a:schemeClr val="accent1"/>
-                    </a:effectRef>
-                    <a:fontRef idx="minor">
-                      <a:schemeClr val="lt1"/>
-                    </a:fontRef>
-                  </p:style>
-                  <p:txBody>
-                    <a:bodyPr rtlCol="0" anchor="ctr"/>
-                    <a:lstStyle/>
-                    <a:p>
-                      <a:pPr algn="ctr"/>
-                      <a:endParaRPr lang="en-US"/>
-                    </a:p>
-                  </p:txBody>
-                </p:sp>
-                <p:sp>
-                  <p:nvSpPr>
-                    <p:cNvPr id="39" name="Rectangle: Rounded Corners 38">
-                      <a:extLst>
-                        <a:ext uri="{FF2B5EF4-FFF2-40B4-BE49-F238E27FC236}">
-                          <a16:creationId xmlns:a16="http://schemas.microsoft.com/office/drawing/2014/main" id="{B5C5DF2A-4F80-58F0-7F14-9A6CAA7EA5E2}"/>
-                        </a:ext>
-                      </a:extLst>
-                    </p:cNvPr>
-                    <p:cNvSpPr/>
-                    <p:nvPr/>
-                  </p:nvSpPr>
-                  <p:spPr>
-                    <a:xfrm>
-                      <a:off x="4021891" y="2194878"/>
-                      <a:ext cx="2239249" cy="618689"/>
-                    </a:xfrm>
-                    <a:prstGeom prst="roundRect">
-                      <a:avLst>
-                        <a:gd name="adj" fmla="val 12974"/>
-                      </a:avLst>
-                    </a:prstGeom>
-                    <a:noFill/>
-                    <a:ln w="12700">
-                      <a:solidFill>
-                        <a:schemeClr val="bg1"/>
-                      </a:solidFill>
-                    </a:ln>
-                  </p:spPr>
-                  <p:style>
-                    <a:lnRef idx="2">
-                      <a:schemeClr val="accent1">
-                        <a:shade val="15000"/>
-                      </a:schemeClr>
-                    </a:lnRef>
-                    <a:fillRef idx="1">
-                      <a:schemeClr val="accent1"/>
-                    </a:fillRef>
-                    <a:effectRef idx="0">
-                      <a:schemeClr val="accent1"/>
-                    </a:effectRef>
-                    <a:fontRef idx="minor">
-                      <a:schemeClr val="lt1"/>
-                    </a:fontRef>
-                  </p:style>
-                  <p:txBody>
-                    <a:bodyPr rtlCol="0" anchor="ctr"/>
-                    <a:lstStyle/>
-                    <a:p>
-                      <a:pPr algn="ctr"/>
-                      <a:endParaRPr lang="en-US" dirty="0">
-                        <a:latin typeface="Times New Roman" panose="02020603050405020304" pitchFamily="18" charset="0"/>
-                        <a:cs typeface="Times New Roman" panose="02020603050405020304" pitchFamily="18" charset="0"/>
-                      </a:endParaRPr>
-                    </a:p>
-                  </p:txBody>
-                </p:sp>
-              </p:grpSp>
-              <p:sp>
-                <p:nvSpPr>
-                  <p:cNvPr id="35" name="TextBox 34">
-                    <a:extLst>
-                      <a:ext uri="{FF2B5EF4-FFF2-40B4-BE49-F238E27FC236}">
-                        <a16:creationId xmlns:a16="http://schemas.microsoft.com/office/drawing/2014/main" id="{3DB1D612-0DA6-DFDD-7974-3E9354FCC1D8}"/>
-                      </a:ext>
-                    </a:extLst>
-                  </p:cNvPr>
-                  <p:cNvSpPr txBox="1"/>
-                  <p:nvPr/>
-                </p:nvSpPr>
-                <p:spPr>
-                  <a:xfrm>
-                    <a:off x="6808092" y="5171400"/>
-                    <a:ext cx="2239250" cy="307777"/>
-                  </a:xfrm>
-                  <a:prstGeom prst="rect">
-                    <a:avLst/>
-                  </a:prstGeom>
-                  <a:noFill/>
-                </p:spPr>
-                <p:txBody>
-                  <a:bodyPr wrap="square">
-                    <a:spAutoFit/>
-                  </a:bodyPr>
-                  <a:lstStyle/>
-                  <a:p>
-                    <a:pPr algn="ctr"/>
-                    <a:r>
-                      <a:rPr lang="en-US" sz="1400" dirty="0">
-                        <a:solidFill>
-                          <a:schemeClr val="bg1"/>
-                        </a:solidFill>
-                        <a:latin typeface="Times New Roman" panose="02020603050405020304" pitchFamily="18" charset="0"/>
-                        <a:cs typeface="Times New Roman" panose="02020603050405020304" pitchFamily="18" charset="0"/>
-                      </a:rPr>
-                      <a:t>O-RAN SC : Near-RT RIC</a:t>
-                    </a:r>
-                  </a:p>
-                </p:txBody>
-              </p:sp>
-              <p:sp>
-                <p:nvSpPr>
-                  <p:cNvPr id="36" name="TextBox 35">
-                    <a:extLst>
-                      <a:ext uri="{FF2B5EF4-FFF2-40B4-BE49-F238E27FC236}">
-                        <a16:creationId xmlns:a16="http://schemas.microsoft.com/office/drawing/2014/main" id="{9F749793-5D51-05F0-271A-74342A22925C}"/>
-                      </a:ext>
-                    </a:extLst>
-                  </p:cNvPr>
-                  <p:cNvSpPr txBox="1"/>
-                  <p:nvPr/>
-                </p:nvSpPr>
-                <p:spPr>
-                  <a:xfrm>
-                    <a:off x="6808092" y="5464822"/>
-                    <a:ext cx="2239250" cy="307777"/>
-                  </a:xfrm>
-                  <a:prstGeom prst="rect">
-                    <a:avLst/>
-                  </a:prstGeom>
-                  <a:noFill/>
-                </p:spPr>
-                <p:txBody>
-                  <a:bodyPr wrap="square">
-                    <a:spAutoFit/>
-                  </a:bodyPr>
-                  <a:lstStyle/>
-                  <a:p>
-                    <a:pPr algn="ctr"/>
-                    <a:r>
-                      <a:rPr lang="en-US" sz="1400" dirty="0">
-                        <a:solidFill>
-                          <a:schemeClr val="bg1"/>
-                        </a:solidFill>
-                        <a:latin typeface="Times New Roman" panose="02020603050405020304" pitchFamily="18" charset="0"/>
-                        <a:cs typeface="Times New Roman" panose="02020603050405020304" pitchFamily="18" charset="0"/>
-                      </a:rPr>
-                      <a:t>Mosaic5G : FlexRIC</a:t>
-                    </a:r>
-                  </a:p>
-                </p:txBody>
-              </p:sp>
-            </p:grpSp>
-            <p:sp>
-              <p:nvSpPr>
-                <p:cNvPr id="33" name="TextBox 32">
-                  <a:extLst>
-                    <a:ext uri="{FF2B5EF4-FFF2-40B4-BE49-F238E27FC236}">
-                      <a16:creationId xmlns:a16="http://schemas.microsoft.com/office/drawing/2014/main" id="{26B54E29-6558-EF44-CA43-59C6ECE36CDF}"/>
-                    </a:ext>
-                  </a:extLst>
-                </p:cNvPr>
-                <p:cNvSpPr txBox="1"/>
-                <p:nvPr/>
-              </p:nvSpPr>
-              <p:spPr>
-                <a:xfrm>
-                  <a:off x="6696060" y="5769045"/>
-                  <a:ext cx="2239249" cy="307777"/>
-                </a:xfrm>
-                <a:prstGeom prst="rect">
-                  <a:avLst/>
-                </a:prstGeom>
-                <a:noFill/>
-              </p:spPr>
-              <p:txBody>
-                <a:bodyPr wrap="square">
-                  <a:spAutoFit/>
-                </a:bodyPr>
-                <a:lstStyle/>
-                <a:p>
-                  <a:pPr algn="ctr"/>
-                  <a:r>
-                    <a:rPr lang="en-US" sz="1400" b="1" dirty="0">
-                      <a:solidFill>
-                        <a:schemeClr val="bg1"/>
-                      </a:solidFill>
-                      <a:latin typeface="Times New Roman" panose="02020603050405020304" pitchFamily="18" charset="0"/>
-                      <a:cs typeface="Times New Roman" panose="02020603050405020304" pitchFamily="18" charset="0"/>
-                    </a:rPr>
-                    <a:t>Near-RT RIC</a:t>
-                  </a:r>
-                </a:p>
-              </p:txBody>
-            </p:sp>
-          </p:grpSp>
-          <p:grpSp>
-            <p:nvGrpSpPr>
-              <p:cNvPr id="28" name="Group 27">
-                <a:extLst>
-                  <a:ext uri="{FF2B5EF4-FFF2-40B4-BE49-F238E27FC236}">
-                    <a16:creationId xmlns:a16="http://schemas.microsoft.com/office/drawing/2014/main" id="{760B8761-A333-E78A-907F-AD48533196CD}"/>
-                  </a:ext>
-                </a:extLst>
-              </p:cNvPr>
-              <p:cNvGrpSpPr/>
-              <p:nvPr/>
-            </p:nvGrpSpPr>
-            <p:grpSpPr>
-              <a:xfrm>
-                <a:off x="9465142" y="5430796"/>
-                <a:ext cx="2302213" cy="647296"/>
-                <a:chOff x="9110915" y="4521647"/>
-                <a:chExt cx="2302213" cy="647296"/>
-              </a:xfrm>
-            </p:grpSpPr>
-            <p:sp>
-              <p:nvSpPr>
-                <p:cNvPr id="29" name="Rectangle: Rounded Corners 28">
-                  <a:extLst>
-                    <a:ext uri="{FF2B5EF4-FFF2-40B4-BE49-F238E27FC236}">
-                      <a16:creationId xmlns:a16="http://schemas.microsoft.com/office/drawing/2014/main" id="{022DC171-A3EC-050F-5AC8-CA1EDEC48D5E}"/>
-                    </a:ext>
-                  </a:extLst>
-                </p:cNvPr>
-                <p:cNvSpPr/>
-                <p:nvPr/>
-              </p:nvSpPr>
-              <p:spPr>
-                <a:xfrm>
-                  <a:off x="9110917" y="4521647"/>
-                  <a:ext cx="2239249" cy="333931"/>
+                  <a:off x="7168596" y="4200673"/>
+                  <a:ext cx="2239249" cy="299842"/>
                 </a:xfrm>
                 <a:prstGeom prst="roundRect">
                   <a:avLst>
@@ -17792,10 +15220,10 @@
             </p:sp>
             <p:sp>
               <p:nvSpPr>
-                <p:cNvPr id="30" name="TextBox 29">
+                <p:cNvPr id="70" name="TextBox 69">
                   <a:extLst>
                     <a:ext uri="{FF2B5EF4-FFF2-40B4-BE49-F238E27FC236}">
-                      <a16:creationId xmlns:a16="http://schemas.microsoft.com/office/drawing/2014/main" id="{78F29ACD-A658-CB33-2DDC-6428BDD4405E}"/>
+                      <a16:creationId xmlns:a16="http://schemas.microsoft.com/office/drawing/2014/main" id="{A6BD8DC3-F519-6540-99EC-9071E4B84D62}"/>
                     </a:ext>
                   </a:extLst>
                 </p:cNvPr>
@@ -17804,8 +15232,2396 @@
               </p:nvSpPr>
               <p:spPr>
                 <a:xfrm>
-                  <a:off x="9110915" y="4522182"/>
-                  <a:ext cx="2238468" cy="307777"/>
+                  <a:off x="7168594" y="4201157"/>
+                  <a:ext cx="2238468" cy="276358"/>
+                </a:xfrm>
+                <a:prstGeom prst="rect">
+                  <a:avLst/>
+                </a:prstGeom>
+                <a:noFill/>
+                <a:ln w="12700">
+                  <a:noFill/>
+                </a:ln>
+              </p:spPr>
+              <p:txBody>
+                <a:bodyPr wrap="square">
+                  <a:spAutoFit/>
+                </a:bodyPr>
+                <a:lstStyle/>
+                <a:p>
+                  <a:pPr algn="ctr"/>
+                  <a:r>
+                    <a:rPr lang="en-US" sz="1400" dirty="0">
+                      <a:solidFill>
+                        <a:schemeClr val="bg1"/>
+                      </a:solidFill>
+                      <a:latin typeface="Times New Roman" panose="02020603050405020304" pitchFamily="18" charset="0"/>
+                      <a:cs typeface="Times New Roman" panose="02020603050405020304" pitchFamily="18" charset="0"/>
+                    </a:rPr>
+                    <a:t>Open5GS</a:t>
+                  </a:r>
+                </a:p>
+              </p:txBody>
+            </p:sp>
+          </p:grpSp>
+          <p:sp>
+            <p:nvSpPr>
+              <p:cNvPr id="68" name="TextBox 67">
+                <a:extLst>
+                  <a:ext uri="{FF2B5EF4-FFF2-40B4-BE49-F238E27FC236}">
+                    <a16:creationId xmlns:a16="http://schemas.microsoft.com/office/drawing/2014/main" id="{94615E0D-4553-284E-CE2D-CF14F759AE84}"/>
+                  </a:ext>
+                </a:extLst>
+              </p:cNvPr>
+              <p:cNvSpPr txBox="1"/>
+              <p:nvPr/>
+            </p:nvSpPr>
+            <p:spPr>
+              <a:xfrm>
+                <a:off x="7126641" y="5291068"/>
+                <a:ext cx="2239249" cy="307777"/>
+              </a:xfrm>
+              <a:prstGeom prst="rect">
+                <a:avLst/>
+              </a:prstGeom>
+              <a:noFill/>
+            </p:spPr>
+            <p:txBody>
+              <a:bodyPr wrap="square">
+                <a:spAutoFit/>
+              </a:bodyPr>
+              <a:lstStyle/>
+              <a:p>
+                <a:pPr algn="ctr"/>
+                <a:r>
+                  <a:rPr lang="en-US" sz="1400" b="1" dirty="0">
+                    <a:solidFill>
+                      <a:schemeClr val="bg1"/>
+                    </a:solidFill>
+                    <a:latin typeface="Times New Roman" panose="02020603050405020304" pitchFamily="18" charset="0"/>
+                    <a:cs typeface="Times New Roman" panose="02020603050405020304" pitchFamily="18" charset="0"/>
+                  </a:rPr>
+                  <a:t>5G Core Network</a:t>
+                </a:r>
+              </a:p>
+            </p:txBody>
+          </p:sp>
+        </p:grpSp>
+        <p:cxnSp>
+          <p:nvCxnSpPr>
+            <p:cNvPr id="10" name="Straight Connector 9">
+              <a:extLst>
+                <a:ext uri="{FF2B5EF4-FFF2-40B4-BE49-F238E27FC236}">
+                  <a16:creationId xmlns:a16="http://schemas.microsoft.com/office/drawing/2014/main" id="{32A79DEC-8744-1300-577F-E137537AD2F9}"/>
+                </a:ext>
+              </a:extLst>
+            </p:cNvPr>
+            <p:cNvCxnSpPr>
+              <a:cxnSpLocks/>
+              <a:stCxn id="45" idx="3"/>
+              <a:endCxn id="56" idx="1"/>
+            </p:cNvCxnSpPr>
+            <p:nvPr/>
+          </p:nvCxnSpPr>
+          <p:spPr>
+            <a:xfrm>
+              <a:off x="2929887" y="2336371"/>
+              <a:ext cx="676819" cy="0"/>
+            </a:xfrm>
+            <a:prstGeom prst="line">
+              <a:avLst/>
+            </a:prstGeom>
+            <a:ln w="12700">
+              <a:solidFill>
+                <a:schemeClr val="bg1"/>
+              </a:solidFill>
+              <a:prstDash val="sysDot"/>
+            </a:ln>
+          </p:spPr>
+          <p:style>
+            <a:lnRef idx="2">
+              <a:schemeClr val="accent1"/>
+            </a:lnRef>
+            <a:fillRef idx="0">
+              <a:schemeClr val="accent1"/>
+            </a:fillRef>
+            <a:effectRef idx="1">
+              <a:schemeClr val="accent1"/>
+            </a:effectRef>
+            <a:fontRef idx="minor">
+              <a:schemeClr val="tx1"/>
+            </a:fontRef>
+          </p:style>
+        </p:cxnSp>
+        <p:cxnSp>
+          <p:nvCxnSpPr>
+            <p:cNvPr id="11" name="Straight Connector 10">
+              <a:extLst>
+                <a:ext uri="{FF2B5EF4-FFF2-40B4-BE49-F238E27FC236}">
+                  <a16:creationId xmlns:a16="http://schemas.microsoft.com/office/drawing/2014/main" id="{34C38DF5-DD28-45E9-2507-546631986FEC}"/>
+                </a:ext>
+              </a:extLst>
+            </p:cNvPr>
+            <p:cNvCxnSpPr>
+              <a:cxnSpLocks/>
+              <a:stCxn id="44" idx="3"/>
+              <a:endCxn id="55" idx="1"/>
+            </p:cNvCxnSpPr>
+            <p:nvPr/>
+          </p:nvCxnSpPr>
+          <p:spPr>
+            <a:xfrm>
+              <a:off x="2931791" y="2642033"/>
+              <a:ext cx="678726" cy="0"/>
+            </a:xfrm>
+            <a:prstGeom prst="line">
+              <a:avLst/>
+            </a:prstGeom>
+            <a:ln w="12700">
+              <a:solidFill>
+                <a:schemeClr val="bg1"/>
+              </a:solidFill>
+            </a:ln>
+          </p:spPr>
+          <p:style>
+            <a:lnRef idx="2">
+              <a:schemeClr val="accent1"/>
+            </a:lnRef>
+            <a:fillRef idx="0">
+              <a:schemeClr val="accent1"/>
+            </a:fillRef>
+            <a:effectRef idx="1">
+              <a:schemeClr val="accent1"/>
+            </a:effectRef>
+            <a:fontRef idx="minor">
+              <a:schemeClr val="tx1"/>
+            </a:fontRef>
+          </p:style>
+        </p:cxnSp>
+        <p:cxnSp>
+          <p:nvCxnSpPr>
+            <p:cNvPr id="12" name="Straight Connector 11">
+              <a:extLst>
+                <a:ext uri="{FF2B5EF4-FFF2-40B4-BE49-F238E27FC236}">
+                  <a16:creationId xmlns:a16="http://schemas.microsoft.com/office/drawing/2014/main" id="{5ECED138-8687-8AC9-B515-1F21C20F5556}"/>
+                </a:ext>
+              </a:extLst>
+            </p:cNvPr>
+            <p:cNvCxnSpPr>
+              <a:cxnSpLocks/>
+              <a:stCxn id="46" idx="3"/>
+              <a:endCxn id="56" idx="1"/>
+            </p:cNvCxnSpPr>
+            <p:nvPr/>
+          </p:nvCxnSpPr>
+          <p:spPr>
+            <a:xfrm flipV="1">
+              <a:off x="2929886" y="2336371"/>
+              <a:ext cx="676820" cy="1222648"/>
+            </a:xfrm>
+            <a:prstGeom prst="line">
+              <a:avLst/>
+            </a:prstGeom>
+            <a:ln w="12700">
+              <a:solidFill>
+                <a:schemeClr val="bg1"/>
+              </a:solidFill>
+              <a:prstDash val="sysDot"/>
+            </a:ln>
+          </p:spPr>
+          <p:style>
+            <a:lnRef idx="2">
+              <a:schemeClr val="accent1"/>
+            </a:lnRef>
+            <a:fillRef idx="0">
+              <a:schemeClr val="accent1"/>
+            </a:fillRef>
+            <a:effectRef idx="1">
+              <a:schemeClr val="accent1"/>
+            </a:effectRef>
+            <a:fontRef idx="minor">
+              <a:schemeClr val="tx1"/>
+            </a:fontRef>
+          </p:style>
+        </p:cxnSp>
+        <p:cxnSp>
+          <p:nvCxnSpPr>
+            <p:cNvPr id="13" name="Straight Connector 12">
+              <a:extLst>
+                <a:ext uri="{FF2B5EF4-FFF2-40B4-BE49-F238E27FC236}">
+                  <a16:creationId xmlns:a16="http://schemas.microsoft.com/office/drawing/2014/main" id="{1515E354-6DA8-293E-5366-4FCC379F89CE}"/>
+                </a:ext>
+              </a:extLst>
+            </p:cNvPr>
+            <p:cNvCxnSpPr>
+              <a:cxnSpLocks/>
+              <a:stCxn id="49" idx="3"/>
+              <a:endCxn id="60" idx="1"/>
+            </p:cNvCxnSpPr>
+            <p:nvPr/>
+          </p:nvCxnSpPr>
+          <p:spPr>
+            <a:xfrm>
+              <a:off x="2929886" y="3253357"/>
+              <a:ext cx="680631" cy="0"/>
+            </a:xfrm>
+            <a:prstGeom prst="line">
+              <a:avLst/>
+            </a:prstGeom>
+            <a:ln w="12700">
+              <a:solidFill>
+                <a:schemeClr val="bg1"/>
+              </a:solidFill>
+            </a:ln>
+          </p:spPr>
+          <p:style>
+            <a:lnRef idx="2">
+              <a:schemeClr val="accent1"/>
+            </a:lnRef>
+            <a:fillRef idx="0">
+              <a:schemeClr val="accent1"/>
+            </a:fillRef>
+            <a:effectRef idx="1">
+              <a:schemeClr val="accent1"/>
+            </a:effectRef>
+            <a:fontRef idx="minor">
+              <a:schemeClr val="tx1"/>
+            </a:fontRef>
+          </p:style>
+        </p:cxnSp>
+        <p:cxnSp>
+          <p:nvCxnSpPr>
+            <p:cNvPr id="14" name="Straight Connector 13">
+              <a:extLst>
+                <a:ext uri="{FF2B5EF4-FFF2-40B4-BE49-F238E27FC236}">
+                  <a16:creationId xmlns:a16="http://schemas.microsoft.com/office/drawing/2014/main" id="{FB2657DE-F9D4-6A96-5B71-8BE2C8C90454}"/>
+                </a:ext>
+              </a:extLst>
+            </p:cNvPr>
+            <p:cNvCxnSpPr>
+              <a:cxnSpLocks/>
+              <a:stCxn id="43" idx="3"/>
+              <a:endCxn id="54" idx="1"/>
+            </p:cNvCxnSpPr>
+            <p:nvPr/>
+          </p:nvCxnSpPr>
+          <p:spPr>
+            <a:xfrm>
+              <a:off x="2929886" y="2947695"/>
+              <a:ext cx="665196" cy="0"/>
+            </a:xfrm>
+            <a:prstGeom prst="line">
+              <a:avLst/>
+            </a:prstGeom>
+            <a:ln w="12700">
+              <a:solidFill>
+                <a:schemeClr val="bg1"/>
+              </a:solidFill>
+              <a:prstDash val="sysDot"/>
+            </a:ln>
+          </p:spPr>
+          <p:style>
+            <a:lnRef idx="2">
+              <a:schemeClr val="accent1"/>
+            </a:lnRef>
+            <a:fillRef idx="0">
+              <a:schemeClr val="accent1"/>
+            </a:fillRef>
+            <a:effectRef idx="1">
+              <a:schemeClr val="accent1"/>
+            </a:effectRef>
+            <a:fontRef idx="minor">
+              <a:schemeClr val="tx1"/>
+            </a:fontRef>
+          </p:style>
+        </p:cxnSp>
+        <p:cxnSp>
+          <p:nvCxnSpPr>
+            <p:cNvPr id="15" name="Straight Connector 14">
+              <a:extLst>
+                <a:ext uri="{FF2B5EF4-FFF2-40B4-BE49-F238E27FC236}">
+                  <a16:creationId xmlns:a16="http://schemas.microsoft.com/office/drawing/2014/main" id="{7B8C0992-8C5B-0CFA-F351-BDE45110AE40}"/>
+                </a:ext>
+              </a:extLst>
+            </p:cNvPr>
+            <p:cNvCxnSpPr>
+              <a:cxnSpLocks/>
+              <a:stCxn id="35" idx="3"/>
+              <a:endCxn id="30" idx="1"/>
+            </p:cNvCxnSpPr>
+            <p:nvPr/>
+          </p:nvCxnSpPr>
+          <p:spPr>
+            <a:xfrm>
+              <a:off x="8737209" y="3256258"/>
+              <a:ext cx="639701" cy="267551"/>
+            </a:xfrm>
+            <a:prstGeom prst="line">
+              <a:avLst/>
+            </a:prstGeom>
+            <a:ln w="12700">
+              <a:solidFill>
+                <a:schemeClr val="bg1"/>
+              </a:solidFill>
+            </a:ln>
+          </p:spPr>
+          <p:style>
+            <a:lnRef idx="2">
+              <a:schemeClr val="accent1"/>
+            </a:lnRef>
+            <a:fillRef idx="0">
+              <a:schemeClr val="accent1"/>
+            </a:fillRef>
+            <a:effectRef idx="1">
+              <a:schemeClr val="accent1"/>
+            </a:effectRef>
+            <a:fontRef idx="minor">
+              <a:schemeClr val="tx1"/>
+            </a:fontRef>
+          </p:style>
+        </p:cxnSp>
+        <p:cxnSp>
+          <p:nvCxnSpPr>
+            <p:cNvPr id="16" name="Straight Connector 15">
+              <a:extLst>
+                <a:ext uri="{FF2B5EF4-FFF2-40B4-BE49-F238E27FC236}">
+                  <a16:creationId xmlns:a16="http://schemas.microsoft.com/office/drawing/2014/main" id="{A0F3449C-2283-DACE-FB13-38396C4B7FB9}"/>
+                </a:ext>
+              </a:extLst>
+            </p:cNvPr>
+            <p:cNvCxnSpPr>
+              <a:cxnSpLocks/>
+              <a:stCxn id="23" idx="1"/>
+              <a:endCxn id="70" idx="1"/>
+            </p:cNvCxnSpPr>
+            <p:nvPr/>
+          </p:nvCxnSpPr>
+          <p:spPr>
+            <a:xfrm flipV="1">
+              <a:off x="5943801" y="2326685"/>
+              <a:ext cx="554923" cy="166966"/>
+            </a:xfrm>
+            <a:prstGeom prst="line">
+              <a:avLst/>
+            </a:prstGeom>
+            <a:ln w="12700">
+              <a:solidFill>
+                <a:schemeClr val="bg1"/>
+              </a:solidFill>
+            </a:ln>
+          </p:spPr>
+          <p:style>
+            <a:lnRef idx="2">
+              <a:schemeClr val="accent1"/>
+            </a:lnRef>
+            <a:fillRef idx="0">
+              <a:schemeClr val="accent1"/>
+            </a:fillRef>
+            <a:effectRef idx="1">
+              <a:schemeClr val="accent1"/>
+            </a:effectRef>
+            <a:fontRef idx="minor">
+              <a:schemeClr val="tx1"/>
+            </a:fontRef>
+          </p:style>
+        </p:cxnSp>
+        <p:cxnSp>
+          <p:nvCxnSpPr>
+            <p:cNvPr id="17" name="Straight Connector 16">
+              <a:extLst>
+                <a:ext uri="{FF2B5EF4-FFF2-40B4-BE49-F238E27FC236}">
+                  <a16:creationId xmlns:a16="http://schemas.microsoft.com/office/drawing/2014/main" id="{A0F3409B-9BA3-B0DD-2840-A8BFD7EB2EFD}"/>
+                </a:ext>
+              </a:extLst>
+            </p:cNvPr>
+            <p:cNvCxnSpPr>
+              <a:cxnSpLocks/>
+              <a:stCxn id="24" idx="1"/>
+              <a:endCxn id="70" idx="1"/>
+            </p:cNvCxnSpPr>
+            <p:nvPr/>
+          </p:nvCxnSpPr>
+          <p:spPr>
+            <a:xfrm flipV="1">
+              <a:off x="5943801" y="2326685"/>
+              <a:ext cx="554923" cy="780316"/>
+            </a:xfrm>
+            <a:prstGeom prst="line">
+              <a:avLst/>
+            </a:prstGeom>
+            <a:ln w="12700">
+              <a:solidFill>
+                <a:schemeClr val="bg1"/>
+              </a:solidFill>
+            </a:ln>
+          </p:spPr>
+          <p:style>
+            <a:lnRef idx="2">
+              <a:schemeClr val="accent1"/>
+            </a:lnRef>
+            <a:fillRef idx="0">
+              <a:schemeClr val="accent1"/>
+            </a:fillRef>
+            <a:effectRef idx="1">
+              <a:schemeClr val="accent1"/>
+            </a:effectRef>
+            <a:fontRef idx="minor">
+              <a:schemeClr val="tx1"/>
+            </a:fontRef>
+          </p:style>
+        </p:cxnSp>
+        <p:cxnSp>
+          <p:nvCxnSpPr>
+            <p:cNvPr id="18" name="Straight Connector 17">
+              <a:extLst>
+                <a:ext uri="{FF2B5EF4-FFF2-40B4-BE49-F238E27FC236}">
+                  <a16:creationId xmlns:a16="http://schemas.microsoft.com/office/drawing/2014/main" id="{3936E016-28E0-8BF0-9431-64131BB8293D}"/>
+                </a:ext>
+              </a:extLst>
+            </p:cNvPr>
+            <p:cNvCxnSpPr>
+              <a:cxnSpLocks/>
+              <a:endCxn id="35" idx="1"/>
+            </p:cNvCxnSpPr>
+            <p:nvPr/>
+          </p:nvCxnSpPr>
+          <p:spPr>
+            <a:xfrm>
+              <a:off x="5943801" y="2503176"/>
+              <a:ext cx="554158" cy="753082"/>
+            </a:xfrm>
+            <a:prstGeom prst="line">
+              <a:avLst/>
+            </a:prstGeom>
+            <a:ln w="12700">
+              <a:solidFill>
+                <a:schemeClr val="bg1"/>
+              </a:solidFill>
+            </a:ln>
+          </p:spPr>
+          <p:style>
+            <a:lnRef idx="2">
+              <a:schemeClr val="accent1"/>
+            </a:lnRef>
+            <a:fillRef idx="0">
+              <a:schemeClr val="accent1"/>
+            </a:fillRef>
+            <a:effectRef idx="1">
+              <a:schemeClr val="accent1"/>
+            </a:effectRef>
+            <a:fontRef idx="minor">
+              <a:schemeClr val="tx1"/>
+            </a:fontRef>
+          </p:style>
+        </p:cxnSp>
+        <p:cxnSp>
+          <p:nvCxnSpPr>
+            <p:cNvPr id="19" name="Straight Connector 18">
+              <a:extLst>
+                <a:ext uri="{FF2B5EF4-FFF2-40B4-BE49-F238E27FC236}">
+                  <a16:creationId xmlns:a16="http://schemas.microsoft.com/office/drawing/2014/main" id="{E085886D-3B15-DB08-3633-1E75D9D54A31}"/>
+                </a:ext>
+              </a:extLst>
+            </p:cNvPr>
+            <p:cNvCxnSpPr>
+              <a:cxnSpLocks/>
+              <a:endCxn id="36" idx="1"/>
+            </p:cNvCxnSpPr>
+            <p:nvPr/>
+          </p:nvCxnSpPr>
+          <p:spPr>
+            <a:xfrm>
+              <a:off x="5943801" y="3107001"/>
+              <a:ext cx="554158" cy="442679"/>
+            </a:xfrm>
+            <a:prstGeom prst="line">
+              <a:avLst/>
+            </a:prstGeom>
+            <a:ln w="12700">
+              <a:solidFill>
+                <a:schemeClr val="bg1"/>
+              </a:solidFill>
+            </a:ln>
+          </p:spPr>
+          <p:style>
+            <a:lnRef idx="2">
+              <a:schemeClr val="accent1"/>
+            </a:lnRef>
+            <a:fillRef idx="0">
+              <a:schemeClr val="accent1"/>
+            </a:fillRef>
+            <a:effectRef idx="1">
+              <a:schemeClr val="accent1"/>
+            </a:effectRef>
+            <a:fontRef idx="minor">
+              <a:schemeClr val="tx1"/>
+            </a:fontRef>
+          </p:style>
+        </p:cxnSp>
+        <p:cxnSp>
+          <p:nvCxnSpPr>
+            <p:cNvPr id="20" name="Straight Connector 19">
+              <a:extLst>
+                <a:ext uri="{FF2B5EF4-FFF2-40B4-BE49-F238E27FC236}">
+                  <a16:creationId xmlns:a16="http://schemas.microsoft.com/office/drawing/2014/main" id="{464B0A35-8F04-98CF-A4D8-50AD8B8C9AA5}"/>
+                </a:ext>
+              </a:extLst>
+            </p:cNvPr>
+            <p:cNvCxnSpPr>
+              <a:cxnSpLocks/>
+              <a:stCxn id="57" idx="3"/>
+              <a:endCxn id="35" idx="1"/>
+            </p:cNvCxnSpPr>
+            <p:nvPr/>
+          </p:nvCxnSpPr>
+          <p:spPr>
+            <a:xfrm flipV="1">
+              <a:off x="5817331" y="3256258"/>
+              <a:ext cx="680628" cy="302761"/>
+            </a:xfrm>
+            <a:prstGeom prst="line">
+              <a:avLst/>
+            </a:prstGeom>
+            <a:ln w="12700">
+              <a:solidFill>
+                <a:schemeClr val="bg1"/>
+              </a:solidFill>
+            </a:ln>
+          </p:spPr>
+          <p:style>
+            <a:lnRef idx="2">
+              <a:schemeClr val="accent1"/>
+            </a:lnRef>
+            <a:fillRef idx="0">
+              <a:schemeClr val="accent1"/>
+            </a:fillRef>
+            <a:effectRef idx="1">
+              <a:schemeClr val="accent1"/>
+            </a:effectRef>
+            <a:fontRef idx="minor">
+              <a:schemeClr val="tx1"/>
+            </a:fontRef>
+          </p:style>
+        </p:cxnSp>
+        <p:cxnSp>
+          <p:nvCxnSpPr>
+            <p:cNvPr id="21" name="Straight Connector 20">
+              <a:extLst>
+                <a:ext uri="{FF2B5EF4-FFF2-40B4-BE49-F238E27FC236}">
+                  <a16:creationId xmlns:a16="http://schemas.microsoft.com/office/drawing/2014/main" id="{3820C6D9-0E3D-0876-944B-2DAB23175A99}"/>
+                </a:ext>
+              </a:extLst>
+            </p:cNvPr>
+            <p:cNvCxnSpPr>
+              <a:cxnSpLocks/>
+              <a:endCxn id="36" idx="1"/>
+            </p:cNvCxnSpPr>
+            <p:nvPr/>
+          </p:nvCxnSpPr>
+          <p:spPr>
+            <a:xfrm>
+              <a:off x="5943801" y="2493651"/>
+              <a:ext cx="554158" cy="1056029"/>
+            </a:xfrm>
+            <a:prstGeom prst="line">
+              <a:avLst/>
+            </a:prstGeom>
+            <a:ln w="12700">
+              <a:solidFill>
+                <a:schemeClr val="bg1"/>
+              </a:solidFill>
+              <a:prstDash val="sysDot"/>
+            </a:ln>
+          </p:spPr>
+          <p:style>
+            <a:lnRef idx="2">
+              <a:schemeClr val="accent1"/>
+            </a:lnRef>
+            <a:fillRef idx="0">
+              <a:schemeClr val="accent1"/>
+            </a:fillRef>
+            <a:effectRef idx="1">
+              <a:schemeClr val="accent1"/>
+            </a:effectRef>
+            <a:fontRef idx="minor">
+              <a:schemeClr val="tx1"/>
+            </a:fontRef>
+          </p:style>
+        </p:cxnSp>
+        <p:grpSp>
+          <p:nvGrpSpPr>
+            <p:cNvPr id="22" name="Group 21">
+              <a:extLst>
+                <a:ext uri="{FF2B5EF4-FFF2-40B4-BE49-F238E27FC236}">
+                  <a16:creationId xmlns:a16="http://schemas.microsoft.com/office/drawing/2014/main" id="{AA953FD7-0D5A-D260-FEA5-A750D4B0B26B}"/>
+                </a:ext>
+              </a:extLst>
+            </p:cNvPr>
+            <p:cNvGrpSpPr/>
+            <p:nvPr/>
+          </p:nvGrpSpPr>
+          <p:grpSpPr>
+            <a:xfrm>
+              <a:off x="8873989" y="2167447"/>
+              <a:ext cx="2860204" cy="738664"/>
+              <a:chOff x="8962221" y="4222565"/>
+              <a:chExt cx="2860204" cy="738664"/>
+            </a:xfrm>
+          </p:grpSpPr>
+          <p:sp>
+            <p:nvSpPr>
+              <p:cNvPr id="62" name="Rectangle 61">
+                <a:extLst>
+                  <a:ext uri="{FF2B5EF4-FFF2-40B4-BE49-F238E27FC236}">
+                    <a16:creationId xmlns:a16="http://schemas.microsoft.com/office/drawing/2014/main" id="{A59D6F40-6E6F-232E-ECC9-A4EB8C8693B0}"/>
+                  </a:ext>
+                </a:extLst>
+              </p:cNvPr>
+              <p:cNvSpPr/>
+              <p:nvPr/>
+            </p:nvSpPr>
+            <p:spPr>
+              <a:xfrm>
+                <a:off x="8962221" y="4243038"/>
+                <a:ext cx="2787151" cy="705139"/>
+              </a:xfrm>
+              <a:prstGeom prst="rect">
+                <a:avLst/>
+              </a:prstGeom>
+              <a:solidFill>
+                <a:srgbClr val="0D1117"/>
+              </a:solidFill>
+              <a:ln w="12700">
+                <a:solidFill>
+                  <a:schemeClr val="bg1"/>
+                </a:solidFill>
+              </a:ln>
+            </p:spPr>
+            <p:style>
+              <a:lnRef idx="2">
+                <a:schemeClr val="accent1">
+                  <a:shade val="15000"/>
+                </a:schemeClr>
+              </a:lnRef>
+              <a:fillRef idx="1">
+                <a:schemeClr val="accent1"/>
+              </a:fillRef>
+              <a:effectRef idx="0">
+                <a:schemeClr val="accent1"/>
+              </a:effectRef>
+              <a:fontRef idx="minor">
+                <a:schemeClr val="lt1"/>
+              </a:fontRef>
+            </p:style>
+            <p:txBody>
+              <a:bodyPr rtlCol="0" anchor="ctr"/>
+              <a:lstStyle/>
+              <a:p>
+                <a:pPr algn="ctr"/>
+                <a:endParaRPr lang="en-US"/>
+              </a:p>
+            </p:txBody>
+          </p:sp>
+          <p:cxnSp>
+            <p:nvCxnSpPr>
+              <p:cNvPr id="63" name="Straight Connector 62">
+                <a:extLst>
+                  <a:ext uri="{FF2B5EF4-FFF2-40B4-BE49-F238E27FC236}">
+                    <a16:creationId xmlns:a16="http://schemas.microsoft.com/office/drawing/2014/main" id="{D14BEA91-F3A3-C660-8A23-F11C29E56CD0}"/>
+                  </a:ext>
+                </a:extLst>
+              </p:cNvPr>
+              <p:cNvCxnSpPr>
+                <a:cxnSpLocks/>
+              </p:cNvCxnSpPr>
+              <p:nvPr/>
+            </p:nvCxnSpPr>
+            <p:spPr>
+              <a:xfrm>
+                <a:off x="9055446" y="4378844"/>
+                <a:ext cx="210474" cy="0"/>
+              </a:xfrm>
+              <a:prstGeom prst="line">
+                <a:avLst/>
+              </a:prstGeom>
+              <a:ln w="12700">
+                <a:solidFill>
+                  <a:schemeClr val="bg1"/>
+                </a:solidFill>
+              </a:ln>
+            </p:spPr>
+            <p:style>
+              <a:lnRef idx="2">
+                <a:schemeClr val="dk1"/>
+              </a:lnRef>
+              <a:fillRef idx="0">
+                <a:schemeClr val="dk1"/>
+              </a:fillRef>
+              <a:effectRef idx="1">
+                <a:schemeClr val="dk1"/>
+              </a:effectRef>
+              <a:fontRef idx="minor">
+                <a:schemeClr val="tx1"/>
+              </a:fontRef>
+            </p:style>
+          </p:cxnSp>
+          <p:sp>
+            <p:nvSpPr>
+              <p:cNvPr id="64" name="TextBox 63">
+                <a:extLst>
+                  <a:ext uri="{FF2B5EF4-FFF2-40B4-BE49-F238E27FC236}">
+                    <a16:creationId xmlns:a16="http://schemas.microsoft.com/office/drawing/2014/main" id="{87248227-D8ED-62C9-8498-3B65A1AFBC5C}"/>
+                  </a:ext>
+                </a:extLst>
+              </p:cNvPr>
+              <p:cNvSpPr txBox="1"/>
+              <p:nvPr/>
+            </p:nvSpPr>
+            <p:spPr>
+              <a:xfrm>
+                <a:off x="9235317" y="4222565"/>
+                <a:ext cx="2587108" cy="738664"/>
+              </a:xfrm>
+              <a:prstGeom prst="rect">
+                <a:avLst/>
+              </a:prstGeom>
+              <a:noFill/>
+            </p:spPr>
+            <p:txBody>
+              <a:bodyPr wrap="square">
+                <a:spAutoFit/>
+              </a:bodyPr>
+              <a:lstStyle/>
+              <a:p>
+                <a:r>
+                  <a:rPr lang="en-US" sz="1400" dirty="0">
+                    <a:solidFill>
+                      <a:schemeClr val="bg1"/>
+                    </a:solidFill>
+                    <a:latin typeface="Times New Roman" panose="02020603050405020304" pitchFamily="18" charset="0"/>
+                    <a:cs typeface="Times New Roman" panose="02020603050405020304" pitchFamily="18" charset="0"/>
+                  </a:rPr>
+                  <a:t>Supported by default installation</a:t>
+                </a:r>
+                <a:br>
+                  <a:rPr lang="en-US" sz="1400" dirty="0">
+                    <a:solidFill>
+                      <a:schemeClr val="bg1"/>
+                    </a:solidFill>
+                    <a:latin typeface="Times New Roman" panose="02020603050405020304" pitchFamily="18" charset="0"/>
+                    <a:cs typeface="Times New Roman" panose="02020603050405020304" pitchFamily="18" charset="0"/>
+                  </a:rPr>
+                </a:br>
+                <a:r>
+                  <a:rPr lang="en-US" sz="1400" dirty="0">
+                    <a:solidFill>
+                      <a:schemeClr val="bg1"/>
+                    </a:solidFill>
+                    <a:latin typeface="Times New Roman" panose="02020603050405020304" pitchFamily="18" charset="0"/>
+                    <a:cs typeface="Times New Roman" panose="02020603050405020304" pitchFamily="18" charset="0"/>
+                  </a:rPr>
+                  <a:t>Supported after adjusting configs</a:t>
+                </a:r>
+              </a:p>
+              <a:p>
+                <a:r>
+                  <a:rPr lang="en-US" sz="1400" dirty="0">
+                    <a:solidFill>
+                      <a:schemeClr val="bg1"/>
+                    </a:solidFill>
+                    <a:latin typeface="Times New Roman" panose="02020603050405020304" pitchFamily="18" charset="0"/>
+                    <a:cs typeface="Times New Roman" panose="02020603050405020304" pitchFamily="18" charset="0"/>
+                  </a:rPr>
+                  <a:t>Presumably not supported</a:t>
+                </a:r>
+              </a:p>
+            </p:txBody>
+          </p:sp>
+          <p:cxnSp>
+            <p:nvCxnSpPr>
+              <p:cNvPr id="65" name="Straight Connector 64">
+                <a:extLst>
+                  <a:ext uri="{FF2B5EF4-FFF2-40B4-BE49-F238E27FC236}">
+                    <a16:creationId xmlns:a16="http://schemas.microsoft.com/office/drawing/2014/main" id="{D72BCCD9-0ADB-0E7D-4D13-D2CC2EA67358}"/>
+                  </a:ext>
+                </a:extLst>
+              </p:cNvPr>
+              <p:cNvCxnSpPr>
+                <a:cxnSpLocks/>
+              </p:cNvCxnSpPr>
+              <p:nvPr/>
+            </p:nvCxnSpPr>
+            <p:spPr>
+              <a:xfrm>
+                <a:off x="9055446" y="4596433"/>
+                <a:ext cx="210474" cy="0"/>
+              </a:xfrm>
+              <a:prstGeom prst="line">
+                <a:avLst/>
+              </a:prstGeom>
+              <a:ln w="12700">
+                <a:solidFill>
+                  <a:schemeClr val="bg1"/>
+                </a:solidFill>
+                <a:prstDash val="sysDot"/>
+              </a:ln>
+            </p:spPr>
+            <p:style>
+              <a:lnRef idx="2">
+                <a:schemeClr val="dk1"/>
+              </a:lnRef>
+              <a:fillRef idx="0">
+                <a:schemeClr val="dk1"/>
+              </a:fillRef>
+              <a:effectRef idx="1">
+                <a:schemeClr val="dk1"/>
+              </a:effectRef>
+              <a:fontRef idx="minor">
+                <a:schemeClr val="tx1"/>
+              </a:fontRef>
+            </p:style>
+          </p:cxnSp>
+          <p:cxnSp>
+            <p:nvCxnSpPr>
+              <p:cNvPr id="66" name="Straight Connector 65">
+                <a:extLst>
+                  <a:ext uri="{FF2B5EF4-FFF2-40B4-BE49-F238E27FC236}">
+                    <a16:creationId xmlns:a16="http://schemas.microsoft.com/office/drawing/2014/main" id="{665363D5-40A1-F6AF-3318-E7F22DE66076}"/>
+                  </a:ext>
+                </a:extLst>
+              </p:cNvPr>
+              <p:cNvCxnSpPr>
+                <a:cxnSpLocks/>
+              </p:cNvCxnSpPr>
+              <p:nvPr/>
+            </p:nvCxnSpPr>
+            <p:spPr>
+              <a:xfrm>
+                <a:off x="9055446" y="4814021"/>
+                <a:ext cx="210474" cy="0"/>
+              </a:xfrm>
+              <a:prstGeom prst="line">
+                <a:avLst/>
+              </a:prstGeom>
+              <a:ln w="12700">
+                <a:solidFill>
+                  <a:srgbClr val="FF7B61"/>
+                </a:solidFill>
+                <a:prstDash val="sysDot"/>
+              </a:ln>
+            </p:spPr>
+            <p:style>
+              <a:lnRef idx="2">
+                <a:schemeClr val="dk1"/>
+              </a:lnRef>
+              <a:fillRef idx="0">
+                <a:schemeClr val="dk1"/>
+              </a:fillRef>
+              <a:effectRef idx="1">
+                <a:schemeClr val="dk1"/>
+              </a:effectRef>
+              <a:fontRef idx="minor">
+                <a:schemeClr val="tx1"/>
+              </a:fontRef>
+            </p:style>
+          </p:cxnSp>
+        </p:grpSp>
+        <p:sp>
+          <p:nvSpPr>
+            <p:cNvPr id="23" name="Right Brace 22">
+              <a:extLst>
+                <a:ext uri="{FF2B5EF4-FFF2-40B4-BE49-F238E27FC236}">
+                  <a16:creationId xmlns:a16="http://schemas.microsoft.com/office/drawing/2014/main" id="{A7991ECF-F9B7-7535-37FB-A57CED3BF203}"/>
+                </a:ext>
+              </a:extLst>
+            </p:cNvPr>
+            <p:cNvSpPr/>
+            <p:nvPr/>
+          </p:nvSpPr>
+          <p:spPr>
+            <a:xfrm>
+              <a:off x="5861045" y="2206203"/>
+              <a:ext cx="82756" cy="574896"/>
+            </a:xfrm>
+            <a:prstGeom prst="rightBrace">
+              <a:avLst>
+                <a:gd name="adj1" fmla="val 88901"/>
+                <a:gd name="adj2" fmla="val 50000"/>
+              </a:avLst>
+            </a:prstGeom>
+            <a:ln w="12700">
+              <a:solidFill>
+                <a:schemeClr val="bg1"/>
+              </a:solidFill>
+            </a:ln>
+          </p:spPr>
+          <p:style>
+            <a:lnRef idx="2">
+              <a:schemeClr val="accent1"/>
+            </a:lnRef>
+            <a:fillRef idx="0">
+              <a:schemeClr val="accent1"/>
+            </a:fillRef>
+            <a:effectRef idx="1">
+              <a:schemeClr val="accent1"/>
+            </a:effectRef>
+            <a:fontRef idx="minor">
+              <a:schemeClr val="tx1"/>
+            </a:fontRef>
+          </p:style>
+          <p:txBody>
+            <a:bodyPr rtlCol="0" anchor="ctr"/>
+            <a:lstStyle/>
+            <a:p>
+              <a:pPr algn="ctr"/>
+              <a:endParaRPr lang="en-US"/>
+            </a:p>
+          </p:txBody>
+        </p:sp>
+        <p:sp>
+          <p:nvSpPr>
+            <p:cNvPr id="24" name="Right Brace 23">
+              <a:extLst>
+                <a:ext uri="{FF2B5EF4-FFF2-40B4-BE49-F238E27FC236}">
+                  <a16:creationId xmlns:a16="http://schemas.microsoft.com/office/drawing/2014/main" id="{20C8E6D4-A40E-D435-BF8F-F8C003ACF650}"/>
+                </a:ext>
+              </a:extLst>
+            </p:cNvPr>
+            <p:cNvSpPr/>
+            <p:nvPr/>
+          </p:nvSpPr>
+          <p:spPr>
+            <a:xfrm>
+              <a:off x="5861045" y="2819553"/>
+              <a:ext cx="82756" cy="574896"/>
+            </a:xfrm>
+            <a:prstGeom prst="rightBrace">
+              <a:avLst>
+                <a:gd name="adj1" fmla="val 88901"/>
+                <a:gd name="adj2" fmla="val 50000"/>
+              </a:avLst>
+            </a:prstGeom>
+            <a:ln w="12700">
+              <a:solidFill>
+                <a:schemeClr val="bg1"/>
+              </a:solidFill>
+            </a:ln>
+          </p:spPr>
+          <p:style>
+            <a:lnRef idx="2">
+              <a:schemeClr val="accent1"/>
+            </a:lnRef>
+            <a:fillRef idx="0">
+              <a:schemeClr val="accent1"/>
+            </a:fillRef>
+            <a:effectRef idx="1">
+              <a:schemeClr val="accent1"/>
+            </a:effectRef>
+            <a:fontRef idx="minor">
+              <a:schemeClr val="tx1"/>
+            </a:fontRef>
+          </p:style>
+          <p:txBody>
+            <a:bodyPr rtlCol="0" anchor="ctr"/>
+            <a:lstStyle/>
+            <a:p>
+              <a:pPr algn="ctr"/>
+              <a:endParaRPr lang="en-US"/>
+            </a:p>
+          </p:txBody>
+        </p:sp>
+        <p:grpSp>
+          <p:nvGrpSpPr>
+            <p:cNvPr id="25" name="Group 24">
+              <a:extLst>
+                <a:ext uri="{FF2B5EF4-FFF2-40B4-BE49-F238E27FC236}">
+                  <a16:creationId xmlns:a16="http://schemas.microsoft.com/office/drawing/2014/main" id="{7A087A7C-EBC3-7D25-0193-6488C85E22BB}"/>
+                </a:ext>
+              </a:extLst>
+            </p:cNvPr>
+            <p:cNvGrpSpPr/>
+            <p:nvPr/>
+          </p:nvGrpSpPr>
+          <p:grpSpPr>
+            <a:xfrm>
+              <a:off x="3594298" y="2171378"/>
+              <a:ext cx="2263961" cy="1844033"/>
+              <a:chOff x="3916949" y="3691197"/>
+              <a:chExt cx="2263961" cy="1844033"/>
+            </a:xfrm>
+          </p:grpSpPr>
+          <p:sp>
+            <p:nvSpPr>
+              <p:cNvPr id="51" name="Rectangle: Rounded Corners 50">
+                <a:extLst>
+                  <a:ext uri="{FF2B5EF4-FFF2-40B4-BE49-F238E27FC236}">
+                    <a16:creationId xmlns:a16="http://schemas.microsoft.com/office/drawing/2014/main" id="{B3D7257C-B989-E6D2-FBC9-EEE63B1B672D}"/>
+                  </a:ext>
+                </a:extLst>
+              </p:cNvPr>
+              <p:cNvSpPr/>
+              <p:nvPr/>
+            </p:nvSpPr>
+            <p:spPr>
+              <a:xfrm>
+                <a:off x="3916949" y="3692460"/>
+                <a:ext cx="2239249" cy="1531642"/>
+              </a:xfrm>
+              <a:prstGeom prst="roundRect">
+                <a:avLst>
+                  <a:gd name="adj" fmla="val 5859"/>
+                </a:avLst>
+              </a:prstGeom>
+              <a:solidFill>
+                <a:srgbClr val="262626"/>
+              </a:solidFill>
+              <a:ln w="28575">
+                <a:noFill/>
+              </a:ln>
+            </p:spPr>
+            <p:style>
+              <a:lnRef idx="2">
+                <a:schemeClr val="accent1">
+                  <a:shade val="15000"/>
+                </a:schemeClr>
+              </a:lnRef>
+              <a:fillRef idx="1">
+                <a:schemeClr val="accent1"/>
+              </a:fillRef>
+              <a:effectRef idx="0">
+                <a:schemeClr val="accent1"/>
+              </a:effectRef>
+              <a:fontRef idx="minor">
+                <a:schemeClr val="lt1"/>
+              </a:fontRef>
+            </p:style>
+            <p:txBody>
+              <a:bodyPr rtlCol="0" anchor="ctr"/>
+              <a:lstStyle/>
+              <a:p>
+                <a:pPr algn="ctr"/>
+                <a:endParaRPr lang="en-US" dirty="0">
+                  <a:latin typeface="Times New Roman" panose="02020603050405020304" pitchFamily="18" charset="0"/>
+                  <a:cs typeface="Times New Roman" panose="02020603050405020304" pitchFamily="18" charset="0"/>
+                </a:endParaRPr>
+              </a:p>
+            </p:txBody>
+          </p:sp>
+          <p:sp>
+            <p:nvSpPr>
+              <p:cNvPr id="52" name="Rectangle: Top Corners Rounded 51">
+                <a:extLst>
+                  <a:ext uri="{FF2B5EF4-FFF2-40B4-BE49-F238E27FC236}">
+                    <a16:creationId xmlns:a16="http://schemas.microsoft.com/office/drawing/2014/main" id="{DBC9B431-FC85-98F1-7802-3B3651BE6F8D}"/>
+                  </a:ext>
+                </a:extLst>
+              </p:cNvPr>
+              <p:cNvSpPr/>
+              <p:nvPr/>
+            </p:nvSpPr>
+            <p:spPr>
+              <a:xfrm rot="10800000">
+                <a:off x="3916952" y="4613172"/>
+                <a:ext cx="2239248" cy="323588"/>
+              </a:xfrm>
+              <a:prstGeom prst="round2SameRect">
+                <a:avLst>
+                  <a:gd name="adj1" fmla="val 28890"/>
+                  <a:gd name="adj2" fmla="val 0"/>
+                </a:avLst>
+              </a:prstGeom>
+              <a:solidFill>
+                <a:srgbClr val="F2F2F2"/>
+              </a:solidFill>
+              <a:ln>
+                <a:noFill/>
+              </a:ln>
+            </p:spPr>
+            <p:style>
+              <a:lnRef idx="2">
+                <a:schemeClr val="accent1">
+                  <a:shade val="15000"/>
+                </a:schemeClr>
+              </a:lnRef>
+              <a:fillRef idx="1">
+                <a:schemeClr val="accent1"/>
+              </a:fillRef>
+              <a:effectRef idx="0">
+                <a:schemeClr val="accent1"/>
+              </a:effectRef>
+              <a:fontRef idx="minor">
+                <a:schemeClr val="lt1"/>
+              </a:fontRef>
+            </p:style>
+            <p:txBody>
+              <a:bodyPr rtlCol="0" anchor="ctr"/>
+              <a:lstStyle/>
+              <a:p>
+                <a:pPr algn="ctr"/>
+                <a:endParaRPr lang="en-US"/>
+              </a:p>
+            </p:txBody>
+          </p:sp>
+          <p:sp>
+            <p:nvSpPr>
+              <p:cNvPr id="53" name="Rectangle 52">
+                <a:extLst>
+                  <a:ext uri="{FF2B5EF4-FFF2-40B4-BE49-F238E27FC236}">
+                    <a16:creationId xmlns:a16="http://schemas.microsoft.com/office/drawing/2014/main" id="{19AB0D5D-41E1-ECDD-6800-6D04A0A25D57}"/>
+                  </a:ext>
+                </a:extLst>
+              </p:cNvPr>
+              <p:cNvSpPr/>
+              <p:nvPr/>
+            </p:nvSpPr>
+            <p:spPr>
+              <a:xfrm>
+                <a:off x="3916951" y="3990559"/>
+                <a:ext cx="2239249" cy="323587"/>
+              </a:xfrm>
+              <a:prstGeom prst="rect">
+                <a:avLst/>
+              </a:prstGeom>
+              <a:solidFill>
+                <a:srgbClr val="3A3A3A"/>
+              </a:solidFill>
+              <a:ln>
+                <a:noFill/>
+              </a:ln>
+            </p:spPr>
+            <p:style>
+              <a:lnRef idx="2">
+                <a:schemeClr val="accent1">
+                  <a:shade val="15000"/>
+                </a:schemeClr>
+              </a:lnRef>
+              <a:fillRef idx="1">
+                <a:schemeClr val="accent1"/>
+              </a:fillRef>
+              <a:effectRef idx="0">
+                <a:schemeClr val="accent1"/>
+              </a:effectRef>
+              <a:fontRef idx="minor">
+                <a:schemeClr val="lt1"/>
+              </a:fontRef>
+            </p:style>
+            <p:txBody>
+              <a:bodyPr rtlCol="0" anchor="ctr"/>
+              <a:lstStyle/>
+              <a:p>
+                <a:pPr algn="ctr"/>
+                <a:endParaRPr lang="en-US"/>
+              </a:p>
+            </p:txBody>
+          </p:sp>
+          <p:sp>
+            <p:nvSpPr>
+              <p:cNvPr id="54" name="TextBox 53">
+                <a:extLst>
+                  <a:ext uri="{FF2B5EF4-FFF2-40B4-BE49-F238E27FC236}">
+                    <a16:creationId xmlns:a16="http://schemas.microsoft.com/office/drawing/2014/main" id="{A40C2853-5546-FC7B-38EC-F30D79A444C7}"/>
+                  </a:ext>
+                </a:extLst>
+              </p:cNvPr>
+              <p:cNvSpPr txBox="1"/>
+              <p:nvPr/>
+            </p:nvSpPr>
+            <p:spPr>
+              <a:xfrm>
+                <a:off x="3917733" y="4313625"/>
+                <a:ext cx="2237684" cy="307777"/>
+              </a:xfrm>
+              <a:prstGeom prst="rect">
+                <a:avLst/>
+              </a:prstGeom>
+              <a:noFill/>
+            </p:spPr>
+            <p:txBody>
+              <a:bodyPr wrap="square">
+                <a:spAutoFit/>
+              </a:bodyPr>
+              <a:lstStyle/>
+              <a:p>
+                <a:pPr algn="ctr"/>
+                <a:r>
+                  <a:rPr lang="en-US" sz="1400" dirty="0">
+                    <a:solidFill>
+                      <a:schemeClr val="bg1"/>
+                    </a:solidFill>
+                    <a:latin typeface="Times New Roman" panose="02020603050405020304" pitchFamily="18" charset="0"/>
+                    <a:cs typeface="Times New Roman" panose="02020603050405020304" pitchFamily="18" charset="0"/>
+                  </a:rPr>
+                  <a:t>OAI : USRP</a:t>
+                </a:r>
+              </a:p>
+            </p:txBody>
+          </p:sp>
+          <p:sp>
+            <p:nvSpPr>
+              <p:cNvPr id="55" name="TextBox 54">
+                <a:extLst>
+                  <a:ext uri="{FF2B5EF4-FFF2-40B4-BE49-F238E27FC236}">
+                    <a16:creationId xmlns:a16="http://schemas.microsoft.com/office/drawing/2014/main" id="{63618131-BAB2-A494-D3FA-1003A22DEB82}"/>
+                  </a:ext>
+                </a:extLst>
+              </p:cNvPr>
+              <p:cNvSpPr txBox="1"/>
+              <p:nvPr/>
+            </p:nvSpPr>
+            <p:spPr>
+              <a:xfrm>
+                <a:off x="3933168" y="4007963"/>
+                <a:ext cx="2206814" cy="307777"/>
+              </a:xfrm>
+              <a:prstGeom prst="rect">
+                <a:avLst/>
+              </a:prstGeom>
+              <a:noFill/>
+            </p:spPr>
+            <p:txBody>
+              <a:bodyPr wrap="square">
+                <a:spAutoFit/>
+              </a:bodyPr>
+              <a:lstStyle/>
+              <a:p>
+                <a:pPr algn="ctr"/>
+                <a:r>
+                  <a:rPr lang="en-US" sz="1400" dirty="0" err="1">
+                    <a:solidFill>
+                      <a:schemeClr val="bg1"/>
+                    </a:solidFill>
+                    <a:latin typeface="Times New Roman" panose="02020603050405020304" pitchFamily="18" charset="0"/>
+                    <a:cs typeface="Times New Roman" panose="02020603050405020304" pitchFamily="18" charset="0"/>
+                  </a:rPr>
+                  <a:t>srsRAN_Project</a:t>
+                </a:r>
+                <a:r>
+                  <a:rPr lang="en-US" sz="1400" dirty="0">
+                    <a:solidFill>
+                      <a:schemeClr val="bg1"/>
+                    </a:solidFill>
+                    <a:latin typeface="Times New Roman" panose="02020603050405020304" pitchFamily="18" charset="0"/>
+                    <a:cs typeface="Times New Roman" panose="02020603050405020304" pitchFamily="18" charset="0"/>
+                  </a:rPr>
+                  <a:t> : </a:t>
+                </a:r>
+                <a:r>
+                  <a:rPr lang="en-US" sz="1400" dirty="0" err="1">
+                    <a:solidFill>
+                      <a:schemeClr val="bg1"/>
+                    </a:solidFill>
+                    <a:latin typeface="Times New Roman" panose="02020603050405020304" pitchFamily="18" charset="0"/>
+                    <a:cs typeface="Times New Roman" panose="02020603050405020304" pitchFamily="18" charset="0"/>
+                  </a:rPr>
+                  <a:t>ZeroMQ</a:t>
+                </a:r>
+                <a:endParaRPr lang="en-US" sz="1400" dirty="0">
+                  <a:solidFill>
+                    <a:schemeClr val="bg1"/>
+                  </a:solidFill>
+                  <a:latin typeface="Times New Roman" panose="02020603050405020304" pitchFamily="18" charset="0"/>
+                  <a:cs typeface="Times New Roman" panose="02020603050405020304" pitchFamily="18" charset="0"/>
+                </a:endParaRPr>
+              </a:p>
+            </p:txBody>
+          </p:sp>
+          <p:sp>
+            <p:nvSpPr>
+              <p:cNvPr id="56" name="TextBox 55">
+                <a:extLst>
+                  <a:ext uri="{FF2B5EF4-FFF2-40B4-BE49-F238E27FC236}">
+                    <a16:creationId xmlns:a16="http://schemas.microsoft.com/office/drawing/2014/main" id="{30B92E24-1934-475B-8C5E-87A7F5F0D58C}"/>
+                  </a:ext>
+                </a:extLst>
+              </p:cNvPr>
+              <p:cNvSpPr txBox="1"/>
+              <p:nvPr/>
+            </p:nvSpPr>
+            <p:spPr>
+              <a:xfrm>
+                <a:off x="3929357" y="3702301"/>
+                <a:ext cx="2206816" cy="307777"/>
+              </a:xfrm>
+              <a:prstGeom prst="rect">
+                <a:avLst/>
+              </a:prstGeom>
+              <a:noFill/>
+            </p:spPr>
+            <p:txBody>
+              <a:bodyPr wrap="square">
+                <a:spAutoFit/>
+              </a:bodyPr>
+              <a:lstStyle/>
+              <a:p>
+                <a:pPr algn="ctr"/>
+                <a:r>
+                  <a:rPr lang="en-US" sz="1400" dirty="0" err="1">
+                    <a:solidFill>
+                      <a:schemeClr val="bg1"/>
+                    </a:solidFill>
+                    <a:latin typeface="Times New Roman" panose="02020603050405020304" pitchFamily="18" charset="0"/>
+                    <a:cs typeface="Times New Roman" panose="02020603050405020304" pitchFamily="18" charset="0"/>
+                  </a:rPr>
+                  <a:t>srsRAN_Project</a:t>
+                </a:r>
+                <a:r>
+                  <a:rPr lang="en-US" sz="1400" dirty="0">
+                    <a:solidFill>
+                      <a:schemeClr val="bg1"/>
+                    </a:solidFill>
+                    <a:latin typeface="Times New Roman" panose="02020603050405020304" pitchFamily="18" charset="0"/>
+                    <a:cs typeface="Times New Roman" panose="02020603050405020304" pitchFamily="18" charset="0"/>
+                  </a:rPr>
+                  <a:t> : USRP</a:t>
+                </a:r>
+              </a:p>
+            </p:txBody>
+          </p:sp>
+          <p:sp>
+            <p:nvSpPr>
+              <p:cNvPr id="57" name="TextBox 56">
+                <a:extLst>
+                  <a:ext uri="{FF2B5EF4-FFF2-40B4-BE49-F238E27FC236}">
+                    <a16:creationId xmlns:a16="http://schemas.microsoft.com/office/drawing/2014/main" id="{0B8C8F01-0D4B-E516-9B28-D04D18700C28}"/>
+                  </a:ext>
+                </a:extLst>
+              </p:cNvPr>
+              <p:cNvSpPr txBox="1"/>
+              <p:nvPr/>
+            </p:nvSpPr>
+            <p:spPr>
+              <a:xfrm>
+                <a:off x="3933168" y="4924949"/>
+                <a:ext cx="2206814" cy="307777"/>
+              </a:xfrm>
+              <a:prstGeom prst="rect">
+                <a:avLst/>
+              </a:prstGeom>
+              <a:noFill/>
+            </p:spPr>
+            <p:txBody>
+              <a:bodyPr wrap="square">
+                <a:spAutoFit/>
+              </a:bodyPr>
+              <a:lstStyle/>
+              <a:p>
+                <a:pPr algn="ctr"/>
+                <a:r>
+                  <a:rPr lang="en-US" sz="1400" dirty="0">
+                    <a:solidFill>
+                      <a:schemeClr val="bg1"/>
+                    </a:solidFill>
+                    <a:latin typeface="Times New Roman" panose="02020603050405020304" pitchFamily="18" charset="0"/>
+                    <a:cs typeface="Times New Roman" panose="02020603050405020304" pitchFamily="18" charset="0"/>
+                  </a:rPr>
+                  <a:t>O-RAN SC : E2 Simulator</a:t>
+                </a:r>
+              </a:p>
+            </p:txBody>
+          </p:sp>
+          <p:sp>
+            <p:nvSpPr>
+              <p:cNvPr id="58" name="TextBox 57">
+                <a:extLst>
+                  <a:ext uri="{FF2B5EF4-FFF2-40B4-BE49-F238E27FC236}">
+                    <a16:creationId xmlns:a16="http://schemas.microsoft.com/office/drawing/2014/main" id="{E1692A11-3785-2962-B861-CAA171F11677}"/>
+                  </a:ext>
+                </a:extLst>
+              </p:cNvPr>
+              <p:cNvSpPr txBox="1"/>
+              <p:nvPr/>
+            </p:nvSpPr>
+            <p:spPr>
+              <a:xfrm>
+                <a:off x="3941661" y="5227453"/>
+                <a:ext cx="2239249" cy="307777"/>
+              </a:xfrm>
+              <a:prstGeom prst="rect">
+                <a:avLst/>
+              </a:prstGeom>
+              <a:noFill/>
+            </p:spPr>
+            <p:txBody>
+              <a:bodyPr wrap="square">
+                <a:spAutoFit/>
+              </a:bodyPr>
+              <a:lstStyle/>
+              <a:p>
+                <a:pPr algn="ctr"/>
+                <a:r>
+                  <a:rPr lang="en-US" sz="1400" b="1" dirty="0">
+                    <a:solidFill>
+                      <a:schemeClr val="bg1"/>
+                    </a:solidFill>
+                    <a:latin typeface="Times New Roman" panose="02020603050405020304" pitchFamily="18" charset="0"/>
+                    <a:cs typeface="Times New Roman" panose="02020603050405020304" pitchFamily="18" charset="0"/>
+                  </a:rPr>
+                  <a:t>Next Generation Node B</a:t>
+                </a:r>
+              </a:p>
+            </p:txBody>
+          </p:sp>
+          <p:sp>
+            <p:nvSpPr>
+              <p:cNvPr id="59" name="Rectangle 58">
+                <a:extLst>
+                  <a:ext uri="{FF2B5EF4-FFF2-40B4-BE49-F238E27FC236}">
+                    <a16:creationId xmlns:a16="http://schemas.microsoft.com/office/drawing/2014/main" id="{31BF9939-6DC0-9767-200A-9AA00ED4DFCB}"/>
+                  </a:ext>
+                </a:extLst>
+              </p:cNvPr>
+              <p:cNvSpPr/>
+              <p:nvPr/>
+            </p:nvSpPr>
+            <p:spPr>
+              <a:xfrm>
+                <a:off x="3916950" y="4607247"/>
+                <a:ext cx="2239249" cy="331887"/>
+              </a:xfrm>
+              <a:prstGeom prst="rect">
+                <a:avLst/>
+              </a:prstGeom>
+              <a:solidFill>
+                <a:srgbClr val="3A3A3A"/>
+              </a:solidFill>
+              <a:ln>
+                <a:noFill/>
+              </a:ln>
+            </p:spPr>
+            <p:style>
+              <a:lnRef idx="2">
+                <a:schemeClr val="accent1">
+                  <a:shade val="15000"/>
+                </a:schemeClr>
+              </a:lnRef>
+              <a:fillRef idx="1">
+                <a:schemeClr val="accent1"/>
+              </a:fillRef>
+              <a:effectRef idx="0">
+                <a:schemeClr val="accent1"/>
+              </a:effectRef>
+              <a:fontRef idx="minor">
+                <a:schemeClr val="lt1"/>
+              </a:fontRef>
+            </p:style>
+            <p:txBody>
+              <a:bodyPr rtlCol="0" anchor="ctr"/>
+              <a:lstStyle/>
+              <a:p>
+                <a:pPr algn="ctr"/>
+                <a:endParaRPr lang="en-US"/>
+              </a:p>
+            </p:txBody>
+          </p:sp>
+          <p:sp>
+            <p:nvSpPr>
+              <p:cNvPr id="60" name="TextBox 59">
+                <a:extLst>
+                  <a:ext uri="{FF2B5EF4-FFF2-40B4-BE49-F238E27FC236}">
+                    <a16:creationId xmlns:a16="http://schemas.microsoft.com/office/drawing/2014/main" id="{590EF321-DED3-3E92-2D8E-023FCA46B884}"/>
+                  </a:ext>
+                </a:extLst>
+              </p:cNvPr>
+              <p:cNvSpPr txBox="1"/>
+              <p:nvPr/>
+            </p:nvSpPr>
+            <p:spPr>
+              <a:xfrm>
+                <a:off x="3933168" y="4619287"/>
+                <a:ext cx="2206814" cy="307777"/>
+              </a:xfrm>
+              <a:prstGeom prst="rect">
+                <a:avLst/>
+              </a:prstGeom>
+              <a:noFill/>
+            </p:spPr>
+            <p:txBody>
+              <a:bodyPr wrap="square">
+                <a:spAutoFit/>
+              </a:bodyPr>
+              <a:lstStyle/>
+              <a:p>
+                <a:pPr algn="ctr"/>
+                <a:r>
+                  <a:rPr lang="en-US" sz="1400" dirty="0">
+                    <a:solidFill>
+                      <a:schemeClr val="bg1"/>
+                    </a:solidFill>
+                    <a:latin typeface="Times New Roman" panose="02020603050405020304" pitchFamily="18" charset="0"/>
+                    <a:cs typeface="Times New Roman" panose="02020603050405020304" pitchFamily="18" charset="0"/>
+                  </a:rPr>
+                  <a:t>OAI : RF Simulator</a:t>
+                </a:r>
+              </a:p>
+            </p:txBody>
+          </p:sp>
+          <p:sp>
+            <p:nvSpPr>
+              <p:cNvPr id="61" name="Rectangle: Rounded Corners 60">
+                <a:extLst>
+                  <a:ext uri="{FF2B5EF4-FFF2-40B4-BE49-F238E27FC236}">
+                    <a16:creationId xmlns:a16="http://schemas.microsoft.com/office/drawing/2014/main" id="{26FE37A3-1994-C0D5-B06F-E32D4E2A9E9D}"/>
+                  </a:ext>
+                </a:extLst>
+              </p:cNvPr>
+              <p:cNvSpPr/>
+              <p:nvPr/>
+            </p:nvSpPr>
+            <p:spPr>
+              <a:xfrm>
+                <a:off x="3916951" y="3691197"/>
+                <a:ext cx="2239249" cy="1534218"/>
+              </a:xfrm>
+              <a:prstGeom prst="roundRect">
+                <a:avLst>
+                  <a:gd name="adj" fmla="val 5819"/>
+                </a:avLst>
+              </a:prstGeom>
+              <a:noFill/>
+              <a:ln w="12700">
+                <a:solidFill>
+                  <a:schemeClr val="bg1"/>
+                </a:solidFill>
+              </a:ln>
+            </p:spPr>
+            <p:style>
+              <a:lnRef idx="2">
+                <a:schemeClr val="accent1">
+                  <a:shade val="15000"/>
+                </a:schemeClr>
+              </a:lnRef>
+              <a:fillRef idx="1">
+                <a:schemeClr val="accent1"/>
+              </a:fillRef>
+              <a:effectRef idx="0">
+                <a:schemeClr val="accent1"/>
+              </a:effectRef>
+              <a:fontRef idx="minor">
+                <a:schemeClr val="lt1"/>
+              </a:fontRef>
+            </p:style>
+            <p:txBody>
+              <a:bodyPr rtlCol="0" anchor="ctr"/>
+              <a:lstStyle/>
+              <a:p>
+                <a:pPr algn="ctr"/>
+                <a:endParaRPr lang="en-US" dirty="0">
+                  <a:latin typeface="Times New Roman" panose="02020603050405020304" pitchFamily="18" charset="0"/>
+                  <a:cs typeface="Times New Roman" panose="02020603050405020304" pitchFamily="18" charset="0"/>
+                </a:endParaRPr>
+              </a:p>
+            </p:txBody>
+          </p:sp>
+        </p:grpSp>
+        <p:grpSp>
+          <p:nvGrpSpPr>
+            <p:cNvPr id="26" name="Group 25">
+              <a:extLst>
+                <a:ext uri="{FF2B5EF4-FFF2-40B4-BE49-F238E27FC236}">
+                  <a16:creationId xmlns:a16="http://schemas.microsoft.com/office/drawing/2014/main" id="{738FE746-EA93-3F84-2E49-EB596828B714}"/>
+                </a:ext>
+              </a:extLst>
+            </p:cNvPr>
+            <p:cNvGrpSpPr/>
+            <p:nvPr/>
+          </p:nvGrpSpPr>
+          <p:grpSpPr>
+            <a:xfrm>
+              <a:off x="690637" y="2171378"/>
+              <a:ext cx="2263961" cy="1844033"/>
+              <a:chOff x="3916949" y="3691197"/>
+              <a:chExt cx="2263961" cy="1844033"/>
+            </a:xfrm>
+          </p:grpSpPr>
+          <p:sp>
+            <p:nvSpPr>
+              <p:cNvPr id="40" name="Rectangle: Rounded Corners 39">
+                <a:extLst>
+                  <a:ext uri="{FF2B5EF4-FFF2-40B4-BE49-F238E27FC236}">
+                    <a16:creationId xmlns:a16="http://schemas.microsoft.com/office/drawing/2014/main" id="{06932116-A947-404E-B203-2C38A8952496}"/>
+                  </a:ext>
+                </a:extLst>
+              </p:cNvPr>
+              <p:cNvSpPr/>
+              <p:nvPr/>
+            </p:nvSpPr>
+            <p:spPr>
+              <a:xfrm>
+                <a:off x="3916949" y="3692460"/>
+                <a:ext cx="2239249" cy="1531642"/>
+              </a:xfrm>
+              <a:prstGeom prst="roundRect">
+                <a:avLst>
+                  <a:gd name="adj" fmla="val 5859"/>
+                </a:avLst>
+              </a:prstGeom>
+              <a:solidFill>
+                <a:srgbClr val="262626"/>
+              </a:solidFill>
+              <a:ln w="28575">
+                <a:noFill/>
+              </a:ln>
+            </p:spPr>
+            <p:style>
+              <a:lnRef idx="2">
+                <a:schemeClr val="accent1">
+                  <a:shade val="15000"/>
+                </a:schemeClr>
+              </a:lnRef>
+              <a:fillRef idx="1">
+                <a:schemeClr val="accent1"/>
+              </a:fillRef>
+              <a:effectRef idx="0">
+                <a:schemeClr val="accent1"/>
+              </a:effectRef>
+              <a:fontRef idx="minor">
+                <a:schemeClr val="lt1"/>
+              </a:fontRef>
+            </p:style>
+            <p:txBody>
+              <a:bodyPr rtlCol="0" anchor="ctr"/>
+              <a:lstStyle/>
+              <a:p>
+                <a:pPr algn="ctr"/>
+                <a:endParaRPr lang="en-US" dirty="0">
+                  <a:latin typeface="Times New Roman" panose="02020603050405020304" pitchFamily="18" charset="0"/>
+                  <a:cs typeface="Times New Roman" panose="02020603050405020304" pitchFamily="18" charset="0"/>
+                </a:endParaRPr>
+              </a:p>
+            </p:txBody>
+          </p:sp>
+          <p:sp>
+            <p:nvSpPr>
+              <p:cNvPr id="41" name="Rectangle: Top Corners Rounded 40">
+                <a:extLst>
+                  <a:ext uri="{FF2B5EF4-FFF2-40B4-BE49-F238E27FC236}">
+                    <a16:creationId xmlns:a16="http://schemas.microsoft.com/office/drawing/2014/main" id="{AB9DCAB6-A723-7C47-DA69-4A1D35F5520F}"/>
+                  </a:ext>
+                </a:extLst>
+              </p:cNvPr>
+              <p:cNvSpPr/>
+              <p:nvPr/>
+            </p:nvSpPr>
+            <p:spPr>
+              <a:xfrm rot="10800000">
+                <a:off x="3916952" y="4613172"/>
+                <a:ext cx="2239248" cy="323588"/>
+              </a:xfrm>
+              <a:prstGeom prst="round2SameRect">
+                <a:avLst>
+                  <a:gd name="adj1" fmla="val 28890"/>
+                  <a:gd name="adj2" fmla="val 0"/>
+                </a:avLst>
+              </a:prstGeom>
+              <a:solidFill>
+                <a:srgbClr val="F2F2F2"/>
+              </a:solidFill>
+              <a:ln>
+                <a:noFill/>
+              </a:ln>
+            </p:spPr>
+            <p:style>
+              <a:lnRef idx="2">
+                <a:schemeClr val="accent1">
+                  <a:shade val="15000"/>
+                </a:schemeClr>
+              </a:lnRef>
+              <a:fillRef idx="1">
+                <a:schemeClr val="accent1"/>
+              </a:fillRef>
+              <a:effectRef idx="0">
+                <a:schemeClr val="accent1"/>
+              </a:effectRef>
+              <a:fontRef idx="minor">
+                <a:schemeClr val="lt1"/>
+              </a:fontRef>
+            </p:style>
+            <p:txBody>
+              <a:bodyPr rtlCol="0" anchor="ctr"/>
+              <a:lstStyle/>
+              <a:p>
+                <a:pPr algn="ctr"/>
+                <a:endParaRPr lang="en-US"/>
+              </a:p>
+            </p:txBody>
+          </p:sp>
+          <p:sp>
+            <p:nvSpPr>
+              <p:cNvPr id="42" name="Rectangle 41">
+                <a:extLst>
+                  <a:ext uri="{FF2B5EF4-FFF2-40B4-BE49-F238E27FC236}">
+                    <a16:creationId xmlns:a16="http://schemas.microsoft.com/office/drawing/2014/main" id="{059024B3-E725-8F4D-57EF-E266332C0F1D}"/>
+                  </a:ext>
+                </a:extLst>
+              </p:cNvPr>
+              <p:cNvSpPr/>
+              <p:nvPr/>
+            </p:nvSpPr>
+            <p:spPr>
+              <a:xfrm>
+                <a:off x="3916951" y="3990559"/>
+                <a:ext cx="2239249" cy="323587"/>
+              </a:xfrm>
+              <a:prstGeom prst="rect">
+                <a:avLst/>
+              </a:prstGeom>
+              <a:solidFill>
+                <a:srgbClr val="3A3A3A"/>
+              </a:solidFill>
+              <a:ln>
+                <a:noFill/>
+              </a:ln>
+            </p:spPr>
+            <p:style>
+              <a:lnRef idx="2">
+                <a:schemeClr val="accent1">
+                  <a:shade val="15000"/>
+                </a:schemeClr>
+              </a:lnRef>
+              <a:fillRef idx="1">
+                <a:schemeClr val="accent1"/>
+              </a:fillRef>
+              <a:effectRef idx="0">
+                <a:schemeClr val="accent1"/>
+              </a:effectRef>
+              <a:fontRef idx="minor">
+                <a:schemeClr val="lt1"/>
+              </a:fontRef>
+            </p:style>
+            <p:txBody>
+              <a:bodyPr rtlCol="0" anchor="ctr"/>
+              <a:lstStyle/>
+              <a:p>
+                <a:pPr algn="ctr"/>
+                <a:endParaRPr lang="en-US"/>
+              </a:p>
+            </p:txBody>
+          </p:sp>
+          <p:sp>
+            <p:nvSpPr>
+              <p:cNvPr id="43" name="TextBox 42">
+                <a:extLst>
+                  <a:ext uri="{FF2B5EF4-FFF2-40B4-BE49-F238E27FC236}">
+                    <a16:creationId xmlns:a16="http://schemas.microsoft.com/office/drawing/2014/main" id="{8F539C13-3DA0-CDD5-906F-B7B23E40A3DD}"/>
+                  </a:ext>
+                </a:extLst>
+              </p:cNvPr>
+              <p:cNvSpPr txBox="1"/>
+              <p:nvPr/>
+            </p:nvSpPr>
+            <p:spPr>
+              <a:xfrm>
+                <a:off x="3916952" y="4313625"/>
+                <a:ext cx="2239246" cy="307777"/>
+              </a:xfrm>
+              <a:prstGeom prst="rect">
+                <a:avLst/>
+              </a:prstGeom>
+              <a:noFill/>
+            </p:spPr>
+            <p:txBody>
+              <a:bodyPr wrap="square">
+                <a:spAutoFit/>
+              </a:bodyPr>
+              <a:lstStyle/>
+              <a:p>
+                <a:pPr algn="ctr"/>
+                <a:r>
+                  <a:rPr lang="en-US" sz="1400" dirty="0">
+                    <a:solidFill>
+                      <a:schemeClr val="bg1"/>
+                    </a:solidFill>
+                    <a:latin typeface="Times New Roman" panose="02020603050405020304" pitchFamily="18" charset="0"/>
+                    <a:cs typeface="Times New Roman" panose="02020603050405020304" pitchFamily="18" charset="0"/>
+                  </a:rPr>
+                  <a:t>OAI : USRP</a:t>
+                </a:r>
+              </a:p>
+            </p:txBody>
+          </p:sp>
+          <p:sp>
+            <p:nvSpPr>
+              <p:cNvPr id="44" name="TextBox 43">
+                <a:extLst>
+                  <a:ext uri="{FF2B5EF4-FFF2-40B4-BE49-F238E27FC236}">
+                    <a16:creationId xmlns:a16="http://schemas.microsoft.com/office/drawing/2014/main" id="{DA83BE73-067A-6A36-CE79-E9C8F7848B03}"/>
+                  </a:ext>
+                </a:extLst>
+              </p:cNvPr>
+              <p:cNvSpPr txBox="1"/>
+              <p:nvPr/>
+            </p:nvSpPr>
+            <p:spPr>
+              <a:xfrm>
+                <a:off x="3918857" y="4007963"/>
+                <a:ext cx="2239246" cy="307777"/>
+              </a:xfrm>
+              <a:prstGeom prst="rect">
+                <a:avLst/>
+              </a:prstGeom>
+              <a:noFill/>
+            </p:spPr>
+            <p:txBody>
+              <a:bodyPr wrap="square">
+                <a:spAutoFit/>
+              </a:bodyPr>
+              <a:lstStyle/>
+              <a:p>
+                <a:pPr algn="ctr"/>
+                <a:r>
+                  <a:rPr lang="en-US" sz="1400" dirty="0">
+                    <a:solidFill>
+                      <a:schemeClr val="bg1"/>
+                    </a:solidFill>
+                    <a:latin typeface="Times New Roman" panose="02020603050405020304" pitchFamily="18" charset="0"/>
+                    <a:cs typeface="Times New Roman" panose="02020603050405020304" pitchFamily="18" charset="0"/>
+                  </a:rPr>
+                  <a:t>srsRAN_4G : </a:t>
+                </a:r>
+                <a:r>
+                  <a:rPr lang="en-US" sz="1400" dirty="0" err="1">
+                    <a:solidFill>
+                      <a:schemeClr val="bg1"/>
+                    </a:solidFill>
+                    <a:latin typeface="Times New Roman" panose="02020603050405020304" pitchFamily="18" charset="0"/>
+                    <a:cs typeface="Times New Roman" panose="02020603050405020304" pitchFamily="18" charset="0"/>
+                  </a:rPr>
+                  <a:t>ZeroMQ</a:t>
+                </a:r>
+                <a:endParaRPr lang="en-US" sz="1400" dirty="0">
+                  <a:solidFill>
+                    <a:schemeClr val="bg1"/>
+                  </a:solidFill>
+                  <a:latin typeface="Times New Roman" panose="02020603050405020304" pitchFamily="18" charset="0"/>
+                  <a:cs typeface="Times New Roman" panose="02020603050405020304" pitchFamily="18" charset="0"/>
+                </a:endParaRPr>
+              </a:p>
+            </p:txBody>
+          </p:sp>
+          <p:sp>
+            <p:nvSpPr>
+              <p:cNvPr id="45" name="TextBox 44">
+                <a:extLst>
+                  <a:ext uri="{FF2B5EF4-FFF2-40B4-BE49-F238E27FC236}">
+                    <a16:creationId xmlns:a16="http://schemas.microsoft.com/office/drawing/2014/main" id="{592A8990-5727-46D2-F53B-BB54ADC83038}"/>
+                  </a:ext>
+                </a:extLst>
+              </p:cNvPr>
+              <p:cNvSpPr txBox="1"/>
+              <p:nvPr/>
+            </p:nvSpPr>
+            <p:spPr>
+              <a:xfrm>
+                <a:off x="3916951" y="3702301"/>
+                <a:ext cx="2239248" cy="307777"/>
+              </a:xfrm>
+              <a:prstGeom prst="rect">
+                <a:avLst/>
+              </a:prstGeom>
+              <a:noFill/>
+            </p:spPr>
+            <p:txBody>
+              <a:bodyPr wrap="square">
+                <a:spAutoFit/>
+              </a:bodyPr>
+              <a:lstStyle/>
+              <a:p>
+                <a:pPr algn="ctr"/>
+                <a:r>
+                  <a:rPr lang="en-US" sz="1400" dirty="0">
+                    <a:solidFill>
+                      <a:schemeClr val="bg1"/>
+                    </a:solidFill>
+                    <a:latin typeface="Times New Roman" panose="02020603050405020304" pitchFamily="18" charset="0"/>
+                    <a:cs typeface="Times New Roman" panose="02020603050405020304" pitchFamily="18" charset="0"/>
+                  </a:rPr>
+                  <a:t>srsRAN_4G : USRP</a:t>
+                </a:r>
+              </a:p>
+            </p:txBody>
+          </p:sp>
+          <p:sp>
+            <p:nvSpPr>
+              <p:cNvPr id="46" name="TextBox 45">
+                <a:extLst>
+                  <a:ext uri="{FF2B5EF4-FFF2-40B4-BE49-F238E27FC236}">
+                    <a16:creationId xmlns:a16="http://schemas.microsoft.com/office/drawing/2014/main" id="{52E6A652-08FB-05C2-F5D5-25D5E1D5B523}"/>
+                  </a:ext>
+                </a:extLst>
+              </p:cNvPr>
+              <p:cNvSpPr txBox="1"/>
+              <p:nvPr/>
+            </p:nvSpPr>
+            <p:spPr>
+              <a:xfrm>
+                <a:off x="3916952" y="4924949"/>
+                <a:ext cx="2239246" cy="307777"/>
+              </a:xfrm>
+              <a:prstGeom prst="rect">
+                <a:avLst/>
+              </a:prstGeom>
+              <a:noFill/>
+            </p:spPr>
+            <p:txBody>
+              <a:bodyPr wrap="square">
+                <a:spAutoFit/>
+              </a:bodyPr>
+              <a:lstStyle/>
+              <a:p>
+                <a:pPr algn="ctr"/>
+                <a:r>
+                  <a:rPr lang="en-US" sz="1400" dirty="0">
+                    <a:solidFill>
+                      <a:schemeClr val="bg1"/>
+                    </a:solidFill>
+                    <a:latin typeface="Times New Roman" panose="02020603050405020304" pitchFamily="18" charset="0"/>
+                    <a:cs typeface="Times New Roman" panose="02020603050405020304" pitchFamily="18" charset="0"/>
+                  </a:rPr>
+                  <a:t>Mobile Phone</a:t>
+                </a:r>
+              </a:p>
+            </p:txBody>
+          </p:sp>
+          <p:sp>
+            <p:nvSpPr>
+              <p:cNvPr id="47" name="TextBox 46">
+                <a:extLst>
+                  <a:ext uri="{FF2B5EF4-FFF2-40B4-BE49-F238E27FC236}">
+                    <a16:creationId xmlns:a16="http://schemas.microsoft.com/office/drawing/2014/main" id="{29036365-8CEE-A19F-B173-8499CDCFCABA}"/>
+                  </a:ext>
+                </a:extLst>
+              </p:cNvPr>
+              <p:cNvSpPr txBox="1"/>
+              <p:nvPr/>
+            </p:nvSpPr>
+            <p:spPr>
+              <a:xfrm>
+                <a:off x="3941661" y="5227453"/>
+                <a:ext cx="2239249" cy="307777"/>
+              </a:xfrm>
+              <a:prstGeom prst="rect">
+                <a:avLst/>
+              </a:prstGeom>
+              <a:noFill/>
+            </p:spPr>
+            <p:txBody>
+              <a:bodyPr wrap="square">
+                <a:spAutoFit/>
+              </a:bodyPr>
+              <a:lstStyle/>
+              <a:p>
+                <a:pPr algn="ctr"/>
+                <a:r>
+                  <a:rPr lang="en-US" sz="1400" b="1" dirty="0">
+                    <a:solidFill>
+                      <a:schemeClr val="bg1"/>
+                    </a:solidFill>
+                    <a:latin typeface="Times New Roman" panose="02020603050405020304" pitchFamily="18" charset="0"/>
+                    <a:cs typeface="Times New Roman" panose="02020603050405020304" pitchFamily="18" charset="0"/>
+                  </a:rPr>
+                  <a:t>User Equipment</a:t>
+                </a:r>
+              </a:p>
+            </p:txBody>
+          </p:sp>
+          <p:sp>
+            <p:nvSpPr>
+              <p:cNvPr id="48" name="Rectangle 47">
+                <a:extLst>
+                  <a:ext uri="{FF2B5EF4-FFF2-40B4-BE49-F238E27FC236}">
+                    <a16:creationId xmlns:a16="http://schemas.microsoft.com/office/drawing/2014/main" id="{D925D158-702C-A0D3-8A57-4736AFF32367}"/>
+                  </a:ext>
+                </a:extLst>
+              </p:cNvPr>
+              <p:cNvSpPr/>
+              <p:nvPr/>
+            </p:nvSpPr>
+            <p:spPr>
+              <a:xfrm>
+                <a:off x="3916950" y="4611639"/>
+                <a:ext cx="2239249" cy="327496"/>
+              </a:xfrm>
+              <a:prstGeom prst="rect">
+                <a:avLst/>
+              </a:prstGeom>
+              <a:solidFill>
+                <a:srgbClr val="3A3A3A"/>
+              </a:solidFill>
+              <a:ln>
+                <a:noFill/>
+              </a:ln>
+            </p:spPr>
+            <p:style>
+              <a:lnRef idx="2">
+                <a:schemeClr val="accent1">
+                  <a:shade val="15000"/>
+                </a:schemeClr>
+              </a:lnRef>
+              <a:fillRef idx="1">
+                <a:schemeClr val="accent1"/>
+              </a:fillRef>
+              <a:effectRef idx="0">
+                <a:schemeClr val="accent1"/>
+              </a:effectRef>
+              <a:fontRef idx="minor">
+                <a:schemeClr val="lt1"/>
+              </a:fontRef>
+            </p:style>
+            <p:txBody>
+              <a:bodyPr rtlCol="0" anchor="ctr"/>
+              <a:lstStyle/>
+              <a:p>
+                <a:pPr algn="ctr"/>
+                <a:endParaRPr lang="en-US"/>
+              </a:p>
+            </p:txBody>
+          </p:sp>
+          <p:sp>
+            <p:nvSpPr>
+              <p:cNvPr id="49" name="TextBox 48">
+                <a:extLst>
+                  <a:ext uri="{FF2B5EF4-FFF2-40B4-BE49-F238E27FC236}">
+                    <a16:creationId xmlns:a16="http://schemas.microsoft.com/office/drawing/2014/main" id="{D8772B8B-14B6-19AA-9DFC-643F7AF6818D}"/>
+                  </a:ext>
+                </a:extLst>
+              </p:cNvPr>
+              <p:cNvSpPr txBox="1"/>
+              <p:nvPr/>
+            </p:nvSpPr>
+            <p:spPr>
+              <a:xfrm>
+                <a:off x="3916952" y="4619287"/>
+                <a:ext cx="2239246" cy="307777"/>
+              </a:xfrm>
+              <a:prstGeom prst="rect">
+                <a:avLst/>
+              </a:prstGeom>
+              <a:noFill/>
+            </p:spPr>
+            <p:txBody>
+              <a:bodyPr wrap="square">
+                <a:spAutoFit/>
+              </a:bodyPr>
+              <a:lstStyle/>
+              <a:p>
+                <a:pPr algn="ctr"/>
+                <a:r>
+                  <a:rPr lang="en-US" sz="1400" dirty="0">
+                    <a:solidFill>
+                      <a:schemeClr val="bg1"/>
+                    </a:solidFill>
+                    <a:latin typeface="Times New Roman" panose="02020603050405020304" pitchFamily="18" charset="0"/>
+                    <a:cs typeface="Times New Roman" panose="02020603050405020304" pitchFamily="18" charset="0"/>
+                  </a:rPr>
+                  <a:t>OAI : RF Simulator</a:t>
+                </a:r>
+              </a:p>
+            </p:txBody>
+          </p:sp>
+          <p:sp>
+            <p:nvSpPr>
+              <p:cNvPr id="50" name="Rectangle: Rounded Corners 49">
+                <a:extLst>
+                  <a:ext uri="{FF2B5EF4-FFF2-40B4-BE49-F238E27FC236}">
+                    <a16:creationId xmlns:a16="http://schemas.microsoft.com/office/drawing/2014/main" id="{A0CE4E09-8DF3-9F5F-9E61-B32DC3A4E44A}"/>
+                  </a:ext>
+                </a:extLst>
+              </p:cNvPr>
+              <p:cNvSpPr/>
+              <p:nvPr/>
+            </p:nvSpPr>
+            <p:spPr>
+              <a:xfrm>
+                <a:off x="3916951" y="3691197"/>
+                <a:ext cx="2239249" cy="1534218"/>
+              </a:xfrm>
+              <a:prstGeom prst="roundRect">
+                <a:avLst>
+                  <a:gd name="adj" fmla="val 5819"/>
+                </a:avLst>
+              </a:prstGeom>
+              <a:noFill/>
+              <a:ln w="12700">
+                <a:solidFill>
+                  <a:schemeClr val="bg1"/>
+                </a:solidFill>
+              </a:ln>
+            </p:spPr>
+            <p:style>
+              <a:lnRef idx="2">
+                <a:schemeClr val="accent1">
+                  <a:shade val="15000"/>
+                </a:schemeClr>
+              </a:lnRef>
+              <a:fillRef idx="1">
+                <a:schemeClr val="accent1"/>
+              </a:fillRef>
+              <a:effectRef idx="0">
+                <a:schemeClr val="accent1"/>
+              </a:effectRef>
+              <a:fontRef idx="minor">
+                <a:schemeClr val="lt1"/>
+              </a:fontRef>
+            </p:style>
+            <p:txBody>
+              <a:bodyPr rtlCol="0" anchor="ctr"/>
+              <a:lstStyle/>
+              <a:p>
+                <a:pPr algn="ctr"/>
+                <a:endParaRPr lang="en-US" dirty="0">
+                  <a:latin typeface="Times New Roman" panose="02020603050405020304" pitchFamily="18" charset="0"/>
+                  <a:cs typeface="Times New Roman" panose="02020603050405020304" pitchFamily="18" charset="0"/>
+                </a:endParaRPr>
+              </a:p>
+            </p:txBody>
+          </p:sp>
+        </p:grpSp>
+        <p:grpSp>
+          <p:nvGrpSpPr>
+            <p:cNvPr id="27" name="Group 26">
+              <a:extLst>
+                <a:ext uri="{FF2B5EF4-FFF2-40B4-BE49-F238E27FC236}">
+                  <a16:creationId xmlns:a16="http://schemas.microsoft.com/office/drawing/2014/main" id="{5726D8C5-614D-56A4-C7DA-2AE1FE738FC2}"/>
+                </a:ext>
+              </a:extLst>
+            </p:cNvPr>
+            <p:cNvGrpSpPr/>
+            <p:nvPr/>
+          </p:nvGrpSpPr>
+          <p:grpSpPr>
+            <a:xfrm>
+              <a:off x="6497959" y="3084878"/>
+              <a:ext cx="2239250" cy="930533"/>
+              <a:chOff x="6696060" y="5146289"/>
+              <a:chExt cx="2239250" cy="930533"/>
+            </a:xfrm>
+          </p:grpSpPr>
+          <p:grpSp>
+            <p:nvGrpSpPr>
+              <p:cNvPr id="32" name="Group 31">
+                <a:extLst>
+                  <a:ext uri="{FF2B5EF4-FFF2-40B4-BE49-F238E27FC236}">
+                    <a16:creationId xmlns:a16="http://schemas.microsoft.com/office/drawing/2014/main" id="{820554D9-5169-E86E-F3E1-6FD7B1FB0948}"/>
+                  </a:ext>
+                </a:extLst>
+              </p:cNvPr>
+              <p:cNvGrpSpPr/>
+              <p:nvPr/>
+            </p:nvGrpSpPr>
+            <p:grpSpPr>
+              <a:xfrm>
+                <a:off x="6696060" y="5146289"/>
+                <a:ext cx="2239250" cy="618690"/>
+                <a:chOff x="6808092" y="5153909"/>
+                <a:chExt cx="2239250" cy="618690"/>
+              </a:xfrm>
+            </p:grpSpPr>
+            <p:grpSp>
+              <p:nvGrpSpPr>
+                <p:cNvPr id="34" name="Group 33">
+                  <a:extLst>
+                    <a:ext uri="{FF2B5EF4-FFF2-40B4-BE49-F238E27FC236}">
+                      <a16:creationId xmlns:a16="http://schemas.microsoft.com/office/drawing/2014/main" id="{0E46935C-6F39-D19A-CFCF-D62A86034828}"/>
+                    </a:ext>
+                  </a:extLst>
+                </p:cNvPr>
+                <p:cNvGrpSpPr/>
+                <p:nvPr/>
+              </p:nvGrpSpPr>
+              <p:grpSpPr>
+                <a:xfrm>
+                  <a:off x="6808092" y="5153909"/>
+                  <a:ext cx="2239249" cy="618690"/>
+                  <a:chOff x="4021891" y="2194877"/>
+                  <a:chExt cx="2239249" cy="618690"/>
+                </a:xfrm>
+              </p:grpSpPr>
+              <p:sp>
+                <p:nvSpPr>
+                  <p:cNvPr id="37" name="Rectangle: Rounded Corners 36">
+                    <a:extLst>
+                      <a:ext uri="{FF2B5EF4-FFF2-40B4-BE49-F238E27FC236}">
+                        <a16:creationId xmlns:a16="http://schemas.microsoft.com/office/drawing/2014/main" id="{2B8A2F6C-2A67-260F-6F24-A4C6D93DEC79}"/>
+                      </a:ext>
+                    </a:extLst>
+                  </p:cNvPr>
+                  <p:cNvSpPr/>
+                  <p:nvPr/>
+                </p:nvSpPr>
+                <p:spPr>
+                  <a:xfrm>
+                    <a:off x="4021891" y="2194877"/>
+                    <a:ext cx="2239249" cy="618689"/>
+                  </a:xfrm>
+                  <a:prstGeom prst="roundRect">
+                    <a:avLst>
+                      <a:gd name="adj" fmla="val 12974"/>
+                    </a:avLst>
+                  </a:prstGeom>
+                  <a:solidFill>
+                    <a:srgbClr val="262626"/>
+                  </a:solidFill>
+                  <a:ln w="28575">
+                    <a:noFill/>
+                  </a:ln>
+                </p:spPr>
+                <p:style>
+                  <a:lnRef idx="2">
+                    <a:schemeClr val="accent1">
+                      <a:shade val="15000"/>
+                    </a:schemeClr>
+                  </a:lnRef>
+                  <a:fillRef idx="1">
+                    <a:schemeClr val="accent1"/>
+                  </a:fillRef>
+                  <a:effectRef idx="0">
+                    <a:schemeClr val="accent1"/>
+                  </a:effectRef>
+                  <a:fontRef idx="minor">
+                    <a:schemeClr val="lt1"/>
+                  </a:fontRef>
+                </p:style>
+                <p:txBody>
+                  <a:bodyPr rtlCol="0" anchor="ctr"/>
+                  <a:lstStyle/>
+                  <a:p>
+                    <a:pPr algn="ctr"/>
+                    <a:endParaRPr lang="en-US" dirty="0">
+                      <a:latin typeface="Times New Roman" panose="02020603050405020304" pitchFamily="18" charset="0"/>
+                      <a:cs typeface="Times New Roman" panose="02020603050405020304" pitchFamily="18" charset="0"/>
+                    </a:endParaRPr>
+                  </a:p>
+                </p:txBody>
+              </p:sp>
+              <p:sp>
+                <p:nvSpPr>
+                  <p:cNvPr id="38" name="Rectangle: Top Corners Rounded 37">
+                    <a:extLst>
+                      <a:ext uri="{FF2B5EF4-FFF2-40B4-BE49-F238E27FC236}">
+                        <a16:creationId xmlns:a16="http://schemas.microsoft.com/office/drawing/2014/main" id="{DF0159E4-F128-74A1-8A96-41E2DB712167}"/>
+                      </a:ext>
+                    </a:extLst>
+                  </p:cNvPr>
+                  <p:cNvSpPr/>
+                  <p:nvPr/>
+                </p:nvSpPr>
+                <p:spPr>
+                  <a:xfrm flipV="1">
+                    <a:off x="4022672" y="2504431"/>
+                    <a:ext cx="2238468" cy="307778"/>
+                  </a:xfrm>
+                  <a:prstGeom prst="round2SameRect">
+                    <a:avLst>
+                      <a:gd name="adj1" fmla="val 28674"/>
+                      <a:gd name="adj2" fmla="val 0"/>
+                    </a:avLst>
+                  </a:prstGeom>
+                  <a:solidFill>
+                    <a:srgbClr val="3A3A3A"/>
+                  </a:solidFill>
+                  <a:ln>
+                    <a:noFill/>
+                  </a:ln>
+                </p:spPr>
+                <p:style>
+                  <a:lnRef idx="2">
+                    <a:schemeClr val="accent1">
+                      <a:shade val="15000"/>
+                    </a:schemeClr>
+                  </a:lnRef>
+                  <a:fillRef idx="1">
+                    <a:schemeClr val="accent1"/>
+                  </a:fillRef>
+                  <a:effectRef idx="0">
+                    <a:schemeClr val="accent1"/>
+                  </a:effectRef>
+                  <a:fontRef idx="minor">
+                    <a:schemeClr val="lt1"/>
+                  </a:fontRef>
+                </p:style>
+                <p:txBody>
+                  <a:bodyPr rtlCol="0" anchor="ctr"/>
+                  <a:lstStyle/>
+                  <a:p>
+                    <a:pPr algn="ctr"/>
+                    <a:endParaRPr lang="en-US"/>
+                  </a:p>
+                </p:txBody>
+              </p:sp>
+              <p:sp>
+                <p:nvSpPr>
+                  <p:cNvPr id="39" name="Rectangle: Rounded Corners 38">
+                    <a:extLst>
+                      <a:ext uri="{FF2B5EF4-FFF2-40B4-BE49-F238E27FC236}">
+                        <a16:creationId xmlns:a16="http://schemas.microsoft.com/office/drawing/2014/main" id="{B5C5DF2A-4F80-58F0-7F14-9A6CAA7EA5E2}"/>
+                      </a:ext>
+                    </a:extLst>
+                  </p:cNvPr>
+                  <p:cNvSpPr/>
+                  <p:nvPr/>
+                </p:nvSpPr>
+                <p:spPr>
+                  <a:xfrm>
+                    <a:off x="4021891" y="2194878"/>
+                    <a:ext cx="2239249" cy="618689"/>
+                  </a:xfrm>
+                  <a:prstGeom prst="roundRect">
+                    <a:avLst>
+                      <a:gd name="adj" fmla="val 12974"/>
+                    </a:avLst>
+                  </a:prstGeom>
+                  <a:noFill/>
+                  <a:ln w="12700">
+                    <a:solidFill>
+                      <a:schemeClr val="bg1"/>
+                    </a:solidFill>
+                  </a:ln>
+                </p:spPr>
+                <p:style>
+                  <a:lnRef idx="2">
+                    <a:schemeClr val="accent1">
+                      <a:shade val="15000"/>
+                    </a:schemeClr>
+                  </a:lnRef>
+                  <a:fillRef idx="1">
+                    <a:schemeClr val="accent1"/>
+                  </a:fillRef>
+                  <a:effectRef idx="0">
+                    <a:schemeClr val="accent1"/>
+                  </a:effectRef>
+                  <a:fontRef idx="minor">
+                    <a:schemeClr val="lt1"/>
+                  </a:fontRef>
+                </p:style>
+                <p:txBody>
+                  <a:bodyPr rtlCol="0" anchor="ctr"/>
+                  <a:lstStyle/>
+                  <a:p>
+                    <a:pPr algn="ctr"/>
+                    <a:endParaRPr lang="en-US" dirty="0">
+                      <a:latin typeface="Times New Roman" panose="02020603050405020304" pitchFamily="18" charset="0"/>
+                      <a:cs typeface="Times New Roman" panose="02020603050405020304" pitchFamily="18" charset="0"/>
+                    </a:endParaRPr>
+                  </a:p>
+                </p:txBody>
+              </p:sp>
+            </p:grpSp>
+            <p:sp>
+              <p:nvSpPr>
+                <p:cNvPr id="35" name="TextBox 34">
+                  <a:extLst>
+                    <a:ext uri="{FF2B5EF4-FFF2-40B4-BE49-F238E27FC236}">
+                      <a16:creationId xmlns:a16="http://schemas.microsoft.com/office/drawing/2014/main" id="{3DB1D612-0DA6-DFDD-7974-3E9354FCC1D8}"/>
+                    </a:ext>
+                  </a:extLst>
+                </p:cNvPr>
+                <p:cNvSpPr txBox="1"/>
+                <p:nvPr/>
+              </p:nvSpPr>
+              <p:spPr>
+                <a:xfrm>
+                  <a:off x="6808092" y="5171400"/>
+                  <a:ext cx="2239250" cy="307777"/>
                 </a:xfrm>
                 <a:prstGeom prst="rect">
                   <a:avLst/>
@@ -17827,17 +17643,17 @@
                       <a:latin typeface="Times New Roman" panose="02020603050405020304" pitchFamily="18" charset="0"/>
                       <a:cs typeface="Times New Roman" panose="02020603050405020304" pitchFamily="18" charset="0"/>
                     </a:rPr>
-                    <a:t>O-RAN SC : Non-RT RIC</a:t>
+                    <a:t>O-RAN SC : Near-RT RIC</a:t>
                   </a:r>
                 </a:p>
               </p:txBody>
             </p:sp>
             <p:sp>
               <p:nvSpPr>
-                <p:cNvPr id="31" name="TextBox 30">
+                <p:cNvPr id="36" name="TextBox 35">
                   <a:extLst>
                     <a:ext uri="{FF2B5EF4-FFF2-40B4-BE49-F238E27FC236}">
-                      <a16:creationId xmlns:a16="http://schemas.microsoft.com/office/drawing/2014/main" id="{4F2D46F8-64B8-9102-13D1-EC6356B1DA86}"/>
+                      <a16:creationId xmlns:a16="http://schemas.microsoft.com/office/drawing/2014/main" id="{9F749793-5D51-05F0-271A-74342A22925C}"/>
                     </a:ext>
                   </a:extLst>
                 </p:cNvPr>
@@ -17846,8 +17662,8 @@
               </p:nvSpPr>
               <p:spPr>
                 <a:xfrm>
-                  <a:off x="9173879" y="4861166"/>
-                  <a:ext cx="2239249" cy="307777"/>
+                  <a:off x="6808092" y="5464822"/>
+                  <a:ext cx="2239250" cy="307777"/>
                 </a:xfrm>
                 <a:prstGeom prst="rect">
                   <a:avLst/>
@@ -17862,20 +17678,275 @@
                 <a:p>
                   <a:pPr algn="ctr"/>
                   <a:r>
-                    <a:rPr lang="en-US" sz="1400" b="1" dirty="0">
+                    <a:rPr lang="en-US" sz="1400" dirty="0">
                       <a:solidFill>
                         <a:schemeClr val="bg1"/>
                       </a:solidFill>
                       <a:latin typeface="Times New Roman" panose="02020603050405020304" pitchFamily="18" charset="0"/>
                       <a:cs typeface="Times New Roman" panose="02020603050405020304" pitchFamily="18" charset="0"/>
                     </a:rPr>
-                    <a:t>Non-RT RIC</a:t>
+                    <a:t>Mosaic5G : FlexRIC</a:t>
                   </a:r>
                 </a:p>
               </p:txBody>
             </p:sp>
           </p:grpSp>
+          <p:sp>
+            <p:nvSpPr>
+              <p:cNvPr id="33" name="TextBox 32">
+                <a:extLst>
+                  <a:ext uri="{FF2B5EF4-FFF2-40B4-BE49-F238E27FC236}">
+                    <a16:creationId xmlns:a16="http://schemas.microsoft.com/office/drawing/2014/main" id="{26B54E29-6558-EF44-CA43-59C6ECE36CDF}"/>
+                  </a:ext>
+                </a:extLst>
+              </p:cNvPr>
+              <p:cNvSpPr txBox="1"/>
+              <p:nvPr/>
+            </p:nvSpPr>
+            <p:spPr>
+              <a:xfrm>
+                <a:off x="6696060" y="5769045"/>
+                <a:ext cx="2239249" cy="307777"/>
+              </a:xfrm>
+              <a:prstGeom prst="rect">
+                <a:avLst/>
+              </a:prstGeom>
+              <a:noFill/>
+            </p:spPr>
+            <p:txBody>
+              <a:bodyPr wrap="square">
+                <a:spAutoFit/>
+              </a:bodyPr>
+              <a:lstStyle/>
+              <a:p>
+                <a:pPr algn="ctr"/>
+                <a:r>
+                  <a:rPr lang="en-US" sz="1400" b="1" dirty="0">
+                    <a:solidFill>
+                      <a:schemeClr val="bg1"/>
+                    </a:solidFill>
+                    <a:latin typeface="Times New Roman" panose="02020603050405020304" pitchFamily="18" charset="0"/>
+                    <a:cs typeface="Times New Roman" panose="02020603050405020304" pitchFamily="18" charset="0"/>
+                  </a:rPr>
+                  <a:t>Near-RT RIC</a:t>
+                </a:r>
+              </a:p>
+            </p:txBody>
+          </p:sp>
         </p:grpSp>
+        <p:grpSp>
+          <p:nvGrpSpPr>
+            <p:cNvPr id="28" name="Group 27">
+              <a:extLst>
+                <a:ext uri="{FF2B5EF4-FFF2-40B4-BE49-F238E27FC236}">
+                  <a16:creationId xmlns:a16="http://schemas.microsoft.com/office/drawing/2014/main" id="{760B8761-A333-E78A-907F-AD48533196CD}"/>
+                </a:ext>
+              </a:extLst>
+            </p:cNvPr>
+            <p:cNvGrpSpPr/>
+            <p:nvPr/>
+          </p:nvGrpSpPr>
+          <p:grpSpPr>
+            <a:xfrm>
+              <a:off x="9376910" y="3369385"/>
+              <a:ext cx="2302213" cy="647296"/>
+              <a:chOff x="9110915" y="4521647"/>
+              <a:chExt cx="2302213" cy="647296"/>
+            </a:xfrm>
+          </p:grpSpPr>
+          <p:sp>
+            <p:nvSpPr>
+              <p:cNvPr id="29" name="Rectangle: Rounded Corners 28">
+                <a:extLst>
+                  <a:ext uri="{FF2B5EF4-FFF2-40B4-BE49-F238E27FC236}">
+                    <a16:creationId xmlns:a16="http://schemas.microsoft.com/office/drawing/2014/main" id="{022DC171-A3EC-050F-5AC8-CA1EDEC48D5E}"/>
+                  </a:ext>
+                </a:extLst>
+              </p:cNvPr>
+              <p:cNvSpPr/>
+              <p:nvPr/>
+            </p:nvSpPr>
+            <p:spPr>
+              <a:xfrm>
+                <a:off x="9110917" y="4521647"/>
+                <a:ext cx="2239249" cy="333931"/>
+              </a:xfrm>
+              <a:prstGeom prst="roundRect">
+                <a:avLst>
+                  <a:gd name="adj" fmla="val 28947"/>
+                </a:avLst>
+              </a:prstGeom>
+              <a:solidFill>
+                <a:srgbClr val="262626"/>
+              </a:solidFill>
+              <a:ln w="12700">
+                <a:solidFill>
+                  <a:schemeClr val="bg1"/>
+                </a:solidFill>
+              </a:ln>
+            </p:spPr>
+            <p:style>
+              <a:lnRef idx="2">
+                <a:schemeClr val="accent1">
+                  <a:shade val="15000"/>
+                </a:schemeClr>
+              </a:lnRef>
+              <a:fillRef idx="1">
+                <a:schemeClr val="accent1"/>
+              </a:fillRef>
+              <a:effectRef idx="0">
+                <a:schemeClr val="accent1"/>
+              </a:effectRef>
+              <a:fontRef idx="minor">
+                <a:schemeClr val="lt1"/>
+              </a:fontRef>
+            </p:style>
+            <p:txBody>
+              <a:bodyPr rtlCol="0" anchor="ctr"/>
+              <a:lstStyle/>
+              <a:p>
+                <a:pPr algn="ctr"/>
+                <a:endParaRPr lang="en-US" sz="1400" dirty="0">
+                  <a:solidFill>
+                    <a:schemeClr val="tx1"/>
+                  </a:solidFill>
+                  <a:latin typeface="Times New Roman" panose="02020603050405020304" pitchFamily="18" charset="0"/>
+                  <a:cs typeface="Times New Roman" panose="02020603050405020304" pitchFamily="18" charset="0"/>
+                </a:endParaRPr>
+              </a:p>
+            </p:txBody>
+          </p:sp>
+          <p:sp>
+            <p:nvSpPr>
+              <p:cNvPr id="30" name="TextBox 29">
+                <a:extLst>
+                  <a:ext uri="{FF2B5EF4-FFF2-40B4-BE49-F238E27FC236}">
+                    <a16:creationId xmlns:a16="http://schemas.microsoft.com/office/drawing/2014/main" id="{78F29ACD-A658-CB33-2DDC-6428BDD4405E}"/>
+                  </a:ext>
+                </a:extLst>
+              </p:cNvPr>
+              <p:cNvSpPr txBox="1"/>
+              <p:nvPr/>
+            </p:nvSpPr>
+            <p:spPr>
+              <a:xfrm>
+                <a:off x="9110915" y="4522182"/>
+                <a:ext cx="2238468" cy="307777"/>
+              </a:xfrm>
+              <a:prstGeom prst="rect">
+                <a:avLst/>
+              </a:prstGeom>
+              <a:noFill/>
+            </p:spPr>
+            <p:txBody>
+              <a:bodyPr wrap="square">
+                <a:spAutoFit/>
+              </a:bodyPr>
+              <a:lstStyle/>
+              <a:p>
+                <a:pPr algn="ctr"/>
+                <a:r>
+                  <a:rPr lang="en-US" sz="1400" dirty="0">
+                    <a:solidFill>
+                      <a:schemeClr val="bg1"/>
+                    </a:solidFill>
+                    <a:latin typeface="Times New Roman" panose="02020603050405020304" pitchFamily="18" charset="0"/>
+                    <a:cs typeface="Times New Roman" panose="02020603050405020304" pitchFamily="18" charset="0"/>
+                  </a:rPr>
+                  <a:t>O-RAN SC : Non-RT RIC</a:t>
+                </a:r>
+              </a:p>
+            </p:txBody>
+          </p:sp>
+          <p:sp>
+            <p:nvSpPr>
+              <p:cNvPr id="31" name="TextBox 30">
+                <a:extLst>
+                  <a:ext uri="{FF2B5EF4-FFF2-40B4-BE49-F238E27FC236}">
+                    <a16:creationId xmlns:a16="http://schemas.microsoft.com/office/drawing/2014/main" id="{4F2D46F8-64B8-9102-13D1-EC6356B1DA86}"/>
+                  </a:ext>
+                </a:extLst>
+              </p:cNvPr>
+              <p:cNvSpPr txBox="1"/>
+              <p:nvPr/>
+            </p:nvSpPr>
+            <p:spPr>
+              <a:xfrm>
+                <a:off x="9173879" y="4861166"/>
+                <a:ext cx="2239249" cy="307777"/>
+              </a:xfrm>
+              <a:prstGeom prst="rect">
+                <a:avLst/>
+              </a:prstGeom>
+              <a:noFill/>
+            </p:spPr>
+            <p:txBody>
+              <a:bodyPr wrap="square">
+                <a:spAutoFit/>
+              </a:bodyPr>
+              <a:lstStyle/>
+              <a:p>
+                <a:pPr algn="ctr"/>
+                <a:r>
+                  <a:rPr lang="en-US" sz="1400" b="1" dirty="0">
+                    <a:solidFill>
+                      <a:schemeClr val="bg1"/>
+                    </a:solidFill>
+                    <a:latin typeface="Times New Roman" panose="02020603050405020304" pitchFamily="18" charset="0"/>
+                    <a:cs typeface="Times New Roman" panose="02020603050405020304" pitchFamily="18" charset="0"/>
+                  </a:rPr>
+                  <a:t>Non-RT RIC</a:t>
+                </a:r>
+              </a:p>
+            </p:txBody>
+          </p:sp>
+        </p:grpSp>
+        <p:cxnSp>
+          <p:nvCxnSpPr>
+            <p:cNvPr id="2" name="Straight Connector 1">
+              <a:extLst>
+                <a:ext uri="{FF2B5EF4-FFF2-40B4-BE49-F238E27FC236}">
+                  <a16:creationId xmlns:a16="http://schemas.microsoft.com/office/drawing/2014/main" id="{A259E58A-9111-E91B-A5A5-A6C4526B5B70}"/>
+                </a:ext>
+              </a:extLst>
+            </p:cNvPr>
+            <p:cNvCxnSpPr>
+              <a:cxnSpLocks/>
+              <a:stCxn id="46" idx="3"/>
+              <a:endCxn id="54" idx="1"/>
+            </p:cNvCxnSpPr>
+            <p:nvPr/>
+          </p:nvCxnSpPr>
+          <p:spPr>
+            <a:xfrm flipV="1">
+              <a:off x="2929886" y="2947695"/>
+              <a:ext cx="665196" cy="611324"/>
+            </a:xfrm>
+            <a:prstGeom prst="line">
+              <a:avLst/>
+            </a:prstGeom>
+            <a:ln w="12700">
+              <a:solidFill>
+                <a:schemeClr val="bg1"/>
+              </a:solidFill>
+              <a:prstDash val="sysDot"/>
+            </a:ln>
+          </p:spPr>
+          <p:style>
+            <a:lnRef idx="2">
+              <a:schemeClr val="accent1"/>
+            </a:lnRef>
+            <a:fillRef idx="0">
+              <a:schemeClr val="accent1"/>
+            </a:fillRef>
+            <a:effectRef idx="1">
+              <a:schemeClr val="accent1"/>
+            </a:effectRef>
+            <a:fontRef idx="minor">
+              <a:schemeClr val="tx1"/>
+            </a:fontRef>
+          </p:style>
+        </p:cxnSp>
       </p:grpSp>
     </p:spTree>
     <p:extLst>
@@ -19818,6 +19889,45 @@
           </p:spPr>
         </p:pic>
       </p:grpSp>
+      <p:sp>
+        <p:nvSpPr>
+          <p:cNvPr id="3" name="TextBox 2">
+            <a:extLst>
+              <a:ext uri="{FF2B5EF4-FFF2-40B4-BE49-F238E27FC236}">
+                <a16:creationId xmlns:a16="http://schemas.microsoft.com/office/drawing/2014/main" id="{3A6B4BEF-4393-C342-1C07-D6E23E30CC41}"/>
+              </a:ext>
+            </a:extLst>
+          </p:cNvPr>
+          <p:cNvSpPr txBox="1"/>
+          <p:nvPr/>
+        </p:nvSpPr>
+        <p:spPr>
+          <a:xfrm>
+            <a:off x="2049861" y="4285318"/>
+            <a:ext cx="4092531" cy="369332"/>
+          </a:xfrm>
+          <a:prstGeom prst="rect">
+            <a:avLst/>
+          </a:prstGeom>
+          <a:noFill/>
+        </p:spPr>
+        <p:txBody>
+          <a:bodyPr wrap="none" rtlCol="0">
+            <a:spAutoFit/>
+          </a:bodyPr>
+          <a:lstStyle/>
+          <a:p>
+            <a:r>
+              <a:rPr lang="en-US" dirty="0">
+                <a:highlight>
+                  <a:srgbClr val="FFFF00"/>
+                </a:highlight>
+              </a:rPr>
+              <a:t>[ Template objects for future diagrams ]</a:t>
+            </a:r>
+          </a:p>
+        </p:txBody>
+      </p:sp>
     </p:spTree>
     <p:extLst>
       <p:ext uri="{BB962C8B-B14F-4D97-AF65-F5344CB8AC3E}">

--- a/RAN_Intelligent_Controllers/research/Diagrams.pptx
+++ b/RAN_Intelligent_Controllers/research/Diagrams.pptx
@@ -263,7 +263,7 @@
           <a:p>
             <a:fld id="{2D1DF383-F48D-4C35-882C-8A26F25E24F6}" type="datetimeFigureOut">
               <a:rPr lang="en-US" smtClean="0"/>
-              <a:t>4/3/2025</a:t>
+              <a:t>4/29/2025</a:t>
             </a:fld>
             <a:endParaRPr lang="en-US"/>
           </a:p>
@@ -461,7 +461,7 @@
           <a:p>
             <a:fld id="{2D1DF383-F48D-4C35-882C-8A26F25E24F6}" type="datetimeFigureOut">
               <a:rPr lang="en-US" smtClean="0"/>
-              <a:t>4/3/2025</a:t>
+              <a:t>4/29/2025</a:t>
             </a:fld>
             <a:endParaRPr lang="en-US"/>
           </a:p>
@@ -669,7 +669,7 @@
           <a:p>
             <a:fld id="{2D1DF383-F48D-4C35-882C-8A26F25E24F6}" type="datetimeFigureOut">
               <a:rPr lang="en-US" smtClean="0"/>
-              <a:t>4/3/2025</a:t>
+              <a:t>4/29/2025</a:t>
             </a:fld>
             <a:endParaRPr lang="en-US"/>
           </a:p>
@@ -867,7 +867,7 @@
           <a:p>
             <a:fld id="{2D1DF383-F48D-4C35-882C-8A26F25E24F6}" type="datetimeFigureOut">
               <a:rPr lang="en-US" smtClean="0"/>
-              <a:t>4/3/2025</a:t>
+              <a:t>4/29/2025</a:t>
             </a:fld>
             <a:endParaRPr lang="en-US"/>
           </a:p>
@@ -1142,7 +1142,7 @@
           <a:p>
             <a:fld id="{2D1DF383-F48D-4C35-882C-8A26F25E24F6}" type="datetimeFigureOut">
               <a:rPr lang="en-US" smtClean="0"/>
-              <a:t>4/3/2025</a:t>
+              <a:t>4/29/2025</a:t>
             </a:fld>
             <a:endParaRPr lang="en-US"/>
           </a:p>
@@ -1407,7 +1407,7 @@
           <a:p>
             <a:fld id="{2D1DF383-F48D-4C35-882C-8A26F25E24F6}" type="datetimeFigureOut">
               <a:rPr lang="en-US" smtClean="0"/>
-              <a:t>4/3/2025</a:t>
+              <a:t>4/29/2025</a:t>
             </a:fld>
             <a:endParaRPr lang="en-US"/>
           </a:p>
@@ -1819,7 +1819,7 @@
           <a:p>
             <a:fld id="{2D1DF383-F48D-4C35-882C-8A26F25E24F6}" type="datetimeFigureOut">
               <a:rPr lang="en-US" smtClean="0"/>
-              <a:t>4/3/2025</a:t>
+              <a:t>4/29/2025</a:t>
             </a:fld>
             <a:endParaRPr lang="en-US"/>
           </a:p>
@@ -1960,7 +1960,7 @@
           <a:p>
             <a:fld id="{2D1DF383-F48D-4C35-882C-8A26F25E24F6}" type="datetimeFigureOut">
               <a:rPr lang="en-US" smtClean="0"/>
-              <a:t>4/3/2025</a:t>
+              <a:t>4/29/2025</a:t>
             </a:fld>
             <a:endParaRPr lang="en-US"/>
           </a:p>
@@ -2073,7 +2073,7 @@
           <a:p>
             <a:fld id="{2D1DF383-F48D-4C35-882C-8A26F25E24F6}" type="datetimeFigureOut">
               <a:rPr lang="en-US" smtClean="0"/>
-              <a:t>4/3/2025</a:t>
+              <a:t>4/29/2025</a:t>
             </a:fld>
             <a:endParaRPr lang="en-US"/>
           </a:p>
@@ -2384,7 +2384,7 @@
           <a:p>
             <a:fld id="{2D1DF383-F48D-4C35-882C-8A26F25E24F6}" type="datetimeFigureOut">
               <a:rPr lang="en-US" smtClean="0"/>
-              <a:t>4/3/2025</a:t>
+              <a:t>4/29/2025</a:t>
             </a:fld>
             <a:endParaRPr lang="en-US"/>
           </a:p>
@@ -2672,7 +2672,7 @@
           <a:p>
             <a:fld id="{2D1DF383-F48D-4C35-882C-8A26F25E24F6}" type="datetimeFigureOut">
               <a:rPr lang="en-US" smtClean="0"/>
-              <a:t>4/3/2025</a:t>
+              <a:t>4/29/2025</a:t>
             </a:fld>
             <a:endParaRPr lang="en-US"/>
           </a:p>
@@ -2913,7 +2913,7 @@
           <a:p>
             <a:fld id="{2D1DF383-F48D-4C35-882C-8A26F25E24F6}" type="datetimeFigureOut">
               <a:rPr lang="en-US" smtClean="0"/>
-              <a:t>4/3/2025</a:t>
+              <a:t>4/29/2025</a:t>
             </a:fld>
             <a:endParaRPr lang="en-US"/>
           </a:p>
@@ -6002,7 +6002,7 @@
                     <a:latin typeface="Times New Roman" panose="02020603050405020304" pitchFamily="18" charset="0"/>
                     <a:cs typeface="Times New Roman" panose="02020603050405020304" pitchFamily="18" charset="0"/>
                   </a:rPr>
-                  <a:t>Policy</a:t>
+                  <a:t>A1 Policy</a:t>
                 </a:r>
                 <a:endParaRPr lang="en-US" sz="1200" i="1" dirty="0">
                   <a:latin typeface="Times New Roman" panose="02020603050405020304" pitchFamily="18" charset="0"/>
@@ -6026,7 +6026,7 @@
             <p:spPr>
               <a:xfrm>
                 <a:off x="6407418" y="3202655"/>
-                <a:ext cx="621711" cy="461665"/>
+                <a:ext cx="2184599" cy="461665"/>
               </a:xfrm>
               <a:prstGeom prst="rect">
                 <a:avLst/>
@@ -6047,17 +6047,10 @@
                     <a:latin typeface="Times New Roman" panose="02020603050405020304" pitchFamily="18" charset="0"/>
                     <a:cs typeface="Times New Roman" panose="02020603050405020304" pitchFamily="18" charset="0"/>
                   </a:rPr>
-                  <a:t>RC</a:t>
+                  <a:t>Key Performance Measurement</a:t>
                 </a:r>
-                <a:br>
-                  <a:rPr lang="en-US" sz="1200" i="1" dirty="0">
-                    <a:solidFill>
-                      <a:schemeClr val="tx1"/>
-                    </a:solidFill>
-                    <a:latin typeface="Times New Roman" panose="02020603050405020304" pitchFamily="18" charset="0"/>
-                    <a:cs typeface="Times New Roman" panose="02020603050405020304" pitchFamily="18" charset="0"/>
-                  </a:rPr>
-                </a:br>
+              </a:p>
+              <a:p>
                 <a:r>
                   <a:rPr lang="en-US" sz="1200" i="1" dirty="0">
                     <a:solidFill>
@@ -6066,7 +6059,7 @@
                     <a:latin typeface="Times New Roman" panose="02020603050405020304" pitchFamily="18" charset="0"/>
                     <a:cs typeface="Times New Roman" panose="02020603050405020304" pitchFamily="18" charset="0"/>
                   </a:rPr>
-                  <a:t>KPM</a:t>
+                  <a:t>RAN Control</a:t>
                 </a:r>
                 <a:endParaRPr lang="en-US" sz="1200" i="1" dirty="0">
                   <a:latin typeface="Times New Roman" panose="02020603050405020304" pitchFamily="18" charset="0"/>
@@ -6196,7 +6189,7 @@
                       <a:latin typeface="Times New Roman" panose="02020603050405020304" pitchFamily="18" charset="0"/>
                       <a:cs typeface="Times New Roman" panose="02020603050405020304" pitchFamily="18" charset="0"/>
                     </a:rPr>
-                    <a:t>KPI Monitor</a:t>
+                    <a:t>KPM Monitor</a:t>
                   </a:r>
                   <a:endParaRPr lang="en-US" sz="1400" dirty="0">
                     <a:latin typeface="Times New Roman" panose="02020603050405020304" pitchFamily="18" charset="0"/>
@@ -10362,7 +10355,7 @@
             <p:spPr>
               <a:xfrm>
                 <a:off x="6407418" y="3202655"/>
-                <a:ext cx="621711" cy="461665"/>
+                <a:ext cx="2184599" cy="461665"/>
               </a:xfrm>
               <a:prstGeom prst="rect">
                 <a:avLst/>
@@ -10383,17 +10376,10 @@
                     <a:latin typeface="Times New Roman" panose="02020603050405020304" pitchFamily="18" charset="0"/>
                     <a:cs typeface="Times New Roman" panose="02020603050405020304" pitchFamily="18" charset="0"/>
                   </a:rPr>
-                  <a:t>RC</a:t>
+                  <a:t>Key Performance Measurement</a:t>
                 </a:r>
-                <a:br>
-                  <a:rPr lang="en-US" sz="1200" i="1" dirty="0">
-                    <a:solidFill>
-                      <a:schemeClr val="bg1"/>
-                    </a:solidFill>
-                    <a:latin typeface="Times New Roman" panose="02020603050405020304" pitchFamily="18" charset="0"/>
-                    <a:cs typeface="Times New Roman" panose="02020603050405020304" pitchFamily="18" charset="0"/>
-                  </a:rPr>
-                </a:br>
+              </a:p>
+              <a:p>
                 <a:r>
                   <a:rPr lang="en-US" sz="1200" i="1" dirty="0">
                     <a:solidFill>
@@ -10402,7 +10388,7 @@
                     <a:latin typeface="Times New Roman" panose="02020603050405020304" pitchFamily="18" charset="0"/>
                     <a:cs typeface="Times New Roman" panose="02020603050405020304" pitchFamily="18" charset="0"/>
                   </a:rPr>
-                  <a:t>KPM</a:t>
+                  <a:t>RAN Control</a:t>
                 </a:r>
               </a:p>
             </p:txBody>
@@ -10530,7 +10516,7 @@
                       <a:latin typeface="Times New Roman" panose="02020603050405020304" pitchFamily="18" charset="0"/>
                       <a:cs typeface="Times New Roman" panose="02020603050405020304" pitchFamily="18" charset="0"/>
                     </a:rPr>
-                    <a:t>KPI Monitor</a:t>
+                    <a:t>KPM Monitor</a:t>
                   </a:r>
                 </a:p>
               </p:txBody>
@@ -11953,10 +11939,10 @@
       </p:grpSpPr>
       <p:grpSp>
         <p:nvGrpSpPr>
-          <p:cNvPr id="15" name="Group 14">
+          <p:cNvPr id="268" name="Group 267">
             <a:extLst>
               <a:ext uri="{FF2B5EF4-FFF2-40B4-BE49-F238E27FC236}">
-                <a16:creationId xmlns:a16="http://schemas.microsoft.com/office/drawing/2014/main" id="{5277176F-FC8F-52B9-D803-65D9E27547F1}"/>
+                <a16:creationId xmlns:a16="http://schemas.microsoft.com/office/drawing/2014/main" id="{8F3BE6CA-7DE7-0289-6F16-C0A8B58E71BF}"/>
               </a:ext>
             </a:extLst>
           </p:cNvPr>
@@ -12041,14 +12027,14 @@
             </p:cNvPr>
             <p:cNvCxnSpPr>
               <a:cxnSpLocks/>
-              <a:endCxn id="137" idx="1"/>
+              <a:endCxn id="237" idx="1"/>
             </p:cNvCxnSpPr>
             <p:nvPr/>
           </p:nvCxnSpPr>
           <p:spPr>
             <a:xfrm>
               <a:off x="5943801" y="3107001"/>
-              <a:ext cx="554158" cy="139732"/>
+              <a:ext cx="554157" cy="139349"/>
             </a:xfrm>
             <a:prstGeom prst="line">
               <a:avLst/>
@@ -12090,9 +12076,9 @@
           <p:grpSpPr>
             <a:xfrm>
               <a:off x="6498724" y="2172257"/>
-              <a:ext cx="2302213" cy="647296"/>
+              <a:ext cx="2302213" cy="609196"/>
               <a:chOff x="7063677" y="4951549"/>
-              <a:chExt cx="2302213" cy="647296"/>
+              <a:chExt cx="2302213" cy="609196"/>
             </a:xfrm>
           </p:grpSpPr>
           <p:grpSp>
@@ -12240,7 +12226,7 @@
             </p:nvSpPr>
             <p:spPr>
               <a:xfrm>
-                <a:off x="7126641" y="5291068"/>
+                <a:off x="7126641" y="5252968"/>
                 <a:ext cx="2239249" cy="307777"/>
               </a:xfrm>
               <a:prstGeom prst="rect">
@@ -12512,15 +12498,15 @@
             </p:cNvPr>
             <p:cNvCxnSpPr>
               <a:cxnSpLocks/>
-              <a:stCxn id="137" idx="3"/>
+              <a:stCxn id="237" idx="3"/>
               <a:endCxn id="315" idx="1"/>
             </p:cNvCxnSpPr>
             <p:nvPr/>
           </p:nvCxnSpPr>
           <p:spPr>
             <a:xfrm>
-              <a:off x="8737209" y="3246733"/>
-              <a:ext cx="639701" cy="277076"/>
+              <a:off x="8737207" y="3246350"/>
+              <a:ext cx="639703" cy="290794"/>
             </a:xfrm>
             <a:prstGeom prst="line">
               <a:avLst/>
@@ -12529,6 +12515,7 @@
               <a:solidFill>
                 <a:schemeClr val="tx1"/>
               </a:solidFill>
+              <a:prstDash val="sysDot"/>
             </a:ln>
           </p:spPr>
           <p:style>
@@ -12647,14 +12634,14 @@
             </p:cNvPr>
             <p:cNvCxnSpPr>
               <a:cxnSpLocks/>
-              <a:endCxn id="137" idx="1"/>
+              <a:endCxn id="237" idx="1"/>
             </p:cNvCxnSpPr>
             <p:nvPr/>
           </p:nvCxnSpPr>
           <p:spPr>
             <a:xfrm>
               <a:off x="5943801" y="2493651"/>
-              <a:ext cx="554158" cy="753082"/>
+              <a:ext cx="554157" cy="752699"/>
             </a:xfrm>
             <a:prstGeom prst="line">
               <a:avLst/>
@@ -12691,14 +12678,14 @@
             </p:cNvPr>
             <p:cNvCxnSpPr>
               <a:cxnSpLocks/>
-              <a:endCxn id="139" idx="1"/>
+              <a:endCxn id="236" idx="1"/>
             </p:cNvCxnSpPr>
             <p:nvPr/>
           </p:nvCxnSpPr>
           <p:spPr>
             <a:xfrm>
               <a:off x="5943801" y="3107001"/>
-              <a:ext cx="554158" cy="442679"/>
+              <a:ext cx="554157" cy="438375"/>
             </a:xfrm>
             <a:prstGeom prst="line">
               <a:avLst/>
@@ -12736,14 +12723,14 @@
             <p:cNvCxnSpPr>
               <a:cxnSpLocks/>
               <a:stCxn id="277" idx="3"/>
-              <a:endCxn id="137" idx="1"/>
+              <a:endCxn id="237" idx="1"/>
             </p:cNvCxnSpPr>
             <p:nvPr/>
           </p:nvCxnSpPr>
           <p:spPr>
             <a:xfrm flipV="1">
-              <a:off x="5817331" y="3246733"/>
-              <a:ext cx="680628" cy="312286"/>
+              <a:off x="5817331" y="3246350"/>
+              <a:ext cx="680627" cy="312669"/>
             </a:xfrm>
             <a:prstGeom prst="line">
               <a:avLst/>
@@ -12780,14 +12767,14 @@
             </p:cNvPr>
             <p:cNvCxnSpPr>
               <a:cxnSpLocks/>
-              <a:endCxn id="139" idx="1"/>
+              <a:endCxn id="236" idx="1"/>
             </p:cNvCxnSpPr>
             <p:nvPr/>
           </p:nvCxnSpPr>
           <p:spPr>
             <a:xfrm>
               <a:off x="5943801" y="2493651"/>
-              <a:ext cx="554158" cy="1056029"/>
+              <a:ext cx="554157" cy="1051725"/>
             </a:xfrm>
             <a:prstGeom prst="line">
               <a:avLst/>
@@ -14045,380 +14032,6 @@
         </p:grpSp>
         <p:grpSp>
           <p:nvGrpSpPr>
-            <p:cNvPr id="294" name="Group 293">
-              <a:extLst>
-                <a:ext uri="{FF2B5EF4-FFF2-40B4-BE49-F238E27FC236}">
-                  <a16:creationId xmlns:a16="http://schemas.microsoft.com/office/drawing/2014/main" id="{7F0217C1-27AC-0AE9-0AB2-B6739AA10A59}"/>
-                </a:ext>
-              </a:extLst>
-            </p:cNvPr>
-            <p:cNvGrpSpPr/>
-            <p:nvPr/>
-          </p:nvGrpSpPr>
-          <p:grpSpPr>
-            <a:xfrm>
-              <a:off x="6497959" y="3084878"/>
-              <a:ext cx="2239250" cy="930533"/>
-              <a:chOff x="6696060" y="5146289"/>
-              <a:chExt cx="2239250" cy="930533"/>
-            </a:xfrm>
-          </p:grpSpPr>
-          <p:grpSp>
-            <p:nvGrpSpPr>
-              <p:cNvPr id="282" name="Group 281">
-                <a:extLst>
-                  <a:ext uri="{FF2B5EF4-FFF2-40B4-BE49-F238E27FC236}">
-                    <a16:creationId xmlns:a16="http://schemas.microsoft.com/office/drawing/2014/main" id="{10760A10-5230-083D-FCAE-497AD888B029}"/>
-                  </a:ext>
-                </a:extLst>
-              </p:cNvPr>
-              <p:cNvGrpSpPr/>
-              <p:nvPr/>
-            </p:nvGrpSpPr>
-            <p:grpSpPr>
-              <a:xfrm>
-                <a:off x="6696060" y="5146289"/>
-                <a:ext cx="2239250" cy="618690"/>
-                <a:chOff x="6808092" y="5153909"/>
-                <a:chExt cx="2239250" cy="618690"/>
-              </a:xfrm>
-            </p:grpSpPr>
-            <p:grpSp>
-              <p:nvGrpSpPr>
-                <p:cNvPr id="136" name="Group 135">
-                  <a:extLst>
-                    <a:ext uri="{FF2B5EF4-FFF2-40B4-BE49-F238E27FC236}">
-                      <a16:creationId xmlns:a16="http://schemas.microsoft.com/office/drawing/2014/main" id="{841B9809-A189-561B-4300-1452E248F236}"/>
-                    </a:ext>
-                  </a:extLst>
-                </p:cNvPr>
-                <p:cNvGrpSpPr/>
-                <p:nvPr/>
-              </p:nvGrpSpPr>
-              <p:grpSpPr>
-                <a:xfrm>
-                  <a:off x="6808092" y="5153909"/>
-                  <a:ext cx="2239249" cy="618690"/>
-                  <a:chOff x="4021891" y="2194877"/>
-                  <a:chExt cx="2239249" cy="618690"/>
-                </a:xfrm>
-              </p:grpSpPr>
-              <p:sp>
-                <p:nvSpPr>
-                  <p:cNvPr id="141" name="Rectangle: Rounded Corners 140">
-                    <a:extLst>
-                      <a:ext uri="{FF2B5EF4-FFF2-40B4-BE49-F238E27FC236}">
-                        <a16:creationId xmlns:a16="http://schemas.microsoft.com/office/drawing/2014/main" id="{3F2A5807-4769-53A4-4C75-D528398D2568}"/>
-                      </a:ext>
-                    </a:extLst>
-                  </p:cNvPr>
-                  <p:cNvSpPr/>
-                  <p:nvPr/>
-                </p:nvSpPr>
-                <p:spPr>
-                  <a:xfrm>
-                    <a:off x="4021891" y="2194877"/>
-                    <a:ext cx="2239249" cy="618689"/>
-                  </a:xfrm>
-                  <a:prstGeom prst="roundRect">
-                    <a:avLst>
-                      <a:gd name="adj" fmla="val 12974"/>
-                    </a:avLst>
-                  </a:prstGeom>
-                  <a:solidFill>
-                    <a:schemeClr val="bg1">
-                      <a:lumMod val="85000"/>
-                    </a:schemeClr>
-                  </a:solidFill>
-                  <a:ln w="28575">
-                    <a:noFill/>
-                  </a:ln>
-                </p:spPr>
-                <p:style>
-                  <a:lnRef idx="2">
-                    <a:schemeClr val="accent1">
-                      <a:shade val="15000"/>
-                    </a:schemeClr>
-                  </a:lnRef>
-                  <a:fillRef idx="1">
-                    <a:schemeClr val="accent1"/>
-                  </a:fillRef>
-                  <a:effectRef idx="0">
-                    <a:schemeClr val="accent1"/>
-                  </a:effectRef>
-                  <a:fontRef idx="minor">
-                    <a:schemeClr val="lt1"/>
-                  </a:fontRef>
-                </p:style>
-                <p:txBody>
-                  <a:bodyPr rtlCol="0" anchor="ctr"/>
-                  <a:lstStyle/>
-                  <a:p>
-                    <a:pPr algn="ctr"/>
-                    <a:endParaRPr lang="en-US" dirty="0">
-                      <a:latin typeface="Times New Roman" panose="02020603050405020304" pitchFamily="18" charset="0"/>
-                      <a:cs typeface="Times New Roman" panose="02020603050405020304" pitchFamily="18" charset="0"/>
-                    </a:endParaRPr>
-                  </a:p>
-                </p:txBody>
-              </p:sp>
-              <p:sp>
-                <p:nvSpPr>
-                  <p:cNvPr id="142" name="Rectangle: Top Corners Rounded 141">
-                    <a:extLst>
-                      <a:ext uri="{FF2B5EF4-FFF2-40B4-BE49-F238E27FC236}">
-                        <a16:creationId xmlns:a16="http://schemas.microsoft.com/office/drawing/2014/main" id="{BFBE2C83-3F94-BEC1-509A-666E953B5AE3}"/>
-                      </a:ext>
-                    </a:extLst>
-                  </p:cNvPr>
-                  <p:cNvSpPr/>
-                  <p:nvPr/>
-                </p:nvSpPr>
-                <p:spPr>
-                  <a:xfrm flipV="1">
-                    <a:off x="4022672" y="2504431"/>
-                    <a:ext cx="2238468" cy="307778"/>
-                  </a:xfrm>
-                  <a:prstGeom prst="round2SameRect">
-                    <a:avLst>
-                      <a:gd name="adj1" fmla="val 28674"/>
-                      <a:gd name="adj2" fmla="val 0"/>
-                    </a:avLst>
-                  </a:prstGeom>
-                  <a:solidFill>
-                    <a:schemeClr val="bg1">
-                      <a:lumMod val="95000"/>
-                    </a:schemeClr>
-                  </a:solidFill>
-                  <a:ln>
-                    <a:noFill/>
-                  </a:ln>
-                </p:spPr>
-                <p:style>
-                  <a:lnRef idx="2">
-                    <a:schemeClr val="accent1">
-                      <a:shade val="15000"/>
-                    </a:schemeClr>
-                  </a:lnRef>
-                  <a:fillRef idx="1">
-                    <a:schemeClr val="accent1"/>
-                  </a:fillRef>
-                  <a:effectRef idx="0">
-                    <a:schemeClr val="accent1"/>
-                  </a:effectRef>
-                  <a:fontRef idx="minor">
-                    <a:schemeClr val="lt1"/>
-                  </a:fontRef>
-                </p:style>
-                <p:txBody>
-                  <a:bodyPr rtlCol="0" anchor="ctr"/>
-                  <a:lstStyle/>
-                  <a:p>
-                    <a:pPr algn="ctr"/>
-                    <a:endParaRPr lang="en-US"/>
-                  </a:p>
-                </p:txBody>
-              </p:sp>
-              <p:sp>
-                <p:nvSpPr>
-                  <p:cNvPr id="143" name="Rectangle: Rounded Corners 142">
-                    <a:extLst>
-                      <a:ext uri="{FF2B5EF4-FFF2-40B4-BE49-F238E27FC236}">
-                        <a16:creationId xmlns:a16="http://schemas.microsoft.com/office/drawing/2014/main" id="{BE57BFF5-2C67-F628-A5CE-99608F010250}"/>
-                      </a:ext>
-                    </a:extLst>
-                  </p:cNvPr>
-                  <p:cNvSpPr/>
-                  <p:nvPr/>
-                </p:nvSpPr>
-                <p:spPr>
-                  <a:xfrm>
-                    <a:off x="4021891" y="2194878"/>
-                    <a:ext cx="2239249" cy="618689"/>
-                  </a:xfrm>
-                  <a:prstGeom prst="roundRect">
-                    <a:avLst>
-                      <a:gd name="adj" fmla="val 12974"/>
-                    </a:avLst>
-                  </a:prstGeom>
-                  <a:noFill/>
-                  <a:ln w="12700">
-                    <a:solidFill>
-                      <a:schemeClr val="tx1"/>
-                    </a:solidFill>
-                  </a:ln>
-                </p:spPr>
-                <p:style>
-                  <a:lnRef idx="2">
-                    <a:schemeClr val="accent1">
-                      <a:shade val="15000"/>
-                    </a:schemeClr>
-                  </a:lnRef>
-                  <a:fillRef idx="1">
-                    <a:schemeClr val="accent1"/>
-                  </a:fillRef>
-                  <a:effectRef idx="0">
-                    <a:schemeClr val="accent1"/>
-                  </a:effectRef>
-                  <a:fontRef idx="minor">
-                    <a:schemeClr val="lt1"/>
-                  </a:fontRef>
-                </p:style>
-                <p:txBody>
-                  <a:bodyPr rtlCol="0" anchor="ctr"/>
-                  <a:lstStyle/>
-                  <a:p>
-                    <a:pPr algn="ctr"/>
-                    <a:endParaRPr lang="en-US" dirty="0">
-                      <a:latin typeface="Times New Roman" panose="02020603050405020304" pitchFamily="18" charset="0"/>
-                      <a:cs typeface="Times New Roman" panose="02020603050405020304" pitchFamily="18" charset="0"/>
-                    </a:endParaRPr>
-                  </a:p>
-                </p:txBody>
-              </p:sp>
-            </p:grpSp>
-            <p:sp>
-              <p:nvSpPr>
-                <p:cNvPr id="137" name="TextBox 136">
-                  <a:extLst>
-                    <a:ext uri="{FF2B5EF4-FFF2-40B4-BE49-F238E27FC236}">
-                      <a16:creationId xmlns:a16="http://schemas.microsoft.com/office/drawing/2014/main" id="{8E4086BF-90AE-16D0-B4BD-62589545315F}"/>
-                    </a:ext>
-                  </a:extLst>
-                </p:cNvPr>
-                <p:cNvSpPr txBox="1"/>
-                <p:nvPr/>
-              </p:nvSpPr>
-              <p:spPr>
-                <a:xfrm>
-                  <a:off x="6808092" y="5161875"/>
-                  <a:ext cx="2239250" cy="307777"/>
-                </a:xfrm>
-                <a:prstGeom prst="rect">
-                  <a:avLst/>
-                </a:prstGeom>
-                <a:noFill/>
-              </p:spPr>
-              <p:txBody>
-                <a:bodyPr wrap="square">
-                  <a:spAutoFit/>
-                </a:bodyPr>
-                <a:lstStyle/>
-                <a:p>
-                  <a:pPr algn="ctr"/>
-                  <a:r>
-                    <a:rPr lang="en-US" sz="1400" dirty="0">
-                      <a:solidFill>
-                        <a:schemeClr val="tx1"/>
-                      </a:solidFill>
-                      <a:latin typeface="Times New Roman" panose="02020603050405020304" pitchFamily="18" charset="0"/>
-                      <a:cs typeface="Times New Roman" panose="02020603050405020304" pitchFamily="18" charset="0"/>
-                    </a:rPr>
-                    <a:t>O-RAN SC : Near-RT RIC</a:t>
-                  </a:r>
-                  <a:endParaRPr lang="en-US" sz="1400" dirty="0">
-                    <a:latin typeface="Times New Roman" panose="02020603050405020304" pitchFamily="18" charset="0"/>
-                    <a:cs typeface="Times New Roman" panose="02020603050405020304" pitchFamily="18" charset="0"/>
-                  </a:endParaRPr>
-                </a:p>
-              </p:txBody>
-            </p:sp>
-            <p:sp>
-              <p:nvSpPr>
-                <p:cNvPr id="139" name="TextBox 138">
-                  <a:extLst>
-                    <a:ext uri="{FF2B5EF4-FFF2-40B4-BE49-F238E27FC236}">
-                      <a16:creationId xmlns:a16="http://schemas.microsoft.com/office/drawing/2014/main" id="{EBFB5C70-1560-E4FD-6B36-6B68117B7EA6}"/>
-                    </a:ext>
-                  </a:extLst>
-                </p:cNvPr>
-                <p:cNvSpPr txBox="1"/>
-                <p:nvPr/>
-              </p:nvSpPr>
-              <p:spPr>
-                <a:xfrm>
-                  <a:off x="6808092" y="5464822"/>
-                  <a:ext cx="2239250" cy="307777"/>
-                </a:xfrm>
-                <a:prstGeom prst="rect">
-                  <a:avLst/>
-                </a:prstGeom>
-                <a:noFill/>
-              </p:spPr>
-              <p:txBody>
-                <a:bodyPr wrap="square">
-                  <a:spAutoFit/>
-                </a:bodyPr>
-                <a:lstStyle/>
-                <a:p>
-                  <a:pPr algn="ctr"/>
-                  <a:r>
-                    <a:rPr lang="en-US" sz="1400" dirty="0">
-                      <a:solidFill>
-                        <a:schemeClr val="tx1"/>
-                      </a:solidFill>
-                      <a:latin typeface="Times New Roman" panose="02020603050405020304" pitchFamily="18" charset="0"/>
-                      <a:cs typeface="Times New Roman" panose="02020603050405020304" pitchFamily="18" charset="0"/>
-                    </a:rPr>
-                    <a:t>Mosaic5G : FlexRIC</a:t>
-                  </a:r>
-                  <a:endParaRPr lang="en-US" sz="1400" dirty="0">
-                    <a:latin typeface="Times New Roman" panose="02020603050405020304" pitchFamily="18" charset="0"/>
-                    <a:cs typeface="Times New Roman" panose="02020603050405020304" pitchFamily="18" charset="0"/>
-                  </a:endParaRPr>
-                </a:p>
-              </p:txBody>
-            </p:sp>
-          </p:grpSp>
-          <p:sp>
-            <p:nvSpPr>
-              <p:cNvPr id="283" name="TextBox 282">
-                <a:extLst>
-                  <a:ext uri="{FF2B5EF4-FFF2-40B4-BE49-F238E27FC236}">
-                    <a16:creationId xmlns:a16="http://schemas.microsoft.com/office/drawing/2014/main" id="{86324A6E-ABC2-1C25-09F7-5897B7BD58DD}"/>
-                  </a:ext>
-                </a:extLst>
-              </p:cNvPr>
-              <p:cNvSpPr txBox="1"/>
-              <p:nvPr/>
-            </p:nvSpPr>
-            <p:spPr>
-              <a:xfrm>
-                <a:off x="6696060" y="5769045"/>
-                <a:ext cx="2239249" cy="307777"/>
-              </a:xfrm>
-              <a:prstGeom prst="rect">
-                <a:avLst/>
-              </a:prstGeom>
-              <a:noFill/>
-            </p:spPr>
-            <p:txBody>
-              <a:bodyPr wrap="square">
-                <a:spAutoFit/>
-              </a:bodyPr>
-              <a:lstStyle/>
-              <a:p>
-                <a:pPr algn="ctr"/>
-                <a:r>
-                  <a:rPr lang="en-US" sz="1400" b="1" dirty="0">
-                    <a:solidFill>
-                      <a:schemeClr val="tx1"/>
-                    </a:solidFill>
-                    <a:latin typeface="Times New Roman" panose="02020603050405020304" pitchFamily="18" charset="0"/>
-                    <a:cs typeface="Times New Roman" panose="02020603050405020304" pitchFamily="18" charset="0"/>
-                  </a:rPr>
-                  <a:t>Near-RT RIC</a:t>
-                </a:r>
-                <a:endParaRPr lang="en-US" sz="1400" b="1" dirty="0">
-                  <a:latin typeface="Times New Roman" panose="02020603050405020304" pitchFamily="18" charset="0"/>
-                  <a:cs typeface="Times New Roman" panose="02020603050405020304" pitchFamily="18" charset="0"/>
-                </a:endParaRPr>
-              </a:p>
-            </p:txBody>
-          </p:sp>
-        </p:grpSp>
-        <p:grpSp>
-          <p:nvGrpSpPr>
             <p:cNvPr id="335" name="Group 334">
               <a:extLst>
                 <a:ext uri="{FF2B5EF4-FFF2-40B4-BE49-F238E27FC236}">
@@ -14515,7 +14128,7 @@
             </p:nvSpPr>
             <p:spPr>
               <a:xfrm>
-                <a:off x="9110915" y="4522182"/>
+                <a:off x="9110915" y="4535517"/>
                 <a:ext cx="2238468" cy="307777"/>
               </a:xfrm>
               <a:prstGeom prst="rect">
@@ -14906,6 +14519,440 @@
             </a:fontRef>
           </p:style>
         </p:cxnSp>
+        <p:grpSp>
+          <p:nvGrpSpPr>
+            <p:cNvPr id="233" name="Group 232">
+              <a:extLst>
+                <a:ext uri="{FF2B5EF4-FFF2-40B4-BE49-F238E27FC236}">
+                  <a16:creationId xmlns:a16="http://schemas.microsoft.com/office/drawing/2014/main" id="{00ED7F0F-60DC-1536-A747-6184C3BCA9BE}"/>
+                </a:ext>
+              </a:extLst>
+            </p:cNvPr>
+            <p:cNvGrpSpPr/>
+            <p:nvPr/>
+          </p:nvGrpSpPr>
+          <p:grpSpPr>
+            <a:xfrm>
+              <a:off x="6497958" y="2781548"/>
+              <a:ext cx="2239249" cy="1233863"/>
+              <a:chOff x="1028392" y="2318655"/>
+              <a:chExt cx="2239249" cy="1233863"/>
+            </a:xfrm>
+          </p:grpSpPr>
+          <p:sp>
+            <p:nvSpPr>
+              <p:cNvPr id="234" name="TextBox 233">
+                <a:extLst>
+                  <a:ext uri="{FF2B5EF4-FFF2-40B4-BE49-F238E27FC236}">
+                    <a16:creationId xmlns:a16="http://schemas.microsoft.com/office/drawing/2014/main" id="{1D447C6C-DBB4-1E2B-28C0-122262FFC526}"/>
+                  </a:ext>
+                </a:extLst>
+              </p:cNvPr>
+              <p:cNvSpPr txBox="1"/>
+              <p:nvPr/>
+            </p:nvSpPr>
+            <p:spPr>
+              <a:xfrm>
+                <a:off x="1028392" y="3244741"/>
+                <a:ext cx="2239249" cy="307777"/>
+              </a:xfrm>
+              <a:prstGeom prst="rect">
+                <a:avLst/>
+              </a:prstGeom>
+              <a:noFill/>
+            </p:spPr>
+            <p:txBody>
+              <a:bodyPr wrap="square">
+                <a:spAutoFit/>
+              </a:bodyPr>
+              <a:lstStyle/>
+              <a:p>
+                <a:pPr algn="ctr"/>
+                <a:r>
+                  <a:rPr lang="en-US" sz="1400" b="1" dirty="0">
+                    <a:solidFill>
+                      <a:schemeClr val="tx1"/>
+                    </a:solidFill>
+                    <a:latin typeface="Times New Roman" panose="02020603050405020304" pitchFamily="18" charset="0"/>
+                    <a:cs typeface="Times New Roman" panose="02020603050405020304" pitchFamily="18" charset="0"/>
+                  </a:rPr>
+                  <a:t>Near-RT RIC</a:t>
+                </a:r>
+                <a:endParaRPr lang="en-US" sz="1400" b="1" dirty="0">
+                  <a:latin typeface="Times New Roman" panose="02020603050405020304" pitchFamily="18" charset="0"/>
+                  <a:cs typeface="Times New Roman" panose="02020603050405020304" pitchFamily="18" charset="0"/>
+                </a:endParaRPr>
+              </a:p>
+            </p:txBody>
+          </p:sp>
+          <p:grpSp>
+            <p:nvGrpSpPr>
+              <p:cNvPr id="235" name="Group 234">
+                <a:extLst>
+                  <a:ext uri="{FF2B5EF4-FFF2-40B4-BE49-F238E27FC236}">
+                    <a16:creationId xmlns:a16="http://schemas.microsoft.com/office/drawing/2014/main" id="{D43FEA2F-F6B1-5C6E-588B-A05B26190774}"/>
+                  </a:ext>
+                </a:extLst>
+              </p:cNvPr>
+              <p:cNvGrpSpPr/>
+              <p:nvPr/>
+            </p:nvGrpSpPr>
+            <p:grpSpPr>
+              <a:xfrm>
+                <a:off x="1028392" y="2318655"/>
+                <a:ext cx="2239249" cy="923272"/>
+                <a:chOff x="1590040" y="5303322"/>
+                <a:chExt cx="2374765" cy="923272"/>
+              </a:xfrm>
+            </p:grpSpPr>
+            <p:sp>
+              <p:nvSpPr>
+                <p:cNvPr id="239" name="Rectangle: Rounded Corners 238">
+                  <a:extLst>
+                    <a:ext uri="{FF2B5EF4-FFF2-40B4-BE49-F238E27FC236}">
+                      <a16:creationId xmlns:a16="http://schemas.microsoft.com/office/drawing/2014/main" id="{A4D60007-5474-BEA2-4BFA-9BC486259CA7}"/>
+                    </a:ext>
+                  </a:extLst>
+                </p:cNvPr>
+                <p:cNvSpPr/>
+                <p:nvPr/>
+              </p:nvSpPr>
+              <p:spPr>
+                <a:xfrm>
+                  <a:off x="1590040" y="5303322"/>
+                  <a:ext cx="2374765" cy="923272"/>
+                </a:xfrm>
+                <a:prstGeom prst="roundRect">
+                  <a:avLst>
+                    <a:gd name="adj" fmla="val 9466"/>
+                  </a:avLst>
+                </a:prstGeom>
+                <a:solidFill>
+                  <a:schemeClr val="bg1">
+                    <a:lumMod val="85000"/>
+                  </a:schemeClr>
+                </a:solidFill>
+                <a:ln w="28575">
+                  <a:noFill/>
+                </a:ln>
+              </p:spPr>
+              <p:style>
+                <a:lnRef idx="2">
+                  <a:schemeClr val="accent1">
+                    <a:shade val="15000"/>
+                  </a:schemeClr>
+                </a:lnRef>
+                <a:fillRef idx="1">
+                  <a:schemeClr val="accent1"/>
+                </a:fillRef>
+                <a:effectRef idx="0">
+                  <a:schemeClr val="accent1"/>
+                </a:effectRef>
+                <a:fontRef idx="minor">
+                  <a:schemeClr val="lt1"/>
+                </a:fontRef>
+              </p:style>
+              <p:txBody>
+                <a:bodyPr rtlCol="0" anchor="ctr"/>
+                <a:lstStyle/>
+                <a:p>
+                  <a:pPr algn="ctr"/>
+                  <a:endParaRPr lang="en-US" dirty="0">
+                    <a:latin typeface="Times New Roman" panose="02020603050405020304" pitchFamily="18" charset="0"/>
+                    <a:cs typeface="Times New Roman" panose="02020603050405020304" pitchFamily="18" charset="0"/>
+                  </a:endParaRPr>
+                </a:p>
+              </p:txBody>
+            </p:sp>
+            <p:sp>
+              <p:nvSpPr>
+                <p:cNvPr id="240" name="Rectangle 239">
+                  <a:extLst>
+                    <a:ext uri="{FF2B5EF4-FFF2-40B4-BE49-F238E27FC236}">
+                      <a16:creationId xmlns:a16="http://schemas.microsoft.com/office/drawing/2014/main" id="{664D770F-BF79-4EE6-E4F3-5C75388C93E3}"/>
+                    </a:ext>
+                  </a:extLst>
+                </p:cNvPr>
+                <p:cNvSpPr/>
+                <p:nvPr/>
+              </p:nvSpPr>
+              <p:spPr>
+                <a:xfrm>
+                  <a:off x="1590040" y="5603165"/>
+                  <a:ext cx="2374765" cy="323587"/>
+                </a:xfrm>
+                <a:prstGeom prst="rect">
+                  <a:avLst/>
+                </a:prstGeom>
+                <a:solidFill>
+                  <a:schemeClr val="bg1">
+                    <a:lumMod val="95000"/>
+                  </a:schemeClr>
+                </a:solidFill>
+                <a:ln>
+                  <a:noFill/>
+                </a:ln>
+              </p:spPr>
+              <p:style>
+                <a:lnRef idx="2">
+                  <a:schemeClr val="accent1">
+                    <a:shade val="15000"/>
+                  </a:schemeClr>
+                </a:lnRef>
+                <a:fillRef idx="1">
+                  <a:schemeClr val="accent1"/>
+                </a:fillRef>
+                <a:effectRef idx="0">
+                  <a:schemeClr val="accent1"/>
+                </a:effectRef>
+                <a:fontRef idx="minor">
+                  <a:schemeClr val="lt1"/>
+                </a:fontRef>
+              </p:style>
+              <p:txBody>
+                <a:bodyPr rtlCol="0" anchor="ctr"/>
+                <a:lstStyle/>
+                <a:p>
+                  <a:pPr algn="ctr"/>
+                  <a:endParaRPr lang="en-US"/>
+                </a:p>
+              </p:txBody>
+            </p:sp>
+            <p:sp>
+              <p:nvSpPr>
+                <p:cNvPr id="241" name="Rectangle: Rounded Corners 240">
+                  <a:extLst>
+                    <a:ext uri="{FF2B5EF4-FFF2-40B4-BE49-F238E27FC236}">
+                      <a16:creationId xmlns:a16="http://schemas.microsoft.com/office/drawing/2014/main" id="{A848D181-7B55-B5B1-5BAE-AF8A42EC5A00}"/>
+                    </a:ext>
+                  </a:extLst>
+                </p:cNvPr>
+                <p:cNvSpPr/>
+                <p:nvPr/>
+              </p:nvSpPr>
+              <p:spPr>
+                <a:xfrm>
+                  <a:off x="1590040" y="5303322"/>
+                  <a:ext cx="2374765" cy="923272"/>
+                </a:xfrm>
+                <a:prstGeom prst="roundRect">
+                  <a:avLst>
+                    <a:gd name="adj" fmla="val 9879"/>
+                  </a:avLst>
+                </a:prstGeom>
+                <a:noFill/>
+                <a:ln w="12700">
+                  <a:solidFill>
+                    <a:schemeClr val="tx1"/>
+                  </a:solidFill>
+                </a:ln>
+              </p:spPr>
+              <p:style>
+                <a:lnRef idx="2">
+                  <a:schemeClr val="accent1">
+                    <a:shade val="15000"/>
+                  </a:schemeClr>
+                </a:lnRef>
+                <a:fillRef idx="1">
+                  <a:schemeClr val="accent1"/>
+                </a:fillRef>
+                <a:effectRef idx="0">
+                  <a:schemeClr val="accent1"/>
+                </a:effectRef>
+                <a:fontRef idx="minor">
+                  <a:schemeClr val="lt1"/>
+                </a:fontRef>
+              </p:style>
+              <p:txBody>
+                <a:bodyPr rtlCol="0" anchor="ctr"/>
+                <a:lstStyle/>
+                <a:p>
+                  <a:pPr algn="ctr"/>
+                  <a:endParaRPr lang="en-US" dirty="0">
+                    <a:latin typeface="Times New Roman" panose="02020603050405020304" pitchFamily="18" charset="0"/>
+                    <a:cs typeface="Times New Roman" panose="02020603050405020304" pitchFamily="18" charset="0"/>
+                  </a:endParaRPr>
+                </a:p>
+              </p:txBody>
+            </p:sp>
+          </p:grpSp>
+          <p:sp>
+            <p:nvSpPr>
+              <p:cNvPr id="236" name="TextBox 235">
+                <a:extLst>
+                  <a:ext uri="{FF2B5EF4-FFF2-40B4-BE49-F238E27FC236}">
+                    <a16:creationId xmlns:a16="http://schemas.microsoft.com/office/drawing/2014/main" id="{A60306A6-CD1B-62E6-4CD0-FA864383631B}"/>
+                  </a:ext>
+                </a:extLst>
+              </p:cNvPr>
+              <p:cNvSpPr txBox="1"/>
+              <p:nvPr/>
+            </p:nvSpPr>
+            <p:spPr>
+              <a:xfrm>
+                <a:off x="1028392" y="2928594"/>
+                <a:ext cx="2239249" cy="307777"/>
+              </a:xfrm>
+              <a:prstGeom prst="rect">
+                <a:avLst/>
+              </a:prstGeom>
+              <a:noFill/>
+            </p:spPr>
+            <p:txBody>
+              <a:bodyPr wrap="square">
+                <a:spAutoFit/>
+              </a:bodyPr>
+              <a:lstStyle/>
+              <a:p>
+                <a:pPr algn="ctr"/>
+                <a:r>
+                  <a:rPr lang="en-US" sz="1400" dirty="0">
+                    <a:solidFill>
+                      <a:schemeClr val="tx1"/>
+                    </a:solidFill>
+                    <a:latin typeface="Times New Roman" panose="02020603050405020304" pitchFamily="18" charset="0"/>
+                    <a:cs typeface="Times New Roman" panose="02020603050405020304" pitchFamily="18" charset="0"/>
+                  </a:rPr>
+                  <a:t>Mosaic5G : FlexRIC</a:t>
+                </a:r>
+                <a:endParaRPr lang="en-US" sz="1400" dirty="0">
+                  <a:latin typeface="Times New Roman" panose="02020603050405020304" pitchFamily="18" charset="0"/>
+                  <a:cs typeface="Times New Roman" panose="02020603050405020304" pitchFamily="18" charset="0"/>
+                </a:endParaRPr>
+              </a:p>
+            </p:txBody>
+          </p:sp>
+          <p:sp>
+            <p:nvSpPr>
+              <p:cNvPr id="237" name="TextBox 236">
+                <a:extLst>
+                  <a:ext uri="{FF2B5EF4-FFF2-40B4-BE49-F238E27FC236}">
+                    <a16:creationId xmlns:a16="http://schemas.microsoft.com/office/drawing/2014/main" id="{B43BC923-2C5D-2AAE-BD1F-3637CD533B4A}"/>
+                  </a:ext>
+                </a:extLst>
+              </p:cNvPr>
+              <p:cNvSpPr txBox="1"/>
+              <p:nvPr/>
+            </p:nvSpPr>
+            <p:spPr>
+              <a:xfrm>
+                <a:off x="1028392" y="2629568"/>
+                <a:ext cx="2239249" cy="307777"/>
+              </a:xfrm>
+              <a:prstGeom prst="rect">
+                <a:avLst/>
+              </a:prstGeom>
+              <a:noFill/>
+            </p:spPr>
+            <p:txBody>
+              <a:bodyPr wrap="square">
+                <a:spAutoFit/>
+              </a:bodyPr>
+              <a:lstStyle/>
+              <a:p>
+                <a:pPr algn="ctr"/>
+                <a:r>
+                  <a:rPr lang="en-US" sz="1400" dirty="0">
+                    <a:solidFill>
+                      <a:schemeClr val="tx1"/>
+                    </a:solidFill>
+                    <a:latin typeface="Times New Roman" panose="02020603050405020304" pitchFamily="18" charset="0"/>
+                    <a:cs typeface="Times New Roman" panose="02020603050405020304" pitchFamily="18" charset="0"/>
+                  </a:rPr>
+                  <a:t>O-RAN SC : Near-RT RIC</a:t>
+                </a:r>
+                <a:endParaRPr lang="en-US" sz="1400" dirty="0">
+                  <a:latin typeface="Times New Roman" panose="02020603050405020304" pitchFamily="18" charset="0"/>
+                  <a:cs typeface="Times New Roman" panose="02020603050405020304" pitchFamily="18" charset="0"/>
+                </a:endParaRPr>
+              </a:p>
+            </p:txBody>
+          </p:sp>
+          <p:sp>
+            <p:nvSpPr>
+              <p:cNvPr id="238" name="TextBox 237">
+                <a:extLst>
+                  <a:ext uri="{FF2B5EF4-FFF2-40B4-BE49-F238E27FC236}">
+                    <a16:creationId xmlns:a16="http://schemas.microsoft.com/office/drawing/2014/main" id="{01F21BA0-7B22-2985-C4B7-BEC32317C4DA}"/>
+                  </a:ext>
+                </a:extLst>
+              </p:cNvPr>
+              <p:cNvSpPr txBox="1"/>
+              <p:nvPr/>
+            </p:nvSpPr>
+            <p:spPr>
+              <a:xfrm>
+                <a:off x="1028392" y="2330542"/>
+                <a:ext cx="2239249" cy="307777"/>
+              </a:xfrm>
+              <a:prstGeom prst="rect">
+                <a:avLst/>
+              </a:prstGeom>
+              <a:noFill/>
+            </p:spPr>
+            <p:txBody>
+              <a:bodyPr wrap="square">
+                <a:spAutoFit/>
+              </a:bodyPr>
+              <a:lstStyle/>
+              <a:p>
+                <a:pPr algn="ctr"/>
+                <a:r>
+                  <a:rPr lang="en-US" sz="1400" dirty="0">
+                    <a:latin typeface="Times New Roman" panose="02020603050405020304" pitchFamily="18" charset="0"/>
+                    <a:cs typeface="Times New Roman" panose="02020603050405020304" pitchFamily="18" charset="0"/>
+                  </a:rPr>
+                  <a:t>O-RAN SC : A1 Simulator</a:t>
+                </a:r>
+              </a:p>
+            </p:txBody>
+          </p:sp>
+        </p:grpSp>
+        <p:cxnSp>
+          <p:nvCxnSpPr>
+            <p:cNvPr id="255" name="Straight Connector 254">
+              <a:extLst>
+                <a:ext uri="{FF2B5EF4-FFF2-40B4-BE49-F238E27FC236}">
+                  <a16:creationId xmlns:a16="http://schemas.microsoft.com/office/drawing/2014/main" id="{91DD07F7-2F86-0E54-F54F-7BDC7A59D6BD}"/>
+                </a:ext>
+              </a:extLst>
+            </p:cNvPr>
+            <p:cNvCxnSpPr>
+              <a:cxnSpLocks/>
+              <a:stCxn id="238" idx="3"/>
+              <a:endCxn id="315" idx="1"/>
+            </p:cNvCxnSpPr>
+            <p:nvPr/>
+          </p:nvCxnSpPr>
+          <p:spPr>
+            <a:xfrm>
+              <a:off x="8737207" y="2947324"/>
+              <a:ext cx="639703" cy="589820"/>
+            </a:xfrm>
+            <a:prstGeom prst="line">
+              <a:avLst/>
+            </a:prstGeom>
+            <a:ln w="12700">
+              <a:solidFill>
+                <a:schemeClr val="tx1"/>
+              </a:solidFill>
+            </a:ln>
+          </p:spPr>
+          <p:style>
+            <a:lnRef idx="2">
+              <a:schemeClr val="accent1"/>
+            </a:lnRef>
+            <a:fillRef idx="0">
+              <a:schemeClr val="accent1"/>
+            </a:fillRef>
+            <a:effectRef idx="1">
+              <a:schemeClr val="accent1"/>
+            </a:effectRef>
+            <a:fontRef idx="minor">
+              <a:schemeClr val="tx1"/>
+            </a:fontRef>
+          </p:style>
+        </p:cxnSp>
       </p:grpSp>
     </p:spTree>
     <p:extLst>
@@ -14994,10 +15041,10 @@
       </p:sp>
       <p:grpSp>
         <p:nvGrpSpPr>
-          <p:cNvPr id="71" name="Group 70">
+          <p:cNvPr id="90" name="Group 89">
             <a:extLst>
               <a:ext uri="{FF2B5EF4-FFF2-40B4-BE49-F238E27FC236}">
-                <a16:creationId xmlns:a16="http://schemas.microsoft.com/office/drawing/2014/main" id="{985DB30F-01F0-302E-005C-3A0C3D22E960}"/>
+                <a16:creationId xmlns:a16="http://schemas.microsoft.com/office/drawing/2014/main" id="{E8E01907-679C-CCC9-D3A2-B1DF57432798}"/>
               </a:ext>
             </a:extLst>
           </p:cNvPr>
@@ -15082,7 +15129,6 @@
             </p:cNvPr>
             <p:cNvCxnSpPr>
               <a:cxnSpLocks/>
-              <a:endCxn id="35" idx="1"/>
             </p:cNvCxnSpPr>
             <p:nvPr/>
           </p:nvCxnSpPr>
@@ -15118,10 +15164,10 @@
         </p:cxnSp>
         <p:grpSp>
           <p:nvGrpSpPr>
-            <p:cNvPr id="9" name="Group 8">
+            <p:cNvPr id="67" name="Group 66">
               <a:extLst>
                 <a:ext uri="{FF2B5EF4-FFF2-40B4-BE49-F238E27FC236}">
-                  <a16:creationId xmlns:a16="http://schemas.microsoft.com/office/drawing/2014/main" id="{316BC739-B35F-85FE-983B-5189F671AA40}"/>
+                  <a16:creationId xmlns:a16="http://schemas.microsoft.com/office/drawing/2014/main" id="{94C82875-16D7-328F-D44F-2C1A08F28D46}"/>
                 </a:ext>
               </a:extLst>
             </p:cNvPr>
@@ -15131,145 +15177,79 @@
           <p:grpSpPr>
             <a:xfrm>
               <a:off x="6498724" y="2172257"/>
-              <a:ext cx="2302213" cy="647296"/>
-              <a:chOff x="7063677" y="4951549"/>
-              <a:chExt cx="2302213" cy="647296"/>
+              <a:ext cx="2239251" cy="333931"/>
+              <a:chOff x="7168594" y="4200673"/>
+              <a:chExt cx="2239251" cy="299842"/>
             </a:xfrm>
           </p:grpSpPr>
-          <p:grpSp>
-            <p:nvGrpSpPr>
-              <p:cNvPr id="67" name="Group 66">
+          <p:sp>
+            <p:nvSpPr>
+              <p:cNvPr id="69" name="Rectangle: Rounded Corners 68">
                 <a:extLst>
                   <a:ext uri="{FF2B5EF4-FFF2-40B4-BE49-F238E27FC236}">
-                    <a16:creationId xmlns:a16="http://schemas.microsoft.com/office/drawing/2014/main" id="{94C82875-16D7-328F-D44F-2C1A08F28D46}"/>
+                    <a16:creationId xmlns:a16="http://schemas.microsoft.com/office/drawing/2014/main" id="{E3E5506D-785E-C802-0B5C-83BCF4D57BC8}"/>
                   </a:ext>
                 </a:extLst>
               </p:cNvPr>
-              <p:cNvGrpSpPr/>
+              <p:cNvSpPr/>
               <p:nvPr/>
-            </p:nvGrpSpPr>
-            <p:grpSpPr>
+            </p:nvSpPr>
+            <p:spPr>
               <a:xfrm>
-                <a:off x="7063677" y="4951549"/>
-                <a:ext cx="2239251" cy="333931"/>
-                <a:chOff x="7168594" y="4200673"/>
-                <a:chExt cx="2239251" cy="299842"/>
+                <a:off x="7168596" y="4200673"/>
+                <a:ext cx="2239249" cy="299842"/>
               </a:xfrm>
-            </p:grpSpPr>
-            <p:sp>
-              <p:nvSpPr>
-                <p:cNvPr id="69" name="Rectangle: Rounded Corners 68">
-                  <a:extLst>
-                    <a:ext uri="{FF2B5EF4-FFF2-40B4-BE49-F238E27FC236}">
-                      <a16:creationId xmlns:a16="http://schemas.microsoft.com/office/drawing/2014/main" id="{E3E5506D-785E-C802-0B5C-83BCF4D57BC8}"/>
-                    </a:ext>
-                  </a:extLst>
-                </p:cNvPr>
-                <p:cNvSpPr/>
-                <p:nvPr/>
-              </p:nvSpPr>
-              <p:spPr>
-                <a:xfrm>
-                  <a:off x="7168596" y="4200673"/>
-                  <a:ext cx="2239249" cy="299842"/>
-                </a:xfrm>
-                <a:prstGeom prst="roundRect">
-                  <a:avLst>
-                    <a:gd name="adj" fmla="val 28947"/>
-                  </a:avLst>
-                </a:prstGeom>
+              <a:prstGeom prst="roundRect">
+                <a:avLst>
+                  <a:gd name="adj" fmla="val 28947"/>
+                </a:avLst>
+              </a:prstGeom>
+              <a:solidFill>
+                <a:srgbClr val="262626"/>
+              </a:solidFill>
+              <a:ln w="12700">
                 <a:solidFill>
-                  <a:srgbClr val="262626"/>
+                  <a:schemeClr val="bg1"/>
                 </a:solidFill>
-                <a:ln w="12700">
+              </a:ln>
+            </p:spPr>
+            <p:style>
+              <a:lnRef idx="2">
+                <a:schemeClr val="accent1">
+                  <a:shade val="15000"/>
+                </a:schemeClr>
+              </a:lnRef>
+              <a:fillRef idx="1">
+                <a:schemeClr val="accent1"/>
+              </a:fillRef>
+              <a:effectRef idx="0">
+                <a:schemeClr val="accent1"/>
+              </a:effectRef>
+              <a:fontRef idx="minor">
+                <a:schemeClr val="lt1"/>
+              </a:fontRef>
+            </p:style>
+            <p:txBody>
+              <a:bodyPr rtlCol="0" anchor="ctr"/>
+              <a:lstStyle/>
+              <a:p>
+                <a:pPr algn="ctr"/>
+                <a:endParaRPr lang="en-US" sz="1400" dirty="0">
                   <a:solidFill>
-                    <a:schemeClr val="bg1"/>
+                    <a:schemeClr val="tx1"/>
                   </a:solidFill>
-                </a:ln>
-              </p:spPr>
-              <p:style>
-                <a:lnRef idx="2">
-                  <a:schemeClr val="accent1">
-                    <a:shade val="15000"/>
-                  </a:schemeClr>
-                </a:lnRef>
-                <a:fillRef idx="1">
-                  <a:schemeClr val="accent1"/>
-                </a:fillRef>
-                <a:effectRef idx="0">
-                  <a:schemeClr val="accent1"/>
-                </a:effectRef>
-                <a:fontRef idx="minor">
-                  <a:schemeClr val="lt1"/>
-                </a:fontRef>
-              </p:style>
-              <p:txBody>
-                <a:bodyPr rtlCol="0" anchor="ctr"/>
-                <a:lstStyle/>
-                <a:p>
-                  <a:pPr algn="ctr"/>
-                  <a:endParaRPr lang="en-US" sz="1400" dirty="0">
-                    <a:solidFill>
-                      <a:schemeClr val="tx1"/>
-                    </a:solidFill>
-                    <a:latin typeface="Times New Roman" panose="02020603050405020304" pitchFamily="18" charset="0"/>
-                    <a:cs typeface="Times New Roman" panose="02020603050405020304" pitchFamily="18" charset="0"/>
-                  </a:endParaRPr>
-                </a:p>
-              </p:txBody>
-            </p:sp>
-            <p:sp>
-              <p:nvSpPr>
-                <p:cNvPr id="70" name="TextBox 69">
-                  <a:extLst>
-                    <a:ext uri="{FF2B5EF4-FFF2-40B4-BE49-F238E27FC236}">
-                      <a16:creationId xmlns:a16="http://schemas.microsoft.com/office/drawing/2014/main" id="{A6BD8DC3-F519-6540-99EC-9071E4B84D62}"/>
-                    </a:ext>
-                  </a:extLst>
-                </p:cNvPr>
-                <p:cNvSpPr txBox="1"/>
-                <p:nvPr/>
-              </p:nvSpPr>
-              <p:spPr>
-                <a:xfrm>
-                  <a:off x="7168594" y="4201157"/>
-                  <a:ext cx="2238468" cy="276358"/>
-                </a:xfrm>
-                <a:prstGeom prst="rect">
-                  <a:avLst/>
-                </a:prstGeom>
-                <a:noFill/>
-                <a:ln w="12700">
-                  <a:noFill/>
-                </a:ln>
-              </p:spPr>
-              <p:txBody>
-                <a:bodyPr wrap="square">
-                  <a:spAutoFit/>
-                </a:bodyPr>
-                <a:lstStyle/>
-                <a:p>
-                  <a:pPr algn="ctr"/>
-                  <a:r>
-                    <a:rPr lang="en-US" sz="1400" dirty="0">
-                      <a:solidFill>
-                        <a:schemeClr val="bg1"/>
-                      </a:solidFill>
-                      <a:latin typeface="Times New Roman" panose="02020603050405020304" pitchFamily="18" charset="0"/>
-                      <a:cs typeface="Times New Roman" panose="02020603050405020304" pitchFamily="18" charset="0"/>
-                    </a:rPr>
-                    <a:t>Open5GS</a:t>
-                  </a:r>
-                </a:p>
-              </p:txBody>
-            </p:sp>
-          </p:grpSp>
+                  <a:latin typeface="Times New Roman" panose="02020603050405020304" pitchFamily="18" charset="0"/>
+                  <a:cs typeface="Times New Roman" panose="02020603050405020304" pitchFamily="18" charset="0"/>
+                </a:endParaRPr>
+              </a:p>
+            </p:txBody>
+          </p:sp>
           <p:sp>
             <p:nvSpPr>
-              <p:cNvPr id="68" name="TextBox 67">
+              <p:cNvPr id="70" name="TextBox 69">
                 <a:extLst>
                   <a:ext uri="{FF2B5EF4-FFF2-40B4-BE49-F238E27FC236}">
-                    <a16:creationId xmlns:a16="http://schemas.microsoft.com/office/drawing/2014/main" id="{94615E0D-4553-284E-CE2D-CF14F759AE84}"/>
+                    <a16:creationId xmlns:a16="http://schemas.microsoft.com/office/drawing/2014/main" id="{A6BD8DC3-F519-6540-99EC-9071E4B84D62}"/>
                   </a:ext>
                 </a:extLst>
               </p:cNvPr>
@@ -15278,13 +15258,16 @@
             </p:nvSpPr>
             <p:spPr>
               <a:xfrm>
-                <a:off x="7126641" y="5291068"/>
-                <a:ext cx="2239249" cy="307777"/>
+                <a:off x="7168594" y="4201157"/>
+                <a:ext cx="2238468" cy="276358"/>
               </a:xfrm>
               <a:prstGeom prst="rect">
                 <a:avLst/>
               </a:prstGeom>
               <a:noFill/>
+              <a:ln w="12700">
+                <a:noFill/>
+              </a:ln>
             </p:spPr>
             <p:txBody>
               <a:bodyPr wrap="square">
@@ -15294,14 +15277,14 @@
               <a:p>
                 <a:pPr algn="ctr"/>
                 <a:r>
-                  <a:rPr lang="en-US" sz="1400" b="1" dirty="0">
+                  <a:rPr lang="en-US" sz="1400" dirty="0">
                     <a:solidFill>
                       <a:schemeClr val="bg1"/>
                     </a:solidFill>
                     <a:latin typeface="Times New Roman" panose="02020603050405020304" pitchFamily="18" charset="0"/>
                     <a:cs typeface="Times New Roman" panose="02020603050405020304" pitchFamily="18" charset="0"/>
                   </a:rPr>
-                  <a:t>5G Core Network</a:t>
+                  <a:t>Open5GS</a:t>
                 </a:r>
               </a:p>
             </p:txBody>
@@ -15546,15 +15529,15 @@
             </p:cNvPr>
             <p:cNvCxnSpPr>
               <a:cxnSpLocks/>
-              <a:stCxn id="35" idx="3"/>
+              <a:stCxn id="81" idx="3"/>
               <a:endCxn id="30" idx="1"/>
             </p:cNvCxnSpPr>
             <p:nvPr/>
           </p:nvCxnSpPr>
           <p:spPr>
             <a:xfrm>
-              <a:off x="8737209" y="3256258"/>
-              <a:ext cx="639701" cy="267551"/>
+              <a:off x="8737207" y="3246350"/>
+              <a:ext cx="639703" cy="290794"/>
             </a:xfrm>
             <a:prstGeom prst="line">
               <a:avLst/>
@@ -15563,6 +15546,7 @@
               <a:solidFill>
                 <a:schemeClr val="bg1"/>
               </a:solidFill>
+              <a:prstDash val="sysDot"/>
             </a:ln>
           </p:spPr>
           <p:style>
@@ -15681,7 +15665,6 @@
             </p:cNvPr>
             <p:cNvCxnSpPr>
               <a:cxnSpLocks/>
-              <a:endCxn id="35" idx="1"/>
             </p:cNvCxnSpPr>
             <p:nvPr/>
           </p:nvCxnSpPr>
@@ -15725,7 +15708,6 @@
             </p:cNvPr>
             <p:cNvCxnSpPr>
               <a:cxnSpLocks/>
-              <a:endCxn id="36" idx="1"/>
             </p:cNvCxnSpPr>
             <p:nvPr/>
           </p:nvCxnSpPr>
@@ -15770,7 +15752,6 @@
             <p:cNvCxnSpPr>
               <a:cxnSpLocks/>
               <a:stCxn id="57" idx="3"/>
-              <a:endCxn id="35" idx="1"/>
             </p:cNvCxnSpPr>
             <p:nvPr/>
           </p:nvCxnSpPr>
@@ -15814,7 +15795,6 @@
             </p:cNvPr>
             <p:cNvCxnSpPr>
               <a:cxnSpLocks/>
-              <a:endCxn id="36" idx="1"/>
             </p:cNvCxnSpPr>
             <p:nvPr/>
           </p:nvCxnSpPr>
@@ -17378,364 +17358,6 @@
         </p:grpSp>
         <p:grpSp>
           <p:nvGrpSpPr>
-            <p:cNvPr id="27" name="Group 26">
-              <a:extLst>
-                <a:ext uri="{FF2B5EF4-FFF2-40B4-BE49-F238E27FC236}">
-                  <a16:creationId xmlns:a16="http://schemas.microsoft.com/office/drawing/2014/main" id="{5726D8C5-614D-56A4-C7DA-2AE1FE738FC2}"/>
-                </a:ext>
-              </a:extLst>
-            </p:cNvPr>
-            <p:cNvGrpSpPr/>
-            <p:nvPr/>
-          </p:nvGrpSpPr>
-          <p:grpSpPr>
-            <a:xfrm>
-              <a:off x="6497959" y="3084878"/>
-              <a:ext cx="2239250" cy="930533"/>
-              <a:chOff x="6696060" y="5146289"/>
-              <a:chExt cx="2239250" cy="930533"/>
-            </a:xfrm>
-          </p:grpSpPr>
-          <p:grpSp>
-            <p:nvGrpSpPr>
-              <p:cNvPr id="32" name="Group 31">
-                <a:extLst>
-                  <a:ext uri="{FF2B5EF4-FFF2-40B4-BE49-F238E27FC236}">
-                    <a16:creationId xmlns:a16="http://schemas.microsoft.com/office/drawing/2014/main" id="{820554D9-5169-E86E-F3E1-6FD7B1FB0948}"/>
-                  </a:ext>
-                </a:extLst>
-              </p:cNvPr>
-              <p:cNvGrpSpPr/>
-              <p:nvPr/>
-            </p:nvGrpSpPr>
-            <p:grpSpPr>
-              <a:xfrm>
-                <a:off x="6696060" y="5146289"/>
-                <a:ext cx="2239250" cy="618690"/>
-                <a:chOff x="6808092" y="5153909"/>
-                <a:chExt cx="2239250" cy="618690"/>
-              </a:xfrm>
-            </p:grpSpPr>
-            <p:grpSp>
-              <p:nvGrpSpPr>
-                <p:cNvPr id="34" name="Group 33">
-                  <a:extLst>
-                    <a:ext uri="{FF2B5EF4-FFF2-40B4-BE49-F238E27FC236}">
-                      <a16:creationId xmlns:a16="http://schemas.microsoft.com/office/drawing/2014/main" id="{0E46935C-6F39-D19A-CFCF-D62A86034828}"/>
-                    </a:ext>
-                  </a:extLst>
-                </p:cNvPr>
-                <p:cNvGrpSpPr/>
-                <p:nvPr/>
-              </p:nvGrpSpPr>
-              <p:grpSpPr>
-                <a:xfrm>
-                  <a:off x="6808092" y="5153909"/>
-                  <a:ext cx="2239249" cy="618690"/>
-                  <a:chOff x="4021891" y="2194877"/>
-                  <a:chExt cx="2239249" cy="618690"/>
-                </a:xfrm>
-              </p:grpSpPr>
-              <p:sp>
-                <p:nvSpPr>
-                  <p:cNvPr id="37" name="Rectangle: Rounded Corners 36">
-                    <a:extLst>
-                      <a:ext uri="{FF2B5EF4-FFF2-40B4-BE49-F238E27FC236}">
-                        <a16:creationId xmlns:a16="http://schemas.microsoft.com/office/drawing/2014/main" id="{2B8A2F6C-2A67-260F-6F24-A4C6D93DEC79}"/>
-                      </a:ext>
-                    </a:extLst>
-                  </p:cNvPr>
-                  <p:cNvSpPr/>
-                  <p:nvPr/>
-                </p:nvSpPr>
-                <p:spPr>
-                  <a:xfrm>
-                    <a:off x="4021891" y="2194877"/>
-                    <a:ext cx="2239249" cy="618689"/>
-                  </a:xfrm>
-                  <a:prstGeom prst="roundRect">
-                    <a:avLst>
-                      <a:gd name="adj" fmla="val 12974"/>
-                    </a:avLst>
-                  </a:prstGeom>
-                  <a:solidFill>
-                    <a:srgbClr val="262626"/>
-                  </a:solidFill>
-                  <a:ln w="28575">
-                    <a:noFill/>
-                  </a:ln>
-                </p:spPr>
-                <p:style>
-                  <a:lnRef idx="2">
-                    <a:schemeClr val="accent1">
-                      <a:shade val="15000"/>
-                    </a:schemeClr>
-                  </a:lnRef>
-                  <a:fillRef idx="1">
-                    <a:schemeClr val="accent1"/>
-                  </a:fillRef>
-                  <a:effectRef idx="0">
-                    <a:schemeClr val="accent1"/>
-                  </a:effectRef>
-                  <a:fontRef idx="minor">
-                    <a:schemeClr val="lt1"/>
-                  </a:fontRef>
-                </p:style>
-                <p:txBody>
-                  <a:bodyPr rtlCol="0" anchor="ctr"/>
-                  <a:lstStyle/>
-                  <a:p>
-                    <a:pPr algn="ctr"/>
-                    <a:endParaRPr lang="en-US" dirty="0">
-                      <a:latin typeface="Times New Roman" panose="02020603050405020304" pitchFamily="18" charset="0"/>
-                      <a:cs typeface="Times New Roman" panose="02020603050405020304" pitchFamily="18" charset="0"/>
-                    </a:endParaRPr>
-                  </a:p>
-                </p:txBody>
-              </p:sp>
-              <p:sp>
-                <p:nvSpPr>
-                  <p:cNvPr id="38" name="Rectangle: Top Corners Rounded 37">
-                    <a:extLst>
-                      <a:ext uri="{FF2B5EF4-FFF2-40B4-BE49-F238E27FC236}">
-                        <a16:creationId xmlns:a16="http://schemas.microsoft.com/office/drawing/2014/main" id="{DF0159E4-F128-74A1-8A96-41E2DB712167}"/>
-                      </a:ext>
-                    </a:extLst>
-                  </p:cNvPr>
-                  <p:cNvSpPr/>
-                  <p:nvPr/>
-                </p:nvSpPr>
-                <p:spPr>
-                  <a:xfrm flipV="1">
-                    <a:off x="4022672" y="2504431"/>
-                    <a:ext cx="2238468" cy="307778"/>
-                  </a:xfrm>
-                  <a:prstGeom prst="round2SameRect">
-                    <a:avLst>
-                      <a:gd name="adj1" fmla="val 28674"/>
-                      <a:gd name="adj2" fmla="val 0"/>
-                    </a:avLst>
-                  </a:prstGeom>
-                  <a:solidFill>
-                    <a:srgbClr val="3A3A3A"/>
-                  </a:solidFill>
-                  <a:ln>
-                    <a:noFill/>
-                  </a:ln>
-                </p:spPr>
-                <p:style>
-                  <a:lnRef idx="2">
-                    <a:schemeClr val="accent1">
-                      <a:shade val="15000"/>
-                    </a:schemeClr>
-                  </a:lnRef>
-                  <a:fillRef idx="1">
-                    <a:schemeClr val="accent1"/>
-                  </a:fillRef>
-                  <a:effectRef idx="0">
-                    <a:schemeClr val="accent1"/>
-                  </a:effectRef>
-                  <a:fontRef idx="minor">
-                    <a:schemeClr val="lt1"/>
-                  </a:fontRef>
-                </p:style>
-                <p:txBody>
-                  <a:bodyPr rtlCol="0" anchor="ctr"/>
-                  <a:lstStyle/>
-                  <a:p>
-                    <a:pPr algn="ctr"/>
-                    <a:endParaRPr lang="en-US"/>
-                  </a:p>
-                </p:txBody>
-              </p:sp>
-              <p:sp>
-                <p:nvSpPr>
-                  <p:cNvPr id="39" name="Rectangle: Rounded Corners 38">
-                    <a:extLst>
-                      <a:ext uri="{FF2B5EF4-FFF2-40B4-BE49-F238E27FC236}">
-                        <a16:creationId xmlns:a16="http://schemas.microsoft.com/office/drawing/2014/main" id="{B5C5DF2A-4F80-58F0-7F14-9A6CAA7EA5E2}"/>
-                      </a:ext>
-                    </a:extLst>
-                  </p:cNvPr>
-                  <p:cNvSpPr/>
-                  <p:nvPr/>
-                </p:nvSpPr>
-                <p:spPr>
-                  <a:xfrm>
-                    <a:off x="4021891" y="2194878"/>
-                    <a:ext cx="2239249" cy="618689"/>
-                  </a:xfrm>
-                  <a:prstGeom prst="roundRect">
-                    <a:avLst>
-                      <a:gd name="adj" fmla="val 12974"/>
-                    </a:avLst>
-                  </a:prstGeom>
-                  <a:noFill/>
-                  <a:ln w="12700">
-                    <a:solidFill>
-                      <a:schemeClr val="bg1"/>
-                    </a:solidFill>
-                  </a:ln>
-                </p:spPr>
-                <p:style>
-                  <a:lnRef idx="2">
-                    <a:schemeClr val="accent1">
-                      <a:shade val="15000"/>
-                    </a:schemeClr>
-                  </a:lnRef>
-                  <a:fillRef idx="1">
-                    <a:schemeClr val="accent1"/>
-                  </a:fillRef>
-                  <a:effectRef idx="0">
-                    <a:schemeClr val="accent1"/>
-                  </a:effectRef>
-                  <a:fontRef idx="minor">
-                    <a:schemeClr val="lt1"/>
-                  </a:fontRef>
-                </p:style>
-                <p:txBody>
-                  <a:bodyPr rtlCol="0" anchor="ctr"/>
-                  <a:lstStyle/>
-                  <a:p>
-                    <a:pPr algn="ctr"/>
-                    <a:endParaRPr lang="en-US" dirty="0">
-                      <a:latin typeface="Times New Roman" panose="02020603050405020304" pitchFamily="18" charset="0"/>
-                      <a:cs typeface="Times New Roman" panose="02020603050405020304" pitchFamily="18" charset="0"/>
-                    </a:endParaRPr>
-                  </a:p>
-                </p:txBody>
-              </p:sp>
-            </p:grpSp>
-            <p:sp>
-              <p:nvSpPr>
-                <p:cNvPr id="35" name="TextBox 34">
-                  <a:extLst>
-                    <a:ext uri="{FF2B5EF4-FFF2-40B4-BE49-F238E27FC236}">
-                      <a16:creationId xmlns:a16="http://schemas.microsoft.com/office/drawing/2014/main" id="{3DB1D612-0DA6-DFDD-7974-3E9354FCC1D8}"/>
-                    </a:ext>
-                  </a:extLst>
-                </p:cNvPr>
-                <p:cNvSpPr txBox="1"/>
-                <p:nvPr/>
-              </p:nvSpPr>
-              <p:spPr>
-                <a:xfrm>
-                  <a:off x="6808092" y="5171400"/>
-                  <a:ext cx="2239250" cy="307777"/>
-                </a:xfrm>
-                <a:prstGeom prst="rect">
-                  <a:avLst/>
-                </a:prstGeom>
-                <a:noFill/>
-              </p:spPr>
-              <p:txBody>
-                <a:bodyPr wrap="square">
-                  <a:spAutoFit/>
-                </a:bodyPr>
-                <a:lstStyle/>
-                <a:p>
-                  <a:pPr algn="ctr"/>
-                  <a:r>
-                    <a:rPr lang="en-US" sz="1400" dirty="0">
-                      <a:solidFill>
-                        <a:schemeClr val="bg1"/>
-                      </a:solidFill>
-                      <a:latin typeface="Times New Roman" panose="02020603050405020304" pitchFamily="18" charset="0"/>
-                      <a:cs typeface="Times New Roman" panose="02020603050405020304" pitchFamily="18" charset="0"/>
-                    </a:rPr>
-                    <a:t>O-RAN SC : Near-RT RIC</a:t>
-                  </a:r>
-                </a:p>
-              </p:txBody>
-            </p:sp>
-            <p:sp>
-              <p:nvSpPr>
-                <p:cNvPr id="36" name="TextBox 35">
-                  <a:extLst>
-                    <a:ext uri="{FF2B5EF4-FFF2-40B4-BE49-F238E27FC236}">
-                      <a16:creationId xmlns:a16="http://schemas.microsoft.com/office/drawing/2014/main" id="{9F749793-5D51-05F0-271A-74342A22925C}"/>
-                    </a:ext>
-                  </a:extLst>
-                </p:cNvPr>
-                <p:cNvSpPr txBox="1"/>
-                <p:nvPr/>
-              </p:nvSpPr>
-              <p:spPr>
-                <a:xfrm>
-                  <a:off x="6808092" y="5464822"/>
-                  <a:ext cx="2239250" cy="307777"/>
-                </a:xfrm>
-                <a:prstGeom prst="rect">
-                  <a:avLst/>
-                </a:prstGeom>
-                <a:noFill/>
-              </p:spPr>
-              <p:txBody>
-                <a:bodyPr wrap="square">
-                  <a:spAutoFit/>
-                </a:bodyPr>
-                <a:lstStyle/>
-                <a:p>
-                  <a:pPr algn="ctr"/>
-                  <a:r>
-                    <a:rPr lang="en-US" sz="1400" dirty="0">
-                      <a:solidFill>
-                        <a:schemeClr val="bg1"/>
-                      </a:solidFill>
-                      <a:latin typeface="Times New Roman" panose="02020603050405020304" pitchFamily="18" charset="0"/>
-                      <a:cs typeface="Times New Roman" panose="02020603050405020304" pitchFamily="18" charset="0"/>
-                    </a:rPr>
-                    <a:t>Mosaic5G : FlexRIC</a:t>
-                  </a:r>
-                </a:p>
-              </p:txBody>
-            </p:sp>
-          </p:grpSp>
-          <p:sp>
-            <p:nvSpPr>
-              <p:cNvPr id="33" name="TextBox 32">
-                <a:extLst>
-                  <a:ext uri="{FF2B5EF4-FFF2-40B4-BE49-F238E27FC236}">
-                    <a16:creationId xmlns:a16="http://schemas.microsoft.com/office/drawing/2014/main" id="{26B54E29-6558-EF44-CA43-59C6ECE36CDF}"/>
-                  </a:ext>
-                </a:extLst>
-              </p:cNvPr>
-              <p:cNvSpPr txBox="1"/>
-              <p:nvPr/>
-            </p:nvSpPr>
-            <p:spPr>
-              <a:xfrm>
-                <a:off x="6696060" y="5769045"/>
-                <a:ext cx="2239249" cy="307777"/>
-              </a:xfrm>
-              <a:prstGeom prst="rect">
-                <a:avLst/>
-              </a:prstGeom>
-              <a:noFill/>
-            </p:spPr>
-            <p:txBody>
-              <a:bodyPr wrap="square">
-                <a:spAutoFit/>
-              </a:bodyPr>
-              <a:lstStyle/>
-              <a:p>
-                <a:pPr algn="ctr"/>
-                <a:r>
-                  <a:rPr lang="en-US" sz="1400" b="1" dirty="0">
-                    <a:solidFill>
-                      <a:schemeClr val="bg1"/>
-                    </a:solidFill>
-                    <a:latin typeface="Times New Roman" panose="02020603050405020304" pitchFamily="18" charset="0"/>
-                    <a:cs typeface="Times New Roman" panose="02020603050405020304" pitchFamily="18" charset="0"/>
-                  </a:rPr>
-                  <a:t>Near-RT RIC</a:t>
-                </a:r>
-              </a:p>
-            </p:txBody>
-          </p:sp>
-        </p:grpSp>
-        <p:grpSp>
-          <p:nvGrpSpPr>
             <p:cNvPr id="28" name="Group 27">
               <a:extLst>
                 <a:ext uri="{FF2B5EF4-FFF2-40B4-BE49-F238E27FC236}">
@@ -17830,7 +17452,7 @@
             </p:nvSpPr>
             <p:spPr>
               <a:xfrm>
-                <a:off x="9110915" y="4522182"/>
+                <a:off x="9110915" y="4535517"/>
                 <a:ext cx="2238468" cy="307777"/>
               </a:xfrm>
               <a:prstGeom prst="rect">
@@ -17947,6 +17569,469 @@
             </a:fontRef>
           </p:style>
         </p:cxnSp>
+        <p:grpSp>
+          <p:nvGrpSpPr>
+            <p:cNvPr id="77" name="Group 76">
+              <a:extLst>
+                <a:ext uri="{FF2B5EF4-FFF2-40B4-BE49-F238E27FC236}">
+                  <a16:creationId xmlns:a16="http://schemas.microsoft.com/office/drawing/2014/main" id="{4F0FF1D2-F883-D4BA-E0FF-D67304C298C7}"/>
+                </a:ext>
+              </a:extLst>
+            </p:cNvPr>
+            <p:cNvGrpSpPr/>
+            <p:nvPr/>
+          </p:nvGrpSpPr>
+          <p:grpSpPr>
+            <a:xfrm>
+              <a:off x="6496054" y="2781548"/>
+              <a:ext cx="2241153" cy="1233863"/>
+              <a:chOff x="1026488" y="2318655"/>
+              <a:chExt cx="2241153" cy="1233863"/>
+            </a:xfrm>
+          </p:grpSpPr>
+          <p:sp>
+            <p:nvSpPr>
+              <p:cNvPr id="78" name="TextBox 77">
+                <a:extLst>
+                  <a:ext uri="{FF2B5EF4-FFF2-40B4-BE49-F238E27FC236}">
+                    <a16:creationId xmlns:a16="http://schemas.microsoft.com/office/drawing/2014/main" id="{8692BA8C-8BFD-D4AF-1AAD-285177594A04}"/>
+                  </a:ext>
+                </a:extLst>
+              </p:cNvPr>
+              <p:cNvSpPr txBox="1"/>
+              <p:nvPr/>
+            </p:nvSpPr>
+            <p:spPr>
+              <a:xfrm>
+                <a:off x="1028392" y="3244741"/>
+                <a:ext cx="2239249" cy="307777"/>
+              </a:xfrm>
+              <a:prstGeom prst="rect">
+                <a:avLst/>
+              </a:prstGeom>
+              <a:noFill/>
+            </p:spPr>
+            <p:txBody>
+              <a:bodyPr wrap="square">
+                <a:spAutoFit/>
+              </a:bodyPr>
+              <a:lstStyle/>
+              <a:p>
+                <a:pPr algn="ctr"/>
+                <a:r>
+                  <a:rPr lang="en-US" sz="1400" b="1" dirty="0">
+                    <a:solidFill>
+                      <a:schemeClr val="bg1"/>
+                    </a:solidFill>
+                    <a:latin typeface="Times New Roman" panose="02020603050405020304" pitchFamily="18" charset="0"/>
+                    <a:cs typeface="Times New Roman" panose="02020603050405020304" pitchFamily="18" charset="0"/>
+                  </a:rPr>
+                  <a:t>Near-RT RIC</a:t>
+                </a:r>
+              </a:p>
+            </p:txBody>
+          </p:sp>
+          <p:grpSp>
+            <p:nvGrpSpPr>
+              <p:cNvPr id="79" name="Group 78">
+                <a:extLst>
+                  <a:ext uri="{FF2B5EF4-FFF2-40B4-BE49-F238E27FC236}">
+                    <a16:creationId xmlns:a16="http://schemas.microsoft.com/office/drawing/2014/main" id="{3DE97752-AB53-3ACA-903E-641E201E9234}"/>
+                  </a:ext>
+                </a:extLst>
+              </p:cNvPr>
+              <p:cNvGrpSpPr/>
+              <p:nvPr/>
+            </p:nvGrpSpPr>
+            <p:grpSpPr>
+              <a:xfrm>
+                <a:off x="1028392" y="2318655"/>
+                <a:ext cx="2239249" cy="923272"/>
+                <a:chOff x="1590040" y="5303322"/>
+                <a:chExt cx="2374765" cy="923272"/>
+              </a:xfrm>
+            </p:grpSpPr>
+            <p:sp>
+              <p:nvSpPr>
+                <p:cNvPr id="83" name="Rectangle: Rounded Corners 82">
+                  <a:extLst>
+                    <a:ext uri="{FF2B5EF4-FFF2-40B4-BE49-F238E27FC236}">
+                      <a16:creationId xmlns:a16="http://schemas.microsoft.com/office/drawing/2014/main" id="{71E07B19-72A9-960B-E632-3DF83E0D2A9A}"/>
+                    </a:ext>
+                  </a:extLst>
+                </p:cNvPr>
+                <p:cNvSpPr/>
+                <p:nvPr/>
+              </p:nvSpPr>
+              <p:spPr>
+                <a:xfrm>
+                  <a:off x="1590040" y="5303322"/>
+                  <a:ext cx="2374765" cy="923272"/>
+                </a:xfrm>
+                <a:prstGeom prst="roundRect">
+                  <a:avLst>
+                    <a:gd name="adj" fmla="val 9466"/>
+                  </a:avLst>
+                </a:prstGeom>
+                <a:solidFill>
+                  <a:srgbClr val="262626"/>
+                </a:solidFill>
+                <a:ln w="28575">
+                  <a:noFill/>
+                </a:ln>
+              </p:spPr>
+              <p:style>
+                <a:lnRef idx="2">
+                  <a:schemeClr val="accent1">
+                    <a:shade val="15000"/>
+                  </a:schemeClr>
+                </a:lnRef>
+                <a:fillRef idx="1">
+                  <a:schemeClr val="accent1"/>
+                </a:fillRef>
+                <a:effectRef idx="0">
+                  <a:schemeClr val="accent1"/>
+                </a:effectRef>
+                <a:fontRef idx="minor">
+                  <a:schemeClr val="lt1"/>
+                </a:fontRef>
+              </p:style>
+              <p:txBody>
+                <a:bodyPr rtlCol="0" anchor="ctr"/>
+                <a:lstStyle/>
+                <a:p>
+                  <a:pPr algn="ctr"/>
+                  <a:endParaRPr lang="en-US" dirty="0">
+                    <a:latin typeface="Times New Roman" panose="02020603050405020304" pitchFamily="18" charset="0"/>
+                    <a:cs typeface="Times New Roman" panose="02020603050405020304" pitchFamily="18" charset="0"/>
+                  </a:endParaRPr>
+                </a:p>
+              </p:txBody>
+            </p:sp>
+            <p:sp>
+              <p:nvSpPr>
+                <p:cNvPr id="84" name="Rectangle 83">
+                  <a:extLst>
+                    <a:ext uri="{FF2B5EF4-FFF2-40B4-BE49-F238E27FC236}">
+                      <a16:creationId xmlns:a16="http://schemas.microsoft.com/office/drawing/2014/main" id="{90FAC063-73E1-9FCD-9F9C-9F943B1D6B62}"/>
+                    </a:ext>
+                  </a:extLst>
+                </p:cNvPr>
+                <p:cNvSpPr/>
+                <p:nvPr/>
+              </p:nvSpPr>
+              <p:spPr>
+                <a:xfrm>
+                  <a:off x="1590040" y="5603165"/>
+                  <a:ext cx="2374765" cy="323587"/>
+                </a:xfrm>
+                <a:prstGeom prst="rect">
+                  <a:avLst/>
+                </a:prstGeom>
+                <a:solidFill>
+                  <a:srgbClr val="3A3A3A"/>
+                </a:solidFill>
+                <a:ln>
+                  <a:noFill/>
+                </a:ln>
+              </p:spPr>
+              <p:style>
+                <a:lnRef idx="2">
+                  <a:schemeClr val="accent1">
+                    <a:shade val="15000"/>
+                  </a:schemeClr>
+                </a:lnRef>
+                <a:fillRef idx="1">
+                  <a:schemeClr val="accent1"/>
+                </a:fillRef>
+                <a:effectRef idx="0">
+                  <a:schemeClr val="accent1"/>
+                </a:effectRef>
+                <a:fontRef idx="minor">
+                  <a:schemeClr val="lt1"/>
+                </a:fontRef>
+              </p:style>
+              <p:txBody>
+                <a:bodyPr rtlCol="0" anchor="ctr"/>
+                <a:lstStyle/>
+                <a:p>
+                  <a:pPr algn="ctr"/>
+                  <a:endParaRPr lang="en-US"/>
+                </a:p>
+              </p:txBody>
+            </p:sp>
+            <p:sp>
+              <p:nvSpPr>
+                <p:cNvPr id="85" name="Rectangle: Rounded Corners 84">
+                  <a:extLst>
+                    <a:ext uri="{FF2B5EF4-FFF2-40B4-BE49-F238E27FC236}">
+                      <a16:creationId xmlns:a16="http://schemas.microsoft.com/office/drawing/2014/main" id="{97D48B6F-4051-F261-5713-9BF4699D9936}"/>
+                    </a:ext>
+                  </a:extLst>
+                </p:cNvPr>
+                <p:cNvSpPr/>
+                <p:nvPr/>
+              </p:nvSpPr>
+              <p:spPr>
+                <a:xfrm>
+                  <a:off x="1590040" y="5303322"/>
+                  <a:ext cx="2374765" cy="923272"/>
+                </a:xfrm>
+                <a:prstGeom prst="roundRect">
+                  <a:avLst>
+                    <a:gd name="adj" fmla="val 9879"/>
+                  </a:avLst>
+                </a:prstGeom>
+                <a:noFill/>
+                <a:ln w="12700">
+                  <a:solidFill>
+                    <a:schemeClr val="bg1"/>
+                  </a:solidFill>
+                </a:ln>
+              </p:spPr>
+              <p:style>
+                <a:lnRef idx="2">
+                  <a:schemeClr val="accent1">
+                    <a:shade val="15000"/>
+                  </a:schemeClr>
+                </a:lnRef>
+                <a:fillRef idx="1">
+                  <a:schemeClr val="accent1"/>
+                </a:fillRef>
+                <a:effectRef idx="0">
+                  <a:schemeClr val="accent1"/>
+                </a:effectRef>
+                <a:fontRef idx="minor">
+                  <a:schemeClr val="lt1"/>
+                </a:fontRef>
+              </p:style>
+              <p:txBody>
+                <a:bodyPr rtlCol="0" anchor="ctr"/>
+                <a:lstStyle/>
+                <a:p>
+                  <a:pPr algn="ctr"/>
+                  <a:endParaRPr lang="en-US" dirty="0">
+                    <a:latin typeface="Times New Roman" panose="02020603050405020304" pitchFamily="18" charset="0"/>
+                    <a:cs typeface="Times New Roman" panose="02020603050405020304" pitchFamily="18" charset="0"/>
+                  </a:endParaRPr>
+                </a:p>
+              </p:txBody>
+            </p:sp>
+          </p:grpSp>
+          <p:sp>
+            <p:nvSpPr>
+              <p:cNvPr id="80" name="TextBox 79">
+                <a:extLst>
+                  <a:ext uri="{FF2B5EF4-FFF2-40B4-BE49-F238E27FC236}">
+                    <a16:creationId xmlns:a16="http://schemas.microsoft.com/office/drawing/2014/main" id="{F1059630-8383-0B66-68A0-1B624EC69700}"/>
+                  </a:ext>
+                </a:extLst>
+              </p:cNvPr>
+              <p:cNvSpPr txBox="1"/>
+              <p:nvPr/>
+            </p:nvSpPr>
+            <p:spPr>
+              <a:xfrm>
+                <a:off x="1026488" y="2928594"/>
+                <a:ext cx="2241153" cy="307777"/>
+              </a:xfrm>
+              <a:prstGeom prst="rect">
+                <a:avLst/>
+              </a:prstGeom>
+              <a:noFill/>
+            </p:spPr>
+            <p:txBody>
+              <a:bodyPr wrap="square">
+                <a:spAutoFit/>
+              </a:bodyPr>
+              <a:lstStyle/>
+              <a:p>
+                <a:pPr algn="ctr"/>
+                <a:r>
+                  <a:rPr lang="en-US" sz="1400" dirty="0">
+                    <a:solidFill>
+                      <a:schemeClr val="bg1"/>
+                    </a:solidFill>
+                    <a:latin typeface="Times New Roman" panose="02020603050405020304" pitchFamily="18" charset="0"/>
+                    <a:cs typeface="Times New Roman" panose="02020603050405020304" pitchFamily="18" charset="0"/>
+                  </a:rPr>
+                  <a:t>Mosaic5G : FlexRIC</a:t>
+                </a:r>
+              </a:p>
+            </p:txBody>
+          </p:sp>
+          <p:sp>
+            <p:nvSpPr>
+              <p:cNvPr id="81" name="TextBox 80">
+                <a:extLst>
+                  <a:ext uri="{FF2B5EF4-FFF2-40B4-BE49-F238E27FC236}">
+                    <a16:creationId xmlns:a16="http://schemas.microsoft.com/office/drawing/2014/main" id="{7FE2B9E7-212A-DA2F-8016-28CC6B67159F}"/>
+                  </a:ext>
+                </a:extLst>
+              </p:cNvPr>
+              <p:cNvSpPr txBox="1"/>
+              <p:nvPr/>
+            </p:nvSpPr>
+            <p:spPr>
+              <a:xfrm>
+                <a:off x="1026488" y="2629568"/>
+                <a:ext cx="2241153" cy="307777"/>
+              </a:xfrm>
+              <a:prstGeom prst="rect">
+                <a:avLst/>
+              </a:prstGeom>
+              <a:noFill/>
+            </p:spPr>
+            <p:txBody>
+              <a:bodyPr wrap="square">
+                <a:spAutoFit/>
+              </a:bodyPr>
+              <a:lstStyle/>
+              <a:p>
+                <a:pPr algn="ctr"/>
+                <a:r>
+                  <a:rPr lang="en-US" sz="1400" dirty="0">
+                    <a:solidFill>
+                      <a:schemeClr val="bg1"/>
+                    </a:solidFill>
+                    <a:latin typeface="Times New Roman" panose="02020603050405020304" pitchFamily="18" charset="0"/>
+                    <a:cs typeface="Times New Roman" panose="02020603050405020304" pitchFamily="18" charset="0"/>
+                  </a:rPr>
+                  <a:t>O-RAN SC : Near-RT RIC</a:t>
+                </a:r>
+              </a:p>
+            </p:txBody>
+          </p:sp>
+          <p:sp>
+            <p:nvSpPr>
+              <p:cNvPr id="82" name="TextBox 81">
+                <a:extLst>
+                  <a:ext uri="{FF2B5EF4-FFF2-40B4-BE49-F238E27FC236}">
+                    <a16:creationId xmlns:a16="http://schemas.microsoft.com/office/drawing/2014/main" id="{467B0EE3-8C81-7DF0-9524-0DB7433CFFAF}"/>
+                  </a:ext>
+                </a:extLst>
+              </p:cNvPr>
+              <p:cNvSpPr txBox="1"/>
+              <p:nvPr/>
+            </p:nvSpPr>
+            <p:spPr>
+              <a:xfrm>
+                <a:off x="1026488" y="2330542"/>
+                <a:ext cx="2241153" cy="307777"/>
+              </a:xfrm>
+              <a:prstGeom prst="rect">
+                <a:avLst/>
+              </a:prstGeom>
+              <a:noFill/>
+            </p:spPr>
+            <p:txBody>
+              <a:bodyPr wrap="square">
+                <a:spAutoFit/>
+              </a:bodyPr>
+              <a:lstStyle/>
+              <a:p>
+                <a:pPr algn="ctr"/>
+                <a:r>
+                  <a:rPr lang="en-US" sz="1400" dirty="0">
+                    <a:solidFill>
+                      <a:schemeClr val="bg1"/>
+                    </a:solidFill>
+                    <a:latin typeface="Times New Roman" panose="02020603050405020304" pitchFamily="18" charset="0"/>
+                    <a:cs typeface="Times New Roman" panose="02020603050405020304" pitchFamily="18" charset="0"/>
+                  </a:rPr>
+                  <a:t>O-RAN SC : A1 Simulator</a:t>
+                </a:r>
+              </a:p>
+            </p:txBody>
+          </p:sp>
+        </p:grpSp>
+        <p:cxnSp>
+          <p:nvCxnSpPr>
+            <p:cNvPr id="86" name="Straight Connector 85">
+              <a:extLst>
+                <a:ext uri="{FF2B5EF4-FFF2-40B4-BE49-F238E27FC236}">
+                  <a16:creationId xmlns:a16="http://schemas.microsoft.com/office/drawing/2014/main" id="{8716AD2C-5E04-6500-20A3-966FF14ADD37}"/>
+                </a:ext>
+              </a:extLst>
+            </p:cNvPr>
+            <p:cNvCxnSpPr>
+              <a:cxnSpLocks/>
+              <a:stCxn id="82" idx="3"/>
+              <a:endCxn id="30" idx="1"/>
+            </p:cNvCxnSpPr>
+            <p:nvPr/>
+          </p:nvCxnSpPr>
+          <p:spPr>
+            <a:xfrm>
+              <a:off x="8737207" y="2947324"/>
+              <a:ext cx="639703" cy="589820"/>
+            </a:xfrm>
+            <a:prstGeom prst="line">
+              <a:avLst/>
+            </a:prstGeom>
+            <a:ln w="12700">
+              <a:solidFill>
+                <a:schemeClr val="bg1"/>
+              </a:solidFill>
+            </a:ln>
+          </p:spPr>
+          <p:style>
+            <a:lnRef idx="2">
+              <a:schemeClr val="accent1"/>
+            </a:lnRef>
+            <a:fillRef idx="0">
+              <a:schemeClr val="accent1"/>
+            </a:fillRef>
+            <a:effectRef idx="1">
+              <a:schemeClr val="accent1"/>
+            </a:effectRef>
+            <a:fontRef idx="minor">
+              <a:schemeClr val="tx1"/>
+            </a:fontRef>
+          </p:style>
+        </p:cxnSp>
+        <p:sp>
+          <p:nvSpPr>
+            <p:cNvPr id="89" name="TextBox 88">
+              <a:extLst>
+                <a:ext uri="{FF2B5EF4-FFF2-40B4-BE49-F238E27FC236}">
+                  <a16:creationId xmlns:a16="http://schemas.microsoft.com/office/drawing/2014/main" id="{E4ED17CE-4528-0EEC-AB9C-36F0BCB17D7E}"/>
+                </a:ext>
+              </a:extLst>
+            </p:cNvPr>
+            <p:cNvSpPr txBox="1"/>
+            <p:nvPr/>
+          </p:nvSpPr>
+          <p:spPr>
+            <a:xfrm>
+              <a:off x="6561688" y="2473676"/>
+              <a:ext cx="2239249" cy="307777"/>
+            </a:xfrm>
+            <a:prstGeom prst="rect">
+              <a:avLst/>
+            </a:prstGeom>
+            <a:noFill/>
+          </p:spPr>
+          <p:txBody>
+            <a:bodyPr wrap="square">
+              <a:spAutoFit/>
+            </a:bodyPr>
+            <a:lstStyle/>
+            <a:p>
+              <a:pPr algn="ctr"/>
+              <a:r>
+                <a:rPr lang="en-US" sz="1400" b="1" dirty="0">
+                  <a:solidFill>
+                    <a:schemeClr val="bg1"/>
+                  </a:solidFill>
+                  <a:latin typeface="Times New Roman" panose="02020603050405020304" pitchFamily="18" charset="0"/>
+                  <a:cs typeface="Times New Roman" panose="02020603050405020304" pitchFamily="18" charset="0"/>
+                </a:rPr>
+                <a:t>5G Core Network</a:t>
+              </a:r>
+            </a:p>
+          </p:txBody>
+        </p:sp>
       </p:grpSp>
     </p:spTree>
     <p:extLst>
@@ -18331,7 +18416,7 @@
                 </a:avLst>
               </a:prstGeom>
               <a:noFill/>
-              <a:ln w="28575">
+              <a:ln w="12700">
                 <a:solidFill>
                   <a:schemeClr val="tx1"/>
                 </a:solidFill>

--- a/RAN_Intelligent_Controllers/research/Diagrams.pptx
+++ b/RAN_Intelligent_Controllers/research/Diagrams.pptx
@@ -263,7 +263,7 @@
           <a:p>
             <a:fld id="{2D1DF383-F48D-4C35-882C-8A26F25E24F6}" type="datetimeFigureOut">
               <a:rPr lang="en-US" smtClean="0"/>
-              <a:t>4/29/2025</a:t>
+              <a:t>5/22/2025</a:t>
             </a:fld>
             <a:endParaRPr lang="en-US"/>
           </a:p>
@@ -461,7 +461,7 @@
           <a:p>
             <a:fld id="{2D1DF383-F48D-4C35-882C-8A26F25E24F6}" type="datetimeFigureOut">
               <a:rPr lang="en-US" smtClean="0"/>
-              <a:t>4/29/2025</a:t>
+              <a:t>5/22/2025</a:t>
             </a:fld>
             <a:endParaRPr lang="en-US"/>
           </a:p>
@@ -669,7 +669,7 @@
           <a:p>
             <a:fld id="{2D1DF383-F48D-4C35-882C-8A26F25E24F6}" type="datetimeFigureOut">
               <a:rPr lang="en-US" smtClean="0"/>
-              <a:t>4/29/2025</a:t>
+              <a:t>5/22/2025</a:t>
             </a:fld>
             <a:endParaRPr lang="en-US"/>
           </a:p>
@@ -867,7 +867,7 @@
           <a:p>
             <a:fld id="{2D1DF383-F48D-4C35-882C-8A26F25E24F6}" type="datetimeFigureOut">
               <a:rPr lang="en-US" smtClean="0"/>
-              <a:t>4/29/2025</a:t>
+              <a:t>5/22/2025</a:t>
             </a:fld>
             <a:endParaRPr lang="en-US"/>
           </a:p>
@@ -1142,7 +1142,7 @@
           <a:p>
             <a:fld id="{2D1DF383-F48D-4C35-882C-8A26F25E24F6}" type="datetimeFigureOut">
               <a:rPr lang="en-US" smtClean="0"/>
-              <a:t>4/29/2025</a:t>
+              <a:t>5/22/2025</a:t>
             </a:fld>
             <a:endParaRPr lang="en-US"/>
           </a:p>
@@ -1407,7 +1407,7 @@
           <a:p>
             <a:fld id="{2D1DF383-F48D-4C35-882C-8A26F25E24F6}" type="datetimeFigureOut">
               <a:rPr lang="en-US" smtClean="0"/>
-              <a:t>4/29/2025</a:t>
+              <a:t>5/22/2025</a:t>
             </a:fld>
             <a:endParaRPr lang="en-US"/>
           </a:p>
@@ -1819,7 +1819,7 @@
           <a:p>
             <a:fld id="{2D1DF383-F48D-4C35-882C-8A26F25E24F6}" type="datetimeFigureOut">
               <a:rPr lang="en-US" smtClean="0"/>
-              <a:t>4/29/2025</a:t>
+              <a:t>5/22/2025</a:t>
             </a:fld>
             <a:endParaRPr lang="en-US"/>
           </a:p>
@@ -1960,7 +1960,7 @@
           <a:p>
             <a:fld id="{2D1DF383-F48D-4C35-882C-8A26F25E24F6}" type="datetimeFigureOut">
               <a:rPr lang="en-US" smtClean="0"/>
-              <a:t>4/29/2025</a:t>
+              <a:t>5/22/2025</a:t>
             </a:fld>
             <a:endParaRPr lang="en-US"/>
           </a:p>
@@ -2073,7 +2073,7 @@
           <a:p>
             <a:fld id="{2D1DF383-F48D-4C35-882C-8A26F25E24F6}" type="datetimeFigureOut">
               <a:rPr lang="en-US" smtClean="0"/>
-              <a:t>4/29/2025</a:t>
+              <a:t>5/22/2025</a:t>
             </a:fld>
             <a:endParaRPr lang="en-US"/>
           </a:p>
@@ -2384,7 +2384,7 @@
           <a:p>
             <a:fld id="{2D1DF383-F48D-4C35-882C-8A26F25E24F6}" type="datetimeFigureOut">
               <a:rPr lang="en-US" smtClean="0"/>
-              <a:t>4/29/2025</a:t>
+              <a:t>5/22/2025</a:t>
             </a:fld>
             <a:endParaRPr lang="en-US"/>
           </a:p>
@@ -2672,7 +2672,7 @@
           <a:p>
             <a:fld id="{2D1DF383-F48D-4C35-882C-8A26F25E24F6}" type="datetimeFigureOut">
               <a:rPr lang="en-US" smtClean="0"/>
-              <a:t>4/29/2025</a:t>
+              <a:t>5/22/2025</a:t>
             </a:fld>
             <a:endParaRPr lang="en-US"/>
           </a:p>
@@ -2913,7 +2913,7 @@
           <a:p>
             <a:fld id="{2D1DF383-F48D-4C35-882C-8A26F25E24F6}" type="datetimeFigureOut">
               <a:rPr lang="en-US" smtClean="0"/>
-              <a:t>4/29/2025</a:t>
+              <a:t>5/22/2025</a:t>
             </a:fld>
             <a:endParaRPr lang="en-US"/>
           </a:p>
@@ -4233,7 +4233,7 @@
                               <a:latin typeface="Times New Roman" panose="02020603050405020304" pitchFamily="18" charset="0"/>
                               <a:cs typeface="Times New Roman" panose="02020603050405020304" pitchFamily="18" charset="0"/>
                             </a:rPr>
-                            <a:t>Mobile Phone</a:t>
+                            <a:t>5G Mobile Phone</a:t>
                           </a:r>
                           <a:endParaRPr lang="en-US" sz="1400" dirty="0">
                             <a:latin typeface="Times New Roman" panose="02020603050405020304" pitchFamily="18" charset="0"/>
@@ -8537,7 +8537,7 @@
                               <a:latin typeface="Times New Roman" panose="02020603050405020304" pitchFamily="18" charset="0"/>
                               <a:cs typeface="Times New Roman" panose="02020603050405020304" pitchFamily="18" charset="0"/>
                             </a:rPr>
-                            <a:t>Mobile Phone</a:t>
+                            <a:t>5G Mobile Phone</a:t>
                           </a:r>
                         </a:p>
                       </p:txBody>
@@ -13828,7 +13828,7 @@
                     <a:latin typeface="Times New Roman" panose="02020603050405020304" pitchFamily="18" charset="0"/>
                     <a:cs typeface="Times New Roman" panose="02020603050405020304" pitchFamily="18" charset="0"/>
                   </a:rPr>
-                  <a:t>Mobile Phone</a:t>
+                  <a:t>5G Mobile Phone</a:t>
                 </a:r>
               </a:p>
             </p:txBody>
@@ -17157,7 +17157,7 @@
                     <a:latin typeface="Times New Roman" panose="02020603050405020304" pitchFamily="18" charset="0"/>
                     <a:cs typeface="Times New Roman" panose="02020603050405020304" pitchFamily="18" charset="0"/>
                   </a:rPr>
-                  <a:t>Mobile Phone</a:t>
+                  <a:t>5G Mobile Phone</a:t>
                 </a:r>
               </a:p>
             </p:txBody>

--- a/RAN_Intelligent_Controllers/research/Diagrams.pptx
+++ b/RAN_Intelligent_Controllers/research/Diagrams.pptx
@@ -10,6 +10,8 @@
     <p:sldId id="259" r:id="rId4"/>
     <p:sldId id="261" r:id="rId5"/>
     <p:sldId id="260" r:id="rId6"/>
+    <p:sldId id="262" r:id="rId7"/>
+    <p:sldId id="263" r:id="rId8"/>
   </p:sldIdLst>
   <p:sldSz cx="12192000" cy="6858000"/>
   <p:notesSz cx="6858000" cy="9144000"/>
@@ -263,7 +265,7 @@
           <a:p>
             <a:fld id="{2D1DF383-F48D-4C35-882C-8A26F25E24F6}" type="datetimeFigureOut">
               <a:rPr lang="en-US" smtClean="0"/>
-              <a:t>5/22/2025</a:t>
+              <a:t>6/2/2025</a:t>
             </a:fld>
             <a:endParaRPr lang="en-US"/>
           </a:p>
@@ -461,7 +463,7 @@
           <a:p>
             <a:fld id="{2D1DF383-F48D-4C35-882C-8A26F25E24F6}" type="datetimeFigureOut">
               <a:rPr lang="en-US" smtClean="0"/>
-              <a:t>5/22/2025</a:t>
+              <a:t>6/2/2025</a:t>
             </a:fld>
             <a:endParaRPr lang="en-US"/>
           </a:p>
@@ -669,7 +671,7 @@
           <a:p>
             <a:fld id="{2D1DF383-F48D-4C35-882C-8A26F25E24F6}" type="datetimeFigureOut">
               <a:rPr lang="en-US" smtClean="0"/>
-              <a:t>5/22/2025</a:t>
+              <a:t>6/2/2025</a:t>
             </a:fld>
             <a:endParaRPr lang="en-US"/>
           </a:p>
@@ -867,7 +869,7 @@
           <a:p>
             <a:fld id="{2D1DF383-F48D-4C35-882C-8A26F25E24F6}" type="datetimeFigureOut">
               <a:rPr lang="en-US" smtClean="0"/>
-              <a:t>5/22/2025</a:t>
+              <a:t>6/2/2025</a:t>
             </a:fld>
             <a:endParaRPr lang="en-US"/>
           </a:p>
@@ -1142,7 +1144,7 @@
           <a:p>
             <a:fld id="{2D1DF383-F48D-4C35-882C-8A26F25E24F6}" type="datetimeFigureOut">
               <a:rPr lang="en-US" smtClean="0"/>
-              <a:t>5/22/2025</a:t>
+              <a:t>6/2/2025</a:t>
             </a:fld>
             <a:endParaRPr lang="en-US"/>
           </a:p>
@@ -1407,7 +1409,7 @@
           <a:p>
             <a:fld id="{2D1DF383-F48D-4C35-882C-8A26F25E24F6}" type="datetimeFigureOut">
               <a:rPr lang="en-US" smtClean="0"/>
-              <a:t>5/22/2025</a:t>
+              <a:t>6/2/2025</a:t>
             </a:fld>
             <a:endParaRPr lang="en-US"/>
           </a:p>
@@ -1819,7 +1821,7 @@
           <a:p>
             <a:fld id="{2D1DF383-F48D-4C35-882C-8A26F25E24F6}" type="datetimeFigureOut">
               <a:rPr lang="en-US" smtClean="0"/>
-              <a:t>5/22/2025</a:t>
+              <a:t>6/2/2025</a:t>
             </a:fld>
             <a:endParaRPr lang="en-US"/>
           </a:p>
@@ -1960,7 +1962,7 @@
           <a:p>
             <a:fld id="{2D1DF383-F48D-4C35-882C-8A26F25E24F6}" type="datetimeFigureOut">
               <a:rPr lang="en-US" smtClean="0"/>
-              <a:t>5/22/2025</a:t>
+              <a:t>6/2/2025</a:t>
             </a:fld>
             <a:endParaRPr lang="en-US"/>
           </a:p>
@@ -2073,7 +2075,7 @@
           <a:p>
             <a:fld id="{2D1DF383-F48D-4C35-882C-8A26F25E24F6}" type="datetimeFigureOut">
               <a:rPr lang="en-US" smtClean="0"/>
-              <a:t>5/22/2025</a:t>
+              <a:t>6/2/2025</a:t>
             </a:fld>
             <a:endParaRPr lang="en-US"/>
           </a:p>
@@ -2384,7 +2386,7 @@
           <a:p>
             <a:fld id="{2D1DF383-F48D-4C35-882C-8A26F25E24F6}" type="datetimeFigureOut">
               <a:rPr lang="en-US" smtClean="0"/>
-              <a:t>5/22/2025</a:t>
+              <a:t>6/2/2025</a:t>
             </a:fld>
             <a:endParaRPr lang="en-US"/>
           </a:p>
@@ -2672,7 +2674,7 @@
           <a:p>
             <a:fld id="{2D1DF383-F48D-4C35-882C-8A26F25E24F6}" type="datetimeFigureOut">
               <a:rPr lang="en-US" smtClean="0"/>
-              <a:t>5/22/2025</a:t>
+              <a:t>6/2/2025</a:t>
             </a:fld>
             <a:endParaRPr lang="en-US"/>
           </a:p>
@@ -2913,7 +2915,7 @@
           <a:p>
             <a:fld id="{2D1DF383-F48D-4C35-882C-8A26F25E24F6}" type="datetimeFigureOut">
               <a:rPr lang="en-US" smtClean="0"/>
-              <a:t>5/22/2025</a:t>
+              <a:t>6/2/2025</a:t>
             </a:fld>
             <a:endParaRPr lang="en-US"/>
           </a:p>
@@ -18783,7 +18785,7 @@
               </a:avLst>
             </a:prstGeom>
             <a:noFill/>
-            <a:ln w="28575">
+            <a:ln w="12700">
               <a:solidFill>
                 <a:schemeClr val="tx1"/>
               </a:solidFill>
@@ -20026,6 +20028,6755 @@
 </p:sld>
 </file>
 
+<file path=ppt/slides/slide6.xml><?xml version="1.0" encoding="utf-8"?>
+<p:sld xmlns:a="http://schemas.openxmlformats.org/drawingml/2006/main" xmlns:r="http://schemas.openxmlformats.org/officeDocument/2006/relationships" xmlns:p="http://schemas.openxmlformats.org/presentationml/2006/main">
+  <p:cSld>
+    <p:spTree>
+      <p:nvGrpSpPr>
+        <p:cNvPr id="1" name=""/>
+        <p:cNvGrpSpPr/>
+        <p:nvPr/>
+      </p:nvGrpSpPr>
+      <p:grpSpPr>
+        <a:xfrm>
+          <a:off x="0" y="0"/>
+          <a:ext cx="0" cy="0"/>
+          <a:chOff x="0" y="0"/>
+          <a:chExt cx="0" cy="0"/>
+        </a:xfrm>
+      </p:grpSpPr>
+      <p:sp>
+        <p:nvSpPr>
+          <p:cNvPr id="322" name="Rectangle: Rounded Corners 321">
+            <a:extLst>
+              <a:ext uri="{FF2B5EF4-FFF2-40B4-BE49-F238E27FC236}">
+                <a16:creationId xmlns:a16="http://schemas.microsoft.com/office/drawing/2014/main" id="{A0D81E5A-0064-1E68-166F-BC38892F6D96}"/>
+              </a:ext>
+            </a:extLst>
+          </p:cNvPr>
+          <p:cNvSpPr/>
+          <p:nvPr/>
+        </p:nvSpPr>
+        <p:spPr>
+          <a:xfrm>
+            <a:off x="6353680" y="1690777"/>
+            <a:ext cx="2517752" cy="2880797"/>
+          </a:xfrm>
+          <a:prstGeom prst="roundRect">
+            <a:avLst>
+              <a:gd name="adj" fmla="val 2856"/>
+            </a:avLst>
+          </a:prstGeom>
+          <a:solidFill>
+            <a:schemeClr val="bg1"/>
+          </a:solidFill>
+          <a:ln w="12700">
+            <a:solidFill>
+              <a:schemeClr val="tx1"/>
+            </a:solidFill>
+          </a:ln>
+        </p:spPr>
+        <p:style>
+          <a:lnRef idx="2">
+            <a:schemeClr val="accent1">
+              <a:shade val="15000"/>
+            </a:schemeClr>
+          </a:lnRef>
+          <a:fillRef idx="1">
+            <a:schemeClr val="accent1"/>
+          </a:fillRef>
+          <a:effectRef idx="0">
+            <a:schemeClr val="accent1"/>
+          </a:effectRef>
+          <a:fontRef idx="minor">
+            <a:schemeClr val="lt1"/>
+          </a:fontRef>
+        </p:style>
+        <p:txBody>
+          <a:bodyPr rtlCol="0" anchor="ctr"/>
+          <a:lstStyle/>
+          <a:p>
+            <a:pPr algn="ctr"/>
+            <a:endParaRPr lang="en-US" dirty="0">
+              <a:latin typeface="Times New Roman" panose="02020603050405020304" pitchFamily="18" charset="0"/>
+              <a:cs typeface="Times New Roman" panose="02020603050405020304" pitchFamily="18" charset="0"/>
+            </a:endParaRPr>
+          </a:p>
+        </p:txBody>
+      </p:sp>
+      <p:sp>
+        <p:nvSpPr>
+          <p:cNvPr id="14" name="Rectangle: Rounded Corners 13">
+            <a:extLst>
+              <a:ext uri="{FF2B5EF4-FFF2-40B4-BE49-F238E27FC236}">
+                <a16:creationId xmlns:a16="http://schemas.microsoft.com/office/drawing/2014/main" id="{F0739420-0123-DB6F-5885-960E057BE8AB}"/>
+              </a:ext>
+            </a:extLst>
+          </p:cNvPr>
+          <p:cNvSpPr/>
+          <p:nvPr/>
+        </p:nvSpPr>
+        <p:spPr>
+          <a:xfrm>
+            <a:off x="575839" y="2069432"/>
+            <a:ext cx="11199066" cy="1945979"/>
+          </a:xfrm>
+          <a:prstGeom prst="roundRect">
+            <a:avLst>
+              <a:gd name="adj" fmla="val 3896"/>
+            </a:avLst>
+          </a:prstGeom>
+          <a:solidFill>
+            <a:schemeClr val="bg1"/>
+          </a:solidFill>
+          <a:ln w="12700">
+            <a:solidFill>
+              <a:schemeClr val="tx1"/>
+            </a:solidFill>
+          </a:ln>
+        </p:spPr>
+        <p:style>
+          <a:lnRef idx="2">
+            <a:schemeClr val="accent1">
+              <a:shade val="15000"/>
+            </a:schemeClr>
+          </a:lnRef>
+          <a:fillRef idx="1">
+            <a:schemeClr val="accent1"/>
+          </a:fillRef>
+          <a:effectRef idx="0">
+            <a:schemeClr val="accent1"/>
+          </a:effectRef>
+          <a:fontRef idx="minor">
+            <a:schemeClr val="lt1"/>
+          </a:fontRef>
+        </p:style>
+        <p:txBody>
+          <a:bodyPr rtlCol="0" anchor="ctr"/>
+          <a:lstStyle/>
+          <a:p>
+            <a:pPr algn="ctr"/>
+            <a:endParaRPr lang="en-US" dirty="0">
+              <a:latin typeface="Times New Roman" panose="02020603050405020304" pitchFamily="18" charset="0"/>
+              <a:cs typeface="Times New Roman" panose="02020603050405020304" pitchFamily="18" charset="0"/>
+            </a:endParaRPr>
+          </a:p>
+        </p:txBody>
+      </p:sp>
+      <p:cxnSp>
+        <p:nvCxnSpPr>
+          <p:cNvPr id="342" name="Straight Connector 341">
+            <a:extLst>
+              <a:ext uri="{FF2B5EF4-FFF2-40B4-BE49-F238E27FC236}">
+                <a16:creationId xmlns:a16="http://schemas.microsoft.com/office/drawing/2014/main" id="{19AEC2F8-5A21-3B40-519C-F2CA97AA5EE4}"/>
+              </a:ext>
+            </a:extLst>
+          </p:cNvPr>
+          <p:cNvCxnSpPr>
+            <a:cxnSpLocks/>
+            <a:stCxn id="201" idx="3"/>
+            <a:endCxn id="276" idx="1"/>
+          </p:cNvCxnSpPr>
+          <p:nvPr/>
+        </p:nvCxnSpPr>
+        <p:spPr>
+          <a:xfrm>
+            <a:off x="2929887" y="2336371"/>
+            <a:ext cx="676819" cy="0"/>
+          </a:xfrm>
+          <a:prstGeom prst="line">
+            <a:avLst/>
+          </a:prstGeom>
+          <a:ln w="12700">
+            <a:solidFill>
+              <a:schemeClr val="tx1"/>
+            </a:solidFill>
+            <a:prstDash val="sysDot"/>
+          </a:ln>
+        </p:spPr>
+        <p:style>
+          <a:lnRef idx="2">
+            <a:schemeClr val="accent1"/>
+          </a:lnRef>
+          <a:fillRef idx="0">
+            <a:schemeClr val="accent1"/>
+          </a:fillRef>
+          <a:effectRef idx="1">
+            <a:schemeClr val="accent1"/>
+          </a:effectRef>
+          <a:fontRef idx="minor">
+            <a:schemeClr val="tx1"/>
+          </a:fontRef>
+        </p:style>
+      </p:cxnSp>
+      <p:cxnSp>
+        <p:nvCxnSpPr>
+          <p:cNvPr id="347" name="Straight Connector 346">
+            <a:extLst>
+              <a:ext uri="{FF2B5EF4-FFF2-40B4-BE49-F238E27FC236}">
+                <a16:creationId xmlns:a16="http://schemas.microsoft.com/office/drawing/2014/main" id="{B08242A5-1335-1B3A-F36E-92F7ACADE36C}"/>
+              </a:ext>
+            </a:extLst>
+          </p:cNvPr>
+          <p:cNvCxnSpPr>
+            <a:cxnSpLocks/>
+            <a:stCxn id="200" idx="3"/>
+            <a:endCxn id="275" idx="1"/>
+          </p:cNvCxnSpPr>
+          <p:nvPr/>
+        </p:nvCxnSpPr>
+        <p:spPr>
+          <a:xfrm>
+            <a:off x="2929886" y="2642033"/>
+            <a:ext cx="680631" cy="0"/>
+          </a:xfrm>
+          <a:prstGeom prst="line">
+            <a:avLst/>
+          </a:prstGeom>
+          <a:ln w="12700">
+            <a:solidFill>
+              <a:schemeClr val="tx1"/>
+            </a:solidFill>
+          </a:ln>
+        </p:spPr>
+        <p:style>
+          <a:lnRef idx="2">
+            <a:schemeClr val="accent1"/>
+          </a:lnRef>
+          <a:fillRef idx="0">
+            <a:schemeClr val="accent1"/>
+          </a:fillRef>
+          <a:effectRef idx="1">
+            <a:schemeClr val="accent1"/>
+          </a:effectRef>
+          <a:fontRef idx="minor">
+            <a:schemeClr val="tx1"/>
+          </a:fontRef>
+        </p:style>
+      </p:cxnSp>
+      <p:cxnSp>
+        <p:nvCxnSpPr>
+          <p:cNvPr id="350" name="Straight Connector 349">
+            <a:extLst>
+              <a:ext uri="{FF2B5EF4-FFF2-40B4-BE49-F238E27FC236}">
+                <a16:creationId xmlns:a16="http://schemas.microsoft.com/office/drawing/2014/main" id="{03562168-DCAA-1D7C-522F-29E8943268AD}"/>
+              </a:ext>
+            </a:extLst>
+          </p:cNvPr>
+          <p:cNvCxnSpPr>
+            <a:cxnSpLocks/>
+            <a:stCxn id="202" idx="3"/>
+            <a:endCxn id="276" idx="1"/>
+          </p:cNvCxnSpPr>
+          <p:nvPr/>
+        </p:nvCxnSpPr>
+        <p:spPr>
+          <a:xfrm flipV="1">
+            <a:off x="2929886" y="2336371"/>
+            <a:ext cx="676820" cy="1222648"/>
+          </a:xfrm>
+          <a:prstGeom prst="line">
+            <a:avLst/>
+          </a:prstGeom>
+          <a:ln w="12700">
+            <a:solidFill>
+              <a:schemeClr val="tx1"/>
+            </a:solidFill>
+            <a:prstDash val="sysDot"/>
+          </a:ln>
+        </p:spPr>
+        <p:style>
+          <a:lnRef idx="2">
+            <a:schemeClr val="accent1"/>
+          </a:lnRef>
+          <a:fillRef idx="0">
+            <a:schemeClr val="accent1"/>
+          </a:fillRef>
+          <a:effectRef idx="1">
+            <a:schemeClr val="accent1"/>
+          </a:effectRef>
+          <a:fontRef idx="minor">
+            <a:schemeClr val="tx1"/>
+          </a:fontRef>
+        </p:style>
+      </p:cxnSp>
+      <p:cxnSp>
+        <p:nvCxnSpPr>
+          <p:cNvPr id="353" name="Straight Connector 352">
+            <a:extLst>
+              <a:ext uri="{FF2B5EF4-FFF2-40B4-BE49-F238E27FC236}">
+                <a16:creationId xmlns:a16="http://schemas.microsoft.com/office/drawing/2014/main" id="{E96F9127-6829-F9FD-FB9A-07BC9E2C0085}"/>
+              </a:ext>
+            </a:extLst>
+          </p:cNvPr>
+          <p:cNvCxnSpPr>
+            <a:cxnSpLocks/>
+            <a:stCxn id="209" idx="3"/>
+            <a:endCxn id="280" idx="1"/>
+          </p:cNvCxnSpPr>
+          <p:nvPr/>
+        </p:nvCxnSpPr>
+        <p:spPr>
+          <a:xfrm>
+            <a:off x="2929886" y="3253357"/>
+            <a:ext cx="680631" cy="0"/>
+          </a:xfrm>
+          <a:prstGeom prst="line">
+            <a:avLst/>
+          </a:prstGeom>
+          <a:ln w="12700">
+            <a:solidFill>
+              <a:schemeClr val="tx1"/>
+            </a:solidFill>
+          </a:ln>
+        </p:spPr>
+        <p:style>
+          <a:lnRef idx="2">
+            <a:schemeClr val="accent1"/>
+          </a:lnRef>
+          <a:fillRef idx="0">
+            <a:schemeClr val="accent1"/>
+          </a:fillRef>
+          <a:effectRef idx="1">
+            <a:schemeClr val="accent1"/>
+          </a:effectRef>
+          <a:fontRef idx="minor">
+            <a:schemeClr val="tx1"/>
+          </a:fontRef>
+        </p:style>
+      </p:cxnSp>
+      <p:cxnSp>
+        <p:nvCxnSpPr>
+          <p:cNvPr id="356" name="Straight Connector 355">
+            <a:extLst>
+              <a:ext uri="{FF2B5EF4-FFF2-40B4-BE49-F238E27FC236}">
+                <a16:creationId xmlns:a16="http://schemas.microsoft.com/office/drawing/2014/main" id="{85981B5D-8D58-316D-8BA0-E0B5EC7F6C13}"/>
+              </a:ext>
+            </a:extLst>
+          </p:cNvPr>
+          <p:cNvCxnSpPr>
+            <a:cxnSpLocks/>
+            <a:stCxn id="199" idx="3"/>
+            <a:endCxn id="274" idx="1"/>
+          </p:cNvCxnSpPr>
+          <p:nvPr/>
+        </p:nvCxnSpPr>
+        <p:spPr>
+          <a:xfrm>
+            <a:off x="2929886" y="2947695"/>
+            <a:ext cx="665196" cy="0"/>
+          </a:xfrm>
+          <a:prstGeom prst="line">
+            <a:avLst/>
+          </a:prstGeom>
+          <a:ln w="12700">
+            <a:solidFill>
+              <a:schemeClr val="tx1"/>
+            </a:solidFill>
+            <a:prstDash val="sysDot"/>
+          </a:ln>
+        </p:spPr>
+        <p:style>
+          <a:lnRef idx="2">
+            <a:schemeClr val="accent1"/>
+          </a:lnRef>
+          <a:fillRef idx="0">
+            <a:schemeClr val="accent1"/>
+          </a:fillRef>
+          <a:effectRef idx="1">
+            <a:schemeClr val="accent1"/>
+          </a:effectRef>
+          <a:fontRef idx="minor">
+            <a:schemeClr val="tx1"/>
+          </a:fontRef>
+        </p:style>
+      </p:cxnSp>
+      <p:sp>
+        <p:nvSpPr>
+          <p:cNvPr id="2" name="Right Brace 1">
+            <a:extLst>
+              <a:ext uri="{FF2B5EF4-FFF2-40B4-BE49-F238E27FC236}">
+                <a16:creationId xmlns:a16="http://schemas.microsoft.com/office/drawing/2014/main" id="{2A8D8D8A-42F1-94E4-4204-822955899560}"/>
+              </a:ext>
+            </a:extLst>
+          </p:cNvPr>
+          <p:cNvSpPr/>
+          <p:nvPr/>
+        </p:nvSpPr>
+        <p:spPr>
+          <a:xfrm>
+            <a:off x="5861045" y="2206203"/>
+            <a:ext cx="82756" cy="574896"/>
+          </a:xfrm>
+          <a:prstGeom prst="rightBrace">
+            <a:avLst>
+              <a:gd name="adj1" fmla="val 88901"/>
+              <a:gd name="adj2" fmla="val 50000"/>
+            </a:avLst>
+          </a:prstGeom>
+          <a:ln w="12700">
+            <a:solidFill>
+              <a:schemeClr val="tx1"/>
+            </a:solidFill>
+          </a:ln>
+        </p:spPr>
+        <p:style>
+          <a:lnRef idx="2">
+            <a:schemeClr val="accent1"/>
+          </a:lnRef>
+          <a:fillRef idx="0">
+            <a:schemeClr val="accent1"/>
+          </a:fillRef>
+          <a:effectRef idx="1">
+            <a:schemeClr val="accent1"/>
+          </a:effectRef>
+          <a:fontRef idx="minor">
+            <a:schemeClr val="tx1"/>
+          </a:fontRef>
+        </p:style>
+        <p:txBody>
+          <a:bodyPr rtlCol="0" anchor="ctr"/>
+          <a:lstStyle/>
+          <a:p>
+            <a:pPr algn="ctr"/>
+            <a:endParaRPr lang="en-US"/>
+          </a:p>
+        </p:txBody>
+      </p:sp>
+      <p:sp>
+        <p:nvSpPr>
+          <p:cNvPr id="3" name="Right Brace 2">
+            <a:extLst>
+              <a:ext uri="{FF2B5EF4-FFF2-40B4-BE49-F238E27FC236}">
+                <a16:creationId xmlns:a16="http://schemas.microsoft.com/office/drawing/2014/main" id="{7E2A8974-C683-F013-EE39-E7DAD5BD85E5}"/>
+              </a:ext>
+            </a:extLst>
+          </p:cNvPr>
+          <p:cNvSpPr/>
+          <p:nvPr/>
+        </p:nvSpPr>
+        <p:spPr>
+          <a:xfrm>
+            <a:off x="5861045" y="2819553"/>
+            <a:ext cx="82756" cy="574896"/>
+          </a:xfrm>
+          <a:prstGeom prst="rightBrace">
+            <a:avLst>
+              <a:gd name="adj1" fmla="val 88901"/>
+              <a:gd name="adj2" fmla="val 50000"/>
+            </a:avLst>
+          </a:prstGeom>
+          <a:ln w="12700">
+            <a:solidFill>
+              <a:schemeClr val="tx1"/>
+            </a:solidFill>
+          </a:ln>
+        </p:spPr>
+        <p:style>
+          <a:lnRef idx="2">
+            <a:schemeClr val="accent1"/>
+          </a:lnRef>
+          <a:fillRef idx="0">
+            <a:schemeClr val="accent1"/>
+          </a:fillRef>
+          <a:effectRef idx="1">
+            <a:schemeClr val="accent1"/>
+          </a:effectRef>
+          <a:fontRef idx="minor">
+            <a:schemeClr val="tx1"/>
+          </a:fontRef>
+        </p:style>
+        <p:txBody>
+          <a:bodyPr rtlCol="0" anchor="ctr"/>
+          <a:lstStyle/>
+          <a:p>
+            <a:pPr algn="ctr"/>
+            <a:endParaRPr lang="en-US"/>
+          </a:p>
+        </p:txBody>
+      </p:sp>
+      <p:grpSp>
+        <p:nvGrpSpPr>
+          <p:cNvPr id="270" name="Group 269">
+            <a:extLst>
+              <a:ext uri="{FF2B5EF4-FFF2-40B4-BE49-F238E27FC236}">
+                <a16:creationId xmlns:a16="http://schemas.microsoft.com/office/drawing/2014/main" id="{A9832EC4-0E44-30A3-4E70-CD46C82868E4}"/>
+              </a:ext>
+            </a:extLst>
+          </p:cNvPr>
+          <p:cNvGrpSpPr/>
+          <p:nvPr/>
+        </p:nvGrpSpPr>
+        <p:grpSpPr>
+          <a:xfrm>
+            <a:off x="3594298" y="2171378"/>
+            <a:ext cx="2263961" cy="1844033"/>
+            <a:chOff x="3916949" y="3691197"/>
+            <a:chExt cx="2263961" cy="1844033"/>
+          </a:xfrm>
+        </p:grpSpPr>
+        <p:sp>
+          <p:nvSpPr>
+            <p:cNvPr id="271" name="Rectangle: Rounded Corners 270">
+              <a:extLst>
+                <a:ext uri="{FF2B5EF4-FFF2-40B4-BE49-F238E27FC236}">
+                  <a16:creationId xmlns:a16="http://schemas.microsoft.com/office/drawing/2014/main" id="{D7B4D6CF-6257-A2E5-C9CA-3300DB701243}"/>
+                </a:ext>
+              </a:extLst>
+            </p:cNvPr>
+            <p:cNvSpPr/>
+            <p:nvPr/>
+          </p:nvSpPr>
+          <p:spPr>
+            <a:xfrm>
+              <a:off x="3916949" y="3692460"/>
+              <a:ext cx="2239249" cy="1531642"/>
+            </a:xfrm>
+            <a:prstGeom prst="roundRect">
+              <a:avLst>
+                <a:gd name="adj" fmla="val 5859"/>
+              </a:avLst>
+            </a:prstGeom>
+            <a:solidFill>
+              <a:schemeClr val="bg1">
+                <a:lumMod val="85000"/>
+              </a:schemeClr>
+            </a:solidFill>
+            <a:ln w="28575">
+              <a:noFill/>
+            </a:ln>
+          </p:spPr>
+          <p:style>
+            <a:lnRef idx="2">
+              <a:schemeClr val="accent1">
+                <a:shade val="15000"/>
+              </a:schemeClr>
+            </a:lnRef>
+            <a:fillRef idx="1">
+              <a:schemeClr val="accent1"/>
+            </a:fillRef>
+            <a:effectRef idx="0">
+              <a:schemeClr val="accent1"/>
+            </a:effectRef>
+            <a:fontRef idx="minor">
+              <a:schemeClr val="lt1"/>
+            </a:fontRef>
+          </p:style>
+          <p:txBody>
+            <a:bodyPr rtlCol="0" anchor="ctr"/>
+            <a:lstStyle/>
+            <a:p>
+              <a:pPr algn="ctr"/>
+              <a:endParaRPr lang="en-US" dirty="0">
+                <a:latin typeface="Times New Roman" panose="02020603050405020304" pitchFamily="18" charset="0"/>
+                <a:cs typeface="Times New Roman" panose="02020603050405020304" pitchFamily="18" charset="0"/>
+              </a:endParaRPr>
+            </a:p>
+          </p:txBody>
+        </p:sp>
+        <p:sp>
+          <p:nvSpPr>
+            <p:cNvPr id="272" name="Rectangle: Top Corners Rounded 271">
+              <a:extLst>
+                <a:ext uri="{FF2B5EF4-FFF2-40B4-BE49-F238E27FC236}">
+                  <a16:creationId xmlns:a16="http://schemas.microsoft.com/office/drawing/2014/main" id="{9EACF07D-32F6-2137-DA90-32B66227DEC0}"/>
+                </a:ext>
+              </a:extLst>
+            </p:cNvPr>
+            <p:cNvSpPr/>
+            <p:nvPr/>
+          </p:nvSpPr>
+          <p:spPr>
+            <a:xfrm rot="10800000">
+              <a:off x="3916952" y="4613172"/>
+              <a:ext cx="2239248" cy="323588"/>
+            </a:xfrm>
+            <a:prstGeom prst="round2SameRect">
+              <a:avLst>
+                <a:gd name="adj1" fmla="val 28890"/>
+                <a:gd name="adj2" fmla="val 0"/>
+              </a:avLst>
+            </a:prstGeom>
+            <a:solidFill>
+              <a:srgbClr val="F2F2F2"/>
+            </a:solidFill>
+            <a:ln>
+              <a:noFill/>
+            </a:ln>
+          </p:spPr>
+          <p:style>
+            <a:lnRef idx="2">
+              <a:schemeClr val="accent1">
+                <a:shade val="15000"/>
+              </a:schemeClr>
+            </a:lnRef>
+            <a:fillRef idx="1">
+              <a:schemeClr val="accent1"/>
+            </a:fillRef>
+            <a:effectRef idx="0">
+              <a:schemeClr val="accent1"/>
+            </a:effectRef>
+            <a:fontRef idx="minor">
+              <a:schemeClr val="lt1"/>
+            </a:fontRef>
+          </p:style>
+          <p:txBody>
+            <a:bodyPr rtlCol="0" anchor="ctr"/>
+            <a:lstStyle/>
+            <a:p>
+              <a:pPr algn="ctr"/>
+              <a:endParaRPr lang="en-US"/>
+            </a:p>
+          </p:txBody>
+        </p:sp>
+        <p:sp>
+          <p:nvSpPr>
+            <p:cNvPr id="273" name="Rectangle 272">
+              <a:extLst>
+                <a:ext uri="{FF2B5EF4-FFF2-40B4-BE49-F238E27FC236}">
+                  <a16:creationId xmlns:a16="http://schemas.microsoft.com/office/drawing/2014/main" id="{D6075B7C-6B1B-AA09-28DC-A0AB26B8A4EF}"/>
+                </a:ext>
+              </a:extLst>
+            </p:cNvPr>
+            <p:cNvSpPr/>
+            <p:nvPr/>
+          </p:nvSpPr>
+          <p:spPr>
+            <a:xfrm>
+              <a:off x="3916951" y="3990559"/>
+              <a:ext cx="2239249" cy="323587"/>
+            </a:xfrm>
+            <a:prstGeom prst="rect">
+              <a:avLst/>
+            </a:prstGeom>
+            <a:solidFill>
+              <a:schemeClr val="bg1">
+                <a:lumMod val="95000"/>
+              </a:schemeClr>
+            </a:solidFill>
+            <a:ln>
+              <a:noFill/>
+            </a:ln>
+          </p:spPr>
+          <p:style>
+            <a:lnRef idx="2">
+              <a:schemeClr val="accent1">
+                <a:shade val="15000"/>
+              </a:schemeClr>
+            </a:lnRef>
+            <a:fillRef idx="1">
+              <a:schemeClr val="accent1"/>
+            </a:fillRef>
+            <a:effectRef idx="0">
+              <a:schemeClr val="accent1"/>
+            </a:effectRef>
+            <a:fontRef idx="minor">
+              <a:schemeClr val="lt1"/>
+            </a:fontRef>
+          </p:style>
+          <p:txBody>
+            <a:bodyPr rtlCol="0" anchor="ctr"/>
+            <a:lstStyle/>
+            <a:p>
+              <a:pPr algn="ctr"/>
+              <a:endParaRPr lang="en-US"/>
+            </a:p>
+          </p:txBody>
+        </p:sp>
+        <p:sp>
+          <p:nvSpPr>
+            <p:cNvPr id="274" name="TextBox 273">
+              <a:extLst>
+                <a:ext uri="{FF2B5EF4-FFF2-40B4-BE49-F238E27FC236}">
+                  <a16:creationId xmlns:a16="http://schemas.microsoft.com/office/drawing/2014/main" id="{0F1D9381-EB89-C1C5-783F-90CB3F61BF0E}"/>
+                </a:ext>
+              </a:extLst>
+            </p:cNvPr>
+            <p:cNvSpPr txBox="1"/>
+            <p:nvPr/>
+          </p:nvSpPr>
+          <p:spPr>
+            <a:xfrm>
+              <a:off x="3917733" y="4313625"/>
+              <a:ext cx="2237684" cy="307777"/>
+            </a:xfrm>
+            <a:prstGeom prst="rect">
+              <a:avLst/>
+            </a:prstGeom>
+            <a:noFill/>
+          </p:spPr>
+          <p:txBody>
+            <a:bodyPr wrap="square">
+              <a:spAutoFit/>
+            </a:bodyPr>
+            <a:lstStyle/>
+            <a:p>
+              <a:pPr algn="ctr"/>
+              <a:r>
+                <a:rPr lang="en-US" sz="1400" dirty="0">
+                  <a:latin typeface="Times New Roman" panose="02020603050405020304" pitchFamily="18" charset="0"/>
+                  <a:cs typeface="Times New Roman" panose="02020603050405020304" pitchFamily="18" charset="0"/>
+                </a:rPr>
+                <a:t>OAI : USRP</a:t>
+              </a:r>
+            </a:p>
+          </p:txBody>
+        </p:sp>
+        <p:sp>
+          <p:nvSpPr>
+            <p:cNvPr id="275" name="TextBox 274">
+              <a:extLst>
+                <a:ext uri="{FF2B5EF4-FFF2-40B4-BE49-F238E27FC236}">
+                  <a16:creationId xmlns:a16="http://schemas.microsoft.com/office/drawing/2014/main" id="{A8AE50F6-876D-1B55-54CD-525FF6E92E84}"/>
+                </a:ext>
+              </a:extLst>
+            </p:cNvPr>
+            <p:cNvSpPr txBox="1"/>
+            <p:nvPr/>
+          </p:nvSpPr>
+          <p:spPr>
+            <a:xfrm>
+              <a:off x="3933168" y="4007963"/>
+              <a:ext cx="2206814" cy="307777"/>
+            </a:xfrm>
+            <a:prstGeom prst="rect">
+              <a:avLst/>
+            </a:prstGeom>
+            <a:noFill/>
+          </p:spPr>
+          <p:txBody>
+            <a:bodyPr wrap="square">
+              <a:spAutoFit/>
+            </a:bodyPr>
+            <a:lstStyle/>
+            <a:p>
+              <a:pPr algn="ctr"/>
+              <a:r>
+                <a:rPr lang="en-US" sz="1400" dirty="0" err="1">
+                  <a:latin typeface="Times New Roman" panose="02020603050405020304" pitchFamily="18" charset="0"/>
+                  <a:cs typeface="Times New Roman" panose="02020603050405020304" pitchFamily="18" charset="0"/>
+                </a:rPr>
+                <a:t>srsRAN_Project</a:t>
+              </a:r>
+              <a:r>
+                <a:rPr lang="en-US" sz="1400" dirty="0">
+                  <a:latin typeface="Times New Roman" panose="02020603050405020304" pitchFamily="18" charset="0"/>
+                  <a:cs typeface="Times New Roman" panose="02020603050405020304" pitchFamily="18" charset="0"/>
+                </a:rPr>
+                <a:t> : </a:t>
+              </a:r>
+              <a:r>
+                <a:rPr lang="en-US" sz="1400" dirty="0" err="1">
+                  <a:latin typeface="Times New Roman" panose="02020603050405020304" pitchFamily="18" charset="0"/>
+                  <a:cs typeface="Times New Roman" panose="02020603050405020304" pitchFamily="18" charset="0"/>
+                </a:rPr>
+                <a:t>ZeroMQ</a:t>
+              </a:r>
+              <a:endParaRPr lang="en-US" sz="1400" dirty="0">
+                <a:latin typeface="Times New Roman" panose="02020603050405020304" pitchFamily="18" charset="0"/>
+                <a:cs typeface="Times New Roman" panose="02020603050405020304" pitchFamily="18" charset="0"/>
+              </a:endParaRPr>
+            </a:p>
+          </p:txBody>
+        </p:sp>
+        <p:sp>
+          <p:nvSpPr>
+            <p:cNvPr id="276" name="TextBox 275">
+              <a:extLst>
+                <a:ext uri="{FF2B5EF4-FFF2-40B4-BE49-F238E27FC236}">
+                  <a16:creationId xmlns:a16="http://schemas.microsoft.com/office/drawing/2014/main" id="{1413A169-90A0-F78F-98F8-C95D3D06F347}"/>
+                </a:ext>
+              </a:extLst>
+            </p:cNvPr>
+            <p:cNvSpPr txBox="1"/>
+            <p:nvPr/>
+          </p:nvSpPr>
+          <p:spPr>
+            <a:xfrm>
+              <a:off x="3929357" y="3702301"/>
+              <a:ext cx="2206816" cy="307777"/>
+            </a:xfrm>
+            <a:prstGeom prst="rect">
+              <a:avLst/>
+            </a:prstGeom>
+            <a:noFill/>
+          </p:spPr>
+          <p:txBody>
+            <a:bodyPr wrap="square">
+              <a:spAutoFit/>
+            </a:bodyPr>
+            <a:lstStyle/>
+            <a:p>
+              <a:pPr algn="ctr"/>
+              <a:r>
+                <a:rPr lang="en-US" sz="1400" dirty="0" err="1">
+                  <a:latin typeface="Times New Roman" panose="02020603050405020304" pitchFamily="18" charset="0"/>
+                  <a:cs typeface="Times New Roman" panose="02020603050405020304" pitchFamily="18" charset="0"/>
+                </a:rPr>
+                <a:t>srsRAN_Project</a:t>
+              </a:r>
+              <a:r>
+                <a:rPr lang="en-US" sz="1400" dirty="0">
+                  <a:latin typeface="Times New Roman" panose="02020603050405020304" pitchFamily="18" charset="0"/>
+                  <a:cs typeface="Times New Roman" panose="02020603050405020304" pitchFamily="18" charset="0"/>
+                </a:rPr>
+                <a:t> : USRP</a:t>
+              </a:r>
+            </a:p>
+          </p:txBody>
+        </p:sp>
+        <p:sp>
+          <p:nvSpPr>
+            <p:cNvPr id="277" name="TextBox 276">
+              <a:extLst>
+                <a:ext uri="{FF2B5EF4-FFF2-40B4-BE49-F238E27FC236}">
+                  <a16:creationId xmlns:a16="http://schemas.microsoft.com/office/drawing/2014/main" id="{96F5014D-82C8-C27A-8EF4-CC8285452C10}"/>
+                </a:ext>
+              </a:extLst>
+            </p:cNvPr>
+            <p:cNvSpPr txBox="1"/>
+            <p:nvPr/>
+          </p:nvSpPr>
+          <p:spPr>
+            <a:xfrm>
+              <a:off x="3933168" y="4924949"/>
+              <a:ext cx="2206814" cy="307777"/>
+            </a:xfrm>
+            <a:prstGeom prst="rect">
+              <a:avLst/>
+            </a:prstGeom>
+            <a:noFill/>
+          </p:spPr>
+          <p:txBody>
+            <a:bodyPr wrap="square">
+              <a:spAutoFit/>
+            </a:bodyPr>
+            <a:lstStyle/>
+            <a:p>
+              <a:pPr algn="ctr"/>
+              <a:r>
+                <a:rPr lang="en-US" sz="1400" dirty="0">
+                  <a:latin typeface="Times New Roman" panose="02020603050405020304" pitchFamily="18" charset="0"/>
+                  <a:cs typeface="Times New Roman" panose="02020603050405020304" pitchFamily="18" charset="0"/>
+                </a:rPr>
+                <a:t>O-RAN SC : E2 Simulator</a:t>
+              </a:r>
+            </a:p>
+          </p:txBody>
+        </p:sp>
+        <p:sp>
+          <p:nvSpPr>
+            <p:cNvPr id="278" name="TextBox 277">
+              <a:extLst>
+                <a:ext uri="{FF2B5EF4-FFF2-40B4-BE49-F238E27FC236}">
+                  <a16:creationId xmlns:a16="http://schemas.microsoft.com/office/drawing/2014/main" id="{3BDAD62F-06B2-79B2-26C5-B0000A989788}"/>
+                </a:ext>
+              </a:extLst>
+            </p:cNvPr>
+            <p:cNvSpPr txBox="1"/>
+            <p:nvPr/>
+          </p:nvSpPr>
+          <p:spPr>
+            <a:xfrm>
+              <a:off x="3941661" y="5227453"/>
+              <a:ext cx="2239249" cy="307777"/>
+            </a:xfrm>
+            <a:prstGeom prst="rect">
+              <a:avLst/>
+            </a:prstGeom>
+            <a:noFill/>
+          </p:spPr>
+          <p:txBody>
+            <a:bodyPr wrap="square">
+              <a:spAutoFit/>
+            </a:bodyPr>
+            <a:lstStyle/>
+            <a:p>
+              <a:pPr algn="ctr"/>
+              <a:r>
+                <a:rPr lang="en-US" sz="1400" b="1" dirty="0">
+                  <a:solidFill>
+                    <a:schemeClr val="tx1"/>
+                  </a:solidFill>
+                  <a:latin typeface="Times New Roman" panose="02020603050405020304" pitchFamily="18" charset="0"/>
+                  <a:cs typeface="Times New Roman" panose="02020603050405020304" pitchFamily="18" charset="0"/>
+                </a:rPr>
+                <a:t>Next Generation Node B</a:t>
+              </a:r>
+              <a:endParaRPr lang="en-US" sz="1400" b="1" dirty="0">
+                <a:latin typeface="Times New Roman" panose="02020603050405020304" pitchFamily="18" charset="0"/>
+                <a:cs typeface="Times New Roman" panose="02020603050405020304" pitchFamily="18" charset="0"/>
+              </a:endParaRPr>
+            </a:p>
+          </p:txBody>
+        </p:sp>
+        <p:sp>
+          <p:nvSpPr>
+            <p:cNvPr id="279" name="Rectangle 278">
+              <a:extLst>
+                <a:ext uri="{FF2B5EF4-FFF2-40B4-BE49-F238E27FC236}">
+                  <a16:creationId xmlns:a16="http://schemas.microsoft.com/office/drawing/2014/main" id="{83A50FAE-7494-A2B4-0F14-D16BA097F548}"/>
+                </a:ext>
+              </a:extLst>
+            </p:cNvPr>
+            <p:cNvSpPr/>
+            <p:nvPr/>
+          </p:nvSpPr>
+          <p:spPr>
+            <a:xfrm>
+              <a:off x="3916950" y="4615547"/>
+              <a:ext cx="2239249" cy="323587"/>
+            </a:xfrm>
+            <a:prstGeom prst="rect">
+              <a:avLst/>
+            </a:prstGeom>
+            <a:solidFill>
+              <a:schemeClr val="bg1">
+                <a:lumMod val="95000"/>
+              </a:schemeClr>
+            </a:solidFill>
+            <a:ln>
+              <a:noFill/>
+            </a:ln>
+          </p:spPr>
+          <p:style>
+            <a:lnRef idx="2">
+              <a:schemeClr val="accent1">
+                <a:shade val="15000"/>
+              </a:schemeClr>
+            </a:lnRef>
+            <a:fillRef idx="1">
+              <a:schemeClr val="accent1"/>
+            </a:fillRef>
+            <a:effectRef idx="0">
+              <a:schemeClr val="accent1"/>
+            </a:effectRef>
+            <a:fontRef idx="minor">
+              <a:schemeClr val="lt1"/>
+            </a:fontRef>
+          </p:style>
+          <p:txBody>
+            <a:bodyPr rtlCol="0" anchor="ctr"/>
+            <a:lstStyle/>
+            <a:p>
+              <a:pPr algn="ctr"/>
+              <a:endParaRPr lang="en-US"/>
+            </a:p>
+          </p:txBody>
+        </p:sp>
+        <p:sp>
+          <p:nvSpPr>
+            <p:cNvPr id="280" name="TextBox 279">
+              <a:extLst>
+                <a:ext uri="{FF2B5EF4-FFF2-40B4-BE49-F238E27FC236}">
+                  <a16:creationId xmlns:a16="http://schemas.microsoft.com/office/drawing/2014/main" id="{B116DFE2-7F21-FE11-0F36-441A58E9A2C3}"/>
+                </a:ext>
+              </a:extLst>
+            </p:cNvPr>
+            <p:cNvSpPr txBox="1"/>
+            <p:nvPr/>
+          </p:nvSpPr>
+          <p:spPr>
+            <a:xfrm>
+              <a:off x="3933168" y="4619287"/>
+              <a:ext cx="2206814" cy="307777"/>
+            </a:xfrm>
+            <a:prstGeom prst="rect">
+              <a:avLst/>
+            </a:prstGeom>
+            <a:noFill/>
+          </p:spPr>
+          <p:txBody>
+            <a:bodyPr wrap="square">
+              <a:spAutoFit/>
+            </a:bodyPr>
+            <a:lstStyle/>
+            <a:p>
+              <a:pPr algn="ctr"/>
+              <a:r>
+                <a:rPr lang="en-US" sz="1400" dirty="0">
+                  <a:solidFill>
+                    <a:schemeClr val="tx1"/>
+                  </a:solidFill>
+                  <a:latin typeface="Times New Roman" panose="02020603050405020304" pitchFamily="18" charset="0"/>
+                  <a:cs typeface="Times New Roman" panose="02020603050405020304" pitchFamily="18" charset="0"/>
+                </a:rPr>
+                <a:t>OAI : RF Simulator</a:t>
+              </a:r>
+              <a:endParaRPr lang="en-US" sz="1400" dirty="0">
+                <a:latin typeface="Times New Roman" panose="02020603050405020304" pitchFamily="18" charset="0"/>
+                <a:cs typeface="Times New Roman" panose="02020603050405020304" pitchFamily="18" charset="0"/>
+              </a:endParaRPr>
+            </a:p>
+          </p:txBody>
+        </p:sp>
+        <p:sp>
+          <p:nvSpPr>
+            <p:cNvPr id="281" name="Rectangle: Rounded Corners 280">
+              <a:extLst>
+                <a:ext uri="{FF2B5EF4-FFF2-40B4-BE49-F238E27FC236}">
+                  <a16:creationId xmlns:a16="http://schemas.microsoft.com/office/drawing/2014/main" id="{4D54D83B-619F-C188-C380-2C35CAF9BF85}"/>
+                </a:ext>
+              </a:extLst>
+            </p:cNvPr>
+            <p:cNvSpPr/>
+            <p:nvPr/>
+          </p:nvSpPr>
+          <p:spPr>
+            <a:xfrm>
+              <a:off x="3916951" y="3691197"/>
+              <a:ext cx="2239249" cy="1534218"/>
+            </a:xfrm>
+            <a:prstGeom prst="roundRect">
+              <a:avLst>
+                <a:gd name="adj" fmla="val 5819"/>
+              </a:avLst>
+            </a:prstGeom>
+            <a:noFill/>
+            <a:ln w="12700">
+              <a:solidFill>
+                <a:schemeClr val="tx1"/>
+              </a:solidFill>
+            </a:ln>
+          </p:spPr>
+          <p:style>
+            <a:lnRef idx="2">
+              <a:schemeClr val="accent1">
+                <a:shade val="15000"/>
+              </a:schemeClr>
+            </a:lnRef>
+            <a:fillRef idx="1">
+              <a:schemeClr val="accent1"/>
+            </a:fillRef>
+            <a:effectRef idx="0">
+              <a:schemeClr val="accent1"/>
+            </a:effectRef>
+            <a:fontRef idx="minor">
+              <a:schemeClr val="lt1"/>
+            </a:fontRef>
+          </p:style>
+          <p:txBody>
+            <a:bodyPr rtlCol="0" anchor="ctr"/>
+            <a:lstStyle/>
+            <a:p>
+              <a:pPr algn="ctr"/>
+              <a:endParaRPr lang="en-US" dirty="0">
+                <a:latin typeface="Times New Roman" panose="02020603050405020304" pitchFamily="18" charset="0"/>
+                <a:cs typeface="Times New Roman" panose="02020603050405020304" pitchFamily="18" charset="0"/>
+              </a:endParaRPr>
+            </a:p>
+          </p:txBody>
+        </p:sp>
+      </p:grpSp>
+      <p:grpSp>
+        <p:nvGrpSpPr>
+          <p:cNvPr id="227" name="Group 226">
+            <a:extLst>
+              <a:ext uri="{FF2B5EF4-FFF2-40B4-BE49-F238E27FC236}">
+                <a16:creationId xmlns:a16="http://schemas.microsoft.com/office/drawing/2014/main" id="{7A854522-CD14-6BE1-A26D-F4B8091652DF}"/>
+              </a:ext>
+            </a:extLst>
+          </p:cNvPr>
+          <p:cNvGrpSpPr/>
+          <p:nvPr/>
+        </p:nvGrpSpPr>
+        <p:grpSpPr>
+          <a:xfrm>
+            <a:off x="690637" y="2171378"/>
+            <a:ext cx="2263961" cy="1844033"/>
+            <a:chOff x="3916949" y="3691197"/>
+            <a:chExt cx="2263961" cy="1844033"/>
+          </a:xfrm>
+        </p:grpSpPr>
+        <p:sp>
+          <p:nvSpPr>
+            <p:cNvPr id="210" name="Rectangle: Rounded Corners 209">
+              <a:extLst>
+                <a:ext uri="{FF2B5EF4-FFF2-40B4-BE49-F238E27FC236}">
+                  <a16:creationId xmlns:a16="http://schemas.microsoft.com/office/drawing/2014/main" id="{70ADBDF1-D32C-AE54-601E-E1D8D6CDE9CC}"/>
+                </a:ext>
+              </a:extLst>
+            </p:cNvPr>
+            <p:cNvSpPr/>
+            <p:nvPr/>
+          </p:nvSpPr>
+          <p:spPr>
+            <a:xfrm>
+              <a:off x="3916949" y="3692460"/>
+              <a:ext cx="2239249" cy="1531642"/>
+            </a:xfrm>
+            <a:prstGeom prst="roundRect">
+              <a:avLst>
+                <a:gd name="adj" fmla="val 5859"/>
+              </a:avLst>
+            </a:prstGeom>
+            <a:solidFill>
+              <a:schemeClr val="bg1">
+                <a:lumMod val="85000"/>
+              </a:schemeClr>
+            </a:solidFill>
+            <a:ln w="28575">
+              <a:noFill/>
+            </a:ln>
+          </p:spPr>
+          <p:style>
+            <a:lnRef idx="2">
+              <a:schemeClr val="accent1">
+                <a:shade val="15000"/>
+              </a:schemeClr>
+            </a:lnRef>
+            <a:fillRef idx="1">
+              <a:schemeClr val="accent1"/>
+            </a:fillRef>
+            <a:effectRef idx="0">
+              <a:schemeClr val="accent1"/>
+            </a:effectRef>
+            <a:fontRef idx="minor">
+              <a:schemeClr val="lt1"/>
+            </a:fontRef>
+          </p:style>
+          <p:txBody>
+            <a:bodyPr rtlCol="0" anchor="ctr"/>
+            <a:lstStyle/>
+            <a:p>
+              <a:pPr algn="ctr"/>
+              <a:endParaRPr lang="en-US" dirty="0">
+                <a:latin typeface="Times New Roman" panose="02020603050405020304" pitchFamily="18" charset="0"/>
+                <a:cs typeface="Times New Roman" panose="02020603050405020304" pitchFamily="18" charset="0"/>
+              </a:endParaRPr>
+            </a:p>
+          </p:txBody>
+        </p:sp>
+        <p:sp>
+          <p:nvSpPr>
+            <p:cNvPr id="195" name="Rectangle: Top Corners Rounded 194">
+              <a:extLst>
+                <a:ext uri="{FF2B5EF4-FFF2-40B4-BE49-F238E27FC236}">
+                  <a16:creationId xmlns:a16="http://schemas.microsoft.com/office/drawing/2014/main" id="{49EE529D-3822-3C34-2FCF-96301FCBDE2B}"/>
+                </a:ext>
+              </a:extLst>
+            </p:cNvPr>
+            <p:cNvSpPr/>
+            <p:nvPr/>
+          </p:nvSpPr>
+          <p:spPr>
+            <a:xfrm rot="10800000">
+              <a:off x="3916952" y="4613172"/>
+              <a:ext cx="2239248" cy="323588"/>
+            </a:xfrm>
+            <a:prstGeom prst="round2SameRect">
+              <a:avLst>
+                <a:gd name="adj1" fmla="val 28890"/>
+                <a:gd name="adj2" fmla="val 0"/>
+              </a:avLst>
+            </a:prstGeom>
+            <a:solidFill>
+              <a:srgbClr val="F2F2F2"/>
+            </a:solidFill>
+            <a:ln>
+              <a:noFill/>
+            </a:ln>
+          </p:spPr>
+          <p:style>
+            <a:lnRef idx="2">
+              <a:schemeClr val="accent1">
+                <a:shade val="15000"/>
+              </a:schemeClr>
+            </a:lnRef>
+            <a:fillRef idx="1">
+              <a:schemeClr val="accent1"/>
+            </a:fillRef>
+            <a:effectRef idx="0">
+              <a:schemeClr val="accent1"/>
+            </a:effectRef>
+            <a:fontRef idx="minor">
+              <a:schemeClr val="lt1"/>
+            </a:fontRef>
+          </p:style>
+          <p:txBody>
+            <a:bodyPr rtlCol="0" anchor="ctr"/>
+            <a:lstStyle/>
+            <a:p>
+              <a:pPr algn="ctr"/>
+              <a:endParaRPr lang="en-US"/>
+            </a:p>
+          </p:txBody>
+        </p:sp>
+        <p:sp>
+          <p:nvSpPr>
+            <p:cNvPr id="197" name="Rectangle 196">
+              <a:extLst>
+                <a:ext uri="{FF2B5EF4-FFF2-40B4-BE49-F238E27FC236}">
+                  <a16:creationId xmlns:a16="http://schemas.microsoft.com/office/drawing/2014/main" id="{9D8422CA-4FF5-7187-2D0D-ADC45EB74032}"/>
+                </a:ext>
+              </a:extLst>
+            </p:cNvPr>
+            <p:cNvSpPr/>
+            <p:nvPr/>
+          </p:nvSpPr>
+          <p:spPr>
+            <a:xfrm>
+              <a:off x="3916951" y="3990559"/>
+              <a:ext cx="2239249" cy="323587"/>
+            </a:xfrm>
+            <a:prstGeom prst="rect">
+              <a:avLst/>
+            </a:prstGeom>
+            <a:solidFill>
+              <a:schemeClr val="bg1">
+                <a:lumMod val="95000"/>
+              </a:schemeClr>
+            </a:solidFill>
+            <a:ln>
+              <a:noFill/>
+            </a:ln>
+          </p:spPr>
+          <p:style>
+            <a:lnRef idx="2">
+              <a:schemeClr val="accent1">
+                <a:shade val="15000"/>
+              </a:schemeClr>
+            </a:lnRef>
+            <a:fillRef idx="1">
+              <a:schemeClr val="accent1"/>
+            </a:fillRef>
+            <a:effectRef idx="0">
+              <a:schemeClr val="accent1"/>
+            </a:effectRef>
+            <a:fontRef idx="minor">
+              <a:schemeClr val="lt1"/>
+            </a:fontRef>
+          </p:style>
+          <p:txBody>
+            <a:bodyPr rtlCol="0" anchor="ctr"/>
+            <a:lstStyle/>
+            <a:p>
+              <a:pPr algn="ctr"/>
+              <a:endParaRPr lang="en-US"/>
+            </a:p>
+          </p:txBody>
+        </p:sp>
+        <p:sp>
+          <p:nvSpPr>
+            <p:cNvPr id="199" name="TextBox 198">
+              <a:extLst>
+                <a:ext uri="{FF2B5EF4-FFF2-40B4-BE49-F238E27FC236}">
+                  <a16:creationId xmlns:a16="http://schemas.microsoft.com/office/drawing/2014/main" id="{9F8EDD21-A0C6-EE8F-DB27-D2CD5236A366}"/>
+                </a:ext>
+              </a:extLst>
+            </p:cNvPr>
+            <p:cNvSpPr txBox="1"/>
+            <p:nvPr/>
+          </p:nvSpPr>
+          <p:spPr>
+            <a:xfrm>
+              <a:off x="3916952" y="4313625"/>
+              <a:ext cx="2239246" cy="307777"/>
+            </a:xfrm>
+            <a:prstGeom prst="rect">
+              <a:avLst/>
+            </a:prstGeom>
+            <a:noFill/>
+          </p:spPr>
+          <p:txBody>
+            <a:bodyPr wrap="square">
+              <a:spAutoFit/>
+            </a:bodyPr>
+            <a:lstStyle/>
+            <a:p>
+              <a:pPr algn="ctr"/>
+              <a:r>
+                <a:rPr lang="en-US" sz="1400" dirty="0">
+                  <a:latin typeface="Times New Roman" panose="02020603050405020304" pitchFamily="18" charset="0"/>
+                  <a:cs typeface="Times New Roman" panose="02020603050405020304" pitchFamily="18" charset="0"/>
+                </a:rPr>
+                <a:t>OAI : USRP</a:t>
+              </a:r>
+            </a:p>
+          </p:txBody>
+        </p:sp>
+        <p:sp>
+          <p:nvSpPr>
+            <p:cNvPr id="200" name="TextBox 199">
+              <a:extLst>
+                <a:ext uri="{FF2B5EF4-FFF2-40B4-BE49-F238E27FC236}">
+                  <a16:creationId xmlns:a16="http://schemas.microsoft.com/office/drawing/2014/main" id="{F4E12DF1-F6ED-9A1D-33B3-ACB6D007555A}"/>
+                </a:ext>
+              </a:extLst>
+            </p:cNvPr>
+            <p:cNvSpPr txBox="1"/>
+            <p:nvPr/>
+          </p:nvSpPr>
+          <p:spPr>
+            <a:xfrm>
+              <a:off x="3916952" y="4007963"/>
+              <a:ext cx="2239246" cy="307777"/>
+            </a:xfrm>
+            <a:prstGeom prst="rect">
+              <a:avLst/>
+            </a:prstGeom>
+            <a:noFill/>
+          </p:spPr>
+          <p:txBody>
+            <a:bodyPr wrap="square">
+              <a:spAutoFit/>
+            </a:bodyPr>
+            <a:lstStyle/>
+            <a:p>
+              <a:pPr algn="ctr"/>
+              <a:r>
+                <a:rPr lang="en-US" sz="1400" dirty="0">
+                  <a:latin typeface="Times New Roman" panose="02020603050405020304" pitchFamily="18" charset="0"/>
+                  <a:cs typeface="Times New Roman" panose="02020603050405020304" pitchFamily="18" charset="0"/>
+                </a:rPr>
+                <a:t>srsRAN_4G : </a:t>
+              </a:r>
+              <a:r>
+                <a:rPr lang="en-US" sz="1400" dirty="0" err="1">
+                  <a:latin typeface="Times New Roman" panose="02020603050405020304" pitchFamily="18" charset="0"/>
+                  <a:cs typeface="Times New Roman" panose="02020603050405020304" pitchFamily="18" charset="0"/>
+                </a:rPr>
+                <a:t>ZeroMQ</a:t>
+              </a:r>
+              <a:endParaRPr lang="en-US" sz="1400" dirty="0">
+                <a:latin typeface="Times New Roman" panose="02020603050405020304" pitchFamily="18" charset="0"/>
+                <a:cs typeface="Times New Roman" panose="02020603050405020304" pitchFamily="18" charset="0"/>
+              </a:endParaRPr>
+            </a:p>
+          </p:txBody>
+        </p:sp>
+        <p:sp>
+          <p:nvSpPr>
+            <p:cNvPr id="201" name="TextBox 200">
+              <a:extLst>
+                <a:ext uri="{FF2B5EF4-FFF2-40B4-BE49-F238E27FC236}">
+                  <a16:creationId xmlns:a16="http://schemas.microsoft.com/office/drawing/2014/main" id="{0E36D728-D080-9470-0E71-4C5261DE33FD}"/>
+                </a:ext>
+              </a:extLst>
+            </p:cNvPr>
+            <p:cNvSpPr txBox="1"/>
+            <p:nvPr/>
+          </p:nvSpPr>
+          <p:spPr>
+            <a:xfrm>
+              <a:off x="3916951" y="3702301"/>
+              <a:ext cx="2239248" cy="307777"/>
+            </a:xfrm>
+            <a:prstGeom prst="rect">
+              <a:avLst/>
+            </a:prstGeom>
+            <a:noFill/>
+          </p:spPr>
+          <p:txBody>
+            <a:bodyPr wrap="square">
+              <a:spAutoFit/>
+            </a:bodyPr>
+            <a:lstStyle/>
+            <a:p>
+              <a:pPr algn="ctr"/>
+              <a:r>
+                <a:rPr lang="en-US" sz="1400" dirty="0">
+                  <a:latin typeface="Times New Roman" panose="02020603050405020304" pitchFamily="18" charset="0"/>
+                  <a:cs typeface="Times New Roman" panose="02020603050405020304" pitchFamily="18" charset="0"/>
+                </a:rPr>
+                <a:t>srsRAN_4G : USRP</a:t>
+              </a:r>
+            </a:p>
+          </p:txBody>
+        </p:sp>
+        <p:sp>
+          <p:nvSpPr>
+            <p:cNvPr id="202" name="TextBox 201">
+              <a:extLst>
+                <a:ext uri="{FF2B5EF4-FFF2-40B4-BE49-F238E27FC236}">
+                  <a16:creationId xmlns:a16="http://schemas.microsoft.com/office/drawing/2014/main" id="{16FB98B6-AA11-EA1B-485F-18B0C2E0C573}"/>
+                </a:ext>
+              </a:extLst>
+            </p:cNvPr>
+            <p:cNvSpPr txBox="1"/>
+            <p:nvPr/>
+          </p:nvSpPr>
+          <p:spPr>
+            <a:xfrm>
+              <a:off x="3916952" y="4924949"/>
+              <a:ext cx="2239246" cy="307777"/>
+            </a:xfrm>
+            <a:prstGeom prst="rect">
+              <a:avLst/>
+            </a:prstGeom>
+            <a:noFill/>
+          </p:spPr>
+          <p:txBody>
+            <a:bodyPr wrap="square">
+              <a:spAutoFit/>
+            </a:bodyPr>
+            <a:lstStyle/>
+            <a:p>
+              <a:pPr algn="ctr"/>
+              <a:r>
+                <a:rPr lang="en-US" sz="1400" dirty="0">
+                  <a:latin typeface="Times New Roman" panose="02020603050405020304" pitchFamily="18" charset="0"/>
+                  <a:cs typeface="Times New Roman" panose="02020603050405020304" pitchFamily="18" charset="0"/>
+                </a:rPr>
+                <a:t>5G Mobile Phone</a:t>
+              </a:r>
+            </a:p>
+          </p:txBody>
+        </p:sp>
+        <p:sp>
+          <p:nvSpPr>
+            <p:cNvPr id="203" name="TextBox 202">
+              <a:extLst>
+                <a:ext uri="{FF2B5EF4-FFF2-40B4-BE49-F238E27FC236}">
+                  <a16:creationId xmlns:a16="http://schemas.microsoft.com/office/drawing/2014/main" id="{2BC8A388-630D-2F0A-E362-E58FB4DE4B4B}"/>
+                </a:ext>
+              </a:extLst>
+            </p:cNvPr>
+            <p:cNvSpPr txBox="1"/>
+            <p:nvPr/>
+          </p:nvSpPr>
+          <p:spPr>
+            <a:xfrm>
+              <a:off x="3941661" y="5227453"/>
+              <a:ext cx="2239249" cy="307777"/>
+            </a:xfrm>
+            <a:prstGeom prst="rect">
+              <a:avLst/>
+            </a:prstGeom>
+            <a:noFill/>
+          </p:spPr>
+          <p:txBody>
+            <a:bodyPr wrap="square">
+              <a:spAutoFit/>
+            </a:bodyPr>
+            <a:lstStyle/>
+            <a:p>
+              <a:pPr algn="ctr"/>
+              <a:r>
+                <a:rPr lang="en-US" sz="1400" b="1" dirty="0">
+                  <a:solidFill>
+                    <a:schemeClr val="tx1"/>
+                  </a:solidFill>
+                  <a:latin typeface="Times New Roman" panose="02020603050405020304" pitchFamily="18" charset="0"/>
+                  <a:cs typeface="Times New Roman" panose="02020603050405020304" pitchFamily="18" charset="0"/>
+                </a:rPr>
+                <a:t>User Equipment</a:t>
+              </a:r>
+              <a:endParaRPr lang="en-US" sz="1400" b="1" dirty="0">
+                <a:latin typeface="Times New Roman" panose="02020603050405020304" pitchFamily="18" charset="0"/>
+                <a:cs typeface="Times New Roman" panose="02020603050405020304" pitchFamily="18" charset="0"/>
+              </a:endParaRPr>
+            </a:p>
+          </p:txBody>
+        </p:sp>
+        <p:sp>
+          <p:nvSpPr>
+            <p:cNvPr id="208" name="Rectangle 207">
+              <a:extLst>
+                <a:ext uri="{FF2B5EF4-FFF2-40B4-BE49-F238E27FC236}">
+                  <a16:creationId xmlns:a16="http://schemas.microsoft.com/office/drawing/2014/main" id="{212011C4-EBF3-EB29-D80C-BEAECBCA7B62}"/>
+                </a:ext>
+              </a:extLst>
+            </p:cNvPr>
+            <p:cNvSpPr/>
+            <p:nvPr/>
+          </p:nvSpPr>
+          <p:spPr>
+            <a:xfrm>
+              <a:off x="3916950" y="4615547"/>
+              <a:ext cx="2239249" cy="323587"/>
+            </a:xfrm>
+            <a:prstGeom prst="rect">
+              <a:avLst/>
+            </a:prstGeom>
+            <a:solidFill>
+              <a:schemeClr val="bg1">
+                <a:lumMod val="95000"/>
+              </a:schemeClr>
+            </a:solidFill>
+            <a:ln>
+              <a:noFill/>
+            </a:ln>
+          </p:spPr>
+          <p:style>
+            <a:lnRef idx="2">
+              <a:schemeClr val="accent1">
+                <a:shade val="15000"/>
+              </a:schemeClr>
+            </a:lnRef>
+            <a:fillRef idx="1">
+              <a:schemeClr val="accent1"/>
+            </a:fillRef>
+            <a:effectRef idx="0">
+              <a:schemeClr val="accent1"/>
+            </a:effectRef>
+            <a:fontRef idx="minor">
+              <a:schemeClr val="lt1"/>
+            </a:fontRef>
+          </p:style>
+          <p:txBody>
+            <a:bodyPr rtlCol="0" anchor="ctr"/>
+            <a:lstStyle/>
+            <a:p>
+              <a:pPr algn="ctr"/>
+              <a:endParaRPr lang="en-US"/>
+            </a:p>
+          </p:txBody>
+        </p:sp>
+        <p:sp>
+          <p:nvSpPr>
+            <p:cNvPr id="209" name="TextBox 208">
+              <a:extLst>
+                <a:ext uri="{FF2B5EF4-FFF2-40B4-BE49-F238E27FC236}">
+                  <a16:creationId xmlns:a16="http://schemas.microsoft.com/office/drawing/2014/main" id="{84E8EFF1-03BE-6A27-CF24-939A0A21B022}"/>
+                </a:ext>
+              </a:extLst>
+            </p:cNvPr>
+            <p:cNvSpPr txBox="1"/>
+            <p:nvPr/>
+          </p:nvSpPr>
+          <p:spPr>
+            <a:xfrm>
+              <a:off x="3916952" y="4619287"/>
+              <a:ext cx="2239246" cy="307777"/>
+            </a:xfrm>
+            <a:prstGeom prst="rect">
+              <a:avLst/>
+            </a:prstGeom>
+            <a:noFill/>
+          </p:spPr>
+          <p:txBody>
+            <a:bodyPr wrap="square">
+              <a:spAutoFit/>
+            </a:bodyPr>
+            <a:lstStyle/>
+            <a:p>
+              <a:pPr algn="ctr"/>
+              <a:r>
+                <a:rPr lang="en-US" sz="1400" dirty="0">
+                  <a:latin typeface="Times New Roman" panose="02020603050405020304" pitchFamily="18" charset="0"/>
+                  <a:cs typeface="Times New Roman" panose="02020603050405020304" pitchFamily="18" charset="0"/>
+                </a:rPr>
+                <a:t>OAI : RF Simulator</a:t>
+              </a:r>
+            </a:p>
+          </p:txBody>
+        </p:sp>
+        <p:sp>
+          <p:nvSpPr>
+            <p:cNvPr id="198" name="Rectangle: Rounded Corners 197">
+              <a:extLst>
+                <a:ext uri="{FF2B5EF4-FFF2-40B4-BE49-F238E27FC236}">
+                  <a16:creationId xmlns:a16="http://schemas.microsoft.com/office/drawing/2014/main" id="{4F21D880-AC22-436C-BBFD-41B6AC956B7F}"/>
+                </a:ext>
+              </a:extLst>
+            </p:cNvPr>
+            <p:cNvSpPr/>
+            <p:nvPr/>
+          </p:nvSpPr>
+          <p:spPr>
+            <a:xfrm>
+              <a:off x="3916951" y="3691197"/>
+              <a:ext cx="2239249" cy="1534218"/>
+            </a:xfrm>
+            <a:prstGeom prst="roundRect">
+              <a:avLst>
+                <a:gd name="adj" fmla="val 5819"/>
+              </a:avLst>
+            </a:prstGeom>
+            <a:noFill/>
+            <a:ln w="12700">
+              <a:solidFill>
+                <a:schemeClr val="tx1"/>
+              </a:solidFill>
+            </a:ln>
+          </p:spPr>
+          <p:style>
+            <a:lnRef idx="2">
+              <a:schemeClr val="accent1">
+                <a:shade val="15000"/>
+              </a:schemeClr>
+            </a:lnRef>
+            <a:fillRef idx="1">
+              <a:schemeClr val="accent1"/>
+            </a:fillRef>
+            <a:effectRef idx="0">
+              <a:schemeClr val="accent1"/>
+            </a:effectRef>
+            <a:fontRef idx="minor">
+              <a:schemeClr val="lt1"/>
+            </a:fontRef>
+          </p:style>
+          <p:txBody>
+            <a:bodyPr rtlCol="0" anchor="ctr"/>
+            <a:lstStyle/>
+            <a:p>
+              <a:pPr algn="ctr"/>
+              <a:endParaRPr lang="en-US" dirty="0">
+                <a:latin typeface="Times New Roman" panose="02020603050405020304" pitchFamily="18" charset="0"/>
+                <a:cs typeface="Times New Roman" panose="02020603050405020304" pitchFamily="18" charset="0"/>
+              </a:endParaRPr>
+            </a:p>
+          </p:txBody>
+        </p:sp>
+      </p:grpSp>
+      <p:grpSp>
+        <p:nvGrpSpPr>
+          <p:cNvPr id="335" name="Group 334">
+            <a:extLst>
+              <a:ext uri="{FF2B5EF4-FFF2-40B4-BE49-F238E27FC236}">
+                <a16:creationId xmlns:a16="http://schemas.microsoft.com/office/drawing/2014/main" id="{C7A28311-B01E-C743-5717-5D14FED17C39}"/>
+              </a:ext>
+            </a:extLst>
+          </p:cNvPr>
+          <p:cNvGrpSpPr/>
+          <p:nvPr/>
+        </p:nvGrpSpPr>
+        <p:grpSpPr>
+          <a:xfrm>
+            <a:off x="9376910" y="3337714"/>
+            <a:ext cx="2302213" cy="647296"/>
+            <a:chOff x="9110915" y="4521647"/>
+            <a:chExt cx="2302213" cy="647296"/>
+          </a:xfrm>
+        </p:grpSpPr>
+        <p:sp>
+          <p:nvSpPr>
+            <p:cNvPr id="314" name="Rectangle: Rounded Corners 313">
+              <a:extLst>
+                <a:ext uri="{FF2B5EF4-FFF2-40B4-BE49-F238E27FC236}">
+                  <a16:creationId xmlns:a16="http://schemas.microsoft.com/office/drawing/2014/main" id="{C9184302-A9D9-791B-1672-1678F45A7E55}"/>
+                </a:ext>
+              </a:extLst>
+            </p:cNvPr>
+            <p:cNvSpPr/>
+            <p:nvPr/>
+          </p:nvSpPr>
+          <p:spPr>
+            <a:xfrm>
+              <a:off x="9110917" y="4521647"/>
+              <a:ext cx="2239249" cy="333931"/>
+            </a:xfrm>
+            <a:prstGeom prst="roundRect">
+              <a:avLst>
+                <a:gd name="adj" fmla="val 28947"/>
+              </a:avLst>
+            </a:prstGeom>
+            <a:solidFill>
+              <a:schemeClr val="bg1">
+                <a:lumMod val="85000"/>
+              </a:schemeClr>
+            </a:solidFill>
+            <a:ln w="12700">
+              <a:solidFill>
+                <a:schemeClr val="tx1"/>
+              </a:solidFill>
+            </a:ln>
+          </p:spPr>
+          <p:style>
+            <a:lnRef idx="2">
+              <a:schemeClr val="accent1">
+                <a:shade val="15000"/>
+              </a:schemeClr>
+            </a:lnRef>
+            <a:fillRef idx="1">
+              <a:schemeClr val="accent1"/>
+            </a:fillRef>
+            <a:effectRef idx="0">
+              <a:schemeClr val="accent1"/>
+            </a:effectRef>
+            <a:fontRef idx="minor">
+              <a:schemeClr val="lt1"/>
+            </a:fontRef>
+          </p:style>
+          <p:txBody>
+            <a:bodyPr rtlCol="0" anchor="ctr"/>
+            <a:lstStyle/>
+            <a:p>
+              <a:pPr algn="ctr"/>
+              <a:endParaRPr lang="en-US" sz="1400" dirty="0">
+                <a:solidFill>
+                  <a:schemeClr val="tx1"/>
+                </a:solidFill>
+                <a:latin typeface="Times New Roman" panose="02020603050405020304" pitchFamily="18" charset="0"/>
+                <a:cs typeface="Times New Roman" panose="02020603050405020304" pitchFamily="18" charset="0"/>
+              </a:endParaRPr>
+            </a:p>
+          </p:txBody>
+        </p:sp>
+        <p:sp>
+          <p:nvSpPr>
+            <p:cNvPr id="315" name="TextBox 314">
+              <a:extLst>
+                <a:ext uri="{FF2B5EF4-FFF2-40B4-BE49-F238E27FC236}">
+                  <a16:creationId xmlns:a16="http://schemas.microsoft.com/office/drawing/2014/main" id="{9BDE51E9-FC26-93B1-D16F-98B8FB9FEE2F}"/>
+                </a:ext>
+              </a:extLst>
+            </p:cNvPr>
+            <p:cNvSpPr txBox="1"/>
+            <p:nvPr/>
+          </p:nvSpPr>
+          <p:spPr>
+            <a:xfrm>
+              <a:off x="9110915" y="4535517"/>
+              <a:ext cx="2238468" cy="307777"/>
+            </a:xfrm>
+            <a:prstGeom prst="rect">
+              <a:avLst/>
+            </a:prstGeom>
+            <a:noFill/>
+          </p:spPr>
+          <p:txBody>
+            <a:bodyPr wrap="square">
+              <a:spAutoFit/>
+            </a:bodyPr>
+            <a:lstStyle/>
+            <a:p>
+              <a:pPr algn="ctr"/>
+              <a:r>
+                <a:rPr lang="en-US" sz="1400" dirty="0">
+                  <a:solidFill>
+                    <a:schemeClr val="tx1"/>
+                  </a:solidFill>
+                  <a:latin typeface="Times New Roman" panose="02020603050405020304" pitchFamily="18" charset="0"/>
+                  <a:cs typeface="Times New Roman" panose="02020603050405020304" pitchFamily="18" charset="0"/>
+                </a:rPr>
+                <a:t>O-RAN SC : Non-RT RIC</a:t>
+              </a:r>
+              <a:endParaRPr lang="en-US" sz="1400" dirty="0">
+                <a:latin typeface="Times New Roman" panose="02020603050405020304" pitchFamily="18" charset="0"/>
+                <a:cs typeface="Times New Roman" panose="02020603050405020304" pitchFamily="18" charset="0"/>
+              </a:endParaRPr>
+            </a:p>
+          </p:txBody>
+        </p:sp>
+        <p:sp>
+          <p:nvSpPr>
+            <p:cNvPr id="316" name="TextBox 315">
+              <a:extLst>
+                <a:ext uri="{FF2B5EF4-FFF2-40B4-BE49-F238E27FC236}">
+                  <a16:creationId xmlns:a16="http://schemas.microsoft.com/office/drawing/2014/main" id="{C18DB793-99BB-9141-9857-0496732E9F2F}"/>
+                </a:ext>
+              </a:extLst>
+            </p:cNvPr>
+            <p:cNvSpPr txBox="1"/>
+            <p:nvPr/>
+          </p:nvSpPr>
+          <p:spPr>
+            <a:xfrm>
+              <a:off x="9173879" y="4861166"/>
+              <a:ext cx="2239249" cy="307777"/>
+            </a:xfrm>
+            <a:prstGeom prst="rect">
+              <a:avLst/>
+            </a:prstGeom>
+            <a:noFill/>
+          </p:spPr>
+          <p:txBody>
+            <a:bodyPr wrap="square">
+              <a:spAutoFit/>
+            </a:bodyPr>
+            <a:lstStyle/>
+            <a:p>
+              <a:pPr algn="ctr"/>
+              <a:r>
+                <a:rPr lang="en-US" sz="1400" b="1" dirty="0">
+                  <a:solidFill>
+                    <a:schemeClr val="tx1"/>
+                  </a:solidFill>
+                  <a:latin typeface="Times New Roman" panose="02020603050405020304" pitchFamily="18" charset="0"/>
+                  <a:cs typeface="Times New Roman" panose="02020603050405020304" pitchFamily="18" charset="0"/>
+                </a:rPr>
+                <a:t>Non-RT RIC</a:t>
+              </a:r>
+              <a:endParaRPr lang="en-US" sz="1400" b="1" dirty="0">
+                <a:latin typeface="Times New Roman" panose="02020603050405020304" pitchFamily="18" charset="0"/>
+                <a:cs typeface="Times New Roman" panose="02020603050405020304" pitchFamily="18" charset="0"/>
+              </a:endParaRPr>
+            </a:p>
+          </p:txBody>
+        </p:sp>
+      </p:grpSp>
+      <p:grpSp>
+        <p:nvGrpSpPr>
+          <p:cNvPr id="10" name="Group 9">
+            <a:extLst>
+              <a:ext uri="{FF2B5EF4-FFF2-40B4-BE49-F238E27FC236}">
+                <a16:creationId xmlns:a16="http://schemas.microsoft.com/office/drawing/2014/main" id="{3F4BAE37-81CB-F3FB-EAED-6C481A15D7A4}"/>
+              </a:ext>
+            </a:extLst>
+          </p:cNvPr>
+          <p:cNvGrpSpPr/>
+          <p:nvPr/>
+        </p:nvGrpSpPr>
+        <p:grpSpPr>
+          <a:xfrm>
+            <a:off x="8873989" y="2167447"/>
+            <a:ext cx="2860204" cy="738664"/>
+            <a:chOff x="8873989" y="2167447"/>
+            <a:chExt cx="2860204" cy="738664"/>
+          </a:xfrm>
+        </p:grpSpPr>
+        <p:sp>
+          <p:nvSpPr>
+            <p:cNvPr id="4" name="Rectangle 3">
+              <a:extLst>
+                <a:ext uri="{FF2B5EF4-FFF2-40B4-BE49-F238E27FC236}">
+                  <a16:creationId xmlns:a16="http://schemas.microsoft.com/office/drawing/2014/main" id="{240F11AF-0E17-5252-2864-12FAED76A826}"/>
+                </a:ext>
+              </a:extLst>
+            </p:cNvPr>
+            <p:cNvSpPr/>
+            <p:nvPr/>
+          </p:nvSpPr>
+          <p:spPr>
+            <a:xfrm>
+              <a:off x="8873989" y="2187920"/>
+              <a:ext cx="2787151" cy="705139"/>
+            </a:xfrm>
+            <a:prstGeom prst="rect">
+              <a:avLst/>
+            </a:prstGeom>
+            <a:solidFill>
+              <a:schemeClr val="bg1"/>
+            </a:solidFill>
+            <a:ln w="12700">
+              <a:solidFill>
+                <a:schemeClr val="tx1"/>
+              </a:solidFill>
+            </a:ln>
+          </p:spPr>
+          <p:style>
+            <a:lnRef idx="2">
+              <a:schemeClr val="accent1">
+                <a:shade val="15000"/>
+              </a:schemeClr>
+            </a:lnRef>
+            <a:fillRef idx="1">
+              <a:schemeClr val="accent1"/>
+            </a:fillRef>
+            <a:effectRef idx="0">
+              <a:schemeClr val="accent1"/>
+            </a:effectRef>
+            <a:fontRef idx="minor">
+              <a:schemeClr val="lt1"/>
+            </a:fontRef>
+          </p:style>
+          <p:txBody>
+            <a:bodyPr rtlCol="0" anchor="ctr"/>
+            <a:lstStyle/>
+            <a:p>
+              <a:pPr algn="ctr"/>
+              <a:endParaRPr lang="en-US"/>
+            </a:p>
+          </p:txBody>
+        </p:sp>
+        <p:cxnSp>
+          <p:nvCxnSpPr>
+            <p:cNvPr id="5" name="Straight Connector 4">
+              <a:extLst>
+                <a:ext uri="{FF2B5EF4-FFF2-40B4-BE49-F238E27FC236}">
+                  <a16:creationId xmlns:a16="http://schemas.microsoft.com/office/drawing/2014/main" id="{6EB7CE28-570D-A649-CDDD-D2D4267E56C2}"/>
+                </a:ext>
+              </a:extLst>
+            </p:cNvPr>
+            <p:cNvCxnSpPr>
+              <a:cxnSpLocks/>
+            </p:cNvCxnSpPr>
+            <p:nvPr/>
+          </p:nvCxnSpPr>
+          <p:spPr>
+            <a:xfrm>
+              <a:off x="8967214" y="2323726"/>
+              <a:ext cx="210474" cy="0"/>
+            </a:xfrm>
+            <a:prstGeom prst="line">
+              <a:avLst/>
+            </a:prstGeom>
+            <a:ln w="12700">
+              <a:solidFill>
+                <a:schemeClr val="tx1"/>
+              </a:solidFill>
+            </a:ln>
+          </p:spPr>
+          <p:style>
+            <a:lnRef idx="2">
+              <a:schemeClr val="dk1"/>
+            </a:lnRef>
+            <a:fillRef idx="0">
+              <a:schemeClr val="dk1"/>
+            </a:fillRef>
+            <a:effectRef idx="1">
+              <a:schemeClr val="dk1"/>
+            </a:effectRef>
+            <a:fontRef idx="minor">
+              <a:schemeClr val="tx1"/>
+            </a:fontRef>
+          </p:style>
+        </p:cxnSp>
+        <p:sp>
+          <p:nvSpPr>
+            <p:cNvPr id="6" name="TextBox 5">
+              <a:extLst>
+                <a:ext uri="{FF2B5EF4-FFF2-40B4-BE49-F238E27FC236}">
+                  <a16:creationId xmlns:a16="http://schemas.microsoft.com/office/drawing/2014/main" id="{64D782A1-F8AE-355C-132E-E89499CD1C8D}"/>
+                </a:ext>
+              </a:extLst>
+            </p:cNvPr>
+            <p:cNvSpPr txBox="1"/>
+            <p:nvPr/>
+          </p:nvSpPr>
+          <p:spPr>
+            <a:xfrm>
+              <a:off x="9147085" y="2167447"/>
+              <a:ext cx="2587108" cy="738664"/>
+            </a:xfrm>
+            <a:prstGeom prst="rect">
+              <a:avLst/>
+            </a:prstGeom>
+            <a:noFill/>
+          </p:spPr>
+          <p:txBody>
+            <a:bodyPr wrap="square">
+              <a:spAutoFit/>
+            </a:bodyPr>
+            <a:lstStyle/>
+            <a:p>
+              <a:r>
+                <a:rPr lang="en-US" sz="1400" dirty="0">
+                  <a:latin typeface="Times New Roman" panose="02020603050405020304" pitchFamily="18" charset="0"/>
+                  <a:cs typeface="Times New Roman" panose="02020603050405020304" pitchFamily="18" charset="0"/>
+                </a:rPr>
+                <a:t>Supported by default installation</a:t>
+              </a:r>
+              <a:br>
+                <a:rPr lang="en-US" sz="1400" dirty="0">
+                  <a:latin typeface="Times New Roman" panose="02020603050405020304" pitchFamily="18" charset="0"/>
+                  <a:cs typeface="Times New Roman" panose="02020603050405020304" pitchFamily="18" charset="0"/>
+                </a:rPr>
+              </a:br>
+              <a:r>
+                <a:rPr lang="en-US" sz="1400" dirty="0">
+                  <a:latin typeface="Times New Roman" panose="02020603050405020304" pitchFamily="18" charset="0"/>
+                  <a:cs typeface="Times New Roman" panose="02020603050405020304" pitchFamily="18" charset="0"/>
+                </a:rPr>
+                <a:t>Supported after adjusting configs</a:t>
+              </a:r>
+            </a:p>
+            <a:p>
+              <a:r>
+                <a:rPr lang="en-US" sz="1400" dirty="0">
+                  <a:latin typeface="Times New Roman" panose="02020603050405020304" pitchFamily="18" charset="0"/>
+                  <a:cs typeface="Times New Roman" panose="02020603050405020304" pitchFamily="18" charset="0"/>
+                </a:rPr>
+                <a:t>Presumably not supported</a:t>
+              </a:r>
+            </a:p>
+          </p:txBody>
+        </p:sp>
+        <p:cxnSp>
+          <p:nvCxnSpPr>
+            <p:cNvPr id="7" name="Straight Connector 6">
+              <a:extLst>
+                <a:ext uri="{FF2B5EF4-FFF2-40B4-BE49-F238E27FC236}">
+                  <a16:creationId xmlns:a16="http://schemas.microsoft.com/office/drawing/2014/main" id="{E90BE35D-3534-C8E0-8BAC-13AA49C1B7B8}"/>
+                </a:ext>
+              </a:extLst>
+            </p:cNvPr>
+            <p:cNvCxnSpPr>
+              <a:cxnSpLocks/>
+            </p:cNvCxnSpPr>
+            <p:nvPr/>
+          </p:nvCxnSpPr>
+          <p:spPr>
+            <a:xfrm>
+              <a:off x="8967214" y="2541315"/>
+              <a:ext cx="210474" cy="0"/>
+            </a:xfrm>
+            <a:prstGeom prst="line">
+              <a:avLst/>
+            </a:prstGeom>
+            <a:ln w="12700">
+              <a:solidFill>
+                <a:schemeClr val="tx1"/>
+              </a:solidFill>
+              <a:prstDash val="sysDot"/>
+            </a:ln>
+          </p:spPr>
+          <p:style>
+            <a:lnRef idx="2">
+              <a:schemeClr val="dk1"/>
+            </a:lnRef>
+            <a:fillRef idx="0">
+              <a:schemeClr val="dk1"/>
+            </a:fillRef>
+            <a:effectRef idx="1">
+              <a:schemeClr val="dk1"/>
+            </a:effectRef>
+            <a:fontRef idx="minor">
+              <a:schemeClr val="tx1"/>
+            </a:fontRef>
+          </p:style>
+        </p:cxnSp>
+        <p:cxnSp>
+          <p:nvCxnSpPr>
+            <p:cNvPr id="8" name="Straight Connector 7">
+              <a:extLst>
+                <a:ext uri="{FF2B5EF4-FFF2-40B4-BE49-F238E27FC236}">
+                  <a16:creationId xmlns:a16="http://schemas.microsoft.com/office/drawing/2014/main" id="{9C57C3EC-B1EB-B8F3-36AA-A15E64D94D01}"/>
+                </a:ext>
+              </a:extLst>
+            </p:cNvPr>
+            <p:cNvCxnSpPr>
+              <a:cxnSpLocks/>
+            </p:cNvCxnSpPr>
+            <p:nvPr/>
+          </p:nvCxnSpPr>
+          <p:spPr>
+            <a:xfrm>
+              <a:off x="8967214" y="2758903"/>
+              <a:ext cx="210474" cy="0"/>
+            </a:xfrm>
+            <a:prstGeom prst="line">
+              <a:avLst/>
+            </a:prstGeom>
+            <a:ln w="12700">
+              <a:solidFill>
+                <a:srgbClr val="C40E00"/>
+              </a:solidFill>
+              <a:prstDash val="sysDot"/>
+            </a:ln>
+          </p:spPr>
+          <p:style>
+            <a:lnRef idx="2">
+              <a:schemeClr val="dk1"/>
+            </a:lnRef>
+            <a:fillRef idx="0">
+              <a:schemeClr val="dk1"/>
+            </a:fillRef>
+            <a:effectRef idx="1">
+              <a:schemeClr val="dk1"/>
+            </a:effectRef>
+            <a:fontRef idx="minor">
+              <a:schemeClr val="tx1"/>
+            </a:fontRef>
+          </p:style>
+        </p:cxnSp>
+      </p:grpSp>
+      <p:cxnSp>
+        <p:nvCxnSpPr>
+          <p:cNvPr id="9" name="Straight Connector 8">
+            <a:extLst>
+              <a:ext uri="{FF2B5EF4-FFF2-40B4-BE49-F238E27FC236}">
+                <a16:creationId xmlns:a16="http://schemas.microsoft.com/office/drawing/2014/main" id="{145E9855-DB2F-EF47-9B6D-8D24DD2BDB8D}"/>
+              </a:ext>
+            </a:extLst>
+          </p:cNvPr>
+          <p:cNvCxnSpPr>
+            <a:cxnSpLocks/>
+            <a:stCxn id="202" idx="3"/>
+            <a:endCxn id="281" idx="1"/>
+          </p:cNvCxnSpPr>
+          <p:nvPr/>
+        </p:nvCxnSpPr>
+        <p:spPr>
+          <a:xfrm flipV="1">
+            <a:off x="2929886" y="2938487"/>
+            <a:ext cx="664414" cy="620532"/>
+          </a:xfrm>
+          <a:prstGeom prst="line">
+            <a:avLst/>
+          </a:prstGeom>
+          <a:ln w="12700">
+            <a:solidFill>
+              <a:schemeClr val="tx1"/>
+            </a:solidFill>
+            <a:prstDash val="sysDot"/>
+          </a:ln>
+        </p:spPr>
+        <p:style>
+          <a:lnRef idx="2">
+            <a:schemeClr val="accent1"/>
+          </a:lnRef>
+          <a:fillRef idx="0">
+            <a:schemeClr val="accent1"/>
+          </a:fillRef>
+          <a:effectRef idx="1">
+            <a:schemeClr val="accent1"/>
+          </a:effectRef>
+          <a:fontRef idx="minor">
+            <a:schemeClr val="tx1"/>
+          </a:fontRef>
+        </p:style>
+      </p:cxnSp>
+      <p:sp>
+        <p:nvSpPr>
+          <p:cNvPr id="323" name="Rectangle 322">
+            <a:extLst>
+              <a:ext uri="{FF2B5EF4-FFF2-40B4-BE49-F238E27FC236}">
+                <a16:creationId xmlns:a16="http://schemas.microsoft.com/office/drawing/2014/main" id="{A52FDDC1-67F4-A627-B672-9E679A9DB23A}"/>
+              </a:ext>
+            </a:extLst>
+          </p:cNvPr>
+          <p:cNvSpPr/>
+          <p:nvPr/>
+        </p:nvSpPr>
+        <p:spPr>
+          <a:xfrm>
+            <a:off x="6360554" y="2059780"/>
+            <a:ext cx="2507221" cy="1964533"/>
+          </a:xfrm>
+          <a:prstGeom prst="rect">
+            <a:avLst/>
+          </a:prstGeom>
+          <a:solidFill>
+            <a:schemeClr val="bg1"/>
+          </a:solidFill>
+          <a:ln>
+            <a:noFill/>
+          </a:ln>
+        </p:spPr>
+        <p:style>
+          <a:lnRef idx="2">
+            <a:schemeClr val="accent1">
+              <a:shade val="15000"/>
+            </a:schemeClr>
+          </a:lnRef>
+          <a:fillRef idx="1">
+            <a:schemeClr val="accent1"/>
+          </a:fillRef>
+          <a:effectRef idx="0">
+            <a:schemeClr val="accent1"/>
+          </a:effectRef>
+          <a:fontRef idx="minor">
+            <a:schemeClr val="lt1"/>
+          </a:fontRef>
+        </p:style>
+        <p:txBody>
+          <a:bodyPr rtlCol="0" anchor="ctr"/>
+          <a:lstStyle/>
+          <a:p>
+            <a:pPr algn="ctr"/>
+            <a:endParaRPr lang="en-US"/>
+          </a:p>
+        </p:txBody>
+      </p:sp>
+      <p:grpSp>
+        <p:nvGrpSpPr>
+          <p:cNvPr id="233" name="Group 232">
+            <a:extLst>
+              <a:ext uri="{FF2B5EF4-FFF2-40B4-BE49-F238E27FC236}">
+                <a16:creationId xmlns:a16="http://schemas.microsoft.com/office/drawing/2014/main" id="{00ED7F0F-60DC-1536-A747-6184C3BCA9BE}"/>
+              </a:ext>
+            </a:extLst>
+          </p:cNvPr>
+          <p:cNvGrpSpPr/>
+          <p:nvPr/>
+        </p:nvGrpSpPr>
+        <p:grpSpPr>
+          <a:xfrm>
+            <a:off x="6497958" y="3337714"/>
+            <a:ext cx="2239249" cy="1233863"/>
+            <a:chOff x="1028392" y="2318655"/>
+            <a:chExt cx="2239249" cy="1233863"/>
+          </a:xfrm>
+        </p:grpSpPr>
+        <p:sp>
+          <p:nvSpPr>
+            <p:cNvPr id="234" name="TextBox 233">
+              <a:extLst>
+                <a:ext uri="{FF2B5EF4-FFF2-40B4-BE49-F238E27FC236}">
+                  <a16:creationId xmlns:a16="http://schemas.microsoft.com/office/drawing/2014/main" id="{1D447C6C-DBB4-1E2B-28C0-122262FFC526}"/>
+                </a:ext>
+              </a:extLst>
+            </p:cNvPr>
+            <p:cNvSpPr txBox="1"/>
+            <p:nvPr/>
+          </p:nvSpPr>
+          <p:spPr>
+            <a:xfrm>
+              <a:off x="1028392" y="3244741"/>
+              <a:ext cx="2239249" cy="307777"/>
+            </a:xfrm>
+            <a:prstGeom prst="rect">
+              <a:avLst/>
+            </a:prstGeom>
+            <a:noFill/>
+          </p:spPr>
+          <p:txBody>
+            <a:bodyPr wrap="square">
+              <a:spAutoFit/>
+            </a:bodyPr>
+            <a:lstStyle/>
+            <a:p>
+              <a:pPr algn="ctr"/>
+              <a:r>
+                <a:rPr lang="en-US" sz="1400" b="1" dirty="0">
+                  <a:solidFill>
+                    <a:schemeClr val="tx1"/>
+                  </a:solidFill>
+                  <a:latin typeface="Times New Roman" panose="02020603050405020304" pitchFamily="18" charset="0"/>
+                  <a:cs typeface="Times New Roman" panose="02020603050405020304" pitchFamily="18" charset="0"/>
+                </a:rPr>
+                <a:t>Near-RT RIC</a:t>
+              </a:r>
+              <a:endParaRPr lang="en-US" sz="1400" b="1" dirty="0">
+                <a:latin typeface="Times New Roman" panose="02020603050405020304" pitchFamily="18" charset="0"/>
+                <a:cs typeface="Times New Roman" panose="02020603050405020304" pitchFamily="18" charset="0"/>
+              </a:endParaRPr>
+            </a:p>
+          </p:txBody>
+        </p:sp>
+        <p:grpSp>
+          <p:nvGrpSpPr>
+            <p:cNvPr id="235" name="Group 234">
+              <a:extLst>
+                <a:ext uri="{FF2B5EF4-FFF2-40B4-BE49-F238E27FC236}">
+                  <a16:creationId xmlns:a16="http://schemas.microsoft.com/office/drawing/2014/main" id="{D43FEA2F-F6B1-5C6E-588B-A05B26190774}"/>
+                </a:ext>
+              </a:extLst>
+            </p:cNvPr>
+            <p:cNvGrpSpPr/>
+            <p:nvPr/>
+          </p:nvGrpSpPr>
+          <p:grpSpPr>
+            <a:xfrm>
+              <a:off x="1028392" y="2318655"/>
+              <a:ext cx="2239249" cy="923272"/>
+              <a:chOff x="1590040" y="5303322"/>
+              <a:chExt cx="2374765" cy="923272"/>
+            </a:xfrm>
+          </p:grpSpPr>
+          <p:sp>
+            <p:nvSpPr>
+              <p:cNvPr id="239" name="Rectangle: Rounded Corners 238">
+                <a:extLst>
+                  <a:ext uri="{FF2B5EF4-FFF2-40B4-BE49-F238E27FC236}">
+                    <a16:creationId xmlns:a16="http://schemas.microsoft.com/office/drawing/2014/main" id="{A4D60007-5474-BEA2-4BFA-9BC486259CA7}"/>
+                  </a:ext>
+                </a:extLst>
+              </p:cNvPr>
+              <p:cNvSpPr/>
+              <p:nvPr/>
+            </p:nvSpPr>
+            <p:spPr>
+              <a:xfrm>
+                <a:off x="1590040" y="5303322"/>
+                <a:ext cx="2374765" cy="923272"/>
+              </a:xfrm>
+              <a:prstGeom prst="roundRect">
+                <a:avLst>
+                  <a:gd name="adj" fmla="val 9466"/>
+                </a:avLst>
+              </a:prstGeom>
+              <a:solidFill>
+                <a:schemeClr val="bg1">
+                  <a:lumMod val="85000"/>
+                </a:schemeClr>
+              </a:solidFill>
+              <a:ln w="28575">
+                <a:noFill/>
+              </a:ln>
+            </p:spPr>
+            <p:style>
+              <a:lnRef idx="2">
+                <a:schemeClr val="accent1">
+                  <a:shade val="15000"/>
+                </a:schemeClr>
+              </a:lnRef>
+              <a:fillRef idx="1">
+                <a:schemeClr val="accent1"/>
+              </a:fillRef>
+              <a:effectRef idx="0">
+                <a:schemeClr val="accent1"/>
+              </a:effectRef>
+              <a:fontRef idx="minor">
+                <a:schemeClr val="lt1"/>
+              </a:fontRef>
+            </p:style>
+            <p:txBody>
+              <a:bodyPr rtlCol="0" anchor="ctr"/>
+              <a:lstStyle/>
+              <a:p>
+                <a:pPr algn="ctr"/>
+                <a:endParaRPr lang="en-US" dirty="0">
+                  <a:latin typeface="Times New Roman" panose="02020603050405020304" pitchFamily="18" charset="0"/>
+                  <a:cs typeface="Times New Roman" panose="02020603050405020304" pitchFamily="18" charset="0"/>
+                </a:endParaRPr>
+              </a:p>
+            </p:txBody>
+          </p:sp>
+          <p:sp>
+            <p:nvSpPr>
+              <p:cNvPr id="240" name="Rectangle 239">
+                <a:extLst>
+                  <a:ext uri="{FF2B5EF4-FFF2-40B4-BE49-F238E27FC236}">
+                    <a16:creationId xmlns:a16="http://schemas.microsoft.com/office/drawing/2014/main" id="{664D770F-BF79-4EE6-E4F3-5C75388C93E3}"/>
+                  </a:ext>
+                </a:extLst>
+              </p:cNvPr>
+              <p:cNvSpPr/>
+              <p:nvPr/>
+            </p:nvSpPr>
+            <p:spPr>
+              <a:xfrm>
+                <a:off x="1590040" y="5603165"/>
+                <a:ext cx="2374765" cy="323587"/>
+              </a:xfrm>
+              <a:prstGeom prst="rect">
+                <a:avLst/>
+              </a:prstGeom>
+              <a:solidFill>
+                <a:schemeClr val="bg1">
+                  <a:lumMod val="95000"/>
+                </a:schemeClr>
+              </a:solidFill>
+              <a:ln>
+                <a:noFill/>
+              </a:ln>
+            </p:spPr>
+            <p:style>
+              <a:lnRef idx="2">
+                <a:schemeClr val="accent1">
+                  <a:shade val="15000"/>
+                </a:schemeClr>
+              </a:lnRef>
+              <a:fillRef idx="1">
+                <a:schemeClr val="accent1"/>
+              </a:fillRef>
+              <a:effectRef idx="0">
+                <a:schemeClr val="accent1"/>
+              </a:effectRef>
+              <a:fontRef idx="minor">
+                <a:schemeClr val="lt1"/>
+              </a:fontRef>
+            </p:style>
+            <p:txBody>
+              <a:bodyPr rtlCol="0" anchor="ctr"/>
+              <a:lstStyle/>
+              <a:p>
+                <a:pPr algn="ctr"/>
+                <a:endParaRPr lang="en-US"/>
+              </a:p>
+            </p:txBody>
+          </p:sp>
+          <p:sp>
+            <p:nvSpPr>
+              <p:cNvPr id="241" name="Rectangle: Rounded Corners 240">
+                <a:extLst>
+                  <a:ext uri="{FF2B5EF4-FFF2-40B4-BE49-F238E27FC236}">
+                    <a16:creationId xmlns:a16="http://schemas.microsoft.com/office/drawing/2014/main" id="{A848D181-7B55-B5B1-5BAE-AF8A42EC5A00}"/>
+                  </a:ext>
+                </a:extLst>
+              </p:cNvPr>
+              <p:cNvSpPr/>
+              <p:nvPr/>
+            </p:nvSpPr>
+            <p:spPr>
+              <a:xfrm>
+                <a:off x="1590040" y="5303322"/>
+                <a:ext cx="2374765" cy="923272"/>
+              </a:xfrm>
+              <a:prstGeom prst="roundRect">
+                <a:avLst>
+                  <a:gd name="adj" fmla="val 9879"/>
+                </a:avLst>
+              </a:prstGeom>
+              <a:noFill/>
+              <a:ln w="12700">
+                <a:solidFill>
+                  <a:schemeClr val="tx1"/>
+                </a:solidFill>
+              </a:ln>
+            </p:spPr>
+            <p:style>
+              <a:lnRef idx="2">
+                <a:schemeClr val="accent1">
+                  <a:shade val="15000"/>
+                </a:schemeClr>
+              </a:lnRef>
+              <a:fillRef idx="1">
+                <a:schemeClr val="accent1"/>
+              </a:fillRef>
+              <a:effectRef idx="0">
+                <a:schemeClr val="accent1"/>
+              </a:effectRef>
+              <a:fontRef idx="minor">
+                <a:schemeClr val="lt1"/>
+              </a:fontRef>
+            </p:style>
+            <p:txBody>
+              <a:bodyPr rtlCol="0" anchor="ctr"/>
+              <a:lstStyle/>
+              <a:p>
+                <a:pPr algn="ctr"/>
+                <a:endParaRPr lang="en-US" dirty="0">
+                  <a:latin typeface="Times New Roman" panose="02020603050405020304" pitchFamily="18" charset="0"/>
+                  <a:cs typeface="Times New Roman" panose="02020603050405020304" pitchFamily="18" charset="0"/>
+                </a:endParaRPr>
+              </a:p>
+            </p:txBody>
+          </p:sp>
+        </p:grpSp>
+        <p:sp>
+          <p:nvSpPr>
+            <p:cNvPr id="236" name="TextBox 235">
+              <a:extLst>
+                <a:ext uri="{FF2B5EF4-FFF2-40B4-BE49-F238E27FC236}">
+                  <a16:creationId xmlns:a16="http://schemas.microsoft.com/office/drawing/2014/main" id="{A60306A6-CD1B-62E6-4CD0-FA864383631B}"/>
+                </a:ext>
+              </a:extLst>
+            </p:cNvPr>
+            <p:cNvSpPr txBox="1"/>
+            <p:nvPr/>
+          </p:nvSpPr>
+          <p:spPr>
+            <a:xfrm>
+              <a:off x="1028392" y="2928594"/>
+              <a:ext cx="2239249" cy="307777"/>
+            </a:xfrm>
+            <a:prstGeom prst="rect">
+              <a:avLst/>
+            </a:prstGeom>
+            <a:noFill/>
+          </p:spPr>
+          <p:txBody>
+            <a:bodyPr wrap="square">
+              <a:spAutoFit/>
+            </a:bodyPr>
+            <a:lstStyle/>
+            <a:p>
+              <a:pPr algn="ctr"/>
+              <a:r>
+                <a:rPr lang="en-US" sz="1400" dirty="0">
+                  <a:solidFill>
+                    <a:schemeClr val="tx1"/>
+                  </a:solidFill>
+                  <a:latin typeface="Times New Roman" panose="02020603050405020304" pitchFamily="18" charset="0"/>
+                  <a:cs typeface="Times New Roman" panose="02020603050405020304" pitchFamily="18" charset="0"/>
+                </a:rPr>
+                <a:t>Mosaic5G : FlexRIC</a:t>
+              </a:r>
+              <a:endParaRPr lang="en-US" sz="1400" dirty="0">
+                <a:latin typeface="Times New Roman" panose="02020603050405020304" pitchFamily="18" charset="0"/>
+                <a:cs typeface="Times New Roman" panose="02020603050405020304" pitchFamily="18" charset="0"/>
+              </a:endParaRPr>
+            </a:p>
+          </p:txBody>
+        </p:sp>
+        <p:sp>
+          <p:nvSpPr>
+            <p:cNvPr id="237" name="TextBox 236">
+              <a:extLst>
+                <a:ext uri="{FF2B5EF4-FFF2-40B4-BE49-F238E27FC236}">
+                  <a16:creationId xmlns:a16="http://schemas.microsoft.com/office/drawing/2014/main" id="{B43BC923-2C5D-2AAE-BD1F-3637CD533B4A}"/>
+                </a:ext>
+              </a:extLst>
+            </p:cNvPr>
+            <p:cNvSpPr txBox="1"/>
+            <p:nvPr/>
+          </p:nvSpPr>
+          <p:spPr>
+            <a:xfrm>
+              <a:off x="1028392" y="2629568"/>
+              <a:ext cx="2239249" cy="307777"/>
+            </a:xfrm>
+            <a:prstGeom prst="rect">
+              <a:avLst/>
+            </a:prstGeom>
+            <a:noFill/>
+          </p:spPr>
+          <p:txBody>
+            <a:bodyPr wrap="square">
+              <a:spAutoFit/>
+            </a:bodyPr>
+            <a:lstStyle/>
+            <a:p>
+              <a:pPr algn="ctr"/>
+              <a:r>
+                <a:rPr lang="en-US" sz="1400" dirty="0">
+                  <a:solidFill>
+                    <a:schemeClr val="tx1"/>
+                  </a:solidFill>
+                  <a:latin typeface="Times New Roman" panose="02020603050405020304" pitchFamily="18" charset="0"/>
+                  <a:cs typeface="Times New Roman" panose="02020603050405020304" pitchFamily="18" charset="0"/>
+                </a:rPr>
+                <a:t>O-RAN SC : Near-RT RIC</a:t>
+              </a:r>
+              <a:endParaRPr lang="en-US" sz="1400" dirty="0">
+                <a:latin typeface="Times New Roman" panose="02020603050405020304" pitchFamily="18" charset="0"/>
+                <a:cs typeface="Times New Roman" panose="02020603050405020304" pitchFamily="18" charset="0"/>
+              </a:endParaRPr>
+            </a:p>
+          </p:txBody>
+        </p:sp>
+        <p:sp>
+          <p:nvSpPr>
+            <p:cNvPr id="238" name="TextBox 237">
+              <a:extLst>
+                <a:ext uri="{FF2B5EF4-FFF2-40B4-BE49-F238E27FC236}">
+                  <a16:creationId xmlns:a16="http://schemas.microsoft.com/office/drawing/2014/main" id="{01F21BA0-7B22-2985-C4B7-BEC32317C4DA}"/>
+                </a:ext>
+              </a:extLst>
+            </p:cNvPr>
+            <p:cNvSpPr txBox="1"/>
+            <p:nvPr/>
+          </p:nvSpPr>
+          <p:spPr>
+            <a:xfrm>
+              <a:off x="1028392" y="2330542"/>
+              <a:ext cx="2239249" cy="307777"/>
+            </a:xfrm>
+            <a:prstGeom prst="rect">
+              <a:avLst/>
+            </a:prstGeom>
+            <a:noFill/>
+          </p:spPr>
+          <p:txBody>
+            <a:bodyPr wrap="square">
+              <a:spAutoFit/>
+            </a:bodyPr>
+            <a:lstStyle/>
+            <a:p>
+              <a:pPr algn="ctr"/>
+              <a:r>
+                <a:rPr lang="en-US" sz="1400" dirty="0">
+                  <a:latin typeface="Times New Roman" panose="02020603050405020304" pitchFamily="18" charset="0"/>
+                  <a:cs typeface="Times New Roman" panose="02020603050405020304" pitchFamily="18" charset="0"/>
+                </a:rPr>
+                <a:t>O-RAN SC : A1 Simulator</a:t>
+              </a:r>
+            </a:p>
+          </p:txBody>
+        </p:sp>
+      </p:grpSp>
+      <p:grpSp>
+        <p:nvGrpSpPr>
+          <p:cNvPr id="21" name="Group 20">
+            <a:extLst>
+              <a:ext uri="{FF2B5EF4-FFF2-40B4-BE49-F238E27FC236}">
+                <a16:creationId xmlns:a16="http://schemas.microsoft.com/office/drawing/2014/main" id="{385101B2-3441-45C3-4D5F-B32E7D1461C5}"/>
+              </a:ext>
+            </a:extLst>
+          </p:cNvPr>
+          <p:cNvGrpSpPr/>
+          <p:nvPr/>
+        </p:nvGrpSpPr>
+        <p:grpSpPr>
+          <a:xfrm>
+            <a:off x="6497956" y="1822299"/>
+            <a:ext cx="2301839" cy="1514666"/>
+            <a:chOff x="4580555" y="3243709"/>
+            <a:chExt cx="2301839" cy="1514666"/>
+          </a:xfrm>
+        </p:grpSpPr>
+        <p:sp>
+          <p:nvSpPr>
+            <p:cNvPr id="22" name="Rectangle: Top Corners Rounded 21">
+              <a:extLst>
+                <a:ext uri="{FF2B5EF4-FFF2-40B4-BE49-F238E27FC236}">
+                  <a16:creationId xmlns:a16="http://schemas.microsoft.com/office/drawing/2014/main" id="{77878395-64F7-3C4F-756B-7DB9A3FFACED}"/>
+                </a:ext>
+              </a:extLst>
+            </p:cNvPr>
+            <p:cNvSpPr/>
+            <p:nvPr/>
+          </p:nvSpPr>
+          <p:spPr>
+            <a:xfrm rot="10800000">
+              <a:off x="4580557" y="4166644"/>
+              <a:ext cx="2239248" cy="323588"/>
+            </a:xfrm>
+            <a:prstGeom prst="round2SameRect">
+              <a:avLst>
+                <a:gd name="adj1" fmla="val 28890"/>
+                <a:gd name="adj2" fmla="val 0"/>
+              </a:avLst>
+            </a:prstGeom>
+            <a:solidFill>
+              <a:srgbClr val="F2F2F2"/>
+            </a:solidFill>
+            <a:ln>
+              <a:noFill/>
+            </a:ln>
+          </p:spPr>
+          <p:style>
+            <a:lnRef idx="2">
+              <a:schemeClr val="accent1">
+                <a:shade val="15000"/>
+              </a:schemeClr>
+            </a:lnRef>
+            <a:fillRef idx="1">
+              <a:schemeClr val="accent1"/>
+            </a:fillRef>
+            <a:effectRef idx="0">
+              <a:schemeClr val="accent1"/>
+            </a:effectRef>
+            <a:fontRef idx="minor">
+              <a:schemeClr val="lt1"/>
+            </a:fontRef>
+          </p:style>
+          <p:txBody>
+            <a:bodyPr rtlCol="0" anchor="ctr"/>
+            <a:lstStyle/>
+            <a:p>
+              <a:pPr algn="ctr"/>
+              <a:endParaRPr lang="en-US"/>
+            </a:p>
+          </p:txBody>
+        </p:sp>
+        <p:sp>
+          <p:nvSpPr>
+            <p:cNvPr id="23" name="Rectangle: Top Corners Rounded 22">
+              <a:extLst>
+                <a:ext uri="{FF2B5EF4-FFF2-40B4-BE49-F238E27FC236}">
+                  <a16:creationId xmlns:a16="http://schemas.microsoft.com/office/drawing/2014/main" id="{1B3C8D2A-C9D1-9D95-D967-D15933172E7C}"/>
+                </a:ext>
+              </a:extLst>
+            </p:cNvPr>
+            <p:cNvSpPr/>
+            <p:nvPr/>
+          </p:nvSpPr>
+          <p:spPr>
+            <a:xfrm>
+              <a:off x="4580556" y="3243709"/>
+              <a:ext cx="2239248" cy="923272"/>
+            </a:xfrm>
+            <a:prstGeom prst="round2SameRect">
+              <a:avLst>
+                <a:gd name="adj1" fmla="val 9715"/>
+                <a:gd name="adj2" fmla="val 0"/>
+              </a:avLst>
+            </a:prstGeom>
+            <a:solidFill>
+              <a:srgbClr val="D9D9D9"/>
+            </a:solidFill>
+            <a:ln>
+              <a:noFill/>
+            </a:ln>
+          </p:spPr>
+          <p:style>
+            <a:lnRef idx="2">
+              <a:schemeClr val="accent1">
+                <a:shade val="15000"/>
+              </a:schemeClr>
+            </a:lnRef>
+            <a:fillRef idx="1">
+              <a:schemeClr val="accent1"/>
+            </a:fillRef>
+            <a:effectRef idx="0">
+              <a:schemeClr val="accent1"/>
+            </a:effectRef>
+            <a:fontRef idx="minor">
+              <a:schemeClr val="lt1"/>
+            </a:fontRef>
+          </p:style>
+          <p:txBody>
+            <a:bodyPr rtlCol="0" anchor="ctr"/>
+            <a:lstStyle/>
+            <a:p>
+              <a:pPr algn="ctr"/>
+              <a:endParaRPr lang="en-US"/>
+            </a:p>
+          </p:txBody>
+        </p:sp>
+        <p:sp>
+          <p:nvSpPr>
+            <p:cNvPr id="24" name="Rectangle 23">
+              <a:extLst>
+                <a:ext uri="{FF2B5EF4-FFF2-40B4-BE49-F238E27FC236}">
+                  <a16:creationId xmlns:a16="http://schemas.microsoft.com/office/drawing/2014/main" id="{2320646D-E588-66BF-2291-C28731EB62C6}"/>
+                </a:ext>
+              </a:extLst>
+            </p:cNvPr>
+            <p:cNvSpPr/>
+            <p:nvPr/>
+          </p:nvSpPr>
+          <p:spPr>
+            <a:xfrm>
+              <a:off x="4580556" y="3544031"/>
+              <a:ext cx="2239249" cy="323587"/>
+            </a:xfrm>
+            <a:prstGeom prst="rect">
+              <a:avLst/>
+            </a:prstGeom>
+            <a:solidFill>
+              <a:schemeClr val="bg1">
+                <a:lumMod val="95000"/>
+              </a:schemeClr>
+            </a:solidFill>
+            <a:ln>
+              <a:noFill/>
+            </a:ln>
+          </p:spPr>
+          <p:style>
+            <a:lnRef idx="2">
+              <a:schemeClr val="accent1">
+                <a:shade val="15000"/>
+              </a:schemeClr>
+            </a:lnRef>
+            <a:fillRef idx="1">
+              <a:schemeClr val="accent1"/>
+            </a:fillRef>
+            <a:effectRef idx="0">
+              <a:schemeClr val="accent1"/>
+            </a:effectRef>
+            <a:fontRef idx="minor">
+              <a:schemeClr val="lt1"/>
+            </a:fontRef>
+          </p:style>
+          <p:txBody>
+            <a:bodyPr rtlCol="0" anchor="ctr"/>
+            <a:lstStyle/>
+            <a:p>
+              <a:pPr algn="ctr"/>
+              <a:endParaRPr lang="en-US"/>
+            </a:p>
+          </p:txBody>
+        </p:sp>
+        <p:sp>
+          <p:nvSpPr>
+            <p:cNvPr id="25" name="Rectangle: Rounded Corners 24">
+              <a:extLst>
+                <a:ext uri="{FF2B5EF4-FFF2-40B4-BE49-F238E27FC236}">
+                  <a16:creationId xmlns:a16="http://schemas.microsoft.com/office/drawing/2014/main" id="{CDD7B7F2-522F-30DC-707E-115B5707AD6C}"/>
+                </a:ext>
+              </a:extLst>
+            </p:cNvPr>
+            <p:cNvSpPr/>
+            <p:nvPr/>
+          </p:nvSpPr>
+          <p:spPr>
+            <a:xfrm>
+              <a:off x="4580556" y="3244668"/>
+              <a:ext cx="2239249" cy="1246101"/>
+            </a:xfrm>
+            <a:prstGeom prst="roundRect">
+              <a:avLst>
+                <a:gd name="adj" fmla="val 7433"/>
+              </a:avLst>
+            </a:prstGeom>
+            <a:noFill/>
+            <a:ln w="12700">
+              <a:solidFill>
+                <a:schemeClr val="tx1"/>
+              </a:solidFill>
+            </a:ln>
+          </p:spPr>
+          <p:style>
+            <a:lnRef idx="2">
+              <a:schemeClr val="accent1">
+                <a:shade val="15000"/>
+              </a:schemeClr>
+            </a:lnRef>
+            <a:fillRef idx="1">
+              <a:schemeClr val="accent1"/>
+            </a:fillRef>
+            <a:effectRef idx="0">
+              <a:schemeClr val="accent1"/>
+            </a:effectRef>
+            <a:fontRef idx="minor">
+              <a:schemeClr val="lt1"/>
+            </a:fontRef>
+          </p:style>
+          <p:txBody>
+            <a:bodyPr rtlCol="0" anchor="ctr"/>
+            <a:lstStyle/>
+            <a:p>
+              <a:pPr algn="ctr"/>
+              <a:endParaRPr lang="en-US" dirty="0">
+                <a:latin typeface="Times New Roman" panose="02020603050405020304" pitchFamily="18" charset="0"/>
+                <a:cs typeface="Times New Roman" panose="02020603050405020304" pitchFamily="18" charset="0"/>
+              </a:endParaRPr>
+            </a:p>
+          </p:txBody>
+        </p:sp>
+        <p:sp>
+          <p:nvSpPr>
+            <p:cNvPr id="26" name="TextBox 25">
+              <a:extLst>
+                <a:ext uri="{FF2B5EF4-FFF2-40B4-BE49-F238E27FC236}">
+                  <a16:creationId xmlns:a16="http://schemas.microsoft.com/office/drawing/2014/main" id="{84582B19-FF4F-F533-E626-177EA2EE43FA}"/>
+                </a:ext>
+              </a:extLst>
+            </p:cNvPr>
+            <p:cNvSpPr txBox="1"/>
+            <p:nvPr/>
+          </p:nvSpPr>
+          <p:spPr>
+            <a:xfrm>
+              <a:off x="4580557" y="3853825"/>
+              <a:ext cx="2239247" cy="307777"/>
+            </a:xfrm>
+            <a:prstGeom prst="rect">
+              <a:avLst/>
+            </a:prstGeom>
+            <a:noFill/>
+          </p:spPr>
+          <p:txBody>
+            <a:bodyPr wrap="square">
+              <a:spAutoFit/>
+            </a:bodyPr>
+            <a:lstStyle/>
+            <a:p>
+              <a:pPr algn="ctr"/>
+              <a:r>
+                <a:rPr lang="en-US" sz="1400" dirty="0">
+                  <a:latin typeface="Times New Roman" panose="02020603050405020304" pitchFamily="18" charset="0"/>
+                  <a:cs typeface="Times New Roman" panose="02020603050405020304" pitchFamily="18" charset="0"/>
+                </a:rPr>
+                <a:t>OAI 5G CN (5gdeploy)</a:t>
+              </a:r>
+            </a:p>
+          </p:txBody>
+        </p:sp>
+        <p:sp>
+          <p:nvSpPr>
+            <p:cNvPr id="27" name="TextBox 26">
+              <a:extLst>
+                <a:ext uri="{FF2B5EF4-FFF2-40B4-BE49-F238E27FC236}">
+                  <a16:creationId xmlns:a16="http://schemas.microsoft.com/office/drawing/2014/main" id="{ED8250A4-D4DE-5B5F-A55F-B8F6432AF1CA}"/>
+                </a:ext>
+              </a:extLst>
+            </p:cNvPr>
+            <p:cNvSpPr txBox="1"/>
+            <p:nvPr/>
+          </p:nvSpPr>
+          <p:spPr>
+            <a:xfrm>
+              <a:off x="4580557" y="3554799"/>
+              <a:ext cx="2239247" cy="307777"/>
+            </a:xfrm>
+            <a:prstGeom prst="rect">
+              <a:avLst/>
+            </a:prstGeom>
+            <a:noFill/>
+          </p:spPr>
+          <p:txBody>
+            <a:bodyPr wrap="square">
+              <a:spAutoFit/>
+            </a:bodyPr>
+            <a:lstStyle/>
+            <a:p>
+              <a:pPr algn="ctr"/>
+              <a:r>
+                <a:rPr lang="en-US" sz="1400" dirty="0">
+                  <a:latin typeface="Times New Roman" panose="02020603050405020304" pitchFamily="18" charset="0"/>
+                  <a:cs typeface="Times New Roman" panose="02020603050405020304" pitchFamily="18" charset="0"/>
+                </a:rPr>
+                <a:t>Phoenix (5gdeploy)</a:t>
+              </a:r>
+            </a:p>
+          </p:txBody>
+        </p:sp>
+        <p:sp>
+          <p:nvSpPr>
+            <p:cNvPr id="28" name="TextBox 27">
+              <a:extLst>
+                <a:ext uri="{FF2B5EF4-FFF2-40B4-BE49-F238E27FC236}">
+                  <a16:creationId xmlns:a16="http://schemas.microsoft.com/office/drawing/2014/main" id="{04DFD742-DB1D-C83C-32E6-9DCE1C152217}"/>
+                </a:ext>
+              </a:extLst>
+            </p:cNvPr>
+            <p:cNvSpPr txBox="1"/>
+            <p:nvPr/>
+          </p:nvSpPr>
+          <p:spPr>
+            <a:xfrm>
+              <a:off x="4580555" y="3255773"/>
+              <a:ext cx="2239247" cy="307777"/>
+            </a:xfrm>
+            <a:prstGeom prst="rect">
+              <a:avLst/>
+            </a:prstGeom>
+            <a:noFill/>
+          </p:spPr>
+          <p:txBody>
+            <a:bodyPr wrap="square">
+              <a:spAutoFit/>
+            </a:bodyPr>
+            <a:lstStyle/>
+            <a:p>
+              <a:pPr algn="ctr"/>
+              <a:r>
+                <a:rPr lang="en-US" sz="1400" dirty="0">
+                  <a:latin typeface="Times New Roman" panose="02020603050405020304" pitchFamily="18" charset="0"/>
+                  <a:cs typeface="Times New Roman" panose="02020603050405020304" pitchFamily="18" charset="0"/>
+                </a:rPr>
+                <a:t>Free5GC (5gdeploy)</a:t>
+              </a:r>
+            </a:p>
+          </p:txBody>
+        </p:sp>
+        <p:sp>
+          <p:nvSpPr>
+            <p:cNvPr id="29" name="TextBox 28">
+              <a:extLst>
+                <a:ext uri="{FF2B5EF4-FFF2-40B4-BE49-F238E27FC236}">
+                  <a16:creationId xmlns:a16="http://schemas.microsoft.com/office/drawing/2014/main" id="{B85AE1C1-5F7F-93A3-D1D3-3A3A14493B4D}"/>
+                </a:ext>
+              </a:extLst>
+            </p:cNvPr>
+            <p:cNvSpPr txBox="1"/>
+            <p:nvPr/>
+          </p:nvSpPr>
+          <p:spPr>
+            <a:xfrm>
+              <a:off x="4580557" y="4173617"/>
+              <a:ext cx="2239247" cy="307777"/>
+            </a:xfrm>
+            <a:prstGeom prst="rect">
+              <a:avLst/>
+            </a:prstGeom>
+            <a:noFill/>
+          </p:spPr>
+          <p:txBody>
+            <a:bodyPr wrap="square">
+              <a:spAutoFit/>
+            </a:bodyPr>
+            <a:lstStyle/>
+            <a:p>
+              <a:pPr algn="ctr"/>
+              <a:r>
+                <a:rPr lang="en-US" sz="1400" dirty="0">
+                  <a:solidFill>
+                    <a:schemeClr val="tx1"/>
+                  </a:solidFill>
+                  <a:latin typeface="Times New Roman" panose="02020603050405020304" pitchFamily="18" charset="0"/>
+                  <a:cs typeface="Times New Roman" panose="02020603050405020304" pitchFamily="18" charset="0"/>
+                </a:rPr>
+                <a:t>Open5GS</a:t>
+              </a:r>
+              <a:endParaRPr lang="en-US" sz="1400" dirty="0">
+                <a:latin typeface="Times New Roman" panose="02020603050405020304" pitchFamily="18" charset="0"/>
+                <a:cs typeface="Times New Roman" panose="02020603050405020304" pitchFamily="18" charset="0"/>
+              </a:endParaRPr>
+            </a:p>
+          </p:txBody>
+        </p:sp>
+        <p:sp>
+          <p:nvSpPr>
+            <p:cNvPr id="30" name="TextBox 29">
+              <a:extLst>
+                <a:ext uri="{FF2B5EF4-FFF2-40B4-BE49-F238E27FC236}">
+                  <a16:creationId xmlns:a16="http://schemas.microsoft.com/office/drawing/2014/main" id="{034260CC-1F20-1BA6-9F62-4C53EBD2BEAC}"/>
+                </a:ext>
+              </a:extLst>
+            </p:cNvPr>
+            <p:cNvSpPr txBox="1"/>
+            <p:nvPr/>
+          </p:nvSpPr>
+          <p:spPr>
+            <a:xfrm>
+              <a:off x="4643145" y="4450598"/>
+              <a:ext cx="2239249" cy="307777"/>
+            </a:xfrm>
+            <a:prstGeom prst="rect">
+              <a:avLst/>
+            </a:prstGeom>
+            <a:noFill/>
+          </p:spPr>
+          <p:txBody>
+            <a:bodyPr wrap="square">
+              <a:spAutoFit/>
+            </a:bodyPr>
+            <a:lstStyle/>
+            <a:p>
+              <a:pPr algn="ctr"/>
+              <a:r>
+                <a:rPr lang="en-US" sz="1400" b="1" dirty="0">
+                  <a:solidFill>
+                    <a:schemeClr val="tx1"/>
+                  </a:solidFill>
+                  <a:latin typeface="Times New Roman" panose="02020603050405020304" pitchFamily="18" charset="0"/>
+                  <a:cs typeface="Times New Roman" panose="02020603050405020304" pitchFamily="18" charset="0"/>
+                </a:rPr>
+                <a:t>5G Core Network</a:t>
+              </a:r>
+              <a:endParaRPr lang="en-US" sz="1400" b="1" dirty="0">
+                <a:latin typeface="Times New Roman" panose="02020603050405020304" pitchFamily="18" charset="0"/>
+                <a:cs typeface="Times New Roman" panose="02020603050405020304" pitchFamily="18" charset="0"/>
+              </a:endParaRPr>
+            </a:p>
+          </p:txBody>
+        </p:sp>
+      </p:grpSp>
+      <p:cxnSp>
+        <p:nvCxnSpPr>
+          <p:cNvPr id="389" name="Straight Connector 388">
+            <a:extLst>
+              <a:ext uri="{FF2B5EF4-FFF2-40B4-BE49-F238E27FC236}">
+                <a16:creationId xmlns:a16="http://schemas.microsoft.com/office/drawing/2014/main" id="{E8158BD4-8CEA-CB0D-3588-00251A11F8D0}"/>
+              </a:ext>
+            </a:extLst>
+          </p:cNvPr>
+          <p:cNvCxnSpPr>
+            <a:cxnSpLocks/>
+            <a:stCxn id="3" idx="1"/>
+            <a:endCxn id="237" idx="1"/>
+          </p:cNvCxnSpPr>
+          <p:nvPr/>
+        </p:nvCxnSpPr>
+        <p:spPr>
+          <a:xfrm>
+            <a:off x="5943801" y="3107001"/>
+            <a:ext cx="554157" cy="695515"/>
+          </a:xfrm>
+          <a:prstGeom prst="line">
+            <a:avLst/>
+          </a:prstGeom>
+          <a:ln w="12700">
+            <a:solidFill>
+              <a:srgbClr val="C40E00"/>
+            </a:solidFill>
+            <a:prstDash val="sysDot"/>
+          </a:ln>
+        </p:spPr>
+        <p:style>
+          <a:lnRef idx="2">
+            <a:schemeClr val="accent1"/>
+          </a:lnRef>
+          <a:fillRef idx="0">
+            <a:schemeClr val="accent1"/>
+          </a:fillRef>
+          <a:effectRef idx="1">
+            <a:schemeClr val="accent1"/>
+          </a:effectRef>
+          <a:fontRef idx="minor">
+            <a:schemeClr val="tx1"/>
+          </a:fontRef>
+        </p:style>
+      </p:cxnSp>
+      <p:cxnSp>
+        <p:nvCxnSpPr>
+          <p:cNvPr id="367" name="Straight Connector 366">
+            <a:extLst>
+              <a:ext uri="{FF2B5EF4-FFF2-40B4-BE49-F238E27FC236}">
+                <a16:creationId xmlns:a16="http://schemas.microsoft.com/office/drawing/2014/main" id="{0292EA4F-C1D1-7DDC-D7FC-4367D17C623C}"/>
+              </a:ext>
+            </a:extLst>
+          </p:cNvPr>
+          <p:cNvCxnSpPr>
+            <a:cxnSpLocks/>
+            <a:stCxn id="2" idx="1"/>
+            <a:endCxn id="29" idx="1"/>
+          </p:cNvCxnSpPr>
+          <p:nvPr/>
+        </p:nvCxnSpPr>
+        <p:spPr>
+          <a:xfrm>
+            <a:off x="5943801" y="2493651"/>
+            <a:ext cx="554157" cy="412445"/>
+          </a:xfrm>
+          <a:prstGeom prst="line">
+            <a:avLst/>
+          </a:prstGeom>
+          <a:ln w="12700">
+            <a:solidFill>
+              <a:schemeClr val="tx1"/>
+            </a:solidFill>
+          </a:ln>
+        </p:spPr>
+        <p:style>
+          <a:lnRef idx="2">
+            <a:schemeClr val="accent1"/>
+          </a:lnRef>
+          <a:fillRef idx="0">
+            <a:schemeClr val="accent1"/>
+          </a:fillRef>
+          <a:effectRef idx="1">
+            <a:schemeClr val="accent1"/>
+          </a:effectRef>
+          <a:fontRef idx="minor">
+            <a:schemeClr val="tx1"/>
+          </a:fontRef>
+        </p:style>
+      </p:cxnSp>
+      <p:cxnSp>
+        <p:nvCxnSpPr>
+          <p:cNvPr id="370" name="Straight Connector 369">
+            <a:extLst>
+              <a:ext uri="{FF2B5EF4-FFF2-40B4-BE49-F238E27FC236}">
+                <a16:creationId xmlns:a16="http://schemas.microsoft.com/office/drawing/2014/main" id="{1463F92E-A5E1-B471-7536-4E2BB81B1C71}"/>
+              </a:ext>
+            </a:extLst>
+          </p:cNvPr>
+          <p:cNvCxnSpPr>
+            <a:cxnSpLocks/>
+            <a:stCxn id="3" idx="1"/>
+            <a:endCxn id="29" idx="1"/>
+          </p:cNvCxnSpPr>
+          <p:nvPr/>
+        </p:nvCxnSpPr>
+        <p:spPr>
+          <a:xfrm flipV="1">
+            <a:off x="5943801" y="2906096"/>
+            <a:ext cx="554157" cy="200905"/>
+          </a:xfrm>
+          <a:prstGeom prst="line">
+            <a:avLst/>
+          </a:prstGeom>
+          <a:ln w="12700">
+            <a:solidFill>
+              <a:schemeClr val="tx1"/>
+            </a:solidFill>
+          </a:ln>
+        </p:spPr>
+        <p:style>
+          <a:lnRef idx="2">
+            <a:schemeClr val="accent1"/>
+          </a:lnRef>
+          <a:fillRef idx="0">
+            <a:schemeClr val="accent1"/>
+          </a:fillRef>
+          <a:effectRef idx="1">
+            <a:schemeClr val="accent1"/>
+          </a:effectRef>
+          <a:fontRef idx="minor">
+            <a:schemeClr val="tx1"/>
+          </a:fontRef>
+        </p:style>
+      </p:cxnSp>
+      <p:cxnSp>
+        <p:nvCxnSpPr>
+          <p:cNvPr id="376" name="Straight Connector 375">
+            <a:extLst>
+              <a:ext uri="{FF2B5EF4-FFF2-40B4-BE49-F238E27FC236}">
+                <a16:creationId xmlns:a16="http://schemas.microsoft.com/office/drawing/2014/main" id="{DCB765BE-C6D0-9C88-B79C-0653B5D0E5AF}"/>
+              </a:ext>
+            </a:extLst>
+          </p:cNvPr>
+          <p:cNvCxnSpPr>
+            <a:cxnSpLocks/>
+            <a:stCxn id="3" idx="1"/>
+            <a:endCxn id="236" idx="1"/>
+          </p:cNvCxnSpPr>
+          <p:nvPr/>
+        </p:nvCxnSpPr>
+        <p:spPr>
+          <a:xfrm>
+            <a:off x="5943801" y="3107001"/>
+            <a:ext cx="554157" cy="994541"/>
+          </a:xfrm>
+          <a:prstGeom prst="line">
+            <a:avLst/>
+          </a:prstGeom>
+          <a:ln w="12700">
+            <a:solidFill>
+              <a:schemeClr val="tx1"/>
+            </a:solidFill>
+          </a:ln>
+        </p:spPr>
+        <p:style>
+          <a:lnRef idx="2">
+            <a:schemeClr val="accent1"/>
+          </a:lnRef>
+          <a:fillRef idx="0">
+            <a:schemeClr val="accent1"/>
+          </a:fillRef>
+          <a:effectRef idx="1">
+            <a:schemeClr val="accent1"/>
+          </a:effectRef>
+          <a:fontRef idx="minor">
+            <a:schemeClr val="tx1"/>
+          </a:fontRef>
+        </p:style>
+      </p:cxnSp>
+      <p:cxnSp>
+        <p:nvCxnSpPr>
+          <p:cNvPr id="385" name="Straight Connector 384">
+            <a:extLst>
+              <a:ext uri="{FF2B5EF4-FFF2-40B4-BE49-F238E27FC236}">
+                <a16:creationId xmlns:a16="http://schemas.microsoft.com/office/drawing/2014/main" id="{86974C24-CD13-AB9D-5659-40C787D7C759}"/>
+              </a:ext>
+            </a:extLst>
+          </p:cNvPr>
+          <p:cNvCxnSpPr>
+            <a:cxnSpLocks/>
+            <a:stCxn id="2" idx="1"/>
+            <a:endCxn id="236" idx="1"/>
+          </p:cNvCxnSpPr>
+          <p:nvPr/>
+        </p:nvCxnSpPr>
+        <p:spPr>
+          <a:xfrm>
+            <a:off x="5943801" y="2493651"/>
+            <a:ext cx="554157" cy="1607891"/>
+          </a:xfrm>
+          <a:prstGeom prst="line">
+            <a:avLst/>
+          </a:prstGeom>
+          <a:ln w="12700">
+            <a:solidFill>
+              <a:schemeClr val="tx1"/>
+            </a:solidFill>
+            <a:prstDash val="sysDot"/>
+          </a:ln>
+        </p:spPr>
+        <p:style>
+          <a:lnRef idx="2">
+            <a:schemeClr val="accent1"/>
+          </a:lnRef>
+          <a:fillRef idx="0">
+            <a:schemeClr val="accent1"/>
+          </a:fillRef>
+          <a:effectRef idx="1">
+            <a:schemeClr val="accent1"/>
+          </a:effectRef>
+          <a:fontRef idx="minor">
+            <a:schemeClr val="tx1"/>
+          </a:fontRef>
+        </p:style>
+      </p:cxnSp>
+      <p:cxnSp>
+        <p:nvCxnSpPr>
+          <p:cNvPr id="244" name="Straight Connector 243">
+            <a:extLst>
+              <a:ext uri="{FF2B5EF4-FFF2-40B4-BE49-F238E27FC236}">
+                <a16:creationId xmlns:a16="http://schemas.microsoft.com/office/drawing/2014/main" id="{6404A511-24EF-F2E0-E620-746E32F0E998}"/>
+              </a:ext>
+            </a:extLst>
+          </p:cNvPr>
+          <p:cNvCxnSpPr>
+            <a:cxnSpLocks/>
+            <a:stCxn id="3" idx="1"/>
+            <a:endCxn id="27" idx="1"/>
+          </p:cNvCxnSpPr>
+          <p:nvPr/>
+        </p:nvCxnSpPr>
+        <p:spPr>
+          <a:xfrm flipV="1">
+            <a:off x="5943801" y="2287278"/>
+            <a:ext cx="554157" cy="819723"/>
+          </a:xfrm>
+          <a:prstGeom prst="line">
+            <a:avLst/>
+          </a:prstGeom>
+          <a:ln w="12700">
+            <a:solidFill>
+              <a:schemeClr val="tx1"/>
+            </a:solidFill>
+            <a:prstDash val="sysDot"/>
+          </a:ln>
+        </p:spPr>
+        <p:style>
+          <a:lnRef idx="2">
+            <a:schemeClr val="accent1"/>
+          </a:lnRef>
+          <a:fillRef idx="0">
+            <a:schemeClr val="accent1"/>
+          </a:fillRef>
+          <a:effectRef idx="1">
+            <a:schemeClr val="accent1"/>
+          </a:effectRef>
+          <a:fontRef idx="minor">
+            <a:schemeClr val="tx1"/>
+          </a:fontRef>
+        </p:style>
+      </p:cxnSp>
+      <p:cxnSp>
+        <p:nvCxnSpPr>
+          <p:cNvPr id="247" name="Straight Connector 246">
+            <a:extLst>
+              <a:ext uri="{FF2B5EF4-FFF2-40B4-BE49-F238E27FC236}">
+                <a16:creationId xmlns:a16="http://schemas.microsoft.com/office/drawing/2014/main" id="{70465907-0F64-4965-9163-B2C700A48E2C}"/>
+              </a:ext>
+            </a:extLst>
+          </p:cNvPr>
+          <p:cNvCxnSpPr>
+            <a:cxnSpLocks/>
+            <a:stCxn id="3" idx="1"/>
+            <a:endCxn id="28" idx="1"/>
+          </p:cNvCxnSpPr>
+          <p:nvPr/>
+        </p:nvCxnSpPr>
+        <p:spPr>
+          <a:xfrm flipV="1">
+            <a:off x="5943801" y="1988252"/>
+            <a:ext cx="554155" cy="1118749"/>
+          </a:xfrm>
+          <a:prstGeom prst="line">
+            <a:avLst/>
+          </a:prstGeom>
+          <a:ln w="12700">
+            <a:solidFill>
+              <a:schemeClr val="tx1"/>
+            </a:solidFill>
+            <a:prstDash val="sysDot"/>
+          </a:ln>
+        </p:spPr>
+        <p:style>
+          <a:lnRef idx="2">
+            <a:schemeClr val="accent1"/>
+          </a:lnRef>
+          <a:fillRef idx="0">
+            <a:schemeClr val="accent1"/>
+          </a:fillRef>
+          <a:effectRef idx="1">
+            <a:schemeClr val="accent1"/>
+          </a:effectRef>
+          <a:fontRef idx="minor">
+            <a:schemeClr val="tx1"/>
+          </a:fontRef>
+        </p:style>
+      </p:cxnSp>
+      <p:cxnSp>
+        <p:nvCxnSpPr>
+          <p:cNvPr id="301" name="Straight Connector 300">
+            <a:extLst>
+              <a:ext uri="{FF2B5EF4-FFF2-40B4-BE49-F238E27FC236}">
+                <a16:creationId xmlns:a16="http://schemas.microsoft.com/office/drawing/2014/main" id="{411F421E-1B73-D5DA-0B27-75EF7C35376E}"/>
+              </a:ext>
+            </a:extLst>
+          </p:cNvPr>
+          <p:cNvCxnSpPr>
+            <a:cxnSpLocks/>
+            <a:stCxn id="2" idx="1"/>
+            <a:endCxn id="26" idx="1"/>
+          </p:cNvCxnSpPr>
+          <p:nvPr/>
+        </p:nvCxnSpPr>
+        <p:spPr>
+          <a:xfrm>
+            <a:off x="5943801" y="2493651"/>
+            <a:ext cx="554157" cy="92653"/>
+          </a:xfrm>
+          <a:prstGeom prst="line">
+            <a:avLst/>
+          </a:prstGeom>
+          <a:ln w="12700">
+            <a:solidFill>
+              <a:schemeClr val="tx1"/>
+            </a:solidFill>
+            <a:prstDash val="sysDot"/>
+          </a:ln>
+        </p:spPr>
+        <p:style>
+          <a:lnRef idx="2">
+            <a:schemeClr val="accent1"/>
+          </a:lnRef>
+          <a:fillRef idx="0">
+            <a:schemeClr val="accent1"/>
+          </a:fillRef>
+          <a:effectRef idx="1">
+            <a:schemeClr val="accent1"/>
+          </a:effectRef>
+          <a:fontRef idx="minor">
+            <a:schemeClr val="tx1"/>
+          </a:fontRef>
+        </p:style>
+      </p:cxnSp>
+      <p:cxnSp>
+        <p:nvCxnSpPr>
+          <p:cNvPr id="302" name="Straight Connector 301">
+            <a:extLst>
+              <a:ext uri="{FF2B5EF4-FFF2-40B4-BE49-F238E27FC236}">
+                <a16:creationId xmlns:a16="http://schemas.microsoft.com/office/drawing/2014/main" id="{6C08D5E6-1E0C-25D0-ED10-FE79EF24D209}"/>
+              </a:ext>
+            </a:extLst>
+          </p:cNvPr>
+          <p:cNvCxnSpPr>
+            <a:cxnSpLocks/>
+            <a:stCxn id="2" idx="1"/>
+            <a:endCxn id="27" idx="1"/>
+          </p:cNvCxnSpPr>
+          <p:nvPr/>
+        </p:nvCxnSpPr>
+        <p:spPr>
+          <a:xfrm flipV="1">
+            <a:off x="5943801" y="2287278"/>
+            <a:ext cx="554157" cy="206373"/>
+          </a:xfrm>
+          <a:prstGeom prst="line">
+            <a:avLst/>
+          </a:prstGeom>
+          <a:ln w="12700">
+            <a:solidFill>
+              <a:schemeClr val="tx1"/>
+            </a:solidFill>
+            <a:prstDash val="sysDot"/>
+          </a:ln>
+        </p:spPr>
+        <p:style>
+          <a:lnRef idx="2">
+            <a:schemeClr val="accent1"/>
+          </a:lnRef>
+          <a:fillRef idx="0">
+            <a:schemeClr val="accent1"/>
+          </a:fillRef>
+          <a:effectRef idx="1">
+            <a:schemeClr val="accent1"/>
+          </a:effectRef>
+          <a:fontRef idx="minor">
+            <a:schemeClr val="tx1"/>
+          </a:fontRef>
+        </p:style>
+      </p:cxnSp>
+      <p:cxnSp>
+        <p:nvCxnSpPr>
+          <p:cNvPr id="303" name="Straight Connector 302">
+            <a:extLst>
+              <a:ext uri="{FF2B5EF4-FFF2-40B4-BE49-F238E27FC236}">
+                <a16:creationId xmlns:a16="http://schemas.microsoft.com/office/drawing/2014/main" id="{D5B6C4AD-F7E9-7B2A-2D7D-25E385B05D6D}"/>
+              </a:ext>
+            </a:extLst>
+          </p:cNvPr>
+          <p:cNvCxnSpPr>
+            <a:cxnSpLocks/>
+            <a:stCxn id="2" idx="1"/>
+            <a:endCxn id="28" idx="1"/>
+          </p:cNvCxnSpPr>
+          <p:nvPr/>
+        </p:nvCxnSpPr>
+        <p:spPr>
+          <a:xfrm flipV="1">
+            <a:off x="5943801" y="1988252"/>
+            <a:ext cx="554155" cy="505399"/>
+          </a:xfrm>
+          <a:prstGeom prst="line">
+            <a:avLst/>
+          </a:prstGeom>
+          <a:ln w="12700">
+            <a:solidFill>
+              <a:schemeClr val="tx1"/>
+            </a:solidFill>
+            <a:prstDash val="sysDot"/>
+          </a:ln>
+        </p:spPr>
+        <p:style>
+          <a:lnRef idx="2">
+            <a:schemeClr val="accent1"/>
+          </a:lnRef>
+          <a:fillRef idx="0">
+            <a:schemeClr val="accent1"/>
+          </a:fillRef>
+          <a:effectRef idx="1">
+            <a:schemeClr val="accent1"/>
+          </a:effectRef>
+          <a:fontRef idx="minor">
+            <a:schemeClr val="tx1"/>
+          </a:fontRef>
+        </p:style>
+      </p:cxnSp>
+      <p:cxnSp>
+        <p:nvCxnSpPr>
+          <p:cNvPr id="231" name="Straight Connector 230">
+            <a:extLst>
+              <a:ext uri="{FF2B5EF4-FFF2-40B4-BE49-F238E27FC236}">
+                <a16:creationId xmlns:a16="http://schemas.microsoft.com/office/drawing/2014/main" id="{CCB705AB-188A-483B-5A34-A75DADA65705}"/>
+              </a:ext>
+            </a:extLst>
+          </p:cNvPr>
+          <p:cNvCxnSpPr>
+            <a:cxnSpLocks/>
+            <a:stCxn id="3" idx="1"/>
+            <a:endCxn id="26" idx="1"/>
+          </p:cNvCxnSpPr>
+          <p:nvPr/>
+        </p:nvCxnSpPr>
+        <p:spPr>
+          <a:xfrm flipV="1">
+            <a:off x="5943801" y="2586304"/>
+            <a:ext cx="554157" cy="520697"/>
+          </a:xfrm>
+          <a:prstGeom prst="line">
+            <a:avLst/>
+          </a:prstGeom>
+          <a:ln w="12700">
+            <a:solidFill>
+              <a:schemeClr val="tx1"/>
+            </a:solidFill>
+            <a:prstDash val="sysDot"/>
+          </a:ln>
+        </p:spPr>
+        <p:style>
+          <a:lnRef idx="2">
+            <a:schemeClr val="accent1"/>
+          </a:lnRef>
+          <a:fillRef idx="0">
+            <a:schemeClr val="accent1"/>
+          </a:fillRef>
+          <a:effectRef idx="1">
+            <a:schemeClr val="accent1"/>
+          </a:effectRef>
+          <a:fontRef idx="minor">
+            <a:schemeClr val="tx1"/>
+          </a:fontRef>
+        </p:style>
+      </p:cxnSp>
+      <p:cxnSp>
+        <p:nvCxnSpPr>
+          <p:cNvPr id="373" name="Straight Connector 372">
+            <a:extLst>
+              <a:ext uri="{FF2B5EF4-FFF2-40B4-BE49-F238E27FC236}">
+                <a16:creationId xmlns:a16="http://schemas.microsoft.com/office/drawing/2014/main" id="{203454DD-698B-FE70-9DDA-C59F2DCB67D9}"/>
+              </a:ext>
+            </a:extLst>
+          </p:cNvPr>
+          <p:cNvCxnSpPr>
+            <a:cxnSpLocks/>
+            <a:stCxn id="2" idx="1"/>
+            <a:endCxn id="237" idx="1"/>
+          </p:cNvCxnSpPr>
+          <p:nvPr/>
+        </p:nvCxnSpPr>
+        <p:spPr>
+          <a:xfrm>
+            <a:off x="5943801" y="2493651"/>
+            <a:ext cx="554157" cy="1308865"/>
+          </a:xfrm>
+          <a:prstGeom prst="line">
+            <a:avLst/>
+          </a:prstGeom>
+          <a:ln w="12700">
+            <a:solidFill>
+              <a:schemeClr val="tx1"/>
+            </a:solidFill>
+          </a:ln>
+        </p:spPr>
+        <p:style>
+          <a:lnRef idx="2">
+            <a:schemeClr val="accent1"/>
+          </a:lnRef>
+          <a:fillRef idx="0">
+            <a:schemeClr val="accent1"/>
+          </a:fillRef>
+          <a:effectRef idx="1">
+            <a:schemeClr val="accent1"/>
+          </a:effectRef>
+          <a:fontRef idx="minor">
+            <a:schemeClr val="tx1"/>
+          </a:fontRef>
+        </p:style>
+      </p:cxnSp>
+      <p:cxnSp>
+        <p:nvCxnSpPr>
+          <p:cNvPr id="380" name="Straight Connector 379">
+            <a:extLst>
+              <a:ext uri="{FF2B5EF4-FFF2-40B4-BE49-F238E27FC236}">
+                <a16:creationId xmlns:a16="http://schemas.microsoft.com/office/drawing/2014/main" id="{AA778A2D-5D6E-872D-16E0-E2154F72147B}"/>
+              </a:ext>
+            </a:extLst>
+          </p:cNvPr>
+          <p:cNvCxnSpPr>
+            <a:cxnSpLocks/>
+            <a:stCxn id="277" idx="3"/>
+            <a:endCxn id="237" idx="1"/>
+          </p:cNvCxnSpPr>
+          <p:nvPr/>
+        </p:nvCxnSpPr>
+        <p:spPr>
+          <a:xfrm>
+            <a:off x="5817331" y="3559019"/>
+            <a:ext cx="680627" cy="243497"/>
+          </a:xfrm>
+          <a:prstGeom prst="line">
+            <a:avLst/>
+          </a:prstGeom>
+          <a:ln w="12700">
+            <a:solidFill>
+              <a:schemeClr val="tx1"/>
+            </a:solidFill>
+          </a:ln>
+        </p:spPr>
+        <p:style>
+          <a:lnRef idx="2">
+            <a:schemeClr val="accent1"/>
+          </a:lnRef>
+          <a:fillRef idx="0">
+            <a:schemeClr val="accent1"/>
+          </a:fillRef>
+          <a:effectRef idx="1">
+            <a:schemeClr val="accent1"/>
+          </a:effectRef>
+          <a:fontRef idx="minor">
+            <a:schemeClr val="tx1"/>
+          </a:fontRef>
+        </p:style>
+      </p:cxnSp>
+      <p:cxnSp>
+        <p:nvCxnSpPr>
+          <p:cNvPr id="359" name="Straight Connector 358">
+            <a:extLst>
+              <a:ext uri="{FF2B5EF4-FFF2-40B4-BE49-F238E27FC236}">
+                <a16:creationId xmlns:a16="http://schemas.microsoft.com/office/drawing/2014/main" id="{C221BBAA-9FEE-8D9E-6872-58AEB1FAFC02}"/>
+              </a:ext>
+            </a:extLst>
+          </p:cNvPr>
+          <p:cNvCxnSpPr>
+            <a:cxnSpLocks/>
+            <a:stCxn id="237" idx="3"/>
+            <a:endCxn id="315" idx="1"/>
+          </p:cNvCxnSpPr>
+          <p:nvPr/>
+        </p:nvCxnSpPr>
+        <p:spPr>
+          <a:xfrm flipV="1">
+            <a:off x="8737207" y="3505473"/>
+            <a:ext cx="639703" cy="297043"/>
+          </a:xfrm>
+          <a:prstGeom prst="line">
+            <a:avLst/>
+          </a:prstGeom>
+          <a:ln w="12700">
+            <a:solidFill>
+              <a:schemeClr val="tx1"/>
+            </a:solidFill>
+            <a:prstDash val="sysDot"/>
+          </a:ln>
+        </p:spPr>
+        <p:style>
+          <a:lnRef idx="2">
+            <a:schemeClr val="accent1"/>
+          </a:lnRef>
+          <a:fillRef idx="0">
+            <a:schemeClr val="accent1"/>
+          </a:fillRef>
+          <a:effectRef idx="1">
+            <a:schemeClr val="accent1"/>
+          </a:effectRef>
+          <a:fontRef idx="minor">
+            <a:schemeClr val="tx1"/>
+          </a:fontRef>
+        </p:style>
+      </p:cxnSp>
+      <p:cxnSp>
+        <p:nvCxnSpPr>
+          <p:cNvPr id="255" name="Straight Connector 254">
+            <a:extLst>
+              <a:ext uri="{FF2B5EF4-FFF2-40B4-BE49-F238E27FC236}">
+                <a16:creationId xmlns:a16="http://schemas.microsoft.com/office/drawing/2014/main" id="{91DD07F7-2F86-0E54-F54F-7BDC7A59D6BD}"/>
+              </a:ext>
+            </a:extLst>
+          </p:cNvPr>
+          <p:cNvCxnSpPr>
+            <a:cxnSpLocks/>
+            <a:stCxn id="238" idx="3"/>
+            <a:endCxn id="315" idx="1"/>
+          </p:cNvCxnSpPr>
+          <p:nvPr/>
+        </p:nvCxnSpPr>
+        <p:spPr>
+          <a:xfrm>
+            <a:off x="8737207" y="3503490"/>
+            <a:ext cx="639703" cy="1983"/>
+          </a:xfrm>
+          <a:prstGeom prst="line">
+            <a:avLst/>
+          </a:prstGeom>
+          <a:ln w="12700">
+            <a:solidFill>
+              <a:schemeClr val="tx1"/>
+            </a:solidFill>
+          </a:ln>
+        </p:spPr>
+        <p:style>
+          <a:lnRef idx="2">
+            <a:schemeClr val="accent1"/>
+          </a:lnRef>
+          <a:fillRef idx="0">
+            <a:schemeClr val="accent1"/>
+          </a:fillRef>
+          <a:effectRef idx="1">
+            <a:schemeClr val="accent1"/>
+          </a:effectRef>
+          <a:fontRef idx="minor">
+            <a:schemeClr val="tx1"/>
+          </a:fontRef>
+        </p:style>
+      </p:cxnSp>
+    </p:spTree>
+    <p:extLst>
+      <p:ext uri="{BB962C8B-B14F-4D97-AF65-F5344CB8AC3E}">
+        <p14:creationId xmlns:p14="http://schemas.microsoft.com/office/powerpoint/2010/main" val="325947210"/>
+      </p:ext>
+    </p:extLst>
+  </p:cSld>
+  <p:clrMapOvr>
+    <a:masterClrMapping/>
+  </p:clrMapOvr>
+</p:sld>
+</file>
+
+<file path=ppt/slides/slide7.xml><?xml version="1.0" encoding="utf-8"?>
+<p:sld xmlns:a="http://schemas.openxmlformats.org/drawingml/2006/main" xmlns:r="http://schemas.openxmlformats.org/officeDocument/2006/relationships" xmlns:p="http://schemas.openxmlformats.org/presentationml/2006/main">
+  <p:cSld>
+    <p:spTree>
+      <p:nvGrpSpPr>
+        <p:cNvPr id="1" name=""/>
+        <p:cNvGrpSpPr/>
+        <p:nvPr/>
+      </p:nvGrpSpPr>
+      <p:grpSpPr>
+        <a:xfrm>
+          <a:off x="0" y="0"/>
+          <a:ext cx="0" cy="0"/>
+          <a:chOff x="0" y="0"/>
+          <a:chExt cx="0" cy="0"/>
+        </a:xfrm>
+      </p:grpSpPr>
+      <p:sp>
+        <p:nvSpPr>
+          <p:cNvPr id="198" name="Rectangle 197">
+            <a:extLst>
+              <a:ext uri="{FF2B5EF4-FFF2-40B4-BE49-F238E27FC236}">
+                <a16:creationId xmlns:a16="http://schemas.microsoft.com/office/drawing/2014/main" id="{48F3AFCA-C6E8-6EAA-EE14-23BCAADE730F}"/>
+              </a:ext>
+            </a:extLst>
+          </p:cNvPr>
+          <p:cNvSpPr>
+            <a:spLocks noGrp="1" noRot="1" noMove="1" noResize="1" noEditPoints="1" noAdjustHandles="1" noChangeArrowheads="1" noChangeShapeType="1"/>
+          </p:cNvSpPr>
+          <p:nvPr/>
+        </p:nvSpPr>
+        <p:spPr>
+          <a:xfrm>
+            <a:off x="0" y="0"/>
+            <a:ext cx="12192000" cy="6858000"/>
+          </a:xfrm>
+          <a:prstGeom prst="rect">
+            <a:avLst/>
+          </a:prstGeom>
+          <a:solidFill>
+            <a:srgbClr val="0D1117"/>
+          </a:solidFill>
+        </p:spPr>
+        <p:style>
+          <a:lnRef idx="2">
+            <a:schemeClr val="dk1">
+              <a:shade val="15000"/>
+            </a:schemeClr>
+          </a:lnRef>
+          <a:fillRef idx="1">
+            <a:schemeClr val="dk1"/>
+          </a:fillRef>
+          <a:effectRef idx="0">
+            <a:schemeClr val="dk1"/>
+          </a:effectRef>
+          <a:fontRef idx="minor">
+            <a:schemeClr val="lt1"/>
+          </a:fontRef>
+        </p:style>
+        <p:txBody>
+          <a:bodyPr rtlCol="0" anchor="ctr"/>
+          <a:lstStyle/>
+          <a:p>
+            <a:pPr algn="ctr"/>
+            <a:endParaRPr lang="en-US">
+              <a:solidFill>
+                <a:schemeClr val="bg1"/>
+              </a:solidFill>
+            </a:endParaRPr>
+          </a:p>
+        </p:txBody>
+      </p:sp>
+      <p:grpSp>
+        <p:nvGrpSpPr>
+          <p:cNvPr id="90" name="Group 89">
+            <a:extLst>
+              <a:ext uri="{FF2B5EF4-FFF2-40B4-BE49-F238E27FC236}">
+                <a16:creationId xmlns:a16="http://schemas.microsoft.com/office/drawing/2014/main" id="{E8E01907-679C-CCC9-D3A2-B1DF57432798}"/>
+              </a:ext>
+            </a:extLst>
+          </p:cNvPr>
+          <p:cNvGrpSpPr/>
+          <p:nvPr/>
+        </p:nvGrpSpPr>
+        <p:grpSpPr>
+          <a:xfrm>
+            <a:off x="575839" y="2069432"/>
+            <a:ext cx="11199066" cy="1947249"/>
+            <a:chOff x="575839" y="2069432"/>
+            <a:chExt cx="11199066" cy="1947249"/>
+          </a:xfrm>
+        </p:grpSpPr>
+        <p:sp>
+          <p:nvSpPr>
+            <p:cNvPr id="6" name="Rectangle: Rounded Corners 5">
+              <a:extLst>
+                <a:ext uri="{FF2B5EF4-FFF2-40B4-BE49-F238E27FC236}">
+                  <a16:creationId xmlns:a16="http://schemas.microsoft.com/office/drawing/2014/main" id="{782EB370-06F7-A3C6-2D9D-767AE910B3C2}"/>
+                </a:ext>
+              </a:extLst>
+            </p:cNvPr>
+            <p:cNvSpPr/>
+            <p:nvPr/>
+          </p:nvSpPr>
+          <p:spPr>
+            <a:xfrm>
+              <a:off x="575839" y="2069432"/>
+              <a:ext cx="11199066" cy="1945979"/>
+            </a:xfrm>
+            <a:prstGeom prst="roundRect">
+              <a:avLst>
+                <a:gd name="adj" fmla="val 3896"/>
+              </a:avLst>
+            </a:prstGeom>
+            <a:solidFill>
+              <a:srgbClr val="0D1117"/>
+            </a:solidFill>
+            <a:ln w="12700">
+              <a:solidFill>
+                <a:schemeClr val="bg1"/>
+              </a:solidFill>
+            </a:ln>
+          </p:spPr>
+          <p:style>
+            <a:lnRef idx="2">
+              <a:schemeClr val="accent1">
+                <a:shade val="15000"/>
+              </a:schemeClr>
+            </a:lnRef>
+            <a:fillRef idx="1">
+              <a:schemeClr val="accent1"/>
+            </a:fillRef>
+            <a:effectRef idx="0">
+              <a:schemeClr val="accent1"/>
+            </a:effectRef>
+            <a:fontRef idx="minor">
+              <a:schemeClr val="lt1"/>
+            </a:fontRef>
+          </p:style>
+          <p:txBody>
+            <a:bodyPr rtlCol="0" anchor="ctr"/>
+            <a:lstStyle/>
+            <a:p>
+              <a:pPr algn="ctr"/>
+              <a:endParaRPr lang="en-US" dirty="0">
+                <a:latin typeface="Times New Roman" panose="02020603050405020304" pitchFamily="18" charset="0"/>
+                <a:cs typeface="Times New Roman" panose="02020603050405020304" pitchFamily="18" charset="0"/>
+              </a:endParaRPr>
+            </a:p>
+          </p:txBody>
+        </p:sp>
+        <p:cxnSp>
+          <p:nvCxnSpPr>
+            <p:cNvPr id="8" name="Straight Connector 7">
+              <a:extLst>
+                <a:ext uri="{FF2B5EF4-FFF2-40B4-BE49-F238E27FC236}">
+                  <a16:creationId xmlns:a16="http://schemas.microsoft.com/office/drawing/2014/main" id="{9E7BD0CD-0AD8-F766-F38F-1FB50716D247}"/>
+                </a:ext>
+              </a:extLst>
+            </p:cNvPr>
+            <p:cNvCxnSpPr>
+              <a:cxnSpLocks/>
+            </p:cNvCxnSpPr>
+            <p:nvPr/>
+          </p:nvCxnSpPr>
+          <p:spPr>
+            <a:xfrm>
+              <a:off x="5943801" y="3116526"/>
+              <a:ext cx="554158" cy="139732"/>
+            </a:xfrm>
+            <a:prstGeom prst="line">
+              <a:avLst/>
+            </a:prstGeom>
+            <a:ln w="12700">
+              <a:solidFill>
+                <a:srgbClr val="FF7B61"/>
+              </a:solidFill>
+              <a:prstDash val="sysDot"/>
+            </a:ln>
+          </p:spPr>
+          <p:style>
+            <a:lnRef idx="2">
+              <a:schemeClr val="accent1"/>
+            </a:lnRef>
+            <a:fillRef idx="0">
+              <a:schemeClr val="accent1"/>
+            </a:fillRef>
+            <a:effectRef idx="1">
+              <a:schemeClr val="accent1"/>
+            </a:effectRef>
+            <a:fontRef idx="minor">
+              <a:schemeClr val="tx1"/>
+            </a:fontRef>
+          </p:style>
+        </p:cxnSp>
+        <p:grpSp>
+          <p:nvGrpSpPr>
+            <p:cNvPr id="67" name="Group 66">
+              <a:extLst>
+                <a:ext uri="{FF2B5EF4-FFF2-40B4-BE49-F238E27FC236}">
+                  <a16:creationId xmlns:a16="http://schemas.microsoft.com/office/drawing/2014/main" id="{94C82875-16D7-328F-D44F-2C1A08F28D46}"/>
+                </a:ext>
+              </a:extLst>
+            </p:cNvPr>
+            <p:cNvGrpSpPr/>
+            <p:nvPr/>
+          </p:nvGrpSpPr>
+          <p:grpSpPr>
+            <a:xfrm>
+              <a:off x="6498724" y="2172257"/>
+              <a:ext cx="2239251" cy="333931"/>
+              <a:chOff x="7168594" y="4200673"/>
+              <a:chExt cx="2239251" cy="299842"/>
+            </a:xfrm>
+          </p:grpSpPr>
+          <p:sp>
+            <p:nvSpPr>
+              <p:cNvPr id="69" name="Rectangle: Rounded Corners 68">
+                <a:extLst>
+                  <a:ext uri="{FF2B5EF4-FFF2-40B4-BE49-F238E27FC236}">
+                    <a16:creationId xmlns:a16="http://schemas.microsoft.com/office/drawing/2014/main" id="{E3E5506D-785E-C802-0B5C-83BCF4D57BC8}"/>
+                  </a:ext>
+                </a:extLst>
+              </p:cNvPr>
+              <p:cNvSpPr/>
+              <p:nvPr/>
+            </p:nvSpPr>
+            <p:spPr>
+              <a:xfrm>
+                <a:off x="7168596" y="4200673"/>
+                <a:ext cx="2239249" cy="299842"/>
+              </a:xfrm>
+              <a:prstGeom prst="roundRect">
+                <a:avLst>
+                  <a:gd name="adj" fmla="val 28947"/>
+                </a:avLst>
+              </a:prstGeom>
+              <a:solidFill>
+                <a:srgbClr val="262626"/>
+              </a:solidFill>
+              <a:ln w="12700">
+                <a:solidFill>
+                  <a:schemeClr val="bg1"/>
+                </a:solidFill>
+              </a:ln>
+            </p:spPr>
+            <p:style>
+              <a:lnRef idx="2">
+                <a:schemeClr val="accent1">
+                  <a:shade val="15000"/>
+                </a:schemeClr>
+              </a:lnRef>
+              <a:fillRef idx="1">
+                <a:schemeClr val="accent1"/>
+              </a:fillRef>
+              <a:effectRef idx="0">
+                <a:schemeClr val="accent1"/>
+              </a:effectRef>
+              <a:fontRef idx="minor">
+                <a:schemeClr val="lt1"/>
+              </a:fontRef>
+            </p:style>
+            <p:txBody>
+              <a:bodyPr rtlCol="0" anchor="ctr"/>
+              <a:lstStyle/>
+              <a:p>
+                <a:pPr algn="ctr"/>
+                <a:endParaRPr lang="en-US" sz="1400" dirty="0">
+                  <a:solidFill>
+                    <a:schemeClr val="tx1"/>
+                  </a:solidFill>
+                  <a:latin typeface="Times New Roman" panose="02020603050405020304" pitchFamily="18" charset="0"/>
+                  <a:cs typeface="Times New Roman" panose="02020603050405020304" pitchFamily="18" charset="0"/>
+                </a:endParaRPr>
+              </a:p>
+            </p:txBody>
+          </p:sp>
+          <p:sp>
+            <p:nvSpPr>
+              <p:cNvPr id="70" name="TextBox 69">
+                <a:extLst>
+                  <a:ext uri="{FF2B5EF4-FFF2-40B4-BE49-F238E27FC236}">
+                    <a16:creationId xmlns:a16="http://schemas.microsoft.com/office/drawing/2014/main" id="{A6BD8DC3-F519-6540-99EC-9071E4B84D62}"/>
+                  </a:ext>
+                </a:extLst>
+              </p:cNvPr>
+              <p:cNvSpPr txBox="1"/>
+              <p:nvPr/>
+            </p:nvSpPr>
+            <p:spPr>
+              <a:xfrm>
+                <a:off x="7168594" y="4201157"/>
+                <a:ext cx="2238468" cy="276358"/>
+              </a:xfrm>
+              <a:prstGeom prst="rect">
+                <a:avLst/>
+              </a:prstGeom>
+              <a:noFill/>
+              <a:ln w="12700">
+                <a:noFill/>
+              </a:ln>
+            </p:spPr>
+            <p:txBody>
+              <a:bodyPr wrap="square">
+                <a:spAutoFit/>
+              </a:bodyPr>
+              <a:lstStyle/>
+              <a:p>
+                <a:pPr algn="ctr"/>
+                <a:r>
+                  <a:rPr lang="en-US" sz="1400" dirty="0">
+                    <a:solidFill>
+                      <a:schemeClr val="bg1"/>
+                    </a:solidFill>
+                    <a:latin typeface="Times New Roman" panose="02020603050405020304" pitchFamily="18" charset="0"/>
+                    <a:cs typeface="Times New Roman" panose="02020603050405020304" pitchFamily="18" charset="0"/>
+                  </a:rPr>
+                  <a:t>Open5GS</a:t>
+                </a:r>
+              </a:p>
+            </p:txBody>
+          </p:sp>
+        </p:grpSp>
+        <p:cxnSp>
+          <p:nvCxnSpPr>
+            <p:cNvPr id="10" name="Straight Connector 9">
+              <a:extLst>
+                <a:ext uri="{FF2B5EF4-FFF2-40B4-BE49-F238E27FC236}">
+                  <a16:creationId xmlns:a16="http://schemas.microsoft.com/office/drawing/2014/main" id="{32A79DEC-8744-1300-577F-E137537AD2F9}"/>
+                </a:ext>
+              </a:extLst>
+            </p:cNvPr>
+            <p:cNvCxnSpPr>
+              <a:cxnSpLocks/>
+              <a:stCxn id="45" idx="3"/>
+              <a:endCxn id="56" idx="1"/>
+            </p:cNvCxnSpPr>
+            <p:nvPr/>
+          </p:nvCxnSpPr>
+          <p:spPr>
+            <a:xfrm>
+              <a:off x="2929887" y="2336371"/>
+              <a:ext cx="676819" cy="0"/>
+            </a:xfrm>
+            <a:prstGeom prst="line">
+              <a:avLst/>
+            </a:prstGeom>
+            <a:ln w="12700">
+              <a:solidFill>
+                <a:schemeClr val="bg1"/>
+              </a:solidFill>
+              <a:prstDash val="sysDot"/>
+            </a:ln>
+          </p:spPr>
+          <p:style>
+            <a:lnRef idx="2">
+              <a:schemeClr val="accent1"/>
+            </a:lnRef>
+            <a:fillRef idx="0">
+              <a:schemeClr val="accent1"/>
+            </a:fillRef>
+            <a:effectRef idx="1">
+              <a:schemeClr val="accent1"/>
+            </a:effectRef>
+            <a:fontRef idx="minor">
+              <a:schemeClr val="tx1"/>
+            </a:fontRef>
+          </p:style>
+        </p:cxnSp>
+        <p:cxnSp>
+          <p:nvCxnSpPr>
+            <p:cNvPr id="11" name="Straight Connector 10">
+              <a:extLst>
+                <a:ext uri="{FF2B5EF4-FFF2-40B4-BE49-F238E27FC236}">
+                  <a16:creationId xmlns:a16="http://schemas.microsoft.com/office/drawing/2014/main" id="{34C38DF5-DD28-45E9-2507-546631986FEC}"/>
+                </a:ext>
+              </a:extLst>
+            </p:cNvPr>
+            <p:cNvCxnSpPr>
+              <a:cxnSpLocks/>
+              <a:stCxn id="44" idx="3"/>
+              <a:endCxn id="55" idx="1"/>
+            </p:cNvCxnSpPr>
+            <p:nvPr/>
+          </p:nvCxnSpPr>
+          <p:spPr>
+            <a:xfrm>
+              <a:off x="2931791" y="2642033"/>
+              <a:ext cx="678726" cy="0"/>
+            </a:xfrm>
+            <a:prstGeom prst="line">
+              <a:avLst/>
+            </a:prstGeom>
+            <a:ln w="12700">
+              <a:solidFill>
+                <a:schemeClr val="bg1"/>
+              </a:solidFill>
+            </a:ln>
+          </p:spPr>
+          <p:style>
+            <a:lnRef idx="2">
+              <a:schemeClr val="accent1"/>
+            </a:lnRef>
+            <a:fillRef idx="0">
+              <a:schemeClr val="accent1"/>
+            </a:fillRef>
+            <a:effectRef idx="1">
+              <a:schemeClr val="accent1"/>
+            </a:effectRef>
+            <a:fontRef idx="minor">
+              <a:schemeClr val="tx1"/>
+            </a:fontRef>
+          </p:style>
+        </p:cxnSp>
+        <p:cxnSp>
+          <p:nvCxnSpPr>
+            <p:cNvPr id="12" name="Straight Connector 11">
+              <a:extLst>
+                <a:ext uri="{FF2B5EF4-FFF2-40B4-BE49-F238E27FC236}">
+                  <a16:creationId xmlns:a16="http://schemas.microsoft.com/office/drawing/2014/main" id="{5ECED138-8687-8AC9-B515-1F21C20F5556}"/>
+                </a:ext>
+              </a:extLst>
+            </p:cNvPr>
+            <p:cNvCxnSpPr>
+              <a:cxnSpLocks/>
+              <a:stCxn id="46" idx="3"/>
+              <a:endCxn id="56" idx="1"/>
+            </p:cNvCxnSpPr>
+            <p:nvPr/>
+          </p:nvCxnSpPr>
+          <p:spPr>
+            <a:xfrm flipV="1">
+              <a:off x="2929886" y="2336371"/>
+              <a:ext cx="676820" cy="1222648"/>
+            </a:xfrm>
+            <a:prstGeom prst="line">
+              <a:avLst/>
+            </a:prstGeom>
+            <a:ln w="12700">
+              <a:solidFill>
+                <a:schemeClr val="bg1"/>
+              </a:solidFill>
+              <a:prstDash val="sysDot"/>
+            </a:ln>
+          </p:spPr>
+          <p:style>
+            <a:lnRef idx="2">
+              <a:schemeClr val="accent1"/>
+            </a:lnRef>
+            <a:fillRef idx="0">
+              <a:schemeClr val="accent1"/>
+            </a:fillRef>
+            <a:effectRef idx="1">
+              <a:schemeClr val="accent1"/>
+            </a:effectRef>
+            <a:fontRef idx="minor">
+              <a:schemeClr val="tx1"/>
+            </a:fontRef>
+          </p:style>
+        </p:cxnSp>
+        <p:cxnSp>
+          <p:nvCxnSpPr>
+            <p:cNvPr id="13" name="Straight Connector 12">
+              <a:extLst>
+                <a:ext uri="{FF2B5EF4-FFF2-40B4-BE49-F238E27FC236}">
+                  <a16:creationId xmlns:a16="http://schemas.microsoft.com/office/drawing/2014/main" id="{1515E354-6DA8-293E-5366-4FCC379F89CE}"/>
+                </a:ext>
+              </a:extLst>
+            </p:cNvPr>
+            <p:cNvCxnSpPr>
+              <a:cxnSpLocks/>
+              <a:stCxn id="49" idx="3"/>
+              <a:endCxn id="60" idx="1"/>
+            </p:cNvCxnSpPr>
+            <p:nvPr/>
+          </p:nvCxnSpPr>
+          <p:spPr>
+            <a:xfrm>
+              <a:off x="2929886" y="3253357"/>
+              <a:ext cx="680631" cy="0"/>
+            </a:xfrm>
+            <a:prstGeom prst="line">
+              <a:avLst/>
+            </a:prstGeom>
+            <a:ln w="12700">
+              <a:solidFill>
+                <a:schemeClr val="bg1"/>
+              </a:solidFill>
+            </a:ln>
+          </p:spPr>
+          <p:style>
+            <a:lnRef idx="2">
+              <a:schemeClr val="accent1"/>
+            </a:lnRef>
+            <a:fillRef idx="0">
+              <a:schemeClr val="accent1"/>
+            </a:fillRef>
+            <a:effectRef idx="1">
+              <a:schemeClr val="accent1"/>
+            </a:effectRef>
+            <a:fontRef idx="minor">
+              <a:schemeClr val="tx1"/>
+            </a:fontRef>
+          </p:style>
+        </p:cxnSp>
+        <p:cxnSp>
+          <p:nvCxnSpPr>
+            <p:cNvPr id="14" name="Straight Connector 13">
+              <a:extLst>
+                <a:ext uri="{FF2B5EF4-FFF2-40B4-BE49-F238E27FC236}">
+                  <a16:creationId xmlns:a16="http://schemas.microsoft.com/office/drawing/2014/main" id="{FB2657DE-F9D4-6A96-5B71-8BE2C8C90454}"/>
+                </a:ext>
+              </a:extLst>
+            </p:cNvPr>
+            <p:cNvCxnSpPr>
+              <a:cxnSpLocks/>
+              <a:stCxn id="43" idx="3"/>
+              <a:endCxn id="54" idx="1"/>
+            </p:cNvCxnSpPr>
+            <p:nvPr/>
+          </p:nvCxnSpPr>
+          <p:spPr>
+            <a:xfrm>
+              <a:off x="2929886" y="2947695"/>
+              <a:ext cx="665196" cy="0"/>
+            </a:xfrm>
+            <a:prstGeom prst="line">
+              <a:avLst/>
+            </a:prstGeom>
+            <a:ln w="12700">
+              <a:solidFill>
+                <a:schemeClr val="bg1"/>
+              </a:solidFill>
+              <a:prstDash val="sysDot"/>
+            </a:ln>
+          </p:spPr>
+          <p:style>
+            <a:lnRef idx="2">
+              <a:schemeClr val="accent1"/>
+            </a:lnRef>
+            <a:fillRef idx="0">
+              <a:schemeClr val="accent1"/>
+            </a:fillRef>
+            <a:effectRef idx="1">
+              <a:schemeClr val="accent1"/>
+            </a:effectRef>
+            <a:fontRef idx="minor">
+              <a:schemeClr val="tx1"/>
+            </a:fontRef>
+          </p:style>
+        </p:cxnSp>
+        <p:cxnSp>
+          <p:nvCxnSpPr>
+            <p:cNvPr id="15" name="Straight Connector 14">
+              <a:extLst>
+                <a:ext uri="{FF2B5EF4-FFF2-40B4-BE49-F238E27FC236}">
+                  <a16:creationId xmlns:a16="http://schemas.microsoft.com/office/drawing/2014/main" id="{7B8C0992-8C5B-0CFA-F351-BDE45110AE40}"/>
+                </a:ext>
+              </a:extLst>
+            </p:cNvPr>
+            <p:cNvCxnSpPr>
+              <a:cxnSpLocks/>
+              <a:stCxn id="81" idx="3"/>
+              <a:endCxn id="30" idx="1"/>
+            </p:cNvCxnSpPr>
+            <p:nvPr/>
+          </p:nvCxnSpPr>
+          <p:spPr>
+            <a:xfrm>
+              <a:off x="8737207" y="3246350"/>
+              <a:ext cx="639703" cy="290794"/>
+            </a:xfrm>
+            <a:prstGeom prst="line">
+              <a:avLst/>
+            </a:prstGeom>
+            <a:ln w="12700">
+              <a:solidFill>
+                <a:schemeClr val="bg1"/>
+              </a:solidFill>
+              <a:prstDash val="sysDot"/>
+            </a:ln>
+          </p:spPr>
+          <p:style>
+            <a:lnRef idx="2">
+              <a:schemeClr val="accent1"/>
+            </a:lnRef>
+            <a:fillRef idx="0">
+              <a:schemeClr val="accent1"/>
+            </a:fillRef>
+            <a:effectRef idx="1">
+              <a:schemeClr val="accent1"/>
+            </a:effectRef>
+            <a:fontRef idx="minor">
+              <a:schemeClr val="tx1"/>
+            </a:fontRef>
+          </p:style>
+        </p:cxnSp>
+        <p:cxnSp>
+          <p:nvCxnSpPr>
+            <p:cNvPr id="16" name="Straight Connector 15">
+              <a:extLst>
+                <a:ext uri="{FF2B5EF4-FFF2-40B4-BE49-F238E27FC236}">
+                  <a16:creationId xmlns:a16="http://schemas.microsoft.com/office/drawing/2014/main" id="{A0F3449C-2283-DACE-FB13-38396C4B7FB9}"/>
+                </a:ext>
+              </a:extLst>
+            </p:cNvPr>
+            <p:cNvCxnSpPr>
+              <a:cxnSpLocks/>
+              <a:stCxn id="23" idx="1"/>
+              <a:endCxn id="70" idx="1"/>
+            </p:cNvCxnSpPr>
+            <p:nvPr/>
+          </p:nvCxnSpPr>
+          <p:spPr>
+            <a:xfrm flipV="1">
+              <a:off x="5943801" y="2326685"/>
+              <a:ext cx="554923" cy="166966"/>
+            </a:xfrm>
+            <a:prstGeom prst="line">
+              <a:avLst/>
+            </a:prstGeom>
+            <a:ln w="12700">
+              <a:solidFill>
+                <a:schemeClr val="bg1"/>
+              </a:solidFill>
+            </a:ln>
+          </p:spPr>
+          <p:style>
+            <a:lnRef idx="2">
+              <a:schemeClr val="accent1"/>
+            </a:lnRef>
+            <a:fillRef idx="0">
+              <a:schemeClr val="accent1"/>
+            </a:fillRef>
+            <a:effectRef idx="1">
+              <a:schemeClr val="accent1"/>
+            </a:effectRef>
+            <a:fontRef idx="minor">
+              <a:schemeClr val="tx1"/>
+            </a:fontRef>
+          </p:style>
+        </p:cxnSp>
+        <p:cxnSp>
+          <p:nvCxnSpPr>
+            <p:cNvPr id="17" name="Straight Connector 16">
+              <a:extLst>
+                <a:ext uri="{FF2B5EF4-FFF2-40B4-BE49-F238E27FC236}">
+                  <a16:creationId xmlns:a16="http://schemas.microsoft.com/office/drawing/2014/main" id="{A0F3409B-9BA3-B0DD-2840-A8BFD7EB2EFD}"/>
+                </a:ext>
+              </a:extLst>
+            </p:cNvPr>
+            <p:cNvCxnSpPr>
+              <a:cxnSpLocks/>
+              <a:stCxn id="24" idx="1"/>
+              <a:endCxn id="70" idx="1"/>
+            </p:cNvCxnSpPr>
+            <p:nvPr/>
+          </p:nvCxnSpPr>
+          <p:spPr>
+            <a:xfrm flipV="1">
+              <a:off x="5943801" y="2326685"/>
+              <a:ext cx="554923" cy="780316"/>
+            </a:xfrm>
+            <a:prstGeom prst="line">
+              <a:avLst/>
+            </a:prstGeom>
+            <a:ln w="12700">
+              <a:solidFill>
+                <a:schemeClr val="bg1"/>
+              </a:solidFill>
+            </a:ln>
+          </p:spPr>
+          <p:style>
+            <a:lnRef idx="2">
+              <a:schemeClr val="accent1"/>
+            </a:lnRef>
+            <a:fillRef idx="0">
+              <a:schemeClr val="accent1"/>
+            </a:fillRef>
+            <a:effectRef idx="1">
+              <a:schemeClr val="accent1"/>
+            </a:effectRef>
+            <a:fontRef idx="minor">
+              <a:schemeClr val="tx1"/>
+            </a:fontRef>
+          </p:style>
+        </p:cxnSp>
+        <p:cxnSp>
+          <p:nvCxnSpPr>
+            <p:cNvPr id="18" name="Straight Connector 17">
+              <a:extLst>
+                <a:ext uri="{FF2B5EF4-FFF2-40B4-BE49-F238E27FC236}">
+                  <a16:creationId xmlns:a16="http://schemas.microsoft.com/office/drawing/2014/main" id="{3936E016-28E0-8BF0-9431-64131BB8293D}"/>
+                </a:ext>
+              </a:extLst>
+            </p:cNvPr>
+            <p:cNvCxnSpPr>
+              <a:cxnSpLocks/>
+            </p:cNvCxnSpPr>
+            <p:nvPr/>
+          </p:nvCxnSpPr>
+          <p:spPr>
+            <a:xfrm>
+              <a:off x="5943801" y="2503176"/>
+              <a:ext cx="554158" cy="753082"/>
+            </a:xfrm>
+            <a:prstGeom prst="line">
+              <a:avLst/>
+            </a:prstGeom>
+            <a:ln w="12700">
+              <a:solidFill>
+                <a:schemeClr val="bg1"/>
+              </a:solidFill>
+            </a:ln>
+          </p:spPr>
+          <p:style>
+            <a:lnRef idx="2">
+              <a:schemeClr val="accent1"/>
+            </a:lnRef>
+            <a:fillRef idx="0">
+              <a:schemeClr val="accent1"/>
+            </a:fillRef>
+            <a:effectRef idx="1">
+              <a:schemeClr val="accent1"/>
+            </a:effectRef>
+            <a:fontRef idx="minor">
+              <a:schemeClr val="tx1"/>
+            </a:fontRef>
+          </p:style>
+        </p:cxnSp>
+        <p:cxnSp>
+          <p:nvCxnSpPr>
+            <p:cNvPr id="19" name="Straight Connector 18">
+              <a:extLst>
+                <a:ext uri="{FF2B5EF4-FFF2-40B4-BE49-F238E27FC236}">
+                  <a16:creationId xmlns:a16="http://schemas.microsoft.com/office/drawing/2014/main" id="{E085886D-3B15-DB08-3633-1E75D9D54A31}"/>
+                </a:ext>
+              </a:extLst>
+            </p:cNvPr>
+            <p:cNvCxnSpPr>
+              <a:cxnSpLocks/>
+            </p:cNvCxnSpPr>
+            <p:nvPr/>
+          </p:nvCxnSpPr>
+          <p:spPr>
+            <a:xfrm>
+              <a:off x="5943801" y="3107001"/>
+              <a:ext cx="554158" cy="442679"/>
+            </a:xfrm>
+            <a:prstGeom prst="line">
+              <a:avLst/>
+            </a:prstGeom>
+            <a:ln w="12700">
+              <a:solidFill>
+                <a:schemeClr val="bg1"/>
+              </a:solidFill>
+            </a:ln>
+          </p:spPr>
+          <p:style>
+            <a:lnRef idx="2">
+              <a:schemeClr val="accent1"/>
+            </a:lnRef>
+            <a:fillRef idx="0">
+              <a:schemeClr val="accent1"/>
+            </a:fillRef>
+            <a:effectRef idx="1">
+              <a:schemeClr val="accent1"/>
+            </a:effectRef>
+            <a:fontRef idx="minor">
+              <a:schemeClr val="tx1"/>
+            </a:fontRef>
+          </p:style>
+        </p:cxnSp>
+        <p:cxnSp>
+          <p:nvCxnSpPr>
+            <p:cNvPr id="20" name="Straight Connector 19">
+              <a:extLst>
+                <a:ext uri="{FF2B5EF4-FFF2-40B4-BE49-F238E27FC236}">
+                  <a16:creationId xmlns:a16="http://schemas.microsoft.com/office/drawing/2014/main" id="{464B0A35-8F04-98CF-A4D8-50AD8B8C9AA5}"/>
+                </a:ext>
+              </a:extLst>
+            </p:cNvPr>
+            <p:cNvCxnSpPr>
+              <a:cxnSpLocks/>
+              <a:stCxn id="57" idx="3"/>
+            </p:cNvCxnSpPr>
+            <p:nvPr/>
+          </p:nvCxnSpPr>
+          <p:spPr>
+            <a:xfrm flipV="1">
+              <a:off x="5817331" y="3256258"/>
+              <a:ext cx="680628" cy="302761"/>
+            </a:xfrm>
+            <a:prstGeom prst="line">
+              <a:avLst/>
+            </a:prstGeom>
+            <a:ln w="12700">
+              <a:solidFill>
+                <a:schemeClr val="bg1"/>
+              </a:solidFill>
+            </a:ln>
+          </p:spPr>
+          <p:style>
+            <a:lnRef idx="2">
+              <a:schemeClr val="accent1"/>
+            </a:lnRef>
+            <a:fillRef idx="0">
+              <a:schemeClr val="accent1"/>
+            </a:fillRef>
+            <a:effectRef idx="1">
+              <a:schemeClr val="accent1"/>
+            </a:effectRef>
+            <a:fontRef idx="minor">
+              <a:schemeClr val="tx1"/>
+            </a:fontRef>
+          </p:style>
+        </p:cxnSp>
+        <p:cxnSp>
+          <p:nvCxnSpPr>
+            <p:cNvPr id="21" name="Straight Connector 20">
+              <a:extLst>
+                <a:ext uri="{FF2B5EF4-FFF2-40B4-BE49-F238E27FC236}">
+                  <a16:creationId xmlns:a16="http://schemas.microsoft.com/office/drawing/2014/main" id="{3820C6D9-0E3D-0876-944B-2DAB23175A99}"/>
+                </a:ext>
+              </a:extLst>
+            </p:cNvPr>
+            <p:cNvCxnSpPr>
+              <a:cxnSpLocks/>
+            </p:cNvCxnSpPr>
+            <p:nvPr/>
+          </p:nvCxnSpPr>
+          <p:spPr>
+            <a:xfrm>
+              <a:off x="5943801" y="2493651"/>
+              <a:ext cx="554158" cy="1056029"/>
+            </a:xfrm>
+            <a:prstGeom prst="line">
+              <a:avLst/>
+            </a:prstGeom>
+            <a:ln w="12700">
+              <a:solidFill>
+                <a:schemeClr val="bg1"/>
+              </a:solidFill>
+              <a:prstDash val="sysDot"/>
+            </a:ln>
+          </p:spPr>
+          <p:style>
+            <a:lnRef idx="2">
+              <a:schemeClr val="accent1"/>
+            </a:lnRef>
+            <a:fillRef idx="0">
+              <a:schemeClr val="accent1"/>
+            </a:fillRef>
+            <a:effectRef idx="1">
+              <a:schemeClr val="accent1"/>
+            </a:effectRef>
+            <a:fontRef idx="minor">
+              <a:schemeClr val="tx1"/>
+            </a:fontRef>
+          </p:style>
+        </p:cxnSp>
+        <p:grpSp>
+          <p:nvGrpSpPr>
+            <p:cNvPr id="22" name="Group 21">
+              <a:extLst>
+                <a:ext uri="{FF2B5EF4-FFF2-40B4-BE49-F238E27FC236}">
+                  <a16:creationId xmlns:a16="http://schemas.microsoft.com/office/drawing/2014/main" id="{AA953FD7-0D5A-D260-FEA5-A750D4B0B26B}"/>
+                </a:ext>
+              </a:extLst>
+            </p:cNvPr>
+            <p:cNvGrpSpPr/>
+            <p:nvPr/>
+          </p:nvGrpSpPr>
+          <p:grpSpPr>
+            <a:xfrm>
+              <a:off x="8873989" y="2167447"/>
+              <a:ext cx="2860204" cy="738664"/>
+              <a:chOff x="8962221" y="4222565"/>
+              <a:chExt cx="2860204" cy="738664"/>
+            </a:xfrm>
+          </p:grpSpPr>
+          <p:sp>
+            <p:nvSpPr>
+              <p:cNvPr id="62" name="Rectangle 61">
+                <a:extLst>
+                  <a:ext uri="{FF2B5EF4-FFF2-40B4-BE49-F238E27FC236}">
+                    <a16:creationId xmlns:a16="http://schemas.microsoft.com/office/drawing/2014/main" id="{A59D6F40-6E6F-232E-ECC9-A4EB8C8693B0}"/>
+                  </a:ext>
+                </a:extLst>
+              </p:cNvPr>
+              <p:cNvSpPr/>
+              <p:nvPr/>
+            </p:nvSpPr>
+            <p:spPr>
+              <a:xfrm>
+                <a:off x="8962221" y="4243038"/>
+                <a:ext cx="2787151" cy="705139"/>
+              </a:xfrm>
+              <a:prstGeom prst="rect">
+                <a:avLst/>
+              </a:prstGeom>
+              <a:solidFill>
+                <a:srgbClr val="0D1117"/>
+              </a:solidFill>
+              <a:ln w="12700">
+                <a:solidFill>
+                  <a:schemeClr val="bg1"/>
+                </a:solidFill>
+              </a:ln>
+            </p:spPr>
+            <p:style>
+              <a:lnRef idx="2">
+                <a:schemeClr val="accent1">
+                  <a:shade val="15000"/>
+                </a:schemeClr>
+              </a:lnRef>
+              <a:fillRef idx="1">
+                <a:schemeClr val="accent1"/>
+              </a:fillRef>
+              <a:effectRef idx="0">
+                <a:schemeClr val="accent1"/>
+              </a:effectRef>
+              <a:fontRef idx="minor">
+                <a:schemeClr val="lt1"/>
+              </a:fontRef>
+            </p:style>
+            <p:txBody>
+              <a:bodyPr rtlCol="0" anchor="ctr"/>
+              <a:lstStyle/>
+              <a:p>
+                <a:pPr algn="ctr"/>
+                <a:endParaRPr lang="en-US"/>
+              </a:p>
+            </p:txBody>
+          </p:sp>
+          <p:cxnSp>
+            <p:nvCxnSpPr>
+              <p:cNvPr id="63" name="Straight Connector 62">
+                <a:extLst>
+                  <a:ext uri="{FF2B5EF4-FFF2-40B4-BE49-F238E27FC236}">
+                    <a16:creationId xmlns:a16="http://schemas.microsoft.com/office/drawing/2014/main" id="{D14BEA91-F3A3-C660-8A23-F11C29E56CD0}"/>
+                  </a:ext>
+                </a:extLst>
+              </p:cNvPr>
+              <p:cNvCxnSpPr>
+                <a:cxnSpLocks/>
+              </p:cNvCxnSpPr>
+              <p:nvPr/>
+            </p:nvCxnSpPr>
+            <p:spPr>
+              <a:xfrm>
+                <a:off x="9055446" y="4378844"/>
+                <a:ext cx="210474" cy="0"/>
+              </a:xfrm>
+              <a:prstGeom prst="line">
+                <a:avLst/>
+              </a:prstGeom>
+              <a:ln w="12700">
+                <a:solidFill>
+                  <a:schemeClr val="bg1"/>
+                </a:solidFill>
+              </a:ln>
+            </p:spPr>
+            <p:style>
+              <a:lnRef idx="2">
+                <a:schemeClr val="dk1"/>
+              </a:lnRef>
+              <a:fillRef idx="0">
+                <a:schemeClr val="dk1"/>
+              </a:fillRef>
+              <a:effectRef idx="1">
+                <a:schemeClr val="dk1"/>
+              </a:effectRef>
+              <a:fontRef idx="minor">
+                <a:schemeClr val="tx1"/>
+              </a:fontRef>
+            </p:style>
+          </p:cxnSp>
+          <p:sp>
+            <p:nvSpPr>
+              <p:cNvPr id="64" name="TextBox 63">
+                <a:extLst>
+                  <a:ext uri="{FF2B5EF4-FFF2-40B4-BE49-F238E27FC236}">
+                    <a16:creationId xmlns:a16="http://schemas.microsoft.com/office/drawing/2014/main" id="{87248227-D8ED-62C9-8498-3B65A1AFBC5C}"/>
+                  </a:ext>
+                </a:extLst>
+              </p:cNvPr>
+              <p:cNvSpPr txBox="1"/>
+              <p:nvPr/>
+            </p:nvSpPr>
+            <p:spPr>
+              <a:xfrm>
+                <a:off x="9235317" y="4222565"/>
+                <a:ext cx="2587108" cy="738664"/>
+              </a:xfrm>
+              <a:prstGeom prst="rect">
+                <a:avLst/>
+              </a:prstGeom>
+              <a:noFill/>
+            </p:spPr>
+            <p:txBody>
+              <a:bodyPr wrap="square">
+                <a:spAutoFit/>
+              </a:bodyPr>
+              <a:lstStyle/>
+              <a:p>
+                <a:r>
+                  <a:rPr lang="en-US" sz="1400" dirty="0">
+                    <a:solidFill>
+                      <a:schemeClr val="bg1"/>
+                    </a:solidFill>
+                    <a:latin typeface="Times New Roman" panose="02020603050405020304" pitchFamily="18" charset="0"/>
+                    <a:cs typeface="Times New Roman" panose="02020603050405020304" pitchFamily="18" charset="0"/>
+                  </a:rPr>
+                  <a:t>Supported by default installation</a:t>
+                </a:r>
+                <a:br>
+                  <a:rPr lang="en-US" sz="1400" dirty="0">
+                    <a:solidFill>
+                      <a:schemeClr val="bg1"/>
+                    </a:solidFill>
+                    <a:latin typeface="Times New Roman" panose="02020603050405020304" pitchFamily="18" charset="0"/>
+                    <a:cs typeface="Times New Roman" panose="02020603050405020304" pitchFamily="18" charset="0"/>
+                  </a:rPr>
+                </a:br>
+                <a:r>
+                  <a:rPr lang="en-US" sz="1400" dirty="0">
+                    <a:solidFill>
+                      <a:schemeClr val="bg1"/>
+                    </a:solidFill>
+                    <a:latin typeface="Times New Roman" panose="02020603050405020304" pitchFamily="18" charset="0"/>
+                    <a:cs typeface="Times New Roman" panose="02020603050405020304" pitchFamily="18" charset="0"/>
+                  </a:rPr>
+                  <a:t>Supported after adjusting configs</a:t>
+                </a:r>
+              </a:p>
+              <a:p>
+                <a:r>
+                  <a:rPr lang="en-US" sz="1400" dirty="0">
+                    <a:solidFill>
+                      <a:schemeClr val="bg1"/>
+                    </a:solidFill>
+                    <a:latin typeface="Times New Roman" panose="02020603050405020304" pitchFamily="18" charset="0"/>
+                    <a:cs typeface="Times New Roman" panose="02020603050405020304" pitchFamily="18" charset="0"/>
+                  </a:rPr>
+                  <a:t>Presumably not supported</a:t>
+                </a:r>
+              </a:p>
+            </p:txBody>
+          </p:sp>
+          <p:cxnSp>
+            <p:nvCxnSpPr>
+              <p:cNvPr id="65" name="Straight Connector 64">
+                <a:extLst>
+                  <a:ext uri="{FF2B5EF4-FFF2-40B4-BE49-F238E27FC236}">
+                    <a16:creationId xmlns:a16="http://schemas.microsoft.com/office/drawing/2014/main" id="{D72BCCD9-0ADB-0E7D-4D13-D2CC2EA67358}"/>
+                  </a:ext>
+                </a:extLst>
+              </p:cNvPr>
+              <p:cNvCxnSpPr>
+                <a:cxnSpLocks/>
+              </p:cNvCxnSpPr>
+              <p:nvPr/>
+            </p:nvCxnSpPr>
+            <p:spPr>
+              <a:xfrm>
+                <a:off x="9055446" y="4596433"/>
+                <a:ext cx="210474" cy="0"/>
+              </a:xfrm>
+              <a:prstGeom prst="line">
+                <a:avLst/>
+              </a:prstGeom>
+              <a:ln w="12700">
+                <a:solidFill>
+                  <a:schemeClr val="bg1"/>
+                </a:solidFill>
+                <a:prstDash val="sysDot"/>
+              </a:ln>
+            </p:spPr>
+            <p:style>
+              <a:lnRef idx="2">
+                <a:schemeClr val="dk1"/>
+              </a:lnRef>
+              <a:fillRef idx="0">
+                <a:schemeClr val="dk1"/>
+              </a:fillRef>
+              <a:effectRef idx="1">
+                <a:schemeClr val="dk1"/>
+              </a:effectRef>
+              <a:fontRef idx="minor">
+                <a:schemeClr val="tx1"/>
+              </a:fontRef>
+            </p:style>
+          </p:cxnSp>
+          <p:cxnSp>
+            <p:nvCxnSpPr>
+              <p:cNvPr id="66" name="Straight Connector 65">
+                <a:extLst>
+                  <a:ext uri="{FF2B5EF4-FFF2-40B4-BE49-F238E27FC236}">
+                    <a16:creationId xmlns:a16="http://schemas.microsoft.com/office/drawing/2014/main" id="{665363D5-40A1-F6AF-3318-E7F22DE66076}"/>
+                  </a:ext>
+                </a:extLst>
+              </p:cNvPr>
+              <p:cNvCxnSpPr>
+                <a:cxnSpLocks/>
+              </p:cNvCxnSpPr>
+              <p:nvPr/>
+            </p:nvCxnSpPr>
+            <p:spPr>
+              <a:xfrm>
+                <a:off x="9055446" y="4814021"/>
+                <a:ext cx="210474" cy="0"/>
+              </a:xfrm>
+              <a:prstGeom prst="line">
+                <a:avLst/>
+              </a:prstGeom>
+              <a:ln w="12700">
+                <a:solidFill>
+                  <a:srgbClr val="FF7B61"/>
+                </a:solidFill>
+                <a:prstDash val="sysDot"/>
+              </a:ln>
+            </p:spPr>
+            <p:style>
+              <a:lnRef idx="2">
+                <a:schemeClr val="dk1"/>
+              </a:lnRef>
+              <a:fillRef idx="0">
+                <a:schemeClr val="dk1"/>
+              </a:fillRef>
+              <a:effectRef idx="1">
+                <a:schemeClr val="dk1"/>
+              </a:effectRef>
+              <a:fontRef idx="minor">
+                <a:schemeClr val="tx1"/>
+              </a:fontRef>
+            </p:style>
+          </p:cxnSp>
+        </p:grpSp>
+        <p:sp>
+          <p:nvSpPr>
+            <p:cNvPr id="23" name="Right Brace 22">
+              <a:extLst>
+                <a:ext uri="{FF2B5EF4-FFF2-40B4-BE49-F238E27FC236}">
+                  <a16:creationId xmlns:a16="http://schemas.microsoft.com/office/drawing/2014/main" id="{A7991ECF-F9B7-7535-37FB-A57CED3BF203}"/>
+                </a:ext>
+              </a:extLst>
+            </p:cNvPr>
+            <p:cNvSpPr/>
+            <p:nvPr/>
+          </p:nvSpPr>
+          <p:spPr>
+            <a:xfrm>
+              <a:off x="5861045" y="2206203"/>
+              <a:ext cx="82756" cy="574896"/>
+            </a:xfrm>
+            <a:prstGeom prst="rightBrace">
+              <a:avLst>
+                <a:gd name="adj1" fmla="val 88901"/>
+                <a:gd name="adj2" fmla="val 50000"/>
+              </a:avLst>
+            </a:prstGeom>
+            <a:ln w="12700">
+              <a:solidFill>
+                <a:schemeClr val="bg1"/>
+              </a:solidFill>
+            </a:ln>
+          </p:spPr>
+          <p:style>
+            <a:lnRef idx="2">
+              <a:schemeClr val="accent1"/>
+            </a:lnRef>
+            <a:fillRef idx="0">
+              <a:schemeClr val="accent1"/>
+            </a:fillRef>
+            <a:effectRef idx="1">
+              <a:schemeClr val="accent1"/>
+            </a:effectRef>
+            <a:fontRef idx="minor">
+              <a:schemeClr val="tx1"/>
+            </a:fontRef>
+          </p:style>
+          <p:txBody>
+            <a:bodyPr rtlCol="0" anchor="ctr"/>
+            <a:lstStyle/>
+            <a:p>
+              <a:pPr algn="ctr"/>
+              <a:endParaRPr lang="en-US"/>
+            </a:p>
+          </p:txBody>
+        </p:sp>
+        <p:sp>
+          <p:nvSpPr>
+            <p:cNvPr id="24" name="Right Brace 23">
+              <a:extLst>
+                <a:ext uri="{FF2B5EF4-FFF2-40B4-BE49-F238E27FC236}">
+                  <a16:creationId xmlns:a16="http://schemas.microsoft.com/office/drawing/2014/main" id="{20C8E6D4-A40E-D435-BF8F-F8C003ACF650}"/>
+                </a:ext>
+              </a:extLst>
+            </p:cNvPr>
+            <p:cNvSpPr/>
+            <p:nvPr/>
+          </p:nvSpPr>
+          <p:spPr>
+            <a:xfrm>
+              <a:off x="5861045" y="2819553"/>
+              <a:ext cx="82756" cy="574896"/>
+            </a:xfrm>
+            <a:prstGeom prst="rightBrace">
+              <a:avLst>
+                <a:gd name="adj1" fmla="val 88901"/>
+                <a:gd name="adj2" fmla="val 50000"/>
+              </a:avLst>
+            </a:prstGeom>
+            <a:ln w="12700">
+              <a:solidFill>
+                <a:schemeClr val="bg1"/>
+              </a:solidFill>
+            </a:ln>
+          </p:spPr>
+          <p:style>
+            <a:lnRef idx="2">
+              <a:schemeClr val="accent1"/>
+            </a:lnRef>
+            <a:fillRef idx="0">
+              <a:schemeClr val="accent1"/>
+            </a:fillRef>
+            <a:effectRef idx="1">
+              <a:schemeClr val="accent1"/>
+            </a:effectRef>
+            <a:fontRef idx="minor">
+              <a:schemeClr val="tx1"/>
+            </a:fontRef>
+          </p:style>
+          <p:txBody>
+            <a:bodyPr rtlCol="0" anchor="ctr"/>
+            <a:lstStyle/>
+            <a:p>
+              <a:pPr algn="ctr"/>
+              <a:endParaRPr lang="en-US"/>
+            </a:p>
+          </p:txBody>
+        </p:sp>
+        <p:grpSp>
+          <p:nvGrpSpPr>
+            <p:cNvPr id="25" name="Group 24">
+              <a:extLst>
+                <a:ext uri="{FF2B5EF4-FFF2-40B4-BE49-F238E27FC236}">
+                  <a16:creationId xmlns:a16="http://schemas.microsoft.com/office/drawing/2014/main" id="{7A087A7C-EBC3-7D25-0193-6488C85E22BB}"/>
+                </a:ext>
+              </a:extLst>
+            </p:cNvPr>
+            <p:cNvGrpSpPr/>
+            <p:nvPr/>
+          </p:nvGrpSpPr>
+          <p:grpSpPr>
+            <a:xfrm>
+              <a:off x="3594298" y="2171378"/>
+              <a:ext cx="2263961" cy="1844033"/>
+              <a:chOff x="3916949" y="3691197"/>
+              <a:chExt cx="2263961" cy="1844033"/>
+            </a:xfrm>
+          </p:grpSpPr>
+          <p:sp>
+            <p:nvSpPr>
+              <p:cNvPr id="51" name="Rectangle: Rounded Corners 50">
+                <a:extLst>
+                  <a:ext uri="{FF2B5EF4-FFF2-40B4-BE49-F238E27FC236}">
+                    <a16:creationId xmlns:a16="http://schemas.microsoft.com/office/drawing/2014/main" id="{B3D7257C-B989-E6D2-FBC9-EEE63B1B672D}"/>
+                  </a:ext>
+                </a:extLst>
+              </p:cNvPr>
+              <p:cNvSpPr/>
+              <p:nvPr/>
+            </p:nvSpPr>
+            <p:spPr>
+              <a:xfrm>
+                <a:off x="3916949" y="3692460"/>
+                <a:ext cx="2239249" cy="1531642"/>
+              </a:xfrm>
+              <a:prstGeom prst="roundRect">
+                <a:avLst>
+                  <a:gd name="adj" fmla="val 5859"/>
+                </a:avLst>
+              </a:prstGeom>
+              <a:solidFill>
+                <a:srgbClr val="262626"/>
+              </a:solidFill>
+              <a:ln w="28575">
+                <a:noFill/>
+              </a:ln>
+            </p:spPr>
+            <p:style>
+              <a:lnRef idx="2">
+                <a:schemeClr val="accent1">
+                  <a:shade val="15000"/>
+                </a:schemeClr>
+              </a:lnRef>
+              <a:fillRef idx="1">
+                <a:schemeClr val="accent1"/>
+              </a:fillRef>
+              <a:effectRef idx="0">
+                <a:schemeClr val="accent1"/>
+              </a:effectRef>
+              <a:fontRef idx="minor">
+                <a:schemeClr val="lt1"/>
+              </a:fontRef>
+            </p:style>
+            <p:txBody>
+              <a:bodyPr rtlCol="0" anchor="ctr"/>
+              <a:lstStyle/>
+              <a:p>
+                <a:pPr algn="ctr"/>
+                <a:endParaRPr lang="en-US" dirty="0">
+                  <a:latin typeface="Times New Roman" panose="02020603050405020304" pitchFamily="18" charset="0"/>
+                  <a:cs typeface="Times New Roman" panose="02020603050405020304" pitchFamily="18" charset="0"/>
+                </a:endParaRPr>
+              </a:p>
+            </p:txBody>
+          </p:sp>
+          <p:sp>
+            <p:nvSpPr>
+              <p:cNvPr id="52" name="Rectangle: Top Corners Rounded 51">
+                <a:extLst>
+                  <a:ext uri="{FF2B5EF4-FFF2-40B4-BE49-F238E27FC236}">
+                    <a16:creationId xmlns:a16="http://schemas.microsoft.com/office/drawing/2014/main" id="{DBC9B431-FC85-98F1-7802-3B3651BE6F8D}"/>
+                  </a:ext>
+                </a:extLst>
+              </p:cNvPr>
+              <p:cNvSpPr/>
+              <p:nvPr/>
+            </p:nvSpPr>
+            <p:spPr>
+              <a:xfrm rot="10800000">
+                <a:off x="3916952" y="4613172"/>
+                <a:ext cx="2239248" cy="323588"/>
+              </a:xfrm>
+              <a:prstGeom prst="round2SameRect">
+                <a:avLst>
+                  <a:gd name="adj1" fmla="val 28890"/>
+                  <a:gd name="adj2" fmla="val 0"/>
+                </a:avLst>
+              </a:prstGeom>
+              <a:solidFill>
+                <a:srgbClr val="F2F2F2"/>
+              </a:solidFill>
+              <a:ln>
+                <a:noFill/>
+              </a:ln>
+            </p:spPr>
+            <p:style>
+              <a:lnRef idx="2">
+                <a:schemeClr val="accent1">
+                  <a:shade val="15000"/>
+                </a:schemeClr>
+              </a:lnRef>
+              <a:fillRef idx="1">
+                <a:schemeClr val="accent1"/>
+              </a:fillRef>
+              <a:effectRef idx="0">
+                <a:schemeClr val="accent1"/>
+              </a:effectRef>
+              <a:fontRef idx="minor">
+                <a:schemeClr val="lt1"/>
+              </a:fontRef>
+            </p:style>
+            <p:txBody>
+              <a:bodyPr rtlCol="0" anchor="ctr"/>
+              <a:lstStyle/>
+              <a:p>
+                <a:pPr algn="ctr"/>
+                <a:endParaRPr lang="en-US"/>
+              </a:p>
+            </p:txBody>
+          </p:sp>
+          <p:sp>
+            <p:nvSpPr>
+              <p:cNvPr id="53" name="Rectangle 52">
+                <a:extLst>
+                  <a:ext uri="{FF2B5EF4-FFF2-40B4-BE49-F238E27FC236}">
+                    <a16:creationId xmlns:a16="http://schemas.microsoft.com/office/drawing/2014/main" id="{19AB0D5D-41E1-ECDD-6800-6D04A0A25D57}"/>
+                  </a:ext>
+                </a:extLst>
+              </p:cNvPr>
+              <p:cNvSpPr/>
+              <p:nvPr/>
+            </p:nvSpPr>
+            <p:spPr>
+              <a:xfrm>
+                <a:off x="3916951" y="3990559"/>
+                <a:ext cx="2239249" cy="323587"/>
+              </a:xfrm>
+              <a:prstGeom prst="rect">
+                <a:avLst/>
+              </a:prstGeom>
+              <a:solidFill>
+                <a:srgbClr val="3A3A3A"/>
+              </a:solidFill>
+              <a:ln>
+                <a:noFill/>
+              </a:ln>
+            </p:spPr>
+            <p:style>
+              <a:lnRef idx="2">
+                <a:schemeClr val="accent1">
+                  <a:shade val="15000"/>
+                </a:schemeClr>
+              </a:lnRef>
+              <a:fillRef idx="1">
+                <a:schemeClr val="accent1"/>
+              </a:fillRef>
+              <a:effectRef idx="0">
+                <a:schemeClr val="accent1"/>
+              </a:effectRef>
+              <a:fontRef idx="minor">
+                <a:schemeClr val="lt1"/>
+              </a:fontRef>
+            </p:style>
+            <p:txBody>
+              <a:bodyPr rtlCol="0" anchor="ctr"/>
+              <a:lstStyle/>
+              <a:p>
+                <a:pPr algn="ctr"/>
+                <a:endParaRPr lang="en-US"/>
+              </a:p>
+            </p:txBody>
+          </p:sp>
+          <p:sp>
+            <p:nvSpPr>
+              <p:cNvPr id="54" name="TextBox 53">
+                <a:extLst>
+                  <a:ext uri="{FF2B5EF4-FFF2-40B4-BE49-F238E27FC236}">
+                    <a16:creationId xmlns:a16="http://schemas.microsoft.com/office/drawing/2014/main" id="{A40C2853-5546-FC7B-38EC-F30D79A444C7}"/>
+                  </a:ext>
+                </a:extLst>
+              </p:cNvPr>
+              <p:cNvSpPr txBox="1"/>
+              <p:nvPr/>
+            </p:nvSpPr>
+            <p:spPr>
+              <a:xfrm>
+                <a:off x="3917733" y="4313625"/>
+                <a:ext cx="2237684" cy="307777"/>
+              </a:xfrm>
+              <a:prstGeom prst="rect">
+                <a:avLst/>
+              </a:prstGeom>
+              <a:noFill/>
+            </p:spPr>
+            <p:txBody>
+              <a:bodyPr wrap="square">
+                <a:spAutoFit/>
+              </a:bodyPr>
+              <a:lstStyle/>
+              <a:p>
+                <a:pPr algn="ctr"/>
+                <a:r>
+                  <a:rPr lang="en-US" sz="1400" dirty="0">
+                    <a:solidFill>
+                      <a:schemeClr val="bg1"/>
+                    </a:solidFill>
+                    <a:latin typeface="Times New Roman" panose="02020603050405020304" pitchFamily="18" charset="0"/>
+                    <a:cs typeface="Times New Roman" panose="02020603050405020304" pitchFamily="18" charset="0"/>
+                  </a:rPr>
+                  <a:t>OAI : USRP</a:t>
+                </a:r>
+              </a:p>
+            </p:txBody>
+          </p:sp>
+          <p:sp>
+            <p:nvSpPr>
+              <p:cNvPr id="55" name="TextBox 54">
+                <a:extLst>
+                  <a:ext uri="{FF2B5EF4-FFF2-40B4-BE49-F238E27FC236}">
+                    <a16:creationId xmlns:a16="http://schemas.microsoft.com/office/drawing/2014/main" id="{63618131-BAB2-A494-D3FA-1003A22DEB82}"/>
+                  </a:ext>
+                </a:extLst>
+              </p:cNvPr>
+              <p:cNvSpPr txBox="1"/>
+              <p:nvPr/>
+            </p:nvSpPr>
+            <p:spPr>
+              <a:xfrm>
+                <a:off x="3933168" y="4007963"/>
+                <a:ext cx="2206814" cy="307777"/>
+              </a:xfrm>
+              <a:prstGeom prst="rect">
+                <a:avLst/>
+              </a:prstGeom>
+              <a:noFill/>
+            </p:spPr>
+            <p:txBody>
+              <a:bodyPr wrap="square">
+                <a:spAutoFit/>
+              </a:bodyPr>
+              <a:lstStyle/>
+              <a:p>
+                <a:pPr algn="ctr"/>
+                <a:r>
+                  <a:rPr lang="en-US" sz="1400" dirty="0" err="1">
+                    <a:solidFill>
+                      <a:schemeClr val="bg1"/>
+                    </a:solidFill>
+                    <a:latin typeface="Times New Roman" panose="02020603050405020304" pitchFamily="18" charset="0"/>
+                    <a:cs typeface="Times New Roman" panose="02020603050405020304" pitchFamily="18" charset="0"/>
+                  </a:rPr>
+                  <a:t>srsRAN_Project</a:t>
+                </a:r>
+                <a:r>
+                  <a:rPr lang="en-US" sz="1400" dirty="0">
+                    <a:solidFill>
+                      <a:schemeClr val="bg1"/>
+                    </a:solidFill>
+                    <a:latin typeface="Times New Roman" panose="02020603050405020304" pitchFamily="18" charset="0"/>
+                    <a:cs typeface="Times New Roman" panose="02020603050405020304" pitchFamily="18" charset="0"/>
+                  </a:rPr>
+                  <a:t> : </a:t>
+                </a:r>
+                <a:r>
+                  <a:rPr lang="en-US" sz="1400" dirty="0" err="1">
+                    <a:solidFill>
+                      <a:schemeClr val="bg1"/>
+                    </a:solidFill>
+                    <a:latin typeface="Times New Roman" panose="02020603050405020304" pitchFamily="18" charset="0"/>
+                    <a:cs typeface="Times New Roman" panose="02020603050405020304" pitchFamily="18" charset="0"/>
+                  </a:rPr>
+                  <a:t>ZeroMQ</a:t>
+                </a:r>
+                <a:endParaRPr lang="en-US" sz="1400" dirty="0">
+                  <a:solidFill>
+                    <a:schemeClr val="bg1"/>
+                  </a:solidFill>
+                  <a:latin typeface="Times New Roman" panose="02020603050405020304" pitchFamily="18" charset="0"/>
+                  <a:cs typeface="Times New Roman" panose="02020603050405020304" pitchFamily="18" charset="0"/>
+                </a:endParaRPr>
+              </a:p>
+            </p:txBody>
+          </p:sp>
+          <p:sp>
+            <p:nvSpPr>
+              <p:cNvPr id="56" name="TextBox 55">
+                <a:extLst>
+                  <a:ext uri="{FF2B5EF4-FFF2-40B4-BE49-F238E27FC236}">
+                    <a16:creationId xmlns:a16="http://schemas.microsoft.com/office/drawing/2014/main" id="{30B92E24-1934-475B-8C5E-87A7F5F0D58C}"/>
+                  </a:ext>
+                </a:extLst>
+              </p:cNvPr>
+              <p:cNvSpPr txBox="1"/>
+              <p:nvPr/>
+            </p:nvSpPr>
+            <p:spPr>
+              <a:xfrm>
+                <a:off x="3929357" y="3702301"/>
+                <a:ext cx="2206816" cy="307777"/>
+              </a:xfrm>
+              <a:prstGeom prst="rect">
+                <a:avLst/>
+              </a:prstGeom>
+              <a:noFill/>
+            </p:spPr>
+            <p:txBody>
+              <a:bodyPr wrap="square">
+                <a:spAutoFit/>
+              </a:bodyPr>
+              <a:lstStyle/>
+              <a:p>
+                <a:pPr algn="ctr"/>
+                <a:r>
+                  <a:rPr lang="en-US" sz="1400" dirty="0" err="1">
+                    <a:solidFill>
+                      <a:schemeClr val="bg1"/>
+                    </a:solidFill>
+                    <a:latin typeface="Times New Roman" panose="02020603050405020304" pitchFamily="18" charset="0"/>
+                    <a:cs typeface="Times New Roman" panose="02020603050405020304" pitchFamily="18" charset="0"/>
+                  </a:rPr>
+                  <a:t>srsRAN_Project</a:t>
+                </a:r>
+                <a:r>
+                  <a:rPr lang="en-US" sz="1400" dirty="0">
+                    <a:solidFill>
+                      <a:schemeClr val="bg1"/>
+                    </a:solidFill>
+                    <a:latin typeface="Times New Roman" panose="02020603050405020304" pitchFamily="18" charset="0"/>
+                    <a:cs typeface="Times New Roman" panose="02020603050405020304" pitchFamily="18" charset="0"/>
+                  </a:rPr>
+                  <a:t> : USRP</a:t>
+                </a:r>
+              </a:p>
+            </p:txBody>
+          </p:sp>
+          <p:sp>
+            <p:nvSpPr>
+              <p:cNvPr id="57" name="TextBox 56">
+                <a:extLst>
+                  <a:ext uri="{FF2B5EF4-FFF2-40B4-BE49-F238E27FC236}">
+                    <a16:creationId xmlns:a16="http://schemas.microsoft.com/office/drawing/2014/main" id="{0B8C8F01-0D4B-E516-9B28-D04D18700C28}"/>
+                  </a:ext>
+                </a:extLst>
+              </p:cNvPr>
+              <p:cNvSpPr txBox="1"/>
+              <p:nvPr/>
+            </p:nvSpPr>
+            <p:spPr>
+              <a:xfrm>
+                <a:off x="3933168" y="4924949"/>
+                <a:ext cx="2206814" cy="307777"/>
+              </a:xfrm>
+              <a:prstGeom prst="rect">
+                <a:avLst/>
+              </a:prstGeom>
+              <a:noFill/>
+            </p:spPr>
+            <p:txBody>
+              <a:bodyPr wrap="square">
+                <a:spAutoFit/>
+              </a:bodyPr>
+              <a:lstStyle/>
+              <a:p>
+                <a:pPr algn="ctr"/>
+                <a:r>
+                  <a:rPr lang="en-US" sz="1400" dirty="0">
+                    <a:solidFill>
+                      <a:schemeClr val="bg1"/>
+                    </a:solidFill>
+                    <a:latin typeface="Times New Roman" panose="02020603050405020304" pitchFamily="18" charset="0"/>
+                    <a:cs typeface="Times New Roman" panose="02020603050405020304" pitchFamily="18" charset="0"/>
+                  </a:rPr>
+                  <a:t>O-RAN SC : E2 Simulator</a:t>
+                </a:r>
+              </a:p>
+            </p:txBody>
+          </p:sp>
+          <p:sp>
+            <p:nvSpPr>
+              <p:cNvPr id="58" name="TextBox 57">
+                <a:extLst>
+                  <a:ext uri="{FF2B5EF4-FFF2-40B4-BE49-F238E27FC236}">
+                    <a16:creationId xmlns:a16="http://schemas.microsoft.com/office/drawing/2014/main" id="{E1692A11-3785-2962-B861-CAA171F11677}"/>
+                  </a:ext>
+                </a:extLst>
+              </p:cNvPr>
+              <p:cNvSpPr txBox="1"/>
+              <p:nvPr/>
+            </p:nvSpPr>
+            <p:spPr>
+              <a:xfrm>
+                <a:off x="3941661" y="5227453"/>
+                <a:ext cx="2239249" cy="307777"/>
+              </a:xfrm>
+              <a:prstGeom prst="rect">
+                <a:avLst/>
+              </a:prstGeom>
+              <a:noFill/>
+            </p:spPr>
+            <p:txBody>
+              <a:bodyPr wrap="square">
+                <a:spAutoFit/>
+              </a:bodyPr>
+              <a:lstStyle/>
+              <a:p>
+                <a:pPr algn="ctr"/>
+                <a:r>
+                  <a:rPr lang="en-US" sz="1400" b="1" dirty="0">
+                    <a:solidFill>
+                      <a:schemeClr val="bg1"/>
+                    </a:solidFill>
+                    <a:latin typeface="Times New Roman" panose="02020603050405020304" pitchFamily="18" charset="0"/>
+                    <a:cs typeface="Times New Roman" panose="02020603050405020304" pitchFamily="18" charset="0"/>
+                  </a:rPr>
+                  <a:t>Next Generation Node B</a:t>
+                </a:r>
+              </a:p>
+            </p:txBody>
+          </p:sp>
+          <p:sp>
+            <p:nvSpPr>
+              <p:cNvPr id="59" name="Rectangle 58">
+                <a:extLst>
+                  <a:ext uri="{FF2B5EF4-FFF2-40B4-BE49-F238E27FC236}">
+                    <a16:creationId xmlns:a16="http://schemas.microsoft.com/office/drawing/2014/main" id="{31BF9939-6DC0-9767-200A-9AA00ED4DFCB}"/>
+                  </a:ext>
+                </a:extLst>
+              </p:cNvPr>
+              <p:cNvSpPr/>
+              <p:nvPr/>
+            </p:nvSpPr>
+            <p:spPr>
+              <a:xfrm>
+                <a:off x="3916950" y="4607247"/>
+                <a:ext cx="2239249" cy="331887"/>
+              </a:xfrm>
+              <a:prstGeom prst="rect">
+                <a:avLst/>
+              </a:prstGeom>
+              <a:solidFill>
+                <a:srgbClr val="3A3A3A"/>
+              </a:solidFill>
+              <a:ln>
+                <a:noFill/>
+              </a:ln>
+            </p:spPr>
+            <p:style>
+              <a:lnRef idx="2">
+                <a:schemeClr val="accent1">
+                  <a:shade val="15000"/>
+                </a:schemeClr>
+              </a:lnRef>
+              <a:fillRef idx="1">
+                <a:schemeClr val="accent1"/>
+              </a:fillRef>
+              <a:effectRef idx="0">
+                <a:schemeClr val="accent1"/>
+              </a:effectRef>
+              <a:fontRef idx="minor">
+                <a:schemeClr val="lt1"/>
+              </a:fontRef>
+            </p:style>
+            <p:txBody>
+              <a:bodyPr rtlCol="0" anchor="ctr"/>
+              <a:lstStyle/>
+              <a:p>
+                <a:pPr algn="ctr"/>
+                <a:endParaRPr lang="en-US"/>
+              </a:p>
+            </p:txBody>
+          </p:sp>
+          <p:sp>
+            <p:nvSpPr>
+              <p:cNvPr id="60" name="TextBox 59">
+                <a:extLst>
+                  <a:ext uri="{FF2B5EF4-FFF2-40B4-BE49-F238E27FC236}">
+                    <a16:creationId xmlns:a16="http://schemas.microsoft.com/office/drawing/2014/main" id="{590EF321-DED3-3E92-2D8E-023FCA46B884}"/>
+                  </a:ext>
+                </a:extLst>
+              </p:cNvPr>
+              <p:cNvSpPr txBox="1"/>
+              <p:nvPr/>
+            </p:nvSpPr>
+            <p:spPr>
+              <a:xfrm>
+                <a:off x="3933168" y="4619287"/>
+                <a:ext cx="2206814" cy="307777"/>
+              </a:xfrm>
+              <a:prstGeom prst="rect">
+                <a:avLst/>
+              </a:prstGeom>
+              <a:noFill/>
+            </p:spPr>
+            <p:txBody>
+              <a:bodyPr wrap="square">
+                <a:spAutoFit/>
+              </a:bodyPr>
+              <a:lstStyle/>
+              <a:p>
+                <a:pPr algn="ctr"/>
+                <a:r>
+                  <a:rPr lang="en-US" sz="1400" dirty="0">
+                    <a:solidFill>
+                      <a:schemeClr val="bg1"/>
+                    </a:solidFill>
+                    <a:latin typeface="Times New Roman" panose="02020603050405020304" pitchFamily="18" charset="0"/>
+                    <a:cs typeface="Times New Roman" panose="02020603050405020304" pitchFamily="18" charset="0"/>
+                  </a:rPr>
+                  <a:t>OAI : RF Simulator</a:t>
+                </a:r>
+              </a:p>
+            </p:txBody>
+          </p:sp>
+          <p:sp>
+            <p:nvSpPr>
+              <p:cNvPr id="61" name="Rectangle: Rounded Corners 60">
+                <a:extLst>
+                  <a:ext uri="{FF2B5EF4-FFF2-40B4-BE49-F238E27FC236}">
+                    <a16:creationId xmlns:a16="http://schemas.microsoft.com/office/drawing/2014/main" id="{26FE37A3-1994-C0D5-B06F-E32D4E2A9E9D}"/>
+                  </a:ext>
+                </a:extLst>
+              </p:cNvPr>
+              <p:cNvSpPr/>
+              <p:nvPr/>
+            </p:nvSpPr>
+            <p:spPr>
+              <a:xfrm>
+                <a:off x="3916951" y="3691197"/>
+                <a:ext cx="2239249" cy="1534218"/>
+              </a:xfrm>
+              <a:prstGeom prst="roundRect">
+                <a:avLst>
+                  <a:gd name="adj" fmla="val 5819"/>
+                </a:avLst>
+              </a:prstGeom>
+              <a:noFill/>
+              <a:ln w="12700">
+                <a:solidFill>
+                  <a:schemeClr val="bg1"/>
+                </a:solidFill>
+              </a:ln>
+            </p:spPr>
+            <p:style>
+              <a:lnRef idx="2">
+                <a:schemeClr val="accent1">
+                  <a:shade val="15000"/>
+                </a:schemeClr>
+              </a:lnRef>
+              <a:fillRef idx="1">
+                <a:schemeClr val="accent1"/>
+              </a:fillRef>
+              <a:effectRef idx="0">
+                <a:schemeClr val="accent1"/>
+              </a:effectRef>
+              <a:fontRef idx="minor">
+                <a:schemeClr val="lt1"/>
+              </a:fontRef>
+            </p:style>
+            <p:txBody>
+              <a:bodyPr rtlCol="0" anchor="ctr"/>
+              <a:lstStyle/>
+              <a:p>
+                <a:pPr algn="ctr"/>
+                <a:endParaRPr lang="en-US" dirty="0">
+                  <a:latin typeface="Times New Roman" panose="02020603050405020304" pitchFamily="18" charset="0"/>
+                  <a:cs typeface="Times New Roman" panose="02020603050405020304" pitchFamily="18" charset="0"/>
+                </a:endParaRPr>
+              </a:p>
+            </p:txBody>
+          </p:sp>
+        </p:grpSp>
+        <p:grpSp>
+          <p:nvGrpSpPr>
+            <p:cNvPr id="26" name="Group 25">
+              <a:extLst>
+                <a:ext uri="{FF2B5EF4-FFF2-40B4-BE49-F238E27FC236}">
+                  <a16:creationId xmlns:a16="http://schemas.microsoft.com/office/drawing/2014/main" id="{738FE746-EA93-3F84-2E49-EB596828B714}"/>
+                </a:ext>
+              </a:extLst>
+            </p:cNvPr>
+            <p:cNvGrpSpPr/>
+            <p:nvPr/>
+          </p:nvGrpSpPr>
+          <p:grpSpPr>
+            <a:xfrm>
+              <a:off x="690637" y="2171378"/>
+              <a:ext cx="2263961" cy="1844033"/>
+              <a:chOff x="3916949" y="3691197"/>
+              <a:chExt cx="2263961" cy="1844033"/>
+            </a:xfrm>
+          </p:grpSpPr>
+          <p:sp>
+            <p:nvSpPr>
+              <p:cNvPr id="40" name="Rectangle: Rounded Corners 39">
+                <a:extLst>
+                  <a:ext uri="{FF2B5EF4-FFF2-40B4-BE49-F238E27FC236}">
+                    <a16:creationId xmlns:a16="http://schemas.microsoft.com/office/drawing/2014/main" id="{06932116-A947-404E-B203-2C38A8952496}"/>
+                  </a:ext>
+                </a:extLst>
+              </p:cNvPr>
+              <p:cNvSpPr/>
+              <p:nvPr/>
+            </p:nvSpPr>
+            <p:spPr>
+              <a:xfrm>
+                <a:off x="3916949" y="3692460"/>
+                <a:ext cx="2239249" cy="1531642"/>
+              </a:xfrm>
+              <a:prstGeom prst="roundRect">
+                <a:avLst>
+                  <a:gd name="adj" fmla="val 5859"/>
+                </a:avLst>
+              </a:prstGeom>
+              <a:solidFill>
+                <a:srgbClr val="262626"/>
+              </a:solidFill>
+              <a:ln w="28575">
+                <a:noFill/>
+              </a:ln>
+            </p:spPr>
+            <p:style>
+              <a:lnRef idx="2">
+                <a:schemeClr val="accent1">
+                  <a:shade val="15000"/>
+                </a:schemeClr>
+              </a:lnRef>
+              <a:fillRef idx="1">
+                <a:schemeClr val="accent1"/>
+              </a:fillRef>
+              <a:effectRef idx="0">
+                <a:schemeClr val="accent1"/>
+              </a:effectRef>
+              <a:fontRef idx="minor">
+                <a:schemeClr val="lt1"/>
+              </a:fontRef>
+            </p:style>
+            <p:txBody>
+              <a:bodyPr rtlCol="0" anchor="ctr"/>
+              <a:lstStyle/>
+              <a:p>
+                <a:pPr algn="ctr"/>
+                <a:endParaRPr lang="en-US" dirty="0">
+                  <a:latin typeface="Times New Roman" panose="02020603050405020304" pitchFamily="18" charset="0"/>
+                  <a:cs typeface="Times New Roman" panose="02020603050405020304" pitchFamily="18" charset="0"/>
+                </a:endParaRPr>
+              </a:p>
+            </p:txBody>
+          </p:sp>
+          <p:sp>
+            <p:nvSpPr>
+              <p:cNvPr id="41" name="Rectangle: Top Corners Rounded 40">
+                <a:extLst>
+                  <a:ext uri="{FF2B5EF4-FFF2-40B4-BE49-F238E27FC236}">
+                    <a16:creationId xmlns:a16="http://schemas.microsoft.com/office/drawing/2014/main" id="{AB9DCAB6-A723-7C47-DA69-4A1D35F5520F}"/>
+                  </a:ext>
+                </a:extLst>
+              </p:cNvPr>
+              <p:cNvSpPr/>
+              <p:nvPr/>
+            </p:nvSpPr>
+            <p:spPr>
+              <a:xfrm rot="10800000">
+                <a:off x="3916952" y="4613172"/>
+                <a:ext cx="2239248" cy="323588"/>
+              </a:xfrm>
+              <a:prstGeom prst="round2SameRect">
+                <a:avLst>
+                  <a:gd name="adj1" fmla="val 28890"/>
+                  <a:gd name="adj2" fmla="val 0"/>
+                </a:avLst>
+              </a:prstGeom>
+              <a:solidFill>
+                <a:srgbClr val="F2F2F2"/>
+              </a:solidFill>
+              <a:ln>
+                <a:noFill/>
+              </a:ln>
+            </p:spPr>
+            <p:style>
+              <a:lnRef idx="2">
+                <a:schemeClr val="accent1">
+                  <a:shade val="15000"/>
+                </a:schemeClr>
+              </a:lnRef>
+              <a:fillRef idx="1">
+                <a:schemeClr val="accent1"/>
+              </a:fillRef>
+              <a:effectRef idx="0">
+                <a:schemeClr val="accent1"/>
+              </a:effectRef>
+              <a:fontRef idx="minor">
+                <a:schemeClr val="lt1"/>
+              </a:fontRef>
+            </p:style>
+            <p:txBody>
+              <a:bodyPr rtlCol="0" anchor="ctr"/>
+              <a:lstStyle/>
+              <a:p>
+                <a:pPr algn="ctr"/>
+                <a:endParaRPr lang="en-US"/>
+              </a:p>
+            </p:txBody>
+          </p:sp>
+          <p:sp>
+            <p:nvSpPr>
+              <p:cNvPr id="42" name="Rectangle 41">
+                <a:extLst>
+                  <a:ext uri="{FF2B5EF4-FFF2-40B4-BE49-F238E27FC236}">
+                    <a16:creationId xmlns:a16="http://schemas.microsoft.com/office/drawing/2014/main" id="{059024B3-E725-8F4D-57EF-E266332C0F1D}"/>
+                  </a:ext>
+                </a:extLst>
+              </p:cNvPr>
+              <p:cNvSpPr/>
+              <p:nvPr/>
+            </p:nvSpPr>
+            <p:spPr>
+              <a:xfrm>
+                <a:off x="3916951" y="3990559"/>
+                <a:ext cx="2239249" cy="323587"/>
+              </a:xfrm>
+              <a:prstGeom prst="rect">
+                <a:avLst/>
+              </a:prstGeom>
+              <a:solidFill>
+                <a:srgbClr val="3A3A3A"/>
+              </a:solidFill>
+              <a:ln>
+                <a:noFill/>
+              </a:ln>
+            </p:spPr>
+            <p:style>
+              <a:lnRef idx="2">
+                <a:schemeClr val="accent1">
+                  <a:shade val="15000"/>
+                </a:schemeClr>
+              </a:lnRef>
+              <a:fillRef idx="1">
+                <a:schemeClr val="accent1"/>
+              </a:fillRef>
+              <a:effectRef idx="0">
+                <a:schemeClr val="accent1"/>
+              </a:effectRef>
+              <a:fontRef idx="minor">
+                <a:schemeClr val="lt1"/>
+              </a:fontRef>
+            </p:style>
+            <p:txBody>
+              <a:bodyPr rtlCol="0" anchor="ctr"/>
+              <a:lstStyle/>
+              <a:p>
+                <a:pPr algn="ctr"/>
+                <a:endParaRPr lang="en-US"/>
+              </a:p>
+            </p:txBody>
+          </p:sp>
+          <p:sp>
+            <p:nvSpPr>
+              <p:cNvPr id="43" name="TextBox 42">
+                <a:extLst>
+                  <a:ext uri="{FF2B5EF4-FFF2-40B4-BE49-F238E27FC236}">
+                    <a16:creationId xmlns:a16="http://schemas.microsoft.com/office/drawing/2014/main" id="{8F539C13-3DA0-CDD5-906F-B7B23E40A3DD}"/>
+                  </a:ext>
+                </a:extLst>
+              </p:cNvPr>
+              <p:cNvSpPr txBox="1"/>
+              <p:nvPr/>
+            </p:nvSpPr>
+            <p:spPr>
+              <a:xfrm>
+                <a:off x="3916952" y="4313625"/>
+                <a:ext cx="2239246" cy="307777"/>
+              </a:xfrm>
+              <a:prstGeom prst="rect">
+                <a:avLst/>
+              </a:prstGeom>
+              <a:noFill/>
+            </p:spPr>
+            <p:txBody>
+              <a:bodyPr wrap="square">
+                <a:spAutoFit/>
+              </a:bodyPr>
+              <a:lstStyle/>
+              <a:p>
+                <a:pPr algn="ctr"/>
+                <a:r>
+                  <a:rPr lang="en-US" sz="1400" dirty="0">
+                    <a:solidFill>
+                      <a:schemeClr val="bg1"/>
+                    </a:solidFill>
+                    <a:latin typeface="Times New Roman" panose="02020603050405020304" pitchFamily="18" charset="0"/>
+                    <a:cs typeface="Times New Roman" panose="02020603050405020304" pitchFamily="18" charset="0"/>
+                  </a:rPr>
+                  <a:t>OAI : USRP</a:t>
+                </a:r>
+              </a:p>
+            </p:txBody>
+          </p:sp>
+          <p:sp>
+            <p:nvSpPr>
+              <p:cNvPr id="44" name="TextBox 43">
+                <a:extLst>
+                  <a:ext uri="{FF2B5EF4-FFF2-40B4-BE49-F238E27FC236}">
+                    <a16:creationId xmlns:a16="http://schemas.microsoft.com/office/drawing/2014/main" id="{DA83BE73-067A-6A36-CE79-E9C8F7848B03}"/>
+                  </a:ext>
+                </a:extLst>
+              </p:cNvPr>
+              <p:cNvSpPr txBox="1"/>
+              <p:nvPr/>
+            </p:nvSpPr>
+            <p:spPr>
+              <a:xfrm>
+                <a:off x="3918857" y="4007963"/>
+                <a:ext cx="2239246" cy="307777"/>
+              </a:xfrm>
+              <a:prstGeom prst="rect">
+                <a:avLst/>
+              </a:prstGeom>
+              <a:noFill/>
+            </p:spPr>
+            <p:txBody>
+              <a:bodyPr wrap="square">
+                <a:spAutoFit/>
+              </a:bodyPr>
+              <a:lstStyle/>
+              <a:p>
+                <a:pPr algn="ctr"/>
+                <a:r>
+                  <a:rPr lang="en-US" sz="1400" dirty="0">
+                    <a:solidFill>
+                      <a:schemeClr val="bg1"/>
+                    </a:solidFill>
+                    <a:latin typeface="Times New Roman" panose="02020603050405020304" pitchFamily="18" charset="0"/>
+                    <a:cs typeface="Times New Roman" panose="02020603050405020304" pitchFamily="18" charset="0"/>
+                  </a:rPr>
+                  <a:t>srsRAN_4G : </a:t>
+                </a:r>
+                <a:r>
+                  <a:rPr lang="en-US" sz="1400" dirty="0" err="1">
+                    <a:solidFill>
+                      <a:schemeClr val="bg1"/>
+                    </a:solidFill>
+                    <a:latin typeface="Times New Roman" panose="02020603050405020304" pitchFamily="18" charset="0"/>
+                    <a:cs typeface="Times New Roman" panose="02020603050405020304" pitchFamily="18" charset="0"/>
+                  </a:rPr>
+                  <a:t>ZeroMQ</a:t>
+                </a:r>
+                <a:endParaRPr lang="en-US" sz="1400" dirty="0">
+                  <a:solidFill>
+                    <a:schemeClr val="bg1"/>
+                  </a:solidFill>
+                  <a:latin typeface="Times New Roman" panose="02020603050405020304" pitchFamily="18" charset="0"/>
+                  <a:cs typeface="Times New Roman" panose="02020603050405020304" pitchFamily="18" charset="0"/>
+                </a:endParaRPr>
+              </a:p>
+            </p:txBody>
+          </p:sp>
+          <p:sp>
+            <p:nvSpPr>
+              <p:cNvPr id="45" name="TextBox 44">
+                <a:extLst>
+                  <a:ext uri="{FF2B5EF4-FFF2-40B4-BE49-F238E27FC236}">
+                    <a16:creationId xmlns:a16="http://schemas.microsoft.com/office/drawing/2014/main" id="{592A8990-5727-46D2-F53B-BB54ADC83038}"/>
+                  </a:ext>
+                </a:extLst>
+              </p:cNvPr>
+              <p:cNvSpPr txBox="1"/>
+              <p:nvPr/>
+            </p:nvSpPr>
+            <p:spPr>
+              <a:xfrm>
+                <a:off x="3916951" y="3702301"/>
+                <a:ext cx="2239248" cy="307777"/>
+              </a:xfrm>
+              <a:prstGeom prst="rect">
+                <a:avLst/>
+              </a:prstGeom>
+              <a:noFill/>
+            </p:spPr>
+            <p:txBody>
+              <a:bodyPr wrap="square">
+                <a:spAutoFit/>
+              </a:bodyPr>
+              <a:lstStyle/>
+              <a:p>
+                <a:pPr algn="ctr"/>
+                <a:r>
+                  <a:rPr lang="en-US" sz="1400" dirty="0">
+                    <a:solidFill>
+                      <a:schemeClr val="bg1"/>
+                    </a:solidFill>
+                    <a:latin typeface="Times New Roman" panose="02020603050405020304" pitchFamily="18" charset="0"/>
+                    <a:cs typeface="Times New Roman" panose="02020603050405020304" pitchFamily="18" charset="0"/>
+                  </a:rPr>
+                  <a:t>srsRAN_4G : USRP</a:t>
+                </a:r>
+              </a:p>
+            </p:txBody>
+          </p:sp>
+          <p:sp>
+            <p:nvSpPr>
+              <p:cNvPr id="46" name="TextBox 45">
+                <a:extLst>
+                  <a:ext uri="{FF2B5EF4-FFF2-40B4-BE49-F238E27FC236}">
+                    <a16:creationId xmlns:a16="http://schemas.microsoft.com/office/drawing/2014/main" id="{52E6A652-08FB-05C2-F5D5-25D5E1D5B523}"/>
+                  </a:ext>
+                </a:extLst>
+              </p:cNvPr>
+              <p:cNvSpPr txBox="1"/>
+              <p:nvPr/>
+            </p:nvSpPr>
+            <p:spPr>
+              <a:xfrm>
+                <a:off x="3916952" y="4924949"/>
+                <a:ext cx="2239246" cy="307777"/>
+              </a:xfrm>
+              <a:prstGeom prst="rect">
+                <a:avLst/>
+              </a:prstGeom>
+              <a:noFill/>
+            </p:spPr>
+            <p:txBody>
+              <a:bodyPr wrap="square">
+                <a:spAutoFit/>
+              </a:bodyPr>
+              <a:lstStyle/>
+              <a:p>
+                <a:pPr algn="ctr"/>
+                <a:r>
+                  <a:rPr lang="en-US" sz="1400" dirty="0">
+                    <a:solidFill>
+                      <a:schemeClr val="bg1"/>
+                    </a:solidFill>
+                    <a:latin typeface="Times New Roman" panose="02020603050405020304" pitchFamily="18" charset="0"/>
+                    <a:cs typeface="Times New Roman" panose="02020603050405020304" pitchFamily="18" charset="0"/>
+                  </a:rPr>
+                  <a:t>5G Mobile Phone</a:t>
+                </a:r>
+              </a:p>
+            </p:txBody>
+          </p:sp>
+          <p:sp>
+            <p:nvSpPr>
+              <p:cNvPr id="47" name="TextBox 46">
+                <a:extLst>
+                  <a:ext uri="{FF2B5EF4-FFF2-40B4-BE49-F238E27FC236}">
+                    <a16:creationId xmlns:a16="http://schemas.microsoft.com/office/drawing/2014/main" id="{29036365-8CEE-A19F-B173-8499CDCFCABA}"/>
+                  </a:ext>
+                </a:extLst>
+              </p:cNvPr>
+              <p:cNvSpPr txBox="1"/>
+              <p:nvPr/>
+            </p:nvSpPr>
+            <p:spPr>
+              <a:xfrm>
+                <a:off x="3941661" y="5227453"/>
+                <a:ext cx="2239249" cy="307777"/>
+              </a:xfrm>
+              <a:prstGeom prst="rect">
+                <a:avLst/>
+              </a:prstGeom>
+              <a:noFill/>
+            </p:spPr>
+            <p:txBody>
+              <a:bodyPr wrap="square">
+                <a:spAutoFit/>
+              </a:bodyPr>
+              <a:lstStyle/>
+              <a:p>
+                <a:pPr algn="ctr"/>
+                <a:r>
+                  <a:rPr lang="en-US" sz="1400" b="1" dirty="0">
+                    <a:solidFill>
+                      <a:schemeClr val="bg1"/>
+                    </a:solidFill>
+                    <a:latin typeface="Times New Roman" panose="02020603050405020304" pitchFamily="18" charset="0"/>
+                    <a:cs typeface="Times New Roman" panose="02020603050405020304" pitchFamily="18" charset="0"/>
+                  </a:rPr>
+                  <a:t>User Equipment</a:t>
+                </a:r>
+              </a:p>
+            </p:txBody>
+          </p:sp>
+          <p:sp>
+            <p:nvSpPr>
+              <p:cNvPr id="48" name="Rectangle 47">
+                <a:extLst>
+                  <a:ext uri="{FF2B5EF4-FFF2-40B4-BE49-F238E27FC236}">
+                    <a16:creationId xmlns:a16="http://schemas.microsoft.com/office/drawing/2014/main" id="{D925D158-702C-A0D3-8A57-4736AFF32367}"/>
+                  </a:ext>
+                </a:extLst>
+              </p:cNvPr>
+              <p:cNvSpPr/>
+              <p:nvPr/>
+            </p:nvSpPr>
+            <p:spPr>
+              <a:xfrm>
+                <a:off x="3916950" y="4611639"/>
+                <a:ext cx="2239249" cy="327496"/>
+              </a:xfrm>
+              <a:prstGeom prst="rect">
+                <a:avLst/>
+              </a:prstGeom>
+              <a:solidFill>
+                <a:srgbClr val="3A3A3A"/>
+              </a:solidFill>
+              <a:ln>
+                <a:noFill/>
+              </a:ln>
+            </p:spPr>
+            <p:style>
+              <a:lnRef idx="2">
+                <a:schemeClr val="accent1">
+                  <a:shade val="15000"/>
+                </a:schemeClr>
+              </a:lnRef>
+              <a:fillRef idx="1">
+                <a:schemeClr val="accent1"/>
+              </a:fillRef>
+              <a:effectRef idx="0">
+                <a:schemeClr val="accent1"/>
+              </a:effectRef>
+              <a:fontRef idx="minor">
+                <a:schemeClr val="lt1"/>
+              </a:fontRef>
+            </p:style>
+            <p:txBody>
+              <a:bodyPr rtlCol="0" anchor="ctr"/>
+              <a:lstStyle/>
+              <a:p>
+                <a:pPr algn="ctr"/>
+                <a:endParaRPr lang="en-US"/>
+              </a:p>
+            </p:txBody>
+          </p:sp>
+          <p:sp>
+            <p:nvSpPr>
+              <p:cNvPr id="49" name="TextBox 48">
+                <a:extLst>
+                  <a:ext uri="{FF2B5EF4-FFF2-40B4-BE49-F238E27FC236}">
+                    <a16:creationId xmlns:a16="http://schemas.microsoft.com/office/drawing/2014/main" id="{D8772B8B-14B6-19AA-9DFC-643F7AF6818D}"/>
+                  </a:ext>
+                </a:extLst>
+              </p:cNvPr>
+              <p:cNvSpPr txBox="1"/>
+              <p:nvPr/>
+            </p:nvSpPr>
+            <p:spPr>
+              <a:xfrm>
+                <a:off x="3916952" y="4619287"/>
+                <a:ext cx="2239246" cy="307777"/>
+              </a:xfrm>
+              <a:prstGeom prst="rect">
+                <a:avLst/>
+              </a:prstGeom>
+              <a:noFill/>
+            </p:spPr>
+            <p:txBody>
+              <a:bodyPr wrap="square">
+                <a:spAutoFit/>
+              </a:bodyPr>
+              <a:lstStyle/>
+              <a:p>
+                <a:pPr algn="ctr"/>
+                <a:r>
+                  <a:rPr lang="en-US" sz="1400" dirty="0">
+                    <a:solidFill>
+                      <a:schemeClr val="bg1"/>
+                    </a:solidFill>
+                    <a:latin typeface="Times New Roman" panose="02020603050405020304" pitchFamily="18" charset="0"/>
+                    <a:cs typeface="Times New Roman" panose="02020603050405020304" pitchFamily="18" charset="0"/>
+                  </a:rPr>
+                  <a:t>OAI : RF Simulator</a:t>
+                </a:r>
+              </a:p>
+            </p:txBody>
+          </p:sp>
+          <p:sp>
+            <p:nvSpPr>
+              <p:cNvPr id="50" name="Rectangle: Rounded Corners 49">
+                <a:extLst>
+                  <a:ext uri="{FF2B5EF4-FFF2-40B4-BE49-F238E27FC236}">
+                    <a16:creationId xmlns:a16="http://schemas.microsoft.com/office/drawing/2014/main" id="{A0CE4E09-8DF3-9F5F-9E61-B32DC3A4E44A}"/>
+                  </a:ext>
+                </a:extLst>
+              </p:cNvPr>
+              <p:cNvSpPr/>
+              <p:nvPr/>
+            </p:nvSpPr>
+            <p:spPr>
+              <a:xfrm>
+                <a:off x="3916951" y="3691197"/>
+                <a:ext cx="2239249" cy="1534218"/>
+              </a:xfrm>
+              <a:prstGeom prst="roundRect">
+                <a:avLst>
+                  <a:gd name="adj" fmla="val 5819"/>
+                </a:avLst>
+              </a:prstGeom>
+              <a:noFill/>
+              <a:ln w="12700">
+                <a:solidFill>
+                  <a:schemeClr val="bg1"/>
+                </a:solidFill>
+              </a:ln>
+            </p:spPr>
+            <p:style>
+              <a:lnRef idx="2">
+                <a:schemeClr val="accent1">
+                  <a:shade val="15000"/>
+                </a:schemeClr>
+              </a:lnRef>
+              <a:fillRef idx="1">
+                <a:schemeClr val="accent1"/>
+              </a:fillRef>
+              <a:effectRef idx="0">
+                <a:schemeClr val="accent1"/>
+              </a:effectRef>
+              <a:fontRef idx="minor">
+                <a:schemeClr val="lt1"/>
+              </a:fontRef>
+            </p:style>
+            <p:txBody>
+              <a:bodyPr rtlCol="0" anchor="ctr"/>
+              <a:lstStyle/>
+              <a:p>
+                <a:pPr algn="ctr"/>
+                <a:endParaRPr lang="en-US" dirty="0">
+                  <a:latin typeface="Times New Roman" panose="02020603050405020304" pitchFamily="18" charset="0"/>
+                  <a:cs typeface="Times New Roman" panose="02020603050405020304" pitchFamily="18" charset="0"/>
+                </a:endParaRPr>
+              </a:p>
+            </p:txBody>
+          </p:sp>
+        </p:grpSp>
+        <p:grpSp>
+          <p:nvGrpSpPr>
+            <p:cNvPr id="28" name="Group 27">
+              <a:extLst>
+                <a:ext uri="{FF2B5EF4-FFF2-40B4-BE49-F238E27FC236}">
+                  <a16:creationId xmlns:a16="http://schemas.microsoft.com/office/drawing/2014/main" id="{760B8761-A333-E78A-907F-AD48533196CD}"/>
+                </a:ext>
+              </a:extLst>
+            </p:cNvPr>
+            <p:cNvGrpSpPr/>
+            <p:nvPr/>
+          </p:nvGrpSpPr>
+          <p:grpSpPr>
+            <a:xfrm>
+              <a:off x="9376910" y="3369385"/>
+              <a:ext cx="2302213" cy="647296"/>
+              <a:chOff x="9110915" y="4521647"/>
+              <a:chExt cx="2302213" cy="647296"/>
+            </a:xfrm>
+          </p:grpSpPr>
+          <p:sp>
+            <p:nvSpPr>
+              <p:cNvPr id="29" name="Rectangle: Rounded Corners 28">
+                <a:extLst>
+                  <a:ext uri="{FF2B5EF4-FFF2-40B4-BE49-F238E27FC236}">
+                    <a16:creationId xmlns:a16="http://schemas.microsoft.com/office/drawing/2014/main" id="{022DC171-A3EC-050F-5AC8-CA1EDEC48D5E}"/>
+                  </a:ext>
+                </a:extLst>
+              </p:cNvPr>
+              <p:cNvSpPr/>
+              <p:nvPr/>
+            </p:nvSpPr>
+            <p:spPr>
+              <a:xfrm>
+                <a:off x="9110917" y="4521647"/>
+                <a:ext cx="2239249" cy="333931"/>
+              </a:xfrm>
+              <a:prstGeom prst="roundRect">
+                <a:avLst>
+                  <a:gd name="adj" fmla="val 28947"/>
+                </a:avLst>
+              </a:prstGeom>
+              <a:solidFill>
+                <a:srgbClr val="262626"/>
+              </a:solidFill>
+              <a:ln w="12700">
+                <a:solidFill>
+                  <a:schemeClr val="bg1"/>
+                </a:solidFill>
+              </a:ln>
+            </p:spPr>
+            <p:style>
+              <a:lnRef idx="2">
+                <a:schemeClr val="accent1">
+                  <a:shade val="15000"/>
+                </a:schemeClr>
+              </a:lnRef>
+              <a:fillRef idx="1">
+                <a:schemeClr val="accent1"/>
+              </a:fillRef>
+              <a:effectRef idx="0">
+                <a:schemeClr val="accent1"/>
+              </a:effectRef>
+              <a:fontRef idx="minor">
+                <a:schemeClr val="lt1"/>
+              </a:fontRef>
+            </p:style>
+            <p:txBody>
+              <a:bodyPr rtlCol="0" anchor="ctr"/>
+              <a:lstStyle/>
+              <a:p>
+                <a:pPr algn="ctr"/>
+                <a:endParaRPr lang="en-US" sz="1400" dirty="0">
+                  <a:solidFill>
+                    <a:schemeClr val="tx1"/>
+                  </a:solidFill>
+                  <a:latin typeface="Times New Roman" panose="02020603050405020304" pitchFamily="18" charset="0"/>
+                  <a:cs typeface="Times New Roman" panose="02020603050405020304" pitchFamily="18" charset="0"/>
+                </a:endParaRPr>
+              </a:p>
+            </p:txBody>
+          </p:sp>
+          <p:sp>
+            <p:nvSpPr>
+              <p:cNvPr id="30" name="TextBox 29">
+                <a:extLst>
+                  <a:ext uri="{FF2B5EF4-FFF2-40B4-BE49-F238E27FC236}">
+                    <a16:creationId xmlns:a16="http://schemas.microsoft.com/office/drawing/2014/main" id="{78F29ACD-A658-CB33-2DDC-6428BDD4405E}"/>
+                  </a:ext>
+                </a:extLst>
+              </p:cNvPr>
+              <p:cNvSpPr txBox="1"/>
+              <p:nvPr/>
+            </p:nvSpPr>
+            <p:spPr>
+              <a:xfrm>
+                <a:off x="9110915" y="4535517"/>
+                <a:ext cx="2238468" cy="307777"/>
+              </a:xfrm>
+              <a:prstGeom prst="rect">
+                <a:avLst/>
+              </a:prstGeom>
+              <a:noFill/>
+            </p:spPr>
+            <p:txBody>
+              <a:bodyPr wrap="square">
+                <a:spAutoFit/>
+              </a:bodyPr>
+              <a:lstStyle/>
+              <a:p>
+                <a:pPr algn="ctr"/>
+                <a:r>
+                  <a:rPr lang="en-US" sz="1400" dirty="0">
+                    <a:solidFill>
+                      <a:schemeClr val="bg1"/>
+                    </a:solidFill>
+                    <a:latin typeface="Times New Roman" panose="02020603050405020304" pitchFamily="18" charset="0"/>
+                    <a:cs typeface="Times New Roman" panose="02020603050405020304" pitchFamily="18" charset="0"/>
+                  </a:rPr>
+                  <a:t>O-RAN SC : Non-RT RIC</a:t>
+                </a:r>
+              </a:p>
+            </p:txBody>
+          </p:sp>
+          <p:sp>
+            <p:nvSpPr>
+              <p:cNvPr id="31" name="TextBox 30">
+                <a:extLst>
+                  <a:ext uri="{FF2B5EF4-FFF2-40B4-BE49-F238E27FC236}">
+                    <a16:creationId xmlns:a16="http://schemas.microsoft.com/office/drawing/2014/main" id="{4F2D46F8-64B8-9102-13D1-EC6356B1DA86}"/>
+                  </a:ext>
+                </a:extLst>
+              </p:cNvPr>
+              <p:cNvSpPr txBox="1"/>
+              <p:nvPr/>
+            </p:nvSpPr>
+            <p:spPr>
+              <a:xfrm>
+                <a:off x="9173879" y="4861166"/>
+                <a:ext cx="2239249" cy="307777"/>
+              </a:xfrm>
+              <a:prstGeom prst="rect">
+                <a:avLst/>
+              </a:prstGeom>
+              <a:noFill/>
+            </p:spPr>
+            <p:txBody>
+              <a:bodyPr wrap="square">
+                <a:spAutoFit/>
+              </a:bodyPr>
+              <a:lstStyle/>
+              <a:p>
+                <a:pPr algn="ctr"/>
+                <a:r>
+                  <a:rPr lang="en-US" sz="1400" b="1" dirty="0">
+                    <a:solidFill>
+                      <a:schemeClr val="bg1"/>
+                    </a:solidFill>
+                    <a:latin typeface="Times New Roman" panose="02020603050405020304" pitchFamily="18" charset="0"/>
+                    <a:cs typeface="Times New Roman" panose="02020603050405020304" pitchFamily="18" charset="0"/>
+                  </a:rPr>
+                  <a:t>Non-RT RIC</a:t>
+                </a:r>
+              </a:p>
+            </p:txBody>
+          </p:sp>
+        </p:grpSp>
+        <p:cxnSp>
+          <p:nvCxnSpPr>
+            <p:cNvPr id="2" name="Straight Connector 1">
+              <a:extLst>
+                <a:ext uri="{FF2B5EF4-FFF2-40B4-BE49-F238E27FC236}">
+                  <a16:creationId xmlns:a16="http://schemas.microsoft.com/office/drawing/2014/main" id="{A259E58A-9111-E91B-A5A5-A6C4526B5B70}"/>
+                </a:ext>
+              </a:extLst>
+            </p:cNvPr>
+            <p:cNvCxnSpPr>
+              <a:cxnSpLocks/>
+              <a:stCxn id="46" idx="3"/>
+              <a:endCxn id="54" idx="1"/>
+            </p:cNvCxnSpPr>
+            <p:nvPr/>
+          </p:nvCxnSpPr>
+          <p:spPr>
+            <a:xfrm flipV="1">
+              <a:off x="2929886" y="2947695"/>
+              <a:ext cx="665196" cy="611324"/>
+            </a:xfrm>
+            <a:prstGeom prst="line">
+              <a:avLst/>
+            </a:prstGeom>
+            <a:ln w="12700">
+              <a:solidFill>
+                <a:schemeClr val="bg1"/>
+              </a:solidFill>
+              <a:prstDash val="sysDot"/>
+            </a:ln>
+          </p:spPr>
+          <p:style>
+            <a:lnRef idx="2">
+              <a:schemeClr val="accent1"/>
+            </a:lnRef>
+            <a:fillRef idx="0">
+              <a:schemeClr val="accent1"/>
+            </a:fillRef>
+            <a:effectRef idx="1">
+              <a:schemeClr val="accent1"/>
+            </a:effectRef>
+            <a:fontRef idx="minor">
+              <a:schemeClr val="tx1"/>
+            </a:fontRef>
+          </p:style>
+        </p:cxnSp>
+        <p:grpSp>
+          <p:nvGrpSpPr>
+            <p:cNvPr id="77" name="Group 76">
+              <a:extLst>
+                <a:ext uri="{FF2B5EF4-FFF2-40B4-BE49-F238E27FC236}">
+                  <a16:creationId xmlns:a16="http://schemas.microsoft.com/office/drawing/2014/main" id="{4F0FF1D2-F883-D4BA-E0FF-D67304C298C7}"/>
+                </a:ext>
+              </a:extLst>
+            </p:cNvPr>
+            <p:cNvGrpSpPr/>
+            <p:nvPr/>
+          </p:nvGrpSpPr>
+          <p:grpSpPr>
+            <a:xfrm>
+              <a:off x="6496054" y="2781548"/>
+              <a:ext cx="2241153" cy="1233863"/>
+              <a:chOff x="1026488" y="2318655"/>
+              <a:chExt cx="2241153" cy="1233863"/>
+            </a:xfrm>
+          </p:grpSpPr>
+          <p:sp>
+            <p:nvSpPr>
+              <p:cNvPr id="78" name="TextBox 77">
+                <a:extLst>
+                  <a:ext uri="{FF2B5EF4-FFF2-40B4-BE49-F238E27FC236}">
+                    <a16:creationId xmlns:a16="http://schemas.microsoft.com/office/drawing/2014/main" id="{8692BA8C-8BFD-D4AF-1AAD-285177594A04}"/>
+                  </a:ext>
+                </a:extLst>
+              </p:cNvPr>
+              <p:cNvSpPr txBox="1"/>
+              <p:nvPr/>
+            </p:nvSpPr>
+            <p:spPr>
+              <a:xfrm>
+                <a:off x="1028392" y="3244741"/>
+                <a:ext cx="2239249" cy="307777"/>
+              </a:xfrm>
+              <a:prstGeom prst="rect">
+                <a:avLst/>
+              </a:prstGeom>
+              <a:noFill/>
+            </p:spPr>
+            <p:txBody>
+              <a:bodyPr wrap="square">
+                <a:spAutoFit/>
+              </a:bodyPr>
+              <a:lstStyle/>
+              <a:p>
+                <a:pPr algn="ctr"/>
+                <a:r>
+                  <a:rPr lang="en-US" sz="1400" b="1" dirty="0">
+                    <a:solidFill>
+                      <a:schemeClr val="bg1"/>
+                    </a:solidFill>
+                    <a:latin typeface="Times New Roman" panose="02020603050405020304" pitchFamily="18" charset="0"/>
+                    <a:cs typeface="Times New Roman" panose="02020603050405020304" pitchFamily="18" charset="0"/>
+                  </a:rPr>
+                  <a:t>Near-RT RIC</a:t>
+                </a:r>
+              </a:p>
+            </p:txBody>
+          </p:sp>
+          <p:grpSp>
+            <p:nvGrpSpPr>
+              <p:cNvPr id="79" name="Group 78">
+                <a:extLst>
+                  <a:ext uri="{FF2B5EF4-FFF2-40B4-BE49-F238E27FC236}">
+                    <a16:creationId xmlns:a16="http://schemas.microsoft.com/office/drawing/2014/main" id="{3DE97752-AB53-3ACA-903E-641E201E9234}"/>
+                  </a:ext>
+                </a:extLst>
+              </p:cNvPr>
+              <p:cNvGrpSpPr/>
+              <p:nvPr/>
+            </p:nvGrpSpPr>
+            <p:grpSpPr>
+              <a:xfrm>
+                <a:off x="1028392" y="2318655"/>
+                <a:ext cx="2239249" cy="923272"/>
+                <a:chOff x="1590040" y="5303322"/>
+                <a:chExt cx="2374765" cy="923272"/>
+              </a:xfrm>
+            </p:grpSpPr>
+            <p:sp>
+              <p:nvSpPr>
+                <p:cNvPr id="83" name="Rectangle: Rounded Corners 82">
+                  <a:extLst>
+                    <a:ext uri="{FF2B5EF4-FFF2-40B4-BE49-F238E27FC236}">
+                      <a16:creationId xmlns:a16="http://schemas.microsoft.com/office/drawing/2014/main" id="{71E07B19-72A9-960B-E632-3DF83E0D2A9A}"/>
+                    </a:ext>
+                  </a:extLst>
+                </p:cNvPr>
+                <p:cNvSpPr/>
+                <p:nvPr/>
+              </p:nvSpPr>
+              <p:spPr>
+                <a:xfrm>
+                  <a:off x="1590040" y="5303322"/>
+                  <a:ext cx="2374765" cy="923272"/>
+                </a:xfrm>
+                <a:prstGeom prst="roundRect">
+                  <a:avLst>
+                    <a:gd name="adj" fmla="val 9466"/>
+                  </a:avLst>
+                </a:prstGeom>
+                <a:solidFill>
+                  <a:srgbClr val="262626"/>
+                </a:solidFill>
+                <a:ln w="28575">
+                  <a:noFill/>
+                </a:ln>
+              </p:spPr>
+              <p:style>
+                <a:lnRef idx="2">
+                  <a:schemeClr val="accent1">
+                    <a:shade val="15000"/>
+                  </a:schemeClr>
+                </a:lnRef>
+                <a:fillRef idx="1">
+                  <a:schemeClr val="accent1"/>
+                </a:fillRef>
+                <a:effectRef idx="0">
+                  <a:schemeClr val="accent1"/>
+                </a:effectRef>
+                <a:fontRef idx="minor">
+                  <a:schemeClr val="lt1"/>
+                </a:fontRef>
+              </p:style>
+              <p:txBody>
+                <a:bodyPr rtlCol="0" anchor="ctr"/>
+                <a:lstStyle/>
+                <a:p>
+                  <a:pPr algn="ctr"/>
+                  <a:endParaRPr lang="en-US" dirty="0">
+                    <a:latin typeface="Times New Roman" panose="02020603050405020304" pitchFamily="18" charset="0"/>
+                    <a:cs typeface="Times New Roman" panose="02020603050405020304" pitchFamily="18" charset="0"/>
+                  </a:endParaRPr>
+                </a:p>
+              </p:txBody>
+            </p:sp>
+            <p:sp>
+              <p:nvSpPr>
+                <p:cNvPr id="84" name="Rectangle 83">
+                  <a:extLst>
+                    <a:ext uri="{FF2B5EF4-FFF2-40B4-BE49-F238E27FC236}">
+                      <a16:creationId xmlns:a16="http://schemas.microsoft.com/office/drawing/2014/main" id="{90FAC063-73E1-9FCD-9F9C-9F943B1D6B62}"/>
+                    </a:ext>
+                  </a:extLst>
+                </p:cNvPr>
+                <p:cNvSpPr/>
+                <p:nvPr/>
+              </p:nvSpPr>
+              <p:spPr>
+                <a:xfrm>
+                  <a:off x="1590040" y="5603165"/>
+                  <a:ext cx="2374765" cy="323587"/>
+                </a:xfrm>
+                <a:prstGeom prst="rect">
+                  <a:avLst/>
+                </a:prstGeom>
+                <a:solidFill>
+                  <a:srgbClr val="3A3A3A"/>
+                </a:solidFill>
+                <a:ln>
+                  <a:noFill/>
+                </a:ln>
+              </p:spPr>
+              <p:style>
+                <a:lnRef idx="2">
+                  <a:schemeClr val="accent1">
+                    <a:shade val="15000"/>
+                  </a:schemeClr>
+                </a:lnRef>
+                <a:fillRef idx="1">
+                  <a:schemeClr val="accent1"/>
+                </a:fillRef>
+                <a:effectRef idx="0">
+                  <a:schemeClr val="accent1"/>
+                </a:effectRef>
+                <a:fontRef idx="minor">
+                  <a:schemeClr val="lt1"/>
+                </a:fontRef>
+              </p:style>
+              <p:txBody>
+                <a:bodyPr rtlCol="0" anchor="ctr"/>
+                <a:lstStyle/>
+                <a:p>
+                  <a:pPr algn="ctr"/>
+                  <a:endParaRPr lang="en-US"/>
+                </a:p>
+              </p:txBody>
+            </p:sp>
+            <p:sp>
+              <p:nvSpPr>
+                <p:cNvPr id="85" name="Rectangle: Rounded Corners 84">
+                  <a:extLst>
+                    <a:ext uri="{FF2B5EF4-FFF2-40B4-BE49-F238E27FC236}">
+                      <a16:creationId xmlns:a16="http://schemas.microsoft.com/office/drawing/2014/main" id="{97D48B6F-4051-F261-5713-9BF4699D9936}"/>
+                    </a:ext>
+                  </a:extLst>
+                </p:cNvPr>
+                <p:cNvSpPr/>
+                <p:nvPr/>
+              </p:nvSpPr>
+              <p:spPr>
+                <a:xfrm>
+                  <a:off x="1590040" y="5303322"/>
+                  <a:ext cx="2374765" cy="923272"/>
+                </a:xfrm>
+                <a:prstGeom prst="roundRect">
+                  <a:avLst>
+                    <a:gd name="adj" fmla="val 9879"/>
+                  </a:avLst>
+                </a:prstGeom>
+                <a:noFill/>
+                <a:ln w="12700">
+                  <a:solidFill>
+                    <a:schemeClr val="bg1"/>
+                  </a:solidFill>
+                </a:ln>
+              </p:spPr>
+              <p:style>
+                <a:lnRef idx="2">
+                  <a:schemeClr val="accent1">
+                    <a:shade val="15000"/>
+                  </a:schemeClr>
+                </a:lnRef>
+                <a:fillRef idx="1">
+                  <a:schemeClr val="accent1"/>
+                </a:fillRef>
+                <a:effectRef idx="0">
+                  <a:schemeClr val="accent1"/>
+                </a:effectRef>
+                <a:fontRef idx="minor">
+                  <a:schemeClr val="lt1"/>
+                </a:fontRef>
+              </p:style>
+              <p:txBody>
+                <a:bodyPr rtlCol="0" anchor="ctr"/>
+                <a:lstStyle/>
+                <a:p>
+                  <a:pPr algn="ctr"/>
+                  <a:endParaRPr lang="en-US" dirty="0">
+                    <a:latin typeface="Times New Roman" panose="02020603050405020304" pitchFamily="18" charset="0"/>
+                    <a:cs typeface="Times New Roman" panose="02020603050405020304" pitchFamily="18" charset="0"/>
+                  </a:endParaRPr>
+                </a:p>
+              </p:txBody>
+            </p:sp>
+          </p:grpSp>
+          <p:sp>
+            <p:nvSpPr>
+              <p:cNvPr id="80" name="TextBox 79">
+                <a:extLst>
+                  <a:ext uri="{FF2B5EF4-FFF2-40B4-BE49-F238E27FC236}">
+                    <a16:creationId xmlns:a16="http://schemas.microsoft.com/office/drawing/2014/main" id="{F1059630-8383-0B66-68A0-1B624EC69700}"/>
+                  </a:ext>
+                </a:extLst>
+              </p:cNvPr>
+              <p:cNvSpPr txBox="1"/>
+              <p:nvPr/>
+            </p:nvSpPr>
+            <p:spPr>
+              <a:xfrm>
+                <a:off x="1026488" y="2928594"/>
+                <a:ext cx="2241153" cy="307777"/>
+              </a:xfrm>
+              <a:prstGeom prst="rect">
+                <a:avLst/>
+              </a:prstGeom>
+              <a:noFill/>
+            </p:spPr>
+            <p:txBody>
+              <a:bodyPr wrap="square">
+                <a:spAutoFit/>
+              </a:bodyPr>
+              <a:lstStyle/>
+              <a:p>
+                <a:pPr algn="ctr"/>
+                <a:r>
+                  <a:rPr lang="en-US" sz="1400" dirty="0">
+                    <a:solidFill>
+                      <a:schemeClr val="bg1"/>
+                    </a:solidFill>
+                    <a:latin typeface="Times New Roman" panose="02020603050405020304" pitchFamily="18" charset="0"/>
+                    <a:cs typeface="Times New Roman" panose="02020603050405020304" pitchFamily="18" charset="0"/>
+                  </a:rPr>
+                  <a:t>Mosaic5G : FlexRIC</a:t>
+                </a:r>
+              </a:p>
+            </p:txBody>
+          </p:sp>
+          <p:sp>
+            <p:nvSpPr>
+              <p:cNvPr id="81" name="TextBox 80">
+                <a:extLst>
+                  <a:ext uri="{FF2B5EF4-FFF2-40B4-BE49-F238E27FC236}">
+                    <a16:creationId xmlns:a16="http://schemas.microsoft.com/office/drawing/2014/main" id="{7FE2B9E7-212A-DA2F-8016-28CC6B67159F}"/>
+                  </a:ext>
+                </a:extLst>
+              </p:cNvPr>
+              <p:cNvSpPr txBox="1"/>
+              <p:nvPr/>
+            </p:nvSpPr>
+            <p:spPr>
+              <a:xfrm>
+                <a:off x="1026488" y="2629568"/>
+                <a:ext cx="2241153" cy="307777"/>
+              </a:xfrm>
+              <a:prstGeom prst="rect">
+                <a:avLst/>
+              </a:prstGeom>
+              <a:noFill/>
+            </p:spPr>
+            <p:txBody>
+              <a:bodyPr wrap="square">
+                <a:spAutoFit/>
+              </a:bodyPr>
+              <a:lstStyle/>
+              <a:p>
+                <a:pPr algn="ctr"/>
+                <a:r>
+                  <a:rPr lang="en-US" sz="1400" dirty="0">
+                    <a:solidFill>
+                      <a:schemeClr val="bg1"/>
+                    </a:solidFill>
+                    <a:latin typeface="Times New Roman" panose="02020603050405020304" pitchFamily="18" charset="0"/>
+                    <a:cs typeface="Times New Roman" panose="02020603050405020304" pitchFamily="18" charset="0"/>
+                  </a:rPr>
+                  <a:t>O-RAN SC : Near-RT RIC</a:t>
+                </a:r>
+              </a:p>
+            </p:txBody>
+          </p:sp>
+          <p:sp>
+            <p:nvSpPr>
+              <p:cNvPr id="82" name="TextBox 81">
+                <a:extLst>
+                  <a:ext uri="{FF2B5EF4-FFF2-40B4-BE49-F238E27FC236}">
+                    <a16:creationId xmlns:a16="http://schemas.microsoft.com/office/drawing/2014/main" id="{467B0EE3-8C81-7DF0-9524-0DB7433CFFAF}"/>
+                  </a:ext>
+                </a:extLst>
+              </p:cNvPr>
+              <p:cNvSpPr txBox="1"/>
+              <p:nvPr/>
+            </p:nvSpPr>
+            <p:spPr>
+              <a:xfrm>
+                <a:off x="1026488" y="2330542"/>
+                <a:ext cx="2241153" cy="307777"/>
+              </a:xfrm>
+              <a:prstGeom prst="rect">
+                <a:avLst/>
+              </a:prstGeom>
+              <a:noFill/>
+            </p:spPr>
+            <p:txBody>
+              <a:bodyPr wrap="square">
+                <a:spAutoFit/>
+              </a:bodyPr>
+              <a:lstStyle/>
+              <a:p>
+                <a:pPr algn="ctr"/>
+                <a:r>
+                  <a:rPr lang="en-US" sz="1400" dirty="0">
+                    <a:solidFill>
+                      <a:schemeClr val="bg1"/>
+                    </a:solidFill>
+                    <a:latin typeface="Times New Roman" panose="02020603050405020304" pitchFamily="18" charset="0"/>
+                    <a:cs typeface="Times New Roman" panose="02020603050405020304" pitchFamily="18" charset="0"/>
+                  </a:rPr>
+                  <a:t>O-RAN SC : A1 Simulator</a:t>
+                </a:r>
+              </a:p>
+            </p:txBody>
+          </p:sp>
+        </p:grpSp>
+        <p:cxnSp>
+          <p:nvCxnSpPr>
+            <p:cNvPr id="86" name="Straight Connector 85">
+              <a:extLst>
+                <a:ext uri="{FF2B5EF4-FFF2-40B4-BE49-F238E27FC236}">
+                  <a16:creationId xmlns:a16="http://schemas.microsoft.com/office/drawing/2014/main" id="{8716AD2C-5E04-6500-20A3-966FF14ADD37}"/>
+                </a:ext>
+              </a:extLst>
+            </p:cNvPr>
+            <p:cNvCxnSpPr>
+              <a:cxnSpLocks/>
+              <a:stCxn id="82" idx="3"/>
+              <a:endCxn id="30" idx="1"/>
+            </p:cNvCxnSpPr>
+            <p:nvPr/>
+          </p:nvCxnSpPr>
+          <p:spPr>
+            <a:xfrm>
+              <a:off x="8737207" y="2947324"/>
+              <a:ext cx="639703" cy="589820"/>
+            </a:xfrm>
+            <a:prstGeom prst="line">
+              <a:avLst/>
+            </a:prstGeom>
+            <a:ln w="12700">
+              <a:solidFill>
+                <a:schemeClr val="bg1"/>
+              </a:solidFill>
+            </a:ln>
+          </p:spPr>
+          <p:style>
+            <a:lnRef idx="2">
+              <a:schemeClr val="accent1"/>
+            </a:lnRef>
+            <a:fillRef idx="0">
+              <a:schemeClr val="accent1"/>
+            </a:fillRef>
+            <a:effectRef idx="1">
+              <a:schemeClr val="accent1"/>
+            </a:effectRef>
+            <a:fontRef idx="minor">
+              <a:schemeClr val="tx1"/>
+            </a:fontRef>
+          </p:style>
+        </p:cxnSp>
+        <p:sp>
+          <p:nvSpPr>
+            <p:cNvPr id="89" name="TextBox 88">
+              <a:extLst>
+                <a:ext uri="{FF2B5EF4-FFF2-40B4-BE49-F238E27FC236}">
+                  <a16:creationId xmlns:a16="http://schemas.microsoft.com/office/drawing/2014/main" id="{E4ED17CE-4528-0EEC-AB9C-36F0BCB17D7E}"/>
+                </a:ext>
+              </a:extLst>
+            </p:cNvPr>
+            <p:cNvSpPr txBox="1"/>
+            <p:nvPr/>
+          </p:nvSpPr>
+          <p:spPr>
+            <a:xfrm>
+              <a:off x="6561688" y="2473676"/>
+              <a:ext cx="2239249" cy="307777"/>
+            </a:xfrm>
+            <a:prstGeom prst="rect">
+              <a:avLst/>
+            </a:prstGeom>
+            <a:noFill/>
+          </p:spPr>
+          <p:txBody>
+            <a:bodyPr wrap="square">
+              <a:spAutoFit/>
+            </a:bodyPr>
+            <a:lstStyle/>
+            <a:p>
+              <a:pPr algn="ctr"/>
+              <a:r>
+                <a:rPr lang="en-US" sz="1400" b="1" dirty="0">
+                  <a:solidFill>
+                    <a:schemeClr val="bg1"/>
+                  </a:solidFill>
+                  <a:latin typeface="Times New Roman" panose="02020603050405020304" pitchFamily="18" charset="0"/>
+                  <a:cs typeface="Times New Roman" panose="02020603050405020304" pitchFamily="18" charset="0"/>
+                </a:rPr>
+                <a:t>5G Core Network</a:t>
+              </a:r>
+            </a:p>
+          </p:txBody>
+        </p:sp>
+      </p:grpSp>
+    </p:spTree>
+    <p:extLst>
+      <p:ext uri="{BB962C8B-B14F-4D97-AF65-F5344CB8AC3E}">
+        <p14:creationId xmlns:p14="http://schemas.microsoft.com/office/powerpoint/2010/main" val="2655625684"/>
+      </p:ext>
+    </p:extLst>
+  </p:cSld>
+  <p:clrMapOvr>
+    <a:masterClrMapping/>
+  </p:clrMapOvr>
+</p:sld>
+</file>
+
 <file path=ppt/theme/theme1.xml><?xml version="1.0" encoding="utf-8"?>
 <a:theme xmlns:a="http://schemas.openxmlformats.org/drawingml/2006/main" name="Office Theme">
   <a:themeElements>

--- a/RAN_Intelligent_Controllers/research/Diagrams.pptx
+++ b/RAN_Intelligent_Controllers/research/Diagrams.pptx
@@ -265,7 +265,7 @@
           <a:p>
             <a:fld id="{2D1DF383-F48D-4C35-882C-8A26F25E24F6}" type="datetimeFigureOut">
               <a:rPr lang="en-US" smtClean="0"/>
-              <a:t>6/5/2025</a:t>
+              <a:t>6/30/2025</a:t>
             </a:fld>
             <a:endParaRPr lang="en-US"/>
           </a:p>
@@ -463,7 +463,7 @@
           <a:p>
             <a:fld id="{2D1DF383-F48D-4C35-882C-8A26F25E24F6}" type="datetimeFigureOut">
               <a:rPr lang="en-US" smtClean="0"/>
-              <a:t>6/5/2025</a:t>
+              <a:t>6/30/2025</a:t>
             </a:fld>
             <a:endParaRPr lang="en-US"/>
           </a:p>
@@ -671,7 +671,7 @@
           <a:p>
             <a:fld id="{2D1DF383-F48D-4C35-882C-8A26F25E24F6}" type="datetimeFigureOut">
               <a:rPr lang="en-US" smtClean="0"/>
-              <a:t>6/5/2025</a:t>
+              <a:t>6/30/2025</a:t>
             </a:fld>
             <a:endParaRPr lang="en-US"/>
           </a:p>
@@ -869,7 +869,7 @@
           <a:p>
             <a:fld id="{2D1DF383-F48D-4C35-882C-8A26F25E24F6}" type="datetimeFigureOut">
               <a:rPr lang="en-US" smtClean="0"/>
-              <a:t>6/5/2025</a:t>
+              <a:t>6/30/2025</a:t>
             </a:fld>
             <a:endParaRPr lang="en-US"/>
           </a:p>
@@ -1144,7 +1144,7 @@
           <a:p>
             <a:fld id="{2D1DF383-F48D-4C35-882C-8A26F25E24F6}" type="datetimeFigureOut">
               <a:rPr lang="en-US" smtClean="0"/>
-              <a:t>6/5/2025</a:t>
+              <a:t>6/30/2025</a:t>
             </a:fld>
             <a:endParaRPr lang="en-US"/>
           </a:p>
@@ -1409,7 +1409,7 @@
           <a:p>
             <a:fld id="{2D1DF383-F48D-4C35-882C-8A26F25E24F6}" type="datetimeFigureOut">
               <a:rPr lang="en-US" smtClean="0"/>
-              <a:t>6/5/2025</a:t>
+              <a:t>6/30/2025</a:t>
             </a:fld>
             <a:endParaRPr lang="en-US"/>
           </a:p>
@@ -1821,7 +1821,7 @@
           <a:p>
             <a:fld id="{2D1DF383-F48D-4C35-882C-8A26F25E24F6}" type="datetimeFigureOut">
               <a:rPr lang="en-US" smtClean="0"/>
-              <a:t>6/5/2025</a:t>
+              <a:t>6/30/2025</a:t>
             </a:fld>
             <a:endParaRPr lang="en-US"/>
           </a:p>
@@ -1962,7 +1962,7 @@
           <a:p>
             <a:fld id="{2D1DF383-F48D-4C35-882C-8A26F25E24F6}" type="datetimeFigureOut">
               <a:rPr lang="en-US" smtClean="0"/>
-              <a:t>6/5/2025</a:t>
+              <a:t>6/30/2025</a:t>
             </a:fld>
             <a:endParaRPr lang="en-US"/>
           </a:p>
@@ -2075,7 +2075,7 @@
           <a:p>
             <a:fld id="{2D1DF383-F48D-4C35-882C-8A26F25E24F6}" type="datetimeFigureOut">
               <a:rPr lang="en-US" smtClean="0"/>
-              <a:t>6/5/2025</a:t>
+              <a:t>6/30/2025</a:t>
             </a:fld>
             <a:endParaRPr lang="en-US"/>
           </a:p>
@@ -2386,7 +2386,7 @@
           <a:p>
             <a:fld id="{2D1DF383-F48D-4C35-882C-8A26F25E24F6}" type="datetimeFigureOut">
               <a:rPr lang="en-US" smtClean="0"/>
-              <a:t>6/5/2025</a:t>
+              <a:t>6/30/2025</a:t>
             </a:fld>
             <a:endParaRPr lang="en-US"/>
           </a:p>
@@ -2674,7 +2674,7 @@
           <a:p>
             <a:fld id="{2D1DF383-F48D-4C35-882C-8A26F25E24F6}" type="datetimeFigureOut">
               <a:rPr lang="en-US" smtClean="0"/>
-              <a:t>6/5/2025</a:t>
+              <a:t>6/30/2025</a:t>
             </a:fld>
             <a:endParaRPr lang="en-US"/>
           </a:p>
@@ -2915,7 +2915,7 @@
           <a:p>
             <a:fld id="{2D1DF383-F48D-4C35-882C-8A26F25E24F6}" type="datetimeFigureOut">
               <a:rPr lang="en-US" smtClean="0"/>
-              <a:t>6/5/2025</a:t>
+              <a:t>6/30/2025</a:t>
             </a:fld>
             <a:endParaRPr lang="en-US"/>
           </a:p>

--- a/RAN_Intelligent_Controllers/research/Diagrams.pptx
+++ b/RAN_Intelligent_Controllers/research/Diagrams.pptx
@@ -9,9 +9,11 @@
     <p:sldId id="258" r:id="rId3"/>
     <p:sldId id="262" r:id="rId4"/>
     <p:sldId id="263" r:id="rId5"/>
-    <p:sldId id="259" r:id="rId6"/>
-    <p:sldId id="261" r:id="rId7"/>
-    <p:sldId id="260" r:id="rId8"/>
+    <p:sldId id="264" r:id="rId6"/>
+    <p:sldId id="265" r:id="rId7"/>
+    <p:sldId id="259" r:id="rId8"/>
+    <p:sldId id="261" r:id="rId9"/>
+    <p:sldId id="260" r:id="rId10"/>
   </p:sldIdLst>
   <p:sldSz cx="12192000" cy="6858000"/>
   <p:notesSz cx="6858000" cy="9144000"/>
@@ -265,7 +267,7 @@
           <a:p>
             <a:fld id="{2D1DF383-F48D-4C35-882C-8A26F25E24F6}" type="datetimeFigureOut">
               <a:rPr lang="en-US" smtClean="0"/>
-              <a:t>6/30/2025</a:t>
+              <a:t>7/9/2025</a:t>
             </a:fld>
             <a:endParaRPr lang="en-US"/>
           </a:p>
@@ -463,7 +465,7 @@
           <a:p>
             <a:fld id="{2D1DF383-F48D-4C35-882C-8A26F25E24F6}" type="datetimeFigureOut">
               <a:rPr lang="en-US" smtClean="0"/>
-              <a:t>6/30/2025</a:t>
+              <a:t>7/9/2025</a:t>
             </a:fld>
             <a:endParaRPr lang="en-US"/>
           </a:p>
@@ -671,7 +673,7 @@
           <a:p>
             <a:fld id="{2D1DF383-F48D-4C35-882C-8A26F25E24F6}" type="datetimeFigureOut">
               <a:rPr lang="en-US" smtClean="0"/>
-              <a:t>6/30/2025</a:t>
+              <a:t>7/9/2025</a:t>
             </a:fld>
             <a:endParaRPr lang="en-US"/>
           </a:p>
@@ -869,7 +871,7 @@
           <a:p>
             <a:fld id="{2D1DF383-F48D-4C35-882C-8A26F25E24F6}" type="datetimeFigureOut">
               <a:rPr lang="en-US" smtClean="0"/>
-              <a:t>6/30/2025</a:t>
+              <a:t>7/9/2025</a:t>
             </a:fld>
             <a:endParaRPr lang="en-US"/>
           </a:p>
@@ -1144,7 +1146,7 @@
           <a:p>
             <a:fld id="{2D1DF383-F48D-4C35-882C-8A26F25E24F6}" type="datetimeFigureOut">
               <a:rPr lang="en-US" smtClean="0"/>
-              <a:t>6/30/2025</a:t>
+              <a:t>7/9/2025</a:t>
             </a:fld>
             <a:endParaRPr lang="en-US"/>
           </a:p>
@@ -1409,7 +1411,7 @@
           <a:p>
             <a:fld id="{2D1DF383-F48D-4C35-882C-8A26F25E24F6}" type="datetimeFigureOut">
               <a:rPr lang="en-US" smtClean="0"/>
-              <a:t>6/30/2025</a:t>
+              <a:t>7/9/2025</a:t>
             </a:fld>
             <a:endParaRPr lang="en-US"/>
           </a:p>
@@ -1821,7 +1823,7 @@
           <a:p>
             <a:fld id="{2D1DF383-F48D-4C35-882C-8A26F25E24F6}" type="datetimeFigureOut">
               <a:rPr lang="en-US" smtClean="0"/>
-              <a:t>6/30/2025</a:t>
+              <a:t>7/9/2025</a:t>
             </a:fld>
             <a:endParaRPr lang="en-US"/>
           </a:p>
@@ -1962,7 +1964,7 @@
           <a:p>
             <a:fld id="{2D1DF383-F48D-4C35-882C-8A26F25E24F6}" type="datetimeFigureOut">
               <a:rPr lang="en-US" smtClean="0"/>
-              <a:t>6/30/2025</a:t>
+              <a:t>7/9/2025</a:t>
             </a:fld>
             <a:endParaRPr lang="en-US"/>
           </a:p>
@@ -2075,7 +2077,7 @@
           <a:p>
             <a:fld id="{2D1DF383-F48D-4C35-882C-8A26F25E24F6}" type="datetimeFigureOut">
               <a:rPr lang="en-US" smtClean="0"/>
-              <a:t>6/30/2025</a:t>
+              <a:t>7/9/2025</a:t>
             </a:fld>
             <a:endParaRPr lang="en-US"/>
           </a:p>
@@ -2386,7 +2388,7 @@
           <a:p>
             <a:fld id="{2D1DF383-F48D-4C35-882C-8A26F25E24F6}" type="datetimeFigureOut">
               <a:rPr lang="en-US" smtClean="0"/>
-              <a:t>6/30/2025</a:t>
+              <a:t>7/9/2025</a:t>
             </a:fld>
             <a:endParaRPr lang="en-US"/>
           </a:p>
@@ -2674,7 +2676,7 @@
           <a:p>
             <a:fld id="{2D1DF383-F48D-4C35-882C-8A26F25E24F6}" type="datetimeFigureOut">
               <a:rPr lang="en-US" smtClean="0"/>
-              <a:t>6/30/2025</a:t>
+              <a:t>7/9/2025</a:t>
             </a:fld>
             <a:endParaRPr lang="en-US"/>
           </a:p>
@@ -2915,7 +2917,7 @@
           <a:p>
             <a:fld id="{2D1DF383-F48D-4C35-882C-8A26F25E24F6}" type="datetimeFigureOut">
               <a:rPr lang="en-US" smtClean="0"/>
-              <a:t>6/30/2025</a:t>
+              <a:t>7/9/2025</a:t>
             </a:fld>
             <a:endParaRPr lang="en-US"/>
           </a:p>
@@ -3346,7 +3348,7 @@
         </p:nvGrpSpPr>
         <p:grpSpPr>
           <a:xfrm>
-            <a:off x="1850713" y="1650083"/>
+            <a:off x="2008561" y="1641915"/>
             <a:ext cx="8174878" cy="3574169"/>
             <a:chOff x="1850713" y="1650083"/>
             <a:chExt cx="8174878" cy="3574169"/>
@@ -6100,7 +6102,7 @@
                     <a:latin typeface="Times New Roman" panose="02020603050405020304" pitchFamily="18" charset="0"/>
                     <a:cs typeface="Times New Roman" panose="02020603050405020304" pitchFamily="18" charset="0"/>
                   </a:rPr>
-                  <a:t>RAN Control</a:t>
+                  <a:t>RIC Control</a:t>
                 </a:r>
                 <a:endParaRPr lang="en-US" sz="1200" i="1" dirty="0">
                   <a:latin typeface="Times New Roman" panose="02020603050405020304" pitchFamily="18" charset="0"/>
@@ -7674,7 +7676,7 @@
         </p:nvGrpSpPr>
         <p:grpSpPr>
           <a:xfrm>
-            <a:off x="1850713" y="1617089"/>
+            <a:off x="2008561" y="1641915"/>
             <a:ext cx="8174878" cy="3574169"/>
             <a:chOff x="1850713" y="1617089"/>
             <a:chExt cx="8174878" cy="3574169"/>
@@ -10477,7 +10479,7 @@
                     <a:latin typeface="Times New Roman" panose="02020603050405020304" pitchFamily="18" charset="0"/>
                     <a:cs typeface="Times New Roman" panose="02020603050405020304" pitchFamily="18" charset="0"/>
                   </a:rPr>
-                  <a:t>RAN Control</a:t>
+                  <a:t>RIC Control</a:t>
                 </a:r>
               </a:p>
             </p:txBody>
@@ -12040,7 +12042,7 @@
         </p:nvGrpSpPr>
         <p:grpSpPr>
           <a:xfrm>
-            <a:off x="575839" y="1513908"/>
+            <a:off x="496467" y="1900165"/>
             <a:ext cx="11199066" cy="3057669"/>
             <a:chOff x="575839" y="1513908"/>
             <a:chExt cx="11199066" cy="3057669"/>
@@ -12105,6 +12107,51 @@
             </a:p>
           </p:txBody>
         </p:sp>
+        <p:cxnSp>
+          <p:nvCxnSpPr>
+            <p:cNvPr id="380" name="Straight Connector 379">
+              <a:extLst>
+                <a:ext uri="{FF2B5EF4-FFF2-40B4-BE49-F238E27FC236}">
+                  <a16:creationId xmlns:a16="http://schemas.microsoft.com/office/drawing/2014/main" id="{AA778A2D-5D6E-872D-16E0-E2154F72147B}"/>
+                </a:ext>
+              </a:extLst>
+            </p:cNvPr>
+            <p:cNvCxnSpPr>
+              <a:cxnSpLocks/>
+              <a:stCxn id="277" idx="3"/>
+              <a:endCxn id="237" idx="1"/>
+            </p:cNvCxnSpPr>
+            <p:nvPr/>
+          </p:nvCxnSpPr>
+          <p:spPr>
+            <a:xfrm>
+              <a:off x="5817331" y="3559019"/>
+              <a:ext cx="680627" cy="243497"/>
+            </a:xfrm>
+            <a:prstGeom prst="line">
+              <a:avLst/>
+            </a:prstGeom>
+            <a:ln w="12700">
+              <a:solidFill>
+                <a:schemeClr val="tx1"/>
+              </a:solidFill>
+            </a:ln>
+          </p:spPr>
+          <p:style>
+            <a:lnRef idx="2">
+              <a:schemeClr val="accent1"/>
+            </a:lnRef>
+            <a:fillRef idx="0">
+              <a:schemeClr val="accent1"/>
+            </a:fillRef>
+            <a:effectRef idx="1">
+              <a:schemeClr val="accent1"/>
+            </a:effectRef>
+            <a:fontRef idx="minor">
+              <a:schemeClr val="tx1"/>
+            </a:fontRef>
+          </p:style>
+        </p:cxnSp>
         <p:cxnSp>
           <p:nvCxnSpPr>
             <p:cNvPr id="342" name="Straight Connector 341">
@@ -13754,9 +13801,9 @@
           <p:grpSpPr>
             <a:xfrm>
               <a:off x="8873989" y="1610328"/>
-              <a:ext cx="2860204" cy="738664"/>
+              <a:ext cx="2860204" cy="543694"/>
               <a:chOff x="8873989" y="2167447"/>
-              <a:chExt cx="2860204" cy="738664"/>
+              <a:chExt cx="2860204" cy="543694"/>
             </a:xfrm>
           </p:grpSpPr>
           <p:sp>
@@ -13774,7 +13821,7 @@
             <p:spPr>
               <a:xfrm>
                 <a:off x="8873989" y="2187920"/>
-                <a:ext cx="2787151" cy="705139"/>
+                <a:ext cx="2787151" cy="523221"/>
               </a:xfrm>
               <a:prstGeom prst="rect">
                 <a:avLst/>
@@ -13871,7 +13918,7 @@
             <p:spPr>
               <a:xfrm>
                 <a:off x="9147085" y="2167447"/>
-                <a:ext cx="2587108" cy="738664"/>
+                <a:ext cx="2587108" cy="523220"/>
               </a:xfrm>
               <a:prstGeom prst="rect">
                 <a:avLst/>
@@ -13905,15 +13952,6 @@
                   <a:t>Supported after adjusting configs</a:t>
                 </a:r>
               </a:p>
-              <a:p>
-                <a:r>
-                  <a:rPr lang="en-US" sz="1400" dirty="0">
-                    <a:latin typeface="Times New Roman" panose="02020603050405020304" pitchFamily="18" charset="0"/>
-                    <a:cs typeface="Times New Roman" panose="02020603050405020304" pitchFamily="18" charset="0"/>
-                  </a:rPr>
-                  <a:t>Presumably not supported</a:t>
-                </a:r>
-              </a:p>
             </p:txBody>
           </p:sp>
           <p:cxnSp>
@@ -13941,50 +13979,6 @@
               <a:ln w="12700">
                 <a:solidFill>
                   <a:schemeClr val="tx1"/>
-                </a:solidFill>
-                <a:prstDash val="sysDot"/>
-              </a:ln>
-            </p:spPr>
-            <p:style>
-              <a:lnRef idx="2">
-                <a:schemeClr val="dk1"/>
-              </a:lnRef>
-              <a:fillRef idx="0">
-                <a:schemeClr val="dk1"/>
-              </a:fillRef>
-              <a:effectRef idx="1">
-                <a:schemeClr val="dk1"/>
-              </a:effectRef>
-              <a:fontRef idx="minor">
-                <a:schemeClr val="tx1"/>
-              </a:fontRef>
-            </p:style>
-          </p:cxnSp>
-          <p:cxnSp>
-            <p:nvCxnSpPr>
-              <p:cNvPr id="8" name="Straight Connector 7">
-                <a:extLst>
-                  <a:ext uri="{FF2B5EF4-FFF2-40B4-BE49-F238E27FC236}">
-                    <a16:creationId xmlns:a16="http://schemas.microsoft.com/office/drawing/2014/main" id="{9C57C3EC-B1EB-B8F3-36AA-A15E64D94D01}"/>
-                  </a:ext>
-                </a:extLst>
-              </p:cNvPr>
-              <p:cNvCxnSpPr>
-                <a:cxnSpLocks/>
-              </p:cNvCxnSpPr>
-              <p:nvPr/>
-            </p:nvCxnSpPr>
-            <p:spPr>
-              <a:xfrm>
-                <a:off x="8967214" y="2758903"/>
-                <a:ext cx="210474" cy="0"/>
-              </a:xfrm>
-              <a:prstGeom prst="line">
-                <a:avLst/>
-              </a:prstGeom>
-              <a:ln w="12700">
-                <a:solidFill>
-                  <a:srgbClr val="C40E00"/>
                 </a:solidFill>
                 <a:prstDash val="sysDot"/>
               </a:ln>
@@ -14917,7 +14911,7 @@
             </a:prstGeom>
             <a:ln w="12700">
               <a:solidFill>
-                <a:srgbClr val="C40E00"/>
+                <a:schemeClr val="tx1"/>
               </a:solidFill>
               <a:prstDash val="sysDot"/>
             </a:ln>
@@ -15441,51 +15435,6 @@
         </p:cxnSp>
         <p:cxnSp>
           <p:nvCxnSpPr>
-            <p:cNvPr id="380" name="Straight Connector 379">
-              <a:extLst>
-                <a:ext uri="{FF2B5EF4-FFF2-40B4-BE49-F238E27FC236}">
-                  <a16:creationId xmlns:a16="http://schemas.microsoft.com/office/drawing/2014/main" id="{AA778A2D-5D6E-872D-16E0-E2154F72147B}"/>
-                </a:ext>
-              </a:extLst>
-            </p:cNvPr>
-            <p:cNvCxnSpPr>
-              <a:cxnSpLocks/>
-              <a:stCxn id="277" idx="3"/>
-              <a:endCxn id="237" idx="1"/>
-            </p:cNvCxnSpPr>
-            <p:nvPr/>
-          </p:nvCxnSpPr>
-          <p:spPr>
-            <a:xfrm>
-              <a:off x="5817331" y="3559019"/>
-              <a:ext cx="680627" cy="243497"/>
-            </a:xfrm>
-            <a:prstGeom prst="line">
-              <a:avLst/>
-            </a:prstGeom>
-            <a:ln w="12700">
-              <a:solidFill>
-                <a:schemeClr val="tx1"/>
-              </a:solidFill>
-            </a:ln>
-          </p:spPr>
-          <p:style>
-            <a:lnRef idx="2">
-              <a:schemeClr val="accent1"/>
-            </a:lnRef>
-            <a:fillRef idx="0">
-              <a:schemeClr val="accent1"/>
-            </a:fillRef>
-            <a:effectRef idx="1">
-              <a:schemeClr val="accent1"/>
-            </a:effectRef>
-            <a:fontRef idx="minor">
-              <a:schemeClr val="tx1"/>
-            </a:fontRef>
-          </p:style>
-        </p:cxnSp>
-        <p:cxnSp>
-          <p:nvCxnSpPr>
             <p:cNvPr id="359" name="Straight Connector 358">
               <a:extLst>
                 <a:ext uri="{FF2B5EF4-FFF2-40B4-BE49-F238E27FC236}">
@@ -15675,7 +15624,7 @@
         </p:nvGrpSpPr>
         <p:grpSpPr>
           <a:xfrm>
-            <a:off x="575839" y="1513908"/>
+            <a:off x="496467" y="1900165"/>
             <a:ext cx="11199066" cy="3057669"/>
             <a:chOff x="575839" y="1513908"/>
             <a:chExt cx="11199066" cy="3057669"/>
@@ -17445,9 +17394,9 @@
           <p:grpSpPr>
             <a:xfrm>
               <a:off x="8873989" y="1610328"/>
-              <a:ext cx="2860204" cy="738664"/>
+              <a:ext cx="2860204" cy="543694"/>
               <a:chOff x="8873989" y="2167447"/>
-              <a:chExt cx="2860204" cy="738664"/>
+              <a:chExt cx="2860204" cy="543694"/>
             </a:xfrm>
           </p:grpSpPr>
           <p:sp>
@@ -17465,7 +17414,7 @@
             <p:spPr>
               <a:xfrm>
                 <a:off x="8873989" y="2187920"/>
-                <a:ext cx="2787151" cy="705139"/>
+                <a:ext cx="2787151" cy="523221"/>
               </a:xfrm>
               <a:prstGeom prst="rect">
                 <a:avLst/>
@@ -17562,7 +17511,7 @@
             <p:spPr>
               <a:xfrm>
                 <a:off x="9147085" y="2167447"/>
-                <a:ext cx="2587108" cy="738664"/>
+                <a:ext cx="2587108" cy="523220"/>
               </a:xfrm>
               <a:prstGeom prst="rect">
                 <a:avLst/>
@@ -17605,18 +17554,6 @@
                   <a:t>Supported after adjusting configs</a:t>
                 </a:r>
               </a:p>
-              <a:p>
-                <a:r>
-                  <a:rPr lang="en-US" sz="1400" dirty="0">
-                    <a:solidFill>
-                      <a:schemeClr val="bg1"/>
-                    </a:solidFill>
-                    <a:latin typeface="Times New Roman" panose="02020603050405020304" pitchFamily="18" charset="0"/>
-                    <a:cs typeface="Times New Roman" panose="02020603050405020304" pitchFamily="18" charset="0"/>
-                  </a:rPr>
-                  <a:t>Presumably not supported</a:t>
-                </a:r>
-              </a:p>
             </p:txBody>
           </p:sp>
           <p:cxnSp>
@@ -17644,50 +17581,6 @@
               <a:ln w="12700">
                 <a:solidFill>
                   <a:schemeClr val="bg1"/>
-                </a:solidFill>
-                <a:prstDash val="sysDot"/>
-              </a:ln>
-            </p:spPr>
-            <p:style>
-              <a:lnRef idx="2">
-                <a:schemeClr val="dk1"/>
-              </a:lnRef>
-              <a:fillRef idx="0">
-                <a:schemeClr val="dk1"/>
-              </a:fillRef>
-              <a:effectRef idx="1">
-                <a:schemeClr val="dk1"/>
-              </a:effectRef>
-              <a:fontRef idx="minor">
-                <a:schemeClr val="tx1"/>
-              </a:fontRef>
-            </p:style>
-          </p:cxnSp>
-          <p:cxnSp>
-            <p:nvCxnSpPr>
-              <p:cNvPr id="217" name="Straight Connector 216">
-                <a:extLst>
-                  <a:ext uri="{FF2B5EF4-FFF2-40B4-BE49-F238E27FC236}">
-                    <a16:creationId xmlns:a16="http://schemas.microsoft.com/office/drawing/2014/main" id="{1513255B-3A22-D9AA-3E9C-3BD57F3D4D0A}"/>
-                  </a:ext>
-                </a:extLst>
-              </p:cNvPr>
-              <p:cNvCxnSpPr>
-                <a:cxnSpLocks/>
-              </p:cNvCxnSpPr>
-              <p:nvPr/>
-            </p:nvCxnSpPr>
-            <p:spPr>
-              <a:xfrm>
-                <a:off x="8967214" y="2758903"/>
-                <a:ext cx="210474" cy="0"/>
-              </a:xfrm>
-              <a:prstGeom prst="line">
-                <a:avLst/>
-              </a:prstGeom>
-              <a:ln w="12700">
-                <a:solidFill>
-                  <a:srgbClr val="FF7B61"/>
                 </a:solidFill>
                 <a:prstDash val="sysDot"/>
               </a:ln>
@@ -18606,7 +18499,7 @@
             </a:prstGeom>
             <a:ln w="12700">
               <a:solidFill>
-                <a:srgbClr val="FF7B61"/>
+                <a:schemeClr val="bg1"/>
               </a:solidFill>
               <a:prstDash val="sysDot"/>
             </a:ln>
@@ -19252,6 +19145,8613 @@
       </p:grpSpPr>
       <p:grpSp>
         <p:nvGrpSpPr>
+          <p:cNvPr id="2" name="Group 1">
+            <a:extLst>
+              <a:ext uri="{FF2B5EF4-FFF2-40B4-BE49-F238E27FC236}">
+                <a16:creationId xmlns:a16="http://schemas.microsoft.com/office/drawing/2014/main" id="{2E3AAF73-51F9-4678-9914-A34536EDBFF4}"/>
+              </a:ext>
+            </a:extLst>
+          </p:cNvPr>
+          <p:cNvGrpSpPr/>
+          <p:nvPr/>
+        </p:nvGrpSpPr>
+        <p:grpSpPr>
+          <a:xfrm>
+            <a:off x="2008561" y="1650083"/>
+            <a:ext cx="8174878" cy="3557833"/>
+            <a:chOff x="1850713" y="1650083"/>
+            <a:chExt cx="8174878" cy="3557833"/>
+          </a:xfrm>
+        </p:grpSpPr>
+        <p:sp>
+          <p:nvSpPr>
+            <p:cNvPr id="50" name="Rectangle: Rounded Corners 49">
+              <a:extLst>
+                <a:ext uri="{FF2B5EF4-FFF2-40B4-BE49-F238E27FC236}">
+                  <a16:creationId xmlns:a16="http://schemas.microsoft.com/office/drawing/2014/main" id="{2E48D905-0F3A-19B5-4417-05FA2C821E70}"/>
+                </a:ext>
+              </a:extLst>
+            </p:cNvPr>
+            <p:cNvSpPr/>
+            <p:nvPr/>
+          </p:nvSpPr>
+          <p:spPr>
+            <a:xfrm>
+              <a:off x="1850713" y="1650083"/>
+              <a:ext cx="8148856" cy="3557833"/>
+            </a:xfrm>
+            <a:prstGeom prst="roundRect">
+              <a:avLst>
+                <a:gd name="adj" fmla="val 2232"/>
+              </a:avLst>
+            </a:prstGeom>
+            <a:solidFill>
+              <a:srgbClr val="FFFFFF"/>
+            </a:solidFill>
+            <a:ln w="28575">
+              <a:noFill/>
+            </a:ln>
+          </p:spPr>
+          <p:style>
+            <a:lnRef idx="2">
+              <a:schemeClr val="accent1">
+                <a:shade val="15000"/>
+              </a:schemeClr>
+            </a:lnRef>
+            <a:fillRef idx="1">
+              <a:schemeClr val="accent1"/>
+            </a:fillRef>
+            <a:effectRef idx="0">
+              <a:schemeClr val="accent1"/>
+            </a:effectRef>
+            <a:fontRef idx="minor">
+              <a:schemeClr val="lt1"/>
+            </a:fontRef>
+          </p:style>
+          <p:txBody>
+            <a:bodyPr rtlCol="0" anchor="ctr"/>
+            <a:lstStyle/>
+            <a:p>
+              <a:pPr algn="ctr"/>
+              <a:endParaRPr lang="en-US" dirty="0">
+                <a:latin typeface="Times New Roman" panose="02020603050405020304" pitchFamily="18" charset="0"/>
+                <a:cs typeface="Times New Roman" panose="02020603050405020304" pitchFamily="18" charset="0"/>
+              </a:endParaRPr>
+            </a:p>
+          </p:txBody>
+        </p:sp>
+        <p:grpSp>
+          <p:nvGrpSpPr>
+            <p:cNvPr id="235" name="Group 234">
+              <a:extLst>
+                <a:ext uri="{FF2B5EF4-FFF2-40B4-BE49-F238E27FC236}">
+                  <a16:creationId xmlns:a16="http://schemas.microsoft.com/office/drawing/2014/main" id="{B29F7496-083E-C96A-A54B-96580005B0F0}"/>
+                </a:ext>
+              </a:extLst>
+            </p:cNvPr>
+            <p:cNvGrpSpPr/>
+            <p:nvPr/>
+          </p:nvGrpSpPr>
+          <p:grpSpPr>
+            <a:xfrm>
+              <a:off x="6715921" y="1757883"/>
+              <a:ext cx="3309670" cy="1432634"/>
+              <a:chOff x="4668372" y="1660130"/>
+              <a:chExt cx="3309670" cy="1432634"/>
+            </a:xfrm>
+          </p:grpSpPr>
+          <p:sp>
+            <p:nvSpPr>
+              <p:cNvPr id="51" name="Rectangle: Rounded Corners 50">
+                <a:extLst>
+                  <a:ext uri="{FF2B5EF4-FFF2-40B4-BE49-F238E27FC236}">
+                    <a16:creationId xmlns:a16="http://schemas.microsoft.com/office/drawing/2014/main" id="{0FFBFE9F-4487-F723-E9C3-8E9D6B819A45}"/>
+                  </a:ext>
+                </a:extLst>
+              </p:cNvPr>
+              <p:cNvSpPr/>
+              <p:nvPr/>
+            </p:nvSpPr>
+            <p:spPr>
+              <a:xfrm>
+                <a:off x="5183521" y="1660130"/>
+                <a:ext cx="2648141" cy="924852"/>
+              </a:xfrm>
+              <a:prstGeom prst="roundRect">
+                <a:avLst>
+                  <a:gd name="adj" fmla="val 8322"/>
+                </a:avLst>
+              </a:prstGeom>
+              <a:solidFill>
+                <a:schemeClr val="bg1">
+                  <a:lumMod val="85000"/>
+                </a:schemeClr>
+              </a:solidFill>
+              <a:ln w="12700">
+                <a:solidFill>
+                  <a:schemeClr val="tx1"/>
+                </a:solidFill>
+              </a:ln>
+            </p:spPr>
+            <p:style>
+              <a:lnRef idx="2">
+                <a:schemeClr val="accent1">
+                  <a:shade val="15000"/>
+                </a:schemeClr>
+              </a:lnRef>
+              <a:fillRef idx="1">
+                <a:schemeClr val="accent1"/>
+              </a:fillRef>
+              <a:effectRef idx="0">
+                <a:schemeClr val="accent1"/>
+              </a:effectRef>
+              <a:fontRef idx="minor">
+                <a:schemeClr val="lt1"/>
+              </a:fontRef>
+            </p:style>
+            <p:txBody>
+              <a:bodyPr rtlCol="0" anchor="ctr"/>
+              <a:lstStyle/>
+              <a:p>
+                <a:pPr algn="ctr"/>
+                <a:endParaRPr lang="en-US" dirty="0">
+                  <a:latin typeface="Times New Roman" panose="02020603050405020304" pitchFamily="18" charset="0"/>
+                  <a:cs typeface="Times New Roman" panose="02020603050405020304" pitchFamily="18" charset="0"/>
+                </a:endParaRPr>
+              </a:p>
+            </p:txBody>
+          </p:sp>
+          <p:grpSp>
+            <p:nvGrpSpPr>
+              <p:cNvPr id="234" name="Group 233">
+                <a:extLst>
+                  <a:ext uri="{FF2B5EF4-FFF2-40B4-BE49-F238E27FC236}">
+                    <a16:creationId xmlns:a16="http://schemas.microsoft.com/office/drawing/2014/main" id="{C8483D81-C738-EC8C-E9D4-9A607C41251A}"/>
+                  </a:ext>
+                </a:extLst>
+              </p:cNvPr>
+              <p:cNvGrpSpPr/>
+              <p:nvPr/>
+            </p:nvGrpSpPr>
+            <p:grpSpPr>
+              <a:xfrm>
+                <a:off x="4668372" y="2611103"/>
+                <a:ext cx="3309670" cy="481661"/>
+                <a:chOff x="4776684" y="2611103"/>
+                <a:chExt cx="3309670" cy="481661"/>
+              </a:xfrm>
+            </p:grpSpPr>
+            <p:sp>
+              <p:nvSpPr>
+                <p:cNvPr id="232" name="TextBox 231">
+                  <a:extLst>
+                    <a:ext uri="{FF2B5EF4-FFF2-40B4-BE49-F238E27FC236}">
+                      <a16:creationId xmlns:a16="http://schemas.microsoft.com/office/drawing/2014/main" id="{26CDB8BB-9B1B-2B00-A882-116D7D2D402E}"/>
+                    </a:ext>
+                  </a:extLst>
+                </p:cNvPr>
+                <p:cNvSpPr txBox="1"/>
+                <p:nvPr/>
+              </p:nvSpPr>
+              <p:spPr>
+                <a:xfrm>
+                  <a:off x="4776684" y="2611103"/>
+                  <a:ext cx="3309670" cy="307777"/>
+                </a:xfrm>
+                <a:prstGeom prst="rect">
+                  <a:avLst/>
+                </a:prstGeom>
+                <a:noFill/>
+              </p:spPr>
+              <p:txBody>
+                <a:bodyPr wrap="square">
+                  <a:spAutoFit/>
+                </a:bodyPr>
+                <a:lstStyle/>
+                <a:p>
+                  <a:pPr algn="ctr"/>
+                  <a:r>
+                    <a:rPr lang="en-US" sz="1400" b="1" dirty="0">
+                      <a:latin typeface="Times New Roman" panose="02020603050405020304" pitchFamily="18" charset="0"/>
+                      <a:cs typeface="Times New Roman" panose="02020603050405020304" pitchFamily="18" charset="0"/>
+                    </a:rPr>
+                    <a:t>S</a:t>
+                  </a:r>
+                  <a:r>
+                    <a:rPr lang="en-US" sz="1400" b="1" dirty="0">
+                      <a:solidFill>
+                        <a:schemeClr val="tx1"/>
+                      </a:solidFill>
+                      <a:latin typeface="Times New Roman" panose="02020603050405020304" pitchFamily="18" charset="0"/>
+                      <a:cs typeface="Times New Roman" panose="02020603050405020304" pitchFamily="18" charset="0"/>
+                    </a:rPr>
+                    <a:t>ervice Management and Orchestration</a:t>
+                  </a:r>
+                  <a:endParaRPr lang="en-US" sz="1400" b="1" dirty="0">
+                    <a:latin typeface="Times New Roman" panose="02020603050405020304" pitchFamily="18" charset="0"/>
+                    <a:cs typeface="Times New Roman" panose="02020603050405020304" pitchFamily="18" charset="0"/>
+                  </a:endParaRPr>
+                </a:p>
+              </p:txBody>
+            </p:sp>
+            <p:sp>
+              <p:nvSpPr>
+                <p:cNvPr id="233" name="TextBox 232">
+                  <a:extLst>
+                    <a:ext uri="{FF2B5EF4-FFF2-40B4-BE49-F238E27FC236}">
+                      <a16:creationId xmlns:a16="http://schemas.microsoft.com/office/drawing/2014/main" id="{62872B1E-AA5E-17AA-511A-1F419F129695}"/>
+                    </a:ext>
+                  </a:extLst>
+                </p:cNvPr>
+                <p:cNvSpPr txBox="1"/>
+                <p:nvPr/>
+              </p:nvSpPr>
+              <p:spPr>
+                <a:xfrm>
+                  <a:off x="5474325" y="2815765"/>
+                  <a:ext cx="2078132" cy="276999"/>
+                </a:xfrm>
+                <a:prstGeom prst="rect">
+                  <a:avLst/>
+                </a:prstGeom>
+                <a:noFill/>
+              </p:spPr>
+              <p:txBody>
+                <a:bodyPr wrap="square">
+                  <a:spAutoFit/>
+                </a:bodyPr>
+                <a:lstStyle/>
+                <a:p>
+                  <a:pPr marL="285750" indent="-285750">
+                    <a:buFont typeface="Arial" panose="020B0604020202020204" pitchFamily="34" charset="0"/>
+                    <a:buChar char="•"/>
+                  </a:pPr>
+                  <a:r>
+                    <a:rPr lang="en-US" sz="1200" dirty="0">
+                      <a:latin typeface="Times New Roman" panose="02020603050405020304" pitchFamily="18" charset="0"/>
+                      <a:cs typeface="Times New Roman" panose="02020603050405020304" pitchFamily="18" charset="0"/>
+                    </a:rPr>
+                    <a:t>O-RAN SC RIC</a:t>
+                  </a:r>
+                </a:p>
+              </p:txBody>
+            </p:sp>
+          </p:grpSp>
+        </p:grpSp>
+        <p:grpSp>
+          <p:nvGrpSpPr>
+            <p:cNvPr id="342" name="Group 341">
+              <a:extLst>
+                <a:ext uri="{FF2B5EF4-FFF2-40B4-BE49-F238E27FC236}">
+                  <a16:creationId xmlns:a16="http://schemas.microsoft.com/office/drawing/2014/main" id="{79B07A05-E871-6B63-E7A9-B641AD8D5BFA}"/>
+                </a:ext>
+              </a:extLst>
+            </p:cNvPr>
+            <p:cNvGrpSpPr/>
+            <p:nvPr/>
+          </p:nvGrpSpPr>
+          <p:grpSpPr>
+            <a:xfrm>
+              <a:off x="7230616" y="1866033"/>
+              <a:ext cx="2648142" cy="811016"/>
+              <a:chOff x="5142539" y="2107864"/>
+              <a:chExt cx="2648142" cy="811016"/>
+            </a:xfrm>
+          </p:grpSpPr>
+          <p:sp>
+            <p:nvSpPr>
+              <p:cNvPr id="343" name="Rectangle: Rounded Corners 342">
+                <a:extLst>
+                  <a:ext uri="{FF2B5EF4-FFF2-40B4-BE49-F238E27FC236}">
+                    <a16:creationId xmlns:a16="http://schemas.microsoft.com/office/drawing/2014/main" id="{0A3AA96D-BAE6-C7C4-642C-F015D4DEEBF5}"/>
+                  </a:ext>
+                </a:extLst>
+              </p:cNvPr>
+              <p:cNvSpPr/>
+              <p:nvPr/>
+            </p:nvSpPr>
+            <p:spPr>
+              <a:xfrm>
+                <a:off x="5323970" y="2107864"/>
+                <a:ext cx="2367244" cy="477118"/>
+              </a:xfrm>
+              <a:prstGeom prst="roundRect">
+                <a:avLst>
+                  <a:gd name="adj" fmla="val 14235"/>
+                </a:avLst>
+              </a:prstGeom>
+              <a:solidFill>
+                <a:schemeClr val="bg1">
+                  <a:lumMod val="95000"/>
+                </a:schemeClr>
+              </a:solidFill>
+              <a:ln w="12700">
+                <a:solidFill>
+                  <a:schemeClr val="tx1"/>
+                </a:solidFill>
+              </a:ln>
+            </p:spPr>
+            <p:style>
+              <a:lnRef idx="2">
+                <a:schemeClr val="accent1">
+                  <a:shade val="15000"/>
+                </a:schemeClr>
+              </a:lnRef>
+              <a:fillRef idx="1">
+                <a:schemeClr val="accent1"/>
+              </a:fillRef>
+              <a:effectRef idx="0">
+                <a:schemeClr val="accent1"/>
+              </a:effectRef>
+              <a:fontRef idx="minor">
+                <a:schemeClr val="lt1"/>
+              </a:fontRef>
+            </p:style>
+            <p:txBody>
+              <a:bodyPr rtlCol="0" anchor="ctr"/>
+              <a:lstStyle/>
+              <a:p>
+                <a:pPr algn="ctr"/>
+                <a:endParaRPr lang="en-US" dirty="0">
+                  <a:latin typeface="Times New Roman" panose="02020603050405020304" pitchFamily="18" charset="0"/>
+                  <a:cs typeface="Times New Roman" panose="02020603050405020304" pitchFamily="18" charset="0"/>
+                </a:endParaRPr>
+              </a:p>
+            </p:txBody>
+          </p:sp>
+          <p:sp>
+            <p:nvSpPr>
+              <p:cNvPr id="345" name="TextBox 344">
+                <a:extLst>
+                  <a:ext uri="{FF2B5EF4-FFF2-40B4-BE49-F238E27FC236}">
+                    <a16:creationId xmlns:a16="http://schemas.microsoft.com/office/drawing/2014/main" id="{934EF4DA-BF0E-CE3A-E425-F1FE25767794}"/>
+                  </a:ext>
+                </a:extLst>
+              </p:cNvPr>
+              <p:cNvSpPr txBox="1"/>
+              <p:nvPr/>
+            </p:nvSpPr>
+            <p:spPr>
+              <a:xfrm>
+                <a:off x="5142539" y="2611103"/>
+                <a:ext cx="2648142" cy="307777"/>
+              </a:xfrm>
+              <a:prstGeom prst="rect">
+                <a:avLst/>
+              </a:prstGeom>
+              <a:noFill/>
+            </p:spPr>
+            <p:txBody>
+              <a:bodyPr wrap="square">
+                <a:spAutoFit/>
+              </a:bodyPr>
+              <a:lstStyle/>
+              <a:p>
+                <a:pPr algn="ctr"/>
+                <a:r>
+                  <a:rPr lang="en-US" sz="1400" b="1" dirty="0">
+                    <a:latin typeface="Times New Roman" panose="02020603050405020304" pitchFamily="18" charset="0"/>
+                    <a:cs typeface="Times New Roman" panose="02020603050405020304" pitchFamily="18" charset="0"/>
+                  </a:rPr>
+                  <a:t>Non-RT RIC</a:t>
+                </a:r>
+              </a:p>
+            </p:txBody>
+          </p:sp>
+        </p:grpSp>
+        <p:sp>
+          <p:nvSpPr>
+            <p:cNvPr id="141" name="Rectangle: Rounded Corners 140">
+              <a:extLst>
+                <a:ext uri="{FF2B5EF4-FFF2-40B4-BE49-F238E27FC236}">
+                  <a16:creationId xmlns:a16="http://schemas.microsoft.com/office/drawing/2014/main" id="{D204B0F3-4A57-4AB3-AAF6-895DEFA28BDA}"/>
+                </a:ext>
+              </a:extLst>
+            </p:cNvPr>
+            <p:cNvSpPr/>
+            <p:nvPr/>
+          </p:nvSpPr>
+          <p:spPr>
+            <a:xfrm>
+              <a:off x="1850713" y="1650083"/>
+              <a:ext cx="8148856" cy="3557833"/>
+            </a:xfrm>
+            <a:prstGeom prst="roundRect">
+              <a:avLst>
+                <a:gd name="adj" fmla="val 2232"/>
+              </a:avLst>
+            </a:prstGeom>
+            <a:noFill/>
+            <a:ln w="12700">
+              <a:solidFill>
+                <a:schemeClr val="tx1"/>
+              </a:solidFill>
+            </a:ln>
+          </p:spPr>
+          <p:style>
+            <a:lnRef idx="2">
+              <a:schemeClr val="accent1">
+                <a:shade val="15000"/>
+              </a:schemeClr>
+            </a:lnRef>
+            <a:fillRef idx="1">
+              <a:schemeClr val="accent1"/>
+            </a:fillRef>
+            <a:effectRef idx="0">
+              <a:schemeClr val="accent1"/>
+            </a:effectRef>
+            <a:fontRef idx="minor">
+              <a:schemeClr val="lt1"/>
+            </a:fontRef>
+          </p:style>
+          <p:txBody>
+            <a:bodyPr rtlCol="0" anchor="ctr"/>
+            <a:lstStyle/>
+            <a:p>
+              <a:pPr algn="ctr"/>
+              <a:endParaRPr lang="en-US" dirty="0">
+                <a:latin typeface="Times New Roman" panose="02020603050405020304" pitchFamily="18" charset="0"/>
+                <a:cs typeface="Times New Roman" panose="02020603050405020304" pitchFamily="18" charset="0"/>
+              </a:endParaRPr>
+            </a:p>
+          </p:txBody>
+        </p:sp>
+        <p:grpSp>
+          <p:nvGrpSpPr>
+            <p:cNvPr id="15" name="Group 14">
+              <a:extLst>
+                <a:ext uri="{FF2B5EF4-FFF2-40B4-BE49-F238E27FC236}">
+                  <a16:creationId xmlns:a16="http://schemas.microsoft.com/office/drawing/2014/main" id="{21D0C2BD-70E8-4233-A01A-8CB16B3F18F4}"/>
+                </a:ext>
+              </a:extLst>
+            </p:cNvPr>
+            <p:cNvGrpSpPr/>
+            <p:nvPr/>
+          </p:nvGrpSpPr>
+          <p:grpSpPr>
+            <a:xfrm>
+              <a:off x="1980485" y="1754073"/>
+              <a:ext cx="8019085" cy="3412689"/>
+              <a:chOff x="2039317" y="1879053"/>
+              <a:chExt cx="8019085" cy="3412689"/>
+            </a:xfrm>
+          </p:grpSpPr>
+          <p:grpSp>
+            <p:nvGrpSpPr>
+              <p:cNvPr id="213" name="Group 212">
+                <a:extLst>
+                  <a:ext uri="{FF2B5EF4-FFF2-40B4-BE49-F238E27FC236}">
+                    <a16:creationId xmlns:a16="http://schemas.microsoft.com/office/drawing/2014/main" id="{407A30F9-1C57-B457-62A9-3E1F1B438814}"/>
+                  </a:ext>
+                </a:extLst>
+              </p:cNvPr>
+              <p:cNvGrpSpPr/>
+              <p:nvPr/>
+            </p:nvGrpSpPr>
+            <p:grpSpPr>
+              <a:xfrm>
+                <a:off x="2039317" y="3492451"/>
+                <a:ext cx="8019085" cy="1799291"/>
+                <a:chOff x="739346" y="2194877"/>
+                <a:chExt cx="8019085" cy="1799291"/>
+              </a:xfrm>
+            </p:grpSpPr>
+            <p:grpSp>
+              <p:nvGrpSpPr>
+                <p:cNvPr id="173" name="Group 172">
+                  <a:extLst>
+                    <a:ext uri="{FF2B5EF4-FFF2-40B4-BE49-F238E27FC236}">
+                      <a16:creationId xmlns:a16="http://schemas.microsoft.com/office/drawing/2014/main" id="{E0FC3736-1AD3-51F7-FF1E-A65B147E173B}"/>
+                    </a:ext>
+                  </a:extLst>
+                </p:cNvPr>
+                <p:cNvGrpSpPr/>
+                <p:nvPr/>
+              </p:nvGrpSpPr>
+              <p:grpSpPr>
+                <a:xfrm>
+                  <a:off x="739346" y="2194877"/>
+                  <a:ext cx="2912140" cy="1614827"/>
+                  <a:chOff x="739346" y="2194877"/>
+                  <a:chExt cx="2912140" cy="1614827"/>
+                </a:xfrm>
+              </p:grpSpPr>
+              <p:grpSp>
+                <p:nvGrpSpPr>
+                  <p:cNvPr id="103" name="Group 102">
+                    <a:extLst>
+                      <a:ext uri="{FF2B5EF4-FFF2-40B4-BE49-F238E27FC236}">
+                        <a16:creationId xmlns:a16="http://schemas.microsoft.com/office/drawing/2014/main" id="{399C3882-C87A-011B-0BCD-46C25509AA50}"/>
+                      </a:ext>
+                    </a:extLst>
+                  </p:cNvPr>
+                  <p:cNvGrpSpPr/>
+                  <p:nvPr/>
+                </p:nvGrpSpPr>
+                <p:grpSpPr>
+                  <a:xfrm>
+                    <a:off x="739346" y="2194877"/>
+                    <a:ext cx="2912140" cy="1233863"/>
+                    <a:chOff x="1605224" y="1599108"/>
+                    <a:chExt cx="2912140" cy="1233863"/>
+                  </a:xfrm>
+                </p:grpSpPr>
+                <p:sp>
+                  <p:nvSpPr>
+                    <p:cNvPr id="99" name="TextBox 98">
+                      <a:extLst>
+                        <a:ext uri="{FF2B5EF4-FFF2-40B4-BE49-F238E27FC236}">
+                          <a16:creationId xmlns:a16="http://schemas.microsoft.com/office/drawing/2014/main" id="{B2146AB4-4D02-128A-EC98-CAF89459C873}"/>
+                        </a:ext>
+                      </a:extLst>
+                    </p:cNvPr>
+                    <p:cNvSpPr txBox="1"/>
+                    <p:nvPr/>
+                  </p:nvSpPr>
+                  <p:spPr>
+                    <a:xfrm>
+                      <a:off x="1605224" y="2525194"/>
+                      <a:ext cx="2239249" cy="307777"/>
+                    </a:xfrm>
+                    <a:prstGeom prst="rect">
+                      <a:avLst/>
+                    </a:prstGeom>
+                    <a:noFill/>
+                  </p:spPr>
+                  <p:txBody>
+                    <a:bodyPr wrap="square">
+                      <a:spAutoFit/>
+                    </a:bodyPr>
+                    <a:lstStyle/>
+                    <a:p>
+                      <a:pPr algn="ctr"/>
+                      <a:r>
+                        <a:rPr lang="en-US" sz="1400" b="1" dirty="0">
+                          <a:solidFill>
+                            <a:schemeClr val="tx1"/>
+                          </a:solidFill>
+                          <a:latin typeface="Times New Roman" panose="02020603050405020304" pitchFamily="18" charset="0"/>
+                          <a:cs typeface="Times New Roman" panose="02020603050405020304" pitchFamily="18" charset="0"/>
+                        </a:rPr>
+                        <a:t>User Equipment</a:t>
+                      </a:r>
+                      <a:endParaRPr lang="en-US" sz="1400" b="1" dirty="0">
+                        <a:latin typeface="Times New Roman" panose="02020603050405020304" pitchFamily="18" charset="0"/>
+                        <a:cs typeface="Times New Roman" panose="02020603050405020304" pitchFamily="18" charset="0"/>
+                      </a:endParaRPr>
+                    </a:p>
+                  </p:txBody>
+                </p:sp>
+                <p:grpSp>
+                  <p:nvGrpSpPr>
+                    <p:cNvPr id="102" name="Group 101">
+                      <a:extLst>
+                        <a:ext uri="{FF2B5EF4-FFF2-40B4-BE49-F238E27FC236}">
+                          <a16:creationId xmlns:a16="http://schemas.microsoft.com/office/drawing/2014/main" id="{19888747-9170-E4AD-78F2-2081289DA324}"/>
+                        </a:ext>
+                      </a:extLst>
+                    </p:cNvPr>
+                    <p:cNvGrpSpPr/>
+                    <p:nvPr/>
+                  </p:nvGrpSpPr>
+                  <p:grpSpPr>
+                    <a:xfrm>
+                      <a:off x="1605224" y="1599108"/>
+                      <a:ext cx="2912140" cy="923272"/>
+                      <a:chOff x="1605224" y="1599108"/>
+                      <a:chExt cx="2912140" cy="923272"/>
+                    </a:xfrm>
+                  </p:grpSpPr>
+                  <p:grpSp>
+                    <p:nvGrpSpPr>
+                      <p:cNvPr id="98" name="Group 97">
+                        <a:extLst>
+                          <a:ext uri="{FF2B5EF4-FFF2-40B4-BE49-F238E27FC236}">
+                            <a16:creationId xmlns:a16="http://schemas.microsoft.com/office/drawing/2014/main" id="{634D968C-4907-C8AB-1683-500984EDAB8F}"/>
+                          </a:ext>
+                        </a:extLst>
+                      </p:cNvPr>
+                      <p:cNvGrpSpPr/>
+                      <p:nvPr/>
+                    </p:nvGrpSpPr>
+                    <p:grpSpPr>
+                      <a:xfrm>
+                        <a:off x="1605224" y="1599108"/>
+                        <a:ext cx="2283381" cy="923272"/>
+                        <a:chOff x="1746885" y="5238877"/>
+                        <a:chExt cx="2283381" cy="923272"/>
+                      </a:xfrm>
+                    </p:grpSpPr>
+                    <p:grpSp>
+                      <p:nvGrpSpPr>
+                        <p:cNvPr id="91" name="Group 90">
+                          <a:extLst>
+                            <a:ext uri="{FF2B5EF4-FFF2-40B4-BE49-F238E27FC236}">
+                              <a16:creationId xmlns:a16="http://schemas.microsoft.com/office/drawing/2014/main" id="{100CEE3F-0B1F-51C4-640B-525CC77D1754}"/>
+                            </a:ext>
+                          </a:extLst>
+                        </p:cNvPr>
+                        <p:cNvGrpSpPr/>
+                        <p:nvPr/>
+                      </p:nvGrpSpPr>
+                      <p:grpSpPr>
+                        <a:xfrm>
+                          <a:off x="1746885" y="5238877"/>
+                          <a:ext cx="2239249" cy="923272"/>
+                          <a:chOff x="1590040" y="5303322"/>
+                          <a:chExt cx="2374765" cy="923272"/>
+                        </a:xfrm>
+                      </p:grpSpPr>
+                      <p:sp>
+                        <p:nvSpPr>
+                          <p:cNvPr id="90" name="Rectangle: Rounded Corners 89">
+                            <a:extLst>
+                              <a:ext uri="{FF2B5EF4-FFF2-40B4-BE49-F238E27FC236}">
+                                <a16:creationId xmlns:a16="http://schemas.microsoft.com/office/drawing/2014/main" id="{6FBF2E9F-5D77-9ADE-7152-C81C1A733CD2}"/>
+                              </a:ext>
+                            </a:extLst>
+                          </p:cNvPr>
+                          <p:cNvSpPr/>
+                          <p:nvPr/>
+                        </p:nvSpPr>
+                        <p:spPr>
+                          <a:xfrm>
+                            <a:off x="1590040" y="5303322"/>
+                            <a:ext cx="2374765" cy="923272"/>
+                          </a:xfrm>
+                          <a:prstGeom prst="roundRect">
+                            <a:avLst>
+                              <a:gd name="adj" fmla="val 9466"/>
+                            </a:avLst>
+                          </a:prstGeom>
+                          <a:solidFill>
+                            <a:schemeClr val="bg1">
+                              <a:lumMod val="85000"/>
+                            </a:schemeClr>
+                          </a:solidFill>
+                          <a:ln w="28575">
+                            <a:noFill/>
+                          </a:ln>
+                        </p:spPr>
+                        <p:style>
+                          <a:lnRef idx="2">
+                            <a:schemeClr val="accent1">
+                              <a:shade val="15000"/>
+                            </a:schemeClr>
+                          </a:lnRef>
+                          <a:fillRef idx="1">
+                            <a:schemeClr val="accent1"/>
+                          </a:fillRef>
+                          <a:effectRef idx="0">
+                            <a:schemeClr val="accent1"/>
+                          </a:effectRef>
+                          <a:fontRef idx="minor">
+                            <a:schemeClr val="lt1"/>
+                          </a:fontRef>
+                        </p:style>
+                        <p:txBody>
+                          <a:bodyPr rtlCol="0" anchor="ctr"/>
+                          <a:lstStyle/>
+                          <a:p>
+                            <a:pPr algn="ctr"/>
+                            <a:endParaRPr lang="en-US" dirty="0">
+                              <a:latin typeface="Times New Roman" panose="02020603050405020304" pitchFamily="18" charset="0"/>
+                              <a:cs typeface="Times New Roman" panose="02020603050405020304" pitchFamily="18" charset="0"/>
+                            </a:endParaRPr>
+                          </a:p>
+                        </p:txBody>
+                      </p:sp>
+                      <p:sp>
+                        <p:nvSpPr>
+                          <p:cNvPr id="87" name="Rectangle 86">
+                            <a:extLst>
+                              <a:ext uri="{FF2B5EF4-FFF2-40B4-BE49-F238E27FC236}">
+                                <a16:creationId xmlns:a16="http://schemas.microsoft.com/office/drawing/2014/main" id="{2226E9FD-9D7F-477B-5597-2AEA05E3F34C}"/>
+                              </a:ext>
+                            </a:extLst>
+                          </p:cNvPr>
+                          <p:cNvSpPr/>
+                          <p:nvPr/>
+                        </p:nvSpPr>
+                        <p:spPr>
+                          <a:xfrm>
+                            <a:off x="1590040" y="5603165"/>
+                            <a:ext cx="2374765" cy="323587"/>
+                          </a:xfrm>
+                          <a:prstGeom prst="rect">
+                            <a:avLst/>
+                          </a:prstGeom>
+                          <a:solidFill>
+                            <a:schemeClr val="bg1">
+                              <a:lumMod val="95000"/>
+                            </a:schemeClr>
+                          </a:solidFill>
+                          <a:ln>
+                            <a:noFill/>
+                          </a:ln>
+                        </p:spPr>
+                        <p:style>
+                          <a:lnRef idx="2">
+                            <a:schemeClr val="accent1">
+                              <a:shade val="15000"/>
+                            </a:schemeClr>
+                          </a:lnRef>
+                          <a:fillRef idx="1">
+                            <a:schemeClr val="accent1"/>
+                          </a:fillRef>
+                          <a:effectRef idx="0">
+                            <a:schemeClr val="accent1"/>
+                          </a:effectRef>
+                          <a:fontRef idx="minor">
+                            <a:schemeClr val="lt1"/>
+                          </a:fontRef>
+                        </p:style>
+                        <p:txBody>
+                          <a:bodyPr rtlCol="0" anchor="ctr"/>
+                          <a:lstStyle/>
+                          <a:p>
+                            <a:pPr algn="ctr"/>
+                            <a:endParaRPr lang="en-US"/>
+                          </a:p>
+                        </p:txBody>
+                      </p:sp>
+                      <p:sp>
+                        <p:nvSpPr>
+                          <p:cNvPr id="88" name="Rectangle: Rounded Corners 87">
+                            <a:extLst>
+                              <a:ext uri="{FF2B5EF4-FFF2-40B4-BE49-F238E27FC236}">
+                                <a16:creationId xmlns:a16="http://schemas.microsoft.com/office/drawing/2014/main" id="{87BCEB7F-0233-D2C1-3A52-344B63D9C7C2}"/>
+                              </a:ext>
+                            </a:extLst>
+                          </p:cNvPr>
+                          <p:cNvSpPr/>
+                          <p:nvPr/>
+                        </p:nvSpPr>
+                        <p:spPr>
+                          <a:xfrm>
+                            <a:off x="1590040" y="5303322"/>
+                            <a:ext cx="2374765" cy="923272"/>
+                          </a:xfrm>
+                          <a:prstGeom prst="roundRect">
+                            <a:avLst>
+                              <a:gd name="adj" fmla="val 9879"/>
+                            </a:avLst>
+                          </a:prstGeom>
+                          <a:noFill/>
+                          <a:ln w="12700">
+                            <a:solidFill>
+                              <a:schemeClr val="tx1"/>
+                            </a:solidFill>
+                          </a:ln>
+                        </p:spPr>
+                        <p:style>
+                          <a:lnRef idx="2">
+                            <a:schemeClr val="accent1">
+                              <a:shade val="15000"/>
+                            </a:schemeClr>
+                          </a:lnRef>
+                          <a:fillRef idx="1">
+                            <a:schemeClr val="accent1"/>
+                          </a:fillRef>
+                          <a:effectRef idx="0">
+                            <a:schemeClr val="accent1"/>
+                          </a:effectRef>
+                          <a:fontRef idx="minor">
+                            <a:schemeClr val="lt1"/>
+                          </a:fontRef>
+                        </p:style>
+                        <p:txBody>
+                          <a:bodyPr rtlCol="0" anchor="ctr"/>
+                          <a:lstStyle/>
+                          <a:p>
+                            <a:pPr algn="ctr"/>
+                            <a:endParaRPr lang="en-US" dirty="0">
+                              <a:latin typeface="Times New Roman" panose="02020603050405020304" pitchFamily="18" charset="0"/>
+                              <a:cs typeface="Times New Roman" panose="02020603050405020304" pitchFamily="18" charset="0"/>
+                            </a:endParaRPr>
+                          </a:p>
+                        </p:txBody>
+                      </p:sp>
+                    </p:grpSp>
+                    <p:sp>
+                      <p:nvSpPr>
+                        <p:cNvPr id="83" name="TextBox 82">
+                          <a:extLst>
+                            <a:ext uri="{FF2B5EF4-FFF2-40B4-BE49-F238E27FC236}">
+                              <a16:creationId xmlns:a16="http://schemas.microsoft.com/office/drawing/2014/main" id="{048302D5-242E-EB61-E965-DD80D6F6BCB2}"/>
+                            </a:ext>
+                          </a:extLst>
+                        </p:cNvPr>
+                        <p:cNvSpPr txBox="1"/>
+                        <p:nvPr/>
+                      </p:nvSpPr>
+                      <p:spPr>
+                        <a:xfrm>
+                          <a:off x="2060863" y="5848816"/>
+                          <a:ext cx="1969403" cy="307777"/>
+                        </a:xfrm>
+                        <a:prstGeom prst="rect">
+                          <a:avLst/>
+                        </a:prstGeom>
+                        <a:noFill/>
+                      </p:spPr>
+                      <p:txBody>
+                        <a:bodyPr wrap="square">
+                          <a:spAutoFit/>
+                        </a:bodyPr>
+                        <a:lstStyle/>
+                        <a:p>
+                          <a:pPr algn="ctr"/>
+                          <a:r>
+                            <a:rPr lang="en-US" sz="1400" dirty="0">
+                              <a:solidFill>
+                                <a:schemeClr val="tx1"/>
+                              </a:solidFill>
+                              <a:latin typeface="Times New Roman" panose="02020603050405020304" pitchFamily="18" charset="0"/>
+                              <a:cs typeface="Times New Roman" panose="02020603050405020304" pitchFamily="18" charset="0"/>
+                            </a:rPr>
+                            <a:t>RF Simulator / </a:t>
+                          </a:r>
+                          <a:r>
+                            <a:rPr lang="en-US" sz="1400" dirty="0" err="1">
+                              <a:solidFill>
+                                <a:schemeClr val="tx1"/>
+                              </a:solidFill>
+                              <a:latin typeface="Times New Roman" panose="02020603050405020304" pitchFamily="18" charset="0"/>
+                              <a:cs typeface="Times New Roman" panose="02020603050405020304" pitchFamily="18" charset="0"/>
+                            </a:rPr>
+                            <a:t>ZeroMQ</a:t>
+                          </a:r>
+                          <a:endParaRPr lang="en-US" sz="1400" dirty="0">
+                            <a:latin typeface="Times New Roman" panose="02020603050405020304" pitchFamily="18" charset="0"/>
+                            <a:cs typeface="Times New Roman" panose="02020603050405020304" pitchFamily="18" charset="0"/>
+                          </a:endParaRPr>
+                        </a:p>
+                      </p:txBody>
+                    </p:sp>
+                    <p:sp>
+                      <p:nvSpPr>
+                        <p:cNvPr id="84" name="TextBox 83">
+                          <a:extLst>
+                            <a:ext uri="{FF2B5EF4-FFF2-40B4-BE49-F238E27FC236}">
+                              <a16:creationId xmlns:a16="http://schemas.microsoft.com/office/drawing/2014/main" id="{4F24F3AA-FD33-1A2E-0461-D2F1702107F3}"/>
+                            </a:ext>
+                          </a:extLst>
+                        </p:cNvPr>
+                        <p:cNvSpPr txBox="1"/>
+                        <p:nvPr/>
+                      </p:nvSpPr>
+                      <p:spPr>
+                        <a:xfrm>
+                          <a:off x="2060863" y="5549790"/>
+                          <a:ext cx="1969403" cy="307777"/>
+                        </a:xfrm>
+                        <a:prstGeom prst="rect">
+                          <a:avLst/>
+                        </a:prstGeom>
+                        <a:noFill/>
+                      </p:spPr>
+                      <p:txBody>
+                        <a:bodyPr wrap="square">
+                          <a:spAutoFit/>
+                        </a:bodyPr>
+                        <a:lstStyle/>
+                        <a:p>
+                          <a:pPr algn="ctr"/>
+                          <a:r>
+                            <a:rPr lang="en-US" sz="1400" dirty="0">
+                              <a:solidFill>
+                                <a:schemeClr val="tx1"/>
+                              </a:solidFill>
+                              <a:latin typeface="Times New Roman" panose="02020603050405020304" pitchFamily="18" charset="0"/>
+                              <a:cs typeface="Times New Roman" panose="02020603050405020304" pitchFamily="18" charset="0"/>
+                            </a:rPr>
+                            <a:t>5G Mobile Phone</a:t>
+                          </a:r>
+                          <a:endParaRPr lang="en-US" sz="1400" dirty="0">
+                            <a:latin typeface="Times New Roman" panose="02020603050405020304" pitchFamily="18" charset="0"/>
+                            <a:cs typeface="Times New Roman" panose="02020603050405020304" pitchFamily="18" charset="0"/>
+                          </a:endParaRPr>
+                        </a:p>
+                      </p:txBody>
+                    </p:sp>
+                    <p:sp>
+                      <p:nvSpPr>
+                        <p:cNvPr id="85" name="TextBox 84">
+                          <a:extLst>
+                            <a:ext uri="{FF2B5EF4-FFF2-40B4-BE49-F238E27FC236}">
+                              <a16:creationId xmlns:a16="http://schemas.microsoft.com/office/drawing/2014/main" id="{C39D088B-736E-499D-7E43-E5FB7908AB37}"/>
+                            </a:ext>
+                          </a:extLst>
+                        </p:cNvPr>
+                        <p:cNvSpPr txBox="1"/>
+                        <p:nvPr/>
+                      </p:nvSpPr>
+                      <p:spPr>
+                        <a:xfrm>
+                          <a:off x="2060863" y="5250764"/>
+                          <a:ext cx="1969403" cy="307777"/>
+                        </a:xfrm>
+                        <a:prstGeom prst="rect">
+                          <a:avLst/>
+                        </a:prstGeom>
+                        <a:noFill/>
+                      </p:spPr>
+                      <p:txBody>
+                        <a:bodyPr wrap="square">
+                          <a:spAutoFit/>
+                        </a:bodyPr>
+                        <a:lstStyle/>
+                        <a:p>
+                          <a:pPr algn="ctr"/>
+                          <a:r>
+                            <a:rPr lang="en-US" sz="1400" dirty="0">
+                              <a:solidFill>
+                                <a:schemeClr val="tx1"/>
+                              </a:solidFill>
+                              <a:latin typeface="Times New Roman" panose="02020603050405020304" pitchFamily="18" charset="0"/>
+                              <a:cs typeface="Times New Roman" panose="02020603050405020304" pitchFamily="18" charset="0"/>
+                            </a:rPr>
+                            <a:t>Software-Defined Radio</a:t>
+                          </a:r>
+                          <a:endParaRPr lang="en-US" sz="1400" dirty="0">
+                            <a:latin typeface="Times New Roman" panose="02020603050405020304" pitchFamily="18" charset="0"/>
+                            <a:cs typeface="Times New Roman" panose="02020603050405020304" pitchFamily="18" charset="0"/>
+                          </a:endParaRPr>
+                        </a:p>
+                      </p:txBody>
+                    </p:sp>
+                    <p:pic>
+                      <p:nvPicPr>
+                        <p:cNvPr id="93" name="Graphic 92" descr="Smart Phone with solid fill">
+                          <a:extLst>
+                            <a:ext uri="{FF2B5EF4-FFF2-40B4-BE49-F238E27FC236}">
+                              <a16:creationId xmlns:a16="http://schemas.microsoft.com/office/drawing/2014/main" id="{7F860B22-AFCA-FBEB-515A-AE4BE6CE5C77}"/>
+                            </a:ext>
+                          </a:extLst>
+                        </p:cNvPr>
+                        <p:cNvPicPr>
+                          <a:picLocks noChangeAspect="1"/>
+                        </p:cNvPicPr>
+                        <p:nvPr/>
+                      </p:nvPicPr>
+                      <p:blipFill>
+                        <a:blip r:embed="rId2">
+                          <a:extLst>
+                            <a:ext uri="{96DAC541-7B7A-43D3-8B79-37D633B846F1}">
+                              <asvg:svgBlip xmlns:asvg="http://schemas.microsoft.com/office/drawing/2016/SVG/main" r:embed="rId3"/>
+                            </a:ext>
+                          </a:extLst>
+                        </a:blip>
+                        <a:stretch>
+                          <a:fillRect/>
+                        </a:stretch>
+                      </p:blipFill>
+                      <p:spPr>
+                        <a:xfrm>
+                          <a:off x="1894659" y="5582141"/>
+                          <a:ext cx="221508" cy="221506"/>
+                        </a:xfrm>
+                        <a:prstGeom prst="rect">
+                          <a:avLst/>
+                        </a:prstGeom>
+                      </p:spPr>
+                    </p:pic>
+                    <p:pic>
+                      <p:nvPicPr>
+                        <p:cNvPr id="95" name="Graphic 94">
+                          <a:extLst>
+                            <a:ext uri="{FF2B5EF4-FFF2-40B4-BE49-F238E27FC236}">
+                              <a16:creationId xmlns:a16="http://schemas.microsoft.com/office/drawing/2014/main" id="{617038CE-6DA9-9CAA-9364-7DF6A08B02DC}"/>
+                            </a:ext>
+                          </a:extLst>
+                        </p:cNvPr>
+                        <p:cNvPicPr>
+                          <a:picLocks noChangeAspect="1"/>
+                        </p:cNvPicPr>
+                        <p:nvPr/>
+                      </p:nvPicPr>
+                      <p:blipFill>
+                        <a:blip r:embed="rId4">
+                          <a:extLst>
+                            <a:ext uri="{96DAC541-7B7A-43D3-8B79-37D633B846F1}">
+                              <asvg:svgBlip xmlns:asvg="http://schemas.microsoft.com/office/drawing/2016/SVG/main" r:embed="rId5"/>
+                            </a:ext>
+                          </a:extLst>
+                        </a:blip>
+                        <a:srcRect/>
+                        <a:stretch/>
+                      </p:blipFill>
+                      <p:spPr>
+                        <a:xfrm>
+                          <a:off x="1876918" y="5880130"/>
+                          <a:ext cx="256990" cy="256990"/>
+                        </a:xfrm>
+                        <a:prstGeom prst="rect">
+                          <a:avLst/>
+                        </a:prstGeom>
+                      </p:spPr>
+                    </p:pic>
+                    <p:pic>
+                      <p:nvPicPr>
+                        <p:cNvPr id="97" name="Graphic 96" descr="Wireless router with solid fill">
+                          <a:extLst>
+                            <a:ext uri="{FF2B5EF4-FFF2-40B4-BE49-F238E27FC236}">
+                              <a16:creationId xmlns:a16="http://schemas.microsoft.com/office/drawing/2014/main" id="{C1D75D05-771C-FCE4-A7D9-F5E220AECAA2}"/>
+                            </a:ext>
+                          </a:extLst>
+                        </p:cNvPr>
+                        <p:cNvPicPr>
+                          <a:picLocks noChangeAspect="1"/>
+                        </p:cNvPicPr>
+                        <p:nvPr/>
+                      </p:nvPicPr>
+                      <p:blipFill>
+                        <a:blip r:embed="rId6">
+                          <a:extLst>
+                            <a:ext uri="{96DAC541-7B7A-43D3-8B79-37D633B846F1}">
+                              <asvg:svgBlip xmlns:asvg="http://schemas.microsoft.com/office/drawing/2016/SVG/main" r:embed="rId7"/>
+                            </a:ext>
+                          </a:extLst>
+                        </a:blip>
+                        <a:stretch>
+                          <a:fillRect/>
+                        </a:stretch>
+                      </p:blipFill>
+                      <p:spPr>
+                        <a:xfrm>
+                          <a:off x="1888554" y="5271939"/>
+                          <a:ext cx="233719" cy="233719"/>
+                        </a:xfrm>
+                        <a:prstGeom prst="rect">
+                          <a:avLst/>
+                        </a:prstGeom>
+                      </p:spPr>
+                    </p:pic>
+                  </p:grpSp>
+                  <p:pic>
+                    <p:nvPicPr>
+                      <p:cNvPr id="101" name="Graphic 100" descr="Wi-Fi outline">
+                        <a:extLst>
+                          <a:ext uri="{FF2B5EF4-FFF2-40B4-BE49-F238E27FC236}">
+                            <a16:creationId xmlns:a16="http://schemas.microsoft.com/office/drawing/2014/main" id="{14C1A9D5-3BE8-3F42-0ADC-45CA9C9FF4E8}"/>
+                          </a:ext>
+                        </a:extLst>
+                      </p:cNvPr>
+                      <p:cNvPicPr>
+                        <a:picLocks noChangeAspect="1"/>
+                      </p:cNvPicPr>
+                      <p:nvPr/>
+                    </p:nvPicPr>
+                    <p:blipFill>
+                      <a:blip r:embed="rId8">
+                        <a:extLst>
+                          <a:ext uri="{96DAC541-7B7A-43D3-8B79-37D633B846F1}">
+                            <asvg:svgBlip xmlns:asvg="http://schemas.microsoft.com/office/drawing/2016/SVG/main" r:embed="rId9"/>
+                          </a:ext>
+                        </a:extLst>
+                      </a:blip>
+                      <a:stretch>
+                        <a:fillRect/>
+                      </a:stretch>
+                    </p:blipFill>
+                    <p:spPr>
+                      <a:xfrm rot="5400000">
+                        <a:off x="3682389" y="1643257"/>
+                        <a:ext cx="834976" cy="834975"/>
+                      </a:xfrm>
+                      <a:prstGeom prst="rect">
+                        <a:avLst/>
+                      </a:prstGeom>
+                    </p:spPr>
+                  </p:pic>
+                </p:grpSp>
+              </p:grpSp>
+              <p:sp>
+                <p:nvSpPr>
+                  <p:cNvPr id="168" name="TextBox 167">
+                    <a:extLst>
+                      <a:ext uri="{FF2B5EF4-FFF2-40B4-BE49-F238E27FC236}">
+                        <a16:creationId xmlns:a16="http://schemas.microsoft.com/office/drawing/2014/main" id="{A648D526-E6A7-758D-E005-A3FD81A65DAB}"/>
+                      </a:ext>
+                    </a:extLst>
+                  </p:cNvPr>
+                  <p:cNvSpPr txBox="1"/>
+                  <p:nvPr/>
+                </p:nvSpPr>
+                <p:spPr>
+                  <a:xfrm>
+                    <a:off x="1200150" y="3348039"/>
+                    <a:ext cx="1778445" cy="461665"/>
+                  </a:xfrm>
+                  <a:prstGeom prst="rect">
+                    <a:avLst/>
+                  </a:prstGeom>
+                  <a:noFill/>
+                </p:spPr>
+                <p:txBody>
+                  <a:bodyPr wrap="square">
+                    <a:spAutoFit/>
+                  </a:bodyPr>
+                  <a:lstStyle/>
+                  <a:p>
+                    <a:pPr marL="285750" indent="-285750">
+                      <a:buFont typeface="Arial" panose="020B0604020202020204" pitchFamily="34" charset="0"/>
+                      <a:buChar char="•"/>
+                    </a:pPr>
+                    <a:r>
+                      <a:rPr lang="en-US" sz="1200" dirty="0">
+                        <a:latin typeface="Times New Roman" panose="02020603050405020304" pitchFamily="18" charset="0"/>
+                        <a:cs typeface="Times New Roman" panose="02020603050405020304" pitchFamily="18" charset="0"/>
+                      </a:rPr>
+                      <a:t>srsRAN_4G</a:t>
+                    </a:r>
+                  </a:p>
+                  <a:p>
+                    <a:pPr marL="285750" indent="-285750">
+                      <a:buFont typeface="Arial" panose="020B0604020202020204" pitchFamily="34" charset="0"/>
+                      <a:buChar char="•"/>
+                    </a:pPr>
+                    <a:r>
+                      <a:rPr lang="en-US" sz="1200" dirty="0">
+                        <a:latin typeface="Times New Roman" panose="02020603050405020304" pitchFamily="18" charset="0"/>
+                        <a:cs typeface="Times New Roman" panose="02020603050405020304" pitchFamily="18" charset="0"/>
+                      </a:rPr>
+                      <a:t>OpenAirInterface5G</a:t>
+                    </a:r>
+                  </a:p>
+                </p:txBody>
+              </p:sp>
+            </p:grpSp>
+            <p:grpSp>
+              <p:nvGrpSpPr>
+                <p:cNvPr id="172" name="Group 171">
+                  <a:extLst>
+                    <a:ext uri="{FF2B5EF4-FFF2-40B4-BE49-F238E27FC236}">
+                      <a16:creationId xmlns:a16="http://schemas.microsoft.com/office/drawing/2014/main" id="{E3CC935D-0E71-4D0A-CE18-B6151B8FFE1D}"/>
+                    </a:ext>
+                  </a:extLst>
+                </p:cNvPr>
+                <p:cNvGrpSpPr/>
+                <p:nvPr/>
+              </p:nvGrpSpPr>
+              <p:grpSpPr>
+                <a:xfrm>
+                  <a:off x="3351330" y="2239026"/>
+                  <a:ext cx="2953942" cy="1755142"/>
+                  <a:chOff x="3351330" y="2239026"/>
+                  <a:chExt cx="2953942" cy="1755142"/>
+                </a:xfrm>
+              </p:grpSpPr>
+              <p:grpSp>
+                <p:nvGrpSpPr>
+                  <p:cNvPr id="166" name="Group 165">
+                    <a:extLst>
+                      <a:ext uri="{FF2B5EF4-FFF2-40B4-BE49-F238E27FC236}">
+                        <a16:creationId xmlns:a16="http://schemas.microsoft.com/office/drawing/2014/main" id="{52BFB7AD-7AC6-A48C-0960-639E212C7C00}"/>
+                      </a:ext>
+                    </a:extLst>
+                  </p:cNvPr>
+                  <p:cNvGrpSpPr/>
+                  <p:nvPr/>
+                </p:nvGrpSpPr>
+                <p:grpSpPr>
+                  <a:xfrm>
+                    <a:off x="3351330" y="2239026"/>
+                    <a:ext cx="2953942" cy="1189714"/>
+                    <a:chOff x="3351330" y="2239026"/>
+                    <a:chExt cx="2953942" cy="1189714"/>
+                  </a:xfrm>
+                </p:grpSpPr>
+                <p:sp>
+                  <p:nvSpPr>
+                    <p:cNvPr id="105" name="TextBox 104">
+                      <a:extLst>
+                        <a:ext uri="{FF2B5EF4-FFF2-40B4-BE49-F238E27FC236}">
+                          <a16:creationId xmlns:a16="http://schemas.microsoft.com/office/drawing/2014/main" id="{DBAFB9D3-DC62-A48E-411E-317A70A9B3AB}"/>
+                        </a:ext>
+                      </a:extLst>
+                    </p:cNvPr>
+                    <p:cNvSpPr txBox="1"/>
+                    <p:nvPr/>
+                  </p:nvSpPr>
+                  <p:spPr>
+                    <a:xfrm>
+                      <a:off x="4021891" y="3120963"/>
+                      <a:ext cx="2239249" cy="307777"/>
+                    </a:xfrm>
+                    <a:prstGeom prst="rect">
+                      <a:avLst/>
+                    </a:prstGeom>
+                    <a:noFill/>
+                  </p:spPr>
+                  <p:txBody>
+                    <a:bodyPr wrap="square">
+                      <a:spAutoFit/>
+                    </a:bodyPr>
+                    <a:lstStyle/>
+                    <a:p>
+                      <a:pPr algn="ctr"/>
+                      <a:r>
+                        <a:rPr lang="en-US" sz="1400" b="1" dirty="0">
+                          <a:solidFill>
+                            <a:schemeClr val="tx1"/>
+                          </a:solidFill>
+                          <a:latin typeface="Times New Roman" panose="02020603050405020304" pitchFamily="18" charset="0"/>
+                          <a:cs typeface="Times New Roman" panose="02020603050405020304" pitchFamily="18" charset="0"/>
+                        </a:rPr>
+                        <a:t>Next Generation Node B</a:t>
+                      </a:r>
+                      <a:endParaRPr lang="en-US" sz="1400" b="1" dirty="0">
+                        <a:latin typeface="Times New Roman" panose="02020603050405020304" pitchFamily="18" charset="0"/>
+                        <a:cs typeface="Times New Roman" panose="02020603050405020304" pitchFamily="18" charset="0"/>
+                      </a:endParaRPr>
+                    </a:p>
+                  </p:txBody>
+                </p:sp>
+                <p:grpSp>
+                  <p:nvGrpSpPr>
+                    <p:cNvPr id="165" name="Group 164">
+                      <a:extLst>
+                        <a:ext uri="{FF2B5EF4-FFF2-40B4-BE49-F238E27FC236}">
+                          <a16:creationId xmlns:a16="http://schemas.microsoft.com/office/drawing/2014/main" id="{94B6153A-628D-51A2-53C1-51D9E895F02A}"/>
+                        </a:ext>
+                      </a:extLst>
+                    </p:cNvPr>
+                    <p:cNvGrpSpPr/>
+                    <p:nvPr/>
+                  </p:nvGrpSpPr>
+                  <p:grpSpPr>
+                    <a:xfrm>
+                      <a:off x="3351330" y="2239026"/>
+                      <a:ext cx="2953942" cy="834976"/>
+                      <a:chOff x="3351330" y="2239026"/>
+                      <a:chExt cx="2953942" cy="834976"/>
+                    </a:xfrm>
+                  </p:grpSpPr>
+                  <p:pic>
+                    <p:nvPicPr>
+                      <p:cNvPr id="150" name="Graphic 149" descr="Wi-Fi outline">
+                        <a:extLst>
+                          <a:ext uri="{FF2B5EF4-FFF2-40B4-BE49-F238E27FC236}">
+                            <a16:creationId xmlns:a16="http://schemas.microsoft.com/office/drawing/2014/main" id="{A4384971-E0FA-83AB-3ECA-EA68B5363120}"/>
+                          </a:ext>
+                        </a:extLst>
+                      </p:cNvPr>
+                      <p:cNvPicPr>
+                        <a:picLocks noChangeAspect="1"/>
+                      </p:cNvPicPr>
+                      <p:nvPr/>
+                    </p:nvPicPr>
+                    <p:blipFill>
+                      <a:blip r:embed="rId8">
+                        <a:extLst>
+                          <a:ext uri="{96DAC541-7B7A-43D3-8B79-37D633B846F1}">
+                            <asvg:svgBlip xmlns:asvg="http://schemas.microsoft.com/office/drawing/2016/SVG/main" r:embed="rId9"/>
+                          </a:ext>
+                        </a:extLst>
+                      </a:blip>
+                      <a:stretch>
+                        <a:fillRect/>
+                      </a:stretch>
+                    </p:blipFill>
+                    <p:spPr>
+                      <a:xfrm rot="16200000" flipH="1">
+                        <a:off x="3351330" y="2239026"/>
+                        <a:ext cx="834976" cy="834975"/>
+                      </a:xfrm>
+                      <a:prstGeom prst="rect">
+                        <a:avLst/>
+                      </a:prstGeom>
+                    </p:spPr>
+                  </p:pic>
+                  <p:grpSp>
+                    <p:nvGrpSpPr>
+                      <p:cNvPr id="164" name="Group 163">
+                        <a:extLst>
+                          <a:ext uri="{FF2B5EF4-FFF2-40B4-BE49-F238E27FC236}">
+                            <a16:creationId xmlns:a16="http://schemas.microsoft.com/office/drawing/2014/main" id="{FEDF8195-14CB-11B2-B6D5-E25DE2BBA929}"/>
+                          </a:ext>
+                        </a:extLst>
+                      </p:cNvPr>
+                      <p:cNvGrpSpPr/>
+                      <p:nvPr/>
+                    </p:nvGrpSpPr>
+                    <p:grpSpPr>
+                      <a:xfrm>
+                        <a:off x="4021891" y="2347277"/>
+                        <a:ext cx="2283381" cy="618690"/>
+                        <a:chOff x="4021891" y="2194877"/>
+                        <a:chExt cx="2283381" cy="618690"/>
+                      </a:xfrm>
+                    </p:grpSpPr>
+                    <p:grpSp>
+                      <p:nvGrpSpPr>
+                        <p:cNvPr id="157" name="Group 156">
+                          <a:extLst>
+                            <a:ext uri="{FF2B5EF4-FFF2-40B4-BE49-F238E27FC236}">
+                              <a16:creationId xmlns:a16="http://schemas.microsoft.com/office/drawing/2014/main" id="{26375E39-3569-ADBB-F1AE-67A9EF281BC7}"/>
+                            </a:ext>
+                          </a:extLst>
+                        </p:cNvPr>
+                        <p:cNvGrpSpPr/>
+                        <p:nvPr/>
+                      </p:nvGrpSpPr>
+                      <p:grpSpPr>
+                        <a:xfrm>
+                          <a:off x="4021891" y="2194877"/>
+                          <a:ext cx="2239249" cy="618690"/>
+                          <a:chOff x="4021891" y="2194877"/>
+                          <a:chExt cx="2239249" cy="618690"/>
+                        </a:xfrm>
+                      </p:grpSpPr>
+                      <p:sp>
+                        <p:nvSpPr>
+                          <p:cNvPr id="116" name="Rectangle: Rounded Corners 115">
+                            <a:extLst>
+                              <a:ext uri="{FF2B5EF4-FFF2-40B4-BE49-F238E27FC236}">
+                                <a16:creationId xmlns:a16="http://schemas.microsoft.com/office/drawing/2014/main" id="{763E022C-45EC-17F5-4D28-50ED4E68B3D8}"/>
+                              </a:ext>
+                            </a:extLst>
+                          </p:cNvPr>
+                          <p:cNvSpPr/>
+                          <p:nvPr/>
+                        </p:nvSpPr>
+                        <p:spPr>
+                          <a:xfrm>
+                            <a:off x="4021891" y="2194877"/>
+                            <a:ext cx="2239249" cy="618689"/>
+                          </a:xfrm>
+                          <a:prstGeom prst="roundRect">
+                            <a:avLst>
+                              <a:gd name="adj" fmla="val 12974"/>
+                            </a:avLst>
+                          </a:prstGeom>
+                          <a:solidFill>
+                            <a:schemeClr val="bg1">
+                              <a:lumMod val="85000"/>
+                            </a:schemeClr>
+                          </a:solidFill>
+                          <a:ln w="28575">
+                            <a:noFill/>
+                          </a:ln>
+                        </p:spPr>
+                        <p:style>
+                          <a:lnRef idx="2">
+                            <a:schemeClr val="accent1">
+                              <a:shade val="15000"/>
+                            </a:schemeClr>
+                          </a:lnRef>
+                          <a:fillRef idx="1">
+                            <a:schemeClr val="accent1"/>
+                          </a:fillRef>
+                          <a:effectRef idx="0">
+                            <a:schemeClr val="accent1"/>
+                          </a:effectRef>
+                          <a:fontRef idx="minor">
+                            <a:schemeClr val="lt1"/>
+                          </a:fontRef>
+                        </p:style>
+                        <p:txBody>
+                          <a:bodyPr rtlCol="0" anchor="ctr"/>
+                          <a:lstStyle/>
+                          <a:p>
+                            <a:pPr algn="ctr"/>
+                            <a:endParaRPr lang="en-US" dirty="0">
+                              <a:latin typeface="Times New Roman" panose="02020603050405020304" pitchFamily="18" charset="0"/>
+                              <a:cs typeface="Times New Roman" panose="02020603050405020304" pitchFamily="18" charset="0"/>
+                            </a:endParaRPr>
+                          </a:p>
+                        </p:txBody>
+                      </p:sp>
+                      <p:sp>
+                        <p:nvSpPr>
+                          <p:cNvPr id="154" name="Rectangle: Top Corners Rounded 153">
+                            <a:extLst>
+                              <a:ext uri="{FF2B5EF4-FFF2-40B4-BE49-F238E27FC236}">
+                                <a16:creationId xmlns:a16="http://schemas.microsoft.com/office/drawing/2014/main" id="{FC1DFCF3-A2B2-8659-C2ED-0301735E43E7}"/>
+                              </a:ext>
+                            </a:extLst>
+                          </p:cNvPr>
+                          <p:cNvSpPr/>
+                          <p:nvPr/>
+                        </p:nvSpPr>
+                        <p:spPr>
+                          <a:xfrm flipV="1">
+                            <a:off x="4022672" y="2504431"/>
+                            <a:ext cx="2238468" cy="307778"/>
+                          </a:xfrm>
+                          <a:prstGeom prst="round2SameRect">
+                            <a:avLst>
+                              <a:gd name="adj1" fmla="val 28674"/>
+                              <a:gd name="adj2" fmla="val 0"/>
+                            </a:avLst>
+                          </a:prstGeom>
+                          <a:solidFill>
+                            <a:schemeClr val="bg1">
+                              <a:lumMod val="95000"/>
+                            </a:schemeClr>
+                          </a:solidFill>
+                          <a:ln>
+                            <a:noFill/>
+                          </a:ln>
+                        </p:spPr>
+                        <p:style>
+                          <a:lnRef idx="2">
+                            <a:schemeClr val="accent1">
+                              <a:shade val="15000"/>
+                            </a:schemeClr>
+                          </a:lnRef>
+                          <a:fillRef idx="1">
+                            <a:schemeClr val="accent1"/>
+                          </a:fillRef>
+                          <a:effectRef idx="0">
+                            <a:schemeClr val="accent1"/>
+                          </a:effectRef>
+                          <a:fontRef idx="minor">
+                            <a:schemeClr val="lt1"/>
+                          </a:fontRef>
+                        </p:style>
+                        <p:txBody>
+                          <a:bodyPr rtlCol="0" anchor="ctr"/>
+                          <a:lstStyle/>
+                          <a:p>
+                            <a:pPr algn="ctr"/>
+                            <a:endParaRPr lang="en-US"/>
+                          </a:p>
+                        </p:txBody>
+                      </p:sp>
+                      <p:sp>
+                        <p:nvSpPr>
+                          <p:cNvPr id="118" name="Rectangle: Rounded Corners 117">
+                            <a:extLst>
+                              <a:ext uri="{FF2B5EF4-FFF2-40B4-BE49-F238E27FC236}">
+                                <a16:creationId xmlns:a16="http://schemas.microsoft.com/office/drawing/2014/main" id="{B5766D04-B969-3849-BAD6-E5FBF42BA676}"/>
+                              </a:ext>
+                            </a:extLst>
+                          </p:cNvPr>
+                          <p:cNvSpPr/>
+                          <p:nvPr/>
+                        </p:nvSpPr>
+                        <p:spPr>
+                          <a:xfrm>
+                            <a:off x="4021891" y="2194878"/>
+                            <a:ext cx="2239249" cy="618689"/>
+                          </a:xfrm>
+                          <a:prstGeom prst="roundRect">
+                            <a:avLst>
+                              <a:gd name="adj" fmla="val 12974"/>
+                            </a:avLst>
+                          </a:prstGeom>
+                          <a:noFill/>
+                          <a:ln w="12700">
+                            <a:solidFill>
+                              <a:schemeClr val="tx1"/>
+                            </a:solidFill>
+                          </a:ln>
+                        </p:spPr>
+                        <p:style>
+                          <a:lnRef idx="2">
+                            <a:schemeClr val="accent1">
+                              <a:shade val="15000"/>
+                            </a:schemeClr>
+                          </a:lnRef>
+                          <a:fillRef idx="1">
+                            <a:schemeClr val="accent1"/>
+                          </a:fillRef>
+                          <a:effectRef idx="0">
+                            <a:schemeClr val="accent1"/>
+                          </a:effectRef>
+                          <a:fontRef idx="minor">
+                            <a:schemeClr val="lt1"/>
+                          </a:fontRef>
+                        </p:style>
+                        <p:txBody>
+                          <a:bodyPr rtlCol="0" anchor="ctr"/>
+                          <a:lstStyle/>
+                          <a:p>
+                            <a:pPr algn="ctr"/>
+                            <a:endParaRPr lang="en-US" dirty="0">
+                              <a:latin typeface="Times New Roman" panose="02020603050405020304" pitchFamily="18" charset="0"/>
+                              <a:cs typeface="Times New Roman" panose="02020603050405020304" pitchFamily="18" charset="0"/>
+                            </a:endParaRPr>
+                          </a:p>
+                        </p:txBody>
+                      </p:sp>
+                    </p:grpSp>
+                    <p:sp>
+                      <p:nvSpPr>
+                        <p:cNvPr id="158" name="TextBox 157">
+                          <a:extLst>
+                            <a:ext uri="{FF2B5EF4-FFF2-40B4-BE49-F238E27FC236}">
+                              <a16:creationId xmlns:a16="http://schemas.microsoft.com/office/drawing/2014/main" id="{118DB05C-DAB0-A421-F073-A792FE4EAAA3}"/>
+                            </a:ext>
+                          </a:extLst>
+                        </p:cNvPr>
+                        <p:cNvSpPr txBox="1"/>
+                        <p:nvPr/>
+                      </p:nvSpPr>
+                      <p:spPr>
+                        <a:xfrm>
+                          <a:off x="4335869" y="2202843"/>
+                          <a:ext cx="1969403" cy="206243"/>
+                        </a:xfrm>
+                        <a:prstGeom prst="rect">
+                          <a:avLst/>
+                        </a:prstGeom>
+                        <a:noFill/>
+                      </p:spPr>
+                      <p:txBody>
+                        <a:bodyPr wrap="square">
+                          <a:spAutoFit/>
+                        </a:bodyPr>
+                        <a:lstStyle/>
+                        <a:p>
+                          <a:pPr algn="ctr"/>
+                          <a:r>
+                            <a:rPr lang="en-US" sz="1400" dirty="0">
+                              <a:solidFill>
+                                <a:schemeClr val="tx1"/>
+                              </a:solidFill>
+                              <a:latin typeface="Times New Roman" panose="02020603050405020304" pitchFamily="18" charset="0"/>
+                              <a:cs typeface="Times New Roman" panose="02020603050405020304" pitchFamily="18" charset="0"/>
+                            </a:rPr>
+                            <a:t>Software-Defined Radio</a:t>
+                          </a:r>
+                          <a:endParaRPr lang="en-US" sz="1400" dirty="0">
+                            <a:latin typeface="Times New Roman" panose="02020603050405020304" pitchFamily="18" charset="0"/>
+                            <a:cs typeface="Times New Roman" panose="02020603050405020304" pitchFamily="18" charset="0"/>
+                          </a:endParaRPr>
+                        </a:p>
+                      </p:txBody>
+                    </p:sp>
+                    <p:pic>
+                      <p:nvPicPr>
+                        <p:cNvPr id="159" name="Graphic 158">
+                          <a:extLst>
+                            <a:ext uri="{FF2B5EF4-FFF2-40B4-BE49-F238E27FC236}">
+                              <a16:creationId xmlns:a16="http://schemas.microsoft.com/office/drawing/2014/main" id="{D29AD5AF-3219-6D63-1EA7-142390B52B38}"/>
+                            </a:ext>
+                          </a:extLst>
+                        </p:cNvPr>
+                        <p:cNvPicPr>
+                          <a:picLocks noChangeAspect="1"/>
+                        </p:cNvPicPr>
+                        <p:nvPr/>
+                      </p:nvPicPr>
+                      <p:blipFill>
+                        <a:blip r:embed="rId10">
+                          <a:extLst>
+                            <a:ext uri="{96DAC541-7B7A-43D3-8B79-37D633B846F1}">
+                              <asvg:svgBlip xmlns:asvg="http://schemas.microsoft.com/office/drawing/2016/SVG/main" r:embed="rId11"/>
+                            </a:ext>
+                          </a:extLst>
+                        </a:blip>
+                        <a:srcRect/>
+                        <a:stretch/>
+                      </p:blipFill>
+                      <p:spPr>
+                        <a:xfrm>
+                          <a:off x="4134842" y="2215325"/>
+                          <a:ext cx="289426" cy="289426"/>
+                        </a:xfrm>
+                        <a:prstGeom prst="rect">
+                          <a:avLst/>
+                        </a:prstGeom>
+                      </p:spPr>
+                    </p:pic>
+                    <p:sp>
+                      <p:nvSpPr>
+                        <p:cNvPr id="162" name="TextBox 161">
+                          <a:extLst>
+                            <a:ext uri="{FF2B5EF4-FFF2-40B4-BE49-F238E27FC236}">
+                              <a16:creationId xmlns:a16="http://schemas.microsoft.com/office/drawing/2014/main" id="{0BF92B8E-1B5B-2C80-D2F6-A6431705198E}"/>
+                            </a:ext>
+                          </a:extLst>
+                        </p:cNvPr>
+                        <p:cNvSpPr txBox="1"/>
+                        <p:nvPr/>
+                      </p:nvSpPr>
+                      <p:spPr>
+                        <a:xfrm>
+                          <a:off x="4335869" y="2505790"/>
+                          <a:ext cx="1969403" cy="307777"/>
+                        </a:xfrm>
+                        <a:prstGeom prst="rect">
+                          <a:avLst/>
+                        </a:prstGeom>
+                        <a:noFill/>
+                      </p:spPr>
+                      <p:txBody>
+                        <a:bodyPr wrap="square">
+                          <a:spAutoFit/>
+                        </a:bodyPr>
+                        <a:lstStyle/>
+                        <a:p>
+                          <a:pPr algn="ctr"/>
+                          <a:r>
+                            <a:rPr lang="en-US" sz="1400" dirty="0">
+                              <a:solidFill>
+                                <a:schemeClr val="tx1"/>
+                              </a:solidFill>
+                              <a:latin typeface="Times New Roman" panose="02020603050405020304" pitchFamily="18" charset="0"/>
+                              <a:cs typeface="Times New Roman" panose="02020603050405020304" pitchFamily="18" charset="0"/>
+                            </a:rPr>
+                            <a:t>RF Simulator / </a:t>
+                          </a:r>
+                          <a:r>
+                            <a:rPr lang="en-US" sz="1400" dirty="0" err="1">
+                              <a:solidFill>
+                                <a:schemeClr val="tx1"/>
+                              </a:solidFill>
+                              <a:latin typeface="Times New Roman" panose="02020603050405020304" pitchFamily="18" charset="0"/>
+                              <a:cs typeface="Times New Roman" panose="02020603050405020304" pitchFamily="18" charset="0"/>
+                            </a:rPr>
+                            <a:t>ZeroMQ</a:t>
+                          </a:r>
+                          <a:endParaRPr lang="en-US" sz="1400" dirty="0">
+                            <a:latin typeface="Times New Roman" panose="02020603050405020304" pitchFamily="18" charset="0"/>
+                            <a:cs typeface="Times New Roman" panose="02020603050405020304" pitchFamily="18" charset="0"/>
+                          </a:endParaRPr>
+                        </a:p>
+                      </p:txBody>
+                    </p:sp>
+                    <p:pic>
+                      <p:nvPicPr>
+                        <p:cNvPr id="163" name="Graphic 162">
+                          <a:extLst>
+                            <a:ext uri="{FF2B5EF4-FFF2-40B4-BE49-F238E27FC236}">
+                              <a16:creationId xmlns:a16="http://schemas.microsoft.com/office/drawing/2014/main" id="{8BF6375D-4174-C1B1-57AE-E2DA824F94CE}"/>
+                            </a:ext>
+                          </a:extLst>
+                        </p:cNvPr>
+                        <p:cNvPicPr>
+                          <a:picLocks noChangeAspect="1"/>
+                        </p:cNvPicPr>
+                        <p:nvPr/>
+                      </p:nvPicPr>
+                      <p:blipFill>
+                        <a:blip r:embed="rId4">
+                          <a:extLst>
+                            <a:ext uri="{96DAC541-7B7A-43D3-8B79-37D633B846F1}">
+                              <asvg:svgBlip xmlns:asvg="http://schemas.microsoft.com/office/drawing/2016/SVG/main" r:embed="rId5"/>
+                            </a:ext>
+                          </a:extLst>
+                        </a:blip>
+                        <a:srcRect/>
+                        <a:stretch/>
+                      </p:blipFill>
+                      <p:spPr>
+                        <a:xfrm>
+                          <a:off x="4167277" y="2528018"/>
+                          <a:ext cx="256990" cy="256990"/>
+                        </a:xfrm>
+                        <a:prstGeom prst="rect">
+                          <a:avLst/>
+                        </a:prstGeom>
+                      </p:spPr>
+                    </p:pic>
+                  </p:grpSp>
+                </p:grpSp>
+              </p:grpSp>
+              <p:sp>
+                <p:nvSpPr>
+                  <p:cNvPr id="169" name="TextBox 168">
+                    <a:extLst>
+                      <a:ext uri="{FF2B5EF4-FFF2-40B4-BE49-F238E27FC236}">
+                        <a16:creationId xmlns:a16="http://schemas.microsoft.com/office/drawing/2014/main" id="{03D8F466-4922-1498-BC9F-4475B7D5BC61}"/>
+                      </a:ext>
+                    </a:extLst>
+                  </p:cNvPr>
+                  <p:cNvSpPr txBox="1"/>
+                  <p:nvPr/>
+                </p:nvSpPr>
+                <p:spPr>
+                  <a:xfrm>
+                    <a:off x="4167277" y="3347837"/>
+                    <a:ext cx="2095177" cy="646331"/>
+                  </a:xfrm>
+                  <a:prstGeom prst="rect">
+                    <a:avLst/>
+                  </a:prstGeom>
+                  <a:noFill/>
+                </p:spPr>
+                <p:txBody>
+                  <a:bodyPr wrap="square">
+                    <a:spAutoFit/>
+                  </a:bodyPr>
+                  <a:lstStyle/>
+                  <a:p>
+                    <a:pPr marL="285750" indent="-285750">
+                      <a:buFont typeface="Arial" panose="020B0604020202020204" pitchFamily="34" charset="0"/>
+                      <a:buChar char="•"/>
+                    </a:pPr>
+                    <a:r>
+                      <a:rPr lang="en-US" sz="1200" dirty="0" err="1">
+                        <a:latin typeface="Times New Roman" panose="02020603050405020304" pitchFamily="18" charset="0"/>
+                        <a:cs typeface="Times New Roman" panose="02020603050405020304" pitchFamily="18" charset="0"/>
+                      </a:rPr>
+                      <a:t>srsRAN_Project</a:t>
+                    </a:r>
+                    <a:endParaRPr lang="en-US" sz="1200" dirty="0">
+                      <a:latin typeface="Times New Roman" panose="02020603050405020304" pitchFamily="18" charset="0"/>
+                      <a:cs typeface="Times New Roman" panose="02020603050405020304" pitchFamily="18" charset="0"/>
+                    </a:endParaRPr>
+                  </a:p>
+                  <a:p>
+                    <a:pPr marL="285750" indent="-285750">
+                      <a:buFont typeface="Arial" panose="020B0604020202020204" pitchFamily="34" charset="0"/>
+                      <a:buChar char="•"/>
+                    </a:pPr>
+                    <a:r>
+                      <a:rPr lang="en-US" sz="1200" dirty="0">
+                        <a:latin typeface="Times New Roman" panose="02020603050405020304" pitchFamily="18" charset="0"/>
+                        <a:cs typeface="Times New Roman" panose="02020603050405020304" pitchFamily="18" charset="0"/>
+                      </a:rPr>
+                      <a:t>OpenAirInterface5G</a:t>
+                    </a:r>
+                  </a:p>
+                  <a:p>
+                    <a:pPr marL="285750" indent="-285750">
+                      <a:buFont typeface="Arial" panose="020B0604020202020204" pitchFamily="34" charset="0"/>
+                      <a:buChar char="•"/>
+                    </a:pPr>
+                    <a:r>
+                      <a:rPr lang="en-US" sz="1200" dirty="0">
+                        <a:latin typeface="Times New Roman" panose="02020603050405020304" pitchFamily="18" charset="0"/>
+                        <a:cs typeface="Times New Roman" panose="02020603050405020304" pitchFamily="18" charset="0"/>
+                      </a:rPr>
+                      <a:t>O-RAN SC E2 Simulator</a:t>
+                    </a:r>
+                  </a:p>
+                </p:txBody>
+              </p:sp>
+            </p:grpSp>
+            <p:grpSp>
+              <p:nvGrpSpPr>
+                <p:cNvPr id="210" name="Group 209">
+                  <a:extLst>
+                    <a:ext uri="{FF2B5EF4-FFF2-40B4-BE49-F238E27FC236}">
+                      <a16:creationId xmlns:a16="http://schemas.microsoft.com/office/drawing/2014/main" id="{6D139E02-B579-A024-59D1-D2BBA1D5BC77}"/>
+                    </a:ext>
+                  </a:extLst>
+                </p:cNvPr>
+                <p:cNvGrpSpPr/>
+                <p:nvPr/>
+              </p:nvGrpSpPr>
+              <p:grpSpPr>
+                <a:xfrm>
+                  <a:off x="7069263" y="2343469"/>
+                  <a:ext cx="1689168" cy="1154191"/>
+                  <a:chOff x="7311071" y="2343469"/>
+                  <a:chExt cx="1689168" cy="1154191"/>
+                </a:xfrm>
+              </p:grpSpPr>
+              <p:grpSp>
+                <p:nvGrpSpPr>
+                  <p:cNvPr id="174" name="Group 173">
+                    <a:extLst>
+                      <a:ext uri="{FF2B5EF4-FFF2-40B4-BE49-F238E27FC236}">
+                        <a16:creationId xmlns:a16="http://schemas.microsoft.com/office/drawing/2014/main" id="{587E8459-7A4D-1604-94F9-4B4D16914130}"/>
+                      </a:ext>
+                    </a:extLst>
+                  </p:cNvPr>
+                  <p:cNvGrpSpPr/>
+                  <p:nvPr/>
+                </p:nvGrpSpPr>
+                <p:grpSpPr>
+                  <a:xfrm>
+                    <a:off x="7311071" y="2347277"/>
+                    <a:ext cx="1689168" cy="1150383"/>
+                    <a:chOff x="4019338" y="2347277"/>
+                    <a:chExt cx="1689168" cy="1150383"/>
+                  </a:xfrm>
+                </p:grpSpPr>
+                <p:grpSp>
+                  <p:nvGrpSpPr>
+                    <p:cNvPr id="175" name="Group 174">
+                      <a:extLst>
+                        <a:ext uri="{FF2B5EF4-FFF2-40B4-BE49-F238E27FC236}">
+                          <a16:creationId xmlns:a16="http://schemas.microsoft.com/office/drawing/2014/main" id="{F4F05426-1DE6-FE3E-CA67-1D2E14DB13E5}"/>
+                        </a:ext>
+                      </a:extLst>
+                    </p:cNvPr>
+                    <p:cNvGrpSpPr/>
+                    <p:nvPr/>
+                  </p:nvGrpSpPr>
+                  <p:grpSpPr>
+                    <a:xfrm>
+                      <a:off x="4019338" y="2347277"/>
+                      <a:ext cx="1568356" cy="954287"/>
+                      <a:chOff x="4019338" y="2347277"/>
+                      <a:chExt cx="1568356" cy="954287"/>
+                    </a:xfrm>
+                  </p:grpSpPr>
+                  <p:sp>
+                    <p:nvSpPr>
+                      <p:cNvPr id="177" name="TextBox 176">
+                        <a:extLst>
+                          <a:ext uri="{FF2B5EF4-FFF2-40B4-BE49-F238E27FC236}">
+                            <a16:creationId xmlns:a16="http://schemas.microsoft.com/office/drawing/2014/main" id="{63AF03B5-ABEE-6A9E-0665-4E76E054C4D7}"/>
+                          </a:ext>
+                        </a:extLst>
+                      </p:cNvPr>
+                      <p:cNvSpPr txBox="1"/>
+                      <p:nvPr/>
+                    </p:nvSpPr>
+                    <p:spPr>
+                      <a:xfrm>
+                        <a:off x="4019338" y="2993787"/>
+                        <a:ext cx="1568356" cy="307777"/>
+                      </a:xfrm>
+                      <a:prstGeom prst="rect">
+                        <a:avLst/>
+                      </a:prstGeom>
+                      <a:noFill/>
+                    </p:spPr>
+                    <p:txBody>
+                      <a:bodyPr wrap="square">
+                        <a:spAutoFit/>
+                      </a:bodyPr>
+                      <a:lstStyle/>
+                      <a:p>
+                        <a:pPr algn="ctr"/>
+                        <a:r>
+                          <a:rPr lang="en-US" sz="1400" b="1" dirty="0">
+                            <a:solidFill>
+                              <a:schemeClr val="tx1"/>
+                            </a:solidFill>
+                            <a:latin typeface="Times New Roman" panose="02020603050405020304" pitchFamily="18" charset="0"/>
+                            <a:cs typeface="Times New Roman" panose="02020603050405020304" pitchFamily="18" charset="0"/>
+                          </a:rPr>
+                          <a:t>5G Core Network</a:t>
+                        </a:r>
+                        <a:endParaRPr lang="en-US" sz="1400" b="1" dirty="0">
+                          <a:latin typeface="Times New Roman" panose="02020603050405020304" pitchFamily="18" charset="0"/>
+                          <a:cs typeface="Times New Roman" panose="02020603050405020304" pitchFamily="18" charset="0"/>
+                        </a:endParaRPr>
+                      </a:p>
+                    </p:txBody>
+                  </p:sp>
+                  <p:grpSp>
+                    <p:nvGrpSpPr>
+                      <p:cNvPr id="180" name="Group 179">
+                        <a:extLst>
+                          <a:ext uri="{FF2B5EF4-FFF2-40B4-BE49-F238E27FC236}">
+                            <a16:creationId xmlns:a16="http://schemas.microsoft.com/office/drawing/2014/main" id="{D35255B8-2E95-3894-2B36-1E12BFB04D1F}"/>
+                          </a:ext>
+                        </a:extLst>
+                      </p:cNvPr>
+                      <p:cNvGrpSpPr/>
+                      <p:nvPr/>
+                    </p:nvGrpSpPr>
+                    <p:grpSpPr>
+                      <a:xfrm>
+                        <a:off x="4021891" y="2347277"/>
+                        <a:ext cx="1565803" cy="618690"/>
+                        <a:chOff x="4021891" y="2194877"/>
+                        <a:chExt cx="1565803" cy="618690"/>
+                      </a:xfrm>
+                    </p:grpSpPr>
+                    <p:grpSp>
+                      <p:nvGrpSpPr>
+                        <p:cNvPr id="181" name="Group 180">
+                          <a:extLst>
+                            <a:ext uri="{FF2B5EF4-FFF2-40B4-BE49-F238E27FC236}">
+                              <a16:creationId xmlns:a16="http://schemas.microsoft.com/office/drawing/2014/main" id="{528EDB48-B949-B841-8C80-A542DAC94410}"/>
+                            </a:ext>
+                          </a:extLst>
+                        </p:cNvPr>
+                        <p:cNvGrpSpPr/>
+                        <p:nvPr/>
+                      </p:nvGrpSpPr>
+                      <p:grpSpPr>
+                        <a:xfrm>
+                          <a:off x="4021891" y="2194877"/>
+                          <a:ext cx="1565803" cy="618689"/>
+                          <a:chOff x="4021891" y="2194877"/>
+                          <a:chExt cx="1565803" cy="618689"/>
+                        </a:xfrm>
+                      </p:grpSpPr>
+                      <p:sp>
+                        <p:nvSpPr>
+                          <p:cNvPr id="186" name="Rectangle: Rounded Corners 185">
+                            <a:extLst>
+                              <a:ext uri="{FF2B5EF4-FFF2-40B4-BE49-F238E27FC236}">
+                                <a16:creationId xmlns:a16="http://schemas.microsoft.com/office/drawing/2014/main" id="{741AD84D-B1A3-9C27-B906-C7D6270533F0}"/>
+                              </a:ext>
+                            </a:extLst>
+                          </p:cNvPr>
+                          <p:cNvSpPr/>
+                          <p:nvPr/>
+                        </p:nvSpPr>
+                        <p:spPr>
+                          <a:xfrm>
+                            <a:off x="4021891" y="2194877"/>
+                            <a:ext cx="1565803" cy="618689"/>
+                          </a:xfrm>
+                          <a:prstGeom prst="roundRect">
+                            <a:avLst>
+                              <a:gd name="adj" fmla="val 12974"/>
+                            </a:avLst>
+                          </a:prstGeom>
+                          <a:solidFill>
+                            <a:schemeClr val="bg1">
+                              <a:lumMod val="85000"/>
+                            </a:schemeClr>
+                          </a:solidFill>
+                          <a:ln w="28575">
+                            <a:noFill/>
+                          </a:ln>
+                        </p:spPr>
+                        <p:style>
+                          <a:lnRef idx="2">
+                            <a:schemeClr val="accent1">
+                              <a:shade val="15000"/>
+                            </a:schemeClr>
+                          </a:lnRef>
+                          <a:fillRef idx="1">
+                            <a:schemeClr val="accent1"/>
+                          </a:fillRef>
+                          <a:effectRef idx="0">
+                            <a:schemeClr val="accent1"/>
+                          </a:effectRef>
+                          <a:fontRef idx="minor">
+                            <a:schemeClr val="lt1"/>
+                          </a:fontRef>
+                        </p:style>
+                        <p:txBody>
+                          <a:bodyPr rtlCol="0" anchor="ctr"/>
+                          <a:lstStyle/>
+                          <a:p>
+                            <a:pPr algn="ctr"/>
+                            <a:endParaRPr lang="en-US" dirty="0">
+                              <a:latin typeface="Times New Roman" panose="02020603050405020304" pitchFamily="18" charset="0"/>
+                              <a:cs typeface="Times New Roman" panose="02020603050405020304" pitchFamily="18" charset="0"/>
+                            </a:endParaRPr>
+                          </a:p>
+                        </p:txBody>
+                      </p:sp>
+                      <p:sp>
+                        <p:nvSpPr>
+                          <p:cNvPr id="187" name="Rectangle: Top Corners Rounded 186">
+                            <a:extLst>
+                              <a:ext uri="{FF2B5EF4-FFF2-40B4-BE49-F238E27FC236}">
+                                <a16:creationId xmlns:a16="http://schemas.microsoft.com/office/drawing/2014/main" id="{B06EE221-0B6C-2630-BDD3-45B204DB206B}"/>
+                              </a:ext>
+                            </a:extLst>
+                          </p:cNvPr>
+                          <p:cNvSpPr/>
+                          <p:nvPr/>
+                        </p:nvSpPr>
+                        <p:spPr>
+                          <a:xfrm flipV="1">
+                            <a:off x="4022672" y="2504431"/>
+                            <a:ext cx="1565022" cy="307778"/>
+                          </a:xfrm>
+                          <a:prstGeom prst="round2SameRect">
+                            <a:avLst>
+                              <a:gd name="adj1" fmla="val 28674"/>
+                              <a:gd name="adj2" fmla="val 0"/>
+                            </a:avLst>
+                          </a:prstGeom>
+                          <a:solidFill>
+                            <a:schemeClr val="bg1">
+                              <a:lumMod val="95000"/>
+                            </a:schemeClr>
+                          </a:solidFill>
+                          <a:ln>
+                            <a:noFill/>
+                          </a:ln>
+                        </p:spPr>
+                        <p:style>
+                          <a:lnRef idx="2">
+                            <a:schemeClr val="accent1">
+                              <a:shade val="15000"/>
+                            </a:schemeClr>
+                          </a:lnRef>
+                          <a:fillRef idx="1">
+                            <a:schemeClr val="accent1"/>
+                          </a:fillRef>
+                          <a:effectRef idx="0">
+                            <a:schemeClr val="accent1"/>
+                          </a:effectRef>
+                          <a:fontRef idx="minor">
+                            <a:schemeClr val="lt1"/>
+                          </a:fontRef>
+                        </p:style>
+                        <p:txBody>
+                          <a:bodyPr rtlCol="0" anchor="ctr"/>
+                          <a:lstStyle/>
+                          <a:p>
+                            <a:pPr algn="ctr"/>
+                            <a:endParaRPr lang="en-US"/>
+                          </a:p>
+                        </p:txBody>
+                      </p:sp>
+                    </p:grpSp>
+                    <p:sp>
+                      <p:nvSpPr>
+                        <p:cNvPr id="182" name="TextBox 181">
+                          <a:extLst>
+                            <a:ext uri="{FF2B5EF4-FFF2-40B4-BE49-F238E27FC236}">
+                              <a16:creationId xmlns:a16="http://schemas.microsoft.com/office/drawing/2014/main" id="{7186A5FD-B9F2-4232-0FE2-63750A4253C5}"/>
+                            </a:ext>
+                          </a:extLst>
+                        </p:cNvPr>
+                        <p:cNvSpPr txBox="1"/>
+                        <p:nvPr/>
+                      </p:nvSpPr>
+                      <p:spPr>
+                        <a:xfrm>
+                          <a:off x="4335870" y="2202843"/>
+                          <a:ext cx="960137" cy="307777"/>
+                        </a:xfrm>
+                        <a:prstGeom prst="rect">
+                          <a:avLst/>
+                        </a:prstGeom>
+                        <a:noFill/>
+                      </p:spPr>
+                      <p:txBody>
+                        <a:bodyPr wrap="square">
+                          <a:spAutoFit/>
+                        </a:bodyPr>
+                        <a:lstStyle/>
+                        <a:p>
+                          <a:pPr algn="ctr"/>
+                          <a:r>
+                            <a:rPr lang="en-US" sz="1400" dirty="0">
+                              <a:solidFill>
+                                <a:schemeClr val="tx1"/>
+                              </a:solidFill>
+                              <a:latin typeface="Times New Roman" panose="02020603050405020304" pitchFamily="18" charset="0"/>
+                              <a:cs typeface="Times New Roman" panose="02020603050405020304" pitchFamily="18" charset="0"/>
+                            </a:rPr>
+                            <a:t>AMF</a:t>
+                          </a:r>
+                          <a:endParaRPr lang="en-US" sz="1400" dirty="0">
+                            <a:latin typeface="Times New Roman" panose="02020603050405020304" pitchFamily="18" charset="0"/>
+                            <a:cs typeface="Times New Roman" panose="02020603050405020304" pitchFamily="18" charset="0"/>
+                          </a:endParaRPr>
+                        </a:p>
+                      </p:txBody>
+                    </p:sp>
+                    <p:pic>
+                      <p:nvPicPr>
+                        <p:cNvPr id="183" name="Graphic 182">
+                          <a:extLst>
+                            <a:ext uri="{FF2B5EF4-FFF2-40B4-BE49-F238E27FC236}">
+                              <a16:creationId xmlns:a16="http://schemas.microsoft.com/office/drawing/2014/main" id="{5CC76CF6-3C16-BF02-9DF2-2C6D92632B06}"/>
+                            </a:ext>
+                          </a:extLst>
+                        </p:cNvPr>
+                        <p:cNvPicPr>
+                          <a:picLocks noChangeAspect="1"/>
+                        </p:cNvPicPr>
+                        <p:nvPr/>
+                      </p:nvPicPr>
+                      <p:blipFill>
+                        <a:blip r:embed="rId12">
+                          <a:extLst>
+                            <a:ext uri="{96DAC541-7B7A-43D3-8B79-37D633B846F1}">
+                              <asvg:svgBlip xmlns:asvg="http://schemas.microsoft.com/office/drawing/2016/SVG/main" r:embed="rId13"/>
+                            </a:ext>
+                          </a:extLst>
+                        </a:blip>
+                        <a:srcRect/>
+                        <a:stretch/>
+                      </p:blipFill>
+                      <p:spPr>
+                        <a:xfrm rot="16200000">
+                          <a:off x="4154082" y="2234565"/>
+                          <a:ext cx="250946" cy="250946"/>
+                        </a:xfrm>
+                        <a:prstGeom prst="rect">
+                          <a:avLst/>
+                        </a:prstGeom>
+                      </p:spPr>
+                    </p:pic>
+                    <p:sp>
+                      <p:nvSpPr>
+                        <p:cNvPr id="184" name="TextBox 183">
+                          <a:extLst>
+                            <a:ext uri="{FF2B5EF4-FFF2-40B4-BE49-F238E27FC236}">
+                              <a16:creationId xmlns:a16="http://schemas.microsoft.com/office/drawing/2014/main" id="{CE9ED2EF-10C3-3BB9-D92A-8E921FE65745}"/>
+                            </a:ext>
+                          </a:extLst>
+                        </p:cNvPr>
+                        <p:cNvSpPr txBox="1"/>
+                        <p:nvPr/>
+                      </p:nvSpPr>
+                      <p:spPr>
+                        <a:xfrm>
+                          <a:off x="4335870" y="2505790"/>
+                          <a:ext cx="960137" cy="307777"/>
+                        </a:xfrm>
+                        <a:prstGeom prst="rect">
+                          <a:avLst/>
+                        </a:prstGeom>
+                        <a:noFill/>
+                      </p:spPr>
+                      <p:txBody>
+                        <a:bodyPr wrap="square">
+                          <a:spAutoFit/>
+                        </a:bodyPr>
+                        <a:lstStyle/>
+                        <a:p>
+                          <a:pPr algn="ctr"/>
+                          <a:r>
+                            <a:rPr lang="en-US" sz="1400" dirty="0">
+                              <a:solidFill>
+                                <a:schemeClr val="tx1"/>
+                              </a:solidFill>
+                              <a:latin typeface="Times New Roman" panose="02020603050405020304" pitchFamily="18" charset="0"/>
+                              <a:cs typeface="Times New Roman" panose="02020603050405020304" pitchFamily="18" charset="0"/>
+                            </a:rPr>
+                            <a:t>UPF</a:t>
+                          </a:r>
+                          <a:endParaRPr lang="en-US" sz="1400" dirty="0">
+                            <a:latin typeface="Times New Roman" panose="02020603050405020304" pitchFamily="18" charset="0"/>
+                            <a:cs typeface="Times New Roman" panose="02020603050405020304" pitchFamily="18" charset="0"/>
+                          </a:endParaRPr>
+                        </a:p>
+                      </p:txBody>
+                    </p:sp>
+                    <p:pic>
+                      <p:nvPicPr>
+                        <p:cNvPr id="185" name="Graphic 184">
+                          <a:extLst>
+                            <a:ext uri="{FF2B5EF4-FFF2-40B4-BE49-F238E27FC236}">
+                              <a16:creationId xmlns:a16="http://schemas.microsoft.com/office/drawing/2014/main" id="{43C59E9A-2AF5-FAFB-647B-C72736050E96}"/>
+                            </a:ext>
+                          </a:extLst>
+                        </p:cNvPr>
+                        <p:cNvPicPr>
+                          <a:picLocks noChangeAspect="1"/>
+                        </p:cNvPicPr>
+                        <p:nvPr/>
+                      </p:nvPicPr>
+                      <p:blipFill>
+                        <a:blip r:embed="rId14">
+                          <a:extLst>
+                            <a:ext uri="{96DAC541-7B7A-43D3-8B79-37D633B846F1}">
+                              <asvg:svgBlip xmlns:asvg="http://schemas.microsoft.com/office/drawing/2016/SVG/main" r:embed="rId15"/>
+                            </a:ext>
+                          </a:extLst>
+                        </a:blip>
+                        <a:srcRect/>
+                        <a:stretch/>
+                      </p:blipFill>
+                      <p:spPr>
+                        <a:xfrm rot="16200000">
+                          <a:off x="4186516" y="2547257"/>
+                          <a:ext cx="218512" cy="218512"/>
+                        </a:xfrm>
+                        <a:prstGeom prst="rect">
+                          <a:avLst/>
+                        </a:prstGeom>
+                      </p:spPr>
+                    </p:pic>
+                  </p:grpSp>
+                </p:grpSp>
+                <p:sp>
+                  <p:nvSpPr>
+                    <p:cNvPr id="176" name="TextBox 175">
+                      <a:extLst>
+                        <a:ext uri="{FF2B5EF4-FFF2-40B4-BE49-F238E27FC236}">
+                          <a16:creationId xmlns:a16="http://schemas.microsoft.com/office/drawing/2014/main" id="{A0649D89-E505-22A1-9F9B-838D485FC1C7}"/>
+                        </a:ext>
+                      </a:extLst>
+                    </p:cNvPr>
+                    <p:cNvSpPr txBox="1"/>
+                    <p:nvPr/>
+                  </p:nvSpPr>
+                  <p:spPr>
+                    <a:xfrm>
+                      <a:off x="4140150" y="3220661"/>
+                      <a:ext cx="1568356" cy="276999"/>
+                    </a:xfrm>
+                    <a:prstGeom prst="rect">
+                      <a:avLst/>
+                    </a:prstGeom>
+                    <a:noFill/>
+                  </p:spPr>
+                  <p:txBody>
+                    <a:bodyPr wrap="square">
+                      <a:spAutoFit/>
+                    </a:bodyPr>
+                    <a:lstStyle/>
+                    <a:p>
+                      <a:pPr marL="285750" indent="-285750">
+                        <a:buFont typeface="Arial" panose="020B0604020202020204" pitchFamily="34" charset="0"/>
+                        <a:buChar char="•"/>
+                      </a:pPr>
+                      <a:r>
+                        <a:rPr lang="en-US" sz="1200" dirty="0">
+                          <a:latin typeface="Times New Roman" panose="02020603050405020304" pitchFamily="18" charset="0"/>
+                          <a:cs typeface="Times New Roman" panose="02020603050405020304" pitchFamily="18" charset="0"/>
+                        </a:rPr>
+                        <a:t>Open5GS</a:t>
+                      </a:r>
+                    </a:p>
+                  </p:txBody>
+                </p:sp>
+              </p:grpSp>
+              <p:sp>
+                <p:nvSpPr>
+                  <p:cNvPr id="200" name="Rectangle: Top Corners Rounded 199">
+                    <a:extLst>
+                      <a:ext uri="{FF2B5EF4-FFF2-40B4-BE49-F238E27FC236}">
+                        <a16:creationId xmlns:a16="http://schemas.microsoft.com/office/drawing/2014/main" id="{074F6BA7-4338-23EC-A819-D42EEC10AD53}"/>
+                      </a:ext>
+                    </a:extLst>
+                  </p:cNvPr>
+                  <p:cNvSpPr/>
+                  <p:nvPr/>
+                </p:nvSpPr>
+                <p:spPr>
+                  <a:xfrm rot="16200000" flipV="1">
+                    <a:off x="8464933" y="2550115"/>
+                    <a:ext cx="621140" cy="207847"/>
+                  </a:xfrm>
+                  <a:prstGeom prst="round2SameRect">
+                    <a:avLst>
+                      <a:gd name="adj1" fmla="val 40326"/>
+                      <a:gd name="adj2" fmla="val 0"/>
+                    </a:avLst>
+                  </a:prstGeom>
+                  <a:solidFill>
+                    <a:srgbClr val="E6E6E6"/>
+                  </a:solidFill>
+                  <a:ln>
+                    <a:noFill/>
+                  </a:ln>
+                </p:spPr>
+                <p:style>
+                  <a:lnRef idx="2">
+                    <a:schemeClr val="accent1">
+                      <a:shade val="15000"/>
+                    </a:schemeClr>
+                  </a:lnRef>
+                  <a:fillRef idx="1">
+                    <a:schemeClr val="accent1"/>
+                  </a:fillRef>
+                  <a:effectRef idx="0">
+                    <a:schemeClr val="accent1"/>
+                  </a:effectRef>
+                  <a:fontRef idx="minor">
+                    <a:schemeClr val="lt1"/>
+                  </a:fontRef>
+                </p:style>
+                <p:txBody>
+                  <a:bodyPr rtlCol="0" anchor="ctr"/>
+                  <a:lstStyle/>
+                  <a:p>
+                    <a:pPr algn="ctr"/>
+                    <a:endParaRPr lang="en-US"/>
+                  </a:p>
+                </p:txBody>
+              </p:sp>
+              <p:sp>
+                <p:nvSpPr>
+                  <p:cNvPr id="207" name="Rectangle: Rounded Corners 206">
+                    <a:extLst>
+                      <a:ext uri="{FF2B5EF4-FFF2-40B4-BE49-F238E27FC236}">
+                        <a16:creationId xmlns:a16="http://schemas.microsoft.com/office/drawing/2014/main" id="{2AD042C8-D8C8-686C-04E3-C1DA9627FCDA}"/>
+                      </a:ext>
+                    </a:extLst>
+                  </p:cNvPr>
+                  <p:cNvSpPr/>
+                  <p:nvPr/>
+                </p:nvSpPr>
+                <p:spPr>
+                  <a:xfrm>
+                    <a:off x="7313624" y="2347278"/>
+                    <a:ext cx="1565803" cy="618689"/>
+                  </a:xfrm>
+                  <a:prstGeom prst="roundRect">
+                    <a:avLst>
+                      <a:gd name="adj" fmla="val 12974"/>
+                    </a:avLst>
+                  </a:prstGeom>
+                  <a:noFill/>
+                  <a:ln w="12700">
+                    <a:solidFill>
+                      <a:schemeClr val="tx1"/>
+                    </a:solidFill>
+                  </a:ln>
+                </p:spPr>
+                <p:style>
+                  <a:lnRef idx="2">
+                    <a:schemeClr val="accent1">
+                      <a:shade val="15000"/>
+                    </a:schemeClr>
+                  </a:lnRef>
+                  <a:fillRef idx="1">
+                    <a:schemeClr val="accent1"/>
+                  </a:fillRef>
+                  <a:effectRef idx="0">
+                    <a:schemeClr val="accent1"/>
+                  </a:effectRef>
+                  <a:fontRef idx="minor">
+                    <a:schemeClr val="lt1"/>
+                  </a:fontRef>
+                </p:style>
+                <p:txBody>
+                  <a:bodyPr rtlCol="0" anchor="ctr"/>
+                  <a:lstStyle/>
+                  <a:p>
+                    <a:pPr algn="ctr"/>
+                    <a:endParaRPr lang="en-US" dirty="0">
+                      <a:latin typeface="Times New Roman" panose="02020603050405020304" pitchFamily="18" charset="0"/>
+                      <a:cs typeface="Times New Roman" panose="02020603050405020304" pitchFamily="18" charset="0"/>
+                    </a:endParaRPr>
+                  </a:p>
+                </p:txBody>
+              </p:sp>
+            </p:grpSp>
+          </p:grpSp>
+          <p:cxnSp>
+            <p:nvCxnSpPr>
+              <p:cNvPr id="236" name="Connector: Elbow 235">
+                <a:extLst>
+                  <a:ext uri="{FF2B5EF4-FFF2-40B4-BE49-F238E27FC236}">
+                    <a16:creationId xmlns:a16="http://schemas.microsoft.com/office/drawing/2014/main" id="{AF73C65C-EB2D-83CA-18A4-ED9FC7D18AE9}"/>
+                  </a:ext>
+                </a:extLst>
+              </p:cNvPr>
+              <p:cNvCxnSpPr>
+                <a:cxnSpLocks/>
+              </p:cNvCxnSpPr>
+              <p:nvPr/>
+            </p:nvCxnSpPr>
+            <p:spPr>
+              <a:xfrm rot="16200000" flipV="1">
+                <a:off x="5806210" y="3005765"/>
+                <a:ext cx="1105253" cy="165302"/>
+              </a:xfrm>
+              <a:prstGeom prst="bentConnector2">
+                <a:avLst/>
+              </a:prstGeom>
+              <a:ln w="12700">
+                <a:solidFill>
+                  <a:schemeClr val="tx1"/>
+                </a:solidFill>
+                <a:round/>
+              </a:ln>
+            </p:spPr>
+            <p:style>
+              <a:lnRef idx="2">
+                <a:schemeClr val="accent1"/>
+              </a:lnRef>
+              <a:fillRef idx="0">
+                <a:schemeClr val="accent1"/>
+              </a:fillRef>
+              <a:effectRef idx="1">
+                <a:schemeClr val="accent1"/>
+              </a:effectRef>
+              <a:fontRef idx="minor">
+                <a:schemeClr val="tx1"/>
+              </a:fontRef>
+            </p:style>
+          </p:cxnSp>
+          <p:grpSp>
+            <p:nvGrpSpPr>
+              <p:cNvPr id="298" name="Group 297">
+                <a:extLst>
+                  <a:ext uri="{FF2B5EF4-FFF2-40B4-BE49-F238E27FC236}">
+                    <a16:creationId xmlns:a16="http://schemas.microsoft.com/office/drawing/2014/main" id="{F4F66483-A881-AB8E-EA24-A1046F52E2A4}"/>
+                  </a:ext>
+                </a:extLst>
+              </p:cNvPr>
+              <p:cNvGrpSpPr/>
+              <p:nvPr/>
+            </p:nvGrpSpPr>
+            <p:grpSpPr>
+              <a:xfrm>
+                <a:off x="2803656" y="1879053"/>
+                <a:ext cx="3500830" cy="1617300"/>
+                <a:chOff x="4409110" y="1660130"/>
+                <a:chExt cx="3500830" cy="1617300"/>
+              </a:xfrm>
+            </p:grpSpPr>
+            <p:sp>
+              <p:nvSpPr>
+                <p:cNvPr id="299" name="Rectangle: Rounded Corners 298">
+                  <a:extLst>
+                    <a:ext uri="{FF2B5EF4-FFF2-40B4-BE49-F238E27FC236}">
+                      <a16:creationId xmlns:a16="http://schemas.microsoft.com/office/drawing/2014/main" id="{F9387809-F426-D5E8-6E1E-11DD2B11E5EC}"/>
+                    </a:ext>
+                  </a:extLst>
+                </p:cNvPr>
+                <p:cNvSpPr/>
+                <p:nvPr/>
+              </p:nvSpPr>
+              <p:spPr>
+                <a:xfrm>
+                  <a:off x="4409110" y="1660130"/>
+                  <a:ext cx="3500830" cy="924852"/>
+                </a:xfrm>
+                <a:prstGeom prst="roundRect">
+                  <a:avLst>
+                    <a:gd name="adj" fmla="val 8734"/>
+                  </a:avLst>
+                </a:prstGeom>
+                <a:solidFill>
+                  <a:schemeClr val="bg1">
+                    <a:lumMod val="95000"/>
+                  </a:schemeClr>
+                </a:solidFill>
+                <a:ln w="12700">
+                  <a:solidFill>
+                    <a:schemeClr val="tx1"/>
+                  </a:solidFill>
+                </a:ln>
+              </p:spPr>
+              <p:style>
+                <a:lnRef idx="2">
+                  <a:schemeClr val="accent1">
+                    <a:shade val="15000"/>
+                  </a:schemeClr>
+                </a:lnRef>
+                <a:fillRef idx="1">
+                  <a:schemeClr val="accent1"/>
+                </a:fillRef>
+                <a:effectRef idx="0">
+                  <a:schemeClr val="accent1"/>
+                </a:effectRef>
+                <a:fontRef idx="minor">
+                  <a:schemeClr val="lt1"/>
+                </a:fontRef>
+              </p:style>
+              <p:txBody>
+                <a:bodyPr rtlCol="0" anchor="ctr"/>
+                <a:lstStyle/>
+                <a:p>
+                  <a:pPr algn="ctr"/>
+                  <a:endParaRPr lang="en-US" dirty="0">
+                    <a:latin typeface="Times New Roman" panose="02020603050405020304" pitchFamily="18" charset="0"/>
+                    <a:cs typeface="Times New Roman" panose="02020603050405020304" pitchFamily="18" charset="0"/>
+                  </a:endParaRPr>
+                </a:p>
+              </p:txBody>
+            </p:sp>
+            <p:grpSp>
+              <p:nvGrpSpPr>
+                <p:cNvPr id="300" name="Group 299">
+                  <a:extLst>
+                    <a:ext uri="{FF2B5EF4-FFF2-40B4-BE49-F238E27FC236}">
+                      <a16:creationId xmlns:a16="http://schemas.microsoft.com/office/drawing/2014/main" id="{BE3ABA9F-C4F0-6B23-7A0B-536CE88F0275}"/>
+                    </a:ext>
+                  </a:extLst>
+                </p:cNvPr>
+                <p:cNvGrpSpPr/>
+                <p:nvPr/>
+              </p:nvGrpSpPr>
+              <p:grpSpPr>
+                <a:xfrm>
+                  <a:off x="4746251" y="2611103"/>
+                  <a:ext cx="3014194" cy="666327"/>
+                  <a:chOff x="4854563" y="2611103"/>
+                  <a:chExt cx="3014194" cy="666327"/>
+                </a:xfrm>
+              </p:grpSpPr>
+              <p:sp>
+                <p:nvSpPr>
+                  <p:cNvPr id="301" name="TextBox 300">
+                    <a:extLst>
+                      <a:ext uri="{FF2B5EF4-FFF2-40B4-BE49-F238E27FC236}">
+                        <a16:creationId xmlns:a16="http://schemas.microsoft.com/office/drawing/2014/main" id="{6C148EEF-91F3-60B8-DD63-926E75254BC6}"/>
+                      </a:ext>
+                    </a:extLst>
+                  </p:cNvPr>
+                  <p:cNvSpPr txBox="1"/>
+                  <p:nvPr/>
+                </p:nvSpPr>
+                <p:spPr>
+                  <a:xfrm>
+                    <a:off x="4854563" y="2611103"/>
+                    <a:ext cx="3014194" cy="307777"/>
+                  </a:xfrm>
+                  <a:prstGeom prst="rect">
+                    <a:avLst/>
+                  </a:prstGeom>
+                  <a:noFill/>
+                </p:spPr>
+                <p:txBody>
+                  <a:bodyPr wrap="square">
+                    <a:spAutoFit/>
+                  </a:bodyPr>
+                  <a:lstStyle/>
+                  <a:p>
+                    <a:pPr algn="ctr"/>
+                    <a:r>
+                      <a:rPr lang="en-US" sz="1400" b="1" dirty="0">
+                        <a:solidFill>
+                          <a:schemeClr val="tx1"/>
+                        </a:solidFill>
+                        <a:latin typeface="Times New Roman" panose="02020603050405020304" pitchFamily="18" charset="0"/>
+                        <a:cs typeface="Times New Roman" panose="02020603050405020304" pitchFamily="18" charset="0"/>
+                      </a:rPr>
+                      <a:t>Near-RT RAN Intelligent Controller</a:t>
+                    </a:r>
+                    <a:endParaRPr lang="en-US" sz="1400" b="1" dirty="0">
+                      <a:latin typeface="Times New Roman" panose="02020603050405020304" pitchFamily="18" charset="0"/>
+                      <a:cs typeface="Times New Roman" panose="02020603050405020304" pitchFamily="18" charset="0"/>
+                    </a:endParaRPr>
+                  </a:p>
+                </p:txBody>
+              </p:sp>
+              <p:sp>
+                <p:nvSpPr>
+                  <p:cNvPr id="302" name="TextBox 301">
+                    <a:extLst>
+                      <a:ext uri="{FF2B5EF4-FFF2-40B4-BE49-F238E27FC236}">
+                        <a16:creationId xmlns:a16="http://schemas.microsoft.com/office/drawing/2014/main" id="{9CEF86A8-EAFC-DCF5-1A14-9BEF19C47DC4}"/>
+                      </a:ext>
+                    </a:extLst>
+                  </p:cNvPr>
+                  <p:cNvSpPr txBox="1"/>
+                  <p:nvPr/>
+                </p:nvSpPr>
+                <p:spPr>
+                  <a:xfrm>
+                    <a:off x="5404466" y="2815765"/>
+                    <a:ext cx="2078132" cy="461665"/>
+                  </a:xfrm>
+                  <a:prstGeom prst="rect">
+                    <a:avLst/>
+                  </a:prstGeom>
+                  <a:noFill/>
+                </p:spPr>
+                <p:txBody>
+                  <a:bodyPr wrap="square">
+                    <a:spAutoFit/>
+                  </a:bodyPr>
+                  <a:lstStyle/>
+                  <a:p>
+                    <a:pPr marL="285750" indent="-285750">
+                      <a:buFont typeface="Arial" panose="020B0604020202020204" pitchFamily="34" charset="0"/>
+                      <a:buChar char="•"/>
+                    </a:pPr>
+                    <a:r>
+                      <a:rPr lang="en-US" sz="1200" dirty="0">
+                        <a:latin typeface="Times New Roman" panose="02020603050405020304" pitchFamily="18" charset="0"/>
+                        <a:cs typeface="Times New Roman" panose="02020603050405020304" pitchFamily="18" charset="0"/>
+                      </a:rPr>
+                      <a:t>O-RAN SC RIC</a:t>
+                    </a:r>
+                  </a:p>
+                  <a:p>
+                    <a:pPr marL="285750" indent="-285750">
+                      <a:buFont typeface="Arial" panose="020B0604020202020204" pitchFamily="34" charset="0"/>
+                      <a:buChar char="•"/>
+                    </a:pPr>
+                    <a:r>
+                      <a:rPr lang="en-US" sz="1200" dirty="0">
+                        <a:latin typeface="Times New Roman" panose="02020603050405020304" pitchFamily="18" charset="0"/>
+                        <a:cs typeface="Times New Roman" panose="02020603050405020304" pitchFamily="18" charset="0"/>
+                      </a:rPr>
+                      <a:t>FlexRIC</a:t>
+                    </a:r>
+                  </a:p>
+                </p:txBody>
+              </p:sp>
+            </p:grpSp>
+          </p:grpSp>
+          <p:cxnSp>
+            <p:nvCxnSpPr>
+              <p:cNvPr id="316" name="Straight Connector 315">
+                <a:extLst>
+                  <a:ext uri="{FF2B5EF4-FFF2-40B4-BE49-F238E27FC236}">
+                    <a16:creationId xmlns:a16="http://schemas.microsoft.com/office/drawing/2014/main" id="{6F0B4269-577E-98FD-100F-DD6A17414AED}"/>
+                  </a:ext>
+                </a:extLst>
+              </p:cNvPr>
+              <p:cNvCxnSpPr>
+                <a:cxnSpLocks/>
+              </p:cNvCxnSpPr>
+              <p:nvPr/>
+            </p:nvCxnSpPr>
+            <p:spPr>
+              <a:xfrm>
+                <a:off x="6304486" y="2146139"/>
+                <a:ext cx="984962" cy="0"/>
+              </a:xfrm>
+              <a:prstGeom prst="line">
+                <a:avLst/>
+              </a:prstGeom>
+              <a:ln w="12700"/>
+            </p:spPr>
+            <p:style>
+              <a:lnRef idx="2">
+                <a:schemeClr val="dk1"/>
+              </a:lnRef>
+              <a:fillRef idx="0">
+                <a:schemeClr val="dk1"/>
+              </a:fillRef>
+              <a:effectRef idx="1">
+                <a:schemeClr val="dk1"/>
+              </a:effectRef>
+              <a:fontRef idx="minor">
+                <a:schemeClr val="tx1"/>
+              </a:fontRef>
+            </p:style>
+          </p:cxnSp>
+          <p:sp>
+            <p:nvSpPr>
+              <p:cNvPr id="318" name="TextBox 317">
+                <a:extLst>
+                  <a:ext uri="{FF2B5EF4-FFF2-40B4-BE49-F238E27FC236}">
+                    <a16:creationId xmlns:a16="http://schemas.microsoft.com/office/drawing/2014/main" id="{5EECCEE8-0AA8-0FC0-E9C6-8A95995C8165}"/>
+                  </a:ext>
+                </a:extLst>
+              </p:cNvPr>
+              <p:cNvSpPr txBox="1"/>
+              <p:nvPr/>
+            </p:nvSpPr>
+            <p:spPr>
+              <a:xfrm>
+                <a:off x="6318121" y="1897625"/>
+                <a:ext cx="971328" cy="276999"/>
+              </a:xfrm>
+              <a:prstGeom prst="rect">
+                <a:avLst/>
+              </a:prstGeom>
+              <a:noFill/>
+            </p:spPr>
+            <p:txBody>
+              <a:bodyPr wrap="square">
+                <a:spAutoFit/>
+              </a:bodyPr>
+              <a:lstStyle/>
+              <a:p>
+                <a:pPr algn="ctr"/>
+                <a:r>
+                  <a:rPr lang="en-US" sz="1200" i="1" dirty="0">
+                    <a:solidFill>
+                      <a:schemeClr val="tx1"/>
+                    </a:solidFill>
+                    <a:latin typeface="Times New Roman" panose="02020603050405020304" pitchFamily="18" charset="0"/>
+                    <a:cs typeface="Times New Roman" panose="02020603050405020304" pitchFamily="18" charset="0"/>
+                  </a:rPr>
+                  <a:t>A1 Policy</a:t>
+                </a:r>
+                <a:endParaRPr lang="en-US" sz="1200" i="1" dirty="0">
+                  <a:latin typeface="Times New Roman" panose="02020603050405020304" pitchFamily="18" charset="0"/>
+                  <a:cs typeface="Times New Roman" panose="02020603050405020304" pitchFamily="18" charset="0"/>
+                </a:endParaRPr>
+              </a:p>
+            </p:txBody>
+          </p:sp>
+          <p:sp>
+            <p:nvSpPr>
+              <p:cNvPr id="319" name="TextBox 318">
+                <a:extLst>
+                  <a:ext uri="{FF2B5EF4-FFF2-40B4-BE49-F238E27FC236}">
+                    <a16:creationId xmlns:a16="http://schemas.microsoft.com/office/drawing/2014/main" id="{351BDFD2-BC3C-44CA-ACCA-DD137E081438}"/>
+                  </a:ext>
+                </a:extLst>
+              </p:cNvPr>
+              <p:cNvSpPr txBox="1"/>
+              <p:nvPr/>
+            </p:nvSpPr>
+            <p:spPr>
+              <a:xfrm>
+                <a:off x="6407418" y="3202655"/>
+                <a:ext cx="2184599" cy="461665"/>
+              </a:xfrm>
+              <a:prstGeom prst="rect">
+                <a:avLst/>
+              </a:prstGeom>
+              <a:noFill/>
+            </p:spPr>
+            <p:txBody>
+              <a:bodyPr wrap="square">
+                <a:spAutoFit/>
+              </a:bodyPr>
+              <a:lstStyle/>
+              <a:p>
+                <a:r>
+                  <a:rPr lang="en-US" sz="1200" i="1" dirty="0">
+                    <a:solidFill>
+                      <a:schemeClr val="tx1"/>
+                    </a:solidFill>
+                    <a:latin typeface="Times New Roman" panose="02020603050405020304" pitchFamily="18" charset="0"/>
+                    <a:cs typeface="Times New Roman" panose="02020603050405020304" pitchFamily="18" charset="0"/>
+                  </a:rPr>
+                  <a:t>Key Performance Measurement</a:t>
+                </a:r>
+              </a:p>
+              <a:p>
+                <a:r>
+                  <a:rPr lang="en-US" sz="1200" i="1" dirty="0">
+                    <a:solidFill>
+                      <a:schemeClr val="tx1"/>
+                    </a:solidFill>
+                    <a:latin typeface="Times New Roman" panose="02020603050405020304" pitchFamily="18" charset="0"/>
+                    <a:cs typeface="Times New Roman" panose="02020603050405020304" pitchFamily="18" charset="0"/>
+                  </a:rPr>
+                  <a:t>RIC Control</a:t>
+                </a:r>
+                <a:endParaRPr lang="en-US" sz="1200" i="1" dirty="0">
+                  <a:latin typeface="Times New Roman" panose="02020603050405020304" pitchFamily="18" charset="0"/>
+                  <a:cs typeface="Times New Roman" panose="02020603050405020304" pitchFamily="18" charset="0"/>
+                </a:endParaRPr>
+              </a:p>
+            </p:txBody>
+          </p:sp>
+          <p:grpSp>
+            <p:nvGrpSpPr>
+              <p:cNvPr id="326" name="Group 325">
+                <a:extLst>
+                  <a:ext uri="{FF2B5EF4-FFF2-40B4-BE49-F238E27FC236}">
+                    <a16:creationId xmlns:a16="http://schemas.microsoft.com/office/drawing/2014/main" id="{A3453D33-2D6E-00C9-72F9-A28C5247CD8D}"/>
+                  </a:ext>
+                </a:extLst>
+              </p:cNvPr>
+              <p:cNvGrpSpPr/>
+              <p:nvPr/>
+            </p:nvGrpSpPr>
+            <p:grpSpPr>
+              <a:xfrm>
+                <a:off x="3683988" y="2374246"/>
+                <a:ext cx="1234649" cy="310703"/>
+                <a:chOff x="3642152" y="2107690"/>
+                <a:chExt cx="1143208" cy="310703"/>
+              </a:xfrm>
+            </p:grpSpPr>
+            <p:sp>
+              <p:nvSpPr>
+                <p:cNvPr id="240" name="Rectangle: Rounded Corners 239">
+                  <a:extLst>
+                    <a:ext uri="{FF2B5EF4-FFF2-40B4-BE49-F238E27FC236}">
+                      <a16:creationId xmlns:a16="http://schemas.microsoft.com/office/drawing/2014/main" id="{4A65C48E-E36E-50DA-D253-3AC63BF3C65F}"/>
+                    </a:ext>
+                  </a:extLst>
+                </p:cNvPr>
+                <p:cNvSpPr/>
+                <p:nvPr/>
+              </p:nvSpPr>
+              <p:spPr>
+                <a:xfrm>
+                  <a:off x="3642155" y="2107690"/>
+                  <a:ext cx="1143205" cy="310703"/>
+                </a:xfrm>
+                <a:prstGeom prst="roundRect">
+                  <a:avLst>
+                    <a:gd name="adj" fmla="val 12974"/>
+                  </a:avLst>
+                </a:prstGeom>
+                <a:solidFill>
+                  <a:schemeClr val="bg1">
+                    <a:lumMod val="85000"/>
+                  </a:schemeClr>
+                </a:solidFill>
+                <a:ln w="12700">
+                  <a:solidFill>
+                    <a:schemeClr val="tx1"/>
+                  </a:solidFill>
+                </a:ln>
+              </p:spPr>
+              <p:style>
+                <a:lnRef idx="2">
+                  <a:schemeClr val="accent1">
+                    <a:shade val="15000"/>
+                  </a:schemeClr>
+                </a:lnRef>
+                <a:fillRef idx="1">
+                  <a:schemeClr val="accent1"/>
+                </a:fillRef>
+                <a:effectRef idx="0">
+                  <a:schemeClr val="accent1"/>
+                </a:effectRef>
+                <a:fontRef idx="minor">
+                  <a:schemeClr val="lt1"/>
+                </a:fontRef>
+              </p:style>
+              <p:txBody>
+                <a:bodyPr rtlCol="0" anchor="ctr"/>
+                <a:lstStyle/>
+                <a:p>
+                  <a:pPr algn="ctr"/>
+                  <a:endParaRPr lang="en-US" sz="1400" dirty="0">
+                    <a:solidFill>
+                      <a:schemeClr val="tx1"/>
+                    </a:solidFill>
+                    <a:latin typeface="Times New Roman" panose="02020603050405020304" pitchFamily="18" charset="0"/>
+                    <a:cs typeface="Times New Roman" panose="02020603050405020304" pitchFamily="18" charset="0"/>
+                  </a:endParaRPr>
+                </a:p>
+              </p:txBody>
+            </p:sp>
+            <p:sp>
+              <p:nvSpPr>
+                <p:cNvPr id="325" name="TextBox 324">
+                  <a:extLst>
+                    <a:ext uri="{FF2B5EF4-FFF2-40B4-BE49-F238E27FC236}">
+                      <a16:creationId xmlns:a16="http://schemas.microsoft.com/office/drawing/2014/main" id="{B086C52C-90A0-EFDE-550F-66D20D667835}"/>
+                    </a:ext>
+                  </a:extLst>
+                </p:cNvPr>
+                <p:cNvSpPr txBox="1"/>
+                <p:nvPr/>
+              </p:nvSpPr>
+              <p:spPr>
+                <a:xfrm>
+                  <a:off x="3642152" y="2108170"/>
+                  <a:ext cx="1143205" cy="307777"/>
+                </a:xfrm>
+                <a:prstGeom prst="rect">
+                  <a:avLst/>
+                </a:prstGeom>
+                <a:noFill/>
+              </p:spPr>
+              <p:txBody>
+                <a:bodyPr wrap="square">
+                  <a:spAutoFit/>
+                </a:bodyPr>
+                <a:lstStyle/>
+                <a:p>
+                  <a:pPr algn="ctr"/>
+                  <a:r>
+                    <a:rPr lang="en-US" sz="1400" dirty="0">
+                      <a:solidFill>
+                        <a:schemeClr val="tx1"/>
+                      </a:solidFill>
+                      <a:latin typeface="Times New Roman" panose="02020603050405020304" pitchFamily="18" charset="0"/>
+                      <a:cs typeface="Times New Roman" panose="02020603050405020304" pitchFamily="18" charset="0"/>
+                    </a:rPr>
+                    <a:t>KPM Monitor</a:t>
+                  </a:r>
+                  <a:endParaRPr lang="en-US" sz="1400" dirty="0">
+                    <a:latin typeface="Times New Roman" panose="02020603050405020304" pitchFamily="18" charset="0"/>
+                    <a:cs typeface="Times New Roman" panose="02020603050405020304" pitchFamily="18" charset="0"/>
+                  </a:endParaRPr>
+                </a:p>
+              </p:txBody>
+            </p:sp>
+          </p:grpSp>
+          <p:grpSp>
+            <p:nvGrpSpPr>
+              <p:cNvPr id="333" name="Group 332">
+                <a:extLst>
+                  <a:ext uri="{FF2B5EF4-FFF2-40B4-BE49-F238E27FC236}">
+                    <a16:creationId xmlns:a16="http://schemas.microsoft.com/office/drawing/2014/main" id="{07E36321-4845-2DC1-D2B9-9B8F056221B6}"/>
+                  </a:ext>
+                </a:extLst>
+              </p:cNvPr>
+              <p:cNvGrpSpPr/>
+              <p:nvPr/>
+            </p:nvGrpSpPr>
+            <p:grpSpPr>
+              <a:xfrm>
+                <a:off x="4916966" y="1992138"/>
+                <a:ext cx="1369001" cy="310703"/>
+                <a:chOff x="3579953" y="2107690"/>
+                <a:chExt cx="1267610" cy="310703"/>
+              </a:xfrm>
+            </p:grpSpPr>
+            <p:sp>
+              <p:nvSpPr>
+                <p:cNvPr id="334" name="Rectangle: Rounded Corners 333">
+                  <a:extLst>
+                    <a:ext uri="{FF2B5EF4-FFF2-40B4-BE49-F238E27FC236}">
+                      <a16:creationId xmlns:a16="http://schemas.microsoft.com/office/drawing/2014/main" id="{D3E13052-BC5E-8FDC-228F-391E8C378CAF}"/>
+                    </a:ext>
+                  </a:extLst>
+                </p:cNvPr>
+                <p:cNvSpPr/>
+                <p:nvPr/>
+              </p:nvSpPr>
+              <p:spPr>
+                <a:xfrm>
+                  <a:off x="3642155" y="2107690"/>
+                  <a:ext cx="1143205" cy="310703"/>
+                </a:xfrm>
+                <a:prstGeom prst="roundRect">
+                  <a:avLst>
+                    <a:gd name="adj" fmla="val 12974"/>
+                  </a:avLst>
+                </a:prstGeom>
+                <a:solidFill>
+                  <a:schemeClr val="bg1">
+                    <a:lumMod val="85000"/>
+                  </a:schemeClr>
+                </a:solidFill>
+                <a:ln w="12700">
+                  <a:solidFill>
+                    <a:schemeClr val="tx1"/>
+                  </a:solidFill>
+                </a:ln>
+              </p:spPr>
+              <p:style>
+                <a:lnRef idx="2">
+                  <a:schemeClr val="accent1">
+                    <a:shade val="15000"/>
+                  </a:schemeClr>
+                </a:lnRef>
+                <a:fillRef idx="1">
+                  <a:schemeClr val="accent1"/>
+                </a:fillRef>
+                <a:effectRef idx="0">
+                  <a:schemeClr val="accent1"/>
+                </a:effectRef>
+                <a:fontRef idx="minor">
+                  <a:schemeClr val="lt1"/>
+                </a:fontRef>
+              </p:style>
+              <p:txBody>
+                <a:bodyPr rtlCol="0" anchor="ctr"/>
+                <a:lstStyle/>
+                <a:p>
+                  <a:pPr algn="ctr"/>
+                  <a:endParaRPr lang="en-US" sz="1400" dirty="0">
+                    <a:solidFill>
+                      <a:schemeClr val="tx1"/>
+                    </a:solidFill>
+                    <a:latin typeface="Times New Roman" panose="02020603050405020304" pitchFamily="18" charset="0"/>
+                    <a:cs typeface="Times New Roman" panose="02020603050405020304" pitchFamily="18" charset="0"/>
+                  </a:endParaRPr>
+                </a:p>
+              </p:txBody>
+            </p:sp>
+            <p:sp>
+              <p:nvSpPr>
+                <p:cNvPr id="335" name="TextBox 334">
+                  <a:extLst>
+                    <a:ext uri="{FF2B5EF4-FFF2-40B4-BE49-F238E27FC236}">
+                      <a16:creationId xmlns:a16="http://schemas.microsoft.com/office/drawing/2014/main" id="{D029EA8F-BBA0-5B94-A6E0-EF02786A1ECE}"/>
+                    </a:ext>
+                  </a:extLst>
+                </p:cNvPr>
+                <p:cNvSpPr txBox="1"/>
+                <p:nvPr/>
+              </p:nvSpPr>
+              <p:spPr>
+                <a:xfrm>
+                  <a:off x="3579953" y="2108170"/>
+                  <a:ext cx="1267610" cy="307777"/>
+                </a:xfrm>
+                <a:prstGeom prst="rect">
+                  <a:avLst/>
+                </a:prstGeom>
+                <a:noFill/>
+              </p:spPr>
+              <p:txBody>
+                <a:bodyPr wrap="square">
+                  <a:spAutoFit/>
+                </a:bodyPr>
+                <a:lstStyle/>
+                <a:p>
+                  <a:pPr algn="ctr"/>
+                  <a:r>
+                    <a:rPr lang="en-US" sz="1400" dirty="0">
+                      <a:solidFill>
+                        <a:schemeClr val="tx1"/>
+                      </a:solidFill>
+                      <a:latin typeface="Times New Roman" panose="02020603050405020304" pitchFamily="18" charset="0"/>
+                      <a:cs typeface="Times New Roman" panose="02020603050405020304" pitchFamily="18" charset="0"/>
+                    </a:rPr>
+                    <a:t>Traffic Steering</a:t>
+                  </a:r>
+                  <a:endParaRPr lang="en-US" sz="1400" dirty="0">
+                    <a:latin typeface="Times New Roman" panose="02020603050405020304" pitchFamily="18" charset="0"/>
+                    <a:cs typeface="Times New Roman" panose="02020603050405020304" pitchFamily="18" charset="0"/>
+                  </a:endParaRPr>
+                </a:p>
+              </p:txBody>
+            </p:sp>
+          </p:grpSp>
+          <p:grpSp>
+            <p:nvGrpSpPr>
+              <p:cNvPr id="336" name="Group 335">
+                <a:extLst>
+                  <a:ext uri="{FF2B5EF4-FFF2-40B4-BE49-F238E27FC236}">
+                    <a16:creationId xmlns:a16="http://schemas.microsoft.com/office/drawing/2014/main" id="{84A20A0E-78FB-9D01-1459-3C069A1299BC}"/>
+                  </a:ext>
+                </a:extLst>
+              </p:cNvPr>
+              <p:cNvGrpSpPr/>
+              <p:nvPr/>
+            </p:nvGrpSpPr>
+            <p:grpSpPr>
+              <a:xfrm>
+                <a:off x="3616810" y="1992138"/>
+                <a:ext cx="1369001" cy="310703"/>
+                <a:chOff x="3579953" y="2107690"/>
+                <a:chExt cx="1267610" cy="310703"/>
+              </a:xfrm>
+            </p:grpSpPr>
+            <p:sp>
+              <p:nvSpPr>
+                <p:cNvPr id="337" name="Rectangle: Rounded Corners 336">
+                  <a:extLst>
+                    <a:ext uri="{FF2B5EF4-FFF2-40B4-BE49-F238E27FC236}">
+                      <a16:creationId xmlns:a16="http://schemas.microsoft.com/office/drawing/2014/main" id="{E58C9A7A-9CC9-A0E6-4D96-B5CC2855D9F2}"/>
+                    </a:ext>
+                  </a:extLst>
+                </p:cNvPr>
+                <p:cNvSpPr/>
+                <p:nvPr/>
+              </p:nvSpPr>
+              <p:spPr>
+                <a:xfrm>
+                  <a:off x="3642155" y="2107690"/>
+                  <a:ext cx="1143205" cy="310703"/>
+                </a:xfrm>
+                <a:prstGeom prst="roundRect">
+                  <a:avLst>
+                    <a:gd name="adj" fmla="val 12974"/>
+                  </a:avLst>
+                </a:prstGeom>
+                <a:solidFill>
+                  <a:schemeClr val="bg1">
+                    <a:lumMod val="85000"/>
+                  </a:schemeClr>
+                </a:solidFill>
+                <a:ln w="12700">
+                  <a:solidFill>
+                    <a:schemeClr val="tx1"/>
+                  </a:solidFill>
+                </a:ln>
+              </p:spPr>
+              <p:style>
+                <a:lnRef idx="2">
+                  <a:schemeClr val="accent1">
+                    <a:shade val="15000"/>
+                  </a:schemeClr>
+                </a:lnRef>
+                <a:fillRef idx="1">
+                  <a:schemeClr val="accent1"/>
+                </a:fillRef>
+                <a:effectRef idx="0">
+                  <a:schemeClr val="accent1"/>
+                </a:effectRef>
+                <a:fontRef idx="minor">
+                  <a:schemeClr val="lt1"/>
+                </a:fontRef>
+              </p:style>
+              <p:txBody>
+                <a:bodyPr rtlCol="0" anchor="ctr"/>
+                <a:lstStyle/>
+                <a:p>
+                  <a:pPr algn="ctr"/>
+                  <a:endParaRPr lang="en-US" sz="1400" dirty="0">
+                    <a:solidFill>
+                      <a:schemeClr val="tx1"/>
+                    </a:solidFill>
+                    <a:latin typeface="Times New Roman" panose="02020603050405020304" pitchFamily="18" charset="0"/>
+                    <a:cs typeface="Times New Roman" panose="02020603050405020304" pitchFamily="18" charset="0"/>
+                  </a:endParaRPr>
+                </a:p>
+              </p:txBody>
+            </p:sp>
+            <p:sp>
+              <p:nvSpPr>
+                <p:cNvPr id="338" name="TextBox 337">
+                  <a:extLst>
+                    <a:ext uri="{FF2B5EF4-FFF2-40B4-BE49-F238E27FC236}">
+                      <a16:creationId xmlns:a16="http://schemas.microsoft.com/office/drawing/2014/main" id="{A3485B05-CDBC-7ABB-426B-CA02365E2BAD}"/>
+                    </a:ext>
+                  </a:extLst>
+                </p:cNvPr>
+                <p:cNvSpPr txBox="1"/>
+                <p:nvPr/>
+              </p:nvSpPr>
+              <p:spPr>
+                <a:xfrm>
+                  <a:off x="3579953" y="2108170"/>
+                  <a:ext cx="1267610" cy="307777"/>
+                </a:xfrm>
+                <a:prstGeom prst="rect">
+                  <a:avLst/>
+                </a:prstGeom>
+                <a:noFill/>
+              </p:spPr>
+              <p:txBody>
+                <a:bodyPr wrap="square">
+                  <a:spAutoFit/>
+                </a:bodyPr>
+                <a:lstStyle/>
+                <a:p>
+                  <a:pPr algn="ctr"/>
+                  <a:r>
+                    <a:rPr lang="en-US" sz="1400" dirty="0" err="1">
+                      <a:solidFill>
+                        <a:schemeClr val="tx1"/>
+                      </a:solidFill>
+                      <a:latin typeface="Times New Roman" panose="02020603050405020304" pitchFamily="18" charset="0"/>
+                      <a:cs typeface="Times New Roman" panose="02020603050405020304" pitchFamily="18" charset="0"/>
+                    </a:rPr>
+                    <a:t>QoE</a:t>
+                  </a:r>
+                  <a:r>
+                    <a:rPr lang="en-US" sz="1400" dirty="0">
+                      <a:solidFill>
+                        <a:schemeClr val="tx1"/>
+                      </a:solidFill>
+                      <a:latin typeface="Times New Roman" panose="02020603050405020304" pitchFamily="18" charset="0"/>
+                      <a:cs typeface="Times New Roman" panose="02020603050405020304" pitchFamily="18" charset="0"/>
+                    </a:rPr>
+                    <a:t> Prediction</a:t>
+                  </a:r>
+                  <a:endParaRPr lang="en-US" sz="1400" dirty="0">
+                    <a:latin typeface="Times New Roman" panose="02020603050405020304" pitchFamily="18" charset="0"/>
+                    <a:cs typeface="Times New Roman" panose="02020603050405020304" pitchFamily="18" charset="0"/>
+                  </a:endParaRPr>
+                </a:p>
+              </p:txBody>
+            </p:sp>
+          </p:grpSp>
+          <p:grpSp>
+            <p:nvGrpSpPr>
+              <p:cNvPr id="339" name="Group 338">
+                <a:extLst>
+                  <a:ext uri="{FF2B5EF4-FFF2-40B4-BE49-F238E27FC236}">
+                    <a16:creationId xmlns:a16="http://schemas.microsoft.com/office/drawing/2014/main" id="{A8B71324-C15E-9BEE-9D24-A267C3F55BB8}"/>
+                  </a:ext>
+                </a:extLst>
+              </p:cNvPr>
+              <p:cNvGrpSpPr/>
+              <p:nvPr/>
+            </p:nvGrpSpPr>
+            <p:grpSpPr>
+              <a:xfrm>
+                <a:off x="4984143" y="2374246"/>
+                <a:ext cx="1234646" cy="310703"/>
+                <a:chOff x="3642154" y="2107690"/>
+                <a:chExt cx="1143206" cy="310703"/>
+              </a:xfrm>
+            </p:grpSpPr>
+            <p:sp>
+              <p:nvSpPr>
+                <p:cNvPr id="340" name="Rectangle: Rounded Corners 339">
+                  <a:extLst>
+                    <a:ext uri="{FF2B5EF4-FFF2-40B4-BE49-F238E27FC236}">
+                      <a16:creationId xmlns:a16="http://schemas.microsoft.com/office/drawing/2014/main" id="{77EA2108-4F43-856E-BF34-DC07A4CBBC2A}"/>
+                    </a:ext>
+                  </a:extLst>
+                </p:cNvPr>
+                <p:cNvSpPr/>
+                <p:nvPr/>
+              </p:nvSpPr>
+              <p:spPr>
+                <a:xfrm>
+                  <a:off x="3642155" y="2107690"/>
+                  <a:ext cx="1143205" cy="310703"/>
+                </a:xfrm>
+                <a:prstGeom prst="roundRect">
+                  <a:avLst>
+                    <a:gd name="adj" fmla="val 12974"/>
+                  </a:avLst>
+                </a:prstGeom>
+                <a:solidFill>
+                  <a:schemeClr val="bg1">
+                    <a:lumMod val="85000"/>
+                  </a:schemeClr>
+                </a:solidFill>
+                <a:ln w="12700">
+                  <a:solidFill>
+                    <a:schemeClr val="tx1"/>
+                  </a:solidFill>
+                </a:ln>
+              </p:spPr>
+              <p:style>
+                <a:lnRef idx="2">
+                  <a:schemeClr val="accent1">
+                    <a:shade val="15000"/>
+                  </a:schemeClr>
+                </a:lnRef>
+                <a:fillRef idx="1">
+                  <a:schemeClr val="accent1"/>
+                </a:fillRef>
+                <a:effectRef idx="0">
+                  <a:schemeClr val="accent1"/>
+                </a:effectRef>
+                <a:fontRef idx="minor">
+                  <a:schemeClr val="lt1"/>
+                </a:fontRef>
+              </p:style>
+              <p:txBody>
+                <a:bodyPr rtlCol="0" anchor="ctr"/>
+                <a:lstStyle/>
+                <a:p>
+                  <a:pPr algn="ctr"/>
+                  <a:endParaRPr lang="en-US" sz="1400" dirty="0">
+                    <a:solidFill>
+                      <a:schemeClr val="tx1"/>
+                    </a:solidFill>
+                    <a:latin typeface="Times New Roman" panose="02020603050405020304" pitchFamily="18" charset="0"/>
+                    <a:cs typeface="Times New Roman" panose="02020603050405020304" pitchFamily="18" charset="0"/>
+                  </a:endParaRPr>
+                </a:p>
+              </p:txBody>
+            </p:sp>
+            <p:sp>
+              <p:nvSpPr>
+                <p:cNvPr id="341" name="TextBox 340">
+                  <a:extLst>
+                    <a:ext uri="{FF2B5EF4-FFF2-40B4-BE49-F238E27FC236}">
+                      <a16:creationId xmlns:a16="http://schemas.microsoft.com/office/drawing/2014/main" id="{DB65914A-4674-4E33-9508-79A71B1F851E}"/>
+                    </a:ext>
+                  </a:extLst>
+                </p:cNvPr>
+                <p:cNvSpPr txBox="1"/>
+                <p:nvPr/>
+              </p:nvSpPr>
+              <p:spPr>
+                <a:xfrm>
+                  <a:off x="3642154" y="2108170"/>
+                  <a:ext cx="1143205" cy="307777"/>
+                </a:xfrm>
+                <a:prstGeom prst="rect">
+                  <a:avLst/>
+                </a:prstGeom>
+                <a:noFill/>
+              </p:spPr>
+              <p:txBody>
+                <a:bodyPr wrap="square">
+                  <a:spAutoFit/>
+                </a:bodyPr>
+                <a:lstStyle/>
+                <a:p>
+                  <a:pPr algn="ctr"/>
+                  <a:r>
+                    <a:rPr lang="en-US" sz="1400" dirty="0">
+                      <a:solidFill>
+                        <a:schemeClr val="tx1"/>
+                      </a:solidFill>
+                      <a:latin typeface="Times New Roman" panose="02020603050405020304" pitchFamily="18" charset="0"/>
+                      <a:cs typeface="Times New Roman" panose="02020603050405020304" pitchFamily="18" charset="0"/>
+                    </a:rPr>
+                    <a:t>RAN Control</a:t>
+                  </a:r>
+                  <a:endParaRPr lang="en-US" sz="1400" dirty="0">
+                    <a:latin typeface="Times New Roman" panose="02020603050405020304" pitchFamily="18" charset="0"/>
+                    <a:cs typeface="Times New Roman" panose="02020603050405020304" pitchFamily="18" charset="0"/>
+                  </a:endParaRPr>
+                </a:p>
+              </p:txBody>
+            </p:sp>
+          </p:grpSp>
+          <p:grpSp>
+            <p:nvGrpSpPr>
+              <p:cNvPr id="347" name="Group 346">
+                <a:extLst>
+                  <a:ext uri="{FF2B5EF4-FFF2-40B4-BE49-F238E27FC236}">
+                    <a16:creationId xmlns:a16="http://schemas.microsoft.com/office/drawing/2014/main" id="{5B9BE978-A5DB-D685-10B4-4EA319C39598}"/>
+                  </a:ext>
+                </a:extLst>
+              </p:cNvPr>
+              <p:cNvGrpSpPr/>
+              <p:nvPr/>
+            </p:nvGrpSpPr>
+            <p:grpSpPr>
+              <a:xfrm>
+                <a:off x="9139199" y="2076271"/>
+                <a:ext cx="655258" cy="310703"/>
+                <a:chOff x="3483267" y="2107690"/>
+                <a:chExt cx="1267610" cy="310703"/>
+              </a:xfrm>
+              <a:solidFill>
+                <a:schemeClr val="bg1"/>
+              </a:solidFill>
+            </p:grpSpPr>
+            <p:sp>
+              <p:nvSpPr>
+                <p:cNvPr id="348" name="Rectangle: Rounded Corners 347">
+                  <a:extLst>
+                    <a:ext uri="{FF2B5EF4-FFF2-40B4-BE49-F238E27FC236}">
+                      <a16:creationId xmlns:a16="http://schemas.microsoft.com/office/drawing/2014/main" id="{3C9841D4-45DC-778F-BEA6-220674ADD499}"/>
+                    </a:ext>
+                  </a:extLst>
+                </p:cNvPr>
+                <p:cNvSpPr/>
+                <p:nvPr/>
+              </p:nvSpPr>
+              <p:spPr>
+                <a:xfrm>
+                  <a:off x="3545470" y="2107690"/>
+                  <a:ext cx="1143205" cy="310703"/>
+                </a:xfrm>
+                <a:prstGeom prst="roundRect">
+                  <a:avLst>
+                    <a:gd name="adj" fmla="val 12974"/>
+                  </a:avLst>
+                </a:prstGeom>
+                <a:grpFill/>
+                <a:ln w="12700">
+                  <a:solidFill>
+                    <a:schemeClr val="tx1"/>
+                  </a:solidFill>
+                </a:ln>
+              </p:spPr>
+              <p:style>
+                <a:lnRef idx="2">
+                  <a:schemeClr val="accent1">
+                    <a:shade val="15000"/>
+                  </a:schemeClr>
+                </a:lnRef>
+                <a:fillRef idx="1">
+                  <a:schemeClr val="accent1"/>
+                </a:fillRef>
+                <a:effectRef idx="0">
+                  <a:schemeClr val="accent1"/>
+                </a:effectRef>
+                <a:fontRef idx="minor">
+                  <a:schemeClr val="lt1"/>
+                </a:fontRef>
+              </p:style>
+              <p:txBody>
+                <a:bodyPr rtlCol="0" anchor="ctr"/>
+                <a:lstStyle/>
+                <a:p>
+                  <a:pPr algn="ctr"/>
+                  <a:endParaRPr lang="en-US" sz="1400" dirty="0">
+                    <a:solidFill>
+                      <a:schemeClr val="tx1"/>
+                    </a:solidFill>
+                    <a:latin typeface="Times New Roman" panose="02020603050405020304" pitchFamily="18" charset="0"/>
+                    <a:cs typeface="Times New Roman" panose="02020603050405020304" pitchFamily="18" charset="0"/>
+                  </a:endParaRPr>
+                </a:p>
+              </p:txBody>
+            </p:sp>
+            <p:sp>
+              <p:nvSpPr>
+                <p:cNvPr id="349" name="TextBox 348">
+                  <a:extLst>
+                    <a:ext uri="{FF2B5EF4-FFF2-40B4-BE49-F238E27FC236}">
+                      <a16:creationId xmlns:a16="http://schemas.microsoft.com/office/drawing/2014/main" id="{492D15C4-5FCA-05B8-E67C-219273E0EB3D}"/>
+                    </a:ext>
+                  </a:extLst>
+                </p:cNvPr>
+                <p:cNvSpPr txBox="1"/>
+                <p:nvPr/>
+              </p:nvSpPr>
+              <p:spPr>
+                <a:xfrm>
+                  <a:off x="3483267" y="2108170"/>
+                  <a:ext cx="1267610" cy="307777"/>
+                </a:xfrm>
+                <a:prstGeom prst="rect">
+                  <a:avLst/>
+                </a:prstGeom>
+                <a:noFill/>
+              </p:spPr>
+              <p:txBody>
+                <a:bodyPr wrap="square">
+                  <a:spAutoFit/>
+                </a:bodyPr>
+                <a:lstStyle/>
+                <a:p>
+                  <a:pPr algn="ctr"/>
+                  <a:r>
+                    <a:rPr lang="en-US" sz="1400" dirty="0">
+                      <a:latin typeface="Times New Roman" panose="02020603050405020304" pitchFamily="18" charset="0"/>
+                      <a:cs typeface="Times New Roman" panose="02020603050405020304" pitchFamily="18" charset="0"/>
+                    </a:rPr>
+                    <a:t>rApps</a:t>
+                  </a:r>
+                </a:p>
+              </p:txBody>
+            </p:sp>
+          </p:grpSp>
+          <p:grpSp>
+            <p:nvGrpSpPr>
+              <p:cNvPr id="351" name="Group 350">
+                <a:extLst>
+                  <a:ext uri="{FF2B5EF4-FFF2-40B4-BE49-F238E27FC236}">
+                    <a16:creationId xmlns:a16="http://schemas.microsoft.com/office/drawing/2014/main" id="{C0E76DF9-91EC-A649-B11A-91E1BE183B4C}"/>
+                  </a:ext>
+                </a:extLst>
+              </p:cNvPr>
+              <p:cNvGrpSpPr/>
+              <p:nvPr/>
+            </p:nvGrpSpPr>
+            <p:grpSpPr>
+              <a:xfrm>
+                <a:off x="7473233" y="2076384"/>
+                <a:ext cx="1712822" cy="310703"/>
+                <a:chOff x="3542966" y="2107690"/>
+                <a:chExt cx="1267610" cy="310703"/>
+              </a:xfrm>
+              <a:solidFill>
+                <a:schemeClr val="bg1"/>
+              </a:solidFill>
+            </p:grpSpPr>
+            <p:sp>
+              <p:nvSpPr>
+                <p:cNvPr id="352" name="Rectangle: Rounded Corners 351">
+                  <a:extLst>
+                    <a:ext uri="{FF2B5EF4-FFF2-40B4-BE49-F238E27FC236}">
+                      <a16:creationId xmlns:a16="http://schemas.microsoft.com/office/drawing/2014/main" id="{A35C3105-3252-BC99-072B-85E2366034C7}"/>
+                    </a:ext>
+                  </a:extLst>
+                </p:cNvPr>
+                <p:cNvSpPr/>
+                <p:nvPr/>
+              </p:nvSpPr>
+              <p:spPr>
+                <a:xfrm>
+                  <a:off x="3605168" y="2107690"/>
+                  <a:ext cx="1143205" cy="310703"/>
+                </a:xfrm>
+                <a:prstGeom prst="roundRect">
+                  <a:avLst>
+                    <a:gd name="adj" fmla="val 12974"/>
+                  </a:avLst>
+                </a:prstGeom>
+                <a:grpFill/>
+                <a:ln w="12700">
+                  <a:solidFill>
+                    <a:schemeClr val="tx1"/>
+                  </a:solidFill>
+                </a:ln>
+              </p:spPr>
+              <p:style>
+                <a:lnRef idx="2">
+                  <a:schemeClr val="accent1">
+                    <a:shade val="15000"/>
+                  </a:schemeClr>
+                </a:lnRef>
+                <a:fillRef idx="1">
+                  <a:schemeClr val="accent1"/>
+                </a:fillRef>
+                <a:effectRef idx="0">
+                  <a:schemeClr val="accent1"/>
+                </a:effectRef>
+                <a:fontRef idx="minor">
+                  <a:schemeClr val="lt1"/>
+                </a:fontRef>
+              </p:style>
+              <p:txBody>
+                <a:bodyPr rtlCol="0" anchor="ctr"/>
+                <a:lstStyle/>
+                <a:p>
+                  <a:pPr algn="ctr"/>
+                  <a:endParaRPr lang="en-US" sz="1400" dirty="0">
+                    <a:solidFill>
+                      <a:schemeClr val="tx1"/>
+                    </a:solidFill>
+                    <a:latin typeface="Times New Roman" panose="02020603050405020304" pitchFamily="18" charset="0"/>
+                    <a:cs typeface="Times New Roman" panose="02020603050405020304" pitchFamily="18" charset="0"/>
+                  </a:endParaRPr>
+                </a:p>
+              </p:txBody>
+            </p:sp>
+            <p:sp>
+              <p:nvSpPr>
+                <p:cNvPr id="353" name="TextBox 352">
+                  <a:extLst>
+                    <a:ext uri="{FF2B5EF4-FFF2-40B4-BE49-F238E27FC236}">
+                      <a16:creationId xmlns:a16="http://schemas.microsoft.com/office/drawing/2014/main" id="{EC5E2325-62FF-4D4A-BD7C-D53E117B8772}"/>
+                    </a:ext>
+                  </a:extLst>
+                </p:cNvPr>
+                <p:cNvSpPr txBox="1"/>
+                <p:nvPr/>
+              </p:nvSpPr>
+              <p:spPr>
+                <a:xfrm>
+                  <a:off x="3542966" y="2108170"/>
+                  <a:ext cx="1267610" cy="307777"/>
+                </a:xfrm>
+                <a:prstGeom prst="rect">
+                  <a:avLst/>
+                </a:prstGeom>
+                <a:noFill/>
+              </p:spPr>
+              <p:txBody>
+                <a:bodyPr wrap="square">
+                  <a:spAutoFit/>
+                </a:bodyPr>
+                <a:lstStyle/>
+                <a:p>
+                  <a:pPr algn="ctr"/>
+                  <a:r>
+                    <a:rPr lang="en-US" sz="1400" dirty="0">
+                      <a:latin typeface="Times New Roman" panose="02020603050405020304" pitchFamily="18" charset="0"/>
+                      <a:cs typeface="Times New Roman" panose="02020603050405020304" pitchFamily="18" charset="0"/>
+                    </a:rPr>
+                    <a:t>Policy Management</a:t>
+                  </a:r>
+                </a:p>
+              </p:txBody>
+            </p:sp>
+          </p:grpSp>
+          <p:sp>
+            <p:nvSpPr>
+              <p:cNvPr id="104" name="TextBox 103">
+                <a:extLst>
+                  <a:ext uri="{FF2B5EF4-FFF2-40B4-BE49-F238E27FC236}">
+                    <a16:creationId xmlns:a16="http://schemas.microsoft.com/office/drawing/2014/main" id="{3342515B-D298-43A1-9E16-E6FD971A6A41}"/>
+                  </a:ext>
+                </a:extLst>
+              </p:cNvPr>
+              <p:cNvSpPr txBox="1"/>
+              <p:nvPr/>
+            </p:nvSpPr>
+            <p:spPr>
+              <a:xfrm>
+                <a:off x="2788486" y="1916665"/>
+                <a:ext cx="742626" cy="307777"/>
+              </a:xfrm>
+              <a:prstGeom prst="rect">
+                <a:avLst/>
+              </a:prstGeom>
+              <a:noFill/>
+            </p:spPr>
+            <p:txBody>
+              <a:bodyPr wrap="square">
+                <a:spAutoFit/>
+              </a:bodyPr>
+              <a:lstStyle/>
+              <a:p>
+                <a:pPr algn="ctr"/>
+                <a:r>
+                  <a:rPr lang="en-US" sz="1400" dirty="0" err="1">
+                    <a:latin typeface="Times New Roman" panose="02020603050405020304" pitchFamily="18" charset="0"/>
+                    <a:cs typeface="Times New Roman" panose="02020603050405020304" pitchFamily="18" charset="0"/>
+                  </a:rPr>
+                  <a:t>xApps</a:t>
+                </a:r>
+                <a:endParaRPr lang="en-US" sz="1400" dirty="0">
+                  <a:latin typeface="Times New Roman" panose="02020603050405020304" pitchFamily="18" charset="0"/>
+                  <a:cs typeface="Times New Roman" panose="02020603050405020304" pitchFamily="18" charset="0"/>
+                </a:endParaRPr>
+              </a:p>
+            </p:txBody>
+          </p:sp>
+          <p:cxnSp>
+            <p:nvCxnSpPr>
+              <p:cNvPr id="111" name="Connector: Elbow 110">
+                <a:extLst>
+                  <a:ext uri="{FF2B5EF4-FFF2-40B4-BE49-F238E27FC236}">
+                    <a16:creationId xmlns:a16="http://schemas.microsoft.com/office/drawing/2014/main" id="{C9D83F41-4194-4299-A450-5523E16454AB}"/>
+                  </a:ext>
+                </a:extLst>
+              </p:cNvPr>
+              <p:cNvCxnSpPr>
+                <a:cxnSpLocks/>
+              </p:cNvCxnSpPr>
+              <p:nvPr/>
+            </p:nvCxnSpPr>
+            <p:spPr>
+              <a:xfrm flipV="1">
+                <a:off x="7561111" y="3806190"/>
+                <a:ext cx="808123" cy="148007"/>
+              </a:xfrm>
+              <a:prstGeom prst="bentConnector3">
+                <a:avLst>
+                  <a:gd name="adj1" fmla="val 50000"/>
+                </a:avLst>
+              </a:prstGeom>
+              <a:ln w="12700">
+                <a:solidFill>
+                  <a:schemeClr val="tx1"/>
+                </a:solidFill>
+                <a:round/>
+              </a:ln>
+            </p:spPr>
+            <p:style>
+              <a:lnRef idx="2">
+                <a:schemeClr val="accent1"/>
+              </a:lnRef>
+              <a:fillRef idx="0">
+                <a:schemeClr val="accent1"/>
+              </a:fillRef>
+              <a:effectRef idx="1">
+                <a:schemeClr val="accent1"/>
+              </a:effectRef>
+              <a:fontRef idx="minor">
+                <a:schemeClr val="tx1"/>
+              </a:fontRef>
+            </p:style>
+          </p:cxnSp>
+          <p:grpSp>
+            <p:nvGrpSpPr>
+              <p:cNvPr id="8" name="Group 7">
+                <a:extLst>
+                  <a:ext uri="{FF2B5EF4-FFF2-40B4-BE49-F238E27FC236}">
+                    <a16:creationId xmlns:a16="http://schemas.microsoft.com/office/drawing/2014/main" id="{404898D3-6C70-464B-8171-22EBA9BA462E}"/>
+                  </a:ext>
+                </a:extLst>
+              </p:cNvPr>
+              <p:cNvGrpSpPr/>
+              <p:nvPr/>
+            </p:nvGrpSpPr>
+            <p:grpSpPr>
+              <a:xfrm>
+                <a:off x="9777994" y="3941543"/>
+                <a:ext cx="97262" cy="20476"/>
+                <a:chOff x="10423398" y="4210335"/>
+                <a:chExt cx="97262" cy="20476"/>
+              </a:xfrm>
+            </p:grpSpPr>
+            <p:sp>
+              <p:nvSpPr>
+                <p:cNvPr id="115" name="Oval 114">
+                  <a:extLst>
+                    <a:ext uri="{FF2B5EF4-FFF2-40B4-BE49-F238E27FC236}">
+                      <a16:creationId xmlns:a16="http://schemas.microsoft.com/office/drawing/2014/main" id="{A4F59B52-4707-44C3-A7FB-893C92767A45}"/>
+                    </a:ext>
+                  </a:extLst>
+                </p:cNvPr>
+                <p:cNvSpPr/>
+                <p:nvPr/>
+              </p:nvSpPr>
+              <p:spPr>
+                <a:xfrm flipV="1">
+                  <a:off x="10423398" y="4210335"/>
+                  <a:ext cx="20476" cy="20476"/>
+                </a:xfrm>
+                <a:prstGeom prst="ellipse">
+                  <a:avLst/>
+                </a:prstGeom>
+                <a:solidFill>
+                  <a:schemeClr val="tx1"/>
+                </a:solidFill>
+                <a:ln>
+                  <a:noFill/>
+                </a:ln>
+              </p:spPr>
+              <p:style>
+                <a:lnRef idx="2">
+                  <a:schemeClr val="accent1">
+                    <a:shade val="15000"/>
+                  </a:schemeClr>
+                </a:lnRef>
+                <a:fillRef idx="1">
+                  <a:schemeClr val="accent1"/>
+                </a:fillRef>
+                <a:effectRef idx="0">
+                  <a:schemeClr val="accent1"/>
+                </a:effectRef>
+                <a:fontRef idx="minor">
+                  <a:schemeClr val="lt1"/>
+                </a:fontRef>
+              </p:style>
+              <p:txBody>
+                <a:bodyPr rtlCol="0" anchor="ctr"/>
+                <a:lstStyle/>
+                <a:p>
+                  <a:pPr algn="ctr"/>
+                  <a:endParaRPr lang="en-US"/>
+                </a:p>
+              </p:txBody>
+            </p:sp>
+            <p:sp>
+              <p:nvSpPr>
+                <p:cNvPr id="117" name="Oval 116">
+                  <a:extLst>
+                    <a:ext uri="{FF2B5EF4-FFF2-40B4-BE49-F238E27FC236}">
+                      <a16:creationId xmlns:a16="http://schemas.microsoft.com/office/drawing/2014/main" id="{6AE6F000-4645-4D6E-B014-5F446A29015B}"/>
+                    </a:ext>
+                  </a:extLst>
+                </p:cNvPr>
+                <p:cNvSpPr/>
+                <p:nvPr/>
+              </p:nvSpPr>
+              <p:spPr>
+                <a:xfrm flipV="1">
+                  <a:off x="10461791" y="4210335"/>
+                  <a:ext cx="20476" cy="20476"/>
+                </a:xfrm>
+                <a:prstGeom prst="ellipse">
+                  <a:avLst/>
+                </a:prstGeom>
+                <a:solidFill>
+                  <a:schemeClr val="tx1"/>
+                </a:solidFill>
+                <a:ln>
+                  <a:noFill/>
+                </a:ln>
+              </p:spPr>
+              <p:style>
+                <a:lnRef idx="2">
+                  <a:schemeClr val="accent1">
+                    <a:shade val="15000"/>
+                  </a:schemeClr>
+                </a:lnRef>
+                <a:fillRef idx="1">
+                  <a:schemeClr val="accent1"/>
+                </a:fillRef>
+                <a:effectRef idx="0">
+                  <a:schemeClr val="accent1"/>
+                </a:effectRef>
+                <a:fontRef idx="minor">
+                  <a:schemeClr val="lt1"/>
+                </a:fontRef>
+              </p:style>
+              <p:txBody>
+                <a:bodyPr rtlCol="0" anchor="ctr"/>
+                <a:lstStyle/>
+                <a:p>
+                  <a:pPr algn="ctr"/>
+                  <a:endParaRPr lang="en-US"/>
+                </a:p>
+              </p:txBody>
+            </p:sp>
+            <p:sp>
+              <p:nvSpPr>
+                <p:cNvPr id="119" name="Oval 118">
+                  <a:extLst>
+                    <a:ext uri="{FF2B5EF4-FFF2-40B4-BE49-F238E27FC236}">
+                      <a16:creationId xmlns:a16="http://schemas.microsoft.com/office/drawing/2014/main" id="{D5F18A58-7DC6-478B-AD16-813A33502DD2}"/>
+                    </a:ext>
+                  </a:extLst>
+                </p:cNvPr>
+                <p:cNvSpPr/>
+                <p:nvPr/>
+              </p:nvSpPr>
+              <p:spPr>
+                <a:xfrm flipV="1">
+                  <a:off x="10500184" y="4210335"/>
+                  <a:ext cx="20476" cy="20476"/>
+                </a:xfrm>
+                <a:prstGeom prst="ellipse">
+                  <a:avLst/>
+                </a:prstGeom>
+                <a:solidFill>
+                  <a:schemeClr val="tx1"/>
+                </a:solidFill>
+                <a:ln>
+                  <a:noFill/>
+                </a:ln>
+              </p:spPr>
+              <p:style>
+                <a:lnRef idx="2">
+                  <a:schemeClr val="accent1">
+                    <a:shade val="15000"/>
+                  </a:schemeClr>
+                </a:lnRef>
+                <a:fillRef idx="1">
+                  <a:schemeClr val="accent1"/>
+                </a:fillRef>
+                <a:effectRef idx="0">
+                  <a:schemeClr val="accent1"/>
+                </a:effectRef>
+                <a:fontRef idx="minor">
+                  <a:schemeClr val="lt1"/>
+                </a:fontRef>
+              </p:style>
+              <p:txBody>
+                <a:bodyPr rtlCol="0" anchor="ctr"/>
+                <a:lstStyle/>
+                <a:p>
+                  <a:pPr algn="ctr"/>
+                  <a:endParaRPr lang="en-US"/>
+                </a:p>
+              </p:txBody>
+            </p:sp>
+          </p:grpSp>
+          <p:grpSp>
+            <p:nvGrpSpPr>
+              <p:cNvPr id="123" name="Group 122">
+                <a:extLst>
+                  <a:ext uri="{FF2B5EF4-FFF2-40B4-BE49-F238E27FC236}">
+                    <a16:creationId xmlns:a16="http://schemas.microsoft.com/office/drawing/2014/main" id="{57872673-AAAD-4628-B781-C1A7A5F491EC}"/>
+                  </a:ext>
+                </a:extLst>
+              </p:cNvPr>
+              <p:cNvGrpSpPr/>
+              <p:nvPr/>
+            </p:nvGrpSpPr>
+            <p:grpSpPr>
+              <a:xfrm>
+                <a:off x="9670874" y="2637902"/>
+                <a:ext cx="97262" cy="20476"/>
+                <a:chOff x="10392777" y="4210335"/>
+                <a:chExt cx="97262" cy="20476"/>
+              </a:xfrm>
+            </p:grpSpPr>
+            <p:sp>
+              <p:nvSpPr>
+                <p:cNvPr id="124" name="Oval 123">
+                  <a:extLst>
+                    <a:ext uri="{FF2B5EF4-FFF2-40B4-BE49-F238E27FC236}">
+                      <a16:creationId xmlns:a16="http://schemas.microsoft.com/office/drawing/2014/main" id="{24631A37-9689-4B10-8ADB-0416A5B0735E}"/>
+                    </a:ext>
+                  </a:extLst>
+                </p:cNvPr>
+                <p:cNvSpPr/>
+                <p:nvPr/>
+              </p:nvSpPr>
+              <p:spPr>
+                <a:xfrm flipV="1">
+                  <a:off x="10392777" y="4210335"/>
+                  <a:ext cx="20476" cy="20476"/>
+                </a:xfrm>
+                <a:prstGeom prst="ellipse">
+                  <a:avLst/>
+                </a:prstGeom>
+                <a:solidFill>
+                  <a:schemeClr val="tx1"/>
+                </a:solidFill>
+                <a:ln>
+                  <a:noFill/>
+                </a:ln>
+              </p:spPr>
+              <p:style>
+                <a:lnRef idx="2">
+                  <a:schemeClr val="accent1">
+                    <a:shade val="15000"/>
+                  </a:schemeClr>
+                </a:lnRef>
+                <a:fillRef idx="1">
+                  <a:schemeClr val="accent1"/>
+                </a:fillRef>
+                <a:effectRef idx="0">
+                  <a:schemeClr val="accent1"/>
+                </a:effectRef>
+                <a:fontRef idx="minor">
+                  <a:schemeClr val="lt1"/>
+                </a:fontRef>
+              </p:style>
+              <p:txBody>
+                <a:bodyPr rtlCol="0" anchor="ctr"/>
+                <a:lstStyle/>
+                <a:p>
+                  <a:pPr algn="ctr"/>
+                  <a:endParaRPr lang="en-US"/>
+                </a:p>
+              </p:txBody>
+            </p:sp>
+            <p:sp>
+              <p:nvSpPr>
+                <p:cNvPr id="125" name="Oval 124">
+                  <a:extLst>
+                    <a:ext uri="{FF2B5EF4-FFF2-40B4-BE49-F238E27FC236}">
+                      <a16:creationId xmlns:a16="http://schemas.microsoft.com/office/drawing/2014/main" id="{0A1B9C14-F6A3-4685-834A-A8A1851159D4}"/>
+                    </a:ext>
+                  </a:extLst>
+                </p:cNvPr>
+                <p:cNvSpPr/>
+                <p:nvPr/>
+              </p:nvSpPr>
+              <p:spPr>
+                <a:xfrm flipV="1">
+                  <a:off x="10431170" y="4210335"/>
+                  <a:ext cx="20476" cy="20476"/>
+                </a:xfrm>
+                <a:prstGeom prst="ellipse">
+                  <a:avLst/>
+                </a:prstGeom>
+                <a:solidFill>
+                  <a:schemeClr val="tx1"/>
+                </a:solidFill>
+                <a:ln>
+                  <a:noFill/>
+                </a:ln>
+              </p:spPr>
+              <p:style>
+                <a:lnRef idx="2">
+                  <a:schemeClr val="accent1">
+                    <a:shade val="15000"/>
+                  </a:schemeClr>
+                </a:lnRef>
+                <a:fillRef idx="1">
+                  <a:schemeClr val="accent1"/>
+                </a:fillRef>
+                <a:effectRef idx="0">
+                  <a:schemeClr val="accent1"/>
+                </a:effectRef>
+                <a:fontRef idx="minor">
+                  <a:schemeClr val="lt1"/>
+                </a:fontRef>
+              </p:style>
+              <p:txBody>
+                <a:bodyPr rtlCol="0" anchor="ctr"/>
+                <a:lstStyle/>
+                <a:p>
+                  <a:pPr algn="ctr"/>
+                  <a:endParaRPr lang="en-US"/>
+                </a:p>
+              </p:txBody>
+            </p:sp>
+            <p:sp>
+              <p:nvSpPr>
+                <p:cNvPr id="126" name="Oval 125">
+                  <a:extLst>
+                    <a:ext uri="{FF2B5EF4-FFF2-40B4-BE49-F238E27FC236}">
+                      <a16:creationId xmlns:a16="http://schemas.microsoft.com/office/drawing/2014/main" id="{B25E1B82-A1FA-4694-AA25-FAEC6C0B5254}"/>
+                    </a:ext>
+                  </a:extLst>
+                </p:cNvPr>
+                <p:cNvSpPr/>
+                <p:nvPr/>
+              </p:nvSpPr>
+              <p:spPr>
+                <a:xfrm flipV="1">
+                  <a:off x="10469563" y="4210335"/>
+                  <a:ext cx="20476" cy="20476"/>
+                </a:xfrm>
+                <a:prstGeom prst="ellipse">
+                  <a:avLst/>
+                </a:prstGeom>
+                <a:solidFill>
+                  <a:schemeClr val="tx1"/>
+                </a:solidFill>
+                <a:ln>
+                  <a:noFill/>
+                </a:ln>
+              </p:spPr>
+              <p:style>
+                <a:lnRef idx="2">
+                  <a:schemeClr val="accent1">
+                    <a:shade val="15000"/>
+                  </a:schemeClr>
+                </a:lnRef>
+                <a:fillRef idx="1">
+                  <a:schemeClr val="accent1"/>
+                </a:fillRef>
+                <a:effectRef idx="0">
+                  <a:schemeClr val="accent1"/>
+                </a:effectRef>
+                <a:fontRef idx="minor">
+                  <a:schemeClr val="lt1"/>
+                </a:fontRef>
+              </p:style>
+              <p:txBody>
+                <a:bodyPr rtlCol="0" anchor="ctr"/>
+                <a:lstStyle/>
+                <a:p>
+                  <a:pPr algn="ctr"/>
+                  <a:endParaRPr lang="en-US"/>
+                </a:p>
+              </p:txBody>
+            </p:sp>
+          </p:grpSp>
+          <p:grpSp>
+            <p:nvGrpSpPr>
+              <p:cNvPr id="127" name="Group 126">
+                <a:extLst>
+                  <a:ext uri="{FF2B5EF4-FFF2-40B4-BE49-F238E27FC236}">
+                    <a16:creationId xmlns:a16="http://schemas.microsoft.com/office/drawing/2014/main" id="{26AD37C1-FC4C-445B-A475-2C31F113B111}"/>
+                  </a:ext>
+                </a:extLst>
+              </p:cNvPr>
+              <p:cNvGrpSpPr/>
+              <p:nvPr/>
+            </p:nvGrpSpPr>
+            <p:grpSpPr>
+              <a:xfrm>
+                <a:off x="2976217" y="2643212"/>
+                <a:ext cx="97262" cy="20476"/>
+                <a:chOff x="10366573" y="4210335"/>
+                <a:chExt cx="97262" cy="20476"/>
+              </a:xfrm>
+            </p:grpSpPr>
+            <p:sp>
+              <p:nvSpPr>
+                <p:cNvPr id="128" name="Oval 127">
+                  <a:extLst>
+                    <a:ext uri="{FF2B5EF4-FFF2-40B4-BE49-F238E27FC236}">
+                      <a16:creationId xmlns:a16="http://schemas.microsoft.com/office/drawing/2014/main" id="{BE600BD0-3962-416A-B573-62FC9571329A}"/>
+                    </a:ext>
+                  </a:extLst>
+                </p:cNvPr>
+                <p:cNvSpPr/>
+                <p:nvPr/>
+              </p:nvSpPr>
+              <p:spPr>
+                <a:xfrm flipV="1">
+                  <a:off x="10366573" y="4210335"/>
+                  <a:ext cx="20476" cy="20476"/>
+                </a:xfrm>
+                <a:prstGeom prst="ellipse">
+                  <a:avLst/>
+                </a:prstGeom>
+                <a:solidFill>
+                  <a:schemeClr val="tx1"/>
+                </a:solidFill>
+                <a:ln>
+                  <a:noFill/>
+                </a:ln>
+              </p:spPr>
+              <p:style>
+                <a:lnRef idx="2">
+                  <a:schemeClr val="accent1">
+                    <a:shade val="15000"/>
+                  </a:schemeClr>
+                </a:lnRef>
+                <a:fillRef idx="1">
+                  <a:schemeClr val="accent1"/>
+                </a:fillRef>
+                <a:effectRef idx="0">
+                  <a:schemeClr val="accent1"/>
+                </a:effectRef>
+                <a:fontRef idx="minor">
+                  <a:schemeClr val="lt1"/>
+                </a:fontRef>
+              </p:style>
+              <p:txBody>
+                <a:bodyPr rtlCol="0" anchor="ctr"/>
+                <a:lstStyle/>
+                <a:p>
+                  <a:pPr algn="ctr"/>
+                  <a:endParaRPr lang="en-US"/>
+                </a:p>
+              </p:txBody>
+            </p:sp>
+            <p:sp>
+              <p:nvSpPr>
+                <p:cNvPr id="129" name="Oval 128">
+                  <a:extLst>
+                    <a:ext uri="{FF2B5EF4-FFF2-40B4-BE49-F238E27FC236}">
+                      <a16:creationId xmlns:a16="http://schemas.microsoft.com/office/drawing/2014/main" id="{A8E8DF44-D72F-48F7-BC48-12898EF88200}"/>
+                    </a:ext>
+                  </a:extLst>
+                </p:cNvPr>
+                <p:cNvSpPr/>
+                <p:nvPr/>
+              </p:nvSpPr>
+              <p:spPr>
+                <a:xfrm flipV="1">
+                  <a:off x="10404966" y="4210335"/>
+                  <a:ext cx="20476" cy="20476"/>
+                </a:xfrm>
+                <a:prstGeom prst="ellipse">
+                  <a:avLst/>
+                </a:prstGeom>
+                <a:solidFill>
+                  <a:schemeClr val="tx1"/>
+                </a:solidFill>
+                <a:ln>
+                  <a:noFill/>
+                </a:ln>
+              </p:spPr>
+              <p:style>
+                <a:lnRef idx="2">
+                  <a:schemeClr val="accent1">
+                    <a:shade val="15000"/>
+                  </a:schemeClr>
+                </a:lnRef>
+                <a:fillRef idx="1">
+                  <a:schemeClr val="accent1"/>
+                </a:fillRef>
+                <a:effectRef idx="0">
+                  <a:schemeClr val="accent1"/>
+                </a:effectRef>
+                <a:fontRef idx="minor">
+                  <a:schemeClr val="lt1"/>
+                </a:fontRef>
+              </p:style>
+              <p:txBody>
+                <a:bodyPr rtlCol="0" anchor="ctr"/>
+                <a:lstStyle/>
+                <a:p>
+                  <a:pPr algn="ctr"/>
+                  <a:endParaRPr lang="en-US"/>
+                </a:p>
+              </p:txBody>
+            </p:sp>
+            <p:sp>
+              <p:nvSpPr>
+                <p:cNvPr id="130" name="Oval 129">
+                  <a:extLst>
+                    <a:ext uri="{FF2B5EF4-FFF2-40B4-BE49-F238E27FC236}">
+                      <a16:creationId xmlns:a16="http://schemas.microsoft.com/office/drawing/2014/main" id="{0E65D4E3-D00A-48E5-99ED-8AC57DBB500A}"/>
+                    </a:ext>
+                  </a:extLst>
+                </p:cNvPr>
+                <p:cNvSpPr/>
+                <p:nvPr/>
+              </p:nvSpPr>
+              <p:spPr>
+                <a:xfrm flipV="1">
+                  <a:off x="10443359" y="4210335"/>
+                  <a:ext cx="20476" cy="20476"/>
+                </a:xfrm>
+                <a:prstGeom prst="ellipse">
+                  <a:avLst/>
+                </a:prstGeom>
+                <a:solidFill>
+                  <a:schemeClr val="tx1"/>
+                </a:solidFill>
+                <a:ln>
+                  <a:noFill/>
+                </a:ln>
+              </p:spPr>
+              <p:style>
+                <a:lnRef idx="2">
+                  <a:schemeClr val="accent1">
+                    <a:shade val="15000"/>
+                  </a:schemeClr>
+                </a:lnRef>
+                <a:fillRef idx="1">
+                  <a:schemeClr val="accent1"/>
+                </a:fillRef>
+                <a:effectRef idx="0">
+                  <a:schemeClr val="accent1"/>
+                </a:effectRef>
+                <a:fontRef idx="minor">
+                  <a:schemeClr val="lt1"/>
+                </a:fontRef>
+              </p:style>
+              <p:txBody>
+                <a:bodyPr rtlCol="0" anchor="ctr"/>
+                <a:lstStyle/>
+                <a:p>
+                  <a:pPr algn="ctr"/>
+                  <a:endParaRPr lang="en-US"/>
+                </a:p>
+              </p:txBody>
+            </p:sp>
+          </p:grpSp>
+        </p:grpSp>
+        <p:sp>
+          <p:nvSpPr>
+            <p:cNvPr id="106" name="TextBox 105">
+              <a:extLst>
+                <a:ext uri="{FF2B5EF4-FFF2-40B4-BE49-F238E27FC236}">
+                  <a16:creationId xmlns:a16="http://schemas.microsoft.com/office/drawing/2014/main" id="{987F1CEA-6580-4105-B686-23136B610DCD}"/>
+                </a:ext>
+              </a:extLst>
+            </p:cNvPr>
+            <p:cNvSpPr txBox="1"/>
+            <p:nvPr/>
+          </p:nvSpPr>
+          <p:spPr>
+            <a:xfrm>
+              <a:off x="7445360" y="3801483"/>
+              <a:ext cx="946329" cy="646331"/>
+            </a:xfrm>
+            <a:prstGeom prst="rect">
+              <a:avLst/>
+            </a:prstGeom>
+            <a:noFill/>
+          </p:spPr>
+          <p:txBody>
+            <a:bodyPr wrap="square">
+              <a:spAutoFit/>
+            </a:bodyPr>
+            <a:lstStyle/>
+            <a:p>
+              <a:r>
+                <a:rPr lang="en-US" sz="1200" i="1" dirty="0">
+                  <a:solidFill>
+                    <a:schemeClr val="tx1"/>
+                  </a:solidFill>
+                  <a:latin typeface="Times New Roman" panose="02020603050405020304" pitchFamily="18" charset="0"/>
+                  <a:cs typeface="Times New Roman" panose="02020603050405020304" pitchFamily="18" charset="0"/>
+                </a:rPr>
+                <a:t>Tunnel from UPF to UE</a:t>
+              </a:r>
+              <a:br>
+                <a:rPr lang="en-US" sz="1200" i="1" dirty="0">
+                  <a:solidFill>
+                    <a:schemeClr val="tx1"/>
+                  </a:solidFill>
+                  <a:latin typeface="Times New Roman" panose="02020603050405020304" pitchFamily="18" charset="0"/>
+                  <a:cs typeface="Times New Roman" panose="02020603050405020304" pitchFamily="18" charset="0"/>
+                </a:rPr>
+              </a:br>
+              <a:r>
+                <a:rPr lang="en-US" sz="1200" i="1" dirty="0">
+                  <a:solidFill>
+                    <a:schemeClr val="tx1"/>
+                  </a:solidFill>
+                  <a:latin typeface="Times New Roman" panose="02020603050405020304" pitchFamily="18" charset="0"/>
+                  <a:cs typeface="Times New Roman" panose="02020603050405020304" pitchFamily="18" charset="0"/>
+                </a:rPr>
+                <a:t>for internet</a:t>
+              </a:r>
+              <a:endParaRPr lang="en-US" sz="1200" i="1" dirty="0">
+                <a:latin typeface="Times New Roman" panose="02020603050405020304" pitchFamily="18" charset="0"/>
+                <a:cs typeface="Times New Roman" panose="02020603050405020304" pitchFamily="18" charset="0"/>
+              </a:endParaRPr>
+            </a:p>
+          </p:txBody>
+        </p:sp>
+      </p:grpSp>
+    </p:spTree>
+    <p:extLst>
+      <p:ext uri="{BB962C8B-B14F-4D97-AF65-F5344CB8AC3E}">
+        <p14:creationId xmlns:p14="http://schemas.microsoft.com/office/powerpoint/2010/main" val="900474636"/>
+      </p:ext>
+    </p:extLst>
+  </p:cSld>
+  <p:clrMapOvr>
+    <a:masterClrMapping/>
+  </p:clrMapOvr>
+</p:sld>
+</file>
+
+<file path=ppt/slides/slide6.xml><?xml version="1.0" encoding="utf-8"?>
+<p:sld xmlns:a="http://schemas.openxmlformats.org/drawingml/2006/main" xmlns:r="http://schemas.openxmlformats.org/officeDocument/2006/relationships" xmlns:p="http://schemas.openxmlformats.org/presentationml/2006/main" show="0">
+  <p:cSld>
+    <p:spTree>
+      <p:nvGrpSpPr>
+        <p:cNvPr id="1" name=""/>
+        <p:cNvGrpSpPr/>
+        <p:nvPr/>
+      </p:nvGrpSpPr>
+      <p:grpSpPr>
+        <a:xfrm>
+          <a:off x="0" y="0"/>
+          <a:ext cx="0" cy="0"/>
+          <a:chOff x="0" y="0"/>
+          <a:chExt cx="0" cy="0"/>
+        </a:xfrm>
+      </p:grpSpPr>
+      <p:sp>
+        <p:nvSpPr>
+          <p:cNvPr id="295" name="Rectangle 294">
+            <a:extLst>
+              <a:ext uri="{FF2B5EF4-FFF2-40B4-BE49-F238E27FC236}">
+                <a16:creationId xmlns:a16="http://schemas.microsoft.com/office/drawing/2014/main" id="{01227F84-DA99-539E-6970-C4DA0CFAFCDE}"/>
+              </a:ext>
+            </a:extLst>
+          </p:cNvPr>
+          <p:cNvSpPr>
+            <a:spLocks noGrp="1" noRot="1" noMove="1" noResize="1" noEditPoints="1" noAdjustHandles="1" noChangeArrowheads="1" noChangeShapeType="1"/>
+          </p:cNvSpPr>
+          <p:nvPr/>
+        </p:nvSpPr>
+        <p:spPr>
+          <a:xfrm>
+            <a:off x="0" y="0"/>
+            <a:ext cx="12192000" cy="6858000"/>
+          </a:xfrm>
+          <a:prstGeom prst="rect">
+            <a:avLst/>
+          </a:prstGeom>
+          <a:solidFill>
+            <a:srgbClr val="0D1117"/>
+          </a:solidFill>
+        </p:spPr>
+        <p:style>
+          <a:lnRef idx="2">
+            <a:schemeClr val="dk1">
+              <a:shade val="15000"/>
+            </a:schemeClr>
+          </a:lnRef>
+          <a:fillRef idx="1">
+            <a:schemeClr val="dk1"/>
+          </a:fillRef>
+          <a:effectRef idx="0">
+            <a:schemeClr val="dk1"/>
+          </a:effectRef>
+          <a:fontRef idx="minor">
+            <a:schemeClr val="lt1"/>
+          </a:fontRef>
+        </p:style>
+        <p:txBody>
+          <a:bodyPr rtlCol="0" anchor="ctr"/>
+          <a:lstStyle/>
+          <a:p>
+            <a:pPr algn="ctr"/>
+            <a:endParaRPr lang="en-US">
+              <a:solidFill>
+                <a:schemeClr val="bg1"/>
+              </a:solidFill>
+            </a:endParaRPr>
+          </a:p>
+        </p:txBody>
+      </p:sp>
+      <p:grpSp>
+        <p:nvGrpSpPr>
+          <p:cNvPr id="2" name="Group 1">
+            <a:extLst>
+              <a:ext uri="{FF2B5EF4-FFF2-40B4-BE49-F238E27FC236}">
+                <a16:creationId xmlns:a16="http://schemas.microsoft.com/office/drawing/2014/main" id="{DE28D0C1-022A-4A17-812E-ED8DE9796EE2}"/>
+              </a:ext>
+            </a:extLst>
+          </p:cNvPr>
+          <p:cNvGrpSpPr/>
+          <p:nvPr/>
+        </p:nvGrpSpPr>
+        <p:grpSpPr>
+          <a:xfrm>
+            <a:off x="2008561" y="1650083"/>
+            <a:ext cx="8174878" cy="3557833"/>
+            <a:chOff x="1850713" y="1617089"/>
+            <a:chExt cx="8174878" cy="3557833"/>
+          </a:xfrm>
+        </p:grpSpPr>
+        <p:sp>
+          <p:nvSpPr>
+            <p:cNvPr id="50" name="Rectangle: Rounded Corners 49">
+              <a:extLst>
+                <a:ext uri="{FF2B5EF4-FFF2-40B4-BE49-F238E27FC236}">
+                  <a16:creationId xmlns:a16="http://schemas.microsoft.com/office/drawing/2014/main" id="{2E48D905-0F3A-19B5-4417-05FA2C821E70}"/>
+                </a:ext>
+              </a:extLst>
+            </p:cNvPr>
+            <p:cNvSpPr/>
+            <p:nvPr/>
+          </p:nvSpPr>
+          <p:spPr>
+            <a:xfrm>
+              <a:off x="1850713" y="1617089"/>
+              <a:ext cx="8148856" cy="3557833"/>
+            </a:xfrm>
+            <a:prstGeom prst="roundRect">
+              <a:avLst>
+                <a:gd name="adj" fmla="val 2232"/>
+              </a:avLst>
+            </a:prstGeom>
+            <a:solidFill>
+              <a:srgbClr val="0D1117"/>
+            </a:solidFill>
+            <a:ln w="28575">
+              <a:noFill/>
+            </a:ln>
+          </p:spPr>
+          <p:style>
+            <a:lnRef idx="2">
+              <a:schemeClr val="accent1">
+                <a:shade val="15000"/>
+              </a:schemeClr>
+            </a:lnRef>
+            <a:fillRef idx="1">
+              <a:schemeClr val="accent1"/>
+            </a:fillRef>
+            <a:effectRef idx="0">
+              <a:schemeClr val="accent1"/>
+            </a:effectRef>
+            <a:fontRef idx="minor">
+              <a:schemeClr val="lt1"/>
+            </a:fontRef>
+          </p:style>
+          <p:txBody>
+            <a:bodyPr rtlCol="0" anchor="ctr"/>
+            <a:lstStyle/>
+            <a:p>
+              <a:pPr algn="ctr"/>
+              <a:endParaRPr lang="en-US" dirty="0">
+                <a:solidFill>
+                  <a:schemeClr val="bg1"/>
+                </a:solidFill>
+                <a:latin typeface="Times New Roman" panose="02020603050405020304" pitchFamily="18" charset="0"/>
+                <a:cs typeface="Times New Roman" panose="02020603050405020304" pitchFamily="18" charset="0"/>
+              </a:endParaRPr>
+            </a:p>
+          </p:txBody>
+        </p:sp>
+        <p:grpSp>
+          <p:nvGrpSpPr>
+            <p:cNvPr id="235" name="Group 234">
+              <a:extLst>
+                <a:ext uri="{FF2B5EF4-FFF2-40B4-BE49-F238E27FC236}">
+                  <a16:creationId xmlns:a16="http://schemas.microsoft.com/office/drawing/2014/main" id="{B29F7496-083E-C96A-A54B-96580005B0F0}"/>
+                </a:ext>
+              </a:extLst>
+            </p:cNvPr>
+            <p:cNvGrpSpPr/>
+            <p:nvPr/>
+          </p:nvGrpSpPr>
+          <p:grpSpPr>
+            <a:xfrm>
+              <a:off x="6715921" y="1724889"/>
+              <a:ext cx="3309670" cy="1432634"/>
+              <a:chOff x="4668372" y="1660130"/>
+              <a:chExt cx="3309670" cy="1432634"/>
+            </a:xfrm>
+          </p:grpSpPr>
+          <p:sp>
+            <p:nvSpPr>
+              <p:cNvPr id="51" name="Rectangle: Rounded Corners 50">
+                <a:extLst>
+                  <a:ext uri="{FF2B5EF4-FFF2-40B4-BE49-F238E27FC236}">
+                    <a16:creationId xmlns:a16="http://schemas.microsoft.com/office/drawing/2014/main" id="{0FFBFE9F-4487-F723-E9C3-8E9D6B819A45}"/>
+                  </a:ext>
+                </a:extLst>
+              </p:cNvPr>
+              <p:cNvSpPr/>
+              <p:nvPr/>
+            </p:nvSpPr>
+            <p:spPr>
+              <a:xfrm>
+                <a:off x="5183521" y="1660130"/>
+                <a:ext cx="2648141" cy="924852"/>
+              </a:xfrm>
+              <a:prstGeom prst="roundRect">
+                <a:avLst>
+                  <a:gd name="adj" fmla="val 8322"/>
+                </a:avLst>
+              </a:prstGeom>
+              <a:solidFill>
+                <a:srgbClr val="262626"/>
+              </a:solidFill>
+              <a:ln w="12700">
+                <a:solidFill>
+                  <a:schemeClr val="bg1"/>
+                </a:solidFill>
+              </a:ln>
+            </p:spPr>
+            <p:style>
+              <a:lnRef idx="2">
+                <a:schemeClr val="accent1">
+                  <a:shade val="15000"/>
+                </a:schemeClr>
+              </a:lnRef>
+              <a:fillRef idx="1">
+                <a:schemeClr val="accent1"/>
+              </a:fillRef>
+              <a:effectRef idx="0">
+                <a:schemeClr val="accent1"/>
+              </a:effectRef>
+              <a:fontRef idx="minor">
+                <a:schemeClr val="lt1"/>
+              </a:fontRef>
+            </p:style>
+            <p:txBody>
+              <a:bodyPr rtlCol="0" anchor="ctr"/>
+              <a:lstStyle/>
+              <a:p>
+                <a:pPr algn="ctr"/>
+                <a:endParaRPr lang="en-US" dirty="0">
+                  <a:solidFill>
+                    <a:schemeClr val="bg1"/>
+                  </a:solidFill>
+                  <a:latin typeface="Times New Roman" panose="02020603050405020304" pitchFamily="18" charset="0"/>
+                  <a:cs typeface="Times New Roman" panose="02020603050405020304" pitchFamily="18" charset="0"/>
+                </a:endParaRPr>
+              </a:p>
+            </p:txBody>
+          </p:sp>
+          <p:grpSp>
+            <p:nvGrpSpPr>
+              <p:cNvPr id="234" name="Group 233">
+                <a:extLst>
+                  <a:ext uri="{FF2B5EF4-FFF2-40B4-BE49-F238E27FC236}">
+                    <a16:creationId xmlns:a16="http://schemas.microsoft.com/office/drawing/2014/main" id="{C8483D81-C738-EC8C-E9D4-9A607C41251A}"/>
+                  </a:ext>
+                </a:extLst>
+              </p:cNvPr>
+              <p:cNvGrpSpPr/>
+              <p:nvPr/>
+            </p:nvGrpSpPr>
+            <p:grpSpPr>
+              <a:xfrm>
+                <a:off x="4668372" y="2611103"/>
+                <a:ext cx="3309670" cy="481661"/>
+                <a:chOff x="4776684" y="2611103"/>
+                <a:chExt cx="3309670" cy="481661"/>
+              </a:xfrm>
+            </p:grpSpPr>
+            <p:sp>
+              <p:nvSpPr>
+                <p:cNvPr id="232" name="TextBox 231">
+                  <a:extLst>
+                    <a:ext uri="{FF2B5EF4-FFF2-40B4-BE49-F238E27FC236}">
+                      <a16:creationId xmlns:a16="http://schemas.microsoft.com/office/drawing/2014/main" id="{26CDB8BB-9B1B-2B00-A882-116D7D2D402E}"/>
+                    </a:ext>
+                  </a:extLst>
+                </p:cNvPr>
+                <p:cNvSpPr txBox="1"/>
+                <p:nvPr/>
+              </p:nvSpPr>
+              <p:spPr>
+                <a:xfrm>
+                  <a:off x="4776684" y="2611103"/>
+                  <a:ext cx="3309670" cy="307777"/>
+                </a:xfrm>
+                <a:prstGeom prst="rect">
+                  <a:avLst/>
+                </a:prstGeom>
+                <a:noFill/>
+              </p:spPr>
+              <p:txBody>
+                <a:bodyPr wrap="square">
+                  <a:spAutoFit/>
+                </a:bodyPr>
+                <a:lstStyle/>
+                <a:p>
+                  <a:pPr algn="ctr"/>
+                  <a:r>
+                    <a:rPr lang="en-US" sz="1400" b="1" dirty="0">
+                      <a:solidFill>
+                        <a:schemeClr val="bg1"/>
+                      </a:solidFill>
+                      <a:latin typeface="Times New Roman" panose="02020603050405020304" pitchFamily="18" charset="0"/>
+                      <a:cs typeface="Times New Roman" panose="02020603050405020304" pitchFamily="18" charset="0"/>
+                    </a:rPr>
+                    <a:t>Service Management and Orchestration</a:t>
+                  </a:r>
+                </a:p>
+              </p:txBody>
+            </p:sp>
+            <p:sp>
+              <p:nvSpPr>
+                <p:cNvPr id="233" name="TextBox 232">
+                  <a:extLst>
+                    <a:ext uri="{FF2B5EF4-FFF2-40B4-BE49-F238E27FC236}">
+                      <a16:creationId xmlns:a16="http://schemas.microsoft.com/office/drawing/2014/main" id="{62872B1E-AA5E-17AA-511A-1F419F129695}"/>
+                    </a:ext>
+                  </a:extLst>
+                </p:cNvPr>
+                <p:cNvSpPr txBox="1"/>
+                <p:nvPr/>
+              </p:nvSpPr>
+              <p:spPr>
+                <a:xfrm>
+                  <a:off x="5474325" y="2815765"/>
+                  <a:ext cx="2078132" cy="276999"/>
+                </a:xfrm>
+                <a:prstGeom prst="rect">
+                  <a:avLst/>
+                </a:prstGeom>
+                <a:noFill/>
+              </p:spPr>
+              <p:txBody>
+                <a:bodyPr wrap="square">
+                  <a:spAutoFit/>
+                </a:bodyPr>
+                <a:lstStyle/>
+                <a:p>
+                  <a:pPr marL="285750" indent="-285750">
+                    <a:buFont typeface="Arial" panose="020B0604020202020204" pitchFamily="34" charset="0"/>
+                    <a:buChar char="•"/>
+                  </a:pPr>
+                  <a:r>
+                    <a:rPr lang="en-US" sz="1200" dirty="0">
+                      <a:solidFill>
+                        <a:schemeClr val="bg1"/>
+                      </a:solidFill>
+                      <a:latin typeface="Times New Roman" panose="02020603050405020304" pitchFamily="18" charset="0"/>
+                      <a:cs typeface="Times New Roman" panose="02020603050405020304" pitchFamily="18" charset="0"/>
+                    </a:rPr>
+                    <a:t>O-RAN SC RIC</a:t>
+                  </a:r>
+                </a:p>
+              </p:txBody>
+            </p:sp>
+          </p:grpSp>
+        </p:grpSp>
+        <p:grpSp>
+          <p:nvGrpSpPr>
+            <p:cNvPr id="342" name="Group 341">
+              <a:extLst>
+                <a:ext uri="{FF2B5EF4-FFF2-40B4-BE49-F238E27FC236}">
+                  <a16:creationId xmlns:a16="http://schemas.microsoft.com/office/drawing/2014/main" id="{79B07A05-E871-6B63-E7A9-B641AD8D5BFA}"/>
+                </a:ext>
+              </a:extLst>
+            </p:cNvPr>
+            <p:cNvGrpSpPr/>
+            <p:nvPr/>
+          </p:nvGrpSpPr>
+          <p:grpSpPr>
+            <a:xfrm>
+              <a:off x="7230616" y="1833039"/>
+              <a:ext cx="2648142" cy="811016"/>
+              <a:chOff x="5142539" y="2107864"/>
+              <a:chExt cx="2648142" cy="811016"/>
+            </a:xfrm>
+          </p:grpSpPr>
+          <p:sp>
+            <p:nvSpPr>
+              <p:cNvPr id="343" name="Rectangle: Rounded Corners 342">
+                <a:extLst>
+                  <a:ext uri="{FF2B5EF4-FFF2-40B4-BE49-F238E27FC236}">
+                    <a16:creationId xmlns:a16="http://schemas.microsoft.com/office/drawing/2014/main" id="{0A3AA96D-BAE6-C7C4-642C-F015D4DEEBF5}"/>
+                  </a:ext>
+                </a:extLst>
+              </p:cNvPr>
+              <p:cNvSpPr/>
+              <p:nvPr/>
+            </p:nvSpPr>
+            <p:spPr>
+              <a:xfrm>
+                <a:off x="5323970" y="2107864"/>
+                <a:ext cx="2367244" cy="477118"/>
+              </a:xfrm>
+              <a:prstGeom prst="roundRect">
+                <a:avLst>
+                  <a:gd name="adj" fmla="val 14235"/>
+                </a:avLst>
+              </a:prstGeom>
+              <a:solidFill>
+                <a:srgbClr val="171717"/>
+              </a:solidFill>
+              <a:ln w="12700">
+                <a:solidFill>
+                  <a:schemeClr val="bg2">
+                    <a:lumMod val="90000"/>
+                  </a:schemeClr>
+                </a:solidFill>
+              </a:ln>
+            </p:spPr>
+            <p:style>
+              <a:lnRef idx="2">
+                <a:schemeClr val="accent1">
+                  <a:shade val="15000"/>
+                </a:schemeClr>
+              </a:lnRef>
+              <a:fillRef idx="1">
+                <a:schemeClr val="accent1"/>
+              </a:fillRef>
+              <a:effectRef idx="0">
+                <a:schemeClr val="accent1"/>
+              </a:effectRef>
+              <a:fontRef idx="minor">
+                <a:schemeClr val="lt1"/>
+              </a:fontRef>
+            </p:style>
+            <p:txBody>
+              <a:bodyPr rtlCol="0" anchor="ctr"/>
+              <a:lstStyle/>
+              <a:p>
+                <a:pPr algn="ctr"/>
+                <a:endParaRPr lang="en-US" dirty="0">
+                  <a:solidFill>
+                    <a:schemeClr val="bg1"/>
+                  </a:solidFill>
+                  <a:latin typeface="Times New Roman" panose="02020603050405020304" pitchFamily="18" charset="0"/>
+                  <a:cs typeface="Times New Roman" panose="02020603050405020304" pitchFamily="18" charset="0"/>
+                </a:endParaRPr>
+              </a:p>
+            </p:txBody>
+          </p:sp>
+          <p:sp>
+            <p:nvSpPr>
+              <p:cNvPr id="345" name="TextBox 344">
+                <a:extLst>
+                  <a:ext uri="{FF2B5EF4-FFF2-40B4-BE49-F238E27FC236}">
+                    <a16:creationId xmlns:a16="http://schemas.microsoft.com/office/drawing/2014/main" id="{934EF4DA-BF0E-CE3A-E425-F1FE25767794}"/>
+                  </a:ext>
+                </a:extLst>
+              </p:cNvPr>
+              <p:cNvSpPr txBox="1"/>
+              <p:nvPr/>
+            </p:nvSpPr>
+            <p:spPr>
+              <a:xfrm>
+                <a:off x="5142539" y="2611103"/>
+                <a:ext cx="2648142" cy="307777"/>
+              </a:xfrm>
+              <a:prstGeom prst="rect">
+                <a:avLst/>
+              </a:prstGeom>
+              <a:noFill/>
+            </p:spPr>
+            <p:txBody>
+              <a:bodyPr wrap="square">
+                <a:spAutoFit/>
+              </a:bodyPr>
+              <a:lstStyle/>
+              <a:p>
+                <a:pPr algn="ctr"/>
+                <a:r>
+                  <a:rPr lang="en-US" sz="1400" b="1" dirty="0">
+                    <a:solidFill>
+                      <a:schemeClr val="bg1"/>
+                    </a:solidFill>
+                    <a:latin typeface="Times New Roman" panose="02020603050405020304" pitchFamily="18" charset="0"/>
+                    <a:cs typeface="Times New Roman" panose="02020603050405020304" pitchFamily="18" charset="0"/>
+                  </a:rPr>
+                  <a:t>Non-RT RIC</a:t>
+                </a:r>
+              </a:p>
+            </p:txBody>
+          </p:sp>
+        </p:grpSp>
+        <p:sp>
+          <p:nvSpPr>
+            <p:cNvPr id="141" name="Rectangle: Rounded Corners 140">
+              <a:extLst>
+                <a:ext uri="{FF2B5EF4-FFF2-40B4-BE49-F238E27FC236}">
+                  <a16:creationId xmlns:a16="http://schemas.microsoft.com/office/drawing/2014/main" id="{D204B0F3-4A57-4AB3-AAF6-895DEFA28BDA}"/>
+                </a:ext>
+              </a:extLst>
+            </p:cNvPr>
+            <p:cNvSpPr/>
+            <p:nvPr/>
+          </p:nvSpPr>
+          <p:spPr>
+            <a:xfrm>
+              <a:off x="1850713" y="1617089"/>
+              <a:ext cx="8148856" cy="3557833"/>
+            </a:xfrm>
+            <a:prstGeom prst="roundRect">
+              <a:avLst>
+                <a:gd name="adj" fmla="val 2232"/>
+              </a:avLst>
+            </a:prstGeom>
+            <a:noFill/>
+            <a:ln w="12700">
+              <a:solidFill>
+                <a:schemeClr val="bg1"/>
+              </a:solidFill>
+            </a:ln>
+          </p:spPr>
+          <p:style>
+            <a:lnRef idx="2">
+              <a:schemeClr val="accent1">
+                <a:shade val="15000"/>
+              </a:schemeClr>
+            </a:lnRef>
+            <a:fillRef idx="1">
+              <a:schemeClr val="accent1"/>
+            </a:fillRef>
+            <a:effectRef idx="0">
+              <a:schemeClr val="accent1"/>
+            </a:effectRef>
+            <a:fontRef idx="minor">
+              <a:schemeClr val="lt1"/>
+            </a:fontRef>
+          </p:style>
+          <p:txBody>
+            <a:bodyPr rtlCol="0" anchor="ctr"/>
+            <a:lstStyle/>
+            <a:p>
+              <a:pPr algn="ctr"/>
+              <a:endParaRPr lang="en-US" dirty="0">
+                <a:solidFill>
+                  <a:schemeClr val="bg1"/>
+                </a:solidFill>
+                <a:latin typeface="Times New Roman" panose="02020603050405020304" pitchFamily="18" charset="0"/>
+                <a:cs typeface="Times New Roman" panose="02020603050405020304" pitchFamily="18" charset="0"/>
+              </a:endParaRPr>
+            </a:p>
+          </p:txBody>
+        </p:sp>
+        <p:grpSp>
+          <p:nvGrpSpPr>
+            <p:cNvPr id="15" name="Group 14">
+              <a:extLst>
+                <a:ext uri="{FF2B5EF4-FFF2-40B4-BE49-F238E27FC236}">
+                  <a16:creationId xmlns:a16="http://schemas.microsoft.com/office/drawing/2014/main" id="{21D0C2BD-70E8-4233-A01A-8CB16B3F18F4}"/>
+                </a:ext>
+              </a:extLst>
+            </p:cNvPr>
+            <p:cNvGrpSpPr/>
+            <p:nvPr/>
+          </p:nvGrpSpPr>
+          <p:grpSpPr>
+            <a:xfrm>
+              <a:off x="1980485" y="1721079"/>
+              <a:ext cx="8019085" cy="3412689"/>
+              <a:chOff x="2039317" y="1879053"/>
+              <a:chExt cx="8019085" cy="3412689"/>
+            </a:xfrm>
+          </p:grpSpPr>
+          <p:grpSp>
+            <p:nvGrpSpPr>
+              <p:cNvPr id="213" name="Group 212">
+                <a:extLst>
+                  <a:ext uri="{FF2B5EF4-FFF2-40B4-BE49-F238E27FC236}">
+                    <a16:creationId xmlns:a16="http://schemas.microsoft.com/office/drawing/2014/main" id="{407A30F9-1C57-B457-62A9-3E1F1B438814}"/>
+                  </a:ext>
+                </a:extLst>
+              </p:cNvPr>
+              <p:cNvGrpSpPr/>
+              <p:nvPr/>
+            </p:nvGrpSpPr>
+            <p:grpSpPr>
+              <a:xfrm>
+                <a:off x="2039317" y="3492451"/>
+                <a:ext cx="8019085" cy="1799291"/>
+                <a:chOff x="739346" y="2194877"/>
+                <a:chExt cx="8019085" cy="1799291"/>
+              </a:xfrm>
+            </p:grpSpPr>
+            <p:grpSp>
+              <p:nvGrpSpPr>
+                <p:cNvPr id="173" name="Group 172">
+                  <a:extLst>
+                    <a:ext uri="{FF2B5EF4-FFF2-40B4-BE49-F238E27FC236}">
+                      <a16:creationId xmlns:a16="http://schemas.microsoft.com/office/drawing/2014/main" id="{E0FC3736-1AD3-51F7-FF1E-A65B147E173B}"/>
+                    </a:ext>
+                  </a:extLst>
+                </p:cNvPr>
+                <p:cNvGrpSpPr/>
+                <p:nvPr/>
+              </p:nvGrpSpPr>
+              <p:grpSpPr>
+                <a:xfrm>
+                  <a:off x="739346" y="2194877"/>
+                  <a:ext cx="2912140" cy="1614827"/>
+                  <a:chOff x="739346" y="2194877"/>
+                  <a:chExt cx="2912140" cy="1614827"/>
+                </a:xfrm>
+              </p:grpSpPr>
+              <p:grpSp>
+                <p:nvGrpSpPr>
+                  <p:cNvPr id="103" name="Group 102">
+                    <a:extLst>
+                      <a:ext uri="{FF2B5EF4-FFF2-40B4-BE49-F238E27FC236}">
+                        <a16:creationId xmlns:a16="http://schemas.microsoft.com/office/drawing/2014/main" id="{399C3882-C87A-011B-0BCD-46C25509AA50}"/>
+                      </a:ext>
+                    </a:extLst>
+                  </p:cNvPr>
+                  <p:cNvGrpSpPr/>
+                  <p:nvPr/>
+                </p:nvGrpSpPr>
+                <p:grpSpPr>
+                  <a:xfrm>
+                    <a:off x="739346" y="2194877"/>
+                    <a:ext cx="2912140" cy="1233863"/>
+                    <a:chOff x="1605224" y="1599108"/>
+                    <a:chExt cx="2912140" cy="1233863"/>
+                  </a:xfrm>
+                </p:grpSpPr>
+                <p:sp>
+                  <p:nvSpPr>
+                    <p:cNvPr id="99" name="TextBox 98">
+                      <a:extLst>
+                        <a:ext uri="{FF2B5EF4-FFF2-40B4-BE49-F238E27FC236}">
+                          <a16:creationId xmlns:a16="http://schemas.microsoft.com/office/drawing/2014/main" id="{B2146AB4-4D02-128A-EC98-CAF89459C873}"/>
+                        </a:ext>
+                      </a:extLst>
+                    </p:cNvPr>
+                    <p:cNvSpPr txBox="1"/>
+                    <p:nvPr/>
+                  </p:nvSpPr>
+                  <p:spPr>
+                    <a:xfrm>
+                      <a:off x="1605224" y="2525194"/>
+                      <a:ext cx="2239249" cy="307777"/>
+                    </a:xfrm>
+                    <a:prstGeom prst="rect">
+                      <a:avLst/>
+                    </a:prstGeom>
+                    <a:noFill/>
+                  </p:spPr>
+                  <p:txBody>
+                    <a:bodyPr wrap="square">
+                      <a:spAutoFit/>
+                    </a:bodyPr>
+                    <a:lstStyle/>
+                    <a:p>
+                      <a:pPr algn="ctr"/>
+                      <a:r>
+                        <a:rPr lang="en-US" sz="1400" b="1" dirty="0">
+                          <a:solidFill>
+                            <a:schemeClr val="bg1"/>
+                          </a:solidFill>
+                          <a:latin typeface="Times New Roman" panose="02020603050405020304" pitchFamily="18" charset="0"/>
+                          <a:cs typeface="Times New Roman" panose="02020603050405020304" pitchFamily="18" charset="0"/>
+                        </a:rPr>
+                        <a:t>User Equipment</a:t>
+                      </a:r>
+                    </a:p>
+                  </p:txBody>
+                </p:sp>
+                <p:grpSp>
+                  <p:nvGrpSpPr>
+                    <p:cNvPr id="102" name="Group 101">
+                      <a:extLst>
+                        <a:ext uri="{FF2B5EF4-FFF2-40B4-BE49-F238E27FC236}">
+                          <a16:creationId xmlns:a16="http://schemas.microsoft.com/office/drawing/2014/main" id="{19888747-9170-E4AD-78F2-2081289DA324}"/>
+                        </a:ext>
+                      </a:extLst>
+                    </p:cNvPr>
+                    <p:cNvGrpSpPr/>
+                    <p:nvPr/>
+                  </p:nvGrpSpPr>
+                  <p:grpSpPr>
+                    <a:xfrm>
+                      <a:off x="1605224" y="1599108"/>
+                      <a:ext cx="2912140" cy="923272"/>
+                      <a:chOff x="1605224" y="1599108"/>
+                      <a:chExt cx="2912140" cy="923272"/>
+                    </a:xfrm>
+                  </p:grpSpPr>
+                  <p:grpSp>
+                    <p:nvGrpSpPr>
+                      <p:cNvPr id="98" name="Group 97">
+                        <a:extLst>
+                          <a:ext uri="{FF2B5EF4-FFF2-40B4-BE49-F238E27FC236}">
+                            <a16:creationId xmlns:a16="http://schemas.microsoft.com/office/drawing/2014/main" id="{634D968C-4907-C8AB-1683-500984EDAB8F}"/>
+                          </a:ext>
+                        </a:extLst>
+                      </p:cNvPr>
+                      <p:cNvGrpSpPr/>
+                      <p:nvPr/>
+                    </p:nvGrpSpPr>
+                    <p:grpSpPr>
+                      <a:xfrm>
+                        <a:off x="1605224" y="1599108"/>
+                        <a:ext cx="2283381" cy="923272"/>
+                        <a:chOff x="1746885" y="5238877"/>
+                        <a:chExt cx="2283381" cy="923272"/>
+                      </a:xfrm>
+                    </p:grpSpPr>
+                    <p:grpSp>
+                      <p:nvGrpSpPr>
+                        <p:cNvPr id="91" name="Group 90">
+                          <a:extLst>
+                            <a:ext uri="{FF2B5EF4-FFF2-40B4-BE49-F238E27FC236}">
+                              <a16:creationId xmlns:a16="http://schemas.microsoft.com/office/drawing/2014/main" id="{100CEE3F-0B1F-51C4-640B-525CC77D1754}"/>
+                            </a:ext>
+                          </a:extLst>
+                        </p:cNvPr>
+                        <p:cNvGrpSpPr/>
+                        <p:nvPr/>
+                      </p:nvGrpSpPr>
+                      <p:grpSpPr>
+                        <a:xfrm>
+                          <a:off x="1746885" y="5238877"/>
+                          <a:ext cx="2239249" cy="923272"/>
+                          <a:chOff x="1590040" y="5303322"/>
+                          <a:chExt cx="2374765" cy="923272"/>
+                        </a:xfrm>
+                      </p:grpSpPr>
+                      <p:sp>
+                        <p:nvSpPr>
+                          <p:cNvPr id="90" name="Rectangle: Rounded Corners 89">
+                            <a:extLst>
+                              <a:ext uri="{FF2B5EF4-FFF2-40B4-BE49-F238E27FC236}">
+                                <a16:creationId xmlns:a16="http://schemas.microsoft.com/office/drawing/2014/main" id="{6FBF2E9F-5D77-9ADE-7152-C81C1A733CD2}"/>
+                              </a:ext>
+                            </a:extLst>
+                          </p:cNvPr>
+                          <p:cNvSpPr/>
+                          <p:nvPr/>
+                        </p:nvSpPr>
+                        <p:spPr>
+                          <a:xfrm>
+                            <a:off x="1590040" y="5303322"/>
+                            <a:ext cx="2374765" cy="923272"/>
+                          </a:xfrm>
+                          <a:prstGeom prst="roundRect">
+                            <a:avLst>
+                              <a:gd name="adj" fmla="val 9466"/>
+                            </a:avLst>
+                          </a:prstGeom>
+                          <a:solidFill>
+                            <a:schemeClr val="bg2">
+                              <a:lumMod val="25000"/>
+                            </a:schemeClr>
+                          </a:solidFill>
+                          <a:ln w="28575">
+                            <a:noFill/>
+                          </a:ln>
+                        </p:spPr>
+                        <p:style>
+                          <a:lnRef idx="2">
+                            <a:schemeClr val="accent1">
+                              <a:shade val="15000"/>
+                            </a:schemeClr>
+                          </a:lnRef>
+                          <a:fillRef idx="1">
+                            <a:schemeClr val="accent1"/>
+                          </a:fillRef>
+                          <a:effectRef idx="0">
+                            <a:schemeClr val="accent1"/>
+                          </a:effectRef>
+                          <a:fontRef idx="minor">
+                            <a:schemeClr val="lt1"/>
+                          </a:fontRef>
+                        </p:style>
+                        <p:txBody>
+                          <a:bodyPr rtlCol="0" anchor="ctr"/>
+                          <a:lstStyle/>
+                          <a:p>
+                            <a:pPr algn="ctr"/>
+                            <a:endParaRPr lang="en-US" dirty="0">
+                              <a:solidFill>
+                                <a:schemeClr val="bg1"/>
+                              </a:solidFill>
+                              <a:latin typeface="Times New Roman" panose="02020603050405020304" pitchFamily="18" charset="0"/>
+                              <a:cs typeface="Times New Roman" panose="02020603050405020304" pitchFamily="18" charset="0"/>
+                            </a:endParaRPr>
+                          </a:p>
+                        </p:txBody>
+                      </p:sp>
+                      <p:sp>
+                        <p:nvSpPr>
+                          <p:cNvPr id="87" name="Rectangle 86">
+                            <a:extLst>
+                              <a:ext uri="{FF2B5EF4-FFF2-40B4-BE49-F238E27FC236}">
+                                <a16:creationId xmlns:a16="http://schemas.microsoft.com/office/drawing/2014/main" id="{2226E9FD-9D7F-477B-5597-2AEA05E3F34C}"/>
+                              </a:ext>
+                            </a:extLst>
+                          </p:cNvPr>
+                          <p:cNvSpPr/>
+                          <p:nvPr/>
+                        </p:nvSpPr>
+                        <p:spPr>
+                          <a:xfrm>
+                            <a:off x="1590040" y="5603165"/>
+                            <a:ext cx="2374765" cy="323587"/>
+                          </a:xfrm>
+                          <a:prstGeom prst="rect">
+                            <a:avLst/>
+                          </a:prstGeom>
+                          <a:solidFill>
+                            <a:schemeClr val="tx1">
+                              <a:lumMod val="85000"/>
+                              <a:lumOff val="15000"/>
+                            </a:schemeClr>
+                          </a:solidFill>
+                          <a:ln>
+                            <a:noFill/>
+                          </a:ln>
+                        </p:spPr>
+                        <p:style>
+                          <a:lnRef idx="2">
+                            <a:schemeClr val="accent1">
+                              <a:shade val="15000"/>
+                            </a:schemeClr>
+                          </a:lnRef>
+                          <a:fillRef idx="1">
+                            <a:schemeClr val="accent1"/>
+                          </a:fillRef>
+                          <a:effectRef idx="0">
+                            <a:schemeClr val="accent1"/>
+                          </a:effectRef>
+                          <a:fontRef idx="minor">
+                            <a:schemeClr val="lt1"/>
+                          </a:fontRef>
+                        </p:style>
+                        <p:txBody>
+                          <a:bodyPr rtlCol="0" anchor="ctr"/>
+                          <a:lstStyle/>
+                          <a:p>
+                            <a:pPr algn="ctr"/>
+                            <a:endParaRPr lang="en-US">
+                              <a:solidFill>
+                                <a:schemeClr val="bg1"/>
+                              </a:solidFill>
+                            </a:endParaRPr>
+                          </a:p>
+                        </p:txBody>
+                      </p:sp>
+                      <p:sp>
+                        <p:nvSpPr>
+                          <p:cNvPr id="88" name="Rectangle: Rounded Corners 87">
+                            <a:extLst>
+                              <a:ext uri="{FF2B5EF4-FFF2-40B4-BE49-F238E27FC236}">
+                                <a16:creationId xmlns:a16="http://schemas.microsoft.com/office/drawing/2014/main" id="{87BCEB7F-0233-D2C1-3A52-344B63D9C7C2}"/>
+                              </a:ext>
+                            </a:extLst>
+                          </p:cNvPr>
+                          <p:cNvSpPr/>
+                          <p:nvPr/>
+                        </p:nvSpPr>
+                        <p:spPr>
+                          <a:xfrm>
+                            <a:off x="1590040" y="5303322"/>
+                            <a:ext cx="2374765" cy="923272"/>
+                          </a:xfrm>
+                          <a:prstGeom prst="roundRect">
+                            <a:avLst>
+                              <a:gd name="adj" fmla="val 9879"/>
+                            </a:avLst>
+                          </a:prstGeom>
+                          <a:noFill/>
+                          <a:ln w="12700">
+                            <a:solidFill>
+                              <a:schemeClr val="bg1"/>
+                            </a:solidFill>
+                          </a:ln>
+                        </p:spPr>
+                        <p:style>
+                          <a:lnRef idx="2">
+                            <a:schemeClr val="accent1">
+                              <a:shade val="15000"/>
+                            </a:schemeClr>
+                          </a:lnRef>
+                          <a:fillRef idx="1">
+                            <a:schemeClr val="accent1"/>
+                          </a:fillRef>
+                          <a:effectRef idx="0">
+                            <a:schemeClr val="accent1"/>
+                          </a:effectRef>
+                          <a:fontRef idx="minor">
+                            <a:schemeClr val="lt1"/>
+                          </a:fontRef>
+                        </p:style>
+                        <p:txBody>
+                          <a:bodyPr rtlCol="0" anchor="ctr"/>
+                          <a:lstStyle/>
+                          <a:p>
+                            <a:pPr algn="ctr"/>
+                            <a:endParaRPr lang="en-US" dirty="0">
+                              <a:solidFill>
+                                <a:schemeClr val="bg1"/>
+                              </a:solidFill>
+                              <a:latin typeface="Times New Roman" panose="02020603050405020304" pitchFamily="18" charset="0"/>
+                              <a:cs typeface="Times New Roman" panose="02020603050405020304" pitchFamily="18" charset="0"/>
+                            </a:endParaRPr>
+                          </a:p>
+                        </p:txBody>
+                      </p:sp>
+                    </p:grpSp>
+                    <p:sp>
+                      <p:nvSpPr>
+                        <p:cNvPr id="83" name="TextBox 82">
+                          <a:extLst>
+                            <a:ext uri="{FF2B5EF4-FFF2-40B4-BE49-F238E27FC236}">
+                              <a16:creationId xmlns:a16="http://schemas.microsoft.com/office/drawing/2014/main" id="{048302D5-242E-EB61-E965-DD80D6F6BCB2}"/>
+                            </a:ext>
+                          </a:extLst>
+                        </p:cNvPr>
+                        <p:cNvSpPr txBox="1"/>
+                        <p:nvPr/>
+                      </p:nvSpPr>
+                      <p:spPr>
+                        <a:xfrm>
+                          <a:off x="2060863" y="5848816"/>
+                          <a:ext cx="1969403" cy="307777"/>
+                        </a:xfrm>
+                        <a:prstGeom prst="rect">
+                          <a:avLst/>
+                        </a:prstGeom>
+                        <a:noFill/>
+                      </p:spPr>
+                      <p:txBody>
+                        <a:bodyPr wrap="square">
+                          <a:spAutoFit/>
+                        </a:bodyPr>
+                        <a:lstStyle/>
+                        <a:p>
+                          <a:pPr algn="ctr"/>
+                          <a:r>
+                            <a:rPr lang="en-US" sz="1400" dirty="0">
+                              <a:solidFill>
+                                <a:schemeClr val="bg1"/>
+                              </a:solidFill>
+                              <a:latin typeface="Times New Roman" panose="02020603050405020304" pitchFamily="18" charset="0"/>
+                              <a:cs typeface="Times New Roman" panose="02020603050405020304" pitchFamily="18" charset="0"/>
+                            </a:rPr>
+                            <a:t>RF Simulator / </a:t>
+                          </a:r>
+                          <a:r>
+                            <a:rPr lang="en-US" sz="1400" dirty="0" err="1">
+                              <a:solidFill>
+                                <a:schemeClr val="bg1"/>
+                              </a:solidFill>
+                              <a:latin typeface="Times New Roman" panose="02020603050405020304" pitchFamily="18" charset="0"/>
+                              <a:cs typeface="Times New Roman" panose="02020603050405020304" pitchFamily="18" charset="0"/>
+                            </a:rPr>
+                            <a:t>ZeroMQ</a:t>
+                          </a:r>
+                          <a:endParaRPr lang="en-US" sz="1400" dirty="0">
+                            <a:solidFill>
+                              <a:schemeClr val="bg1"/>
+                            </a:solidFill>
+                            <a:latin typeface="Times New Roman" panose="02020603050405020304" pitchFamily="18" charset="0"/>
+                            <a:cs typeface="Times New Roman" panose="02020603050405020304" pitchFamily="18" charset="0"/>
+                          </a:endParaRPr>
+                        </a:p>
+                      </p:txBody>
+                    </p:sp>
+                    <p:sp>
+                      <p:nvSpPr>
+                        <p:cNvPr id="84" name="TextBox 83">
+                          <a:extLst>
+                            <a:ext uri="{FF2B5EF4-FFF2-40B4-BE49-F238E27FC236}">
+                              <a16:creationId xmlns:a16="http://schemas.microsoft.com/office/drawing/2014/main" id="{4F24F3AA-FD33-1A2E-0461-D2F1702107F3}"/>
+                            </a:ext>
+                          </a:extLst>
+                        </p:cNvPr>
+                        <p:cNvSpPr txBox="1"/>
+                        <p:nvPr/>
+                      </p:nvSpPr>
+                      <p:spPr>
+                        <a:xfrm>
+                          <a:off x="2060863" y="5549790"/>
+                          <a:ext cx="1969403" cy="307777"/>
+                        </a:xfrm>
+                        <a:prstGeom prst="rect">
+                          <a:avLst/>
+                        </a:prstGeom>
+                        <a:noFill/>
+                      </p:spPr>
+                      <p:txBody>
+                        <a:bodyPr wrap="square">
+                          <a:spAutoFit/>
+                        </a:bodyPr>
+                        <a:lstStyle/>
+                        <a:p>
+                          <a:pPr algn="ctr"/>
+                          <a:r>
+                            <a:rPr lang="en-US" sz="1400" dirty="0">
+                              <a:solidFill>
+                                <a:schemeClr val="bg1"/>
+                              </a:solidFill>
+                              <a:latin typeface="Times New Roman" panose="02020603050405020304" pitchFamily="18" charset="0"/>
+                              <a:cs typeface="Times New Roman" panose="02020603050405020304" pitchFamily="18" charset="0"/>
+                            </a:rPr>
+                            <a:t>5G Mobile Phone</a:t>
+                          </a:r>
+                        </a:p>
+                      </p:txBody>
+                    </p:sp>
+                    <p:sp>
+                      <p:nvSpPr>
+                        <p:cNvPr id="85" name="TextBox 84">
+                          <a:extLst>
+                            <a:ext uri="{FF2B5EF4-FFF2-40B4-BE49-F238E27FC236}">
+                              <a16:creationId xmlns:a16="http://schemas.microsoft.com/office/drawing/2014/main" id="{C39D088B-736E-499D-7E43-E5FB7908AB37}"/>
+                            </a:ext>
+                          </a:extLst>
+                        </p:cNvPr>
+                        <p:cNvSpPr txBox="1"/>
+                        <p:nvPr/>
+                      </p:nvSpPr>
+                      <p:spPr>
+                        <a:xfrm>
+                          <a:off x="2060863" y="5250764"/>
+                          <a:ext cx="1969403" cy="307777"/>
+                        </a:xfrm>
+                        <a:prstGeom prst="rect">
+                          <a:avLst/>
+                        </a:prstGeom>
+                        <a:noFill/>
+                      </p:spPr>
+                      <p:txBody>
+                        <a:bodyPr wrap="square">
+                          <a:spAutoFit/>
+                        </a:bodyPr>
+                        <a:lstStyle/>
+                        <a:p>
+                          <a:pPr algn="ctr"/>
+                          <a:r>
+                            <a:rPr lang="en-US" sz="1400" dirty="0">
+                              <a:solidFill>
+                                <a:schemeClr val="bg1"/>
+                              </a:solidFill>
+                              <a:latin typeface="Times New Roman" panose="02020603050405020304" pitchFamily="18" charset="0"/>
+                              <a:cs typeface="Times New Roman" panose="02020603050405020304" pitchFamily="18" charset="0"/>
+                            </a:rPr>
+                            <a:t>Software-Defined Radio</a:t>
+                          </a:r>
+                        </a:p>
+                      </p:txBody>
+                    </p:sp>
+                    <p:pic>
+                      <p:nvPicPr>
+                        <p:cNvPr id="93" name="Graphic 92" descr="Smart Phone with solid fill">
+                          <a:extLst>
+                            <a:ext uri="{FF2B5EF4-FFF2-40B4-BE49-F238E27FC236}">
+                              <a16:creationId xmlns:a16="http://schemas.microsoft.com/office/drawing/2014/main" id="{7F860B22-AFCA-FBEB-515A-AE4BE6CE5C77}"/>
+                            </a:ext>
+                          </a:extLst>
+                        </p:cNvPr>
+                        <p:cNvPicPr>
+                          <a:picLocks noChangeAspect="1"/>
+                        </p:cNvPicPr>
+                        <p:nvPr/>
+                      </p:nvPicPr>
+                      <p:blipFill>
+                        <a:blip r:embed="rId2">
+                          <a:extLst>
+                            <a:ext uri="{96DAC541-7B7A-43D3-8B79-37D633B846F1}">
+                              <asvg:svgBlip xmlns:asvg="http://schemas.microsoft.com/office/drawing/2016/SVG/main" r:embed="rId3"/>
+                            </a:ext>
+                          </a:extLst>
+                        </a:blip>
+                        <a:stretch>
+                          <a:fillRect/>
+                        </a:stretch>
+                      </p:blipFill>
+                      <p:spPr>
+                        <a:xfrm>
+                          <a:off x="1894659" y="5582141"/>
+                          <a:ext cx="221508" cy="221506"/>
+                        </a:xfrm>
+                        <a:prstGeom prst="rect">
+                          <a:avLst/>
+                        </a:prstGeom>
+                      </p:spPr>
+                    </p:pic>
+                    <p:pic>
+                      <p:nvPicPr>
+                        <p:cNvPr id="95" name="Graphic 94">
+                          <a:extLst>
+                            <a:ext uri="{FF2B5EF4-FFF2-40B4-BE49-F238E27FC236}">
+                              <a16:creationId xmlns:a16="http://schemas.microsoft.com/office/drawing/2014/main" id="{617038CE-6DA9-9CAA-9364-7DF6A08B02DC}"/>
+                            </a:ext>
+                          </a:extLst>
+                        </p:cNvPr>
+                        <p:cNvPicPr>
+                          <a:picLocks noChangeAspect="1"/>
+                        </p:cNvPicPr>
+                        <p:nvPr/>
+                      </p:nvPicPr>
+                      <p:blipFill>
+                        <a:blip r:embed="rId4">
+                          <a:extLst>
+                            <a:ext uri="{96DAC541-7B7A-43D3-8B79-37D633B846F1}">
+                              <asvg:svgBlip xmlns:asvg="http://schemas.microsoft.com/office/drawing/2016/SVG/main" r:embed="rId5"/>
+                            </a:ext>
+                          </a:extLst>
+                        </a:blip>
+                        <a:srcRect/>
+                        <a:stretch/>
+                      </p:blipFill>
+                      <p:spPr>
+                        <a:xfrm>
+                          <a:off x="1876918" y="5880130"/>
+                          <a:ext cx="256990" cy="256990"/>
+                        </a:xfrm>
+                        <a:prstGeom prst="rect">
+                          <a:avLst/>
+                        </a:prstGeom>
+                      </p:spPr>
+                    </p:pic>
+                    <p:pic>
+                      <p:nvPicPr>
+                        <p:cNvPr id="97" name="Graphic 96" descr="Wireless router with solid fill">
+                          <a:extLst>
+                            <a:ext uri="{FF2B5EF4-FFF2-40B4-BE49-F238E27FC236}">
+                              <a16:creationId xmlns:a16="http://schemas.microsoft.com/office/drawing/2014/main" id="{C1D75D05-771C-FCE4-A7D9-F5E220AECAA2}"/>
+                            </a:ext>
+                          </a:extLst>
+                        </p:cNvPr>
+                        <p:cNvPicPr>
+                          <a:picLocks noChangeAspect="1"/>
+                        </p:cNvPicPr>
+                        <p:nvPr/>
+                      </p:nvPicPr>
+                      <p:blipFill>
+                        <a:blip r:embed="rId6">
+                          <a:extLst>
+                            <a:ext uri="{96DAC541-7B7A-43D3-8B79-37D633B846F1}">
+                              <asvg:svgBlip xmlns:asvg="http://schemas.microsoft.com/office/drawing/2016/SVG/main" r:embed="rId7"/>
+                            </a:ext>
+                          </a:extLst>
+                        </a:blip>
+                        <a:stretch>
+                          <a:fillRect/>
+                        </a:stretch>
+                      </p:blipFill>
+                      <p:spPr>
+                        <a:xfrm>
+                          <a:off x="1888554" y="5271939"/>
+                          <a:ext cx="233719" cy="233719"/>
+                        </a:xfrm>
+                        <a:prstGeom prst="rect">
+                          <a:avLst/>
+                        </a:prstGeom>
+                      </p:spPr>
+                    </p:pic>
+                  </p:grpSp>
+                  <p:pic>
+                    <p:nvPicPr>
+                      <p:cNvPr id="101" name="Graphic 100" descr="Wi-Fi outline">
+                        <a:extLst>
+                          <a:ext uri="{FF2B5EF4-FFF2-40B4-BE49-F238E27FC236}">
+                            <a16:creationId xmlns:a16="http://schemas.microsoft.com/office/drawing/2014/main" id="{14C1A9D5-3BE8-3F42-0ADC-45CA9C9FF4E8}"/>
+                          </a:ext>
+                        </a:extLst>
+                      </p:cNvPr>
+                      <p:cNvPicPr>
+                        <a:picLocks noChangeAspect="1"/>
+                      </p:cNvPicPr>
+                      <p:nvPr/>
+                    </p:nvPicPr>
+                    <p:blipFill>
+                      <a:blip r:embed="rId8">
+                        <a:extLst>
+                          <a:ext uri="{96DAC541-7B7A-43D3-8B79-37D633B846F1}">
+                            <asvg:svgBlip xmlns:asvg="http://schemas.microsoft.com/office/drawing/2016/SVG/main" r:embed="rId9"/>
+                          </a:ext>
+                        </a:extLst>
+                      </a:blip>
+                      <a:stretch>
+                        <a:fillRect/>
+                      </a:stretch>
+                    </p:blipFill>
+                    <p:spPr>
+                      <a:xfrm rot="5400000">
+                        <a:off x="3682389" y="1643257"/>
+                        <a:ext cx="834976" cy="834975"/>
+                      </a:xfrm>
+                      <a:prstGeom prst="rect">
+                        <a:avLst/>
+                      </a:prstGeom>
+                    </p:spPr>
+                  </p:pic>
+                </p:grpSp>
+              </p:grpSp>
+              <p:sp>
+                <p:nvSpPr>
+                  <p:cNvPr id="168" name="TextBox 167">
+                    <a:extLst>
+                      <a:ext uri="{FF2B5EF4-FFF2-40B4-BE49-F238E27FC236}">
+                        <a16:creationId xmlns:a16="http://schemas.microsoft.com/office/drawing/2014/main" id="{A648D526-E6A7-758D-E005-A3FD81A65DAB}"/>
+                      </a:ext>
+                    </a:extLst>
+                  </p:cNvPr>
+                  <p:cNvSpPr txBox="1"/>
+                  <p:nvPr/>
+                </p:nvSpPr>
+                <p:spPr>
+                  <a:xfrm>
+                    <a:off x="1200150" y="3348039"/>
+                    <a:ext cx="1778445" cy="461665"/>
+                  </a:xfrm>
+                  <a:prstGeom prst="rect">
+                    <a:avLst/>
+                  </a:prstGeom>
+                  <a:noFill/>
+                </p:spPr>
+                <p:txBody>
+                  <a:bodyPr wrap="square">
+                    <a:spAutoFit/>
+                  </a:bodyPr>
+                  <a:lstStyle/>
+                  <a:p>
+                    <a:pPr marL="285750" indent="-285750">
+                      <a:buFont typeface="Arial" panose="020B0604020202020204" pitchFamily="34" charset="0"/>
+                      <a:buChar char="•"/>
+                    </a:pPr>
+                    <a:r>
+                      <a:rPr lang="en-US" sz="1200" dirty="0">
+                        <a:solidFill>
+                          <a:schemeClr val="bg1"/>
+                        </a:solidFill>
+                        <a:latin typeface="Times New Roman" panose="02020603050405020304" pitchFamily="18" charset="0"/>
+                        <a:cs typeface="Times New Roman" panose="02020603050405020304" pitchFamily="18" charset="0"/>
+                      </a:rPr>
+                      <a:t>srsRAN_4G</a:t>
+                    </a:r>
+                  </a:p>
+                  <a:p>
+                    <a:pPr marL="285750" indent="-285750">
+                      <a:buFont typeface="Arial" panose="020B0604020202020204" pitchFamily="34" charset="0"/>
+                      <a:buChar char="•"/>
+                    </a:pPr>
+                    <a:r>
+                      <a:rPr lang="en-US" sz="1200" dirty="0">
+                        <a:solidFill>
+                          <a:schemeClr val="bg1"/>
+                        </a:solidFill>
+                        <a:latin typeface="Times New Roman" panose="02020603050405020304" pitchFamily="18" charset="0"/>
+                        <a:cs typeface="Times New Roman" panose="02020603050405020304" pitchFamily="18" charset="0"/>
+                      </a:rPr>
+                      <a:t>OpenAirInterface5G</a:t>
+                    </a:r>
+                  </a:p>
+                </p:txBody>
+              </p:sp>
+            </p:grpSp>
+            <p:grpSp>
+              <p:nvGrpSpPr>
+                <p:cNvPr id="172" name="Group 171">
+                  <a:extLst>
+                    <a:ext uri="{FF2B5EF4-FFF2-40B4-BE49-F238E27FC236}">
+                      <a16:creationId xmlns:a16="http://schemas.microsoft.com/office/drawing/2014/main" id="{E3CC935D-0E71-4D0A-CE18-B6151B8FFE1D}"/>
+                    </a:ext>
+                  </a:extLst>
+                </p:cNvPr>
+                <p:cNvGrpSpPr/>
+                <p:nvPr/>
+              </p:nvGrpSpPr>
+              <p:grpSpPr>
+                <a:xfrm>
+                  <a:off x="3351330" y="2239026"/>
+                  <a:ext cx="2953942" cy="1755142"/>
+                  <a:chOff x="3351330" y="2239026"/>
+                  <a:chExt cx="2953942" cy="1755142"/>
+                </a:xfrm>
+              </p:grpSpPr>
+              <p:grpSp>
+                <p:nvGrpSpPr>
+                  <p:cNvPr id="166" name="Group 165">
+                    <a:extLst>
+                      <a:ext uri="{FF2B5EF4-FFF2-40B4-BE49-F238E27FC236}">
+                        <a16:creationId xmlns:a16="http://schemas.microsoft.com/office/drawing/2014/main" id="{52BFB7AD-7AC6-A48C-0960-639E212C7C00}"/>
+                      </a:ext>
+                    </a:extLst>
+                  </p:cNvPr>
+                  <p:cNvGrpSpPr/>
+                  <p:nvPr/>
+                </p:nvGrpSpPr>
+                <p:grpSpPr>
+                  <a:xfrm>
+                    <a:off x="3351330" y="2239026"/>
+                    <a:ext cx="2953942" cy="1189714"/>
+                    <a:chOff x="3351330" y="2239026"/>
+                    <a:chExt cx="2953942" cy="1189714"/>
+                  </a:xfrm>
+                </p:grpSpPr>
+                <p:sp>
+                  <p:nvSpPr>
+                    <p:cNvPr id="105" name="TextBox 104">
+                      <a:extLst>
+                        <a:ext uri="{FF2B5EF4-FFF2-40B4-BE49-F238E27FC236}">
+                          <a16:creationId xmlns:a16="http://schemas.microsoft.com/office/drawing/2014/main" id="{DBAFB9D3-DC62-A48E-411E-317A70A9B3AB}"/>
+                        </a:ext>
+                      </a:extLst>
+                    </p:cNvPr>
+                    <p:cNvSpPr txBox="1"/>
+                    <p:nvPr/>
+                  </p:nvSpPr>
+                  <p:spPr>
+                    <a:xfrm>
+                      <a:off x="4021891" y="3120963"/>
+                      <a:ext cx="2239249" cy="307777"/>
+                    </a:xfrm>
+                    <a:prstGeom prst="rect">
+                      <a:avLst/>
+                    </a:prstGeom>
+                    <a:noFill/>
+                  </p:spPr>
+                  <p:txBody>
+                    <a:bodyPr wrap="square">
+                      <a:spAutoFit/>
+                    </a:bodyPr>
+                    <a:lstStyle/>
+                    <a:p>
+                      <a:pPr algn="ctr"/>
+                      <a:r>
+                        <a:rPr lang="en-US" sz="1400" b="1" dirty="0">
+                          <a:solidFill>
+                            <a:schemeClr val="bg1"/>
+                          </a:solidFill>
+                          <a:latin typeface="Times New Roman" panose="02020603050405020304" pitchFamily="18" charset="0"/>
+                          <a:cs typeface="Times New Roman" panose="02020603050405020304" pitchFamily="18" charset="0"/>
+                        </a:rPr>
+                        <a:t>Next Generation Node B</a:t>
+                      </a:r>
+                    </a:p>
+                  </p:txBody>
+                </p:sp>
+                <p:grpSp>
+                  <p:nvGrpSpPr>
+                    <p:cNvPr id="165" name="Group 164">
+                      <a:extLst>
+                        <a:ext uri="{FF2B5EF4-FFF2-40B4-BE49-F238E27FC236}">
+                          <a16:creationId xmlns:a16="http://schemas.microsoft.com/office/drawing/2014/main" id="{94B6153A-628D-51A2-53C1-51D9E895F02A}"/>
+                        </a:ext>
+                      </a:extLst>
+                    </p:cNvPr>
+                    <p:cNvGrpSpPr/>
+                    <p:nvPr/>
+                  </p:nvGrpSpPr>
+                  <p:grpSpPr>
+                    <a:xfrm>
+                      <a:off x="3351330" y="2239026"/>
+                      <a:ext cx="2953942" cy="834976"/>
+                      <a:chOff x="3351330" y="2239026"/>
+                      <a:chExt cx="2953942" cy="834976"/>
+                    </a:xfrm>
+                  </p:grpSpPr>
+                  <p:pic>
+                    <p:nvPicPr>
+                      <p:cNvPr id="150" name="Graphic 149" descr="Wi-Fi outline">
+                        <a:extLst>
+                          <a:ext uri="{FF2B5EF4-FFF2-40B4-BE49-F238E27FC236}">
+                            <a16:creationId xmlns:a16="http://schemas.microsoft.com/office/drawing/2014/main" id="{A4384971-E0FA-83AB-3ECA-EA68B5363120}"/>
+                          </a:ext>
+                        </a:extLst>
+                      </p:cNvPr>
+                      <p:cNvPicPr>
+                        <a:picLocks noChangeAspect="1"/>
+                      </p:cNvPicPr>
+                      <p:nvPr/>
+                    </p:nvPicPr>
+                    <p:blipFill>
+                      <a:blip r:embed="rId8">
+                        <a:extLst>
+                          <a:ext uri="{96DAC541-7B7A-43D3-8B79-37D633B846F1}">
+                            <asvg:svgBlip xmlns:asvg="http://schemas.microsoft.com/office/drawing/2016/SVG/main" r:embed="rId9"/>
+                          </a:ext>
+                        </a:extLst>
+                      </a:blip>
+                      <a:stretch>
+                        <a:fillRect/>
+                      </a:stretch>
+                    </p:blipFill>
+                    <p:spPr>
+                      <a:xfrm rot="16200000" flipH="1">
+                        <a:off x="3351330" y="2239026"/>
+                        <a:ext cx="834976" cy="834975"/>
+                      </a:xfrm>
+                      <a:prstGeom prst="rect">
+                        <a:avLst/>
+                      </a:prstGeom>
+                    </p:spPr>
+                  </p:pic>
+                  <p:grpSp>
+                    <p:nvGrpSpPr>
+                      <p:cNvPr id="164" name="Group 163">
+                        <a:extLst>
+                          <a:ext uri="{FF2B5EF4-FFF2-40B4-BE49-F238E27FC236}">
+                            <a16:creationId xmlns:a16="http://schemas.microsoft.com/office/drawing/2014/main" id="{FEDF8195-14CB-11B2-B6D5-E25DE2BBA929}"/>
+                          </a:ext>
+                        </a:extLst>
+                      </p:cNvPr>
+                      <p:cNvGrpSpPr/>
+                      <p:nvPr/>
+                    </p:nvGrpSpPr>
+                    <p:grpSpPr>
+                      <a:xfrm>
+                        <a:off x="4021891" y="2347277"/>
+                        <a:ext cx="2283381" cy="618690"/>
+                        <a:chOff x="4021891" y="2194877"/>
+                        <a:chExt cx="2283381" cy="618690"/>
+                      </a:xfrm>
+                    </p:grpSpPr>
+                    <p:grpSp>
+                      <p:nvGrpSpPr>
+                        <p:cNvPr id="157" name="Group 156">
+                          <a:extLst>
+                            <a:ext uri="{FF2B5EF4-FFF2-40B4-BE49-F238E27FC236}">
+                              <a16:creationId xmlns:a16="http://schemas.microsoft.com/office/drawing/2014/main" id="{26375E39-3569-ADBB-F1AE-67A9EF281BC7}"/>
+                            </a:ext>
+                          </a:extLst>
+                        </p:cNvPr>
+                        <p:cNvGrpSpPr/>
+                        <p:nvPr/>
+                      </p:nvGrpSpPr>
+                      <p:grpSpPr>
+                        <a:xfrm>
+                          <a:off x="4021891" y="2194877"/>
+                          <a:ext cx="2239249" cy="618690"/>
+                          <a:chOff x="4021891" y="2194877"/>
+                          <a:chExt cx="2239249" cy="618690"/>
+                        </a:xfrm>
+                      </p:grpSpPr>
+                      <p:sp>
+                        <p:nvSpPr>
+                          <p:cNvPr id="116" name="Rectangle: Rounded Corners 115">
+                            <a:extLst>
+                              <a:ext uri="{FF2B5EF4-FFF2-40B4-BE49-F238E27FC236}">
+                                <a16:creationId xmlns:a16="http://schemas.microsoft.com/office/drawing/2014/main" id="{763E022C-45EC-17F5-4D28-50ED4E68B3D8}"/>
+                              </a:ext>
+                            </a:extLst>
+                          </p:cNvPr>
+                          <p:cNvSpPr/>
+                          <p:nvPr/>
+                        </p:nvSpPr>
+                        <p:spPr>
+                          <a:xfrm>
+                            <a:off x="4021891" y="2194877"/>
+                            <a:ext cx="2239249" cy="618689"/>
+                          </a:xfrm>
+                          <a:prstGeom prst="roundRect">
+                            <a:avLst>
+                              <a:gd name="adj" fmla="val 12974"/>
+                            </a:avLst>
+                          </a:prstGeom>
+                          <a:solidFill>
+                            <a:schemeClr val="bg2">
+                              <a:lumMod val="25000"/>
+                            </a:schemeClr>
+                          </a:solidFill>
+                          <a:ln w="28575">
+                            <a:noFill/>
+                          </a:ln>
+                        </p:spPr>
+                        <p:style>
+                          <a:lnRef idx="2">
+                            <a:schemeClr val="accent1">
+                              <a:shade val="15000"/>
+                            </a:schemeClr>
+                          </a:lnRef>
+                          <a:fillRef idx="1">
+                            <a:schemeClr val="accent1"/>
+                          </a:fillRef>
+                          <a:effectRef idx="0">
+                            <a:schemeClr val="accent1"/>
+                          </a:effectRef>
+                          <a:fontRef idx="minor">
+                            <a:schemeClr val="lt1"/>
+                          </a:fontRef>
+                        </p:style>
+                        <p:txBody>
+                          <a:bodyPr rtlCol="0" anchor="ctr"/>
+                          <a:lstStyle/>
+                          <a:p>
+                            <a:pPr algn="ctr"/>
+                            <a:endParaRPr lang="en-US" dirty="0">
+                              <a:solidFill>
+                                <a:schemeClr val="bg1"/>
+                              </a:solidFill>
+                              <a:latin typeface="Times New Roman" panose="02020603050405020304" pitchFamily="18" charset="0"/>
+                              <a:cs typeface="Times New Roman" panose="02020603050405020304" pitchFamily="18" charset="0"/>
+                            </a:endParaRPr>
+                          </a:p>
+                        </p:txBody>
+                      </p:sp>
+                      <p:sp>
+                        <p:nvSpPr>
+                          <p:cNvPr id="154" name="Rectangle: Top Corners Rounded 153">
+                            <a:extLst>
+                              <a:ext uri="{FF2B5EF4-FFF2-40B4-BE49-F238E27FC236}">
+                                <a16:creationId xmlns:a16="http://schemas.microsoft.com/office/drawing/2014/main" id="{FC1DFCF3-A2B2-8659-C2ED-0301735E43E7}"/>
+                              </a:ext>
+                            </a:extLst>
+                          </p:cNvPr>
+                          <p:cNvSpPr/>
+                          <p:nvPr/>
+                        </p:nvSpPr>
+                        <p:spPr>
+                          <a:xfrm flipV="1">
+                            <a:off x="4022672" y="2504431"/>
+                            <a:ext cx="2238468" cy="307778"/>
+                          </a:xfrm>
+                          <a:prstGeom prst="round2SameRect">
+                            <a:avLst>
+                              <a:gd name="adj1" fmla="val 28674"/>
+                              <a:gd name="adj2" fmla="val 0"/>
+                            </a:avLst>
+                          </a:prstGeom>
+                          <a:solidFill>
+                            <a:schemeClr val="tx1">
+                              <a:lumMod val="85000"/>
+                              <a:lumOff val="15000"/>
+                            </a:schemeClr>
+                          </a:solidFill>
+                          <a:ln>
+                            <a:noFill/>
+                          </a:ln>
+                        </p:spPr>
+                        <p:style>
+                          <a:lnRef idx="2">
+                            <a:schemeClr val="accent1">
+                              <a:shade val="15000"/>
+                            </a:schemeClr>
+                          </a:lnRef>
+                          <a:fillRef idx="1">
+                            <a:schemeClr val="accent1"/>
+                          </a:fillRef>
+                          <a:effectRef idx="0">
+                            <a:schemeClr val="accent1"/>
+                          </a:effectRef>
+                          <a:fontRef idx="minor">
+                            <a:schemeClr val="lt1"/>
+                          </a:fontRef>
+                        </p:style>
+                        <p:txBody>
+                          <a:bodyPr rtlCol="0" anchor="ctr"/>
+                          <a:lstStyle/>
+                          <a:p>
+                            <a:pPr algn="ctr"/>
+                            <a:endParaRPr lang="en-US">
+                              <a:solidFill>
+                                <a:schemeClr val="bg1"/>
+                              </a:solidFill>
+                            </a:endParaRPr>
+                          </a:p>
+                        </p:txBody>
+                      </p:sp>
+                      <p:sp>
+                        <p:nvSpPr>
+                          <p:cNvPr id="118" name="Rectangle: Rounded Corners 117">
+                            <a:extLst>
+                              <a:ext uri="{FF2B5EF4-FFF2-40B4-BE49-F238E27FC236}">
+                                <a16:creationId xmlns:a16="http://schemas.microsoft.com/office/drawing/2014/main" id="{B5766D04-B969-3849-BAD6-E5FBF42BA676}"/>
+                              </a:ext>
+                            </a:extLst>
+                          </p:cNvPr>
+                          <p:cNvSpPr/>
+                          <p:nvPr/>
+                        </p:nvSpPr>
+                        <p:spPr>
+                          <a:xfrm>
+                            <a:off x="4021891" y="2194878"/>
+                            <a:ext cx="2239249" cy="618689"/>
+                          </a:xfrm>
+                          <a:prstGeom prst="roundRect">
+                            <a:avLst>
+                              <a:gd name="adj" fmla="val 12974"/>
+                            </a:avLst>
+                          </a:prstGeom>
+                          <a:noFill/>
+                          <a:ln w="12700">
+                            <a:solidFill>
+                              <a:schemeClr val="bg1"/>
+                            </a:solidFill>
+                          </a:ln>
+                        </p:spPr>
+                        <p:style>
+                          <a:lnRef idx="2">
+                            <a:schemeClr val="accent1">
+                              <a:shade val="15000"/>
+                            </a:schemeClr>
+                          </a:lnRef>
+                          <a:fillRef idx="1">
+                            <a:schemeClr val="accent1"/>
+                          </a:fillRef>
+                          <a:effectRef idx="0">
+                            <a:schemeClr val="accent1"/>
+                          </a:effectRef>
+                          <a:fontRef idx="minor">
+                            <a:schemeClr val="lt1"/>
+                          </a:fontRef>
+                        </p:style>
+                        <p:txBody>
+                          <a:bodyPr rtlCol="0" anchor="ctr"/>
+                          <a:lstStyle/>
+                          <a:p>
+                            <a:pPr algn="ctr"/>
+                            <a:endParaRPr lang="en-US" dirty="0">
+                              <a:solidFill>
+                                <a:schemeClr val="bg1"/>
+                              </a:solidFill>
+                              <a:latin typeface="Times New Roman" panose="02020603050405020304" pitchFamily="18" charset="0"/>
+                              <a:cs typeface="Times New Roman" panose="02020603050405020304" pitchFamily="18" charset="0"/>
+                            </a:endParaRPr>
+                          </a:p>
+                        </p:txBody>
+                      </p:sp>
+                    </p:grpSp>
+                    <p:sp>
+                      <p:nvSpPr>
+                        <p:cNvPr id="158" name="TextBox 157">
+                          <a:extLst>
+                            <a:ext uri="{FF2B5EF4-FFF2-40B4-BE49-F238E27FC236}">
+                              <a16:creationId xmlns:a16="http://schemas.microsoft.com/office/drawing/2014/main" id="{118DB05C-DAB0-A421-F073-A792FE4EAAA3}"/>
+                            </a:ext>
+                          </a:extLst>
+                        </p:cNvPr>
+                        <p:cNvSpPr txBox="1"/>
+                        <p:nvPr/>
+                      </p:nvSpPr>
+                      <p:spPr>
+                        <a:xfrm>
+                          <a:off x="4335869" y="2202843"/>
+                          <a:ext cx="1969403" cy="307777"/>
+                        </a:xfrm>
+                        <a:prstGeom prst="rect">
+                          <a:avLst/>
+                        </a:prstGeom>
+                        <a:noFill/>
+                      </p:spPr>
+                      <p:txBody>
+                        <a:bodyPr wrap="square">
+                          <a:spAutoFit/>
+                        </a:bodyPr>
+                        <a:lstStyle/>
+                        <a:p>
+                          <a:pPr algn="ctr"/>
+                          <a:r>
+                            <a:rPr lang="en-US" sz="1400" dirty="0">
+                              <a:solidFill>
+                                <a:schemeClr val="bg1"/>
+                              </a:solidFill>
+                              <a:latin typeface="Times New Roman" panose="02020603050405020304" pitchFamily="18" charset="0"/>
+                              <a:cs typeface="Times New Roman" panose="02020603050405020304" pitchFamily="18" charset="0"/>
+                            </a:rPr>
+                            <a:t>Software-Defined Radio</a:t>
+                          </a:r>
+                        </a:p>
+                      </p:txBody>
+                    </p:sp>
+                    <p:pic>
+                      <p:nvPicPr>
+                        <p:cNvPr id="159" name="Graphic 158">
+                          <a:extLst>
+                            <a:ext uri="{FF2B5EF4-FFF2-40B4-BE49-F238E27FC236}">
+                              <a16:creationId xmlns:a16="http://schemas.microsoft.com/office/drawing/2014/main" id="{D29AD5AF-3219-6D63-1EA7-142390B52B38}"/>
+                            </a:ext>
+                          </a:extLst>
+                        </p:cNvPr>
+                        <p:cNvPicPr>
+                          <a:picLocks noChangeAspect="1"/>
+                        </p:cNvPicPr>
+                        <p:nvPr/>
+                      </p:nvPicPr>
+                      <p:blipFill>
+                        <a:blip r:embed="rId10">
+                          <a:extLst>
+                            <a:ext uri="{96DAC541-7B7A-43D3-8B79-37D633B846F1}">
+                              <asvg:svgBlip xmlns:asvg="http://schemas.microsoft.com/office/drawing/2016/SVG/main" r:embed="rId11"/>
+                            </a:ext>
+                          </a:extLst>
+                        </a:blip>
+                        <a:srcRect/>
+                        <a:stretch/>
+                      </p:blipFill>
+                      <p:spPr>
+                        <a:xfrm>
+                          <a:off x="4134842" y="2215325"/>
+                          <a:ext cx="289426" cy="289426"/>
+                        </a:xfrm>
+                        <a:prstGeom prst="rect">
+                          <a:avLst/>
+                        </a:prstGeom>
+                      </p:spPr>
+                    </p:pic>
+                    <p:sp>
+                      <p:nvSpPr>
+                        <p:cNvPr id="162" name="TextBox 161">
+                          <a:extLst>
+                            <a:ext uri="{FF2B5EF4-FFF2-40B4-BE49-F238E27FC236}">
+                              <a16:creationId xmlns:a16="http://schemas.microsoft.com/office/drawing/2014/main" id="{0BF92B8E-1B5B-2C80-D2F6-A6431705198E}"/>
+                            </a:ext>
+                          </a:extLst>
+                        </p:cNvPr>
+                        <p:cNvSpPr txBox="1"/>
+                        <p:nvPr/>
+                      </p:nvSpPr>
+                      <p:spPr>
+                        <a:xfrm>
+                          <a:off x="4335869" y="2505790"/>
+                          <a:ext cx="1969403" cy="307777"/>
+                        </a:xfrm>
+                        <a:prstGeom prst="rect">
+                          <a:avLst/>
+                        </a:prstGeom>
+                        <a:noFill/>
+                      </p:spPr>
+                      <p:txBody>
+                        <a:bodyPr wrap="square">
+                          <a:spAutoFit/>
+                        </a:bodyPr>
+                        <a:lstStyle/>
+                        <a:p>
+                          <a:pPr algn="ctr"/>
+                          <a:r>
+                            <a:rPr lang="en-US" sz="1400" dirty="0">
+                              <a:solidFill>
+                                <a:schemeClr val="bg1"/>
+                              </a:solidFill>
+                              <a:latin typeface="Times New Roman" panose="02020603050405020304" pitchFamily="18" charset="0"/>
+                              <a:cs typeface="Times New Roman" panose="02020603050405020304" pitchFamily="18" charset="0"/>
+                            </a:rPr>
+                            <a:t>RF Simulator / </a:t>
+                          </a:r>
+                          <a:r>
+                            <a:rPr lang="en-US" sz="1400" dirty="0" err="1">
+                              <a:solidFill>
+                                <a:schemeClr val="bg1"/>
+                              </a:solidFill>
+                              <a:latin typeface="Times New Roman" panose="02020603050405020304" pitchFamily="18" charset="0"/>
+                              <a:cs typeface="Times New Roman" panose="02020603050405020304" pitchFamily="18" charset="0"/>
+                            </a:rPr>
+                            <a:t>ZeroMQ</a:t>
+                          </a:r>
+                          <a:endParaRPr lang="en-US" sz="1400" dirty="0">
+                            <a:solidFill>
+                              <a:schemeClr val="bg1"/>
+                            </a:solidFill>
+                            <a:latin typeface="Times New Roman" panose="02020603050405020304" pitchFamily="18" charset="0"/>
+                            <a:cs typeface="Times New Roman" panose="02020603050405020304" pitchFamily="18" charset="0"/>
+                          </a:endParaRPr>
+                        </a:p>
+                      </p:txBody>
+                    </p:sp>
+                    <p:pic>
+                      <p:nvPicPr>
+                        <p:cNvPr id="163" name="Graphic 162">
+                          <a:extLst>
+                            <a:ext uri="{FF2B5EF4-FFF2-40B4-BE49-F238E27FC236}">
+                              <a16:creationId xmlns:a16="http://schemas.microsoft.com/office/drawing/2014/main" id="{8BF6375D-4174-C1B1-57AE-E2DA824F94CE}"/>
+                            </a:ext>
+                          </a:extLst>
+                        </p:cNvPr>
+                        <p:cNvPicPr>
+                          <a:picLocks noChangeAspect="1"/>
+                        </p:cNvPicPr>
+                        <p:nvPr/>
+                      </p:nvPicPr>
+                      <p:blipFill>
+                        <a:blip r:embed="rId4">
+                          <a:extLst>
+                            <a:ext uri="{96DAC541-7B7A-43D3-8B79-37D633B846F1}">
+                              <asvg:svgBlip xmlns:asvg="http://schemas.microsoft.com/office/drawing/2016/SVG/main" r:embed="rId5"/>
+                            </a:ext>
+                          </a:extLst>
+                        </a:blip>
+                        <a:srcRect/>
+                        <a:stretch/>
+                      </p:blipFill>
+                      <p:spPr>
+                        <a:xfrm>
+                          <a:off x="4167277" y="2528018"/>
+                          <a:ext cx="256990" cy="256990"/>
+                        </a:xfrm>
+                        <a:prstGeom prst="rect">
+                          <a:avLst/>
+                        </a:prstGeom>
+                      </p:spPr>
+                    </p:pic>
+                  </p:grpSp>
+                </p:grpSp>
+              </p:grpSp>
+              <p:sp>
+                <p:nvSpPr>
+                  <p:cNvPr id="169" name="TextBox 168">
+                    <a:extLst>
+                      <a:ext uri="{FF2B5EF4-FFF2-40B4-BE49-F238E27FC236}">
+                        <a16:creationId xmlns:a16="http://schemas.microsoft.com/office/drawing/2014/main" id="{03D8F466-4922-1498-BC9F-4475B7D5BC61}"/>
+                      </a:ext>
+                    </a:extLst>
+                  </p:cNvPr>
+                  <p:cNvSpPr txBox="1"/>
+                  <p:nvPr/>
+                </p:nvSpPr>
+                <p:spPr>
+                  <a:xfrm>
+                    <a:off x="4167277" y="3347837"/>
+                    <a:ext cx="2095177" cy="646331"/>
+                  </a:xfrm>
+                  <a:prstGeom prst="rect">
+                    <a:avLst/>
+                  </a:prstGeom>
+                  <a:noFill/>
+                </p:spPr>
+                <p:txBody>
+                  <a:bodyPr wrap="square">
+                    <a:spAutoFit/>
+                  </a:bodyPr>
+                  <a:lstStyle/>
+                  <a:p>
+                    <a:pPr marL="285750" indent="-285750">
+                      <a:buFont typeface="Arial" panose="020B0604020202020204" pitchFamily="34" charset="0"/>
+                      <a:buChar char="•"/>
+                    </a:pPr>
+                    <a:r>
+                      <a:rPr lang="en-US" sz="1200" dirty="0" err="1">
+                        <a:solidFill>
+                          <a:schemeClr val="bg1"/>
+                        </a:solidFill>
+                        <a:latin typeface="Times New Roman" panose="02020603050405020304" pitchFamily="18" charset="0"/>
+                        <a:cs typeface="Times New Roman" panose="02020603050405020304" pitchFamily="18" charset="0"/>
+                      </a:rPr>
+                      <a:t>srsRAN_Project</a:t>
+                    </a:r>
+                    <a:endParaRPr lang="en-US" sz="1200" dirty="0">
+                      <a:solidFill>
+                        <a:schemeClr val="bg1"/>
+                      </a:solidFill>
+                      <a:latin typeface="Times New Roman" panose="02020603050405020304" pitchFamily="18" charset="0"/>
+                      <a:cs typeface="Times New Roman" panose="02020603050405020304" pitchFamily="18" charset="0"/>
+                    </a:endParaRPr>
+                  </a:p>
+                  <a:p>
+                    <a:pPr marL="285750" indent="-285750">
+                      <a:buFont typeface="Arial" panose="020B0604020202020204" pitchFamily="34" charset="0"/>
+                      <a:buChar char="•"/>
+                    </a:pPr>
+                    <a:r>
+                      <a:rPr lang="en-US" sz="1200" dirty="0">
+                        <a:solidFill>
+                          <a:schemeClr val="bg1"/>
+                        </a:solidFill>
+                        <a:latin typeface="Times New Roman" panose="02020603050405020304" pitchFamily="18" charset="0"/>
+                        <a:cs typeface="Times New Roman" panose="02020603050405020304" pitchFamily="18" charset="0"/>
+                      </a:rPr>
+                      <a:t>OpenAirInterface5G</a:t>
+                    </a:r>
+                  </a:p>
+                  <a:p>
+                    <a:pPr marL="285750" indent="-285750">
+                      <a:buFont typeface="Arial" panose="020B0604020202020204" pitchFamily="34" charset="0"/>
+                      <a:buChar char="•"/>
+                    </a:pPr>
+                    <a:r>
+                      <a:rPr lang="en-US" sz="1200" dirty="0">
+                        <a:solidFill>
+                          <a:schemeClr val="bg1"/>
+                        </a:solidFill>
+                        <a:latin typeface="Times New Roman" panose="02020603050405020304" pitchFamily="18" charset="0"/>
+                        <a:cs typeface="Times New Roman" panose="02020603050405020304" pitchFamily="18" charset="0"/>
+                      </a:rPr>
+                      <a:t>O-RAN SC E2 Simulator</a:t>
+                    </a:r>
+                  </a:p>
+                </p:txBody>
+              </p:sp>
+            </p:grpSp>
+            <p:grpSp>
+              <p:nvGrpSpPr>
+                <p:cNvPr id="210" name="Group 209">
+                  <a:extLst>
+                    <a:ext uri="{FF2B5EF4-FFF2-40B4-BE49-F238E27FC236}">
+                      <a16:creationId xmlns:a16="http://schemas.microsoft.com/office/drawing/2014/main" id="{6D139E02-B579-A024-59D1-D2BBA1D5BC77}"/>
+                    </a:ext>
+                  </a:extLst>
+                </p:cNvPr>
+                <p:cNvGrpSpPr/>
+                <p:nvPr/>
+              </p:nvGrpSpPr>
+              <p:grpSpPr>
+                <a:xfrm>
+                  <a:off x="7069263" y="2343469"/>
+                  <a:ext cx="1689168" cy="1154191"/>
+                  <a:chOff x="7311071" y="2343469"/>
+                  <a:chExt cx="1689168" cy="1154191"/>
+                </a:xfrm>
+              </p:grpSpPr>
+              <p:grpSp>
+                <p:nvGrpSpPr>
+                  <p:cNvPr id="174" name="Group 173">
+                    <a:extLst>
+                      <a:ext uri="{FF2B5EF4-FFF2-40B4-BE49-F238E27FC236}">
+                        <a16:creationId xmlns:a16="http://schemas.microsoft.com/office/drawing/2014/main" id="{587E8459-7A4D-1604-94F9-4B4D16914130}"/>
+                      </a:ext>
+                    </a:extLst>
+                  </p:cNvPr>
+                  <p:cNvGrpSpPr/>
+                  <p:nvPr/>
+                </p:nvGrpSpPr>
+                <p:grpSpPr>
+                  <a:xfrm>
+                    <a:off x="7311071" y="2347277"/>
+                    <a:ext cx="1689168" cy="1150383"/>
+                    <a:chOff x="4019338" y="2347277"/>
+                    <a:chExt cx="1689168" cy="1150383"/>
+                  </a:xfrm>
+                </p:grpSpPr>
+                <p:grpSp>
+                  <p:nvGrpSpPr>
+                    <p:cNvPr id="175" name="Group 174">
+                      <a:extLst>
+                        <a:ext uri="{FF2B5EF4-FFF2-40B4-BE49-F238E27FC236}">
+                          <a16:creationId xmlns:a16="http://schemas.microsoft.com/office/drawing/2014/main" id="{F4F05426-1DE6-FE3E-CA67-1D2E14DB13E5}"/>
+                        </a:ext>
+                      </a:extLst>
+                    </p:cNvPr>
+                    <p:cNvGrpSpPr/>
+                    <p:nvPr/>
+                  </p:nvGrpSpPr>
+                  <p:grpSpPr>
+                    <a:xfrm>
+                      <a:off x="4019338" y="2347277"/>
+                      <a:ext cx="1568356" cy="954287"/>
+                      <a:chOff x="4019338" y="2347277"/>
+                      <a:chExt cx="1568356" cy="954287"/>
+                    </a:xfrm>
+                  </p:grpSpPr>
+                  <p:sp>
+                    <p:nvSpPr>
+                      <p:cNvPr id="177" name="TextBox 176">
+                        <a:extLst>
+                          <a:ext uri="{FF2B5EF4-FFF2-40B4-BE49-F238E27FC236}">
+                            <a16:creationId xmlns:a16="http://schemas.microsoft.com/office/drawing/2014/main" id="{63AF03B5-ABEE-6A9E-0665-4E76E054C4D7}"/>
+                          </a:ext>
+                        </a:extLst>
+                      </p:cNvPr>
+                      <p:cNvSpPr txBox="1"/>
+                      <p:nvPr/>
+                    </p:nvSpPr>
+                    <p:spPr>
+                      <a:xfrm>
+                        <a:off x="4019338" y="2993787"/>
+                        <a:ext cx="1568356" cy="307777"/>
+                      </a:xfrm>
+                      <a:prstGeom prst="rect">
+                        <a:avLst/>
+                      </a:prstGeom>
+                      <a:noFill/>
+                    </p:spPr>
+                    <p:txBody>
+                      <a:bodyPr wrap="square">
+                        <a:spAutoFit/>
+                      </a:bodyPr>
+                      <a:lstStyle/>
+                      <a:p>
+                        <a:pPr algn="ctr"/>
+                        <a:r>
+                          <a:rPr lang="en-US" sz="1400" b="1" dirty="0">
+                            <a:solidFill>
+                              <a:schemeClr val="bg1"/>
+                            </a:solidFill>
+                            <a:latin typeface="Times New Roman" panose="02020603050405020304" pitchFamily="18" charset="0"/>
+                            <a:cs typeface="Times New Roman" panose="02020603050405020304" pitchFamily="18" charset="0"/>
+                          </a:rPr>
+                          <a:t>5G Core Network</a:t>
+                        </a:r>
+                      </a:p>
+                    </p:txBody>
+                  </p:sp>
+                  <p:grpSp>
+                    <p:nvGrpSpPr>
+                      <p:cNvPr id="180" name="Group 179">
+                        <a:extLst>
+                          <a:ext uri="{FF2B5EF4-FFF2-40B4-BE49-F238E27FC236}">
+                            <a16:creationId xmlns:a16="http://schemas.microsoft.com/office/drawing/2014/main" id="{D35255B8-2E95-3894-2B36-1E12BFB04D1F}"/>
+                          </a:ext>
+                        </a:extLst>
+                      </p:cNvPr>
+                      <p:cNvGrpSpPr/>
+                      <p:nvPr/>
+                    </p:nvGrpSpPr>
+                    <p:grpSpPr>
+                      <a:xfrm>
+                        <a:off x="4021891" y="2347277"/>
+                        <a:ext cx="1565803" cy="618690"/>
+                        <a:chOff x="4021891" y="2194877"/>
+                        <a:chExt cx="1565803" cy="618690"/>
+                      </a:xfrm>
+                    </p:grpSpPr>
+                    <p:grpSp>
+                      <p:nvGrpSpPr>
+                        <p:cNvPr id="181" name="Group 180">
+                          <a:extLst>
+                            <a:ext uri="{FF2B5EF4-FFF2-40B4-BE49-F238E27FC236}">
+                              <a16:creationId xmlns:a16="http://schemas.microsoft.com/office/drawing/2014/main" id="{528EDB48-B949-B841-8C80-A542DAC94410}"/>
+                            </a:ext>
+                          </a:extLst>
+                        </p:cNvPr>
+                        <p:cNvGrpSpPr/>
+                        <p:nvPr/>
+                      </p:nvGrpSpPr>
+                      <p:grpSpPr>
+                        <a:xfrm>
+                          <a:off x="4021891" y="2194877"/>
+                          <a:ext cx="1565803" cy="618689"/>
+                          <a:chOff x="4021891" y="2194877"/>
+                          <a:chExt cx="1565803" cy="618689"/>
+                        </a:xfrm>
+                      </p:grpSpPr>
+                      <p:sp>
+                        <p:nvSpPr>
+                          <p:cNvPr id="186" name="Rectangle: Rounded Corners 185">
+                            <a:extLst>
+                              <a:ext uri="{FF2B5EF4-FFF2-40B4-BE49-F238E27FC236}">
+                                <a16:creationId xmlns:a16="http://schemas.microsoft.com/office/drawing/2014/main" id="{741AD84D-B1A3-9C27-B906-C7D6270533F0}"/>
+                              </a:ext>
+                            </a:extLst>
+                          </p:cNvPr>
+                          <p:cNvSpPr/>
+                          <p:nvPr/>
+                        </p:nvSpPr>
+                        <p:spPr>
+                          <a:xfrm>
+                            <a:off x="4021891" y="2194877"/>
+                            <a:ext cx="1565803" cy="618689"/>
+                          </a:xfrm>
+                          <a:prstGeom prst="roundRect">
+                            <a:avLst>
+                              <a:gd name="adj" fmla="val 12974"/>
+                            </a:avLst>
+                          </a:prstGeom>
+                          <a:solidFill>
+                            <a:schemeClr val="bg2">
+                              <a:lumMod val="25000"/>
+                            </a:schemeClr>
+                          </a:solidFill>
+                          <a:ln w="28575">
+                            <a:noFill/>
+                          </a:ln>
+                        </p:spPr>
+                        <p:style>
+                          <a:lnRef idx="2">
+                            <a:schemeClr val="accent1">
+                              <a:shade val="15000"/>
+                            </a:schemeClr>
+                          </a:lnRef>
+                          <a:fillRef idx="1">
+                            <a:schemeClr val="accent1"/>
+                          </a:fillRef>
+                          <a:effectRef idx="0">
+                            <a:schemeClr val="accent1"/>
+                          </a:effectRef>
+                          <a:fontRef idx="minor">
+                            <a:schemeClr val="lt1"/>
+                          </a:fontRef>
+                        </p:style>
+                        <p:txBody>
+                          <a:bodyPr rtlCol="0" anchor="ctr"/>
+                          <a:lstStyle/>
+                          <a:p>
+                            <a:pPr algn="ctr"/>
+                            <a:endParaRPr lang="en-US" dirty="0">
+                              <a:solidFill>
+                                <a:schemeClr val="bg1"/>
+                              </a:solidFill>
+                              <a:latin typeface="Times New Roman" panose="02020603050405020304" pitchFamily="18" charset="0"/>
+                              <a:cs typeface="Times New Roman" panose="02020603050405020304" pitchFamily="18" charset="0"/>
+                            </a:endParaRPr>
+                          </a:p>
+                        </p:txBody>
+                      </p:sp>
+                      <p:sp>
+                        <p:nvSpPr>
+                          <p:cNvPr id="187" name="Rectangle: Top Corners Rounded 186">
+                            <a:extLst>
+                              <a:ext uri="{FF2B5EF4-FFF2-40B4-BE49-F238E27FC236}">
+                                <a16:creationId xmlns:a16="http://schemas.microsoft.com/office/drawing/2014/main" id="{B06EE221-0B6C-2630-BDD3-45B204DB206B}"/>
+                              </a:ext>
+                            </a:extLst>
+                          </p:cNvPr>
+                          <p:cNvSpPr/>
+                          <p:nvPr/>
+                        </p:nvSpPr>
+                        <p:spPr>
+                          <a:xfrm flipV="1">
+                            <a:off x="4022672" y="2504431"/>
+                            <a:ext cx="1565022" cy="307778"/>
+                          </a:xfrm>
+                          <a:prstGeom prst="round2SameRect">
+                            <a:avLst>
+                              <a:gd name="adj1" fmla="val 28674"/>
+                              <a:gd name="adj2" fmla="val 0"/>
+                            </a:avLst>
+                          </a:prstGeom>
+                          <a:solidFill>
+                            <a:schemeClr val="tx1">
+                              <a:lumMod val="85000"/>
+                              <a:lumOff val="15000"/>
+                            </a:schemeClr>
+                          </a:solidFill>
+                          <a:ln>
+                            <a:noFill/>
+                          </a:ln>
+                        </p:spPr>
+                        <p:style>
+                          <a:lnRef idx="2">
+                            <a:schemeClr val="accent1">
+                              <a:shade val="15000"/>
+                            </a:schemeClr>
+                          </a:lnRef>
+                          <a:fillRef idx="1">
+                            <a:schemeClr val="accent1"/>
+                          </a:fillRef>
+                          <a:effectRef idx="0">
+                            <a:schemeClr val="accent1"/>
+                          </a:effectRef>
+                          <a:fontRef idx="minor">
+                            <a:schemeClr val="lt1"/>
+                          </a:fontRef>
+                        </p:style>
+                        <p:txBody>
+                          <a:bodyPr rtlCol="0" anchor="ctr"/>
+                          <a:lstStyle/>
+                          <a:p>
+                            <a:pPr algn="ctr"/>
+                            <a:endParaRPr lang="en-US">
+                              <a:solidFill>
+                                <a:schemeClr val="bg1"/>
+                              </a:solidFill>
+                            </a:endParaRPr>
+                          </a:p>
+                        </p:txBody>
+                      </p:sp>
+                    </p:grpSp>
+                    <p:sp>
+                      <p:nvSpPr>
+                        <p:cNvPr id="182" name="TextBox 181">
+                          <a:extLst>
+                            <a:ext uri="{FF2B5EF4-FFF2-40B4-BE49-F238E27FC236}">
+                              <a16:creationId xmlns:a16="http://schemas.microsoft.com/office/drawing/2014/main" id="{7186A5FD-B9F2-4232-0FE2-63750A4253C5}"/>
+                            </a:ext>
+                          </a:extLst>
+                        </p:cNvPr>
+                        <p:cNvSpPr txBox="1"/>
+                        <p:nvPr/>
+                      </p:nvSpPr>
+                      <p:spPr>
+                        <a:xfrm>
+                          <a:off x="4335870" y="2202843"/>
+                          <a:ext cx="960137" cy="307777"/>
+                        </a:xfrm>
+                        <a:prstGeom prst="rect">
+                          <a:avLst/>
+                        </a:prstGeom>
+                        <a:noFill/>
+                      </p:spPr>
+                      <p:txBody>
+                        <a:bodyPr wrap="square">
+                          <a:spAutoFit/>
+                        </a:bodyPr>
+                        <a:lstStyle/>
+                        <a:p>
+                          <a:pPr algn="ctr"/>
+                          <a:r>
+                            <a:rPr lang="en-US" sz="1400" dirty="0">
+                              <a:solidFill>
+                                <a:schemeClr val="bg1"/>
+                              </a:solidFill>
+                              <a:latin typeface="Times New Roman" panose="02020603050405020304" pitchFamily="18" charset="0"/>
+                              <a:cs typeface="Times New Roman" panose="02020603050405020304" pitchFamily="18" charset="0"/>
+                            </a:rPr>
+                            <a:t>AMF</a:t>
+                          </a:r>
+                        </a:p>
+                      </p:txBody>
+                    </p:sp>
+                    <p:pic>
+                      <p:nvPicPr>
+                        <p:cNvPr id="183" name="Graphic 182">
+                          <a:extLst>
+                            <a:ext uri="{FF2B5EF4-FFF2-40B4-BE49-F238E27FC236}">
+                              <a16:creationId xmlns:a16="http://schemas.microsoft.com/office/drawing/2014/main" id="{5CC76CF6-3C16-BF02-9DF2-2C6D92632B06}"/>
+                            </a:ext>
+                          </a:extLst>
+                        </p:cNvPr>
+                        <p:cNvPicPr>
+                          <a:picLocks noChangeAspect="1"/>
+                        </p:cNvPicPr>
+                        <p:nvPr/>
+                      </p:nvPicPr>
+                      <p:blipFill>
+                        <a:blip r:embed="rId12">
+                          <a:extLst>
+                            <a:ext uri="{96DAC541-7B7A-43D3-8B79-37D633B846F1}">
+                              <asvg:svgBlip xmlns:asvg="http://schemas.microsoft.com/office/drawing/2016/SVG/main" r:embed="rId13"/>
+                            </a:ext>
+                          </a:extLst>
+                        </a:blip>
+                        <a:srcRect/>
+                        <a:stretch/>
+                      </p:blipFill>
+                      <p:spPr>
+                        <a:xfrm rot="16200000">
+                          <a:off x="4154082" y="2234565"/>
+                          <a:ext cx="250946" cy="250946"/>
+                        </a:xfrm>
+                        <a:prstGeom prst="rect">
+                          <a:avLst/>
+                        </a:prstGeom>
+                      </p:spPr>
+                    </p:pic>
+                    <p:sp>
+                      <p:nvSpPr>
+                        <p:cNvPr id="184" name="TextBox 183">
+                          <a:extLst>
+                            <a:ext uri="{FF2B5EF4-FFF2-40B4-BE49-F238E27FC236}">
+                              <a16:creationId xmlns:a16="http://schemas.microsoft.com/office/drawing/2014/main" id="{CE9ED2EF-10C3-3BB9-D92A-8E921FE65745}"/>
+                            </a:ext>
+                          </a:extLst>
+                        </p:cNvPr>
+                        <p:cNvSpPr txBox="1"/>
+                        <p:nvPr/>
+                      </p:nvSpPr>
+                      <p:spPr>
+                        <a:xfrm>
+                          <a:off x="4335870" y="2505790"/>
+                          <a:ext cx="960137" cy="307777"/>
+                        </a:xfrm>
+                        <a:prstGeom prst="rect">
+                          <a:avLst/>
+                        </a:prstGeom>
+                        <a:noFill/>
+                      </p:spPr>
+                      <p:txBody>
+                        <a:bodyPr wrap="square">
+                          <a:spAutoFit/>
+                        </a:bodyPr>
+                        <a:lstStyle/>
+                        <a:p>
+                          <a:pPr algn="ctr"/>
+                          <a:r>
+                            <a:rPr lang="en-US" sz="1400" dirty="0">
+                              <a:solidFill>
+                                <a:schemeClr val="bg1"/>
+                              </a:solidFill>
+                              <a:latin typeface="Times New Roman" panose="02020603050405020304" pitchFamily="18" charset="0"/>
+                              <a:cs typeface="Times New Roman" panose="02020603050405020304" pitchFamily="18" charset="0"/>
+                            </a:rPr>
+                            <a:t>UPF</a:t>
+                          </a:r>
+                        </a:p>
+                      </p:txBody>
+                    </p:sp>
+                    <p:pic>
+                      <p:nvPicPr>
+                        <p:cNvPr id="185" name="Graphic 184">
+                          <a:extLst>
+                            <a:ext uri="{FF2B5EF4-FFF2-40B4-BE49-F238E27FC236}">
+                              <a16:creationId xmlns:a16="http://schemas.microsoft.com/office/drawing/2014/main" id="{43C59E9A-2AF5-FAFB-647B-C72736050E96}"/>
+                            </a:ext>
+                          </a:extLst>
+                        </p:cNvPr>
+                        <p:cNvPicPr>
+                          <a:picLocks noChangeAspect="1"/>
+                        </p:cNvPicPr>
+                        <p:nvPr/>
+                      </p:nvPicPr>
+                      <p:blipFill>
+                        <a:blip r:embed="rId14">
+                          <a:extLst>
+                            <a:ext uri="{96DAC541-7B7A-43D3-8B79-37D633B846F1}">
+                              <asvg:svgBlip xmlns:asvg="http://schemas.microsoft.com/office/drawing/2016/SVG/main" r:embed="rId15"/>
+                            </a:ext>
+                          </a:extLst>
+                        </a:blip>
+                        <a:srcRect/>
+                        <a:stretch/>
+                      </p:blipFill>
+                      <p:spPr>
+                        <a:xfrm rot="16200000">
+                          <a:off x="4186516" y="2547257"/>
+                          <a:ext cx="218512" cy="218512"/>
+                        </a:xfrm>
+                        <a:prstGeom prst="rect">
+                          <a:avLst/>
+                        </a:prstGeom>
+                      </p:spPr>
+                    </p:pic>
+                  </p:grpSp>
+                </p:grpSp>
+                <p:sp>
+                  <p:nvSpPr>
+                    <p:cNvPr id="176" name="TextBox 175">
+                      <a:extLst>
+                        <a:ext uri="{FF2B5EF4-FFF2-40B4-BE49-F238E27FC236}">
+                          <a16:creationId xmlns:a16="http://schemas.microsoft.com/office/drawing/2014/main" id="{A0649D89-E505-22A1-9F9B-838D485FC1C7}"/>
+                        </a:ext>
+                      </a:extLst>
+                    </p:cNvPr>
+                    <p:cNvSpPr txBox="1"/>
+                    <p:nvPr/>
+                  </p:nvSpPr>
+                  <p:spPr>
+                    <a:xfrm>
+                      <a:off x="4140150" y="3220661"/>
+                      <a:ext cx="1568356" cy="276999"/>
+                    </a:xfrm>
+                    <a:prstGeom prst="rect">
+                      <a:avLst/>
+                    </a:prstGeom>
+                    <a:noFill/>
+                  </p:spPr>
+                  <p:txBody>
+                    <a:bodyPr wrap="square">
+                      <a:spAutoFit/>
+                    </a:bodyPr>
+                    <a:lstStyle/>
+                    <a:p>
+                      <a:pPr marL="285750" indent="-285750">
+                        <a:buFont typeface="Arial" panose="020B0604020202020204" pitchFamily="34" charset="0"/>
+                        <a:buChar char="•"/>
+                      </a:pPr>
+                      <a:r>
+                        <a:rPr lang="en-US" sz="1200" dirty="0">
+                          <a:solidFill>
+                            <a:schemeClr val="bg1"/>
+                          </a:solidFill>
+                          <a:latin typeface="Times New Roman" panose="02020603050405020304" pitchFamily="18" charset="0"/>
+                          <a:cs typeface="Times New Roman" panose="02020603050405020304" pitchFamily="18" charset="0"/>
+                        </a:rPr>
+                        <a:t>Open5GS</a:t>
+                      </a:r>
+                    </a:p>
+                  </p:txBody>
+                </p:sp>
+              </p:grpSp>
+              <p:sp>
+                <p:nvSpPr>
+                  <p:cNvPr id="200" name="Rectangle: Top Corners Rounded 199">
+                    <a:extLst>
+                      <a:ext uri="{FF2B5EF4-FFF2-40B4-BE49-F238E27FC236}">
+                        <a16:creationId xmlns:a16="http://schemas.microsoft.com/office/drawing/2014/main" id="{074F6BA7-4338-23EC-A819-D42EEC10AD53}"/>
+                      </a:ext>
+                    </a:extLst>
+                  </p:cNvPr>
+                  <p:cNvSpPr/>
+                  <p:nvPr/>
+                </p:nvSpPr>
+                <p:spPr>
+                  <a:xfrm rot="16200000" flipV="1">
+                    <a:off x="8464933" y="2550115"/>
+                    <a:ext cx="621140" cy="207847"/>
+                  </a:xfrm>
+                  <a:prstGeom prst="round2SameRect">
+                    <a:avLst>
+                      <a:gd name="adj1" fmla="val 39753"/>
+                      <a:gd name="adj2" fmla="val 0"/>
+                    </a:avLst>
+                  </a:prstGeom>
+                  <a:solidFill>
+                    <a:srgbClr val="303030"/>
+                  </a:solidFill>
+                  <a:ln>
+                    <a:noFill/>
+                  </a:ln>
+                </p:spPr>
+                <p:style>
+                  <a:lnRef idx="2">
+                    <a:schemeClr val="accent1">
+                      <a:shade val="15000"/>
+                    </a:schemeClr>
+                  </a:lnRef>
+                  <a:fillRef idx="1">
+                    <a:schemeClr val="accent1"/>
+                  </a:fillRef>
+                  <a:effectRef idx="0">
+                    <a:schemeClr val="accent1"/>
+                  </a:effectRef>
+                  <a:fontRef idx="minor">
+                    <a:schemeClr val="lt1"/>
+                  </a:fontRef>
+                </p:style>
+                <p:txBody>
+                  <a:bodyPr rtlCol="0" anchor="ctr"/>
+                  <a:lstStyle/>
+                  <a:p>
+                    <a:pPr algn="ctr"/>
+                    <a:endParaRPr lang="en-US">
+                      <a:solidFill>
+                        <a:schemeClr val="bg1"/>
+                      </a:solidFill>
+                    </a:endParaRPr>
+                  </a:p>
+                </p:txBody>
+              </p:sp>
+              <p:sp>
+                <p:nvSpPr>
+                  <p:cNvPr id="207" name="Rectangle: Rounded Corners 206">
+                    <a:extLst>
+                      <a:ext uri="{FF2B5EF4-FFF2-40B4-BE49-F238E27FC236}">
+                        <a16:creationId xmlns:a16="http://schemas.microsoft.com/office/drawing/2014/main" id="{2AD042C8-D8C8-686C-04E3-C1DA9627FCDA}"/>
+                      </a:ext>
+                    </a:extLst>
+                  </p:cNvPr>
+                  <p:cNvSpPr/>
+                  <p:nvPr/>
+                </p:nvSpPr>
+                <p:spPr>
+                  <a:xfrm>
+                    <a:off x="7313624" y="2347278"/>
+                    <a:ext cx="1565803" cy="618689"/>
+                  </a:xfrm>
+                  <a:prstGeom prst="roundRect">
+                    <a:avLst>
+                      <a:gd name="adj" fmla="val 12974"/>
+                    </a:avLst>
+                  </a:prstGeom>
+                  <a:noFill/>
+                  <a:ln w="12700">
+                    <a:solidFill>
+                      <a:schemeClr val="bg1"/>
+                    </a:solidFill>
+                  </a:ln>
+                </p:spPr>
+                <p:style>
+                  <a:lnRef idx="2">
+                    <a:schemeClr val="accent1">
+                      <a:shade val="15000"/>
+                    </a:schemeClr>
+                  </a:lnRef>
+                  <a:fillRef idx="1">
+                    <a:schemeClr val="accent1"/>
+                  </a:fillRef>
+                  <a:effectRef idx="0">
+                    <a:schemeClr val="accent1"/>
+                  </a:effectRef>
+                  <a:fontRef idx="minor">
+                    <a:schemeClr val="lt1"/>
+                  </a:fontRef>
+                </p:style>
+                <p:txBody>
+                  <a:bodyPr rtlCol="0" anchor="ctr"/>
+                  <a:lstStyle/>
+                  <a:p>
+                    <a:pPr algn="ctr"/>
+                    <a:endParaRPr lang="en-US" dirty="0">
+                      <a:solidFill>
+                        <a:schemeClr val="bg1"/>
+                      </a:solidFill>
+                      <a:latin typeface="Times New Roman" panose="02020603050405020304" pitchFamily="18" charset="0"/>
+                      <a:cs typeface="Times New Roman" panose="02020603050405020304" pitchFamily="18" charset="0"/>
+                    </a:endParaRPr>
+                  </a:p>
+                </p:txBody>
+              </p:sp>
+            </p:grpSp>
+          </p:grpSp>
+          <p:cxnSp>
+            <p:nvCxnSpPr>
+              <p:cNvPr id="236" name="Connector: Elbow 235">
+                <a:extLst>
+                  <a:ext uri="{FF2B5EF4-FFF2-40B4-BE49-F238E27FC236}">
+                    <a16:creationId xmlns:a16="http://schemas.microsoft.com/office/drawing/2014/main" id="{AF73C65C-EB2D-83CA-18A4-ED9FC7D18AE9}"/>
+                  </a:ext>
+                </a:extLst>
+              </p:cNvPr>
+              <p:cNvCxnSpPr>
+                <a:cxnSpLocks/>
+              </p:cNvCxnSpPr>
+              <p:nvPr/>
+            </p:nvCxnSpPr>
+            <p:spPr>
+              <a:xfrm rot="16200000" flipV="1">
+                <a:off x="5806210" y="3005765"/>
+                <a:ext cx="1105253" cy="165302"/>
+              </a:xfrm>
+              <a:prstGeom prst="bentConnector2">
+                <a:avLst/>
+              </a:prstGeom>
+              <a:ln w="12700">
+                <a:solidFill>
+                  <a:schemeClr val="bg1"/>
+                </a:solidFill>
+                <a:round/>
+              </a:ln>
+            </p:spPr>
+            <p:style>
+              <a:lnRef idx="2">
+                <a:schemeClr val="accent1"/>
+              </a:lnRef>
+              <a:fillRef idx="0">
+                <a:schemeClr val="accent1"/>
+              </a:fillRef>
+              <a:effectRef idx="1">
+                <a:schemeClr val="accent1"/>
+              </a:effectRef>
+              <a:fontRef idx="minor">
+                <a:schemeClr val="tx1"/>
+              </a:fontRef>
+            </p:style>
+          </p:cxnSp>
+          <p:grpSp>
+            <p:nvGrpSpPr>
+              <p:cNvPr id="298" name="Group 297">
+                <a:extLst>
+                  <a:ext uri="{FF2B5EF4-FFF2-40B4-BE49-F238E27FC236}">
+                    <a16:creationId xmlns:a16="http://schemas.microsoft.com/office/drawing/2014/main" id="{F4F66483-A881-AB8E-EA24-A1046F52E2A4}"/>
+                  </a:ext>
+                </a:extLst>
+              </p:cNvPr>
+              <p:cNvGrpSpPr/>
+              <p:nvPr/>
+            </p:nvGrpSpPr>
+            <p:grpSpPr>
+              <a:xfrm>
+                <a:off x="2803656" y="1879053"/>
+                <a:ext cx="3500830" cy="1617300"/>
+                <a:chOff x="4409110" y="1660130"/>
+                <a:chExt cx="3500830" cy="1617300"/>
+              </a:xfrm>
+            </p:grpSpPr>
+            <p:sp>
+              <p:nvSpPr>
+                <p:cNvPr id="299" name="Rectangle: Rounded Corners 298">
+                  <a:extLst>
+                    <a:ext uri="{FF2B5EF4-FFF2-40B4-BE49-F238E27FC236}">
+                      <a16:creationId xmlns:a16="http://schemas.microsoft.com/office/drawing/2014/main" id="{F9387809-F426-D5E8-6E1E-11DD2B11E5EC}"/>
+                    </a:ext>
+                  </a:extLst>
+                </p:cNvPr>
+                <p:cNvSpPr/>
+                <p:nvPr/>
+              </p:nvSpPr>
+              <p:spPr>
+                <a:xfrm>
+                  <a:off x="4409110" y="1660130"/>
+                  <a:ext cx="3500830" cy="924852"/>
+                </a:xfrm>
+                <a:prstGeom prst="roundRect">
+                  <a:avLst>
+                    <a:gd name="adj" fmla="val 8734"/>
+                  </a:avLst>
+                </a:prstGeom>
+                <a:solidFill>
+                  <a:srgbClr val="262626"/>
+                </a:solidFill>
+                <a:ln w="12700">
+                  <a:solidFill>
+                    <a:schemeClr val="bg1"/>
+                  </a:solidFill>
+                </a:ln>
+              </p:spPr>
+              <p:style>
+                <a:lnRef idx="2">
+                  <a:schemeClr val="accent1">
+                    <a:shade val="15000"/>
+                  </a:schemeClr>
+                </a:lnRef>
+                <a:fillRef idx="1">
+                  <a:schemeClr val="accent1"/>
+                </a:fillRef>
+                <a:effectRef idx="0">
+                  <a:schemeClr val="accent1"/>
+                </a:effectRef>
+                <a:fontRef idx="minor">
+                  <a:schemeClr val="lt1"/>
+                </a:fontRef>
+              </p:style>
+              <p:txBody>
+                <a:bodyPr rtlCol="0" anchor="ctr"/>
+                <a:lstStyle/>
+                <a:p>
+                  <a:pPr algn="ctr"/>
+                  <a:endParaRPr lang="en-US" dirty="0">
+                    <a:solidFill>
+                      <a:schemeClr val="bg1"/>
+                    </a:solidFill>
+                    <a:latin typeface="Times New Roman" panose="02020603050405020304" pitchFamily="18" charset="0"/>
+                    <a:cs typeface="Times New Roman" panose="02020603050405020304" pitchFamily="18" charset="0"/>
+                  </a:endParaRPr>
+                </a:p>
+              </p:txBody>
+            </p:sp>
+            <p:grpSp>
+              <p:nvGrpSpPr>
+                <p:cNvPr id="300" name="Group 299">
+                  <a:extLst>
+                    <a:ext uri="{FF2B5EF4-FFF2-40B4-BE49-F238E27FC236}">
+                      <a16:creationId xmlns:a16="http://schemas.microsoft.com/office/drawing/2014/main" id="{BE3ABA9F-C4F0-6B23-7A0B-536CE88F0275}"/>
+                    </a:ext>
+                  </a:extLst>
+                </p:cNvPr>
+                <p:cNvGrpSpPr/>
+                <p:nvPr/>
+              </p:nvGrpSpPr>
+              <p:grpSpPr>
+                <a:xfrm>
+                  <a:off x="4746251" y="2611103"/>
+                  <a:ext cx="3014194" cy="666327"/>
+                  <a:chOff x="4854563" y="2611103"/>
+                  <a:chExt cx="3014194" cy="666327"/>
+                </a:xfrm>
+              </p:grpSpPr>
+              <p:sp>
+                <p:nvSpPr>
+                  <p:cNvPr id="301" name="TextBox 300">
+                    <a:extLst>
+                      <a:ext uri="{FF2B5EF4-FFF2-40B4-BE49-F238E27FC236}">
+                        <a16:creationId xmlns:a16="http://schemas.microsoft.com/office/drawing/2014/main" id="{6C148EEF-91F3-60B8-DD63-926E75254BC6}"/>
+                      </a:ext>
+                    </a:extLst>
+                  </p:cNvPr>
+                  <p:cNvSpPr txBox="1"/>
+                  <p:nvPr/>
+                </p:nvSpPr>
+                <p:spPr>
+                  <a:xfrm>
+                    <a:off x="4854563" y="2611103"/>
+                    <a:ext cx="3014194" cy="307777"/>
+                  </a:xfrm>
+                  <a:prstGeom prst="rect">
+                    <a:avLst/>
+                  </a:prstGeom>
+                  <a:noFill/>
+                </p:spPr>
+                <p:txBody>
+                  <a:bodyPr wrap="square">
+                    <a:spAutoFit/>
+                  </a:bodyPr>
+                  <a:lstStyle/>
+                  <a:p>
+                    <a:pPr algn="ctr"/>
+                    <a:r>
+                      <a:rPr lang="en-US" sz="1400" b="1" dirty="0">
+                        <a:solidFill>
+                          <a:schemeClr val="bg1"/>
+                        </a:solidFill>
+                        <a:latin typeface="Times New Roman" panose="02020603050405020304" pitchFamily="18" charset="0"/>
+                        <a:cs typeface="Times New Roman" panose="02020603050405020304" pitchFamily="18" charset="0"/>
+                      </a:rPr>
+                      <a:t>Near-RT RAN Intelligent Controller</a:t>
+                    </a:r>
+                  </a:p>
+                </p:txBody>
+              </p:sp>
+              <p:sp>
+                <p:nvSpPr>
+                  <p:cNvPr id="302" name="TextBox 301">
+                    <a:extLst>
+                      <a:ext uri="{FF2B5EF4-FFF2-40B4-BE49-F238E27FC236}">
+                        <a16:creationId xmlns:a16="http://schemas.microsoft.com/office/drawing/2014/main" id="{9CEF86A8-EAFC-DCF5-1A14-9BEF19C47DC4}"/>
+                      </a:ext>
+                    </a:extLst>
+                  </p:cNvPr>
+                  <p:cNvSpPr txBox="1"/>
+                  <p:nvPr/>
+                </p:nvSpPr>
+                <p:spPr>
+                  <a:xfrm>
+                    <a:off x="5404466" y="2815765"/>
+                    <a:ext cx="2078132" cy="461665"/>
+                  </a:xfrm>
+                  <a:prstGeom prst="rect">
+                    <a:avLst/>
+                  </a:prstGeom>
+                  <a:noFill/>
+                </p:spPr>
+                <p:txBody>
+                  <a:bodyPr wrap="square">
+                    <a:spAutoFit/>
+                  </a:bodyPr>
+                  <a:lstStyle/>
+                  <a:p>
+                    <a:pPr marL="285750" indent="-285750">
+                      <a:buFont typeface="Arial" panose="020B0604020202020204" pitchFamily="34" charset="0"/>
+                      <a:buChar char="•"/>
+                    </a:pPr>
+                    <a:r>
+                      <a:rPr lang="en-US" sz="1200" dirty="0">
+                        <a:solidFill>
+                          <a:schemeClr val="bg1"/>
+                        </a:solidFill>
+                        <a:latin typeface="Times New Roman" panose="02020603050405020304" pitchFamily="18" charset="0"/>
+                        <a:cs typeface="Times New Roman" panose="02020603050405020304" pitchFamily="18" charset="0"/>
+                      </a:rPr>
+                      <a:t>O-RAN SC RIC</a:t>
+                    </a:r>
+                  </a:p>
+                  <a:p>
+                    <a:pPr marL="285750" indent="-285750">
+                      <a:buFont typeface="Arial" panose="020B0604020202020204" pitchFamily="34" charset="0"/>
+                      <a:buChar char="•"/>
+                    </a:pPr>
+                    <a:r>
+                      <a:rPr lang="en-US" sz="1200" dirty="0">
+                        <a:solidFill>
+                          <a:schemeClr val="bg1"/>
+                        </a:solidFill>
+                        <a:latin typeface="Times New Roman" panose="02020603050405020304" pitchFamily="18" charset="0"/>
+                        <a:cs typeface="Times New Roman" panose="02020603050405020304" pitchFamily="18" charset="0"/>
+                      </a:rPr>
+                      <a:t>FlexRIC</a:t>
+                    </a:r>
+                  </a:p>
+                </p:txBody>
+              </p:sp>
+            </p:grpSp>
+          </p:grpSp>
+          <p:cxnSp>
+            <p:nvCxnSpPr>
+              <p:cNvPr id="316" name="Straight Connector 315">
+                <a:extLst>
+                  <a:ext uri="{FF2B5EF4-FFF2-40B4-BE49-F238E27FC236}">
+                    <a16:creationId xmlns:a16="http://schemas.microsoft.com/office/drawing/2014/main" id="{6F0B4269-577E-98FD-100F-DD6A17414AED}"/>
+                  </a:ext>
+                </a:extLst>
+              </p:cNvPr>
+              <p:cNvCxnSpPr>
+                <a:cxnSpLocks/>
+              </p:cNvCxnSpPr>
+              <p:nvPr/>
+            </p:nvCxnSpPr>
+            <p:spPr>
+              <a:xfrm>
+                <a:off x="6304486" y="2146139"/>
+                <a:ext cx="984962" cy="0"/>
+              </a:xfrm>
+              <a:prstGeom prst="line">
+                <a:avLst/>
+              </a:prstGeom>
+              <a:ln w="12700">
+                <a:solidFill>
+                  <a:schemeClr val="bg1"/>
+                </a:solidFill>
+              </a:ln>
+            </p:spPr>
+            <p:style>
+              <a:lnRef idx="2">
+                <a:schemeClr val="dk1"/>
+              </a:lnRef>
+              <a:fillRef idx="0">
+                <a:schemeClr val="dk1"/>
+              </a:fillRef>
+              <a:effectRef idx="1">
+                <a:schemeClr val="dk1"/>
+              </a:effectRef>
+              <a:fontRef idx="minor">
+                <a:schemeClr val="tx1"/>
+              </a:fontRef>
+            </p:style>
+          </p:cxnSp>
+          <p:sp>
+            <p:nvSpPr>
+              <p:cNvPr id="318" name="TextBox 317">
+                <a:extLst>
+                  <a:ext uri="{FF2B5EF4-FFF2-40B4-BE49-F238E27FC236}">
+                    <a16:creationId xmlns:a16="http://schemas.microsoft.com/office/drawing/2014/main" id="{5EECCEE8-0AA8-0FC0-E9C6-8A95995C8165}"/>
+                  </a:ext>
+                </a:extLst>
+              </p:cNvPr>
+              <p:cNvSpPr txBox="1"/>
+              <p:nvPr/>
+            </p:nvSpPr>
+            <p:spPr>
+              <a:xfrm>
+                <a:off x="6318121" y="1897625"/>
+                <a:ext cx="971328" cy="276999"/>
+              </a:xfrm>
+              <a:prstGeom prst="rect">
+                <a:avLst/>
+              </a:prstGeom>
+              <a:noFill/>
+            </p:spPr>
+            <p:txBody>
+              <a:bodyPr wrap="square">
+                <a:spAutoFit/>
+              </a:bodyPr>
+              <a:lstStyle/>
+              <a:p>
+                <a:pPr algn="ctr"/>
+                <a:r>
+                  <a:rPr lang="en-US" sz="1200" i="1" dirty="0">
+                    <a:solidFill>
+                      <a:schemeClr val="bg1"/>
+                    </a:solidFill>
+                    <a:latin typeface="Times New Roman" panose="02020603050405020304" pitchFamily="18" charset="0"/>
+                    <a:cs typeface="Times New Roman" panose="02020603050405020304" pitchFamily="18" charset="0"/>
+                  </a:rPr>
+                  <a:t>Policy</a:t>
+                </a:r>
+              </a:p>
+            </p:txBody>
+          </p:sp>
+          <p:sp>
+            <p:nvSpPr>
+              <p:cNvPr id="319" name="TextBox 318">
+                <a:extLst>
+                  <a:ext uri="{FF2B5EF4-FFF2-40B4-BE49-F238E27FC236}">
+                    <a16:creationId xmlns:a16="http://schemas.microsoft.com/office/drawing/2014/main" id="{351BDFD2-BC3C-44CA-ACCA-DD137E081438}"/>
+                  </a:ext>
+                </a:extLst>
+              </p:cNvPr>
+              <p:cNvSpPr txBox="1"/>
+              <p:nvPr/>
+            </p:nvSpPr>
+            <p:spPr>
+              <a:xfrm>
+                <a:off x="6407418" y="3202655"/>
+                <a:ext cx="2184599" cy="461665"/>
+              </a:xfrm>
+              <a:prstGeom prst="rect">
+                <a:avLst/>
+              </a:prstGeom>
+              <a:noFill/>
+            </p:spPr>
+            <p:txBody>
+              <a:bodyPr wrap="square">
+                <a:spAutoFit/>
+              </a:bodyPr>
+              <a:lstStyle/>
+              <a:p>
+                <a:r>
+                  <a:rPr lang="en-US" sz="1200" i="1" dirty="0">
+                    <a:solidFill>
+                      <a:schemeClr val="bg1"/>
+                    </a:solidFill>
+                    <a:latin typeface="Times New Roman" panose="02020603050405020304" pitchFamily="18" charset="0"/>
+                    <a:cs typeface="Times New Roman" panose="02020603050405020304" pitchFamily="18" charset="0"/>
+                  </a:rPr>
+                  <a:t>Key Performance Measurement</a:t>
+                </a:r>
+              </a:p>
+              <a:p>
+                <a:r>
+                  <a:rPr lang="en-US" sz="1200" i="1" dirty="0">
+                    <a:solidFill>
+                      <a:schemeClr val="bg1"/>
+                    </a:solidFill>
+                    <a:latin typeface="Times New Roman" panose="02020603050405020304" pitchFamily="18" charset="0"/>
+                    <a:cs typeface="Times New Roman" panose="02020603050405020304" pitchFamily="18" charset="0"/>
+                  </a:rPr>
+                  <a:t>RIC Control</a:t>
+                </a:r>
+              </a:p>
+            </p:txBody>
+          </p:sp>
+          <p:grpSp>
+            <p:nvGrpSpPr>
+              <p:cNvPr id="326" name="Group 325">
+                <a:extLst>
+                  <a:ext uri="{FF2B5EF4-FFF2-40B4-BE49-F238E27FC236}">
+                    <a16:creationId xmlns:a16="http://schemas.microsoft.com/office/drawing/2014/main" id="{A3453D33-2D6E-00C9-72F9-A28C5247CD8D}"/>
+                  </a:ext>
+                </a:extLst>
+              </p:cNvPr>
+              <p:cNvGrpSpPr/>
+              <p:nvPr/>
+            </p:nvGrpSpPr>
+            <p:grpSpPr>
+              <a:xfrm>
+                <a:off x="3683988" y="2374246"/>
+                <a:ext cx="1234649" cy="310703"/>
+                <a:chOff x="3642152" y="2107690"/>
+                <a:chExt cx="1143208" cy="310703"/>
+              </a:xfrm>
+            </p:grpSpPr>
+            <p:sp>
+              <p:nvSpPr>
+                <p:cNvPr id="240" name="Rectangle: Rounded Corners 239">
+                  <a:extLst>
+                    <a:ext uri="{FF2B5EF4-FFF2-40B4-BE49-F238E27FC236}">
+                      <a16:creationId xmlns:a16="http://schemas.microsoft.com/office/drawing/2014/main" id="{4A65C48E-E36E-50DA-D253-3AC63BF3C65F}"/>
+                    </a:ext>
+                  </a:extLst>
+                </p:cNvPr>
+                <p:cNvSpPr/>
+                <p:nvPr/>
+              </p:nvSpPr>
+              <p:spPr>
+                <a:xfrm>
+                  <a:off x="3642155" y="2107690"/>
+                  <a:ext cx="1143205" cy="310703"/>
+                </a:xfrm>
+                <a:prstGeom prst="roundRect">
+                  <a:avLst>
+                    <a:gd name="adj" fmla="val 12974"/>
+                  </a:avLst>
+                </a:prstGeom>
+                <a:solidFill>
+                  <a:schemeClr val="bg2">
+                    <a:lumMod val="25000"/>
+                  </a:schemeClr>
+                </a:solidFill>
+                <a:ln w="12700">
+                  <a:solidFill>
+                    <a:schemeClr val="bg2">
+                      <a:lumMod val="90000"/>
+                    </a:schemeClr>
+                  </a:solidFill>
+                </a:ln>
+              </p:spPr>
+              <p:style>
+                <a:lnRef idx="2">
+                  <a:schemeClr val="accent1">
+                    <a:shade val="15000"/>
+                  </a:schemeClr>
+                </a:lnRef>
+                <a:fillRef idx="1">
+                  <a:schemeClr val="accent1"/>
+                </a:fillRef>
+                <a:effectRef idx="0">
+                  <a:schemeClr val="accent1"/>
+                </a:effectRef>
+                <a:fontRef idx="minor">
+                  <a:schemeClr val="lt1"/>
+                </a:fontRef>
+              </p:style>
+              <p:txBody>
+                <a:bodyPr rtlCol="0" anchor="ctr"/>
+                <a:lstStyle/>
+                <a:p>
+                  <a:pPr algn="ctr"/>
+                  <a:endParaRPr lang="en-US" sz="1400" dirty="0">
+                    <a:solidFill>
+                      <a:schemeClr val="bg1"/>
+                    </a:solidFill>
+                    <a:latin typeface="Times New Roman" panose="02020603050405020304" pitchFamily="18" charset="0"/>
+                    <a:cs typeface="Times New Roman" panose="02020603050405020304" pitchFamily="18" charset="0"/>
+                  </a:endParaRPr>
+                </a:p>
+              </p:txBody>
+            </p:sp>
+            <p:sp>
+              <p:nvSpPr>
+                <p:cNvPr id="325" name="TextBox 324">
+                  <a:extLst>
+                    <a:ext uri="{FF2B5EF4-FFF2-40B4-BE49-F238E27FC236}">
+                      <a16:creationId xmlns:a16="http://schemas.microsoft.com/office/drawing/2014/main" id="{B086C52C-90A0-EFDE-550F-66D20D667835}"/>
+                    </a:ext>
+                  </a:extLst>
+                </p:cNvPr>
+                <p:cNvSpPr txBox="1"/>
+                <p:nvPr/>
+              </p:nvSpPr>
+              <p:spPr>
+                <a:xfrm>
+                  <a:off x="3642152" y="2108170"/>
+                  <a:ext cx="1143205" cy="307777"/>
+                </a:xfrm>
+                <a:prstGeom prst="rect">
+                  <a:avLst/>
+                </a:prstGeom>
+                <a:noFill/>
+              </p:spPr>
+              <p:txBody>
+                <a:bodyPr wrap="square">
+                  <a:spAutoFit/>
+                </a:bodyPr>
+                <a:lstStyle/>
+                <a:p>
+                  <a:pPr algn="ctr"/>
+                  <a:r>
+                    <a:rPr lang="en-US" sz="1400" dirty="0">
+                      <a:solidFill>
+                        <a:schemeClr val="bg1"/>
+                      </a:solidFill>
+                      <a:latin typeface="Times New Roman" panose="02020603050405020304" pitchFamily="18" charset="0"/>
+                      <a:cs typeface="Times New Roman" panose="02020603050405020304" pitchFamily="18" charset="0"/>
+                    </a:rPr>
+                    <a:t>KPM Monitor</a:t>
+                  </a:r>
+                </a:p>
+              </p:txBody>
+            </p:sp>
+          </p:grpSp>
+          <p:grpSp>
+            <p:nvGrpSpPr>
+              <p:cNvPr id="333" name="Group 332">
+                <a:extLst>
+                  <a:ext uri="{FF2B5EF4-FFF2-40B4-BE49-F238E27FC236}">
+                    <a16:creationId xmlns:a16="http://schemas.microsoft.com/office/drawing/2014/main" id="{07E36321-4845-2DC1-D2B9-9B8F056221B6}"/>
+                  </a:ext>
+                </a:extLst>
+              </p:cNvPr>
+              <p:cNvGrpSpPr/>
+              <p:nvPr/>
+            </p:nvGrpSpPr>
+            <p:grpSpPr>
+              <a:xfrm>
+                <a:off x="4916966" y="1992138"/>
+                <a:ext cx="1369001" cy="310703"/>
+                <a:chOff x="3579953" y="2107690"/>
+                <a:chExt cx="1267610" cy="310703"/>
+              </a:xfrm>
+            </p:grpSpPr>
+            <p:sp>
+              <p:nvSpPr>
+                <p:cNvPr id="334" name="Rectangle: Rounded Corners 333">
+                  <a:extLst>
+                    <a:ext uri="{FF2B5EF4-FFF2-40B4-BE49-F238E27FC236}">
+                      <a16:creationId xmlns:a16="http://schemas.microsoft.com/office/drawing/2014/main" id="{D3E13052-BC5E-8FDC-228F-391E8C378CAF}"/>
+                    </a:ext>
+                  </a:extLst>
+                </p:cNvPr>
+                <p:cNvSpPr/>
+                <p:nvPr/>
+              </p:nvSpPr>
+              <p:spPr>
+                <a:xfrm>
+                  <a:off x="3642155" y="2107690"/>
+                  <a:ext cx="1143205" cy="310703"/>
+                </a:xfrm>
+                <a:prstGeom prst="roundRect">
+                  <a:avLst>
+                    <a:gd name="adj" fmla="val 12974"/>
+                  </a:avLst>
+                </a:prstGeom>
+                <a:solidFill>
+                  <a:schemeClr val="bg2">
+                    <a:lumMod val="25000"/>
+                  </a:schemeClr>
+                </a:solidFill>
+                <a:ln w="12700">
+                  <a:solidFill>
+                    <a:schemeClr val="bg2">
+                      <a:lumMod val="90000"/>
+                    </a:schemeClr>
+                  </a:solidFill>
+                </a:ln>
+              </p:spPr>
+              <p:style>
+                <a:lnRef idx="2">
+                  <a:schemeClr val="accent1">
+                    <a:shade val="15000"/>
+                  </a:schemeClr>
+                </a:lnRef>
+                <a:fillRef idx="1">
+                  <a:schemeClr val="accent1"/>
+                </a:fillRef>
+                <a:effectRef idx="0">
+                  <a:schemeClr val="accent1"/>
+                </a:effectRef>
+                <a:fontRef idx="minor">
+                  <a:schemeClr val="lt1"/>
+                </a:fontRef>
+              </p:style>
+              <p:txBody>
+                <a:bodyPr rtlCol="0" anchor="ctr"/>
+                <a:lstStyle/>
+                <a:p>
+                  <a:pPr algn="ctr"/>
+                  <a:endParaRPr lang="en-US" sz="1400" dirty="0">
+                    <a:solidFill>
+                      <a:schemeClr val="bg1"/>
+                    </a:solidFill>
+                    <a:latin typeface="Times New Roman" panose="02020603050405020304" pitchFamily="18" charset="0"/>
+                    <a:cs typeface="Times New Roman" panose="02020603050405020304" pitchFamily="18" charset="0"/>
+                  </a:endParaRPr>
+                </a:p>
+              </p:txBody>
+            </p:sp>
+            <p:sp>
+              <p:nvSpPr>
+                <p:cNvPr id="335" name="TextBox 334">
+                  <a:extLst>
+                    <a:ext uri="{FF2B5EF4-FFF2-40B4-BE49-F238E27FC236}">
+                      <a16:creationId xmlns:a16="http://schemas.microsoft.com/office/drawing/2014/main" id="{D029EA8F-BBA0-5B94-A6E0-EF02786A1ECE}"/>
+                    </a:ext>
+                  </a:extLst>
+                </p:cNvPr>
+                <p:cNvSpPr txBox="1"/>
+                <p:nvPr/>
+              </p:nvSpPr>
+              <p:spPr>
+                <a:xfrm>
+                  <a:off x="3579953" y="2108170"/>
+                  <a:ext cx="1267610" cy="307777"/>
+                </a:xfrm>
+                <a:prstGeom prst="rect">
+                  <a:avLst/>
+                </a:prstGeom>
+                <a:noFill/>
+              </p:spPr>
+              <p:txBody>
+                <a:bodyPr wrap="square">
+                  <a:spAutoFit/>
+                </a:bodyPr>
+                <a:lstStyle/>
+                <a:p>
+                  <a:pPr algn="ctr"/>
+                  <a:r>
+                    <a:rPr lang="en-US" sz="1400" dirty="0">
+                      <a:solidFill>
+                        <a:schemeClr val="bg1"/>
+                      </a:solidFill>
+                      <a:latin typeface="Times New Roman" panose="02020603050405020304" pitchFamily="18" charset="0"/>
+                      <a:cs typeface="Times New Roman" panose="02020603050405020304" pitchFamily="18" charset="0"/>
+                    </a:rPr>
+                    <a:t>Traffic Steering</a:t>
+                  </a:r>
+                </a:p>
+              </p:txBody>
+            </p:sp>
+          </p:grpSp>
+          <p:grpSp>
+            <p:nvGrpSpPr>
+              <p:cNvPr id="336" name="Group 335">
+                <a:extLst>
+                  <a:ext uri="{FF2B5EF4-FFF2-40B4-BE49-F238E27FC236}">
+                    <a16:creationId xmlns:a16="http://schemas.microsoft.com/office/drawing/2014/main" id="{84A20A0E-78FB-9D01-1459-3C069A1299BC}"/>
+                  </a:ext>
+                </a:extLst>
+              </p:cNvPr>
+              <p:cNvGrpSpPr/>
+              <p:nvPr/>
+            </p:nvGrpSpPr>
+            <p:grpSpPr>
+              <a:xfrm>
+                <a:off x="3616810" y="1992138"/>
+                <a:ext cx="1369001" cy="310703"/>
+                <a:chOff x="3579953" y="2107690"/>
+                <a:chExt cx="1267610" cy="310703"/>
+              </a:xfrm>
+            </p:grpSpPr>
+            <p:sp>
+              <p:nvSpPr>
+                <p:cNvPr id="337" name="Rectangle: Rounded Corners 336">
+                  <a:extLst>
+                    <a:ext uri="{FF2B5EF4-FFF2-40B4-BE49-F238E27FC236}">
+                      <a16:creationId xmlns:a16="http://schemas.microsoft.com/office/drawing/2014/main" id="{E58C9A7A-9CC9-A0E6-4D96-B5CC2855D9F2}"/>
+                    </a:ext>
+                  </a:extLst>
+                </p:cNvPr>
+                <p:cNvSpPr/>
+                <p:nvPr/>
+              </p:nvSpPr>
+              <p:spPr>
+                <a:xfrm>
+                  <a:off x="3642155" y="2107690"/>
+                  <a:ext cx="1143205" cy="310703"/>
+                </a:xfrm>
+                <a:prstGeom prst="roundRect">
+                  <a:avLst>
+                    <a:gd name="adj" fmla="val 12974"/>
+                  </a:avLst>
+                </a:prstGeom>
+                <a:solidFill>
+                  <a:schemeClr val="bg2">
+                    <a:lumMod val="25000"/>
+                  </a:schemeClr>
+                </a:solidFill>
+                <a:ln w="12700">
+                  <a:solidFill>
+                    <a:schemeClr val="bg2">
+                      <a:lumMod val="90000"/>
+                    </a:schemeClr>
+                  </a:solidFill>
+                </a:ln>
+              </p:spPr>
+              <p:style>
+                <a:lnRef idx="2">
+                  <a:schemeClr val="accent1">
+                    <a:shade val="15000"/>
+                  </a:schemeClr>
+                </a:lnRef>
+                <a:fillRef idx="1">
+                  <a:schemeClr val="accent1"/>
+                </a:fillRef>
+                <a:effectRef idx="0">
+                  <a:schemeClr val="accent1"/>
+                </a:effectRef>
+                <a:fontRef idx="minor">
+                  <a:schemeClr val="lt1"/>
+                </a:fontRef>
+              </p:style>
+              <p:txBody>
+                <a:bodyPr rtlCol="0" anchor="ctr"/>
+                <a:lstStyle/>
+                <a:p>
+                  <a:pPr algn="ctr"/>
+                  <a:endParaRPr lang="en-US" sz="1400" dirty="0">
+                    <a:solidFill>
+                      <a:schemeClr val="bg1"/>
+                    </a:solidFill>
+                    <a:latin typeface="Times New Roman" panose="02020603050405020304" pitchFamily="18" charset="0"/>
+                    <a:cs typeface="Times New Roman" panose="02020603050405020304" pitchFamily="18" charset="0"/>
+                  </a:endParaRPr>
+                </a:p>
+              </p:txBody>
+            </p:sp>
+            <p:sp>
+              <p:nvSpPr>
+                <p:cNvPr id="338" name="TextBox 337">
+                  <a:extLst>
+                    <a:ext uri="{FF2B5EF4-FFF2-40B4-BE49-F238E27FC236}">
+                      <a16:creationId xmlns:a16="http://schemas.microsoft.com/office/drawing/2014/main" id="{A3485B05-CDBC-7ABB-426B-CA02365E2BAD}"/>
+                    </a:ext>
+                  </a:extLst>
+                </p:cNvPr>
+                <p:cNvSpPr txBox="1"/>
+                <p:nvPr/>
+              </p:nvSpPr>
+              <p:spPr>
+                <a:xfrm>
+                  <a:off x="3579953" y="2108170"/>
+                  <a:ext cx="1267610" cy="307777"/>
+                </a:xfrm>
+                <a:prstGeom prst="rect">
+                  <a:avLst/>
+                </a:prstGeom>
+                <a:noFill/>
+              </p:spPr>
+              <p:txBody>
+                <a:bodyPr wrap="square">
+                  <a:spAutoFit/>
+                </a:bodyPr>
+                <a:lstStyle/>
+                <a:p>
+                  <a:pPr algn="ctr"/>
+                  <a:r>
+                    <a:rPr lang="en-US" sz="1400" dirty="0" err="1">
+                      <a:solidFill>
+                        <a:schemeClr val="bg1"/>
+                      </a:solidFill>
+                      <a:latin typeface="Times New Roman" panose="02020603050405020304" pitchFamily="18" charset="0"/>
+                      <a:cs typeface="Times New Roman" panose="02020603050405020304" pitchFamily="18" charset="0"/>
+                    </a:rPr>
+                    <a:t>QoE</a:t>
+                  </a:r>
+                  <a:r>
+                    <a:rPr lang="en-US" sz="1400" dirty="0">
+                      <a:solidFill>
+                        <a:schemeClr val="bg1"/>
+                      </a:solidFill>
+                      <a:latin typeface="Times New Roman" panose="02020603050405020304" pitchFamily="18" charset="0"/>
+                      <a:cs typeface="Times New Roman" panose="02020603050405020304" pitchFamily="18" charset="0"/>
+                    </a:rPr>
+                    <a:t> Prediction</a:t>
+                  </a:r>
+                </a:p>
+              </p:txBody>
+            </p:sp>
+          </p:grpSp>
+          <p:grpSp>
+            <p:nvGrpSpPr>
+              <p:cNvPr id="339" name="Group 338">
+                <a:extLst>
+                  <a:ext uri="{FF2B5EF4-FFF2-40B4-BE49-F238E27FC236}">
+                    <a16:creationId xmlns:a16="http://schemas.microsoft.com/office/drawing/2014/main" id="{A8B71324-C15E-9BEE-9D24-A267C3F55BB8}"/>
+                  </a:ext>
+                </a:extLst>
+              </p:cNvPr>
+              <p:cNvGrpSpPr/>
+              <p:nvPr/>
+            </p:nvGrpSpPr>
+            <p:grpSpPr>
+              <a:xfrm>
+                <a:off x="4984143" y="2374246"/>
+                <a:ext cx="1234646" cy="310703"/>
+                <a:chOff x="3642154" y="2107690"/>
+                <a:chExt cx="1143206" cy="310703"/>
+              </a:xfrm>
+            </p:grpSpPr>
+            <p:sp>
+              <p:nvSpPr>
+                <p:cNvPr id="340" name="Rectangle: Rounded Corners 339">
+                  <a:extLst>
+                    <a:ext uri="{FF2B5EF4-FFF2-40B4-BE49-F238E27FC236}">
+                      <a16:creationId xmlns:a16="http://schemas.microsoft.com/office/drawing/2014/main" id="{77EA2108-4F43-856E-BF34-DC07A4CBBC2A}"/>
+                    </a:ext>
+                  </a:extLst>
+                </p:cNvPr>
+                <p:cNvSpPr/>
+                <p:nvPr/>
+              </p:nvSpPr>
+              <p:spPr>
+                <a:xfrm>
+                  <a:off x="3642155" y="2107690"/>
+                  <a:ext cx="1143205" cy="310703"/>
+                </a:xfrm>
+                <a:prstGeom prst="roundRect">
+                  <a:avLst>
+                    <a:gd name="adj" fmla="val 12974"/>
+                  </a:avLst>
+                </a:prstGeom>
+                <a:solidFill>
+                  <a:schemeClr val="bg2">
+                    <a:lumMod val="25000"/>
+                  </a:schemeClr>
+                </a:solidFill>
+                <a:ln w="12700">
+                  <a:solidFill>
+                    <a:schemeClr val="bg2">
+                      <a:lumMod val="90000"/>
+                    </a:schemeClr>
+                  </a:solidFill>
+                </a:ln>
+              </p:spPr>
+              <p:style>
+                <a:lnRef idx="2">
+                  <a:schemeClr val="accent1">
+                    <a:shade val="15000"/>
+                  </a:schemeClr>
+                </a:lnRef>
+                <a:fillRef idx="1">
+                  <a:schemeClr val="accent1"/>
+                </a:fillRef>
+                <a:effectRef idx="0">
+                  <a:schemeClr val="accent1"/>
+                </a:effectRef>
+                <a:fontRef idx="minor">
+                  <a:schemeClr val="lt1"/>
+                </a:fontRef>
+              </p:style>
+              <p:txBody>
+                <a:bodyPr rtlCol="0" anchor="ctr"/>
+                <a:lstStyle/>
+                <a:p>
+                  <a:pPr algn="ctr"/>
+                  <a:endParaRPr lang="en-US" sz="1400" dirty="0">
+                    <a:solidFill>
+                      <a:schemeClr val="bg1"/>
+                    </a:solidFill>
+                    <a:latin typeface="Times New Roman" panose="02020603050405020304" pitchFamily="18" charset="0"/>
+                    <a:cs typeface="Times New Roman" panose="02020603050405020304" pitchFamily="18" charset="0"/>
+                  </a:endParaRPr>
+                </a:p>
+              </p:txBody>
+            </p:sp>
+            <p:sp>
+              <p:nvSpPr>
+                <p:cNvPr id="341" name="TextBox 340">
+                  <a:extLst>
+                    <a:ext uri="{FF2B5EF4-FFF2-40B4-BE49-F238E27FC236}">
+                      <a16:creationId xmlns:a16="http://schemas.microsoft.com/office/drawing/2014/main" id="{DB65914A-4674-4E33-9508-79A71B1F851E}"/>
+                    </a:ext>
+                  </a:extLst>
+                </p:cNvPr>
+                <p:cNvSpPr txBox="1"/>
+                <p:nvPr/>
+              </p:nvSpPr>
+              <p:spPr>
+                <a:xfrm>
+                  <a:off x="3642154" y="2108170"/>
+                  <a:ext cx="1143205" cy="307777"/>
+                </a:xfrm>
+                <a:prstGeom prst="rect">
+                  <a:avLst/>
+                </a:prstGeom>
+                <a:noFill/>
+              </p:spPr>
+              <p:txBody>
+                <a:bodyPr wrap="square">
+                  <a:spAutoFit/>
+                </a:bodyPr>
+                <a:lstStyle/>
+                <a:p>
+                  <a:pPr algn="ctr"/>
+                  <a:r>
+                    <a:rPr lang="en-US" sz="1400" dirty="0">
+                      <a:solidFill>
+                        <a:schemeClr val="bg1"/>
+                      </a:solidFill>
+                      <a:latin typeface="Times New Roman" panose="02020603050405020304" pitchFamily="18" charset="0"/>
+                      <a:cs typeface="Times New Roman" panose="02020603050405020304" pitchFamily="18" charset="0"/>
+                    </a:rPr>
+                    <a:t>RAN Control</a:t>
+                  </a:r>
+                </a:p>
+              </p:txBody>
+            </p:sp>
+          </p:grpSp>
+          <p:grpSp>
+            <p:nvGrpSpPr>
+              <p:cNvPr id="347" name="Group 346">
+                <a:extLst>
+                  <a:ext uri="{FF2B5EF4-FFF2-40B4-BE49-F238E27FC236}">
+                    <a16:creationId xmlns:a16="http://schemas.microsoft.com/office/drawing/2014/main" id="{5B9BE978-A5DB-D685-10B4-4EA319C39598}"/>
+                  </a:ext>
+                </a:extLst>
+              </p:cNvPr>
+              <p:cNvGrpSpPr/>
+              <p:nvPr/>
+            </p:nvGrpSpPr>
+            <p:grpSpPr>
+              <a:xfrm>
+                <a:off x="9139199" y="2076271"/>
+                <a:ext cx="655258" cy="310703"/>
+                <a:chOff x="3483267" y="2107690"/>
+                <a:chExt cx="1267610" cy="310703"/>
+              </a:xfrm>
+              <a:solidFill>
+                <a:schemeClr val="bg1"/>
+              </a:solidFill>
+            </p:grpSpPr>
+            <p:sp>
+              <p:nvSpPr>
+                <p:cNvPr id="348" name="Rectangle: Rounded Corners 347">
+                  <a:extLst>
+                    <a:ext uri="{FF2B5EF4-FFF2-40B4-BE49-F238E27FC236}">
+                      <a16:creationId xmlns:a16="http://schemas.microsoft.com/office/drawing/2014/main" id="{3C9841D4-45DC-778F-BEA6-220674ADD499}"/>
+                    </a:ext>
+                  </a:extLst>
+                </p:cNvPr>
+                <p:cNvSpPr/>
+                <p:nvPr/>
+              </p:nvSpPr>
+              <p:spPr>
+                <a:xfrm>
+                  <a:off x="3545470" y="2107690"/>
+                  <a:ext cx="1143205" cy="310703"/>
+                </a:xfrm>
+                <a:prstGeom prst="roundRect">
+                  <a:avLst>
+                    <a:gd name="adj" fmla="val 12974"/>
+                  </a:avLst>
+                </a:prstGeom>
+                <a:solidFill>
+                  <a:schemeClr val="bg2">
+                    <a:lumMod val="25000"/>
+                  </a:schemeClr>
+                </a:solidFill>
+                <a:ln w="12700">
+                  <a:solidFill>
+                    <a:schemeClr val="bg2">
+                      <a:lumMod val="90000"/>
+                    </a:schemeClr>
+                  </a:solidFill>
+                </a:ln>
+              </p:spPr>
+              <p:style>
+                <a:lnRef idx="2">
+                  <a:schemeClr val="accent1">
+                    <a:shade val="15000"/>
+                  </a:schemeClr>
+                </a:lnRef>
+                <a:fillRef idx="1">
+                  <a:schemeClr val="accent1"/>
+                </a:fillRef>
+                <a:effectRef idx="0">
+                  <a:schemeClr val="accent1"/>
+                </a:effectRef>
+                <a:fontRef idx="minor">
+                  <a:schemeClr val="lt1"/>
+                </a:fontRef>
+              </p:style>
+              <p:txBody>
+                <a:bodyPr rtlCol="0" anchor="ctr"/>
+                <a:lstStyle/>
+                <a:p>
+                  <a:pPr algn="ctr"/>
+                  <a:endParaRPr lang="en-US" sz="1400" dirty="0">
+                    <a:solidFill>
+                      <a:schemeClr val="bg1"/>
+                    </a:solidFill>
+                    <a:latin typeface="Times New Roman" panose="02020603050405020304" pitchFamily="18" charset="0"/>
+                    <a:cs typeface="Times New Roman" panose="02020603050405020304" pitchFamily="18" charset="0"/>
+                  </a:endParaRPr>
+                </a:p>
+              </p:txBody>
+            </p:sp>
+            <p:sp>
+              <p:nvSpPr>
+                <p:cNvPr id="349" name="TextBox 348">
+                  <a:extLst>
+                    <a:ext uri="{FF2B5EF4-FFF2-40B4-BE49-F238E27FC236}">
+                      <a16:creationId xmlns:a16="http://schemas.microsoft.com/office/drawing/2014/main" id="{492D15C4-5FCA-05B8-E67C-219273E0EB3D}"/>
+                    </a:ext>
+                  </a:extLst>
+                </p:cNvPr>
+                <p:cNvSpPr txBox="1"/>
+                <p:nvPr/>
+              </p:nvSpPr>
+              <p:spPr>
+                <a:xfrm>
+                  <a:off x="3483267" y="2108170"/>
+                  <a:ext cx="1267610" cy="307777"/>
+                </a:xfrm>
+                <a:prstGeom prst="rect">
+                  <a:avLst/>
+                </a:prstGeom>
+                <a:noFill/>
+              </p:spPr>
+              <p:txBody>
+                <a:bodyPr wrap="square">
+                  <a:spAutoFit/>
+                </a:bodyPr>
+                <a:lstStyle/>
+                <a:p>
+                  <a:pPr algn="ctr"/>
+                  <a:r>
+                    <a:rPr lang="en-US" sz="1400" dirty="0">
+                      <a:solidFill>
+                        <a:schemeClr val="bg1"/>
+                      </a:solidFill>
+                      <a:latin typeface="Times New Roman" panose="02020603050405020304" pitchFamily="18" charset="0"/>
+                      <a:cs typeface="Times New Roman" panose="02020603050405020304" pitchFamily="18" charset="0"/>
+                    </a:rPr>
+                    <a:t>rApps</a:t>
+                  </a:r>
+                </a:p>
+              </p:txBody>
+            </p:sp>
+          </p:grpSp>
+          <p:grpSp>
+            <p:nvGrpSpPr>
+              <p:cNvPr id="351" name="Group 350">
+                <a:extLst>
+                  <a:ext uri="{FF2B5EF4-FFF2-40B4-BE49-F238E27FC236}">
+                    <a16:creationId xmlns:a16="http://schemas.microsoft.com/office/drawing/2014/main" id="{C0E76DF9-91EC-A649-B11A-91E1BE183B4C}"/>
+                  </a:ext>
+                </a:extLst>
+              </p:cNvPr>
+              <p:cNvGrpSpPr/>
+              <p:nvPr/>
+            </p:nvGrpSpPr>
+            <p:grpSpPr>
+              <a:xfrm>
+                <a:off x="7473233" y="2076384"/>
+                <a:ext cx="1712822" cy="310703"/>
+                <a:chOff x="3542966" y="2107690"/>
+                <a:chExt cx="1267610" cy="310703"/>
+              </a:xfrm>
+              <a:solidFill>
+                <a:schemeClr val="bg1"/>
+              </a:solidFill>
+            </p:grpSpPr>
+            <p:sp>
+              <p:nvSpPr>
+                <p:cNvPr id="352" name="Rectangle: Rounded Corners 351">
+                  <a:extLst>
+                    <a:ext uri="{FF2B5EF4-FFF2-40B4-BE49-F238E27FC236}">
+                      <a16:creationId xmlns:a16="http://schemas.microsoft.com/office/drawing/2014/main" id="{A35C3105-3252-BC99-072B-85E2366034C7}"/>
+                    </a:ext>
+                  </a:extLst>
+                </p:cNvPr>
+                <p:cNvSpPr/>
+                <p:nvPr/>
+              </p:nvSpPr>
+              <p:spPr>
+                <a:xfrm>
+                  <a:off x="3605168" y="2107690"/>
+                  <a:ext cx="1143205" cy="310703"/>
+                </a:xfrm>
+                <a:prstGeom prst="roundRect">
+                  <a:avLst>
+                    <a:gd name="adj" fmla="val 12974"/>
+                  </a:avLst>
+                </a:prstGeom>
+                <a:solidFill>
+                  <a:schemeClr val="bg2">
+                    <a:lumMod val="25000"/>
+                  </a:schemeClr>
+                </a:solidFill>
+                <a:ln w="12700">
+                  <a:solidFill>
+                    <a:schemeClr val="bg2">
+                      <a:lumMod val="90000"/>
+                    </a:schemeClr>
+                  </a:solidFill>
+                </a:ln>
+              </p:spPr>
+              <p:style>
+                <a:lnRef idx="2">
+                  <a:schemeClr val="accent1">
+                    <a:shade val="15000"/>
+                  </a:schemeClr>
+                </a:lnRef>
+                <a:fillRef idx="1">
+                  <a:schemeClr val="accent1"/>
+                </a:fillRef>
+                <a:effectRef idx="0">
+                  <a:schemeClr val="accent1"/>
+                </a:effectRef>
+                <a:fontRef idx="minor">
+                  <a:schemeClr val="lt1"/>
+                </a:fontRef>
+              </p:style>
+              <p:txBody>
+                <a:bodyPr rtlCol="0" anchor="ctr"/>
+                <a:lstStyle/>
+                <a:p>
+                  <a:pPr algn="ctr"/>
+                  <a:endParaRPr lang="en-US" sz="1400" dirty="0">
+                    <a:solidFill>
+                      <a:schemeClr val="bg1"/>
+                    </a:solidFill>
+                    <a:latin typeface="Times New Roman" panose="02020603050405020304" pitchFamily="18" charset="0"/>
+                    <a:cs typeface="Times New Roman" panose="02020603050405020304" pitchFamily="18" charset="0"/>
+                  </a:endParaRPr>
+                </a:p>
+              </p:txBody>
+            </p:sp>
+            <p:sp>
+              <p:nvSpPr>
+                <p:cNvPr id="353" name="TextBox 352">
+                  <a:extLst>
+                    <a:ext uri="{FF2B5EF4-FFF2-40B4-BE49-F238E27FC236}">
+                      <a16:creationId xmlns:a16="http://schemas.microsoft.com/office/drawing/2014/main" id="{EC5E2325-62FF-4D4A-BD7C-D53E117B8772}"/>
+                    </a:ext>
+                  </a:extLst>
+                </p:cNvPr>
+                <p:cNvSpPr txBox="1"/>
+                <p:nvPr/>
+              </p:nvSpPr>
+              <p:spPr>
+                <a:xfrm>
+                  <a:off x="3542966" y="2108170"/>
+                  <a:ext cx="1267610" cy="307777"/>
+                </a:xfrm>
+                <a:prstGeom prst="rect">
+                  <a:avLst/>
+                </a:prstGeom>
+                <a:noFill/>
+              </p:spPr>
+              <p:txBody>
+                <a:bodyPr wrap="square">
+                  <a:spAutoFit/>
+                </a:bodyPr>
+                <a:lstStyle/>
+                <a:p>
+                  <a:pPr algn="ctr"/>
+                  <a:r>
+                    <a:rPr lang="en-US" sz="1400" dirty="0">
+                      <a:solidFill>
+                        <a:schemeClr val="bg1"/>
+                      </a:solidFill>
+                      <a:latin typeface="Times New Roman" panose="02020603050405020304" pitchFamily="18" charset="0"/>
+                      <a:cs typeface="Times New Roman" panose="02020603050405020304" pitchFamily="18" charset="0"/>
+                    </a:rPr>
+                    <a:t>Policy Management</a:t>
+                  </a:r>
+                </a:p>
+              </p:txBody>
+            </p:sp>
+          </p:grpSp>
+          <p:sp>
+            <p:nvSpPr>
+              <p:cNvPr id="104" name="TextBox 103">
+                <a:extLst>
+                  <a:ext uri="{FF2B5EF4-FFF2-40B4-BE49-F238E27FC236}">
+                    <a16:creationId xmlns:a16="http://schemas.microsoft.com/office/drawing/2014/main" id="{3342515B-D298-43A1-9E16-E6FD971A6A41}"/>
+                  </a:ext>
+                </a:extLst>
+              </p:cNvPr>
+              <p:cNvSpPr txBox="1"/>
+              <p:nvPr/>
+            </p:nvSpPr>
+            <p:spPr>
+              <a:xfrm>
+                <a:off x="2788486" y="1916665"/>
+                <a:ext cx="742626" cy="307777"/>
+              </a:xfrm>
+              <a:prstGeom prst="rect">
+                <a:avLst/>
+              </a:prstGeom>
+              <a:noFill/>
+            </p:spPr>
+            <p:txBody>
+              <a:bodyPr wrap="square">
+                <a:spAutoFit/>
+              </a:bodyPr>
+              <a:lstStyle/>
+              <a:p>
+                <a:pPr algn="ctr"/>
+                <a:r>
+                  <a:rPr lang="en-US" sz="1400" dirty="0" err="1">
+                    <a:solidFill>
+                      <a:schemeClr val="bg1"/>
+                    </a:solidFill>
+                    <a:latin typeface="Times New Roman" panose="02020603050405020304" pitchFamily="18" charset="0"/>
+                    <a:cs typeface="Times New Roman" panose="02020603050405020304" pitchFamily="18" charset="0"/>
+                  </a:rPr>
+                  <a:t>xApps</a:t>
+                </a:r>
+                <a:endParaRPr lang="en-US" sz="1400" dirty="0">
+                  <a:solidFill>
+                    <a:schemeClr val="bg1"/>
+                  </a:solidFill>
+                  <a:latin typeface="Times New Roman" panose="02020603050405020304" pitchFamily="18" charset="0"/>
+                  <a:cs typeface="Times New Roman" panose="02020603050405020304" pitchFamily="18" charset="0"/>
+                </a:endParaRPr>
+              </a:p>
+            </p:txBody>
+          </p:sp>
+          <p:cxnSp>
+            <p:nvCxnSpPr>
+              <p:cNvPr id="111" name="Connector: Elbow 110">
+                <a:extLst>
+                  <a:ext uri="{FF2B5EF4-FFF2-40B4-BE49-F238E27FC236}">
+                    <a16:creationId xmlns:a16="http://schemas.microsoft.com/office/drawing/2014/main" id="{C9D83F41-4194-4299-A450-5523E16454AB}"/>
+                  </a:ext>
+                </a:extLst>
+              </p:cNvPr>
+              <p:cNvCxnSpPr>
+                <a:cxnSpLocks/>
+              </p:cNvCxnSpPr>
+              <p:nvPr/>
+            </p:nvCxnSpPr>
+            <p:spPr>
+              <a:xfrm flipV="1">
+                <a:off x="7561111" y="3806190"/>
+                <a:ext cx="808123" cy="148007"/>
+              </a:xfrm>
+              <a:prstGeom prst="bentConnector3">
+                <a:avLst>
+                  <a:gd name="adj1" fmla="val 50000"/>
+                </a:avLst>
+              </a:prstGeom>
+              <a:ln w="12700">
+                <a:solidFill>
+                  <a:schemeClr val="bg1"/>
+                </a:solidFill>
+                <a:round/>
+              </a:ln>
+            </p:spPr>
+            <p:style>
+              <a:lnRef idx="2">
+                <a:schemeClr val="accent1"/>
+              </a:lnRef>
+              <a:fillRef idx="0">
+                <a:schemeClr val="accent1"/>
+              </a:fillRef>
+              <a:effectRef idx="1">
+                <a:schemeClr val="accent1"/>
+              </a:effectRef>
+              <a:fontRef idx="minor">
+                <a:schemeClr val="tx1"/>
+              </a:fontRef>
+            </p:style>
+          </p:cxnSp>
+          <p:grpSp>
+            <p:nvGrpSpPr>
+              <p:cNvPr id="8" name="Group 7">
+                <a:extLst>
+                  <a:ext uri="{FF2B5EF4-FFF2-40B4-BE49-F238E27FC236}">
+                    <a16:creationId xmlns:a16="http://schemas.microsoft.com/office/drawing/2014/main" id="{404898D3-6C70-464B-8171-22EBA9BA462E}"/>
+                  </a:ext>
+                </a:extLst>
+              </p:cNvPr>
+              <p:cNvGrpSpPr/>
+              <p:nvPr/>
+            </p:nvGrpSpPr>
+            <p:grpSpPr>
+              <a:xfrm>
+                <a:off x="9777994" y="3941543"/>
+                <a:ext cx="97262" cy="20476"/>
+                <a:chOff x="10423398" y="4210335"/>
+                <a:chExt cx="97262" cy="20476"/>
+              </a:xfrm>
+            </p:grpSpPr>
+            <p:sp>
+              <p:nvSpPr>
+                <p:cNvPr id="115" name="Oval 114">
+                  <a:extLst>
+                    <a:ext uri="{FF2B5EF4-FFF2-40B4-BE49-F238E27FC236}">
+                      <a16:creationId xmlns:a16="http://schemas.microsoft.com/office/drawing/2014/main" id="{A4F59B52-4707-44C3-A7FB-893C92767A45}"/>
+                    </a:ext>
+                  </a:extLst>
+                </p:cNvPr>
+                <p:cNvSpPr/>
+                <p:nvPr/>
+              </p:nvSpPr>
+              <p:spPr>
+                <a:xfrm flipV="1">
+                  <a:off x="10423398" y="4210335"/>
+                  <a:ext cx="20476" cy="20476"/>
+                </a:xfrm>
+                <a:prstGeom prst="ellipse">
+                  <a:avLst/>
+                </a:prstGeom>
+                <a:solidFill>
+                  <a:schemeClr val="bg1"/>
+                </a:solidFill>
+                <a:ln>
+                  <a:noFill/>
+                </a:ln>
+              </p:spPr>
+              <p:style>
+                <a:lnRef idx="2">
+                  <a:schemeClr val="accent1">
+                    <a:shade val="15000"/>
+                  </a:schemeClr>
+                </a:lnRef>
+                <a:fillRef idx="1">
+                  <a:schemeClr val="accent1"/>
+                </a:fillRef>
+                <a:effectRef idx="0">
+                  <a:schemeClr val="accent1"/>
+                </a:effectRef>
+                <a:fontRef idx="minor">
+                  <a:schemeClr val="lt1"/>
+                </a:fontRef>
+              </p:style>
+              <p:txBody>
+                <a:bodyPr rtlCol="0" anchor="ctr"/>
+                <a:lstStyle/>
+                <a:p>
+                  <a:pPr algn="ctr"/>
+                  <a:endParaRPr lang="en-US">
+                    <a:solidFill>
+                      <a:schemeClr val="bg1"/>
+                    </a:solidFill>
+                  </a:endParaRPr>
+                </a:p>
+              </p:txBody>
+            </p:sp>
+            <p:sp>
+              <p:nvSpPr>
+                <p:cNvPr id="117" name="Oval 116">
+                  <a:extLst>
+                    <a:ext uri="{FF2B5EF4-FFF2-40B4-BE49-F238E27FC236}">
+                      <a16:creationId xmlns:a16="http://schemas.microsoft.com/office/drawing/2014/main" id="{6AE6F000-4645-4D6E-B014-5F446A29015B}"/>
+                    </a:ext>
+                  </a:extLst>
+                </p:cNvPr>
+                <p:cNvSpPr/>
+                <p:nvPr/>
+              </p:nvSpPr>
+              <p:spPr>
+                <a:xfrm flipV="1">
+                  <a:off x="10461791" y="4210335"/>
+                  <a:ext cx="20476" cy="20476"/>
+                </a:xfrm>
+                <a:prstGeom prst="ellipse">
+                  <a:avLst/>
+                </a:prstGeom>
+                <a:solidFill>
+                  <a:schemeClr val="bg1"/>
+                </a:solidFill>
+                <a:ln>
+                  <a:noFill/>
+                </a:ln>
+              </p:spPr>
+              <p:style>
+                <a:lnRef idx="2">
+                  <a:schemeClr val="accent1">
+                    <a:shade val="15000"/>
+                  </a:schemeClr>
+                </a:lnRef>
+                <a:fillRef idx="1">
+                  <a:schemeClr val="accent1"/>
+                </a:fillRef>
+                <a:effectRef idx="0">
+                  <a:schemeClr val="accent1"/>
+                </a:effectRef>
+                <a:fontRef idx="minor">
+                  <a:schemeClr val="lt1"/>
+                </a:fontRef>
+              </p:style>
+              <p:txBody>
+                <a:bodyPr rtlCol="0" anchor="ctr"/>
+                <a:lstStyle/>
+                <a:p>
+                  <a:pPr algn="ctr"/>
+                  <a:endParaRPr lang="en-US">
+                    <a:solidFill>
+                      <a:schemeClr val="bg1"/>
+                    </a:solidFill>
+                  </a:endParaRPr>
+                </a:p>
+              </p:txBody>
+            </p:sp>
+            <p:sp>
+              <p:nvSpPr>
+                <p:cNvPr id="119" name="Oval 118">
+                  <a:extLst>
+                    <a:ext uri="{FF2B5EF4-FFF2-40B4-BE49-F238E27FC236}">
+                      <a16:creationId xmlns:a16="http://schemas.microsoft.com/office/drawing/2014/main" id="{D5F18A58-7DC6-478B-AD16-813A33502DD2}"/>
+                    </a:ext>
+                  </a:extLst>
+                </p:cNvPr>
+                <p:cNvSpPr/>
+                <p:nvPr/>
+              </p:nvSpPr>
+              <p:spPr>
+                <a:xfrm flipV="1">
+                  <a:off x="10500184" y="4210335"/>
+                  <a:ext cx="20476" cy="20476"/>
+                </a:xfrm>
+                <a:prstGeom prst="ellipse">
+                  <a:avLst/>
+                </a:prstGeom>
+                <a:solidFill>
+                  <a:schemeClr val="bg1"/>
+                </a:solidFill>
+                <a:ln>
+                  <a:noFill/>
+                </a:ln>
+              </p:spPr>
+              <p:style>
+                <a:lnRef idx="2">
+                  <a:schemeClr val="accent1">
+                    <a:shade val="15000"/>
+                  </a:schemeClr>
+                </a:lnRef>
+                <a:fillRef idx="1">
+                  <a:schemeClr val="accent1"/>
+                </a:fillRef>
+                <a:effectRef idx="0">
+                  <a:schemeClr val="accent1"/>
+                </a:effectRef>
+                <a:fontRef idx="minor">
+                  <a:schemeClr val="lt1"/>
+                </a:fontRef>
+              </p:style>
+              <p:txBody>
+                <a:bodyPr rtlCol="0" anchor="ctr"/>
+                <a:lstStyle/>
+                <a:p>
+                  <a:pPr algn="ctr"/>
+                  <a:endParaRPr lang="en-US">
+                    <a:solidFill>
+                      <a:schemeClr val="bg1"/>
+                    </a:solidFill>
+                  </a:endParaRPr>
+                </a:p>
+              </p:txBody>
+            </p:sp>
+          </p:grpSp>
+          <p:grpSp>
+            <p:nvGrpSpPr>
+              <p:cNvPr id="123" name="Group 122">
+                <a:extLst>
+                  <a:ext uri="{FF2B5EF4-FFF2-40B4-BE49-F238E27FC236}">
+                    <a16:creationId xmlns:a16="http://schemas.microsoft.com/office/drawing/2014/main" id="{57872673-AAAD-4628-B781-C1A7A5F491EC}"/>
+                  </a:ext>
+                </a:extLst>
+              </p:cNvPr>
+              <p:cNvGrpSpPr/>
+              <p:nvPr/>
+            </p:nvGrpSpPr>
+            <p:grpSpPr>
+              <a:xfrm>
+                <a:off x="9670874" y="2637902"/>
+                <a:ext cx="97262" cy="20476"/>
+                <a:chOff x="10392777" y="4210335"/>
+                <a:chExt cx="97262" cy="20476"/>
+              </a:xfrm>
+            </p:grpSpPr>
+            <p:sp>
+              <p:nvSpPr>
+                <p:cNvPr id="124" name="Oval 123">
+                  <a:extLst>
+                    <a:ext uri="{FF2B5EF4-FFF2-40B4-BE49-F238E27FC236}">
+                      <a16:creationId xmlns:a16="http://schemas.microsoft.com/office/drawing/2014/main" id="{24631A37-9689-4B10-8ADB-0416A5B0735E}"/>
+                    </a:ext>
+                  </a:extLst>
+                </p:cNvPr>
+                <p:cNvSpPr/>
+                <p:nvPr/>
+              </p:nvSpPr>
+              <p:spPr>
+                <a:xfrm flipV="1">
+                  <a:off x="10392777" y="4210335"/>
+                  <a:ext cx="20476" cy="20476"/>
+                </a:xfrm>
+                <a:prstGeom prst="ellipse">
+                  <a:avLst/>
+                </a:prstGeom>
+                <a:solidFill>
+                  <a:schemeClr val="bg1"/>
+                </a:solidFill>
+                <a:ln>
+                  <a:noFill/>
+                </a:ln>
+              </p:spPr>
+              <p:style>
+                <a:lnRef idx="2">
+                  <a:schemeClr val="accent1">
+                    <a:shade val="15000"/>
+                  </a:schemeClr>
+                </a:lnRef>
+                <a:fillRef idx="1">
+                  <a:schemeClr val="accent1"/>
+                </a:fillRef>
+                <a:effectRef idx="0">
+                  <a:schemeClr val="accent1"/>
+                </a:effectRef>
+                <a:fontRef idx="minor">
+                  <a:schemeClr val="lt1"/>
+                </a:fontRef>
+              </p:style>
+              <p:txBody>
+                <a:bodyPr rtlCol="0" anchor="ctr"/>
+                <a:lstStyle/>
+                <a:p>
+                  <a:pPr algn="ctr"/>
+                  <a:endParaRPr lang="en-US">
+                    <a:solidFill>
+                      <a:schemeClr val="bg1"/>
+                    </a:solidFill>
+                  </a:endParaRPr>
+                </a:p>
+              </p:txBody>
+            </p:sp>
+            <p:sp>
+              <p:nvSpPr>
+                <p:cNvPr id="125" name="Oval 124">
+                  <a:extLst>
+                    <a:ext uri="{FF2B5EF4-FFF2-40B4-BE49-F238E27FC236}">
+                      <a16:creationId xmlns:a16="http://schemas.microsoft.com/office/drawing/2014/main" id="{0A1B9C14-F6A3-4685-834A-A8A1851159D4}"/>
+                    </a:ext>
+                  </a:extLst>
+                </p:cNvPr>
+                <p:cNvSpPr/>
+                <p:nvPr/>
+              </p:nvSpPr>
+              <p:spPr>
+                <a:xfrm flipV="1">
+                  <a:off x="10431170" y="4210335"/>
+                  <a:ext cx="20476" cy="20476"/>
+                </a:xfrm>
+                <a:prstGeom prst="ellipse">
+                  <a:avLst/>
+                </a:prstGeom>
+                <a:solidFill>
+                  <a:schemeClr val="bg1"/>
+                </a:solidFill>
+                <a:ln>
+                  <a:noFill/>
+                </a:ln>
+              </p:spPr>
+              <p:style>
+                <a:lnRef idx="2">
+                  <a:schemeClr val="accent1">
+                    <a:shade val="15000"/>
+                  </a:schemeClr>
+                </a:lnRef>
+                <a:fillRef idx="1">
+                  <a:schemeClr val="accent1"/>
+                </a:fillRef>
+                <a:effectRef idx="0">
+                  <a:schemeClr val="accent1"/>
+                </a:effectRef>
+                <a:fontRef idx="minor">
+                  <a:schemeClr val="lt1"/>
+                </a:fontRef>
+              </p:style>
+              <p:txBody>
+                <a:bodyPr rtlCol="0" anchor="ctr"/>
+                <a:lstStyle/>
+                <a:p>
+                  <a:pPr algn="ctr"/>
+                  <a:endParaRPr lang="en-US">
+                    <a:solidFill>
+                      <a:schemeClr val="bg1"/>
+                    </a:solidFill>
+                  </a:endParaRPr>
+                </a:p>
+              </p:txBody>
+            </p:sp>
+            <p:sp>
+              <p:nvSpPr>
+                <p:cNvPr id="126" name="Oval 125">
+                  <a:extLst>
+                    <a:ext uri="{FF2B5EF4-FFF2-40B4-BE49-F238E27FC236}">
+                      <a16:creationId xmlns:a16="http://schemas.microsoft.com/office/drawing/2014/main" id="{B25E1B82-A1FA-4694-AA25-FAEC6C0B5254}"/>
+                    </a:ext>
+                  </a:extLst>
+                </p:cNvPr>
+                <p:cNvSpPr/>
+                <p:nvPr/>
+              </p:nvSpPr>
+              <p:spPr>
+                <a:xfrm flipV="1">
+                  <a:off x="10469563" y="4210335"/>
+                  <a:ext cx="20476" cy="20476"/>
+                </a:xfrm>
+                <a:prstGeom prst="ellipse">
+                  <a:avLst/>
+                </a:prstGeom>
+                <a:solidFill>
+                  <a:schemeClr val="bg1"/>
+                </a:solidFill>
+                <a:ln>
+                  <a:noFill/>
+                </a:ln>
+              </p:spPr>
+              <p:style>
+                <a:lnRef idx="2">
+                  <a:schemeClr val="accent1">
+                    <a:shade val="15000"/>
+                  </a:schemeClr>
+                </a:lnRef>
+                <a:fillRef idx="1">
+                  <a:schemeClr val="accent1"/>
+                </a:fillRef>
+                <a:effectRef idx="0">
+                  <a:schemeClr val="accent1"/>
+                </a:effectRef>
+                <a:fontRef idx="minor">
+                  <a:schemeClr val="lt1"/>
+                </a:fontRef>
+              </p:style>
+              <p:txBody>
+                <a:bodyPr rtlCol="0" anchor="ctr"/>
+                <a:lstStyle/>
+                <a:p>
+                  <a:pPr algn="ctr"/>
+                  <a:endParaRPr lang="en-US">
+                    <a:solidFill>
+                      <a:schemeClr val="bg1"/>
+                    </a:solidFill>
+                  </a:endParaRPr>
+                </a:p>
+              </p:txBody>
+            </p:sp>
+          </p:grpSp>
+          <p:grpSp>
+            <p:nvGrpSpPr>
+              <p:cNvPr id="127" name="Group 126">
+                <a:extLst>
+                  <a:ext uri="{FF2B5EF4-FFF2-40B4-BE49-F238E27FC236}">
+                    <a16:creationId xmlns:a16="http://schemas.microsoft.com/office/drawing/2014/main" id="{26AD37C1-FC4C-445B-A475-2C31F113B111}"/>
+                  </a:ext>
+                </a:extLst>
+              </p:cNvPr>
+              <p:cNvGrpSpPr/>
+              <p:nvPr/>
+            </p:nvGrpSpPr>
+            <p:grpSpPr>
+              <a:xfrm>
+                <a:off x="2976217" y="2643212"/>
+                <a:ext cx="97262" cy="20476"/>
+                <a:chOff x="10366573" y="4210335"/>
+                <a:chExt cx="97262" cy="20476"/>
+              </a:xfrm>
+            </p:grpSpPr>
+            <p:sp>
+              <p:nvSpPr>
+                <p:cNvPr id="128" name="Oval 127">
+                  <a:extLst>
+                    <a:ext uri="{FF2B5EF4-FFF2-40B4-BE49-F238E27FC236}">
+                      <a16:creationId xmlns:a16="http://schemas.microsoft.com/office/drawing/2014/main" id="{BE600BD0-3962-416A-B573-62FC9571329A}"/>
+                    </a:ext>
+                  </a:extLst>
+                </p:cNvPr>
+                <p:cNvSpPr/>
+                <p:nvPr/>
+              </p:nvSpPr>
+              <p:spPr>
+                <a:xfrm flipV="1">
+                  <a:off x="10366573" y="4210335"/>
+                  <a:ext cx="20476" cy="20476"/>
+                </a:xfrm>
+                <a:prstGeom prst="ellipse">
+                  <a:avLst/>
+                </a:prstGeom>
+                <a:solidFill>
+                  <a:schemeClr val="bg1"/>
+                </a:solidFill>
+                <a:ln>
+                  <a:noFill/>
+                </a:ln>
+              </p:spPr>
+              <p:style>
+                <a:lnRef idx="2">
+                  <a:schemeClr val="accent1">
+                    <a:shade val="15000"/>
+                  </a:schemeClr>
+                </a:lnRef>
+                <a:fillRef idx="1">
+                  <a:schemeClr val="accent1"/>
+                </a:fillRef>
+                <a:effectRef idx="0">
+                  <a:schemeClr val="accent1"/>
+                </a:effectRef>
+                <a:fontRef idx="minor">
+                  <a:schemeClr val="lt1"/>
+                </a:fontRef>
+              </p:style>
+              <p:txBody>
+                <a:bodyPr rtlCol="0" anchor="ctr"/>
+                <a:lstStyle/>
+                <a:p>
+                  <a:pPr algn="ctr"/>
+                  <a:endParaRPr lang="en-US">
+                    <a:solidFill>
+                      <a:schemeClr val="bg1"/>
+                    </a:solidFill>
+                  </a:endParaRPr>
+                </a:p>
+              </p:txBody>
+            </p:sp>
+            <p:sp>
+              <p:nvSpPr>
+                <p:cNvPr id="129" name="Oval 128">
+                  <a:extLst>
+                    <a:ext uri="{FF2B5EF4-FFF2-40B4-BE49-F238E27FC236}">
+                      <a16:creationId xmlns:a16="http://schemas.microsoft.com/office/drawing/2014/main" id="{A8E8DF44-D72F-48F7-BC48-12898EF88200}"/>
+                    </a:ext>
+                  </a:extLst>
+                </p:cNvPr>
+                <p:cNvSpPr/>
+                <p:nvPr/>
+              </p:nvSpPr>
+              <p:spPr>
+                <a:xfrm flipV="1">
+                  <a:off x="10404966" y="4210335"/>
+                  <a:ext cx="20476" cy="20476"/>
+                </a:xfrm>
+                <a:prstGeom prst="ellipse">
+                  <a:avLst/>
+                </a:prstGeom>
+                <a:solidFill>
+                  <a:schemeClr val="bg1"/>
+                </a:solidFill>
+                <a:ln>
+                  <a:noFill/>
+                </a:ln>
+              </p:spPr>
+              <p:style>
+                <a:lnRef idx="2">
+                  <a:schemeClr val="accent1">
+                    <a:shade val="15000"/>
+                  </a:schemeClr>
+                </a:lnRef>
+                <a:fillRef idx="1">
+                  <a:schemeClr val="accent1"/>
+                </a:fillRef>
+                <a:effectRef idx="0">
+                  <a:schemeClr val="accent1"/>
+                </a:effectRef>
+                <a:fontRef idx="minor">
+                  <a:schemeClr val="lt1"/>
+                </a:fontRef>
+              </p:style>
+              <p:txBody>
+                <a:bodyPr rtlCol="0" anchor="ctr"/>
+                <a:lstStyle/>
+                <a:p>
+                  <a:pPr algn="ctr"/>
+                  <a:endParaRPr lang="en-US">
+                    <a:solidFill>
+                      <a:schemeClr val="bg1"/>
+                    </a:solidFill>
+                  </a:endParaRPr>
+                </a:p>
+              </p:txBody>
+            </p:sp>
+            <p:sp>
+              <p:nvSpPr>
+                <p:cNvPr id="130" name="Oval 129">
+                  <a:extLst>
+                    <a:ext uri="{FF2B5EF4-FFF2-40B4-BE49-F238E27FC236}">
+                      <a16:creationId xmlns:a16="http://schemas.microsoft.com/office/drawing/2014/main" id="{0E65D4E3-D00A-48E5-99ED-8AC57DBB500A}"/>
+                    </a:ext>
+                  </a:extLst>
+                </p:cNvPr>
+                <p:cNvSpPr/>
+                <p:nvPr/>
+              </p:nvSpPr>
+              <p:spPr>
+                <a:xfrm flipV="1">
+                  <a:off x="10443359" y="4210335"/>
+                  <a:ext cx="20476" cy="20476"/>
+                </a:xfrm>
+                <a:prstGeom prst="ellipse">
+                  <a:avLst/>
+                </a:prstGeom>
+                <a:solidFill>
+                  <a:schemeClr val="bg1"/>
+                </a:solidFill>
+                <a:ln>
+                  <a:noFill/>
+                </a:ln>
+              </p:spPr>
+              <p:style>
+                <a:lnRef idx="2">
+                  <a:schemeClr val="accent1">
+                    <a:shade val="15000"/>
+                  </a:schemeClr>
+                </a:lnRef>
+                <a:fillRef idx="1">
+                  <a:schemeClr val="accent1"/>
+                </a:fillRef>
+                <a:effectRef idx="0">
+                  <a:schemeClr val="accent1"/>
+                </a:effectRef>
+                <a:fontRef idx="minor">
+                  <a:schemeClr val="lt1"/>
+                </a:fontRef>
+              </p:style>
+              <p:txBody>
+                <a:bodyPr rtlCol="0" anchor="ctr"/>
+                <a:lstStyle/>
+                <a:p>
+                  <a:pPr algn="ctr"/>
+                  <a:endParaRPr lang="en-US">
+                    <a:solidFill>
+                      <a:schemeClr val="bg1"/>
+                    </a:solidFill>
+                  </a:endParaRPr>
+                </a:p>
+              </p:txBody>
+            </p:sp>
+          </p:grpSp>
+        </p:grpSp>
+        <p:sp>
+          <p:nvSpPr>
+            <p:cNvPr id="106" name="TextBox 105">
+              <a:extLst>
+                <a:ext uri="{FF2B5EF4-FFF2-40B4-BE49-F238E27FC236}">
+                  <a16:creationId xmlns:a16="http://schemas.microsoft.com/office/drawing/2014/main" id="{8AE9E19A-B742-44B1-ABAF-2240637F635F}"/>
+                </a:ext>
+              </a:extLst>
+            </p:cNvPr>
+            <p:cNvSpPr txBox="1"/>
+            <p:nvPr/>
+          </p:nvSpPr>
+          <p:spPr>
+            <a:xfrm>
+              <a:off x="7445360" y="3780699"/>
+              <a:ext cx="946329" cy="646331"/>
+            </a:xfrm>
+            <a:prstGeom prst="rect">
+              <a:avLst/>
+            </a:prstGeom>
+            <a:noFill/>
+          </p:spPr>
+          <p:txBody>
+            <a:bodyPr wrap="square">
+              <a:spAutoFit/>
+            </a:bodyPr>
+            <a:lstStyle/>
+            <a:p>
+              <a:r>
+                <a:rPr lang="en-US" sz="1200" i="1" dirty="0">
+                  <a:solidFill>
+                    <a:schemeClr val="bg1"/>
+                  </a:solidFill>
+                  <a:latin typeface="Times New Roman" panose="02020603050405020304" pitchFamily="18" charset="0"/>
+                  <a:cs typeface="Times New Roman" panose="02020603050405020304" pitchFamily="18" charset="0"/>
+                </a:rPr>
+                <a:t>Tunnel from UPF to UE</a:t>
+              </a:r>
+              <a:br>
+                <a:rPr lang="en-US" sz="1200" i="1" dirty="0">
+                  <a:solidFill>
+                    <a:schemeClr val="bg1"/>
+                  </a:solidFill>
+                  <a:latin typeface="Times New Roman" panose="02020603050405020304" pitchFamily="18" charset="0"/>
+                  <a:cs typeface="Times New Roman" panose="02020603050405020304" pitchFamily="18" charset="0"/>
+                </a:rPr>
+              </a:br>
+              <a:r>
+                <a:rPr lang="en-US" sz="1200" i="1" dirty="0">
+                  <a:solidFill>
+                    <a:schemeClr val="bg1"/>
+                  </a:solidFill>
+                  <a:latin typeface="Times New Roman" panose="02020603050405020304" pitchFamily="18" charset="0"/>
+                  <a:cs typeface="Times New Roman" panose="02020603050405020304" pitchFamily="18" charset="0"/>
+                </a:rPr>
+                <a:t>for internet</a:t>
+              </a:r>
+            </a:p>
+          </p:txBody>
+        </p:sp>
+      </p:grpSp>
+    </p:spTree>
+    <p:extLst>
+      <p:ext uri="{BB962C8B-B14F-4D97-AF65-F5344CB8AC3E}">
+        <p14:creationId xmlns:p14="http://schemas.microsoft.com/office/powerpoint/2010/main" val="3945928522"/>
+      </p:ext>
+    </p:extLst>
+  </p:cSld>
+  <p:clrMapOvr>
+    <a:masterClrMapping/>
+  </p:clrMapOvr>
+</p:sld>
+</file>
+
+<file path=ppt/slides/slide7.xml><?xml version="1.0" encoding="utf-8"?>
+<p:sld xmlns:a="http://schemas.openxmlformats.org/drawingml/2006/main" xmlns:r="http://schemas.openxmlformats.org/officeDocument/2006/relationships" xmlns:p="http://schemas.openxmlformats.org/presentationml/2006/main" show="0">
+  <p:cSld>
+    <p:spTree>
+      <p:nvGrpSpPr>
+        <p:cNvPr id="1" name=""/>
+        <p:cNvGrpSpPr/>
+        <p:nvPr/>
+      </p:nvGrpSpPr>
+      <p:grpSpPr>
+        <a:xfrm>
+          <a:off x="0" y="0"/>
+          <a:ext cx="0" cy="0"/>
+          <a:chOff x="0" y="0"/>
+          <a:chExt cx="0" cy="0"/>
+        </a:xfrm>
+      </p:grpSpPr>
+      <p:grpSp>
+        <p:nvGrpSpPr>
           <p:cNvPr id="268" name="Group 267">
             <a:extLst>
               <a:ext uri="{FF2B5EF4-FFF2-40B4-BE49-F238E27FC236}">
@@ -19264,7 +27764,7 @@
         </p:nvGrpSpPr>
         <p:grpSpPr>
           <a:xfrm>
-            <a:off x="575839" y="2069432"/>
+            <a:off x="496467" y="2455375"/>
             <a:ext cx="11199066" cy="1947249"/>
             <a:chOff x="575839" y="2069432"/>
             <a:chExt cx="11199066" cy="1947249"/>
@@ -19354,7 +27854,7 @@
             </a:prstGeom>
             <a:ln w="12700">
               <a:solidFill>
-                <a:srgbClr val="C40E00"/>
+                <a:schemeClr val="tx1"/>
               </a:solidFill>
               <a:prstDash val="sysDot"/>
             </a:ln>
@@ -21535,9 +30035,9 @@
           <p:grpSpPr>
             <a:xfrm>
               <a:off x="8873989" y="2167447"/>
-              <a:ext cx="2860204" cy="738664"/>
+              <a:ext cx="2860204" cy="523220"/>
               <a:chOff x="8873989" y="2167447"/>
-              <a:chExt cx="2860204" cy="738664"/>
+              <a:chExt cx="2860204" cy="523220"/>
             </a:xfrm>
           </p:grpSpPr>
           <p:sp>
@@ -21554,8 +30054,8 @@
             </p:nvSpPr>
             <p:spPr>
               <a:xfrm>
-                <a:off x="8873989" y="2187920"/>
-                <a:ext cx="2787151" cy="705139"/>
+                <a:off x="8873989" y="2187921"/>
+                <a:ext cx="2787151" cy="502746"/>
               </a:xfrm>
               <a:prstGeom prst="rect">
                 <a:avLst/>
@@ -21652,7 +30152,7 @@
             <p:spPr>
               <a:xfrm>
                 <a:off x="9147085" y="2167447"/>
-                <a:ext cx="2587108" cy="738664"/>
+                <a:ext cx="2587108" cy="523220"/>
               </a:xfrm>
               <a:prstGeom prst="rect">
                 <a:avLst/>
@@ -21686,15 +30186,6 @@
                   <a:t>Supported after adjusting configs</a:t>
                 </a:r>
               </a:p>
-              <a:p>
-                <a:r>
-                  <a:rPr lang="en-US" sz="1400" dirty="0">
-                    <a:latin typeface="Times New Roman" panose="02020603050405020304" pitchFamily="18" charset="0"/>
-                    <a:cs typeface="Times New Roman" panose="02020603050405020304" pitchFamily="18" charset="0"/>
-                  </a:rPr>
-                  <a:t>Presumably not supported</a:t>
-                </a:r>
-              </a:p>
             </p:txBody>
           </p:sp>
           <p:cxnSp>
@@ -21722,50 +30213,6 @@
               <a:ln w="12700">
                 <a:solidFill>
                   <a:schemeClr val="tx1"/>
-                </a:solidFill>
-                <a:prstDash val="sysDot"/>
-              </a:ln>
-            </p:spPr>
-            <p:style>
-              <a:lnRef idx="2">
-                <a:schemeClr val="dk1"/>
-              </a:lnRef>
-              <a:fillRef idx="0">
-                <a:schemeClr val="dk1"/>
-              </a:fillRef>
-              <a:effectRef idx="1">
-                <a:schemeClr val="dk1"/>
-              </a:effectRef>
-              <a:fontRef idx="minor">
-                <a:schemeClr val="tx1"/>
-              </a:fontRef>
-            </p:style>
-          </p:cxnSp>
-          <p:cxnSp>
-            <p:nvCxnSpPr>
-              <p:cNvPr id="8" name="Straight Connector 7">
-                <a:extLst>
-                  <a:ext uri="{FF2B5EF4-FFF2-40B4-BE49-F238E27FC236}">
-                    <a16:creationId xmlns:a16="http://schemas.microsoft.com/office/drawing/2014/main" id="{9C57C3EC-B1EB-B8F3-36AA-A15E64D94D01}"/>
-                  </a:ext>
-                </a:extLst>
-              </p:cNvPr>
-              <p:cNvCxnSpPr>
-                <a:cxnSpLocks/>
-              </p:cNvCxnSpPr>
-              <p:nvPr/>
-            </p:nvCxnSpPr>
-            <p:spPr>
-              <a:xfrm>
-                <a:off x="8967214" y="2758903"/>
-                <a:ext cx="210474" cy="0"/>
-              </a:xfrm>
-              <a:prstGeom prst="line">
-                <a:avLst/>
-              </a:prstGeom>
-              <a:ln w="12700">
-                <a:solidFill>
-                  <a:srgbClr val="C40E00"/>
                 </a:solidFill>
                 <a:prstDash val="sysDot"/>
               </a:ln>
@@ -22280,7 +30727,7 @@
 </p:sld>
 </file>
 
-<file path=ppt/slides/slide6.xml><?xml version="1.0" encoding="utf-8"?>
+<file path=ppt/slides/slide8.xml><?xml version="1.0" encoding="utf-8"?>
 <p:sld xmlns:a="http://schemas.openxmlformats.org/drawingml/2006/main" xmlns:r="http://schemas.openxmlformats.org/officeDocument/2006/relationships" xmlns:p="http://schemas.openxmlformats.org/presentationml/2006/main" show="0">
   <p:cSld>
     <p:spTree>
@@ -22366,7 +30813,7 @@
         </p:nvGrpSpPr>
         <p:grpSpPr>
           <a:xfrm>
-            <a:off x="575839" y="2069432"/>
+            <a:off x="496467" y="2455375"/>
             <a:ext cx="11199066" cy="1947249"/>
             <a:chOff x="575839" y="2069432"/>
             <a:chExt cx="11199066" cy="1947249"/>
@@ -22455,7 +30902,7 @@
             </a:prstGeom>
             <a:ln w="12700">
               <a:solidFill>
-                <a:srgbClr val="FF7B61"/>
+                <a:schemeClr val="bg1"/>
               </a:solidFill>
               <a:prstDash val="sysDot"/>
             </a:ln>
@@ -23156,9 +31603,9 @@
           <p:grpSpPr>
             <a:xfrm>
               <a:off x="8873989" y="2167447"/>
-              <a:ext cx="2860204" cy="738664"/>
+              <a:ext cx="2860204" cy="523220"/>
               <a:chOff x="8962221" y="4222565"/>
-              <a:chExt cx="2860204" cy="738664"/>
+              <a:chExt cx="2860204" cy="523220"/>
             </a:xfrm>
           </p:grpSpPr>
           <p:sp>
@@ -23175,8 +31622,8 @@
             </p:nvSpPr>
             <p:spPr>
               <a:xfrm>
-                <a:off x="8962221" y="4243038"/>
-                <a:ext cx="2787151" cy="705139"/>
+                <a:off x="8962221" y="4243039"/>
+                <a:ext cx="2787151" cy="502746"/>
               </a:xfrm>
               <a:prstGeom prst="rect">
                 <a:avLst/>
@@ -23273,7 +31720,7 @@
             <p:spPr>
               <a:xfrm>
                 <a:off x="9235317" y="4222565"/>
-                <a:ext cx="2587108" cy="738664"/>
+                <a:ext cx="2587108" cy="523220"/>
               </a:xfrm>
               <a:prstGeom prst="rect">
                 <a:avLst/>
@@ -23316,18 +31763,6 @@
                   <a:t>Supported after adjusting configs</a:t>
                 </a:r>
               </a:p>
-              <a:p>
-                <a:r>
-                  <a:rPr lang="en-US" sz="1400" dirty="0">
-                    <a:solidFill>
-                      <a:schemeClr val="bg1"/>
-                    </a:solidFill>
-                    <a:latin typeface="Times New Roman" panose="02020603050405020304" pitchFamily="18" charset="0"/>
-                    <a:cs typeface="Times New Roman" panose="02020603050405020304" pitchFamily="18" charset="0"/>
-                  </a:rPr>
-                  <a:t>Presumably not supported</a:t>
-                </a:r>
-              </a:p>
             </p:txBody>
           </p:sp>
           <p:cxnSp>
@@ -23355,50 +31790,6 @@
               <a:ln w="12700">
                 <a:solidFill>
                   <a:schemeClr val="bg1"/>
-                </a:solidFill>
-                <a:prstDash val="sysDot"/>
-              </a:ln>
-            </p:spPr>
-            <p:style>
-              <a:lnRef idx="2">
-                <a:schemeClr val="dk1"/>
-              </a:lnRef>
-              <a:fillRef idx="0">
-                <a:schemeClr val="dk1"/>
-              </a:fillRef>
-              <a:effectRef idx="1">
-                <a:schemeClr val="dk1"/>
-              </a:effectRef>
-              <a:fontRef idx="minor">
-                <a:schemeClr val="tx1"/>
-              </a:fontRef>
-            </p:style>
-          </p:cxnSp>
-          <p:cxnSp>
-            <p:nvCxnSpPr>
-              <p:cNvPr id="66" name="Straight Connector 65">
-                <a:extLst>
-                  <a:ext uri="{FF2B5EF4-FFF2-40B4-BE49-F238E27FC236}">
-                    <a16:creationId xmlns:a16="http://schemas.microsoft.com/office/drawing/2014/main" id="{665363D5-40A1-F6AF-3318-E7F22DE66076}"/>
-                  </a:ext>
-                </a:extLst>
-              </p:cNvPr>
-              <p:cNvCxnSpPr>
-                <a:cxnSpLocks/>
-              </p:cNvCxnSpPr>
-              <p:nvPr/>
-            </p:nvCxnSpPr>
-            <p:spPr>
-              <a:xfrm>
-                <a:off x="9055446" y="4814021"/>
-                <a:ext cx="210474" cy="0"/>
-              </a:xfrm>
-              <a:prstGeom prst="line">
-                <a:avLst/>
-              </a:prstGeom>
-              <a:ln w="12700">
-                <a:solidFill>
-                  <a:srgbClr val="FF7B61"/>
                 </a:solidFill>
                 <a:prstDash val="sysDot"/>
               </a:ln>
@@ -25359,7 +33750,7 @@
 </p:sld>
 </file>
 
-<file path=ppt/slides/slide7.xml><?xml version="1.0" encoding="utf-8"?>
+<file path=ppt/slides/slide9.xml><?xml version="1.0" encoding="utf-8"?>
 <p:sld xmlns:a="http://schemas.openxmlformats.org/drawingml/2006/main" xmlns:r="http://schemas.openxmlformats.org/officeDocument/2006/relationships" xmlns:p="http://schemas.openxmlformats.org/presentationml/2006/main">
   <p:cSld>
     <p:spTree>

--- a/RAN_Intelligent_Controllers/research/Diagrams.pptx
+++ b/RAN_Intelligent_Controllers/research/Diagrams.pptx
@@ -267,7 +267,7 @@
           <a:p>
             <a:fld id="{2D1DF383-F48D-4C35-882C-8A26F25E24F6}" type="datetimeFigureOut">
               <a:rPr lang="en-US" smtClean="0"/>
-              <a:t>7/9/2025</a:t>
+              <a:t>8/15/2025</a:t>
             </a:fld>
             <a:endParaRPr lang="en-US"/>
           </a:p>
@@ -465,7 +465,7 @@
           <a:p>
             <a:fld id="{2D1DF383-F48D-4C35-882C-8A26F25E24F6}" type="datetimeFigureOut">
               <a:rPr lang="en-US" smtClean="0"/>
-              <a:t>7/9/2025</a:t>
+              <a:t>8/15/2025</a:t>
             </a:fld>
             <a:endParaRPr lang="en-US"/>
           </a:p>
@@ -673,7 +673,7 @@
           <a:p>
             <a:fld id="{2D1DF383-F48D-4C35-882C-8A26F25E24F6}" type="datetimeFigureOut">
               <a:rPr lang="en-US" smtClean="0"/>
-              <a:t>7/9/2025</a:t>
+              <a:t>8/15/2025</a:t>
             </a:fld>
             <a:endParaRPr lang="en-US"/>
           </a:p>
@@ -871,7 +871,7 @@
           <a:p>
             <a:fld id="{2D1DF383-F48D-4C35-882C-8A26F25E24F6}" type="datetimeFigureOut">
               <a:rPr lang="en-US" smtClean="0"/>
-              <a:t>7/9/2025</a:t>
+              <a:t>8/15/2025</a:t>
             </a:fld>
             <a:endParaRPr lang="en-US"/>
           </a:p>
@@ -1146,7 +1146,7 @@
           <a:p>
             <a:fld id="{2D1DF383-F48D-4C35-882C-8A26F25E24F6}" type="datetimeFigureOut">
               <a:rPr lang="en-US" smtClean="0"/>
-              <a:t>7/9/2025</a:t>
+              <a:t>8/15/2025</a:t>
             </a:fld>
             <a:endParaRPr lang="en-US"/>
           </a:p>
@@ -1411,7 +1411,7 @@
           <a:p>
             <a:fld id="{2D1DF383-F48D-4C35-882C-8A26F25E24F6}" type="datetimeFigureOut">
               <a:rPr lang="en-US" smtClean="0"/>
-              <a:t>7/9/2025</a:t>
+              <a:t>8/15/2025</a:t>
             </a:fld>
             <a:endParaRPr lang="en-US"/>
           </a:p>
@@ -1823,7 +1823,7 @@
           <a:p>
             <a:fld id="{2D1DF383-F48D-4C35-882C-8A26F25E24F6}" type="datetimeFigureOut">
               <a:rPr lang="en-US" smtClean="0"/>
-              <a:t>7/9/2025</a:t>
+              <a:t>8/15/2025</a:t>
             </a:fld>
             <a:endParaRPr lang="en-US"/>
           </a:p>
@@ -1964,7 +1964,7 @@
           <a:p>
             <a:fld id="{2D1DF383-F48D-4C35-882C-8A26F25E24F6}" type="datetimeFigureOut">
               <a:rPr lang="en-US" smtClean="0"/>
-              <a:t>7/9/2025</a:t>
+              <a:t>8/15/2025</a:t>
             </a:fld>
             <a:endParaRPr lang="en-US"/>
           </a:p>
@@ -2077,7 +2077,7 @@
           <a:p>
             <a:fld id="{2D1DF383-F48D-4C35-882C-8A26F25E24F6}" type="datetimeFigureOut">
               <a:rPr lang="en-US" smtClean="0"/>
-              <a:t>7/9/2025</a:t>
+              <a:t>8/15/2025</a:t>
             </a:fld>
             <a:endParaRPr lang="en-US"/>
           </a:p>
@@ -2388,7 +2388,7 @@
           <a:p>
             <a:fld id="{2D1DF383-F48D-4C35-882C-8A26F25E24F6}" type="datetimeFigureOut">
               <a:rPr lang="en-US" smtClean="0"/>
-              <a:t>7/9/2025</a:t>
+              <a:t>8/15/2025</a:t>
             </a:fld>
             <a:endParaRPr lang="en-US"/>
           </a:p>
@@ -2676,7 +2676,7 @@
           <a:p>
             <a:fld id="{2D1DF383-F48D-4C35-882C-8A26F25E24F6}" type="datetimeFigureOut">
               <a:rPr lang="en-US" smtClean="0"/>
-              <a:t>7/9/2025</a:t>
+              <a:t>8/15/2025</a:t>
             </a:fld>
             <a:endParaRPr lang="en-US"/>
           </a:p>
@@ -2917,7 +2917,7 @@
           <a:p>
             <a:fld id="{2D1DF383-F48D-4C35-882C-8A26F25E24F6}" type="datetimeFigureOut">
               <a:rPr lang="en-US" smtClean="0"/>
-              <a:t>7/9/2025</a:t>
+              <a:t>8/15/2025</a:t>
             </a:fld>
             <a:endParaRPr lang="en-US"/>
           </a:p>
@@ -10426,7 +10426,7 @@
                     <a:latin typeface="Times New Roman" panose="02020603050405020304" pitchFamily="18" charset="0"/>
                     <a:cs typeface="Times New Roman" panose="02020603050405020304" pitchFamily="18" charset="0"/>
                   </a:rPr>
-                  <a:t>Policy</a:t>
+                  <a:t>A1 Policy</a:t>
                 </a:r>
               </a:p>
             </p:txBody>

--- a/RAN_Intelligent_Controllers/research/Diagrams.pptx
+++ b/RAN_Intelligent_Controllers/research/Diagrams.pptx
@@ -14,6 +14,7 @@
     <p:sldId id="259" r:id="rId8"/>
     <p:sldId id="261" r:id="rId9"/>
     <p:sldId id="260" r:id="rId10"/>
+    <p:sldId id="266" r:id="rId11"/>
   </p:sldIdLst>
   <p:sldSz cx="12192000" cy="6858000"/>
   <p:notesSz cx="6858000" cy="9144000"/>
@@ -7392,6 +7393,252 @@
     <p:extLst>
       <p:ext uri="{BB962C8B-B14F-4D97-AF65-F5344CB8AC3E}">
         <p14:creationId xmlns:p14="http://schemas.microsoft.com/office/powerpoint/2010/main" val="3118189070"/>
+      </p:ext>
+    </p:extLst>
+  </p:cSld>
+  <p:clrMapOvr>
+    <a:masterClrMapping/>
+  </p:clrMapOvr>
+</p:sld>
+</file>
+
+<file path=ppt/slides/slide10.xml><?xml version="1.0" encoding="utf-8"?>
+<p:sld xmlns:a="http://schemas.openxmlformats.org/drawingml/2006/main" xmlns:r="http://schemas.openxmlformats.org/officeDocument/2006/relationships" xmlns:p="http://schemas.openxmlformats.org/presentationml/2006/main">
+  <p:cSld>
+    <p:spTree>
+      <p:nvGrpSpPr>
+        <p:cNvPr id="1" name=""/>
+        <p:cNvGrpSpPr/>
+        <p:nvPr/>
+      </p:nvGrpSpPr>
+      <p:grpSpPr>
+        <a:xfrm>
+          <a:off x="0" y="0"/>
+          <a:ext cx="0" cy="0"/>
+          <a:chOff x="0" y="0"/>
+          <a:chExt cx="0" cy="0"/>
+        </a:xfrm>
+      </p:grpSpPr>
+      <p:pic>
+        <p:nvPicPr>
+          <p:cNvPr id="1026" name="Picture 2" descr="O-RAN gNB Overview — srsRAN Project documentation">
+            <a:extLst>
+              <a:ext uri="{FF2B5EF4-FFF2-40B4-BE49-F238E27FC236}">
+                <a16:creationId xmlns:a16="http://schemas.microsoft.com/office/drawing/2014/main" id="{A7394ECF-42BA-F193-3EA6-8F345F13FCF0}"/>
+              </a:ext>
+            </a:extLst>
+          </p:cNvPr>
+          <p:cNvPicPr>
+            <a:picLocks noChangeAspect="1" noChangeArrowheads="1"/>
+          </p:cNvPicPr>
+          <p:nvPr/>
+        </p:nvPicPr>
+        <p:blipFill rotWithShape="1">
+          <a:blip r:embed="rId2">
+            <a:extLst>
+              <a:ext uri="{28A0092B-C50C-407E-A947-70E740481C1C}">
+                <a14:useLocalDpi xmlns:a14="http://schemas.microsoft.com/office/drawing/2010/main" val="0"/>
+              </a:ext>
+            </a:extLst>
+          </a:blip>
+          <a:srcRect t="70519"/>
+          <a:stretch/>
+        </p:blipFill>
+        <p:spPr bwMode="auto">
+          <a:xfrm>
+            <a:off x="4905375" y="228842"/>
+            <a:ext cx="7186484" cy="1147133"/>
+          </a:xfrm>
+          <a:prstGeom prst="rect">
+            <a:avLst/>
+          </a:prstGeom>
+          <a:noFill/>
+          <a:extLst>
+            <a:ext uri="{909E8E84-426E-40DD-AFC4-6F175D3DCCD1}">
+              <a14:hiddenFill xmlns:a14="http://schemas.microsoft.com/office/drawing/2010/main">
+                <a:solidFill>
+                  <a:srgbClr val="FFFFFF"/>
+                </a:solidFill>
+              </a14:hiddenFill>
+            </a:ext>
+          </a:extLst>
+        </p:spPr>
+      </p:pic>
+      <p:pic>
+        <p:nvPicPr>
+          <p:cNvPr id="1028" name="Picture 4" descr="5G Overview">
+            <a:extLst>
+              <a:ext uri="{FF2B5EF4-FFF2-40B4-BE49-F238E27FC236}">
+                <a16:creationId xmlns:a16="http://schemas.microsoft.com/office/drawing/2014/main" id="{36465057-85AD-DA2B-2937-4F577F84577A}"/>
+              </a:ext>
+            </a:extLst>
+          </p:cNvPr>
+          <p:cNvPicPr>
+            <a:picLocks noChangeAspect="1" noChangeArrowheads="1"/>
+          </p:cNvPicPr>
+          <p:nvPr/>
+        </p:nvPicPr>
+        <p:blipFill>
+          <a:blip r:embed="rId3">
+            <a:extLst>
+              <a:ext uri="{28A0092B-C50C-407E-A947-70E740481C1C}">
+                <a14:useLocalDpi xmlns:a14="http://schemas.microsoft.com/office/drawing/2010/main" val="0"/>
+              </a:ext>
+            </a:extLst>
+          </a:blip>
+          <a:srcRect/>
+          <a:stretch>
+            <a:fillRect/>
+          </a:stretch>
+        </p:blipFill>
+        <p:spPr bwMode="auto">
+          <a:xfrm>
+            <a:off x="6969211" y="1595627"/>
+            <a:ext cx="4876800" cy="1647825"/>
+          </a:xfrm>
+          <a:prstGeom prst="rect">
+            <a:avLst/>
+          </a:prstGeom>
+          <a:noFill/>
+          <a:extLst>
+            <a:ext uri="{909E8E84-426E-40DD-AFC4-6F175D3DCCD1}">
+              <a14:hiddenFill xmlns:a14="http://schemas.microsoft.com/office/drawing/2010/main">
+                <a:solidFill>
+                  <a:srgbClr val="FFFFFF"/>
+                </a:solidFill>
+              </a14:hiddenFill>
+            </a:ext>
+          </a:extLst>
+        </p:spPr>
+      </p:pic>
+      <p:pic>
+        <p:nvPicPr>
+          <p:cNvPr id="1030" name="Picture 6" descr="5G Requirement: New Network Architecture | Smart Telecom Edu">
+            <a:extLst>
+              <a:ext uri="{FF2B5EF4-FFF2-40B4-BE49-F238E27FC236}">
+                <a16:creationId xmlns:a16="http://schemas.microsoft.com/office/drawing/2014/main" id="{08726F91-2B0F-0AF5-A3EE-44C77597D602}"/>
+              </a:ext>
+            </a:extLst>
+          </p:cNvPr>
+          <p:cNvPicPr>
+            <a:picLocks noChangeAspect="1" noChangeArrowheads="1"/>
+          </p:cNvPicPr>
+          <p:nvPr/>
+        </p:nvPicPr>
+        <p:blipFill>
+          <a:blip r:embed="rId4">
+            <a:extLst>
+              <a:ext uri="{28A0092B-C50C-407E-A947-70E740481C1C}">
+                <a14:useLocalDpi xmlns:a14="http://schemas.microsoft.com/office/drawing/2010/main" val="0"/>
+              </a:ext>
+            </a:extLst>
+          </a:blip>
+          <a:srcRect/>
+          <a:stretch>
+            <a:fillRect/>
+          </a:stretch>
+        </p:blipFill>
+        <p:spPr bwMode="auto">
+          <a:xfrm>
+            <a:off x="7091491" y="3771899"/>
+            <a:ext cx="4908658" cy="2606951"/>
+          </a:xfrm>
+          <a:prstGeom prst="rect">
+            <a:avLst/>
+          </a:prstGeom>
+          <a:noFill/>
+          <a:extLst>
+            <a:ext uri="{909E8E84-426E-40DD-AFC4-6F175D3DCCD1}">
+              <a14:hiddenFill xmlns:a14="http://schemas.microsoft.com/office/drawing/2010/main">
+                <a:solidFill>
+                  <a:srgbClr val="FFFFFF"/>
+                </a:solidFill>
+              </a14:hiddenFill>
+            </a:ext>
+          </a:extLst>
+        </p:spPr>
+      </p:pic>
+      <p:pic>
+        <p:nvPicPr>
+          <p:cNvPr id="1032" name="Picture 8" descr="5G Protocol Stack | LTEProtocol.com: Your Gateway to Wireless Excellence">
+            <a:extLst>
+              <a:ext uri="{FF2B5EF4-FFF2-40B4-BE49-F238E27FC236}">
+                <a16:creationId xmlns:a16="http://schemas.microsoft.com/office/drawing/2014/main" id="{6291FB33-293F-C88F-93BA-161477BAD4B8}"/>
+              </a:ext>
+            </a:extLst>
+          </p:cNvPr>
+          <p:cNvPicPr>
+            <a:picLocks noChangeAspect="1" noChangeArrowheads="1"/>
+          </p:cNvPicPr>
+          <p:nvPr/>
+        </p:nvPicPr>
+        <p:blipFill>
+          <a:blip r:embed="rId5">
+            <a:extLst>
+              <a:ext uri="{28A0092B-C50C-407E-A947-70E740481C1C}">
+                <a14:useLocalDpi xmlns:a14="http://schemas.microsoft.com/office/drawing/2010/main" val="0"/>
+              </a:ext>
+            </a:extLst>
+          </a:blip>
+          <a:srcRect/>
+          <a:stretch>
+            <a:fillRect/>
+          </a:stretch>
+        </p:blipFill>
+        <p:spPr bwMode="auto">
+          <a:xfrm>
+            <a:off x="100141" y="3620598"/>
+            <a:ext cx="6991350" cy="3171825"/>
+          </a:xfrm>
+          <a:prstGeom prst="rect">
+            <a:avLst/>
+          </a:prstGeom>
+          <a:noFill/>
+          <a:extLst>
+            <a:ext uri="{909E8E84-426E-40DD-AFC4-6F175D3DCCD1}">
+              <a14:hiddenFill xmlns:a14="http://schemas.microsoft.com/office/drawing/2010/main">
+                <a:solidFill>
+                  <a:srgbClr val="FFFFFF"/>
+                </a:solidFill>
+              </a14:hiddenFill>
+            </a:ext>
+          </a:extLst>
+        </p:spPr>
+      </p:pic>
+      <p:pic>
+        <p:nvPicPr>
+          <p:cNvPr id="9" name="Picture 8">
+            <a:extLst>
+              <a:ext uri="{FF2B5EF4-FFF2-40B4-BE49-F238E27FC236}">
+                <a16:creationId xmlns:a16="http://schemas.microsoft.com/office/drawing/2014/main" id="{CCB71D96-4F2C-919A-704A-46D0C3DA274C}"/>
+              </a:ext>
+            </a:extLst>
+          </p:cNvPr>
+          <p:cNvPicPr>
+            <a:picLocks noChangeAspect="1"/>
+          </p:cNvPicPr>
+          <p:nvPr/>
+        </p:nvPicPr>
+        <p:blipFill>
+          <a:blip r:embed="rId6"/>
+          <a:stretch>
+            <a:fillRect/>
+          </a:stretch>
+        </p:blipFill>
+        <p:spPr>
+          <a:xfrm>
+            <a:off x="345989" y="221000"/>
+            <a:ext cx="4414709" cy="3016402"/>
+          </a:xfrm>
+          <a:prstGeom prst="rect">
+            <a:avLst/>
+          </a:prstGeom>
+        </p:spPr>
+      </p:pic>
+    </p:spTree>
+    <p:extLst>
+      <p:ext uri="{BB962C8B-B14F-4D97-AF65-F5344CB8AC3E}">
+        <p14:creationId xmlns:p14="http://schemas.microsoft.com/office/powerpoint/2010/main" val="2257679150"/>
       </p:ext>
     </p:extLst>
   </p:cSld>

--- a/RAN_Intelligent_Controllers/research/Diagrams.pptx
+++ b/RAN_Intelligent_Controllers/research/Diagrams.pptx
@@ -268,7 +268,7 @@
           <a:p>
             <a:fld id="{2D1DF383-F48D-4C35-882C-8A26F25E24F6}" type="datetimeFigureOut">
               <a:rPr lang="en-US" smtClean="0"/>
-              <a:t>8/22/2025</a:t>
+              <a:t>9/18/2025</a:t>
             </a:fld>
             <a:endParaRPr lang="en-US"/>
           </a:p>
@@ -466,7 +466,7 @@
           <a:p>
             <a:fld id="{2D1DF383-F48D-4C35-882C-8A26F25E24F6}" type="datetimeFigureOut">
               <a:rPr lang="en-US" smtClean="0"/>
-              <a:t>8/22/2025</a:t>
+              <a:t>9/18/2025</a:t>
             </a:fld>
             <a:endParaRPr lang="en-US"/>
           </a:p>
@@ -674,7 +674,7 @@
           <a:p>
             <a:fld id="{2D1DF383-F48D-4C35-882C-8A26F25E24F6}" type="datetimeFigureOut">
               <a:rPr lang="en-US" smtClean="0"/>
-              <a:t>8/22/2025</a:t>
+              <a:t>9/18/2025</a:t>
             </a:fld>
             <a:endParaRPr lang="en-US"/>
           </a:p>
@@ -872,7 +872,7 @@
           <a:p>
             <a:fld id="{2D1DF383-F48D-4C35-882C-8A26F25E24F6}" type="datetimeFigureOut">
               <a:rPr lang="en-US" smtClean="0"/>
-              <a:t>8/22/2025</a:t>
+              <a:t>9/18/2025</a:t>
             </a:fld>
             <a:endParaRPr lang="en-US"/>
           </a:p>
@@ -1147,7 +1147,7 @@
           <a:p>
             <a:fld id="{2D1DF383-F48D-4C35-882C-8A26F25E24F6}" type="datetimeFigureOut">
               <a:rPr lang="en-US" smtClean="0"/>
-              <a:t>8/22/2025</a:t>
+              <a:t>9/18/2025</a:t>
             </a:fld>
             <a:endParaRPr lang="en-US"/>
           </a:p>
@@ -1412,7 +1412,7 @@
           <a:p>
             <a:fld id="{2D1DF383-F48D-4C35-882C-8A26F25E24F6}" type="datetimeFigureOut">
               <a:rPr lang="en-US" smtClean="0"/>
-              <a:t>8/22/2025</a:t>
+              <a:t>9/18/2025</a:t>
             </a:fld>
             <a:endParaRPr lang="en-US"/>
           </a:p>
@@ -1824,7 +1824,7 @@
           <a:p>
             <a:fld id="{2D1DF383-F48D-4C35-882C-8A26F25E24F6}" type="datetimeFigureOut">
               <a:rPr lang="en-US" smtClean="0"/>
-              <a:t>8/22/2025</a:t>
+              <a:t>9/18/2025</a:t>
             </a:fld>
             <a:endParaRPr lang="en-US"/>
           </a:p>
@@ -1965,7 +1965,7 @@
           <a:p>
             <a:fld id="{2D1DF383-F48D-4C35-882C-8A26F25E24F6}" type="datetimeFigureOut">
               <a:rPr lang="en-US" smtClean="0"/>
-              <a:t>8/22/2025</a:t>
+              <a:t>9/18/2025</a:t>
             </a:fld>
             <a:endParaRPr lang="en-US"/>
           </a:p>
@@ -2078,7 +2078,7 @@
           <a:p>
             <a:fld id="{2D1DF383-F48D-4C35-882C-8A26F25E24F6}" type="datetimeFigureOut">
               <a:rPr lang="en-US" smtClean="0"/>
-              <a:t>8/22/2025</a:t>
+              <a:t>9/18/2025</a:t>
             </a:fld>
             <a:endParaRPr lang="en-US"/>
           </a:p>
@@ -2389,7 +2389,7 @@
           <a:p>
             <a:fld id="{2D1DF383-F48D-4C35-882C-8A26F25E24F6}" type="datetimeFigureOut">
               <a:rPr lang="en-US" smtClean="0"/>
-              <a:t>8/22/2025</a:t>
+              <a:t>9/18/2025</a:t>
             </a:fld>
             <a:endParaRPr lang="en-US"/>
           </a:p>
@@ -2677,7 +2677,7 @@
           <a:p>
             <a:fld id="{2D1DF383-F48D-4C35-882C-8A26F25E24F6}" type="datetimeFigureOut">
               <a:rPr lang="en-US" smtClean="0"/>
-              <a:t>8/22/2025</a:t>
+              <a:t>9/18/2025</a:t>
             </a:fld>
             <a:endParaRPr lang="en-US"/>
           </a:p>
@@ -2918,7 +2918,7 @@
           <a:p>
             <a:fld id="{2D1DF383-F48D-4C35-882C-8A26F25E24F6}" type="datetimeFigureOut">
               <a:rPr lang="en-US" smtClean="0"/>
-              <a:t>8/22/2025</a:t>
+              <a:t>9/18/2025</a:t>
             </a:fld>
             <a:endParaRPr lang="en-US"/>
           </a:p>
@@ -7322,7 +7322,7 @@
                       <a:latin typeface="Times New Roman" panose="02020603050405020304" pitchFamily="18" charset="0"/>
                       <a:cs typeface="Times New Roman" panose="02020603050405020304" pitchFamily="18" charset="0"/>
                     </a:rPr>
-                    <a:t>Phoenix</a:t>
+                    <a:t>Free5GC</a:t>
                   </a:r>
                 </a:p>
                 <a:p>
@@ -7335,7 +7335,7 @@
                       <a:latin typeface="Times New Roman" panose="02020603050405020304" pitchFamily="18" charset="0"/>
                       <a:cs typeface="Times New Roman" panose="02020603050405020304" pitchFamily="18" charset="0"/>
                     </a:rPr>
-                    <a:t>Free5GC</a:t>
+                    <a:t>Phoenix</a:t>
                   </a:r>
                 </a:p>
               </p:txBody>
@@ -11796,7 +11796,7 @@
                       <a:latin typeface="Times New Roman" panose="02020603050405020304" pitchFamily="18" charset="0"/>
                       <a:cs typeface="Times New Roman" panose="02020603050405020304" pitchFamily="18" charset="0"/>
                     </a:rPr>
-                    <a:t>Phoenix</a:t>
+                    <a:t>Free5GC</a:t>
                   </a:r>
                 </a:p>
                 <a:p>
@@ -11812,7 +11812,7 @@
                       <a:latin typeface="Times New Roman" panose="02020603050405020304" pitchFamily="18" charset="0"/>
                       <a:cs typeface="Times New Roman" panose="02020603050405020304" pitchFamily="18" charset="0"/>
                     </a:rPr>
-                    <a:t>Free5GC</a:t>
+                    <a:t>Phoenix</a:t>
                   </a:r>
                 </a:p>
               </p:txBody>
@@ -14573,7 +14573,7 @@
                     <a:latin typeface="Times New Roman" panose="02020603050405020304" pitchFamily="18" charset="0"/>
                     <a:cs typeface="Times New Roman" panose="02020603050405020304" pitchFamily="18" charset="0"/>
                   </a:rPr>
-                  <a:t>OAI 5G CN (5gdeploy)</a:t>
+                  <a:t>Phoenix (5gdeploy)</a:t>
                 </a:r>
               </a:p>
             </p:txBody>
@@ -14612,7 +14612,7 @@
                     <a:latin typeface="Times New Roman" panose="02020603050405020304" pitchFamily="18" charset="0"/>
                     <a:cs typeface="Times New Roman" panose="02020603050405020304" pitchFamily="18" charset="0"/>
                   </a:rPr>
-                  <a:t>Phoenix (5gdeploy)</a:t>
+                  <a:t>Free5GC (5gdeploy)</a:t>
                 </a:r>
               </a:p>
             </p:txBody>
@@ -14651,7 +14651,7 @@
                     <a:latin typeface="Times New Roman" panose="02020603050405020304" pitchFamily="18" charset="0"/>
                     <a:cs typeface="Times New Roman" panose="02020603050405020304" pitchFamily="18" charset="0"/>
                   </a:rPr>
-                  <a:t>Free5GC (5gdeploy)</a:t>
+                  <a:t>OAI 5G CN (5gdeploy)</a:t>
                 </a:r>
               </a:p>
             </p:txBody>
@@ -18163,7 +18163,7 @@
                     <a:latin typeface="Times New Roman" panose="02020603050405020304" pitchFamily="18" charset="0"/>
                     <a:cs typeface="Times New Roman" panose="02020603050405020304" pitchFamily="18" charset="0"/>
                   </a:rPr>
-                  <a:t>OAI 5G CN (5gdeploy)</a:t>
+                  <a:t>Phoenix (5gdeploy)</a:t>
                 </a:r>
               </a:p>
             </p:txBody>
@@ -18205,7 +18205,7 @@
                     <a:latin typeface="Times New Roman" panose="02020603050405020304" pitchFamily="18" charset="0"/>
                     <a:cs typeface="Times New Roman" panose="02020603050405020304" pitchFamily="18" charset="0"/>
                   </a:rPr>
-                  <a:t>Phoenix (5gdeploy)</a:t>
+                  <a:t>Free5GC (5gdeploy)</a:t>
                 </a:r>
               </a:p>
             </p:txBody>
@@ -18247,7 +18247,7 @@
                     <a:latin typeface="Times New Roman" panose="02020603050405020304" pitchFamily="18" charset="0"/>
                     <a:cs typeface="Times New Roman" panose="02020603050405020304" pitchFamily="18" charset="0"/>
                   </a:rPr>
-                  <a:t>Free5GC (5gdeploy)</a:t>
+                  <a:t>OAI 5G CN (5gdeploy)</a:t>
                 </a:r>
               </a:p>
             </p:txBody>

--- a/RAN_Intelligent_Controllers/research/Diagrams.pptx
+++ b/RAN_Intelligent_Controllers/research/Diagrams.pptx
@@ -15,6 +15,7 @@
     <p:sldId id="261" r:id="rId9"/>
     <p:sldId id="260" r:id="rId10"/>
     <p:sldId id="266" r:id="rId11"/>
+    <p:sldId id="267" r:id="rId12"/>
   </p:sldIdLst>
   <p:sldSz cx="12192000" cy="6858000"/>
   <p:notesSz cx="6858000" cy="9144000"/>
@@ -268,7 +269,7 @@
           <a:p>
             <a:fld id="{2D1DF383-F48D-4C35-882C-8A26F25E24F6}" type="datetimeFigureOut">
               <a:rPr lang="en-US" smtClean="0"/>
-              <a:t>9/18/2025</a:t>
+              <a:t>9/19/2025</a:t>
             </a:fld>
             <a:endParaRPr lang="en-US"/>
           </a:p>
@@ -466,7 +467,7 @@
           <a:p>
             <a:fld id="{2D1DF383-F48D-4C35-882C-8A26F25E24F6}" type="datetimeFigureOut">
               <a:rPr lang="en-US" smtClean="0"/>
-              <a:t>9/18/2025</a:t>
+              <a:t>9/19/2025</a:t>
             </a:fld>
             <a:endParaRPr lang="en-US"/>
           </a:p>
@@ -674,7 +675,7 @@
           <a:p>
             <a:fld id="{2D1DF383-F48D-4C35-882C-8A26F25E24F6}" type="datetimeFigureOut">
               <a:rPr lang="en-US" smtClean="0"/>
-              <a:t>9/18/2025</a:t>
+              <a:t>9/19/2025</a:t>
             </a:fld>
             <a:endParaRPr lang="en-US"/>
           </a:p>
@@ -872,7 +873,7 @@
           <a:p>
             <a:fld id="{2D1DF383-F48D-4C35-882C-8A26F25E24F6}" type="datetimeFigureOut">
               <a:rPr lang="en-US" smtClean="0"/>
-              <a:t>9/18/2025</a:t>
+              <a:t>9/19/2025</a:t>
             </a:fld>
             <a:endParaRPr lang="en-US"/>
           </a:p>
@@ -1147,7 +1148,7 @@
           <a:p>
             <a:fld id="{2D1DF383-F48D-4C35-882C-8A26F25E24F6}" type="datetimeFigureOut">
               <a:rPr lang="en-US" smtClean="0"/>
-              <a:t>9/18/2025</a:t>
+              <a:t>9/19/2025</a:t>
             </a:fld>
             <a:endParaRPr lang="en-US"/>
           </a:p>
@@ -1412,7 +1413,7 @@
           <a:p>
             <a:fld id="{2D1DF383-F48D-4C35-882C-8A26F25E24F6}" type="datetimeFigureOut">
               <a:rPr lang="en-US" smtClean="0"/>
-              <a:t>9/18/2025</a:t>
+              <a:t>9/19/2025</a:t>
             </a:fld>
             <a:endParaRPr lang="en-US"/>
           </a:p>
@@ -1824,7 +1825,7 @@
           <a:p>
             <a:fld id="{2D1DF383-F48D-4C35-882C-8A26F25E24F6}" type="datetimeFigureOut">
               <a:rPr lang="en-US" smtClean="0"/>
-              <a:t>9/18/2025</a:t>
+              <a:t>9/19/2025</a:t>
             </a:fld>
             <a:endParaRPr lang="en-US"/>
           </a:p>
@@ -1965,7 +1966,7 @@
           <a:p>
             <a:fld id="{2D1DF383-F48D-4C35-882C-8A26F25E24F6}" type="datetimeFigureOut">
               <a:rPr lang="en-US" smtClean="0"/>
-              <a:t>9/18/2025</a:t>
+              <a:t>9/19/2025</a:t>
             </a:fld>
             <a:endParaRPr lang="en-US"/>
           </a:p>
@@ -2078,7 +2079,7 @@
           <a:p>
             <a:fld id="{2D1DF383-F48D-4C35-882C-8A26F25E24F6}" type="datetimeFigureOut">
               <a:rPr lang="en-US" smtClean="0"/>
-              <a:t>9/18/2025</a:t>
+              <a:t>9/19/2025</a:t>
             </a:fld>
             <a:endParaRPr lang="en-US"/>
           </a:p>
@@ -2389,7 +2390,7 @@
           <a:p>
             <a:fld id="{2D1DF383-F48D-4C35-882C-8A26F25E24F6}" type="datetimeFigureOut">
               <a:rPr lang="en-US" smtClean="0"/>
-              <a:t>9/18/2025</a:t>
+              <a:t>9/19/2025</a:t>
             </a:fld>
             <a:endParaRPr lang="en-US"/>
           </a:p>
@@ -2677,7 +2678,7 @@
           <a:p>
             <a:fld id="{2D1DF383-F48D-4C35-882C-8A26F25E24F6}" type="datetimeFigureOut">
               <a:rPr lang="en-US" smtClean="0"/>
-              <a:t>9/18/2025</a:t>
+              <a:t>9/19/2025</a:t>
             </a:fld>
             <a:endParaRPr lang="en-US"/>
           </a:p>
@@ -2918,7 +2919,7 @@
           <a:p>
             <a:fld id="{2D1DF383-F48D-4C35-882C-8A26F25E24F6}" type="datetimeFigureOut">
               <a:rPr lang="en-US" smtClean="0"/>
-              <a:t>9/18/2025</a:t>
+              <a:t>9/19/2025</a:t>
             </a:fld>
             <a:endParaRPr lang="en-US"/>
           </a:p>
@@ -7639,6 +7640,1376 @@
     <p:extLst>
       <p:ext uri="{BB962C8B-B14F-4D97-AF65-F5344CB8AC3E}">
         <p14:creationId xmlns:p14="http://schemas.microsoft.com/office/powerpoint/2010/main" val="2257679150"/>
+      </p:ext>
+    </p:extLst>
+  </p:cSld>
+  <p:clrMapOvr>
+    <a:masterClrMapping/>
+  </p:clrMapOvr>
+</p:sld>
+</file>
+
+<file path=ppt/slides/slide11.xml><?xml version="1.0" encoding="utf-8"?>
+<p:sld xmlns:a="http://schemas.openxmlformats.org/drawingml/2006/main" xmlns:r="http://schemas.openxmlformats.org/officeDocument/2006/relationships" xmlns:p="http://schemas.openxmlformats.org/presentationml/2006/main">
+  <p:cSld>
+    <p:spTree>
+      <p:nvGrpSpPr>
+        <p:cNvPr id="1" name=""/>
+        <p:cNvGrpSpPr/>
+        <p:nvPr/>
+      </p:nvGrpSpPr>
+      <p:grpSpPr>
+        <a:xfrm>
+          <a:off x="0" y="0"/>
+          <a:ext cx="0" cy="0"/>
+          <a:chOff x="0" y="0"/>
+          <a:chExt cx="0" cy="0"/>
+        </a:xfrm>
+      </p:grpSpPr>
+      <p:grpSp>
+        <p:nvGrpSpPr>
+          <p:cNvPr id="37" name="Group 36">
+            <a:extLst>
+              <a:ext uri="{FF2B5EF4-FFF2-40B4-BE49-F238E27FC236}">
+                <a16:creationId xmlns:a16="http://schemas.microsoft.com/office/drawing/2014/main" id="{B6EB04C3-13B2-832D-461A-C07D80900EC3}"/>
+              </a:ext>
+            </a:extLst>
+          </p:cNvPr>
+          <p:cNvGrpSpPr/>
+          <p:nvPr/>
+        </p:nvGrpSpPr>
+        <p:grpSpPr>
+          <a:xfrm>
+            <a:off x="2974533" y="2575560"/>
+            <a:ext cx="6378008" cy="1706880"/>
+            <a:chOff x="2974533" y="2575560"/>
+            <a:chExt cx="6378008" cy="1706880"/>
+          </a:xfrm>
+        </p:grpSpPr>
+        <p:sp>
+          <p:nvSpPr>
+            <p:cNvPr id="5" name="Rectangle: Rounded Corners 4">
+              <a:extLst>
+                <a:ext uri="{FF2B5EF4-FFF2-40B4-BE49-F238E27FC236}">
+                  <a16:creationId xmlns:a16="http://schemas.microsoft.com/office/drawing/2014/main" id="{64A09B1F-0776-2D94-AECE-DE4BA0D19E8B}"/>
+                </a:ext>
+              </a:extLst>
+            </p:cNvPr>
+            <p:cNvSpPr/>
+            <p:nvPr/>
+          </p:nvSpPr>
+          <p:spPr>
+            <a:xfrm>
+              <a:off x="2974533" y="2575560"/>
+              <a:ext cx="6378008" cy="1706880"/>
+            </a:xfrm>
+            <a:prstGeom prst="roundRect">
+              <a:avLst>
+                <a:gd name="adj" fmla="val 4524"/>
+              </a:avLst>
+            </a:prstGeom>
+            <a:solidFill>
+              <a:srgbClr val="DBF0F9"/>
+            </a:solidFill>
+          </p:spPr>
+          <p:style>
+            <a:lnRef idx="2">
+              <a:schemeClr val="accent1">
+                <a:shade val="15000"/>
+              </a:schemeClr>
+            </a:lnRef>
+            <a:fillRef idx="1">
+              <a:schemeClr val="accent1"/>
+            </a:fillRef>
+            <a:effectRef idx="0">
+              <a:schemeClr val="accent1"/>
+            </a:effectRef>
+            <a:fontRef idx="minor">
+              <a:schemeClr val="lt1"/>
+            </a:fontRef>
+          </p:style>
+          <p:txBody>
+            <a:bodyPr rtlCol="0" anchor="ctr"/>
+            <a:lstStyle/>
+            <a:p>
+              <a:pPr algn="ctr"/>
+              <a:endParaRPr lang="en-US"/>
+            </a:p>
+          </p:txBody>
+        </p:sp>
+        <p:cxnSp>
+          <p:nvCxnSpPr>
+            <p:cNvPr id="7" name="Straight Connector 6">
+              <a:extLst>
+                <a:ext uri="{FF2B5EF4-FFF2-40B4-BE49-F238E27FC236}">
+                  <a16:creationId xmlns:a16="http://schemas.microsoft.com/office/drawing/2014/main" id="{07CD1992-B1F5-D85A-2142-4D52AA33E96E}"/>
+                </a:ext>
+              </a:extLst>
+            </p:cNvPr>
+            <p:cNvCxnSpPr>
+              <a:cxnSpLocks/>
+              <a:stCxn id="20" idx="1"/>
+              <a:endCxn id="24" idx="3"/>
+            </p:cNvCxnSpPr>
+            <p:nvPr/>
+          </p:nvCxnSpPr>
+          <p:spPr>
+            <a:xfrm flipH="1" flipV="1">
+              <a:off x="4745902" y="3437810"/>
+              <a:ext cx="749484" cy="659"/>
+            </a:xfrm>
+            <a:prstGeom prst="line">
+              <a:avLst/>
+            </a:prstGeom>
+          </p:spPr>
+          <p:style>
+            <a:lnRef idx="2">
+              <a:schemeClr val="dk1"/>
+            </a:lnRef>
+            <a:fillRef idx="0">
+              <a:schemeClr val="dk1"/>
+            </a:fillRef>
+            <a:effectRef idx="1">
+              <a:schemeClr val="dk1"/>
+            </a:effectRef>
+            <a:fontRef idx="minor">
+              <a:schemeClr val="tx1"/>
+            </a:fontRef>
+          </p:style>
+        </p:cxnSp>
+        <p:grpSp>
+          <p:nvGrpSpPr>
+            <p:cNvPr id="8" name="Group 7">
+              <a:extLst>
+                <a:ext uri="{FF2B5EF4-FFF2-40B4-BE49-F238E27FC236}">
+                  <a16:creationId xmlns:a16="http://schemas.microsoft.com/office/drawing/2014/main" id="{B02924FF-D488-1132-C790-2B9B96CF37D0}"/>
+                </a:ext>
+              </a:extLst>
+            </p:cNvPr>
+            <p:cNvGrpSpPr/>
+            <p:nvPr/>
+          </p:nvGrpSpPr>
+          <p:grpSpPr>
+            <a:xfrm>
+              <a:off x="3109608" y="2701524"/>
+              <a:ext cx="1702648" cy="1468106"/>
+              <a:chOff x="1451811" y="1299410"/>
+              <a:chExt cx="1702648" cy="1900989"/>
+            </a:xfrm>
+          </p:grpSpPr>
+          <p:grpSp>
+            <p:nvGrpSpPr>
+              <p:cNvPr id="22" name="Group 21">
+                <a:extLst>
+                  <a:ext uri="{FF2B5EF4-FFF2-40B4-BE49-F238E27FC236}">
+                    <a16:creationId xmlns:a16="http://schemas.microsoft.com/office/drawing/2014/main" id="{C2B7BCC7-AAC9-8722-0E5A-49090390D2BE}"/>
+                  </a:ext>
+                </a:extLst>
+              </p:cNvPr>
+              <p:cNvGrpSpPr/>
+              <p:nvPr/>
+            </p:nvGrpSpPr>
+            <p:grpSpPr>
+              <a:xfrm>
+                <a:off x="1451811" y="1299410"/>
+                <a:ext cx="882313" cy="1900989"/>
+                <a:chOff x="1451811" y="1299410"/>
+                <a:chExt cx="882313" cy="1900989"/>
+              </a:xfrm>
+            </p:grpSpPr>
+            <p:grpSp>
+              <p:nvGrpSpPr>
+                <p:cNvPr id="27" name="Group 26">
+                  <a:extLst>
+                    <a:ext uri="{FF2B5EF4-FFF2-40B4-BE49-F238E27FC236}">
+                      <a16:creationId xmlns:a16="http://schemas.microsoft.com/office/drawing/2014/main" id="{F8F44F4B-F668-10EE-E29B-75FCA45DA90F}"/>
+                    </a:ext>
+                  </a:extLst>
+                </p:cNvPr>
+                <p:cNvGrpSpPr/>
+                <p:nvPr/>
+              </p:nvGrpSpPr>
+              <p:grpSpPr>
+                <a:xfrm>
+                  <a:off x="1451811" y="1299410"/>
+                  <a:ext cx="544360" cy="1900989"/>
+                  <a:chOff x="1685491" y="1299410"/>
+                  <a:chExt cx="544360" cy="1900989"/>
+                </a:xfrm>
+              </p:grpSpPr>
+              <p:sp>
+                <p:nvSpPr>
+                  <p:cNvPr id="31" name="Rectangle: Rounded Corners 30">
+                    <a:extLst>
+                      <a:ext uri="{FF2B5EF4-FFF2-40B4-BE49-F238E27FC236}">
+                        <a16:creationId xmlns:a16="http://schemas.microsoft.com/office/drawing/2014/main" id="{9C1BD43C-3043-3C7B-3125-142BC70D4E72}"/>
+                      </a:ext>
+                    </a:extLst>
+                  </p:cNvPr>
+                  <p:cNvSpPr/>
+                  <p:nvPr/>
+                </p:nvSpPr>
+                <p:spPr>
+                  <a:xfrm>
+                    <a:off x="1685491" y="1299410"/>
+                    <a:ext cx="544360" cy="585537"/>
+                  </a:xfrm>
+                  <a:prstGeom prst="roundRect">
+                    <a:avLst/>
+                  </a:prstGeom>
+                  <a:solidFill>
+                    <a:schemeClr val="bg1">
+                      <a:lumMod val="95000"/>
+                    </a:schemeClr>
+                  </a:solidFill>
+                  <a:ln>
+                    <a:solidFill>
+                      <a:schemeClr val="tx1"/>
+                    </a:solidFill>
+                  </a:ln>
+                </p:spPr>
+                <p:style>
+                  <a:lnRef idx="2">
+                    <a:schemeClr val="accent1">
+                      <a:shade val="15000"/>
+                    </a:schemeClr>
+                  </a:lnRef>
+                  <a:fillRef idx="1">
+                    <a:schemeClr val="accent1"/>
+                  </a:fillRef>
+                  <a:effectRef idx="0">
+                    <a:schemeClr val="accent1"/>
+                  </a:effectRef>
+                  <a:fontRef idx="minor">
+                    <a:schemeClr val="lt1"/>
+                  </a:fontRef>
+                </p:style>
+                <p:txBody>
+                  <a:bodyPr rtlCol="0" anchor="ctr"/>
+                  <a:lstStyle/>
+                  <a:p>
+                    <a:pPr algn="ctr"/>
+                    <a:r>
+                      <a:rPr lang="en-US" dirty="0">
+                        <a:solidFill>
+                          <a:schemeClr val="tx1"/>
+                        </a:solidFill>
+                        <a:latin typeface="Times New Roman" panose="02020603050405020304" pitchFamily="18" charset="0"/>
+                        <a:cs typeface="Times New Roman" panose="02020603050405020304" pitchFamily="18" charset="0"/>
+                      </a:rPr>
+                      <a:t>UE</a:t>
+                    </a:r>
+                  </a:p>
+                </p:txBody>
+              </p:sp>
+              <p:sp>
+                <p:nvSpPr>
+                  <p:cNvPr id="32" name="Rectangle: Rounded Corners 31">
+                    <a:extLst>
+                      <a:ext uri="{FF2B5EF4-FFF2-40B4-BE49-F238E27FC236}">
+                        <a16:creationId xmlns:a16="http://schemas.microsoft.com/office/drawing/2014/main" id="{B65964A7-AD4C-06E4-EE76-FBD966EB7A0A}"/>
+                      </a:ext>
+                    </a:extLst>
+                  </p:cNvPr>
+                  <p:cNvSpPr/>
+                  <p:nvPr/>
+                </p:nvSpPr>
+                <p:spPr>
+                  <a:xfrm>
+                    <a:off x="1685491" y="1957136"/>
+                    <a:ext cx="544360" cy="585537"/>
+                  </a:xfrm>
+                  <a:prstGeom prst="roundRect">
+                    <a:avLst/>
+                  </a:prstGeom>
+                  <a:solidFill>
+                    <a:schemeClr val="bg1">
+                      <a:lumMod val="95000"/>
+                    </a:schemeClr>
+                  </a:solidFill>
+                  <a:ln>
+                    <a:solidFill>
+                      <a:schemeClr val="tx1"/>
+                    </a:solidFill>
+                  </a:ln>
+                </p:spPr>
+                <p:style>
+                  <a:lnRef idx="2">
+                    <a:schemeClr val="accent1">
+                      <a:shade val="15000"/>
+                    </a:schemeClr>
+                  </a:lnRef>
+                  <a:fillRef idx="1">
+                    <a:schemeClr val="accent1"/>
+                  </a:fillRef>
+                  <a:effectRef idx="0">
+                    <a:schemeClr val="accent1"/>
+                  </a:effectRef>
+                  <a:fontRef idx="minor">
+                    <a:schemeClr val="lt1"/>
+                  </a:fontRef>
+                </p:style>
+                <p:txBody>
+                  <a:bodyPr rtlCol="0" anchor="ctr"/>
+                  <a:lstStyle/>
+                  <a:p>
+                    <a:pPr algn="ctr"/>
+                    <a:r>
+                      <a:rPr lang="en-US" dirty="0">
+                        <a:solidFill>
+                          <a:schemeClr val="tx1"/>
+                        </a:solidFill>
+                        <a:latin typeface="Times New Roman" panose="02020603050405020304" pitchFamily="18" charset="0"/>
+                        <a:cs typeface="Times New Roman" panose="02020603050405020304" pitchFamily="18" charset="0"/>
+                      </a:rPr>
+                      <a:t>UE</a:t>
+                    </a:r>
+                  </a:p>
+                </p:txBody>
+              </p:sp>
+              <p:sp>
+                <p:nvSpPr>
+                  <p:cNvPr id="33" name="Rectangle: Rounded Corners 32">
+                    <a:extLst>
+                      <a:ext uri="{FF2B5EF4-FFF2-40B4-BE49-F238E27FC236}">
+                        <a16:creationId xmlns:a16="http://schemas.microsoft.com/office/drawing/2014/main" id="{B68994C4-8220-556E-F23B-83BE69B55D25}"/>
+                      </a:ext>
+                    </a:extLst>
+                  </p:cNvPr>
+                  <p:cNvSpPr/>
+                  <p:nvPr/>
+                </p:nvSpPr>
+                <p:spPr>
+                  <a:xfrm>
+                    <a:off x="1685491" y="2614862"/>
+                    <a:ext cx="544360" cy="585537"/>
+                  </a:xfrm>
+                  <a:prstGeom prst="roundRect">
+                    <a:avLst/>
+                  </a:prstGeom>
+                  <a:solidFill>
+                    <a:schemeClr val="bg1">
+                      <a:lumMod val="95000"/>
+                    </a:schemeClr>
+                  </a:solidFill>
+                  <a:ln>
+                    <a:solidFill>
+                      <a:schemeClr val="tx1"/>
+                    </a:solidFill>
+                  </a:ln>
+                </p:spPr>
+                <p:style>
+                  <a:lnRef idx="2">
+                    <a:schemeClr val="accent1">
+                      <a:shade val="15000"/>
+                    </a:schemeClr>
+                  </a:lnRef>
+                  <a:fillRef idx="1">
+                    <a:schemeClr val="accent1"/>
+                  </a:fillRef>
+                  <a:effectRef idx="0">
+                    <a:schemeClr val="accent1"/>
+                  </a:effectRef>
+                  <a:fontRef idx="minor">
+                    <a:schemeClr val="lt1"/>
+                  </a:fontRef>
+                </p:style>
+                <p:txBody>
+                  <a:bodyPr rtlCol="0" anchor="ctr"/>
+                  <a:lstStyle/>
+                  <a:p>
+                    <a:pPr algn="ctr"/>
+                    <a:r>
+                      <a:rPr lang="en-US" dirty="0">
+                        <a:solidFill>
+                          <a:schemeClr val="tx1"/>
+                        </a:solidFill>
+                        <a:latin typeface="Times New Roman" panose="02020603050405020304" pitchFamily="18" charset="0"/>
+                        <a:cs typeface="Times New Roman" panose="02020603050405020304" pitchFamily="18" charset="0"/>
+                      </a:rPr>
+                      <a:t>UE</a:t>
+                    </a:r>
+                  </a:p>
+                </p:txBody>
+              </p:sp>
+            </p:grpSp>
+            <p:cxnSp>
+              <p:nvCxnSpPr>
+                <p:cNvPr id="28" name="Straight Connector 27">
+                  <a:extLst>
+                    <a:ext uri="{FF2B5EF4-FFF2-40B4-BE49-F238E27FC236}">
+                      <a16:creationId xmlns:a16="http://schemas.microsoft.com/office/drawing/2014/main" id="{C09AA416-09AC-3AFE-B0CF-6892D52A2A85}"/>
+                    </a:ext>
+                  </a:extLst>
+                </p:cNvPr>
+                <p:cNvCxnSpPr>
+                  <a:cxnSpLocks/>
+                  <a:stCxn id="24" idx="1"/>
+                  <a:endCxn id="31" idx="3"/>
+                </p:cNvCxnSpPr>
+                <p:nvPr/>
+              </p:nvCxnSpPr>
+              <p:spPr>
+                <a:xfrm flipH="1" flipV="1">
+                  <a:off x="1996171" y="1592179"/>
+                  <a:ext cx="337953" cy="660617"/>
+                </a:xfrm>
+                <a:prstGeom prst="line">
+                  <a:avLst/>
+                </a:prstGeom>
+              </p:spPr>
+              <p:style>
+                <a:lnRef idx="2">
+                  <a:schemeClr val="dk1"/>
+                </a:lnRef>
+                <a:fillRef idx="0">
+                  <a:schemeClr val="dk1"/>
+                </a:fillRef>
+                <a:effectRef idx="1">
+                  <a:schemeClr val="dk1"/>
+                </a:effectRef>
+                <a:fontRef idx="minor">
+                  <a:schemeClr val="tx1"/>
+                </a:fontRef>
+              </p:style>
+            </p:cxnSp>
+            <p:cxnSp>
+              <p:nvCxnSpPr>
+                <p:cNvPr id="29" name="Straight Connector 28">
+                  <a:extLst>
+                    <a:ext uri="{FF2B5EF4-FFF2-40B4-BE49-F238E27FC236}">
+                      <a16:creationId xmlns:a16="http://schemas.microsoft.com/office/drawing/2014/main" id="{D22EF14C-54AA-A9CE-D455-7C9A1F66C8DA}"/>
+                    </a:ext>
+                  </a:extLst>
+                </p:cNvPr>
+                <p:cNvCxnSpPr>
+                  <a:cxnSpLocks/>
+                  <a:stCxn id="24" idx="1"/>
+                  <a:endCxn id="32" idx="3"/>
+                </p:cNvCxnSpPr>
+                <p:nvPr/>
+              </p:nvCxnSpPr>
+              <p:spPr>
+                <a:xfrm flipH="1" flipV="1">
+                  <a:off x="1996171" y="2249904"/>
+                  <a:ext cx="337953" cy="2891"/>
+                </a:xfrm>
+                <a:prstGeom prst="line">
+                  <a:avLst/>
+                </a:prstGeom>
+              </p:spPr>
+              <p:style>
+                <a:lnRef idx="2">
+                  <a:schemeClr val="dk1"/>
+                </a:lnRef>
+                <a:fillRef idx="0">
+                  <a:schemeClr val="dk1"/>
+                </a:fillRef>
+                <a:effectRef idx="1">
+                  <a:schemeClr val="dk1"/>
+                </a:effectRef>
+                <a:fontRef idx="minor">
+                  <a:schemeClr val="tx1"/>
+                </a:fontRef>
+              </p:style>
+            </p:cxnSp>
+            <p:cxnSp>
+              <p:nvCxnSpPr>
+                <p:cNvPr id="30" name="Straight Connector 29">
+                  <a:extLst>
+                    <a:ext uri="{FF2B5EF4-FFF2-40B4-BE49-F238E27FC236}">
+                      <a16:creationId xmlns:a16="http://schemas.microsoft.com/office/drawing/2014/main" id="{DFDDB555-A935-B7ED-235F-75C1F2EC96A1}"/>
+                    </a:ext>
+                  </a:extLst>
+                </p:cNvPr>
+                <p:cNvCxnSpPr>
+                  <a:cxnSpLocks/>
+                  <a:stCxn id="24" idx="1"/>
+                  <a:endCxn id="33" idx="3"/>
+                </p:cNvCxnSpPr>
+                <p:nvPr/>
+              </p:nvCxnSpPr>
+              <p:spPr>
+                <a:xfrm flipH="1">
+                  <a:off x="1996171" y="2252796"/>
+                  <a:ext cx="337953" cy="654834"/>
+                </a:xfrm>
+                <a:prstGeom prst="line">
+                  <a:avLst/>
+                </a:prstGeom>
+              </p:spPr>
+              <p:style>
+                <a:lnRef idx="2">
+                  <a:schemeClr val="dk1"/>
+                </a:lnRef>
+                <a:fillRef idx="0">
+                  <a:schemeClr val="dk1"/>
+                </a:fillRef>
+                <a:effectRef idx="1">
+                  <a:schemeClr val="dk1"/>
+                </a:effectRef>
+                <a:fontRef idx="minor">
+                  <a:schemeClr val="tx1"/>
+                </a:fontRef>
+              </p:style>
+            </p:cxnSp>
+          </p:grpSp>
+          <p:grpSp>
+            <p:nvGrpSpPr>
+              <p:cNvPr id="23" name="Group 22">
+                <a:extLst>
+                  <a:ext uri="{FF2B5EF4-FFF2-40B4-BE49-F238E27FC236}">
+                    <a16:creationId xmlns:a16="http://schemas.microsoft.com/office/drawing/2014/main" id="{213BF788-E53F-9CD1-CE9C-08BF62AD3EBE}"/>
+                  </a:ext>
+                </a:extLst>
+              </p:cNvPr>
+              <p:cNvGrpSpPr/>
+              <p:nvPr/>
+            </p:nvGrpSpPr>
+            <p:grpSpPr>
+              <a:xfrm>
+                <a:off x="2300585" y="1930839"/>
+                <a:ext cx="853874" cy="614726"/>
+                <a:chOff x="2300585" y="1930839"/>
+                <a:chExt cx="853874" cy="614726"/>
+              </a:xfrm>
+            </p:grpSpPr>
+            <p:sp>
+              <p:nvSpPr>
+                <p:cNvPr id="24" name="Rectangle: Rounded Corners 23">
+                  <a:extLst>
+                    <a:ext uri="{FF2B5EF4-FFF2-40B4-BE49-F238E27FC236}">
+                      <a16:creationId xmlns:a16="http://schemas.microsoft.com/office/drawing/2014/main" id="{94B784CE-4CED-0B2F-C06E-13BA5C6D26B1}"/>
+                    </a:ext>
+                  </a:extLst>
+                </p:cNvPr>
+                <p:cNvSpPr/>
+                <p:nvPr/>
+              </p:nvSpPr>
+              <p:spPr>
+                <a:xfrm>
+                  <a:off x="2334124" y="1960028"/>
+                  <a:ext cx="753981" cy="585537"/>
+                </a:xfrm>
+                <a:prstGeom prst="roundRect">
+                  <a:avLst/>
+                </a:prstGeom>
+                <a:solidFill>
+                  <a:schemeClr val="bg1">
+                    <a:lumMod val="95000"/>
+                  </a:schemeClr>
+                </a:solidFill>
+                <a:ln>
+                  <a:solidFill>
+                    <a:schemeClr val="tx1"/>
+                  </a:solidFill>
+                </a:ln>
+              </p:spPr>
+              <p:style>
+                <a:lnRef idx="2">
+                  <a:schemeClr val="accent1">
+                    <a:shade val="15000"/>
+                  </a:schemeClr>
+                </a:lnRef>
+                <a:fillRef idx="1">
+                  <a:schemeClr val="accent1"/>
+                </a:fillRef>
+                <a:effectRef idx="0">
+                  <a:schemeClr val="accent1"/>
+                </a:effectRef>
+                <a:fontRef idx="minor">
+                  <a:schemeClr val="lt1"/>
+                </a:fontRef>
+              </p:style>
+              <p:txBody>
+                <a:bodyPr rtlCol="0" anchor="ctr"/>
+                <a:lstStyle/>
+                <a:p>
+                  <a:pPr algn="ctr"/>
+                  <a:r>
+                    <a:rPr lang="en-US" dirty="0">
+                      <a:solidFill>
+                        <a:schemeClr val="tx1"/>
+                      </a:solidFill>
+                      <a:latin typeface="Times New Roman" panose="02020603050405020304" pitchFamily="18" charset="0"/>
+                      <a:cs typeface="Times New Roman" panose="02020603050405020304" pitchFamily="18" charset="0"/>
+                    </a:rPr>
+                    <a:t>gNB</a:t>
+                  </a:r>
+                </a:p>
+              </p:txBody>
+            </p:sp>
+            <p:sp>
+              <p:nvSpPr>
+                <p:cNvPr id="25" name="Rectangle: Rounded Corners 24">
+                  <a:extLst>
+                    <a:ext uri="{FF2B5EF4-FFF2-40B4-BE49-F238E27FC236}">
+                      <a16:creationId xmlns:a16="http://schemas.microsoft.com/office/drawing/2014/main" id="{F9DBE718-B94B-F16E-6147-9CDFF056B02C}"/>
+                    </a:ext>
+                  </a:extLst>
+                </p:cNvPr>
+                <p:cNvSpPr/>
+                <p:nvPr/>
+              </p:nvSpPr>
+              <p:spPr>
+                <a:xfrm>
+                  <a:off x="3012756" y="2155382"/>
+                  <a:ext cx="141703" cy="189443"/>
+                </a:xfrm>
+                <a:prstGeom prst="roundRect">
+                  <a:avLst>
+                    <a:gd name="adj" fmla="val 25490"/>
+                  </a:avLst>
+                </a:prstGeom>
+                <a:ln>
+                  <a:noFill/>
+                </a:ln>
+              </p:spPr>
+              <p:style>
+                <a:lnRef idx="2">
+                  <a:schemeClr val="dk1">
+                    <a:shade val="15000"/>
+                  </a:schemeClr>
+                </a:lnRef>
+                <a:fillRef idx="1">
+                  <a:schemeClr val="dk1"/>
+                </a:fillRef>
+                <a:effectRef idx="0">
+                  <a:schemeClr val="dk1"/>
+                </a:effectRef>
+                <a:fontRef idx="minor">
+                  <a:schemeClr val="lt1"/>
+                </a:fontRef>
+              </p:style>
+              <p:txBody>
+                <a:bodyPr rtlCol="0" anchor="ctr"/>
+                <a:lstStyle/>
+                <a:p>
+                  <a:pPr algn="ctr"/>
+                  <a:endParaRPr lang="en-US"/>
+                </a:p>
+              </p:txBody>
+            </p:sp>
+            <p:sp>
+              <p:nvSpPr>
+                <p:cNvPr id="26" name="TextBox 25">
+                  <a:extLst>
+                    <a:ext uri="{FF2B5EF4-FFF2-40B4-BE49-F238E27FC236}">
+                      <a16:creationId xmlns:a16="http://schemas.microsoft.com/office/drawing/2014/main" id="{53C01354-0AB0-265D-E19E-ACCC3B58038F}"/>
+                    </a:ext>
+                  </a:extLst>
+                </p:cNvPr>
+                <p:cNvSpPr txBox="1"/>
+                <p:nvPr/>
+              </p:nvSpPr>
+              <p:spPr>
+                <a:xfrm>
+                  <a:off x="2300585" y="1930839"/>
+                  <a:ext cx="821059" cy="200055"/>
+                </a:xfrm>
+                <a:prstGeom prst="rect">
+                  <a:avLst/>
+                </a:prstGeom>
+                <a:noFill/>
+              </p:spPr>
+              <p:txBody>
+                <a:bodyPr wrap="none" rtlCol="0">
+                  <a:spAutoFit/>
+                </a:bodyPr>
+                <a:lstStyle/>
+                <a:p>
+                  <a:r>
+                    <a:rPr lang="en-US" sz="700" dirty="0">
+                      <a:latin typeface="Times New Roman" panose="02020603050405020304" pitchFamily="18" charset="0"/>
+                      <a:cs typeface="Times New Roman" panose="02020603050405020304" pitchFamily="18" charset="0"/>
+                    </a:rPr>
+                    <a:t>OpenAirInterface</a:t>
+                  </a:r>
+                </a:p>
+              </p:txBody>
+            </p:sp>
+          </p:grpSp>
+        </p:grpSp>
+        <p:grpSp>
+          <p:nvGrpSpPr>
+            <p:cNvPr id="9" name="Group 8">
+              <a:extLst>
+                <a:ext uri="{FF2B5EF4-FFF2-40B4-BE49-F238E27FC236}">
+                  <a16:creationId xmlns:a16="http://schemas.microsoft.com/office/drawing/2014/main" id="{F56BA1C0-C4BB-BE6E-09E5-EDB3FA25F306}"/>
+                </a:ext>
+              </a:extLst>
+            </p:cNvPr>
+            <p:cNvGrpSpPr/>
+            <p:nvPr/>
+          </p:nvGrpSpPr>
+          <p:grpSpPr>
+            <a:xfrm>
+              <a:off x="5495386" y="3116511"/>
+              <a:ext cx="1380443" cy="614726"/>
+              <a:chOff x="3837589" y="1930839"/>
+              <a:chExt cx="1380443" cy="614726"/>
+            </a:xfrm>
+          </p:grpSpPr>
+          <p:sp>
+            <p:nvSpPr>
+              <p:cNvPr id="20" name="Rectangle: Rounded Corners 19">
+                <a:extLst>
+                  <a:ext uri="{FF2B5EF4-FFF2-40B4-BE49-F238E27FC236}">
+                    <a16:creationId xmlns:a16="http://schemas.microsoft.com/office/drawing/2014/main" id="{B04486F9-8CB3-BA55-5E3A-51043C1161B5}"/>
+                  </a:ext>
+                </a:extLst>
+              </p:cNvPr>
+              <p:cNvSpPr/>
+              <p:nvPr/>
+            </p:nvSpPr>
+            <p:spPr>
+              <a:xfrm>
+                <a:off x="3837589" y="1960028"/>
+                <a:ext cx="1380443" cy="585537"/>
+              </a:xfrm>
+              <a:prstGeom prst="roundRect">
+                <a:avLst/>
+              </a:prstGeom>
+              <a:solidFill>
+                <a:schemeClr val="bg1">
+                  <a:lumMod val="95000"/>
+                </a:schemeClr>
+              </a:solidFill>
+              <a:ln>
+                <a:solidFill>
+                  <a:schemeClr val="tx1"/>
+                </a:solidFill>
+              </a:ln>
+            </p:spPr>
+            <p:style>
+              <a:lnRef idx="2">
+                <a:schemeClr val="accent1">
+                  <a:shade val="15000"/>
+                </a:schemeClr>
+              </a:lnRef>
+              <a:fillRef idx="1">
+                <a:schemeClr val="accent1"/>
+              </a:fillRef>
+              <a:effectRef idx="0">
+                <a:schemeClr val="accent1"/>
+              </a:effectRef>
+              <a:fontRef idx="minor">
+                <a:schemeClr val="lt1"/>
+              </a:fontRef>
+            </p:style>
+            <p:txBody>
+              <a:bodyPr rtlCol="0" anchor="ctr"/>
+              <a:lstStyle/>
+              <a:p>
+                <a:pPr algn="ctr"/>
+                <a:r>
+                  <a:rPr lang="en-US" dirty="0">
+                    <a:solidFill>
+                      <a:schemeClr val="tx1"/>
+                    </a:solidFill>
+                    <a:latin typeface="Times New Roman" panose="02020603050405020304" pitchFamily="18" charset="0"/>
+                    <a:cs typeface="Times New Roman" panose="02020603050405020304" pitchFamily="18" charset="0"/>
+                  </a:rPr>
+                  <a:t>O1 Adapter</a:t>
+                </a:r>
+              </a:p>
+            </p:txBody>
+          </p:sp>
+          <p:sp>
+            <p:nvSpPr>
+              <p:cNvPr id="21" name="TextBox 20">
+                <a:extLst>
+                  <a:ext uri="{FF2B5EF4-FFF2-40B4-BE49-F238E27FC236}">
+                    <a16:creationId xmlns:a16="http://schemas.microsoft.com/office/drawing/2014/main" id="{B01172F1-265A-3ACE-F222-8B3F812FE109}"/>
+                  </a:ext>
+                </a:extLst>
+              </p:cNvPr>
+              <p:cNvSpPr txBox="1"/>
+              <p:nvPr/>
+            </p:nvSpPr>
+            <p:spPr>
+              <a:xfrm>
+                <a:off x="4117280" y="1930839"/>
+                <a:ext cx="821059" cy="200055"/>
+              </a:xfrm>
+              <a:prstGeom prst="rect">
+                <a:avLst/>
+              </a:prstGeom>
+              <a:noFill/>
+            </p:spPr>
+            <p:txBody>
+              <a:bodyPr wrap="none" rtlCol="0">
+                <a:spAutoFit/>
+              </a:bodyPr>
+              <a:lstStyle/>
+              <a:p>
+                <a:r>
+                  <a:rPr lang="en-US" sz="700" dirty="0">
+                    <a:latin typeface="Times New Roman" panose="02020603050405020304" pitchFamily="18" charset="0"/>
+                    <a:cs typeface="Times New Roman" panose="02020603050405020304" pitchFamily="18" charset="0"/>
+                  </a:rPr>
+                  <a:t>OpenAirInterface</a:t>
+                </a:r>
+              </a:p>
+            </p:txBody>
+          </p:sp>
+        </p:grpSp>
+        <p:sp>
+          <p:nvSpPr>
+            <p:cNvPr id="10" name="Speech Bubble: Rectangle with Corners Rounded 9">
+              <a:extLst>
+                <a:ext uri="{FF2B5EF4-FFF2-40B4-BE49-F238E27FC236}">
+                  <a16:creationId xmlns:a16="http://schemas.microsoft.com/office/drawing/2014/main" id="{7C8768EE-019B-4786-889B-241D7BEA5029}"/>
+                </a:ext>
+              </a:extLst>
+            </p:cNvPr>
+            <p:cNvSpPr/>
+            <p:nvPr/>
+          </p:nvSpPr>
+          <p:spPr>
+            <a:xfrm>
+              <a:off x="4745901" y="2701839"/>
+              <a:ext cx="1580684" cy="300565"/>
+            </a:xfrm>
+            <a:prstGeom prst="wedgeRoundRectCallout">
+              <a:avLst>
+                <a:gd name="adj1" fmla="val -44446"/>
+                <a:gd name="adj2" fmla="val 155070"/>
+                <a:gd name="adj3" fmla="val 16667"/>
+              </a:avLst>
+            </a:prstGeom>
+            <a:solidFill>
+              <a:schemeClr val="bg1">
+                <a:lumMod val="95000"/>
+              </a:schemeClr>
+            </a:solidFill>
+          </p:spPr>
+          <p:style>
+            <a:lnRef idx="2">
+              <a:schemeClr val="accent1">
+                <a:shade val="15000"/>
+              </a:schemeClr>
+            </a:lnRef>
+            <a:fillRef idx="1">
+              <a:schemeClr val="accent1"/>
+            </a:fillRef>
+            <a:effectRef idx="0">
+              <a:schemeClr val="accent1"/>
+            </a:effectRef>
+            <a:fontRef idx="minor">
+              <a:schemeClr val="lt1"/>
+            </a:fontRef>
+          </p:style>
+          <p:txBody>
+            <a:bodyPr rtlCol="0" anchor="ctr"/>
+            <a:lstStyle/>
+            <a:p>
+              <a:pPr algn="ctr"/>
+              <a:r>
+                <a:rPr lang="en-US" dirty="0">
+                  <a:solidFill>
+                    <a:schemeClr val="tx1"/>
+                  </a:solidFill>
+                  <a:latin typeface="Times New Roman" panose="02020603050405020304" pitchFamily="18" charset="0"/>
+                  <a:cs typeface="Times New Roman" panose="02020603050405020304" pitchFamily="18" charset="0"/>
+                </a:rPr>
+                <a:t>Telnet Server</a:t>
+              </a:r>
+            </a:p>
+          </p:txBody>
+        </p:sp>
+        <p:cxnSp>
+          <p:nvCxnSpPr>
+            <p:cNvPr id="11" name="Straight Connector 10">
+              <a:extLst>
+                <a:ext uri="{FF2B5EF4-FFF2-40B4-BE49-F238E27FC236}">
+                  <a16:creationId xmlns:a16="http://schemas.microsoft.com/office/drawing/2014/main" id="{7F654B56-D0FE-9705-347A-E9A0C7259973}"/>
+                </a:ext>
+              </a:extLst>
+            </p:cNvPr>
+            <p:cNvCxnSpPr>
+              <a:cxnSpLocks/>
+              <a:stCxn id="18" idx="1"/>
+            </p:cNvCxnSpPr>
+            <p:nvPr/>
+          </p:nvCxnSpPr>
+          <p:spPr>
+            <a:xfrm flipH="1" flipV="1">
+              <a:off x="6875829" y="3435577"/>
+              <a:ext cx="749484" cy="367833"/>
+            </a:xfrm>
+            <a:prstGeom prst="line">
+              <a:avLst/>
+            </a:prstGeom>
+            <a:ln>
+              <a:headEnd type="arrow" w="med" len="med"/>
+              <a:tailEnd type="none" w="med" len="med"/>
+            </a:ln>
+          </p:spPr>
+          <p:style>
+            <a:lnRef idx="2">
+              <a:schemeClr val="dk1"/>
+            </a:lnRef>
+            <a:fillRef idx="0">
+              <a:schemeClr val="dk1"/>
+            </a:fillRef>
+            <a:effectRef idx="1">
+              <a:schemeClr val="dk1"/>
+            </a:effectRef>
+            <a:fontRef idx="minor">
+              <a:schemeClr val="tx1"/>
+            </a:fontRef>
+          </p:style>
+        </p:cxnSp>
+        <p:sp>
+          <p:nvSpPr>
+            <p:cNvPr id="12" name="Rectangle: Rounded Corners 11">
+              <a:extLst>
+                <a:ext uri="{FF2B5EF4-FFF2-40B4-BE49-F238E27FC236}">
+                  <a16:creationId xmlns:a16="http://schemas.microsoft.com/office/drawing/2014/main" id="{BF76B1D6-A203-E77C-4D53-AC36FF89A215}"/>
+                </a:ext>
+              </a:extLst>
+            </p:cNvPr>
+            <p:cNvSpPr/>
+            <p:nvPr/>
+          </p:nvSpPr>
+          <p:spPr>
+            <a:xfrm>
+              <a:off x="6804977" y="3367179"/>
+              <a:ext cx="141703" cy="141703"/>
+            </a:xfrm>
+            <a:prstGeom prst="roundRect">
+              <a:avLst>
+                <a:gd name="adj" fmla="val 25490"/>
+              </a:avLst>
+            </a:prstGeom>
+            <a:ln>
+              <a:noFill/>
+            </a:ln>
+          </p:spPr>
+          <p:style>
+            <a:lnRef idx="2">
+              <a:schemeClr val="dk1">
+                <a:shade val="15000"/>
+              </a:schemeClr>
+            </a:lnRef>
+            <a:fillRef idx="1">
+              <a:schemeClr val="dk1"/>
+            </a:fillRef>
+            <a:effectRef idx="0">
+              <a:schemeClr val="dk1"/>
+            </a:effectRef>
+            <a:fontRef idx="minor">
+              <a:schemeClr val="lt1"/>
+            </a:fontRef>
+          </p:style>
+          <p:txBody>
+            <a:bodyPr rtlCol="0" anchor="ctr"/>
+            <a:lstStyle/>
+            <a:p>
+              <a:pPr algn="ctr"/>
+              <a:endParaRPr lang="en-US"/>
+            </a:p>
+          </p:txBody>
+        </p:sp>
+        <p:sp>
+          <p:nvSpPr>
+            <p:cNvPr id="13" name="Speech Bubble: Rectangle with Corners Rounded 12">
+              <a:extLst>
+                <a:ext uri="{FF2B5EF4-FFF2-40B4-BE49-F238E27FC236}">
+                  <a16:creationId xmlns:a16="http://schemas.microsoft.com/office/drawing/2014/main" id="{3F54D99C-840C-00E9-D78A-966783930513}"/>
+                </a:ext>
+              </a:extLst>
+            </p:cNvPr>
+            <p:cNvSpPr/>
+            <p:nvPr/>
+          </p:nvSpPr>
+          <p:spPr>
+            <a:xfrm flipH="1">
+              <a:off x="5072518" y="3873064"/>
+              <a:ext cx="1939420" cy="300565"/>
+            </a:xfrm>
+            <a:prstGeom prst="wedgeRoundRectCallout">
+              <a:avLst>
+                <a:gd name="adj1" fmla="val -39426"/>
+                <a:gd name="adj2" fmla="val -148622"/>
+                <a:gd name="adj3" fmla="val 16667"/>
+              </a:avLst>
+            </a:prstGeom>
+            <a:solidFill>
+              <a:schemeClr val="bg1">
+                <a:lumMod val="95000"/>
+              </a:schemeClr>
+            </a:solidFill>
+          </p:spPr>
+          <p:style>
+            <a:lnRef idx="2">
+              <a:schemeClr val="accent1">
+                <a:shade val="15000"/>
+              </a:schemeClr>
+            </a:lnRef>
+            <a:fillRef idx="1">
+              <a:schemeClr val="accent1"/>
+            </a:fillRef>
+            <a:effectRef idx="0">
+              <a:schemeClr val="accent1"/>
+            </a:effectRef>
+            <a:fontRef idx="minor">
+              <a:schemeClr val="lt1"/>
+            </a:fontRef>
+          </p:style>
+          <p:txBody>
+            <a:bodyPr rtlCol="0" anchor="ctr"/>
+            <a:lstStyle/>
+            <a:p>
+              <a:pPr algn="ctr"/>
+              <a:r>
+                <a:rPr lang="en-US" dirty="0">
+                  <a:solidFill>
+                    <a:schemeClr val="tx1"/>
+                  </a:solidFill>
+                  <a:latin typeface="Times New Roman" panose="02020603050405020304" pitchFamily="18" charset="0"/>
+                  <a:cs typeface="Times New Roman" panose="02020603050405020304" pitchFamily="18" charset="0"/>
+                </a:rPr>
+                <a:t>NETCONF Server</a:t>
+              </a:r>
+            </a:p>
+          </p:txBody>
+        </p:sp>
+        <p:cxnSp>
+          <p:nvCxnSpPr>
+            <p:cNvPr id="15" name="Straight Connector 14">
+              <a:extLst>
+                <a:ext uri="{FF2B5EF4-FFF2-40B4-BE49-F238E27FC236}">
+                  <a16:creationId xmlns:a16="http://schemas.microsoft.com/office/drawing/2014/main" id="{224AB07A-1A5B-5ACF-B65B-816EAAF58EA1}"/>
+                </a:ext>
+              </a:extLst>
+            </p:cNvPr>
+            <p:cNvCxnSpPr>
+              <a:cxnSpLocks/>
+              <a:endCxn id="18" idx="3"/>
+            </p:cNvCxnSpPr>
+            <p:nvPr/>
+          </p:nvCxnSpPr>
+          <p:spPr>
+            <a:xfrm flipH="1">
+              <a:off x="8631767" y="3803410"/>
+              <a:ext cx="249790" cy="0"/>
+            </a:xfrm>
+            <a:prstGeom prst="line">
+              <a:avLst/>
+            </a:prstGeom>
+          </p:spPr>
+          <p:style>
+            <a:lnRef idx="2">
+              <a:schemeClr val="dk1"/>
+            </a:lnRef>
+            <a:fillRef idx="0">
+              <a:schemeClr val="dk1"/>
+            </a:fillRef>
+            <a:effectRef idx="1">
+              <a:schemeClr val="dk1"/>
+            </a:effectRef>
+            <a:fontRef idx="minor">
+              <a:schemeClr val="tx1"/>
+            </a:fontRef>
+          </p:style>
+        </p:cxnSp>
+        <p:grpSp>
+          <p:nvGrpSpPr>
+            <p:cNvPr id="16" name="Group 15">
+              <a:extLst>
+                <a:ext uri="{FF2B5EF4-FFF2-40B4-BE49-F238E27FC236}">
+                  <a16:creationId xmlns:a16="http://schemas.microsoft.com/office/drawing/2014/main" id="{7E15130A-2F5A-AC26-7CB1-723DD14E6E91}"/>
+                </a:ext>
+              </a:extLst>
+            </p:cNvPr>
+            <p:cNvGrpSpPr/>
+            <p:nvPr/>
+          </p:nvGrpSpPr>
+          <p:grpSpPr>
+            <a:xfrm>
+              <a:off x="7625313" y="2774975"/>
+              <a:ext cx="1006454" cy="1321203"/>
+              <a:chOff x="5967516" y="1221469"/>
+              <a:chExt cx="1006454" cy="1321203"/>
+            </a:xfrm>
+          </p:grpSpPr>
+          <p:sp>
+            <p:nvSpPr>
+              <p:cNvPr id="18" name="Rectangle: Rounded Corners 17">
+                <a:extLst>
+                  <a:ext uri="{FF2B5EF4-FFF2-40B4-BE49-F238E27FC236}">
+                    <a16:creationId xmlns:a16="http://schemas.microsoft.com/office/drawing/2014/main" id="{3C91E35C-D730-4F2A-A6C0-F5DB23F0B23C}"/>
+                  </a:ext>
+                </a:extLst>
+              </p:cNvPr>
+              <p:cNvSpPr/>
+              <p:nvPr/>
+            </p:nvSpPr>
+            <p:spPr>
+              <a:xfrm>
+                <a:off x="5967516" y="1957135"/>
+                <a:ext cx="1006454" cy="585537"/>
+              </a:xfrm>
+              <a:prstGeom prst="roundRect">
+                <a:avLst/>
+              </a:prstGeom>
+              <a:solidFill>
+                <a:schemeClr val="bg1">
+                  <a:lumMod val="95000"/>
+                </a:schemeClr>
+              </a:solidFill>
+              <a:ln>
+                <a:solidFill>
+                  <a:schemeClr val="tx1"/>
+                </a:solidFill>
+              </a:ln>
+            </p:spPr>
+            <p:style>
+              <a:lnRef idx="2">
+                <a:schemeClr val="accent1">
+                  <a:shade val="15000"/>
+                </a:schemeClr>
+              </a:lnRef>
+              <a:fillRef idx="1">
+                <a:schemeClr val="accent1"/>
+              </a:fillRef>
+              <a:effectRef idx="0">
+                <a:schemeClr val="accent1"/>
+              </a:effectRef>
+              <a:fontRef idx="minor">
+                <a:schemeClr val="lt1"/>
+              </a:fontRef>
+            </p:style>
+            <p:txBody>
+              <a:bodyPr rtlCol="0" anchor="ctr"/>
+              <a:lstStyle/>
+              <a:p>
+                <a:pPr algn="ctr"/>
+                <a:r>
+                  <a:rPr lang="en-US" dirty="0">
+                    <a:solidFill>
+                      <a:schemeClr val="tx1"/>
+                    </a:solidFill>
+                    <a:latin typeface="Times New Roman" panose="02020603050405020304" pitchFamily="18" charset="0"/>
+                    <a:cs typeface="Times New Roman" panose="02020603050405020304" pitchFamily="18" charset="0"/>
+                  </a:rPr>
+                  <a:t>KPM Monitor</a:t>
+                </a:r>
+              </a:p>
+            </p:txBody>
+          </p:sp>
+          <p:sp>
+            <p:nvSpPr>
+              <p:cNvPr id="19" name="Rectangle: Rounded Corners 18">
+                <a:extLst>
+                  <a:ext uri="{FF2B5EF4-FFF2-40B4-BE49-F238E27FC236}">
+                    <a16:creationId xmlns:a16="http://schemas.microsoft.com/office/drawing/2014/main" id="{1447506B-A068-7CC5-68CB-A171CEE44055}"/>
+                  </a:ext>
+                </a:extLst>
+              </p:cNvPr>
+              <p:cNvSpPr/>
+              <p:nvPr/>
+            </p:nvSpPr>
+            <p:spPr>
+              <a:xfrm>
+                <a:off x="5967516" y="1221469"/>
+                <a:ext cx="1006454" cy="585537"/>
+              </a:xfrm>
+              <a:prstGeom prst="roundRect">
+                <a:avLst/>
+              </a:prstGeom>
+              <a:solidFill>
+                <a:schemeClr val="bg1">
+                  <a:lumMod val="95000"/>
+                </a:schemeClr>
+              </a:solidFill>
+              <a:ln>
+                <a:solidFill>
+                  <a:schemeClr val="tx1"/>
+                </a:solidFill>
+              </a:ln>
+            </p:spPr>
+            <p:style>
+              <a:lnRef idx="2">
+                <a:schemeClr val="accent1">
+                  <a:shade val="15000"/>
+                </a:schemeClr>
+              </a:lnRef>
+              <a:fillRef idx="1">
+                <a:schemeClr val="accent1"/>
+              </a:fillRef>
+              <a:effectRef idx="0">
+                <a:schemeClr val="accent1"/>
+              </a:effectRef>
+              <a:fontRef idx="minor">
+                <a:schemeClr val="lt1"/>
+              </a:fontRef>
+            </p:style>
+            <p:txBody>
+              <a:bodyPr rtlCol="0" anchor="ctr"/>
+              <a:lstStyle/>
+              <a:p>
+                <a:pPr algn="ctr"/>
+                <a:r>
+                  <a:rPr lang="en-US" dirty="0">
+                    <a:solidFill>
+                      <a:schemeClr val="tx1"/>
+                    </a:solidFill>
+                    <a:latin typeface="Times New Roman" panose="02020603050405020304" pitchFamily="18" charset="0"/>
+                    <a:cs typeface="Times New Roman" panose="02020603050405020304" pitchFamily="18" charset="0"/>
+                  </a:rPr>
+                  <a:t>RIC Control</a:t>
+                </a:r>
+              </a:p>
+            </p:txBody>
+          </p:sp>
+        </p:grpSp>
+        <p:cxnSp>
+          <p:nvCxnSpPr>
+            <p:cNvPr id="17" name="Straight Connector 16">
+              <a:extLst>
+                <a:ext uri="{FF2B5EF4-FFF2-40B4-BE49-F238E27FC236}">
+                  <a16:creationId xmlns:a16="http://schemas.microsoft.com/office/drawing/2014/main" id="{EB777EB9-626C-CCA4-B12F-E2A04D893EF7}"/>
+                </a:ext>
+              </a:extLst>
+            </p:cNvPr>
+            <p:cNvCxnSpPr>
+              <a:cxnSpLocks/>
+              <a:stCxn id="19" idx="1"/>
+              <a:endCxn id="12" idx="3"/>
+            </p:cNvCxnSpPr>
+            <p:nvPr/>
+          </p:nvCxnSpPr>
+          <p:spPr>
+            <a:xfrm flipH="1">
+              <a:off x="6946680" y="3067744"/>
+              <a:ext cx="678633" cy="370287"/>
+            </a:xfrm>
+            <a:prstGeom prst="line">
+              <a:avLst/>
+            </a:prstGeom>
+            <a:ln>
+              <a:headEnd type="none" w="med" len="med"/>
+              <a:tailEnd type="arrow" w="med" len="med"/>
+            </a:ln>
+          </p:spPr>
+          <p:style>
+            <a:lnRef idx="2">
+              <a:schemeClr val="dk1"/>
+            </a:lnRef>
+            <a:fillRef idx="0">
+              <a:schemeClr val="dk1"/>
+            </a:fillRef>
+            <a:effectRef idx="1">
+              <a:schemeClr val="dk1"/>
+            </a:effectRef>
+            <a:fontRef idx="minor">
+              <a:schemeClr val="tx1"/>
+            </a:fontRef>
+          </p:style>
+        </p:cxnSp>
+        <p:grpSp>
+          <p:nvGrpSpPr>
+            <p:cNvPr id="36" name="Group 35">
+              <a:extLst>
+                <a:ext uri="{FF2B5EF4-FFF2-40B4-BE49-F238E27FC236}">
+                  <a16:creationId xmlns:a16="http://schemas.microsoft.com/office/drawing/2014/main" id="{FA470185-A33C-DB86-47B5-AB273427E564}"/>
+                </a:ext>
+              </a:extLst>
+            </p:cNvPr>
+            <p:cNvGrpSpPr/>
+            <p:nvPr/>
+          </p:nvGrpSpPr>
+          <p:grpSpPr>
+            <a:xfrm>
+              <a:off x="8654914" y="3287694"/>
+              <a:ext cx="697627" cy="727425"/>
+              <a:chOff x="8654914" y="3287694"/>
+              <a:chExt cx="697627" cy="727425"/>
+            </a:xfrm>
+          </p:grpSpPr>
+          <p:pic>
+            <p:nvPicPr>
+              <p:cNvPr id="14" name="Graphic 13" descr="Database with solid fill">
+                <a:extLst>
+                  <a:ext uri="{FF2B5EF4-FFF2-40B4-BE49-F238E27FC236}">
+                    <a16:creationId xmlns:a16="http://schemas.microsoft.com/office/drawing/2014/main" id="{A1063F4F-21AC-0E37-2CC6-4FCEE9DD00A8}"/>
+                  </a:ext>
+                </a:extLst>
+              </p:cNvPr>
+              <p:cNvPicPr>
+                <a:picLocks noChangeAspect="1"/>
+              </p:cNvPicPr>
+              <p:nvPr/>
+            </p:nvPicPr>
+            <p:blipFill>
+              <a:blip r:embed="rId2">
+                <a:extLst>
+                  <a:ext uri="{96DAC541-7B7A-43D3-8B79-37D633B846F1}">
+                    <asvg:svgBlip xmlns:asvg="http://schemas.microsoft.com/office/drawing/2016/SVG/main" r:embed="rId3"/>
+                  </a:ext>
+                </a:extLst>
+              </a:blip>
+              <a:stretch>
+                <a:fillRect/>
+              </a:stretch>
+            </p:blipFill>
+            <p:spPr>
+              <a:xfrm>
+                <a:off x="8794046" y="3591699"/>
+                <a:ext cx="423420" cy="423420"/>
+              </a:xfrm>
+              <a:prstGeom prst="rect">
+                <a:avLst/>
+              </a:prstGeom>
+            </p:spPr>
+          </p:pic>
+          <p:sp>
+            <p:nvSpPr>
+              <p:cNvPr id="35" name="TextBox 34">
+                <a:extLst>
+                  <a:ext uri="{FF2B5EF4-FFF2-40B4-BE49-F238E27FC236}">
+                    <a16:creationId xmlns:a16="http://schemas.microsoft.com/office/drawing/2014/main" id="{890CD3CB-E954-E9B3-5E89-BD0233A8DCA5}"/>
+                  </a:ext>
+                </a:extLst>
+              </p:cNvPr>
+              <p:cNvSpPr txBox="1"/>
+              <p:nvPr/>
+            </p:nvSpPr>
+            <p:spPr>
+              <a:xfrm>
+                <a:off x="8654914" y="3287694"/>
+                <a:ext cx="697627" cy="369332"/>
+              </a:xfrm>
+              <a:prstGeom prst="rect">
+                <a:avLst/>
+              </a:prstGeom>
+              <a:noFill/>
+            </p:spPr>
+            <p:txBody>
+              <a:bodyPr wrap="none" rtlCol="0">
+                <a:spAutoFit/>
+              </a:bodyPr>
+              <a:lstStyle/>
+              <a:p>
+                <a:r>
+                  <a:rPr lang="en-US" dirty="0">
+                    <a:latin typeface="Times New Roman" panose="02020603050405020304" pitchFamily="18" charset="0"/>
+                    <a:cs typeface="Times New Roman" panose="02020603050405020304" pitchFamily="18" charset="0"/>
+                  </a:rPr>
+                  <a:t>DME</a:t>
+                </a:r>
+              </a:p>
+            </p:txBody>
+          </p:sp>
+        </p:grpSp>
+      </p:grpSp>
+    </p:spTree>
+    <p:extLst>
+      <p:ext uri="{BB962C8B-B14F-4D97-AF65-F5344CB8AC3E}">
+        <p14:creationId xmlns:p14="http://schemas.microsoft.com/office/powerpoint/2010/main" val="3601091235"/>
       </p:ext>
     </p:extLst>
   </p:cSld>

--- a/RAN_Intelligent_Controllers/research/Diagrams.pptx
+++ b/RAN_Intelligent_Controllers/research/Diagrams.pptx
@@ -5,7 +5,7 @@
     <p:sldMasterId id="2147483648" r:id="rId1"/>
   </p:sldMasterIdLst>
   <p:sldIdLst>
-    <p:sldId id="257" r:id="rId2"/>
+    <p:sldId id="268" r:id="rId2"/>
     <p:sldId id="258" r:id="rId3"/>
     <p:sldId id="262" r:id="rId4"/>
     <p:sldId id="263" r:id="rId5"/>
@@ -265,7 +265,7 @@
           <a:p>
             <a:fld id="{2D1DF383-F48D-4C35-882C-8A26F25E24F6}" type="datetimeFigureOut">
               <a:rPr lang="en-US" smtClean="0"/>
-              <a:t>9/26/2025</a:t>
+              <a:t>11/13/2025</a:t>
             </a:fld>
             <a:endParaRPr lang="en-US"/>
           </a:p>
@@ -463,7 +463,7 @@
           <a:p>
             <a:fld id="{2D1DF383-F48D-4C35-882C-8A26F25E24F6}" type="datetimeFigureOut">
               <a:rPr lang="en-US" smtClean="0"/>
-              <a:t>9/26/2025</a:t>
+              <a:t>11/13/2025</a:t>
             </a:fld>
             <a:endParaRPr lang="en-US"/>
           </a:p>
@@ -671,7 +671,7 @@
           <a:p>
             <a:fld id="{2D1DF383-F48D-4C35-882C-8A26F25E24F6}" type="datetimeFigureOut">
               <a:rPr lang="en-US" smtClean="0"/>
-              <a:t>9/26/2025</a:t>
+              <a:t>11/13/2025</a:t>
             </a:fld>
             <a:endParaRPr lang="en-US"/>
           </a:p>
@@ -869,7 +869,7 @@
           <a:p>
             <a:fld id="{2D1DF383-F48D-4C35-882C-8A26F25E24F6}" type="datetimeFigureOut">
               <a:rPr lang="en-US" smtClean="0"/>
-              <a:t>9/26/2025</a:t>
+              <a:t>11/13/2025</a:t>
             </a:fld>
             <a:endParaRPr lang="en-US"/>
           </a:p>
@@ -1144,7 +1144,7 @@
           <a:p>
             <a:fld id="{2D1DF383-F48D-4C35-882C-8A26F25E24F6}" type="datetimeFigureOut">
               <a:rPr lang="en-US" smtClean="0"/>
-              <a:t>9/26/2025</a:t>
+              <a:t>11/13/2025</a:t>
             </a:fld>
             <a:endParaRPr lang="en-US"/>
           </a:p>
@@ -1409,7 +1409,7 @@
           <a:p>
             <a:fld id="{2D1DF383-F48D-4C35-882C-8A26F25E24F6}" type="datetimeFigureOut">
               <a:rPr lang="en-US" smtClean="0"/>
-              <a:t>9/26/2025</a:t>
+              <a:t>11/13/2025</a:t>
             </a:fld>
             <a:endParaRPr lang="en-US"/>
           </a:p>
@@ -1821,7 +1821,7 @@
           <a:p>
             <a:fld id="{2D1DF383-F48D-4C35-882C-8A26F25E24F6}" type="datetimeFigureOut">
               <a:rPr lang="en-US" smtClean="0"/>
-              <a:t>9/26/2025</a:t>
+              <a:t>11/13/2025</a:t>
             </a:fld>
             <a:endParaRPr lang="en-US"/>
           </a:p>
@@ -1962,7 +1962,7 @@
           <a:p>
             <a:fld id="{2D1DF383-F48D-4C35-882C-8A26F25E24F6}" type="datetimeFigureOut">
               <a:rPr lang="en-US" smtClean="0"/>
-              <a:t>9/26/2025</a:t>
+              <a:t>11/13/2025</a:t>
             </a:fld>
             <a:endParaRPr lang="en-US"/>
           </a:p>
@@ -2075,7 +2075,7 @@
           <a:p>
             <a:fld id="{2D1DF383-F48D-4C35-882C-8A26F25E24F6}" type="datetimeFigureOut">
               <a:rPr lang="en-US" smtClean="0"/>
-              <a:t>9/26/2025</a:t>
+              <a:t>11/13/2025</a:t>
             </a:fld>
             <a:endParaRPr lang="en-US"/>
           </a:p>
@@ -2386,7 +2386,7 @@
           <a:p>
             <a:fld id="{2D1DF383-F48D-4C35-882C-8A26F25E24F6}" type="datetimeFigureOut">
               <a:rPr lang="en-US" smtClean="0"/>
-              <a:t>9/26/2025</a:t>
+              <a:t>11/13/2025</a:t>
             </a:fld>
             <a:endParaRPr lang="en-US"/>
           </a:p>
@@ -2674,7 +2674,7 @@
           <a:p>
             <a:fld id="{2D1DF383-F48D-4C35-882C-8A26F25E24F6}" type="datetimeFigureOut">
               <a:rPr lang="en-US" smtClean="0"/>
-              <a:t>9/26/2025</a:t>
+              <a:t>11/13/2025</a:t>
             </a:fld>
             <a:endParaRPr lang="en-US"/>
           </a:p>
@@ -2915,7 +2915,7 @@
           <a:p>
             <a:fld id="{2D1DF383-F48D-4C35-882C-8A26F25E24F6}" type="datetimeFigureOut">
               <a:rPr lang="en-US" smtClean="0"/>
-              <a:t>9/26/2025</a:t>
+              <a:t>11/13/2025</a:t>
             </a:fld>
             <a:endParaRPr lang="en-US"/>
           </a:p>
@@ -3320,7 +3320,13 @@
   <p:cSld>
     <p:spTree>
       <p:nvGrpSpPr>
-        <p:cNvPr id="1" name=""/>
+        <p:cNvPr id="1" name="">
+          <a:extLst>
+            <a:ext uri="{FF2B5EF4-FFF2-40B4-BE49-F238E27FC236}">
+              <a16:creationId xmlns:a16="http://schemas.microsoft.com/office/drawing/2014/main" id="{DC934B10-6BE2-DDE4-0921-56E9F6A48114}"/>
+            </a:ext>
+          </a:extLst>
+        </p:cNvPr>
         <p:cNvGrpSpPr/>
         <p:nvPr/>
       </p:nvGrpSpPr>
@@ -3337,7 +3343,7 @@
           <p:cNvPr id="20" name="Group 19">
             <a:extLst>
               <a:ext uri="{FF2B5EF4-FFF2-40B4-BE49-F238E27FC236}">
-                <a16:creationId xmlns:a16="http://schemas.microsoft.com/office/drawing/2014/main" id="{A37AE9EC-B476-11AD-7BE2-0D56AF3945BE}"/>
+                <a16:creationId xmlns:a16="http://schemas.microsoft.com/office/drawing/2014/main" id="{ACE60489-66B9-A95C-9A12-954E4073475D}"/>
               </a:ext>
             </a:extLst>
           </p:cNvPr>
@@ -3347,9 +3353,9 @@
         <p:grpSpPr>
           <a:xfrm>
             <a:off x="2008561" y="1641915"/>
-            <a:ext cx="8174878" cy="3574169"/>
+            <a:ext cx="8148856" cy="3557833"/>
             <a:chOff x="2008561" y="1641915"/>
-            <a:chExt cx="8174878" cy="3574169"/>
+            <a:chExt cx="8148856" cy="3557833"/>
           </a:xfrm>
         </p:grpSpPr>
         <p:sp>
@@ -3357,7 +3363,7 @@
             <p:cNvPr id="50" name="Rectangle: Rounded Corners 49">
               <a:extLst>
                 <a:ext uri="{FF2B5EF4-FFF2-40B4-BE49-F238E27FC236}">
-                  <a16:creationId xmlns:a16="http://schemas.microsoft.com/office/drawing/2014/main" id="{2E48D905-0F3A-19B5-4417-05FA2C821E70}"/>
+                  <a16:creationId xmlns:a16="http://schemas.microsoft.com/office/drawing/2014/main" id="{0614AD0A-4522-93FF-6A28-19E268C54C5C}"/>
                 </a:ext>
               </a:extLst>
             </p:cNvPr>
@@ -3414,7 +3420,7 @@
             <p:cNvPr id="235" name="Group 234">
               <a:extLst>
                 <a:ext uri="{FF2B5EF4-FFF2-40B4-BE49-F238E27FC236}">
-                  <a16:creationId xmlns:a16="http://schemas.microsoft.com/office/drawing/2014/main" id="{B29F7496-083E-C96A-A54B-96580005B0F0}"/>
+                  <a16:creationId xmlns:a16="http://schemas.microsoft.com/office/drawing/2014/main" id="{AE003259-7600-E504-CA3C-45658A1D3C60}"/>
                 </a:ext>
               </a:extLst>
             </p:cNvPr>
@@ -3423,9 +3429,9 @@
           </p:nvGrpSpPr>
           <p:grpSpPr>
             <a:xfrm>
-              <a:off x="6873769" y="1749715"/>
+              <a:off x="6788425" y="1749715"/>
               <a:ext cx="3309670" cy="1432634"/>
-              <a:chOff x="4668372" y="1660130"/>
+              <a:chOff x="4583028" y="1660130"/>
               <a:chExt cx="3309670" cy="1432634"/>
             </a:xfrm>
           </p:grpSpPr>
@@ -3434,7 +3440,7 @@
               <p:cNvPr id="51" name="Rectangle: Rounded Corners 50">
                 <a:extLst>
                   <a:ext uri="{FF2B5EF4-FFF2-40B4-BE49-F238E27FC236}">
-                    <a16:creationId xmlns:a16="http://schemas.microsoft.com/office/drawing/2014/main" id="{0FFBFE9F-4487-F723-E9C3-8E9D6B819A45}"/>
+                    <a16:creationId xmlns:a16="http://schemas.microsoft.com/office/drawing/2014/main" id="{EF60C0F4-52C4-9738-40DC-518B0A7C197E}"/>
                   </a:ext>
                 </a:extLst>
               </p:cNvPr>
@@ -3495,7 +3501,7 @@
               <p:cNvPr id="234" name="Group 233">
                 <a:extLst>
                   <a:ext uri="{FF2B5EF4-FFF2-40B4-BE49-F238E27FC236}">
-                    <a16:creationId xmlns:a16="http://schemas.microsoft.com/office/drawing/2014/main" id="{C8483D81-C738-EC8C-E9D4-9A607C41251A}"/>
+                    <a16:creationId xmlns:a16="http://schemas.microsoft.com/office/drawing/2014/main" id="{010C11B1-7540-CD7F-EE82-E4AF2B261BF1}"/>
                   </a:ext>
                 </a:extLst>
               </p:cNvPr>
@@ -3504,9 +3510,9 @@
             </p:nvGrpSpPr>
             <p:grpSpPr>
               <a:xfrm>
-                <a:off x="4668372" y="2611103"/>
+                <a:off x="4583028" y="2611103"/>
                 <a:ext cx="3309670" cy="481661"/>
-                <a:chOff x="4776684" y="2611103"/>
+                <a:chOff x="4691340" y="2611103"/>
                 <a:chExt cx="3309670" cy="481661"/>
               </a:xfrm>
             </p:grpSpPr>
@@ -3515,7 +3521,7 @@
                 <p:cNvPr id="232" name="TextBox 231">
                   <a:extLst>
                     <a:ext uri="{FF2B5EF4-FFF2-40B4-BE49-F238E27FC236}">
-                      <a16:creationId xmlns:a16="http://schemas.microsoft.com/office/drawing/2014/main" id="{26CDB8BB-9B1B-2B00-A882-116D7D2D402E}"/>
+                      <a16:creationId xmlns:a16="http://schemas.microsoft.com/office/drawing/2014/main" id="{C8D0965C-A620-F621-9868-A7644BAB7ECF}"/>
                     </a:ext>
                   </a:extLst>
                 </p:cNvPr>
@@ -3524,7 +3530,7 @@
               </p:nvSpPr>
               <p:spPr>
                 <a:xfrm>
-                  <a:off x="4776684" y="2611103"/>
+                  <a:off x="4691340" y="2611103"/>
                   <a:ext cx="3309670" cy="307777"/>
                 </a:xfrm>
                 <a:prstGeom prst="rect">
@@ -3568,7 +3574,7 @@
                 <p:cNvPr id="233" name="TextBox 232">
                   <a:extLst>
                     <a:ext uri="{FF2B5EF4-FFF2-40B4-BE49-F238E27FC236}">
-                      <a16:creationId xmlns:a16="http://schemas.microsoft.com/office/drawing/2014/main" id="{62872B1E-AA5E-17AA-511A-1F419F129695}"/>
+                      <a16:creationId xmlns:a16="http://schemas.microsoft.com/office/drawing/2014/main" id="{07B8609D-259D-C105-4B06-C00BF3F3FE5C}"/>
                     </a:ext>
                   </a:extLst>
                 </p:cNvPr>
@@ -3577,7 +3583,7 @@
               </p:nvSpPr>
               <p:spPr>
                 <a:xfrm>
-                  <a:off x="5474325" y="2815765"/>
+                  <a:off x="5388981" y="2815765"/>
                   <a:ext cx="2078132" cy="276999"/>
                 </a:xfrm>
                 <a:prstGeom prst="rect">
@@ -3612,7 +3618,7 @@
             <p:cNvPr id="345" name="TextBox 344">
               <a:extLst>
                 <a:ext uri="{FF2B5EF4-FFF2-40B4-BE49-F238E27FC236}">
-                  <a16:creationId xmlns:a16="http://schemas.microsoft.com/office/drawing/2014/main" id="{934EF4DA-BF0E-CE3A-E425-F1FE25767794}"/>
+                  <a16:creationId xmlns:a16="http://schemas.microsoft.com/office/drawing/2014/main" id="{9FD9B6E5-7E97-70BF-39B6-1F87E31AF9A7}"/>
                 </a:ext>
               </a:extLst>
             </p:cNvPr>
@@ -3651,7 +3657,7 @@
             <p:cNvPr id="141" name="Rectangle: Rounded Corners 140">
               <a:extLst>
                 <a:ext uri="{FF2B5EF4-FFF2-40B4-BE49-F238E27FC236}">
-                  <a16:creationId xmlns:a16="http://schemas.microsoft.com/office/drawing/2014/main" id="{D204B0F3-4A57-4AB3-AAF6-895DEFA28BDA}"/>
+                  <a16:creationId xmlns:a16="http://schemas.microsoft.com/office/drawing/2014/main" id="{97224A4C-CF33-6E82-3D94-BCA348DEDCF7}"/>
                 </a:ext>
               </a:extLst>
             </p:cNvPr>
@@ -3708,7 +3714,7 @@
             <p:cNvPr id="173" name="Group 172">
               <a:extLst>
                 <a:ext uri="{FF2B5EF4-FFF2-40B4-BE49-F238E27FC236}">
-                  <a16:creationId xmlns:a16="http://schemas.microsoft.com/office/drawing/2014/main" id="{E0FC3736-1AD3-51F7-FF1E-A65B147E173B}"/>
+                  <a16:creationId xmlns:a16="http://schemas.microsoft.com/office/drawing/2014/main" id="{386D7656-0F1F-6FD8-CF8D-FA67F52437DC}"/>
                 </a:ext>
               </a:extLst>
             </p:cNvPr>
@@ -3728,7 +3734,7 @@
               <p:cNvPr id="103" name="Group 102">
                 <a:extLst>
                   <a:ext uri="{FF2B5EF4-FFF2-40B4-BE49-F238E27FC236}">
-                    <a16:creationId xmlns:a16="http://schemas.microsoft.com/office/drawing/2014/main" id="{399C3882-C87A-011B-0BCD-46C25509AA50}"/>
+                    <a16:creationId xmlns:a16="http://schemas.microsoft.com/office/drawing/2014/main" id="{415198F1-6858-9162-A745-12365AA1F713}"/>
                   </a:ext>
                 </a:extLst>
               </p:cNvPr>
@@ -3748,7 +3754,7 @@
                 <p:cNvPr id="99" name="TextBox 98">
                   <a:extLst>
                     <a:ext uri="{FF2B5EF4-FFF2-40B4-BE49-F238E27FC236}">
-                      <a16:creationId xmlns:a16="http://schemas.microsoft.com/office/drawing/2014/main" id="{B2146AB4-4D02-128A-EC98-CAF89459C873}"/>
+                      <a16:creationId xmlns:a16="http://schemas.microsoft.com/office/drawing/2014/main" id="{64A3D375-3DA5-9A82-094F-1C90CF0DE148}"/>
                     </a:ext>
                   </a:extLst>
                 </p:cNvPr>
@@ -3794,7 +3800,7 @@
                 <p:cNvPr id="102" name="Group 101">
                   <a:extLst>
                     <a:ext uri="{FF2B5EF4-FFF2-40B4-BE49-F238E27FC236}">
-                      <a16:creationId xmlns:a16="http://schemas.microsoft.com/office/drawing/2014/main" id="{19888747-9170-E4AD-78F2-2081289DA324}"/>
+                      <a16:creationId xmlns:a16="http://schemas.microsoft.com/office/drawing/2014/main" id="{93C861BC-367F-0A17-C162-028BBB7E157A}"/>
                     </a:ext>
                   </a:extLst>
                 </p:cNvPr>
@@ -3814,7 +3820,7 @@
                   <p:cNvPr id="98" name="Group 97">
                     <a:extLst>
                       <a:ext uri="{FF2B5EF4-FFF2-40B4-BE49-F238E27FC236}">
-                        <a16:creationId xmlns:a16="http://schemas.microsoft.com/office/drawing/2014/main" id="{634D968C-4907-C8AB-1683-500984EDAB8F}"/>
+                        <a16:creationId xmlns:a16="http://schemas.microsoft.com/office/drawing/2014/main" id="{D652DD24-CDB1-4D10-666D-473C222B25DC}"/>
                       </a:ext>
                     </a:extLst>
                   </p:cNvPr>
@@ -3834,7 +3840,7 @@
                     <p:cNvPr id="91" name="Group 90">
                       <a:extLst>
                         <a:ext uri="{FF2B5EF4-FFF2-40B4-BE49-F238E27FC236}">
-                          <a16:creationId xmlns:a16="http://schemas.microsoft.com/office/drawing/2014/main" id="{100CEE3F-0B1F-51C4-640B-525CC77D1754}"/>
+                          <a16:creationId xmlns:a16="http://schemas.microsoft.com/office/drawing/2014/main" id="{5277B5BA-615C-5737-E9D8-342854CC2686}"/>
                         </a:ext>
                       </a:extLst>
                     </p:cNvPr>
@@ -3854,7 +3860,7 @@
                       <p:cNvPr id="90" name="Rectangle: Rounded Corners 89">
                         <a:extLst>
                           <a:ext uri="{FF2B5EF4-FFF2-40B4-BE49-F238E27FC236}">
-                            <a16:creationId xmlns:a16="http://schemas.microsoft.com/office/drawing/2014/main" id="{6FBF2E9F-5D77-9ADE-7152-C81C1A733CD2}"/>
+                            <a16:creationId xmlns:a16="http://schemas.microsoft.com/office/drawing/2014/main" id="{23C307BE-3202-A234-F88C-47DC2ED93A17}"/>
                           </a:ext>
                         </a:extLst>
                       </p:cNvPr>
@@ -3913,7 +3919,7 @@
                       <p:cNvPr id="87" name="Rectangle 86">
                         <a:extLst>
                           <a:ext uri="{FF2B5EF4-FFF2-40B4-BE49-F238E27FC236}">
-                            <a16:creationId xmlns:a16="http://schemas.microsoft.com/office/drawing/2014/main" id="{2226E9FD-9D7F-477B-5597-2AEA05E3F34C}"/>
+                            <a16:creationId xmlns:a16="http://schemas.microsoft.com/office/drawing/2014/main" id="{A9B90A8D-E1C0-69B9-8B17-1842EDB25AC5}"/>
                           </a:ext>
                         </a:extLst>
                       </p:cNvPr>
@@ -3965,7 +3971,7 @@
                       <p:cNvPr id="88" name="Rectangle: Rounded Corners 87">
                         <a:extLst>
                           <a:ext uri="{FF2B5EF4-FFF2-40B4-BE49-F238E27FC236}">
-                            <a16:creationId xmlns:a16="http://schemas.microsoft.com/office/drawing/2014/main" id="{87BCEB7F-0233-D2C1-3A52-344B63D9C7C2}"/>
+                            <a16:creationId xmlns:a16="http://schemas.microsoft.com/office/drawing/2014/main" id="{FACB33C4-4DD3-3537-5CC7-D1D25672FF1E}"/>
                           </a:ext>
                         </a:extLst>
                       </p:cNvPr>
@@ -4023,7 +4029,7 @@
                     <p:cNvPr id="83" name="TextBox 82">
                       <a:extLst>
                         <a:ext uri="{FF2B5EF4-FFF2-40B4-BE49-F238E27FC236}">
-                          <a16:creationId xmlns:a16="http://schemas.microsoft.com/office/drawing/2014/main" id="{048302D5-242E-EB61-E965-DD80D6F6BCB2}"/>
+                          <a16:creationId xmlns:a16="http://schemas.microsoft.com/office/drawing/2014/main" id="{E342B541-F3EC-5218-4138-1FFF0B9888F8}"/>
                         </a:ext>
                       </a:extLst>
                     </p:cNvPr>
@@ -4079,7 +4085,7 @@
                     <p:cNvPr id="84" name="TextBox 83">
                       <a:extLst>
                         <a:ext uri="{FF2B5EF4-FFF2-40B4-BE49-F238E27FC236}">
-                          <a16:creationId xmlns:a16="http://schemas.microsoft.com/office/drawing/2014/main" id="{4F24F3AA-FD33-1A2E-0461-D2F1702107F3}"/>
+                          <a16:creationId xmlns:a16="http://schemas.microsoft.com/office/drawing/2014/main" id="{45CC95EB-69C7-31B8-040F-B0005938C2D6}"/>
                         </a:ext>
                       </a:extLst>
                     </p:cNvPr>
@@ -4125,7 +4131,7 @@
                     <p:cNvPr id="85" name="TextBox 84">
                       <a:extLst>
                         <a:ext uri="{FF2B5EF4-FFF2-40B4-BE49-F238E27FC236}">
-                          <a16:creationId xmlns:a16="http://schemas.microsoft.com/office/drawing/2014/main" id="{C39D088B-736E-499D-7E43-E5FB7908AB37}"/>
+                          <a16:creationId xmlns:a16="http://schemas.microsoft.com/office/drawing/2014/main" id="{AEDCEE1D-D82E-7AF9-BADE-57B78FF0A876}"/>
                         </a:ext>
                       </a:extLst>
                     </p:cNvPr>
@@ -4171,7 +4177,7 @@
                     <p:cNvPr id="93" name="Graphic 92" descr="Smart Phone with solid fill">
                       <a:extLst>
                         <a:ext uri="{FF2B5EF4-FFF2-40B4-BE49-F238E27FC236}">
-                          <a16:creationId xmlns:a16="http://schemas.microsoft.com/office/drawing/2014/main" id="{7F860B22-AFCA-FBEB-515A-AE4BE6CE5C77}"/>
+                          <a16:creationId xmlns:a16="http://schemas.microsoft.com/office/drawing/2014/main" id="{7094807C-5F16-DBD2-ABE8-BB31FD412A27}"/>
                         </a:ext>
                       </a:extLst>
                     </p:cNvPr>
@@ -4207,7 +4213,7 @@
                     <p:cNvPr id="95" name="Graphic 94">
                       <a:extLst>
                         <a:ext uri="{FF2B5EF4-FFF2-40B4-BE49-F238E27FC236}">
-                          <a16:creationId xmlns:a16="http://schemas.microsoft.com/office/drawing/2014/main" id="{617038CE-6DA9-9CAA-9364-7DF6A08B02DC}"/>
+                          <a16:creationId xmlns:a16="http://schemas.microsoft.com/office/drawing/2014/main" id="{A643CB78-4E32-8A61-2B45-CF69ADD84E43}"/>
                         </a:ext>
                       </a:extLst>
                     </p:cNvPr>
@@ -4242,7 +4248,7 @@
                     <p:cNvPr id="97" name="Graphic 96" descr="Wireless router with solid fill">
                       <a:extLst>
                         <a:ext uri="{FF2B5EF4-FFF2-40B4-BE49-F238E27FC236}">
-                          <a16:creationId xmlns:a16="http://schemas.microsoft.com/office/drawing/2014/main" id="{C1D75D05-771C-FCE4-A7D9-F5E220AECAA2}"/>
+                          <a16:creationId xmlns:a16="http://schemas.microsoft.com/office/drawing/2014/main" id="{72BA2D59-557A-C41F-36DE-23B7DBA8619B}"/>
                         </a:ext>
                       </a:extLst>
                     </p:cNvPr>
@@ -4279,7 +4285,7 @@
                   <p:cNvPr id="101" name="Graphic 100" descr="Wi-Fi outline">
                     <a:extLst>
                       <a:ext uri="{FF2B5EF4-FFF2-40B4-BE49-F238E27FC236}">
-                        <a16:creationId xmlns:a16="http://schemas.microsoft.com/office/drawing/2014/main" id="{14C1A9D5-3BE8-3F42-0ADC-45CA9C9FF4E8}"/>
+                        <a16:creationId xmlns:a16="http://schemas.microsoft.com/office/drawing/2014/main" id="{43F98100-AAF3-A536-CC6F-86AF63FC4816}"/>
                       </a:ext>
                     </a:extLst>
                   </p:cNvPr>
@@ -4317,7 +4323,7 @@
               <p:cNvPr id="168" name="TextBox 167">
                 <a:extLst>
                   <a:ext uri="{FF2B5EF4-FFF2-40B4-BE49-F238E27FC236}">
-                    <a16:creationId xmlns:a16="http://schemas.microsoft.com/office/drawing/2014/main" id="{A648D526-E6A7-758D-E005-A3FD81A65DAB}"/>
+                    <a16:creationId xmlns:a16="http://schemas.microsoft.com/office/drawing/2014/main" id="{A2565DCE-C91F-14EE-9807-9EC8C26FFE40}"/>
                   </a:ext>
                 </a:extLst>
               </p:cNvPr>
@@ -4373,7 +4379,7 @@
             <p:cNvPr id="172" name="Group 171">
               <a:extLst>
                 <a:ext uri="{FF2B5EF4-FFF2-40B4-BE49-F238E27FC236}">
-                  <a16:creationId xmlns:a16="http://schemas.microsoft.com/office/drawing/2014/main" id="{E3CC935D-0E71-4D0A-CE18-B6151B8FFE1D}"/>
+                  <a16:creationId xmlns:a16="http://schemas.microsoft.com/office/drawing/2014/main" id="{543EBD7F-8BC0-F4AF-B72F-A49E02775213}"/>
                 </a:ext>
               </a:extLst>
             </p:cNvPr>
@@ -4383,9 +4389,9 @@
           <p:grpSpPr>
             <a:xfrm>
               <a:off x="4750317" y="3403452"/>
-              <a:ext cx="2953942" cy="1755142"/>
+              <a:ext cx="2953942" cy="1694182"/>
               <a:chOff x="3351330" y="2239026"/>
-              <a:chExt cx="2953942" cy="1755142"/>
+              <a:chExt cx="2953942" cy="1694182"/>
             </a:xfrm>
           </p:grpSpPr>
           <p:grpSp>
@@ -4393,7 +4399,7 @@
               <p:cNvPr id="166" name="Group 165">
                 <a:extLst>
                   <a:ext uri="{FF2B5EF4-FFF2-40B4-BE49-F238E27FC236}">
-                    <a16:creationId xmlns:a16="http://schemas.microsoft.com/office/drawing/2014/main" id="{52BFB7AD-7AC6-A48C-0960-639E212C7C00}"/>
+                    <a16:creationId xmlns:a16="http://schemas.microsoft.com/office/drawing/2014/main" id="{C9566CE4-3BAA-AB37-3D2E-ACFB4F6E6FEE}"/>
                   </a:ext>
                 </a:extLst>
               </p:cNvPr>
@@ -4403,9 +4409,9 @@
             <p:grpSpPr>
               <a:xfrm>
                 <a:off x="3351330" y="2239026"/>
-                <a:ext cx="2953942" cy="1189714"/>
+                <a:ext cx="2953942" cy="1128754"/>
                 <a:chOff x="3351330" y="2239026"/>
-                <a:chExt cx="2953942" cy="1189714"/>
+                <a:chExt cx="2953942" cy="1128754"/>
               </a:xfrm>
             </p:grpSpPr>
             <p:sp>
@@ -4413,7 +4419,7 @@
                 <p:cNvPr id="105" name="TextBox 104">
                   <a:extLst>
                     <a:ext uri="{FF2B5EF4-FFF2-40B4-BE49-F238E27FC236}">
-                      <a16:creationId xmlns:a16="http://schemas.microsoft.com/office/drawing/2014/main" id="{DBAFB9D3-DC62-A48E-411E-317A70A9B3AB}"/>
+                      <a16:creationId xmlns:a16="http://schemas.microsoft.com/office/drawing/2014/main" id="{9AEDD0CF-8A9F-E610-7384-3D1B371DDA00}"/>
                     </a:ext>
                   </a:extLst>
                 </p:cNvPr>
@@ -4422,7 +4428,7 @@
               </p:nvSpPr>
               <p:spPr>
                 <a:xfrm>
-                  <a:off x="4021891" y="3120963"/>
+                  <a:off x="4021891" y="3060003"/>
                   <a:ext cx="2239249" cy="307777"/>
                 </a:xfrm>
                 <a:prstGeom prst="rect">
@@ -4459,7 +4465,7 @@
                 <p:cNvPr id="165" name="Group 164">
                   <a:extLst>
                     <a:ext uri="{FF2B5EF4-FFF2-40B4-BE49-F238E27FC236}">
-                      <a16:creationId xmlns:a16="http://schemas.microsoft.com/office/drawing/2014/main" id="{94B6153A-628D-51A2-53C1-51D9E895F02A}"/>
+                      <a16:creationId xmlns:a16="http://schemas.microsoft.com/office/drawing/2014/main" id="{685B90E1-9109-97D6-5A72-AF62B8EC117C}"/>
                     </a:ext>
                   </a:extLst>
                 </p:cNvPr>
@@ -4479,7 +4485,7 @@
                   <p:cNvPr id="150" name="Graphic 149" descr="Wi-Fi outline">
                     <a:extLst>
                       <a:ext uri="{FF2B5EF4-FFF2-40B4-BE49-F238E27FC236}">
-                        <a16:creationId xmlns:a16="http://schemas.microsoft.com/office/drawing/2014/main" id="{A4384971-E0FA-83AB-3ECA-EA68B5363120}"/>
+                        <a16:creationId xmlns:a16="http://schemas.microsoft.com/office/drawing/2014/main" id="{F86C36EC-AB9C-731B-77FA-4E9A61F891C3}"/>
                       </a:ext>
                     </a:extLst>
                   </p:cNvPr>
@@ -4515,7 +4521,7 @@
                   <p:cNvPr id="164" name="Group 163">
                     <a:extLst>
                       <a:ext uri="{FF2B5EF4-FFF2-40B4-BE49-F238E27FC236}">
-                        <a16:creationId xmlns:a16="http://schemas.microsoft.com/office/drawing/2014/main" id="{FEDF8195-14CB-11B2-B6D5-E25DE2BBA929}"/>
+                        <a16:creationId xmlns:a16="http://schemas.microsoft.com/office/drawing/2014/main" id="{EDE05E91-43DE-B886-4425-DF885BB144F8}"/>
                       </a:ext>
                     </a:extLst>
                   </p:cNvPr>
@@ -4535,7 +4541,7 @@
                     <p:cNvPr id="157" name="Group 156">
                       <a:extLst>
                         <a:ext uri="{FF2B5EF4-FFF2-40B4-BE49-F238E27FC236}">
-                          <a16:creationId xmlns:a16="http://schemas.microsoft.com/office/drawing/2014/main" id="{26375E39-3569-ADBB-F1AE-67A9EF281BC7}"/>
+                          <a16:creationId xmlns:a16="http://schemas.microsoft.com/office/drawing/2014/main" id="{F2B637D4-F06E-1C10-76AC-55AF61886E0E}"/>
                         </a:ext>
                       </a:extLst>
                     </p:cNvPr>
@@ -4555,7 +4561,7 @@
                       <p:cNvPr id="116" name="Rectangle: Rounded Corners 115">
                         <a:extLst>
                           <a:ext uri="{FF2B5EF4-FFF2-40B4-BE49-F238E27FC236}">
-                            <a16:creationId xmlns:a16="http://schemas.microsoft.com/office/drawing/2014/main" id="{763E022C-45EC-17F5-4D28-50ED4E68B3D8}"/>
+                            <a16:creationId xmlns:a16="http://schemas.microsoft.com/office/drawing/2014/main" id="{04B2F569-8B47-FFB1-6835-95675A38F275}"/>
                           </a:ext>
                         </a:extLst>
                       </p:cNvPr>
@@ -4614,7 +4620,7 @@
                       <p:cNvPr id="154" name="Rectangle: Top Corners Rounded 153">
                         <a:extLst>
                           <a:ext uri="{FF2B5EF4-FFF2-40B4-BE49-F238E27FC236}">
-                            <a16:creationId xmlns:a16="http://schemas.microsoft.com/office/drawing/2014/main" id="{FC1DFCF3-A2B2-8659-C2ED-0301735E43E7}"/>
+                            <a16:creationId xmlns:a16="http://schemas.microsoft.com/office/drawing/2014/main" id="{F2C3760F-1A26-8F99-FF38-3EC6D5F85DEF}"/>
                           </a:ext>
                         </a:extLst>
                       </p:cNvPr>
@@ -4669,7 +4675,7 @@
                       <p:cNvPr id="118" name="Rectangle: Rounded Corners 117">
                         <a:extLst>
                           <a:ext uri="{FF2B5EF4-FFF2-40B4-BE49-F238E27FC236}">
-                            <a16:creationId xmlns:a16="http://schemas.microsoft.com/office/drawing/2014/main" id="{B5766D04-B969-3849-BAD6-E5FBF42BA676}"/>
+                            <a16:creationId xmlns:a16="http://schemas.microsoft.com/office/drawing/2014/main" id="{457092CA-2966-B5F6-9B98-F1F6F92706AA}"/>
                           </a:ext>
                         </a:extLst>
                       </p:cNvPr>
@@ -4727,7 +4733,7 @@
                     <p:cNvPr id="158" name="TextBox 157">
                       <a:extLst>
                         <a:ext uri="{FF2B5EF4-FFF2-40B4-BE49-F238E27FC236}">
-                          <a16:creationId xmlns:a16="http://schemas.microsoft.com/office/drawing/2014/main" id="{118DB05C-DAB0-A421-F073-A792FE4EAAA3}"/>
+                          <a16:creationId xmlns:a16="http://schemas.microsoft.com/office/drawing/2014/main" id="{4C779143-B458-A5C7-5AF4-C9E610C3D978}"/>
                         </a:ext>
                       </a:extLst>
                     </p:cNvPr>
@@ -4773,7 +4779,7 @@
                     <p:cNvPr id="159" name="Graphic 158">
                       <a:extLst>
                         <a:ext uri="{FF2B5EF4-FFF2-40B4-BE49-F238E27FC236}">
-                          <a16:creationId xmlns:a16="http://schemas.microsoft.com/office/drawing/2014/main" id="{D29AD5AF-3219-6D63-1EA7-142390B52B38}"/>
+                          <a16:creationId xmlns:a16="http://schemas.microsoft.com/office/drawing/2014/main" id="{47EB4318-16BE-3805-2798-4FBF12016368}"/>
                         </a:ext>
                       </a:extLst>
                     </p:cNvPr>
@@ -4808,7 +4814,7 @@
                     <p:cNvPr id="162" name="TextBox 161">
                       <a:extLst>
                         <a:ext uri="{FF2B5EF4-FFF2-40B4-BE49-F238E27FC236}">
-                          <a16:creationId xmlns:a16="http://schemas.microsoft.com/office/drawing/2014/main" id="{0BF92B8E-1B5B-2C80-D2F6-A6431705198E}"/>
+                          <a16:creationId xmlns:a16="http://schemas.microsoft.com/office/drawing/2014/main" id="{B89D1264-28C0-F096-0109-94F5F52F94AF}"/>
                         </a:ext>
                       </a:extLst>
                     </p:cNvPr>
@@ -4864,7 +4870,7 @@
                     <p:cNvPr id="163" name="Graphic 162">
                       <a:extLst>
                         <a:ext uri="{FF2B5EF4-FFF2-40B4-BE49-F238E27FC236}">
-                          <a16:creationId xmlns:a16="http://schemas.microsoft.com/office/drawing/2014/main" id="{8BF6375D-4174-C1B1-57AE-E2DA824F94CE}"/>
+                          <a16:creationId xmlns:a16="http://schemas.microsoft.com/office/drawing/2014/main" id="{25F9F0CA-0720-2072-A64D-C29DFFE43EAE}"/>
                         </a:ext>
                       </a:extLst>
                     </p:cNvPr>
@@ -4902,7 +4908,7 @@
               <p:cNvPr id="169" name="TextBox 168">
                 <a:extLst>
                   <a:ext uri="{FF2B5EF4-FFF2-40B4-BE49-F238E27FC236}">
-                    <a16:creationId xmlns:a16="http://schemas.microsoft.com/office/drawing/2014/main" id="{03D8F466-4922-1498-BC9F-4475B7D5BC61}"/>
+                    <a16:creationId xmlns:a16="http://schemas.microsoft.com/office/drawing/2014/main" id="{866FED8A-F96E-DF4B-BAA9-78E78914F62B}"/>
                   </a:ext>
                 </a:extLst>
               </p:cNvPr>
@@ -4911,7 +4917,7 @@
             </p:nvSpPr>
             <p:spPr>
               <a:xfrm>
-                <a:off x="4167277" y="3347837"/>
+                <a:off x="4167277" y="3286877"/>
                 <a:ext cx="2095177" cy="646331"/>
               </a:xfrm>
               <a:prstGeom prst="rect">
@@ -4975,7 +4981,7 @@
             <p:cNvPr id="186" name="Rectangle: Rounded Corners 185">
               <a:extLst>
                 <a:ext uri="{FF2B5EF4-FFF2-40B4-BE49-F238E27FC236}">
-                  <a16:creationId xmlns:a16="http://schemas.microsoft.com/office/drawing/2014/main" id="{741AD84D-B1A3-9C27-B906-C7D6270533F0}"/>
+                  <a16:creationId xmlns:a16="http://schemas.microsoft.com/office/drawing/2014/main" id="{2ABE1094-ECC6-B8A8-4B66-95AE49EA6FFE}"/>
                 </a:ext>
               </a:extLst>
             </p:cNvPr>
@@ -5034,7 +5040,7 @@
             <p:cNvPr id="236" name="Connector: Elbow 235">
               <a:extLst>
                 <a:ext uri="{FF2B5EF4-FFF2-40B4-BE49-F238E27FC236}">
-                  <a16:creationId xmlns:a16="http://schemas.microsoft.com/office/drawing/2014/main" id="{AF73C65C-EB2D-83CA-18A4-ED9FC7D18AE9}"/>
+                  <a16:creationId xmlns:a16="http://schemas.microsoft.com/office/drawing/2014/main" id="{3B180A49-F11D-190D-0E27-D6D70B07789E}"/>
                 </a:ext>
               </a:extLst>
             </p:cNvPr>
@@ -5078,7 +5084,7 @@
             <p:cNvPr id="298" name="Group 297">
               <a:extLst>
                 <a:ext uri="{FF2B5EF4-FFF2-40B4-BE49-F238E27FC236}">
-                  <a16:creationId xmlns:a16="http://schemas.microsoft.com/office/drawing/2014/main" id="{F4F66483-A881-AB8E-EA24-A1046F52E2A4}"/>
+                  <a16:creationId xmlns:a16="http://schemas.microsoft.com/office/drawing/2014/main" id="{DC129536-C2B7-4DA3-492D-8BD7E3971FC6}"/>
                 </a:ext>
               </a:extLst>
             </p:cNvPr>
@@ -5098,7 +5104,7 @@
               <p:cNvPr id="299" name="Rectangle: Rounded Corners 298">
                 <a:extLst>
                   <a:ext uri="{FF2B5EF4-FFF2-40B4-BE49-F238E27FC236}">
-                    <a16:creationId xmlns:a16="http://schemas.microsoft.com/office/drawing/2014/main" id="{F9387809-F426-D5E8-6E1E-11DD2B11E5EC}"/>
+                    <a16:creationId xmlns:a16="http://schemas.microsoft.com/office/drawing/2014/main" id="{51CF1C4A-E6CF-6DEC-B9C9-99C4666537AA}"/>
                   </a:ext>
                 </a:extLst>
               </p:cNvPr>
@@ -5159,7 +5165,7 @@
               <p:cNvPr id="300" name="Group 299">
                 <a:extLst>
                   <a:ext uri="{FF2B5EF4-FFF2-40B4-BE49-F238E27FC236}">
-                    <a16:creationId xmlns:a16="http://schemas.microsoft.com/office/drawing/2014/main" id="{BE3ABA9F-C4F0-6B23-7A0B-536CE88F0275}"/>
+                    <a16:creationId xmlns:a16="http://schemas.microsoft.com/office/drawing/2014/main" id="{FAA500E9-3DD9-A6B6-791B-3606E086D98F}"/>
                   </a:ext>
                 </a:extLst>
               </p:cNvPr>
@@ -5179,7 +5185,7 @@
                 <p:cNvPr id="301" name="TextBox 300">
                   <a:extLst>
                     <a:ext uri="{FF2B5EF4-FFF2-40B4-BE49-F238E27FC236}">
-                      <a16:creationId xmlns:a16="http://schemas.microsoft.com/office/drawing/2014/main" id="{6C148EEF-91F3-60B8-DD63-926E75254BC6}"/>
+                      <a16:creationId xmlns:a16="http://schemas.microsoft.com/office/drawing/2014/main" id="{4A7B6B29-0DA7-E032-4721-E7D4CC8E5C00}"/>
                     </a:ext>
                   </a:extLst>
                 </p:cNvPr>
@@ -5225,7 +5231,7 @@
                 <p:cNvPr id="302" name="TextBox 301">
                   <a:extLst>
                     <a:ext uri="{FF2B5EF4-FFF2-40B4-BE49-F238E27FC236}">
-                      <a16:creationId xmlns:a16="http://schemas.microsoft.com/office/drawing/2014/main" id="{9CEF86A8-EAFC-DCF5-1A14-9BEF19C47DC4}"/>
+                      <a16:creationId xmlns:a16="http://schemas.microsoft.com/office/drawing/2014/main" id="{601F6530-67FD-3955-4AAE-AB8259209727}"/>
                     </a:ext>
                   </a:extLst>
                 </p:cNvPr>
@@ -5282,7 +5288,7 @@
             <p:cNvPr id="316" name="Straight Connector 315">
               <a:extLst>
                 <a:ext uri="{FF2B5EF4-FFF2-40B4-BE49-F238E27FC236}">
-                  <a16:creationId xmlns:a16="http://schemas.microsoft.com/office/drawing/2014/main" id="{6F0B4269-577E-98FD-100F-DD6A17414AED}"/>
+                  <a16:creationId xmlns:a16="http://schemas.microsoft.com/office/drawing/2014/main" id="{73E70FC3-33DB-F71F-3C5B-0F817ADA6565}"/>
                 </a:ext>
               </a:extLst>
             </p:cNvPr>
@@ -5316,115 +5322,12 @@
             </a:fontRef>
           </p:style>
         </p:cxnSp>
-        <p:sp>
-          <p:nvSpPr>
-            <p:cNvPr id="318" name="TextBox 317">
-              <a:extLst>
-                <a:ext uri="{FF2B5EF4-FFF2-40B4-BE49-F238E27FC236}">
-                  <a16:creationId xmlns:a16="http://schemas.microsoft.com/office/drawing/2014/main" id="{5EECCEE8-0AA8-0FC0-E9C6-8A95995C8165}"/>
-                </a:ext>
-              </a:extLst>
-            </p:cNvPr>
-            <p:cNvSpPr txBox="1"/>
-            <p:nvPr/>
-          </p:nvSpPr>
-          <p:spPr>
-            <a:xfrm>
-              <a:off x="6417137" y="1764477"/>
-              <a:ext cx="971328" cy="276999"/>
-            </a:xfrm>
-            <a:prstGeom prst="rect">
-              <a:avLst/>
-            </a:prstGeom>
-            <a:noFill/>
-          </p:spPr>
-          <p:txBody>
-            <a:bodyPr wrap="square">
-              <a:spAutoFit/>
-            </a:bodyPr>
-            <a:lstStyle/>
-            <a:p>
-              <a:pPr algn="ctr"/>
-              <a:r>
-                <a:rPr lang="en-US" sz="1200" i="1" dirty="0">
-                  <a:solidFill>
-                    <a:schemeClr val="tx1"/>
-                  </a:solidFill>
-                  <a:latin typeface="Times New Roman" panose="02020603050405020304" pitchFamily="18" charset="0"/>
-                  <a:cs typeface="Times New Roman" panose="02020603050405020304" pitchFamily="18" charset="0"/>
-                </a:rPr>
-                <a:t>A1 Policy</a:t>
-              </a:r>
-              <a:endParaRPr lang="en-US" sz="1200" i="1" dirty="0">
-                <a:latin typeface="Times New Roman" panose="02020603050405020304" pitchFamily="18" charset="0"/>
-                <a:cs typeface="Times New Roman" panose="02020603050405020304" pitchFamily="18" charset="0"/>
-              </a:endParaRPr>
-            </a:p>
-          </p:txBody>
-        </p:sp>
-        <p:sp>
-          <p:nvSpPr>
-            <p:cNvPr id="319" name="TextBox 318">
-              <a:extLst>
-                <a:ext uri="{FF2B5EF4-FFF2-40B4-BE49-F238E27FC236}">
-                  <a16:creationId xmlns:a16="http://schemas.microsoft.com/office/drawing/2014/main" id="{351BDFD2-BC3C-44CA-ACCA-DD137E081438}"/>
-                </a:ext>
-              </a:extLst>
-            </p:cNvPr>
-            <p:cNvSpPr txBox="1"/>
-            <p:nvPr/>
-          </p:nvSpPr>
-          <p:spPr>
-            <a:xfrm>
-              <a:off x="6506434" y="3069507"/>
-              <a:ext cx="2184599" cy="461665"/>
-            </a:xfrm>
-            <a:prstGeom prst="rect">
-              <a:avLst/>
-            </a:prstGeom>
-            <a:noFill/>
-          </p:spPr>
-          <p:txBody>
-            <a:bodyPr wrap="square">
-              <a:spAutoFit/>
-            </a:bodyPr>
-            <a:lstStyle/>
-            <a:p>
-              <a:r>
-                <a:rPr lang="en-US" sz="1200" i="1" dirty="0">
-                  <a:solidFill>
-                    <a:schemeClr val="tx1"/>
-                  </a:solidFill>
-                  <a:latin typeface="Times New Roman" panose="02020603050405020304" pitchFamily="18" charset="0"/>
-                  <a:cs typeface="Times New Roman" panose="02020603050405020304" pitchFamily="18" charset="0"/>
-                </a:rPr>
-                <a:t>Key Performance Measurement</a:t>
-              </a:r>
-            </a:p>
-            <a:p>
-              <a:r>
-                <a:rPr lang="en-US" sz="1200" i="1" dirty="0">
-                  <a:solidFill>
-                    <a:schemeClr val="tx1"/>
-                  </a:solidFill>
-                  <a:latin typeface="Times New Roman" panose="02020603050405020304" pitchFamily="18" charset="0"/>
-                  <a:cs typeface="Times New Roman" panose="02020603050405020304" pitchFamily="18" charset="0"/>
-                </a:rPr>
-                <a:t>RIC Control</a:t>
-              </a:r>
-              <a:endParaRPr lang="en-US" sz="1200" i="1" dirty="0">
-                <a:latin typeface="Times New Roman" panose="02020603050405020304" pitchFamily="18" charset="0"/>
-                <a:cs typeface="Times New Roman" panose="02020603050405020304" pitchFamily="18" charset="0"/>
-              </a:endParaRPr>
-            </a:p>
-          </p:txBody>
-        </p:sp>
         <p:grpSp>
           <p:nvGrpSpPr>
             <p:cNvPr id="326" name="Group 325">
               <a:extLst>
                 <a:ext uri="{FF2B5EF4-FFF2-40B4-BE49-F238E27FC236}">
-                  <a16:creationId xmlns:a16="http://schemas.microsoft.com/office/drawing/2014/main" id="{A3453D33-2D6E-00C9-72F9-A28C5247CD8D}"/>
+                  <a16:creationId xmlns:a16="http://schemas.microsoft.com/office/drawing/2014/main" id="{397A9C2D-DFF1-6646-2360-5F14ECECADBD}"/>
                 </a:ext>
               </a:extLst>
             </p:cNvPr>
@@ -5444,7 +5347,7 @@
               <p:cNvPr id="240" name="Rectangle: Rounded Corners 239">
                 <a:extLst>
                   <a:ext uri="{FF2B5EF4-FFF2-40B4-BE49-F238E27FC236}">
-                    <a16:creationId xmlns:a16="http://schemas.microsoft.com/office/drawing/2014/main" id="{4A65C48E-E36E-50DA-D253-3AC63BF3C65F}"/>
+                    <a16:creationId xmlns:a16="http://schemas.microsoft.com/office/drawing/2014/main" id="{62A05DA4-B6C8-36F9-8F9E-306684A99075}"/>
                   </a:ext>
                 </a:extLst>
               </p:cNvPr>
@@ -5506,7 +5409,7 @@
               <p:cNvPr id="325" name="TextBox 324">
                 <a:extLst>
                   <a:ext uri="{FF2B5EF4-FFF2-40B4-BE49-F238E27FC236}">
-                    <a16:creationId xmlns:a16="http://schemas.microsoft.com/office/drawing/2014/main" id="{B086C52C-90A0-EFDE-550F-66D20D667835}"/>
+                    <a16:creationId xmlns:a16="http://schemas.microsoft.com/office/drawing/2014/main" id="{4196D5D3-D0EC-73E0-35FC-9426907983B6}"/>
                   </a:ext>
                 </a:extLst>
               </p:cNvPr>
@@ -5553,7 +5456,7 @@
             <p:cNvPr id="333" name="Group 332">
               <a:extLst>
                 <a:ext uri="{FF2B5EF4-FFF2-40B4-BE49-F238E27FC236}">
-                  <a16:creationId xmlns:a16="http://schemas.microsoft.com/office/drawing/2014/main" id="{07E36321-4845-2DC1-D2B9-9B8F056221B6}"/>
+                  <a16:creationId xmlns:a16="http://schemas.microsoft.com/office/drawing/2014/main" id="{A4454A94-363D-D860-C436-9D6D85B336F4}"/>
                 </a:ext>
               </a:extLst>
             </p:cNvPr>
@@ -5573,7 +5476,7 @@
               <p:cNvPr id="334" name="Rectangle: Rounded Corners 333">
                 <a:extLst>
                   <a:ext uri="{FF2B5EF4-FFF2-40B4-BE49-F238E27FC236}">
-                    <a16:creationId xmlns:a16="http://schemas.microsoft.com/office/drawing/2014/main" id="{D3E13052-BC5E-8FDC-228F-391E8C378CAF}"/>
+                    <a16:creationId xmlns:a16="http://schemas.microsoft.com/office/drawing/2014/main" id="{48E00EAB-9E4C-1B65-08DF-2C5496B9B3CA}"/>
                   </a:ext>
                 </a:extLst>
               </p:cNvPr>
@@ -5635,7 +5538,7 @@
               <p:cNvPr id="335" name="TextBox 334">
                 <a:extLst>
                   <a:ext uri="{FF2B5EF4-FFF2-40B4-BE49-F238E27FC236}">
-                    <a16:creationId xmlns:a16="http://schemas.microsoft.com/office/drawing/2014/main" id="{D029EA8F-BBA0-5B94-A6E0-EF02786A1ECE}"/>
+                    <a16:creationId xmlns:a16="http://schemas.microsoft.com/office/drawing/2014/main" id="{F42280FE-43A6-365C-358A-C8554DC640BA}"/>
                   </a:ext>
                 </a:extLst>
               </p:cNvPr>
@@ -5682,7 +5585,7 @@
             <p:cNvPr id="336" name="Group 335">
               <a:extLst>
                 <a:ext uri="{FF2B5EF4-FFF2-40B4-BE49-F238E27FC236}">
-                  <a16:creationId xmlns:a16="http://schemas.microsoft.com/office/drawing/2014/main" id="{84A20A0E-78FB-9D01-1459-3C069A1299BC}"/>
+                  <a16:creationId xmlns:a16="http://schemas.microsoft.com/office/drawing/2014/main" id="{2FE08671-6F43-894C-17E7-D7A2F00653FD}"/>
                 </a:ext>
               </a:extLst>
             </p:cNvPr>
@@ -5702,7 +5605,7 @@
               <p:cNvPr id="337" name="Rectangle: Rounded Corners 336">
                 <a:extLst>
                   <a:ext uri="{FF2B5EF4-FFF2-40B4-BE49-F238E27FC236}">
-                    <a16:creationId xmlns:a16="http://schemas.microsoft.com/office/drawing/2014/main" id="{E58C9A7A-9CC9-A0E6-4D96-B5CC2855D9F2}"/>
+                    <a16:creationId xmlns:a16="http://schemas.microsoft.com/office/drawing/2014/main" id="{F1289BAE-1D1F-3DE1-018F-B6FC63E30E72}"/>
                   </a:ext>
                 </a:extLst>
               </p:cNvPr>
@@ -5764,7 +5667,7 @@
               <p:cNvPr id="338" name="TextBox 337">
                 <a:extLst>
                   <a:ext uri="{FF2B5EF4-FFF2-40B4-BE49-F238E27FC236}">
-                    <a16:creationId xmlns:a16="http://schemas.microsoft.com/office/drawing/2014/main" id="{A3485B05-CDBC-7ABB-426B-CA02365E2BAD}"/>
+                    <a16:creationId xmlns:a16="http://schemas.microsoft.com/office/drawing/2014/main" id="{D1D07F64-82AD-0D2D-A198-671CB409DB1C}"/>
                   </a:ext>
                 </a:extLst>
               </p:cNvPr>
@@ -5821,7 +5724,7 @@
             <p:cNvPr id="339" name="Group 338">
               <a:extLst>
                 <a:ext uri="{FF2B5EF4-FFF2-40B4-BE49-F238E27FC236}">
-                  <a16:creationId xmlns:a16="http://schemas.microsoft.com/office/drawing/2014/main" id="{A8B71324-C15E-9BEE-9D24-A267C3F55BB8}"/>
+                  <a16:creationId xmlns:a16="http://schemas.microsoft.com/office/drawing/2014/main" id="{11E2E4B2-0575-7C29-5A70-8AC1D40B0479}"/>
                 </a:ext>
               </a:extLst>
             </p:cNvPr>
@@ -5841,7 +5744,7 @@
               <p:cNvPr id="340" name="Rectangle: Rounded Corners 339">
                 <a:extLst>
                   <a:ext uri="{FF2B5EF4-FFF2-40B4-BE49-F238E27FC236}">
-                    <a16:creationId xmlns:a16="http://schemas.microsoft.com/office/drawing/2014/main" id="{77EA2108-4F43-856E-BF34-DC07A4CBBC2A}"/>
+                    <a16:creationId xmlns:a16="http://schemas.microsoft.com/office/drawing/2014/main" id="{A03616DF-9617-C8B7-1C7D-33780E7BBDB2}"/>
                   </a:ext>
                 </a:extLst>
               </p:cNvPr>
@@ -5903,7 +5806,7 @@
               <p:cNvPr id="341" name="TextBox 340">
                 <a:extLst>
                   <a:ext uri="{FF2B5EF4-FFF2-40B4-BE49-F238E27FC236}">
-                    <a16:creationId xmlns:a16="http://schemas.microsoft.com/office/drawing/2014/main" id="{DB65914A-4674-4E33-9508-79A71B1F851E}"/>
+                    <a16:creationId xmlns:a16="http://schemas.microsoft.com/office/drawing/2014/main" id="{C615CB26-A7A4-DCAA-F86A-18674011737E}"/>
                   </a:ext>
                 </a:extLst>
               </p:cNvPr>
@@ -5950,7 +5853,7 @@
             <p:cNvPr id="347" name="Group 346">
               <a:extLst>
                 <a:ext uri="{FF2B5EF4-FFF2-40B4-BE49-F238E27FC236}">
-                  <a16:creationId xmlns:a16="http://schemas.microsoft.com/office/drawing/2014/main" id="{5B9BE978-A5DB-D685-10B4-4EA319C39598}"/>
+                  <a16:creationId xmlns:a16="http://schemas.microsoft.com/office/drawing/2014/main" id="{13228077-5930-C6D4-2459-FE8167A5D591}"/>
                 </a:ext>
               </a:extLst>
             </p:cNvPr>
@@ -5973,7 +5876,7 @@
               <p:cNvPr id="348" name="Rectangle: Rounded Corners 347">
                 <a:extLst>
                   <a:ext uri="{FF2B5EF4-FFF2-40B4-BE49-F238E27FC236}">
-                    <a16:creationId xmlns:a16="http://schemas.microsoft.com/office/drawing/2014/main" id="{3C9841D4-45DC-778F-BEA6-220674ADD499}"/>
+                    <a16:creationId xmlns:a16="http://schemas.microsoft.com/office/drawing/2014/main" id="{B3451EF3-FB6A-B622-6351-35764418B70D}"/>
                   </a:ext>
                 </a:extLst>
               </p:cNvPr>
@@ -6035,7 +5938,7 @@
               <p:cNvPr id="349" name="TextBox 348">
                 <a:extLst>
                   <a:ext uri="{FF2B5EF4-FFF2-40B4-BE49-F238E27FC236}">
-                    <a16:creationId xmlns:a16="http://schemas.microsoft.com/office/drawing/2014/main" id="{492D15C4-5FCA-05B8-E67C-219273E0EB3D}"/>
+                    <a16:creationId xmlns:a16="http://schemas.microsoft.com/office/drawing/2014/main" id="{531045DF-ADD5-D378-5029-7333D4BDAD97}"/>
                   </a:ext>
                 </a:extLst>
               </p:cNvPr>
@@ -6075,7 +5978,7 @@
             <p:cNvPr id="351" name="Group 350">
               <a:extLst>
                 <a:ext uri="{FF2B5EF4-FFF2-40B4-BE49-F238E27FC236}">
-                  <a16:creationId xmlns:a16="http://schemas.microsoft.com/office/drawing/2014/main" id="{C0E76DF9-91EC-A649-B11A-91E1BE183B4C}"/>
+                  <a16:creationId xmlns:a16="http://schemas.microsoft.com/office/drawing/2014/main" id="{1845557C-7543-BBF8-D8CE-44146F485F3E}"/>
                 </a:ext>
               </a:extLst>
             </p:cNvPr>
@@ -6098,7 +6001,7 @@
               <p:cNvPr id="352" name="Rectangle: Rounded Corners 351">
                 <a:extLst>
                   <a:ext uri="{FF2B5EF4-FFF2-40B4-BE49-F238E27FC236}">
-                    <a16:creationId xmlns:a16="http://schemas.microsoft.com/office/drawing/2014/main" id="{A35C3105-3252-BC99-072B-85E2366034C7}"/>
+                    <a16:creationId xmlns:a16="http://schemas.microsoft.com/office/drawing/2014/main" id="{45B98422-8C70-AEC4-6CDE-299E7131477C}"/>
                   </a:ext>
                 </a:extLst>
               </p:cNvPr>
@@ -6160,7 +6063,7 @@
               <p:cNvPr id="353" name="TextBox 352">
                 <a:extLst>
                   <a:ext uri="{FF2B5EF4-FFF2-40B4-BE49-F238E27FC236}">
-                    <a16:creationId xmlns:a16="http://schemas.microsoft.com/office/drawing/2014/main" id="{EC5E2325-62FF-4D4A-BD7C-D53E117B8772}"/>
+                    <a16:creationId xmlns:a16="http://schemas.microsoft.com/office/drawing/2014/main" id="{CCBF380C-15C9-4705-8F73-76E0467D483F}"/>
                   </a:ext>
                 </a:extLst>
               </p:cNvPr>
@@ -6200,7 +6103,7 @@
             <p:cNvPr id="104" name="TextBox 103">
               <a:extLst>
                 <a:ext uri="{FF2B5EF4-FFF2-40B4-BE49-F238E27FC236}">
-                  <a16:creationId xmlns:a16="http://schemas.microsoft.com/office/drawing/2014/main" id="{3342515B-D298-43A1-9E16-E6FD971A6A41}"/>
+                  <a16:creationId xmlns:a16="http://schemas.microsoft.com/office/drawing/2014/main" id="{18D67298-084E-1C66-42D3-0981A488A8BC}"/>
                 </a:ext>
               </a:extLst>
             </p:cNvPr>
@@ -6243,7 +6146,7 @@
             <p:cNvPr id="123" name="Group 122">
               <a:extLst>
                 <a:ext uri="{FF2B5EF4-FFF2-40B4-BE49-F238E27FC236}">
-                  <a16:creationId xmlns:a16="http://schemas.microsoft.com/office/drawing/2014/main" id="{57872673-AAAD-4628-B781-C1A7A5F491EC}"/>
+                  <a16:creationId xmlns:a16="http://schemas.microsoft.com/office/drawing/2014/main" id="{DCA1DED8-91A0-4833-5993-32495D364015}"/>
                 </a:ext>
               </a:extLst>
             </p:cNvPr>
@@ -6263,7 +6166,7 @@
               <p:cNvPr id="124" name="Oval 123">
                 <a:extLst>
                   <a:ext uri="{FF2B5EF4-FFF2-40B4-BE49-F238E27FC236}">
-                    <a16:creationId xmlns:a16="http://schemas.microsoft.com/office/drawing/2014/main" id="{24631A37-9689-4B10-8ADB-0416A5B0735E}"/>
+                    <a16:creationId xmlns:a16="http://schemas.microsoft.com/office/drawing/2014/main" id="{990D42A1-D5DC-B9ED-60EE-F8C90E0FDF6F}"/>
                   </a:ext>
                 </a:extLst>
               </p:cNvPr>
@@ -6315,7 +6218,7 @@
               <p:cNvPr id="125" name="Oval 124">
                 <a:extLst>
                   <a:ext uri="{FF2B5EF4-FFF2-40B4-BE49-F238E27FC236}">
-                    <a16:creationId xmlns:a16="http://schemas.microsoft.com/office/drawing/2014/main" id="{0A1B9C14-F6A3-4685-834A-A8A1851159D4}"/>
+                    <a16:creationId xmlns:a16="http://schemas.microsoft.com/office/drawing/2014/main" id="{A87127DE-8C89-9021-6583-581CE6DA3103}"/>
                   </a:ext>
                 </a:extLst>
               </p:cNvPr>
@@ -6367,7 +6270,7 @@
               <p:cNvPr id="126" name="Oval 125">
                 <a:extLst>
                   <a:ext uri="{FF2B5EF4-FFF2-40B4-BE49-F238E27FC236}">
-                    <a16:creationId xmlns:a16="http://schemas.microsoft.com/office/drawing/2014/main" id="{B25E1B82-A1FA-4694-AA25-FAEC6C0B5254}"/>
+                    <a16:creationId xmlns:a16="http://schemas.microsoft.com/office/drawing/2014/main" id="{017FC8AF-5B2C-E8B4-E03B-1DCB50D958A3}"/>
                   </a:ext>
                 </a:extLst>
               </p:cNvPr>
@@ -6420,7 +6323,7 @@
             <p:cNvPr id="127" name="Group 126">
               <a:extLst>
                 <a:ext uri="{FF2B5EF4-FFF2-40B4-BE49-F238E27FC236}">
-                  <a16:creationId xmlns:a16="http://schemas.microsoft.com/office/drawing/2014/main" id="{26AD37C1-FC4C-445B-A475-2C31F113B111}"/>
+                  <a16:creationId xmlns:a16="http://schemas.microsoft.com/office/drawing/2014/main" id="{C8B97E36-52B3-ED39-0874-98F7C73F9235}"/>
                 </a:ext>
               </a:extLst>
             </p:cNvPr>
@@ -6440,7 +6343,7 @@
               <p:cNvPr id="128" name="Oval 127">
                 <a:extLst>
                   <a:ext uri="{FF2B5EF4-FFF2-40B4-BE49-F238E27FC236}">
-                    <a16:creationId xmlns:a16="http://schemas.microsoft.com/office/drawing/2014/main" id="{BE600BD0-3962-416A-B573-62FC9571329A}"/>
+                    <a16:creationId xmlns:a16="http://schemas.microsoft.com/office/drawing/2014/main" id="{8BFA72EC-FAD5-6350-14E3-28F24BE68C79}"/>
                   </a:ext>
                 </a:extLst>
               </p:cNvPr>
@@ -6492,7 +6395,7 @@
               <p:cNvPr id="129" name="Oval 128">
                 <a:extLst>
                   <a:ext uri="{FF2B5EF4-FFF2-40B4-BE49-F238E27FC236}">
-                    <a16:creationId xmlns:a16="http://schemas.microsoft.com/office/drawing/2014/main" id="{A8E8DF44-D72F-48F7-BC48-12898EF88200}"/>
+                    <a16:creationId xmlns:a16="http://schemas.microsoft.com/office/drawing/2014/main" id="{8879AE96-B54D-AF88-3E86-82B2ED5BD75A}"/>
                   </a:ext>
                 </a:extLst>
               </p:cNvPr>
@@ -6544,7 +6447,7 @@
               <p:cNvPr id="130" name="Oval 129">
                 <a:extLst>
                   <a:ext uri="{FF2B5EF4-FFF2-40B4-BE49-F238E27FC236}">
-                    <a16:creationId xmlns:a16="http://schemas.microsoft.com/office/drawing/2014/main" id="{0E65D4E3-D00A-48E5-99ED-8AC57DBB500A}"/>
+                    <a16:creationId xmlns:a16="http://schemas.microsoft.com/office/drawing/2014/main" id="{A3812DBF-61CD-DC0A-9C0D-A532C5A45C03}"/>
                   </a:ext>
                 </a:extLst>
               </p:cNvPr>
@@ -6597,7 +6500,7 @@
             <p:cNvPr id="106" name="TextBox 105">
               <a:extLst>
                 <a:ext uri="{FF2B5EF4-FFF2-40B4-BE49-F238E27FC236}">
-                  <a16:creationId xmlns:a16="http://schemas.microsoft.com/office/drawing/2014/main" id="{987F1CEA-6580-4105-B686-23136B610DCD}"/>
+                  <a16:creationId xmlns:a16="http://schemas.microsoft.com/office/drawing/2014/main" id="{0FC97C58-D90C-802B-F810-BF5B67B2506C}"/>
                 </a:ext>
               </a:extLst>
             </p:cNvPr>
@@ -6661,7 +6564,7 @@
             <p:cNvPr id="12" name="Straight Connector 11">
               <a:extLst>
                 <a:ext uri="{FF2B5EF4-FFF2-40B4-BE49-F238E27FC236}">
-                  <a16:creationId xmlns:a16="http://schemas.microsoft.com/office/drawing/2014/main" id="{5FC2D553-68D7-15E4-624E-B769E1CCDB30}"/>
+                  <a16:creationId xmlns:a16="http://schemas.microsoft.com/office/drawing/2014/main" id="{2BF925D7-7171-122A-6DD5-FAC63B5FD3FC}"/>
                 </a:ext>
               </a:extLst>
             </p:cNvPr>
@@ -6698,10 +6601,10 @@
         </p:cxnSp>
         <p:grpSp>
           <p:nvGrpSpPr>
-            <p:cNvPr id="19" name="Group 18">
+            <p:cNvPr id="16" name="Group 15">
               <a:extLst>
                 <a:ext uri="{FF2B5EF4-FFF2-40B4-BE49-F238E27FC236}">
-                  <a16:creationId xmlns:a16="http://schemas.microsoft.com/office/drawing/2014/main" id="{A33E3A0D-5D50-B8ED-78D7-557C25CFA0AF}"/>
+                  <a16:creationId xmlns:a16="http://schemas.microsoft.com/office/drawing/2014/main" id="{7CBE782F-3003-C6D1-EA4D-E740895CCFD1}"/>
                 </a:ext>
               </a:extLst>
             </p:cNvPr>
@@ -6710,18 +6613,75 @@
           </p:nvGrpSpPr>
           <p:grpSpPr>
             <a:xfrm>
-              <a:off x="8468250" y="3511704"/>
-              <a:ext cx="1689168" cy="1704380"/>
-              <a:chOff x="8468250" y="3511704"/>
-              <a:chExt cx="1689168" cy="1704380"/>
+              <a:off x="8470803" y="3511704"/>
+              <a:ext cx="1565803" cy="618689"/>
+              <a:chOff x="8470803" y="3511704"/>
+              <a:chExt cx="1565803" cy="618689"/>
             </a:xfrm>
           </p:grpSpPr>
+          <p:sp>
+            <p:nvSpPr>
+              <p:cNvPr id="207" name="Rectangle: Rounded Corners 206">
+                <a:extLst>
+                  <a:ext uri="{FF2B5EF4-FFF2-40B4-BE49-F238E27FC236}">
+                    <a16:creationId xmlns:a16="http://schemas.microsoft.com/office/drawing/2014/main" id="{450964B0-930D-CCE0-9BAF-D2E05A9F5914}"/>
+                  </a:ext>
+                </a:extLst>
+              </p:cNvPr>
+              <p:cNvSpPr/>
+              <p:nvPr/>
+            </p:nvSpPr>
+            <p:spPr>
+              <a:xfrm>
+                <a:off x="8470803" y="3511704"/>
+                <a:ext cx="1565803" cy="618689"/>
+              </a:xfrm>
+              <a:prstGeom prst="roundRect">
+                <a:avLst>
+                  <a:gd name="adj" fmla="val 12974"/>
+                </a:avLst>
+              </a:prstGeom>
+              <a:noFill/>
+              <a:ln w="12700">
+                <a:solidFill>
+                  <a:schemeClr val="tx1"/>
+                </a:solidFill>
+              </a:ln>
+            </p:spPr>
+            <p:style>
+              <a:lnRef idx="2">
+                <a:schemeClr val="accent1">
+                  <a:shade val="15000"/>
+                </a:schemeClr>
+              </a:lnRef>
+              <a:fillRef idx="1">
+                <a:schemeClr val="accent1"/>
+              </a:fillRef>
+              <a:effectRef idx="0">
+                <a:schemeClr val="accent1"/>
+              </a:effectRef>
+              <a:fontRef idx="minor">
+                <a:schemeClr val="lt1"/>
+              </a:fontRef>
+            </p:style>
+            <p:txBody>
+              <a:bodyPr rtlCol="0" anchor="ctr"/>
+              <a:lstStyle/>
+              <a:p>
+                <a:pPr algn="ctr"/>
+                <a:endParaRPr lang="en-US" dirty="0">
+                  <a:latin typeface="Times New Roman" panose="02020603050405020304" pitchFamily="18" charset="0"/>
+                  <a:cs typeface="Times New Roman" panose="02020603050405020304" pitchFamily="18" charset="0"/>
+                </a:endParaRPr>
+              </a:p>
+            </p:txBody>
+          </p:sp>
           <p:grpSp>
             <p:nvGrpSpPr>
-              <p:cNvPr id="16" name="Group 15">
+              <p:cNvPr id="14" name="Group 13">
                 <a:extLst>
                   <a:ext uri="{FF2B5EF4-FFF2-40B4-BE49-F238E27FC236}">
-                    <a16:creationId xmlns:a16="http://schemas.microsoft.com/office/drawing/2014/main" id="{5A0D4E12-3FC9-6E87-DF0E-6D25592C3931}"/>
+                    <a16:creationId xmlns:a16="http://schemas.microsoft.com/office/drawing/2014/main" id="{16618EB8-0A44-5246-1C08-E8D5934D8CF6}"/>
                   </a:ext>
                 </a:extLst>
               </p:cNvPr>
@@ -6730,75 +6690,195 @@
             </p:nvGrpSpPr>
             <p:grpSpPr>
               <a:xfrm>
-                <a:off x="8470803" y="3511704"/>
-                <a:ext cx="1565803" cy="618689"/>
-                <a:chOff x="8470803" y="3511704"/>
-                <a:chExt cx="1565803" cy="618689"/>
+                <a:off x="8544250" y="3663843"/>
+                <a:ext cx="1430022" cy="310703"/>
+                <a:chOff x="8544250" y="3663843"/>
+                <a:chExt cx="1430022" cy="310703"/>
               </a:xfrm>
             </p:grpSpPr>
-            <p:sp>
-              <p:nvSpPr>
-                <p:cNvPr id="207" name="Rectangle: Rounded Corners 206">
+            <p:grpSp>
+              <p:nvGrpSpPr>
+                <p:cNvPr id="8" name="Group 7">
                   <a:extLst>
                     <a:ext uri="{FF2B5EF4-FFF2-40B4-BE49-F238E27FC236}">
-                      <a16:creationId xmlns:a16="http://schemas.microsoft.com/office/drawing/2014/main" id="{2AD042C8-D8C8-686C-04E3-C1DA9627FCDA}"/>
+                      <a16:creationId xmlns:a16="http://schemas.microsoft.com/office/drawing/2014/main" id="{1A4A7F63-9428-9C54-F025-DA35E18BB52C}"/>
                     </a:ext>
                   </a:extLst>
                 </p:cNvPr>
-                <p:cNvSpPr/>
+                <p:cNvGrpSpPr/>
                 <p:nvPr/>
-              </p:nvSpPr>
-              <p:spPr>
+              </p:nvGrpSpPr>
+              <p:grpSpPr>
                 <a:xfrm>
-                  <a:off x="8470803" y="3511704"/>
-                  <a:ext cx="1565803" cy="618689"/>
+                  <a:off x="9877010" y="3808956"/>
+                  <a:ext cx="97262" cy="20476"/>
+                  <a:chOff x="10423398" y="4210335"/>
+                  <a:chExt cx="97262" cy="20476"/>
                 </a:xfrm>
-                <a:prstGeom prst="roundRect">
-                  <a:avLst>
-                    <a:gd name="adj" fmla="val 12974"/>
-                  </a:avLst>
-                </a:prstGeom>
-                <a:noFill/>
-                <a:ln w="12700">
+              </p:grpSpPr>
+              <p:sp>
+                <p:nvSpPr>
+                  <p:cNvPr id="115" name="Oval 114">
+                    <a:extLst>
+                      <a:ext uri="{FF2B5EF4-FFF2-40B4-BE49-F238E27FC236}">
+                        <a16:creationId xmlns:a16="http://schemas.microsoft.com/office/drawing/2014/main" id="{B1A2696D-500D-0A6C-0D03-918DCDDC62A6}"/>
+                      </a:ext>
+                    </a:extLst>
+                  </p:cNvPr>
+                  <p:cNvSpPr/>
+                  <p:nvPr/>
+                </p:nvSpPr>
+                <p:spPr>
+                  <a:xfrm flipV="1">
+                    <a:off x="10423398" y="4210335"/>
+                    <a:ext cx="20476" cy="20476"/>
+                  </a:xfrm>
+                  <a:prstGeom prst="ellipse">
+                    <a:avLst/>
+                  </a:prstGeom>
                   <a:solidFill>
                     <a:schemeClr val="tx1"/>
                   </a:solidFill>
-                </a:ln>
-              </p:spPr>
-              <p:style>
-                <a:lnRef idx="2">
-                  <a:schemeClr val="accent1">
-                    <a:shade val="15000"/>
-                  </a:schemeClr>
-                </a:lnRef>
-                <a:fillRef idx="1">
-                  <a:schemeClr val="accent1"/>
-                </a:fillRef>
-                <a:effectRef idx="0">
-                  <a:schemeClr val="accent1"/>
-                </a:effectRef>
-                <a:fontRef idx="minor">
-                  <a:schemeClr val="lt1"/>
-                </a:fontRef>
-              </p:style>
-              <p:txBody>
-                <a:bodyPr rtlCol="0" anchor="ctr"/>
-                <a:lstStyle/>
-                <a:p>
-                  <a:pPr algn="ctr"/>
-                  <a:endParaRPr lang="en-US" dirty="0">
-                    <a:latin typeface="Times New Roman" panose="02020603050405020304" pitchFamily="18" charset="0"/>
-                    <a:cs typeface="Times New Roman" panose="02020603050405020304" pitchFamily="18" charset="0"/>
-                  </a:endParaRPr>
-                </a:p>
-              </p:txBody>
-            </p:sp>
+                  <a:ln>
+                    <a:noFill/>
+                  </a:ln>
+                </p:spPr>
+                <p:style>
+                  <a:lnRef idx="2">
+                    <a:schemeClr val="accent1">
+                      <a:shade val="15000"/>
+                    </a:schemeClr>
+                  </a:lnRef>
+                  <a:fillRef idx="1">
+                    <a:schemeClr val="accent1"/>
+                  </a:fillRef>
+                  <a:effectRef idx="0">
+                    <a:schemeClr val="accent1"/>
+                  </a:effectRef>
+                  <a:fontRef idx="minor">
+                    <a:schemeClr val="lt1"/>
+                  </a:fontRef>
+                </p:style>
+                <p:txBody>
+                  <a:bodyPr rtlCol="0" anchor="ctr"/>
+                  <a:lstStyle/>
+                  <a:p>
+                    <a:pPr algn="ctr"/>
+                    <a:endParaRPr lang="en-US"/>
+                  </a:p>
+                </p:txBody>
+              </p:sp>
+              <p:sp>
+                <p:nvSpPr>
+                  <p:cNvPr id="117" name="Oval 116">
+                    <a:extLst>
+                      <a:ext uri="{FF2B5EF4-FFF2-40B4-BE49-F238E27FC236}">
+                        <a16:creationId xmlns:a16="http://schemas.microsoft.com/office/drawing/2014/main" id="{CC772C2A-767C-EA01-78AE-F96977BB681E}"/>
+                      </a:ext>
+                    </a:extLst>
+                  </p:cNvPr>
+                  <p:cNvSpPr/>
+                  <p:nvPr/>
+                </p:nvSpPr>
+                <p:spPr>
+                  <a:xfrm flipV="1">
+                    <a:off x="10461791" y="4210335"/>
+                    <a:ext cx="20476" cy="20476"/>
+                  </a:xfrm>
+                  <a:prstGeom prst="ellipse">
+                    <a:avLst/>
+                  </a:prstGeom>
+                  <a:solidFill>
+                    <a:schemeClr val="tx1"/>
+                  </a:solidFill>
+                  <a:ln>
+                    <a:noFill/>
+                  </a:ln>
+                </p:spPr>
+                <p:style>
+                  <a:lnRef idx="2">
+                    <a:schemeClr val="accent1">
+                      <a:shade val="15000"/>
+                    </a:schemeClr>
+                  </a:lnRef>
+                  <a:fillRef idx="1">
+                    <a:schemeClr val="accent1"/>
+                  </a:fillRef>
+                  <a:effectRef idx="0">
+                    <a:schemeClr val="accent1"/>
+                  </a:effectRef>
+                  <a:fontRef idx="minor">
+                    <a:schemeClr val="lt1"/>
+                  </a:fontRef>
+                </p:style>
+                <p:txBody>
+                  <a:bodyPr rtlCol="0" anchor="ctr"/>
+                  <a:lstStyle/>
+                  <a:p>
+                    <a:pPr algn="ctr"/>
+                    <a:endParaRPr lang="en-US"/>
+                  </a:p>
+                </p:txBody>
+              </p:sp>
+              <p:sp>
+                <p:nvSpPr>
+                  <p:cNvPr id="119" name="Oval 118">
+                    <a:extLst>
+                      <a:ext uri="{FF2B5EF4-FFF2-40B4-BE49-F238E27FC236}">
+                        <a16:creationId xmlns:a16="http://schemas.microsoft.com/office/drawing/2014/main" id="{A3FCB6E3-1292-8438-B3BB-B8337E929420}"/>
+                      </a:ext>
+                    </a:extLst>
+                  </p:cNvPr>
+                  <p:cNvSpPr/>
+                  <p:nvPr/>
+                </p:nvSpPr>
+                <p:spPr>
+                  <a:xfrm flipV="1">
+                    <a:off x="10500184" y="4210335"/>
+                    <a:ext cx="20476" cy="20476"/>
+                  </a:xfrm>
+                  <a:prstGeom prst="ellipse">
+                    <a:avLst/>
+                  </a:prstGeom>
+                  <a:solidFill>
+                    <a:schemeClr val="tx1"/>
+                  </a:solidFill>
+                  <a:ln>
+                    <a:noFill/>
+                  </a:ln>
+                </p:spPr>
+                <p:style>
+                  <a:lnRef idx="2">
+                    <a:schemeClr val="accent1">
+                      <a:shade val="15000"/>
+                    </a:schemeClr>
+                  </a:lnRef>
+                  <a:fillRef idx="1">
+                    <a:schemeClr val="accent1"/>
+                  </a:fillRef>
+                  <a:effectRef idx="0">
+                    <a:schemeClr val="accent1"/>
+                  </a:effectRef>
+                  <a:fontRef idx="minor">
+                    <a:schemeClr val="lt1"/>
+                  </a:fontRef>
+                </p:style>
+                <p:txBody>
+                  <a:bodyPr rtlCol="0" anchor="ctr"/>
+                  <a:lstStyle/>
+                  <a:p>
+                    <a:pPr algn="ctr"/>
+                    <a:endParaRPr lang="en-US"/>
+                  </a:p>
+                </p:txBody>
+              </p:sp>
+            </p:grpSp>
             <p:grpSp>
               <p:nvGrpSpPr>
-                <p:cNvPr id="14" name="Group 13">
+                <p:cNvPr id="9" name="Group 8">
                   <a:extLst>
                     <a:ext uri="{FF2B5EF4-FFF2-40B4-BE49-F238E27FC236}">
-                      <a16:creationId xmlns:a16="http://schemas.microsoft.com/office/drawing/2014/main" id="{97F1E941-3E13-49C5-7690-78ACF6050DEF}"/>
+                      <a16:creationId xmlns:a16="http://schemas.microsoft.com/office/drawing/2014/main" id="{F8E13138-047D-D5AF-6FA4-730BEDA737DD}"/>
                     </a:ext>
                   </a:extLst>
                 </p:cNvPr>
@@ -6808,588 +6888,481 @@
               <p:grpSpPr>
                 <a:xfrm>
                   <a:off x="8544250" y="3663843"/>
-                  <a:ext cx="1430022" cy="310703"/>
-                  <a:chOff x="8544250" y="3663843"/>
-                  <a:chExt cx="1430022" cy="310703"/>
+                  <a:ext cx="655258" cy="310703"/>
+                  <a:chOff x="8483290" y="3660903"/>
+                  <a:chExt cx="655258" cy="310703"/>
                 </a:xfrm>
               </p:grpSpPr>
-              <p:grpSp>
-                <p:nvGrpSpPr>
-                  <p:cNvPr id="8" name="Group 7">
+              <p:sp>
+                <p:nvSpPr>
+                  <p:cNvPr id="3" name="Rectangle: Rounded Corners 2">
                     <a:extLst>
                       <a:ext uri="{FF2B5EF4-FFF2-40B4-BE49-F238E27FC236}">
-                        <a16:creationId xmlns:a16="http://schemas.microsoft.com/office/drawing/2014/main" id="{404898D3-6C70-464B-8171-22EBA9BA462E}"/>
+                        <a16:creationId xmlns:a16="http://schemas.microsoft.com/office/drawing/2014/main" id="{DC34C81B-0305-46CD-F9C4-826E28186BCD}"/>
                       </a:ext>
                     </a:extLst>
                   </p:cNvPr>
-                  <p:cNvGrpSpPr/>
+                  <p:cNvSpPr/>
                   <p:nvPr/>
-                </p:nvGrpSpPr>
-                <p:grpSpPr>
+                </p:nvSpPr>
+                <p:spPr>
                   <a:xfrm>
-                    <a:off x="9877010" y="3808956"/>
-                    <a:ext cx="97262" cy="20476"/>
-                    <a:chOff x="10423398" y="4210335"/>
-                    <a:chExt cx="97262" cy="20476"/>
+                    <a:off x="8515444" y="3660903"/>
+                    <a:ext cx="590950" cy="310703"/>
                   </a:xfrm>
-                </p:grpSpPr>
-                <p:sp>
-                  <p:nvSpPr>
-                    <p:cNvPr id="115" name="Oval 114">
-                      <a:extLst>
-                        <a:ext uri="{FF2B5EF4-FFF2-40B4-BE49-F238E27FC236}">
-                          <a16:creationId xmlns:a16="http://schemas.microsoft.com/office/drawing/2014/main" id="{A4F59B52-4707-44C3-A7FB-893C92767A45}"/>
-                        </a:ext>
-                      </a:extLst>
-                    </p:cNvPr>
-                    <p:cNvSpPr/>
-                    <p:nvPr/>
-                  </p:nvSpPr>
-                  <p:spPr>
-                    <a:xfrm flipV="1">
-                      <a:off x="10423398" y="4210335"/>
-                      <a:ext cx="20476" cy="20476"/>
-                    </a:xfrm>
-                    <a:prstGeom prst="ellipse">
-                      <a:avLst/>
-                    </a:prstGeom>
+                  <a:prstGeom prst="roundRect">
+                    <a:avLst>
+                      <a:gd name="adj" fmla="val 12974"/>
+                    </a:avLst>
+                  </a:prstGeom>
+                  <a:solidFill>
+                    <a:schemeClr val="bg1"/>
+                  </a:solidFill>
+                  <a:ln w="12700">
                     <a:solidFill>
                       <a:schemeClr val="tx1"/>
                     </a:solidFill>
-                    <a:ln>
-                      <a:noFill/>
-                    </a:ln>
-                  </p:spPr>
-                  <p:style>
-                    <a:lnRef idx="2">
-                      <a:schemeClr val="accent1">
-                        <a:shade val="15000"/>
-                      </a:schemeClr>
-                    </a:lnRef>
-                    <a:fillRef idx="1">
-                      <a:schemeClr val="accent1"/>
-                    </a:fillRef>
-                    <a:effectRef idx="0">
-                      <a:schemeClr val="accent1"/>
-                    </a:effectRef>
-                    <a:fontRef idx="minor">
-                      <a:schemeClr val="lt1"/>
-                    </a:fontRef>
-                  </p:style>
-                  <p:txBody>
-                    <a:bodyPr rtlCol="0" anchor="ctr"/>
-                    <a:lstStyle/>
-                    <a:p>
-                      <a:pPr algn="ctr"/>
-                      <a:endParaRPr lang="en-US"/>
-                    </a:p>
-                  </p:txBody>
-                </p:sp>
-                <p:sp>
-                  <p:nvSpPr>
-                    <p:cNvPr id="117" name="Oval 116">
-                      <a:extLst>
-                        <a:ext uri="{FF2B5EF4-FFF2-40B4-BE49-F238E27FC236}">
-                          <a16:creationId xmlns:a16="http://schemas.microsoft.com/office/drawing/2014/main" id="{6AE6F000-4645-4D6E-B014-5F446A29015B}"/>
-                        </a:ext>
-                      </a:extLst>
-                    </p:cNvPr>
-                    <p:cNvSpPr/>
-                    <p:nvPr/>
-                  </p:nvSpPr>
-                  <p:spPr>
-                    <a:xfrm flipV="1">
-                      <a:off x="10461791" y="4210335"/>
-                      <a:ext cx="20476" cy="20476"/>
-                    </a:xfrm>
-                    <a:prstGeom prst="ellipse">
-                      <a:avLst/>
-                    </a:prstGeom>
-                    <a:solidFill>
-                      <a:schemeClr val="tx1"/>
-                    </a:solidFill>
-                    <a:ln>
-                      <a:noFill/>
-                    </a:ln>
-                  </p:spPr>
-                  <p:style>
-                    <a:lnRef idx="2">
-                      <a:schemeClr val="accent1">
-                        <a:shade val="15000"/>
-                      </a:schemeClr>
-                    </a:lnRef>
-                    <a:fillRef idx="1">
-                      <a:schemeClr val="accent1"/>
-                    </a:fillRef>
-                    <a:effectRef idx="0">
-                      <a:schemeClr val="accent1"/>
-                    </a:effectRef>
-                    <a:fontRef idx="minor">
-                      <a:schemeClr val="lt1"/>
-                    </a:fontRef>
-                  </p:style>
-                  <p:txBody>
-                    <a:bodyPr rtlCol="0" anchor="ctr"/>
-                    <a:lstStyle/>
-                    <a:p>
-                      <a:pPr algn="ctr"/>
-                      <a:endParaRPr lang="en-US"/>
-                    </a:p>
-                  </p:txBody>
-                </p:sp>
-                <p:sp>
-                  <p:nvSpPr>
-                    <p:cNvPr id="119" name="Oval 118">
-                      <a:extLst>
-                        <a:ext uri="{FF2B5EF4-FFF2-40B4-BE49-F238E27FC236}">
-                          <a16:creationId xmlns:a16="http://schemas.microsoft.com/office/drawing/2014/main" id="{D5F18A58-7DC6-478B-AD16-813A33502DD2}"/>
-                        </a:ext>
-                      </a:extLst>
-                    </p:cNvPr>
-                    <p:cNvSpPr/>
-                    <p:nvPr/>
-                  </p:nvSpPr>
-                  <p:spPr>
-                    <a:xfrm flipV="1">
-                      <a:off x="10500184" y="4210335"/>
-                      <a:ext cx="20476" cy="20476"/>
-                    </a:xfrm>
-                    <a:prstGeom prst="ellipse">
-                      <a:avLst/>
-                    </a:prstGeom>
-                    <a:solidFill>
-                      <a:schemeClr val="tx1"/>
-                    </a:solidFill>
-                    <a:ln>
-                      <a:noFill/>
-                    </a:ln>
-                  </p:spPr>
-                  <p:style>
-                    <a:lnRef idx="2">
-                      <a:schemeClr val="accent1">
-                        <a:shade val="15000"/>
-                      </a:schemeClr>
-                    </a:lnRef>
-                    <a:fillRef idx="1">
-                      <a:schemeClr val="accent1"/>
-                    </a:fillRef>
-                    <a:effectRef idx="0">
-                      <a:schemeClr val="accent1"/>
-                    </a:effectRef>
-                    <a:fontRef idx="minor">
-                      <a:schemeClr val="lt1"/>
-                    </a:fontRef>
-                  </p:style>
-                  <p:txBody>
-                    <a:bodyPr rtlCol="0" anchor="ctr"/>
-                    <a:lstStyle/>
-                    <a:p>
-                      <a:pPr algn="ctr"/>
-                      <a:endParaRPr lang="en-US"/>
-                    </a:p>
-                  </p:txBody>
-                </p:sp>
-              </p:grpSp>
-              <p:grpSp>
-                <p:nvGrpSpPr>
-                  <p:cNvPr id="9" name="Group 8">
-                    <a:extLst>
-                      <a:ext uri="{FF2B5EF4-FFF2-40B4-BE49-F238E27FC236}">
-                        <a16:creationId xmlns:a16="http://schemas.microsoft.com/office/drawing/2014/main" id="{1F3106DC-80E8-FB39-EE47-D21D07164908}"/>
-                      </a:ext>
-                    </a:extLst>
-                  </p:cNvPr>
-                  <p:cNvGrpSpPr/>
-                  <p:nvPr/>
-                </p:nvGrpSpPr>
-                <p:grpSpPr>
-                  <a:xfrm>
-                    <a:off x="8544250" y="3663843"/>
-                    <a:ext cx="655258" cy="310703"/>
-                    <a:chOff x="8483290" y="3660903"/>
-                    <a:chExt cx="655258" cy="310703"/>
-                  </a:xfrm>
-                </p:grpSpPr>
-                <p:sp>
-                  <p:nvSpPr>
-                    <p:cNvPr id="3" name="Rectangle: Rounded Corners 2">
-                      <a:extLst>
-                        <a:ext uri="{FF2B5EF4-FFF2-40B4-BE49-F238E27FC236}">
-                          <a16:creationId xmlns:a16="http://schemas.microsoft.com/office/drawing/2014/main" id="{676FA5F0-9072-6328-5AD3-0AA5C4AC01F5}"/>
-                        </a:ext>
-                      </a:extLst>
-                    </p:cNvPr>
-                    <p:cNvSpPr/>
-                    <p:nvPr/>
-                  </p:nvSpPr>
-                  <p:spPr>
-                    <a:xfrm>
-                      <a:off x="8515444" y="3660903"/>
-                      <a:ext cx="590950" cy="310703"/>
-                    </a:xfrm>
-                    <a:prstGeom prst="roundRect">
-                      <a:avLst>
-                        <a:gd name="adj" fmla="val 12974"/>
-                      </a:avLst>
-                    </a:prstGeom>
-                    <a:solidFill>
-                      <a:schemeClr val="bg1"/>
-                    </a:solidFill>
-                    <a:ln w="12700">
-                      <a:solidFill>
-                        <a:schemeClr val="tx1"/>
-                      </a:solidFill>
-                    </a:ln>
-                  </p:spPr>
-                  <p:style>
-                    <a:lnRef idx="2">
-                      <a:schemeClr val="accent1">
-                        <a:shade val="15000"/>
-                      </a:schemeClr>
-                    </a:lnRef>
-                    <a:fillRef idx="1">
-                      <a:schemeClr val="accent1"/>
-                    </a:fillRef>
-                    <a:effectRef idx="0">
-                      <a:schemeClr val="accent1"/>
-                    </a:effectRef>
-                    <a:fontRef idx="minor">
-                      <a:schemeClr val="lt1"/>
-                    </a:fontRef>
-                  </p:style>
-                  <p:txBody>
-                    <a:bodyPr rtlCol="0" anchor="ctr"/>
-                    <a:lstStyle/>
-                    <a:p>
-                      <a:pPr algn="ctr"/>
-                      <a:endParaRPr lang="en-US" sz="1400" dirty="0">
-                        <a:solidFill>
-                          <a:schemeClr val="tx1"/>
-                        </a:solidFill>
-                        <a:latin typeface="Times New Roman" panose="02020603050405020304" pitchFamily="18" charset="0"/>
-                        <a:cs typeface="Times New Roman" panose="02020603050405020304" pitchFamily="18" charset="0"/>
-                      </a:endParaRPr>
-                    </a:p>
-                  </p:txBody>
-                </p:sp>
-                <p:sp>
-                  <p:nvSpPr>
-                    <p:cNvPr id="4" name="TextBox 3">
-                      <a:extLst>
-                        <a:ext uri="{FF2B5EF4-FFF2-40B4-BE49-F238E27FC236}">
-                          <a16:creationId xmlns:a16="http://schemas.microsoft.com/office/drawing/2014/main" id="{D9774F6E-6E79-9D5C-73CD-F37E2DAA19D9}"/>
-                        </a:ext>
-                      </a:extLst>
-                    </p:cNvPr>
-                    <p:cNvSpPr txBox="1"/>
-                    <p:nvPr/>
-                  </p:nvSpPr>
-                  <p:spPr>
-                    <a:xfrm>
-                      <a:off x="8483290" y="3661383"/>
-                      <a:ext cx="655258" cy="307777"/>
-                    </a:xfrm>
-                    <a:prstGeom prst="rect">
-                      <a:avLst/>
-                    </a:prstGeom>
-                    <a:noFill/>
-                  </p:spPr>
-                  <p:txBody>
-                    <a:bodyPr wrap="square">
-                      <a:spAutoFit/>
-                    </a:bodyPr>
-                    <a:lstStyle/>
-                    <a:p>
-                      <a:pPr algn="ctr"/>
-                      <a:r>
-                        <a:rPr lang="en-US" sz="1400" dirty="0">
-                          <a:latin typeface="Times New Roman" panose="02020603050405020304" pitchFamily="18" charset="0"/>
-                          <a:cs typeface="Times New Roman" panose="02020603050405020304" pitchFamily="18" charset="0"/>
-                        </a:rPr>
-                        <a:t>UPF</a:t>
-                      </a:r>
-                    </a:p>
-                  </p:txBody>
-                </p:sp>
-              </p:grpSp>
-              <p:grpSp>
-                <p:nvGrpSpPr>
-                  <p:cNvPr id="7" name="Group 6">
-                    <a:extLst>
-                      <a:ext uri="{FF2B5EF4-FFF2-40B4-BE49-F238E27FC236}">
-                        <a16:creationId xmlns:a16="http://schemas.microsoft.com/office/drawing/2014/main" id="{A3472C23-380D-F6B9-4577-FCC39ACC3639}"/>
-                      </a:ext>
-                    </a:extLst>
-                  </p:cNvPr>
-                  <p:cNvGrpSpPr/>
-                  <p:nvPr/>
-                </p:nvGrpSpPr>
-                <p:grpSpPr>
-                  <a:xfrm>
-                    <a:off x="9189714" y="3663843"/>
-                    <a:ext cx="655258" cy="310703"/>
-                    <a:chOff x="9128754" y="3666783"/>
-                    <a:chExt cx="655258" cy="310703"/>
-                  </a:xfrm>
-                </p:grpSpPr>
-                <p:sp>
-                  <p:nvSpPr>
-                    <p:cNvPr id="5" name="Rectangle: Rounded Corners 4">
-                      <a:extLst>
-                        <a:ext uri="{FF2B5EF4-FFF2-40B4-BE49-F238E27FC236}">
-                          <a16:creationId xmlns:a16="http://schemas.microsoft.com/office/drawing/2014/main" id="{93AA82A3-42FB-C756-FA83-779EA158E1B5}"/>
-                        </a:ext>
-                      </a:extLst>
-                    </p:cNvPr>
-                    <p:cNvSpPr/>
-                    <p:nvPr/>
-                  </p:nvSpPr>
-                  <p:spPr>
-                    <a:xfrm>
-                      <a:off x="9160908" y="3666783"/>
-                      <a:ext cx="590950" cy="310703"/>
-                    </a:xfrm>
-                    <a:prstGeom prst="roundRect">
-                      <a:avLst>
-                        <a:gd name="adj" fmla="val 12974"/>
-                      </a:avLst>
-                    </a:prstGeom>
-                    <a:solidFill>
-                      <a:schemeClr val="bg1"/>
-                    </a:solidFill>
-                    <a:ln w="12700">
-                      <a:solidFill>
-                        <a:schemeClr val="tx1"/>
-                      </a:solidFill>
-                    </a:ln>
-                  </p:spPr>
-                  <p:style>
-                    <a:lnRef idx="2">
-                      <a:schemeClr val="accent1">
-                        <a:shade val="15000"/>
-                      </a:schemeClr>
-                    </a:lnRef>
-                    <a:fillRef idx="1">
-                      <a:schemeClr val="accent1"/>
-                    </a:fillRef>
-                    <a:effectRef idx="0">
-                      <a:schemeClr val="accent1"/>
-                    </a:effectRef>
-                    <a:fontRef idx="minor">
-                      <a:schemeClr val="lt1"/>
-                    </a:fontRef>
-                  </p:style>
-                  <p:txBody>
-                    <a:bodyPr rtlCol="0" anchor="ctr"/>
-                    <a:lstStyle/>
-                    <a:p>
-                      <a:pPr algn="ctr"/>
-                      <a:endParaRPr lang="en-US" sz="1400" dirty="0">
-                        <a:solidFill>
-                          <a:schemeClr val="tx1"/>
-                        </a:solidFill>
-                        <a:latin typeface="Times New Roman" panose="02020603050405020304" pitchFamily="18" charset="0"/>
-                        <a:cs typeface="Times New Roman" panose="02020603050405020304" pitchFamily="18" charset="0"/>
-                      </a:endParaRPr>
-                    </a:p>
-                  </p:txBody>
-                </p:sp>
-                <p:sp>
-                  <p:nvSpPr>
-                    <p:cNvPr id="6" name="TextBox 5">
-                      <a:extLst>
-                        <a:ext uri="{FF2B5EF4-FFF2-40B4-BE49-F238E27FC236}">
-                          <a16:creationId xmlns:a16="http://schemas.microsoft.com/office/drawing/2014/main" id="{728182E5-8037-AF99-606B-1CBB93A73E32}"/>
-                        </a:ext>
-                      </a:extLst>
-                    </p:cNvPr>
-                    <p:cNvSpPr txBox="1"/>
-                    <p:nvPr/>
-                  </p:nvSpPr>
-                  <p:spPr>
-                    <a:xfrm>
-                      <a:off x="9128754" y="3667263"/>
-                      <a:ext cx="655258" cy="307777"/>
-                    </a:xfrm>
-                    <a:prstGeom prst="rect">
-                      <a:avLst/>
-                    </a:prstGeom>
-                    <a:noFill/>
-                  </p:spPr>
-                  <p:txBody>
-                    <a:bodyPr wrap="square">
-                      <a:spAutoFit/>
-                    </a:bodyPr>
-                    <a:lstStyle/>
-                    <a:p>
-                      <a:pPr algn="ctr"/>
-                      <a:r>
-                        <a:rPr lang="en-US" sz="1400" dirty="0">
-                          <a:latin typeface="Times New Roman" panose="02020603050405020304" pitchFamily="18" charset="0"/>
-                          <a:cs typeface="Times New Roman" panose="02020603050405020304" pitchFamily="18" charset="0"/>
-                        </a:rPr>
-                        <a:t>AMF</a:t>
-                      </a:r>
-                    </a:p>
-                  </p:txBody>
-                </p:sp>
-              </p:grpSp>
-            </p:grpSp>
-          </p:grpSp>
-          <p:grpSp>
-            <p:nvGrpSpPr>
-              <p:cNvPr id="18" name="Group 17">
-                <a:extLst>
-                  <a:ext uri="{FF2B5EF4-FFF2-40B4-BE49-F238E27FC236}">
-                    <a16:creationId xmlns:a16="http://schemas.microsoft.com/office/drawing/2014/main" id="{13B2248C-E438-FBC9-EDBF-1D9B2A1601B0}"/>
-                  </a:ext>
-                </a:extLst>
-              </p:cNvPr>
-              <p:cNvGrpSpPr/>
-              <p:nvPr/>
-            </p:nvGrpSpPr>
-            <p:grpSpPr>
-              <a:xfrm>
-                <a:off x="8468250" y="4158213"/>
-                <a:ext cx="1689168" cy="1057871"/>
-                <a:chOff x="8468250" y="4158213"/>
-                <a:chExt cx="1689168" cy="1057871"/>
-              </a:xfrm>
-            </p:grpSpPr>
-            <p:sp>
-              <p:nvSpPr>
-                <p:cNvPr id="176" name="TextBox 175">
-                  <a:extLst>
-                    <a:ext uri="{FF2B5EF4-FFF2-40B4-BE49-F238E27FC236}">
-                      <a16:creationId xmlns:a16="http://schemas.microsoft.com/office/drawing/2014/main" id="{A0649D89-E505-22A1-9F9B-838D485FC1C7}"/>
-                    </a:ext>
-                  </a:extLst>
-                </p:cNvPr>
-                <p:cNvSpPr txBox="1"/>
-                <p:nvPr/>
-              </p:nvSpPr>
-              <p:spPr>
-                <a:xfrm>
-                  <a:off x="8589062" y="4385087"/>
-                  <a:ext cx="1568356" cy="830997"/>
-                </a:xfrm>
-                <a:prstGeom prst="rect">
-                  <a:avLst/>
-                </a:prstGeom>
-                <a:noFill/>
-              </p:spPr>
-              <p:txBody>
-                <a:bodyPr wrap="square">
-                  <a:spAutoFit/>
-                </a:bodyPr>
-                <a:lstStyle/>
-                <a:p>
-                  <a:pPr marL="285750" indent="-285750">
-                    <a:buFont typeface="Arial" panose="020B0604020202020204" pitchFamily="34" charset="0"/>
-                    <a:buChar char="•"/>
-                  </a:pPr>
-                  <a:r>
-                    <a:rPr lang="en-US" sz="1200" dirty="0">
-                      <a:latin typeface="Times New Roman" panose="02020603050405020304" pitchFamily="18" charset="0"/>
-                      <a:cs typeface="Times New Roman" panose="02020603050405020304" pitchFamily="18" charset="0"/>
-                    </a:rPr>
-                    <a:t>Open5GS</a:t>
-                  </a:r>
-                </a:p>
-                <a:p>
-                  <a:pPr marL="285750" indent="-285750">
-                    <a:buFont typeface="Arial" panose="020B0604020202020204" pitchFamily="34" charset="0"/>
-                    <a:buChar char="•"/>
-                  </a:pPr>
-                  <a:r>
-                    <a:rPr lang="en-US" sz="1200" dirty="0">
-                      <a:latin typeface="Times New Roman" panose="02020603050405020304" pitchFamily="18" charset="0"/>
-                      <a:cs typeface="Times New Roman" panose="02020603050405020304" pitchFamily="18" charset="0"/>
-                    </a:rPr>
-                    <a:t>OAI 5G CN</a:t>
-                  </a:r>
-                </a:p>
-                <a:p>
-                  <a:pPr marL="285750" indent="-285750">
-                    <a:buFont typeface="Arial" panose="020B0604020202020204" pitchFamily="34" charset="0"/>
-                    <a:buChar char="•"/>
-                  </a:pPr>
-                  <a:r>
-                    <a:rPr lang="en-US" sz="1200" dirty="0">
-                      <a:latin typeface="Times New Roman" panose="02020603050405020304" pitchFamily="18" charset="0"/>
-                      <a:cs typeface="Times New Roman" panose="02020603050405020304" pitchFamily="18" charset="0"/>
-                    </a:rPr>
-                    <a:t>Free5GC</a:t>
-                  </a:r>
-                </a:p>
-                <a:p>
-                  <a:pPr marL="285750" indent="-285750">
-                    <a:buFont typeface="Arial" panose="020B0604020202020204" pitchFamily="34" charset="0"/>
-                    <a:buChar char="•"/>
-                  </a:pPr>
-                  <a:r>
-                    <a:rPr lang="en-US" sz="1200" dirty="0">
-                      <a:latin typeface="Times New Roman" panose="02020603050405020304" pitchFamily="18" charset="0"/>
-                      <a:cs typeface="Times New Roman" panose="02020603050405020304" pitchFamily="18" charset="0"/>
-                    </a:rPr>
-                    <a:t>Phoenix</a:t>
-                  </a:r>
-                </a:p>
-              </p:txBody>
-            </p:sp>
-            <p:sp>
-              <p:nvSpPr>
-                <p:cNvPr id="17" name="TextBox 16">
-                  <a:extLst>
-                    <a:ext uri="{FF2B5EF4-FFF2-40B4-BE49-F238E27FC236}">
-                      <a16:creationId xmlns:a16="http://schemas.microsoft.com/office/drawing/2014/main" id="{63AF03B5-ABEE-6A9E-0665-4E76E054C4D7}"/>
-                    </a:ext>
-                  </a:extLst>
-                </p:cNvPr>
-                <p:cNvSpPr txBox="1"/>
-                <p:nvPr/>
-              </p:nvSpPr>
-              <p:spPr>
-                <a:xfrm>
-                  <a:off x="8468250" y="4158213"/>
-                  <a:ext cx="1568356" cy="307777"/>
-                </a:xfrm>
-                <a:prstGeom prst="rect">
-                  <a:avLst/>
-                </a:prstGeom>
-                <a:noFill/>
-              </p:spPr>
-              <p:txBody>
-                <a:bodyPr wrap="square">
-                  <a:spAutoFit/>
-                </a:bodyPr>
-                <a:lstStyle/>
-                <a:p>
-                  <a:pPr algn="ctr"/>
-                  <a:r>
-                    <a:rPr lang="en-US" sz="1400" b="1" dirty="0">
+                  </a:ln>
+                </p:spPr>
+                <p:style>
+                  <a:lnRef idx="2">
+                    <a:schemeClr val="accent1">
+                      <a:shade val="15000"/>
+                    </a:schemeClr>
+                  </a:lnRef>
+                  <a:fillRef idx="1">
+                    <a:schemeClr val="accent1"/>
+                  </a:fillRef>
+                  <a:effectRef idx="0">
+                    <a:schemeClr val="accent1"/>
+                  </a:effectRef>
+                  <a:fontRef idx="minor">
+                    <a:schemeClr val="lt1"/>
+                  </a:fontRef>
+                </p:style>
+                <p:txBody>
+                  <a:bodyPr rtlCol="0" anchor="ctr"/>
+                  <a:lstStyle/>
+                  <a:p>
+                    <a:pPr algn="ctr"/>
+                    <a:endParaRPr lang="en-US" sz="1400" dirty="0">
                       <a:solidFill>
                         <a:schemeClr val="tx1"/>
                       </a:solidFill>
                       <a:latin typeface="Times New Roman" panose="02020603050405020304" pitchFamily="18" charset="0"/>
                       <a:cs typeface="Times New Roman" panose="02020603050405020304" pitchFamily="18" charset="0"/>
-                    </a:rPr>
-                    <a:t>5G Core Network</a:t>
-                  </a:r>
-                  <a:endParaRPr lang="en-US" sz="1400" b="1" dirty="0">
+                    </a:endParaRPr>
+                  </a:p>
+                </p:txBody>
+              </p:sp>
+              <p:sp>
+                <p:nvSpPr>
+                  <p:cNvPr id="4" name="TextBox 3">
+                    <a:extLst>
+                      <a:ext uri="{FF2B5EF4-FFF2-40B4-BE49-F238E27FC236}">
+                        <a16:creationId xmlns:a16="http://schemas.microsoft.com/office/drawing/2014/main" id="{348BC2BF-B84B-E3B6-35EF-5C0866F96D3D}"/>
+                      </a:ext>
+                    </a:extLst>
+                  </p:cNvPr>
+                  <p:cNvSpPr txBox="1"/>
+                  <p:nvPr/>
+                </p:nvSpPr>
+                <p:spPr>
+                  <a:xfrm>
+                    <a:off x="8483290" y="3661383"/>
+                    <a:ext cx="655258" cy="307777"/>
+                  </a:xfrm>
+                  <a:prstGeom prst="rect">
+                    <a:avLst/>
+                  </a:prstGeom>
+                  <a:noFill/>
+                </p:spPr>
+                <p:txBody>
+                  <a:bodyPr wrap="square">
+                    <a:spAutoFit/>
+                  </a:bodyPr>
+                  <a:lstStyle/>
+                  <a:p>
+                    <a:pPr algn="ctr"/>
+                    <a:r>
+                      <a:rPr lang="en-US" sz="1400" dirty="0">
+                        <a:latin typeface="Times New Roman" panose="02020603050405020304" pitchFamily="18" charset="0"/>
+                        <a:cs typeface="Times New Roman" panose="02020603050405020304" pitchFamily="18" charset="0"/>
+                      </a:rPr>
+                      <a:t>UPF</a:t>
+                    </a:r>
+                  </a:p>
+                </p:txBody>
+              </p:sp>
+            </p:grpSp>
+            <p:grpSp>
+              <p:nvGrpSpPr>
+                <p:cNvPr id="7" name="Group 6">
+                  <a:extLst>
+                    <a:ext uri="{FF2B5EF4-FFF2-40B4-BE49-F238E27FC236}">
+                      <a16:creationId xmlns:a16="http://schemas.microsoft.com/office/drawing/2014/main" id="{1A64A0FD-A5E5-D5F3-1CAB-E578630CB933}"/>
+                    </a:ext>
+                  </a:extLst>
+                </p:cNvPr>
+                <p:cNvGrpSpPr/>
+                <p:nvPr/>
+              </p:nvGrpSpPr>
+              <p:grpSpPr>
+                <a:xfrm>
+                  <a:off x="9189714" y="3663843"/>
+                  <a:ext cx="655258" cy="310703"/>
+                  <a:chOff x="9128754" y="3666783"/>
+                  <a:chExt cx="655258" cy="310703"/>
+                </a:xfrm>
+              </p:grpSpPr>
+              <p:sp>
+                <p:nvSpPr>
+                  <p:cNvPr id="5" name="Rectangle: Rounded Corners 4">
+                    <a:extLst>
+                      <a:ext uri="{FF2B5EF4-FFF2-40B4-BE49-F238E27FC236}">
+                        <a16:creationId xmlns:a16="http://schemas.microsoft.com/office/drawing/2014/main" id="{BC1EAB85-D75F-08EF-1093-E64DEBD75018}"/>
+                      </a:ext>
+                    </a:extLst>
+                  </p:cNvPr>
+                  <p:cNvSpPr/>
+                  <p:nvPr/>
+                </p:nvSpPr>
+                <p:spPr>
+                  <a:xfrm>
+                    <a:off x="9160908" y="3666783"/>
+                    <a:ext cx="590950" cy="310703"/>
+                  </a:xfrm>
+                  <a:prstGeom prst="roundRect">
+                    <a:avLst>
+                      <a:gd name="adj" fmla="val 12974"/>
+                    </a:avLst>
+                  </a:prstGeom>
+                  <a:solidFill>
+                    <a:schemeClr val="bg1"/>
+                  </a:solidFill>
+                  <a:ln w="12700">
+                    <a:solidFill>
+                      <a:schemeClr val="tx1"/>
+                    </a:solidFill>
+                  </a:ln>
+                </p:spPr>
+                <p:style>
+                  <a:lnRef idx="2">
+                    <a:schemeClr val="accent1">
+                      <a:shade val="15000"/>
+                    </a:schemeClr>
+                  </a:lnRef>
+                  <a:fillRef idx="1">
+                    <a:schemeClr val="accent1"/>
+                  </a:fillRef>
+                  <a:effectRef idx="0">
+                    <a:schemeClr val="accent1"/>
+                  </a:effectRef>
+                  <a:fontRef idx="minor">
+                    <a:schemeClr val="lt1"/>
+                  </a:fontRef>
+                </p:style>
+                <p:txBody>
+                  <a:bodyPr rtlCol="0" anchor="ctr"/>
+                  <a:lstStyle/>
+                  <a:p>
+                    <a:pPr algn="ctr"/>
+                    <a:endParaRPr lang="en-US" sz="1400" dirty="0">
+                      <a:solidFill>
+                        <a:schemeClr val="tx1"/>
+                      </a:solidFill>
+                      <a:latin typeface="Times New Roman" panose="02020603050405020304" pitchFamily="18" charset="0"/>
+                      <a:cs typeface="Times New Roman" panose="02020603050405020304" pitchFamily="18" charset="0"/>
+                    </a:endParaRPr>
+                  </a:p>
+                </p:txBody>
+              </p:sp>
+              <p:sp>
+                <p:nvSpPr>
+                  <p:cNvPr id="6" name="TextBox 5">
+                    <a:extLst>
+                      <a:ext uri="{FF2B5EF4-FFF2-40B4-BE49-F238E27FC236}">
+                        <a16:creationId xmlns:a16="http://schemas.microsoft.com/office/drawing/2014/main" id="{D4229715-6AFF-2E41-69E6-DA72189E21A1}"/>
+                      </a:ext>
+                    </a:extLst>
+                  </p:cNvPr>
+                  <p:cNvSpPr txBox="1"/>
+                  <p:nvPr/>
+                </p:nvSpPr>
+                <p:spPr>
+                  <a:xfrm>
+                    <a:off x="9128754" y="3667263"/>
+                    <a:ext cx="655258" cy="307777"/>
+                  </a:xfrm>
+                  <a:prstGeom prst="rect">
+                    <a:avLst/>
+                  </a:prstGeom>
+                  <a:noFill/>
+                </p:spPr>
+                <p:txBody>
+                  <a:bodyPr wrap="square">
+                    <a:spAutoFit/>
+                  </a:bodyPr>
+                  <a:lstStyle/>
+                  <a:p>
+                    <a:pPr algn="ctr"/>
+                    <a:r>
+                      <a:rPr lang="en-US" sz="1400" dirty="0">
+                        <a:latin typeface="Times New Roman" panose="02020603050405020304" pitchFamily="18" charset="0"/>
+                        <a:cs typeface="Times New Roman" panose="02020603050405020304" pitchFamily="18" charset="0"/>
+                      </a:rPr>
+                      <a:t>AMF</a:t>
+                    </a:r>
+                  </a:p>
+                </p:txBody>
+              </p:sp>
+            </p:grpSp>
+          </p:grpSp>
+        </p:grpSp>
+        <p:grpSp>
+          <p:nvGrpSpPr>
+            <p:cNvPr id="18" name="Group 17">
+              <a:extLst>
+                <a:ext uri="{FF2B5EF4-FFF2-40B4-BE49-F238E27FC236}">
+                  <a16:creationId xmlns:a16="http://schemas.microsoft.com/office/drawing/2014/main" id="{FB0B699B-CBB2-1144-87BD-9EC09572D482}"/>
+                </a:ext>
+              </a:extLst>
+            </p:cNvPr>
+            <p:cNvGrpSpPr/>
+            <p:nvPr/>
+          </p:nvGrpSpPr>
+          <p:grpSpPr>
+            <a:xfrm>
+              <a:off x="8468250" y="4109945"/>
+              <a:ext cx="1653015" cy="1059453"/>
+              <a:chOff x="8468250" y="4134989"/>
+              <a:chExt cx="1653015" cy="1076072"/>
+            </a:xfrm>
+          </p:grpSpPr>
+          <p:sp>
+            <p:nvSpPr>
+              <p:cNvPr id="176" name="TextBox 175">
+                <a:extLst>
+                  <a:ext uri="{FF2B5EF4-FFF2-40B4-BE49-F238E27FC236}">
+                    <a16:creationId xmlns:a16="http://schemas.microsoft.com/office/drawing/2014/main" id="{A37A3E02-E00E-4E4C-24B9-DE87DE254A2B}"/>
+                  </a:ext>
+                </a:extLst>
+              </p:cNvPr>
+              <p:cNvSpPr txBox="1"/>
+              <p:nvPr/>
+            </p:nvSpPr>
+            <p:spPr>
+              <a:xfrm>
+                <a:off x="8589063" y="4367030"/>
+                <a:ext cx="1532202" cy="844031"/>
+              </a:xfrm>
+              <a:prstGeom prst="rect">
+                <a:avLst/>
+              </a:prstGeom>
+              <a:noFill/>
+            </p:spPr>
+            <p:txBody>
+              <a:bodyPr wrap="square">
+                <a:spAutoFit/>
+              </a:bodyPr>
+              <a:lstStyle/>
+              <a:p>
+                <a:pPr marL="285750" indent="-285750">
+                  <a:buFont typeface="Arial" panose="020B0604020202020204" pitchFamily="34" charset="0"/>
+                  <a:buChar char="•"/>
+                </a:pPr>
+                <a:r>
+                  <a:rPr lang="en-US" sz="1200" dirty="0">
                     <a:latin typeface="Times New Roman" panose="02020603050405020304" pitchFamily="18" charset="0"/>
                     <a:cs typeface="Times New Roman" panose="02020603050405020304" pitchFamily="18" charset="0"/>
-                  </a:endParaRPr>
-                </a:p>
-              </p:txBody>
-            </p:sp>
-          </p:grpSp>
+                  </a:rPr>
+                  <a:t>Open5GS</a:t>
+                </a:r>
+              </a:p>
+              <a:p>
+                <a:pPr marL="285750" indent="-285750">
+                  <a:buFont typeface="Arial" panose="020B0604020202020204" pitchFamily="34" charset="0"/>
+                  <a:buChar char="•"/>
+                </a:pPr>
+                <a:r>
+                  <a:rPr lang="en-US" sz="1200" dirty="0">
+                    <a:latin typeface="Times New Roman" panose="02020603050405020304" pitchFamily="18" charset="0"/>
+                    <a:cs typeface="Times New Roman" panose="02020603050405020304" pitchFamily="18" charset="0"/>
+                  </a:rPr>
+                  <a:t>OAI 5G CN</a:t>
+                </a:r>
+              </a:p>
+              <a:p>
+                <a:pPr marL="285750" indent="-285750">
+                  <a:buFont typeface="Arial" panose="020B0604020202020204" pitchFamily="34" charset="0"/>
+                  <a:buChar char="•"/>
+                </a:pPr>
+                <a:r>
+                  <a:rPr lang="en-US" sz="1200" dirty="0">
+                    <a:latin typeface="Times New Roman" panose="02020603050405020304" pitchFamily="18" charset="0"/>
+                    <a:cs typeface="Times New Roman" panose="02020603050405020304" pitchFamily="18" charset="0"/>
+                  </a:rPr>
+                  <a:t>Free5GC</a:t>
+                </a:r>
+              </a:p>
+              <a:p>
+                <a:pPr marL="285750" indent="-285750">
+                  <a:buFont typeface="Arial" panose="020B0604020202020204" pitchFamily="34" charset="0"/>
+                  <a:buChar char="•"/>
+                </a:pPr>
+                <a:r>
+                  <a:rPr lang="en-US" sz="1200" dirty="0">
+                    <a:latin typeface="Times New Roman" panose="02020603050405020304" pitchFamily="18" charset="0"/>
+                    <a:cs typeface="Times New Roman" panose="02020603050405020304" pitchFamily="18" charset="0"/>
+                  </a:rPr>
+                  <a:t>Open5GCore</a:t>
+                </a:r>
+              </a:p>
+            </p:txBody>
+          </p:sp>
+          <p:sp>
+            <p:nvSpPr>
+              <p:cNvPr id="17" name="TextBox 16">
+                <a:extLst>
+                  <a:ext uri="{FF2B5EF4-FFF2-40B4-BE49-F238E27FC236}">
+                    <a16:creationId xmlns:a16="http://schemas.microsoft.com/office/drawing/2014/main" id="{924078A0-C9B3-EE91-5200-847FD0169039}"/>
+                  </a:ext>
+                </a:extLst>
+              </p:cNvPr>
+              <p:cNvSpPr txBox="1"/>
+              <p:nvPr/>
+            </p:nvSpPr>
+            <p:spPr>
+              <a:xfrm>
+                <a:off x="8468250" y="4134989"/>
+                <a:ext cx="1568356" cy="307777"/>
+              </a:xfrm>
+              <a:prstGeom prst="rect">
+                <a:avLst/>
+              </a:prstGeom>
+              <a:noFill/>
+            </p:spPr>
+            <p:txBody>
+              <a:bodyPr wrap="square">
+                <a:spAutoFit/>
+              </a:bodyPr>
+              <a:lstStyle/>
+              <a:p>
+                <a:pPr algn="ctr"/>
+                <a:r>
+                  <a:rPr lang="en-US" sz="1400" b="1" dirty="0">
+                    <a:solidFill>
+                      <a:schemeClr val="tx1"/>
+                    </a:solidFill>
+                    <a:latin typeface="Times New Roman" panose="02020603050405020304" pitchFamily="18" charset="0"/>
+                    <a:cs typeface="Times New Roman" panose="02020603050405020304" pitchFamily="18" charset="0"/>
+                  </a:rPr>
+                  <a:t>5G Core Network</a:t>
+                </a:r>
+                <a:endParaRPr lang="en-US" sz="1400" b="1" dirty="0">
+                  <a:latin typeface="Times New Roman" panose="02020603050405020304" pitchFamily="18" charset="0"/>
+                  <a:cs typeface="Times New Roman" panose="02020603050405020304" pitchFamily="18" charset="0"/>
+                </a:endParaRPr>
+              </a:p>
+            </p:txBody>
+          </p:sp>
         </p:grpSp>
+        <p:sp>
+          <p:nvSpPr>
+            <p:cNvPr id="2" name="TextBox 1">
+              <a:extLst>
+                <a:ext uri="{FF2B5EF4-FFF2-40B4-BE49-F238E27FC236}">
+                  <a16:creationId xmlns:a16="http://schemas.microsoft.com/office/drawing/2014/main" id="{726BF3DA-B90A-5DE9-E13B-54E1D0BB70F6}"/>
+                </a:ext>
+              </a:extLst>
+            </p:cNvPr>
+            <p:cNvSpPr txBox="1"/>
+            <p:nvPr/>
+          </p:nvSpPr>
+          <p:spPr>
+            <a:xfrm>
+              <a:off x="6417137" y="1764477"/>
+              <a:ext cx="971328" cy="276999"/>
+            </a:xfrm>
+            <a:prstGeom prst="rect">
+              <a:avLst/>
+            </a:prstGeom>
+            <a:noFill/>
+          </p:spPr>
+          <p:txBody>
+            <a:bodyPr wrap="square">
+              <a:spAutoFit/>
+            </a:bodyPr>
+            <a:lstStyle/>
+            <a:p>
+              <a:pPr algn="ctr"/>
+              <a:r>
+                <a:rPr lang="en-US" sz="1200" dirty="0">
+                  <a:solidFill>
+                    <a:schemeClr val="tx1"/>
+                  </a:solidFill>
+                  <a:latin typeface="Times New Roman" panose="02020603050405020304" pitchFamily="18" charset="0"/>
+                  <a:cs typeface="Times New Roman" panose="02020603050405020304" pitchFamily="18" charset="0"/>
+                </a:rPr>
+                <a:t>A1-P, A1-EI</a:t>
+              </a:r>
+              <a:endParaRPr lang="en-US" sz="1200" dirty="0">
+                <a:latin typeface="Times New Roman" panose="02020603050405020304" pitchFamily="18" charset="0"/>
+                <a:cs typeface="Times New Roman" panose="02020603050405020304" pitchFamily="18" charset="0"/>
+              </a:endParaRPr>
+            </a:p>
+          </p:txBody>
+        </p:sp>
+        <p:sp>
+          <p:nvSpPr>
+            <p:cNvPr id="10" name="TextBox 9">
+              <a:extLst>
+                <a:ext uri="{FF2B5EF4-FFF2-40B4-BE49-F238E27FC236}">
+                  <a16:creationId xmlns:a16="http://schemas.microsoft.com/office/drawing/2014/main" id="{ECC65E69-40F3-D591-FFF2-046504C33894}"/>
+                </a:ext>
+              </a:extLst>
+            </p:cNvPr>
+            <p:cNvSpPr txBox="1"/>
+            <p:nvPr/>
+          </p:nvSpPr>
+          <p:spPr>
+            <a:xfrm>
+              <a:off x="6506434" y="3236557"/>
+              <a:ext cx="2184599" cy="276999"/>
+            </a:xfrm>
+            <a:prstGeom prst="rect">
+              <a:avLst/>
+            </a:prstGeom>
+            <a:noFill/>
+          </p:spPr>
+          <p:txBody>
+            <a:bodyPr wrap="square">
+              <a:spAutoFit/>
+            </a:bodyPr>
+            <a:lstStyle/>
+            <a:p>
+              <a:r>
+                <a:rPr lang="en-US" sz="1200" dirty="0">
+                  <a:solidFill>
+                    <a:schemeClr val="tx1"/>
+                  </a:solidFill>
+                  <a:latin typeface="Times New Roman" panose="02020603050405020304" pitchFamily="18" charset="0"/>
+                  <a:cs typeface="Times New Roman" panose="02020603050405020304" pitchFamily="18" charset="0"/>
+                </a:rPr>
+                <a:t>E2AP, E2SM</a:t>
+              </a:r>
+              <a:endParaRPr lang="en-US" sz="1200" dirty="0">
+                <a:latin typeface="Times New Roman" panose="02020603050405020304" pitchFamily="18" charset="0"/>
+                <a:cs typeface="Times New Roman" panose="02020603050405020304" pitchFamily="18" charset="0"/>
+              </a:endParaRPr>
+            </a:p>
+          </p:txBody>
+        </p:sp>
       </p:grpSp>
     </p:spTree>
     <p:extLst>
       <p:ext uri="{BB962C8B-B14F-4D97-AF65-F5344CB8AC3E}">
-        <p14:creationId xmlns:p14="http://schemas.microsoft.com/office/powerpoint/2010/main" val="3118189070"/>
+        <p14:creationId xmlns:p14="http://schemas.microsoft.com/office/powerpoint/2010/main" val="3696561918"/>
       </p:ext>
     </p:extLst>
   </p:cSld>
@@ -7473,10 +7446,10 @@
       </p:sp>
       <p:grpSp>
         <p:nvGrpSpPr>
-          <p:cNvPr id="24" name="Group 23">
+          <p:cNvPr id="30" name="Group 29">
             <a:extLst>
               <a:ext uri="{FF2B5EF4-FFF2-40B4-BE49-F238E27FC236}">
-                <a16:creationId xmlns:a16="http://schemas.microsoft.com/office/drawing/2014/main" id="{F53561E3-B989-B4E1-7890-4F36A45A1188}"/>
+                <a16:creationId xmlns:a16="http://schemas.microsoft.com/office/drawing/2014/main" id="{419FEC76-5159-39F9-23D6-C5BF2417B8D7}"/>
               </a:ext>
             </a:extLst>
           </p:cNvPr>
@@ -7486,9 +7459,9 @@
         <p:grpSpPr>
           <a:xfrm>
             <a:off x="2008561" y="1641915"/>
-            <a:ext cx="8174878" cy="3574169"/>
+            <a:ext cx="8148856" cy="3557833"/>
             <a:chOff x="2008561" y="1641915"/>
-            <a:chExt cx="8174878" cy="3574169"/>
+            <a:chExt cx="8148856" cy="3557833"/>
           </a:xfrm>
         </p:grpSpPr>
         <p:sp>
@@ -7551,197 +7524,68 @@
             </a:p>
           </p:txBody>
         </p:sp>
-        <p:grpSp>
-          <p:nvGrpSpPr>
-            <p:cNvPr id="235" name="Group 234">
+        <p:sp>
+          <p:nvSpPr>
+            <p:cNvPr id="51" name="Rectangle: Rounded Corners 50">
               <a:extLst>
                 <a:ext uri="{FF2B5EF4-FFF2-40B4-BE49-F238E27FC236}">
-                  <a16:creationId xmlns:a16="http://schemas.microsoft.com/office/drawing/2014/main" id="{B29F7496-083E-C96A-A54B-96580005B0F0}"/>
+                  <a16:creationId xmlns:a16="http://schemas.microsoft.com/office/drawing/2014/main" id="{0FFBFE9F-4487-F723-E9C3-8E9D6B819A45}"/>
                 </a:ext>
               </a:extLst>
             </p:cNvPr>
-            <p:cNvGrpSpPr/>
+            <p:cNvSpPr/>
             <p:nvPr/>
-          </p:nvGrpSpPr>
-          <p:grpSpPr>
+          </p:nvSpPr>
+          <p:spPr>
             <a:xfrm>
-              <a:off x="6873769" y="1749715"/>
-              <a:ext cx="3309670" cy="1432634"/>
-              <a:chOff x="4668372" y="1660130"/>
-              <a:chExt cx="3309670" cy="1432634"/>
+              <a:off x="7388918" y="1749715"/>
+              <a:ext cx="2648141" cy="924852"/>
             </a:xfrm>
-          </p:grpSpPr>
-          <p:sp>
-            <p:nvSpPr>
-              <p:cNvPr id="51" name="Rectangle: Rounded Corners 50">
-                <a:extLst>
-                  <a:ext uri="{FF2B5EF4-FFF2-40B4-BE49-F238E27FC236}">
-                    <a16:creationId xmlns:a16="http://schemas.microsoft.com/office/drawing/2014/main" id="{0FFBFE9F-4487-F723-E9C3-8E9D6B819A45}"/>
-                  </a:ext>
-                </a:extLst>
-              </p:cNvPr>
-              <p:cNvSpPr/>
-              <p:nvPr/>
-            </p:nvSpPr>
-            <p:spPr>
-              <a:xfrm>
-                <a:off x="5183521" y="1660130"/>
-                <a:ext cx="2648141" cy="924852"/>
-              </a:xfrm>
-              <a:prstGeom prst="roundRect">
-                <a:avLst>
-                  <a:gd name="adj" fmla="val 8322"/>
-                </a:avLst>
-              </a:prstGeom>
+            <a:prstGeom prst="roundRect">
+              <a:avLst>
+                <a:gd name="adj" fmla="val 8322"/>
+              </a:avLst>
+            </a:prstGeom>
+            <a:solidFill>
+              <a:srgbClr val="262626"/>
+            </a:solidFill>
+            <a:ln w="12700">
               <a:solidFill>
-                <a:srgbClr val="262626"/>
+                <a:schemeClr val="bg1"/>
               </a:solidFill>
-              <a:ln w="12700">
+            </a:ln>
+          </p:spPr>
+          <p:style>
+            <a:lnRef idx="2">
+              <a:schemeClr val="accent1">
+                <a:shade val="15000"/>
+              </a:schemeClr>
+            </a:lnRef>
+            <a:fillRef idx="1">
+              <a:schemeClr val="accent1"/>
+            </a:fillRef>
+            <a:effectRef idx="0">
+              <a:schemeClr val="accent1"/>
+            </a:effectRef>
+            <a:fontRef idx="minor">
+              <a:schemeClr val="lt1"/>
+            </a:fontRef>
+          </p:style>
+          <p:txBody>
+            <a:bodyPr rtlCol="0" anchor="ctr"/>
+            <a:lstStyle/>
+            <a:p>
+              <a:pPr algn="ctr"/>
+              <a:endParaRPr lang="en-US" dirty="0">
                 <a:solidFill>
                   <a:schemeClr val="bg1"/>
                 </a:solidFill>
-              </a:ln>
-            </p:spPr>
-            <p:style>
-              <a:lnRef idx="2">
-                <a:schemeClr val="accent1">
-                  <a:shade val="15000"/>
-                </a:schemeClr>
-              </a:lnRef>
-              <a:fillRef idx="1">
-                <a:schemeClr val="accent1"/>
-              </a:fillRef>
-              <a:effectRef idx="0">
-                <a:schemeClr val="accent1"/>
-              </a:effectRef>
-              <a:fontRef idx="minor">
-                <a:schemeClr val="lt1"/>
-              </a:fontRef>
-            </p:style>
-            <p:txBody>
-              <a:bodyPr rtlCol="0" anchor="ctr"/>
-              <a:lstStyle/>
-              <a:p>
-                <a:pPr algn="ctr"/>
-                <a:endParaRPr lang="en-US" dirty="0">
-                  <a:solidFill>
-                    <a:schemeClr val="bg1"/>
-                  </a:solidFill>
-                  <a:latin typeface="Times New Roman" panose="02020603050405020304" pitchFamily="18" charset="0"/>
-                  <a:cs typeface="Times New Roman" panose="02020603050405020304" pitchFamily="18" charset="0"/>
-                </a:endParaRPr>
-              </a:p>
-            </p:txBody>
-          </p:sp>
-          <p:grpSp>
-            <p:nvGrpSpPr>
-              <p:cNvPr id="234" name="Group 233">
-                <a:extLst>
-                  <a:ext uri="{FF2B5EF4-FFF2-40B4-BE49-F238E27FC236}">
-                    <a16:creationId xmlns:a16="http://schemas.microsoft.com/office/drawing/2014/main" id="{C8483D81-C738-EC8C-E9D4-9A607C41251A}"/>
-                  </a:ext>
-                </a:extLst>
-              </p:cNvPr>
-              <p:cNvGrpSpPr/>
-              <p:nvPr/>
-            </p:nvGrpSpPr>
-            <p:grpSpPr>
-              <a:xfrm>
-                <a:off x="4668372" y="2611103"/>
-                <a:ext cx="3309670" cy="481661"/>
-                <a:chOff x="4776684" y="2611103"/>
-                <a:chExt cx="3309670" cy="481661"/>
-              </a:xfrm>
-            </p:grpSpPr>
-            <p:sp>
-              <p:nvSpPr>
-                <p:cNvPr id="232" name="TextBox 231">
-                  <a:extLst>
-                    <a:ext uri="{FF2B5EF4-FFF2-40B4-BE49-F238E27FC236}">
-                      <a16:creationId xmlns:a16="http://schemas.microsoft.com/office/drawing/2014/main" id="{26CDB8BB-9B1B-2B00-A882-116D7D2D402E}"/>
-                    </a:ext>
-                  </a:extLst>
-                </p:cNvPr>
-                <p:cNvSpPr txBox="1"/>
-                <p:nvPr/>
-              </p:nvSpPr>
-              <p:spPr>
-                <a:xfrm>
-                  <a:off x="4776684" y="2611103"/>
-                  <a:ext cx="3309670" cy="307777"/>
-                </a:xfrm>
-                <a:prstGeom prst="rect">
-                  <a:avLst/>
-                </a:prstGeom>
-                <a:noFill/>
-              </p:spPr>
-              <p:txBody>
-                <a:bodyPr wrap="square">
-                  <a:spAutoFit/>
-                </a:bodyPr>
-                <a:lstStyle/>
-                <a:p>
-                  <a:pPr algn="ctr"/>
-                  <a:r>
-                    <a:rPr lang="en-US" sz="1400" b="1" dirty="0">
-                      <a:solidFill>
-                        <a:schemeClr val="bg1"/>
-                      </a:solidFill>
-                      <a:latin typeface="Times New Roman" panose="02020603050405020304" pitchFamily="18" charset="0"/>
-                      <a:cs typeface="Times New Roman" panose="02020603050405020304" pitchFamily="18" charset="0"/>
-                    </a:rPr>
-                    <a:t>Service Management and Orchestration</a:t>
-                  </a:r>
-                </a:p>
-              </p:txBody>
-            </p:sp>
-            <p:sp>
-              <p:nvSpPr>
-                <p:cNvPr id="233" name="TextBox 232">
-                  <a:extLst>
-                    <a:ext uri="{FF2B5EF4-FFF2-40B4-BE49-F238E27FC236}">
-                      <a16:creationId xmlns:a16="http://schemas.microsoft.com/office/drawing/2014/main" id="{62872B1E-AA5E-17AA-511A-1F419F129695}"/>
-                    </a:ext>
-                  </a:extLst>
-                </p:cNvPr>
-                <p:cNvSpPr txBox="1"/>
-                <p:nvPr/>
-              </p:nvSpPr>
-              <p:spPr>
-                <a:xfrm>
-                  <a:off x="5474325" y="2815765"/>
-                  <a:ext cx="2078132" cy="276999"/>
-                </a:xfrm>
-                <a:prstGeom prst="rect">
-                  <a:avLst/>
-                </a:prstGeom>
-                <a:noFill/>
-              </p:spPr>
-              <p:txBody>
-                <a:bodyPr wrap="square">
-                  <a:spAutoFit/>
-                </a:bodyPr>
-                <a:lstStyle/>
-                <a:p>
-                  <a:pPr marL="285750" indent="-285750">
-                    <a:buFont typeface="Arial" panose="020B0604020202020204" pitchFamily="34" charset="0"/>
-                    <a:buChar char="•"/>
-                  </a:pPr>
-                  <a:r>
-                    <a:rPr lang="en-US" sz="1200" dirty="0">
-                      <a:solidFill>
-                        <a:schemeClr val="bg1"/>
-                      </a:solidFill>
-                      <a:latin typeface="Times New Roman" panose="02020603050405020304" pitchFamily="18" charset="0"/>
-                      <a:cs typeface="Times New Roman" panose="02020603050405020304" pitchFamily="18" charset="0"/>
-                    </a:rPr>
-                    <a:t>O-RAN SC RIC</a:t>
-                  </a:r>
-                </a:p>
-              </p:txBody>
-            </p:sp>
-          </p:grpSp>
-        </p:grpSp>
+                <a:latin typeface="Times New Roman" panose="02020603050405020304" pitchFamily="18" charset="0"/>
+                <a:cs typeface="Times New Roman" panose="02020603050405020304" pitchFamily="18" charset="0"/>
+              </a:endParaRPr>
+            </a:p>
+          </p:txBody>
+        </p:sp>
         <p:sp>
           <p:nvSpPr>
             <p:cNvPr id="345" name="TextBox 344">
@@ -8521,10 +8365,10 @@
         </p:grpSp>
         <p:grpSp>
           <p:nvGrpSpPr>
-            <p:cNvPr id="172" name="Group 171">
+            <p:cNvPr id="165" name="Group 164">
               <a:extLst>
                 <a:ext uri="{FF2B5EF4-FFF2-40B4-BE49-F238E27FC236}">
-                  <a16:creationId xmlns:a16="http://schemas.microsoft.com/office/drawing/2014/main" id="{E3CC935D-0E71-4D0A-CE18-B6151B8FFE1D}"/>
+                  <a16:creationId xmlns:a16="http://schemas.microsoft.com/office/drawing/2014/main" id="{94B6153A-628D-51A2-53C1-51D9E895F02A}"/>
                 </a:ext>
               </a:extLst>
             </p:cNvPr>
@@ -8534,17 +8378,53 @@
           <p:grpSpPr>
             <a:xfrm>
               <a:off x="4750317" y="3403452"/>
-              <a:ext cx="2953942" cy="1755142"/>
+              <a:ext cx="2953942" cy="834976"/>
               <a:chOff x="3351330" y="2239026"/>
-              <a:chExt cx="2953942" cy="1755142"/>
+              <a:chExt cx="2953942" cy="834976"/>
             </a:xfrm>
           </p:grpSpPr>
+          <p:pic>
+            <p:nvPicPr>
+              <p:cNvPr id="150" name="Graphic 149" descr="Wi-Fi outline">
+                <a:extLst>
+                  <a:ext uri="{FF2B5EF4-FFF2-40B4-BE49-F238E27FC236}">
+                    <a16:creationId xmlns:a16="http://schemas.microsoft.com/office/drawing/2014/main" id="{A4384971-E0FA-83AB-3ECA-EA68B5363120}"/>
+                  </a:ext>
+                </a:extLst>
+              </p:cNvPr>
+              <p:cNvPicPr>
+                <a:picLocks noChangeAspect="1"/>
+              </p:cNvPicPr>
+              <p:nvPr/>
+            </p:nvPicPr>
+            <p:blipFill>
+              <a:blip r:embed="rId8">
+                <a:extLst>
+                  <a:ext uri="{96DAC541-7B7A-43D3-8B79-37D633B846F1}">
+                    <asvg:svgBlip xmlns:asvg="http://schemas.microsoft.com/office/drawing/2016/SVG/main" r:embed="rId9"/>
+                  </a:ext>
+                </a:extLst>
+              </a:blip>
+              <a:stretch>
+                <a:fillRect/>
+              </a:stretch>
+            </p:blipFill>
+            <p:spPr>
+              <a:xfrm rot="16200000" flipH="1">
+                <a:off x="3351330" y="2239026"/>
+                <a:ext cx="834976" cy="834975"/>
+              </a:xfrm>
+              <a:prstGeom prst="rect">
+                <a:avLst/>
+              </a:prstGeom>
+            </p:spPr>
+          </p:pic>
           <p:grpSp>
             <p:nvGrpSpPr>
-              <p:cNvPr id="166" name="Group 165">
+              <p:cNvPr id="164" name="Group 163">
                 <a:extLst>
                   <a:ext uri="{FF2B5EF4-FFF2-40B4-BE49-F238E27FC236}">
-                    <a16:creationId xmlns:a16="http://schemas.microsoft.com/office/drawing/2014/main" id="{52BFB7AD-7AC6-A48C-0960-639E212C7C00}"/>
+                    <a16:creationId xmlns:a16="http://schemas.microsoft.com/office/drawing/2014/main" id="{FEDF8195-14CB-11B2-B6D5-E25DE2BBA929}"/>
                   </a:ext>
                 </a:extLst>
               </p:cNvPr>
@@ -8553,18 +8433,223 @@
             </p:nvGrpSpPr>
             <p:grpSpPr>
               <a:xfrm>
-                <a:off x="3351330" y="2239026"/>
-                <a:ext cx="2953942" cy="1189714"/>
-                <a:chOff x="3351330" y="2239026"/>
-                <a:chExt cx="2953942" cy="1189714"/>
+                <a:off x="4021891" y="2347277"/>
+                <a:ext cx="2283381" cy="618690"/>
+                <a:chOff x="4021891" y="2194877"/>
+                <a:chExt cx="2283381" cy="618690"/>
               </a:xfrm>
             </p:grpSpPr>
+            <p:grpSp>
+              <p:nvGrpSpPr>
+                <p:cNvPr id="157" name="Group 156">
+                  <a:extLst>
+                    <a:ext uri="{FF2B5EF4-FFF2-40B4-BE49-F238E27FC236}">
+                      <a16:creationId xmlns:a16="http://schemas.microsoft.com/office/drawing/2014/main" id="{26375E39-3569-ADBB-F1AE-67A9EF281BC7}"/>
+                    </a:ext>
+                  </a:extLst>
+                </p:cNvPr>
+                <p:cNvGrpSpPr/>
+                <p:nvPr/>
+              </p:nvGrpSpPr>
+              <p:grpSpPr>
+                <a:xfrm>
+                  <a:off x="4021891" y="2194877"/>
+                  <a:ext cx="2239249" cy="618690"/>
+                  <a:chOff x="4021891" y="2194877"/>
+                  <a:chExt cx="2239249" cy="618690"/>
+                </a:xfrm>
+              </p:grpSpPr>
+              <p:sp>
+                <p:nvSpPr>
+                  <p:cNvPr id="116" name="Rectangle: Rounded Corners 115">
+                    <a:extLst>
+                      <a:ext uri="{FF2B5EF4-FFF2-40B4-BE49-F238E27FC236}">
+                        <a16:creationId xmlns:a16="http://schemas.microsoft.com/office/drawing/2014/main" id="{763E022C-45EC-17F5-4D28-50ED4E68B3D8}"/>
+                      </a:ext>
+                    </a:extLst>
+                  </p:cNvPr>
+                  <p:cNvSpPr/>
+                  <p:nvPr/>
+                </p:nvSpPr>
+                <p:spPr>
+                  <a:xfrm>
+                    <a:off x="4021891" y="2194877"/>
+                    <a:ext cx="2239249" cy="618689"/>
+                  </a:xfrm>
+                  <a:prstGeom prst="roundRect">
+                    <a:avLst>
+                      <a:gd name="adj" fmla="val 12974"/>
+                    </a:avLst>
+                  </a:prstGeom>
+                  <a:solidFill>
+                    <a:schemeClr val="bg2">
+                      <a:lumMod val="25000"/>
+                    </a:schemeClr>
+                  </a:solidFill>
+                  <a:ln w="28575">
+                    <a:noFill/>
+                  </a:ln>
+                </p:spPr>
+                <p:style>
+                  <a:lnRef idx="2">
+                    <a:schemeClr val="accent1">
+                      <a:shade val="15000"/>
+                    </a:schemeClr>
+                  </a:lnRef>
+                  <a:fillRef idx="1">
+                    <a:schemeClr val="accent1"/>
+                  </a:fillRef>
+                  <a:effectRef idx="0">
+                    <a:schemeClr val="accent1"/>
+                  </a:effectRef>
+                  <a:fontRef idx="minor">
+                    <a:schemeClr val="lt1"/>
+                  </a:fontRef>
+                </p:style>
+                <p:txBody>
+                  <a:bodyPr rtlCol="0" anchor="ctr"/>
+                  <a:lstStyle/>
+                  <a:p>
+                    <a:pPr algn="ctr"/>
+                    <a:endParaRPr lang="en-US" dirty="0">
+                      <a:solidFill>
+                        <a:schemeClr val="bg1"/>
+                      </a:solidFill>
+                      <a:latin typeface="Times New Roman" panose="02020603050405020304" pitchFamily="18" charset="0"/>
+                      <a:cs typeface="Times New Roman" panose="02020603050405020304" pitchFamily="18" charset="0"/>
+                    </a:endParaRPr>
+                  </a:p>
+                </p:txBody>
+              </p:sp>
+              <p:sp>
+                <p:nvSpPr>
+                  <p:cNvPr id="154" name="Rectangle: Top Corners Rounded 153">
+                    <a:extLst>
+                      <a:ext uri="{FF2B5EF4-FFF2-40B4-BE49-F238E27FC236}">
+                        <a16:creationId xmlns:a16="http://schemas.microsoft.com/office/drawing/2014/main" id="{FC1DFCF3-A2B2-8659-C2ED-0301735E43E7}"/>
+                      </a:ext>
+                    </a:extLst>
+                  </p:cNvPr>
+                  <p:cNvSpPr/>
+                  <p:nvPr/>
+                </p:nvSpPr>
+                <p:spPr>
+                  <a:xfrm flipV="1">
+                    <a:off x="4022672" y="2504431"/>
+                    <a:ext cx="2238468" cy="307778"/>
+                  </a:xfrm>
+                  <a:prstGeom prst="round2SameRect">
+                    <a:avLst>
+                      <a:gd name="adj1" fmla="val 28674"/>
+                      <a:gd name="adj2" fmla="val 0"/>
+                    </a:avLst>
+                  </a:prstGeom>
+                  <a:solidFill>
+                    <a:schemeClr val="tx1">
+                      <a:lumMod val="85000"/>
+                      <a:lumOff val="15000"/>
+                    </a:schemeClr>
+                  </a:solidFill>
+                  <a:ln>
+                    <a:noFill/>
+                  </a:ln>
+                </p:spPr>
+                <p:style>
+                  <a:lnRef idx="2">
+                    <a:schemeClr val="accent1">
+                      <a:shade val="15000"/>
+                    </a:schemeClr>
+                  </a:lnRef>
+                  <a:fillRef idx="1">
+                    <a:schemeClr val="accent1"/>
+                  </a:fillRef>
+                  <a:effectRef idx="0">
+                    <a:schemeClr val="accent1"/>
+                  </a:effectRef>
+                  <a:fontRef idx="minor">
+                    <a:schemeClr val="lt1"/>
+                  </a:fontRef>
+                </p:style>
+                <p:txBody>
+                  <a:bodyPr rtlCol="0" anchor="ctr"/>
+                  <a:lstStyle/>
+                  <a:p>
+                    <a:pPr algn="ctr"/>
+                    <a:endParaRPr lang="en-US">
+                      <a:solidFill>
+                        <a:schemeClr val="bg1"/>
+                      </a:solidFill>
+                    </a:endParaRPr>
+                  </a:p>
+                </p:txBody>
+              </p:sp>
+              <p:sp>
+                <p:nvSpPr>
+                  <p:cNvPr id="118" name="Rectangle: Rounded Corners 117">
+                    <a:extLst>
+                      <a:ext uri="{FF2B5EF4-FFF2-40B4-BE49-F238E27FC236}">
+                        <a16:creationId xmlns:a16="http://schemas.microsoft.com/office/drawing/2014/main" id="{B5766D04-B969-3849-BAD6-E5FBF42BA676}"/>
+                      </a:ext>
+                    </a:extLst>
+                  </p:cNvPr>
+                  <p:cNvSpPr/>
+                  <p:nvPr/>
+                </p:nvSpPr>
+                <p:spPr>
+                  <a:xfrm>
+                    <a:off x="4021891" y="2194878"/>
+                    <a:ext cx="2239249" cy="618689"/>
+                  </a:xfrm>
+                  <a:prstGeom prst="roundRect">
+                    <a:avLst>
+                      <a:gd name="adj" fmla="val 12974"/>
+                    </a:avLst>
+                  </a:prstGeom>
+                  <a:noFill/>
+                  <a:ln w="12700">
+                    <a:solidFill>
+                      <a:schemeClr val="bg1"/>
+                    </a:solidFill>
+                  </a:ln>
+                </p:spPr>
+                <p:style>
+                  <a:lnRef idx="2">
+                    <a:schemeClr val="accent1">
+                      <a:shade val="15000"/>
+                    </a:schemeClr>
+                  </a:lnRef>
+                  <a:fillRef idx="1">
+                    <a:schemeClr val="accent1"/>
+                  </a:fillRef>
+                  <a:effectRef idx="0">
+                    <a:schemeClr val="accent1"/>
+                  </a:effectRef>
+                  <a:fontRef idx="minor">
+                    <a:schemeClr val="lt1"/>
+                  </a:fontRef>
+                </p:style>
+                <p:txBody>
+                  <a:bodyPr rtlCol="0" anchor="ctr"/>
+                  <a:lstStyle/>
+                  <a:p>
+                    <a:pPr algn="ctr"/>
+                    <a:endParaRPr lang="en-US" dirty="0">
+                      <a:solidFill>
+                        <a:schemeClr val="bg1"/>
+                      </a:solidFill>
+                      <a:latin typeface="Times New Roman" panose="02020603050405020304" pitchFamily="18" charset="0"/>
+                      <a:cs typeface="Times New Roman" panose="02020603050405020304" pitchFamily="18" charset="0"/>
+                    </a:endParaRPr>
+                  </a:p>
+                </p:txBody>
+              </p:sp>
+            </p:grpSp>
             <p:sp>
               <p:nvSpPr>
-                <p:cNvPr id="105" name="TextBox 104">
+                <p:cNvPr id="158" name="TextBox 157">
                   <a:extLst>
                     <a:ext uri="{FF2B5EF4-FFF2-40B4-BE49-F238E27FC236}">
-                      <a16:creationId xmlns:a16="http://schemas.microsoft.com/office/drawing/2014/main" id="{DBAFB9D3-DC62-A48E-411E-317A70A9B3AB}"/>
+                      <a16:creationId xmlns:a16="http://schemas.microsoft.com/office/drawing/2014/main" id="{118DB05C-DAB0-A421-F073-A792FE4EAAA3}"/>
                     </a:ext>
                   </a:extLst>
                 </p:cNvPr>
@@ -8573,8 +8658,8 @@
               </p:nvSpPr>
               <p:spPr>
                 <a:xfrm>
-                  <a:off x="4021891" y="3120963"/>
-                  <a:ext cx="2239249" cy="307777"/>
+                  <a:off x="4335869" y="2202843"/>
+                  <a:ext cx="1969403" cy="307777"/>
                 </a:xfrm>
                 <a:prstGeom prst="rect">
                   <a:avLst/>
@@ -8589,557 +8674,148 @@
                 <a:p>
                   <a:pPr algn="ctr"/>
                   <a:r>
-                    <a:rPr lang="en-US" sz="1400" b="1" dirty="0">
+                    <a:rPr lang="en-US" sz="1400" dirty="0">
                       <a:solidFill>
                         <a:schemeClr val="bg1"/>
                       </a:solidFill>
                       <a:latin typeface="Times New Roman" panose="02020603050405020304" pitchFamily="18" charset="0"/>
                       <a:cs typeface="Times New Roman" panose="02020603050405020304" pitchFamily="18" charset="0"/>
                     </a:rPr>
-                    <a:t>Next Generation Node B</a:t>
+                    <a:t>Software-Defined Radio</a:t>
                   </a:r>
                 </a:p>
               </p:txBody>
             </p:sp>
-            <p:grpSp>
-              <p:nvGrpSpPr>
-                <p:cNvPr id="165" name="Group 164">
+            <p:pic>
+              <p:nvPicPr>
+                <p:cNvPr id="159" name="Graphic 158">
                   <a:extLst>
                     <a:ext uri="{FF2B5EF4-FFF2-40B4-BE49-F238E27FC236}">
-                      <a16:creationId xmlns:a16="http://schemas.microsoft.com/office/drawing/2014/main" id="{94B6153A-628D-51A2-53C1-51D9E895F02A}"/>
+                      <a16:creationId xmlns:a16="http://schemas.microsoft.com/office/drawing/2014/main" id="{D29AD5AF-3219-6D63-1EA7-142390B52B38}"/>
                     </a:ext>
                   </a:extLst>
                 </p:cNvPr>
-                <p:cNvGrpSpPr/>
+                <p:cNvPicPr>
+                  <a:picLocks noChangeAspect="1"/>
+                </p:cNvPicPr>
                 <p:nvPr/>
-              </p:nvGrpSpPr>
-              <p:grpSpPr>
+              </p:nvPicPr>
+              <p:blipFill>
+                <a:blip r:embed="rId10">
+                  <a:extLst>
+                    <a:ext uri="{96DAC541-7B7A-43D3-8B79-37D633B846F1}">
+                      <asvg:svgBlip xmlns:asvg="http://schemas.microsoft.com/office/drawing/2016/SVG/main" r:embed="rId11"/>
+                    </a:ext>
+                  </a:extLst>
+                </a:blip>
+                <a:srcRect/>
+                <a:stretch/>
+              </p:blipFill>
+              <p:spPr>
                 <a:xfrm>
-                  <a:off x="3351330" y="2239026"/>
-                  <a:ext cx="2953942" cy="834976"/>
-                  <a:chOff x="3351330" y="2239026"/>
-                  <a:chExt cx="2953942" cy="834976"/>
+                  <a:off x="4134842" y="2215325"/>
+                  <a:ext cx="289426" cy="289426"/>
                 </a:xfrm>
-              </p:grpSpPr>
-              <p:pic>
-                <p:nvPicPr>
-                  <p:cNvPr id="150" name="Graphic 149" descr="Wi-Fi outline">
-                    <a:extLst>
-                      <a:ext uri="{FF2B5EF4-FFF2-40B4-BE49-F238E27FC236}">
-                        <a16:creationId xmlns:a16="http://schemas.microsoft.com/office/drawing/2014/main" id="{A4384971-E0FA-83AB-3ECA-EA68B5363120}"/>
-                      </a:ext>
-                    </a:extLst>
-                  </p:cNvPr>
-                  <p:cNvPicPr>
-                    <a:picLocks noChangeAspect="1"/>
-                  </p:cNvPicPr>
-                  <p:nvPr/>
-                </p:nvPicPr>
-                <p:blipFill>
-                  <a:blip r:embed="rId8">
-                    <a:extLst>
-                      <a:ext uri="{96DAC541-7B7A-43D3-8B79-37D633B846F1}">
-                        <asvg:svgBlip xmlns:asvg="http://schemas.microsoft.com/office/drawing/2016/SVG/main" r:embed="rId9"/>
-                      </a:ext>
-                    </a:extLst>
-                  </a:blip>
-                  <a:stretch>
-                    <a:fillRect/>
-                  </a:stretch>
-                </p:blipFill>
-                <p:spPr>
-                  <a:xfrm rot="16200000" flipH="1">
-                    <a:off x="3351330" y="2239026"/>
-                    <a:ext cx="834976" cy="834975"/>
-                  </a:xfrm>
-                  <a:prstGeom prst="rect">
-                    <a:avLst/>
-                  </a:prstGeom>
-                </p:spPr>
-              </p:pic>
-              <p:grpSp>
-                <p:nvGrpSpPr>
-                  <p:cNvPr id="164" name="Group 163">
-                    <a:extLst>
-                      <a:ext uri="{FF2B5EF4-FFF2-40B4-BE49-F238E27FC236}">
-                        <a16:creationId xmlns:a16="http://schemas.microsoft.com/office/drawing/2014/main" id="{FEDF8195-14CB-11B2-B6D5-E25DE2BBA929}"/>
-                      </a:ext>
-                    </a:extLst>
-                  </p:cNvPr>
-                  <p:cNvGrpSpPr/>
-                  <p:nvPr/>
-                </p:nvGrpSpPr>
-                <p:grpSpPr>
-                  <a:xfrm>
-                    <a:off x="4021891" y="2347277"/>
-                    <a:ext cx="2283381" cy="618690"/>
-                    <a:chOff x="4021891" y="2194877"/>
-                    <a:chExt cx="2283381" cy="618690"/>
-                  </a:xfrm>
-                </p:grpSpPr>
-                <p:grpSp>
-                  <p:nvGrpSpPr>
-                    <p:cNvPr id="157" name="Group 156">
-                      <a:extLst>
-                        <a:ext uri="{FF2B5EF4-FFF2-40B4-BE49-F238E27FC236}">
-                          <a16:creationId xmlns:a16="http://schemas.microsoft.com/office/drawing/2014/main" id="{26375E39-3569-ADBB-F1AE-67A9EF281BC7}"/>
-                        </a:ext>
-                      </a:extLst>
-                    </p:cNvPr>
-                    <p:cNvGrpSpPr/>
-                    <p:nvPr/>
-                  </p:nvGrpSpPr>
-                  <p:grpSpPr>
-                    <a:xfrm>
-                      <a:off x="4021891" y="2194877"/>
-                      <a:ext cx="2239249" cy="618690"/>
-                      <a:chOff x="4021891" y="2194877"/>
-                      <a:chExt cx="2239249" cy="618690"/>
-                    </a:xfrm>
-                  </p:grpSpPr>
-                  <p:sp>
-                    <p:nvSpPr>
-                      <p:cNvPr id="116" name="Rectangle: Rounded Corners 115">
-                        <a:extLst>
-                          <a:ext uri="{FF2B5EF4-FFF2-40B4-BE49-F238E27FC236}">
-                            <a16:creationId xmlns:a16="http://schemas.microsoft.com/office/drawing/2014/main" id="{763E022C-45EC-17F5-4D28-50ED4E68B3D8}"/>
-                          </a:ext>
-                        </a:extLst>
-                      </p:cNvPr>
-                      <p:cNvSpPr/>
-                      <p:nvPr/>
-                    </p:nvSpPr>
-                    <p:spPr>
-                      <a:xfrm>
-                        <a:off x="4021891" y="2194877"/>
-                        <a:ext cx="2239249" cy="618689"/>
-                      </a:xfrm>
-                      <a:prstGeom prst="roundRect">
-                        <a:avLst>
-                          <a:gd name="adj" fmla="val 12974"/>
-                        </a:avLst>
-                      </a:prstGeom>
+                <a:prstGeom prst="rect">
+                  <a:avLst/>
+                </a:prstGeom>
+              </p:spPr>
+            </p:pic>
+            <p:sp>
+              <p:nvSpPr>
+                <p:cNvPr id="162" name="TextBox 161">
+                  <a:extLst>
+                    <a:ext uri="{FF2B5EF4-FFF2-40B4-BE49-F238E27FC236}">
+                      <a16:creationId xmlns:a16="http://schemas.microsoft.com/office/drawing/2014/main" id="{0BF92B8E-1B5B-2C80-D2F6-A6431705198E}"/>
+                    </a:ext>
+                  </a:extLst>
+                </p:cNvPr>
+                <p:cNvSpPr txBox="1"/>
+                <p:nvPr/>
+              </p:nvSpPr>
+              <p:spPr>
+                <a:xfrm>
+                  <a:off x="4335869" y="2505790"/>
+                  <a:ext cx="1969403" cy="307777"/>
+                </a:xfrm>
+                <a:prstGeom prst="rect">
+                  <a:avLst/>
+                </a:prstGeom>
+                <a:noFill/>
+              </p:spPr>
+              <p:txBody>
+                <a:bodyPr wrap="square">
+                  <a:spAutoFit/>
+                </a:bodyPr>
+                <a:lstStyle/>
+                <a:p>
+                  <a:pPr algn="ctr"/>
+                  <a:r>
+                    <a:rPr lang="en-US" sz="1400" dirty="0">
                       <a:solidFill>
-                        <a:schemeClr val="bg2">
-                          <a:lumMod val="25000"/>
-                        </a:schemeClr>
+                        <a:schemeClr val="bg1"/>
                       </a:solidFill>
-                      <a:ln w="28575">
-                        <a:noFill/>
-                      </a:ln>
-                    </p:spPr>
-                    <p:style>
-                      <a:lnRef idx="2">
-                        <a:schemeClr val="accent1">
-                          <a:shade val="15000"/>
-                        </a:schemeClr>
-                      </a:lnRef>
-                      <a:fillRef idx="1">
-                        <a:schemeClr val="accent1"/>
-                      </a:fillRef>
-                      <a:effectRef idx="0">
-                        <a:schemeClr val="accent1"/>
-                      </a:effectRef>
-                      <a:fontRef idx="minor">
-                        <a:schemeClr val="lt1"/>
-                      </a:fontRef>
-                    </p:style>
-                    <p:txBody>
-                      <a:bodyPr rtlCol="0" anchor="ctr"/>
-                      <a:lstStyle/>
-                      <a:p>
-                        <a:pPr algn="ctr"/>
-                        <a:endParaRPr lang="en-US" dirty="0">
-                          <a:solidFill>
-                            <a:schemeClr val="bg1"/>
-                          </a:solidFill>
-                          <a:latin typeface="Times New Roman" panose="02020603050405020304" pitchFamily="18" charset="0"/>
-                          <a:cs typeface="Times New Roman" panose="02020603050405020304" pitchFamily="18" charset="0"/>
-                        </a:endParaRPr>
-                      </a:p>
-                    </p:txBody>
-                  </p:sp>
-                  <p:sp>
-                    <p:nvSpPr>
-                      <p:cNvPr id="154" name="Rectangle: Top Corners Rounded 153">
-                        <a:extLst>
-                          <a:ext uri="{FF2B5EF4-FFF2-40B4-BE49-F238E27FC236}">
-                            <a16:creationId xmlns:a16="http://schemas.microsoft.com/office/drawing/2014/main" id="{FC1DFCF3-A2B2-8659-C2ED-0301735E43E7}"/>
-                          </a:ext>
-                        </a:extLst>
-                      </p:cNvPr>
-                      <p:cNvSpPr/>
-                      <p:nvPr/>
-                    </p:nvSpPr>
-                    <p:spPr>
-                      <a:xfrm flipV="1">
-                        <a:off x="4022672" y="2504431"/>
-                        <a:ext cx="2238468" cy="307778"/>
-                      </a:xfrm>
-                      <a:prstGeom prst="round2SameRect">
-                        <a:avLst>
-                          <a:gd name="adj1" fmla="val 28674"/>
-                          <a:gd name="adj2" fmla="val 0"/>
-                        </a:avLst>
-                      </a:prstGeom>
+                      <a:latin typeface="Times New Roman" panose="02020603050405020304" pitchFamily="18" charset="0"/>
+                      <a:cs typeface="Times New Roman" panose="02020603050405020304" pitchFamily="18" charset="0"/>
+                    </a:rPr>
+                    <a:t>RF Simulator / </a:t>
+                  </a:r>
+                  <a:r>
+                    <a:rPr lang="en-US" sz="1400" dirty="0" err="1">
                       <a:solidFill>
-                        <a:schemeClr val="tx1">
-                          <a:lumMod val="85000"/>
-                          <a:lumOff val="15000"/>
-                        </a:schemeClr>
+                        <a:schemeClr val="bg1"/>
                       </a:solidFill>
-                      <a:ln>
-                        <a:noFill/>
-                      </a:ln>
-                    </p:spPr>
-                    <p:style>
-                      <a:lnRef idx="2">
-                        <a:schemeClr val="accent1">
-                          <a:shade val="15000"/>
-                        </a:schemeClr>
-                      </a:lnRef>
-                      <a:fillRef idx="1">
-                        <a:schemeClr val="accent1"/>
-                      </a:fillRef>
-                      <a:effectRef idx="0">
-                        <a:schemeClr val="accent1"/>
-                      </a:effectRef>
-                      <a:fontRef idx="minor">
-                        <a:schemeClr val="lt1"/>
-                      </a:fontRef>
-                    </p:style>
-                    <p:txBody>
-                      <a:bodyPr rtlCol="0" anchor="ctr"/>
-                      <a:lstStyle/>
-                      <a:p>
-                        <a:pPr algn="ctr"/>
-                        <a:endParaRPr lang="en-US">
-                          <a:solidFill>
-                            <a:schemeClr val="bg1"/>
-                          </a:solidFill>
-                        </a:endParaRPr>
-                      </a:p>
-                    </p:txBody>
-                  </p:sp>
-                  <p:sp>
-                    <p:nvSpPr>
-                      <p:cNvPr id="118" name="Rectangle: Rounded Corners 117">
-                        <a:extLst>
-                          <a:ext uri="{FF2B5EF4-FFF2-40B4-BE49-F238E27FC236}">
-                            <a16:creationId xmlns:a16="http://schemas.microsoft.com/office/drawing/2014/main" id="{B5766D04-B969-3849-BAD6-E5FBF42BA676}"/>
-                          </a:ext>
-                        </a:extLst>
-                      </p:cNvPr>
-                      <p:cNvSpPr/>
-                      <p:nvPr/>
-                    </p:nvSpPr>
-                    <p:spPr>
-                      <a:xfrm>
-                        <a:off x="4021891" y="2194878"/>
-                        <a:ext cx="2239249" cy="618689"/>
-                      </a:xfrm>
-                      <a:prstGeom prst="roundRect">
-                        <a:avLst>
-                          <a:gd name="adj" fmla="val 12974"/>
-                        </a:avLst>
-                      </a:prstGeom>
-                      <a:noFill/>
-                      <a:ln w="12700">
-                        <a:solidFill>
-                          <a:schemeClr val="bg1"/>
-                        </a:solidFill>
-                      </a:ln>
-                    </p:spPr>
-                    <p:style>
-                      <a:lnRef idx="2">
-                        <a:schemeClr val="accent1">
-                          <a:shade val="15000"/>
-                        </a:schemeClr>
-                      </a:lnRef>
-                      <a:fillRef idx="1">
-                        <a:schemeClr val="accent1"/>
-                      </a:fillRef>
-                      <a:effectRef idx="0">
-                        <a:schemeClr val="accent1"/>
-                      </a:effectRef>
-                      <a:fontRef idx="minor">
-                        <a:schemeClr val="lt1"/>
-                      </a:fontRef>
-                    </p:style>
-                    <p:txBody>
-                      <a:bodyPr rtlCol="0" anchor="ctr"/>
-                      <a:lstStyle/>
-                      <a:p>
-                        <a:pPr algn="ctr"/>
-                        <a:endParaRPr lang="en-US" dirty="0">
-                          <a:solidFill>
-                            <a:schemeClr val="bg1"/>
-                          </a:solidFill>
-                          <a:latin typeface="Times New Roman" panose="02020603050405020304" pitchFamily="18" charset="0"/>
-                          <a:cs typeface="Times New Roman" panose="02020603050405020304" pitchFamily="18" charset="0"/>
-                        </a:endParaRPr>
-                      </a:p>
-                    </p:txBody>
-                  </p:sp>
-                </p:grpSp>
-                <p:sp>
-                  <p:nvSpPr>
-                    <p:cNvPr id="158" name="TextBox 157">
-                      <a:extLst>
-                        <a:ext uri="{FF2B5EF4-FFF2-40B4-BE49-F238E27FC236}">
-                          <a16:creationId xmlns:a16="http://schemas.microsoft.com/office/drawing/2014/main" id="{118DB05C-DAB0-A421-F073-A792FE4EAAA3}"/>
-                        </a:ext>
-                      </a:extLst>
-                    </p:cNvPr>
-                    <p:cNvSpPr txBox="1"/>
-                    <p:nvPr/>
-                  </p:nvSpPr>
-                  <p:spPr>
-                    <a:xfrm>
-                      <a:off x="4335869" y="2202843"/>
-                      <a:ext cx="1969403" cy="307777"/>
-                    </a:xfrm>
-                    <a:prstGeom prst="rect">
-                      <a:avLst/>
-                    </a:prstGeom>
-                    <a:noFill/>
-                  </p:spPr>
-                  <p:txBody>
-                    <a:bodyPr wrap="square">
-                      <a:spAutoFit/>
-                    </a:bodyPr>
-                    <a:lstStyle/>
-                    <a:p>
-                      <a:pPr algn="ctr"/>
-                      <a:r>
-                        <a:rPr lang="en-US" sz="1400" dirty="0">
-                          <a:solidFill>
-                            <a:schemeClr val="bg1"/>
-                          </a:solidFill>
-                          <a:latin typeface="Times New Roman" panose="02020603050405020304" pitchFamily="18" charset="0"/>
-                          <a:cs typeface="Times New Roman" panose="02020603050405020304" pitchFamily="18" charset="0"/>
-                        </a:rPr>
-                        <a:t>Software-Defined Radio</a:t>
-                      </a:r>
-                    </a:p>
-                  </p:txBody>
-                </p:sp>
-                <p:pic>
-                  <p:nvPicPr>
-                    <p:cNvPr id="159" name="Graphic 158">
-                      <a:extLst>
-                        <a:ext uri="{FF2B5EF4-FFF2-40B4-BE49-F238E27FC236}">
-                          <a16:creationId xmlns:a16="http://schemas.microsoft.com/office/drawing/2014/main" id="{D29AD5AF-3219-6D63-1EA7-142390B52B38}"/>
-                        </a:ext>
-                      </a:extLst>
-                    </p:cNvPr>
-                    <p:cNvPicPr>
-                      <a:picLocks noChangeAspect="1"/>
-                    </p:cNvPicPr>
-                    <p:nvPr/>
-                  </p:nvPicPr>
-                  <p:blipFill>
-                    <a:blip r:embed="rId10">
-                      <a:extLst>
-                        <a:ext uri="{96DAC541-7B7A-43D3-8B79-37D633B846F1}">
-                          <asvg:svgBlip xmlns:asvg="http://schemas.microsoft.com/office/drawing/2016/SVG/main" r:embed="rId11"/>
-                        </a:ext>
-                      </a:extLst>
-                    </a:blip>
-                    <a:srcRect/>
-                    <a:stretch/>
-                  </p:blipFill>
-                  <p:spPr>
-                    <a:xfrm>
-                      <a:off x="4134842" y="2215325"/>
-                      <a:ext cx="289426" cy="289426"/>
-                    </a:xfrm>
-                    <a:prstGeom prst="rect">
-                      <a:avLst/>
-                    </a:prstGeom>
-                  </p:spPr>
-                </p:pic>
-                <p:sp>
-                  <p:nvSpPr>
-                    <p:cNvPr id="162" name="TextBox 161">
-                      <a:extLst>
-                        <a:ext uri="{FF2B5EF4-FFF2-40B4-BE49-F238E27FC236}">
-                          <a16:creationId xmlns:a16="http://schemas.microsoft.com/office/drawing/2014/main" id="{0BF92B8E-1B5B-2C80-D2F6-A6431705198E}"/>
-                        </a:ext>
-                      </a:extLst>
-                    </p:cNvPr>
-                    <p:cNvSpPr txBox="1"/>
-                    <p:nvPr/>
-                  </p:nvSpPr>
-                  <p:spPr>
-                    <a:xfrm>
-                      <a:off x="4335869" y="2505790"/>
-                      <a:ext cx="1969403" cy="307777"/>
-                    </a:xfrm>
-                    <a:prstGeom prst="rect">
-                      <a:avLst/>
-                    </a:prstGeom>
-                    <a:noFill/>
-                  </p:spPr>
-                  <p:txBody>
-                    <a:bodyPr wrap="square">
-                      <a:spAutoFit/>
-                    </a:bodyPr>
-                    <a:lstStyle/>
-                    <a:p>
-                      <a:pPr algn="ctr"/>
-                      <a:r>
-                        <a:rPr lang="en-US" sz="1400" dirty="0">
-                          <a:solidFill>
-                            <a:schemeClr val="bg1"/>
-                          </a:solidFill>
-                          <a:latin typeface="Times New Roman" panose="02020603050405020304" pitchFamily="18" charset="0"/>
-                          <a:cs typeface="Times New Roman" panose="02020603050405020304" pitchFamily="18" charset="0"/>
-                        </a:rPr>
-                        <a:t>RF Simulator / </a:t>
-                      </a:r>
-                      <a:r>
-                        <a:rPr lang="en-US" sz="1400" dirty="0" err="1">
-                          <a:solidFill>
-                            <a:schemeClr val="bg1"/>
-                          </a:solidFill>
-                          <a:latin typeface="Times New Roman" panose="02020603050405020304" pitchFamily="18" charset="0"/>
-                          <a:cs typeface="Times New Roman" panose="02020603050405020304" pitchFamily="18" charset="0"/>
-                        </a:rPr>
-                        <a:t>ZeroMQ</a:t>
-                      </a:r>
-                      <a:endParaRPr lang="en-US" sz="1400" dirty="0">
-                        <a:solidFill>
-                          <a:schemeClr val="bg1"/>
-                        </a:solidFill>
-                        <a:latin typeface="Times New Roman" panose="02020603050405020304" pitchFamily="18" charset="0"/>
-                        <a:cs typeface="Times New Roman" panose="02020603050405020304" pitchFamily="18" charset="0"/>
-                      </a:endParaRPr>
-                    </a:p>
-                  </p:txBody>
-                </p:sp>
-                <p:pic>
-                  <p:nvPicPr>
-                    <p:cNvPr id="163" name="Graphic 162">
-                      <a:extLst>
-                        <a:ext uri="{FF2B5EF4-FFF2-40B4-BE49-F238E27FC236}">
-                          <a16:creationId xmlns:a16="http://schemas.microsoft.com/office/drawing/2014/main" id="{8BF6375D-4174-C1B1-57AE-E2DA824F94CE}"/>
-                        </a:ext>
-                      </a:extLst>
-                    </p:cNvPr>
-                    <p:cNvPicPr>
-                      <a:picLocks noChangeAspect="1"/>
-                    </p:cNvPicPr>
-                    <p:nvPr/>
-                  </p:nvPicPr>
-                  <p:blipFill>
-                    <a:blip r:embed="rId4">
-                      <a:extLst>
-                        <a:ext uri="{96DAC541-7B7A-43D3-8B79-37D633B846F1}">
-                          <asvg:svgBlip xmlns:asvg="http://schemas.microsoft.com/office/drawing/2016/SVG/main" r:embed="rId5"/>
-                        </a:ext>
-                      </a:extLst>
-                    </a:blip>
-                    <a:srcRect/>
-                    <a:stretch/>
-                  </p:blipFill>
-                  <p:spPr>
-                    <a:xfrm>
-                      <a:off x="4167277" y="2528018"/>
-                      <a:ext cx="256990" cy="256990"/>
-                    </a:xfrm>
-                    <a:prstGeom prst="rect">
-                      <a:avLst/>
-                    </a:prstGeom>
-                  </p:spPr>
-                </p:pic>
-              </p:grpSp>
-            </p:grpSp>
-          </p:grpSp>
-          <p:sp>
-            <p:nvSpPr>
-              <p:cNvPr id="169" name="TextBox 168">
-                <a:extLst>
-                  <a:ext uri="{FF2B5EF4-FFF2-40B4-BE49-F238E27FC236}">
-                    <a16:creationId xmlns:a16="http://schemas.microsoft.com/office/drawing/2014/main" id="{03D8F466-4922-1498-BC9F-4475B7D5BC61}"/>
-                  </a:ext>
-                </a:extLst>
-              </p:cNvPr>
-              <p:cNvSpPr txBox="1"/>
-              <p:nvPr/>
-            </p:nvSpPr>
-            <p:spPr>
-              <a:xfrm>
-                <a:off x="4167277" y="3347837"/>
-                <a:ext cx="2095177" cy="646331"/>
-              </a:xfrm>
-              <a:prstGeom prst="rect">
-                <a:avLst/>
-              </a:prstGeom>
-              <a:noFill/>
-            </p:spPr>
-            <p:txBody>
-              <a:bodyPr wrap="square">
-                <a:spAutoFit/>
-              </a:bodyPr>
-              <a:lstStyle/>
-              <a:p>
-                <a:pPr marL="285750" indent="-285750">
-                  <a:buFont typeface="Arial" panose="020B0604020202020204" pitchFamily="34" charset="0"/>
-                  <a:buChar char="•"/>
-                </a:pPr>
-                <a:r>
-                  <a:rPr lang="en-US" sz="1200" dirty="0" err="1">
+                      <a:latin typeface="Times New Roman" panose="02020603050405020304" pitchFamily="18" charset="0"/>
+                      <a:cs typeface="Times New Roman" panose="02020603050405020304" pitchFamily="18" charset="0"/>
+                    </a:rPr>
+                    <a:t>ZeroMQ</a:t>
+                  </a:r>
+                  <a:endParaRPr lang="en-US" sz="1400" dirty="0">
                     <a:solidFill>
                       <a:schemeClr val="bg1"/>
                     </a:solidFill>
                     <a:latin typeface="Times New Roman" panose="02020603050405020304" pitchFamily="18" charset="0"/>
                     <a:cs typeface="Times New Roman" panose="02020603050405020304" pitchFamily="18" charset="0"/>
-                  </a:rPr>
-                  <a:t>srsRAN_Project</a:t>
-                </a:r>
-                <a:endParaRPr lang="en-US" sz="1200" dirty="0">
-                  <a:solidFill>
-                    <a:schemeClr val="bg1"/>
-                  </a:solidFill>
-                  <a:latin typeface="Times New Roman" panose="02020603050405020304" pitchFamily="18" charset="0"/>
-                  <a:cs typeface="Times New Roman" panose="02020603050405020304" pitchFamily="18" charset="0"/>
-                </a:endParaRPr>
-              </a:p>
-              <a:p>
-                <a:pPr marL="285750" indent="-285750">
-                  <a:buFont typeface="Arial" panose="020B0604020202020204" pitchFamily="34" charset="0"/>
-                  <a:buChar char="•"/>
-                </a:pPr>
-                <a:r>
-                  <a:rPr lang="en-US" sz="1200" dirty="0">
-                    <a:solidFill>
-                      <a:schemeClr val="bg1"/>
-                    </a:solidFill>
-                    <a:latin typeface="Times New Roman" panose="02020603050405020304" pitchFamily="18" charset="0"/>
-                    <a:cs typeface="Times New Roman" panose="02020603050405020304" pitchFamily="18" charset="0"/>
-                  </a:rPr>
-                  <a:t>OpenAirInterface5G</a:t>
-                </a:r>
-              </a:p>
-              <a:p>
-                <a:pPr marL="285750" indent="-285750">
-                  <a:buFont typeface="Arial" panose="020B0604020202020204" pitchFamily="34" charset="0"/>
-                  <a:buChar char="•"/>
-                </a:pPr>
-                <a:r>
-                  <a:rPr lang="en-US" sz="1200" dirty="0">
-                    <a:solidFill>
-                      <a:schemeClr val="bg1"/>
-                    </a:solidFill>
-                    <a:latin typeface="Times New Roman" panose="02020603050405020304" pitchFamily="18" charset="0"/>
-                    <a:cs typeface="Times New Roman" panose="02020603050405020304" pitchFamily="18" charset="0"/>
-                  </a:rPr>
-                  <a:t>O-RAN SC E2 Simulator</a:t>
-                </a:r>
-              </a:p>
-            </p:txBody>
-          </p:sp>
+                  </a:endParaRPr>
+                </a:p>
+              </p:txBody>
+            </p:sp>
+            <p:pic>
+              <p:nvPicPr>
+                <p:cNvPr id="163" name="Graphic 162">
+                  <a:extLst>
+                    <a:ext uri="{FF2B5EF4-FFF2-40B4-BE49-F238E27FC236}">
+                      <a16:creationId xmlns:a16="http://schemas.microsoft.com/office/drawing/2014/main" id="{8BF6375D-4174-C1B1-57AE-E2DA824F94CE}"/>
+                    </a:ext>
+                  </a:extLst>
+                </p:cNvPr>
+                <p:cNvPicPr>
+                  <a:picLocks noChangeAspect="1"/>
+                </p:cNvPicPr>
+                <p:nvPr/>
+              </p:nvPicPr>
+              <p:blipFill>
+                <a:blip r:embed="rId4">
+                  <a:extLst>
+                    <a:ext uri="{96DAC541-7B7A-43D3-8B79-37D633B846F1}">
+                      <asvg:svgBlip xmlns:asvg="http://schemas.microsoft.com/office/drawing/2016/SVG/main" r:embed="rId5"/>
+                    </a:ext>
+                  </a:extLst>
+                </a:blip>
+                <a:srcRect/>
+                <a:stretch/>
+              </p:blipFill>
+              <p:spPr>
+                <a:xfrm>
+                  <a:off x="4167277" y="2528018"/>
+                  <a:ext cx="256990" cy="256990"/>
+                </a:xfrm>
+                <a:prstGeom prst="rect">
+                  <a:avLst/>
+                </a:prstGeom>
+              </p:spPr>
+            </p:pic>
+          </p:grpSp>
         </p:grpSp>
         <p:cxnSp>
           <p:nvCxnSpPr>
@@ -9435,101 +9111,6 @@
             </a:fontRef>
           </p:style>
         </p:cxnSp>
-        <p:sp>
-          <p:nvSpPr>
-            <p:cNvPr id="318" name="TextBox 317">
-              <a:extLst>
-                <a:ext uri="{FF2B5EF4-FFF2-40B4-BE49-F238E27FC236}">
-                  <a16:creationId xmlns:a16="http://schemas.microsoft.com/office/drawing/2014/main" id="{5EECCEE8-0AA8-0FC0-E9C6-8A95995C8165}"/>
-                </a:ext>
-              </a:extLst>
-            </p:cNvPr>
-            <p:cNvSpPr txBox="1"/>
-            <p:nvPr/>
-          </p:nvSpPr>
-          <p:spPr>
-            <a:xfrm>
-              <a:off x="6417137" y="1764477"/>
-              <a:ext cx="971328" cy="276999"/>
-            </a:xfrm>
-            <a:prstGeom prst="rect">
-              <a:avLst/>
-            </a:prstGeom>
-            <a:noFill/>
-          </p:spPr>
-          <p:txBody>
-            <a:bodyPr wrap="square">
-              <a:spAutoFit/>
-            </a:bodyPr>
-            <a:lstStyle/>
-            <a:p>
-              <a:pPr algn="ctr"/>
-              <a:r>
-                <a:rPr lang="en-US" sz="1200" i="1" dirty="0">
-                  <a:solidFill>
-                    <a:schemeClr val="bg1"/>
-                  </a:solidFill>
-                  <a:latin typeface="Times New Roman" panose="02020603050405020304" pitchFamily="18" charset="0"/>
-                  <a:cs typeface="Times New Roman" panose="02020603050405020304" pitchFamily="18" charset="0"/>
-                </a:rPr>
-                <a:t>A1 Policy</a:t>
-              </a:r>
-            </a:p>
-          </p:txBody>
-        </p:sp>
-        <p:sp>
-          <p:nvSpPr>
-            <p:cNvPr id="319" name="TextBox 318">
-              <a:extLst>
-                <a:ext uri="{FF2B5EF4-FFF2-40B4-BE49-F238E27FC236}">
-                  <a16:creationId xmlns:a16="http://schemas.microsoft.com/office/drawing/2014/main" id="{351BDFD2-BC3C-44CA-ACCA-DD137E081438}"/>
-                </a:ext>
-              </a:extLst>
-            </p:cNvPr>
-            <p:cNvSpPr txBox="1"/>
-            <p:nvPr/>
-          </p:nvSpPr>
-          <p:spPr>
-            <a:xfrm>
-              <a:off x="6506434" y="3069507"/>
-              <a:ext cx="2184599" cy="461665"/>
-            </a:xfrm>
-            <a:prstGeom prst="rect">
-              <a:avLst/>
-            </a:prstGeom>
-            <a:noFill/>
-          </p:spPr>
-          <p:txBody>
-            <a:bodyPr wrap="square">
-              <a:spAutoFit/>
-            </a:bodyPr>
-            <a:lstStyle/>
-            <a:p>
-              <a:r>
-                <a:rPr lang="en-US" sz="1200" i="1" dirty="0">
-                  <a:solidFill>
-                    <a:schemeClr val="bg1"/>
-                  </a:solidFill>
-                  <a:latin typeface="Times New Roman" panose="02020603050405020304" pitchFamily="18" charset="0"/>
-                  <a:cs typeface="Times New Roman" panose="02020603050405020304" pitchFamily="18" charset="0"/>
-                </a:rPr>
-                <a:t>Key Performance Measurement</a:t>
-              </a:r>
-            </a:p>
-            <a:p>
-              <a:r>
-                <a:rPr lang="en-US" sz="1200" i="1" dirty="0">
-                  <a:solidFill>
-                    <a:schemeClr val="bg1"/>
-                  </a:solidFill>
-                  <a:latin typeface="Times New Roman" panose="02020603050405020304" pitchFamily="18" charset="0"/>
-                  <a:cs typeface="Times New Roman" panose="02020603050405020304" pitchFamily="18" charset="0"/>
-                </a:rPr>
-                <a:t>RIC Control</a:t>
-              </a:r>
-            </a:p>
-          </p:txBody>
-        </p:sp>
         <p:grpSp>
           <p:nvGrpSpPr>
             <p:cNvPr id="326" name="Group 325">
@@ -10907,10 +10488,10 @@
         </p:cxnSp>
         <p:grpSp>
           <p:nvGrpSpPr>
-            <p:cNvPr id="5" name="Group 4">
+            <p:cNvPr id="6" name="Group 5">
               <a:extLst>
                 <a:ext uri="{FF2B5EF4-FFF2-40B4-BE49-F238E27FC236}">
-                  <a16:creationId xmlns:a16="http://schemas.microsoft.com/office/drawing/2014/main" id="{7DAB8416-3004-A7E9-975D-2AD8061A2F2A}"/>
+                  <a16:creationId xmlns:a16="http://schemas.microsoft.com/office/drawing/2014/main" id="{88919BBE-89B4-C169-F885-E2C41B5D3829}"/>
                 </a:ext>
               </a:extLst>
             </p:cNvPr>
@@ -10919,18 +10500,75 @@
           </p:nvGrpSpPr>
           <p:grpSpPr>
             <a:xfrm>
-              <a:off x="8468250" y="3511704"/>
-              <a:ext cx="1689168" cy="1704380"/>
-              <a:chOff x="8468250" y="3511704"/>
-              <a:chExt cx="1689168" cy="1704380"/>
+              <a:off x="8470803" y="3511704"/>
+              <a:ext cx="1565803" cy="618689"/>
+              <a:chOff x="8470803" y="3511704"/>
+              <a:chExt cx="1565803" cy="618689"/>
             </a:xfrm>
           </p:grpSpPr>
+          <p:sp>
+            <p:nvSpPr>
+              <p:cNvPr id="11" name="Rectangle: Rounded Corners 10">
+                <a:extLst>
+                  <a:ext uri="{FF2B5EF4-FFF2-40B4-BE49-F238E27FC236}">
+                    <a16:creationId xmlns:a16="http://schemas.microsoft.com/office/drawing/2014/main" id="{CE0C6DFE-1B4A-CDD8-414E-2C8F06CF267A}"/>
+                  </a:ext>
+                </a:extLst>
+              </p:cNvPr>
+              <p:cNvSpPr/>
+              <p:nvPr/>
+            </p:nvSpPr>
+            <p:spPr>
+              <a:xfrm>
+                <a:off x="8470803" y="3511704"/>
+                <a:ext cx="1565803" cy="618689"/>
+              </a:xfrm>
+              <a:prstGeom prst="roundRect">
+                <a:avLst>
+                  <a:gd name="adj" fmla="val 12974"/>
+                </a:avLst>
+              </a:prstGeom>
+              <a:noFill/>
+              <a:ln w="12700">
+                <a:solidFill>
+                  <a:schemeClr val="bg1"/>
+                </a:solidFill>
+              </a:ln>
+            </p:spPr>
+            <p:style>
+              <a:lnRef idx="2">
+                <a:schemeClr val="accent1">
+                  <a:shade val="15000"/>
+                </a:schemeClr>
+              </a:lnRef>
+              <a:fillRef idx="1">
+                <a:schemeClr val="accent1"/>
+              </a:fillRef>
+              <a:effectRef idx="0">
+                <a:schemeClr val="accent1"/>
+              </a:effectRef>
+              <a:fontRef idx="minor">
+                <a:schemeClr val="lt1"/>
+              </a:fontRef>
+            </p:style>
+            <p:txBody>
+              <a:bodyPr rtlCol="0" anchor="ctr"/>
+              <a:lstStyle/>
+              <a:p>
+                <a:pPr algn="ctr"/>
+                <a:endParaRPr lang="en-US" dirty="0">
+                  <a:latin typeface="Times New Roman" panose="02020603050405020304" pitchFamily="18" charset="0"/>
+                  <a:cs typeface="Times New Roman" panose="02020603050405020304" pitchFamily="18" charset="0"/>
+                </a:endParaRPr>
+              </a:p>
+            </p:txBody>
+          </p:sp>
           <p:grpSp>
             <p:nvGrpSpPr>
-              <p:cNvPr id="6" name="Group 5">
+              <p:cNvPr id="12" name="Group 11">
                 <a:extLst>
                   <a:ext uri="{FF2B5EF4-FFF2-40B4-BE49-F238E27FC236}">
-                    <a16:creationId xmlns:a16="http://schemas.microsoft.com/office/drawing/2014/main" id="{88919BBE-89B4-C169-F885-E2C41B5D3829}"/>
+                    <a16:creationId xmlns:a16="http://schemas.microsoft.com/office/drawing/2014/main" id="{6790A086-C9BB-9F22-01C8-627725552182}"/>
                   </a:ext>
                 </a:extLst>
               </p:cNvPr>
@@ -10939,75 +10577,195 @@
             </p:nvGrpSpPr>
             <p:grpSpPr>
               <a:xfrm>
-                <a:off x="8470803" y="3511704"/>
-                <a:ext cx="1565803" cy="618689"/>
-                <a:chOff x="8470803" y="3511704"/>
-                <a:chExt cx="1565803" cy="618689"/>
+                <a:off x="8544250" y="3663843"/>
+                <a:ext cx="1430022" cy="310703"/>
+                <a:chOff x="8544250" y="3663843"/>
+                <a:chExt cx="1430022" cy="310703"/>
               </a:xfrm>
             </p:grpSpPr>
-            <p:sp>
-              <p:nvSpPr>
-                <p:cNvPr id="11" name="Rectangle: Rounded Corners 10">
+            <p:grpSp>
+              <p:nvGrpSpPr>
+                <p:cNvPr id="13" name="Group 12">
                   <a:extLst>
                     <a:ext uri="{FF2B5EF4-FFF2-40B4-BE49-F238E27FC236}">
-                      <a16:creationId xmlns:a16="http://schemas.microsoft.com/office/drawing/2014/main" id="{CE0C6DFE-1B4A-CDD8-414E-2C8F06CF267A}"/>
+                      <a16:creationId xmlns:a16="http://schemas.microsoft.com/office/drawing/2014/main" id="{109BC3B5-7515-6387-B152-338A0545A48A}"/>
                     </a:ext>
                   </a:extLst>
                 </p:cNvPr>
-                <p:cNvSpPr/>
+                <p:cNvGrpSpPr/>
                 <p:nvPr/>
-              </p:nvSpPr>
-              <p:spPr>
+              </p:nvGrpSpPr>
+              <p:grpSpPr>
                 <a:xfrm>
-                  <a:off x="8470803" y="3511704"/>
-                  <a:ext cx="1565803" cy="618689"/>
+                  <a:off x="9877010" y="3808956"/>
+                  <a:ext cx="97262" cy="20476"/>
+                  <a:chOff x="10423398" y="4210335"/>
+                  <a:chExt cx="97262" cy="20476"/>
                 </a:xfrm>
-                <a:prstGeom prst="roundRect">
-                  <a:avLst>
-                    <a:gd name="adj" fmla="val 12974"/>
-                  </a:avLst>
-                </a:prstGeom>
-                <a:noFill/>
-                <a:ln w="12700">
+              </p:grpSpPr>
+              <p:sp>
+                <p:nvSpPr>
+                  <p:cNvPr id="21" name="Oval 20">
+                    <a:extLst>
+                      <a:ext uri="{FF2B5EF4-FFF2-40B4-BE49-F238E27FC236}">
+                        <a16:creationId xmlns:a16="http://schemas.microsoft.com/office/drawing/2014/main" id="{0F7E4327-3B24-A579-20DC-4E04FBE9762A}"/>
+                      </a:ext>
+                    </a:extLst>
+                  </p:cNvPr>
+                  <p:cNvSpPr/>
+                  <p:nvPr/>
+                </p:nvSpPr>
+                <p:spPr>
+                  <a:xfrm flipV="1">
+                    <a:off x="10423398" y="4210335"/>
+                    <a:ext cx="20476" cy="20476"/>
+                  </a:xfrm>
+                  <a:prstGeom prst="ellipse">
+                    <a:avLst/>
+                  </a:prstGeom>
                   <a:solidFill>
                     <a:schemeClr val="bg1"/>
                   </a:solidFill>
-                </a:ln>
-              </p:spPr>
-              <p:style>
-                <a:lnRef idx="2">
-                  <a:schemeClr val="accent1">
-                    <a:shade val="15000"/>
-                  </a:schemeClr>
-                </a:lnRef>
-                <a:fillRef idx="1">
-                  <a:schemeClr val="accent1"/>
-                </a:fillRef>
-                <a:effectRef idx="0">
-                  <a:schemeClr val="accent1"/>
-                </a:effectRef>
-                <a:fontRef idx="minor">
-                  <a:schemeClr val="lt1"/>
-                </a:fontRef>
-              </p:style>
-              <p:txBody>
-                <a:bodyPr rtlCol="0" anchor="ctr"/>
-                <a:lstStyle/>
-                <a:p>
-                  <a:pPr algn="ctr"/>
-                  <a:endParaRPr lang="en-US" dirty="0">
-                    <a:latin typeface="Times New Roman" panose="02020603050405020304" pitchFamily="18" charset="0"/>
-                    <a:cs typeface="Times New Roman" panose="02020603050405020304" pitchFamily="18" charset="0"/>
-                  </a:endParaRPr>
-                </a:p>
-              </p:txBody>
-            </p:sp>
+                  <a:ln>
+                    <a:noFill/>
+                  </a:ln>
+                </p:spPr>
+                <p:style>
+                  <a:lnRef idx="2">
+                    <a:schemeClr val="accent1">
+                      <a:shade val="15000"/>
+                    </a:schemeClr>
+                  </a:lnRef>
+                  <a:fillRef idx="1">
+                    <a:schemeClr val="accent1"/>
+                  </a:fillRef>
+                  <a:effectRef idx="0">
+                    <a:schemeClr val="accent1"/>
+                  </a:effectRef>
+                  <a:fontRef idx="minor">
+                    <a:schemeClr val="lt1"/>
+                  </a:fontRef>
+                </p:style>
+                <p:txBody>
+                  <a:bodyPr rtlCol="0" anchor="ctr"/>
+                  <a:lstStyle/>
+                  <a:p>
+                    <a:pPr algn="ctr"/>
+                    <a:endParaRPr lang="en-US"/>
+                  </a:p>
+                </p:txBody>
+              </p:sp>
+              <p:sp>
+                <p:nvSpPr>
+                  <p:cNvPr id="22" name="Oval 21">
+                    <a:extLst>
+                      <a:ext uri="{FF2B5EF4-FFF2-40B4-BE49-F238E27FC236}">
+                        <a16:creationId xmlns:a16="http://schemas.microsoft.com/office/drawing/2014/main" id="{65CC17AB-E282-B165-2260-E04A0D47220B}"/>
+                      </a:ext>
+                    </a:extLst>
+                  </p:cNvPr>
+                  <p:cNvSpPr/>
+                  <p:nvPr/>
+                </p:nvSpPr>
+                <p:spPr>
+                  <a:xfrm flipV="1">
+                    <a:off x="10461791" y="4210335"/>
+                    <a:ext cx="20476" cy="20476"/>
+                  </a:xfrm>
+                  <a:prstGeom prst="ellipse">
+                    <a:avLst/>
+                  </a:prstGeom>
+                  <a:solidFill>
+                    <a:schemeClr val="bg1"/>
+                  </a:solidFill>
+                  <a:ln>
+                    <a:noFill/>
+                  </a:ln>
+                </p:spPr>
+                <p:style>
+                  <a:lnRef idx="2">
+                    <a:schemeClr val="accent1">
+                      <a:shade val="15000"/>
+                    </a:schemeClr>
+                  </a:lnRef>
+                  <a:fillRef idx="1">
+                    <a:schemeClr val="accent1"/>
+                  </a:fillRef>
+                  <a:effectRef idx="0">
+                    <a:schemeClr val="accent1"/>
+                  </a:effectRef>
+                  <a:fontRef idx="minor">
+                    <a:schemeClr val="lt1"/>
+                  </a:fontRef>
+                </p:style>
+                <p:txBody>
+                  <a:bodyPr rtlCol="0" anchor="ctr"/>
+                  <a:lstStyle/>
+                  <a:p>
+                    <a:pPr algn="ctr"/>
+                    <a:endParaRPr lang="en-US"/>
+                  </a:p>
+                </p:txBody>
+              </p:sp>
+              <p:sp>
+                <p:nvSpPr>
+                  <p:cNvPr id="23" name="Oval 22">
+                    <a:extLst>
+                      <a:ext uri="{FF2B5EF4-FFF2-40B4-BE49-F238E27FC236}">
+                        <a16:creationId xmlns:a16="http://schemas.microsoft.com/office/drawing/2014/main" id="{6AAF88ED-F440-9178-BA85-686FF7B57F3E}"/>
+                      </a:ext>
+                    </a:extLst>
+                  </p:cNvPr>
+                  <p:cNvSpPr/>
+                  <p:nvPr/>
+                </p:nvSpPr>
+                <p:spPr>
+                  <a:xfrm flipV="1">
+                    <a:off x="10500184" y="4210335"/>
+                    <a:ext cx="20476" cy="20476"/>
+                  </a:xfrm>
+                  <a:prstGeom prst="ellipse">
+                    <a:avLst/>
+                  </a:prstGeom>
+                  <a:solidFill>
+                    <a:schemeClr val="bg1"/>
+                  </a:solidFill>
+                  <a:ln>
+                    <a:noFill/>
+                  </a:ln>
+                </p:spPr>
+                <p:style>
+                  <a:lnRef idx="2">
+                    <a:schemeClr val="accent1">
+                      <a:shade val="15000"/>
+                    </a:schemeClr>
+                  </a:lnRef>
+                  <a:fillRef idx="1">
+                    <a:schemeClr val="accent1"/>
+                  </a:fillRef>
+                  <a:effectRef idx="0">
+                    <a:schemeClr val="accent1"/>
+                  </a:effectRef>
+                  <a:fontRef idx="minor">
+                    <a:schemeClr val="lt1"/>
+                  </a:fontRef>
+                </p:style>
+                <p:txBody>
+                  <a:bodyPr rtlCol="0" anchor="ctr"/>
+                  <a:lstStyle/>
+                  <a:p>
+                    <a:pPr algn="ctr"/>
+                    <a:endParaRPr lang="en-US"/>
+                  </a:p>
+                </p:txBody>
+              </p:sp>
+            </p:grpSp>
             <p:grpSp>
               <p:nvGrpSpPr>
-                <p:cNvPr id="12" name="Group 11">
+                <p:cNvPr id="14" name="Group 13">
                   <a:extLst>
                     <a:ext uri="{FF2B5EF4-FFF2-40B4-BE49-F238E27FC236}">
-                      <a16:creationId xmlns:a16="http://schemas.microsoft.com/office/drawing/2014/main" id="{6790A086-C9BB-9F22-01C8-627725552182}"/>
+                      <a16:creationId xmlns:a16="http://schemas.microsoft.com/office/drawing/2014/main" id="{49F32863-BFC1-757F-5B01-BAC1A230BA39}"/>
                     </a:ext>
                   </a:extLst>
                 </p:cNvPr>
@@ -11017,601 +10775,678 @@
               <p:grpSpPr>
                 <a:xfrm>
                   <a:off x="8544250" y="3663843"/>
-                  <a:ext cx="1430022" cy="310703"/>
-                  <a:chOff x="8544250" y="3663843"/>
-                  <a:chExt cx="1430022" cy="310703"/>
+                  <a:ext cx="655258" cy="310703"/>
+                  <a:chOff x="8483290" y="3660903"/>
+                  <a:chExt cx="655258" cy="310703"/>
                 </a:xfrm>
               </p:grpSpPr>
-              <p:grpSp>
-                <p:nvGrpSpPr>
-                  <p:cNvPr id="13" name="Group 12">
+              <p:sp>
+                <p:nvSpPr>
+                  <p:cNvPr id="19" name="Rectangle: Rounded Corners 18">
                     <a:extLst>
                       <a:ext uri="{FF2B5EF4-FFF2-40B4-BE49-F238E27FC236}">
-                        <a16:creationId xmlns:a16="http://schemas.microsoft.com/office/drawing/2014/main" id="{109BC3B5-7515-6387-B152-338A0545A48A}"/>
+                        <a16:creationId xmlns:a16="http://schemas.microsoft.com/office/drawing/2014/main" id="{DD049208-FC03-CA31-F96B-4B622E9F569D}"/>
                       </a:ext>
                     </a:extLst>
                   </p:cNvPr>
-                  <p:cNvGrpSpPr/>
+                  <p:cNvSpPr/>
                   <p:nvPr/>
-                </p:nvGrpSpPr>
-                <p:grpSpPr>
+                </p:nvSpPr>
+                <p:spPr>
                   <a:xfrm>
-                    <a:off x="9877010" y="3808956"/>
-                    <a:ext cx="97262" cy="20476"/>
-                    <a:chOff x="10423398" y="4210335"/>
-                    <a:chExt cx="97262" cy="20476"/>
+                    <a:off x="8515444" y="3660903"/>
+                    <a:ext cx="590950" cy="310703"/>
                   </a:xfrm>
-                </p:grpSpPr>
-                <p:sp>
-                  <p:nvSpPr>
-                    <p:cNvPr id="21" name="Oval 20">
-                      <a:extLst>
-                        <a:ext uri="{FF2B5EF4-FFF2-40B4-BE49-F238E27FC236}">
-                          <a16:creationId xmlns:a16="http://schemas.microsoft.com/office/drawing/2014/main" id="{0F7E4327-3B24-A579-20DC-4E04FBE9762A}"/>
-                        </a:ext>
-                      </a:extLst>
-                    </p:cNvPr>
-                    <p:cNvSpPr/>
-                    <p:nvPr/>
-                  </p:nvSpPr>
-                  <p:spPr>
-                    <a:xfrm flipV="1">
-                      <a:off x="10423398" y="4210335"/>
-                      <a:ext cx="20476" cy="20476"/>
-                    </a:xfrm>
-                    <a:prstGeom prst="ellipse">
-                      <a:avLst/>
-                    </a:prstGeom>
+                  <a:prstGeom prst="roundRect">
+                    <a:avLst>
+                      <a:gd name="adj" fmla="val 12974"/>
+                    </a:avLst>
+                  </a:prstGeom>
+                  <a:solidFill>
+                    <a:schemeClr val="bg2">
+                      <a:lumMod val="25000"/>
+                    </a:schemeClr>
+                  </a:solidFill>
+                  <a:ln w="12700">
                     <a:solidFill>
                       <a:schemeClr val="bg1"/>
                     </a:solidFill>
-                    <a:ln>
-                      <a:noFill/>
-                    </a:ln>
-                  </p:spPr>
-                  <p:style>
-                    <a:lnRef idx="2">
-                      <a:schemeClr val="accent1">
-                        <a:shade val="15000"/>
-                      </a:schemeClr>
-                    </a:lnRef>
-                    <a:fillRef idx="1">
-                      <a:schemeClr val="accent1"/>
-                    </a:fillRef>
-                    <a:effectRef idx="0">
-                      <a:schemeClr val="accent1"/>
-                    </a:effectRef>
-                    <a:fontRef idx="minor">
-                      <a:schemeClr val="lt1"/>
-                    </a:fontRef>
-                  </p:style>
-                  <p:txBody>
-                    <a:bodyPr rtlCol="0" anchor="ctr"/>
-                    <a:lstStyle/>
-                    <a:p>
-                      <a:pPr algn="ctr"/>
-                      <a:endParaRPr lang="en-US"/>
-                    </a:p>
-                  </p:txBody>
-                </p:sp>
-                <p:sp>
-                  <p:nvSpPr>
-                    <p:cNvPr id="22" name="Oval 21">
-                      <a:extLst>
-                        <a:ext uri="{FF2B5EF4-FFF2-40B4-BE49-F238E27FC236}">
-                          <a16:creationId xmlns:a16="http://schemas.microsoft.com/office/drawing/2014/main" id="{65CC17AB-E282-B165-2260-E04A0D47220B}"/>
-                        </a:ext>
-                      </a:extLst>
-                    </p:cNvPr>
-                    <p:cNvSpPr/>
-                    <p:nvPr/>
-                  </p:nvSpPr>
-                  <p:spPr>
-                    <a:xfrm flipV="1">
-                      <a:off x="10461791" y="4210335"/>
-                      <a:ext cx="20476" cy="20476"/>
-                    </a:xfrm>
-                    <a:prstGeom prst="ellipse">
-                      <a:avLst/>
-                    </a:prstGeom>
+                  </a:ln>
+                </p:spPr>
+                <p:style>
+                  <a:lnRef idx="2">
+                    <a:schemeClr val="accent1">
+                      <a:shade val="15000"/>
+                    </a:schemeClr>
+                  </a:lnRef>
+                  <a:fillRef idx="1">
+                    <a:schemeClr val="accent1"/>
+                  </a:fillRef>
+                  <a:effectRef idx="0">
+                    <a:schemeClr val="accent1"/>
+                  </a:effectRef>
+                  <a:fontRef idx="minor">
+                    <a:schemeClr val="lt1"/>
+                  </a:fontRef>
+                </p:style>
+                <p:txBody>
+                  <a:bodyPr rtlCol="0" anchor="ctr"/>
+                  <a:lstStyle/>
+                  <a:p>
+                    <a:pPr algn="ctr"/>
+                    <a:endParaRPr lang="en-US" sz="1400" dirty="0">
+                      <a:solidFill>
+                        <a:schemeClr val="tx1"/>
+                      </a:solidFill>
+                      <a:latin typeface="Times New Roman" panose="02020603050405020304" pitchFamily="18" charset="0"/>
+                      <a:cs typeface="Times New Roman" panose="02020603050405020304" pitchFamily="18" charset="0"/>
+                    </a:endParaRPr>
+                  </a:p>
+                </p:txBody>
+              </p:sp>
+              <p:sp>
+                <p:nvSpPr>
+                  <p:cNvPr id="20" name="TextBox 19">
+                    <a:extLst>
+                      <a:ext uri="{FF2B5EF4-FFF2-40B4-BE49-F238E27FC236}">
+                        <a16:creationId xmlns:a16="http://schemas.microsoft.com/office/drawing/2014/main" id="{7156A02F-6D01-C389-75B6-745AC5F21490}"/>
+                      </a:ext>
+                    </a:extLst>
+                  </p:cNvPr>
+                  <p:cNvSpPr txBox="1"/>
+                  <p:nvPr/>
+                </p:nvSpPr>
+                <p:spPr>
+                  <a:xfrm>
+                    <a:off x="8483290" y="3661383"/>
+                    <a:ext cx="655258" cy="307777"/>
+                  </a:xfrm>
+                  <a:prstGeom prst="rect">
+                    <a:avLst/>
+                  </a:prstGeom>
+                  <a:noFill/>
+                </p:spPr>
+                <p:txBody>
+                  <a:bodyPr wrap="square">
+                    <a:spAutoFit/>
+                  </a:bodyPr>
+                  <a:lstStyle/>
+                  <a:p>
+                    <a:pPr algn="ctr"/>
+                    <a:r>
+                      <a:rPr lang="en-US" sz="1400" dirty="0">
+                        <a:solidFill>
+                          <a:schemeClr val="bg1"/>
+                        </a:solidFill>
+                        <a:latin typeface="Times New Roman" panose="02020603050405020304" pitchFamily="18" charset="0"/>
+                        <a:cs typeface="Times New Roman" panose="02020603050405020304" pitchFamily="18" charset="0"/>
+                      </a:rPr>
+                      <a:t>UPF</a:t>
+                    </a:r>
+                  </a:p>
+                </p:txBody>
+              </p:sp>
+            </p:grpSp>
+            <p:grpSp>
+              <p:nvGrpSpPr>
+                <p:cNvPr id="16" name="Group 15">
+                  <a:extLst>
+                    <a:ext uri="{FF2B5EF4-FFF2-40B4-BE49-F238E27FC236}">
+                      <a16:creationId xmlns:a16="http://schemas.microsoft.com/office/drawing/2014/main" id="{12A7027B-5E3A-EC2D-BCB4-EDA5D1C0BEC8}"/>
+                    </a:ext>
+                  </a:extLst>
+                </p:cNvPr>
+                <p:cNvGrpSpPr/>
+                <p:nvPr/>
+              </p:nvGrpSpPr>
+              <p:grpSpPr>
+                <a:xfrm>
+                  <a:off x="9189714" y="3663843"/>
+                  <a:ext cx="655258" cy="310703"/>
+                  <a:chOff x="9128754" y="3666783"/>
+                  <a:chExt cx="655258" cy="310703"/>
+                </a:xfrm>
+              </p:grpSpPr>
+              <p:sp>
+                <p:nvSpPr>
+                  <p:cNvPr id="17" name="Rectangle: Rounded Corners 16">
+                    <a:extLst>
+                      <a:ext uri="{FF2B5EF4-FFF2-40B4-BE49-F238E27FC236}">
+                        <a16:creationId xmlns:a16="http://schemas.microsoft.com/office/drawing/2014/main" id="{10ABB812-6101-B7BC-B307-C5F721932CA7}"/>
+                      </a:ext>
+                    </a:extLst>
+                  </p:cNvPr>
+                  <p:cNvSpPr/>
+                  <p:nvPr/>
+                </p:nvSpPr>
+                <p:spPr>
+                  <a:xfrm>
+                    <a:off x="9160908" y="3666783"/>
+                    <a:ext cx="590950" cy="310703"/>
+                  </a:xfrm>
+                  <a:prstGeom prst="roundRect">
+                    <a:avLst>
+                      <a:gd name="adj" fmla="val 12974"/>
+                    </a:avLst>
+                  </a:prstGeom>
+                  <a:solidFill>
+                    <a:schemeClr val="bg2">
+                      <a:lumMod val="25000"/>
+                    </a:schemeClr>
+                  </a:solidFill>
+                  <a:ln w="12700">
                     <a:solidFill>
                       <a:schemeClr val="bg1"/>
                     </a:solidFill>
-                    <a:ln>
-                      <a:noFill/>
-                    </a:ln>
-                  </p:spPr>
-                  <p:style>
-                    <a:lnRef idx="2">
-                      <a:schemeClr val="accent1">
-                        <a:shade val="15000"/>
-                      </a:schemeClr>
-                    </a:lnRef>
-                    <a:fillRef idx="1">
-                      <a:schemeClr val="accent1"/>
-                    </a:fillRef>
-                    <a:effectRef idx="0">
-                      <a:schemeClr val="accent1"/>
-                    </a:effectRef>
-                    <a:fontRef idx="minor">
-                      <a:schemeClr val="lt1"/>
-                    </a:fontRef>
-                  </p:style>
-                  <p:txBody>
-                    <a:bodyPr rtlCol="0" anchor="ctr"/>
-                    <a:lstStyle/>
-                    <a:p>
-                      <a:pPr algn="ctr"/>
-                      <a:endParaRPr lang="en-US"/>
-                    </a:p>
-                  </p:txBody>
-                </p:sp>
-                <p:sp>
-                  <p:nvSpPr>
-                    <p:cNvPr id="23" name="Oval 22">
-                      <a:extLst>
-                        <a:ext uri="{FF2B5EF4-FFF2-40B4-BE49-F238E27FC236}">
-                          <a16:creationId xmlns:a16="http://schemas.microsoft.com/office/drawing/2014/main" id="{6AAF88ED-F440-9178-BA85-686FF7B57F3E}"/>
-                        </a:ext>
-                      </a:extLst>
-                    </p:cNvPr>
-                    <p:cNvSpPr/>
-                    <p:nvPr/>
-                  </p:nvSpPr>
-                  <p:spPr>
-                    <a:xfrm flipV="1">
-                      <a:off x="10500184" y="4210335"/>
-                      <a:ext cx="20476" cy="20476"/>
-                    </a:xfrm>
-                    <a:prstGeom prst="ellipse">
-                      <a:avLst/>
-                    </a:prstGeom>
-                    <a:solidFill>
-                      <a:schemeClr val="bg1"/>
-                    </a:solidFill>
-                    <a:ln>
-                      <a:noFill/>
-                    </a:ln>
-                  </p:spPr>
-                  <p:style>
-                    <a:lnRef idx="2">
-                      <a:schemeClr val="accent1">
-                        <a:shade val="15000"/>
-                      </a:schemeClr>
-                    </a:lnRef>
-                    <a:fillRef idx="1">
-                      <a:schemeClr val="accent1"/>
-                    </a:fillRef>
-                    <a:effectRef idx="0">
-                      <a:schemeClr val="accent1"/>
-                    </a:effectRef>
-                    <a:fontRef idx="minor">
-                      <a:schemeClr val="lt1"/>
-                    </a:fontRef>
-                  </p:style>
-                  <p:txBody>
-                    <a:bodyPr rtlCol="0" anchor="ctr"/>
-                    <a:lstStyle/>
-                    <a:p>
-                      <a:pPr algn="ctr"/>
-                      <a:endParaRPr lang="en-US"/>
-                    </a:p>
-                  </p:txBody>
-                </p:sp>
-              </p:grpSp>
-              <p:grpSp>
-                <p:nvGrpSpPr>
-                  <p:cNvPr id="14" name="Group 13">
+                  </a:ln>
+                </p:spPr>
+                <p:style>
+                  <a:lnRef idx="2">
+                    <a:schemeClr val="accent1">
+                      <a:shade val="15000"/>
+                    </a:schemeClr>
+                  </a:lnRef>
+                  <a:fillRef idx="1">
+                    <a:schemeClr val="accent1"/>
+                  </a:fillRef>
+                  <a:effectRef idx="0">
+                    <a:schemeClr val="accent1"/>
+                  </a:effectRef>
+                  <a:fontRef idx="minor">
+                    <a:schemeClr val="lt1"/>
+                  </a:fontRef>
+                </p:style>
+                <p:txBody>
+                  <a:bodyPr rtlCol="0" anchor="ctr"/>
+                  <a:lstStyle/>
+                  <a:p>
+                    <a:pPr algn="ctr"/>
+                    <a:endParaRPr lang="en-US" sz="1400" dirty="0">
+                      <a:solidFill>
+                        <a:schemeClr val="tx1"/>
+                      </a:solidFill>
+                      <a:latin typeface="Times New Roman" panose="02020603050405020304" pitchFamily="18" charset="0"/>
+                      <a:cs typeface="Times New Roman" panose="02020603050405020304" pitchFamily="18" charset="0"/>
+                    </a:endParaRPr>
+                  </a:p>
+                </p:txBody>
+              </p:sp>
+              <p:sp>
+                <p:nvSpPr>
+                  <p:cNvPr id="18" name="TextBox 17">
                     <a:extLst>
                       <a:ext uri="{FF2B5EF4-FFF2-40B4-BE49-F238E27FC236}">
-                        <a16:creationId xmlns:a16="http://schemas.microsoft.com/office/drawing/2014/main" id="{49F32863-BFC1-757F-5B01-BAC1A230BA39}"/>
+                        <a16:creationId xmlns:a16="http://schemas.microsoft.com/office/drawing/2014/main" id="{B2DE4C59-4701-798A-7ABE-6AB0F969D911}"/>
                       </a:ext>
                     </a:extLst>
                   </p:cNvPr>
-                  <p:cNvGrpSpPr/>
+                  <p:cNvSpPr txBox="1"/>
                   <p:nvPr/>
-                </p:nvGrpSpPr>
-                <p:grpSpPr>
+                </p:nvSpPr>
+                <p:spPr>
                   <a:xfrm>
-                    <a:off x="8544250" y="3663843"/>
-                    <a:ext cx="655258" cy="310703"/>
-                    <a:chOff x="8483290" y="3660903"/>
-                    <a:chExt cx="655258" cy="310703"/>
+                    <a:off x="9128754" y="3667263"/>
+                    <a:ext cx="655258" cy="307777"/>
                   </a:xfrm>
-                </p:grpSpPr>
-                <p:sp>
-                  <p:nvSpPr>
-                    <p:cNvPr id="19" name="Rectangle: Rounded Corners 18">
-                      <a:extLst>
-                        <a:ext uri="{FF2B5EF4-FFF2-40B4-BE49-F238E27FC236}">
-                          <a16:creationId xmlns:a16="http://schemas.microsoft.com/office/drawing/2014/main" id="{DD049208-FC03-CA31-F96B-4B622E9F569D}"/>
-                        </a:ext>
-                      </a:extLst>
-                    </p:cNvPr>
-                    <p:cNvSpPr/>
-                    <p:nvPr/>
-                  </p:nvSpPr>
-                  <p:spPr>
-                    <a:xfrm>
-                      <a:off x="8515444" y="3660903"/>
-                      <a:ext cx="590950" cy="310703"/>
-                    </a:xfrm>
-                    <a:prstGeom prst="roundRect">
-                      <a:avLst>
-                        <a:gd name="adj" fmla="val 12974"/>
-                      </a:avLst>
-                    </a:prstGeom>
-                    <a:solidFill>
-                      <a:schemeClr val="bg2">
-                        <a:lumMod val="25000"/>
-                      </a:schemeClr>
-                    </a:solidFill>
-                    <a:ln w="12700">
-                      <a:solidFill>
-                        <a:schemeClr val="bg1"/>
-                      </a:solidFill>
-                    </a:ln>
-                  </p:spPr>
-                  <p:style>
-                    <a:lnRef idx="2">
-                      <a:schemeClr val="accent1">
-                        <a:shade val="15000"/>
-                      </a:schemeClr>
-                    </a:lnRef>
-                    <a:fillRef idx="1">
-                      <a:schemeClr val="accent1"/>
-                    </a:fillRef>
-                    <a:effectRef idx="0">
-                      <a:schemeClr val="accent1"/>
-                    </a:effectRef>
-                    <a:fontRef idx="minor">
-                      <a:schemeClr val="lt1"/>
-                    </a:fontRef>
-                  </p:style>
-                  <p:txBody>
-                    <a:bodyPr rtlCol="0" anchor="ctr"/>
-                    <a:lstStyle/>
-                    <a:p>
-                      <a:pPr algn="ctr"/>
-                      <a:endParaRPr lang="en-US" sz="1400" dirty="0">
+                  <a:prstGeom prst="rect">
+                    <a:avLst/>
+                  </a:prstGeom>
+                  <a:noFill/>
+                </p:spPr>
+                <p:txBody>
+                  <a:bodyPr wrap="square">
+                    <a:spAutoFit/>
+                  </a:bodyPr>
+                  <a:lstStyle/>
+                  <a:p>
+                    <a:pPr algn="ctr"/>
+                    <a:r>
+                      <a:rPr lang="en-US" sz="1400" dirty="0">
                         <a:solidFill>
-                          <a:schemeClr val="tx1"/>
+                          <a:schemeClr val="bg1"/>
                         </a:solidFill>
                         <a:latin typeface="Times New Roman" panose="02020603050405020304" pitchFamily="18" charset="0"/>
                         <a:cs typeface="Times New Roman" panose="02020603050405020304" pitchFamily="18" charset="0"/>
-                      </a:endParaRPr>
-                    </a:p>
-                  </p:txBody>
-                </p:sp>
-                <p:sp>
-                  <p:nvSpPr>
-                    <p:cNvPr id="20" name="TextBox 19">
-                      <a:extLst>
-                        <a:ext uri="{FF2B5EF4-FFF2-40B4-BE49-F238E27FC236}">
-                          <a16:creationId xmlns:a16="http://schemas.microsoft.com/office/drawing/2014/main" id="{7156A02F-6D01-C389-75B6-745AC5F21490}"/>
-                        </a:ext>
-                      </a:extLst>
-                    </p:cNvPr>
-                    <p:cNvSpPr txBox="1"/>
-                    <p:nvPr/>
-                  </p:nvSpPr>
-                  <p:spPr>
-                    <a:xfrm>
-                      <a:off x="8483290" y="3661383"/>
-                      <a:ext cx="655258" cy="307777"/>
-                    </a:xfrm>
-                    <a:prstGeom prst="rect">
-                      <a:avLst/>
-                    </a:prstGeom>
-                    <a:noFill/>
-                  </p:spPr>
-                  <p:txBody>
-                    <a:bodyPr wrap="square">
-                      <a:spAutoFit/>
-                    </a:bodyPr>
-                    <a:lstStyle/>
-                    <a:p>
-                      <a:pPr algn="ctr"/>
-                      <a:r>
-                        <a:rPr lang="en-US" sz="1400" dirty="0">
-                          <a:solidFill>
-                            <a:schemeClr val="bg1"/>
-                          </a:solidFill>
-                          <a:latin typeface="Times New Roman" panose="02020603050405020304" pitchFamily="18" charset="0"/>
-                          <a:cs typeface="Times New Roman" panose="02020603050405020304" pitchFamily="18" charset="0"/>
-                        </a:rPr>
-                        <a:t>UPF</a:t>
-                      </a:r>
-                    </a:p>
-                  </p:txBody>
-                </p:sp>
-              </p:grpSp>
-              <p:grpSp>
-                <p:nvGrpSpPr>
-                  <p:cNvPr id="16" name="Group 15">
-                    <a:extLst>
-                      <a:ext uri="{FF2B5EF4-FFF2-40B4-BE49-F238E27FC236}">
-                        <a16:creationId xmlns:a16="http://schemas.microsoft.com/office/drawing/2014/main" id="{12A7027B-5E3A-EC2D-BCB4-EDA5D1C0BEC8}"/>
-                      </a:ext>
-                    </a:extLst>
-                  </p:cNvPr>
-                  <p:cNvGrpSpPr/>
-                  <p:nvPr/>
-                </p:nvGrpSpPr>
-                <p:grpSpPr>
-                  <a:xfrm>
-                    <a:off x="9189714" y="3663843"/>
-                    <a:ext cx="655258" cy="310703"/>
-                    <a:chOff x="9128754" y="3666783"/>
-                    <a:chExt cx="655258" cy="310703"/>
-                  </a:xfrm>
-                </p:grpSpPr>
-                <p:sp>
-                  <p:nvSpPr>
-                    <p:cNvPr id="17" name="Rectangle: Rounded Corners 16">
-                      <a:extLst>
-                        <a:ext uri="{FF2B5EF4-FFF2-40B4-BE49-F238E27FC236}">
-                          <a16:creationId xmlns:a16="http://schemas.microsoft.com/office/drawing/2014/main" id="{10ABB812-6101-B7BC-B307-C5F721932CA7}"/>
-                        </a:ext>
-                      </a:extLst>
-                    </p:cNvPr>
-                    <p:cNvSpPr/>
-                    <p:nvPr/>
-                  </p:nvSpPr>
-                  <p:spPr>
-                    <a:xfrm>
-                      <a:off x="9160908" y="3666783"/>
-                      <a:ext cx="590950" cy="310703"/>
-                    </a:xfrm>
-                    <a:prstGeom prst="roundRect">
-                      <a:avLst>
-                        <a:gd name="adj" fmla="val 12974"/>
-                      </a:avLst>
-                    </a:prstGeom>
-                    <a:solidFill>
-                      <a:schemeClr val="bg2">
-                        <a:lumMod val="25000"/>
-                      </a:schemeClr>
-                    </a:solidFill>
-                    <a:ln w="12700">
-                      <a:solidFill>
-                        <a:schemeClr val="bg1"/>
-                      </a:solidFill>
-                    </a:ln>
-                  </p:spPr>
-                  <p:style>
-                    <a:lnRef idx="2">
-                      <a:schemeClr val="accent1">
-                        <a:shade val="15000"/>
-                      </a:schemeClr>
-                    </a:lnRef>
-                    <a:fillRef idx="1">
-                      <a:schemeClr val="accent1"/>
-                    </a:fillRef>
-                    <a:effectRef idx="0">
-                      <a:schemeClr val="accent1"/>
-                    </a:effectRef>
-                    <a:fontRef idx="minor">
-                      <a:schemeClr val="lt1"/>
-                    </a:fontRef>
-                  </p:style>
-                  <p:txBody>
-                    <a:bodyPr rtlCol="0" anchor="ctr"/>
-                    <a:lstStyle/>
-                    <a:p>
-                      <a:pPr algn="ctr"/>
-                      <a:endParaRPr lang="en-US" sz="1400" dirty="0">
-                        <a:solidFill>
-                          <a:schemeClr val="tx1"/>
-                        </a:solidFill>
-                        <a:latin typeface="Times New Roman" panose="02020603050405020304" pitchFamily="18" charset="0"/>
-                        <a:cs typeface="Times New Roman" panose="02020603050405020304" pitchFamily="18" charset="0"/>
-                      </a:endParaRPr>
-                    </a:p>
-                  </p:txBody>
-                </p:sp>
-                <p:sp>
-                  <p:nvSpPr>
-                    <p:cNvPr id="18" name="TextBox 17">
-                      <a:extLst>
-                        <a:ext uri="{FF2B5EF4-FFF2-40B4-BE49-F238E27FC236}">
-                          <a16:creationId xmlns:a16="http://schemas.microsoft.com/office/drawing/2014/main" id="{B2DE4C59-4701-798A-7ABE-6AB0F969D911}"/>
-                        </a:ext>
-                      </a:extLst>
-                    </p:cNvPr>
-                    <p:cNvSpPr txBox="1"/>
-                    <p:nvPr/>
-                  </p:nvSpPr>
-                  <p:spPr>
-                    <a:xfrm>
-                      <a:off x="9128754" y="3667263"/>
-                      <a:ext cx="655258" cy="307777"/>
-                    </a:xfrm>
-                    <a:prstGeom prst="rect">
-                      <a:avLst/>
-                    </a:prstGeom>
-                    <a:noFill/>
-                  </p:spPr>
-                  <p:txBody>
-                    <a:bodyPr wrap="square">
-                      <a:spAutoFit/>
-                    </a:bodyPr>
-                    <a:lstStyle/>
-                    <a:p>
-                      <a:pPr algn="ctr"/>
-                      <a:r>
-                        <a:rPr lang="en-US" sz="1400" dirty="0">
-                          <a:solidFill>
-                            <a:schemeClr val="bg1"/>
-                          </a:solidFill>
-                          <a:latin typeface="Times New Roman" panose="02020603050405020304" pitchFamily="18" charset="0"/>
-                          <a:cs typeface="Times New Roman" panose="02020603050405020304" pitchFamily="18" charset="0"/>
-                        </a:rPr>
-                        <a:t>AMF</a:t>
-                      </a:r>
-                    </a:p>
-                  </p:txBody>
-                </p:sp>
-              </p:grpSp>
+                      </a:rPr>
+                      <a:t>AMF</a:t>
+                    </a:r>
+                  </a:p>
+                </p:txBody>
+              </p:sp>
             </p:grpSp>
           </p:grpSp>
-          <p:grpSp>
-            <p:nvGrpSpPr>
-              <p:cNvPr id="7" name="Group 6">
-                <a:extLst>
-                  <a:ext uri="{FF2B5EF4-FFF2-40B4-BE49-F238E27FC236}">
-                    <a16:creationId xmlns:a16="http://schemas.microsoft.com/office/drawing/2014/main" id="{34177930-97C0-441E-8A21-12674904E42B}"/>
-                  </a:ext>
-                </a:extLst>
-              </p:cNvPr>
-              <p:cNvGrpSpPr/>
-              <p:nvPr/>
-            </p:nvGrpSpPr>
-            <p:grpSpPr>
-              <a:xfrm>
-                <a:off x="8468250" y="4158213"/>
-                <a:ext cx="1689168" cy="1057871"/>
-                <a:chOff x="8468250" y="4158213"/>
-                <a:chExt cx="1689168" cy="1057871"/>
-              </a:xfrm>
-            </p:grpSpPr>
-            <p:sp>
-              <p:nvSpPr>
-                <p:cNvPr id="9" name="TextBox 8">
-                  <a:extLst>
-                    <a:ext uri="{FF2B5EF4-FFF2-40B4-BE49-F238E27FC236}">
-                      <a16:creationId xmlns:a16="http://schemas.microsoft.com/office/drawing/2014/main" id="{EB67B94F-0D31-8E06-4AAC-5F5BF5274CC6}"/>
-                    </a:ext>
-                  </a:extLst>
-                </p:cNvPr>
-                <p:cNvSpPr txBox="1"/>
-                <p:nvPr/>
-              </p:nvSpPr>
-              <p:spPr>
-                <a:xfrm>
-                  <a:off x="8589062" y="4385087"/>
-                  <a:ext cx="1568356" cy="830997"/>
-                </a:xfrm>
-                <a:prstGeom prst="rect">
-                  <a:avLst/>
-                </a:prstGeom>
-                <a:noFill/>
-              </p:spPr>
-              <p:txBody>
-                <a:bodyPr wrap="square">
-                  <a:spAutoFit/>
-                </a:bodyPr>
-                <a:lstStyle/>
-                <a:p>
-                  <a:pPr marL="285750" indent="-285750">
-                    <a:buFont typeface="Arial" panose="020B0604020202020204" pitchFamily="34" charset="0"/>
-                    <a:buChar char="•"/>
-                  </a:pPr>
-                  <a:r>
-                    <a:rPr lang="en-US" sz="1200" dirty="0">
-                      <a:solidFill>
-                        <a:schemeClr val="bg1"/>
-                      </a:solidFill>
-                      <a:latin typeface="Times New Roman" panose="02020603050405020304" pitchFamily="18" charset="0"/>
-                      <a:cs typeface="Times New Roman" panose="02020603050405020304" pitchFamily="18" charset="0"/>
-                    </a:rPr>
-                    <a:t>Open5GS</a:t>
-                  </a:r>
-                </a:p>
-                <a:p>
-                  <a:pPr marL="285750" indent="-285750">
-                    <a:buFont typeface="Arial" panose="020B0604020202020204" pitchFamily="34" charset="0"/>
-                    <a:buChar char="•"/>
-                  </a:pPr>
-                  <a:r>
-                    <a:rPr lang="en-US" sz="1200" dirty="0">
-                      <a:solidFill>
-                        <a:schemeClr val="bg1"/>
-                      </a:solidFill>
-                      <a:latin typeface="Times New Roman" panose="02020603050405020304" pitchFamily="18" charset="0"/>
-                      <a:cs typeface="Times New Roman" panose="02020603050405020304" pitchFamily="18" charset="0"/>
-                    </a:rPr>
-                    <a:t>OAI 5G CN</a:t>
-                  </a:r>
-                </a:p>
-                <a:p>
-                  <a:pPr marL="285750" indent="-285750">
-                    <a:buFont typeface="Arial" panose="020B0604020202020204" pitchFamily="34" charset="0"/>
-                    <a:buChar char="•"/>
-                  </a:pPr>
-                  <a:r>
-                    <a:rPr lang="en-US" sz="1200" dirty="0">
-                      <a:solidFill>
-                        <a:schemeClr val="bg1"/>
-                      </a:solidFill>
-                      <a:latin typeface="Times New Roman" panose="02020603050405020304" pitchFamily="18" charset="0"/>
-                      <a:cs typeface="Times New Roman" panose="02020603050405020304" pitchFamily="18" charset="0"/>
-                    </a:rPr>
-                    <a:t>Free5GC</a:t>
-                  </a:r>
-                </a:p>
-                <a:p>
-                  <a:pPr marL="285750" indent="-285750">
-                    <a:buFont typeface="Arial" panose="020B0604020202020204" pitchFamily="34" charset="0"/>
-                    <a:buChar char="•"/>
-                  </a:pPr>
-                  <a:r>
-                    <a:rPr lang="en-US" sz="1200" dirty="0">
-                      <a:solidFill>
-                        <a:schemeClr val="bg1"/>
-                      </a:solidFill>
-                      <a:latin typeface="Times New Roman" panose="02020603050405020304" pitchFamily="18" charset="0"/>
-                      <a:cs typeface="Times New Roman" panose="02020603050405020304" pitchFamily="18" charset="0"/>
-                    </a:rPr>
-                    <a:t>Phoenix</a:t>
-                  </a:r>
-                </a:p>
-              </p:txBody>
-            </p:sp>
-            <p:sp>
-              <p:nvSpPr>
-                <p:cNvPr id="10" name="TextBox 9">
-                  <a:extLst>
-                    <a:ext uri="{FF2B5EF4-FFF2-40B4-BE49-F238E27FC236}">
-                      <a16:creationId xmlns:a16="http://schemas.microsoft.com/office/drawing/2014/main" id="{8337A69A-A57E-6292-9DC1-C5BEEF046218}"/>
-                    </a:ext>
-                  </a:extLst>
-                </p:cNvPr>
-                <p:cNvSpPr txBox="1"/>
-                <p:nvPr/>
-              </p:nvSpPr>
-              <p:spPr>
-                <a:xfrm>
-                  <a:off x="8468250" y="4158213"/>
-                  <a:ext cx="1568356" cy="307777"/>
-                </a:xfrm>
-                <a:prstGeom prst="rect">
-                  <a:avLst/>
-                </a:prstGeom>
-                <a:noFill/>
-              </p:spPr>
-              <p:txBody>
-                <a:bodyPr wrap="square">
-                  <a:spAutoFit/>
-                </a:bodyPr>
-                <a:lstStyle/>
-                <a:p>
-                  <a:pPr algn="ctr"/>
-                  <a:r>
-                    <a:rPr lang="en-US" sz="1400" b="1" dirty="0">
-                      <a:solidFill>
-                        <a:schemeClr val="bg1"/>
-                      </a:solidFill>
-                      <a:latin typeface="Times New Roman" panose="02020603050405020304" pitchFamily="18" charset="0"/>
-                      <a:cs typeface="Times New Roman" panose="02020603050405020304" pitchFamily="18" charset="0"/>
-                    </a:rPr>
-                    <a:t>5G Core Network</a:t>
-                  </a:r>
-                </a:p>
-              </p:txBody>
-            </p:sp>
-          </p:grpSp>
         </p:grpSp>
+        <p:sp>
+          <p:nvSpPr>
+            <p:cNvPr id="25" name="TextBox 24">
+              <a:extLst>
+                <a:ext uri="{FF2B5EF4-FFF2-40B4-BE49-F238E27FC236}">
+                  <a16:creationId xmlns:a16="http://schemas.microsoft.com/office/drawing/2014/main" id="{E08AF785-64DD-5213-EFB1-C72E9837A77B}"/>
+                </a:ext>
+              </a:extLst>
+            </p:cNvPr>
+            <p:cNvSpPr txBox="1"/>
+            <p:nvPr/>
+          </p:nvSpPr>
+          <p:spPr>
+            <a:xfrm>
+              <a:off x="6417137" y="1764477"/>
+              <a:ext cx="971328" cy="276999"/>
+            </a:xfrm>
+            <a:prstGeom prst="rect">
+              <a:avLst/>
+            </a:prstGeom>
+            <a:noFill/>
+          </p:spPr>
+          <p:txBody>
+            <a:bodyPr wrap="square">
+              <a:spAutoFit/>
+            </a:bodyPr>
+            <a:lstStyle/>
+            <a:p>
+              <a:pPr algn="ctr"/>
+              <a:r>
+                <a:rPr lang="en-US" sz="1200" dirty="0">
+                  <a:solidFill>
+                    <a:schemeClr val="bg1"/>
+                  </a:solidFill>
+                  <a:latin typeface="Times New Roman" panose="02020603050405020304" pitchFamily="18" charset="0"/>
+                  <a:cs typeface="Times New Roman" panose="02020603050405020304" pitchFamily="18" charset="0"/>
+                </a:rPr>
+                <a:t>A1-P, A1-EI</a:t>
+              </a:r>
+            </a:p>
+          </p:txBody>
+        </p:sp>
+        <p:sp>
+          <p:nvSpPr>
+            <p:cNvPr id="26" name="TextBox 25">
+              <a:extLst>
+                <a:ext uri="{FF2B5EF4-FFF2-40B4-BE49-F238E27FC236}">
+                  <a16:creationId xmlns:a16="http://schemas.microsoft.com/office/drawing/2014/main" id="{ECE108E2-A257-1689-DEB3-58EACB4F7465}"/>
+                </a:ext>
+              </a:extLst>
+            </p:cNvPr>
+            <p:cNvSpPr txBox="1"/>
+            <p:nvPr/>
+          </p:nvSpPr>
+          <p:spPr>
+            <a:xfrm>
+              <a:off x="6506434" y="3236557"/>
+              <a:ext cx="2184599" cy="276999"/>
+            </a:xfrm>
+            <a:prstGeom prst="rect">
+              <a:avLst/>
+            </a:prstGeom>
+            <a:noFill/>
+          </p:spPr>
+          <p:txBody>
+            <a:bodyPr wrap="square">
+              <a:spAutoFit/>
+            </a:bodyPr>
+            <a:lstStyle/>
+            <a:p>
+              <a:r>
+                <a:rPr lang="en-US" sz="1200" dirty="0">
+                  <a:solidFill>
+                    <a:schemeClr val="bg1"/>
+                  </a:solidFill>
+                  <a:latin typeface="Times New Roman" panose="02020603050405020304" pitchFamily="18" charset="0"/>
+                  <a:cs typeface="Times New Roman" panose="02020603050405020304" pitchFamily="18" charset="0"/>
+                </a:rPr>
+                <a:t>E2AP, E2SM</a:t>
+              </a:r>
+            </a:p>
+          </p:txBody>
+        </p:sp>
+        <p:sp>
+          <p:nvSpPr>
+            <p:cNvPr id="2" name="TextBox 1">
+              <a:extLst>
+                <a:ext uri="{FF2B5EF4-FFF2-40B4-BE49-F238E27FC236}">
+                  <a16:creationId xmlns:a16="http://schemas.microsoft.com/office/drawing/2014/main" id="{7AD74077-27C2-09AC-7CE1-70F5C84ABC60}"/>
+                </a:ext>
+              </a:extLst>
+            </p:cNvPr>
+            <p:cNvSpPr txBox="1"/>
+            <p:nvPr/>
+          </p:nvSpPr>
+          <p:spPr>
+            <a:xfrm>
+              <a:off x="6788425" y="2700688"/>
+              <a:ext cx="3309670" cy="307777"/>
+            </a:xfrm>
+            <a:prstGeom prst="rect">
+              <a:avLst/>
+            </a:prstGeom>
+            <a:noFill/>
+          </p:spPr>
+          <p:txBody>
+            <a:bodyPr wrap="square">
+              <a:spAutoFit/>
+            </a:bodyPr>
+            <a:lstStyle/>
+            <a:p>
+              <a:pPr algn="ctr"/>
+              <a:r>
+                <a:rPr lang="en-US" sz="1400" b="1" dirty="0">
+                  <a:solidFill>
+                    <a:schemeClr val="bg1"/>
+                  </a:solidFill>
+                  <a:latin typeface="Times New Roman" panose="02020603050405020304" pitchFamily="18" charset="0"/>
+                  <a:cs typeface="Times New Roman" panose="02020603050405020304" pitchFamily="18" charset="0"/>
+                </a:rPr>
+                <a:t>Service Management and Orchestration</a:t>
+              </a:r>
+            </a:p>
+          </p:txBody>
+        </p:sp>
+        <p:sp>
+          <p:nvSpPr>
+            <p:cNvPr id="8" name="TextBox 7">
+              <a:extLst>
+                <a:ext uri="{FF2B5EF4-FFF2-40B4-BE49-F238E27FC236}">
+                  <a16:creationId xmlns:a16="http://schemas.microsoft.com/office/drawing/2014/main" id="{624651D9-0BC3-A5D9-407D-1196EBDD0FE4}"/>
+                </a:ext>
+              </a:extLst>
+            </p:cNvPr>
+            <p:cNvSpPr txBox="1"/>
+            <p:nvPr/>
+          </p:nvSpPr>
+          <p:spPr>
+            <a:xfrm>
+              <a:off x="7486066" y="2905350"/>
+              <a:ext cx="2078132" cy="276999"/>
+            </a:xfrm>
+            <a:prstGeom prst="rect">
+              <a:avLst/>
+            </a:prstGeom>
+            <a:noFill/>
+          </p:spPr>
+          <p:txBody>
+            <a:bodyPr wrap="square">
+              <a:spAutoFit/>
+            </a:bodyPr>
+            <a:lstStyle/>
+            <a:p>
+              <a:pPr marL="285750" indent="-285750">
+                <a:buFont typeface="Arial" panose="020B0604020202020204" pitchFamily="34" charset="0"/>
+                <a:buChar char="•"/>
+              </a:pPr>
+              <a:r>
+                <a:rPr lang="en-US" sz="1200" dirty="0">
+                  <a:solidFill>
+                    <a:schemeClr val="bg1"/>
+                  </a:solidFill>
+                  <a:latin typeface="Times New Roman" panose="02020603050405020304" pitchFamily="18" charset="0"/>
+                  <a:cs typeface="Times New Roman" panose="02020603050405020304" pitchFamily="18" charset="0"/>
+                </a:rPr>
+                <a:t>O-RAN SC RIC</a:t>
+              </a:r>
+            </a:p>
+          </p:txBody>
+        </p:sp>
+        <p:sp>
+          <p:nvSpPr>
+            <p:cNvPr id="15" name="TextBox 14">
+              <a:extLst>
+                <a:ext uri="{FF2B5EF4-FFF2-40B4-BE49-F238E27FC236}">
+                  <a16:creationId xmlns:a16="http://schemas.microsoft.com/office/drawing/2014/main" id="{0D1816B3-2F0C-5BC7-EF43-2643BC9F317C}"/>
+                </a:ext>
+              </a:extLst>
+            </p:cNvPr>
+            <p:cNvSpPr txBox="1"/>
+            <p:nvPr/>
+          </p:nvSpPr>
+          <p:spPr>
+            <a:xfrm>
+              <a:off x="5420878" y="4224429"/>
+              <a:ext cx="2239249" cy="307777"/>
+            </a:xfrm>
+            <a:prstGeom prst="rect">
+              <a:avLst/>
+            </a:prstGeom>
+            <a:noFill/>
+          </p:spPr>
+          <p:txBody>
+            <a:bodyPr wrap="square">
+              <a:spAutoFit/>
+            </a:bodyPr>
+            <a:lstStyle/>
+            <a:p>
+              <a:pPr algn="ctr"/>
+              <a:r>
+                <a:rPr lang="en-US" sz="1400" b="1" dirty="0">
+                  <a:solidFill>
+                    <a:schemeClr val="bg1"/>
+                  </a:solidFill>
+                  <a:latin typeface="Times New Roman" panose="02020603050405020304" pitchFamily="18" charset="0"/>
+                  <a:cs typeface="Times New Roman" panose="02020603050405020304" pitchFamily="18" charset="0"/>
+                </a:rPr>
+                <a:t>Next Generation Node B</a:t>
+              </a:r>
+            </a:p>
+          </p:txBody>
+        </p:sp>
+        <p:sp>
+          <p:nvSpPr>
+            <p:cNvPr id="24" name="TextBox 23">
+              <a:extLst>
+                <a:ext uri="{FF2B5EF4-FFF2-40B4-BE49-F238E27FC236}">
+                  <a16:creationId xmlns:a16="http://schemas.microsoft.com/office/drawing/2014/main" id="{465A236D-5DC4-4924-E9BF-5BCBC5CC0DB4}"/>
+                </a:ext>
+              </a:extLst>
+            </p:cNvPr>
+            <p:cNvSpPr txBox="1"/>
+            <p:nvPr/>
+          </p:nvSpPr>
+          <p:spPr>
+            <a:xfrm>
+              <a:off x="5566264" y="4451303"/>
+              <a:ext cx="2095177" cy="646331"/>
+            </a:xfrm>
+            <a:prstGeom prst="rect">
+              <a:avLst/>
+            </a:prstGeom>
+            <a:noFill/>
+          </p:spPr>
+          <p:txBody>
+            <a:bodyPr wrap="square">
+              <a:spAutoFit/>
+            </a:bodyPr>
+            <a:lstStyle/>
+            <a:p>
+              <a:pPr marL="285750" indent="-285750">
+                <a:buFont typeface="Arial" panose="020B0604020202020204" pitchFamily="34" charset="0"/>
+                <a:buChar char="•"/>
+              </a:pPr>
+              <a:r>
+                <a:rPr lang="en-US" sz="1200" dirty="0" err="1">
+                  <a:solidFill>
+                    <a:schemeClr val="bg1"/>
+                  </a:solidFill>
+                  <a:latin typeface="Times New Roman" panose="02020603050405020304" pitchFamily="18" charset="0"/>
+                  <a:cs typeface="Times New Roman" panose="02020603050405020304" pitchFamily="18" charset="0"/>
+                </a:rPr>
+                <a:t>srsRAN_Project</a:t>
+              </a:r>
+              <a:endParaRPr lang="en-US" sz="1200" dirty="0">
+                <a:solidFill>
+                  <a:schemeClr val="bg1"/>
+                </a:solidFill>
+                <a:latin typeface="Times New Roman" panose="02020603050405020304" pitchFamily="18" charset="0"/>
+                <a:cs typeface="Times New Roman" panose="02020603050405020304" pitchFamily="18" charset="0"/>
+              </a:endParaRPr>
+            </a:p>
+            <a:p>
+              <a:pPr marL="285750" indent="-285750">
+                <a:buFont typeface="Arial" panose="020B0604020202020204" pitchFamily="34" charset="0"/>
+                <a:buChar char="•"/>
+              </a:pPr>
+              <a:r>
+                <a:rPr lang="en-US" sz="1200" dirty="0">
+                  <a:solidFill>
+                    <a:schemeClr val="bg1"/>
+                  </a:solidFill>
+                  <a:latin typeface="Times New Roman" panose="02020603050405020304" pitchFamily="18" charset="0"/>
+                  <a:cs typeface="Times New Roman" panose="02020603050405020304" pitchFamily="18" charset="0"/>
+                </a:rPr>
+                <a:t>OpenAirInterface5G</a:t>
+              </a:r>
+            </a:p>
+            <a:p>
+              <a:pPr marL="285750" indent="-285750">
+                <a:buFont typeface="Arial" panose="020B0604020202020204" pitchFamily="34" charset="0"/>
+                <a:buChar char="•"/>
+              </a:pPr>
+              <a:r>
+                <a:rPr lang="en-US" sz="1200" dirty="0">
+                  <a:solidFill>
+                    <a:schemeClr val="bg1"/>
+                  </a:solidFill>
+                  <a:latin typeface="Times New Roman" panose="02020603050405020304" pitchFamily="18" charset="0"/>
+                  <a:cs typeface="Times New Roman" panose="02020603050405020304" pitchFamily="18" charset="0"/>
+                </a:rPr>
+                <a:t>O-RAN SC E2 Simulator</a:t>
+              </a:r>
+            </a:p>
+          </p:txBody>
+        </p:sp>
+        <p:sp>
+          <p:nvSpPr>
+            <p:cNvPr id="28" name="TextBox 27">
+              <a:extLst>
+                <a:ext uri="{FF2B5EF4-FFF2-40B4-BE49-F238E27FC236}">
+                  <a16:creationId xmlns:a16="http://schemas.microsoft.com/office/drawing/2014/main" id="{8983C6B6-9442-28D0-3F90-CC015BA1CA48}"/>
+                </a:ext>
+              </a:extLst>
+            </p:cNvPr>
+            <p:cNvSpPr txBox="1"/>
+            <p:nvPr/>
+          </p:nvSpPr>
+          <p:spPr>
+            <a:xfrm>
+              <a:off x="8589063" y="4338402"/>
+              <a:ext cx="1532202" cy="830996"/>
+            </a:xfrm>
+            <a:prstGeom prst="rect">
+              <a:avLst/>
+            </a:prstGeom>
+            <a:noFill/>
+          </p:spPr>
+          <p:txBody>
+            <a:bodyPr wrap="square">
+              <a:spAutoFit/>
+            </a:bodyPr>
+            <a:lstStyle/>
+            <a:p>
+              <a:pPr marL="285750" indent="-285750">
+                <a:buFont typeface="Arial" panose="020B0604020202020204" pitchFamily="34" charset="0"/>
+                <a:buChar char="•"/>
+              </a:pPr>
+              <a:r>
+                <a:rPr lang="en-US" sz="1200" dirty="0">
+                  <a:solidFill>
+                    <a:schemeClr val="bg1"/>
+                  </a:solidFill>
+                  <a:latin typeface="Times New Roman" panose="02020603050405020304" pitchFamily="18" charset="0"/>
+                  <a:cs typeface="Times New Roman" panose="02020603050405020304" pitchFamily="18" charset="0"/>
+                </a:rPr>
+                <a:t>Open5GS</a:t>
+              </a:r>
+            </a:p>
+            <a:p>
+              <a:pPr marL="285750" indent="-285750">
+                <a:buFont typeface="Arial" panose="020B0604020202020204" pitchFamily="34" charset="0"/>
+                <a:buChar char="•"/>
+              </a:pPr>
+              <a:r>
+                <a:rPr lang="en-US" sz="1200" dirty="0">
+                  <a:solidFill>
+                    <a:schemeClr val="bg1"/>
+                  </a:solidFill>
+                  <a:latin typeface="Times New Roman" panose="02020603050405020304" pitchFamily="18" charset="0"/>
+                  <a:cs typeface="Times New Roman" panose="02020603050405020304" pitchFamily="18" charset="0"/>
+                </a:rPr>
+                <a:t>OAI 5G CN</a:t>
+              </a:r>
+            </a:p>
+            <a:p>
+              <a:pPr marL="285750" indent="-285750">
+                <a:buFont typeface="Arial" panose="020B0604020202020204" pitchFamily="34" charset="0"/>
+                <a:buChar char="•"/>
+              </a:pPr>
+              <a:r>
+                <a:rPr lang="en-US" sz="1200" dirty="0">
+                  <a:solidFill>
+                    <a:schemeClr val="bg1"/>
+                  </a:solidFill>
+                  <a:latin typeface="Times New Roman" panose="02020603050405020304" pitchFamily="18" charset="0"/>
+                  <a:cs typeface="Times New Roman" panose="02020603050405020304" pitchFamily="18" charset="0"/>
+                </a:rPr>
+                <a:t>Free5GC</a:t>
+              </a:r>
+            </a:p>
+            <a:p>
+              <a:pPr marL="285750" indent="-285750">
+                <a:buFont typeface="Arial" panose="020B0604020202020204" pitchFamily="34" charset="0"/>
+                <a:buChar char="•"/>
+              </a:pPr>
+              <a:r>
+                <a:rPr lang="en-US" sz="1200" dirty="0">
+                  <a:solidFill>
+                    <a:schemeClr val="bg1"/>
+                  </a:solidFill>
+                  <a:latin typeface="Times New Roman" panose="02020603050405020304" pitchFamily="18" charset="0"/>
+                  <a:cs typeface="Times New Roman" panose="02020603050405020304" pitchFamily="18" charset="0"/>
+                </a:rPr>
+                <a:t>Open5GCore</a:t>
+              </a:r>
+            </a:p>
+          </p:txBody>
+        </p:sp>
+        <p:sp>
+          <p:nvSpPr>
+            <p:cNvPr id="29" name="TextBox 28">
+              <a:extLst>
+                <a:ext uri="{FF2B5EF4-FFF2-40B4-BE49-F238E27FC236}">
+                  <a16:creationId xmlns:a16="http://schemas.microsoft.com/office/drawing/2014/main" id="{93BE429E-B8C4-A416-EB71-203FC89A1B08}"/>
+                </a:ext>
+              </a:extLst>
+            </p:cNvPr>
+            <p:cNvSpPr txBox="1"/>
+            <p:nvPr/>
+          </p:nvSpPr>
+          <p:spPr>
+            <a:xfrm>
+              <a:off x="8468250" y="4109945"/>
+              <a:ext cx="1568356" cy="307777"/>
+            </a:xfrm>
+            <a:prstGeom prst="rect">
+              <a:avLst/>
+            </a:prstGeom>
+            <a:noFill/>
+          </p:spPr>
+          <p:txBody>
+            <a:bodyPr wrap="square">
+              <a:spAutoFit/>
+            </a:bodyPr>
+            <a:lstStyle/>
+            <a:p>
+              <a:pPr algn="ctr"/>
+              <a:r>
+                <a:rPr lang="en-US" sz="1400" b="1" dirty="0">
+                  <a:solidFill>
+                    <a:schemeClr val="bg1"/>
+                  </a:solidFill>
+                  <a:latin typeface="Times New Roman" panose="02020603050405020304" pitchFamily="18" charset="0"/>
+                  <a:cs typeface="Times New Roman" panose="02020603050405020304" pitchFamily="18" charset="0"/>
+                </a:rPr>
+                <a:t>5G Core Network</a:t>
+              </a:r>
+            </a:p>
+          </p:txBody>
+        </p:sp>
       </p:grpSp>
     </p:spTree>
     <p:extLst>
@@ -14324,7 +14159,7 @@
                     <a:latin typeface="Times New Roman" panose="02020603050405020304" pitchFamily="18" charset="0"/>
                     <a:cs typeface="Times New Roman" panose="02020603050405020304" pitchFamily="18" charset="0"/>
                   </a:rPr>
-                  <a:t>Phoenix (5gdeploy)</a:t>
+                  <a:t>Open5GCore (5gdeploy)</a:t>
                 </a:r>
               </a:p>
             </p:txBody>
@@ -17914,7 +17749,7 @@
                     <a:latin typeface="Times New Roman" panose="02020603050405020304" pitchFamily="18" charset="0"/>
                     <a:cs typeface="Times New Roman" panose="02020603050405020304" pitchFamily="18" charset="0"/>
                   </a:rPr>
-                  <a:t>Phoenix (5gdeploy)</a:t>
+                  <a:t>Open5GCore (5gdeploy)</a:t>
                 </a:r>
               </a:p>
             </p:txBody>

--- a/RAN_Intelligent_Controllers/research/Diagrams.pptx
+++ b/RAN_Intelligent_Controllers/research/Diagrams.pptx
@@ -265,7 +265,7 @@
           <a:p>
             <a:fld id="{2D1DF383-F48D-4C35-882C-8A26F25E24F6}" type="datetimeFigureOut">
               <a:rPr lang="en-US" smtClean="0"/>
-              <a:t>11/13/2025</a:t>
+              <a:t>2/6/2026</a:t>
             </a:fld>
             <a:endParaRPr lang="en-US"/>
           </a:p>
@@ -463,7 +463,7 @@
           <a:p>
             <a:fld id="{2D1DF383-F48D-4C35-882C-8A26F25E24F6}" type="datetimeFigureOut">
               <a:rPr lang="en-US" smtClean="0"/>
-              <a:t>11/13/2025</a:t>
+              <a:t>2/6/2026</a:t>
             </a:fld>
             <a:endParaRPr lang="en-US"/>
           </a:p>
@@ -671,7 +671,7 @@
           <a:p>
             <a:fld id="{2D1DF383-F48D-4C35-882C-8A26F25E24F6}" type="datetimeFigureOut">
               <a:rPr lang="en-US" smtClean="0"/>
-              <a:t>11/13/2025</a:t>
+              <a:t>2/6/2026</a:t>
             </a:fld>
             <a:endParaRPr lang="en-US"/>
           </a:p>
@@ -869,7 +869,7 @@
           <a:p>
             <a:fld id="{2D1DF383-F48D-4C35-882C-8A26F25E24F6}" type="datetimeFigureOut">
               <a:rPr lang="en-US" smtClean="0"/>
-              <a:t>11/13/2025</a:t>
+              <a:t>2/6/2026</a:t>
             </a:fld>
             <a:endParaRPr lang="en-US"/>
           </a:p>
@@ -1144,7 +1144,7 @@
           <a:p>
             <a:fld id="{2D1DF383-F48D-4C35-882C-8A26F25E24F6}" type="datetimeFigureOut">
               <a:rPr lang="en-US" smtClean="0"/>
-              <a:t>11/13/2025</a:t>
+              <a:t>2/6/2026</a:t>
             </a:fld>
             <a:endParaRPr lang="en-US"/>
           </a:p>
@@ -1409,7 +1409,7 @@
           <a:p>
             <a:fld id="{2D1DF383-F48D-4C35-882C-8A26F25E24F6}" type="datetimeFigureOut">
               <a:rPr lang="en-US" smtClean="0"/>
-              <a:t>11/13/2025</a:t>
+              <a:t>2/6/2026</a:t>
             </a:fld>
             <a:endParaRPr lang="en-US"/>
           </a:p>
@@ -1821,7 +1821,7 @@
           <a:p>
             <a:fld id="{2D1DF383-F48D-4C35-882C-8A26F25E24F6}" type="datetimeFigureOut">
               <a:rPr lang="en-US" smtClean="0"/>
-              <a:t>11/13/2025</a:t>
+              <a:t>2/6/2026</a:t>
             </a:fld>
             <a:endParaRPr lang="en-US"/>
           </a:p>
@@ -1962,7 +1962,7 @@
           <a:p>
             <a:fld id="{2D1DF383-F48D-4C35-882C-8A26F25E24F6}" type="datetimeFigureOut">
               <a:rPr lang="en-US" smtClean="0"/>
-              <a:t>11/13/2025</a:t>
+              <a:t>2/6/2026</a:t>
             </a:fld>
             <a:endParaRPr lang="en-US"/>
           </a:p>
@@ -2075,7 +2075,7 @@
           <a:p>
             <a:fld id="{2D1DF383-F48D-4C35-882C-8A26F25E24F6}" type="datetimeFigureOut">
               <a:rPr lang="en-US" smtClean="0"/>
-              <a:t>11/13/2025</a:t>
+              <a:t>2/6/2026</a:t>
             </a:fld>
             <a:endParaRPr lang="en-US"/>
           </a:p>
@@ -2386,7 +2386,7 @@
           <a:p>
             <a:fld id="{2D1DF383-F48D-4C35-882C-8A26F25E24F6}" type="datetimeFigureOut">
               <a:rPr lang="en-US" smtClean="0"/>
-              <a:t>11/13/2025</a:t>
+              <a:t>2/6/2026</a:t>
             </a:fld>
             <a:endParaRPr lang="en-US"/>
           </a:p>
@@ -2674,7 +2674,7 @@
           <a:p>
             <a:fld id="{2D1DF383-F48D-4C35-882C-8A26F25E24F6}" type="datetimeFigureOut">
               <a:rPr lang="en-US" smtClean="0"/>
-              <a:t>11/13/2025</a:t>
+              <a:t>2/6/2026</a:t>
             </a:fld>
             <a:endParaRPr lang="en-US"/>
           </a:p>
@@ -2915,7 +2915,7 @@
           <a:p>
             <a:fld id="{2D1DF383-F48D-4C35-882C-8A26F25E24F6}" type="datetimeFigureOut">
               <a:rPr lang="en-US" smtClean="0"/>
-              <a:t>11/13/2025</a:t>
+              <a:t>2/6/2026</a:t>
             </a:fld>
             <a:endParaRPr lang="en-US"/>
           </a:p>
@@ -7282,7 +7282,7 @@
           <p:spPr>
             <a:xfrm>
               <a:off x="6417137" y="1764477"/>
-              <a:ext cx="971328" cy="276999"/>
+              <a:ext cx="971328" cy="461665"/>
             </a:xfrm>
             <a:prstGeom prst="rect">
               <a:avLst/>
@@ -7295,7 +7295,6 @@
             </a:bodyPr>
             <a:lstStyle/>
             <a:p>
-              <a:pPr algn="ctr"/>
               <a:r>
                 <a:rPr lang="en-US" sz="1200" dirty="0">
                   <a:solidFill>
@@ -7305,6 +7304,25 @@
                   <a:cs typeface="Times New Roman" panose="02020603050405020304" pitchFamily="18" charset="0"/>
                 </a:rPr>
                 <a:t>A1-P, A1-EI</a:t>
+              </a:r>
+              <a:br>
+                <a:rPr lang="en-US" sz="1200" dirty="0">
+                  <a:solidFill>
+                    <a:schemeClr val="tx1"/>
+                  </a:solidFill>
+                  <a:latin typeface="Times New Roman" panose="02020603050405020304" pitchFamily="18" charset="0"/>
+                  <a:cs typeface="Times New Roman" panose="02020603050405020304" pitchFamily="18" charset="0"/>
+                </a:rPr>
+              </a:br>
+              <a:r>
+                <a:rPr lang="en-US" sz="1200" dirty="0">
+                  <a:solidFill>
+                    <a:schemeClr val="tx1"/>
+                  </a:solidFill>
+                  <a:latin typeface="Times New Roman" panose="02020603050405020304" pitchFamily="18" charset="0"/>
+                  <a:cs typeface="Times New Roman" panose="02020603050405020304" pitchFamily="18" charset="0"/>
+                </a:rPr>
+                <a:t>A1-ML</a:t>
               </a:r>
               <a:endParaRPr lang="en-US" sz="1200" dirty="0">
                 <a:latin typeface="Times New Roman" panose="02020603050405020304" pitchFamily="18" charset="0"/>
@@ -11031,7 +11049,7 @@
           <p:spPr>
             <a:xfrm>
               <a:off x="6417137" y="1764477"/>
-              <a:ext cx="971328" cy="276999"/>
+              <a:ext cx="971328" cy="461665"/>
             </a:xfrm>
             <a:prstGeom prst="rect">
               <a:avLst/>
@@ -11044,7 +11062,6 @@
             </a:bodyPr>
             <a:lstStyle/>
             <a:p>
-              <a:pPr algn="ctr"/>
               <a:r>
                 <a:rPr lang="en-US" sz="1200" dirty="0">
                   <a:solidFill>
@@ -11054,6 +11071,25 @@
                   <a:cs typeface="Times New Roman" panose="02020603050405020304" pitchFamily="18" charset="0"/>
                 </a:rPr>
                 <a:t>A1-P, A1-EI</a:t>
+              </a:r>
+              <a:br>
+                <a:rPr lang="en-US" sz="1200" dirty="0">
+                  <a:solidFill>
+                    <a:schemeClr val="bg1"/>
+                  </a:solidFill>
+                  <a:latin typeface="Times New Roman" panose="02020603050405020304" pitchFamily="18" charset="0"/>
+                  <a:cs typeface="Times New Roman" panose="02020603050405020304" pitchFamily="18" charset="0"/>
+                </a:rPr>
+              </a:br>
+              <a:r>
+                <a:rPr lang="en-US" sz="1200" dirty="0">
+                  <a:solidFill>
+                    <a:schemeClr val="bg1"/>
+                  </a:solidFill>
+                  <a:latin typeface="Times New Roman" panose="02020603050405020304" pitchFamily="18" charset="0"/>
+                  <a:cs typeface="Times New Roman" panose="02020603050405020304" pitchFamily="18" charset="0"/>
+                </a:rPr>
+                <a:t>A1-ML</a:t>
               </a:r>
             </a:p>
           </p:txBody>

--- a/RAN_Intelligent_Controllers/research/Diagrams.pptx
+++ b/RAN_Intelligent_Controllers/research/Diagrams.pptx
@@ -9,9 +9,6 @@
     <p:sldId id="258" r:id="rId3"/>
     <p:sldId id="262" r:id="rId4"/>
     <p:sldId id="263" r:id="rId5"/>
-    <p:sldId id="260" r:id="rId6"/>
-    <p:sldId id="266" r:id="rId7"/>
-    <p:sldId id="267" r:id="rId8"/>
   </p:sldIdLst>
   <p:sldSz cx="12192000" cy="6858000"/>
   <p:notesSz cx="6858000" cy="9144000"/>
@@ -265,7 +262,7 @@
           <a:p>
             <a:fld id="{2D1DF383-F48D-4C35-882C-8A26F25E24F6}" type="datetimeFigureOut">
               <a:rPr lang="en-US" smtClean="0"/>
-              <a:t>2/6/2026</a:t>
+              <a:t>3/23/2026</a:t>
             </a:fld>
             <a:endParaRPr lang="en-US"/>
           </a:p>
@@ -463,7 +460,7 @@
           <a:p>
             <a:fld id="{2D1DF383-F48D-4C35-882C-8A26F25E24F6}" type="datetimeFigureOut">
               <a:rPr lang="en-US" smtClean="0"/>
-              <a:t>2/6/2026</a:t>
+              <a:t>3/23/2026</a:t>
             </a:fld>
             <a:endParaRPr lang="en-US"/>
           </a:p>
@@ -671,7 +668,7 @@
           <a:p>
             <a:fld id="{2D1DF383-F48D-4C35-882C-8A26F25E24F6}" type="datetimeFigureOut">
               <a:rPr lang="en-US" smtClean="0"/>
-              <a:t>2/6/2026</a:t>
+              <a:t>3/23/2026</a:t>
             </a:fld>
             <a:endParaRPr lang="en-US"/>
           </a:p>
@@ -869,7 +866,7 @@
           <a:p>
             <a:fld id="{2D1DF383-F48D-4C35-882C-8A26F25E24F6}" type="datetimeFigureOut">
               <a:rPr lang="en-US" smtClean="0"/>
-              <a:t>2/6/2026</a:t>
+              <a:t>3/23/2026</a:t>
             </a:fld>
             <a:endParaRPr lang="en-US"/>
           </a:p>
@@ -1144,7 +1141,7 @@
           <a:p>
             <a:fld id="{2D1DF383-F48D-4C35-882C-8A26F25E24F6}" type="datetimeFigureOut">
               <a:rPr lang="en-US" smtClean="0"/>
-              <a:t>2/6/2026</a:t>
+              <a:t>3/23/2026</a:t>
             </a:fld>
             <a:endParaRPr lang="en-US"/>
           </a:p>
@@ -1409,7 +1406,7 @@
           <a:p>
             <a:fld id="{2D1DF383-F48D-4C35-882C-8A26F25E24F6}" type="datetimeFigureOut">
               <a:rPr lang="en-US" smtClean="0"/>
-              <a:t>2/6/2026</a:t>
+              <a:t>3/23/2026</a:t>
             </a:fld>
             <a:endParaRPr lang="en-US"/>
           </a:p>
@@ -1821,7 +1818,7 @@
           <a:p>
             <a:fld id="{2D1DF383-F48D-4C35-882C-8A26F25E24F6}" type="datetimeFigureOut">
               <a:rPr lang="en-US" smtClean="0"/>
-              <a:t>2/6/2026</a:t>
+              <a:t>3/23/2026</a:t>
             </a:fld>
             <a:endParaRPr lang="en-US"/>
           </a:p>
@@ -1962,7 +1959,7 @@
           <a:p>
             <a:fld id="{2D1DF383-F48D-4C35-882C-8A26F25E24F6}" type="datetimeFigureOut">
               <a:rPr lang="en-US" smtClean="0"/>
-              <a:t>2/6/2026</a:t>
+              <a:t>3/23/2026</a:t>
             </a:fld>
             <a:endParaRPr lang="en-US"/>
           </a:p>
@@ -2075,7 +2072,7 @@
           <a:p>
             <a:fld id="{2D1DF383-F48D-4C35-882C-8A26F25E24F6}" type="datetimeFigureOut">
               <a:rPr lang="en-US" smtClean="0"/>
-              <a:t>2/6/2026</a:t>
+              <a:t>3/23/2026</a:t>
             </a:fld>
             <a:endParaRPr lang="en-US"/>
           </a:p>
@@ -2386,7 +2383,7 @@
           <a:p>
             <a:fld id="{2D1DF383-F48D-4C35-882C-8A26F25E24F6}" type="datetimeFigureOut">
               <a:rPr lang="en-US" smtClean="0"/>
-              <a:t>2/6/2026</a:t>
+              <a:t>3/23/2026</a:t>
             </a:fld>
             <a:endParaRPr lang="en-US"/>
           </a:p>
@@ -2674,7 +2671,7 @@
           <a:p>
             <a:fld id="{2D1DF383-F48D-4C35-882C-8A26F25E24F6}" type="datetimeFigureOut">
               <a:rPr lang="en-US" smtClean="0"/>
-              <a:t>2/6/2026</a:t>
+              <a:t>3/23/2026</a:t>
             </a:fld>
             <a:endParaRPr lang="en-US"/>
           </a:p>
@@ -2915,7 +2912,7 @@
           <a:p>
             <a:fld id="{2D1DF383-F48D-4C35-882C-8A26F25E24F6}" type="datetimeFigureOut">
               <a:rPr lang="en-US" smtClean="0"/>
-              <a:t>2/6/2026</a:t>
+              <a:t>3/23/2026</a:t>
             </a:fld>
             <a:endParaRPr lang="en-US"/>
           </a:p>
@@ -4936,16 +4933,12 @@
                   <a:buChar char="•"/>
                 </a:pPr>
                 <a:r>
-                  <a:rPr lang="en-US" sz="1200" dirty="0" err="1">
+                  <a:rPr lang="en-US" sz="1200" dirty="0">
                     <a:latin typeface="Times New Roman" panose="02020603050405020304" pitchFamily="18" charset="0"/>
                     <a:cs typeface="Times New Roman" panose="02020603050405020304" pitchFamily="18" charset="0"/>
                   </a:rPr>
-                  <a:t>srsRAN_Project</a:t>
+                  <a:t>OCUDU</a:t>
                 </a:r>
-                <a:endParaRPr lang="en-US" sz="1200" dirty="0">
-                  <a:latin typeface="Times New Roman" panose="02020603050405020304" pitchFamily="18" charset="0"/>
-                  <a:cs typeface="Times New Roman" panose="02020603050405020304" pitchFamily="18" charset="0"/>
-                </a:endParaRPr>
               </a:p>
               <a:p>
                 <a:pPr marL="285750" indent="-285750">
@@ -11297,22 +11290,15 @@
                 <a:buChar char="•"/>
               </a:pPr>
               <a:r>
-                <a:rPr lang="en-US" sz="1200" dirty="0" err="1">
+                <a:rPr lang="en-US" sz="1200" dirty="0">
                   <a:solidFill>
                     <a:schemeClr val="bg1"/>
                   </a:solidFill>
                   <a:latin typeface="Times New Roman" panose="02020603050405020304" pitchFamily="18" charset="0"/>
                   <a:cs typeface="Times New Roman" panose="02020603050405020304" pitchFamily="18" charset="0"/>
                 </a:rPr>
-                <a:t>srsRAN_Project</a:t>
+                <a:t>OCUDU</a:t>
               </a:r>
-              <a:endParaRPr lang="en-US" sz="1200" dirty="0">
-                <a:solidFill>
-                  <a:schemeClr val="bg1"/>
-                </a:solidFill>
-                <a:latin typeface="Times New Roman" panose="02020603050405020304" pitchFamily="18" charset="0"/>
-                <a:cs typeface="Times New Roman" panose="02020603050405020304" pitchFamily="18" charset="0"/>
-              </a:endParaRPr>
             </a:p>
             <a:p>
               <a:pPr marL="285750" indent="-285750">
@@ -12227,18 +12213,11 @@
               <a:p>
                 <a:pPr algn="ctr"/>
                 <a:r>
-                  <a:rPr lang="en-US" sz="1400" dirty="0" err="1">
-                    <a:latin typeface="Times New Roman" panose="02020603050405020304" pitchFamily="18" charset="0"/>
-                    <a:cs typeface="Times New Roman" panose="02020603050405020304" pitchFamily="18" charset="0"/>
-                  </a:rPr>
-                  <a:t>srsRAN_Project</a:t>
-                </a:r>
-                <a:r>
                   <a:rPr lang="en-US" sz="1400" dirty="0">
                     <a:latin typeface="Times New Roman" panose="02020603050405020304" pitchFamily="18" charset="0"/>
                     <a:cs typeface="Times New Roman" panose="02020603050405020304" pitchFamily="18" charset="0"/>
                   </a:rPr>
-                  <a:t> : </a:t>
+                  <a:t>OCUDU : </a:t>
                 </a:r>
                 <a:r>
                   <a:rPr lang="en-US" sz="1400" dirty="0" err="1">
@@ -12284,18 +12263,11 @@
               <a:p>
                 <a:pPr algn="ctr"/>
                 <a:r>
-                  <a:rPr lang="en-US" sz="1400" dirty="0" err="1">
-                    <a:latin typeface="Times New Roman" panose="02020603050405020304" pitchFamily="18" charset="0"/>
-                    <a:cs typeface="Times New Roman" panose="02020603050405020304" pitchFamily="18" charset="0"/>
-                  </a:rPr>
-                  <a:t>srsRAN_Project</a:t>
-                </a:r>
-                <a:r>
                   <a:rPr lang="en-US" sz="1400" dirty="0">
                     <a:latin typeface="Times New Roman" panose="02020603050405020304" pitchFamily="18" charset="0"/>
                     <a:cs typeface="Times New Roman" panose="02020603050405020304" pitchFamily="18" charset="0"/>
                   </a:rPr>
-                  <a:t> : USRP</a:t>
+                  <a:t>OCUDU : USRP</a:t>
                 </a:r>
               </a:p>
             </p:txBody>
@@ -15808,16 +15780,6 @@
               <a:p>
                 <a:pPr algn="ctr"/>
                 <a:r>
-                  <a:rPr lang="en-US" sz="1400" dirty="0" err="1">
-                    <a:solidFill>
-                      <a:schemeClr val="bg1"/>
-                    </a:solidFill>
-                    <a:latin typeface="Times New Roman" panose="02020603050405020304" pitchFamily="18" charset="0"/>
-                    <a:cs typeface="Times New Roman" panose="02020603050405020304" pitchFamily="18" charset="0"/>
-                  </a:rPr>
-                  <a:t>srsRAN_Project</a:t>
-                </a:r>
-                <a:r>
                   <a:rPr lang="en-US" sz="1400" dirty="0">
                     <a:solidFill>
                       <a:schemeClr val="bg1"/>
@@ -15825,7 +15787,7 @@
                     <a:latin typeface="Times New Roman" panose="02020603050405020304" pitchFamily="18" charset="0"/>
                     <a:cs typeface="Times New Roman" panose="02020603050405020304" pitchFamily="18" charset="0"/>
                   </a:rPr>
-                  <a:t> : </a:t>
+                  <a:t>OCUDU : </a:t>
                 </a:r>
                 <a:r>
                   <a:rPr lang="en-US" sz="1400" dirty="0" err="1">
@@ -15877,16 +15839,6 @@
               <a:p>
                 <a:pPr algn="ctr"/>
                 <a:r>
-                  <a:rPr lang="en-US" sz="1400" dirty="0" err="1">
-                    <a:solidFill>
-                      <a:schemeClr val="bg1"/>
-                    </a:solidFill>
-                    <a:latin typeface="Times New Roman" panose="02020603050405020304" pitchFamily="18" charset="0"/>
-                    <a:cs typeface="Times New Roman" panose="02020603050405020304" pitchFamily="18" charset="0"/>
-                  </a:rPr>
-                  <a:t>srsRAN_Project</a:t>
-                </a:r>
-                <a:r>
                   <a:rPr lang="en-US" sz="1400" dirty="0">
                     <a:solidFill>
                       <a:schemeClr val="bg1"/>
@@ -15894,7 +15846,7 @@
                     <a:latin typeface="Times New Roman" panose="02020603050405020304" pitchFamily="18" charset="0"/>
                     <a:cs typeface="Times New Roman" panose="02020603050405020304" pitchFamily="18" charset="0"/>
                   </a:rPr>
-                  <a:t> : USRP</a:t>
+                  <a:t>OCUDU : USRP</a:t>
                 </a:r>
               </a:p>
             </p:txBody>
@@ -18612,3602 +18564,6 @@
 </p:sld>
 </file>
 
-<file path=ppt/slides/slide5.xml><?xml version="1.0" encoding="utf-8"?>
-<p:sld xmlns:a="http://schemas.openxmlformats.org/drawingml/2006/main" xmlns:r="http://schemas.openxmlformats.org/officeDocument/2006/relationships" xmlns:p="http://schemas.openxmlformats.org/presentationml/2006/main">
-  <p:cSld>
-    <p:spTree>
-      <p:nvGrpSpPr>
-        <p:cNvPr id="1" name=""/>
-        <p:cNvGrpSpPr/>
-        <p:nvPr/>
-      </p:nvGrpSpPr>
-      <p:grpSpPr>
-        <a:xfrm>
-          <a:off x="0" y="0"/>
-          <a:ext cx="0" cy="0"/>
-          <a:chOff x="0" y="0"/>
-          <a:chExt cx="0" cy="0"/>
-        </a:xfrm>
-      </p:grpSpPr>
-      <p:grpSp>
-        <p:nvGrpSpPr>
-          <p:cNvPr id="2" name="Group 1">
-            <a:extLst>
-              <a:ext uri="{FF2B5EF4-FFF2-40B4-BE49-F238E27FC236}">
-                <a16:creationId xmlns:a16="http://schemas.microsoft.com/office/drawing/2014/main" id="{1F1C2E85-70FA-F3AF-5835-4DDBDE1FC0EB}"/>
-              </a:ext>
-            </a:extLst>
-          </p:cNvPr>
-          <p:cNvGrpSpPr/>
-          <p:nvPr/>
-        </p:nvGrpSpPr>
-        <p:grpSpPr>
-          <a:xfrm>
-            <a:off x="412247" y="458846"/>
-            <a:ext cx="1637614" cy="523700"/>
-            <a:chOff x="3423671" y="1867158"/>
-            <a:chExt cx="1637614" cy="523700"/>
-          </a:xfrm>
-        </p:grpSpPr>
-        <p:sp>
-          <p:nvSpPr>
-            <p:cNvPr id="6" name="Rectangle: Rounded Corners 5">
-              <a:extLst>
-                <a:ext uri="{FF2B5EF4-FFF2-40B4-BE49-F238E27FC236}">
-                  <a16:creationId xmlns:a16="http://schemas.microsoft.com/office/drawing/2014/main" id="{0DE1AD32-18BE-07D1-4819-E93C1902D708}"/>
-                </a:ext>
-              </a:extLst>
-            </p:cNvPr>
-            <p:cNvSpPr/>
-            <p:nvPr/>
-          </p:nvSpPr>
-          <p:spPr>
-            <a:xfrm>
-              <a:off x="3423671" y="1867158"/>
-              <a:ext cx="1637614" cy="523220"/>
-            </a:xfrm>
-            <a:prstGeom prst="roundRect">
-              <a:avLst>
-                <a:gd name="adj" fmla="val 12974"/>
-              </a:avLst>
-            </a:prstGeom>
-            <a:solidFill>
-              <a:schemeClr val="bg1">
-                <a:lumMod val="85000"/>
-              </a:schemeClr>
-            </a:solidFill>
-            <a:ln w="28575">
-              <a:solidFill>
-                <a:schemeClr val="tx1"/>
-              </a:solidFill>
-            </a:ln>
-          </p:spPr>
-          <p:style>
-            <a:lnRef idx="2">
-              <a:schemeClr val="accent1">
-                <a:shade val="15000"/>
-              </a:schemeClr>
-            </a:lnRef>
-            <a:fillRef idx="1">
-              <a:schemeClr val="accent1"/>
-            </a:fillRef>
-            <a:effectRef idx="0">
-              <a:schemeClr val="accent1"/>
-            </a:effectRef>
-            <a:fontRef idx="minor">
-              <a:schemeClr val="lt1"/>
-            </a:fontRef>
-          </p:style>
-          <p:txBody>
-            <a:bodyPr rtlCol="0" anchor="ctr"/>
-            <a:lstStyle/>
-            <a:p>
-              <a:pPr algn="ctr"/>
-              <a:endParaRPr lang="en-US" sz="1400" dirty="0">
-                <a:solidFill>
-                  <a:schemeClr val="tx1"/>
-                </a:solidFill>
-                <a:latin typeface="Times New Roman" panose="02020603050405020304" pitchFamily="18" charset="0"/>
-                <a:cs typeface="Times New Roman" panose="02020603050405020304" pitchFamily="18" charset="0"/>
-              </a:endParaRPr>
-            </a:p>
-          </p:txBody>
-        </p:sp>
-        <p:sp>
-          <p:nvSpPr>
-            <p:cNvPr id="7" name="TextBox 6">
-              <a:extLst>
-                <a:ext uri="{FF2B5EF4-FFF2-40B4-BE49-F238E27FC236}">
-                  <a16:creationId xmlns:a16="http://schemas.microsoft.com/office/drawing/2014/main" id="{2D86B25B-27D4-ED9E-4290-51E8EA8B1A63}"/>
-                </a:ext>
-              </a:extLst>
-            </p:cNvPr>
-            <p:cNvSpPr txBox="1"/>
-            <p:nvPr/>
-          </p:nvSpPr>
-          <p:spPr>
-            <a:xfrm>
-              <a:off x="3557978" y="1867638"/>
-              <a:ext cx="1369001" cy="523220"/>
-            </a:xfrm>
-            <a:prstGeom prst="rect">
-              <a:avLst/>
-            </a:prstGeom>
-            <a:noFill/>
-          </p:spPr>
-          <p:txBody>
-            <a:bodyPr wrap="square">
-              <a:spAutoFit/>
-            </a:bodyPr>
-            <a:lstStyle/>
-            <a:p>
-              <a:pPr algn="ctr"/>
-              <a:r>
-                <a:rPr lang="en-US" sz="1400" dirty="0">
-                  <a:solidFill>
-                    <a:schemeClr val="tx1"/>
-                  </a:solidFill>
-                  <a:latin typeface="Times New Roman" panose="02020603050405020304" pitchFamily="18" charset="0"/>
-                  <a:cs typeface="Times New Roman" panose="02020603050405020304" pitchFamily="18" charset="0"/>
-                </a:rPr>
-                <a:t>OpenAirInterface5G</a:t>
-              </a:r>
-              <a:endParaRPr lang="en-US" sz="1400" dirty="0">
-                <a:latin typeface="Times New Roman" panose="02020603050405020304" pitchFamily="18" charset="0"/>
-                <a:cs typeface="Times New Roman" panose="02020603050405020304" pitchFamily="18" charset="0"/>
-              </a:endParaRPr>
-            </a:p>
-          </p:txBody>
-        </p:sp>
-      </p:grpSp>
-      <p:grpSp>
-        <p:nvGrpSpPr>
-          <p:cNvPr id="21" name="Group 20">
-            <a:extLst>
-              <a:ext uri="{FF2B5EF4-FFF2-40B4-BE49-F238E27FC236}">
-                <a16:creationId xmlns:a16="http://schemas.microsoft.com/office/drawing/2014/main" id="{B7AC3C24-5D93-8C7A-BF1B-FB95124CC532}"/>
-              </a:ext>
-            </a:extLst>
-          </p:cNvPr>
-          <p:cNvGrpSpPr/>
-          <p:nvPr/>
-        </p:nvGrpSpPr>
-        <p:grpSpPr>
-          <a:xfrm>
-            <a:off x="5451307" y="440618"/>
-            <a:ext cx="2283381" cy="1233863"/>
-            <a:chOff x="1028392" y="2318655"/>
-            <a:chExt cx="2283381" cy="1233863"/>
-          </a:xfrm>
-        </p:grpSpPr>
-        <p:sp>
-          <p:nvSpPr>
-            <p:cNvPr id="146" name="TextBox 145">
-              <a:extLst>
-                <a:ext uri="{FF2B5EF4-FFF2-40B4-BE49-F238E27FC236}">
-                  <a16:creationId xmlns:a16="http://schemas.microsoft.com/office/drawing/2014/main" id="{3D2C051E-CEAC-BF62-49F2-C16CA11A4610}"/>
-                </a:ext>
-              </a:extLst>
-            </p:cNvPr>
-            <p:cNvSpPr txBox="1"/>
-            <p:nvPr/>
-          </p:nvSpPr>
-          <p:spPr>
-            <a:xfrm>
-              <a:off x="1028392" y="3244741"/>
-              <a:ext cx="2239249" cy="307777"/>
-            </a:xfrm>
-            <a:prstGeom prst="rect">
-              <a:avLst/>
-            </a:prstGeom>
-            <a:noFill/>
-          </p:spPr>
-          <p:txBody>
-            <a:bodyPr wrap="square">
-              <a:spAutoFit/>
-            </a:bodyPr>
-            <a:lstStyle/>
-            <a:p>
-              <a:pPr algn="ctr"/>
-              <a:r>
-                <a:rPr lang="en-US" sz="1400" b="1" dirty="0">
-                  <a:solidFill>
-                    <a:schemeClr val="tx1"/>
-                  </a:solidFill>
-                  <a:latin typeface="Times New Roman" panose="02020603050405020304" pitchFamily="18" charset="0"/>
-                  <a:cs typeface="Times New Roman" panose="02020603050405020304" pitchFamily="18" charset="0"/>
-                </a:rPr>
-                <a:t>Next Generation Node B</a:t>
-              </a:r>
-              <a:endParaRPr lang="en-US" sz="1400" b="1" dirty="0">
-                <a:latin typeface="Times New Roman" panose="02020603050405020304" pitchFamily="18" charset="0"/>
-                <a:cs typeface="Times New Roman" panose="02020603050405020304" pitchFamily="18" charset="0"/>
-              </a:endParaRPr>
-            </a:p>
-          </p:txBody>
-        </p:sp>
-        <p:grpSp>
-          <p:nvGrpSpPr>
-            <p:cNvPr id="150" name="Group 149">
-              <a:extLst>
-                <a:ext uri="{FF2B5EF4-FFF2-40B4-BE49-F238E27FC236}">
-                  <a16:creationId xmlns:a16="http://schemas.microsoft.com/office/drawing/2014/main" id="{16B62768-79CA-CE53-4D99-435EA269FFFD}"/>
-                </a:ext>
-              </a:extLst>
-            </p:cNvPr>
-            <p:cNvGrpSpPr/>
-            <p:nvPr/>
-          </p:nvGrpSpPr>
-          <p:grpSpPr>
-            <a:xfrm>
-              <a:off x="1028392" y="2318655"/>
-              <a:ext cx="2239249" cy="923272"/>
-              <a:chOff x="1590040" y="5303322"/>
-              <a:chExt cx="2374765" cy="923272"/>
-            </a:xfrm>
-          </p:grpSpPr>
-          <p:sp>
-            <p:nvSpPr>
-              <p:cNvPr id="157" name="Rectangle: Rounded Corners 156">
-                <a:extLst>
-                  <a:ext uri="{FF2B5EF4-FFF2-40B4-BE49-F238E27FC236}">
-                    <a16:creationId xmlns:a16="http://schemas.microsoft.com/office/drawing/2014/main" id="{528EBC03-1854-3E22-EDF7-C6702650CE13}"/>
-                  </a:ext>
-                </a:extLst>
-              </p:cNvPr>
-              <p:cNvSpPr/>
-              <p:nvPr/>
-            </p:nvSpPr>
-            <p:spPr>
-              <a:xfrm>
-                <a:off x="1590040" y="5303322"/>
-                <a:ext cx="2374765" cy="923272"/>
-              </a:xfrm>
-              <a:prstGeom prst="roundRect">
-                <a:avLst>
-                  <a:gd name="adj" fmla="val 9466"/>
-                </a:avLst>
-              </a:prstGeom>
-              <a:solidFill>
-                <a:schemeClr val="bg1">
-                  <a:lumMod val="85000"/>
-                </a:schemeClr>
-              </a:solidFill>
-              <a:ln w="28575">
-                <a:noFill/>
-              </a:ln>
-            </p:spPr>
-            <p:style>
-              <a:lnRef idx="2">
-                <a:schemeClr val="accent1">
-                  <a:shade val="15000"/>
-                </a:schemeClr>
-              </a:lnRef>
-              <a:fillRef idx="1">
-                <a:schemeClr val="accent1"/>
-              </a:fillRef>
-              <a:effectRef idx="0">
-                <a:schemeClr val="accent1"/>
-              </a:effectRef>
-              <a:fontRef idx="minor">
-                <a:schemeClr val="lt1"/>
-              </a:fontRef>
-            </p:style>
-            <p:txBody>
-              <a:bodyPr rtlCol="0" anchor="ctr"/>
-              <a:lstStyle/>
-              <a:p>
-                <a:pPr algn="ctr"/>
-                <a:endParaRPr lang="en-US" dirty="0">
-                  <a:latin typeface="Times New Roman" panose="02020603050405020304" pitchFamily="18" charset="0"/>
-                  <a:cs typeface="Times New Roman" panose="02020603050405020304" pitchFamily="18" charset="0"/>
-                </a:endParaRPr>
-              </a:p>
-            </p:txBody>
-          </p:sp>
-          <p:sp>
-            <p:nvSpPr>
-              <p:cNvPr id="158" name="Rectangle 157">
-                <a:extLst>
-                  <a:ext uri="{FF2B5EF4-FFF2-40B4-BE49-F238E27FC236}">
-                    <a16:creationId xmlns:a16="http://schemas.microsoft.com/office/drawing/2014/main" id="{9EE93C6C-9A09-52B2-8968-AB606F0E55D6}"/>
-                  </a:ext>
-                </a:extLst>
-              </p:cNvPr>
-              <p:cNvSpPr/>
-              <p:nvPr/>
-            </p:nvSpPr>
-            <p:spPr>
-              <a:xfrm>
-                <a:off x="1590040" y="5603165"/>
-                <a:ext cx="2374765" cy="323587"/>
-              </a:xfrm>
-              <a:prstGeom prst="rect">
-                <a:avLst/>
-              </a:prstGeom>
-              <a:solidFill>
-                <a:schemeClr val="bg1">
-                  <a:lumMod val="95000"/>
-                </a:schemeClr>
-              </a:solidFill>
-              <a:ln>
-                <a:noFill/>
-              </a:ln>
-            </p:spPr>
-            <p:style>
-              <a:lnRef idx="2">
-                <a:schemeClr val="accent1">
-                  <a:shade val="15000"/>
-                </a:schemeClr>
-              </a:lnRef>
-              <a:fillRef idx="1">
-                <a:schemeClr val="accent1"/>
-              </a:fillRef>
-              <a:effectRef idx="0">
-                <a:schemeClr val="accent1"/>
-              </a:effectRef>
-              <a:fontRef idx="minor">
-                <a:schemeClr val="lt1"/>
-              </a:fontRef>
-            </p:style>
-            <p:txBody>
-              <a:bodyPr rtlCol="0" anchor="ctr"/>
-              <a:lstStyle/>
-              <a:p>
-                <a:pPr algn="ctr"/>
-                <a:endParaRPr lang="en-US"/>
-              </a:p>
-            </p:txBody>
-          </p:sp>
-          <p:sp>
-            <p:nvSpPr>
-              <p:cNvPr id="159" name="Rectangle: Rounded Corners 158">
-                <a:extLst>
-                  <a:ext uri="{FF2B5EF4-FFF2-40B4-BE49-F238E27FC236}">
-                    <a16:creationId xmlns:a16="http://schemas.microsoft.com/office/drawing/2014/main" id="{14EF32EA-D114-017F-DBFE-F63D79959F99}"/>
-                  </a:ext>
-                </a:extLst>
-              </p:cNvPr>
-              <p:cNvSpPr/>
-              <p:nvPr/>
-            </p:nvSpPr>
-            <p:spPr>
-              <a:xfrm>
-                <a:off x="1590040" y="5303322"/>
-                <a:ext cx="2374765" cy="923272"/>
-              </a:xfrm>
-              <a:prstGeom prst="roundRect">
-                <a:avLst>
-                  <a:gd name="adj" fmla="val 9879"/>
-                </a:avLst>
-              </a:prstGeom>
-              <a:noFill/>
-              <a:ln w="12700">
-                <a:solidFill>
-                  <a:schemeClr val="tx1"/>
-                </a:solidFill>
-              </a:ln>
-            </p:spPr>
-            <p:style>
-              <a:lnRef idx="2">
-                <a:schemeClr val="accent1">
-                  <a:shade val="15000"/>
-                </a:schemeClr>
-              </a:lnRef>
-              <a:fillRef idx="1">
-                <a:schemeClr val="accent1"/>
-              </a:fillRef>
-              <a:effectRef idx="0">
-                <a:schemeClr val="accent1"/>
-              </a:effectRef>
-              <a:fontRef idx="minor">
-                <a:schemeClr val="lt1"/>
-              </a:fontRef>
-            </p:style>
-            <p:txBody>
-              <a:bodyPr rtlCol="0" anchor="ctr"/>
-              <a:lstStyle/>
-              <a:p>
-                <a:pPr algn="ctr"/>
-                <a:endParaRPr lang="en-US" dirty="0">
-                  <a:latin typeface="Times New Roman" panose="02020603050405020304" pitchFamily="18" charset="0"/>
-                  <a:cs typeface="Times New Roman" panose="02020603050405020304" pitchFamily="18" charset="0"/>
-                </a:endParaRPr>
-              </a:p>
-            </p:txBody>
-          </p:sp>
-        </p:grpSp>
-        <p:sp>
-          <p:nvSpPr>
-            <p:cNvPr id="151" name="TextBox 150">
-              <a:extLst>
-                <a:ext uri="{FF2B5EF4-FFF2-40B4-BE49-F238E27FC236}">
-                  <a16:creationId xmlns:a16="http://schemas.microsoft.com/office/drawing/2014/main" id="{D086D922-3E57-7D55-1D13-0524DE570C58}"/>
-                </a:ext>
-              </a:extLst>
-            </p:cNvPr>
-            <p:cNvSpPr txBox="1"/>
-            <p:nvPr/>
-          </p:nvSpPr>
-          <p:spPr>
-            <a:xfrm>
-              <a:off x="1342370" y="2928594"/>
-              <a:ext cx="1969403" cy="307777"/>
-            </a:xfrm>
-            <a:prstGeom prst="rect">
-              <a:avLst/>
-            </a:prstGeom>
-            <a:noFill/>
-          </p:spPr>
-          <p:txBody>
-            <a:bodyPr wrap="square">
-              <a:spAutoFit/>
-            </a:bodyPr>
-            <a:lstStyle/>
-            <a:p>
-              <a:pPr algn="ctr"/>
-              <a:r>
-                <a:rPr lang="en-US" sz="1400" dirty="0">
-                  <a:solidFill>
-                    <a:schemeClr val="tx1"/>
-                  </a:solidFill>
-                  <a:latin typeface="Times New Roman" panose="02020603050405020304" pitchFamily="18" charset="0"/>
-                  <a:cs typeface="Times New Roman" panose="02020603050405020304" pitchFamily="18" charset="0"/>
-                </a:rPr>
-                <a:t>RF Simulator</a:t>
-              </a:r>
-              <a:endParaRPr lang="en-US" sz="1400" dirty="0">
-                <a:latin typeface="Times New Roman" panose="02020603050405020304" pitchFamily="18" charset="0"/>
-                <a:cs typeface="Times New Roman" panose="02020603050405020304" pitchFamily="18" charset="0"/>
-              </a:endParaRPr>
-            </a:p>
-          </p:txBody>
-        </p:sp>
-        <p:sp>
-          <p:nvSpPr>
-            <p:cNvPr id="152" name="TextBox 151">
-              <a:extLst>
-                <a:ext uri="{FF2B5EF4-FFF2-40B4-BE49-F238E27FC236}">
-                  <a16:creationId xmlns:a16="http://schemas.microsoft.com/office/drawing/2014/main" id="{2F4E4E72-ECFE-B991-CB49-4F95696D47F8}"/>
-                </a:ext>
-              </a:extLst>
-            </p:cNvPr>
-            <p:cNvSpPr txBox="1"/>
-            <p:nvPr/>
-          </p:nvSpPr>
-          <p:spPr>
-            <a:xfrm>
-              <a:off x="1342370" y="2629568"/>
-              <a:ext cx="1969403" cy="307777"/>
-            </a:xfrm>
-            <a:prstGeom prst="rect">
-              <a:avLst/>
-            </a:prstGeom>
-            <a:noFill/>
-          </p:spPr>
-          <p:txBody>
-            <a:bodyPr wrap="square">
-              <a:spAutoFit/>
-            </a:bodyPr>
-            <a:lstStyle/>
-            <a:p>
-              <a:pPr algn="ctr"/>
-              <a:r>
-                <a:rPr lang="en-US" sz="1400" dirty="0">
-                  <a:latin typeface="Times New Roman" panose="02020603050405020304" pitchFamily="18" charset="0"/>
-                  <a:cs typeface="Times New Roman" panose="02020603050405020304" pitchFamily="18" charset="0"/>
-                </a:rPr>
-                <a:t>OAI RF Simulator</a:t>
-              </a:r>
-            </a:p>
-          </p:txBody>
-        </p:sp>
-        <p:sp>
-          <p:nvSpPr>
-            <p:cNvPr id="153" name="TextBox 152">
-              <a:extLst>
-                <a:ext uri="{FF2B5EF4-FFF2-40B4-BE49-F238E27FC236}">
-                  <a16:creationId xmlns:a16="http://schemas.microsoft.com/office/drawing/2014/main" id="{85EFAFED-45ED-1FDD-79F8-2BED0AC5076B}"/>
-                </a:ext>
-              </a:extLst>
-            </p:cNvPr>
-            <p:cNvSpPr txBox="1"/>
-            <p:nvPr/>
-          </p:nvSpPr>
-          <p:spPr>
-            <a:xfrm>
-              <a:off x="1342370" y="2330542"/>
-              <a:ext cx="1969403" cy="307777"/>
-            </a:xfrm>
-            <a:prstGeom prst="rect">
-              <a:avLst/>
-            </a:prstGeom>
-            <a:noFill/>
-          </p:spPr>
-          <p:txBody>
-            <a:bodyPr wrap="square">
-              <a:spAutoFit/>
-            </a:bodyPr>
-            <a:lstStyle/>
-            <a:p>
-              <a:pPr algn="ctr"/>
-              <a:r>
-                <a:rPr lang="en-US" sz="1400" dirty="0">
-                  <a:latin typeface="Times New Roman" panose="02020603050405020304" pitchFamily="18" charset="0"/>
-                  <a:cs typeface="Times New Roman" panose="02020603050405020304" pitchFamily="18" charset="0"/>
-                </a:rPr>
-                <a:t>srsRAN_4G</a:t>
-              </a:r>
-            </a:p>
-          </p:txBody>
-        </p:sp>
-      </p:grpSp>
-      <p:grpSp>
-        <p:nvGrpSpPr>
-          <p:cNvPr id="183" name="Group 182">
-            <a:extLst>
-              <a:ext uri="{FF2B5EF4-FFF2-40B4-BE49-F238E27FC236}">
-                <a16:creationId xmlns:a16="http://schemas.microsoft.com/office/drawing/2014/main" id="{56A8650A-9B1A-7398-6972-598AB9FAD8E5}"/>
-              </a:ext>
-            </a:extLst>
-          </p:cNvPr>
-          <p:cNvGrpSpPr/>
-          <p:nvPr/>
-        </p:nvGrpSpPr>
-        <p:grpSpPr>
-          <a:xfrm>
-            <a:off x="8216865" y="440618"/>
-            <a:ext cx="2239249" cy="1557651"/>
-            <a:chOff x="4580556" y="3243709"/>
-            <a:chExt cx="2239249" cy="1557651"/>
-          </a:xfrm>
-        </p:grpSpPr>
-        <p:sp>
-          <p:nvSpPr>
-            <p:cNvPr id="184" name="Rectangle: Top Corners Rounded 183">
-              <a:extLst>
-                <a:ext uri="{FF2B5EF4-FFF2-40B4-BE49-F238E27FC236}">
-                  <a16:creationId xmlns:a16="http://schemas.microsoft.com/office/drawing/2014/main" id="{229EA9B1-6BFD-E3FF-F3FF-C5C9B53DF06F}"/>
-                </a:ext>
-              </a:extLst>
-            </p:cNvPr>
-            <p:cNvSpPr/>
-            <p:nvPr/>
-          </p:nvSpPr>
-          <p:spPr>
-            <a:xfrm rot="10800000">
-              <a:off x="4580557" y="4166644"/>
-              <a:ext cx="2239248" cy="323588"/>
-            </a:xfrm>
-            <a:prstGeom prst="round2SameRect">
-              <a:avLst>
-                <a:gd name="adj1" fmla="val 28890"/>
-                <a:gd name="adj2" fmla="val 0"/>
-              </a:avLst>
-            </a:prstGeom>
-            <a:solidFill>
-              <a:srgbClr val="F2F2F2"/>
-            </a:solidFill>
-            <a:ln>
-              <a:noFill/>
-            </a:ln>
-          </p:spPr>
-          <p:style>
-            <a:lnRef idx="2">
-              <a:schemeClr val="accent1">
-                <a:shade val="15000"/>
-              </a:schemeClr>
-            </a:lnRef>
-            <a:fillRef idx="1">
-              <a:schemeClr val="accent1"/>
-            </a:fillRef>
-            <a:effectRef idx="0">
-              <a:schemeClr val="accent1"/>
-            </a:effectRef>
-            <a:fontRef idx="minor">
-              <a:schemeClr val="lt1"/>
-            </a:fontRef>
-          </p:style>
-          <p:txBody>
-            <a:bodyPr rtlCol="0" anchor="ctr"/>
-            <a:lstStyle/>
-            <a:p>
-              <a:pPr algn="ctr"/>
-              <a:endParaRPr lang="en-US"/>
-            </a:p>
-          </p:txBody>
-        </p:sp>
-        <p:sp>
-          <p:nvSpPr>
-            <p:cNvPr id="185" name="Rectangle: Top Corners Rounded 184">
-              <a:extLst>
-                <a:ext uri="{FF2B5EF4-FFF2-40B4-BE49-F238E27FC236}">
-                  <a16:creationId xmlns:a16="http://schemas.microsoft.com/office/drawing/2014/main" id="{73FB63BF-5717-D110-52A5-F3B146F5CB6B}"/>
-                </a:ext>
-              </a:extLst>
-            </p:cNvPr>
-            <p:cNvSpPr/>
-            <p:nvPr/>
-          </p:nvSpPr>
-          <p:spPr>
-            <a:xfrm>
-              <a:off x="4580556" y="3243709"/>
-              <a:ext cx="2239248" cy="923272"/>
-            </a:xfrm>
-            <a:prstGeom prst="round2SameRect">
-              <a:avLst>
-                <a:gd name="adj1" fmla="val 13584"/>
-                <a:gd name="adj2" fmla="val 0"/>
-              </a:avLst>
-            </a:prstGeom>
-            <a:solidFill>
-              <a:srgbClr val="D9D9D9"/>
-            </a:solidFill>
-            <a:ln>
-              <a:noFill/>
-            </a:ln>
-          </p:spPr>
-          <p:style>
-            <a:lnRef idx="2">
-              <a:schemeClr val="accent1">
-                <a:shade val="15000"/>
-              </a:schemeClr>
-            </a:lnRef>
-            <a:fillRef idx="1">
-              <a:schemeClr val="accent1"/>
-            </a:fillRef>
-            <a:effectRef idx="0">
-              <a:schemeClr val="accent1"/>
-            </a:effectRef>
-            <a:fontRef idx="minor">
-              <a:schemeClr val="lt1"/>
-            </a:fontRef>
-          </p:style>
-          <p:txBody>
-            <a:bodyPr rtlCol="0" anchor="ctr"/>
-            <a:lstStyle/>
-            <a:p>
-              <a:pPr algn="ctr"/>
-              <a:endParaRPr lang="en-US"/>
-            </a:p>
-          </p:txBody>
-        </p:sp>
-        <p:sp>
-          <p:nvSpPr>
-            <p:cNvPr id="186" name="Rectangle 185">
-              <a:extLst>
-                <a:ext uri="{FF2B5EF4-FFF2-40B4-BE49-F238E27FC236}">
-                  <a16:creationId xmlns:a16="http://schemas.microsoft.com/office/drawing/2014/main" id="{BFE8DF71-9149-613C-4600-80E2A3014CBA}"/>
-                </a:ext>
-              </a:extLst>
-            </p:cNvPr>
-            <p:cNvSpPr/>
-            <p:nvPr/>
-          </p:nvSpPr>
-          <p:spPr>
-            <a:xfrm>
-              <a:off x="4580556" y="3544031"/>
-              <a:ext cx="2239249" cy="323587"/>
-            </a:xfrm>
-            <a:prstGeom prst="rect">
-              <a:avLst/>
-            </a:prstGeom>
-            <a:solidFill>
-              <a:schemeClr val="bg1">
-                <a:lumMod val="95000"/>
-              </a:schemeClr>
-            </a:solidFill>
-            <a:ln>
-              <a:noFill/>
-            </a:ln>
-          </p:spPr>
-          <p:style>
-            <a:lnRef idx="2">
-              <a:schemeClr val="accent1">
-                <a:shade val="15000"/>
-              </a:schemeClr>
-            </a:lnRef>
-            <a:fillRef idx="1">
-              <a:schemeClr val="accent1"/>
-            </a:fillRef>
-            <a:effectRef idx="0">
-              <a:schemeClr val="accent1"/>
-            </a:effectRef>
-            <a:fontRef idx="minor">
-              <a:schemeClr val="lt1"/>
-            </a:fontRef>
-          </p:style>
-          <p:txBody>
-            <a:bodyPr rtlCol="0" anchor="ctr"/>
-            <a:lstStyle/>
-            <a:p>
-              <a:pPr algn="ctr"/>
-              <a:endParaRPr lang="en-US"/>
-            </a:p>
-          </p:txBody>
-        </p:sp>
-        <p:sp>
-          <p:nvSpPr>
-            <p:cNvPr id="187" name="Rectangle: Rounded Corners 186">
-              <a:extLst>
-                <a:ext uri="{FF2B5EF4-FFF2-40B4-BE49-F238E27FC236}">
-                  <a16:creationId xmlns:a16="http://schemas.microsoft.com/office/drawing/2014/main" id="{1AEFF849-F882-E815-BA68-80B76190EC0D}"/>
-                </a:ext>
-              </a:extLst>
-            </p:cNvPr>
-            <p:cNvSpPr/>
-            <p:nvPr/>
-          </p:nvSpPr>
-          <p:spPr>
-            <a:xfrm>
-              <a:off x="4580556" y="3244668"/>
-              <a:ext cx="2239249" cy="1246101"/>
-            </a:xfrm>
-            <a:prstGeom prst="roundRect">
-              <a:avLst>
-                <a:gd name="adj" fmla="val 7433"/>
-              </a:avLst>
-            </a:prstGeom>
-            <a:noFill/>
-            <a:ln w="12700">
-              <a:solidFill>
-                <a:schemeClr val="tx1"/>
-              </a:solidFill>
-            </a:ln>
-          </p:spPr>
-          <p:style>
-            <a:lnRef idx="2">
-              <a:schemeClr val="accent1">
-                <a:shade val="15000"/>
-              </a:schemeClr>
-            </a:lnRef>
-            <a:fillRef idx="1">
-              <a:schemeClr val="accent1"/>
-            </a:fillRef>
-            <a:effectRef idx="0">
-              <a:schemeClr val="accent1"/>
-            </a:effectRef>
-            <a:fontRef idx="minor">
-              <a:schemeClr val="lt1"/>
-            </a:fontRef>
-          </p:style>
-          <p:txBody>
-            <a:bodyPr rtlCol="0" anchor="ctr"/>
-            <a:lstStyle/>
-            <a:p>
-              <a:pPr algn="ctr"/>
-              <a:endParaRPr lang="en-US" dirty="0">
-                <a:latin typeface="Times New Roman" panose="02020603050405020304" pitchFamily="18" charset="0"/>
-                <a:cs typeface="Times New Roman" panose="02020603050405020304" pitchFamily="18" charset="0"/>
-              </a:endParaRPr>
-            </a:p>
-          </p:txBody>
-        </p:sp>
-        <p:sp>
-          <p:nvSpPr>
-            <p:cNvPr id="188" name="TextBox 187">
-              <a:extLst>
-                <a:ext uri="{FF2B5EF4-FFF2-40B4-BE49-F238E27FC236}">
-                  <a16:creationId xmlns:a16="http://schemas.microsoft.com/office/drawing/2014/main" id="{33579F1E-6CB2-0193-BAA2-1247E7FCBDEF}"/>
-                </a:ext>
-              </a:extLst>
-            </p:cNvPr>
-            <p:cNvSpPr txBox="1"/>
-            <p:nvPr/>
-          </p:nvSpPr>
-          <p:spPr>
-            <a:xfrm>
-              <a:off x="4651773" y="3853825"/>
-              <a:ext cx="2096816" cy="307777"/>
-            </a:xfrm>
-            <a:prstGeom prst="rect">
-              <a:avLst/>
-            </a:prstGeom>
-            <a:noFill/>
-          </p:spPr>
-          <p:txBody>
-            <a:bodyPr wrap="square">
-              <a:spAutoFit/>
-            </a:bodyPr>
-            <a:lstStyle/>
-            <a:p>
-              <a:pPr algn="ctr"/>
-              <a:r>
-                <a:rPr lang="en-US" sz="1400" dirty="0" err="1">
-                  <a:latin typeface="Times New Roman" panose="02020603050405020304" pitchFamily="18" charset="0"/>
-                  <a:cs typeface="Times New Roman" panose="02020603050405020304" pitchFamily="18" charset="0"/>
-                </a:rPr>
-                <a:t>ZeroMQ</a:t>
-              </a:r>
-              <a:endParaRPr lang="en-US" sz="1400" dirty="0">
-                <a:latin typeface="Times New Roman" panose="02020603050405020304" pitchFamily="18" charset="0"/>
-                <a:cs typeface="Times New Roman" panose="02020603050405020304" pitchFamily="18" charset="0"/>
-              </a:endParaRPr>
-            </a:p>
-          </p:txBody>
-        </p:sp>
-        <p:sp>
-          <p:nvSpPr>
-            <p:cNvPr id="189" name="TextBox 188">
-              <a:extLst>
-                <a:ext uri="{FF2B5EF4-FFF2-40B4-BE49-F238E27FC236}">
-                  <a16:creationId xmlns:a16="http://schemas.microsoft.com/office/drawing/2014/main" id="{AFC220C3-24C2-039B-DB95-799285B4D7EF}"/>
-                </a:ext>
-              </a:extLst>
-            </p:cNvPr>
-            <p:cNvSpPr txBox="1"/>
-            <p:nvPr/>
-          </p:nvSpPr>
-          <p:spPr>
-            <a:xfrm>
-              <a:off x="4651773" y="3554799"/>
-              <a:ext cx="2096816" cy="307777"/>
-            </a:xfrm>
-            <a:prstGeom prst="rect">
-              <a:avLst/>
-            </a:prstGeom>
-            <a:noFill/>
-          </p:spPr>
-          <p:txBody>
-            <a:bodyPr wrap="square">
-              <a:spAutoFit/>
-            </a:bodyPr>
-            <a:lstStyle/>
-            <a:p>
-              <a:pPr algn="ctr"/>
-              <a:r>
-                <a:rPr lang="en-US" sz="1400" dirty="0">
-                  <a:latin typeface="Times New Roman" panose="02020603050405020304" pitchFamily="18" charset="0"/>
-                  <a:cs typeface="Times New Roman" panose="02020603050405020304" pitchFamily="18" charset="0"/>
-                </a:rPr>
-                <a:t>OAI RF Simulator</a:t>
-              </a:r>
-            </a:p>
-          </p:txBody>
-        </p:sp>
-        <p:sp>
-          <p:nvSpPr>
-            <p:cNvPr id="190" name="TextBox 189">
-              <a:extLst>
-                <a:ext uri="{FF2B5EF4-FFF2-40B4-BE49-F238E27FC236}">
-                  <a16:creationId xmlns:a16="http://schemas.microsoft.com/office/drawing/2014/main" id="{66E1370B-F4E9-A649-A767-EE11BD3748F2}"/>
-                </a:ext>
-              </a:extLst>
-            </p:cNvPr>
-            <p:cNvSpPr txBox="1"/>
-            <p:nvPr/>
-          </p:nvSpPr>
-          <p:spPr>
-            <a:xfrm>
-              <a:off x="4651771" y="3255773"/>
-              <a:ext cx="2096818" cy="307777"/>
-            </a:xfrm>
-            <a:prstGeom prst="rect">
-              <a:avLst/>
-            </a:prstGeom>
-            <a:noFill/>
-          </p:spPr>
-          <p:txBody>
-            <a:bodyPr wrap="square">
-              <a:spAutoFit/>
-            </a:bodyPr>
-            <a:lstStyle/>
-            <a:p>
-              <a:pPr algn="ctr"/>
-              <a:r>
-                <a:rPr lang="en-US" sz="1400" dirty="0" err="1">
-                  <a:latin typeface="Times New Roman" panose="02020603050405020304" pitchFamily="18" charset="0"/>
-                  <a:cs typeface="Times New Roman" panose="02020603050405020304" pitchFamily="18" charset="0"/>
-                </a:rPr>
-                <a:t>srsRAN_Project</a:t>
-              </a:r>
-              <a:endParaRPr lang="en-US" sz="1400" dirty="0">
-                <a:latin typeface="Times New Roman" panose="02020603050405020304" pitchFamily="18" charset="0"/>
-                <a:cs typeface="Times New Roman" panose="02020603050405020304" pitchFamily="18" charset="0"/>
-              </a:endParaRPr>
-            </a:p>
-          </p:txBody>
-        </p:sp>
-        <p:sp>
-          <p:nvSpPr>
-            <p:cNvPr id="191" name="TextBox 190">
-              <a:extLst>
-                <a:ext uri="{FF2B5EF4-FFF2-40B4-BE49-F238E27FC236}">
-                  <a16:creationId xmlns:a16="http://schemas.microsoft.com/office/drawing/2014/main" id="{B9116D2E-B36D-257B-A7FE-ED45BAEF10A0}"/>
-                </a:ext>
-              </a:extLst>
-            </p:cNvPr>
-            <p:cNvSpPr txBox="1"/>
-            <p:nvPr/>
-          </p:nvSpPr>
-          <p:spPr>
-            <a:xfrm>
-              <a:off x="4651773" y="4173617"/>
-              <a:ext cx="2096816" cy="307777"/>
-            </a:xfrm>
-            <a:prstGeom prst="rect">
-              <a:avLst/>
-            </a:prstGeom>
-            <a:noFill/>
-          </p:spPr>
-          <p:txBody>
-            <a:bodyPr wrap="square">
-              <a:spAutoFit/>
-            </a:bodyPr>
-            <a:lstStyle/>
-            <a:p>
-              <a:pPr algn="ctr"/>
-              <a:r>
-                <a:rPr lang="en-US" sz="1400" dirty="0">
-                  <a:solidFill>
-                    <a:schemeClr val="tx1"/>
-                  </a:solidFill>
-                  <a:latin typeface="Times New Roman" panose="02020603050405020304" pitchFamily="18" charset="0"/>
-                  <a:cs typeface="Times New Roman" panose="02020603050405020304" pitchFamily="18" charset="0"/>
-                </a:rPr>
-                <a:t>RF Simulator</a:t>
-              </a:r>
-              <a:endParaRPr lang="en-US" sz="1400" dirty="0">
-                <a:latin typeface="Times New Roman" panose="02020603050405020304" pitchFamily="18" charset="0"/>
-                <a:cs typeface="Times New Roman" panose="02020603050405020304" pitchFamily="18" charset="0"/>
-              </a:endParaRPr>
-            </a:p>
-          </p:txBody>
-        </p:sp>
-        <p:sp>
-          <p:nvSpPr>
-            <p:cNvPr id="192" name="TextBox 191">
-              <a:extLst>
-                <a:ext uri="{FF2B5EF4-FFF2-40B4-BE49-F238E27FC236}">
-                  <a16:creationId xmlns:a16="http://schemas.microsoft.com/office/drawing/2014/main" id="{E6E33893-429F-F317-B564-C4D037064D7E}"/>
-                </a:ext>
-              </a:extLst>
-            </p:cNvPr>
-            <p:cNvSpPr txBox="1"/>
-            <p:nvPr/>
-          </p:nvSpPr>
-          <p:spPr>
-            <a:xfrm>
-              <a:off x="4580556" y="4493583"/>
-              <a:ext cx="2239249" cy="307777"/>
-            </a:xfrm>
-            <a:prstGeom prst="rect">
-              <a:avLst/>
-            </a:prstGeom>
-            <a:noFill/>
-          </p:spPr>
-          <p:txBody>
-            <a:bodyPr wrap="square">
-              <a:spAutoFit/>
-            </a:bodyPr>
-            <a:lstStyle/>
-            <a:p>
-              <a:pPr algn="ctr"/>
-              <a:r>
-                <a:rPr lang="en-US" sz="1400" b="1" dirty="0">
-                  <a:solidFill>
-                    <a:schemeClr val="tx1"/>
-                  </a:solidFill>
-                  <a:latin typeface="Times New Roman" panose="02020603050405020304" pitchFamily="18" charset="0"/>
-                  <a:cs typeface="Times New Roman" panose="02020603050405020304" pitchFamily="18" charset="0"/>
-                </a:rPr>
-                <a:t>Next Generation Node B</a:t>
-              </a:r>
-              <a:endParaRPr lang="en-US" sz="1400" b="1" dirty="0">
-                <a:latin typeface="Times New Roman" panose="02020603050405020304" pitchFamily="18" charset="0"/>
-                <a:cs typeface="Times New Roman" panose="02020603050405020304" pitchFamily="18" charset="0"/>
-              </a:endParaRPr>
-            </a:p>
-          </p:txBody>
-        </p:sp>
-      </p:grpSp>
-      <p:grpSp>
-        <p:nvGrpSpPr>
-          <p:cNvPr id="22" name="Group 21">
-            <a:extLst>
-              <a:ext uri="{FF2B5EF4-FFF2-40B4-BE49-F238E27FC236}">
-                <a16:creationId xmlns:a16="http://schemas.microsoft.com/office/drawing/2014/main" id="{753784BD-0F53-3A78-9BF8-4EDBA6EF7876}"/>
-              </a:ext>
-            </a:extLst>
-          </p:cNvPr>
-          <p:cNvGrpSpPr/>
-          <p:nvPr/>
-        </p:nvGrpSpPr>
-        <p:grpSpPr>
-          <a:xfrm>
-            <a:off x="8946149" y="2752413"/>
-            <a:ext cx="2263961" cy="1844033"/>
-            <a:chOff x="3916949" y="3691197"/>
-            <a:chExt cx="2263961" cy="1844033"/>
-          </a:xfrm>
-        </p:grpSpPr>
-        <p:sp>
-          <p:nvSpPr>
-            <p:cNvPr id="210" name="Rectangle: Rounded Corners 209">
-              <a:extLst>
-                <a:ext uri="{FF2B5EF4-FFF2-40B4-BE49-F238E27FC236}">
-                  <a16:creationId xmlns:a16="http://schemas.microsoft.com/office/drawing/2014/main" id="{70ADBDF1-D32C-AE54-601E-E1D8D6CDE9CC}"/>
-                </a:ext>
-              </a:extLst>
-            </p:cNvPr>
-            <p:cNvSpPr/>
-            <p:nvPr/>
-          </p:nvSpPr>
-          <p:spPr>
-            <a:xfrm>
-              <a:off x="3916949" y="3692460"/>
-              <a:ext cx="2239249" cy="1531642"/>
-            </a:xfrm>
-            <a:prstGeom prst="roundRect">
-              <a:avLst>
-                <a:gd name="adj" fmla="val 5859"/>
-              </a:avLst>
-            </a:prstGeom>
-            <a:solidFill>
-              <a:schemeClr val="bg1">
-                <a:lumMod val="85000"/>
-              </a:schemeClr>
-            </a:solidFill>
-            <a:ln w="28575">
-              <a:noFill/>
-            </a:ln>
-          </p:spPr>
-          <p:style>
-            <a:lnRef idx="2">
-              <a:schemeClr val="accent1">
-                <a:shade val="15000"/>
-              </a:schemeClr>
-            </a:lnRef>
-            <a:fillRef idx="1">
-              <a:schemeClr val="accent1"/>
-            </a:fillRef>
-            <a:effectRef idx="0">
-              <a:schemeClr val="accent1"/>
-            </a:effectRef>
-            <a:fontRef idx="minor">
-              <a:schemeClr val="lt1"/>
-            </a:fontRef>
-          </p:style>
-          <p:txBody>
-            <a:bodyPr rtlCol="0" anchor="ctr"/>
-            <a:lstStyle/>
-            <a:p>
-              <a:pPr algn="ctr"/>
-              <a:endParaRPr lang="en-US" dirty="0">
-                <a:latin typeface="Times New Roman" panose="02020603050405020304" pitchFamily="18" charset="0"/>
-                <a:cs typeface="Times New Roman" panose="02020603050405020304" pitchFamily="18" charset="0"/>
-              </a:endParaRPr>
-            </a:p>
-          </p:txBody>
-        </p:sp>
-        <p:sp>
-          <p:nvSpPr>
-            <p:cNvPr id="195" name="Rectangle: Top Corners Rounded 194">
-              <a:extLst>
-                <a:ext uri="{FF2B5EF4-FFF2-40B4-BE49-F238E27FC236}">
-                  <a16:creationId xmlns:a16="http://schemas.microsoft.com/office/drawing/2014/main" id="{49EE529D-3822-3C34-2FCF-96301FCBDE2B}"/>
-                </a:ext>
-              </a:extLst>
-            </p:cNvPr>
-            <p:cNvSpPr/>
-            <p:nvPr/>
-          </p:nvSpPr>
-          <p:spPr>
-            <a:xfrm rot="10800000">
-              <a:off x="3916952" y="4613172"/>
-              <a:ext cx="2239248" cy="323588"/>
-            </a:xfrm>
-            <a:prstGeom prst="round2SameRect">
-              <a:avLst>
-                <a:gd name="adj1" fmla="val 28890"/>
-                <a:gd name="adj2" fmla="val 0"/>
-              </a:avLst>
-            </a:prstGeom>
-            <a:solidFill>
-              <a:srgbClr val="F2F2F2"/>
-            </a:solidFill>
-            <a:ln>
-              <a:noFill/>
-            </a:ln>
-          </p:spPr>
-          <p:style>
-            <a:lnRef idx="2">
-              <a:schemeClr val="accent1">
-                <a:shade val="15000"/>
-              </a:schemeClr>
-            </a:lnRef>
-            <a:fillRef idx="1">
-              <a:schemeClr val="accent1"/>
-            </a:fillRef>
-            <a:effectRef idx="0">
-              <a:schemeClr val="accent1"/>
-            </a:effectRef>
-            <a:fontRef idx="minor">
-              <a:schemeClr val="lt1"/>
-            </a:fontRef>
-          </p:style>
-          <p:txBody>
-            <a:bodyPr rtlCol="0" anchor="ctr"/>
-            <a:lstStyle/>
-            <a:p>
-              <a:pPr algn="ctr"/>
-              <a:endParaRPr lang="en-US"/>
-            </a:p>
-          </p:txBody>
-        </p:sp>
-        <p:sp>
-          <p:nvSpPr>
-            <p:cNvPr id="197" name="Rectangle 196">
-              <a:extLst>
-                <a:ext uri="{FF2B5EF4-FFF2-40B4-BE49-F238E27FC236}">
-                  <a16:creationId xmlns:a16="http://schemas.microsoft.com/office/drawing/2014/main" id="{9D8422CA-4FF5-7187-2D0D-ADC45EB74032}"/>
-                </a:ext>
-              </a:extLst>
-            </p:cNvPr>
-            <p:cNvSpPr/>
-            <p:nvPr/>
-          </p:nvSpPr>
-          <p:spPr>
-            <a:xfrm>
-              <a:off x="3916951" y="3990559"/>
-              <a:ext cx="2239249" cy="323587"/>
-            </a:xfrm>
-            <a:prstGeom prst="rect">
-              <a:avLst/>
-            </a:prstGeom>
-            <a:solidFill>
-              <a:schemeClr val="bg1">
-                <a:lumMod val="95000"/>
-              </a:schemeClr>
-            </a:solidFill>
-            <a:ln>
-              <a:noFill/>
-            </a:ln>
-          </p:spPr>
-          <p:style>
-            <a:lnRef idx="2">
-              <a:schemeClr val="accent1">
-                <a:shade val="15000"/>
-              </a:schemeClr>
-            </a:lnRef>
-            <a:fillRef idx="1">
-              <a:schemeClr val="accent1"/>
-            </a:fillRef>
-            <a:effectRef idx="0">
-              <a:schemeClr val="accent1"/>
-            </a:effectRef>
-            <a:fontRef idx="minor">
-              <a:schemeClr val="lt1"/>
-            </a:fontRef>
-          </p:style>
-          <p:txBody>
-            <a:bodyPr rtlCol="0" anchor="ctr"/>
-            <a:lstStyle/>
-            <a:p>
-              <a:pPr algn="ctr"/>
-              <a:endParaRPr lang="en-US"/>
-            </a:p>
-          </p:txBody>
-        </p:sp>
-        <p:sp>
-          <p:nvSpPr>
-            <p:cNvPr id="199" name="TextBox 198">
-              <a:extLst>
-                <a:ext uri="{FF2B5EF4-FFF2-40B4-BE49-F238E27FC236}">
-                  <a16:creationId xmlns:a16="http://schemas.microsoft.com/office/drawing/2014/main" id="{9F8EDD21-A0C6-EE8F-DB27-D2CD5236A366}"/>
-                </a:ext>
-              </a:extLst>
-            </p:cNvPr>
-            <p:cNvSpPr txBox="1"/>
-            <p:nvPr/>
-          </p:nvSpPr>
-          <p:spPr>
-            <a:xfrm>
-              <a:off x="3988167" y="4313625"/>
-              <a:ext cx="2096816" cy="307777"/>
-            </a:xfrm>
-            <a:prstGeom prst="rect">
-              <a:avLst/>
-            </a:prstGeom>
-            <a:noFill/>
-          </p:spPr>
-          <p:txBody>
-            <a:bodyPr wrap="square">
-              <a:spAutoFit/>
-            </a:bodyPr>
-            <a:lstStyle/>
-            <a:p>
-              <a:pPr algn="ctr"/>
-              <a:r>
-                <a:rPr lang="en-US" sz="1400" dirty="0" err="1">
-                  <a:latin typeface="Times New Roman" panose="02020603050405020304" pitchFamily="18" charset="0"/>
-                  <a:cs typeface="Times New Roman" panose="02020603050405020304" pitchFamily="18" charset="0"/>
-                </a:rPr>
-                <a:t>ZeroMQ</a:t>
-              </a:r>
-              <a:endParaRPr lang="en-US" sz="1400" dirty="0">
-                <a:latin typeface="Times New Roman" panose="02020603050405020304" pitchFamily="18" charset="0"/>
-                <a:cs typeface="Times New Roman" panose="02020603050405020304" pitchFamily="18" charset="0"/>
-              </a:endParaRPr>
-            </a:p>
-          </p:txBody>
-        </p:sp>
-        <p:sp>
-          <p:nvSpPr>
-            <p:cNvPr id="200" name="TextBox 199">
-              <a:extLst>
-                <a:ext uri="{FF2B5EF4-FFF2-40B4-BE49-F238E27FC236}">
-                  <a16:creationId xmlns:a16="http://schemas.microsoft.com/office/drawing/2014/main" id="{F4E12DF1-F6ED-9A1D-33B3-ACB6D007555A}"/>
-                </a:ext>
-              </a:extLst>
-            </p:cNvPr>
-            <p:cNvSpPr txBox="1"/>
-            <p:nvPr/>
-          </p:nvSpPr>
-          <p:spPr>
-            <a:xfrm>
-              <a:off x="3988167" y="4007963"/>
-              <a:ext cx="2096816" cy="307777"/>
-            </a:xfrm>
-            <a:prstGeom prst="rect">
-              <a:avLst/>
-            </a:prstGeom>
-            <a:noFill/>
-          </p:spPr>
-          <p:txBody>
-            <a:bodyPr wrap="square">
-              <a:spAutoFit/>
-            </a:bodyPr>
-            <a:lstStyle/>
-            <a:p>
-              <a:pPr algn="ctr"/>
-              <a:r>
-                <a:rPr lang="en-US" sz="1400" dirty="0">
-                  <a:latin typeface="Times New Roman" panose="02020603050405020304" pitchFamily="18" charset="0"/>
-                  <a:cs typeface="Times New Roman" panose="02020603050405020304" pitchFamily="18" charset="0"/>
-                </a:rPr>
-                <a:t>OAI RF Simulator</a:t>
-              </a:r>
-            </a:p>
-          </p:txBody>
-        </p:sp>
-        <p:sp>
-          <p:nvSpPr>
-            <p:cNvPr id="201" name="TextBox 200">
-              <a:extLst>
-                <a:ext uri="{FF2B5EF4-FFF2-40B4-BE49-F238E27FC236}">
-                  <a16:creationId xmlns:a16="http://schemas.microsoft.com/office/drawing/2014/main" id="{0E36D728-D080-9470-0E71-4C5261DE33FD}"/>
-                </a:ext>
-              </a:extLst>
-            </p:cNvPr>
-            <p:cNvSpPr txBox="1"/>
-            <p:nvPr/>
-          </p:nvSpPr>
-          <p:spPr>
-            <a:xfrm>
-              <a:off x="3988166" y="3702301"/>
-              <a:ext cx="2096818" cy="307777"/>
-            </a:xfrm>
-            <a:prstGeom prst="rect">
-              <a:avLst/>
-            </a:prstGeom>
-            <a:noFill/>
-          </p:spPr>
-          <p:txBody>
-            <a:bodyPr wrap="square">
-              <a:spAutoFit/>
-            </a:bodyPr>
-            <a:lstStyle/>
-            <a:p>
-              <a:pPr algn="ctr"/>
-              <a:r>
-                <a:rPr lang="en-US" sz="1400" dirty="0">
-                  <a:latin typeface="Times New Roman" panose="02020603050405020304" pitchFamily="18" charset="0"/>
-                  <a:cs typeface="Times New Roman" panose="02020603050405020304" pitchFamily="18" charset="0"/>
-                </a:rPr>
-                <a:t>srsRAN_4G</a:t>
-              </a:r>
-            </a:p>
-          </p:txBody>
-        </p:sp>
-        <p:sp>
-          <p:nvSpPr>
-            <p:cNvPr id="202" name="TextBox 201">
-              <a:extLst>
-                <a:ext uri="{FF2B5EF4-FFF2-40B4-BE49-F238E27FC236}">
-                  <a16:creationId xmlns:a16="http://schemas.microsoft.com/office/drawing/2014/main" id="{16FB98B6-AA11-EA1B-485F-18B0C2E0C573}"/>
-                </a:ext>
-              </a:extLst>
-            </p:cNvPr>
-            <p:cNvSpPr txBox="1"/>
-            <p:nvPr/>
-          </p:nvSpPr>
-          <p:spPr>
-            <a:xfrm>
-              <a:off x="3988167" y="4924949"/>
-              <a:ext cx="2096816" cy="307777"/>
-            </a:xfrm>
-            <a:prstGeom prst="rect">
-              <a:avLst/>
-            </a:prstGeom>
-            <a:noFill/>
-          </p:spPr>
-          <p:txBody>
-            <a:bodyPr wrap="square">
-              <a:spAutoFit/>
-            </a:bodyPr>
-            <a:lstStyle/>
-            <a:p>
-              <a:pPr algn="ctr"/>
-              <a:r>
-                <a:rPr lang="en-US" sz="1400" dirty="0">
-                  <a:solidFill>
-                    <a:schemeClr val="tx1"/>
-                  </a:solidFill>
-                  <a:latin typeface="Times New Roman" panose="02020603050405020304" pitchFamily="18" charset="0"/>
-                  <a:cs typeface="Times New Roman" panose="02020603050405020304" pitchFamily="18" charset="0"/>
-                </a:rPr>
-                <a:t>RF Simulator</a:t>
-              </a:r>
-              <a:endParaRPr lang="en-US" sz="1400" dirty="0">
-                <a:latin typeface="Times New Roman" panose="02020603050405020304" pitchFamily="18" charset="0"/>
-                <a:cs typeface="Times New Roman" panose="02020603050405020304" pitchFamily="18" charset="0"/>
-              </a:endParaRPr>
-            </a:p>
-          </p:txBody>
-        </p:sp>
-        <p:sp>
-          <p:nvSpPr>
-            <p:cNvPr id="203" name="TextBox 202">
-              <a:extLst>
-                <a:ext uri="{FF2B5EF4-FFF2-40B4-BE49-F238E27FC236}">
-                  <a16:creationId xmlns:a16="http://schemas.microsoft.com/office/drawing/2014/main" id="{2BC8A388-630D-2F0A-E362-E58FB4DE4B4B}"/>
-                </a:ext>
-              </a:extLst>
-            </p:cNvPr>
-            <p:cNvSpPr txBox="1"/>
-            <p:nvPr/>
-          </p:nvSpPr>
-          <p:spPr>
-            <a:xfrm>
-              <a:off x="3941661" y="5227453"/>
-              <a:ext cx="2239249" cy="307777"/>
-            </a:xfrm>
-            <a:prstGeom prst="rect">
-              <a:avLst/>
-            </a:prstGeom>
-            <a:noFill/>
-          </p:spPr>
-          <p:txBody>
-            <a:bodyPr wrap="square">
-              <a:spAutoFit/>
-            </a:bodyPr>
-            <a:lstStyle/>
-            <a:p>
-              <a:pPr algn="ctr"/>
-              <a:r>
-                <a:rPr lang="en-US" sz="1400" b="1" dirty="0">
-                  <a:solidFill>
-                    <a:schemeClr val="tx1"/>
-                  </a:solidFill>
-                  <a:latin typeface="Times New Roman" panose="02020603050405020304" pitchFamily="18" charset="0"/>
-                  <a:cs typeface="Times New Roman" panose="02020603050405020304" pitchFamily="18" charset="0"/>
-                </a:rPr>
-                <a:t>User Equipment</a:t>
-              </a:r>
-              <a:endParaRPr lang="en-US" sz="1400" b="1" dirty="0">
-                <a:latin typeface="Times New Roman" panose="02020603050405020304" pitchFamily="18" charset="0"/>
-                <a:cs typeface="Times New Roman" panose="02020603050405020304" pitchFamily="18" charset="0"/>
-              </a:endParaRPr>
-            </a:p>
-          </p:txBody>
-        </p:sp>
-        <p:sp>
-          <p:nvSpPr>
-            <p:cNvPr id="208" name="Rectangle 207">
-              <a:extLst>
-                <a:ext uri="{FF2B5EF4-FFF2-40B4-BE49-F238E27FC236}">
-                  <a16:creationId xmlns:a16="http://schemas.microsoft.com/office/drawing/2014/main" id="{212011C4-EBF3-EB29-D80C-BEAECBCA7B62}"/>
-                </a:ext>
-              </a:extLst>
-            </p:cNvPr>
-            <p:cNvSpPr/>
-            <p:nvPr/>
-          </p:nvSpPr>
-          <p:spPr>
-            <a:xfrm>
-              <a:off x="3916950" y="4615547"/>
-              <a:ext cx="2239249" cy="323587"/>
-            </a:xfrm>
-            <a:prstGeom prst="rect">
-              <a:avLst/>
-            </a:prstGeom>
-            <a:solidFill>
-              <a:schemeClr val="bg1">
-                <a:lumMod val="95000"/>
-              </a:schemeClr>
-            </a:solidFill>
-            <a:ln>
-              <a:noFill/>
-            </a:ln>
-          </p:spPr>
-          <p:style>
-            <a:lnRef idx="2">
-              <a:schemeClr val="accent1">
-                <a:shade val="15000"/>
-              </a:schemeClr>
-            </a:lnRef>
-            <a:fillRef idx="1">
-              <a:schemeClr val="accent1"/>
-            </a:fillRef>
-            <a:effectRef idx="0">
-              <a:schemeClr val="accent1"/>
-            </a:effectRef>
-            <a:fontRef idx="minor">
-              <a:schemeClr val="lt1"/>
-            </a:fontRef>
-          </p:style>
-          <p:txBody>
-            <a:bodyPr rtlCol="0" anchor="ctr"/>
-            <a:lstStyle/>
-            <a:p>
-              <a:pPr algn="ctr"/>
-              <a:endParaRPr lang="en-US"/>
-            </a:p>
-          </p:txBody>
-        </p:sp>
-        <p:sp>
-          <p:nvSpPr>
-            <p:cNvPr id="209" name="TextBox 208">
-              <a:extLst>
-                <a:ext uri="{FF2B5EF4-FFF2-40B4-BE49-F238E27FC236}">
-                  <a16:creationId xmlns:a16="http://schemas.microsoft.com/office/drawing/2014/main" id="{84E8EFF1-03BE-6A27-CF24-939A0A21B022}"/>
-                </a:ext>
-              </a:extLst>
-            </p:cNvPr>
-            <p:cNvSpPr txBox="1"/>
-            <p:nvPr/>
-          </p:nvSpPr>
-          <p:spPr>
-            <a:xfrm>
-              <a:off x="3988167" y="4619287"/>
-              <a:ext cx="2096816" cy="307777"/>
-            </a:xfrm>
-            <a:prstGeom prst="rect">
-              <a:avLst/>
-            </a:prstGeom>
-            <a:noFill/>
-          </p:spPr>
-          <p:txBody>
-            <a:bodyPr wrap="square">
-              <a:spAutoFit/>
-            </a:bodyPr>
-            <a:lstStyle/>
-            <a:p>
-              <a:pPr algn="ctr"/>
-              <a:r>
-                <a:rPr lang="en-US" sz="1400" dirty="0">
-                  <a:latin typeface="Times New Roman" panose="02020603050405020304" pitchFamily="18" charset="0"/>
-                  <a:cs typeface="Times New Roman" panose="02020603050405020304" pitchFamily="18" charset="0"/>
-                </a:rPr>
-                <a:t>OAI RF Simulator</a:t>
-              </a:r>
-            </a:p>
-          </p:txBody>
-        </p:sp>
-        <p:sp>
-          <p:nvSpPr>
-            <p:cNvPr id="198" name="Rectangle: Rounded Corners 197">
-              <a:extLst>
-                <a:ext uri="{FF2B5EF4-FFF2-40B4-BE49-F238E27FC236}">
-                  <a16:creationId xmlns:a16="http://schemas.microsoft.com/office/drawing/2014/main" id="{4F21D880-AC22-436C-BBFD-41B6AC956B7F}"/>
-                </a:ext>
-              </a:extLst>
-            </p:cNvPr>
-            <p:cNvSpPr/>
-            <p:nvPr/>
-          </p:nvSpPr>
-          <p:spPr>
-            <a:xfrm>
-              <a:off x="3916951" y="3691197"/>
-              <a:ext cx="2239249" cy="1534218"/>
-            </a:xfrm>
-            <a:prstGeom prst="roundRect">
-              <a:avLst>
-                <a:gd name="adj" fmla="val 5819"/>
-              </a:avLst>
-            </a:prstGeom>
-            <a:noFill/>
-            <a:ln w="28575">
-              <a:solidFill>
-                <a:schemeClr val="tx1"/>
-              </a:solidFill>
-            </a:ln>
-          </p:spPr>
-          <p:style>
-            <a:lnRef idx="2">
-              <a:schemeClr val="accent1">
-                <a:shade val="15000"/>
-              </a:schemeClr>
-            </a:lnRef>
-            <a:fillRef idx="1">
-              <a:schemeClr val="accent1"/>
-            </a:fillRef>
-            <a:effectRef idx="0">
-              <a:schemeClr val="accent1"/>
-            </a:effectRef>
-            <a:fontRef idx="minor">
-              <a:schemeClr val="lt1"/>
-            </a:fontRef>
-          </p:style>
-          <p:txBody>
-            <a:bodyPr rtlCol="0" anchor="ctr"/>
-            <a:lstStyle/>
-            <a:p>
-              <a:pPr algn="ctr"/>
-              <a:endParaRPr lang="en-US" dirty="0">
-                <a:latin typeface="Times New Roman" panose="02020603050405020304" pitchFamily="18" charset="0"/>
-                <a:cs typeface="Times New Roman" panose="02020603050405020304" pitchFamily="18" charset="0"/>
-              </a:endParaRPr>
-            </a:p>
-          </p:txBody>
-        </p:sp>
-      </p:grpSp>
-      <p:grpSp>
-        <p:nvGrpSpPr>
-          <p:cNvPr id="12" name="Group 11">
-            <a:extLst>
-              <a:ext uri="{FF2B5EF4-FFF2-40B4-BE49-F238E27FC236}">
-                <a16:creationId xmlns:a16="http://schemas.microsoft.com/office/drawing/2014/main" id="{C49EF465-001C-7783-5F6C-57A25CF61BB4}"/>
-              </a:ext>
-            </a:extLst>
-          </p:cNvPr>
-          <p:cNvGrpSpPr/>
-          <p:nvPr/>
-        </p:nvGrpSpPr>
-        <p:grpSpPr>
-          <a:xfrm>
-            <a:off x="2854729" y="476549"/>
-            <a:ext cx="2283381" cy="618690"/>
-            <a:chOff x="4021891" y="2194877"/>
-            <a:chExt cx="2283381" cy="618690"/>
-          </a:xfrm>
-        </p:grpSpPr>
-        <p:grpSp>
-          <p:nvGrpSpPr>
-            <p:cNvPr id="13" name="Group 12">
-              <a:extLst>
-                <a:ext uri="{FF2B5EF4-FFF2-40B4-BE49-F238E27FC236}">
-                  <a16:creationId xmlns:a16="http://schemas.microsoft.com/office/drawing/2014/main" id="{4C17C7CA-3D88-352F-013F-B179FDCA2E4C}"/>
-                </a:ext>
-              </a:extLst>
-            </p:cNvPr>
-            <p:cNvGrpSpPr/>
-            <p:nvPr/>
-          </p:nvGrpSpPr>
-          <p:grpSpPr>
-            <a:xfrm>
-              <a:off x="4021891" y="2194877"/>
-              <a:ext cx="2239249" cy="618690"/>
-              <a:chOff x="4021891" y="2194877"/>
-              <a:chExt cx="2239249" cy="618690"/>
-            </a:xfrm>
-          </p:grpSpPr>
-          <p:sp>
-            <p:nvSpPr>
-              <p:cNvPr id="18" name="Rectangle: Rounded Corners 17">
-                <a:extLst>
-                  <a:ext uri="{FF2B5EF4-FFF2-40B4-BE49-F238E27FC236}">
-                    <a16:creationId xmlns:a16="http://schemas.microsoft.com/office/drawing/2014/main" id="{C8F751A2-1FD4-CEF2-3A17-68FE14A70D80}"/>
-                  </a:ext>
-                </a:extLst>
-              </p:cNvPr>
-              <p:cNvSpPr/>
-              <p:nvPr/>
-            </p:nvSpPr>
-            <p:spPr>
-              <a:xfrm>
-                <a:off x="4021891" y="2194877"/>
-                <a:ext cx="2239249" cy="618689"/>
-              </a:xfrm>
-              <a:prstGeom prst="roundRect">
-                <a:avLst>
-                  <a:gd name="adj" fmla="val 12974"/>
-                </a:avLst>
-              </a:prstGeom>
-              <a:solidFill>
-                <a:schemeClr val="bg1">
-                  <a:lumMod val="85000"/>
-                </a:schemeClr>
-              </a:solidFill>
-              <a:ln w="28575">
-                <a:noFill/>
-              </a:ln>
-            </p:spPr>
-            <p:style>
-              <a:lnRef idx="2">
-                <a:schemeClr val="accent1">
-                  <a:shade val="15000"/>
-                </a:schemeClr>
-              </a:lnRef>
-              <a:fillRef idx="1">
-                <a:schemeClr val="accent1"/>
-              </a:fillRef>
-              <a:effectRef idx="0">
-                <a:schemeClr val="accent1"/>
-              </a:effectRef>
-              <a:fontRef idx="minor">
-                <a:schemeClr val="lt1"/>
-              </a:fontRef>
-            </p:style>
-            <p:txBody>
-              <a:bodyPr rtlCol="0" anchor="ctr"/>
-              <a:lstStyle/>
-              <a:p>
-                <a:pPr algn="ctr"/>
-                <a:endParaRPr lang="en-US" dirty="0">
-                  <a:latin typeface="Times New Roman" panose="02020603050405020304" pitchFamily="18" charset="0"/>
-                  <a:cs typeface="Times New Roman" panose="02020603050405020304" pitchFamily="18" charset="0"/>
-                </a:endParaRPr>
-              </a:p>
-            </p:txBody>
-          </p:sp>
-          <p:sp>
-            <p:nvSpPr>
-              <p:cNvPr id="19" name="Rectangle: Top Corners Rounded 18">
-                <a:extLst>
-                  <a:ext uri="{FF2B5EF4-FFF2-40B4-BE49-F238E27FC236}">
-                    <a16:creationId xmlns:a16="http://schemas.microsoft.com/office/drawing/2014/main" id="{6B20333F-70B2-82D0-0236-16367BE204FC}"/>
-                  </a:ext>
-                </a:extLst>
-              </p:cNvPr>
-              <p:cNvSpPr/>
-              <p:nvPr/>
-            </p:nvSpPr>
-            <p:spPr>
-              <a:xfrm flipV="1">
-                <a:off x="4022672" y="2504431"/>
-                <a:ext cx="2238468" cy="307778"/>
-              </a:xfrm>
-              <a:prstGeom prst="round2SameRect">
-                <a:avLst>
-                  <a:gd name="adj1" fmla="val 28674"/>
-                  <a:gd name="adj2" fmla="val 0"/>
-                </a:avLst>
-              </a:prstGeom>
-              <a:solidFill>
-                <a:schemeClr val="bg1">
-                  <a:lumMod val="95000"/>
-                </a:schemeClr>
-              </a:solidFill>
-              <a:ln>
-                <a:noFill/>
-              </a:ln>
-            </p:spPr>
-            <p:style>
-              <a:lnRef idx="2">
-                <a:schemeClr val="accent1">
-                  <a:shade val="15000"/>
-                </a:schemeClr>
-              </a:lnRef>
-              <a:fillRef idx="1">
-                <a:schemeClr val="accent1"/>
-              </a:fillRef>
-              <a:effectRef idx="0">
-                <a:schemeClr val="accent1"/>
-              </a:effectRef>
-              <a:fontRef idx="minor">
-                <a:schemeClr val="lt1"/>
-              </a:fontRef>
-            </p:style>
-            <p:txBody>
-              <a:bodyPr rtlCol="0" anchor="ctr"/>
-              <a:lstStyle/>
-              <a:p>
-                <a:pPr algn="ctr"/>
-                <a:endParaRPr lang="en-US"/>
-              </a:p>
-            </p:txBody>
-          </p:sp>
-          <p:sp>
-            <p:nvSpPr>
-              <p:cNvPr id="20" name="Rectangle: Rounded Corners 19">
-                <a:extLst>
-                  <a:ext uri="{FF2B5EF4-FFF2-40B4-BE49-F238E27FC236}">
-                    <a16:creationId xmlns:a16="http://schemas.microsoft.com/office/drawing/2014/main" id="{4935954C-C150-F87D-E950-5626530C6397}"/>
-                  </a:ext>
-                </a:extLst>
-              </p:cNvPr>
-              <p:cNvSpPr/>
-              <p:nvPr/>
-            </p:nvSpPr>
-            <p:spPr>
-              <a:xfrm>
-                <a:off x="4021891" y="2194878"/>
-                <a:ext cx="2239249" cy="618689"/>
-              </a:xfrm>
-              <a:prstGeom prst="roundRect">
-                <a:avLst>
-                  <a:gd name="adj" fmla="val 12974"/>
-                </a:avLst>
-              </a:prstGeom>
-              <a:noFill/>
-              <a:ln w="28575">
-                <a:solidFill>
-                  <a:schemeClr val="tx1"/>
-                </a:solidFill>
-              </a:ln>
-            </p:spPr>
-            <p:style>
-              <a:lnRef idx="2">
-                <a:schemeClr val="accent1">
-                  <a:shade val="15000"/>
-                </a:schemeClr>
-              </a:lnRef>
-              <a:fillRef idx="1">
-                <a:schemeClr val="accent1"/>
-              </a:fillRef>
-              <a:effectRef idx="0">
-                <a:schemeClr val="accent1"/>
-              </a:effectRef>
-              <a:fontRef idx="minor">
-                <a:schemeClr val="lt1"/>
-              </a:fontRef>
-            </p:style>
-            <p:txBody>
-              <a:bodyPr rtlCol="0" anchor="ctr"/>
-              <a:lstStyle/>
-              <a:p>
-                <a:pPr algn="ctr"/>
-                <a:endParaRPr lang="en-US" dirty="0">
-                  <a:latin typeface="Times New Roman" panose="02020603050405020304" pitchFamily="18" charset="0"/>
-                  <a:cs typeface="Times New Roman" panose="02020603050405020304" pitchFamily="18" charset="0"/>
-                </a:endParaRPr>
-              </a:p>
-            </p:txBody>
-          </p:sp>
-        </p:grpSp>
-        <p:sp>
-          <p:nvSpPr>
-            <p:cNvPr id="14" name="TextBox 13">
-              <a:extLst>
-                <a:ext uri="{FF2B5EF4-FFF2-40B4-BE49-F238E27FC236}">
-                  <a16:creationId xmlns:a16="http://schemas.microsoft.com/office/drawing/2014/main" id="{2B8321BA-AFD2-0D5A-A1EF-8F267B242282}"/>
-                </a:ext>
-              </a:extLst>
-            </p:cNvPr>
-            <p:cNvSpPr txBox="1"/>
-            <p:nvPr/>
-          </p:nvSpPr>
-          <p:spPr>
-            <a:xfrm>
-              <a:off x="4335869" y="2202843"/>
-              <a:ext cx="1969403" cy="206243"/>
-            </a:xfrm>
-            <a:prstGeom prst="rect">
-              <a:avLst/>
-            </a:prstGeom>
-            <a:noFill/>
-          </p:spPr>
-          <p:txBody>
-            <a:bodyPr wrap="square">
-              <a:spAutoFit/>
-            </a:bodyPr>
-            <a:lstStyle/>
-            <a:p>
-              <a:pPr algn="ctr"/>
-              <a:r>
-                <a:rPr lang="en-US" sz="1400" dirty="0">
-                  <a:solidFill>
-                    <a:schemeClr val="tx1"/>
-                  </a:solidFill>
-                  <a:latin typeface="Times New Roman" panose="02020603050405020304" pitchFamily="18" charset="0"/>
-                  <a:cs typeface="Times New Roman" panose="02020603050405020304" pitchFamily="18" charset="0"/>
-                </a:rPr>
-                <a:t>Software-Defined Radio</a:t>
-              </a:r>
-              <a:endParaRPr lang="en-US" sz="1400" dirty="0">
-                <a:latin typeface="Times New Roman" panose="02020603050405020304" pitchFamily="18" charset="0"/>
-                <a:cs typeface="Times New Roman" panose="02020603050405020304" pitchFamily="18" charset="0"/>
-              </a:endParaRPr>
-            </a:p>
-          </p:txBody>
-        </p:sp>
-        <p:pic>
-          <p:nvPicPr>
-            <p:cNvPr id="15" name="Graphic 14">
-              <a:extLst>
-                <a:ext uri="{FF2B5EF4-FFF2-40B4-BE49-F238E27FC236}">
-                  <a16:creationId xmlns:a16="http://schemas.microsoft.com/office/drawing/2014/main" id="{838E587D-7FC7-DCA8-A87C-348E0BC50496}"/>
-                </a:ext>
-              </a:extLst>
-            </p:cNvPr>
-            <p:cNvPicPr>
-              <a:picLocks noChangeAspect="1"/>
-            </p:cNvPicPr>
-            <p:nvPr/>
-          </p:nvPicPr>
-          <p:blipFill>
-            <a:blip r:embed="rId2">
-              <a:extLst>
-                <a:ext uri="{96DAC541-7B7A-43D3-8B79-37D633B846F1}">
-                  <asvg:svgBlip xmlns:asvg="http://schemas.microsoft.com/office/drawing/2016/SVG/main" r:embed="rId3"/>
-                </a:ext>
-              </a:extLst>
-            </a:blip>
-            <a:srcRect/>
-            <a:stretch/>
-          </p:blipFill>
-          <p:spPr>
-            <a:xfrm>
-              <a:off x="4134842" y="2215325"/>
-              <a:ext cx="289426" cy="289426"/>
-            </a:xfrm>
-            <a:prstGeom prst="rect">
-              <a:avLst/>
-            </a:prstGeom>
-          </p:spPr>
-        </p:pic>
-        <p:sp>
-          <p:nvSpPr>
-            <p:cNvPr id="16" name="TextBox 15">
-              <a:extLst>
-                <a:ext uri="{FF2B5EF4-FFF2-40B4-BE49-F238E27FC236}">
-                  <a16:creationId xmlns:a16="http://schemas.microsoft.com/office/drawing/2014/main" id="{89E10690-E616-98D7-E1BE-87ABD688169C}"/>
-                </a:ext>
-              </a:extLst>
-            </p:cNvPr>
-            <p:cNvSpPr txBox="1"/>
-            <p:nvPr/>
-          </p:nvSpPr>
-          <p:spPr>
-            <a:xfrm>
-              <a:off x="4335869" y="2505790"/>
-              <a:ext cx="1969403" cy="307777"/>
-            </a:xfrm>
-            <a:prstGeom prst="rect">
-              <a:avLst/>
-            </a:prstGeom>
-            <a:noFill/>
-          </p:spPr>
-          <p:txBody>
-            <a:bodyPr wrap="square">
-              <a:spAutoFit/>
-            </a:bodyPr>
-            <a:lstStyle/>
-            <a:p>
-              <a:pPr algn="ctr"/>
-              <a:r>
-                <a:rPr lang="en-US" sz="1400" dirty="0">
-                  <a:solidFill>
-                    <a:schemeClr val="tx1"/>
-                  </a:solidFill>
-                  <a:latin typeface="Times New Roman" panose="02020603050405020304" pitchFamily="18" charset="0"/>
-                  <a:cs typeface="Times New Roman" panose="02020603050405020304" pitchFamily="18" charset="0"/>
-                </a:rPr>
-                <a:t>RF Simulator / </a:t>
-              </a:r>
-              <a:r>
-                <a:rPr lang="en-US" sz="1400" dirty="0" err="1">
-                  <a:solidFill>
-                    <a:schemeClr val="tx1"/>
-                  </a:solidFill>
-                  <a:latin typeface="Times New Roman" panose="02020603050405020304" pitchFamily="18" charset="0"/>
-                  <a:cs typeface="Times New Roman" panose="02020603050405020304" pitchFamily="18" charset="0"/>
-                </a:rPr>
-                <a:t>ZeroMQ</a:t>
-              </a:r>
-              <a:endParaRPr lang="en-US" sz="1400" dirty="0">
-                <a:latin typeface="Times New Roman" panose="02020603050405020304" pitchFamily="18" charset="0"/>
-                <a:cs typeface="Times New Roman" panose="02020603050405020304" pitchFamily="18" charset="0"/>
-              </a:endParaRPr>
-            </a:p>
-          </p:txBody>
-        </p:sp>
-        <p:pic>
-          <p:nvPicPr>
-            <p:cNvPr id="17" name="Graphic 16">
-              <a:extLst>
-                <a:ext uri="{FF2B5EF4-FFF2-40B4-BE49-F238E27FC236}">
-                  <a16:creationId xmlns:a16="http://schemas.microsoft.com/office/drawing/2014/main" id="{623624F3-1900-AB14-665C-2ED82DEB8D11}"/>
-                </a:ext>
-              </a:extLst>
-            </p:cNvPr>
-            <p:cNvPicPr>
-              <a:picLocks noChangeAspect="1"/>
-            </p:cNvPicPr>
-            <p:nvPr/>
-          </p:nvPicPr>
-          <p:blipFill>
-            <a:blip r:embed="rId4">
-              <a:extLst>
-                <a:ext uri="{96DAC541-7B7A-43D3-8B79-37D633B846F1}">
-                  <asvg:svgBlip xmlns:asvg="http://schemas.microsoft.com/office/drawing/2016/SVG/main" r:embed="rId5"/>
-                </a:ext>
-              </a:extLst>
-            </a:blip>
-            <a:srcRect/>
-            <a:stretch/>
-          </p:blipFill>
-          <p:spPr>
-            <a:xfrm>
-              <a:off x="4167277" y="2528018"/>
-              <a:ext cx="256990" cy="256990"/>
-            </a:xfrm>
-            <a:prstGeom prst="rect">
-              <a:avLst/>
-            </a:prstGeom>
-          </p:spPr>
-        </p:pic>
-      </p:grpSp>
-      <p:sp>
-        <p:nvSpPr>
-          <p:cNvPr id="3" name="TextBox 2">
-            <a:extLst>
-              <a:ext uri="{FF2B5EF4-FFF2-40B4-BE49-F238E27FC236}">
-                <a16:creationId xmlns:a16="http://schemas.microsoft.com/office/drawing/2014/main" id="{3A6B4BEF-4393-C342-1C07-D6E23E30CC41}"/>
-              </a:ext>
-            </a:extLst>
-          </p:cNvPr>
-          <p:cNvSpPr txBox="1"/>
-          <p:nvPr/>
-        </p:nvSpPr>
-        <p:spPr>
-          <a:xfrm>
-            <a:off x="2049861" y="4285318"/>
-            <a:ext cx="4092531" cy="369332"/>
-          </a:xfrm>
-          <a:prstGeom prst="rect">
-            <a:avLst/>
-          </a:prstGeom>
-          <a:noFill/>
-        </p:spPr>
-        <p:txBody>
-          <a:bodyPr wrap="none" rtlCol="0">
-            <a:spAutoFit/>
-          </a:bodyPr>
-          <a:lstStyle/>
-          <a:p>
-            <a:r>
-              <a:rPr lang="en-US" dirty="0">
-                <a:highlight>
-                  <a:srgbClr val="FFFF00"/>
-                </a:highlight>
-              </a:rPr>
-              <a:t>[ Template objects for future diagrams ]</a:t>
-            </a:r>
-          </a:p>
-        </p:txBody>
-      </p:sp>
-    </p:spTree>
-    <p:extLst>
-      <p:ext uri="{BB962C8B-B14F-4D97-AF65-F5344CB8AC3E}">
-        <p14:creationId xmlns:p14="http://schemas.microsoft.com/office/powerpoint/2010/main" val="3201538529"/>
-      </p:ext>
-    </p:extLst>
-  </p:cSld>
-  <p:clrMapOvr>
-    <a:masterClrMapping/>
-  </p:clrMapOvr>
-</p:sld>
-</file>
-
-<file path=ppt/slides/slide6.xml><?xml version="1.0" encoding="utf-8"?>
-<p:sld xmlns:a="http://schemas.openxmlformats.org/drawingml/2006/main" xmlns:r="http://schemas.openxmlformats.org/officeDocument/2006/relationships" xmlns:p="http://schemas.openxmlformats.org/presentationml/2006/main">
-  <p:cSld>
-    <p:spTree>
-      <p:nvGrpSpPr>
-        <p:cNvPr id="1" name=""/>
-        <p:cNvGrpSpPr/>
-        <p:nvPr/>
-      </p:nvGrpSpPr>
-      <p:grpSpPr>
-        <a:xfrm>
-          <a:off x="0" y="0"/>
-          <a:ext cx="0" cy="0"/>
-          <a:chOff x="0" y="0"/>
-          <a:chExt cx="0" cy="0"/>
-        </a:xfrm>
-      </p:grpSpPr>
-      <p:pic>
-        <p:nvPicPr>
-          <p:cNvPr id="1026" name="Picture 2" descr="O-RAN gNB Overview — srsRAN Project documentation">
-            <a:extLst>
-              <a:ext uri="{FF2B5EF4-FFF2-40B4-BE49-F238E27FC236}">
-                <a16:creationId xmlns:a16="http://schemas.microsoft.com/office/drawing/2014/main" id="{A7394ECF-42BA-F193-3EA6-8F345F13FCF0}"/>
-              </a:ext>
-            </a:extLst>
-          </p:cNvPr>
-          <p:cNvPicPr>
-            <a:picLocks noChangeAspect="1" noChangeArrowheads="1"/>
-          </p:cNvPicPr>
-          <p:nvPr/>
-        </p:nvPicPr>
-        <p:blipFill rotWithShape="1">
-          <a:blip r:embed="rId2">
-            <a:extLst>
-              <a:ext uri="{28A0092B-C50C-407E-A947-70E740481C1C}">
-                <a14:useLocalDpi xmlns:a14="http://schemas.microsoft.com/office/drawing/2010/main" val="0"/>
-              </a:ext>
-            </a:extLst>
-          </a:blip>
-          <a:srcRect t="70519"/>
-          <a:stretch/>
-        </p:blipFill>
-        <p:spPr bwMode="auto">
-          <a:xfrm>
-            <a:off x="4905375" y="228842"/>
-            <a:ext cx="7186484" cy="1147133"/>
-          </a:xfrm>
-          <a:prstGeom prst="rect">
-            <a:avLst/>
-          </a:prstGeom>
-          <a:noFill/>
-          <a:extLst>
-            <a:ext uri="{909E8E84-426E-40DD-AFC4-6F175D3DCCD1}">
-              <a14:hiddenFill xmlns:a14="http://schemas.microsoft.com/office/drawing/2010/main">
-                <a:solidFill>
-                  <a:srgbClr val="FFFFFF"/>
-                </a:solidFill>
-              </a14:hiddenFill>
-            </a:ext>
-          </a:extLst>
-        </p:spPr>
-      </p:pic>
-      <p:pic>
-        <p:nvPicPr>
-          <p:cNvPr id="1028" name="Picture 4" descr="5G Overview">
-            <a:extLst>
-              <a:ext uri="{FF2B5EF4-FFF2-40B4-BE49-F238E27FC236}">
-                <a16:creationId xmlns:a16="http://schemas.microsoft.com/office/drawing/2014/main" id="{36465057-85AD-DA2B-2937-4F577F84577A}"/>
-              </a:ext>
-            </a:extLst>
-          </p:cNvPr>
-          <p:cNvPicPr>
-            <a:picLocks noChangeAspect="1" noChangeArrowheads="1"/>
-          </p:cNvPicPr>
-          <p:nvPr/>
-        </p:nvPicPr>
-        <p:blipFill>
-          <a:blip r:embed="rId3">
-            <a:extLst>
-              <a:ext uri="{28A0092B-C50C-407E-A947-70E740481C1C}">
-                <a14:useLocalDpi xmlns:a14="http://schemas.microsoft.com/office/drawing/2010/main" val="0"/>
-              </a:ext>
-            </a:extLst>
-          </a:blip>
-          <a:srcRect/>
-          <a:stretch>
-            <a:fillRect/>
-          </a:stretch>
-        </p:blipFill>
-        <p:spPr bwMode="auto">
-          <a:xfrm>
-            <a:off x="6969211" y="1595627"/>
-            <a:ext cx="4876800" cy="1647825"/>
-          </a:xfrm>
-          <a:prstGeom prst="rect">
-            <a:avLst/>
-          </a:prstGeom>
-          <a:noFill/>
-          <a:extLst>
-            <a:ext uri="{909E8E84-426E-40DD-AFC4-6F175D3DCCD1}">
-              <a14:hiddenFill xmlns:a14="http://schemas.microsoft.com/office/drawing/2010/main">
-                <a:solidFill>
-                  <a:srgbClr val="FFFFFF"/>
-                </a:solidFill>
-              </a14:hiddenFill>
-            </a:ext>
-          </a:extLst>
-        </p:spPr>
-      </p:pic>
-      <p:pic>
-        <p:nvPicPr>
-          <p:cNvPr id="1030" name="Picture 6" descr="5G Requirement: New Network Architecture | Smart Telecom Edu">
-            <a:extLst>
-              <a:ext uri="{FF2B5EF4-FFF2-40B4-BE49-F238E27FC236}">
-                <a16:creationId xmlns:a16="http://schemas.microsoft.com/office/drawing/2014/main" id="{08726F91-2B0F-0AF5-A3EE-44C77597D602}"/>
-              </a:ext>
-            </a:extLst>
-          </p:cNvPr>
-          <p:cNvPicPr>
-            <a:picLocks noChangeAspect="1" noChangeArrowheads="1"/>
-          </p:cNvPicPr>
-          <p:nvPr/>
-        </p:nvPicPr>
-        <p:blipFill>
-          <a:blip r:embed="rId4">
-            <a:extLst>
-              <a:ext uri="{28A0092B-C50C-407E-A947-70E740481C1C}">
-                <a14:useLocalDpi xmlns:a14="http://schemas.microsoft.com/office/drawing/2010/main" val="0"/>
-              </a:ext>
-            </a:extLst>
-          </a:blip>
-          <a:srcRect/>
-          <a:stretch>
-            <a:fillRect/>
-          </a:stretch>
-        </p:blipFill>
-        <p:spPr bwMode="auto">
-          <a:xfrm>
-            <a:off x="7091491" y="3771899"/>
-            <a:ext cx="4908658" cy="2606951"/>
-          </a:xfrm>
-          <a:prstGeom prst="rect">
-            <a:avLst/>
-          </a:prstGeom>
-          <a:noFill/>
-          <a:extLst>
-            <a:ext uri="{909E8E84-426E-40DD-AFC4-6F175D3DCCD1}">
-              <a14:hiddenFill xmlns:a14="http://schemas.microsoft.com/office/drawing/2010/main">
-                <a:solidFill>
-                  <a:srgbClr val="FFFFFF"/>
-                </a:solidFill>
-              </a14:hiddenFill>
-            </a:ext>
-          </a:extLst>
-        </p:spPr>
-      </p:pic>
-      <p:pic>
-        <p:nvPicPr>
-          <p:cNvPr id="1032" name="Picture 8" descr="5G Protocol Stack | LTEProtocol.com: Your Gateway to Wireless Excellence">
-            <a:extLst>
-              <a:ext uri="{FF2B5EF4-FFF2-40B4-BE49-F238E27FC236}">
-                <a16:creationId xmlns:a16="http://schemas.microsoft.com/office/drawing/2014/main" id="{6291FB33-293F-C88F-93BA-161477BAD4B8}"/>
-              </a:ext>
-            </a:extLst>
-          </p:cNvPr>
-          <p:cNvPicPr>
-            <a:picLocks noChangeAspect="1" noChangeArrowheads="1"/>
-          </p:cNvPicPr>
-          <p:nvPr/>
-        </p:nvPicPr>
-        <p:blipFill>
-          <a:blip r:embed="rId5">
-            <a:extLst>
-              <a:ext uri="{28A0092B-C50C-407E-A947-70E740481C1C}">
-                <a14:useLocalDpi xmlns:a14="http://schemas.microsoft.com/office/drawing/2010/main" val="0"/>
-              </a:ext>
-            </a:extLst>
-          </a:blip>
-          <a:srcRect/>
-          <a:stretch>
-            <a:fillRect/>
-          </a:stretch>
-        </p:blipFill>
-        <p:spPr bwMode="auto">
-          <a:xfrm>
-            <a:off x="100141" y="3620598"/>
-            <a:ext cx="6991350" cy="3171825"/>
-          </a:xfrm>
-          <a:prstGeom prst="rect">
-            <a:avLst/>
-          </a:prstGeom>
-          <a:noFill/>
-          <a:extLst>
-            <a:ext uri="{909E8E84-426E-40DD-AFC4-6F175D3DCCD1}">
-              <a14:hiddenFill xmlns:a14="http://schemas.microsoft.com/office/drawing/2010/main">
-                <a:solidFill>
-                  <a:srgbClr val="FFFFFF"/>
-                </a:solidFill>
-              </a14:hiddenFill>
-            </a:ext>
-          </a:extLst>
-        </p:spPr>
-      </p:pic>
-      <p:pic>
-        <p:nvPicPr>
-          <p:cNvPr id="9" name="Picture 8">
-            <a:extLst>
-              <a:ext uri="{FF2B5EF4-FFF2-40B4-BE49-F238E27FC236}">
-                <a16:creationId xmlns:a16="http://schemas.microsoft.com/office/drawing/2014/main" id="{CCB71D96-4F2C-919A-704A-46D0C3DA274C}"/>
-              </a:ext>
-            </a:extLst>
-          </p:cNvPr>
-          <p:cNvPicPr>
-            <a:picLocks noChangeAspect="1"/>
-          </p:cNvPicPr>
-          <p:nvPr/>
-        </p:nvPicPr>
-        <p:blipFill>
-          <a:blip r:embed="rId6"/>
-          <a:stretch>
-            <a:fillRect/>
-          </a:stretch>
-        </p:blipFill>
-        <p:spPr>
-          <a:xfrm>
-            <a:off x="345989" y="221000"/>
-            <a:ext cx="4414709" cy="3016402"/>
-          </a:xfrm>
-          <a:prstGeom prst="rect">
-            <a:avLst/>
-          </a:prstGeom>
-        </p:spPr>
-      </p:pic>
-    </p:spTree>
-    <p:extLst>
-      <p:ext uri="{BB962C8B-B14F-4D97-AF65-F5344CB8AC3E}">
-        <p14:creationId xmlns:p14="http://schemas.microsoft.com/office/powerpoint/2010/main" val="2257679150"/>
-      </p:ext>
-    </p:extLst>
-  </p:cSld>
-  <p:clrMapOvr>
-    <a:masterClrMapping/>
-  </p:clrMapOvr>
-</p:sld>
-</file>
-
-<file path=ppt/slides/slide7.xml><?xml version="1.0" encoding="utf-8"?>
-<p:sld xmlns:a="http://schemas.openxmlformats.org/drawingml/2006/main" xmlns:r="http://schemas.openxmlformats.org/officeDocument/2006/relationships" xmlns:p="http://schemas.openxmlformats.org/presentationml/2006/main">
-  <p:cSld>
-    <p:spTree>
-      <p:nvGrpSpPr>
-        <p:cNvPr id="1" name=""/>
-        <p:cNvGrpSpPr/>
-        <p:nvPr/>
-      </p:nvGrpSpPr>
-      <p:grpSpPr>
-        <a:xfrm>
-          <a:off x="0" y="0"/>
-          <a:ext cx="0" cy="0"/>
-          <a:chOff x="0" y="0"/>
-          <a:chExt cx="0" cy="0"/>
-        </a:xfrm>
-      </p:grpSpPr>
-      <p:grpSp>
-        <p:nvGrpSpPr>
-          <p:cNvPr id="37" name="Group 36">
-            <a:extLst>
-              <a:ext uri="{FF2B5EF4-FFF2-40B4-BE49-F238E27FC236}">
-                <a16:creationId xmlns:a16="http://schemas.microsoft.com/office/drawing/2014/main" id="{B6EB04C3-13B2-832D-461A-C07D80900EC3}"/>
-              </a:ext>
-            </a:extLst>
-          </p:cNvPr>
-          <p:cNvGrpSpPr/>
-          <p:nvPr/>
-        </p:nvGrpSpPr>
-        <p:grpSpPr>
-          <a:xfrm>
-            <a:off x="2974533" y="2575560"/>
-            <a:ext cx="6378008" cy="1706880"/>
-            <a:chOff x="2974533" y="2575560"/>
-            <a:chExt cx="6378008" cy="1706880"/>
-          </a:xfrm>
-        </p:grpSpPr>
-        <p:sp>
-          <p:nvSpPr>
-            <p:cNvPr id="5" name="Rectangle: Rounded Corners 4">
-              <a:extLst>
-                <a:ext uri="{FF2B5EF4-FFF2-40B4-BE49-F238E27FC236}">
-                  <a16:creationId xmlns:a16="http://schemas.microsoft.com/office/drawing/2014/main" id="{64A09B1F-0776-2D94-AECE-DE4BA0D19E8B}"/>
-                </a:ext>
-              </a:extLst>
-            </p:cNvPr>
-            <p:cNvSpPr/>
-            <p:nvPr/>
-          </p:nvSpPr>
-          <p:spPr>
-            <a:xfrm>
-              <a:off x="2974533" y="2575560"/>
-              <a:ext cx="6378008" cy="1706880"/>
-            </a:xfrm>
-            <a:prstGeom prst="roundRect">
-              <a:avLst>
-                <a:gd name="adj" fmla="val 4524"/>
-              </a:avLst>
-            </a:prstGeom>
-            <a:solidFill>
-              <a:srgbClr val="DBF0F9"/>
-            </a:solidFill>
-          </p:spPr>
-          <p:style>
-            <a:lnRef idx="2">
-              <a:schemeClr val="accent1">
-                <a:shade val="15000"/>
-              </a:schemeClr>
-            </a:lnRef>
-            <a:fillRef idx="1">
-              <a:schemeClr val="accent1"/>
-            </a:fillRef>
-            <a:effectRef idx="0">
-              <a:schemeClr val="accent1"/>
-            </a:effectRef>
-            <a:fontRef idx="minor">
-              <a:schemeClr val="lt1"/>
-            </a:fontRef>
-          </p:style>
-          <p:txBody>
-            <a:bodyPr rtlCol="0" anchor="ctr"/>
-            <a:lstStyle/>
-            <a:p>
-              <a:pPr algn="ctr"/>
-              <a:endParaRPr lang="en-US"/>
-            </a:p>
-          </p:txBody>
-        </p:sp>
-        <p:cxnSp>
-          <p:nvCxnSpPr>
-            <p:cNvPr id="7" name="Straight Connector 6">
-              <a:extLst>
-                <a:ext uri="{FF2B5EF4-FFF2-40B4-BE49-F238E27FC236}">
-                  <a16:creationId xmlns:a16="http://schemas.microsoft.com/office/drawing/2014/main" id="{07CD1992-B1F5-D85A-2142-4D52AA33E96E}"/>
-                </a:ext>
-              </a:extLst>
-            </p:cNvPr>
-            <p:cNvCxnSpPr>
-              <a:cxnSpLocks/>
-              <a:stCxn id="20" idx="1"/>
-              <a:endCxn id="24" idx="3"/>
-            </p:cNvCxnSpPr>
-            <p:nvPr/>
-          </p:nvCxnSpPr>
-          <p:spPr>
-            <a:xfrm flipH="1" flipV="1">
-              <a:off x="4745902" y="3437810"/>
-              <a:ext cx="749484" cy="659"/>
-            </a:xfrm>
-            <a:prstGeom prst="line">
-              <a:avLst/>
-            </a:prstGeom>
-          </p:spPr>
-          <p:style>
-            <a:lnRef idx="2">
-              <a:schemeClr val="dk1"/>
-            </a:lnRef>
-            <a:fillRef idx="0">
-              <a:schemeClr val="dk1"/>
-            </a:fillRef>
-            <a:effectRef idx="1">
-              <a:schemeClr val="dk1"/>
-            </a:effectRef>
-            <a:fontRef idx="minor">
-              <a:schemeClr val="tx1"/>
-            </a:fontRef>
-          </p:style>
-        </p:cxnSp>
-        <p:grpSp>
-          <p:nvGrpSpPr>
-            <p:cNvPr id="8" name="Group 7">
-              <a:extLst>
-                <a:ext uri="{FF2B5EF4-FFF2-40B4-BE49-F238E27FC236}">
-                  <a16:creationId xmlns:a16="http://schemas.microsoft.com/office/drawing/2014/main" id="{B02924FF-D488-1132-C790-2B9B96CF37D0}"/>
-                </a:ext>
-              </a:extLst>
-            </p:cNvPr>
-            <p:cNvGrpSpPr/>
-            <p:nvPr/>
-          </p:nvGrpSpPr>
-          <p:grpSpPr>
-            <a:xfrm>
-              <a:off x="3109608" y="2701524"/>
-              <a:ext cx="1702648" cy="1468106"/>
-              <a:chOff x="1451811" y="1299410"/>
-              <a:chExt cx="1702648" cy="1900989"/>
-            </a:xfrm>
-          </p:grpSpPr>
-          <p:grpSp>
-            <p:nvGrpSpPr>
-              <p:cNvPr id="22" name="Group 21">
-                <a:extLst>
-                  <a:ext uri="{FF2B5EF4-FFF2-40B4-BE49-F238E27FC236}">
-                    <a16:creationId xmlns:a16="http://schemas.microsoft.com/office/drawing/2014/main" id="{C2B7BCC7-AAC9-8722-0E5A-49090390D2BE}"/>
-                  </a:ext>
-                </a:extLst>
-              </p:cNvPr>
-              <p:cNvGrpSpPr/>
-              <p:nvPr/>
-            </p:nvGrpSpPr>
-            <p:grpSpPr>
-              <a:xfrm>
-                <a:off x="1451811" y="1299410"/>
-                <a:ext cx="882313" cy="1900989"/>
-                <a:chOff x="1451811" y="1299410"/>
-                <a:chExt cx="882313" cy="1900989"/>
-              </a:xfrm>
-            </p:grpSpPr>
-            <p:grpSp>
-              <p:nvGrpSpPr>
-                <p:cNvPr id="27" name="Group 26">
-                  <a:extLst>
-                    <a:ext uri="{FF2B5EF4-FFF2-40B4-BE49-F238E27FC236}">
-                      <a16:creationId xmlns:a16="http://schemas.microsoft.com/office/drawing/2014/main" id="{F8F44F4B-F668-10EE-E29B-75FCA45DA90F}"/>
-                    </a:ext>
-                  </a:extLst>
-                </p:cNvPr>
-                <p:cNvGrpSpPr/>
-                <p:nvPr/>
-              </p:nvGrpSpPr>
-              <p:grpSpPr>
-                <a:xfrm>
-                  <a:off x="1451811" y="1299410"/>
-                  <a:ext cx="544360" cy="1900989"/>
-                  <a:chOff x="1685491" y="1299410"/>
-                  <a:chExt cx="544360" cy="1900989"/>
-                </a:xfrm>
-              </p:grpSpPr>
-              <p:sp>
-                <p:nvSpPr>
-                  <p:cNvPr id="31" name="Rectangle: Rounded Corners 30">
-                    <a:extLst>
-                      <a:ext uri="{FF2B5EF4-FFF2-40B4-BE49-F238E27FC236}">
-                        <a16:creationId xmlns:a16="http://schemas.microsoft.com/office/drawing/2014/main" id="{9C1BD43C-3043-3C7B-3125-142BC70D4E72}"/>
-                      </a:ext>
-                    </a:extLst>
-                  </p:cNvPr>
-                  <p:cNvSpPr/>
-                  <p:nvPr/>
-                </p:nvSpPr>
-                <p:spPr>
-                  <a:xfrm>
-                    <a:off x="1685491" y="1299410"/>
-                    <a:ext cx="544360" cy="585537"/>
-                  </a:xfrm>
-                  <a:prstGeom prst="roundRect">
-                    <a:avLst/>
-                  </a:prstGeom>
-                  <a:solidFill>
-                    <a:schemeClr val="bg1">
-                      <a:lumMod val="95000"/>
-                    </a:schemeClr>
-                  </a:solidFill>
-                  <a:ln>
-                    <a:solidFill>
-                      <a:schemeClr val="tx1"/>
-                    </a:solidFill>
-                  </a:ln>
-                </p:spPr>
-                <p:style>
-                  <a:lnRef idx="2">
-                    <a:schemeClr val="accent1">
-                      <a:shade val="15000"/>
-                    </a:schemeClr>
-                  </a:lnRef>
-                  <a:fillRef idx="1">
-                    <a:schemeClr val="accent1"/>
-                  </a:fillRef>
-                  <a:effectRef idx="0">
-                    <a:schemeClr val="accent1"/>
-                  </a:effectRef>
-                  <a:fontRef idx="minor">
-                    <a:schemeClr val="lt1"/>
-                  </a:fontRef>
-                </p:style>
-                <p:txBody>
-                  <a:bodyPr rtlCol="0" anchor="ctr"/>
-                  <a:lstStyle/>
-                  <a:p>
-                    <a:pPr algn="ctr"/>
-                    <a:r>
-                      <a:rPr lang="en-US" dirty="0">
-                        <a:solidFill>
-                          <a:schemeClr val="tx1"/>
-                        </a:solidFill>
-                        <a:latin typeface="Times New Roman" panose="02020603050405020304" pitchFamily="18" charset="0"/>
-                        <a:cs typeface="Times New Roman" panose="02020603050405020304" pitchFamily="18" charset="0"/>
-                      </a:rPr>
-                      <a:t>UE</a:t>
-                    </a:r>
-                  </a:p>
-                </p:txBody>
-              </p:sp>
-              <p:sp>
-                <p:nvSpPr>
-                  <p:cNvPr id="32" name="Rectangle: Rounded Corners 31">
-                    <a:extLst>
-                      <a:ext uri="{FF2B5EF4-FFF2-40B4-BE49-F238E27FC236}">
-                        <a16:creationId xmlns:a16="http://schemas.microsoft.com/office/drawing/2014/main" id="{B65964A7-AD4C-06E4-EE76-FBD966EB7A0A}"/>
-                      </a:ext>
-                    </a:extLst>
-                  </p:cNvPr>
-                  <p:cNvSpPr/>
-                  <p:nvPr/>
-                </p:nvSpPr>
-                <p:spPr>
-                  <a:xfrm>
-                    <a:off x="1685491" y="1957136"/>
-                    <a:ext cx="544360" cy="585537"/>
-                  </a:xfrm>
-                  <a:prstGeom prst="roundRect">
-                    <a:avLst/>
-                  </a:prstGeom>
-                  <a:solidFill>
-                    <a:schemeClr val="bg1">
-                      <a:lumMod val="95000"/>
-                    </a:schemeClr>
-                  </a:solidFill>
-                  <a:ln>
-                    <a:solidFill>
-                      <a:schemeClr val="tx1"/>
-                    </a:solidFill>
-                  </a:ln>
-                </p:spPr>
-                <p:style>
-                  <a:lnRef idx="2">
-                    <a:schemeClr val="accent1">
-                      <a:shade val="15000"/>
-                    </a:schemeClr>
-                  </a:lnRef>
-                  <a:fillRef idx="1">
-                    <a:schemeClr val="accent1"/>
-                  </a:fillRef>
-                  <a:effectRef idx="0">
-                    <a:schemeClr val="accent1"/>
-                  </a:effectRef>
-                  <a:fontRef idx="minor">
-                    <a:schemeClr val="lt1"/>
-                  </a:fontRef>
-                </p:style>
-                <p:txBody>
-                  <a:bodyPr rtlCol="0" anchor="ctr"/>
-                  <a:lstStyle/>
-                  <a:p>
-                    <a:pPr algn="ctr"/>
-                    <a:r>
-                      <a:rPr lang="en-US" dirty="0">
-                        <a:solidFill>
-                          <a:schemeClr val="tx1"/>
-                        </a:solidFill>
-                        <a:latin typeface="Times New Roman" panose="02020603050405020304" pitchFamily="18" charset="0"/>
-                        <a:cs typeface="Times New Roman" panose="02020603050405020304" pitchFamily="18" charset="0"/>
-                      </a:rPr>
-                      <a:t>UE</a:t>
-                    </a:r>
-                  </a:p>
-                </p:txBody>
-              </p:sp>
-              <p:sp>
-                <p:nvSpPr>
-                  <p:cNvPr id="33" name="Rectangle: Rounded Corners 32">
-                    <a:extLst>
-                      <a:ext uri="{FF2B5EF4-FFF2-40B4-BE49-F238E27FC236}">
-                        <a16:creationId xmlns:a16="http://schemas.microsoft.com/office/drawing/2014/main" id="{B68994C4-8220-556E-F23B-83BE69B55D25}"/>
-                      </a:ext>
-                    </a:extLst>
-                  </p:cNvPr>
-                  <p:cNvSpPr/>
-                  <p:nvPr/>
-                </p:nvSpPr>
-                <p:spPr>
-                  <a:xfrm>
-                    <a:off x="1685491" y="2614862"/>
-                    <a:ext cx="544360" cy="585537"/>
-                  </a:xfrm>
-                  <a:prstGeom prst="roundRect">
-                    <a:avLst/>
-                  </a:prstGeom>
-                  <a:solidFill>
-                    <a:schemeClr val="bg1">
-                      <a:lumMod val="95000"/>
-                    </a:schemeClr>
-                  </a:solidFill>
-                  <a:ln>
-                    <a:solidFill>
-                      <a:schemeClr val="tx1"/>
-                    </a:solidFill>
-                  </a:ln>
-                </p:spPr>
-                <p:style>
-                  <a:lnRef idx="2">
-                    <a:schemeClr val="accent1">
-                      <a:shade val="15000"/>
-                    </a:schemeClr>
-                  </a:lnRef>
-                  <a:fillRef idx="1">
-                    <a:schemeClr val="accent1"/>
-                  </a:fillRef>
-                  <a:effectRef idx="0">
-                    <a:schemeClr val="accent1"/>
-                  </a:effectRef>
-                  <a:fontRef idx="minor">
-                    <a:schemeClr val="lt1"/>
-                  </a:fontRef>
-                </p:style>
-                <p:txBody>
-                  <a:bodyPr rtlCol="0" anchor="ctr"/>
-                  <a:lstStyle/>
-                  <a:p>
-                    <a:pPr algn="ctr"/>
-                    <a:r>
-                      <a:rPr lang="en-US" dirty="0">
-                        <a:solidFill>
-                          <a:schemeClr val="tx1"/>
-                        </a:solidFill>
-                        <a:latin typeface="Times New Roman" panose="02020603050405020304" pitchFamily="18" charset="0"/>
-                        <a:cs typeface="Times New Roman" panose="02020603050405020304" pitchFamily="18" charset="0"/>
-                      </a:rPr>
-                      <a:t>UE</a:t>
-                    </a:r>
-                  </a:p>
-                </p:txBody>
-              </p:sp>
-            </p:grpSp>
-            <p:cxnSp>
-              <p:nvCxnSpPr>
-                <p:cNvPr id="28" name="Straight Connector 27">
-                  <a:extLst>
-                    <a:ext uri="{FF2B5EF4-FFF2-40B4-BE49-F238E27FC236}">
-                      <a16:creationId xmlns:a16="http://schemas.microsoft.com/office/drawing/2014/main" id="{C09AA416-09AC-3AFE-B0CF-6892D52A2A85}"/>
-                    </a:ext>
-                  </a:extLst>
-                </p:cNvPr>
-                <p:cNvCxnSpPr>
-                  <a:cxnSpLocks/>
-                  <a:stCxn id="24" idx="1"/>
-                  <a:endCxn id="31" idx="3"/>
-                </p:cNvCxnSpPr>
-                <p:nvPr/>
-              </p:nvCxnSpPr>
-              <p:spPr>
-                <a:xfrm flipH="1" flipV="1">
-                  <a:off x="1996171" y="1592179"/>
-                  <a:ext cx="337953" cy="660617"/>
-                </a:xfrm>
-                <a:prstGeom prst="line">
-                  <a:avLst/>
-                </a:prstGeom>
-              </p:spPr>
-              <p:style>
-                <a:lnRef idx="2">
-                  <a:schemeClr val="dk1"/>
-                </a:lnRef>
-                <a:fillRef idx="0">
-                  <a:schemeClr val="dk1"/>
-                </a:fillRef>
-                <a:effectRef idx="1">
-                  <a:schemeClr val="dk1"/>
-                </a:effectRef>
-                <a:fontRef idx="minor">
-                  <a:schemeClr val="tx1"/>
-                </a:fontRef>
-              </p:style>
-            </p:cxnSp>
-            <p:cxnSp>
-              <p:nvCxnSpPr>
-                <p:cNvPr id="29" name="Straight Connector 28">
-                  <a:extLst>
-                    <a:ext uri="{FF2B5EF4-FFF2-40B4-BE49-F238E27FC236}">
-                      <a16:creationId xmlns:a16="http://schemas.microsoft.com/office/drawing/2014/main" id="{D22EF14C-54AA-A9CE-D455-7C9A1F66C8DA}"/>
-                    </a:ext>
-                  </a:extLst>
-                </p:cNvPr>
-                <p:cNvCxnSpPr>
-                  <a:cxnSpLocks/>
-                  <a:stCxn id="24" idx="1"/>
-                  <a:endCxn id="32" idx="3"/>
-                </p:cNvCxnSpPr>
-                <p:nvPr/>
-              </p:nvCxnSpPr>
-              <p:spPr>
-                <a:xfrm flipH="1" flipV="1">
-                  <a:off x="1996171" y="2249904"/>
-                  <a:ext cx="337953" cy="2891"/>
-                </a:xfrm>
-                <a:prstGeom prst="line">
-                  <a:avLst/>
-                </a:prstGeom>
-              </p:spPr>
-              <p:style>
-                <a:lnRef idx="2">
-                  <a:schemeClr val="dk1"/>
-                </a:lnRef>
-                <a:fillRef idx="0">
-                  <a:schemeClr val="dk1"/>
-                </a:fillRef>
-                <a:effectRef idx="1">
-                  <a:schemeClr val="dk1"/>
-                </a:effectRef>
-                <a:fontRef idx="minor">
-                  <a:schemeClr val="tx1"/>
-                </a:fontRef>
-              </p:style>
-            </p:cxnSp>
-            <p:cxnSp>
-              <p:nvCxnSpPr>
-                <p:cNvPr id="30" name="Straight Connector 29">
-                  <a:extLst>
-                    <a:ext uri="{FF2B5EF4-FFF2-40B4-BE49-F238E27FC236}">
-                      <a16:creationId xmlns:a16="http://schemas.microsoft.com/office/drawing/2014/main" id="{DFDDB555-A935-B7ED-235F-75C1F2EC96A1}"/>
-                    </a:ext>
-                  </a:extLst>
-                </p:cNvPr>
-                <p:cNvCxnSpPr>
-                  <a:cxnSpLocks/>
-                  <a:stCxn id="24" idx="1"/>
-                  <a:endCxn id="33" idx="3"/>
-                </p:cNvCxnSpPr>
-                <p:nvPr/>
-              </p:nvCxnSpPr>
-              <p:spPr>
-                <a:xfrm flipH="1">
-                  <a:off x="1996171" y="2252796"/>
-                  <a:ext cx="337953" cy="654834"/>
-                </a:xfrm>
-                <a:prstGeom prst="line">
-                  <a:avLst/>
-                </a:prstGeom>
-              </p:spPr>
-              <p:style>
-                <a:lnRef idx="2">
-                  <a:schemeClr val="dk1"/>
-                </a:lnRef>
-                <a:fillRef idx="0">
-                  <a:schemeClr val="dk1"/>
-                </a:fillRef>
-                <a:effectRef idx="1">
-                  <a:schemeClr val="dk1"/>
-                </a:effectRef>
-                <a:fontRef idx="minor">
-                  <a:schemeClr val="tx1"/>
-                </a:fontRef>
-              </p:style>
-            </p:cxnSp>
-          </p:grpSp>
-          <p:grpSp>
-            <p:nvGrpSpPr>
-              <p:cNvPr id="23" name="Group 22">
-                <a:extLst>
-                  <a:ext uri="{FF2B5EF4-FFF2-40B4-BE49-F238E27FC236}">
-                    <a16:creationId xmlns:a16="http://schemas.microsoft.com/office/drawing/2014/main" id="{213BF788-E53F-9CD1-CE9C-08BF62AD3EBE}"/>
-                  </a:ext>
-                </a:extLst>
-              </p:cNvPr>
-              <p:cNvGrpSpPr/>
-              <p:nvPr/>
-            </p:nvGrpSpPr>
-            <p:grpSpPr>
-              <a:xfrm>
-                <a:off x="2300585" y="1930839"/>
-                <a:ext cx="853874" cy="614726"/>
-                <a:chOff x="2300585" y="1930839"/>
-                <a:chExt cx="853874" cy="614726"/>
-              </a:xfrm>
-            </p:grpSpPr>
-            <p:sp>
-              <p:nvSpPr>
-                <p:cNvPr id="24" name="Rectangle: Rounded Corners 23">
-                  <a:extLst>
-                    <a:ext uri="{FF2B5EF4-FFF2-40B4-BE49-F238E27FC236}">
-                      <a16:creationId xmlns:a16="http://schemas.microsoft.com/office/drawing/2014/main" id="{94B784CE-4CED-0B2F-C06E-13BA5C6D26B1}"/>
-                    </a:ext>
-                  </a:extLst>
-                </p:cNvPr>
-                <p:cNvSpPr/>
-                <p:nvPr/>
-              </p:nvSpPr>
-              <p:spPr>
-                <a:xfrm>
-                  <a:off x="2334124" y="1960028"/>
-                  <a:ext cx="753981" cy="585537"/>
-                </a:xfrm>
-                <a:prstGeom prst="roundRect">
-                  <a:avLst/>
-                </a:prstGeom>
-                <a:solidFill>
-                  <a:schemeClr val="bg1">
-                    <a:lumMod val="95000"/>
-                  </a:schemeClr>
-                </a:solidFill>
-                <a:ln>
-                  <a:solidFill>
-                    <a:schemeClr val="tx1"/>
-                  </a:solidFill>
-                </a:ln>
-              </p:spPr>
-              <p:style>
-                <a:lnRef idx="2">
-                  <a:schemeClr val="accent1">
-                    <a:shade val="15000"/>
-                  </a:schemeClr>
-                </a:lnRef>
-                <a:fillRef idx="1">
-                  <a:schemeClr val="accent1"/>
-                </a:fillRef>
-                <a:effectRef idx="0">
-                  <a:schemeClr val="accent1"/>
-                </a:effectRef>
-                <a:fontRef idx="minor">
-                  <a:schemeClr val="lt1"/>
-                </a:fontRef>
-              </p:style>
-              <p:txBody>
-                <a:bodyPr rtlCol="0" anchor="ctr"/>
-                <a:lstStyle/>
-                <a:p>
-                  <a:pPr algn="ctr"/>
-                  <a:r>
-                    <a:rPr lang="en-US" dirty="0">
-                      <a:solidFill>
-                        <a:schemeClr val="tx1"/>
-                      </a:solidFill>
-                      <a:latin typeface="Times New Roman" panose="02020603050405020304" pitchFamily="18" charset="0"/>
-                      <a:cs typeface="Times New Roman" panose="02020603050405020304" pitchFamily="18" charset="0"/>
-                    </a:rPr>
-                    <a:t>gNB</a:t>
-                  </a:r>
-                </a:p>
-              </p:txBody>
-            </p:sp>
-            <p:sp>
-              <p:nvSpPr>
-                <p:cNvPr id="25" name="Rectangle: Rounded Corners 24">
-                  <a:extLst>
-                    <a:ext uri="{FF2B5EF4-FFF2-40B4-BE49-F238E27FC236}">
-                      <a16:creationId xmlns:a16="http://schemas.microsoft.com/office/drawing/2014/main" id="{F9DBE718-B94B-F16E-6147-9CDFF056B02C}"/>
-                    </a:ext>
-                  </a:extLst>
-                </p:cNvPr>
-                <p:cNvSpPr/>
-                <p:nvPr/>
-              </p:nvSpPr>
-              <p:spPr>
-                <a:xfrm>
-                  <a:off x="3012756" y="2155382"/>
-                  <a:ext cx="141703" cy="189443"/>
-                </a:xfrm>
-                <a:prstGeom prst="roundRect">
-                  <a:avLst>
-                    <a:gd name="adj" fmla="val 25490"/>
-                  </a:avLst>
-                </a:prstGeom>
-                <a:ln>
-                  <a:noFill/>
-                </a:ln>
-              </p:spPr>
-              <p:style>
-                <a:lnRef idx="2">
-                  <a:schemeClr val="dk1">
-                    <a:shade val="15000"/>
-                  </a:schemeClr>
-                </a:lnRef>
-                <a:fillRef idx="1">
-                  <a:schemeClr val="dk1"/>
-                </a:fillRef>
-                <a:effectRef idx="0">
-                  <a:schemeClr val="dk1"/>
-                </a:effectRef>
-                <a:fontRef idx="minor">
-                  <a:schemeClr val="lt1"/>
-                </a:fontRef>
-              </p:style>
-              <p:txBody>
-                <a:bodyPr rtlCol="0" anchor="ctr"/>
-                <a:lstStyle/>
-                <a:p>
-                  <a:pPr algn="ctr"/>
-                  <a:endParaRPr lang="en-US"/>
-                </a:p>
-              </p:txBody>
-            </p:sp>
-            <p:sp>
-              <p:nvSpPr>
-                <p:cNvPr id="26" name="TextBox 25">
-                  <a:extLst>
-                    <a:ext uri="{FF2B5EF4-FFF2-40B4-BE49-F238E27FC236}">
-                      <a16:creationId xmlns:a16="http://schemas.microsoft.com/office/drawing/2014/main" id="{53C01354-0AB0-265D-E19E-ACCC3B58038F}"/>
-                    </a:ext>
-                  </a:extLst>
-                </p:cNvPr>
-                <p:cNvSpPr txBox="1"/>
-                <p:nvPr/>
-              </p:nvSpPr>
-              <p:spPr>
-                <a:xfrm>
-                  <a:off x="2300585" y="1930839"/>
-                  <a:ext cx="821059" cy="200055"/>
-                </a:xfrm>
-                <a:prstGeom prst="rect">
-                  <a:avLst/>
-                </a:prstGeom>
-                <a:noFill/>
-              </p:spPr>
-              <p:txBody>
-                <a:bodyPr wrap="none" rtlCol="0">
-                  <a:spAutoFit/>
-                </a:bodyPr>
-                <a:lstStyle/>
-                <a:p>
-                  <a:r>
-                    <a:rPr lang="en-US" sz="700" dirty="0">
-                      <a:latin typeface="Times New Roman" panose="02020603050405020304" pitchFamily="18" charset="0"/>
-                      <a:cs typeface="Times New Roman" panose="02020603050405020304" pitchFamily="18" charset="0"/>
-                    </a:rPr>
-                    <a:t>OpenAirInterface</a:t>
-                  </a:r>
-                </a:p>
-              </p:txBody>
-            </p:sp>
-          </p:grpSp>
-        </p:grpSp>
-        <p:grpSp>
-          <p:nvGrpSpPr>
-            <p:cNvPr id="9" name="Group 8">
-              <a:extLst>
-                <a:ext uri="{FF2B5EF4-FFF2-40B4-BE49-F238E27FC236}">
-                  <a16:creationId xmlns:a16="http://schemas.microsoft.com/office/drawing/2014/main" id="{F56BA1C0-C4BB-BE6E-09E5-EDB3FA25F306}"/>
-                </a:ext>
-              </a:extLst>
-            </p:cNvPr>
-            <p:cNvGrpSpPr/>
-            <p:nvPr/>
-          </p:nvGrpSpPr>
-          <p:grpSpPr>
-            <a:xfrm>
-              <a:off x="5495386" y="3116511"/>
-              <a:ext cx="1380443" cy="614726"/>
-              <a:chOff x="3837589" y="1930839"/>
-              <a:chExt cx="1380443" cy="614726"/>
-            </a:xfrm>
-          </p:grpSpPr>
-          <p:sp>
-            <p:nvSpPr>
-              <p:cNvPr id="20" name="Rectangle: Rounded Corners 19">
-                <a:extLst>
-                  <a:ext uri="{FF2B5EF4-FFF2-40B4-BE49-F238E27FC236}">
-                    <a16:creationId xmlns:a16="http://schemas.microsoft.com/office/drawing/2014/main" id="{B04486F9-8CB3-BA55-5E3A-51043C1161B5}"/>
-                  </a:ext>
-                </a:extLst>
-              </p:cNvPr>
-              <p:cNvSpPr/>
-              <p:nvPr/>
-            </p:nvSpPr>
-            <p:spPr>
-              <a:xfrm>
-                <a:off x="3837589" y="1960028"/>
-                <a:ext cx="1380443" cy="585537"/>
-              </a:xfrm>
-              <a:prstGeom prst="roundRect">
-                <a:avLst/>
-              </a:prstGeom>
-              <a:solidFill>
-                <a:schemeClr val="bg1">
-                  <a:lumMod val="95000"/>
-                </a:schemeClr>
-              </a:solidFill>
-              <a:ln>
-                <a:solidFill>
-                  <a:schemeClr val="tx1"/>
-                </a:solidFill>
-              </a:ln>
-            </p:spPr>
-            <p:style>
-              <a:lnRef idx="2">
-                <a:schemeClr val="accent1">
-                  <a:shade val="15000"/>
-                </a:schemeClr>
-              </a:lnRef>
-              <a:fillRef idx="1">
-                <a:schemeClr val="accent1"/>
-              </a:fillRef>
-              <a:effectRef idx="0">
-                <a:schemeClr val="accent1"/>
-              </a:effectRef>
-              <a:fontRef idx="minor">
-                <a:schemeClr val="lt1"/>
-              </a:fontRef>
-            </p:style>
-            <p:txBody>
-              <a:bodyPr rtlCol="0" anchor="ctr"/>
-              <a:lstStyle/>
-              <a:p>
-                <a:pPr algn="ctr"/>
-                <a:r>
-                  <a:rPr lang="en-US" dirty="0">
-                    <a:solidFill>
-                      <a:schemeClr val="tx1"/>
-                    </a:solidFill>
-                    <a:latin typeface="Times New Roman" panose="02020603050405020304" pitchFamily="18" charset="0"/>
-                    <a:cs typeface="Times New Roman" panose="02020603050405020304" pitchFamily="18" charset="0"/>
-                  </a:rPr>
-                  <a:t>O1 Adapter</a:t>
-                </a:r>
-              </a:p>
-            </p:txBody>
-          </p:sp>
-          <p:sp>
-            <p:nvSpPr>
-              <p:cNvPr id="21" name="TextBox 20">
-                <a:extLst>
-                  <a:ext uri="{FF2B5EF4-FFF2-40B4-BE49-F238E27FC236}">
-                    <a16:creationId xmlns:a16="http://schemas.microsoft.com/office/drawing/2014/main" id="{B01172F1-265A-3ACE-F222-8B3F812FE109}"/>
-                  </a:ext>
-                </a:extLst>
-              </p:cNvPr>
-              <p:cNvSpPr txBox="1"/>
-              <p:nvPr/>
-            </p:nvSpPr>
-            <p:spPr>
-              <a:xfrm>
-                <a:off x="4117280" y="1930839"/>
-                <a:ext cx="821059" cy="200055"/>
-              </a:xfrm>
-              <a:prstGeom prst="rect">
-                <a:avLst/>
-              </a:prstGeom>
-              <a:noFill/>
-            </p:spPr>
-            <p:txBody>
-              <a:bodyPr wrap="none" rtlCol="0">
-                <a:spAutoFit/>
-              </a:bodyPr>
-              <a:lstStyle/>
-              <a:p>
-                <a:r>
-                  <a:rPr lang="en-US" sz="700" dirty="0">
-                    <a:latin typeface="Times New Roman" panose="02020603050405020304" pitchFamily="18" charset="0"/>
-                    <a:cs typeface="Times New Roman" panose="02020603050405020304" pitchFamily="18" charset="0"/>
-                  </a:rPr>
-                  <a:t>OpenAirInterface</a:t>
-                </a:r>
-              </a:p>
-            </p:txBody>
-          </p:sp>
-        </p:grpSp>
-        <p:sp>
-          <p:nvSpPr>
-            <p:cNvPr id="10" name="Speech Bubble: Rectangle with Corners Rounded 9">
-              <a:extLst>
-                <a:ext uri="{FF2B5EF4-FFF2-40B4-BE49-F238E27FC236}">
-                  <a16:creationId xmlns:a16="http://schemas.microsoft.com/office/drawing/2014/main" id="{7C8768EE-019B-4786-889B-241D7BEA5029}"/>
-                </a:ext>
-              </a:extLst>
-            </p:cNvPr>
-            <p:cNvSpPr/>
-            <p:nvPr/>
-          </p:nvSpPr>
-          <p:spPr>
-            <a:xfrm>
-              <a:off x="4745901" y="2701839"/>
-              <a:ext cx="1580684" cy="300565"/>
-            </a:xfrm>
-            <a:prstGeom prst="wedgeRoundRectCallout">
-              <a:avLst>
-                <a:gd name="adj1" fmla="val -44446"/>
-                <a:gd name="adj2" fmla="val 155070"/>
-                <a:gd name="adj3" fmla="val 16667"/>
-              </a:avLst>
-            </a:prstGeom>
-            <a:solidFill>
-              <a:schemeClr val="bg1">
-                <a:lumMod val="95000"/>
-              </a:schemeClr>
-            </a:solidFill>
-          </p:spPr>
-          <p:style>
-            <a:lnRef idx="2">
-              <a:schemeClr val="accent1">
-                <a:shade val="15000"/>
-              </a:schemeClr>
-            </a:lnRef>
-            <a:fillRef idx="1">
-              <a:schemeClr val="accent1"/>
-            </a:fillRef>
-            <a:effectRef idx="0">
-              <a:schemeClr val="accent1"/>
-            </a:effectRef>
-            <a:fontRef idx="minor">
-              <a:schemeClr val="lt1"/>
-            </a:fontRef>
-          </p:style>
-          <p:txBody>
-            <a:bodyPr rtlCol="0" anchor="ctr"/>
-            <a:lstStyle/>
-            <a:p>
-              <a:pPr algn="ctr"/>
-              <a:r>
-                <a:rPr lang="en-US" dirty="0">
-                  <a:solidFill>
-                    <a:schemeClr val="tx1"/>
-                  </a:solidFill>
-                  <a:latin typeface="Times New Roman" panose="02020603050405020304" pitchFamily="18" charset="0"/>
-                  <a:cs typeface="Times New Roman" panose="02020603050405020304" pitchFamily="18" charset="0"/>
-                </a:rPr>
-                <a:t>Telnet Server</a:t>
-              </a:r>
-            </a:p>
-          </p:txBody>
-        </p:sp>
-        <p:cxnSp>
-          <p:nvCxnSpPr>
-            <p:cNvPr id="11" name="Straight Connector 10">
-              <a:extLst>
-                <a:ext uri="{FF2B5EF4-FFF2-40B4-BE49-F238E27FC236}">
-                  <a16:creationId xmlns:a16="http://schemas.microsoft.com/office/drawing/2014/main" id="{7F654B56-D0FE-9705-347A-E9A0C7259973}"/>
-                </a:ext>
-              </a:extLst>
-            </p:cNvPr>
-            <p:cNvCxnSpPr>
-              <a:cxnSpLocks/>
-              <a:stCxn id="18" idx="1"/>
-            </p:cNvCxnSpPr>
-            <p:nvPr/>
-          </p:nvCxnSpPr>
-          <p:spPr>
-            <a:xfrm flipH="1" flipV="1">
-              <a:off x="6875829" y="3435577"/>
-              <a:ext cx="749484" cy="367833"/>
-            </a:xfrm>
-            <a:prstGeom prst="line">
-              <a:avLst/>
-            </a:prstGeom>
-            <a:ln>
-              <a:headEnd type="arrow" w="med" len="med"/>
-              <a:tailEnd type="none" w="med" len="med"/>
-            </a:ln>
-          </p:spPr>
-          <p:style>
-            <a:lnRef idx="2">
-              <a:schemeClr val="dk1"/>
-            </a:lnRef>
-            <a:fillRef idx="0">
-              <a:schemeClr val="dk1"/>
-            </a:fillRef>
-            <a:effectRef idx="1">
-              <a:schemeClr val="dk1"/>
-            </a:effectRef>
-            <a:fontRef idx="minor">
-              <a:schemeClr val="tx1"/>
-            </a:fontRef>
-          </p:style>
-        </p:cxnSp>
-        <p:sp>
-          <p:nvSpPr>
-            <p:cNvPr id="12" name="Rectangle: Rounded Corners 11">
-              <a:extLst>
-                <a:ext uri="{FF2B5EF4-FFF2-40B4-BE49-F238E27FC236}">
-                  <a16:creationId xmlns:a16="http://schemas.microsoft.com/office/drawing/2014/main" id="{BF76B1D6-A203-E77C-4D53-AC36FF89A215}"/>
-                </a:ext>
-              </a:extLst>
-            </p:cNvPr>
-            <p:cNvSpPr/>
-            <p:nvPr/>
-          </p:nvSpPr>
-          <p:spPr>
-            <a:xfrm>
-              <a:off x="6804977" y="3367179"/>
-              <a:ext cx="141703" cy="141703"/>
-            </a:xfrm>
-            <a:prstGeom prst="roundRect">
-              <a:avLst>
-                <a:gd name="adj" fmla="val 25490"/>
-              </a:avLst>
-            </a:prstGeom>
-            <a:ln>
-              <a:noFill/>
-            </a:ln>
-          </p:spPr>
-          <p:style>
-            <a:lnRef idx="2">
-              <a:schemeClr val="dk1">
-                <a:shade val="15000"/>
-              </a:schemeClr>
-            </a:lnRef>
-            <a:fillRef idx="1">
-              <a:schemeClr val="dk1"/>
-            </a:fillRef>
-            <a:effectRef idx="0">
-              <a:schemeClr val="dk1"/>
-            </a:effectRef>
-            <a:fontRef idx="minor">
-              <a:schemeClr val="lt1"/>
-            </a:fontRef>
-          </p:style>
-          <p:txBody>
-            <a:bodyPr rtlCol="0" anchor="ctr"/>
-            <a:lstStyle/>
-            <a:p>
-              <a:pPr algn="ctr"/>
-              <a:endParaRPr lang="en-US"/>
-            </a:p>
-          </p:txBody>
-        </p:sp>
-        <p:sp>
-          <p:nvSpPr>
-            <p:cNvPr id="13" name="Speech Bubble: Rectangle with Corners Rounded 12">
-              <a:extLst>
-                <a:ext uri="{FF2B5EF4-FFF2-40B4-BE49-F238E27FC236}">
-                  <a16:creationId xmlns:a16="http://schemas.microsoft.com/office/drawing/2014/main" id="{3F54D99C-840C-00E9-D78A-966783930513}"/>
-                </a:ext>
-              </a:extLst>
-            </p:cNvPr>
-            <p:cNvSpPr/>
-            <p:nvPr/>
-          </p:nvSpPr>
-          <p:spPr>
-            <a:xfrm flipH="1">
-              <a:off x="5072518" y="3873064"/>
-              <a:ext cx="1939420" cy="300565"/>
-            </a:xfrm>
-            <a:prstGeom prst="wedgeRoundRectCallout">
-              <a:avLst>
-                <a:gd name="adj1" fmla="val -39426"/>
-                <a:gd name="adj2" fmla="val -148622"/>
-                <a:gd name="adj3" fmla="val 16667"/>
-              </a:avLst>
-            </a:prstGeom>
-            <a:solidFill>
-              <a:schemeClr val="bg1">
-                <a:lumMod val="95000"/>
-              </a:schemeClr>
-            </a:solidFill>
-          </p:spPr>
-          <p:style>
-            <a:lnRef idx="2">
-              <a:schemeClr val="accent1">
-                <a:shade val="15000"/>
-              </a:schemeClr>
-            </a:lnRef>
-            <a:fillRef idx="1">
-              <a:schemeClr val="accent1"/>
-            </a:fillRef>
-            <a:effectRef idx="0">
-              <a:schemeClr val="accent1"/>
-            </a:effectRef>
-            <a:fontRef idx="minor">
-              <a:schemeClr val="lt1"/>
-            </a:fontRef>
-          </p:style>
-          <p:txBody>
-            <a:bodyPr rtlCol="0" anchor="ctr"/>
-            <a:lstStyle/>
-            <a:p>
-              <a:pPr algn="ctr"/>
-              <a:r>
-                <a:rPr lang="en-US" dirty="0">
-                  <a:solidFill>
-                    <a:schemeClr val="tx1"/>
-                  </a:solidFill>
-                  <a:latin typeface="Times New Roman" panose="02020603050405020304" pitchFamily="18" charset="0"/>
-                  <a:cs typeface="Times New Roman" panose="02020603050405020304" pitchFamily="18" charset="0"/>
-                </a:rPr>
-                <a:t>NETCONF Server</a:t>
-              </a:r>
-            </a:p>
-          </p:txBody>
-        </p:sp>
-        <p:cxnSp>
-          <p:nvCxnSpPr>
-            <p:cNvPr id="15" name="Straight Connector 14">
-              <a:extLst>
-                <a:ext uri="{FF2B5EF4-FFF2-40B4-BE49-F238E27FC236}">
-                  <a16:creationId xmlns:a16="http://schemas.microsoft.com/office/drawing/2014/main" id="{224AB07A-1A5B-5ACF-B65B-816EAAF58EA1}"/>
-                </a:ext>
-              </a:extLst>
-            </p:cNvPr>
-            <p:cNvCxnSpPr>
-              <a:cxnSpLocks/>
-              <a:endCxn id="18" idx="3"/>
-            </p:cNvCxnSpPr>
-            <p:nvPr/>
-          </p:nvCxnSpPr>
-          <p:spPr>
-            <a:xfrm flipH="1">
-              <a:off x="8631767" y="3803410"/>
-              <a:ext cx="249790" cy="0"/>
-            </a:xfrm>
-            <a:prstGeom prst="line">
-              <a:avLst/>
-            </a:prstGeom>
-          </p:spPr>
-          <p:style>
-            <a:lnRef idx="2">
-              <a:schemeClr val="dk1"/>
-            </a:lnRef>
-            <a:fillRef idx="0">
-              <a:schemeClr val="dk1"/>
-            </a:fillRef>
-            <a:effectRef idx="1">
-              <a:schemeClr val="dk1"/>
-            </a:effectRef>
-            <a:fontRef idx="minor">
-              <a:schemeClr val="tx1"/>
-            </a:fontRef>
-          </p:style>
-        </p:cxnSp>
-        <p:grpSp>
-          <p:nvGrpSpPr>
-            <p:cNvPr id="16" name="Group 15">
-              <a:extLst>
-                <a:ext uri="{FF2B5EF4-FFF2-40B4-BE49-F238E27FC236}">
-                  <a16:creationId xmlns:a16="http://schemas.microsoft.com/office/drawing/2014/main" id="{7E15130A-2F5A-AC26-7CB1-723DD14E6E91}"/>
-                </a:ext>
-              </a:extLst>
-            </p:cNvPr>
-            <p:cNvGrpSpPr/>
-            <p:nvPr/>
-          </p:nvGrpSpPr>
-          <p:grpSpPr>
-            <a:xfrm>
-              <a:off x="7625313" y="2774975"/>
-              <a:ext cx="1006454" cy="1321203"/>
-              <a:chOff x="5967516" y="1221469"/>
-              <a:chExt cx="1006454" cy="1321203"/>
-            </a:xfrm>
-          </p:grpSpPr>
-          <p:sp>
-            <p:nvSpPr>
-              <p:cNvPr id="18" name="Rectangle: Rounded Corners 17">
-                <a:extLst>
-                  <a:ext uri="{FF2B5EF4-FFF2-40B4-BE49-F238E27FC236}">
-                    <a16:creationId xmlns:a16="http://schemas.microsoft.com/office/drawing/2014/main" id="{3C91E35C-D730-4F2A-A6C0-F5DB23F0B23C}"/>
-                  </a:ext>
-                </a:extLst>
-              </p:cNvPr>
-              <p:cNvSpPr/>
-              <p:nvPr/>
-            </p:nvSpPr>
-            <p:spPr>
-              <a:xfrm>
-                <a:off x="5967516" y="1957135"/>
-                <a:ext cx="1006454" cy="585537"/>
-              </a:xfrm>
-              <a:prstGeom prst="roundRect">
-                <a:avLst/>
-              </a:prstGeom>
-              <a:solidFill>
-                <a:schemeClr val="bg1">
-                  <a:lumMod val="95000"/>
-                </a:schemeClr>
-              </a:solidFill>
-              <a:ln>
-                <a:solidFill>
-                  <a:schemeClr val="tx1"/>
-                </a:solidFill>
-              </a:ln>
-            </p:spPr>
-            <p:style>
-              <a:lnRef idx="2">
-                <a:schemeClr val="accent1">
-                  <a:shade val="15000"/>
-                </a:schemeClr>
-              </a:lnRef>
-              <a:fillRef idx="1">
-                <a:schemeClr val="accent1"/>
-              </a:fillRef>
-              <a:effectRef idx="0">
-                <a:schemeClr val="accent1"/>
-              </a:effectRef>
-              <a:fontRef idx="minor">
-                <a:schemeClr val="lt1"/>
-              </a:fontRef>
-            </p:style>
-            <p:txBody>
-              <a:bodyPr rtlCol="0" anchor="ctr"/>
-              <a:lstStyle/>
-              <a:p>
-                <a:pPr algn="ctr"/>
-                <a:r>
-                  <a:rPr lang="en-US" dirty="0">
-                    <a:solidFill>
-                      <a:schemeClr val="tx1"/>
-                    </a:solidFill>
-                    <a:latin typeface="Times New Roman" panose="02020603050405020304" pitchFamily="18" charset="0"/>
-                    <a:cs typeface="Times New Roman" panose="02020603050405020304" pitchFamily="18" charset="0"/>
-                  </a:rPr>
-                  <a:t>KPM Monitor</a:t>
-                </a:r>
-              </a:p>
-            </p:txBody>
-          </p:sp>
-          <p:sp>
-            <p:nvSpPr>
-              <p:cNvPr id="19" name="Rectangle: Rounded Corners 18">
-                <a:extLst>
-                  <a:ext uri="{FF2B5EF4-FFF2-40B4-BE49-F238E27FC236}">
-                    <a16:creationId xmlns:a16="http://schemas.microsoft.com/office/drawing/2014/main" id="{1447506B-A068-7CC5-68CB-A171CEE44055}"/>
-                  </a:ext>
-                </a:extLst>
-              </p:cNvPr>
-              <p:cNvSpPr/>
-              <p:nvPr/>
-            </p:nvSpPr>
-            <p:spPr>
-              <a:xfrm>
-                <a:off x="5967516" y="1221469"/>
-                <a:ext cx="1006454" cy="585537"/>
-              </a:xfrm>
-              <a:prstGeom prst="roundRect">
-                <a:avLst/>
-              </a:prstGeom>
-              <a:solidFill>
-                <a:schemeClr val="bg1">
-                  <a:lumMod val="95000"/>
-                </a:schemeClr>
-              </a:solidFill>
-              <a:ln>
-                <a:solidFill>
-                  <a:schemeClr val="tx1"/>
-                </a:solidFill>
-              </a:ln>
-            </p:spPr>
-            <p:style>
-              <a:lnRef idx="2">
-                <a:schemeClr val="accent1">
-                  <a:shade val="15000"/>
-                </a:schemeClr>
-              </a:lnRef>
-              <a:fillRef idx="1">
-                <a:schemeClr val="accent1"/>
-              </a:fillRef>
-              <a:effectRef idx="0">
-                <a:schemeClr val="accent1"/>
-              </a:effectRef>
-              <a:fontRef idx="minor">
-                <a:schemeClr val="lt1"/>
-              </a:fontRef>
-            </p:style>
-            <p:txBody>
-              <a:bodyPr rtlCol="0" anchor="ctr"/>
-              <a:lstStyle/>
-              <a:p>
-                <a:pPr algn="ctr"/>
-                <a:r>
-                  <a:rPr lang="en-US" dirty="0">
-                    <a:solidFill>
-                      <a:schemeClr val="tx1"/>
-                    </a:solidFill>
-                    <a:latin typeface="Times New Roman" panose="02020603050405020304" pitchFamily="18" charset="0"/>
-                    <a:cs typeface="Times New Roman" panose="02020603050405020304" pitchFamily="18" charset="0"/>
-                  </a:rPr>
-                  <a:t>RIC Control</a:t>
-                </a:r>
-              </a:p>
-            </p:txBody>
-          </p:sp>
-        </p:grpSp>
-        <p:cxnSp>
-          <p:nvCxnSpPr>
-            <p:cNvPr id="17" name="Straight Connector 16">
-              <a:extLst>
-                <a:ext uri="{FF2B5EF4-FFF2-40B4-BE49-F238E27FC236}">
-                  <a16:creationId xmlns:a16="http://schemas.microsoft.com/office/drawing/2014/main" id="{EB777EB9-626C-CCA4-B12F-E2A04D893EF7}"/>
-                </a:ext>
-              </a:extLst>
-            </p:cNvPr>
-            <p:cNvCxnSpPr>
-              <a:cxnSpLocks/>
-              <a:stCxn id="19" idx="1"/>
-              <a:endCxn id="12" idx="3"/>
-            </p:cNvCxnSpPr>
-            <p:nvPr/>
-          </p:nvCxnSpPr>
-          <p:spPr>
-            <a:xfrm flipH="1">
-              <a:off x="6946680" y="3067744"/>
-              <a:ext cx="678633" cy="370287"/>
-            </a:xfrm>
-            <a:prstGeom prst="line">
-              <a:avLst/>
-            </a:prstGeom>
-            <a:ln>
-              <a:headEnd type="none" w="med" len="med"/>
-              <a:tailEnd type="arrow" w="med" len="med"/>
-            </a:ln>
-          </p:spPr>
-          <p:style>
-            <a:lnRef idx="2">
-              <a:schemeClr val="dk1"/>
-            </a:lnRef>
-            <a:fillRef idx="0">
-              <a:schemeClr val="dk1"/>
-            </a:fillRef>
-            <a:effectRef idx="1">
-              <a:schemeClr val="dk1"/>
-            </a:effectRef>
-            <a:fontRef idx="minor">
-              <a:schemeClr val="tx1"/>
-            </a:fontRef>
-          </p:style>
-        </p:cxnSp>
-        <p:grpSp>
-          <p:nvGrpSpPr>
-            <p:cNvPr id="36" name="Group 35">
-              <a:extLst>
-                <a:ext uri="{FF2B5EF4-FFF2-40B4-BE49-F238E27FC236}">
-                  <a16:creationId xmlns:a16="http://schemas.microsoft.com/office/drawing/2014/main" id="{FA470185-A33C-DB86-47B5-AB273427E564}"/>
-                </a:ext>
-              </a:extLst>
-            </p:cNvPr>
-            <p:cNvGrpSpPr/>
-            <p:nvPr/>
-          </p:nvGrpSpPr>
-          <p:grpSpPr>
-            <a:xfrm>
-              <a:off x="8654914" y="3287694"/>
-              <a:ext cx="697627" cy="727425"/>
-              <a:chOff x="8654914" y="3287694"/>
-              <a:chExt cx="697627" cy="727425"/>
-            </a:xfrm>
-          </p:grpSpPr>
-          <p:pic>
-            <p:nvPicPr>
-              <p:cNvPr id="14" name="Graphic 13" descr="Database with solid fill">
-                <a:extLst>
-                  <a:ext uri="{FF2B5EF4-FFF2-40B4-BE49-F238E27FC236}">
-                    <a16:creationId xmlns:a16="http://schemas.microsoft.com/office/drawing/2014/main" id="{A1063F4F-21AC-0E37-2CC6-4FCEE9DD00A8}"/>
-                  </a:ext>
-                </a:extLst>
-              </p:cNvPr>
-              <p:cNvPicPr>
-                <a:picLocks noChangeAspect="1"/>
-              </p:cNvPicPr>
-              <p:nvPr/>
-            </p:nvPicPr>
-            <p:blipFill>
-              <a:blip r:embed="rId2">
-                <a:extLst>
-                  <a:ext uri="{96DAC541-7B7A-43D3-8B79-37D633B846F1}">
-                    <asvg:svgBlip xmlns:asvg="http://schemas.microsoft.com/office/drawing/2016/SVG/main" r:embed="rId3"/>
-                  </a:ext>
-                </a:extLst>
-              </a:blip>
-              <a:stretch>
-                <a:fillRect/>
-              </a:stretch>
-            </p:blipFill>
-            <p:spPr>
-              <a:xfrm>
-                <a:off x="8794046" y="3591699"/>
-                <a:ext cx="423420" cy="423420"/>
-              </a:xfrm>
-              <a:prstGeom prst="rect">
-                <a:avLst/>
-              </a:prstGeom>
-            </p:spPr>
-          </p:pic>
-          <p:sp>
-            <p:nvSpPr>
-              <p:cNvPr id="35" name="TextBox 34">
-                <a:extLst>
-                  <a:ext uri="{FF2B5EF4-FFF2-40B4-BE49-F238E27FC236}">
-                    <a16:creationId xmlns:a16="http://schemas.microsoft.com/office/drawing/2014/main" id="{890CD3CB-E954-E9B3-5E89-BD0233A8DCA5}"/>
-                  </a:ext>
-                </a:extLst>
-              </p:cNvPr>
-              <p:cNvSpPr txBox="1"/>
-              <p:nvPr/>
-            </p:nvSpPr>
-            <p:spPr>
-              <a:xfrm>
-                <a:off x="8654914" y="3287694"/>
-                <a:ext cx="697627" cy="369332"/>
-              </a:xfrm>
-              <a:prstGeom prst="rect">
-                <a:avLst/>
-              </a:prstGeom>
-              <a:noFill/>
-            </p:spPr>
-            <p:txBody>
-              <a:bodyPr wrap="none" rtlCol="0">
-                <a:spAutoFit/>
-              </a:bodyPr>
-              <a:lstStyle/>
-              <a:p>
-                <a:r>
-                  <a:rPr lang="en-US" dirty="0">
-                    <a:latin typeface="Times New Roman" panose="02020603050405020304" pitchFamily="18" charset="0"/>
-                    <a:cs typeface="Times New Roman" panose="02020603050405020304" pitchFamily="18" charset="0"/>
-                  </a:rPr>
-                  <a:t>DME</a:t>
-                </a:r>
-              </a:p>
-            </p:txBody>
-          </p:sp>
-        </p:grpSp>
-      </p:grpSp>
-    </p:spTree>
-    <p:extLst>
-      <p:ext uri="{BB962C8B-B14F-4D97-AF65-F5344CB8AC3E}">
-        <p14:creationId xmlns:p14="http://schemas.microsoft.com/office/powerpoint/2010/main" val="3601091235"/>
-      </p:ext>
-    </p:extLst>
-  </p:cSld>
-  <p:clrMapOvr>
-    <a:masterClrMapping/>
-  </p:clrMapOvr>
-</p:sld>
-</file>
-
 <file path=ppt/theme/theme1.xml><?xml version="1.0" encoding="utf-8"?>
 <a:theme xmlns:a="http://schemas.openxmlformats.org/drawingml/2006/main" name="Office Theme">
   <a:themeElements>

--- a/RAN_Intelligent_Controllers/research/Diagrams.pptx
+++ b/RAN_Intelligent_Controllers/research/Diagrams.pptx
@@ -7,8 +7,8 @@
   <p:sldIdLst>
     <p:sldId id="268" r:id="rId2"/>
     <p:sldId id="258" r:id="rId3"/>
-    <p:sldId id="262" r:id="rId4"/>
-    <p:sldId id="263" r:id="rId5"/>
+    <p:sldId id="270" r:id="rId4"/>
+    <p:sldId id="271" r:id="rId5"/>
   </p:sldIdLst>
   <p:sldSz cx="12192000" cy="6858000"/>
   <p:notesSz cx="6858000" cy="9144000"/>
@@ -262,7 +262,7 @@
           <a:p>
             <a:fld id="{2D1DF383-F48D-4C35-882C-8A26F25E24F6}" type="datetimeFigureOut">
               <a:rPr lang="en-US" smtClean="0"/>
-              <a:t>3/23/2026</a:t>
+              <a:t>5/15/2026</a:t>
             </a:fld>
             <a:endParaRPr lang="en-US"/>
           </a:p>
@@ -460,7 +460,7 @@
           <a:p>
             <a:fld id="{2D1DF383-F48D-4C35-882C-8A26F25E24F6}" type="datetimeFigureOut">
               <a:rPr lang="en-US" smtClean="0"/>
-              <a:t>3/23/2026</a:t>
+              <a:t>5/15/2026</a:t>
             </a:fld>
             <a:endParaRPr lang="en-US"/>
           </a:p>
@@ -668,7 +668,7 @@
           <a:p>
             <a:fld id="{2D1DF383-F48D-4C35-882C-8A26F25E24F6}" type="datetimeFigureOut">
               <a:rPr lang="en-US" smtClean="0"/>
-              <a:t>3/23/2026</a:t>
+              <a:t>5/15/2026</a:t>
             </a:fld>
             <a:endParaRPr lang="en-US"/>
           </a:p>
@@ -866,7 +866,7 @@
           <a:p>
             <a:fld id="{2D1DF383-F48D-4C35-882C-8A26F25E24F6}" type="datetimeFigureOut">
               <a:rPr lang="en-US" smtClean="0"/>
-              <a:t>3/23/2026</a:t>
+              <a:t>5/15/2026</a:t>
             </a:fld>
             <a:endParaRPr lang="en-US"/>
           </a:p>
@@ -1141,7 +1141,7 @@
           <a:p>
             <a:fld id="{2D1DF383-F48D-4C35-882C-8A26F25E24F6}" type="datetimeFigureOut">
               <a:rPr lang="en-US" smtClean="0"/>
-              <a:t>3/23/2026</a:t>
+              <a:t>5/15/2026</a:t>
             </a:fld>
             <a:endParaRPr lang="en-US"/>
           </a:p>
@@ -1406,7 +1406,7 @@
           <a:p>
             <a:fld id="{2D1DF383-F48D-4C35-882C-8A26F25E24F6}" type="datetimeFigureOut">
               <a:rPr lang="en-US" smtClean="0"/>
-              <a:t>3/23/2026</a:t>
+              <a:t>5/15/2026</a:t>
             </a:fld>
             <a:endParaRPr lang="en-US"/>
           </a:p>
@@ -1818,7 +1818,7 @@
           <a:p>
             <a:fld id="{2D1DF383-F48D-4C35-882C-8A26F25E24F6}" type="datetimeFigureOut">
               <a:rPr lang="en-US" smtClean="0"/>
-              <a:t>3/23/2026</a:t>
+              <a:t>5/15/2026</a:t>
             </a:fld>
             <a:endParaRPr lang="en-US"/>
           </a:p>
@@ -1959,7 +1959,7 @@
           <a:p>
             <a:fld id="{2D1DF383-F48D-4C35-882C-8A26F25E24F6}" type="datetimeFigureOut">
               <a:rPr lang="en-US" smtClean="0"/>
-              <a:t>3/23/2026</a:t>
+              <a:t>5/15/2026</a:t>
             </a:fld>
             <a:endParaRPr lang="en-US"/>
           </a:p>
@@ -2072,7 +2072,7 @@
           <a:p>
             <a:fld id="{2D1DF383-F48D-4C35-882C-8A26F25E24F6}" type="datetimeFigureOut">
               <a:rPr lang="en-US" smtClean="0"/>
-              <a:t>3/23/2026</a:t>
+              <a:t>5/15/2026</a:t>
             </a:fld>
             <a:endParaRPr lang="en-US"/>
           </a:p>
@@ -2383,7 +2383,7 @@
           <a:p>
             <a:fld id="{2D1DF383-F48D-4C35-882C-8A26F25E24F6}" type="datetimeFigureOut">
               <a:rPr lang="en-US" smtClean="0"/>
-              <a:t>3/23/2026</a:t>
+              <a:t>5/15/2026</a:t>
             </a:fld>
             <a:endParaRPr lang="en-US"/>
           </a:p>
@@ -2671,7 +2671,7 @@
           <a:p>
             <a:fld id="{2D1DF383-F48D-4C35-882C-8A26F25E24F6}" type="datetimeFigureOut">
               <a:rPr lang="en-US" smtClean="0"/>
-              <a:t>3/23/2026</a:t>
+              <a:t>5/15/2026</a:t>
             </a:fld>
             <a:endParaRPr lang="en-US"/>
           </a:p>
@@ -2912,7 +2912,7 @@
           <a:p>
             <a:fld id="{2D1DF383-F48D-4C35-882C-8A26F25E24F6}" type="datetimeFigureOut">
               <a:rPr lang="en-US" smtClean="0"/>
-              <a:t>3/23/2026</a:t>
+              <a:t>5/15/2026</a:t>
             </a:fld>
             <a:endParaRPr lang="en-US"/>
           </a:p>
@@ -11488,7 +11488,13 @@
   <p:cSld>
     <p:spTree>
       <p:nvGrpSpPr>
-        <p:cNvPr id="1" name=""/>
+        <p:cNvPr id="1" name="">
+          <a:extLst>
+            <a:ext uri="{FF2B5EF4-FFF2-40B4-BE49-F238E27FC236}">
+              <a16:creationId xmlns:a16="http://schemas.microsoft.com/office/drawing/2014/main" id="{06F4C34B-A1B5-6BF5-6F1B-43C94EC0C953}"/>
+            </a:ext>
+          </a:extLst>
+        </p:cNvPr>
         <p:cNvGrpSpPr/>
         <p:nvPr/>
       </p:nvGrpSpPr>
@@ -11502,10 +11508,10 @@
       </p:grpSpPr>
       <p:grpSp>
         <p:nvGrpSpPr>
-          <p:cNvPr id="226" name="Group 225">
+          <p:cNvPr id="51" name="Group 50">
             <a:extLst>
               <a:ext uri="{FF2B5EF4-FFF2-40B4-BE49-F238E27FC236}">
-                <a16:creationId xmlns:a16="http://schemas.microsoft.com/office/drawing/2014/main" id="{90F26478-879E-D4B3-A75A-5E42646C065C}"/>
+                <a16:creationId xmlns:a16="http://schemas.microsoft.com/office/drawing/2014/main" id="{0ECFEB13-C3A5-28CD-C249-2D33D7F51D65}"/>
               </a:ext>
             </a:extLst>
           </p:cNvPr>
@@ -11516,7 +11522,7 @@
           <a:xfrm>
             <a:off x="496467" y="1900165"/>
             <a:ext cx="11199066" cy="3057669"/>
-            <a:chOff x="575839" y="1513908"/>
+            <a:chOff x="496467" y="1900165"/>
             <a:chExt cx="11199066" cy="3057669"/>
           </a:xfrm>
         </p:grpSpPr>
@@ -11525,7 +11531,7 @@
             <p:cNvPr id="14" name="Rectangle: Rounded Corners 13">
               <a:extLst>
                 <a:ext uri="{FF2B5EF4-FFF2-40B4-BE49-F238E27FC236}">
-                  <a16:creationId xmlns:a16="http://schemas.microsoft.com/office/drawing/2014/main" id="{F0739420-0123-DB6F-5885-960E057BE8AB}"/>
+                  <a16:creationId xmlns:a16="http://schemas.microsoft.com/office/drawing/2014/main" id="{C5C14889-4F05-5BC7-F20F-5B95FAF1E3DA}"/>
                 </a:ext>
               </a:extLst>
             </p:cNvPr>
@@ -11534,7 +11540,7 @@
           </p:nvSpPr>
           <p:spPr>
             <a:xfrm>
-              <a:off x="575839" y="1513908"/>
+              <a:off x="496467" y="1900165"/>
               <a:ext cx="11199066" cy="3057028"/>
             </a:xfrm>
             <a:prstGeom prst="roundRect">
@@ -11579,389 +11585,12 @@
             </a:p>
           </p:txBody>
         </p:sp>
-        <p:cxnSp>
-          <p:nvCxnSpPr>
-            <p:cNvPr id="380" name="Straight Connector 379">
+        <p:grpSp>
+          <p:nvGrpSpPr>
+            <p:cNvPr id="64" name="Group 63">
               <a:extLst>
                 <a:ext uri="{FF2B5EF4-FFF2-40B4-BE49-F238E27FC236}">
-                  <a16:creationId xmlns:a16="http://schemas.microsoft.com/office/drawing/2014/main" id="{AA778A2D-5D6E-872D-16E0-E2154F72147B}"/>
-                </a:ext>
-              </a:extLst>
-            </p:cNvPr>
-            <p:cNvCxnSpPr>
-              <a:cxnSpLocks/>
-              <a:stCxn id="277" idx="3"/>
-              <a:endCxn id="237" idx="1"/>
-            </p:cNvCxnSpPr>
-            <p:nvPr/>
-          </p:nvCxnSpPr>
-          <p:spPr>
-            <a:xfrm>
-              <a:off x="5817331" y="3559019"/>
-              <a:ext cx="680627" cy="243497"/>
-            </a:xfrm>
-            <a:prstGeom prst="line">
-              <a:avLst/>
-            </a:prstGeom>
-            <a:ln w="12700">
-              <a:solidFill>
-                <a:schemeClr val="tx1"/>
-              </a:solidFill>
-            </a:ln>
-          </p:spPr>
-          <p:style>
-            <a:lnRef idx="2">
-              <a:schemeClr val="accent1"/>
-            </a:lnRef>
-            <a:fillRef idx="0">
-              <a:schemeClr val="accent1"/>
-            </a:fillRef>
-            <a:effectRef idx="1">
-              <a:schemeClr val="accent1"/>
-            </a:effectRef>
-            <a:fontRef idx="minor">
-              <a:schemeClr val="tx1"/>
-            </a:fontRef>
-          </p:style>
-        </p:cxnSp>
-        <p:cxnSp>
-          <p:nvCxnSpPr>
-            <p:cNvPr id="342" name="Straight Connector 341">
-              <a:extLst>
-                <a:ext uri="{FF2B5EF4-FFF2-40B4-BE49-F238E27FC236}">
-                  <a16:creationId xmlns:a16="http://schemas.microsoft.com/office/drawing/2014/main" id="{19AEC2F8-5A21-3B40-519C-F2CA97AA5EE4}"/>
-                </a:ext>
-              </a:extLst>
-            </p:cNvPr>
-            <p:cNvCxnSpPr>
-              <a:cxnSpLocks/>
-              <a:stCxn id="201" idx="3"/>
-              <a:endCxn id="276" idx="1"/>
-            </p:cNvCxnSpPr>
-            <p:nvPr/>
-          </p:nvCxnSpPr>
-          <p:spPr>
-            <a:xfrm>
-              <a:off x="2929887" y="2336371"/>
-              <a:ext cx="676819" cy="0"/>
-            </a:xfrm>
-            <a:prstGeom prst="line">
-              <a:avLst/>
-            </a:prstGeom>
-            <a:ln w="12700">
-              <a:solidFill>
-                <a:schemeClr val="tx1"/>
-              </a:solidFill>
-              <a:prstDash val="sysDot"/>
-            </a:ln>
-          </p:spPr>
-          <p:style>
-            <a:lnRef idx="2">
-              <a:schemeClr val="accent1"/>
-            </a:lnRef>
-            <a:fillRef idx="0">
-              <a:schemeClr val="accent1"/>
-            </a:fillRef>
-            <a:effectRef idx="1">
-              <a:schemeClr val="accent1"/>
-            </a:effectRef>
-            <a:fontRef idx="minor">
-              <a:schemeClr val="tx1"/>
-            </a:fontRef>
-          </p:style>
-        </p:cxnSp>
-        <p:cxnSp>
-          <p:nvCxnSpPr>
-            <p:cNvPr id="347" name="Straight Connector 346">
-              <a:extLst>
-                <a:ext uri="{FF2B5EF4-FFF2-40B4-BE49-F238E27FC236}">
-                  <a16:creationId xmlns:a16="http://schemas.microsoft.com/office/drawing/2014/main" id="{B08242A5-1335-1B3A-F36E-92F7ACADE36C}"/>
-                </a:ext>
-              </a:extLst>
-            </p:cNvPr>
-            <p:cNvCxnSpPr>
-              <a:cxnSpLocks/>
-              <a:stCxn id="200" idx="3"/>
-              <a:endCxn id="275" idx="1"/>
-            </p:cNvCxnSpPr>
-            <p:nvPr/>
-          </p:nvCxnSpPr>
-          <p:spPr>
-            <a:xfrm>
-              <a:off x="2929886" y="2642033"/>
-              <a:ext cx="680631" cy="0"/>
-            </a:xfrm>
-            <a:prstGeom prst="line">
-              <a:avLst/>
-            </a:prstGeom>
-            <a:ln w="12700">
-              <a:solidFill>
-                <a:schemeClr val="tx1"/>
-              </a:solidFill>
-            </a:ln>
-          </p:spPr>
-          <p:style>
-            <a:lnRef idx="2">
-              <a:schemeClr val="accent1"/>
-            </a:lnRef>
-            <a:fillRef idx="0">
-              <a:schemeClr val="accent1"/>
-            </a:fillRef>
-            <a:effectRef idx="1">
-              <a:schemeClr val="accent1"/>
-            </a:effectRef>
-            <a:fontRef idx="minor">
-              <a:schemeClr val="tx1"/>
-            </a:fontRef>
-          </p:style>
-        </p:cxnSp>
-        <p:cxnSp>
-          <p:nvCxnSpPr>
-            <p:cNvPr id="350" name="Straight Connector 349">
-              <a:extLst>
-                <a:ext uri="{FF2B5EF4-FFF2-40B4-BE49-F238E27FC236}">
-                  <a16:creationId xmlns:a16="http://schemas.microsoft.com/office/drawing/2014/main" id="{03562168-DCAA-1D7C-522F-29E8943268AD}"/>
-                </a:ext>
-              </a:extLst>
-            </p:cNvPr>
-            <p:cNvCxnSpPr>
-              <a:cxnSpLocks/>
-              <a:stCxn id="202" idx="3"/>
-              <a:endCxn id="276" idx="1"/>
-            </p:cNvCxnSpPr>
-            <p:nvPr/>
-          </p:nvCxnSpPr>
-          <p:spPr>
-            <a:xfrm flipV="1">
-              <a:off x="2929886" y="2336371"/>
-              <a:ext cx="676820" cy="1222648"/>
-            </a:xfrm>
-            <a:prstGeom prst="line">
-              <a:avLst/>
-            </a:prstGeom>
-            <a:ln w="12700">
-              <a:solidFill>
-                <a:schemeClr val="tx1"/>
-              </a:solidFill>
-              <a:prstDash val="sysDot"/>
-            </a:ln>
-          </p:spPr>
-          <p:style>
-            <a:lnRef idx="2">
-              <a:schemeClr val="accent1"/>
-            </a:lnRef>
-            <a:fillRef idx="0">
-              <a:schemeClr val="accent1"/>
-            </a:fillRef>
-            <a:effectRef idx="1">
-              <a:schemeClr val="accent1"/>
-            </a:effectRef>
-            <a:fontRef idx="minor">
-              <a:schemeClr val="tx1"/>
-            </a:fontRef>
-          </p:style>
-        </p:cxnSp>
-        <p:cxnSp>
-          <p:nvCxnSpPr>
-            <p:cNvPr id="353" name="Straight Connector 352">
-              <a:extLst>
-                <a:ext uri="{FF2B5EF4-FFF2-40B4-BE49-F238E27FC236}">
-                  <a16:creationId xmlns:a16="http://schemas.microsoft.com/office/drawing/2014/main" id="{E96F9127-6829-F9FD-FB9A-07BC9E2C0085}"/>
-                </a:ext>
-              </a:extLst>
-            </p:cNvPr>
-            <p:cNvCxnSpPr>
-              <a:cxnSpLocks/>
-              <a:stCxn id="209" idx="3"/>
-              <a:endCxn id="280" idx="1"/>
-            </p:cNvCxnSpPr>
-            <p:nvPr/>
-          </p:nvCxnSpPr>
-          <p:spPr>
-            <a:xfrm>
-              <a:off x="2929886" y="3253357"/>
-              <a:ext cx="680631" cy="0"/>
-            </a:xfrm>
-            <a:prstGeom prst="line">
-              <a:avLst/>
-            </a:prstGeom>
-            <a:ln w="12700">
-              <a:solidFill>
-                <a:schemeClr val="tx1"/>
-              </a:solidFill>
-            </a:ln>
-          </p:spPr>
-          <p:style>
-            <a:lnRef idx="2">
-              <a:schemeClr val="accent1"/>
-            </a:lnRef>
-            <a:fillRef idx="0">
-              <a:schemeClr val="accent1"/>
-            </a:fillRef>
-            <a:effectRef idx="1">
-              <a:schemeClr val="accent1"/>
-            </a:effectRef>
-            <a:fontRef idx="minor">
-              <a:schemeClr val="tx1"/>
-            </a:fontRef>
-          </p:style>
-        </p:cxnSp>
-        <p:cxnSp>
-          <p:nvCxnSpPr>
-            <p:cNvPr id="356" name="Straight Connector 355">
-              <a:extLst>
-                <a:ext uri="{FF2B5EF4-FFF2-40B4-BE49-F238E27FC236}">
-                  <a16:creationId xmlns:a16="http://schemas.microsoft.com/office/drawing/2014/main" id="{85981B5D-8D58-316D-8BA0-E0B5EC7F6C13}"/>
-                </a:ext>
-              </a:extLst>
-            </p:cNvPr>
-            <p:cNvCxnSpPr>
-              <a:cxnSpLocks/>
-              <a:stCxn id="199" idx="3"/>
-              <a:endCxn id="274" idx="1"/>
-            </p:cNvCxnSpPr>
-            <p:nvPr/>
-          </p:nvCxnSpPr>
-          <p:spPr>
-            <a:xfrm>
-              <a:off x="2929886" y="2947695"/>
-              <a:ext cx="665196" cy="0"/>
-            </a:xfrm>
-            <a:prstGeom prst="line">
-              <a:avLst/>
-            </a:prstGeom>
-            <a:ln w="12700">
-              <a:solidFill>
-                <a:schemeClr val="tx1"/>
-              </a:solidFill>
-              <a:prstDash val="sysDot"/>
-            </a:ln>
-          </p:spPr>
-          <p:style>
-            <a:lnRef idx="2">
-              <a:schemeClr val="accent1"/>
-            </a:lnRef>
-            <a:fillRef idx="0">
-              <a:schemeClr val="accent1"/>
-            </a:fillRef>
-            <a:effectRef idx="1">
-              <a:schemeClr val="accent1"/>
-            </a:effectRef>
-            <a:fontRef idx="minor">
-              <a:schemeClr val="tx1"/>
-            </a:fontRef>
-          </p:style>
-        </p:cxnSp>
-        <p:sp>
-          <p:nvSpPr>
-            <p:cNvPr id="2" name="Right Brace 1">
-              <a:extLst>
-                <a:ext uri="{FF2B5EF4-FFF2-40B4-BE49-F238E27FC236}">
-                  <a16:creationId xmlns:a16="http://schemas.microsoft.com/office/drawing/2014/main" id="{2A8D8D8A-42F1-94E4-4204-822955899560}"/>
-                </a:ext>
-              </a:extLst>
-            </p:cNvPr>
-            <p:cNvSpPr/>
-            <p:nvPr/>
-          </p:nvSpPr>
-          <p:spPr>
-            <a:xfrm>
-              <a:off x="5861045" y="2206203"/>
-              <a:ext cx="82756" cy="574896"/>
-            </a:xfrm>
-            <a:prstGeom prst="rightBrace">
-              <a:avLst>
-                <a:gd name="adj1" fmla="val 88901"/>
-                <a:gd name="adj2" fmla="val 50000"/>
-              </a:avLst>
-            </a:prstGeom>
-            <a:ln w="12700">
-              <a:solidFill>
-                <a:schemeClr val="tx1"/>
-              </a:solidFill>
-            </a:ln>
-          </p:spPr>
-          <p:style>
-            <a:lnRef idx="2">
-              <a:schemeClr val="accent1"/>
-            </a:lnRef>
-            <a:fillRef idx="0">
-              <a:schemeClr val="accent1"/>
-            </a:fillRef>
-            <a:effectRef idx="1">
-              <a:schemeClr val="accent1"/>
-            </a:effectRef>
-            <a:fontRef idx="minor">
-              <a:schemeClr val="tx1"/>
-            </a:fontRef>
-          </p:style>
-          <p:txBody>
-            <a:bodyPr rtlCol="0" anchor="ctr"/>
-            <a:lstStyle/>
-            <a:p>
-              <a:pPr algn="ctr"/>
-              <a:endParaRPr lang="en-US"/>
-            </a:p>
-          </p:txBody>
-        </p:sp>
-        <p:sp>
-          <p:nvSpPr>
-            <p:cNvPr id="3" name="Right Brace 2">
-              <a:extLst>
-                <a:ext uri="{FF2B5EF4-FFF2-40B4-BE49-F238E27FC236}">
-                  <a16:creationId xmlns:a16="http://schemas.microsoft.com/office/drawing/2014/main" id="{7E2A8974-C683-F013-EE39-E7DAD5BD85E5}"/>
-                </a:ext>
-              </a:extLst>
-            </p:cNvPr>
-            <p:cNvSpPr/>
-            <p:nvPr/>
-          </p:nvSpPr>
-          <p:spPr>
-            <a:xfrm>
-              <a:off x="5861045" y="2819553"/>
-              <a:ext cx="82756" cy="574896"/>
-            </a:xfrm>
-            <a:prstGeom prst="rightBrace">
-              <a:avLst>
-                <a:gd name="adj1" fmla="val 88901"/>
-                <a:gd name="adj2" fmla="val 50000"/>
-              </a:avLst>
-            </a:prstGeom>
-            <a:ln w="12700">
-              <a:solidFill>
-                <a:schemeClr val="tx1"/>
-              </a:solidFill>
-            </a:ln>
-          </p:spPr>
-          <p:style>
-            <a:lnRef idx="2">
-              <a:schemeClr val="accent1"/>
-            </a:lnRef>
-            <a:fillRef idx="0">
-              <a:schemeClr val="accent1"/>
-            </a:fillRef>
-            <a:effectRef idx="1">
-              <a:schemeClr val="accent1"/>
-            </a:effectRef>
-            <a:fontRef idx="minor">
-              <a:schemeClr val="tx1"/>
-            </a:fontRef>
-          </p:style>
-          <p:txBody>
-            <a:bodyPr rtlCol="0" anchor="ctr"/>
-            <a:lstStyle/>
-            <a:p>
-              <a:pPr algn="ctr"/>
-              <a:endParaRPr lang="en-US"/>
-            </a:p>
-          </p:txBody>
-        </p:sp>
-        <p:grpSp>
-          <p:nvGrpSpPr>
-            <p:cNvPr id="270" name="Group 269">
-              <a:extLst>
-                <a:ext uri="{FF2B5EF4-FFF2-40B4-BE49-F238E27FC236}">
-                  <a16:creationId xmlns:a16="http://schemas.microsoft.com/office/drawing/2014/main" id="{A9832EC4-0E44-30A3-4E70-CD46C82868E4}"/>
+                  <a16:creationId xmlns:a16="http://schemas.microsoft.com/office/drawing/2014/main" id="{4AE56F1D-2249-2AE1-94DE-8B10BF948170}"/>
                 </a:ext>
               </a:extLst>
             </p:cNvPr>
@@ -11970,18 +11599,18 @@
           </p:nvGrpSpPr>
           <p:grpSpPr>
             <a:xfrm>
-              <a:off x="3594298" y="2171378"/>
-              <a:ext cx="2263961" cy="1844033"/>
-              <a:chOff x="3916949" y="3691197"/>
-              <a:chExt cx="2263961" cy="1844033"/>
+              <a:off x="608881" y="2424120"/>
+              <a:ext cx="2266340" cy="2155067"/>
+              <a:chOff x="608886" y="2557594"/>
+              <a:chExt cx="2266340" cy="2155067"/>
             </a:xfrm>
           </p:grpSpPr>
           <p:sp>
             <p:nvSpPr>
-              <p:cNvPr id="271" name="Rectangle: Rounded Corners 270">
+              <p:cNvPr id="17" name="Rectangle: Rounded Corners 16">
                 <a:extLst>
                   <a:ext uri="{FF2B5EF4-FFF2-40B4-BE49-F238E27FC236}">
-                    <a16:creationId xmlns:a16="http://schemas.microsoft.com/office/drawing/2014/main" id="{D7B4D6CF-6257-A2E5-C9CA-3300DB701243}"/>
+                    <a16:creationId xmlns:a16="http://schemas.microsoft.com/office/drawing/2014/main" id="{5326366B-BF44-4778-F1F6-CE786A847E81}"/>
                   </a:ext>
                 </a:extLst>
               </p:cNvPr>
@@ -11990,8 +11619,8 @@
             </p:nvSpPr>
             <p:spPr>
               <a:xfrm>
-                <a:off x="3916949" y="3692460"/>
-                <a:ext cx="2239249" cy="1531642"/>
+                <a:off x="611265" y="2558856"/>
+                <a:ext cx="2239249" cy="1852258"/>
               </a:xfrm>
               <a:prstGeom prst="roundRect">
                 <a:avLst>
@@ -12037,10 +11666,10 @@
           </p:sp>
           <p:sp>
             <p:nvSpPr>
-              <p:cNvPr id="272" name="Rectangle: Top Corners Rounded 271">
+              <p:cNvPr id="18" name="Rectangle: Top Corners Rounded 17">
                 <a:extLst>
                   <a:ext uri="{FF2B5EF4-FFF2-40B4-BE49-F238E27FC236}">
-                    <a16:creationId xmlns:a16="http://schemas.microsoft.com/office/drawing/2014/main" id="{9EACF07D-32F6-2137-DA90-32B66227DEC0}"/>
+                    <a16:creationId xmlns:a16="http://schemas.microsoft.com/office/drawing/2014/main" id="{83C5F20F-7B76-A66D-D809-CB58E7802E47}"/>
                   </a:ext>
                 </a:extLst>
               </p:cNvPr>
@@ -12049,7 +11678,7 @@
             </p:nvSpPr>
             <p:spPr>
               <a:xfrm rot="10800000">
-                <a:off x="3916952" y="4613172"/>
+                <a:off x="611268" y="3479568"/>
                 <a:ext cx="2239248" cy="323588"/>
               </a:xfrm>
               <a:prstGeom prst="round2SameRect">
@@ -12092,10 +11721,10 @@
           </p:sp>
           <p:sp>
             <p:nvSpPr>
-              <p:cNvPr id="273" name="Rectangle 272">
+              <p:cNvPr id="19" name="Rectangle 18">
                 <a:extLst>
                   <a:ext uri="{FF2B5EF4-FFF2-40B4-BE49-F238E27FC236}">
-                    <a16:creationId xmlns:a16="http://schemas.microsoft.com/office/drawing/2014/main" id="{D6075B7C-6B1B-AA09-28DC-A0AB26B8A4EF}"/>
+                    <a16:creationId xmlns:a16="http://schemas.microsoft.com/office/drawing/2014/main" id="{6C4B80AE-980D-567C-E97A-16DF03B48CF2}"/>
                   </a:ext>
                 </a:extLst>
               </p:cNvPr>
@@ -12104,7 +11733,7 @@
             </p:nvSpPr>
             <p:spPr>
               <a:xfrm>
-                <a:off x="3916951" y="3990559"/>
+                <a:off x="611267" y="2856955"/>
                 <a:ext cx="2239249" cy="323587"/>
               </a:xfrm>
               <a:prstGeom prst="rect">
@@ -12146,10 +11775,10 @@
           </p:sp>
           <p:sp>
             <p:nvSpPr>
-              <p:cNvPr id="274" name="TextBox 273">
+              <p:cNvPr id="20" name="TextBox 19">
                 <a:extLst>
                   <a:ext uri="{FF2B5EF4-FFF2-40B4-BE49-F238E27FC236}">
-                    <a16:creationId xmlns:a16="http://schemas.microsoft.com/office/drawing/2014/main" id="{0F1D9381-EB89-C1C5-783F-90CB3F61BF0E}"/>
+                    <a16:creationId xmlns:a16="http://schemas.microsoft.com/office/drawing/2014/main" id="{58A94C59-6DFD-C0AA-7536-D56EC102801E}"/>
                   </a:ext>
                 </a:extLst>
               </p:cNvPr>
@@ -12158,8 +11787,8 @@
             </p:nvSpPr>
             <p:spPr>
               <a:xfrm>
-                <a:off x="3917733" y="4313625"/>
-                <a:ext cx="2237684" cy="307777"/>
+                <a:off x="611268" y="3180021"/>
+                <a:ext cx="2239246" cy="307777"/>
               </a:xfrm>
               <a:prstGeom prst="rect">
                 <a:avLst/>
@@ -12185,10 +11814,10 @@
           </p:sp>
           <p:sp>
             <p:nvSpPr>
-              <p:cNvPr id="275" name="TextBox 274">
+              <p:cNvPr id="11" name="TextBox 10">
                 <a:extLst>
                   <a:ext uri="{FF2B5EF4-FFF2-40B4-BE49-F238E27FC236}">
-                    <a16:creationId xmlns:a16="http://schemas.microsoft.com/office/drawing/2014/main" id="{A8AE50F6-876D-1B55-54CD-525FF6E92E84}"/>
+                    <a16:creationId xmlns:a16="http://schemas.microsoft.com/office/drawing/2014/main" id="{4B8572A4-A13C-79AD-117B-DDCD8681A021}"/>
                   </a:ext>
                 </a:extLst>
               </p:cNvPr>
@@ -12197,8 +11826,8 @@
             </p:nvSpPr>
             <p:spPr>
               <a:xfrm>
-                <a:off x="3933168" y="4007963"/>
-                <a:ext cx="2206814" cy="307777"/>
+                <a:off x="611268" y="2874359"/>
+                <a:ext cx="2239246" cy="307777"/>
               </a:xfrm>
               <a:prstGeom prst="rect">
                 <a:avLst/>
@@ -12217,7 +11846,7 @@
                     <a:latin typeface="Times New Roman" panose="02020603050405020304" pitchFamily="18" charset="0"/>
                     <a:cs typeface="Times New Roman" panose="02020603050405020304" pitchFamily="18" charset="0"/>
                   </a:rPr>
-                  <a:t>OCUDU : </a:t>
+                  <a:t>srsRAN_4G : </a:t>
                 </a:r>
                 <a:r>
                   <a:rPr lang="en-US" sz="1400" dirty="0" err="1">
@@ -12235,10 +11864,10 @@
           </p:sp>
           <p:sp>
             <p:nvSpPr>
-              <p:cNvPr id="276" name="TextBox 275">
+              <p:cNvPr id="12" name="TextBox 11">
                 <a:extLst>
                   <a:ext uri="{FF2B5EF4-FFF2-40B4-BE49-F238E27FC236}">
-                    <a16:creationId xmlns:a16="http://schemas.microsoft.com/office/drawing/2014/main" id="{1413A169-90A0-F78F-98F8-C95D3D06F347}"/>
+                    <a16:creationId xmlns:a16="http://schemas.microsoft.com/office/drawing/2014/main" id="{06710A20-1DCC-4C29-61C0-319A8B736354}"/>
                   </a:ext>
                 </a:extLst>
               </p:cNvPr>
@@ -12247,8 +11876,8 @@
             </p:nvSpPr>
             <p:spPr>
               <a:xfrm>
-                <a:off x="3929357" y="3702301"/>
-                <a:ext cx="2206816" cy="307777"/>
+                <a:off x="608886" y="2568697"/>
+                <a:ext cx="2239248" cy="307777"/>
               </a:xfrm>
               <a:prstGeom prst="rect">
                 <a:avLst/>
@@ -12267,17 +11896,17 @@
                     <a:latin typeface="Times New Roman" panose="02020603050405020304" pitchFamily="18" charset="0"/>
                     <a:cs typeface="Times New Roman" panose="02020603050405020304" pitchFamily="18" charset="0"/>
                   </a:rPr>
-                  <a:t>OCUDU : USRP</a:t>
+                  <a:t>srsRAN_4G : USRP</a:t>
                 </a:r>
               </a:p>
             </p:txBody>
           </p:sp>
           <p:sp>
             <p:nvSpPr>
-              <p:cNvPr id="277" name="TextBox 276">
+              <p:cNvPr id="13" name="TextBox 12">
                 <a:extLst>
                   <a:ext uri="{FF2B5EF4-FFF2-40B4-BE49-F238E27FC236}">
-                    <a16:creationId xmlns:a16="http://schemas.microsoft.com/office/drawing/2014/main" id="{96F5014D-82C8-C27A-8EF4-CC8285452C10}"/>
+                    <a16:creationId xmlns:a16="http://schemas.microsoft.com/office/drawing/2014/main" id="{A1B0E106-A595-DD07-59AB-909B8974AB13}"/>
                   </a:ext>
                 </a:extLst>
               </p:cNvPr>
@@ -12286,8 +11915,8 @@
             </p:nvSpPr>
             <p:spPr>
               <a:xfrm>
-                <a:off x="3933168" y="4924949"/>
-                <a:ext cx="2206814" cy="307777"/>
+                <a:off x="611268" y="3791345"/>
+                <a:ext cx="2239246" cy="307777"/>
               </a:xfrm>
               <a:prstGeom prst="rect">
                 <a:avLst/>
@@ -12306,51 +11935,16 @@
                     <a:latin typeface="Times New Roman" panose="02020603050405020304" pitchFamily="18" charset="0"/>
                     <a:cs typeface="Times New Roman" panose="02020603050405020304" pitchFamily="18" charset="0"/>
                   </a:rPr>
-                  <a:t>O-RAN SC : E2 Simulator</a:t>
+                  <a:t>OAI : </a:t>
                 </a:r>
-              </a:p>
-            </p:txBody>
-          </p:sp>
-          <p:sp>
-            <p:nvSpPr>
-              <p:cNvPr id="278" name="TextBox 277">
-                <a:extLst>
-                  <a:ext uri="{FF2B5EF4-FFF2-40B4-BE49-F238E27FC236}">
-                    <a16:creationId xmlns:a16="http://schemas.microsoft.com/office/drawing/2014/main" id="{3BDAD62F-06B2-79B2-26C5-B0000A989788}"/>
-                  </a:ext>
-                </a:extLst>
-              </p:cNvPr>
-              <p:cNvSpPr txBox="1"/>
-              <p:nvPr/>
-            </p:nvSpPr>
-            <p:spPr>
-              <a:xfrm>
-                <a:off x="3941661" y="5227453"/>
-                <a:ext cx="2239249" cy="307777"/>
-              </a:xfrm>
-              <a:prstGeom prst="rect">
-                <a:avLst/>
-              </a:prstGeom>
-              <a:noFill/>
-            </p:spPr>
-            <p:txBody>
-              <a:bodyPr wrap="square">
-                <a:spAutoFit/>
-              </a:bodyPr>
-              <a:lstStyle/>
-              <a:p>
-                <a:pPr algn="ctr"/>
                 <a:r>
-                  <a:rPr lang="en-US" sz="1400" b="1" dirty="0">
-                    <a:solidFill>
-                      <a:schemeClr val="tx1"/>
-                    </a:solidFill>
+                  <a:rPr lang="en-US" sz="1400" dirty="0" err="1">
                     <a:latin typeface="Times New Roman" panose="02020603050405020304" pitchFamily="18" charset="0"/>
                     <a:cs typeface="Times New Roman" panose="02020603050405020304" pitchFamily="18" charset="0"/>
                   </a:rPr>
-                  <a:t>Next Generation Node B</a:t>
+                  <a:t>ZeroMQ</a:t>
                 </a:r>
-                <a:endParaRPr lang="en-US" sz="1400" b="1" dirty="0">
+                <a:endParaRPr lang="en-US" sz="1400" dirty="0">
                   <a:latin typeface="Times New Roman" panose="02020603050405020304" pitchFamily="18" charset="0"/>
                   <a:cs typeface="Times New Roman" panose="02020603050405020304" pitchFamily="18" charset="0"/>
                 </a:endParaRPr>
@@ -12359,10 +11953,10 @@
           </p:sp>
           <p:sp>
             <p:nvSpPr>
-              <p:cNvPr id="279" name="Rectangle 278">
+              <p:cNvPr id="15" name="Rectangle 14">
                 <a:extLst>
                   <a:ext uri="{FF2B5EF4-FFF2-40B4-BE49-F238E27FC236}">
-                    <a16:creationId xmlns:a16="http://schemas.microsoft.com/office/drawing/2014/main" id="{83A50FAE-7494-A2B4-0F14-D16BA097F548}"/>
+                    <a16:creationId xmlns:a16="http://schemas.microsoft.com/office/drawing/2014/main" id="{51A7EF76-D8BA-015A-4A48-AF15D528FE0E}"/>
                   </a:ext>
                 </a:extLst>
               </p:cNvPr>
@@ -12371,7 +11965,7 @@
             </p:nvSpPr>
             <p:spPr>
               <a:xfrm>
-                <a:off x="3916950" y="4615547"/>
+                <a:off x="611266" y="3481943"/>
                 <a:ext cx="2239249" cy="323587"/>
               </a:xfrm>
               <a:prstGeom prst="rect">
@@ -12413,10 +12007,10 @@
           </p:sp>
           <p:sp>
             <p:nvSpPr>
-              <p:cNvPr id="280" name="TextBox 279">
+              <p:cNvPr id="16" name="TextBox 15">
                 <a:extLst>
                   <a:ext uri="{FF2B5EF4-FFF2-40B4-BE49-F238E27FC236}">
-                    <a16:creationId xmlns:a16="http://schemas.microsoft.com/office/drawing/2014/main" id="{B116DFE2-7F21-FE11-0F36-441A58E9A2C3}"/>
+                    <a16:creationId xmlns:a16="http://schemas.microsoft.com/office/drawing/2014/main" id="{0A2671F5-C502-ED99-789F-C7260F1A0BE0}"/>
                   </a:ext>
                 </a:extLst>
               </p:cNvPr>
@@ -12425,8 +12019,8 @@
             </p:nvSpPr>
             <p:spPr>
               <a:xfrm>
-                <a:off x="3933168" y="4619287"/>
-                <a:ext cx="2206814" cy="307777"/>
+                <a:off x="611268" y="3485683"/>
+                <a:ext cx="2239246" cy="307777"/>
               </a:xfrm>
               <a:prstGeom prst="rect">
                 <a:avLst/>
@@ -12442,27 +12036,114 @@
                 <a:pPr algn="ctr"/>
                 <a:r>
                   <a:rPr lang="en-US" sz="1400" dirty="0">
-                    <a:solidFill>
-                      <a:schemeClr val="tx1"/>
-                    </a:solidFill>
                     <a:latin typeface="Times New Roman" panose="02020603050405020304" pitchFamily="18" charset="0"/>
                     <a:cs typeface="Times New Roman" panose="02020603050405020304" pitchFamily="18" charset="0"/>
                   </a:rPr>
                   <a:t>OAI : RF Simulator</a:t>
                 </a:r>
-                <a:endParaRPr lang="en-US" sz="1400" dirty="0">
-                  <a:latin typeface="Times New Roman" panose="02020603050405020304" pitchFamily="18" charset="0"/>
-                  <a:cs typeface="Times New Roman" panose="02020603050405020304" pitchFamily="18" charset="0"/>
-                </a:endParaRPr>
               </a:p>
             </p:txBody>
           </p:sp>
           <p:sp>
             <p:nvSpPr>
-              <p:cNvPr id="281" name="Rectangle: Rounded Corners 280">
+              <p:cNvPr id="48" name="Rectangle: Top Corners Rounded 47">
                 <a:extLst>
                   <a:ext uri="{FF2B5EF4-FFF2-40B4-BE49-F238E27FC236}">
-                    <a16:creationId xmlns:a16="http://schemas.microsoft.com/office/drawing/2014/main" id="{4D54D83B-619F-C188-C380-2C35CAF9BF85}"/>
+                    <a16:creationId xmlns:a16="http://schemas.microsoft.com/office/drawing/2014/main" id="{2CD69175-0632-D5B9-44D7-2F51443774BB}"/>
+                  </a:ext>
+                </a:extLst>
+              </p:cNvPr>
+              <p:cNvSpPr/>
+              <p:nvPr/>
+            </p:nvSpPr>
+            <p:spPr>
+              <a:xfrm rot="10800000">
+                <a:off x="611267" y="4087525"/>
+                <a:ext cx="2239248" cy="323588"/>
+              </a:xfrm>
+              <a:prstGeom prst="round2SameRect">
+                <a:avLst>
+                  <a:gd name="adj1" fmla="val 28890"/>
+                  <a:gd name="adj2" fmla="val 0"/>
+                </a:avLst>
+              </a:prstGeom>
+              <a:solidFill>
+                <a:srgbClr val="F2F2F2"/>
+              </a:solidFill>
+              <a:ln>
+                <a:noFill/>
+              </a:ln>
+            </p:spPr>
+            <p:style>
+              <a:lnRef idx="2">
+                <a:schemeClr val="accent1">
+                  <a:shade val="15000"/>
+                </a:schemeClr>
+              </a:lnRef>
+              <a:fillRef idx="1">
+                <a:schemeClr val="accent1"/>
+              </a:fillRef>
+              <a:effectRef idx="0">
+                <a:schemeClr val="accent1"/>
+              </a:effectRef>
+              <a:fontRef idx="minor">
+                <a:schemeClr val="lt1"/>
+              </a:fontRef>
+            </p:style>
+            <p:txBody>
+              <a:bodyPr rtlCol="0" anchor="ctr"/>
+              <a:lstStyle/>
+              <a:p>
+                <a:pPr algn="ctr"/>
+                <a:endParaRPr lang="en-US"/>
+              </a:p>
+            </p:txBody>
+          </p:sp>
+          <p:sp>
+            <p:nvSpPr>
+              <p:cNvPr id="49" name="TextBox 48">
+                <a:extLst>
+                  <a:ext uri="{FF2B5EF4-FFF2-40B4-BE49-F238E27FC236}">
+                    <a16:creationId xmlns:a16="http://schemas.microsoft.com/office/drawing/2014/main" id="{99583430-39FC-D84E-C047-47E613A3C33D}"/>
+                  </a:ext>
+                </a:extLst>
+              </p:cNvPr>
+              <p:cNvSpPr txBox="1"/>
+              <p:nvPr/>
+            </p:nvSpPr>
+            <p:spPr>
+              <a:xfrm>
+                <a:off x="611267" y="4094498"/>
+                <a:ext cx="2239247" cy="307777"/>
+              </a:xfrm>
+              <a:prstGeom prst="rect">
+                <a:avLst/>
+              </a:prstGeom>
+              <a:noFill/>
+            </p:spPr>
+            <p:txBody>
+              <a:bodyPr wrap="square">
+                <a:spAutoFit/>
+              </a:bodyPr>
+              <a:lstStyle/>
+              <a:p>
+                <a:pPr algn="ctr"/>
+                <a:r>
+                  <a:rPr lang="en-US" sz="1400" dirty="0">
+                    <a:latin typeface="Times New Roman" panose="02020603050405020304" pitchFamily="18" charset="0"/>
+                    <a:cs typeface="Times New Roman" panose="02020603050405020304" pitchFamily="18" charset="0"/>
+                  </a:rPr>
+                  <a:t>5G Mobile Phone</a:t>
+                </a:r>
+              </a:p>
+            </p:txBody>
+          </p:sp>
+          <p:sp>
+            <p:nvSpPr>
+              <p:cNvPr id="31" name="Rectangle: Rounded Corners 30">
+                <a:extLst>
+                  <a:ext uri="{FF2B5EF4-FFF2-40B4-BE49-F238E27FC236}">
+                    <a16:creationId xmlns:a16="http://schemas.microsoft.com/office/drawing/2014/main" id="{1D23B8DC-980F-BD08-37D0-4B315BA91DAC}"/>
                   </a:ext>
                 </a:extLst>
               </p:cNvPr>
@@ -12471,12 +12152,12 @@
             </p:nvSpPr>
             <p:spPr>
               <a:xfrm>
-                <a:off x="3916951" y="3691197"/>
-                <a:ext cx="2239249" cy="1534218"/>
+                <a:off x="611267" y="2557594"/>
+                <a:ext cx="2239249" cy="1844074"/>
               </a:xfrm>
               <a:prstGeom prst="roundRect">
                 <a:avLst>
-                  <a:gd name="adj" fmla="val 5819"/>
+                  <a:gd name="adj" fmla="val 5122"/>
                 </a:avLst>
               </a:prstGeom>
               <a:noFill/>
@@ -12514,13 +12195,59 @@
               </a:p>
             </p:txBody>
           </p:sp>
+          <p:sp>
+            <p:nvSpPr>
+              <p:cNvPr id="59" name="TextBox 58">
+                <a:extLst>
+                  <a:ext uri="{FF2B5EF4-FFF2-40B4-BE49-F238E27FC236}">
+                    <a16:creationId xmlns:a16="http://schemas.microsoft.com/office/drawing/2014/main" id="{AE2878C4-D95E-C9C7-90C9-522FEF5B4212}"/>
+                  </a:ext>
+                </a:extLst>
+              </p:cNvPr>
+              <p:cNvSpPr txBox="1"/>
+              <p:nvPr/>
+            </p:nvSpPr>
+            <p:spPr>
+              <a:xfrm>
+                <a:off x="635977" y="4404884"/>
+                <a:ext cx="2239249" cy="307777"/>
+              </a:xfrm>
+              <a:prstGeom prst="rect">
+                <a:avLst/>
+              </a:prstGeom>
+              <a:noFill/>
+            </p:spPr>
+            <p:txBody>
+              <a:bodyPr wrap="square">
+                <a:spAutoFit/>
+              </a:bodyPr>
+              <a:lstStyle/>
+              <a:p>
+                <a:pPr algn="ctr"/>
+                <a:r>
+                  <a:rPr lang="en-US" sz="1400" b="1" dirty="0">
+                    <a:solidFill>
+                      <a:schemeClr val="tx1"/>
+                    </a:solidFill>
+                    <a:latin typeface="Times New Roman" panose="02020603050405020304" pitchFamily="18" charset="0"/>
+                    <a:cs typeface="Times New Roman" panose="02020603050405020304" pitchFamily="18" charset="0"/>
+                  </a:rPr>
+                  <a:t>User Equipment</a:t>
+                </a:r>
+                <a:endParaRPr lang="en-US" sz="1400" b="1" dirty="0">
+                  <a:latin typeface="Times New Roman" panose="02020603050405020304" pitchFamily="18" charset="0"/>
+                  <a:cs typeface="Times New Roman" panose="02020603050405020304" pitchFamily="18" charset="0"/>
+                </a:endParaRPr>
+              </a:p>
+            </p:txBody>
+          </p:sp>
         </p:grpSp>
         <p:grpSp>
           <p:nvGrpSpPr>
-            <p:cNvPr id="227" name="Group 226">
+            <p:cNvPr id="224" name="Group 223">
               <a:extLst>
                 <a:ext uri="{FF2B5EF4-FFF2-40B4-BE49-F238E27FC236}">
-                  <a16:creationId xmlns:a16="http://schemas.microsoft.com/office/drawing/2014/main" id="{7A854522-CD14-6BE1-A26D-F4B8091652DF}"/>
+                  <a16:creationId xmlns:a16="http://schemas.microsoft.com/office/drawing/2014/main" id="{881E5305-5644-641D-AE38-F323C909140A}"/>
                 </a:ext>
               </a:extLst>
             </p:cNvPr>
@@ -12529,18 +12256,18 @@
           </p:nvGrpSpPr>
           <p:grpSpPr>
             <a:xfrm>
-              <a:off x="690637" y="2171378"/>
-              <a:ext cx="2263961" cy="1844033"/>
-              <a:chOff x="3916949" y="3691197"/>
-              <a:chExt cx="2263961" cy="1844033"/>
+              <a:off x="3519144" y="2424120"/>
+              <a:ext cx="2266340" cy="2155067"/>
+              <a:chOff x="608886" y="2557594"/>
+              <a:chExt cx="2266340" cy="2155067"/>
             </a:xfrm>
           </p:grpSpPr>
           <p:sp>
             <p:nvSpPr>
-              <p:cNvPr id="210" name="Rectangle: Rounded Corners 209">
+              <p:cNvPr id="225" name="Rectangle: Rounded Corners 224">
                 <a:extLst>
                   <a:ext uri="{FF2B5EF4-FFF2-40B4-BE49-F238E27FC236}">
-                    <a16:creationId xmlns:a16="http://schemas.microsoft.com/office/drawing/2014/main" id="{70ADBDF1-D32C-AE54-601E-E1D8D6CDE9CC}"/>
+                    <a16:creationId xmlns:a16="http://schemas.microsoft.com/office/drawing/2014/main" id="{70C1ACE0-5CEE-AE25-C2E2-46E65B414436}"/>
                   </a:ext>
                 </a:extLst>
               </p:cNvPr>
@@ -12549,8 +12276,8 @@
             </p:nvSpPr>
             <p:spPr>
               <a:xfrm>
-                <a:off x="3916949" y="3692460"/>
-                <a:ext cx="2239249" cy="1531642"/>
+                <a:off x="611265" y="2558856"/>
+                <a:ext cx="2239249" cy="1852258"/>
               </a:xfrm>
               <a:prstGeom prst="roundRect">
                 <a:avLst>
@@ -12596,10 +12323,10 @@
           </p:sp>
           <p:sp>
             <p:nvSpPr>
-              <p:cNvPr id="195" name="Rectangle: Top Corners Rounded 194">
+              <p:cNvPr id="226" name="Rectangle: Top Corners Rounded 225">
                 <a:extLst>
                   <a:ext uri="{FF2B5EF4-FFF2-40B4-BE49-F238E27FC236}">
-                    <a16:creationId xmlns:a16="http://schemas.microsoft.com/office/drawing/2014/main" id="{49EE529D-3822-3C34-2FCF-96301FCBDE2B}"/>
+                    <a16:creationId xmlns:a16="http://schemas.microsoft.com/office/drawing/2014/main" id="{54DAEA34-751B-46D1-7019-7998AB96F041}"/>
                   </a:ext>
                 </a:extLst>
               </p:cNvPr>
@@ -12608,7 +12335,7 @@
             </p:nvSpPr>
             <p:spPr>
               <a:xfrm rot="10800000">
-                <a:off x="3916952" y="4613172"/>
+                <a:off x="611268" y="3479568"/>
                 <a:ext cx="2239248" cy="323588"/>
               </a:xfrm>
               <a:prstGeom prst="round2SameRect">
@@ -12651,10 +12378,10 @@
           </p:sp>
           <p:sp>
             <p:nvSpPr>
-              <p:cNvPr id="197" name="Rectangle 196">
+              <p:cNvPr id="228" name="Rectangle 227">
                 <a:extLst>
                   <a:ext uri="{FF2B5EF4-FFF2-40B4-BE49-F238E27FC236}">
-                    <a16:creationId xmlns:a16="http://schemas.microsoft.com/office/drawing/2014/main" id="{9D8422CA-4FF5-7187-2D0D-ADC45EB74032}"/>
+                    <a16:creationId xmlns:a16="http://schemas.microsoft.com/office/drawing/2014/main" id="{EDA35506-513E-07ED-C864-16AB32963656}"/>
                   </a:ext>
                 </a:extLst>
               </p:cNvPr>
@@ -12663,7 +12390,7 @@
             </p:nvSpPr>
             <p:spPr>
               <a:xfrm>
-                <a:off x="3916951" y="3990559"/>
+                <a:off x="611267" y="2856955"/>
                 <a:ext cx="2239249" cy="323587"/>
               </a:xfrm>
               <a:prstGeom prst="rect">
@@ -12705,10 +12432,10 @@
           </p:sp>
           <p:sp>
             <p:nvSpPr>
-              <p:cNvPr id="199" name="TextBox 198">
+              <p:cNvPr id="229" name="TextBox 228">
                 <a:extLst>
                   <a:ext uri="{FF2B5EF4-FFF2-40B4-BE49-F238E27FC236}">
-                    <a16:creationId xmlns:a16="http://schemas.microsoft.com/office/drawing/2014/main" id="{9F8EDD21-A0C6-EE8F-DB27-D2CD5236A366}"/>
+                    <a16:creationId xmlns:a16="http://schemas.microsoft.com/office/drawing/2014/main" id="{929AEEDD-1F08-CBCD-ED23-4FB514B8167E}"/>
                   </a:ext>
                 </a:extLst>
               </p:cNvPr>
@@ -12717,7 +12444,7 @@
             </p:nvSpPr>
             <p:spPr>
               <a:xfrm>
-                <a:off x="3916952" y="4313625"/>
+                <a:off x="611268" y="3180021"/>
                 <a:ext cx="2239246" cy="307777"/>
               </a:xfrm>
               <a:prstGeom prst="rect">
@@ -12744,10 +12471,10 @@
           </p:sp>
           <p:sp>
             <p:nvSpPr>
-              <p:cNvPr id="200" name="TextBox 199">
+              <p:cNvPr id="230" name="TextBox 229">
                 <a:extLst>
                   <a:ext uri="{FF2B5EF4-FFF2-40B4-BE49-F238E27FC236}">
-                    <a16:creationId xmlns:a16="http://schemas.microsoft.com/office/drawing/2014/main" id="{F4E12DF1-F6ED-9A1D-33B3-ACB6D007555A}"/>
+                    <a16:creationId xmlns:a16="http://schemas.microsoft.com/office/drawing/2014/main" id="{120A546E-855B-D764-8C49-2ED787801D36}"/>
                   </a:ext>
                 </a:extLst>
               </p:cNvPr>
@@ -12756,7 +12483,7 @@
             </p:nvSpPr>
             <p:spPr>
               <a:xfrm>
-                <a:off x="3916952" y="4007963"/>
+                <a:off x="611268" y="2874359"/>
                 <a:ext cx="2239246" cy="307777"/>
               </a:xfrm>
               <a:prstGeom prst="rect">
@@ -12776,7 +12503,7 @@
                     <a:latin typeface="Times New Roman" panose="02020603050405020304" pitchFamily="18" charset="0"/>
                     <a:cs typeface="Times New Roman" panose="02020603050405020304" pitchFamily="18" charset="0"/>
                   </a:rPr>
-                  <a:t>srsRAN_4G : </a:t>
+                  <a:t>OCUDU : </a:t>
                 </a:r>
                 <a:r>
                   <a:rPr lang="en-US" sz="1400" dirty="0" err="1">
@@ -12794,10 +12521,10 @@
           </p:sp>
           <p:sp>
             <p:nvSpPr>
-              <p:cNvPr id="201" name="TextBox 200">
+              <p:cNvPr id="232" name="TextBox 231">
                 <a:extLst>
                   <a:ext uri="{FF2B5EF4-FFF2-40B4-BE49-F238E27FC236}">
-                    <a16:creationId xmlns:a16="http://schemas.microsoft.com/office/drawing/2014/main" id="{0E36D728-D080-9470-0E71-4C5261DE33FD}"/>
+                    <a16:creationId xmlns:a16="http://schemas.microsoft.com/office/drawing/2014/main" id="{4E7CFEBA-E8E0-79C8-7D4B-7CC7BD9A47EA}"/>
                   </a:ext>
                 </a:extLst>
               </p:cNvPr>
@@ -12806,7 +12533,7 @@
             </p:nvSpPr>
             <p:spPr>
               <a:xfrm>
-                <a:off x="3916951" y="3702301"/>
+                <a:off x="608886" y="2568697"/>
                 <a:ext cx="2239248" cy="307777"/>
               </a:xfrm>
               <a:prstGeom prst="rect">
@@ -12826,17 +12553,17 @@
                     <a:latin typeface="Times New Roman" panose="02020603050405020304" pitchFamily="18" charset="0"/>
                     <a:cs typeface="Times New Roman" panose="02020603050405020304" pitchFamily="18" charset="0"/>
                   </a:rPr>
-                  <a:t>srsRAN_4G : USRP</a:t>
+                  <a:t>OCUDU : USRP</a:t>
                 </a:r>
               </a:p>
             </p:txBody>
           </p:sp>
           <p:sp>
             <p:nvSpPr>
-              <p:cNvPr id="202" name="TextBox 201">
+              <p:cNvPr id="242" name="TextBox 241">
                 <a:extLst>
                   <a:ext uri="{FF2B5EF4-FFF2-40B4-BE49-F238E27FC236}">
-                    <a16:creationId xmlns:a16="http://schemas.microsoft.com/office/drawing/2014/main" id="{16FB98B6-AA11-EA1B-485F-18B0C2E0C573}"/>
+                    <a16:creationId xmlns:a16="http://schemas.microsoft.com/office/drawing/2014/main" id="{788AA010-BCF6-EAAA-1F10-C1594962B19F}"/>
                   </a:ext>
                 </a:extLst>
               </p:cNvPr>
@@ -12845,7 +12572,7 @@
             </p:nvSpPr>
             <p:spPr>
               <a:xfrm>
-                <a:off x="3916952" y="4924949"/>
+                <a:off x="611268" y="3791345"/>
                 <a:ext cx="2239246" cy="307777"/>
               </a:xfrm>
               <a:prstGeom prst="rect">
@@ -12865,51 +12592,16 @@
                     <a:latin typeface="Times New Roman" panose="02020603050405020304" pitchFamily="18" charset="0"/>
                     <a:cs typeface="Times New Roman" panose="02020603050405020304" pitchFamily="18" charset="0"/>
                   </a:rPr>
-                  <a:t>5G Mobile Phone</a:t>
+                  <a:t>OAI : </a:t>
                 </a:r>
-              </a:p>
-            </p:txBody>
-          </p:sp>
-          <p:sp>
-            <p:nvSpPr>
-              <p:cNvPr id="203" name="TextBox 202">
-                <a:extLst>
-                  <a:ext uri="{FF2B5EF4-FFF2-40B4-BE49-F238E27FC236}">
-                    <a16:creationId xmlns:a16="http://schemas.microsoft.com/office/drawing/2014/main" id="{2BC8A388-630D-2F0A-E362-E58FB4DE4B4B}"/>
-                  </a:ext>
-                </a:extLst>
-              </p:cNvPr>
-              <p:cNvSpPr txBox="1"/>
-              <p:nvPr/>
-            </p:nvSpPr>
-            <p:spPr>
-              <a:xfrm>
-                <a:off x="3941661" y="5227453"/>
-                <a:ext cx="2239249" cy="307777"/>
-              </a:xfrm>
-              <a:prstGeom prst="rect">
-                <a:avLst/>
-              </a:prstGeom>
-              <a:noFill/>
-            </p:spPr>
-            <p:txBody>
-              <a:bodyPr wrap="square">
-                <a:spAutoFit/>
-              </a:bodyPr>
-              <a:lstStyle/>
-              <a:p>
-                <a:pPr algn="ctr"/>
                 <a:r>
-                  <a:rPr lang="en-US" sz="1400" b="1" dirty="0">
-                    <a:solidFill>
-                      <a:schemeClr val="tx1"/>
-                    </a:solidFill>
+                  <a:rPr lang="en-US" sz="1400" dirty="0" err="1">
                     <a:latin typeface="Times New Roman" panose="02020603050405020304" pitchFamily="18" charset="0"/>
                     <a:cs typeface="Times New Roman" panose="02020603050405020304" pitchFamily="18" charset="0"/>
                   </a:rPr>
-                  <a:t>User Equipment</a:t>
+                  <a:t>ZeroMQ</a:t>
                 </a:r>
-                <a:endParaRPr lang="en-US" sz="1400" b="1" dirty="0">
+                <a:endParaRPr lang="en-US" sz="1400" dirty="0">
                   <a:latin typeface="Times New Roman" panose="02020603050405020304" pitchFamily="18" charset="0"/>
                   <a:cs typeface="Times New Roman" panose="02020603050405020304" pitchFamily="18" charset="0"/>
                 </a:endParaRPr>
@@ -12918,10 +12610,10 @@
           </p:sp>
           <p:sp>
             <p:nvSpPr>
-              <p:cNvPr id="208" name="Rectangle 207">
+              <p:cNvPr id="243" name="Rectangle 242">
                 <a:extLst>
                   <a:ext uri="{FF2B5EF4-FFF2-40B4-BE49-F238E27FC236}">
-                    <a16:creationId xmlns:a16="http://schemas.microsoft.com/office/drawing/2014/main" id="{212011C4-EBF3-EB29-D80C-BEAECBCA7B62}"/>
+                    <a16:creationId xmlns:a16="http://schemas.microsoft.com/office/drawing/2014/main" id="{39A049C2-37AF-9A22-0065-8CE6E557EDBD}"/>
                   </a:ext>
                 </a:extLst>
               </p:cNvPr>
@@ -12930,7 +12622,7 @@
             </p:nvSpPr>
             <p:spPr>
               <a:xfrm>
-                <a:off x="3916950" y="4615547"/>
+                <a:off x="611266" y="3481943"/>
                 <a:ext cx="2239249" cy="323587"/>
               </a:xfrm>
               <a:prstGeom prst="rect">
@@ -12972,10 +12664,10 @@
           </p:sp>
           <p:sp>
             <p:nvSpPr>
-              <p:cNvPr id="209" name="TextBox 208">
+              <p:cNvPr id="245" name="TextBox 244">
                 <a:extLst>
                   <a:ext uri="{FF2B5EF4-FFF2-40B4-BE49-F238E27FC236}">
-                    <a16:creationId xmlns:a16="http://schemas.microsoft.com/office/drawing/2014/main" id="{84E8EFF1-03BE-6A27-CF24-939A0A21B022}"/>
+                    <a16:creationId xmlns:a16="http://schemas.microsoft.com/office/drawing/2014/main" id="{E1DBF0F3-0626-63A5-8251-79D0BEB8750D}"/>
                   </a:ext>
                 </a:extLst>
               </p:cNvPr>
@@ -12984,7 +12676,7 @@
             </p:nvSpPr>
             <p:spPr>
               <a:xfrm>
-                <a:off x="3916952" y="4619287"/>
+                <a:off x="611268" y="3485683"/>
                 <a:ext cx="2239246" cy="307777"/>
               </a:xfrm>
               <a:prstGeom prst="rect">
@@ -13011,10 +12703,104 @@
           </p:sp>
           <p:sp>
             <p:nvSpPr>
-              <p:cNvPr id="198" name="Rectangle: Rounded Corners 197">
+              <p:cNvPr id="246" name="Rectangle: Top Corners Rounded 245">
                 <a:extLst>
                   <a:ext uri="{FF2B5EF4-FFF2-40B4-BE49-F238E27FC236}">
-                    <a16:creationId xmlns:a16="http://schemas.microsoft.com/office/drawing/2014/main" id="{4F21D880-AC22-436C-BBFD-41B6AC956B7F}"/>
+                    <a16:creationId xmlns:a16="http://schemas.microsoft.com/office/drawing/2014/main" id="{8C2096E6-DAC9-EEFD-D59F-4F3BF5F39DE2}"/>
+                  </a:ext>
+                </a:extLst>
+              </p:cNvPr>
+              <p:cNvSpPr/>
+              <p:nvPr/>
+            </p:nvSpPr>
+            <p:spPr>
+              <a:xfrm rot="10800000">
+                <a:off x="611267" y="4087525"/>
+                <a:ext cx="2239248" cy="323588"/>
+              </a:xfrm>
+              <a:prstGeom prst="round2SameRect">
+                <a:avLst>
+                  <a:gd name="adj1" fmla="val 28890"/>
+                  <a:gd name="adj2" fmla="val 0"/>
+                </a:avLst>
+              </a:prstGeom>
+              <a:solidFill>
+                <a:srgbClr val="F2F2F2"/>
+              </a:solidFill>
+              <a:ln>
+                <a:noFill/>
+              </a:ln>
+            </p:spPr>
+            <p:style>
+              <a:lnRef idx="2">
+                <a:schemeClr val="accent1">
+                  <a:shade val="15000"/>
+                </a:schemeClr>
+              </a:lnRef>
+              <a:fillRef idx="1">
+                <a:schemeClr val="accent1"/>
+              </a:fillRef>
+              <a:effectRef idx="0">
+                <a:schemeClr val="accent1"/>
+              </a:effectRef>
+              <a:fontRef idx="minor">
+                <a:schemeClr val="lt1"/>
+              </a:fontRef>
+            </p:style>
+            <p:txBody>
+              <a:bodyPr rtlCol="0" anchor="ctr"/>
+              <a:lstStyle/>
+              <a:p>
+                <a:pPr algn="ctr"/>
+                <a:endParaRPr lang="en-US"/>
+              </a:p>
+            </p:txBody>
+          </p:sp>
+          <p:sp>
+            <p:nvSpPr>
+              <p:cNvPr id="248" name="TextBox 247">
+                <a:extLst>
+                  <a:ext uri="{FF2B5EF4-FFF2-40B4-BE49-F238E27FC236}">
+                    <a16:creationId xmlns:a16="http://schemas.microsoft.com/office/drawing/2014/main" id="{AD98A4BE-406F-D74A-BF79-B5F36B345B62}"/>
+                  </a:ext>
+                </a:extLst>
+              </p:cNvPr>
+              <p:cNvSpPr txBox="1"/>
+              <p:nvPr/>
+            </p:nvSpPr>
+            <p:spPr>
+              <a:xfrm>
+                <a:off x="611267" y="4094498"/>
+                <a:ext cx="2239247" cy="307777"/>
+              </a:xfrm>
+              <a:prstGeom prst="rect">
+                <a:avLst/>
+              </a:prstGeom>
+              <a:noFill/>
+            </p:spPr>
+            <p:txBody>
+              <a:bodyPr wrap="square">
+                <a:spAutoFit/>
+              </a:bodyPr>
+              <a:lstStyle/>
+              <a:p>
+                <a:pPr algn="ctr"/>
+                <a:r>
+                  <a:rPr lang="en-US" sz="1400" dirty="0">
+                    <a:latin typeface="Times New Roman" panose="02020603050405020304" pitchFamily="18" charset="0"/>
+                    <a:cs typeface="Times New Roman" panose="02020603050405020304" pitchFamily="18" charset="0"/>
+                  </a:rPr>
+                  <a:t>O-RAN SC : E2 Simulator</a:t>
+                </a:r>
+              </a:p>
+            </p:txBody>
+          </p:sp>
+          <p:sp>
+            <p:nvSpPr>
+              <p:cNvPr id="249" name="Rectangle: Rounded Corners 248">
+                <a:extLst>
+                  <a:ext uri="{FF2B5EF4-FFF2-40B4-BE49-F238E27FC236}">
+                    <a16:creationId xmlns:a16="http://schemas.microsoft.com/office/drawing/2014/main" id="{975E562F-27D8-964F-F42D-B6B9E8D61C00}"/>
                   </a:ext>
                 </a:extLst>
               </p:cNvPr>
@@ -13023,12 +12809,12 @@
             </p:nvSpPr>
             <p:spPr>
               <a:xfrm>
-                <a:off x="3916951" y="3691197"/>
-                <a:ext cx="2239249" cy="1534218"/>
+                <a:off x="611267" y="2557594"/>
+                <a:ext cx="2239249" cy="1844074"/>
               </a:xfrm>
               <a:prstGeom prst="roundRect">
                 <a:avLst>
-                  <a:gd name="adj" fmla="val 5819"/>
+                  <a:gd name="adj" fmla="val 5122"/>
                 </a:avLst>
               </a:prstGeom>
               <a:noFill/>
@@ -13066,13 +12852,428 @@
               </a:p>
             </p:txBody>
           </p:sp>
+          <p:sp>
+            <p:nvSpPr>
+              <p:cNvPr id="250" name="TextBox 249">
+                <a:extLst>
+                  <a:ext uri="{FF2B5EF4-FFF2-40B4-BE49-F238E27FC236}">
+                    <a16:creationId xmlns:a16="http://schemas.microsoft.com/office/drawing/2014/main" id="{DC07EEC0-29CB-8C50-4237-2AFB1DCF53C6}"/>
+                  </a:ext>
+                </a:extLst>
+              </p:cNvPr>
+              <p:cNvSpPr txBox="1"/>
+              <p:nvPr/>
+            </p:nvSpPr>
+            <p:spPr>
+              <a:xfrm>
+                <a:off x="635977" y="4404884"/>
+                <a:ext cx="2239249" cy="307777"/>
+              </a:xfrm>
+              <a:prstGeom prst="rect">
+                <a:avLst/>
+              </a:prstGeom>
+              <a:noFill/>
+            </p:spPr>
+            <p:txBody>
+              <a:bodyPr wrap="square">
+                <a:spAutoFit/>
+              </a:bodyPr>
+              <a:lstStyle/>
+              <a:p>
+                <a:pPr algn="ctr"/>
+                <a:r>
+                  <a:rPr lang="en-US" sz="1400" b="1" dirty="0">
+                    <a:latin typeface="Times New Roman" panose="02020603050405020304" pitchFamily="18" charset="0"/>
+                    <a:cs typeface="Times New Roman" panose="02020603050405020304" pitchFamily="18" charset="0"/>
+                  </a:rPr>
+                  <a:t>Next Generation Node B</a:t>
+                </a:r>
+              </a:p>
+            </p:txBody>
+          </p:sp>
         </p:grpSp>
+        <p:cxnSp>
+          <p:nvCxnSpPr>
+            <p:cNvPr id="380" name="Straight Connector 379">
+              <a:extLst>
+                <a:ext uri="{FF2B5EF4-FFF2-40B4-BE49-F238E27FC236}">
+                  <a16:creationId xmlns:a16="http://schemas.microsoft.com/office/drawing/2014/main" id="{B00A34EA-5CEF-41E0-E2F9-C22C52500688}"/>
+                </a:ext>
+              </a:extLst>
+            </p:cNvPr>
+            <p:cNvCxnSpPr>
+              <a:cxnSpLocks/>
+              <a:stCxn id="248" idx="3"/>
+              <a:endCxn id="237" idx="1"/>
+            </p:cNvCxnSpPr>
+            <p:nvPr/>
+          </p:nvCxnSpPr>
+          <p:spPr>
+            <a:xfrm>
+              <a:off x="5760772" y="4114913"/>
+              <a:ext cx="657814" cy="73860"/>
+            </a:xfrm>
+            <a:prstGeom prst="line">
+              <a:avLst/>
+            </a:prstGeom>
+            <a:ln w="12700">
+              <a:solidFill>
+                <a:schemeClr val="tx1"/>
+              </a:solidFill>
+            </a:ln>
+          </p:spPr>
+          <p:style>
+            <a:lnRef idx="2">
+              <a:schemeClr val="accent1"/>
+            </a:lnRef>
+            <a:fillRef idx="0">
+              <a:schemeClr val="accent1"/>
+            </a:fillRef>
+            <a:effectRef idx="1">
+              <a:schemeClr val="accent1"/>
+            </a:effectRef>
+            <a:fontRef idx="minor">
+              <a:schemeClr val="tx1"/>
+            </a:fontRef>
+          </p:style>
+        </p:cxnSp>
+        <p:cxnSp>
+          <p:nvCxnSpPr>
+            <p:cNvPr id="342" name="Straight Connector 341">
+              <a:extLst>
+                <a:ext uri="{FF2B5EF4-FFF2-40B4-BE49-F238E27FC236}">
+                  <a16:creationId xmlns:a16="http://schemas.microsoft.com/office/drawing/2014/main" id="{2EF2EF93-7629-4ED0-CDE9-C57A4B4175A8}"/>
+                </a:ext>
+              </a:extLst>
+            </p:cNvPr>
+            <p:cNvCxnSpPr>
+              <a:cxnSpLocks/>
+              <a:stCxn id="12" idx="3"/>
+              <a:endCxn id="232" idx="1"/>
+            </p:cNvCxnSpPr>
+            <p:nvPr/>
+          </p:nvCxnSpPr>
+          <p:spPr>
+            <a:xfrm>
+              <a:off x="2848129" y="2589112"/>
+              <a:ext cx="671015" cy="0"/>
+            </a:xfrm>
+            <a:prstGeom prst="line">
+              <a:avLst/>
+            </a:prstGeom>
+            <a:ln w="12700">
+              <a:solidFill>
+                <a:schemeClr val="tx1"/>
+              </a:solidFill>
+              <a:prstDash val="sysDot"/>
+            </a:ln>
+          </p:spPr>
+          <p:style>
+            <a:lnRef idx="2">
+              <a:schemeClr val="accent1"/>
+            </a:lnRef>
+            <a:fillRef idx="0">
+              <a:schemeClr val="accent1"/>
+            </a:fillRef>
+            <a:effectRef idx="1">
+              <a:schemeClr val="accent1"/>
+            </a:effectRef>
+            <a:fontRef idx="minor">
+              <a:schemeClr val="tx1"/>
+            </a:fontRef>
+          </p:style>
+        </p:cxnSp>
+        <p:cxnSp>
+          <p:nvCxnSpPr>
+            <p:cNvPr id="347" name="Straight Connector 346">
+              <a:extLst>
+                <a:ext uri="{FF2B5EF4-FFF2-40B4-BE49-F238E27FC236}">
+                  <a16:creationId xmlns:a16="http://schemas.microsoft.com/office/drawing/2014/main" id="{BE8C6A32-1A51-70EF-BC00-CCC9395CB129}"/>
+                </a:ext>
+              </a:extLst>
+            </p:cNvPr>
+            <p:cNvCxnSpPr>
+              <a:cxnSpLocks/>
+              <a:stCxn id="11" idx="3"/>
+              <a:endCxn id="230" idx="1"/>
+            </p:cNvCxnSpPr>
+            <p:nvPr/>
+          </p:nvCxnSpPr>
+          <p:spPr>
+            <a:xfrm>
+              <a:off x="2850509" y="2894774"/>
+              <a:ext cx="671017" cy="0"/>
+            </a:xfrm>
+            <a:prstGeom prst="line">
+              <a:avLst/>
+            </a:prstGeom>
+            <a:ln w="12700">
+              <a:solidFill>
+                <a:schemeClr val="tx1"/>
+              </a:solidFill>
+            </a:ln>
+          </p:spPr>
+          <p:style>
+            <a:lnRef idx="2">
+              <a:schemeClr val="accent1"/>
+            </a:lnRef>
+            <a:fillRef idx="0">
+              <a:schemeClr val="accent1"/>
+            </a:fillRef>
+            <a:effectRef idx="1">
+              <a:schemeClr val="accent1"/>
+            </a:effectRef>
+            <a:fontRef idx="minor">
+              <a:schemeClr val="tx1"/>
+            </a:fontRef>
+          </p:style>
+        </p:cxnSp>
+        <p:cxnSp>
+          <p:nvCxnSpPr>
+            <p:cNvPr id="350" name="Straight Connector 349">
+              <a:extLst>
+                <a:ext uri="{FF2B5EF4-FFF2-40B4-BE49-F238E27FC236}">
+                  <a16:creationId xmlns:a16="http://schemas.microsoft.com/office/drawing/2014/main" id="{E95D0008-8978-089E-1FBB-E95E974B5E02}"/>
+                </a:ext>
+              </a:extLst>
+            </p:cNvPr>
+            <p:cNvCxnSpPr>
+              <a:cxnSpLocks/>
+              <a:stCxn id="49" idx="3"/>
+            </p:cNvCxnSpPr>
+            <p:nvPr/>
+          </p:nvCxnSpPr>
+          <p:spPr>
+            <a:xfrm flipV="1">
+              <a:off x="2850509" y="2589272"/>
+              <a:ext cx="676825" cy="1525641"/>
+            </a:xfrm>
+            <a:prstGeom prst="line">
+              <a:avLst/>
+            </a:prstGeom>
+            <a:ln w="12700">
+              <a:solidFill>
+                <a:schemeClr val="tx1"/>
+              </a:solidFill>
+              <a:prstDash val="sysDot"/>
+            </a:ln>
+          </p:spPr>
+          <p:style>
+            <a:lnRef idx="2">
+              <a:schemeClr val="accent1"/>
+            </a:lnRef>
+            <a:fillRef idx="0">
+              <a:schemeClr val="accent1"/>
+            </a:fillRef>
+            <a:effectRef idx="1">
+              <a:schemeClr val="accent1"/>
+            </a:effectRef>
+            <a:fontRef idx="minor">
+              <a:schemeClr val="tx1"/>
+            </a:fontRef>
+          </p:style>
+        </p:cxnSp>
+        <p:cxnSp>
+          <p:nvCxnSpPr>
+            <p:cNvPr id="353" name="Straight Connector 352">
+              <a:extLst>
+                <a:ext uri="{FF2B5EF4-FFF2-40B4-BE49-F238E27FC236}">
+                  <a16:creationId xmlns:a16="http://schemas.microsoft.com/office/drawing/2014/main" id="{16EB1EE4-97E1-FA98-18F9-190201E65D30}"/>
+                </a:ext>
+              </a:extLst>
+            </p:cNvPr>
+            <p:cNvCxnSpPr>
+              <a:cxnSpLocks/>
+              <a:stCxn id="16" idx="3"/>
+              <a:endCxn id="245" idx="1"/>
+            </p:cNvCxnSpPr>
+            <p:nvPr/>
+          </p:nvCxnSpPr>
+          <p:spPr>
+            <a:xfrm>
+              <a:off x="2850509" y="3506098"/>
+              <a:ext cx="671017" cy="0"/>
+            </a:xfrm>
+            <a:prstGeom prst="line">
+              <a:avLst/>
+            </a:prstGeom>
+            <a:ln w="12700">
+              <a:solidFill>
+                <a:schemeClr val="tx1"/>
+              </a:solidFill>
+            </a:ln>
+          </p:spPr>
+          <p:style>
+            <a:lnRef idx="2">
+              <a:schemeClr val="accent1"/>
+            </a:lnRef>
+            <a:fillRef idx="0">
+              <a:schemeClr val="accent1"/>
+            </a:fillRef>
+            <a:effectRef idx="1">
+              <a:schemeClr val="accent1"/>
+            </a:effectRef>
+            <a:fontRef idx="minor">
+              <a:schemeClr val="tx1"/>
+            </a:fontRef>
+          </p:style>
+        </p:cxnSp>
+        <p:cxnSp>
+          <p:nvCxnSpPr>
+            <p:cNvPr id="356" name="Straight Connector 355">
+              <a:extLst>
+                <a:ext uri="{FF2B5EF4-FFF2-40B4-BE49-F238E27FC236}">
+                  <a16:creationId xmlns:a16="http://schemas.microsoft.com/office/drawing/2014/main" id="{F15669F0-95EF-1D93-C5B7-979CA4FE19F8}"/>
+                </a:ext>
+              </a:extLst>
+            </p:cNvPr>
+            <p:cNvCxnSpPr>
+              <a:cxnSpLocks/>
+              <a:stCxn id="20" idx="3"/>
+              <a:endCxn id="229" idx="1"/>
+            </p:cNvCxnSpPr>
+            <p:nvPr/>
+          </p:nvCxnSpPr>
+          <p:spPr>
+            <a:xfrm>
+              <a:off x="2850509" y="3200436"/>
+              <a:ext cx="671017" cy="0"/>
+            </a:xfrm>
+            <a:prstGeom prst="line">
+              <a:avLst/>
+            </a:prstGeom>
+            <a:ln w="12700">
+              <a:solidFill>
+                <a:schemeClr val="tx1"/>
+              </a:solidFill>
+              <a:prstDash val="sysDot"/>
+            </a:ln>
+          </p:spPr>
+          <p:style>
+            <a:lnRef idx="2">
+              <a:schemeClr val="accent1"/>
+            </a:lnRef>
+            <a:fillRef idx="0">
+              <a:schemeClr val="accent1"/>
+            </a:fillRef>
+            <a:effectRef idx="1">
+              <a:schemeClr val="accent1"/>
+            </a:effectRef>
+            <a:fontRef idx="minor">
+              <a:schemeClr val="tx1"/>
+            </a:fontRef>
+          </p:style>
+        </p:cxnSp>
+        <p:sp>
+          <p:nvSpPr>
+            <p:cNvPr id="2" name="Right Brace 1">
+              <a:extLst>
+                <a:ext uri="{FF2B5EF4-FFF2-40B4-BE49-F238E27FC236}">
+                  <a16:creationId xmlns:a16="http://schemas.microsoft.com/office/drawing/2014/main" id="{EDF82C50-4690-C11E-618A-9B9E5E8B9826}"/>
+                </a:ext>
+              </a:extLst>
+            </p:cNvPr>
+            <p:cNvSpPr/>
+            <p:nvPr/>
+          </p:nvSpPr>
+          <p:spPr>
+            <a:xfrm>
+              <a:off x="5781673" y="2459104"/>
+              <a:ext cx="82756" cy="574896"/>
+            </a:xfrm>
+            <a:prstGeom prst="rightBrace">
+              <a:avLst>
+                <a:gd name="adj1" fmla="val 88901"/>
+                <a:gd name="adj2" fmla="val 50000"/>
+              </a:avLst>
+            </a:prstGeom>
+            <a:ln w="12700">
+              <a:solidFill>
+                <a:schemeClr val="tx1"/>
+              </a:solidFill>
+            </a:ln>
+          </p:spPr>
+          <p:style>
+            <a:lnRef idx="2">
+              <a:schemeClr val="accent1"/>
+            </a:lnRef>
+            <a:fillRef idx="0">
+              <a:schemeClr val="accent1"/>
+            </a:fillRef>
+            <a:effectRef idx="1">
+              <a:schemeClr val="accent1"/>
+            </a:effectRef>
+            <a:fontRef idx="minor">
+              <a:schemeClr val="tx1"/>
+            </a:fontRef>
+          </p:style>
+          <p:txBody>
+            <a:bodyPr rtlCol="0" anchor="ctr"/>
+            <a:lstStyle/>
+            <a:p>
+              <a:pPr algn="ctr"/>
+              <a:endParaRPr lang="en-US"/>
+            </a:p>
+          </p:txBody>
+        </p:sp>
+        <p:sp>
+          <p:nvSpPr>
+            <p:cNvPr id="3" name="Right Brace 2">
+              <a:extLst>
+                <a:ext uri="{FF2B5EF4-FFF2-40B4-BE49-F238E27FC236}">
+                  <a16:creationId xmlns:a16="http://schemas.microsoft.com/office/drawing/2014/main" id="{75CE53CF-DBEC-0572-6ABB-FA6111278896}"/>
+                </a:ext>
+              </a:extLst>
+            </p:cNvPr>
+            <p:cNvSpPr/>
+            <p:nvPr/>
+          </p:nvSpPr>
+          <p:spPr>
+            <a:xfrm>
+              <a:off x="5781673" y="3072453"/>
+              <a:ext cx="82756" cy="854228"/>
+            </a:xfrm>
+            <a:prstGeom prst="rightBrace">
+              <a:avLst>
+                <a:gd name="adj1" fmla="val 88901"/>
+                <a:gd name="adj2" fmla="val 50000"/>
+              </a:avLst>
+            </a:prstGeom>
+            <a:ln w="12700">
+              <a:solidFill>
+                <a:schemeClr val="tx1"/>
+              </a:solidFill>
+            </a:ln>
+          </p:spPr>
+          <p:style>
+            <a:lnRef idx="2">
+              <a:schemeClr val="accent1"/>
+            </a:lnRef>
+            <a:fillRef idx="0">
+              <a:schemeClr val="accent1"/>
+            </a:fillRef>
+            <a:effectRef idx="1">
+              <a:schemeClr val="accent1"/>
+            </a:effectRef>
+            <a:fontRef idx="minor">
+              <a:schemeClr val="tx1"/>
+            </a:fontRef>
+          </p:style>
+          <p:txBody>
+            <a:bodyPr rtlCol="0" anchor="ctr"/>
+            <a:lstStyle/>
+            <a:p>
+              <a:pPr algn="ctr"/>
+              <a:endParaRPr lang="en-US"/>
+            </a:p>
+          </p:txBody>
+        </p:sp>
         <p:grpSp>
           <p:nvGrpSpPr>
             <p:cNvPr id="335" name="Group 334">
               <a:extLst>
                 <a:ext uri="{FF2B5EF4-FFF2-40B4-BE49-F238E27FC236}">
-                  <a16:creationId xmlns:a16="http://schemas.microsoft.com/office/drawing/2014/main" id="{C7A28311-B01E-C743-5717-5D14FED17C39}"/>
+                  <a16:creationId xmlns:a16="http://schemas.microsoft.com/office/drawing/2014/main" id="{CB09740B-177A-FF9E-4C39-0DFD37F9136C}"/>
                 </a:ext>
               </a:extLst>
             </p:cNvPr>
@@ -13081,7 +13282,7 @@
           </p:nvGrpSpPr>
           <p:grpSpPr>
             <a:xfrm>
-              <a:off x="9376910" y="3337714"/>
+              <a:off x="9297538" y="3723971"/>
               <a:ext cx="2302213" cy="647296"/>
               <a:chOff x="9110915" y="4521647"/>
               <a:chExt cx="2302213" cy="647296"/>
@@ -13092,7 +13293,7 @@
               <p:cNvPr id="314" name="Rectangle: Rounded Corners 313">
                 <a:extLst>
                   <a:ext uri="{FF2B5EF4-FFF2-40B4-BE49-F238E27FC236}">
-                    <a16:creationId xmlns:a16="http://schemas.microsoft.com/office/drawing/2014/main" id="{C9184302-A9D9-791B-1672-1678F45A7E55}"/>
+                    <a16:creationId xmlns:a16="http://schemas.microsoft.com/office/drawing/2014/main" id="{A5D7165E-744F-F300-8ACF-6961C56E3642}"/>
                   </a:ext>
                 </a:extLst>
               </p:cNvPr>
@@ -13156,7 +13357,7 @@
               <p:cNvPr id="315" name="TextBox 314">
                 <a:extLst>
                   <a:ext uri="{FF2B5EF4-FFF2-40B4-BE49-F238E27FC236}">
-                    <a16:creationId xmlns:a16="http://schemas.microsoft.com/office/drawing/2014/main" id="{9BDE51E9-FC26-93B1-D16F-98B8FB9FEE2F}"/>
+                    <a16:creationId xmlns:a16="http://schemas.microsoft.com/office/drawing/2014/main" id="{C094DD46-A099-5588-F5A8-4949E01070F2}"/>
                   </a:ext>
                 </a:extLst>
               </p:cNvPr>
@@ -13202,7 +13403,7 @@
               <p:cNvPr id="316" name="TextBox 315">
                 <a:extLst>
                   <a:ext uri="{FF2B5EF4-FFF2-40B4-BE49-F238E27FC236}">
-                    <a16:creationId xmlns:a16="http://schemas.microsoft.com/office/drawing/2014/main" id="{C18DB793-99BB-9141-9857-0496732E9F2F}"/>
+                    <a16:creationId xmlns:a16="http://schemas.microsoft.com/office/drawing/2014/main" id="{1F0AA3BA-08E8-5811-F122-9D8752072792}"/>
                   </a:ext>
                 </a:extLst>
               </p:cNvPr>
@@ -13249,7 +13450,7 @@
             <p:cNvPr id="10" name="Group 9">
               <a:extLst>
                 <a:ext uri="{FF2B5EF4-FFF2-40B4-BE49-F238E27FC236}">
-                  <a16:creationId xmlns:a16="http://schemas.microsoft.com/office/drawing/2014/main" id="{3F4BAE37-81CB-F3FB-EAED-6C481A15D7A4}"/>
+                  <a16:creationId xmlns:a16="http://schemas.microsoft.com/office/drawing/2014/main" id="{8E44BCB6-265F-542C-167A-F1C790AEFE0D}"/>
                 </a:ext>
               </a:extLst>
             </p:cNvPr>
@@ -13258,7 +13459,7 @@
           </p:nvGrpSpPr>
           <p:grpSpPr>
             <a:xfrm>
-              <a:off x="8873989" y="1610328"/>
+              <a:off x="8794617" y="1996585"/>
               <a:ext cx="2860204" cy="543694"/>
               <a:chOff x="8873989" y="2167447"/>
               <a:chExt cx="2860204" cy="543694"/>
@@ -13269,7 +13470,7 @@
               <p:cNvPr id="4" name="Rectangle 3">
                 <a:extLst>
                   <a:ext uri="{FF2B5EF4-FFF2-40B4-BE49-F238E27FC236}">
-                    <a16:creationId xmlns:a16="http://schemas.microsoft.com/office/drawing/2014/main" id="{240F11AF-0E17-5252-2864-12FAED76A826}"/>
+                    <a16:creationId xmlns:a16="http://schemas.microsoft.com/office/drawing/2014/main" id="{F2209C8D-C990-6B35-3C8C-8FB9AC511ABE}"/>
                   </a:ext>
                 </a:extLst>
               </p:cNvPr>
@@ -13323,7 +13524,7 @@
               <p:cNvPr id="5" name="Straight Connector 4">
                 <a:extLst>
                   <a:ext uri="{FF2B5EF4-FFF2-40B4-BE49-F238E27FC236}">
-                    <a16:creationId xmlns:a16="http://schemas.microsoft.com/office/drawing/2014/main" id="{6EB7CE28-570D-A649-CDDD-D2D4267E56C2}"/>
+                    <a16:creationId xmlns:a16="http://schemas.microsoft.com/office/drawing/2014/main" id="{A7BFA04A-AF74-0127-BC01-C4A745F39D16}"/>
                   </a:ext>
                 </a:extLst>
               </p:cNvPr>
@@ -13366,7 +13567,7 @@
               <p:cNvPr id="6" name="TextBox 5">
                 <a:extLst>
                   <a:ext uri="{FF2B5EF4-FFF2-40B4-BE49-F238E27FC236}">
-                    <a16:creationId xmlns:a16="http://schemas.microsoft.com/office/drawing/2014/main" id="{64D782A1-F8AE-355C-132E-E89499CD1C8D}"/>
+                    <a16:creationId xmlns:a16="http://schemas.microsoft.com/office/drawing/2014/main" id="{9A37CAFC-EC64-312F-5824-9458F25E97BA}"/>
                   </a:ext>
                 </a:extLst>
               </p:cNvPr>
@@ -13417,7 +13618,7 @@
               <p:cNvPr id="7" name="Straight Connector 6">
                 <a:extLst>
                   <a:ext uri="{FF2B5EF4-FFF2-40B4-BE49-F238E27FC236}">
-                    <a16:creationId xmlns:a16="http://schemas.microsoft.com/office/drawing/2014/main" id="{E90BE35D-3534-C8E0-8BAC-13AA49C1B7B8}"/>
+                    <a16:creationId xmlns:a16="http://schemas.microsoft.com/office/drawing/2014/main" id="{E4A092C5-4946-5E33-3809-391F21C185D7}"/>
                   </a:ext>
                 </a:extLst>
               </p:cNvPr>
@@ -13462,21 +13663,20 @@
             <p:cNvPr id="9" name="Straight Connector 8">
               <a:extLst>
                 <a:ext uri="{FF2B5EF4-FFF2-40B4-BE49-F238E27FC236}">
-                  <a16:creationId xmlns:a16="http://schemas.microsoft.com/office/drawing/2014/main" id="{145E9855-DB2F-EF47-9B6D-8D24DD2BDB8D}"/>
+                  <a16:creationId xmlns:a16="http://schemas.microsoft.com/office/drawing/2014/main" id="{704A055C-128C-B80C-F487-45942CA68B4A}"/>
                 </a:ext>
               </a:extLst>
             </p:cNvPr>
             <p:cNvCxnSpPr>
               <a:cxnSpLocks/>
-              <a:stCxn id="202" idx="3"/>
-              <a:endCxn id="281" idx="1"/>
+              <a:stCxn id="49" idx="3"/>
             </p:cNvCxnSpPr>
             <p:nvPr/>
           </p:nvCxnSpPr>
           <p:spPr>
             <a:xfrm flipV="1">
-              <a:off x="2929886" y="2938487"/>
-              <a:ext cx="664414" cy="620532"/>
+              <a:off x="2850509" y="3191388"/>
+              <a:ext cx="664419" cy="923525"/>
             </a:xfrm>
             <a:prstGeom prst="line">
               <a:avLst/>
@@ -13508,7 +13708,7 @@
             <p:cNvPr id="233" name="Group 232">
               <a:extLst>
                 <a:ext uri="{FF2B5EF4-FFF2-40B4-BE49-F238E27FC236}">
-                  <a16:creationId xmlns:a16="http://schemas.microsoft.com/office/drawing/2014/main" id="{00ED7F0F-60DC-1536-A747-6184C3BCA9BE}"/>
+                  <a16:creationId xmlns:a16="http://schemas.microsoft.com/office/drawing/2014/main" id="{4CBD7EB1-D44B-B4D6-ADAD-34A811061293}"/>
                 </a:ext>
               </a:extLst>
             </p:cNvPr>
@@ -13517,7 +13717,7 @@
           </p:nvGrpSpPr>
           <p:grpSpPr>
             <a:xfrm>
-              <a:off x="6497958" y="3337714"/>
+              <a:off x="6418586" y="3723971"/>
               <a:ext cx="2239249" cy="1233863"/>
               <a:chOff x="1028392" y="2318655"/>
               <a:chExt cx="2239249" cy="1233863"/>
@@ -13528,7 +13728,7 @@
               <p:cNvPr id="234" name="TextBox 233">
                 <a:extLst>
                   <a:ext uri="{FF2B5EF4-FFF2-40B4-BE49-F238E27FC236}">
-                    <a16:creationId xmlns:a16="http://schemas.microsoft.com/office/drawing/2014/main" id="{1D447C6C-DBB4-1E2B-28C0-122262FFC526}"/>
+                    <a16:creationId xmlns:a16="http://schemas.microsoft.com/office/drawing/2014/main" id="{B9B81581-B930-1811-80AA-1AB18EAE2F69}"/>
                   </a:ext>
                 </a:extLst>
               </p:cNvPr>
@@ -13574,7 +13774,7 @@
               <p:cNvPr id="235" name="Group 234">
                 <a:extLst>
                   <a:ext uri="{FF2B5EF4-FFF2-40B4-BE49-F238E27FC236}">
-                    <a16:creationId xmlns:a16="http://schemas.microsoft.com/office/drawing/2014/main" id="{D43FEA2F-F6B1-5C6E-588B-A05B26190774}"/>
+                    <a16:creationId xmlns:a16="http://schemas.microsoft.com/office/drawing/2014/main" id="{25EE2E56-04A2-954D-A13A-A9A05DEDE71C}"/>
                   </a:ext>
                 </a:extLst>
               </p:cNvPr>
@@ -13594,7 +13794,7 @@
                 <p:cNvPr id="239" name="Rectangle: Rounded Corners 238">
                   <a:extLst>
                     <a:ext uri="{FF2B5EF4-FFF2-40B4-BE49-F238E27FC236}">
-                      <a16:creationId xmlns:a16="http://schemas.microsoft.com/office/drawing/2014/main" id="{A4D60007-5474-BEA2-4BFA-9BC486259CA7}"/>
+                      <a16:creationId xmlns:a16="http://schemas.microsoft.com/office/drawing/2014/main" id="{8979E7B0-5731-BFFD-F252-6CFC83F6B144}"/>
                     </a:ext>
                   </a:extLst>
                 </p:cNvPr>
@@ -13653,7 +13853,7 @@
                 <p:cNvPr id="240" name="Rectangle 239">
                   <a:extLst>
                     <a:ext uri="{FF2B5EF4-FFF2-40B4-BE49-F238E27FC236}">
-                      <a16:creationId xmlns:a16="http://schemas.microsoft.com/office/drawing/2014/main" id="{664D770F-BF79-4EE6-E4F3-5C75388C93E3}"/>
+                      <a16:creationId xmlns:a16="http://schemas.microsoft.com/office/drawing/2014/main" id="{DBF8A54C-5892-9A30-26EF-052D882C2E0A}"/>
                     </a:ext>
                   </a:extLst>
                 </p:cNvPr>
@@ -13707,7 +13907,7 @@
                 <p:cNvPr id="241" name="Rectangle: Rounded Corners 240">
                   <a:extLst>
                     <a:ext uri="{FF2B5EF4-FFF2-40B4-BE49-F238E27FC236}">
-                      <a16:creationId xmlns:a16="http://schemas.microsoft.com/office/drawing/2014/main" id="{A848D181-7B55-B5B1-5BAE-AF8A42EC5A00}"/>
+                      <a16:creationId xmlns:a16="http://schemas.microsoft.com/office/drawing/2014/main" id="{BDD7F2DF-5AD1-B10B-38A9-4DDD708921BA}"/>
                     </a:ext>
                   </a:extLst>
                 </p:cNvPr>
@@ -13765,7 +13965,7 @@
               <p:cNvPr id="236" name="TextBox 235">
                 <a:extLst>
                   <a:ext uri="{FF2B5EF4-FFF2-40B4-BE49-F238E27FC236}">
-                    <a16:creationId xmlns:a16="http://schemas.microsoft.com/office/drawing/2014/main" id="{A60306A6-CD1B-62E6-4CD0-FA864383631B}"/>
+                    <a16:creationId xmlns:a16="http://schemas.microsoft.com/office/drawing/2014/main" id="{317A4A8F-A039-6FCD-14DF-AB0A12082609}"/>
                   </a:ext>
                 </a:extLst>
               </p:cNvPr>
@@ -13811,7 +14011,7 @@
               <p:cNvPr id="237" name="TextBox 236">
                 <a:extLst>
                   <a:ext uri="{FF2B5EF4-FFF2-40B4-BE49-F238E27FC236}">
-                    <a16:creationId xmlns:a16="http://schemas.microsoft.com/office/drawing/2014/main" id="{B43BC923-2C5D-2AAE-BD1F-3637CD533B4A}"/>
+                    <a16:creationId xmlns:a16="http://schemas.microsoft.com/office/drawing/2014/main" id="{57F026D4-444F-2184-F3E1-FAD99A431574}"/>
                   </a:ext>
                 </a:extLst>
               </p:cNvPr>
@@ -13857,7 +14057,7 @@
               <p:cNvPr id="238" name="TextBox 237">
                 <a:extLst>
                   <a:ext uri="{FF2B5EF4-FFF2-40B4-BE49-F238E27FC236}">
-                    <a16:creationId xmlns:a16="http://schemas.microsoft.com/office/drawing/2014/main" id="{01F21BA0-7B22-2985-C4B7-BEC32317C4DA}"/>
+                    <a16:creationId xmlns:a16="http://schemas.microsoft.com/office/drawing/2014/main" id="{D4A16F21-6F49-B07A-6E7B-03CC29F336F0}"/>
                   </a:ext>
                 </a:extLst>
               </p:cNvPr>
@@ -13897,7 +14097,7 @@
             <p:cNvPr id="21" name="Group 20">
               <a:extLst>
                 <a:ext uri="{FF2B5EF4-FFF2-40B4-BE49-F238E27FC236}">
-                  <a16:creationId xmlns:a16="http://schemas.microsoft.com/office/drawing/2014/main" id="{385101B2-3441-45C3-4D5F-B32E7D1461C5}"/>
+                  <a16:creationId xmlns:a16="http://schemas.microsoft.com/office/drawing/2014/main" id="{0EF011CC-A4B4-0342-CA6B-7B9B76F7E8E6}"/>
                 </a:ext>
               </a:extLst>
             </p:cNvPr>
@@ -13906,7 +14106,7 @@
           </p:nvGrpSpPr>
           <p:grpSpPr>
             <a:xfrm>
-              <a:off x="6497956" y="1616395"/>
+              <a:off x="6418584" y="2002652"/>
               <a:ext cx="2301839" cy="1514666"/>
               <a:chOff x="4580555" y="3243709"/>
               <a:chExt cx="2301839" cy="1514666"/>
@@ -13917,7 +14117,7 @@
               <p:cNvPr id="22" name="Rectangle: Top Corners Rounded 21">
                 <a:extLst>
                   <a:ext uri="{FF2B5EF4-FFF2-40B4-BE49-F238E27FC236}">
-                    <a16:creationId xmlns:a16="http://schemas.microsoft.com/office/drawing/2014/main" id="{77878395-64F7-3C4F-756B-7DB9A3FFACED}"/>
+                    <a16:creationId xmlns:a16="http://schemas.microsoft.com/office/drawing/2014/main" id="{E5AEFB43-ECAE-6FB6-427A-5F4FEACDF0B9}"/>
                   </a:ext>
                 </a:extLst>
               </p:cNvPr>
@@ -13972,7 +14172,7 @@
               <p:cNvPr id="23" name="Rectangle: Top Corners Rounded 22">
                 <a:extLst>
                   <a:ext uri="{FF2B5EF4-FFF2-40B4-BE49-F238E27FC236}">
-                    <a16:creationId xmlns:a16="http://schemas.microsoft.com/office/drawing/2014/main" id="{1B3C8D2A-C9D1-9D95-D967-D15933172E7C}"/>
+                    <a16:creationId xmlns:a16="http://schemas.microsoft.com/office/drawing/2014/main" id="{0D766AE2-5378-C5B8-68D6-B1ECA86F48DF}"/>
                   </a:ext>
                 </a:extLst>
               </p:cNvPr>
@@ -14027,7 +14227,7 @@
               <p:cNvPr id="24" name="Rectangle 23">
                 <a:extLst>
                   <a:ext uri="{FF2B5EF4-FFF2-40B4-BE49-F238E27FC236}">
-                    <a16:creationId xmlns:a16="http://schemas.microsoft.com/office/drawing/2014/main" id="{2320646D-E588-66BF-2291-C28731EB62C6}"/>
+                    <a16:creationId xmlns:a16="http://schemas.microsoft.com/office/drawing/2014/main" id="{B954910A-1F51-C506-1498-B6C43C828123}"/>
                   </a:ext>
                 </a:extLst>
               </p:cNvPr>
@@ -14081,7 +14281,7 @@
               <p:cNvPr id="25" name="Rectangle: Rounded Corners 24">
                 <a:extLst>
                   <a:ext uri="{FF2B5EF4-FFF2-40B4-BE49-F238E27FC236}">
-                    <a16:creationId xmlns:a16="http://schemas.microsoft.com/office/drawing/2014/main" id="{CDD7B7F2-522F-30DC-707E-115B5707AD6C}"/>
+                    <a16:creationId xmlns:a16="http://schemas.microsoft.com/office/drawing/2014/main" id="{E612D090-A403-404F-78B6-A222FF35E8CD}"/>
                   </a:ext>
                 </a:extLst>
               </p:cNvPr>
@@ -14138,7 +14338,7 @@
               <p:cNvPr id="26" name="TextBox 25">
                 <a:extLst>
                   <a:ext uri="{FF2B5EF4-FFF2-40B4-BE49-F238E27FC236}">
-                    <a16:creationId xmlns:a16="http://schemas.microsoft.com/office/drawing/2014/main" id="{84582B19-FF4F-F533-E626-177EA2EE43FA}"/>
+                    <a16:creationId xmlns:a16="http://schemas.microsoft.com/office/drawing/2014/main" id="{7E5DDEAB-59B2-C8F2-4626-CE52DC019B2A}"/>
                   </a:ext>
                 </a:extLst>
               </p:cNvPr>
@@ -14177,7 +14377,7 @@
               <p:cNvPr id="27" name="TextBox 26">
                 <a:extLst>
                   <a:ext uri="{FF2B5EF4-FFF2-40B4-BE49-F238E27FC236}">
-                    <a16:creationId xmlns:a16="http://schemas.microsoft.com/office/drawing/2014/main" id="{ED8250A4-D4DE-5B5F-A55F-B8F6432AF1CA}"/>
+                    <a16:creationId xmlns:a16="http://schemas.microsoft.com/office/drawing/2014/main" id="{77BCC8B1-CAFF-A7D7-85D9-F45C5CC5C013}"/>
                   </a:ext>
                 </a:extLst>
               </p:cNvPr>
@@ -14216,7 +14416,7 @@
               <p:cNvPr id="28" name="TextBox 27">
                 <a:extLst>
                   <a:ext uri="{FF2B5EF4-FFF2-40B4-BE49-F238E27FC236}">
-                    <a16:creationId xmlns:a16="http://schemas.microsoft.com/office/drawing/2014/main" id="{04DFD742-DB1D-C83C-32E6-9DCE1C152217}"/>
+                    <a16:creationId xmlns:a16="http://schemas.microsoft.com/office/drawing/2014/main" id="{BB66A299-7967-FD5B-1420-5220E2FEE452}"/>
                   </a:ext>
                 </a:extLst>
               </p:cNvPr>
@@ -14255,7 +14455,7 @@
               <p:cNvPr id="29" name="TextBox 28">
                 <a:extLst>
                   <a:ext uri="{FF2B5EF4-FFF2-40B4-BE49-F238E27FC236}">
-                    <a16:creationId xmlns:a16="http://schemas.microsoft.com/office/drawing/2014/main" id="{B85AE1C1-5F7F-93A3-D1D3-3A3A14493B4D}"/>
+                    <a16:creationId xmlns:a16="http://schemas.microsoft.com/office/drawing/2014/main" id="{C7051A97-49BC-D4BD-2E1A-3B6EF3FDA68E}"/>
                   </a:ext>
                 </a:extLst>
               </p:cNvPr>
@@ -14301,7 +14501,7 @@
               <p:cNvPr id="30" name="TextBox 29">
                 <a:extLst>
                   <a:ext uri="{FF2B5EF4-FFF2-40B4-BE49-F238E27FC236}">
-                    <a16:creationId xmlns:a16="http://schemas.microsoft.com/office/drawing/2014/main" id="{034260CC-1F20-1BA6-9F62-4C53EBD2BEAC}"/>
+                    <a16:creationId xmlns:a16="http://schemas.microsoft.com/office/drawing/2014/main" id="{D006FC99-48C7-54A3-FD0A-8C08709941B0}"/>
                   </a:ext>
                 </a:extLst>
               </p:cNvPr>
@@ -14348,7 +14548,7 @@
             <p:cNvPr id="389" name="Straight Connector 388">
               <a:extLst>
                 <a:ext uri="{FF2B5EF4-FFF2-40B4-BE49-F238E27FC236}">
-                  <a16:creationId xmlns:a16="http://schemas.microsoft.com/office/drawing/2014/main" id="{E8158BD4-8CEA-CB0D-3588-00251A11F8D0}"/>
+                  <a16:creationId xmlns:a16="http://schemas.microsoft.com/office/drawing/2014/main" id="{854B1C14-9DA1-3EF2-F2C5-104AFF8A610C}"/>
                 </a:ext>
               </a:extLst>
             </p:cNvPr>
@@ -14361,8 +14561,8 @@
           </p:nvCxnSpPr>
           <p:spPr>
             <a:xfrm>
-              <a:off x="5943801" y="3107001"/>
-              <a:ext cx="554157" cy="695515"/>
+              <a:off x="5864429" y="3499567"/>
+              <a:ext cx="554157" cy="689206"/>
             </a:xfrm>
             <a:prstGeom prst="line">
               <a:avLst/>
@@ -14394,7 +14594,7 @@
             <p:cNvPr id="367" name="Straight Connector 366">
               <a:extLst>
                 <a:ext uri="{FF2B5EF4-FFF2-40B4-BE49-F238E27FC236}">
-                  <a16:creationId xmlns:a16="http://schemas.microsoft.com/office/drawing/2014/main" id="{0292EA4F-C1D1-7DDC-D7FC-4367D17C623C}"/>
+                  <a16:creationId xmlns:a16="http://schemas.microsoft.com/office/drawing/2014/main" id="{9210CDB7-FB27-0761-90C0-FDE3309E2B97}"/>
                 </a:ext>
               </a:extLst>
             </p:cNvPr>
@@ -14407,8 +14607,8 @@
           </p:nvCxnSpPr>
           <p:spPr>
             <a:xfrm>
-              <a:off x="5943801" y="2493651"/>
-              <a:ext cx="554157" cy="206541"/>
+              <a:off x="5864429" y="2746552"/>
+              <a:ext cx="554157" cy="339897"/>
             </a:xfrm>
             <a:prstGeom prst="line">
               <a:avLst/>
@@ -14439,7 +14639,7 @@
             <p:cNvPr id="370" name="Straight Connector 369">
               <a:extLst>
                 <a:ext uri="{FF2B5EF4-FFF2-40B4-BE49-F238E27FC236}">
-                  <a16:creationId xmlns:a16="http://schemas.microsoft.com/office/drawing/2014/main" id="{1463F92E-A5E1-B471-7536-4E2BB81B1C71}"/>
+                  <a16:creationId xmlns:a16="http://schemas.microsoft.com/office/drawing/2014/main" id="{2BDBFD9A-90B2-2BB0-7473-24377F7F0FBD}"/>
                 </a:ext>
               </a:extLst>
             </p:cNvPr>
@@ -14452,8 +14652,8 @@
           </p:nvCxnSpPr>
           <p:spPr>
             <a:xfrm flipV="1">
-              <a:off x="5943801" y="2700192"/>
-              <a:ext cx="554157" cy="406809"/>
+              <a:off x="5864429" y="3086449"/>
+              <a:ext cx="554157" cy="413118"/>
             </a:xfrm>
             <a:prstGeom prst="line">
               <a:avLst/>
@@ -14484,7 +14684,7 @@
             <p:cNvPr id="376" name="Straight Connector 375">
               <a:extLst>
                 <a:ext uri="{FF2B5EF4-FFF2-40B4-BE49-F238E27FC236}">
-                  <a16:creationId xmlns:a16="http://schemas.microsoft.com/office/drawing/2014/main" id="{DCB765BE-C6D0-9C88-B79C-0653B5D0E5AF}"/>
+                  <a16:creationId xmlns:a16="http://schemas.microsoft.com/office/drawing/2014/main" id="{5DF1B445-2099-0BBC-16CE-4D07F9955398}"/>
                 </a:ext>
               </a:extLst>
             </p:cNvPr>
@@ -14497,8 +14697,8 @@
           </p:nvCxnSpPr>
           <p:spPr>
             <a:xfrm>
-              <a:off x="5943801" y="3107001"/>
-              <a:ext cx="554157" cy="994541"/>
+              <a:off x="5864429" y="3499567"/>
+              <a:ext cx="554157" cy="988232"/>
             </a:xfrm>
             <a:prstGeom prst="line">
               <a:avLst/>
@@ -14529,7 +14729,7 @@
             <p:cNvPr id="385" name="Straight Connector 384">
               <a:extLst>
                 <a:ext uri="{FF2B5EF4-FFF2-40B4-BE49-F238E27FC236}">
-                  <a16:creationId xmlns:a16="http://schemas.microsoft.com/office/drawing/2014/main" id="{86974C24-CD13-AB9D-5659-40C787D7C759}"/>
+                  <a16:creationId xmlns:a16="http://schemas.microsoft.com/office/drawing/2014/main" id="{93B22E95-984A-4B24-5DD4-7EBE45804837}"/>
                 </a:ext>
               </a:extLst>
             </p:cNvPr>
@@ -14542,8 +14742,8 @@
           </p:nvCxnSpPr>
           <p:spPr>
             <a:xfrm>
-              <a:off x="5943801" y="2493651"/>
-              <a:ext cx="554157" cy="1607891"/>
+              <a:off x="5864429" y="2746552"/>
+              <a:ext cx="554157" cy="1741247"/>
             </a:xfrm>
             <a:prstGeom prst="line">
               <a:avLst/>
@@ -14575,7 +14775,7 @@
             <p:cNvPr id="244" name="Straight Connector 243">
               <a:extLst>
                 <a:ext uri="{FF2B5EF4-FFF2-40B4-BE49-F238E27FC236}">
-                  <a16:creationId xmlns:a16="http://schemas.microsoft.com/office/drawing/2014/main" id="{6404A511-24EF-F2E0-E620-746E32F0E998}"/>
+                  <a16:creationId xmlns:a16="http://schemas.microsoft.com/office/drawing/2014/main" id="{5EE2D294-02E0-11DD-F5F2-1E2E7DBF2D5B}"/>
                 </a:ext>
               </a:extLst>
             </p:cNvPr>
@@ -14588,8 +14788,8 @@
           </p:nvCxnSpPr>
           <p:spPr>
             <a:xfrm flipV="1">
-              <a:off x="5943801" y="2081374"/>
-              <a:ext cx="554157" cy="1025627"/>
+              <a:off x="5864429" y="2467631"/>
+              <a:ext cx="554157" cy="1031936"/>
             </a:xfrm>
             <a:prstGeom prst="line">
               <a:avLst/>
@@ -14621,7 +14821,7 @@
             <p:cNvPr id="247" name="Straight Connector 246">
               <a:extLst>
                 <a:ext uri="{FF2B5EF4-FFF2-40B4-BE49-F238E27FC236}">
-                  <a16:creationId xmlns:a16="http://schemas.microsoft.com/office/drawing/2014/main" id="{70465907-0F64-4965-9163-B2C700A48E2C}"/>
+                  <a16:creationId xmlns:a16="http://schemas.microsoft.com/office/drawing/2014/main" id="{1C083323-2AAF-1194-D7B7-62385E9DCEAA}"/>
                 </a:ext>
               </a:extLst>
             </p:cNvPr>
@@ -14634,8 +14834,8 @@
           </p:nvCxnSpPr>
           <p:spPr>
             <a:xfrm flipV="1">
-              <a:off x="5943801" y="1782348"/>
-              <a:ext cx="554155" cy="1324653"/>
+              <a:off x="5864429" y="2168605"/>
+              <a:ext cx="554155" cy="1330962"/>
             </a:xfrm>
             <a:prstGeom prst="line">
               <a:avLst/>
@@ -14667,7 +14867,7 @@
             <p:cNvPr id="301" name="Straight Connector 300">
               <a:extLst>
                 <a:ext uri="{FF2B5EF4-FFF2-40B4-BE49-F238E27FC236}">
-                  <a16:creationId xmlns:a16="http://schemas.microsoft.com/office/drawing/2014/main" id="{411F421E-1B73-D5DA-0B27-75EF7C35376E}"/>
+                  <a16:creationId xmlns:a16="http://schemas.microsoft.com/office/drawing/2014/main" id="{4DD1B8F5-5A27-932D-C771-932E6514854F}"/>
                 </a:ext>
               </a:extLst>
             </p:cNvPr>
@@ -14679,9 +14879,9 @@
             <p:nvPr/>
           </p:nvCxnSpPr>
           <p:spPr>
-            <a:xfrm flipV="1">
-              <a:off x="5943801" y="2380400"/>
-              <a:ext cx="554157" cy="113251"/>
+            <a:xfrm>
+              <a:off x="5864429" y="2746552"/>
+              <a:ext cx="554157" cy="20105"/>
             </a:xfrm>
             <a:prstGeom prst="line">
               <a:avLst/>
@@ -14713,7 +14913,7 @@
             <p:cNvPr id="302" name="Straight Connector 301">
               <a:extLst>
                 <a:ext uri="{FF2B5EF4-FFF2-40B4-BE49-F238E27FC236}">
-                  <a16:creationId xmlns:a16="http://schemas.microsoft.com/office/drawing/2014/main" id="{6C08D5E6-1E0C-25D0-ED10-FE79EF24D209}"/>
+                  <a16:creationId xmlns:a16="http://schemas.microsoft.com/office/drawing/2014/main" id="{478B5CEB-A574-3588-E76F-959B48F24A7F}"/>
                 </a:ext>
               </a:extLst>
             </p:cNvPr>
@@ -14726,8 +14926,8 @@
           </p:nvCxnSpPr>
           <p:spPr>
             <a:xfrm flipV="1">
-              <a:off x="5943801" y="2081374"/>
-              <a:ext cx="554157" cy="412277"/>
+              <a:off x="5864429" y="2467631"/>
+              <a:ext cx="554157" cy="278921"/>
             </a:xfrm>
             <a:prstGeom prst="line">
               <a:avLst/>
@@ -14759,7 +14959,7 @@
             <p:cNvPr id="303" name="Straight Connector 302">
               <a:extLst>
                 <a:ext uri="{FF2B5EF4-FFF2-40B4-BE49-F238E27FC236}">
-                  <a16:creationId xmlns:a16="http://schemas.microsoft.com/office/drawing/2014/main" id="{D5B6C4AD-F7E9-7B2A-2D7D-25E385B05D6D}"/>
+                  <a16:creationId xmlns:a16="http://schemas.microsoft.com/office/drawing/2014/main" id="{7331A20C-27BF-E83C-AC39-F42087154FA7}"/>
                 </a:ext>
               </a:extLst>
             </p:cNvPr>
@@ -14772,8 +14972,8 @@
           </p:nvCxnSpPr>
           <p:spPr>
             <a:xfrm flipV="1">
-              <a:off x="5943801" y="1782348"/>
-              <a:ext cx="554155" cy="711303"/>
+              <a:off x="5864429" y="2168605"/>
+              <a:ext cx="554155" cy="577947"/>
             </a:xfrm>
             <a:prstGeom prst="line">
               <a:avLst/>
@@ -14805,7 +15005,7 @@
             <p:cNvPr id="231" name="Straight Connector 230">
               <a:extLst>
                 <a:ext uri="{FF2B5EF4-FFF2-40B4-BE49-F238E27FC236}">
-                  <a16:creationId xmlns:a16="http://schemas.microsoft.com/office/drawing/2014/main" id="{CCB705AB-188A-483B-5A34-A75DADA65705}"/>
+                  <a16:creationId xmlns:a16="http://schemas.microsoft.com/office/drawing/2014/main" id="{378E03A4-1DE4-C6EC-6BBD-729C01CA26ED}"/>
                 </a:ext>
               </a:extLst>
             </p:cNvPr>
@@ -14818,8 +15018,8 @@
           </p:nvCxnSpPr>
           <p:spPr>
             <a:xfrm flipV="1">
-              <a:off x="5943801" y="2380400"/>
-              <a:ext cx="554157" cy="726601"/>
+              <a:off x="5864429" y="2766657"/>
+              <a:ext cx="554157" cy="732910"/>
             </a:xfrm>
             <a:prstGeom prst="line">
               <a:avLst/>
@@ -14851,7 +15051,7 @@
             <p:cNvPr id="373" name="Straight Connector 372">
               <a:extLst>
                 <a:ext uri="{FF2B5EF4-FFF2-40B4-BE49-F238E27FC236}">
-                  <a16:creationId xmlns:a16="http://schemas.microsoft.com/office/drawing/2014/main" id="{203454DD-698B-FE70-9DDA-C59F2DCB67D9}"/>
+                  <a16:creationId xmlns:a16="http://schemas.microsoft.com/office/drawing/2014/main" id="{92E45EF7-7C82-7742-1CA7-ECCA69016FEF}"/>
                 </a:ext>
               </a:extLst>
             </p:cNvPr>
@@ -14864,8 +15064,8 @@
           </p:nvCxnSpPr>
           <p:spPr>
             <a:xfrm>
-              <a:off x="5943801" y="2493651"/>
-              <a:ext cx="554157" cy="1308865"/>
+              <a:off x="5864429" y="2746552"/>
+              <a:ext cx="554157" cy="1442221"/>
             </a:xfrm>
             <a:prstGeom prst="line">
               <a:avLst/>
@@ -14896,7 +15096,7 @@
             <p:cNvPr id="359" name="Straight Connector 358">
               <a:extLst>
                 <a:ext uri="{FF2B5EF4-FFF2-40B4-BE49-F238E27FC236}">
-                  <a16:creationId xmlns:a16="http://schemas.microsoft.com/office/drawing/2014/main" id="{C221BBAA-9FEE-8D9E-6872-58AEB1FAFC02}"/>
+                  <a16:creationId xmlns:a16="http://schemas.microsoft.com/office/drawing/2014/main" id="{C9D801C7-E1E6-F491-83CB-CBB99201750A}"/>
                 </a:ext>
               </a:extLst>
             </p:cNvPr>
@@ -14909,7 +15109,7 @@
           </p:nvCxnSpPr>
           <p:spPr>
             <a:xfrm flipV="1">
-              <a:off x="8737207" y="3505473"/>
+              <a:off x="8657835" y="3891730"/>
               <a:ext cx="639703" cy="297043"/>
             </a:xfrm>
             <a:prstGeom prst="line">
@@ -14942,7 +15142,7 @@
             <p:cNvPr id="255" name="Straight Connector 254">
               <a:extLst>
                 <a:ext uri="{FF2B5EF4-FFF2-40B4-BE49-F238E27FC236}">
-                  <a16:creationId xmlns:a16="http://schemas.microsoft.com/office/drawing/2014/main" id="{91DD07F7-2F86-0E54-F54F-7BDC7A59D6BD}"/>
+                  <a16:creationId xmlns:a16="http://schemas.microsoft.com/office/drawing/2014/main" id="{07ED3FDE-5283-528A-A4E2-7A0DDD3B9728}"/>
                 </a:ext>
               </a:extLst>
             </p:cNvPr>
@@ -14955,7 +15155,7 @@
           </p:nvCxnSpPr>
           <p:spPr>
             <a:xfrm>
-              <a:off x="8737207" y="3503490"/>
+              <a:off x="8657835" y="3889747"/>
               <a:ext cx="639703" cy="1983"/>
             </a:xfrm>
             <a:prstGeom prst="line">
@@ -14982,11 +15182,103 @@
             </a:fontRef>
           </p:style>
         </p:cxnSp>
+        <p:cxnSp>
+          <p:nvCxnSpPr>
+            <p:cNvPr id="266" name="Straight Connector 265">
+              <a:extLst>
+                <a:ext uri="{FF2B5EF4-FFF2-40B4-BE49-F238E27FC236}">
+                  <a16:creationId xmlns:a16="http://schemas.microsoft.com/office/drawing/2014/main" id="{FDFA58D0-AAFC-16EC-D17F-B3CA0517DE27}"/>
+                </a:ext>
+              </a:extLst>
+            </p:cNvPr>
+            <p:cNvCxnSpPr>
+              <a:cxnSpLocks/>
+              <a:stCxn id="13" idx="3"/>
+              <a:endCxn id="242" idx="1"/>
+            </p:cNvCxnSpPr>
+            <p:nvPr/>
+          </p:nvCxnSpPr>
+          <p:spPr>
+            <a:xfrm>
+              <a:off x="2850509" y="3811760"/>
+              <a:ext cx="671017" cy="0"/>
+            </a:xfrm>
+            <a:prstGeom prst="line">
+              <a:avLst/>
+            </a:prstGeom>
+            <a:ln w="12700">
+              <a:solidFill>
+                <a:schemeClr val="tx1"/>
+              </a:solidFill>
+              <a:prstDash val="sysDot"/>
+            </a:ln>
+          </p:spPr>
+          <p:style>
+            <a:lnRef idx="2">
+              <a:schemeClr val="accent1"/>
+            </a:lnRef>
+            <a:fillRef idx="0">
+              <a:schemeClr val="accent1"/>
+            </a:fillRef>
+            <a:effectRef idx="1">
+              <a:schemeClr val="accent1"/>
+            </a:effectRef>
+            <a:fontRef idx="minor">
+              <a:schemeClr val="tx1"/>
+            </a:fontRef>
+          </p:style>
+        </p:cxnSp>
+        <p:cxnSp>
+          <p:nvCxnSpPr>
+            <p:cNvPr id="282" name="Straight Connector 281">
+              <a:extLst>
+                <a:ext uri="{FF2B5EF4-FFF2-40B4-BE49-F238E27FC236}">
+                  <a16:creationId xmlns:a16="http://schemas.microsoft.com/office/drawing/2014/main" id="{4ECF3CE1-960A-9616-FE2C-C95FDB5E6ECF}"/>
+                </a:ext>
+              </a:extLst>
+            </p:cNvPr>
+            <p:cNvCxnSpPr>
+              <a:cxnSpLocks/>
+              <a:stCxn id="13" idx="3"/>
+              <a:endCxn id="230" idx="1"/>
+            </p:cNvCxnSpPr>
+            <p:nvPr/>
+          </p:nvCxnSpPr>
+          <p:spPr>
+            <a:xfrm flipV="1">
+              <a:off x="2850509" y="2894774"/>
+              <a:ext cx="671017" cy="916986"/>
+            </a:xfrm>
+            <a:prstGeom prst="line">
+              <a:avLst/>
+            </a:prstGeom>
+            <a:ln w="12700">
+              <a:solidFill>
+                <a:schemeClr val="tx1"/>
+              </a:solidFill>
+              <a:prstDash val="sysDot"/>
+            </a:ln>
+          </p:spPr>
+          <p:style>
+            <a:lnRef idx="2">
+              <a:schemeClr val="accent1"/>
+            </a:lnRef>
+            <a:fillRef idx="0">
+              <a:schemeClr val="accent1"/>
+            </a:fillRef>
+            <a:effectRef idx="1">
+              <a:schemeClr val="accent1"/>
+            </a:effectRef>
+            <a:fontRef idx="minor">
+              <a:schemeClr val="tx1"/>
+            </a:fontRef>
+          </p:style>
+        </p:cxnSp>
       </p:grpSp>
     </p:spTree>
     <p:extLst>
       <p:ext uri="{BB962C8B-B14F-4D97-AF65-F5344CB8AC3E}">
-        <p14:creationId xmlns:p14="http://schemas.microsoft.com/office/powerpoint/2010/main" val="325947210"/>
+        <p14:creationId xmlns:p14="http://schemas.microsoft.com/office/powerpoint/2010/main" val="2941891558"/>
       </p:ext>
     </p:extLst>
   </p:cSld>
@@ -15001,7 +15293,13 @@
   <p:cSld>
     <p:spTree>
       <p:nvGrpSpPr>
-        <p:cNvPr id="1" name=""/>
+        <p:cNvPr id="1" name="">
+          <a:extLst>
+            <a:ext uri="{FF2B5EF4-FFF2-40B4-BE49-F238E27FC236}">
+              <a16:creationId xmlns:a16="http://schemas.microsoft.com/office/drawing/2014/main" id="{1A3088F5-A030-EB26-46FE-FCB614CD63F5}"/>
+            </a:ext>
+          </a:extLst>
+        </p:cNvPr>
         <p:cNvGrpSpPr/>
         <p:nvPr/>
       </p:nvGrpSpPr>
@@ -15018,7 +15316,7 @@
           <p:cNvPr id="198" name="Rectangle 197">
             <a:extLst>
               <a:ext uri="{FF2B5EF4-FFF2-40B4-BE49-F238E27FC236}">
-                <a16:creationId xmlns:a16="http://schemas.microsoft.com/office/drawing/2014/main" id="{48F3AFCA-C6E8-6EAA-EE14-23BCAADE730F}"/>
+                <a16:creationId xmlns:a16="http://schemas.microsoft.com/office/drawing/2014/main" id="{BB1AA834-7858-F6B3-3447-8678F6F3772A}"/>
               </a:ext>
             </a:extLst>
           </p:cNvPr>
@@ -15070,10 +15368,10 @@
       </p:sp>
       <p:grpSp>
         <p:nvGrpSpPr>
-          <p:cNvPr id="3" name="Group 2">
+          <p:cNvPr id="261" name="Group 260">
             <a:extLst>
               <a:ext uri="{FF2B5EF4-FFF2-40B4-BE49-F238E27FC236}">
-                <a16:creationId xmlns:a16="http://schemas.microsoft.com/office/drawing/2014/main" id="{B3F2B56B-2A1B-AAED-75E7-7EF400469EE5}"/>
+                <a16:creationId xmlns:a16="http://schemas.microsoft.com/office/drawing/2014/main" id="{4043D89E-1B6F-116E-267B-16A8F7E39415}"/>
               </a:ext>
             </a:extLst>
           </p:cNvPr>
@@ -15084,16 +15382,16 @@
           <a:xfrm>
             <a:off x="496467" y="1900165"/>
             <a:ext cx="11199066" cy="3057669"/>
-            <a:chOff x="575839" y="1513908"/>
+            <a:chOff x="496467" y="1900165"/>
             <a:chExt cx="11199066" cy="3057669"/>
           </a:xfrm>
         </p:grpSpPr>
         <p:sp>
           <p:nvSpPr>
-            <p:cNvPr id="4" name="Rectangle: Rounded Corners 3">
+            <p:cNvPr id="260" name="Rectangle: Rounded Corners 259">
               <a:extLst>
                 <a:ext uri="{FF2B5EF4-FFF2-40B4-BE49-F238E27FC236}">
-                  <a16:creationId xmlns:a16="http://schemas.microsoft.com/office/drawing/2014/main" id="{64A26B3F-15A3-D629-EB52-62377911DD27}"/>
+                  <a16:creationId xmlns:a16="http://schemas.microsoft.com/office/drawing/2014/main" id="{6B21C337-DC1E-8D48-4440-BA2E125A563A}"/>
                 </a:ext>
               </a:extLst>
             </p:cNvPr>
@@ -15102,7 +15400,7 @@
           </p:nvSpPr>
           <p:spPr>
             <a:xfrm>
-              <a:off x="575839" y="1513908"/>
+              <a:off x="496467" y="1900165"/>
               <a:ext cx="11199066" cy="3057028"/>
             </a:xfrm>
             <a:prstGeom prst="roundRect">
@@ -15149,69 +15447,24 @@
         </p:sp>
         <p:cxnSp>
           <p:nvCxnSpPr>
-            <p:cNvPr id="192" name="Straight Connector 191">
+            <p:cNvPr id="8" name="Straight Connector 7">
               <a:extLst>
                 <a:ext uri="{FF2B5EF4-FFF2-40B4-BE49-F238E27FC236}">
-                  <a16:creationId xmlns:a16="http://schemas.microsoft.com/office/drawing/2014/main" id="{A39A4587-AE3D-D35E-ADC6-8CC323C253CF}"/>
+                  <a16:creationId xmlns:a16="http://schemas.microsoft.com/office/drawing/2014/main" id="{85BB3DA4-D78D-5217-C3D9-F9BE583CFFAA}"/>
                 </a:ext>
               </a:extLst>
             </p:cNvPr>
             <p:cNvCxnSpPr>
               <a:cxnSpLocks/>
-              <a:stCxn id="238" idx="3"/>
-              <a:endCxn id="208" idx="1"/>
+              <a:stCxn id="48" idx="3"/>
+              <a:endCxn id="58" idx="1"/>
             </p:cNvCxnSpPr>
             <p:nvPr/>
           </p:nvCxnSpPr>
           <p:spPr>
-            <a:xfrm>
-              <a:off x="5817331" y="3559019"/>
-              <a:ext cx="680627" cy="243497"/>
-            </a:xfrm>
-            <a:prstGeom prst="line">
-              <a:avLst/>
-            </a:prstGeom>
-            <a:ln w="12700">
-              <a:solidFill>
-                <a:schemeClr val="bg1"/>
-              </a:solidFill>
-            </a:ln>
-          </p:spPr>
-          <p:style>
-            <a:lnRef idx="2">
-              <a:schemeClr val="accent1"/>
-            </a:lnRef>
-            <a:fillRef idx="0">
-              <a:schemeClr val="accent1"/>
-            </a:fillRef>
-            <a:effectRef idx="1">
-              <a:schemeClr val="accent1"/>
-            </a:effectRef>
-            <a:fontRef idx="minor">
-              <a:schemeClr val="tx1"/>
-            </a:fontRef>
-          </p:style>
-        </p:cxnSp>
-        <p:cxnSp>
-          <p:nvCxnSpPr>
-            <p:cNvPr id="5" name="Straight Connector 4">
-              <a:extLst>
-                <a:ext uri="{FF2B5EF4-FFF2-40B4-BE49-F238E27FC236}">
-                  <a16:creationId xmlns:a16="http://schemas.microsoft.com/office/drawing/2014/main" id="{AD3AFDF2-EA1A-B0FF-B379-D800EAA448CC}"/>
-                </a:ext>
-              </a:extLst>
-            </p:cNvPr>
-            <p:cNvCxnSpPr>
-              <a:cxnSpLocks/>
-              <a:stCxn id="226" idx="3"/>
-              <a:endCxn id="237" idx="1"/>
-            </p:cNvCxnSpPr>
-            <p:nvPr/>
-          </p:nvCxnSpPr>
-          <p:spPr>
-            <a:xfrm>
-              <a:off x="2929887" y="2336371"/>
-              <a:ext cx="676819" cy="0"/>
+            <a:xfrm flipV="1">
+              <a:off x="8657674" y="3891730"/>
+              <a:ext cx="639864" cy="297043"/>
             </a:xfrm>
             <a:prstGeom prst="line">
               <a:avLst/>
@@ -15240,24 +15493,24 @@
         </p:cxnSp>
         <p:cxnSp>
           <p:nvCxnSpPr>
-            <p:cNvPr id="7" name="Straight Connector 6">
+            <p:cNvPr id="10" name="Straight Connector 9">
               <a:extLst>
                 <a:ext uri="{FF2B5EF4-FFF2-40B4-BE49-F238E27FC236}">
-                  <a16:creationId xmlns:a16="http://schemas.microsoft.com/office/drawing/2014/main" id="{B82F8985-A178-E076-4917-A5370ACBC601}"/>
+                  <a16:creationId xmlns:a16="http://schemas.microsoft.com/office/drawing/2014/main" id="{AB0A8D44-6353-CA0F-9503-207E37AA868C}"/>
                 </a:ext>
               </a:extLst>
             </p:cNvPr>
             <p:cNvCxnSpPr>
               <a:cxnSpLocks/>
-              <a:stCxn id="225" idx="3"/>
-              <a:endCxn id="236" idx="1"/>
+              <a:stCxn id="49" idx="3"/>
+              <a:endCxn id="58" idx="1"/>
             </p:cNvCxnSpPr>
             <p:nvPr/>
           </p:nvCxnSpPr>
           <p:spPr>
             <a:xfrm>
-              <a:off x="2929886" y="2642033"/>
-              <a:ext cx="680631" cy="0"/>
+              <a:off x="8657674" y="3889747"/>
+              <a:ext cx="639864" cy="1983"/>
             </a:xfrm>
             <a:prstGeom prst="line">
               <a:avLst/>
@@ -15285,70 +15538,24 @@
         </p:cxnSp>
         <p:cxnSp>
           <p:nvCxnSpPr>
-            <p:cNvPr id="9" name="Straight Connector 8">
+            <p:cNvPr id="11" name="Straight Connector 10">
               <a:extLst>
                 <a:ext uri="{FF2B5EF4-FFF2-40B4-BE49-F238E27FC236}">
-                  <a16:creationId xmlns:a16="http://schemas.microsoft.com/office/drawing/2014/main" id="{4B8AAFA0-CAE8-2B1F-4E26-94C723A65781}"/>
+                  <a16:creationId xmlns:a16="http://schemas.microsoft.com/office/drawing/2014/main" id="{4E8C51E3-31ED-F640-4BD6-EF848C7ABBA2}"/>
                 </a:ext>
               </a:extLst>
             </p:cNvPr>
             <p:cNvCxnSpPr>
               <a:cxnSpLocks/>
-              <a:stCxn id="227" idx="3"/>
-              <a:endCxn id="237" idx="1"/>
-            </p:cNvCxnSpPr>
-            <p:nvPr/>
-          </p:nvCxnSpPr>
-          <p:spPr>
-            <a:xfrm flipV="1">
-              <a:off x="2929886" y="2336371"/>
-              <a:ext cx="676820" cy="1222648"/>
-            </a:xfrm>
-            <a:prstGeom prst="line">
-              <a:avLst/>
-            </a:prstGeom>
-            <a:ln w="12700">
-              <a:solidFill>
-                <a:schemeClr val="bg1"/>
-              </a:solidFill>
-              <a:prstDash val="sysDot"/>
-            </a:ln>
-          </p:spPr>
-          <p:style>
-            <a:lnRef idx="2">
-              <a:schemeClr val="accent1"/>
-            </a:lnRef>
-            <a:fillRef idx="0">
-              <a:schemeClr val="accent1"/>
-            </a:fillRef>
-            <a:effectRef idx="1">
-              <a:schemeClr val="accent1"/>
-            </a:effectRef>
-            <a:fontRef idx="minor">
-              <a:schemeClr val="tx1"/>
-            </a:fontRef>
-          </p:style>
-        </p:cxnSp>
-        <p:cxnSp>
-          <p:nvCxnSpPr>
-            <p:cNvPr id="27" name="Straight Connector 26">
-              <a:extLst>
-                <a:ext uri="{FF2B5EF4-FFF2-40B4-BE49-F238E27FC236}">
-                  <a16:creationId xmlns:a16="http://schemas.microsoft.com/office/drawing/2014/main" id="{5035DE4D-3950-1680-7C80-CD2732746056}"/>
-                </a:ext>
-              </a:extLst>
-            </p:cNvPr>
-            <p:cNvCxnSpPr>
-              <a:cxnSpLocks/>
-              <a:stCxn id="230" idx="3"/>
-              <a:endCxn id="241" idx="1"/>
+              <a:stCxn id="77" idx="3"/>
+              <a:endCxn id="48" idx="1"/>
             </p:cNvCxnSpPr>
             <p:nvPr/>
           </p:nvCxnSpPr>
           <p:spPr>
             <a:xfrm>
-              <a:off x="2929886" y="3253357"/>
-              <a:ext cx="680631" cy="0"/>
+              <a:off x="5760772" y="4114913"/>
+              <a:ext cx="657653" cy="73860"/>
             </a:xfrm>
             <a:prstGeom prst="line">
               <a:avLst/>
@@ -15374,58 +15581,12 @@
             </a:fontRef>
           </p:style>
         </p:cxnSp>
-        <p:cxnSp>
-          <p:nvCxnSpPr>
-            <p:cNvPr id="32" name="Straight Connector 31">
+        <p:sp>
+          <p:nvSpPr>
+            <p:cNvPr id="12" name="Right Brace 11">
               <a:extLst>
                 <a:ext uri="{FF2B5EF4-FFF2-40B4-BE49-F238E27FC236}">
-                  <a16:creationId xmlns:a16="http://schemas.microsoft.com/office/drawing/2014/main" id="{A8517B87-3347-BAFC-30A4-C32FB9E6475C}"/>
-                </a:ext>
-              </a:extLst>
-            </p:cNvPr>
-            <p:cNvCxnSpPr>
-              <a:cxnSpLocks/>
-              <a:stCxn id="224" idx="3"/>
-              <a:endCxn id="235" idx="1"/>
-            </p:cNvCxnSpPr>
-            <p:nvPr/>
-          </p:nvCxnSpPr>
-          <p:spPr>
-            <a:xfrm>
-              <a:off x="2929886" y="2947695"/>
-              <a:ext cx="665196" cy="0"/>
-            </a:xfrm>
-            <a:prstGeom prst="line">
-              <a:avLst/>
-            </a:prstGeom>
-            <a:ln w="12700">
-              <a:solidFill>
-                <a:schemeClr val="bg1"/>
-              </a:solidFill>
-              <a:prstDash val="sysDot"/>
-            </a:ln>
-          </p:spPr>
-          <p:style>
-            <a:lnRef idx="2">
-              <a:schemeClr val="accent1"/>
-            </a:lnRef>
-            <a:fillRef idx="0">
-              <a:schemeClr val="accent1"/>
-            </a:fillRef>
-            <a:effectRef idx="1">
-              <a:schemeClr val="accent1"/>
-            </a:effectRef>
-            <a:fontRef idx="minor">
-              <a:schemeClr val="tx1"/>
-            </a:fontRef>
-          </p:style>
-        </p:cxnSp>
-        <p:sp>
-          <p:nvSpPr>
-            <p:cNvPr id="33" name="Right Brace 32">
-              <a:extLst>
-                <a:ext uri="{FF2B5EF4-FFF2-40B4-BE49-F238E27FC236}">
-                  <a16:creationId xmlns:a16="http://schemas.microsoft.com/office/drawing/2014/main" id="{6AA9718F-0B06-7882-E106-86151133E8A8}"/>
+                  <a16:creationId xmlns:a16="http://schemas.microsoft.com/office/drawing/2014/main" id="{94175DA7-327D-0331-8F25-A4F4409E3B8F}"/>
                 </a:ext>
               </a:extLst>
             </p:cNvPr>
@@ -15434,7 +15595,7 @@
           </p:nvSpPr>
           <p:spPr>
             <a:xfrm>
-              <a:off x="5861045" y="2206203"/>
+              <a:off x="5781673" y="2459104"/>
               <a:ext cx="82756" cy="574896"/>
             </a:xfrm>
             <a:prstGeom prst="rightBrace">
@@ -15474,10 +15635,10 @@
         </p:sp>
         <p:sp>
           <p:nvSpPr>
-            <p:cNvPr id="34" name="Right Brace 33">
+            <p:cNvPr id="13" name="Right Brace 12">
               <a:extLst>
                 <a:ext uri="{FF2B5EF4-FFF2-40B4-BE49-F238E27FC236}">
-                  <a16:creationId xmlns:a16="http://schemas.microsoft.com/office/drawing/2014/main" id="{65D8AF6B-D011-8ACA-801B-042F88C8AADC}"/>
+                  <a16:creationId xmlns:a16="http://schemas.microsoft.com/office/drawing/2014/main" id="{D521F397-F9B4-CE8E-81AC-6208B0F063EC}"/>
                 </a:ext>
               </a:extLst>
             </p:cNvPr>
@@ -15486,8 +15647,8 @@
           </p:nvSpPr>
           <p:spPr>
             <a:xfrm>
-              <a:off x="5861045" y="2819553"/>
-              <a:ext cx="82756" cy="574896"/>
+              <a:off x="5781673" y="3072453"/>
+              <a:ext cx="82756" cy="854228"/>
             </a:xfrm>
             <a:prstGeom prst="rightBrace">
               <a:avLst>
@@ -15524,12 +15685,924 @@
             </a:p>
           </p:txBody>
         </p:sp>
+        <p:cxnSp>
+          <p:nvCxnSpPr>
+            <p:cNvPr id="14" name="Straight Connector 13">
+              <a:extLst>
+                <a:ext uri="{FF2B5EF4-FFF2-40B4-BE49-F238E27FC236}">
+                  <a16:creationId xmlns:a16="http://schemas.microsoft.com/office/drawing/2014/main" id="{3320183B-5116-DF88-33F2-FC8D16AFDC8A}"/>
+                </a:ext>
+              </a:extLst>
+            </p:cNvPr>
+            <p:cNvCxnSpPr>
+              <a:cxnSpLocks/>
+              <a:stCxn id="13" idx="1"/>
+              <a:endCxn id="48" idx="1"/>
+            </p:cNvCxnSpPr>
+            <p:nvPr/>
+          </p:nvCxnSpPr>
+          <p:spPr>
+            <a:xfrm>
+              <a:off x="5864429" y="3499567"/>
+              <a:ext cx="553996" cy="689206"/>
+            </a:xfrm>
+            <a:prstGeom prst="line">
+              <a:avLst/>
+            </a:prstGeom>
+            <a:ln w="12700">
+              <a:solidFill>
+                <a:schemeClr val="bg1"/>
+              </a:solidFill>
+              <a:prstDash val="sysDot"/>
+            </a:ln>
+          </p:spPr>
+          <p:style>
+            <a:lnRef idx="2">
+              <a:schemeClr val="accent1"/>
+            </a:lnRef>
+            <a:fillRef idx="0">
+              <a:schemeClr val="accent1"/>
+            </a:fillRef>
+            <a:effectRef idx="1">
+              <a:schemeClr val="accent1"/>
+            </a:effectRef>
+            <a:fontRef idx="minor">
+              <a:schemeClr val="tx1"/>
+            </a:fontRef>
+          </p:style>
+        </p:cxnSp>
+        <p:cxnSp>
+          <p:nvCxnSpPr>
+            <p:cNvPr id="15" name="Straight Connector 14">
+              <a:extLst>
+                <a:ext uri="{FF2B5EF4-FFF2-40B4-BE49-F238E27FC236}">
+                  <a16:creationId xmlns:a16="http://schemas.microsoft.com/office/drawing/2014/main" id="{A23FAF82-CAC2-1DA3-8E5E-65C7B0D436DA}"/>
+                </a:ext>
+              </a:extLst>
+            </p:cNvPr>
+            <p:cNvCxnSpPr>
+              <a:cxnSpLocks/>
+              <a:stCxn id="12" idx="1"/>
+              <a:endCxn id="43" idx="1"/>
+            </p:cNvCxnSpPr>
+            <p:nvPr/>
+          </p:nvCxnSpPr>
+          <p:spPr>
+            <a:xfrm>
+              <a:off x="5864429" y="2746552"/>
+              <a:ext cx="553996" cy="339897"/>
+            </a:xfrm>
+            <a:prstGeom prst="line">
+              <a:avLst/>
+            </a:prstGeom>
+            <a:ln w="12700">
+              <a:solidFill>
+                <a:schemeClr val="bg1"/>
+              </a:solidFill>
+            </a:ln>
+          </p:spPr>
+          <p:style>
+            <a:lnRef idx="2">
+              <a:schemeClr val="accent1"/>
+            </a:lnRef>
+            <a:fillRef idx="0">
+              <a:schemeClr val="accent1"/>
+            </a:fillRef>
+            <a:effectRef idx="1">
+              <a:schemeClr val="accent1"/>
+            </a:effectRef>
+            <a:fontRef idx="minor">
+              <a:schemeClr val="tx1"/>
+            </a:fontRef>
+          </p:style>
+        </p:cxnSp>
+        <p:cxnSp>
+          <p:nvCxnSpPr>
+            <p:cNvPr id="16" name="Straight Connector 15">
+              <a:extLst>
+                <a:ext uri="{FF2B5EF4-FFF2-40B4-BE49-F238E27FC236}">
+                  <a16:creationId xmlns:a16="http://schemas.microsoft.com/office/drawing/2014/main" id="{50808BC6-F3F0-B0AF-CDA7-468F550CB654}"/>
+                </a:ext>
+              </a:extLst>
+            </p:cNvPr>
+            <p:cNvCxnSpPr>
+              <a:cxnSpLocks/>
+              <a:stCxn id="13" idx="1"/>
+              <a:endCxn id="43" idx="1"/>
+            </p:cNvCxnSpPr>
+            <p:nvPr/>
+          </p:nvCxnSpPr>
+          <p:spPr>
+            <a:xfrm flipV="1">
+              <a:off x="5864429" y="3086449"/>
+              <a:ext cx="553996" cy="413118"/>
+            </a:xfrm>
+            <a:prstGeom prst="line">
+              <a:avLst/>
+            </a:prstGeom>
+            <a:ln w="12700">
+              <a:solidFill>
+                <a:schemeClr val="bg1"/>
+              </a:solidFill>
+            </a:ln>
+          </p:spPr>
+          <p:style>
+            <a:lnRef idx="2">
+              <a:schemeClr val="accent1"/>
+            </a:lnRef>
+            <a:fillRef idx="0">
+              <a:schemeClr val="accent1"/>
+            </a:fillRef>
+            <a:effectRef idx="1">
+              <a:schemeClr val="accent1"/>
+            </a:effectRef>
+            <a:fontRef idx="minor">
+              <a:schemeClr val="tx1"/>
+            </a:fontRef>
+          </p:style>
+        </p:cxnSp>
+        <p:cxnSp>
+          <p:nvCxnSpPr>
+            <p:cNvPr id="17" name="Straight Connector 16">
+              <a:extLst>
+                <a:ext uri="{FF2B5EF4-FFF2-40B4-BE49-F238E27FC236}">
+                  <a16:creationId xmlns:a16="http://schemas.microsoft.com/office/drawing/2014/main" id="{47D6EA28-053B-C6AB-93CD-C5278C066AC5}"/>
+                </a:ext>
+              </a:extLst>
+            </p:cNvPr>
+            <p:cNvCxnSpPr>
+              <a:cxnSpLocks/>
+              <a:stCxn id="13" idx="1"/>
+              <a:endCxn id="47" idx="1"/>
+            </p:cNvCxnSpPr>
+            <p:nvPr/>
+          </p:nvCxnSpPr>
+          <p:spPr>
+            <a:xfrm>
+              <a:off x="5864429" y="3499567"/>
+              <a:ext cx="553996" cy="988232"/>
+            </a:xfrm>
+            <a:prstGeom prst="line">
+              <a:avLst/>
+            </a:prstGeom>
+            <a:ln w="12700">
+              <a:solidFill>
+                <a:schemeClr val="bg1"/>
+              </a:solidFill>
+            </a:ln>
+          </p:spPr>
+          <p:style>
+            <a:lnRef idx="2">
+              <a:schemeClr val="accent1"/>
+            </a:lnRef>
+            <a:fillRef idx="0">
+              <a:schemeClr val="accent1"/>
+            </a:fillRef>
+            <a:effectRef idx="1">
+              <a:schemeClr val="accent1"/>
+            </a:effectRef>
+            <a:fontRef idx="minor">
+              <a:schemeClr val="tx1"/>
+            </a:fontRef>
+          </p:style>
+        </p:cxnSp>
+        <p:cxnSp>
+          <p:nvCxnSpPr>
+            <p:cNvPr id="18" name="Straight Connector 17">
+              <a:extLst>
+                <a:ext uri="{FF2B5EF4-FFF2-40B4-BE49-F238E27FC236}">
+                  <a16:creationId xmlns:a16="http://schemas.microsoft.com/office/drawing/2014/main" id="{E2C9998B-E5F5-994F-9072-41BDCF9C1A88}"/>
+                </a:ext>
+              </a:extLst>
+            </p:cNvPr>
+            <p:cNvCxnSpPr>
+              <a:cxnSpLocks/>
+              <a:stCxn id="12" idx="1"/>
+              <a:endCxn id="47" idx="1"/>
+            </p:cNvCxnSpPr>
+            <p:nvPr/>
+          </p:nvCxnSpPr>
+          <p:spPr>
+            <a:xfrm>
+              <a:off x="5864429" y="2746552"/>
+              <a:ext cx="553996" cy="1741247"/>
+            </a:xfrm>
+            <a:prstGeom prst="line">
+              <a:avLst/>
+            </a:prstGeom>
+            <a:ln w="12700">
+              <a:solidFill>
+                <a:schemeClr val="bg1"/>
+              </a:solidFill>
+              <a:prstDash val="sysDot"/>
+            </a:ln>
+          </p:spPr>
+          <p:style>
+            <a:lnRef idx="2">
+              <a:schemeClr val="accent1"/>
+            </a:lnRef>
+            <a:fillRef idx="0">
+              <a:schemeClr val="accent1"/>
+            </a:fillRef>
+            <a:effectRef idx="1">
+              <a:schemeClr val="accent1"/>
+            </a:effectRef>
+            <a:fontRef idx="minor">
+              <a:schemeClr val="tx1"/>
+            </a:fontRef>
+          </p:style>
+        </p:cxnSp>
+        <p:cxnSp>
+          <p:nvCxnSpPr>
+            <p:cNvPr id="19" name="Straight Connector 18">
+              <a:extLst>
+                <a:ext uri="{FF2B5EF4-FFF2-40B4-BE49-F238E27FC236}">
+                  <a16:creationId xmlns:a16="http://schemas.microsoft.com/office/drawing/2014/main" id="{5F631A63-0E9C-66C8-E8E8-CAD811910AAD}"/>
+                </a:ext>
+              </a:extLst>
+            </p:cNvPr>
+            <p:cNvCxnSpPr>
+              <a:cxnSpLocks/>
+              <a:stCxn id="13" idx="1"/>
+              <a:endCxn id="41" idx="1"/>
+            </p:cNvCxnSpPr>
+            <p:nvPr/>
+          </p:nvCxnSpPr>
+          <p:spPr>
+            <a:xfrm flipV="1">
+              <a:off x="5864429" y="2467631"/>
+              <a:ext cx="553996" cy="1031936"/>
+            </a:xfrm>
+            <a:prstGeom prst="line">
+              <a:avLst/>
+            </a:prstGeom>
+            <a:ln w="12700">
+              <a:solidFill>
+                <a:schemeClr val="bg1"/>
+              </a:solidFill>
+              <a:prstDash val="sysDot"/>
+            </a:ln>
+          </p:spPr>
+          <p:style>
+            <a:lnRef idx="2">
+              <a:schemeClr val="accent1"/>
+            </a:lnRef>
+            <a:fillRef idx="0">
+              <a:schemeClr val="accent1"/>
+            </a:fillRef>
+            <a:effectRef idx="1">
+              <a:schemeClr val="accent1"/>
+            </a:effectRef>
+            <a:fontRef idx="minor">
+              <a:schemeClr val="tx1"/>
+            </a:fontRef>
+          </p:style>
+        </p:cxnSp>
+        <p:cxnSp>
+          <p:nvCxnSpPr>
+            <p:cNvPr id="20" name="Straight Connector 19">
+              <a:extLst>
+                <a:ext uri="{FF2B5EF4-FFF2-40B4-BE49-F238E27FC236}">
+                  <a16:creationId xmlns:a16="http://schemas.microsoft.com/office/drawing/2014/main" id="{F1275B23-A82D-324A-5F1D-649124F684EC}"/>
+                </a:ext>
+              </a:extLst>
+            </p:cNvPr>
+            <p:cNvCxnSpPr>
+              <a:cxnSpLocks/>
+              <a:stCxn id="13" idx="1"/>
+              <a:endCxn id="42" idx="1"/>
+            </p:cNvCxnSpPr>
+            <p:nvPr/>
+          </p:nvCxnSpPr>
+          <p:spPr>
+            <a:xfrm flipV="1">
+              <a:off x="5864429" y="2168605"/>
+              <a:ext cx="553994" cy="1330962"/>
+            </a:xfrm>
+            <a:prstGeom prst="line">
+              <a:avLst/>
+            </a:prstGeom>
+            <a:ln w="12700">
+              <a:solidFill>
+                <a:schemeClr val="bg1"/>
+              </a:solidFill>
+              <a:prstDash val="sysDot"/>
+            </a:ln>
+          </p:spPr>
+          <p:style>
+            <a:lnRef idx="2">
+              <a:schemeClr val="accent1"/>
+            </a:lnRef>
+            <a:fillRef idx="0">
+              <a:schemeClr val="accent1"/>
+            </a:fillRef>
+            <a:effectRef idx="1">
+              <a:schemeClr val="accent1"/>
+            </a:effectRef>
+            <a:fontRef idx="minor">
+              <a:schemeClr val="tx1"/>
+            </a:fontRef>
+          </p:style>
+        </p:cxnSp>
+        <p:cxnSp>
+          <p:nvCxnSpPr>
+            <p:cNvPr id="21" name="Straight Connector 20">
+              <a:extLst>
+                <a:ext uri="{FF2B5EF4-FFF2-40B4-BE49-F238E27FC236}">
+                  <a16:creationId xmlns:a16="http://schemas.microsoft.com/office/drawing/2014/main" id="{BF981116-8698-0D88-6993-2D04AD4FEBBF}"/>
+                </a:ext>
+              </a:extLst>
+            </p:cNvPr>
+            <p:cNvCxnSpPr>
+              <a:cxnSpLocks/>
+              <a:stCxn id="12" idx="1"/>
+              <a:endCxn id="40" idx="1"/>
+            </p:cNvCxnSpPr>
+            <p:nvPr/>
+          </p:nvCxnSpPr>
+          <p:spPr>
+            <a:xfrm>
+              <a:off x="5864429" y="2746552"/>
+              <a:ext cx="553996" cy="20105"/>
+            </a:xfrm>
+            <a:prstGeom prst="line">
+              <a:avLst/>
+            </a:prstGeom>
+            <a:ln w="12700">
+              <a:solidFill>
+                <a:schemeClr val="bg1"/>
+              </a:solidFill>
+              <a:prstDash val="sysDot"/>
+            </a:ln>
+          </p:spPr>
+          <p:style>
+            <a:lnRef idx="2">
+              <a:schemeClr val="accent1"/>
+            </a:lnRef>
+            <a:fillRef idx="0">
+              <a:schemeClr val="accent1"/>
+            </a:fillRef>
+            <a:effectRef idx="1">
+              <a:schemeClr val="accent1"/>
+            </a:effectRef>
+            <a:fontRef idx="minor">
+              <a:schemeClr val="tx1"/>
+            </a:fontRef>
+          </p:style>
+        </p:cxnSp>
+        <p:cxnSp>
+          <p:nvCxnSpPr>
+            <p:cNvPr id="22" name="Straight Connector 21">
+              <a:extLst>
+                <a:ext uri="{FF2B5EF4-FFF2-40B4-BE49-F238E27FC236}">
+                  <a16:creationId xmlns:a16="http://schemas.microsoft.com/office/drawing/2014/main" id="{A764E24F-BA83-DE5E-B678-484ED25CD187}"/>
+                </a:ext>
+              </a:extLst>
+            </p:cNvPr>
+            <p:cNvCxnSpPr>
+              <a:cxnSpLocks/>
+              <a:stCxn id="12" idx="1"/>
+              <a:endCxn id="41" idx="1"/>
+            </p:cNvCxnSpPr>
+            <p:nvPr/>
+          </p:nvCxnSpPr>
+          <p:spPr>
+            <a:xfrm flipV="1">
+              <a:off x="5864429" y="2467631"/>
+              <a:ext cx="553996" cy="278921"/>
+            </a:xfrm>
+            <a:prstGeom prst="line">
+              <a:avLst/>
+            </a:prstGeom>
+            <a:ln w="12700">
+              <a:solidFill>
+                <a:schemeClr val="bg1"/>
+              </a:solidFill>
+              <a:prstDash val="sysDot"/>
+            </a:ln>
+          </p:spPr>
+          <p:style>
+            <a:lnRef idx="2">
+              <a:schemeClr val="accent1"/>
+            </a:lnRef>
+            <a:fillRef idx="0">
+              <a:schemeClr val="accent1"/>
+            </a:fillRef>
+            <a:effectRef idx="1">
+              <a:schemeClr val="accent1"/>
+            </a:effectRef>
+            <a:fontRef idx="minor">
+              <a:schemeClr val="tx1"/>
+            </a:fontRef>
+          </p:style>
+        </p:cxnSp>
+        <p:cxnSp>
+          <p:nvCxnSpPr>
+            <p:cNvPr id="23" name="Straight Connector 22">
+              <a:extLst>
+                <a:ext uri="{FF2B5EF4-FFF2-40B4-BE49-F238E27FC236}">
+                  <a16:creationId xmlns:a16="http://schemas.microsoft.com/office/drawing/2014/main" id="{EF41C516-1629-A773-3FE5-7B260564F6C2}"/>
+                </a:ext>
+              </a:extLst>
+            </p:cNvPr>
+            <p:cNvCxnSpPr>
+              <a:cxnSpLocks/>
+              <a:stCxn id="12" idx="1"/>
+              <a:endCxn id="42" idx="1"/>
+            </p:cNvCxnSpPr>
+            <p:nvPr/>
+          </p:nvCxnSpPr>
+          <p:spPr>
+            <a:xfrm flipV="1">
+              <a:off x="5864429" y="2168605"/>
+              <a:ext cx="553994" cy="577947"/>
+            </a:xfrm>
+            <a:prstGeom prst="line">
+              <a:avLst/>
+            </a:prstGeom>
+            <a:ln w="12700">
+              <a:solidFill>
+                <a:schemeClr val="bg1"/>
+              </a:solidFill>
+              <a:prstDash val="sysDot"/>
+            </a:ln>
+          </p:spPr>
+          <p:style>
+            <a:lnRef idx="2">
+              <a:schemeClr val="accent1"/>
+            </a:lnRef>
+            <a:fillRef idx="0">
+              <a:schemeClr val="accent1"/>
+            </a:fillRef>
+            <a:effectRef idx="1">
+              <a:schemeClr val="accent1"/>
+            </a:effectRef>
+            <a:fontRef idx="minor">
+              <a:schemeClr val="tx1"/>
+            </a:fontRef>
+          </p:style>
+        </p:cxnSp>
+        <p:cxnSp>
+          <p:nvCxnSpPr>
+            <p:cNvPr id="24" name="Straight Connector 23">
+              <a:extLst>
+                <a:ext uri="{FF2B5EF4-FFF2-40B4-BE49-F238E27FC236}">
+                  <a16:creationId xmlns:a16="http://schemas.microsoft.com/office/drawing/2014/main" id="{705CF95C-3CBB-0E13-6CC2-7BB0F5AF84C5}"/>
+                </a:ext>
+              </a:extLst>
+            </p:cNvPr>
+            <p:cNvCxnSpPr>
+              <a:cxnSpLocks/>
+              <a:stCxn id="13" idx="1"/>
+              <a:endCxn id="40" idx="1"/>
+            </p:cNvCxnSpPr>
+            <p:nvPr/>
+          </p:nvCxnSpPr>
+          <p:spPr>
+            <a:xfrm flipV="1">
+              <a:off x="5864429" y="2766657"/>
+              <a:ext cx="553996" cy="732910"/>
+            </a:xfrm>
+            <a:prstGeom prst="line">
+              <a:avLst/>
+            </a:prstGeom>
+            <a:ln w="12700">
+              <a:solidFill>
+                <a:schemeClr val="bg1"/>
+              </a:solidFill>
+              <a:prstDash val="sysDot"/>
+            </a:ln>
+          </p:spPr>
+          <p:style>
+            <a:lnRef idx="2">
+              <a:schemeClr val="accent1"/>
+            </a:lnRef>
+            <a:fillRef idx="0">
+              <a:schemeClr val="accent1"/>
+            </a:fillRef>
+            <a:effectRef idx="1">
+              <a:schemeClr val="accent1"/>
+            </a:effectRef>
+            <a:fontRef idx="minor">
+              <a:schemeClr val="tx1"/>
+            </a:fontRef>
+          </p:style>
+        </p:cxnSp>
+        <p:cxnSp>
+          <p:nvCxnSpPr>
+            <p:cNvPr id="25" name="Straight Connector 24">
+              <a:extLst>
+                <a:ext uri="{FF2B5EF4-FFF2-40B4-BE49-F238E27FC236}">
+                  <a16:creationId xmlns:a16="http://schemas.microsoft.com/office/drawing/2014/main" id="{2CC9F5F2-3D34-349F-9581-17D47EA0214D}"/>
+                </a:ext>
+              </a:extLst>
+            </p:cNvPr>
+            <p:cNvCxnSpPr>
+              <a:cxnSpLocks/>
+              <a:stCxn id="12" idx="1"/>
+              <a:endCxn id="48" idx="1"/>
+            </p:cNvCxnSpPr>
+            <p:nvPr/>
+          </p:nvCxnSpPr>
+          <p:spPr>
+            <a:xfrm>
+              <a:off x="5864429" y="2746552"/>
+              <a:ext cx="553996" cy="1442221"/>
+            </a:xfrm>
+            <a:prstGeom prst="line">
+              <a:avLst/>
+            </a:prstGeom>
+            <a:ln w="12700">
+              <a:solidFill>
+                <a:schemeClr val="bg1"/>
+              </a:solidFill>
+            </a:ln>
+          </p:spPr>
+          <p:style>
+            <a:lnRef idx="2">
+              <a:schemeClr val="accent1"/>
+            </a:lnRef>
+            <a:fillRef idx="0">
+              <a:schemeClr val="accent1"/>
+            </a:fillRef>
+            <a:effectRef idx="1">
+              <a:schemeClr val="accent1"/>
+            </a:effectRef>
+            <a:fontRef idx="minor">
+              <a:schemeClr val="tx1"/>
+            </a:fontRef>
+          </p:style>
+        </p:cxnSp>
+        <p:cxnSp>
+          <p:nvCxnSpPr>
+            <p:cNvPr id="26" name="Straight Connector 25">
+              <a:extLst>
+                <a:ext uri="{FF2B5EF4-FFF2-40B4-BE49-F238E27FC236}">
+                  <a16:creationId xmlns:a16="http://schemas.microsoft.com/office/drawing/2014/main" id="{1D6EAC62-1F3D-29F9-69E9-493835200B05}"/>
+                </a:ext>
+              </a:extLst>
+            </p:cNvPr>
+            <p:cNvCxnSpPr>
+              <a:cxnSpLocks/>
+              <a:stCxn id="85" idx="3"/>
+              <a:endCxn id="65" idx="1"/>
+            </p:cNvCxnSpPr>
+            <p:nvPr/>
+          </p:nvCxnSpPr>
+          <p:spPr>
+            <a:xfrm>
+              <a:off x="2848129" y="2589112"/>
+              <a:ext cx="671015" cy="0"/>
+            </a:xfrm>
+            <a:prstGeom prst="line">
+              <a:avLst/>
+            </a:prstGeom>
+            <a:ln w="12700">
+              <a:solidFill>
+                <a:schemeClr val="bg1"/>
+              </a:solidFill>
+              <a:prstDash val="sysDot"/>
+            </a:ln>
+          </p:spPr>
+          <p:style>
+            <a:lnRef idx="2">
+              <a:schemeClr val="accent1"/>
+            </a:lnRef>
+            <a:fillRef idx="0">
+              <a:schemeClr val="accent1"/>
+            </a:fillRef>
+            <a:effectRef idx="1">
+              <a:schemeClr val="accent1"/>
+            </a:effectRef>
+            <a:fontRef idx="minor">
+              <a:schemeClr val="tx1"/>
+            </a:fontRef>
+          </p:style>
+        </p:cxnSp>
+        <p:cxnSp>
+          <p:nvCxnSpPr>
+            <p:cNvPr id="28" name="Straight Connector 27">
+              <a:extLst>
+                <a:ext uri="{FF2B5EF4-FFF2-40B4-BE49-F238E27FC236}">
+                  <a16:creationId xmlns:a16="http://schemas.microsoft.com/office/drawing/2014/main" id="{9C438CF4-095F-DD92-2D18-423A1CCE140D}"/>
+                </a:ext>
+              </a:extLst>
+            </p:cNvPr>
+            <p:cNvCxnSpPr>
+              <a:cxnSpLocks/>
+              <a:stCxn id="84" idx="3"/>
+              <a:endCxn id="64" idx="1"/>
+            </p:cNvCxnSpPr>
+            <p:nvPr/>
+          </p:nvCxnSpPr>
+          <p:spPr>
+            <a:xfrm>
+              <a:off x="2850509" y="2894774"/>
+              <a:ext cx="671017" cy="0"/>
+            </a:xfrm>
+            <a:prstGeom prst="line">
+              <a:avLst/>
+            </a:prstGeom>
+            <a:ln w="12700">
+              <a:solidFill>
+                <a:schemeClr val="bg1"/>
+              </a:solidFill>
+            </a:ln>
+          </p:spPr>
+          <p:style>
+            <a:lnRef idx="2">
+              <a:schemeClr val="accent1"/>
+            </a:lnRef>
+            <a:fillRef idx="0">
+              <a:schemeClr val="accent1"/>
+            </a:fillRef>
+            <a:effectRef idx="1">
+              <a:schemeClr val="accent1"/>
+            </a:effectRef>
+            <a:fontRef idx="minor">
+              <a:schemeClr val="tx1"/>
+            </a:fontRef>
+          </p:style>
+        </p:cxnSp>
+        <p:cxnSp>
+          <p:nvCxnSpPr>
+            <p:cNvPr id="29" name="Straight Connector 28">
+              <a:extLst>
+                <a:ext uri="{FF2B5EF4-FFF2-40B4-BE49-F238E27FC236}">
+                  <a16:creationId xmlns:a16="http://schemas.microsoft.com/office/drawing/2014/main" id="{E0932F7F-A481-E60B-8063-E7310EC4DBB9}"/>
+                </a:ext>
+              </a:extLst>
+            </p:cNvPr>
+            <p:cNvCxnSpPr>
+              <a:cxnSpLocks/>
+              <a:stCxn id="256" idx="3"/>
+            </p:cNvCxnSpPr>
+            <p:nvPr/>
+          </p:nvCxnSpPr>
+          <p:spPr>
+            <a:xfrm flipV="1">
+              <a:off x="2850509" y="2589272"/>
+              <a:ext cx="676825" cy="1525641"/>
+            </a:xfrm>
+            <a:prstGeom prst="line">
+              <a:avLst/>
+            </a:prstGeom>
+            <a:ln w="12700">
+              <a:solidFill>
+                <a:schemeClr val="bg1"/>
+              </a:solidFill>
+              <a:prstDash val="sysDot"/>
+            </a:ln>
+          </p:spPr>
+          <p:style>
+            <a:lnRef idx="2">
+              <a:schemeClr val="accent1"/>
+            </a:lnRef>
+            <a:fillRef idx="0">
+              <a:schemeClr val="accent1"/>
+            </a:fillRef>
+            <a:effectRef idx="1">
+              <a:schemeClr val="accent1"/>
+            </a:effectRef>
+            <a:fontRef idx="minor">
+              <a:schemeClr val="tx1"/>
+            </a:fontRef>
+          </p:style>
+        </p:cxnSp>
+        <p:cxnSp>
+          <p:nvCxnSpPr>
+            <p:cNvPr id="30" name="Straight Connector 29">
+              <a:extLst>
+                <a:ext uri="{FF2B5EF4-FFF2-40B4-BE49-F238E27FC236}">
+                  <a16:creationId xmlns:a16="http://schemas.microsoft.com/office/drawing/2014/main" id="{68F76E30-EB82-5C00-67AA-1D09DB79531E}"/>
+                </a:ext>
+              </a:extLst>
+            </p:cNvPr>
+            <p:cNvCxnSpPr>
+              <a:cxnSpLocks/>
+              <a:stCxn id="90" idx="3"/>
+              <a:endCxn id="69" idx="1"/>
+            </p:cNvCxnSpPr>
+            <p:nvPr/>
+          </p:nvCxnSpPr>
+          <p:spPr>
+            <a:xfrm>
+              <a:off x="2850509" y="3506098"/>
+              <a:ext cx="671017" cy="0"/>
+            </a:xfrm>
+            <a:prstGeom prst="line">
+              <a:avLst/>
+            </a:prstGeom>
+            <a:ln w="12700">
+              <a:solidFill>
+                <a:schemeClr val="bg1"/>
+              </a:solidFill>
+            </a:ln>
+          </p:spPr>
+          <p:style>
+            <a:lnRef idx="2">
+              <a:schemeClr val="accent1"/>
+            </a:lnRef>
+            <a:fillRef idx="0">
+              <a:schemeClr val="accent1"/>
+            </a:fillRef>
+            <a:effectRef idx="1">
+              <a:schemeClr val="accent1"/>
+            </a:effectRef>
+            <a:fontRef idx="minor">
+              <a:schemeClr val="tx1"/>
+            </a:fontRef>
+          </p:style>
+        </p:cxnSp>
+        <p:cxnSp>
+          <p:nvCxnSpPr>
+            <p:cNvPr id="31" name="Straight Connector 30">
+              <a:extLst>
+                <a:ext uri="{FF2B5EF4-FFF2-40B4-BE49-F238E27FC236}">
+                  <a16:creationId xmlns:a16="http://schemas.microsoft.com/office/drawing/2014/main" id="{C0B123D6-BC1E-2C91-6285-5F0D4B0942D8}"/>
+                </a:ext>
+              </a:extLst>
+            </p:cNvPr>
+            <p:cNvCxnSpPr>
+              <a:cxnSpLocks/>
+              <a:stCxn id="83" idx="3"/>
+              <a:endCxn id="63" idx="1"/>
+            </p:cNvCxnSpPr>
+            <p:nvPr/>
+          </p:nvCxnSpPr>
+          <p:spPr>
+            <a:xfrm>
+              <a:off x="2850509" y="3200436"/>
+              <a:ext cx="671017" cy="0"/>
+            </a:xfrm>
+            <a:prstGeom prst="line">
+              <a:avLst/>
+            </a:prstGeom>
+            <a:ln w="12700">
+              <a:solidFill>
+                <a:schemeClr val="bg1"/>
+              </a:solidFill>
+              <a:prstDash val="sysDot"/>
+            </a:ln>
+          </p:spPr>
+          <p:style>
+            <a:lnRef idx="2">
+              <a:schemeClr val="accent1"/>
+            </a:lnRef>
+            <a:fillRef idx="0">
+              <a:schemeClr val="accent1"/>
+            </a:fillRef>
+            <a:effectRef idx="1">
+              <a:schemeClr val="accent1"/>
+            </a:effectRef>
+            <a:fontRef idx="minor">
+              <a:schemeClr val="tx1"/>
+            </a:fontRef>
+          </p:style>
+        </p:cxnSp>
+        <p:cxnSp>
+          <p:nvCxnSpPr>
+            <p:cNvPr id="243" name="Straight Connector 242">
+              <a:extLst>
+                <a:ext uri="{FF2B5EF4-FFF2-40B4-BE49-F238E27FC236}">
+                  <a16:creationId xmlns:a16="http://schemas.microsoft.com/office/drawing/2014/main" id="{7BFB02A8-4A6B-C652-B12F-1B6EA2E678F5}"/>
+                </a:ext>
+              </a:extLst>
+            </p:cNvPr>
+            <p:cNvCxnSpPr>
+              <a:cxnSpLocks/>
+              <a:stCxn id="256" idx="3"/>
+            </p:cNvCxnSpPr>
+            <p:nvPr/>
+          </p:nvCxnSpPr>
+          <p:spPr>
+            <a:xfrm flipV="1">
+              <a:off x="2850509" y="3191388"/>
+              <a:ext cx="664419" cy="923525"/>
+            </a:xfrm>
+            <a:prstGeom prst="line">
+              <a:avLst/>
+            </a:prstGeom>
+            <a:ln w="12700">
+              <a:solidFill>
+                <a:schemeClr val="bg1"/>
+              </a:solidFill>
+              <a:prstDash val="sysDot"/>
+            </a:ln>
+          </p:spPr>
+          <p:style>
+            <a:lnRef idx="2">
+              <a:schemeClr val="accent1"/>
+            </a:lnRef>
+            <a:fillRef idx="0">
+              <a:schemeClr val="accent1"/>
+            </a:fillRef>
+            <a:effectRef idx="1">
+              <a:schemeClr val="accent1"/>
+            </a:effectRef>
+            <a:fontRef idx="minor">
+              <a:schemeClr val="tx1"/>
+            </a:fontRef>
+          </p:style>
+        </p:cxnSp>
+        <p:cxnSp>
+          <p:nvCxnSpPr>
+            <p:cNvPr id="244" name="Straight Connector 243">
+              <a:extLst>
+                <a:ext uri="{FF2B5EF4-FFF2-40B4-BE49-F238E27FC236}">
+                  <a16:creationId xmlns:a16="http://schemas.microsoft.com/office/drawing/2014/main" id="{F42253DF-3315-375E-ECA3-439DFF86DA01}"/>
+                </a:ext>
+              </a:extLst>
+            </p:cNvPr>
+            <p:cNvCxnSpPr>
+              <a:cxnSpLocks/>
+              <a:stCxn id="86" idx="3"/>
+              <a:endCxn id="66" idx="1"/>
+            </p:cNvCxnSpPr>
+            <p:nvPr/>
+          </p:nvCxnSpPr>
+          <p:spPr>
+            <a:xfrm>
+              <a:off x="2850509" y="3811760"/>
+              <a:ext cx="671017" cy="0"/>
+            </a:xfrm>
+            <a:prstGeom prst="line">
+              <a:avLst/>
+            </a:prstGeom>
+            <a:ln w="12700">
+              <a:solidFill>
+                <a:schemeClr val="bg1"/>
+              </a:solidFill>
+              <a:prstDash val="sysDot"/>
+            </a:ln>
+          </p:spPr>
+          <p:style>
+            <a:lnRef idx="2">
+              <a:schemeClr val="accent1"/>
+            </a:lnRef>
+            <a:fillRef idx="0">
+              <a:schemeClr val="accent1"/>
+            </a:fillRef>
+            <a:effectRef idx="1">
+              <a:schemeClr val="accent1"/>
+            </a:effectRef>
+            <a:fontRef idx="minor">
+              <a:schemeClr val="tx1"/>
+            </a:fontRef>
+          </p:style>
+        </p:cxnSp>
+        <p:cxnSp>
+          <p:nvCxnSpPr>
+            <p:cNvPr id="245" name="Straight Connector 244">
+              <a:extLst>
+                <a:ext uri="{FF2B5EF4-FFF2-40B4-BE49-F238E27FC236}">
+                  <a16:creationId xmlns:a16="http://schemas.microsoft.com/office/drawing/2014/main" id="{21527546-947B-CB22-1F8F-4B22F9E2C323}"/>
+                </a:ext>
+              </a:extLst>
+            </p:cNvPr>
+            <p:cNvCxnSpPr>
+              <a:cxnSpLocks/>
+              <a:stCxn id="86" idx="3"/>
+              <a:endCxn id="64" idx="1"/>
+            </p:cNvCxnSpPr>
+            <p:nvPr/>
+          </p:nvCxnSpPr>
+          <p:spPr>
+            <a:xfrm flipV="1">
+              <a:off x="2850509" y="2894774"/>
+              <a:ext cx="671017" cy="916986"/>
+            </a:xfrm>
+            <a:prstGeom prst="line">
+              <a:avLst/>
+            </a:prstGeom>
+            <a:ln w="12700">
+              <a:solidFill>
+                <a:schemeClr val="bg1"/>
+              </a:solidFill>
+              <a:prstDash val="sysDot"/>
+            </a:ln>
+          </p:spPr>
+          <p:style>
+            <a:lnRef idx="2">
+              <a:schemeClr val="accent1"/>
+            </a:lnRef>
+            <a:fillRef idx="0">
+              <a:schemeClr val="accent1"/>
+            </a:fillRef>
+            <a:effectRef idx="1">
+              <a:schemeClr val="accent1"/>
+            </a:effectRef>
+            <a:fontRef idx="minor">
+              <a:schemeClr val="tx1"/>
+            </a:fontRef>
+          </p:style>
+        </p:cxnSp>
         <p:grpSp>
           <p:nvGrpSpPr>
-            <p:cNvPr id="35" name="Group 34">
+            <p:cNvPr id="246" name="Group 245">
               <a:extLst>
                 <a:ext uri="{FF2B5EF4-FFF2-40B4-BE49-F238E27FC236}">
-                  <a16:creationId xmlns:a16="http://schemas.microsoft.com/office/drawing/2014/main" id="{6B4A6845-A427-CA62-2C08-0BAA2F810697}"/>
+                  <a16:creationId xmlns:a16="http://schemas.microsoft.com/office/drawing/2014/main" id="{FADF31DD-B732-28F9-99B0-3BCC9A5C1892}"/>
                 </a:ext>
               </a:extLst>
             </p:cNvPr>
@@ -15538,18 +16611,18 @@
           </p:nvGrpSpPr>
           <p:grpSpPr>
             <a:xfrm>
-              <a:off x="3594298" y="2171378"/>
-              <a:ext cx="2263961" cy="1844033"/>
-              <a:chOff x="3916949" y="3691197"/>
-              <a:chExt cx="2263961" cy="1844033"/>
+              <a:off x="608881" y="2424120"/>
+              <a:ext cx="2266340" cy="2155067"/>
+              <a:chOff x="608886" y="2557594"/>
+              <a:chExt cx="2266340" cy="2155067"/>
             </a:xfrm>
           </p:grpSpPr>
           <p:sp>
             <p:nvSpPr>
-              <p:cNvPr id="232" name="Rectangle: Rounded Corners 231">
+              <p:cNvPr id="80" name="Rectangle: Rounded Corners 79">
                 <a:extLst>
                   <a:ext uri="{FF2B5EF4-FFF2-40B4-BE49-F238E27FC236}">
-                    <a16:creationId xmlns:a16="http://schemas.microsoft.com/office/drawing/2014/main" id="{133216DE-A09A-02DA-F73D-F609EA354A37}"/>
+                    <a16:creationId xmlns:a16="http://schemas.microsoft.com/office/drawing/2014/main" id="{22AD2A1F-8489-F812-9BE4-1230A42E4633}"/>
                   </a:ext>
                 </a:extLst>
               </p:cNvPr>
@@ -15558,8 +16631,8 @@
             </p:nvSpPr>
             <p:spPr>
               <a:xfrm>
-                <a:off x="3916949" y="3692460"/>
-                <a:ext cx="2239249" cy="1531642"/>
+                <a:off x="611265" y="2558856"/>
+                <a:ext cx="2239249" cy="1852258"/>
               </a:xfrm>
               <a:prstGeom prst="roundRect">
                 <a:avLst>
@@ -15603,10 +16676,10 @@
           </p:sp>
           <p:sp>
             <p:nvSpPr>
-              <p:cNvPr id="233" name="Rectangle: Top Corners Rounded 232">
+              <p:cNvPr id="81" name="Rectangle: Top Corners Rounded 80">
                 <a:extLst>
                   <a:ext uri="{FF2B5EF4-FFF2-40B4-BE49-F238E27FC236}">
-                    <a16:creationId xmlns:a16="http://schemas.microsoft.com/office/drawing/2014/main" id="{E3F1A58A-3DA1-B726-50A5-443D5C10D3BF}"/>
+                    <a16:creationId xmlns:a16="http://schemas.microsoft.com/office/drawing/2014/main" id="{B6F6253E-2D00-AFCC-D750-8AFB64C6EFB4}"/>
                   </a:ext>
                 </a:extLst>
               </p:cNvPr>
@@ -15615,7 +16688,7 @@
             </p:nvSpPr>
             <p:spPr>
               <a:xfrm rot="10800000">
-                <a:off x="3916952" y="4613172"/>
+                <a:off x="611268" y="3479568"/>
                 <a:ext cx="2239248" cy="323588"/>
               </a:xfrm>
               <a:prstGeom prst="round2SameRect">
@@ -15658,10 +16731,10 @@
           </p:sp>
           <p:sp>
             <p:nvSpPr>
-              <p:cNvPr id="234" name="Rectangle 233">
+              <p:cNvPr id="82" name="Rectangle 81">
                 <a:extLst>
                   <a:ext uri="{FF2B5EF4-FFF2-40B4-BE49-F238E27FC236}">
-                    <a16:creationId xmlns:a16="http://schemas.microsoft.com/office/drawing/2014/main" id="{7D729002-84E1-D59E-85F9-F19919C03FF4}"/>
+                    <a16:creationId xmlns:a16="http://schemas.microsoft.com/office/drawing/2014/main" id="{1B53A0D3-F02A-ADC4-332A-3CDA4EF18D66}"/>
                   </a:ext>
                 </a:extLst>
               </p:cNvPr>
@@ -15670,7 +16743,7 @@
             </p:nvSpPr>
             <p:spPr>
               <a:xfrm>
-                <a:off x="3916951" y="3990559"/>
+                <a:off x="611267" y="2856955"/>
                 <a:ext cx="2239249" cy="323587"/>
               </a:xfrm>
               <a:prstGeom prst="rect">
@@ -15710,10 +16783,10 @@
           </p:sp>
           <p:sp>
             <p:nvSpPr>
-              <p:cNvPr id="235" name="TextBox 234">
+              <p:cNvPr id="83" name="TextBox 82">
                 <a:extLst>
                   <a:ext uri="{FF2B5EF4-FFF2-40B4-BE49-F238E27FC236}">
-                    <a16:creationId xmlns:a16="http://schemas.microsoft.com/office/drawing/2014/main" id="{D275F4CA-9251-4571-DCC0-33EB207DE7D5}"/>
+                    <a16:creationId xmlns:a16="http://schemas.microsoft.com/office/drawing/2014/main" id="{67EA32AA-ECAD-A582-8A72-B363C39095EF}"/>
                   </a:ext>
                 </a:extLst>
               </p:cNvPr>
@@ -15722,570 +16795,7 @@
             </p:nvSpPr>
             <p:spPr>
               <a:xfrm>
-                <a:off x="3917733" y="4313625"/>
-                <a:ext cx="2237684" cy="307777"/>
-              </a:xfrm>
-              <a:prstGeom prst="rect">
-                <a:avLst/>
-              </a:prstGeom>
-              <a:noFill/>
-            </p:spPr>
-            <p:txBody>
-              <a:bodyPr wrap="square">
-                <a:spAutoFit/>
-              </a:bodyPr>
-              <a:lstStyle/>
-              <a:p>
-                <a:pPr algn="ctr"/>
-                <a:r>
-                  <a:rPr lang="en-US" sz="1400" dirty="0">
-                    <a:solidFill>
-                      <a:schemeClr val="bg1"/>
-                    </a:solidFill>
-                    <a:latin typeface="Times New Roman" panose="02020603050405020304" pitchFamily="18" charset="0"/>
-                    <a:cs typeface="Times New Roman" panose="02020603050405020304" pitchFamily="18" charset="0"/>
-                  </a:rPr>
-                  <a:t>OAI : USRP</a:t>
-                </a:r>
-              </a:p>
-            </p:txBody>
-          </p:sp>
-          <p:sp>
-            <p:nvSpPr>
-              <p:cNvPr id="236" name="TextBox 235">
-                <a:extLst>
-                  <a:ext uri="{FF2B5EF4-FFF2-40B4-BE49-F238E27FC236}">
-                    <a16:creationId xmlns:a16="http://schemas.microsoft.com/office/drawing/2014/main" id="{1F26A111-5EBC-8A84-F8A9-6B4AAE92CFC2}"/>
-                  </a:ext>
-                </a:extLst>
-              </p:cNvPr>
-              <p:cNvSpPr txBox="1"/>
-              <p:nvPr/>
-            </p:nvSpPr>
-            <p:spPr>
-              <a:xfrm>
-                <a:off x="3933168" y="4007963"/>
-                <a:ext cx="2206814" cy="307777"/>
-              </a:xfrm>
-              <a:prstGeom prst="rect">
-                <a:avLst/>
-              </a:prstGeom>
-              <a:noFill/>
-            </p:spPr>
-            <p:txBody>
-              <a:bodyPr wrap="square">
-                <a:spAutoFit/>
-              </a:bodyPr>
-              <a:lstStyle/>
-              <a:p>
-                <a:pPr algn="ctr"/>
-                <a:r>
-                  <a:rPr lang="en-US" sz="1400" dirty="0">
-                    <a:solidFill>
-                      <a:schemeClr val="bg1"/>
-                    </a:solidFill>
-                    <a:latin typeface="Times New Roman" panose="02020603050405020304" pitchFamily="18" charset="0"/>
-                    <a:cs typeface="Times New Roman" panose="02020603050405020304" pitchFamily="18" charset="0"/>
-                  </a:rPr>
-                  <a:t>OCUDU : </a:t>
-                </a:r>
-                <a:r>
-                  <a:rPr lang="en-US" sz="1400" dirty="0" err="1">
-                    <a:solidFill>
-                      <a:schemeClr val="bg1"/>
-                    </a:solidFill>
-                    <a:latin typeface="Times New Roman" panose="02020603050405020304" pitchFamily="18" charset="0"/>
-                    <a:cs typeface="Times New Roman" panose="02020603050405020304" pitchFamily="18" charset="0"/>
-                  </a:rPr>
-                  <a:t>ZeroMQ</a:t>
-                </a:r>
-                <a:endParaRPr lang="en-US" sz="1400" dirty="0">
-                  <a:solidFill>
-                    <a:schemeClr val="bg1"/>
-                  </a:solidFill>
-                  <a:latin typeface="Times New Roman" panose="02020603050405020304" pitchFamily="18" charset="0"/>
-                  <a:cs typeface="Times New Roman" panose="02020603050405020304" pitchFamily="18" charset="0"/>
-                </a:endParaRPr>
-              </a:p>
-            </p:txBody>
-          </p:sp>
-          <p:sp>
-            <p:nvSpPr>
-              <p:cNvPr id="237" name="TextBox 236">
-                <a:extLst>
-                  <a:ext uri="{FF2B5EF4-FFF2-40B4-BE49-F238E27FC236}">
-                    <a16:creationId xmlns:a16="http://schemas.microsoft.com/office/drawing/2014/main" id="{B012CE6A-2E67-AA61-B919-3E6BD14B18D3}"/>
-                  </a:ext>
-                </a:extLst>
-              </p:cNvPr>
-              <p:cNvSpPr txBox="1"/>
-              <p:nvPr/>
-            </p:nvSpPr>
-            <p:spPr>
-              <a:xfrm>
-                <a:off x="3929357" y="3702301"/>
-                <a:ext cx="2206816" cy="307777"/>
-              </a:xfrm>
-              <a:prstGeom prst="rect">
-                <a:avLst/>
-              </a:prstGeom>
-              <a:noFill/>
-            </p:spPr>
-            <p:txBody>
-              <a:bodyPr wrap="square">
-                <a:spAutoFit/>
-              </a:bodyPr>
-              <a:lstStyle/>
-              <a:p>
-                <a:pPr algn="ctr"/>
-                <a:r>
-                  <a:rPr lang="en-US" sz="1400" dirty="0">
-                    <a:solidFill>
-                      <a:schemeClr val="bg1"/>
-                    </a:solidFill>
-                    <a:latin typeface="Times New Roman" panose="02020603050405020304" pitchFamily="18" charset="0"/>
-                    <a:cs typeface="Times New Roman" panose="02020603050405020304" pitchFamily="18" charset="0"/>
-                  </a:rPr>
-                  <a:t>OCUDU : USRP</a:t>
-                </a:r>
-              </a:p>
-            </p:txBody>
-          </p:sp>
-          <p:sp>
-            <p:nvSpPr>
-              <p:cNvPr id="238" name="TextBox 237">
-                <a:extLst>
-                  <a:ext uri="{FF2B5EF4-FFF2-40B4-BE49-F238E27FC236}">
-                    <a16:creationId xmlns:a16="http://schemas.microsoft.com/office/drawing/2014/main" id="{CFCF6271-F672-6D8D-EEAC-7FE0D0B10B1B}"/>
-                  </a:ext>
-                </a:extLst>
-              </p:cNvPr>
-              <p:cNvSpPr txBox="1"/>
-              <p:nvPr/>
-            </p:nvSpPr>
-            <p:spPr>
-              <a:xfrm>
-                <a:off x="3933168" y="4924949"/>
-                <a:ext cx="2206814" cy="307777"/>
-              </a:xfrm>
-              <a:prstGeom prst="rect">
-                <a:avLst/>
-              </a:prstGeom>
-              <a:noFill/>
-            </p:spPr>
-            <p:txBody>
-              <a:bodyPr wrap="square">
-                <a:spAutoFit/>
-              </a:bodyPr>
-              <a:lstStyle/>
-              <a:p>
-                <a:pPr algn="ctr"/>
-                <a:r>
-                  <a:rPr lang="en-US" sz="1400" dirty="0">
-                    <a:solidFill>
-                      <a:schemeClr val="bg1"/>
-                    </a:solidFill>
-                    <a:latin typeface="Times New Roman" panose="02020603050405020304" pitchFamily="18" charset="0"/>
-                    <a:cs typeface="Times New Roman" panose="02020603050405020304" pitchFamily="18" charset="0"/>
-                  </a:rPr>
-                  <a:t>O-RAN SC : E2 Simulator</a:t>
-                </a:r>
-              </a:p>
-            </p:txBody>
-          </p:sp>
-          <p:sp>
-            <p:nvSpPr>
-              <p:cNvPr id="239" name="TextBox 238">
-                <a:extLst>
-                  <a:ext uri="{FF2B5EF4-FFF2-40B4-BE49-F238E27FC236}">
-                    <a16:creationId xmlns:a16="http://schemas.microsoft.com/office/drawing/2014/main" id="{C1671B07-F128-BF85-84FA-343EA2772B8E}"/>
-                  </a:ext>
-                </a:extLst>
-              </p:cNvPr>
-              <p:cNvSpPr txBox="1"/>
-              <p:nvPr/>
-            </p:nvSpPr>
-            <p:spPr>
-              <a:xfrm>
-                <a:off x="3941661" y="5227453"/>
-                <a:ext cx="2239249" cy="307777"/>
-              </a:xfrm>
-              <a:prstGeom prst="rect">
-                <a:avLst/>
-              </a:prstGeom>
-              <a:noFill/>
-            </p:spPr>
-            <p:txBody>
-              <a:bodyPr wrap="square">
-                <a:spAutoFit/>
-              </a:bodyPr>
-              <a:lstStyle/>
-              <a:p>
-                <a:pPr algn="ctr"/>
-                <a:r>
-                  <a:rPr lang="en-US" sz="1400" b="1" dirty="0">
-                    <a:solidFill>
-                      <a:schemeClr val="bg1"/>
-                    </a:solidFill>
-                    <a:latin typeface="Times New Roman" panose="02020603050405020304" pitchFamily="18" charset="0"/>
-                    <a:cs typeface="Times New Roman" panose="02020603050405020304" pitchFamily="18" charset="0"/>
-                  </a:rPr>
-                  <a:t>Next Generation Node B</a:t>
-                </a:r>
-              </a:p>
-            </p:txBody>
-          </p:sp>
-          <p:sp>
-            <p:nvSpPr>
-              <p:cNvPr id="240" name="Rectangle 239">
-                <a:extLst>
-                  <a:ext uri="{FF2B5EF4-FFF2-40B4-BE49-F238E27FC236}">
-                    <a16:creationId xmlns:a16="http://schemas.microsoft.com/office/drawing/2014/main" id="{FA825144-48E1-D560-99D8-BB8AA43C40A7}"/>
-                  </a:ext>
-                </a:extLst>
-              </p:cNvPr>
-              <p:cNvSpPr/>
-              <p:nvPr/>
-            </p:nvSpPr>
-            <p:spPr>
-              <a:xfrm>
-                <a:off x="3916950" y="4615547"/>
-                <a:ext cx="2239249" cy="323587"/>
-              </a:xfrm>
-              <a:prstGeom prst="rect">
-                <a:avLst/>
-              </a:prstGeom>
-              <a:solidFill>
-                <a:srgbClr val="3A3A3A"/>
-              </a:solidFill>
-              <a:ln>
-                <a:noFill/>
-              </a:ln>
-            </p:spPr>
-            <p:style>
-              <a:lnRef idx="2">
-                <a:schemeClr val="accent1">
-                  <a:shade val="15000"/>
-                </a:schemeClr>
-              </a:lnRef>
-              <a:fillRef idx="1">
-                <a:schemeClr val="accent1"/>
-              </a:fillRef>
-              <a:effectRef idx="0">
-                <a:schemeClr val="accent1"/>
-              </a:effectRef>
-              <a:fontRef idx="minor">
-                <a:schemeClr val="lt1"/>
-              </a:fontRef>
-            </p:style>
-            <p:txBody>
-              <a:bodyPr rtlCol="0" anchor="ctr"/>
-              <a:lstStyle/>
-              <a:p>
-                <a:pPr algn="ctr"/>
-                <a:endParaRPr lang="en-US"/>
-              </a:p>
-            </p:txBody>
-          </p:sp>
-          <p:sp>
-            <p:nvSpPr>
-              <p:cNvPr id="241" name="TextBox 240">
-                <a:extLst>
-                  <a:ext uri="{FF2B5EF4-FFF2-40B4-BE49-F238E27FC236}">
-                    <a16:creationId xmlns:a16="http://schemas.microsoft.com/office/drawing/2014/main" id="{D0F41E38-7A95-0BD7-0F50-C263DC866D37}"/>
-                  </a:ext>
-                </a:extLst>
-              </p:cNvPr>
-              <p:cNvSpPr txBox="1"/>
-              <p:nvPr/>
-            </p:nvSpPr>
-            <p:spPr>
-              <a:xfrm>
-                <a:off x="3933168" y="4619287"/>
-                <a:ext cx="2206814" cy="307777"/>
-              </a:xfrm>
-              <a:prstGeom prst="rect">
-                <a:avLst/>
-              </a:prstGeom>
-              <a:noFill/>
-            </p:spPr>
-            <p:txBody>
-              <a:bodyPr wrap="square">
-                <a:spAutoFit/>
-              </a:bodyPr>
-              <a:lstStyle/>
-              <a:p>
-                <a:pPr algn="ctr"/>
-                <a:r>
-                  <a:rPr lang="en-US" sz="1400" dirty="0">
-                    <a:solidFill>
-                      <a:schemeClr val="bg1"/>
-                    </a:solidFill>
-                    <a:latin typeface="Times New Roman" panose="02020603050405020304" pitchFamily="18" charset="0"/>
-                    <a:cs typeface="Times New Roman" panose="02020603050405020304" pitchFamily="18" charset="0"/>
-                  </a:rPr>
-                  <a:t>OAI : RF Simulator</a:t>
-                </a:r>
-              </a:p>
-            </p:txBody>
-          </p:sp>
-          <p:sp>
-            <p:nvSpPr>
-              <p:cNvPr id="242" name="Rectangle: Rounded Corners 241">
-                <a:extLst>
-                  <a:ext uri="{FF2B5EF4-FFF2-40B4-BE49-F238E27FC236}">
-                    <a16:creationId xmlns:a16="http://schemas.microsoft.com/office/drawing/2014/main" id="{FCDA3A55-BBEB-2089-FAA6-4D345E6A8BAF}"/>
-                  </a:ext>
-                </a:extLst>
-              </p:cNvPr>
-              <p:cNvSpPr/>
-              <p:nvPr/>
-            </p:nvSpPr>
-            <p:spPr>
-              <a:xfrm>
-                <a:off x="3916951" y="3691197"/>
-                <a:ext cx="2239249" cy="1534218"/>
-              </a:xfrm>
-              <a:prstGeom prst="roundRect">
-                <a:avLst>
-                  <a:gd name="adj" fmla="val 5819"/>
-                </a:avLst>
-              </a:prstGeom>
-              <a:noFill/>
-              <a:ln w="12700">
-                <a:solidFill>
-                  <a:schemeClr val="bg1"/>
-                </a:solidFill>
-              </a:ln>
-            </p:spPr>
-            <p:style>
-              <a:lnRef idx="2">
-                <a:schemeClr val="accent1">
-                  <a:shade val="15000"/>
-                </a:schemeClr>
-              </a:lnRef>
-              <a:fillRef idx="1">
-                <a:schemeClr val="accent1"/>
-              </a:fillRef>
-              <a:effectRef idx="0">
-                <a:schemeClr val="accent1"/>
-              </a:effectRef>
-              <a:fontRef idx="minor">
-                <a:schemeClr val="lt1"/>
-              </a:fontRef>
-            </p:style>
-            <p:txBody>
-              <a:bodyPr rtlCol="0" anchor="ctr"/>
-              <a:lstStyle/>
-              <a:p>
-                <a:pPr algn="ctr"/>
-                <a:endParaRPr lang="en-US" dirty="0">
-                  <a:latin typeface="Times New Roman" panose="02020603050405020304" pitchFamily="18" charset="0"/>
-                  <a:cs typeface="Times New Roman" panose="02020603050405020304" pitchFamily="18" charset="0"/>
-                </a:endParaRPr>
-              </a:p>
-            </p:txBody>
-          </p:sp>
-        </p:grpSp>
-        <p:grpSp>
-          <p:nvGrpSpPr>
-            <p:cNvPr id="36" name="Group 35">
-              <a:extLst>
-                <a:ext uri="{FF2B5EF4-FFF2-40B4-BE49-F238E27FC236}">
-                  <a16:creationId xmlns:a16="http://schemas.microsoft.com/office/drawing/2014/main" id="{3D9E5AA5-6332-81FB-B6C5-522A256BD1FB}"/>
-                </a:ext>
-              </a:extLst>
-            </p:cNvPr>
-            <p:cNvGrpSpPr/>
-            <p:nvPr/>
-          </p:nvGrpSpPr>
-          <p:grpSpPr>
-            <a:xfrm>
-              <a:off x="690637" y="2171378"/>
-              <a:ext cx="2263961" cy="1844033"/>
-              <a:chOff x="3916949" y="3691197"/>
-              <a:chExt cx="2263961" cy="1844033"/>
-            </a:xfrm>
-          </p:grpSpPr>
-          <p:sp>
-            <p:nvSpPr>
-              <p:cNvPr id="221" name="Rectangle: Rounded Corners 220">
-                <a:extLst>
-                  <a:ext uri="{FF2B5EF4-FFF2-40B4-BE49-F238E27FC236}">
-                    <a16:creationId xmlns:a16="http://schemas.microsoft.com/office/drawing/2014/main" id="{41FEA0C9-417A-93F4-3A0D-F05E5B35C040}"/>
-                  </a:ext>
-                </a:extLst>
-              </p:cNvPr>
-              <p:cNvSpPr/>
-              <p:nvPr/>
-            </p:nvSpPr>
-            <p:spPr>
-              <a:xfrm>
-                <a:off x="3916949" y="3692460"/>
-                <a:ext cx="2239249" cy="1531642"/>
-              </a:xfrm>
-              <a:prstGeom prst="roundRect">
-                <a:avLst>
-                  <a:gd name="adj" fmla="val 5859"/>
-                </a:avLst>
-              </a:prstGeom>
-              <a:solidFill>
-                <a:srgbClr val="262626"/>
-              </a:solidFill>
-              <a:ln w="28575">
-                <a:noFill/>
-              </a:ln>
-            </p:spPr>
-            <p:style>
-              <a:lnRef idx="2">
-                <a:schemeClr val="accent1">
-                  <a:shade val="15000"/>
-                </a:schemeClr>
-              </a:lnRef>
-              <a:fillRef idx="1">
-                <a:schemeClr val="accent1"/>
-              </a:fillRef>
-              <a:effectRef idx="0">
-                <a:schemeClr val="accent1"/>
-              </a:effectRef>
-              <a:fontRef idx="minor">
-                <a:schemeClr val="lt1"/>
-              </a:fontRef>
-            </p:style>
-            <p:txBody>
-              <a:bodyPr rtlCol="0" anchor="ctr"/>
-              <a:lstStyle/>
-              <a:p>
-                <a:pPr algn="ctr"/>
-                <a:endParaRPr lang="en-US" dirty="0">
-                  <a:latin typeface="Times New Roman" panose="02020603050405020304" pitchFamily="18" charset="0"/>
-                  <a:cs typeface="Times New Roman" panose="02020603050405020304" pitchFamily="18" charset="0"/>
-                </a:endParaRPr>
-              </a:p>
-            </p:txBody>
-          </p:sp>
-          <p:sp>
-            <p:nvSpPr>
-              <p:cNvPr id="222" name="Rectangle: Top Corners Rounded 221">
-                <a:extLst>
-                  <a:ext uri="{FF2B5EF4-FFF2-40B4-BE49-F238E27FC236}">
-                    <a16:creationId xmlns:a16="http://schemas.microsoft.com/office/drawing/2014/main" id="{7EF6E28E-C708-CF19-2E8C-A5E1FDCB3147}"/>
-                  </a:ext>
-                </a:extLst>
-              </p:cNvPr>
-              <p:cNvSpPr/>
-              <p:nvPr/>
-            </p:nvSpPr>
-            <p:spPr>
-              <a:xfrm rot="10800000">
-                <a:off x="3916952" y="4613172"/>
-                <a:ext cx="2239248" cy="323588"/>
-              </a:xfrm>
-              <a:prstGeom prst="round2SameRect">
-                <a:avLst>
-                  <a:gd name="adj1" fmla="val 28890"/>
-                  <a:gd name="adj2" fmla="val 0"/>
-                </a:avLst>
-              </a:prstGeom>
-              <a:solidFill>
-                <a:srgbClr val="F2F2F2"/>
-              </a:solidFill>
-              <a:ln>
-                <a:noFill/>
-              </a:ln>
-            </p:spPr>
-            <p:style>
-              <a:lnRef idx="2">
-                <a:schemeClr val="accent1">
-                  <a:shade val="15000"/>
-                </a:schemeClr>
-              </a:lnRef>
-              <a:fillRef idx="1">
-                <a:schemeClr val="accent1"/>
-              </a:fillRef>
-              <a:effectRef idx="0">
-                <a:schemeClr val="accent1"/>
-              </a:effectRef>
-              <a:fontRef idx="minor">
-                <a:schemeClr val="lt1"/>
-              </a:fontRef>
-            </p:style>
-            <p:txBody>
-              <a:bodyPr rtlCol="0" anchor="ctr"/>
-              <a:lstStyle/>
-              <a:p>
-                <a:pPr algn="ctr"/>
-                <a:endParaRPr lang="en-US"/>
-              </a:p>
-            </p:txBody>
-          </p:sp>
-          <p:sp>
-            <p:nvSpPr>
-              <p:cNvPr id="223" name="Rectangle 222">
-                <a:extLst>
-                  <a:ext uri="{FF2B5EF4-FFF2-40B4-BE49-F238E27FC236}">
-                    <a16:creationId xmlns:a16="http://schemas.microsoft.com/office/drawing/2014/main" id="{EFFA4B82-D054-49E8-9AF5-3B6B4F929CC0}"/>
-                  </a:ext>
-                </a:extLst>
-              </p:cNvPr>
-              <p:cNvSpPr/>
-              <p:nvPr/>
-            </p:nvSpPr>
-            <p:spPr>
-              <a:xfrm>
-                <a:off x="3916951" y="3990559"/>
-                <a:ext cx="2239249" cy="323587"/>
-              </a:xfrm>
-              <a:prstGeom prst="rect">
-                <a:avLst/>
-              </a:prstGeom>
-              <a:solidFill>
-                <a:srgbClr val="3A3A3A"/>
-              </a:solidFill>
-              <a:ln>
-                <a:noFill/>
-              </a:ln>
-            </p:spPr>
-            <p:style>
-              <a:lnRef idx="2">
-                <a:schemeClr val="accent1">
-                  <a:shade val="15000"/>
-                </a:schemeClr>
-              </a:lnRef>
-              <a:fillRef idx="1">
-                <a:schemeClr val="accent1"/>
-              </a:fillRef>
-              <a:effectRef idx="0">
-                <a:schemeClr val="accent1"/>
-              </a:effectRef>
-              <a:fontRef idx="minor">
-                <a:schemeClr val="lt1"/>
-              </a:fontRef>
-            </p:style>
-            <p:txBody>
-              <a:bodyPr rtlCol="0" anchor="ctr"/>
-              <a:lstStyle/>
-              <a:p>
-                <a:pPr algn="ctr"/>
-                <a:endParaRPr lang="en-US"/>
-              </a:p>
-            </p:txBody>
-          </p:sp>
-          <p:sp>
-            <p:nvSpPr>
-              <p:cNvPr id="224" name="TextBox 223">
-                <a:extLst>
-                  <a:ext uri="{FF2B5EF4-FFF2-40B4-BE49-F238E27FC236}">
-                    <a16:creationId xmlns:a16="http://schemas.microsoft.com/office/drawing/2014/main" id="{D77F2D1E-111A-0EC9-59CB-FDAB785FE13C}"/>
-                  </a:ext>
-                </a:extLst>
-              </p:cNvPr>
-              <p:cNvSpPr txBox="1"/>
-              <p:nvPr/>
-            </p:nvSpPr>
-            <p:spPr>
-              <a:xfrm>
-                <a:off x="3916952" y="4313625"/>
+                <a:off x="611268" y="3180021"/>
                 <a:ext cx="2239246" cy="307777"/>
               </a:xfrm>
               <a:prstGeom prst="rect">
@@ -16315,10 +16825,10 @@
           </p:sp>
           <p:sp>
             <p:nvSpPr>
-              <p:cNvPr id="225" name="TextBox 224">
+              <p:cNvPr id="84" name="TextBox 83">
                 <a:extLst>
                   <a:ext uri="{FF2B5EF4-FFF2-40B4-BE49-F238E27FC236}">
-                    <a16:creationId xmlns:a16="http://schemas.microsoft.com/office/drawing/2014/main" id="{B373C4ED-2749-B46B-095E-84788FBA5171}"/>
+                    <a16:creationId xmlns:a16="http://schemas.microsoft.com/office/drawing/2014/main" id="{15C39153-3898-871E-1B32-41A1A52F4F90}"/>
                   </a:ext>
                 </a:extLst>
               </p:cNvPr>
@@ -16327,7 +16837,7 @@
             </p:nvSpPr>
             <p:spPr>
               <a:xfrm>
-                <a:off x="3916952" y="4007963"/>
+                <a:off x="611268" y="2874359"/>
                 <a:ext cx="2239246" cy="307777"/>
               </a:xfrm>
               <a:prstGeom prst="rect">
@@ -16374,10 +16884,10 @@
           </p:sp>
           <p:sp>
             <p:nvSpPr>
-              <p:cNvPr id="226" name="TextBox 225">
+              <p:cNvPr id="85" name="TextBox 84">
                 <a:extLst>
                   <a:ext uri="{FF2B5EF4-FFF2-40B4-BE49-F238E27FC236}">
-                    <a16:creationId xmlns:a16="http://schemas.microsoft.com/office/drawing/2014/main" id="{DC968F22-74C4-7656-0EE4-CBD09D779742}"/>
+                    <a16:creationId xmlns:a16="http://schemas.microsoft.com/office/drawing/2014/main" id="{D827E503-EE3C-5CFB-D987-C310C9DA8D9A}"/>
                   </a:ext>
                 </a:extLst>
               </p:cNvPr>
@@ -16386,7 +16896,7 @@
             </p:nvSpPr>
             <p:spPr>
               <a:xfrm>
-                <a:off x="3916951" y="3702301"/>
+                <a:off x="608886" y="2568697"/>
                 <a:ext cx="2239248" cy="307777"/>
               </a:xfrm>
               <a:prstGeom prst="rect">
@@ -16416,10 +16926,10 @@
           </p:sp>
           <p:sp>
             <p:nvSpPr>
-              <p:cNvPr id="227" name="TextBox 226">
+              <p:cNvPr id="86" name="TextBox 85">
                 <a:extLst>
                   <a:ext uri="{FF2B5EF4-FFF2-40B4-BE49-F238E27FC236}">
-                    <a16:creationId xmlns:a16="http://schemas.microsoft.com/office/drawing/2014/main" id="{5EF3BAB1-6306-6257-0820-1E60E62D4525}"/>
+                    <a16:creationId xmlns:a16="http://schemas.microsoft.com/office/drawing/2014/main" id="{10945168-4BF6-C90B-9FE2-89C879B36FCB}"/>
                   </a:ext>
                 </a:extLst>
               </p:cNvPr>
@@ -16428,7 +16938,7 @@
             </p:nvSpPr>
             <p:spPr>
               <a:xfrm>
-                <a:off x="3916952" y="4924949"/>
+                <a:off x="611268" y="3791345"/>
                 <a:ext cx="2239246" cy="307777"/>
               </a:xfrm>
               <a:prstGeom prst="rect">
@@ -16451,59 +16961,34 @@
                     <a:latin typeface="Times New Roman" panose="02020603050405020304" pitchFamily="18" charset="0"/>
                     <a:cs typeface="Times New Roman" panose="02020603050405020304" pitchFamily="18" charset="0"/>
                   </a:rPr>
-                  <a:t>5G Mobile Phone</a:t>
+                  <a:t>OAI : </a:t>
                 </a:r>
-              </a:p>
-            </p:txBody>
-          </p:sp>
-          <p:sp>
-            <p:nvSpPr>
-              <p:cNvPr id="228" name="TextBox 227">
-                <a:extLst>
-                  <a:ext uri="{FF2B5EF4-FFF2-40B4-BE49-F238E27FC236}">
-                    <a16:creationId xmlns:a16="http://schemas.microsoft.com/office/drawing/2014/main" id="{12FCE961-5104-E038-0C85-DB23BFA112B8}"/>
-                  </a:ext>
-                </a:extLst>
-              </p:cNvPr>
-              <p:cNvSpPr txBox="1"/>
-              <p:nvPr/>
-            </p:nvSpPr>
-            <p:spPr>
-              <a:xfrm>
-                <a:off x="3941661" y="5227453"/>
-                <a:ext cx="2239249" cy="307777"/>
-              </a:xfrm>
-              <a:prstGeom prst="rect">
-                <a:avLst/>
-              </a:prstGeom>
-              <a:noFill/>
-            </p:spPr>
-            <p:txBody>
-              <a:bodyPr wrap="square">
-                <a:spAutoFit/>
-              </a:bodyPr>
-              <a:lstStyle/>
-              <a:p>
-                <a:pPr algn="ctr"/>
                 <a:r>
-                  <a:rPr lang="en-US" sz="1400" b="1" dirty="0">
+                  <a:rPr lang="en-US" sz="1400" dirty="0" err="1">
                     <a:solidFill>
                       <a:schemeClr val="bg1"/>
                     </a:solidFill>
                     <a:latin typeface="Times New Roman" panose="02020603050405020304" pitchFamily="18" charset="0"/>
                     <a:cs typeface="Times New Roman" panose="02020603050405020304" pitchFamily="18" charset="0"/>
                   </a:rPr>
-                  <a:t>User Equipment</a:t>
+                  <a:t>ZeroMQ</a:t>
                 </a:r>
+                <a:endParaRPr lang="en-US" sz="1400" dirty="0">
+                  <a:solidFill>
+                    <a:schemeClr val="bg1"/>
+                  </a:solidFill>
+                  <a:latin typeface="Times New Roman" panose="02020603050405020304" pitchFamily="18" charset="0"/>
+                  <a:cs typeface="Times New Roman" panose="02020603050405020304" pitchFamily="18" charset="0"/>
+                </a:endParaRPr>
               </a:p>
             </p:txBody>
           </p:sp>
           <p:sp>
             <p:nvSpPr>
-              <p:cNvPr id="229" name="Rectangle 228">
+              <p:cNvPr id="89" name="Rectangle 88">
                 <a:extLst>
                   <a:ext uri="{FF2B5EF4-FFF2-40B4-BE49-F238E27FC236}">
-                    <a16:creationId xmlns:a16="http://schemas.microsoft.com/office/drawing/2014/main" id="{739DA047-9F92-EB9C-2612-A758AA6CDEC6}"/>
+                    <a16:creationId xmlns:a16="http://schemas.microsoft.com/office/drawing/2014/main" id="{DA21E353-3682-DFBD-9DE8-943DE7304CC7}"/>
                   </a:ext>
                 </a:extLst>
               </p:cNvPr>
@@ -16512,7 +16997,7 @@
             </p:nvSpPr>
             <p:spPr>
               <a:xfrm>
-                <a:off x="3916950" y="4615547"/>
+                <a:off x="611266" y="3481943"/>
                 <a:ext cx="2239249" cy="323587"/>
               </a:xfrm>
               <a:prstGeom prst="rect">
@@ -16552,10 +17037,10 @@
           </p:sp>
           <p:sp>
             <p:nvSpPr>
-              <p:cNvPr id="230" name="TextBox 229">
+              <p:cNvPr id="90" name="TextBox 89">
                 <a:extLst>
                   <a:ext uri="{FF2B5EF4-FFF2-40B4-BE49-F238E27FC236}">
-                    <a16:creationId xmlns:a16="http://schemas.microsoft.com/office/drawing/2014/main" id="{55A31A15-A388-A0BF-27C0-7AC7A3C8A0FF}"/>
+                    <a16:creationId xmlns:a16="http://schemas.microsoft.com/office/drawing/2014/main" id="{AC626EFD-BAE6-CB8E-88CB-39F25D063F07}"/>
                   </a:ext>
                 </a:extLst>
               </p:cNvPr>
@@ -16564,7 +17049,7 @@
             </p:nvSpPr>
             <p:spPr>
               <a:xfrm>
-                <a:off x="3916952" y="4619287"/>
+                <a:off x="611268" y="3485683"/>
                 <a:ext cx="2239246" cy="307777"/>
               </a:xfrm>
               <a:prstGeom prst="rect">
@@ -16594,10 +17079,107 @@
           </p:sp>
           <p:sp>
             <p:nvSpPr>
-              <p:cNvPr id="231" name="Rectangle: Rounded Corners 230">
+              <p:cNvPr id="217" name="Rectangle: Top Corners Rounded 216">
                 <a:extLst>
                   <a:ext uri="{FF2B5EF4-FFF2-40B4-BE49-F238E27FC236}">
-                    <a16:creationId xmlns:a16="http://schemas.microsoft.com/office/drawing/2014/main" id="{75A40120-D9C1-6243-5381-63C01A2743D1}"/>
+                    <a16:creationId xmlns:a16="http://schemas.microsoft.com/office/drawing/2014/main" id="{5C579593-8A1A-A1A1-76AB-0D583C269464}"/>
+                  </a:ext>
+                </a:extLst>
+              </p:cNvPr>
+              <p:cNvSpPr/>
+              <p:nvPr/>
+            </p:nvSpPr>
+            <p:spPr>
+              <a:xfrm rot="10800000">
+                <a:off x="611267" y="4087525"/>
+                <a:ext cx="2239248" cy="323588"/>
+              </a:xfrm>
+              <a:prstGeom prst="round2SameRect">
+                <a:avLst>
+                  <a:gd name="adj1" fmla="val 28890"/>
+                  <a:gd name="adj2" fmla="val 0"/>
+                </a:avLst>
+              </a:prstGeom>
+              <a:solidFill>
+                <a:srgbClr val="3A3A3A"/>
+              </a:solidFill>
+              <a:ln>
+                <a:noFill/>
+              </a:ln>
+            </p:spPr>
+            <p:style>
+              <a:lnRef idx="2">
+                <a:schemeClr val="accent1">
+                  <a:shade val="15000"/>
+                </a:schemeClr>
+              </a:lnRef>
+              <a:fillRef idx="1">
+                <a:schemeClr val="accent1"/>
+              </a:fillRef>
+              <a:effectRef idx="0">
+                <a:schemeClr val="accent1"/>
+              </a:effectRef>
+              <a:fontRef idx="minor">
+                <a:schemeClr val="lt1"/>
+              </a:fontRef>
+            </p:style>
+            <p:txBody>
+              <a:bodyPr rtlCol="0" anchor="ctr"/>
+              <a:lstStyle/>
+              <a:p>
+                <a:pPr algn="ctr"/>
+                <a:endParaRPr lang="en-US"/>
+              </a:p>
+            </p:txBody>
+          </p:sp>
+          <p:sp>
+            <p:nvSpPr>
+              <p:cNvPr id="256" name="TextBox 255">
+                <a:extLst>
+                  <a:ext uri="{FF2B5EF4-FFF2-40B4-BE49-F238E27FC236}">
+                    <a16:creationId xmlns:a16="http://schemas.microsoft.com/office/drawing/2014/main" id="{61A21A25-F9FF-672C-C52D-A2DBC174706A}"/>
+                  </a:ext>
+                </a:extLst>
+              </p:cNvPr>
+              <p:cNvSpPr txBox="1"/>
+              <p:nvPr/>
+            </p:nvSpPr>
+            <p:spPr>
+              <a:xfrm>
+                <a:off x="611267" y="4094498"/>
+                <a:ext cx="2239247" cy="307777"/>
+              </a:xfrm>
+              <a:prstGeom prst="rect">
+                <a:avLst/>
+              </a:prstGeom>
+              <a:noFill/>
+            </p:spPr>
+            <p:txBody>
+              <a:bodyPr wrap="square">
+                <a:spAutoFit/>
+              </a:bodyPr>
+              <a:lstStyle/>
+              <a:p>
+                <a:pPr algn="ctr"/>
+                <a:r>
+                  <a:rPr lang="en-US" sz="1400" dirty="0">
+                    <a:solidFill>
+                      <a:schemeClr val="bg1"/>
+                    </a:solidFill>
+                    <a:latin typeface="Times New Roman" panose="02020603050405020304" pitchFamily="18" charset="0"/>
+                    <a:cs typeface="Times New Roman" panose="02020603050405020304" pitchFamily="18" charset="0"/>
+                  </a:rPr>
+                  <a:t>5G Mobile Phone</a:t>
+                </a:r>
+              </a:p>
+            </p:txBody>
+          </p:sp>
+          <p:sp>
+            <p:nvSpPr>
+              <p:cNvPr id="257" name="Rectangle: Rounded Corners 256">
+                <a:extLst>
+                  <a:ext uri="{FF2B5EF4-FFF2-40B4-BE49-F238E27FC236}">
+                    <a16:creationId xmlns:a16="http://schemas.microsoft.com/office/drawing/2014/main" id="{3039217D-9166-CC42-1F30-32B641C52056}"/>
                   </a:ext>
                 </a:extLst>
               </p:cNvPr>
@@ -16606,12 +17188,12 @@
             </p:nvSpPr>
             <p:spPr>
               <a:xfrm>
-                <a:off x="3916951" y="3691197"/>
-                <a:ext cx="2239249" cy="1534218"/>
+                <a:off x="611267" y="2557594"/>
+                <a:ext cx="2239249" cy="1844074"/>
               </a:xfrm>
               <a:prstGeom prst="roundRect">
                 <a:avLst>
-                  <a:gd name="adj" fmla="val 5819"/>
+                  <a:gd name="adj" fmla="val 5122"/>
                 </a:avLst>
               </a:prstGeom>
               <a:noFill/>
@@ -16649,13 +17231,55 @@
               </a:p>
             </p:txBody>
           </p:sp>
+          <p:sp>
+            <p:nvSpPr>
+              <p:cNvPr id="258" name="TextBox 257">
+                <a:extLst>
+                  <a:ext uri="{FF2B5EF4-FFF2-40B4-BE49-F238E27FC236}">
+                    <a16:creationId xmlns:a16="http://schemas.microsoft.com/office/drawing/2014/main" id="{A6419861-3E40-2726-8382-3BEEFB796A09}"/>
+                  </a:ext>
+                </a:extLst>
+              </p:cNvPr>
+              <p:cNvSpPr txBox="1"/>
+              <p:nvPr/>
+            </p:nvSpPr>
+            <p:spPr>
+              <a:xfrm>
+                <a:off x="635977" y="4404884"/>
+                <a:ext cx="2239249" cy="307777"/>
+              </a:xfrm>
+              <a:prstGeom prst="rect">
+                <a:avLst/>
+              </a:prstGeom>
+              <a:noFill/>
+            </p:spPr>
+            <p:txBody>
+              <a:bodyPr wrap="square">
+                <a:spAutoFit/>
+              </a:bodyPr>
+              <a:lstStyle/>
+              <a:p>
+                <a:pPr algn="ctr"/>
+                <a:r>
+                  <a:rPr lang="en-US" sz="1400" b="1" dirty="0">
+                    <a:solidFill>
+                      <a:schemeClr val="bg1"/>
+                    </a:solidFill>
+                    <a:latin typeface="Times New Roman" panose="02020603050405020304" pitchFamily="18" charset="0"/>
+                    <a:cs typeface="Times New Roman" panose="02020603050405020304" pitchFamily="18" charset="0"/>
+                  </a:rPr>
+                  <a:t>User Equipment</a:t>
+                </a:r>
+              </a:p>
+            </p:txBody>
+          </p:sp>
         </p:grpSp>
         <p:grpSp>
           <p:nvGrpSpPr>
-            <p:cNvPr id="37" name="Group 36">
+            <p:cNvPr id="247" name="Group 246">
               <a:extLst>
                 <a:ext uri="{FF2B5EF4-FFF2-40B4-BE49-F238E27FC236}">
-                  <a16:creationId xmlns:a16="http://schemas.microsoft.com/office/drawing/2014/main" id="{AA444277-0F73-A39B-C352-8FA6548B93F8}"/>
+                  <a16:creationId xmlns:a16="http://schemas.microsoft.com/office/drawing/2014/main" id="{4F825174-6497-C0BE-9BDE-BF6E637A4D71}"/>
                 </a:ext>
               </a:extLst>
             </p:cNvPr>
@@ -16664,7 +17288,684 @@
           </p:nvGrpSpPr>
           <p:grpSpPr>
             <a:xfrm>
-              <a:off x="9376910" y="3337714"/>
+              <a:off x="3519144" y="2424120"/>
+              <a:ext cx="2266340" cy="2155067"/>
+              <a:chOff x="608886" y="2557594"/>
+              <a:chExt cx="2266340" cy="2155067"/>
+            </a:xfrm>
+          </p:grpSpPr>
+          <p:sp>
+            <p:nvSpPr>
+              <p:cNvPr id="60" name="Rectangle: Rounded Corners 59">
+                <a:extLst>
+                  <a:ext uri="{FF2B5EF4-FFF2-40B4-BE49-F238E27FC236}">
+                    <a16:creationId xmlns:a16="http://schemas.microsoft.com/office/drawing/2014/main" id="{11435D9A-5ACE-BB30-D4A2-C243204BD0CE}"/>
+                  </a:ext>
+                </a:extLst>
+              </p:cNvPr>
+              <p:cNvSpPr/>
+              <p:nvPr/>
+            </p:nvSpPr>
+            <p:spPr>
+              <a:xfrm>
+                <a:off x="611265" y="2558856"/>
+                <a:ext cx="2239249" cy="1852258"/>
+              </a:xfrm>
+              <a:prstGeom prst="roundRect">
+                <a:avLst>
+                  <a:gd name="adj" fmla="val 5859"/>
+                </a:avLst>
+              </a:prstGeom>
+              <a:solidFill>
+                <a:srgbClr val="262626"/>
+              </a:solidFill>
+              <a:ln w="28575">
+                <a:noFill/>
+              </a:ln>
+            </p:spPr>
+            <p:style>
+              <a:lnRef idx="2">
+                <a:schemeClr val="accent1">
+                  <a:shade val="15000"/>
+                </a:schemeClr>
+              </a:lnRef>
+              <a:fillRef idx="1">
+                <a:schemeClr val="accent1"/>
+              </a:fillRef>
+              <a:effectRef idx="0">
+                <a:schemeClr val="accent1"/>
+              </a:effectRef>
+              <a:fontRef idx="minor">
+                <a:schemeClr val="lt1"/>
+              </a:fontRef>
+            </p:style>
+            <p:txBody>
+              <a:bodyPr rtlCol="0" anchor="ctr"/>
+              <a:lstStyle/>
+              <a:p>
+                <a:pPr algn="ctr"/>
+                <a:endParaRPr lang="en-US" dirty="0">
+                  <a:latin typeface="Times New Roman" panose="02020603050405020304" pitchFamily="18" charset="0"/>
+                  <a:cs typeface="Times New Roman" panose="02020603050405020304" pitchFamily="18" charset="0"/>
+                </a:endParaRPr>
+              </a:p>
+            </p:txBody>
+          </p:sp>
+          <p:sp>
+            <p:nvSpPr>
+              <p:cNvPr id="61" name="Rectangle: Top Corners Rounded 60">
+                <a:extLst>
+                  <a:ext uri="{FF2B5EF4-FFF2-40B4-BE49-F238E27FC236}">
+                    <a16:creationId xmlns:a16="http://schemas.microsoft.com/office/drawing/2014/main" id="{677AED58-3CC1-14FE-5BA5-A624B18BEB8F}"/>
+                  </a:ext>
+                </a:extLst>
+              </p:cNvPr>
+              <p:cNvSpPr/>
+              <p:nvPr/>
+            </p:nvSpPr>
+            <p:spPr>
+              <a:xfrm rot="10800000">
+                <a:off x="611268" y="3479568"/>
+                <a:ext cx="2239248" cy="323588"/>
+              </a:xfrm>
+              <a:prstGeom prst="round2SameRect">
+                <a:avLst>
+                  <a:gd name="adj1" fmla="val 28890"/>
+                  <a:gd name="adj2" fmla="val 0"/>
+                </a:avLst>
+              </a:prstGeom>
+              <a:solidFill>
+                <a:srgbClr val="F2F2F2"/>
+              </a:solidFill>
+              <a:ln>
+                <a:noFill/>
+              </a:ln>
+            </p:spPr>
+            <p:style>
+              <a:lnRef idx="2">
+                <a:schemeClr val="accent1">
+                  <a:shade val="15000"/>
+                </a:schemeClr>
+              </a:lnRef>
+              <a:fillRef idx="1">
+                <a:schemeClr val="accent1"/>
+              </a:fillRef>
+              <a:effectRef idx="0">
+                <a:schemeClr val="accent1"/>
+              </a:effectRef>
+              <a:fontRef idx="minor">
+                <a:schemeClr val="lt1"/>
+              </a:fontRef>
+            </p:style>
+            <p:txBody>
+              <a:bodyPr rtlCol="0" anchor="ctr"/>
+              <a:lstStyle/>
+              <a:p>
+                <a:pPr algn="ctr"/>
+                <a:endParaRPr lang="en-US"/>
+              </a:p>
+            </p:txBody>
+          </p:sp>
+          <p:sp>
+            <p:nvSpPr>
+              <p:cNvPr id="62" name="Rectangle 61">
+                <a:extLst>
+                  <a:ext uri="{FF2B5EF4-FFF2-40B4-BE49-F238E27FC236}">
+                    <a16:creationId xmlns:a16="http://schemas.microsoft.com/office/drawing/2014/main" id="{BF18EC9C-9988-F6B0-2391-1FC8883D4D50}"/>
+                  </a:ext>
+                </a:extLst>
+              </p:cNvPr>
+              <p:cNvSpPr/>
+              <p:nvPr/>
+            </p:nvSpPr>
+            <p:spPr>
+              <a:xfrm>
+                <a:off x="611267" y="2856955"/>
+                <a:ext cx="2239249" cy="323587"/>
+              </a:xfrm>
+              <a:prstGeom prst="rect">
+                <a:avLst/>
+              </a:prstGeom>
+              <a:solidFill>
+                <a:srgbClr val="3A3A3A"/>
+              </a:solidFill>
+              <a:ln>
+                <a:noFill/>
+              </a:ln>
+            </p:spPr>
+            <p:style>
+              <a:lnRef idx="2">
+                <a:schemeClr val="accent1">
+                  <a:shade val="15000"/>
+                </a:schemeClr>
+              </a:lnRef>
+              <a:fillRef idx="1">
+                <a:schemeClr val="accent1"/>
+              </a:fillRef>
+              <a:effectRef idx="0">
+                <a:schemeClr val="accent1"/>
+              </a:effectRef>
+              <a:fontRef idx="minor">
+                <a:schemeClr val="lt1"/>
+              </a:fontRef>
+            </p:style>
+            <p:txBody>
+              <a:bodyPr rtlCol="0" anchor="ctr"/>
+              <a:lstStyle/>
+              <a:p>
+                <a:pPr algn="ctr"/>
+                <a:endParaRPr lang="en-US"/>
+              </a:p>
+            </p:txBody>
+          </p:sp>
+          <p:sp>
+            <p:nvSpPr>
+              <p:cNvPr id="63" name="TextBox 62">
+                <a:extLst>
+                  <a:ext uri="{FF2B5EF4-FFF2-40B4-BE49-F238E27FC236}">
+                    <a16:creationId xmlns:a16="http://schemas.microsoft.com/office/drawing/2014/main" id="{7BCABF4C-2024-234C-E59D-25402AB193C8}"/>
+                  </a:ext>
+                </a:extLst>
+              </p:cNvPr>
+              <p:cNvSpPr txBox="1"/>
+              <p:nvPr/>
+            </p:nvSpPr>
+            <p:spPr>
+              <a:xfrm>
+                <a:off x="611268" y="3180021"/>
+                <a:ext cx="2239246" cy="307777"/>
+              </a:xfrm>
+              <a:prstGeom prst="rect">
+                <a:avLst/>
+              </a:prstGeom>
+              <a:noFill/>
+            </p:spPr>
+            <p:txBody>
+              <a:bodyPr wrap="square">
+                <a:spAutoFit/>
+              </a:bodyPr>
+              <a:lstStyle/>
+              <a:p>
+                <a:pPr algn="ctr"/>
+                <a:r>
+                  <a:rPr lang="en-US" sz="1400" dirty="0">
+                    <a:solidFill>
+                      <a:schemeClr val="bg1"/>
+                    </a:solidFill>
+                    <a:latin typeface="Times New Roman" panose="02020603050405020304" pitchFamily="18" charset="0"/>
+                    <a:cs typeface="Times New Roman" panose="02020603050405020304" pitchFamily="18" charset="0"/>
+                  </a:rPr>
+                  <a:t>OAI : USRP</a:t>
+                </a:r>
+              </a:p>
+            </p:txBody>
+          </p:sp>
+          <p:sp>
+            <p:nvSpPr>
+              <p:cNvPr id="64" name="TextBox 63">
+                <a:extLst>
+                  <a:ext uri="{FF2B5EF4-FFF2-40B4-BE49-F238E27FC236}">
+                    <a16:creationId xmlns:a16="http://schemas.microsoft.com/office/drawing/2014/main" id="{42EC1E50-44CD-D751-B177-188B1D0E20DB}"/>
+                  </a:ext>
+                </a:extLst>
+              </p:cNvPr>
+              <p:cNvSpPr txBox="1"/>
+              <p:nvPr/>
+            </p:nvSpPr>
+            <p:spPr>
+              <a:xfrm>
+                <a:off x="611268" y="2874359"/>
+                <a:ext cx="2239246" cy="307777"/>
+              </a:xfrm>
+              <a:prstGeom prst="rect">
+                <a:avLst/>
+              </a:prstGeom>
+              <a:noFill/>
+            </p:spPr>
+            <p:txBody>
+              <a:bodyPr wrap="square">
+                <a:spAutoFit/>
+              </a:bodyPr>
+              <a:lstStyle/>
+              <a:p>
+                <a:pPr algn="ctr"/>
+                <a:r>
+                  <a:rPr lang="en-US" sz="1400" dirty="0">
+                    <a:solidFill>
+                      <a:schemeClr val="bg1"/>
+                    </a:solidFill>
+                    <a:latin typeface="Times New Roman" panose="02020603050405020304" pitchFamily="18" charset="0"/>
+                    <a:cs typeface="Times New Roman" panose="02020603050405020304" pitchFamily="18" charset="0"/>
+                  </a:rPr>
+                  <a:t>OCUDU : </a:t>
+                </a:r>
+                <a:r>
+                  <a:rPr lang="en-US" sz="1400" dirty="0" err="1">
+                    <a:solidFill>
+                      <a:schemeClr val="bg1"/>
+                    </a:solidFill>
+                    <a:latin typeface="Times New Roman" panose="02020603050405020304" pitchFamily="18" charset="0"/>
+                    <a:cs typeface="Times New Roman" panose="02020603050405020304" pitchFamily="18" charset="0"/>
+                  </a:rPr>
+                  <a:t>ZeroMQ</a:t>
+                </a:r>
+                <a:endParaRPr lang="en-US" sz="1400" dirty="0">
+                  <a:solidFill>
+                    <a:schemeClr val="bg1"/>
+                  </a:solidFill>
+                  <a:latin typeface="Times New Roman" panose="02020603050405020304" pitchFamily="18" charset="0"/>
+                  <a:cs typeface="Times New Roman" panose="02020603050405020304" pitchFamily="18" charset="0"/>
+                </a:endParaRPr>
+              </a:p>
+            </p:txBody>
+          </p:sp>
+          <p:sp>
+            <p:nvSpPr>
+              <p:cNvPr id="65" name="TextBox 64">
+                <a:extLst>
+                  <a:ext uri="{FF2B5EF4-FFF2-40B4-BE49-F238E27FC236}">
+                    <a16:creationId xmlns:a16="http://schemas.microsoft.com/office/drawing/2014/main" id="{26649390-0018-7FF3-B0BF-45B661A862F3}"/>
+                  </a:ext>
+                </a:extLst>
+              </p:cNvPr>
+              <p:cNvSpPr txBox="1"/>
+              <p:nvPr/>
+            </p:nvSpPr>
+            <p:spPr>
+              <a:xfrm>
+                <a:off x="608886" y="2568697"/>
+                <a:ext cx="2239248" cy="307777"/>
+              </a:xfrm>
+              <a:prstGeom prst="rect">
+                <a:avLst/>
+              </a:prstGeom>
+              <a:noFill/>
+            </p:spPr>
+            <p:txBody>
+              <a:bodyPr wrap="square">
+                <a:spAutoFit/>
+              </a:bodyPr>
+              <a:lstStyle/>
+              <a:p>
+                <a:pPr algn="ctr"/>
+                <a:r>
+                  <a:rPr lang="en-US" sz="1400" dirty="0">
+                    <a:solidFill>
+                      <a:schemeClr val="bg1"/>
+                    </a:solidFill>
+                    <a:latin typeface="Times New Roman" panose="02020603050405020304" pitchFamily="18" charset="0"/>
+                    <a:cs typeface="Times New Roman" panose="02020603050405020304" pitchFamily="18" charset="0"/>
+                  </a:rPr>
+                  <a:t>OCUDU : USRP</a:t>
+                </a:r>
+              </a:p>
+            </p:txBody>
+          </p:sp>
+          <p:sp>
+            <p:nvSpPr>
+              <p:cNvPr id="66" name="TextBox 65">
+                <a:extLst>
+                  <a:ext uri="{FF2B5EF4-FFF2-40B4-BE49-F238E27FC236}">
+                    <a16:creationId xmlns:a16="http://schemas.microsoft.com/office/drawing/2014/main" id="{B8374D8C-C586-EDB3-B768-5AB6A30261A1}"/>
+                  </a:ext>
+                </a:extLst>
+              </p:cNvPr>
+              <p:cNvSpPr txBox="1"/>
+              <p:nvPr/>
+            </p:nvSpPr>
+            <p:spPr>
+              <a:xfrm>
+                <a:off x="611268" y="3791345"/>
+                <a:ext cx="2239246" cy="307777"/>
+              </a:xfrm>
+              <a:prstGeom prst="rect">
+                <a:avLst/>
+              </a:prstGeom>
+              <a:noFill/>
+            </p:spPr>
+            <p:txBody>
+              <a:bodyPr wrap="square">
+                <a:spAutoFit/>
+              </a:bodyPr>
+              <a:lstStyle/>
+              <a:p>
+                <a:pPr algn="ctr"/>
+                <a:r>
+                  <a:rPr lang="en-US" sz="1400" dirty="0">
+                    <a:solidFill>
+                      <a:schemeClr val="bg1"/>
+                    </a:solidFill>
+                    <a:latin typeface="Times New Roman" panose="02020603050405020304" pitchFamily="18" charset="0"/>
+                    <a:cs typeface="Times New Roman" panose="02020603050405020304" pitchFamily="18" charset="0"/>
+                  </a:rPr>
+                  <a:t>OAI : </a:t>
+                </a:r>
+                <a:r>
+                  <a:rPr lang="en-US" sz="1400" dirty="0" err="1">
+                    <a:solidFill>
+                      <a:schemeClr val="bg1"/>
+                    </a:solidFill>
+                    <a:latin typeface="Times New Roman" panose="02020603050405020304" pitchFamily="18" charset="0"/>
+                    <a:cs typeface="Times New Roman" panose="02020603050405020304" pitchFamily="18" charset="0"/>
+                  </a:rPr>
+                  <a:t>ZeroMQ</a:t>
+                </a:r>
+                <a:endParaRPr lang="en-US" sz="1400" dirty="0">
+                  <a:solidFill>
+                    <a:schemeClr val="bg1"/>
+                  </a:solidFill>
+                  <a:latin typeface="Times New Roman" panose="02020603050405020304" pitchFamily="18" charset="0"/>
+                  <a:cs typeface="Times New Roman" panose="02020603050405020304" pitchFamily="18" charset="0"/>
+                </a:endParaRPr>
+              </a:p>
+            </p:txBody>
+          </p:sp>
+          <p:sp>
+            <p:nvSpPr>
+              <p:cNvPr id="67" name="Rectangle 66">
+                <a:extLst>
+                  <a:ext uri="{FF2B5EF4-FFF2-40B4-BE49-F238E27FC236}">
+                    <a16:creationId xmlns:a16="http://schemas.microsoft.com/office/drawing/2014/main" id="{9A3B654F-B957-7189-89B1-8E10903A42C0}"/>
+                  </a:ext>
+                </a:extLst>
+              </p:cNvPr>
+              <p:cNvSpPr/>
+              <p:nvPr/>
+            </p:nvSpPr>
+            <p:spPr>
+              <a:xfrm>
+                <a:off x="611266" y="3481943"/>
+                <a:ext cx="2239249" cy="323587"/>
+              </a:xfrm>
+              <a:prstGeom prst="rect">
+                <a:avLst/>
+              </a:prstGeom>
+              <a:solidFill>
+                <a:srgbClr val="3A3A3A"/>
+              </a:solidFill>
+              <a:ln>
+                <a:noFill/>
+              </a:ln>
+            </p:spPr>
+            <p:style>
+              <a:lnRef idx="2">
+                <a:schemeClr val="accent1">
+                  <a:shade val="15000"/>
+                </a:schemeClr>
+              </a:lnRef>
+              <a:fillRef idx="1">
+                <a:schemeClr val="accent1"/>
+              </a:fillRef>
+              <a:effectRef idx="0">
+                <a:schemeClr val="accent1"/>
+              </a:effectRef>
+              <a:fontRef idx="minor">
+                <a:schemeClr val="lt1"/>
+              </a:fontRef>
+            </p:style>
+            <p:txBody>
+              <a:bodyPr rtlCol="0" anchor="ctr"/>
+              <a:lstStyle/>
+              <a:p>
+                <a:pPr algn="ctr"/>
+                <a:endParaRPr lang="en-US"/>
+              </a:p>
+            </p:txBody>
+          </p:sp>
+          <p:sp>
+            <p:nvSpPr>
+              <p:cNvPr id="69" name="TextBox 68">
+                <a:extLst>
+                  <a:ext uri="{FF2B5EF4-FFF2-40B4-BE49-F238E27FC236}">
+                    <a16:creationId xmlns:a16="http://schemas.microsoft.com/office/drawing/2014/main" id="{978EBC2F-2D7E-EEF0-C44F-EB5AF28D6695}"/>
+                  </a:ext>
+                </a:extLst>
+              </p:cNvPr>
+              <p:cNvSpPr txBox="1"/>
+              <p:nvPr/>
+            </p:nvSpPr>
+            <p:spPr>
+              <a:xfrm>
+                <a:off x="611268" y="3485683"/>
+                <a:ext cx="2239246" cy="307777"/>
+              </a:xfrm>
+              <a:prstGeom prst="rect">
+                <a:avLst/>
+              </a:prstGeom>
+              <a:noFill/>
+            </p:spPr>
+            <p:txBody>
+              <a:bodyPr wrap="square">
+                <a:spAutoFit/>
+              </a:bodyPr>
+              <a:lstStyle/>
+              <a:p>
+                <a:pPr algn="ctr"/>
+                <a:r>
+                  <a:rPr lang="en-US" sz="1400" dirty="0">
+                    <a:solidFill>
+                      <a:schemeClr val="bg1"/>
+                    </a:solidFill>
+                    <a:latin typeface="Times New Roman" panose="02020603050405020304" pitchFamily="18" charset="0"/>
+                    <a:cs typeface="Times New Roman" panose="02020603050405020304" pitchFamily="18" charset="0"/>
+                  </a:rPr>
+                  <a:t>OAI : RF Simulator</a:t>
+                </a:r>
+              </a:p>
+            </p:txBody>
+          </p:sp>
+          <p:sp>
+            <p:nvSpPr>
+              <p:cNvPr id="70" name="Rectangle: Top Corners Rounded 69">
+                <a:extLst>
+                  <a:ext uri="{FF2B5EF4-FFF2-40B4-BE49-F238E27FC236}">
+                    <a16:creationId xmlns:a16="http://schemas.microsoft.com/office/drawing/2014/main" id="{12D7C9F2-A1FE-27E6-EDF5-17F684E1D2BF}"/>
+                  </a:ext>
+                </a:extLst>
+              </p:cNvPr>
+              <p:cNvSpPr/>
+              <p:nvPr/>
+            </p:nvSpPr>
+            <p:spPr>
+              <a:xfrm rot="10800000">
+                <a:off x="611267" y="4087525"/>
+                <a:ext cx="2239248" cy="323588"/>
+              </a:xfrm>
+              <a:prstGeom prst="round2SameRect">
+                <a:avLst>
+                  <a:gd name="adj1" fmla="val 28890"/>
+                  <a:gd name="adj2" fmla="val 0"/>
+                </a:avLst>
+              </a:prstGeom>
+              <a:solidFill>
+                <a:srgbClr val="3A3A3A"/>
+              </a:solidFill>
+              <a:ln>
+                <a:noFill/>
+              </a:ln>
+            </p:spPr>
+            <p:style>
+              <a:lnRef idx="2">
+                <a:schemeClr val="accent1">
+                  <a:shade val="15000"/>
+                </a:schemeClr>
+              </a:lnRef>
+              <a:fillRef idx="1">
+                <a:schemeClr val="accent1"/>
+              </a:fillRef>
+              <a:effectRef idx="0">
+                <a:schemeClr val="accent1"/>
+              </a:effectRef>
+              <a:fontRef idx="minor">
+                <a:schemeClr val="lt1"/>
+              </a:fontRef>
+            </p:style>
+            <p:txBody>
+              <a:bodyPr rtlCol="0" anchor="ctr"/>
+              <a:lstStyle/>
+              <a:p>
+                <a:pPr algn="ctr"/>
+                <a:endParaRPr lang="en-US"/>
+              </a:p>
+            </p:txBody>
+          </p:sp>
+          <p:sp>
+            <p:nvSpPr>
+              <p:cNvPr id="77" name="TextBox 76">
+                <a:extLst>
+                  <a:ext uri="{FF2B5EF4-FFF2-40B4-BE49-F238E27FC236}">
+                    <a16:creationId xmlns:a16="http://schemas.microsoft.com/office/drawing/2014/main" id="{A7DB7340-3E00-E7C1-6749-72C519E1F665}"/>
+                  </a:ext>
+                </a:extLst>
+              </p:cNvPr>
+              <p:cNvSpPr txBox="1"/>
+              <p:nvPr/>
+            </p:nvSpPr>
+            <p:spPr>
+              <a:xfrm>
+                <a:off x="611267" y="4094498"/>
+                <a:ext cx="2239247" cy="307777"/>
+              </a:xfrm>
+              <a:prstGeom prst="rect">
+                <a:avLst/>
+              </a:prstGeom>
+              <a:noFill/>
+            </p:spPr>
+            <p:txBody>
+              <a:bodyPr wrap="square">
+                <a:spAutoFit/>
+              </a:bodyPr>
+              <a:lstStyle/>
+              <a:p>
+                <a:pPr algn="ctr"/>
+                <a:r>
+                  <a:rPr lang="en-US" sz="1400" dirty="0">
+                    <a:solidFill>
+                      <a:schemeClr val="bg1"/>
+                    </a:solidFill>
+                    <a:latin typeface="Times New Roman" panose="02020603050405020304" pitchFamily="18" charset="0"/>
+                    <a:cs typeface="Times New Roman" panose="02020603050405020304" pitchFamily="18" charset="0"/>
+                  </a:rPr>
+                  <a:t>O-RAN SC : E2 Simulator</a:t>
+                </a:r>
+              </a:p>
+            </p:txBody>
+          </p:sp>
+          <p:sp>
+            <p:nvSpPr>
+              <p:cNvPr id="78" name="Rectangle: Rounded Corners 77">
+                <a:extLst>
+                  <a:ext uri="{FF2B5EF4-FFF2-40B4-BE49-F238E27FC236}">
+                    <a16:creationId xmlns:a16="http://schemas.microsoft.com/office/drawing/2014/main" id="{270669CB-3F07-5178-9811-9793D39AE5F7}"/>
+                  </a:ext>
+                </a:extLst>
+              </p:cNvPr>
+              <p:cNvSpPr/>
+              <p:nvPr/>
+            </p:nvSpPr>
+            <p:spPr>
+              <a:xfrm>
+                <a:off x="611267" y="2557594"/>
+                <a:ext cx="2239249" cy="1844074"/>
+              </a:xfrm>
+              <a:prstGeom prst="roundRect">
+                <a:avLst>
+                  <a:gd name="adj" fmla="val 5122"/>
+                </a:avLst>
+              </a:prstGeom>
+              <a:noFill/>
+              <a:ln w="12700">
+                <a:solidFill>
+                  <a:schemeClr val="bg1"/>
+                </a:solidFill>
+              </a:ln>
+            </p:spPr>
+            <p:style>
+              <a:lnRef idx="2">
+                <a:schemeClr val="accent1">
+                  <a:shade val="15000"/>
+                </a:schemeClr>
+              </a:lnRef>
+              <a:fillRef idx="1">
+                <a:schemeClr val="accent1"/>
+              </a:fillRef>
+              <a:effectRef idx="0">
+                <a:schemeClr val="accent1"/>
+              </a:effectRef>
+              <a:fontRef idx="minor">
+                <a:schemeClr val="lt1"/>
+              </a:fontRef>
+            </p:style>
+            <p:txBody>
+              <a:bodyPr rtlCol="0" anchor="ctr"/>
+              <a:lstStyle/>
+              <a:p>
+                <a:pPr algn="ctr"/>
+                <a:endParaRPr lang="en-US" dirty="0">
+                  <a:latin typeface="Times New Roman" panose="02020603050405020304" pitchFamily="18" charset="0"/>
+                  <a:cs typeface="Times New Roman" panose="02020603050405020304" pitchFamily="18" charset="0"/>
+                </a:endParaRPr>
+              </a:p>
+            </p:txBody>
+          </p:sp>
+          <p:sp>
+            <p:nvSpPr>
+              <p:cNvPr id="79" name="TextBox 78">
+                <a:extLst>
+                  <a:ext uri="{FF2B5EF4-FFF2-40B4-BE49-F238E27FC236}">
+                    <a16:creationId xmlns:a16="http://schemas.microsoft.com/office/drawing/2014/main" id="{6862D8B3-EB1C-A5A8-23A3-C07DC559A9B0}"/>
+                  </a:ext>
+                </a:extLst>
+              </p:cNvPr>
+              <p:cNvSpPr txBox="1"/>
+              <p:nvPr/>
+            </p:nvSpPr>
+            <p:spPr>
+              <a:xfrm>
+                <a:off x="635977" y="4404884"/>
+                <a:ext cx="2239249" cy="307777"/>
+              </a:xfrm>
+              <a:prstGeom prst="rect">
+                <a:avLst/>
+              </a:prstGeom>
+              <a:noFill/>
+            </p:spPr>
+            <p:txBody>
+              <a:bodyPr wrap="square">
+                <a:spAutoFit/>
+              </a:bodyPr>
+              <a:lstStyle/>
+              <a:p>
+                <a:pPr algn="ctr"/>
+                <a:r>
+                  <a:rPr lang="en-US" sz="1400" b="1" dirty="0">
+                    <a:solidFill>
+                      <a:schemeClr val="bg1"/>
+                    </a:solidFill>
+                    <a:latin typeface="Times New Roman" panose="02020603050405020304" pitchFamily="18" charset="0"/>
+                    <a:cs typeface="Times New Roman" panose="02020603050405020304" pitchFamily="18" charset="0"/>
+                  </a:rPr>
+                  <a:t>Next Generation Node B</a:t>
+                </a:r>
+              </a:p>
+            </p:txBody>
+          </p:sp>
+        </p:grpSp>
+        <p:grpSp>
+          <p:nvGrpSpPr>
+            <p:cNvPr id="248" name="Group 247">
+              <a:extLst>
+                <a:ext uri="{FF2B5EF4-FFF2-40B4-BE49-